--- a/01_テキスト/Git入門_図.pptx
+++ b/01_テキスト/Git入門_図.pptx
@@ -6,19 +6,28 @@
   </p:sldMasterIdLst>
   <p:sldIdLst>
     <p:sldId id="256" r:id="rId2"/>
-    <p:sldId id="257" r:id="rId3"/>
-    <p:sldId id="262" r:id="rId4"/>
-    <p:sldId id="258" r:id="rId5"/>
-    <p:sldId id="260" r:id="rId6"/>
-    <p:sldId id="263" r:id="rId7"/>
-    <p:sldId id="264" r:id="rId8"/>
-    <p:sldId id="265" r:id="rId9"/>
-    <p:sldId id="261" r:id="rId10"/>
-    <p:sldId id="266" r:id="rId11"/>
-    <p:sldId id="267" r:id="rId12"/>
-    <p:sldId id="269" r:id="rId13"/>
-    <p:sldId id="270" r:id="rId14"/>
-    <p:sldId id="271" r:id="rId15"/>
+    <p:sldId id="278" r:id="rId3"/>
+    <p:sldId id="257" r:id="rId4"/>
+    <p:sldId id="279" r:id="rId5"/>
+    <p:sldId id="280" r:id="rId6"/>
+    <p:sldId id="274" r:id="rId7"/>
+    <p:sldId id="277" r:id="rId8"/>
+    <p:sldId id="275" r:id="rId9"/>
+    <p:sldId id="276" r:id="rId10"/>
+    <p:sldId id="273" r:id="rId11"/>
+    <p:sldId id="272" r:id="rId12"/>
+    <p:sldId id="262" r:id="rId13"/>
+    <p:sldId id="258" r:id="rId14"/>
+    <p:sldId id="260" r:id="rId15"/>
+    <p:sldId id="263" r:id="rId16"/>
+    <p:sldId id="264" r:id="rId17"/>
+    <p:sldId id="265" r:id="rId18"/>
+    <p:sldId id="261" r:id="rId19"/>
+    <p:sldId id="266" r:id="rId20"/>
+    <p:sldId id="267" r:id="rId21"/>
+    <p:sldId id="269" r:id="rId22"/>
+    <p:sldId id="270" r:id="rId23"/>
+    <p:sldId id="271" r:id="rId24"/>
   </p:sldIdLst>
   <p:sldSz cx="12192000" cy="6858000"/>
   <p:notesSz cx="6858000" cy="9144000"/>
@@ -117,6 +126,11 @@
       </a:defRPr>
     </a:lvl9pPr>
   </p:defaultTextStyle>
+  <p:extLst>
+    <p:ext uri="{EFAFB233-063F-42B5-8137-9DF3F51BA10A}">
+      <p15:sldGuideLst xmlns:p15="http://schemas.microsoft.com/office/powerpoint/2012/main"/>
+    </p:ext>
+  </p:extLst>
 </p:presentation>
 </file>
 
@@ -267,7 +281,7 @@
           <a:p>
             <a:fld id="{7D4D8970-2F0F-4F19-9427-F451CC43E670}" type="datetimeFigureOut">
               <a:rPr kumimoji="1" lang="ja-JP" altLang="en-US" smtClean="0"/>
-              <a:t>2026/6/19</a:t>
+              <a:t>2026/6/20</a:t>
             </a:fld>
             <a:endParaRPr kumimoji="1" lang="ja-JP" altLang="en-US"/>
           </a:p>
@@ -497,7 +511,7 @@
           <a:p>
             <a:fld id="{7D4D8970-2F0F-4F19-9427-F451CC43E670}" type="datetimeFigureOut">
               <a:rPr kumimoji="1" lang="ja-JP" altLang="en-US" smtClean="0"/>
-              <a:t>2026/6/19</a:t>
+              <a:t>2026/6/20</a:t>
             </a:fld>
             <a:endParaRPr kumimoji="1" lang="ja-JP" altLang="en-US"/>
           </a:p>
@@ -737,7 +751,7 @@
           <a:p>
             <a:fld id="{7D4D8970-2F0F-4F19-9427-F451CC43E670}" type="datetimeFigureOut">
               <a:rPr kumimoji="1" lang="ja-JP" altLang="en-US" smtClean="0"/>
-              <a:t>2026/6/19</a:t>
+              <a:t>2026/6/20</a:t>
             </a:fld>
             <a:endParaRPr kumimoji="1" lang="ja-JP" altLang="en-US"/>
           </a:p>
@@ -967,7 +981,7 @@
           <a:p>
             <a:fld id="{7D4D8970-2F0F-4F19-9427-F451CC43E670}" type="datetimeFigureOut">
               <a:rPr kumimoji="1" lang="ja-JP" altLang="en-US" smtClean="0"/>
-              <a:t>2026/6/19</a:t>
+              <a:t>2026/6/20</a:t>
             </a:fld>
             <a:endParaRPr kumimoji="1" lang="ja-JP" altLang="en-US"/>
           </a:p>
@@ -1242,7 +1256,7 @@
           <a:p>
             <a:fld id="{7D4D8970-2F0F-4F19-9427-F451CC43E670}" type="datetimeFigureOut">
               <a:rPr kumimoji="1" lang="ja-JP" altLang="en-US" smtClean="0"/>
-              <a:t>2026/6/19</a:t>
+              <a:t>2026/6/20</a:t>
             </a:fld>
             <a:endParaRPr kumimoji="1" lang="ja-JP" altLang="en-US"/>
           </a:p>
@@ -1571,7 +1585,7 @@
           <a:p>
             <a:fld id="{7D4D8970-2F0F-4F19-9427-F451CC43E670}" type="datetimeFigureOut">
               <a:rPr kumimoji="1" lang="ja-JP" altLang="en-US" smtClean="0"/>
-              <a:t>2026/6/19</a:t>
+              <a:t>2026/6/20</a:t>
             </a:fld>
             <a:endParaRPr kumimoji="1" lang="ja-JP" altLang="en-US"/>
           </a:p>
@@ -2047,7 +2061,7 @@
           <a:p>
             <a:fld id="{7D4D8970-2F0F-4F19-9427-F451CC43E670}" type="datetimeFigureOut">
               <a:rPr kumimoji="1" lang="ja-JP" altLang="en-US" smtClean="0"/>
-              <a:t>2026/6/19</a:t>
+              <a:t>2026/6/20</a:t>
             </a:fld>
             <a:endParaRPr kumimoji="1" lang="ja-JP" altLang="en-US"/>
           </a:p>
@@ -2188,7 +2202,7 @@
           <a:p>
             <a:fld id="{7D4D8970-2F0F-4F19-9427-F451CC43E670}" type="datetimeFigureOut">
               <a:rPr kumimoji="1" lang="ja-JP" altLang="en-US" smtClean="0"/>
-              <a:t>2026/6/19</a:t>
+              <a:t>2026/6/20</a:t>
             </a:fld>
             <a:endParaRPr kumimoji="1" lang="ja-JP" altLang="en-US"/>
           </a:p>
@@ -2301,7 +2315,7 @@
           <a:p>
             <a:fld id="{7D4D8970-2F0F-4F19-9427-F451CC43E670}" type="datetimeFigureOut">
               <a:rPr kumimoji="1" lang="ja-JP" altLang="en-US" smtClean="0"/>
-              <a:t>2026/6/19</a:t>
+              <a:t>2026/6/20</a:t>
             </a:fld>
             <a:endParaRPr kumimoji="1" lang="ja-JP" altLang="en-US"/>
           </a:p>
@@ -2644,7 +2658,7 @@
           <a:p>
             <a:fld id="{7D4D8970-2F0F-4F19-9427-F451CC43E670}" type="datetimeFigureOut">
               <a:rPr kumimoji="1" lang="ja-JP" altLang="en-US" smtClean="0"/>
-              <a:t>2026/6/19</a:t>
+              <a:t>2026/6/20</a:t>
             </a:fld>
             <a:endParaRPr kumimoji="1" lang="ja-JP" altLang="en-US"/>
           </a:p>
@@ -2932,7 +2946,7 @@
           <a:p>
             <a:fld id="{7D4D8970-2F0F-4F19-9427-F451CC43E670}" type="datetimeFigureOut">
               <a:rPr kumimoji="1" lang="ja-JP" altLang="en-US" smtClean="0"/>
-              <a:t>2026/6/19</a:t>
+              <a:t>2026/6/20</a:t>
             </a:fld>
             <a:endParaRPr kumimoji="1" lang="ja-JP" altLang="en-US"/>
           </a:p>
@@ -3205,7 +3219,7 @@
           <a:p>
             <a:fld id="{7D4D8970-2F0F-4F19-9427-F451CC43E670}" type="datetimeFigureOut">
               <a:rPr kumimoji="1" lang="ja-JP" altLang="en-US" smtClean="0"/>
-              <a:t>2026/6/19</a:t>
+              <a:t>2026/6/20</a:t>
             </a:fld>
             <a:endParaRPr kumimoji="1" lang="ja-JP" altLang="en-US"/>
           </a:p>
@@ -3693,7 +3707,7 @@
         <p:cNvPr id="1" name="">
           <a:extLst>
             <a:ext uri="{FF2B5EF4-FFF2-40B4-BE49-F238E27FC236}">
-              <a16:creationId xmlns:a16="http://schemas.microsoft.com/office/drawing/2014/main" id="{D1FF64E0-DCBA-A10C-3DEF-D712CE5A9E78}"/>
+              <a16:creationId xmlns:a16="http://schemas.microsoft.com/office/drawing/2014/main" id="{75E1921E-B6AE-672A-D265-D754DAAB6A79}"/>
             </a:ext>
           </a:extLst>
         </p:cNvPr>
@@ -3708,256 +3722,10 @@
           <a:chExt cx="0" cy="0"/>
         </a:xfrm>
       </p:grpSpPr>
-      <p:sp>
-        <p:nvSpPr>
-          <p:cNvPr id="18" name="四角形: 角を丸くする 17">
-            <a:extLst>
-              <a:ext uri="{FF2B5EF4-FFF2-40B4-BE49-F238E27FC236}">
-                <a16:creationId xmlns:a16="http://schemas.microsoft.com/office/drawing/2014/main" id="{A460C1F1-ED3C-9715-C975-41E255747B0A}"/>
-              </a:ext>
-            </a:extLst>
-          </p:cNvPr>
-          <p:cNvSpPr/>
-          <p:nvPr/>
-        </p:nvSpPr>
-        <p:spPr>
-          <a:xfrm>
-            <a:off x="2849212" y="189000"/>
-            <a:ext cx="7200000" cy="3240000"/>
-          </a:xfrm>
-          <a:prstGeom prst="roundRect">
-            <a:avLst/>
-          </a:prstGeom>
-          <a:solidFill>
-            <a:schemeClr val="accent1">
-              <a:lumMod val="20000"/>
-              <a:lumOff val="80000"/>
-            </a:schemeClr>
-          </a:solidFill>
-          <a:ln w="38100">
-            <a:solidFill>
-              <a:schemeClr val="tx1"/>
-            </a:solidFill>
-          </a:ln>
-        </p:spPr>
-        <p:style>
-          <a:lnRef idx="2">
-            <a:schemeClr val="accent6"/>
-          </a:lnRef>
-          <a:fillRef idx="1">
-            <a:schemeClr val="lt1"/>
-          </a:fillRef>
-          <a:effectRef idx="0">
-            <a:schemeClr val="accent6"/>
-          </a:effectRef>
-          <a:fontRef idx="minor">
-            <a:schemeClr val="dk1"/>
-          </a:fontRef>
-        </p:style>
-        <p:txBody>
-          <a:bodyPr rtlCol="0" anchor="t"/>
-          <a:lstStyle/>
-          <a:p>
-            <a:pPr algn="ctr"/>
-            <a:r>
-              <a:rPr lang="ja-JP" altLang="en-US" b="1" dirty="0"/>
-              <a:t>ローカルリポジトリ</a:t>
-            </a:r>
-          </a:p>
-        </p:txBody>
-      </p:sp>
-      <p:sp>
-        <p:nvSpPr>
-          <p:cNvPr id="19" name="吹き出し: 四角形 18">
-            <a:extLst>
-              <a:ext uri="{FF2B5EF4-FFF2-40B4-BE49-F238E27FC236}">
-                <a16:creationId xmlns:a16="http://schemas.microsoft.com/office/drawing/2014/main" id="{E4CCD4BE-B4B4-92DB-0984-3D2844912B6B}"/>
-              </a:ext>
-            </a:extLst>
-          </p:cNvPr>
-          <p:cNvSpPr/>
-          <p:nvPr/>
-        </p:nvSpPr>
-        <p:spPr>
-          <a:xfrm>
-            <a:off x="5364910" y="838200"/>
-            <a:ext cx="3887947" cy="1691639"/>
-          </a:xfrm>
-          <a:prstGeom prst="wedgeRectCallout">
-            <a:avLst>
-              <a:gd name="adj1" fmla="val -52807"/>
-              <a:gd name="adj2" fmla="val 66171"/>
-            </a:avLst>
-          </a:prstGeom>
-          <a:ln w="28575">
-            <a:solidFill>
-              <a:schemeClr val="tx1"/>
-            </a:solidFill>
-          </a:ln>
-        </p:spPr>
-        <p:style>
-          <a:lnRef idx="2">
-            <a:schemeClr val="accent6"/>
-          </a:lnRef>
-          <a:fillRef idx="1">
-            <a:schemeClr val="lt1"/>
-          </a:fillRef>
-          <a:effectRef idx="0">
-            <a:schemeClr val="accent6"/>
-          </a:effectRef>
-          <a:fontRef idx="minor">
-            <a:schemeClr val="dk1"/>
-          </a:fontRef>
-        </p:style>
-        <p:txBody>
-          <a:bodyPr rtlCol="0" anchor="ctr"/>
-          <a:lstStyle/>
-          <a:p>
-            <a:pPr algn="ctr"/>
-            <a:endParaRPr kumimoji="1" lang="ja-JP" altLang="en-US" dirty="0"/>
-          </a:p>
-        </p:txBody>
-      </p:sp>
-      <p:pic>
-        <p:nvPicPr>
-          <p:cNvPr id="20" name="図 19">
-            <a:extLst>
-              <a:ext uri="{FF2B5EF4-FFF2-40B4-BE49-F238E27FC236}">
-                <a16:creationId xmlns:a16="http://schemas.microsoft.com/office/drawing/2014/main" id="{B129C5B2-2266-9C0B-97FD-317E4C4F6566}"/>
-              </a:ext>
-            </a:extLst>
-          </p:cNvPr>
-          <p:cNvPicPr>
-            <a:picLocks noChangeAspect="1"/>
-          </p:cNvPicPr>
-          <p:nvPr/>
-        </p:nvPicPr>
-        <p:blipFill>
-          <a:blip r:embed="rId2">
-            <a:extLst>
-              <a:ext uri="{28A0092B-C50C-407E-A947-70E740481C1C}">
-                <a14:useLocalDpi xmlns:a14="http://schemas.microsoft.com/office/drawing/2010/main" val="0"/>
-              </a:ext>
-            </a:extLst>
-          </a:blip>
-          <a:stretch>
-            <a:fillRect/>
-          </a:stretch>
-        </p:blipFill>
-        <p:spPr>
-          <a:xfrm>
-            <a:off x="4331855" y="2212907"/>
-            <a:ext cx="1008000" cy="1008000"/>
-          </a:xfrm>
-          <a:prstGeom prst="rect">
-            <a:avLst/>
-          </a:prstGeom>
-        </p:spPr>
-      </p:pic>
-      <p:sp>
-        <p:nvSpPr>
-          <p:cNvPr id="4" name="四角形: 角を丸くする 3">
-            <a:extLst>
-              <a:ext uri="{FF2B5EF4-FFF2-40B4-BE49-F238E27FC236}">
-                <a16:creationId xmlns:a16="http://schemas.microsoft.com/office/drawing/2014/main" id="{BB7EF791-752D-C789-65B2-5014F5DE91D0}"/>
-              </a:ext>
-            </a:extLst>
-          </p:cNvPr>
-          <p:cNvSpPr/>
-          <p:nvPr/>
-        </p:nvSpPr>
-        <p:spPr>
-          <a:xfrm>
-            <a:off x="6287803" y="1079351"/>
-            <a:ext cx="2042160" cy="563880"/>
-          </a:xfrm>
-          <a:prstGeom prst="roundRect">
-            <a:avLst/>
-          </a:prstGeom>
-          <a:ln w="38100"/>
-        </p:spPr>
-        <p:style>
-          <a:lnRef idx="2">
-            <a:schemeClr val="accent6"/>
-          </a:lnRef>
-          <a:fillRef idx="1">
-            <a:schemeClr val="lt1"/>
-          </a:fillRef>
-          <a:effectRef idx="0">
-            <a:schemeClr val="accent6"/>
-          </a:effectRef>
-          <a:fontRef idx="minor">
-            <a:schemeClr val="dk1"/>
-          </a:fontRef>
-        </p:style>
-        <p:txBody>
-          <a:bodyPr rtlCol="0" anchor="ctr"/>
-          <a:lstStyle/>
-          <a:p>
-            <a:pPr algn="ctr"/>
-            <a:r>
-              <a:rPr kumimoji="1" lang="ja-JP" altLang="en-US" dirty="0"/>
-              <a:t>変更履歴</a:t>
-            </a:r>
-          </a:p>
-        </p:txBody>
-      </p:sp>
-      <p:sp>
-        <p:nvSpPr>
-          <p:cNvPr id="2" name="四角形: 角を丸くする 1">
-            <a:extLst>
-              <a:ext uri="{FF2B5EF4-FFF2-40B4-BE49-F238E27FC236}">
-                <a16:creationId xmlns:a16="http://schemas.microsoft.com/office/drawing/2014/main" id="{77F57688-0D5E-B7B5-BE64-5214C448FB6B}"/>
-              </a:ext>
-            </a:extLst>
-          </p:cNvPr>
-          <p:cNvSpPr/>
-          <p:nvPr/>
-        </p:nvSpPr>
-        <p:spPr>
-          <a:xfrm>
-            <a:off x="6287803" y="1774271"/>
-            <a:ext cx="2042160" cy="563880"/>
-          </a:xfrm>
-          <a:prstGeom prst="roundRect">
-            <a:avLst/>
-          </a:prstGeom>
-          <a:ln w="38100">
-            <a:solidFill>
-              <a:srgbClr val="FFC000"/>
-            </a:solidFill>
-          </a:ln>
-        </p:spPr>
-        <p:style>
-          <a:lnRef idx="2">
-            <a:schemeClr val="accent6"/>
-          </a:lnRef>
-          <a:fillRef idx="1">
-            <a:schemeClr val="lt1"/>
-          </a:fillRef>
-          <a:effectRef idx="0">
-            <a:schemeClr val="accent6"/>
-          </a:effectRef>
-          <a:fontRef idx="minor">
-            <a:schemeClr val="dk1"/>
-          </a:fontRef>
-        </p:style>
-        <p:txBody>
-          <a:bodyPr rtlCol="0" anchor="ctr"/>
-          <a:lstStyle/>
-          <a:p>
-            <a:pPr algn="ctr"/>
-            <a:r>
-              <a:rPr kumimoji="1" lang="ja-JP" altLang="en-US" dirty="0"/>
-              <a:t>変更履歴</a:t>
-            </a:r>
-          </a:p>
-        </p:txBody>
-      </p:sp>
     </p:spTree>
     <p:extLst>
       <p:ext uri="{BB962C8B-B14F-4D97-AF65-F5344CB8AC3E}">
-        <p14:creationId xmlns:p14="http://schemas.microsoft.com/office/powerpoint/2010/main" val="1999392000"/>
+        <p14:creationId xmlns:p14="http://schemas.microsoft.com/office/powerpoint/2010/main" val="1082417098"/>
       </p:ext>
     </p:extLst>
   </p:cSld>
@@ -3975,7 +3743,7 @@
         <p:cNvPr id="1" name="">
           <a:extLst>
             <a:ext uri="{FF2B5EF4-FFF2-40B4-BE49-F238E27FC236}">
-              <a16:creationId xmlns:a16="http://schemas.microsoft.com/office/drawing/2014/main" id="{C00E0F32-64FE-CA19-CAE4-A4FE03E3E1AC}"/>
+              <a16:creationId xmlns:a16="http://schemas.microsoft.com/office/drawing/2014/main" id="{4DC848E8-BBDE-133C-55FD-CF031BC92C4E}"/>
             </a:ext>
           </a:extLst>
         </p:cNvPr>
@@ -3990,2441 +3758,12 @@
           <a:chExt cx="0" cy="0"/>
         </a:xfrm>
       </p:grpSpPr>
-      <p:sp>
-        <p:nvSpPr>
-          <p:cNvPr id="18" name="四角形: 角を丸くする 17">
-            <a:extLst>
-              <a:ext uri="{FF2B5EF4-FFF2-40B4-BE49-F238E27FC236}">
-                <a16:creationId xmlns:a16="http://schemas.microsoft.com/office/drawing/2014/main" id="{102C2E7E-F0D2-B0AA-114D-8332D35BD01C}"/>
-              </a:ext>
-            </a:extLst>
-          </p:cNvPr>
-          <p:cNvSpPr/>
-          <p:nvPr/>
-        </p:nvSpPr>
-        <p:spPr>
-          <a:xfrm>
-            <a:off x="2849212" y="189000"/>
-            <a:ext cx="7200000" cy="3240000"/>
-          </a:xfrm>
-          <a:prstGeom prst="roundRect">
-            <a:avLst/>
-          </a:prstGeom>
-          <a:solidFill>
-            <a:srgbClr val="FFCCFF"/>
-          </a:solidFill>
-          <a:ln w="38100">
-            <a:solidFill>
-              <a:schemeClr val="tx1"/>
-            </a:solidFill>
-          </a:ln>
-        </p:spPr>
-        <p:style>
-          <a:lnRef idx="2">
-            <a:schemeClr val="accent6"/>
-          </a:lnRef>
-          <a:fillRef idx="1">
-            <a:schemeClr val="lt1"/>
-          </a:fillRef>
-          <a:effectRef idx="0">
-            <a:schemeClr val="accent6"/>
-          </a:effectRef>
-          <a:fontRef idx="minor">
-            <a:schemeClr val="dk1"/>
-          </a:fontRef>
-        </p:style>
-        <p:txBody>
-          <a:bodyPr rtlCol="0" anchor="t"/>
-          <a:lstStyle/>
-          <a:p>
-            <a:pPr algn="ctr"/>
-            <a:r>
-              <a:rPr lang="ja-JP" altLang="en-US" b="1" dirty="0"/>
-              <a:t>リモートリポジトリ</a:t>
-            </a:r>
-          </a:p>
-        </p:txBody>
-      </p:sp>
-      <p:sp>
-        <p:nvSpPr>
-          <p:cNvPr id="8" name="吹き出し: 四角形 7">
-            <a:extLst>
-              <a:ext uri="{FF2B5EF4-FFF2-40B4-BE49-F238E27FC236}">
-                <a16:creationId xmlns:a16="http://schemas.microsoft.com/office/drawing/2014/main" id="{7B70CD6C-C0A2-E59F-5E06-88CF4D8C2250}"/>
-              </a:ext>
-            </a:extLst>
-          </p:cNvPr>
-          <p:cNvSpPr/>
-          <p:nvPr/>
-        </p:nvSpPr>
-        <p:spPr>
-          <a:xfrm>
-            <a:off x="5364910" y="838200"/>
-            <a:ext cx="3887947" cy="1691639"/>
-          </a:xfrm>
-          <a:prstGeom prst="wedgeRectCallout">
-            <a:avLst>
-              <a:gd name="adj1" fmla="val -52807"/>
-              <a:gd name="adj2" fmla="val 66171"/>
-            </a:avLst>
-          </a:prstGeom>
-          <a:ln w="28575">
-            <a:solidFill>
-              <a:schemeClr val="tx1"/>
-            </a:solidFill>
-          </a:ln>
-        </p:spPr>
-        <p:style>
-          <a:lnRef idx="2">
-            <a:schemeClr val="accent6"/>
-          </a:lnRef>
-          <a:fillRef idx="1">
-            <a:schemeClr val="lt1"/>
-          </a:fillRef>
-          <a:effectRef idx="0">
-            <a:schemeClr val="accent6"/>
-          </a:effectRef>
-          <a:fontRef idx="minor">
-            <a:schemeClr val="dk1"/>
-          </a:fontRef>
-        </p:style>
-        <p:txBody>
-          <a:bodyPr rtlCol="0" anchor="ctr"/>
-          <a:lstStyle/>
-          <a:p>
-            <a:pPr algn="ctr"/>
-            <a:endParaRPr kumimoji="1" lang="ja-JP" altLang="en-US" dirty="0"/>
-          </a:p>
-        </p:txBody>
-      </p:sp>
-      <p:grpSp>
-        <p:nvGrpSpPr>
-          <p:cNvPr id="3" name="グループ化 2">
-            <a:extLst>
-              <a:ext uri="{FF2B5EF4-FFF2-40B4-BE49-F238E27FC236}">
-                <a16:creationId xmlns:a16="http://schemas.microsoft.com/office/drawing/2014/main" id="{AE5BED5A-D86F-3820-1FAB-4D492B9EA4B8}"/>
-              </a:ext>
-            </a:extLst>
-          </p:cNvPr>
-          <p:cNvGrpSpPr/>
-          <p:nvPr/>
-        </p:nvGrpSpPr>
-        <p:grpSpPr>
-          <a:xfrm>
-            <a:off x="4111901" y="2257036"/>
-            <a:ext cx="1217310" cy="1293884"/>
-            <a:chOff x="5938864" y="3124197"/>
-            <a:chExt cx="1217310" cy="1364976"/>
-          </a:xfrm>
-        </p:grpSpPr>
-        <p:pic>
-          <p:nvPicPr>
-            <p:cNvPr id="5" name="図 4">
-              <a:extLst>
-                <a:ext uri="{FF2B5EF4-FFF2-40B4-BE49-F238E27FC236}">
-                  <a16:creationId xmlns:a16="http://schemas.microsoft.com/office/drawing/2014/main" id="{0F3DA0C4-30D4-A281-89EB-0F2154D9CB9C}"/>
-                </a:ext>
-              </a:extLst>
-            </p:cNvPr>
-            <p:cNvPicPr>
-              <a:picLocks noChangeAspect="1"/>
-            </p:cNvPicPr>
-            <p:nvPr/>
-          </p:nvPicPr>
-          <p:blipFill>
-            <a:blip r:embed="rId2">
-              <a:extLst>
-                <a:ext uri="{28A0092B-C50C-407E-A947-70E740481C1C}">
-                  <a14:useLocalDpi xmlns:a14="http://schemas.microsoft.com/office/drawing/2010/main" val="0"/>
-                </a:ext>
-              </a:extLst>
-            </a:blip>
-            <a:stretch>
-              <a:fillRect/>
-            </a:stretch>
-          </p:blipFill>
-          <p:spPr>
-            <a:xfrm>
-              <a:off x="5938864" y="3124197"/>
-              <a:ext cx="1217310" cy="1364976"/>
-            </a:xfrm>
-            <a:prstGeom prst="rect">
-              <a:avLst/>
-            </a:prstGeom>
-          </p:spPr>
-        </p:pic>
-        <p:pic>
-          <p:nvPicPr>
-            <p:cNvPr id="6" name="図 5">
-              <a:extLst>
-                <a:ext uri="{FF2B5EF4-FFF2-40B4-BE49-F238E27FC236}">
-                  <a16:creationId xmlns:a16="http://schemas.microsoft.com/office/drawing/2014/main" id="{E4FA44E5-969E-8323-0C1D-F35118D67CE8}"/>
-                </a:ext>
-              </a:extLst>
-            </p:cNvPr>
-            <p:cNvPicPr>
-              <a:picLocks noChangeAspect="1"/>
-            </p:cNvPicPr>
-            <p:nvPr/>
-          </p:nvPicPr>
-          <p:blipFill>
-            <a:blip r:embed="rId3">
-              <a:extLst>
-                <a:ext uri="{28A0092B-C50C-407E-A947-70E740481C1C}">
-                  <a14:useLocalDpi xmlns:a14="http://schemas.microsoft.com/office/drawing/2010/main" val="0"/>
-                </a:ext>
-              </a:extLst>
-            </a:blip>
-            <a:stretch>
-              <a:fillRect/>
-            </a:stretch>
-          </p:blipFill>
-          <p:spPr>
-            <a:xfrm>
-              <a:off x="6133519" y="3493589"/>
-              <a:ext cx="828000" cy="828000"/>
-            </a:xfrm>
-            <a:prstGeom prst="rect">
-              <a:avLst/>
-            </a:prstGeom>
-          </p:spPr>
-        </p:pic>
-      </p:grpSp>
-      <p:sp>
-        <p:nvSpPr>
-          <p:cNvPr id="9" name="四角形: 角を丸くする 8">
-            <a:extLst>
-              <a:ext uri="{FF2B5EF4-FFF2-40B4-BE49-F238E27FC236}">
-                <a16:creationId xmlns:a16="http://schemas.microsoft.com/office/drawing/2014/main" id="{2FD17F26-F1AA-4F08-9EA8-AF323AB20E78}"/>
-              </a:ext>
-            </a:extLst>
-          </p:cNvPr>
-          <p:cNvSpPr/>
-          <p:nvPr/>
-        </p:nvSpPr>
-        <p:spPr>
-          <a:xfrm>
-            <a:off x="6287803" y="1079351"/>
-            <a:ext cx="2042160" cy="563880"/>
-          </a:xfrm>
-          <a:prstGeom prst="roundRect">
-            <a:avLst/>
-          </a:prstGeom>
-          <a:ln w="38100"/>
-        </p:spPr>
-        <p:style>
-          <a:lnRef idx="2">
-            <a:schemeClr val="accent6"/>
-          </a:lnRef>
-          <a:fillRef idx="1">
-            <a:schemeClr val="lt1"/>
-          </a:fillRef>
-          <a:effectRef idx="0">
-            <a:schemeClr val="accent6"/>
-          </a:effectRef>
-          <a:fontRef idx="minor">
-            <a:schemeClr val="dk1"/>
-          </a:fontRef>
-        </p:style>
-        <p:txBody>
-          <a:bodyPr rtlCol="0" anchor="ctr"/>
-          <a:lstStyle/>
-          <a:p>
-            <a:pPr algn="ctr"/>
-            <a:r>
-              <a:rPr kumimoji="1" lang="ja-JP" altLang="en-US" dirty="0"/>
-              <a:t>変更履歴</a:t>
-            </a:r>
-          </a:p>
-        </p:txBody>
-      </p:sp>
-      <p:sp>
-        <p:nvSpPr>
-          <p:cNvPr id="10" name="四角形: 角を丸くする 9">
-            <a:extLst>
-              <a:ext uri="{FF2B5EF4-FFF2-40B4-BE49-F238E27FC236}">
-                <a16:creationId xmlns:a16="http://schemas.microsoft.com/office/drawing/2014/main" id="{33A4DC48-52C9-A2E5-4F62-A8D86102686E}"/>
-              </a:ext>
-            </a:extLst>
-          </p:cNvPr>
-          <p:cNvSpPr/>
-          <p:nvPr/>
-        </p:nvSpPr>
-        <p:spPr>
-          <a:xfrm>
-            <a:off x="6287803" y="1774271"/>
-            <a:ext cx="2042160" cy="563880"/>
-          </a:xfrm>
-          <a:prstGeom prst="roundRect">
-            <a:avLst/>
-          </a:prstGeom>
-          <a:ln w="38100">
-            <a:solidFill>
-              <a:srgbClr val="FFC000"/>
-            </a:solidFill>
-          </a:ln>
-        </p:spPr>
-        <p:style>
-          <a:lnRef idx="2">
-            <a:schemeClr val="accent6"/>
-          </a:lnRef>
-          <a:fillRef idx="1">
-            <a:schemeClr val="lt1"/>
-          </a:fillRef>
-          <a:effectRef idx="0">
-            <a:schemeClr val="accent6"/>
-          </a:effectRef>
-          <a:fontRef idx="minor">
-            <a:schemeClr val="dk1"/>
-          </a:fontRef>
-        </p:style>
-        <p:txBody>
-          <a:bodyPr rtlCol="0" anchor="ctr"/>
-          <a:lstStyle/>
-          <a:p>
-            <a:pPr algn="ctr"/>
-            <a:r>
-              <a:rPr kumimoji="1" lang="ja-JP" altLang="en-US" dirty="0"/>
-              <a:t>変更履歴</a:t>
-            </a:r>
-          </a:p>
-        </p:txBody>
-      </p:sp>
-    </p:spTree>
-    <p:extLst>
-      <p:ext uri="{BB962C8B-B14F-4D97-AF65-F5344CB8AC3E}">
-        <p14:creationId xmlns:p14="http://schemas.microsoft.com/office/powerpoint/2010/main" val="16440777"/>
-      </p:ext>
-    </p:extLst>
-  </p:cSld>
-  <p:clrMapOvr>
-    <a:masterClrMapping/>
-  </p:clrMapOvr>
-</p:sld>
-</file>
-
-<file path=ppt/slides/slide12.xml><?xml version="1.0" encoding="utf-8"?>
-<p:sld xmlns:a="http://schemas.openxmlformats.org/drawingml/2006/main" xmlns:r="http://schemas.openxmlformats.org/officeDocument/2006/relationships" xmlns:p="http://schemas.openxmlformats.org/presentationml/2006/main">
-  <p:cSld>
-    <p:spTree>
-      <p:nvGrpSpPr>
-        <p:cNvPr id="1" name="">
-          <a:extLst>
-            <a:ext uri="{FF2B5EF4-FFF2-40B4-BE49-F238E27FC236}">
-              <a16:creationId xmlns:a16="http://schemas.microsoft.com/office/drawing/2014/main" id="{646C35AC-F1A8-B0B4-BA7D-B37B05E8B9D5}"/>
-            </a:ext>
-          </a:extLst>
-        </p:cNvPr>
-        <p:cNvGrpSpPr/>
-        <p:nvPr/>
-      </p:nvGrpSpPr>
-      <p:grpSpPr>
-        <a:xfrm>
-          <a:off x="0" y="0"/>
-          <a:ext cx="0" cy="0"/>
-          <a:chOff x="0" y="0"/>
-          <a:chExt cx="0" cy="0"/>
-        </a:xfrm>
-      </p:grpSpPr>
-      <p:sp>
-        <p:nvSpPr>
-          <p:cNvPr id="6" name="四角形: 角を丸くする 5">
-            <a:extLst>
-              <a:ext uri="{FF2B5EF4-FFF2-40B4-BE49-F238E27FC236}">
-                <a16:creationId xmlns:a16="http://schemas.microsoft.com/office/drawing/2014/main" id="{D85BEA2E-432B-2807-3E72-41884802D25D}"/>
-              </a:ext>
-            </a:extLst>
-          </p:cNvPr>
-          <p:cNvSpPr/>
-          <p:nvPr/>
-        </p:nvSpPr>
-        <p:spPr>
-          <a:xfrm>
-            <a:off x="2849212" y="4736299"/>
-            <a:ext cx="7200000" cy="3240000"/>
-          </a:xfrm>
-          <a:prstGeom prst="roundRect">
-            <a:avLst/>
-          </a:prstGeom>
-          <a:solidFill>
-            <a:srgbClr val="FFCCFF"/>
-          </a:solidFill>
-          <a:ln w="38100">
-            <a:solidFill>
-              <a:schemeClr val="tx1"/>
-            </a:solidFill>
-          </a:ln>
-        </p:spPr>
-        <p:style>
-          <a:lnRef idx="2">
-            <a:schemeClr val="accent6"/>
-          </a:lnRef>
-          <a:fillRef idx="1">
-            <a:schemeClr val="lt1"/>
-          </a:fillRef>
-          <a:effectRef idx="0">
-            <a:schemeClr val="accent6"/>
-          </a:effectRef>
-          <a:fontRef idx="minor">
-            <a:schemeClr val="dk1"/>
-          </a:fontRef>
-        </p:style>
-        <p:txBody>
-          <a:bodyPr rtlCol="0" anchor="t"/>
-          <a:lstStyle/>
-          <a:p>
-            <a:pPr algn="ctr"/>
-            <a:r>
-              <a:rPr lang="ja-JP" altLang="en-US" b="1" dirty="0"/>
-              <a:t>リモートリポジトリ（プッシュ後）</a:t>
-            </a:r>
-          </a:p>
-        </p:txBody>
-      </p:sp>
-      <p:sp>
-        <p:nvSpPr>
-          <p:cNvPr id="16" name="吹き出し: 四角形 15">
-            <a:extLst>
-              <a:ext uri="{FF2B5EF4-FFF2-40B4-BE49-F238E27FC236}">
-                <a16:creationId xmlns:a16="http://schemas.microsoft.com/office/drawing/2014/main" id="{98306C84-8B6C-9CE8-8886-B1F82CB4472E}"/>
-              </a:ext>
-            </a:extLst>
-          </p:cNvPr>
-          <p:cNvSpPr/>
-          <p:nvPr/>
-        </p:nvSpPr>
-        <p:spPr>
-          <a:xfrm>
-            <a:off x="5364910" y="5584870"/>
-            <a:ext cx="3887947" cy="1104641"/>
-          </a:xfrm>
-          <a:prstGeom prst="wedgeRectCallout">
-            <a:avLst>
-              <a:gd name="adj1" fmla="val -51631"/>
-              <a:gd name="adj2" fmla="val 86892"/>
-            </a:avLst>
-          </a:prstGeom>
-          <a:ln w="28575">
-            <a:solidFill>
-              <a:schemeClr val="tx1"/>
-            </a:solidFill>
-          </a:ln>
-        </p:spPr>
-        <p:style>
-          <a:lnRef idx="2">
-            <a:schemeClr val="accent6"/>
-          </a:lnRef>
-          <a:fillRef idx="1">
-            <a:schemeClr val="lt1"/>
-          </a:fillRef>
-          <a:effectRef idx="0">
-            <a:schemeClr val="accent6"/>
-          </a:effectRef>
-          <a:fontRef idx="minor">
-            <a:schemeClr val="dk1"/>
-          </a:fontRef>
-        </p:style>
-        <p:txBody>
-          <a:bodyPr rtlCol="0" anchor="ctr"/>
-          <a:lstStyle/>
-          <a:p>
-            <a:pPr algn="ctr"/>
-            <a:endParaRPr kumimoji="1" lang="ja-JP" altLang="en-US" dirty="0"/>
-          </a:p>
-        </p:txBody>
-      </p:sp>
-      <p:sp>
-        <p:nvSpPr>
-          <p:cNvPr id="86" name="矢印: 右 85">
-            <a:extLst>
-              <a:ext uri="{FF2B5EF4-FFF2-40B4-BE49-F238E27FC236}">
-                <a16:creationId xmlns:a16="http://schemas.microsoft.com/office/drawing/2014/main" id="{8BD89B26-D3FB-4B9B-99A0-F01F7166E333}"/>
-              </a:ext>
-            </a:extLst>
-          </p:cNvPr>
-          <p:cNvSpPr/>
-          <p:nvPr/>
-        </p:nvSpPr>
-        <p:spPr>
-          <a:xfrm rot="5400000">
-            <a:off x="6215169" y="3733800"/>
-            <a:ext cx="468086" cy="677228"/>
-          </a:xfrm>
-          <a:prstGeom prst="rightArrow">
-            <a:avLst/>
-          </a:prstGeom>
-        </p:spPr>
-        <p:style>
-          <a:lnRef idx="2">
-            <a:schemeClr val="dk1">
-              <a:shade val="15000"/>
-            </a:schemeClr>
-          </a:lnRef>
-          <a:fillRef idx="1">
-            <a:schemeClr val="dk1"/>
-          </a:fillRef>
-          <a:effectRef idx="0">
-            <a:schemeClr val="dk1"/>
-          </a:effectRef>
-          <a:fontRef idx="minor">
-            <a:schemeClr val="lt1"/>
-          </a:fontRef>
-        </p:style>
-        <p:txBody>
-          <a:bodyPr rtlCol="0" anchor="ctr"/>
-          <a:lstStyle/>
-          <a:p>
-            <a:pPr algn="ctr"/>
-            <a:endParaRPr kumimoji="1" lang="ja-JP" altLang="en-US"/>
-          </a:p>
-        </p:txBody>
-      </p:sp>
-      <p:sp>
-        <p:nvSpPr>
-          <p:cNvPr id="98" name="テキスト ボックス 97">
-            <a:extLst>
-              <a:ext uri="{FF2B5EF4-FFF2-40B4-BE49-F238E27FC236}">
-                <a16:creationId xmlns:a16="http://schemas.microsoft.com/office/drawing/2014/main" id="{7E82DF4A-5345-3FB1-3CBD-63D347E1D7C8}"/>
-              </a:ext>
-            </a:extLst>
-          </p:cNvPr>
-          <p:cNvSpPr txBox="1"/>
-          <p:nvPr/>
-        </p:nvSpPr>
-        <p:spPr>
-          <a:xfrm>
-            <a:off x="6976284" y="3887728"/>
-            <a:ext cx="1107996" cy="369332"/>
-          </a:xfrm>
-          <a:prstGeom prst="rect">
-            <a:avLst/>
-          </a:prstGeom>
-          <a:noFill/>
-        </p:spPr>
-        <p:txBody>
-          <a:bodyPr wrap="none" rtlCol="0">
-            <a:spAutoFit/>
-          </a:bodyPr>
-          <a:lstStyle/>
-          <a:p>
-            <a:r>
-              <a:rPr kumimoji="1" lang="ja-JP" altLang="en-US" b="1" dirty="0"/>
-              <a:t>プッシュ</a:t>
-            </a:r>
-          </a:p>
-        </p:txBody>
-      </p:sp>
-      <p:sp>
-        <p:nvSpPr>
-          <p:cNvPr id="18" name="四角形: 角を丸くする 17">
-            <a:extLst>
-              <a:ext uri="{FF2B5EF4-FFF2-40B4-BE49-F238E27FC236}">
-                <a16:creationId xmlns:a16="http://schemas.microsoft.com/office/drawing/2014/main" id="{B7980B84-A156-1C2C-CD56-4C44C12D1693}"/>
-              </a:ext>
-            </a:extLst>
-          </p:cNvPr>
-          <p:cNvSpPr/>
-          <p:nvPr/>
-        </p:nvSpPr>
-        <p:spPr>
-          <a:xfrm>
-            <a:off x="2849212" y="189000"/>
-            <a:ext cx="7200000" cy="3240000"/>
-          </a:xfrm>
-          <a:prstGeom prst="roundRect">
-            <a:avLst/>
-          </a:prstGeom>
-          <a:solidFill>
-            <a:srgbClr val="FFCCFF"/>
-          </a:solidFill>
-          <a:ln w="38100">
-            <a:solidFill>
-              <a:schemeClr val="tx1"/>
-            </a:solidFill>
-          </a:ln>
-        </p:spPr>
-        <p:style>
-          <a:lnRef idx="2">
-            <a:schemeClr val="accent6"/>
-          </a:lnRef>
-          <a:fillRef idx="1">
-            <a:schemeClr val="lt1"/>
-          </a:fillRef>
-          <a:effectRef idx="0">
-            <a:schemeClr val="accent6"/>
-          </a:effectRef>
-          <a:fontRef idx="minor">
-            <a:schemeClr val="dk1"/>
-          </a:fontRef>
-        </p:style>
-        <p:txBody>
-          <a:bodyPr rtlCol="0" anchor="t"/>
-          <a:lstStyle/>
-          <a:p>
-            <a:pPr algn="ctr"/>
-            <a:r>
-              <a:rPr lang="ja-JP" altLang="en-US" b="1" dirty="0"/>
-              <a:t>リモートリポジトリ（プッシュ前）</a:t>
-            </a:r>
-          </a:p>
-        </p:txBody>
-      </p:sp>
-      <p:sp>
-        <p:nvSpPr>
-          <p:cNvPr id="19" name="吹き出し: 四角形 18">
-            <a:extLst>
-              <a:ext uri="{FF2B5EF4-FFF2-40B4-BE49-F238E27FC236}">
-                <a16:creationId xmlns:a16="http://schemas.microsoft.com/office/drawing/2014/main" id="{A50EC7D7-24EA-8158-41DA-75811BAECDF9}"/>
-              </a:ext>
-            </a:extLst>
-          </p:cNvPr>
-          <p:cNvSpPr/>
-          <p:nvPr/>
-        </p:nvSpPr>
-        <p:spPr>
-          <a:xfrm>
-            <a:off x="5364910" y="1037571"/>
-            <a:ext cx="3887947" cy="1104641"/>
-          </a:xfrm>
-          <a:prstGeom prst="wedgeRectCallout">
-            <a:avLst>
-              <a:gd name="adj1" fmla="val -51631"/>
-              <a:gd name="adj2" fmla="val 86892"/>
-            </a:avLst>
-          </a:prstGeom>
-          <a:ln w="28575">
-            <a:solidFill>
-              <a:schemeClr val="tx1"/>
-            </a:solidFill>
-          </a:ln>
-        </p:spPr>
-        <p:style>
-          <a:lnRef idx="2">
-            <a:schemeClr val="accent6"/>
-          </a:lnRef>
-          <a:fillRef idx="1">
-            <a:schemeClr val="lt1"/>
-          </a:fillRef>
-          <a:effectRef idx="0">
-            <a:schemeClr val="accent6"/>
-          </a:effectRef>
-          <a:fontRef idx="minor">
-            <a:schemeClr val="dk1"/>
-          </a:fontRef>
-        </p:style>
-        <p:txBody>
-          <a:bodyPr rtlCol="0" anchor="ctr"/>
-          <a:lstStyle/>
-          <a:p>
-            <a:pPr algn="ctr"/>
-            <a:endParaRPr kumimoji="1" lang="ja-JP" altLang="en-US" dirty="0"/>
-          </a:p>
-        </p:txBody>
-      </p:sp>
-      <p:sp>
-        <p:nvSpPr>
-          <p:cNvPr id="37" name="四角形: 角を丸くする 36">
-            <a:extLst>
-              <a:ext uri="{FF2B5EF4-FFF2-40B4-BE49-F238E27FC236}">
-                <a16:creationId xmlns:a16="http://schemas.microsoft.com/office/drawing/2014/main" id="{F3F32988-2F07-724E-069D-DCFD68E0CEC1}"/>
-              </a:ext>
-            </a:extLst>
-          </p:cNvPr>
-          <p:cNvSpPr/>
-          <p:nvPr/>
-        </p:nvSpPr>
-        <p:spPr>
-          <a:xfrm>
-            <a:off x="6287803" y="5855250"/>
-            <a:ext cx="2042160" cy="563880"/>
-          </a:xfrm>
-          <a:prstGeom prst="roundRect">
-            <a:avLst/>
-          </a:prstGeom>
-          <a:ln w="38100"/>
-        </p:spPr>
-        <p:style>
-          <a:lnRef idx="2">
-            <a:schemeClr val="accent6"/>
-          </a:lnRef>
-          <a:fillRef idx="1">
-            <a:schemeClr val="lt1"/>
-          </a:fillRef>
-          <a:effectRef idx="0">
-            <a:schemeClr val="accent6"/>
-          </a:effectRef>
-          <a:fontRef idx="minor">
-            <a:schemeClr val="dk1"/>
-          </a:fontRef>
-        </p:style>
-        <p:txBody>
-          <a:bodyPr rtlCol="0" anchor="ctr"/>
-          <a:lstStyle/>
-          <a:p>
-            <a:pPr algn="ctr"/>
-            <a:r>
-              <a:rPr kumimoji="1" lang="ja-JP" altLang="en-US" dirty="0"/>
-              <a:t>変更履歴</a:t>
-            </a:r>
-          </a:p>
-        </p:txBody>
-      </p:sp>
-      <p:sp>
-        <p:nvSpPr>
-          <p:cNvPr id="2" name="四角形: 角を丸くする 1">
-            <a:extLst>
-              <a:ext uri="{FF2B5EF4-FFF2-40B4-BE49-F238E27FC236}">
-                <a16:creationId xmlns:a16="http://schemas.microsoft.com/office/drawing/2014/main" id="{2F8D038D-C893-87CA-82F9-051B287F8E64}"/>
-              </a:ext>
-            </a:extLst>
-          </p:cNvPr>
-          <p:cNvSpPr/>
-          <p:nvPr/>
-        </p:nvSpPr>
-        <p:spPr>
-          <a:xfrm>
-            <a:off x="8084280" y="3790454"/>
-            <a:ext cx="2042160" cy="563880"/>
-          </a:xfrm>
-          <a:prstGeom prst="roundRect">
-            <a:avLst/>
-          </a:prstGeom>
-          <a:ln w="38100"/>
-        </p:spPr>
-        <p:style>
-          <a:lnRef idx="2">
-            <a:schemeClr val="accent6"/>
-          </a:lnRef>
-          <a:fillRef idx="1">
-            <a:schemeClr val="lt1"/>
-          </a:fillRef>
-          <a:effectRef idx="0">
-            <a:schemeClr val="accent6"/>
-          </a:effectRef>
-          <a:fontRef idx="minor">
-            <a:schemeClr val="dk1"/>
-          </a:fontRef>
-        </p:style>
-        <p:txBody>
-          <a:bodyPr rtlCol="0" anchor="ctr"/>
-          <a:lstStyle/>
-          <a:p>
-            <a:pPr algn="ctr"/>
-            <a:r>
-              <a:rPr kumimoji="1" lang="ja-JP" altLang="en-US" dirty="0"/>
-              <a:t>変更履歴</a:t>
-            </a:r>
-          </a:p>
-        </p:txBody>
-      </p:sp>
-      <p:grpSp>
-        <p:nvGrpSpPr>
-          <p:cNvPr id="3" name="グループ化 2">
-            <a:extLst>
-              <a:ext uri="{FF2B5EF4-FFF2-40B4-BE49-F238E27FC236}">
-                <a16:creationId xmlns:a16="http://schemas.microsoft.com/office/drawing/2014/main" id="{E1700060-A145-EB99-47E1-04C8A6FCEE4A}"/>
-              </a:ext>
-            </a:extLst>
-          </p:cNvPr>
-          <p:cNvGrpSpPr/>
-          <p:nvPr/>
-        </p:nvGrpSpPr>
-        <p:grpSpPr>
-          <a:xfrm>
-            <a:off x="4111901" y="2043676"/>
-            <a:ext cx="1217310" cy="1293884"/>
-            <a:chOff x="5938864" y="3124197"/>
-            <a:chExt cx="1217310" cy="1364976"/>
-          </a:xfrm>
-        </p:grpSpPr>
-        <p:pic>
-          <p:nvPicPr>
-            <p:cNvPr id="4" name="図 3">
-              <a:extLst>
-                <a:ext uri="{FF2B5EF4-FFF2-40B4-BE49-F238E27FC236}">
-                  <a16:creationId xmlns:a16="http://schemas.microsoft.com/office/drawing/2014/main" id="{C967C753-AB82-8144-CA57-729E68F2373B}"/>
-                </a:ext>
-              </a:extLst>
-            </p:cNvPr>
-            <p:cNvPicPr>
-              <a:picLocks noChangeAspect="1"/>
-            </p:cNvPicPr>
-            <p:nvPr/>
-          </p:nvPicPr>
-          <p:blipFill>
-            <a:blip r:embed="rId2">
-              <a:extLst>
-                <a:ext uri="{28A0092B-C50C-407E-A947-70E740481C1C}">
-                  <a14:useLocalDpi xmlns:a14="http://schemas.microsoft.com/office/drawing/2010/main" val="0"/>
-                </a:ext>
-              </a:extLst>
-            </a:blip>
-            <a:stretch>
-              <a:fillRect/>
-            </a:stretch>
-          </p:blipFill>
-          <p:spPr>
-            <a:xfrm>
-              <a:off x="5938864" y="3124197"/>
-              <a:ext cx="1217310" cy="1364976"/>
-            </a:xfrm>
-            <a:prstGeom prst="rect">
-              <a:avLst/>
-            </a:prstGeom>
-          </p:spPr>
-        </p:pic>
-        <p:pic>
-          <p:nvPicPr>
-            <p:cNvPr id="5" name="図 4">
-              <a:extLst>
-                <a:ext uri="{FF2B5EF4-FFF2-40B4-BE49-F238E27FC236}">
-                  <a16:creationId xmlns:a16="http://schemas.microsoft.com/office/drawing/2014/main" id="{AFD375C7-E4ED-A27B-D788-0E93D82F06C7}"/>
-                </a:ext>
-              </a:extLst>
-            </p:cNvPr>
-            <p:cNvPicPr>
-              <a:picLocks noChangeAspect="1"/>
-            </p:cNvPicPr>
-            <p:nvPr/>
-          </p:nvPicPr>
-          <p:blipFill>
-            <a:blip r:embed="rId3">
-              <a:extLst>
-                <a:ext uri="{28A0092B-C50C-407E-A947-70E740481C1C}">
-                  <a14:useLocalDpi xmlns:a14="http://schemas.microsoft.com/office/drawing/2010/main" val="0"/>
-                </a:ext>
-              </a:extLst>
-            </a:blip>
-            <a:stretch>
-              <a:fillRect/>
-            </a:stretch>
-          </p:blipFill>
-          <p:spPr>
-            <a:xfrm>
-              <a:off x="6133519" y="3493589"/>
-              <a:ext cx="828000" cy="828000"/>
-            </a:xfrm>
-            <a:prstGeom prst="rect">
-              <a:avLst/>
-            </a:prstGeom>
-          </p:spPr>
-        </p:pic>
-      </p:grpSp>
-      <p:grpSp>
-        <p:nvGrpSpPr>
-          <p:cNvPr id="7" name="グループ化 6">
-            <a:extLst>
-              <a:ext uri="{FF2B5EF4-FFF2-40B4-BE49-F238E27FC236}">
-                <a16:creationId xmlns:a16="http://schemas.microsoft.com/office/drawing/2014/main" id="{2DCB563A-BE72-B728-5B9B-9DF556F249BF}"/>
-              </a:ext>
-            </a:extLst>
-          </p:cNvPr>
-          <p:cNvGrpSpPr/>
-          <p:nvPr/>
-        </p:nvGrpSpPr>
-        <p:grpSpPr>
-          <a:xfrm>
-            <a:off x="4132360" y="6630916"/>
-            <a:ext cx="1217310" cy="1293884"/>
-            <a:chOff x="5938864" y="3124197"/>
-            <a:chExt cx="1217310" cy="1364976"/>
-          </a:xfrm>
-        </p:grpSpPr>
-        <p:pic>
-          <p:nvPicPr>
-            <p:cNvPr id="8" name="図 7">
-              <a:extLst>
-                <a:ext uri="{FF2B5EF4-FFF2-40B4-BE49-F238E27FC236}">
-                  <a16:creationId xmlns:a16="http://schemas.microsoft.com/office/drawing/2014/main" id="{7F1F740D-3B58-9AE6-5E6E-E0FD43276D0F}"/>
-                </a:ext>
-              </a:extLst>
-            </p:cNvPr>
-            <p:cNvPicPr>
-              <a:picLocks noChangeAspect="1"/>
-            </p:cNvPicPr>
-            <p:nvPr/>
-          </p:nvPicPr>
-          <p:blipFill>
-            <a:blip r:embed="rId2">
-              <a:extLst>
-                <a:ext uri="{28A0092B-C50C-407E-A947-70E740481C1C}">
-                  <a14:useLocalDpi xmlns:a14="http://schemas.microsoft.com/office/drawing/2010/main" val="0"/>
-                </a:ext>
-              </a:extLst>
-            </a:blip>
-            <a:stretch>
-              <a:fillRect/>
-            </a:stretch>
-          </p:blipFill>
-          <p:spPr>
-            <a:xfrm>
-              <a:off x="5938864" y="3124197"/>
-              <a:ext cx="1217310" cy="1364976"/>
-            </a:xfrm>
-            <a:prstGeom prst="rect">
-              <a:avLst/>
-            </a:prstGeom>
-          </p:spPr>
-        </p:pic>
-        <p:pic>
-          <p:nvPicPr>
-            <p:cNvPr id="9" name="図 8">
-              <a:extLst>
-                <a:ext uri="{FF2B5EF4-FFF2-40B4-BE49-F238E27FC236}">
-                  <a16:creationId xmlns:a16="http://schemas.microsoft.com/office/drawing/2014/main" id="{C3A68F92-3830-CF1D-7038-B28A704DC78D}"/>
-                </a:ext>
-              </a:extLst>
-            </p:cNvPr>
-            <p:cNvPicPr>
-              <a:picLocks noChangeAspect="1"/>
-            </p:cNvPicPr>
-            <p:nvPr/>
-          </p:nvPicPr>
-          <p:blipFill>
-            <a:blip r:embed="rId3">
-              <a:extLst>
-                <a:ext uri="{28A0092B-C50C-407E-A947-70E740481C1C}">
-                  <a14:useLocalDpi xmlns:a14="http://schemas.microsoft.com/office/drawing/2010/main" val="0"/>
-                </a:ext>
-              </a:extLst>
-            </a:blip>
-            <a:stretch>
-              <a:fillRect/>
-            </a:stretch>
-          </p:blipFill>
-          <p:spPr>
-            <a:xfrm>
-              <a:off x="6133519" y="3493589"/>
-              <a:ext cx="828000" cy="828000"/>
-            </a:xfrm>
-            <a:prstGeom prst="rect">
-              <a:avLst/>
-            </a:prstGeom>
-          </p:spPr>
-        </p:pic>
-      </p:grpSp>
-    </p:spTree>
-    <p:extLst>
-      <p:ext uri="{BB962C8B-B14F-4D97-AF65-F5344CB8AC3E}">
-        <p14:creationId xmlns:p14="http://schemas.microsoft.com/office/powerpoint/2010/main" val="403509543"/>
-      </p:ext>
-    </p:extLst>
-  </p:cSld>
-  <p:clrMapOvr>
-    <a:masterClrMapping/>
-  </p:clrMapOvr>
-</p:sld>
-</file>
-
-<file path=ppt/slides/slide13.xml><?xml version="1.0" encoding="utf-8"?>
-<p:sld xmlns:a="http://schemas.openxmlformats.org/drawingml/2006/main" xmlns:r="http://schemas.openxmlformats.org/officeDocument/2006/relationships" xmlns:p="http://schemas.openxmlformats.org/presentationml/2006/main">
-  <p:cSld>
-    <p:spTree>
-      <p:nvGrpSpPr>
-        <p:cNvPr id="1" name="">
-          <a:extLst>
-            <a:ext uri="{FF2B5EF4-FFF2-40B4-BE49-F238E27FC236}">
-              <a16:creationId xmlns:a16="http://schemas.microsoft.com/office/drawing/2014/main" id="{47F8275F-89CA-A608-D720-7D05871625DE}"/>
-            </a:ext>
-          </a:extLst>
-        </p:cNvPr>
-        <p:cNvGrpSpPr/>
-        <p:nvPr/>
-      </p:nvGrpSpPr>
-      <p:grpSpPr>
-        <a:xfrm>
-          <a:off x="0" y="0"/>
-          <a:ext cx="0" cy="0"/>
-          <a:chOff x="0" y="0"/>
-          <a:chExt cx="0" cy="0"/>
-        </a:xfrm>
-      </p:grpSpPr>
-      <p:sp>
-        <p:nvSpPr>
-          <p:cNvPr id="6" name="四角形: 角を丸くする 5">
-            <a:extLst>
-              <a:ext uri="{FF2B5EF4-FFF2-40B4-BE49-F238E27FC236}">
-                <a16:creationId xmlns:a16="http://schemas.microsoft.com/office/drawing/2014/main" id="{05790355-C491-6BCB-1AF1-C036E4592FB0}"/>
-              </a:ext>
-            </a:extLst>
-          </p:cNvPr>
-          <p:cNvSpPr/>
-          <p:nvPr/>
-        </p:nvSpPr>
-        <p:spPr>
-          <a:xfrm>
-            <a:off x="2849212" y="4736298"/>
-            <a:ext cx="7200000" cy="3980981"/>
-          </a:xfrm>
-          <a:prstGeom prst="roundRect">
-            <a:avLst/>
-          </a:prstGeom>
-          <a:solidFill>
-            <a:srgbClr val="FFCCFF"/>
-          </a:solidFill>
-          <a:ln w="38100">
-            <a:solidFill>
-              <a:schemeClr val="tx1"/>
-            </a:solidFill>
-          </a:ln>
-        </p:spPr>
-        <p:style>
-          <a:lnRef idx="2">
-            <a:schemeClr val="accent6"/>
-          </a:lnRef>
-          <a:fillRef idx="1">
-            <a:schemeClr val="lt1"/>
-          </a:fillRef>
-          <a:effectRef idx="0">
-            <a:schemeClr val="accent6"/>
-          </a:effectRef>
-          <a:fontRef idx="minor">
-            <a:schemeClr val="dk1"/>
-          </a:fontRef>
-        </p:style>
-        <p:txBody>
-          <a:bodyPr rtlCol="0" anchor="t"/>
-          <a:lstStyle/>
-          <a:p>
-            <a:pPr algn="ctr"/>
-            <a:r>
-              <a:rPr lang="ja-JP" altLang="en-US" b="1" dirty="0"/>
-              <a:t>リモートリポジトリ（プッシュ後）</a:t>
-            </a:r>
-          </a:p>
-        </p:txBody>
-      </p:sp>
-      <p:sp>
-        <p:nvSpPr>
-          <p:cNvPr id="86" name="矢印: 右 85">
-            <a:extLst>
-              <a:ext uri="{FF2B5EF4-FFF2-40B4-BE49-F238E27FC236}">
-                <a16:creationId xmlns:a16="http://schemas.microsoft.com/office/drawing/2014/main" id="{F87D0DC1-A2F6-BB46-4F6C-07475B3ABED4}"/>
-              </a:ext>
-            </a:extLst>
-          </p:cNvPr>
-          <p:cNvSpPr/>
-          <p:nvPr/>
-        </p:nvSpPr>
-        <p:spPr>
-          <a:xfrm rot="5400000">
-            <a:off x="6215169" y="3733800"/>
-            <a:ext cx="468086" cy="677228"/>
-          </a:xfrm>
-          <a:prstGeom prst="rightArrow">
-            <a:avLst/>
-          </a:prstGeom>
-        </p:spPr>
-        <p:style>
-          <a:lnRef idx="2">
-            <a:schemeClr val="dk1">
-              <a:shade val="15000"/>
-            </a:schemeClr>
-          </a:lnRef>
-          <a:fillRef idx="1">
-            <a:schemeClr val="dk1"/>
-          </a:fillRef>
-          <a:effectRef idx="0">
-            <a:schemeClr val="dk1"/>
-          </a:effectRef>
-          <a:fontRef idx="minor">
-            <a:schemeClr val="lt1"/>
-          </a:fontRef>
-        </p:style>
-        <p:txBody>
-          <a:bodyPr rtlCol="0" anchor="ctr"/>
-          <a:lstStyle/>
-          <a:p>
-            <a:pPr algn="ctr"/>
-            <a:endParaRPr kumimoji="1" lang="ja-JP" altLang="en-US"/>
-          </a:p>
-        </p:txBody>
-      </p:sp>
-      <p:sp>
-        <p:nvSpPr>
-          <p:cNvPr id="98" name="テキスト ボックス 97">
-            <a:extLst>
-              <a:ext uri="{FF2B5EF4-FFF2-40B4-BE49-F238E27FC236}">
-                <a16:creationId xmlns:a16="http://schemas.microsoft.com/office/drawing/2014/main" id="{38A37C87-32BB-99FE-C815-74FFBE3ECB4D}"/>
-              </a:ext>
-            </a:extLst>
-          </p:cNvPr>
-          <p:cNvSpPr txBox="1"/>
-          <p:nvPr/>
-        </p:nvSpPr>
-        <p:spPr>
-          <a:xfrm>
-            <a:off x="6976284" y="3887728"/>
-            <a:ext cx="1107996" cy="369332"/>
-          </a:xfrm>
-          <a:prstGeom prst="rect">
-            <a:avLst/>
-          </a:prstGeom>
-          <a:noFill/>
-        </p:spPr>
-        <p:txBody>
-          <a:bodyPr wrap="none" rtlCol="0">
-            <a:spAutoFit/>
-          </a:bodyPr>
-          <a:lstStyle/>
-          <a:p>
-            <a:r>
-              <a:rPr kumimoji="1" lang="ja-JP" altLang="en-US" b="1" dirty="0"/>
-              <a:t>プッシュ</a:t>
-            </a:r>
-          </a:p>
-        </p:txBody>
-      </p:sp>
-      <p:sp>
-        <p:nvSpPr>
-          <p:cNvPr id="2" name="四角形: 角を丸くする 1">
-            <a:extLst>
-              <a:ext uri="{FF2B5EF4-FFF2-40B4-BE49-F238E27FC236}">
-                <a16:creationId xmlns:a16="http://schemas.microsoft.com/office/drawing/2014/main" id="{79BF06C3-242E-A3F7-8BE0-AF18FC0EA369}"/>
-              </a:ext>
-            </a:extLst>
-          </p:cNvPr>
-          <p:cNvSpPr/>
-          <p:nvPr/>
-        </p:nvSpPr>
-        <p:spPr>
-          <a:xfrm>
-            <a:off x="8084280" y="3790454"/>
-            <a:ext cx="2042160" cy="563880"/>
-          </a:xfrm>
-          <a:prstGeom prst="roundRect">
-            <a:avLst/>
-          </a:prstGeom>
-          <a:ln w="38100">
-            <a:solidFill>
-              <a:srgbClr val="00B0F0"/>
-            </a:solidFill>
-          </a:ln>
-        </p:spPr>
-        <p:style>
-          <a:lnRef idx="2">
-            <a:schemeClr val="accent6"/>
-          </a:lnRef>
-          <a:fillRef idx="1">
-            <a:schemeClr val="lt1"/>
-          </a:fillRef>
-          <a:effectRef idx="0">
-            <a:schemeClr val="accent6"/>
-          </a:effectRef>
-          <a:fontRef idx="minor">
-            <a:schemeClr val="dk1"/>
-          </a:fontRef>
-        </p:style>
-        <p:txBody>
-          <a:bodyPr rtlCol="0" anchor="ctr"/>
-          <a:lstStyle/>
-          <a:p>
-            <a:pPr algn="ctr"/>
-            <a:r>
-              <a:rPr kumimoji="1" lang="ja-JP" altLang="en-US" dirty="0"/>
-              <a:t>変更履歴</a:t>
-            </a:r>
-          </a:p>
-        </p:txBody>
-      </p:sp>
-      <p:grpSp>
-        <p:nvGrpSpPr>
-          <p:cNvPr id="7" name="グループ化 6">
-            <a:extLst>
-              <a:ext uri="{FF2B5EF4-FFF2-40B4-BE49-F238E27FC236}">
-                <a16:creationId xmlns:a16="http://schemas.microsoft.com/office/drawing/2014/main" id="{E78327BF-8BE7-AE56-E7DB-F63242ACFA3D}"/>
-              </a:ext>
-            </a:extLst>
-          </p:cNvPr>
-          <p:cNvGrpSpPr/>
-          <p:nvPr/>
-        </p:nvGrpSpPr>
-        <p:grpSpPr>
-          <a:xfrm>
-            <a:off x="4132360" y="7423396"/>
-            <a:ext cx="1217310" cy="1293884"/>
-            <a:chOff x="5938864" y="3124197"/>
-            <a:chExt cx="1217310" cy="1364976"/>
-          </a:xfrm>
-        </p:grpSpPr>
-        <p:pic>
-          <p:nvPicPr>
-            <p:cNvPr id="8" name="図 7">
-              <a:extLst>
-                <a:ext uri="{FF2B5EF4-FFF2-40B4-BE49-F238E27FC236}">
-                  <a16:creationId xmlns:a16="http://schemas.microsoft.com/office/drawing/2014/main" id="{49483B10-DB47-6F04-BE2A-63DC7B9FF356}"/>
-                </a:ext>
-              </a:extLst>
-            </p:cNvPr>
-            <p:cNvPicPr>
-              <a:picLocks noChangeAspect="1"/>
-            </p:cNvPicPr>
-            <p:nvPr/>
-          </p:nvPicPr>
-          <p:blipFill>
-            <a:blip r:embed="rId2">
-              <a:extLst>
-                <a:ext uri="{28A0092B-C50C-407E-A947-70E740481C1C}">
-                  <a14:useLocalDpi xmlns:a14="http://schemas.microsoft.com/office/drawing/2010/main" val="0"/>
-                </a:ext>
-              </a:extLst>
-            </a:blip>
-            <a:stretch>
-              <a:fillRect/>
-            </a:stretch>
-          </p:blipFill>
-          <p:spPr>
-            <a:xfrm>
-              <a:off x="5938864" y="3124197"/>
-              <a:ext cx="1217310" cy="1364976"/>
-            </a:xfrm>
-            <a:prstGeom prst="rect">
-              <a:avLst/>
-            </a:prstGeom>
-          </p:spPr>
-        </p:pic>
-        <p:pic>
-          <p:nvPicPr>
-            <p:cNvPr id="9" name="図 8">
-              <a:extLst>
-                <a:ext uri="{FF2B5EF4-FFF2-40B4-BE49-F238E27FC236}">
-                  <a16:creationId xmlns:a16="http://schemas.microsoft.com/office/drawing/2014/main" id="{3B9A9C92-DDBC-574A-A794-B6AFD70A62A7}"/>
-                </a:ext>
-              </a:extLst>
-            </p:cNvPr>
-            <p:cNvPicPr>
-              <a:picLocks noChangeAspect="1"/>
-            </p:cNvPicPr>
-            <p:nvPr/>
-          </p:nvPicPr>
-          <p:blipFill>
-            <a:blip r:embed="rId3">
-              <a:extLst>
-                <a:ext uri="{28A0092B-C50C-407E-A947-70E740481C1C}">
-                  <a14:useLocalDpi xmlns:a14="http://schemas.microsoft.com/office/drawing/2010/main" val="0"/>
-                </a:ext>
-              </a:extLst>
-            </a:blip>
-            <a:stretch>
-              <a:fillRect/>
-            </a:stretch>
-          </p:blipFill>
-          <p:spPr>
-            <a:xfrm>
-              <a:off x="6133519" y="3493589"/>
-              <a:ext cx="828000" cy="828000"/>
-            </a:xfrm>
-            <a:prstGeom prst="rect">
-              <a:avLst/>
-            </a:prstGeom>
-          </p:spPr>
-        </p:pic>
-      </p:grpSp>
-      <p:sp>
-        <p:nvSpPr>
-          <p:cNvPr id="10" name="四角形: 角を丸くする 9">
-            <a:extLst>
-              <a:ext uri="{FF2B5EF4-FFF2-40B4-BE49-F238E27FC236}">
-                <a16:creationId xmlns:a16="http://schemas.microsoft.com/office/drawing/2014/main" id="{8A294784-95D2-4D1C-3C17-14C98F1D077B}"/>
-              </a:ext>
-            </a:extLst>
-          </p:cNvPr>
-          <p:cNvSpPr/>
-          <p:nvPr/>
-        </p:nvSpPr>
-        <p:spPr>
-          <a:xfrm>
-            <a:off x="2833972" y="179539"/>
-            <a:ext cx="7200000" cy="3240000"/>
-          </a:xfrm>
-          <a:prstGeom prst="roundRect">
-            <a:avLst/>
-          </a:prstGeom>
-          <a:solidFill>
-            <a:schemeClr val="accent1">
-              <a:lumMod val="20000"/>
-              <a:lumOff val="80000"/>
-            </a:schemeClr>
-          </a:solidFill>
-          <a:ln w="38100">
-            <a:solidFill>
-              <a:schemeClr val="tx1"/>
-            </a:solidFill>
-          </a:ln>
-        </p:spPr>
-        <p:style>
-          <a:lnRef idx="2">
-            <a:schemeClr val="accent6"/>
-          </a:lnRef>
-          <a:fillRef idx="1">
-            <a:schemeClr val="lt1"/>
-          </a:fillRef>
-          <a:effectRef idx="0">
-            <a:schemeClr val="accent6"/>
-          </a:effectRef>
-          <a:fontRef idx="minor">
-            <a:schemeClr val="dk1"/>
-          </a:fontRef>
-        </p:style>
-        <p:txBody>
-          <a:bodyPr rtlCol="0" anchor="t"/>
-          <a:lstStyle/>
-          <a:p>
-            <a:pPr algn="ctr"/>
-            <a:r>
-              <a:rPr lang="ja-JP" altLang="en-US" b="1" dirty="0"/>
-              <a:t>ローカルリポジトリ（コミット後）</a:t>
-            </a:r>
-          </a:p>
-        </p:txBody>
-      </p:sp>
-      <p:sp>
-        <p:nvSpPr>
-          <p:cNvPr id="11" name="吹き出し: 四角形 10">
-            <a:extLst>
-              <a:ext uri="{FF2B5EF4-FFF2-40B4-BE49-F238E27FC236}">
-                <a16:creationId xmlns:a16="http://schemas.microsoft.com/office/drawing/2014/main" id="{DE4BF4AD-12FA-C03E-83A6-9F8C18822C69}"/>
-              </a:ext>
-            </a:extLst>
-          </p:cNvPr>
-          <p:cNvSpPr/>
-          <p:nvPr/>
-        </p:nvSpPr>
-        <p:spPr>
-          <a:xfrm>
-            <a:off x="5349670" y="1028110"/>
-            <a:ext cx="3887947" cy="1104641"/>
-          </a:xfrm>
-          <a:prstGeom prst="wedgeRectCallout">
-            <a:avLst>
-              <a:gd name="adj1" fmla="val -51631"/>
-              <a:gd name="adj2" fmla="val 86892"/>
-            </a:avLst>
-          </a:prstGeom>
-          <a:ln w="28575">
-            <a:solidFill>
-              <a:schemeClr val="tx1"/>
-            </a:solidFill>
-          </a:ln>
-        </p:spPr>
-        <p:style>
-          <a:lnRef idx="2">
-            <a:schemeClr val="accent6"/>
-          </a:lnRef>
-          <a:fillRef idx="1">
-            <a:schemeClr val="lt1"/>
-          </a:fillRef>
-          <a:effectRef idx="0">
-            <a:schemeClr val="accent6"/>
-          </a:effectRef>
-          <a:fontRef idx="minor">
-            <a:schemeClr val="dk1"/>
-          </a:fontRef>
-        </p:style>
-        <p:txBody>
-          <a:bodyPr rtlCol="0" anchor="ctr"/>
-          <a:lstStyle/>
-          <a:p>
-            <a:pPr algn="ctr"/>
-            <a:endParaRPr kumimoji="1" lang="ja-JP" altLang="en-US" dirty="0"/>
-          </a:p>
-        </p:txBody>
-      </p:sp>
-      <p:pic>
-        <p:nvPicPr>
-          <p:cNvPr id="12" name="図 11">
-            <a:extLst>
-              <a:ext uri="{FF2B5EF4-FFF2-40B4-BE49-F238E27FC236}">
-                <a16:creationId xmlns:a16="http://schemas.microsoft.com/office/drawing/2014/main" id="{FE52B36B-74CD-D2E0-564B-116B5FD998BD}"/>
-              </a:ext>
-            </a:extLst>
-          </p:cNvPr>
-          <p:cNvPicPr>
-            <a:picLocks noChangeAspect="1"/>
-          </p:cNvPicPr>
-          <p:nvPr/>
-        </p:nvPicPr>
-        <p:blipFill>
-          <a:blip r:embed="rId4">
-            <a:extLst>
-              <a:ext uri="{28A0092B-C50C-407E-A947-70E740481C1C}">
-                <a14:useLocalDpi xmlns:a14="http://schemas.microsoft.com/office/drawing/2010/main" val="0"/>
-              </a:ext>
-            </a:extLst>
-          </a:blip>
-          <a:stretch>
-            <a:fillRect/>
-          </a:stretch>
-        </p:blipFill>
-        <p:spPr>
-          <a:xfrm>
-            <a:off x="4316615" y="2203446"/>
-            <a:ext cx="1008000" cy="1008000"/>
-          </a:xfrm>
-          <a:prstGeom prst="rect">
-            <a:avLst/>
-          </a:prstGeom>
-        </p:spPr>
-      </p:pic>
-      <p:sp>
-        <p:nvSpPr>
-          <p:cNvPr id="13" name="四角形: 角を丸くする 12">
-            <a:extLst>
-              <a:ext uri="{FF2B5EF4-FFF2-40B4-BE49-F238E27FC236}">
-                <a16:creationId xmlns:a16="http://schemas.microsoft.com/office/drawing/2014/main" id="{BFDA74DD-57FD-523C-E8A7-D7390899FA7E}"/>
-              </a:ext>
-            </a:extLst>
-          </p:cNvPr>
-          <p:cNvSpPr/>
-          <p:nvPr/>
-        </p:nvSpPr>
-        <p:spPr>
-          <a:xfrm>
-            <a:off x="6272563" y="1298490"/>
-            <a:ext cx="2042160" cy="563880"/>
-          </a:xfrm>
-          <a:prstGeom prst="roundRect">
-            <a:avLst/>
-          </a:prstGeom>
-          <a:ln w="38100">
-            <a:solidFill>
-              <a:srgbClr val="00B0F0"/>
-            </a:solidFill>
-          </a:ln>
-        </p:spPr>
-        <p:style>
-          <a:lnRef idx="2">
-            <a:schemeClr val="accent6"/>
-          </a:lnRef>
-          <a:fillRef idx="1">
-            <a:schemeClr val="lt1"/>
-          </a:fillRef>
-          <a:effectRef idx="0">
-            <a:schemeClr val="accent6"/>
-          </a:effectRef>
-          <a:fontRef idx="minor">
-            <a:schemeClr val="dk1"/>
-          </a:fontRef>
-        </p:style>
-        <p:txBody>
-          <a:bodyPr rtlCol="0" anchor="ctr"/>
-          <a:lstStyle/>
-          <a:p>
-            <a:pPr algn="ctr"/>
-            <a:r>
-              <a:rPr kumimoji="1" lang="ja-JP" altLang="en-US" dirty="0"/>
-              <a:t>変更履歴</a:t>
-            </a:r>
-          </a:p>
-        </p:txBody>
-      </p:sp>
-      <p:sp>
-        <p:nvSpPr>
-          <p:cNvPr id="14" name="吹き出し: 四角形 13">
-            <a:extLst>
-              <a:ext uri="{FF2B5EF4-FFF2-40B4-BE49-F238E27FC236}">
-                <a16:creationId xmlns:a16="http://schemas.microsoft.com/office/drawing/2014/main" id="{BFE1C366-B10F-2D38-9F9F-CEA852B2A35E}"/>
-              </a:ext>
-            </a:extLst>
-          </p:cNvPr>
-          <p:cNvSpPr/>
-          <p:nvPr/>
-        </p:nvSpPr>
-        <p:spPr>
-          <a:xfrm>
-            <a:off x="5364910" y="5379720"/>
-            <a:ext cx="3887947" cy="2286000"/>
-          </a:xfrm>
-          <a:prstGeom prst="wedgeRectCallout">
-            <a:avLst>
-              <a:gd name="adj1" fmla="val -52807"/>
-              <a:gd name="adj2" fmla="val 66171"/>
-            </a:avLst>
-          </a:prstGeom>
-          <a:ln w="28575">
-            <a:solidFill>
-              <a:schemeClr val="tx1"/>
-            </a:solidFill>
-          </a:ln>
-        </p:spPr>
-        <p:style>
-          <a:lnRef idx="2">
-            <a:schemeClr val="accent6"/>
-          </a:lnRef>
-          <a:fillRef idx="1">
-            <a:schemeClr val="lt1"/>
-          </a:fillRef>
-          <a:effectRef idx="0">
-            <a:schemeClr val="accent6"/>
-          </a:effectRef>
-          <a:fontRef idx="minor">
-            <a:schemeClr val="dk1"/>
-          </a:fontRef>
-        </p:style>
-        <p:txBody>
-          <a:bodyPr rtlCol="0" anchor="ctr"/>
-          <a:lstStyle/>
-          <a:p>
-            <a:pPr algn="ctr"/>
-            <a:endParaRPr kumimoji="1" lang="ja-JP" altLang="en-US" dirty="0"/>
-          </a:p>
-        </p:txBody>
-      </p:sp>
-      <p:sp>
-        <p:nvSpPr>
-          <p:cNvPr id="15" name="四角形: 角を丸くする 14">
-            <a:extLst>
-              <a:ext uri="{FF2B5EF4-FFF2-40B4-BE49-F238E27FC236}">
-                <a16:creationId xmlns:a16="http://schemas.microsoft.com/office/drawing/2014/main" id="{28779FEC-BF07-D6EE-D4E1-976D4EBB232E}"/>
-              </a:ext>
-            </a:extLst>
-          </p:cNvPr>
-          <p:cNvSpPr/>
-          <p:nvPr/>
-        </p:nvSpPr>
-        <p:spPr>
-          <a:xfrm>
-            <a:off x="6298963" y="5529431"/>
-            <a:ext cx="2042160" cy="563880"/>
-          </a:xfrm>
-          <a:prstGeom prst="roundRect">
-            <a:avLst/>
-          </a:prstGeom>
-          <a:ln w="38100"/>
-        </p:spPr>
-        <p:style>
-          <a:lnRef idx="2">
-            <a:schemeClr val="accent6"/>
-          </a:lnRef>
-          <a:fillRef idx="1">
-            <a:schemeClr val="lt1"/>
-          </a:fillRef>
-          <a:effectRef idx="0">
-            <a:schemeClr val="accent6"/>
-          </a:effectRef>
-          <a:fontRef idx="minor">
-            <a:schemeClr val="dk1"/>
-          </a:fontRef>
-        </p:style>
-        <p:txBody>
-          <a:bodyPr rtlCol="0" anchor="ctr"/>
-          <a:lstStyle/>
-          <a:p>
-            <a:pPr algn="ctr"/>
-            <a:r>
-              <a:rPr kumimoji="1" lang="ja-JP" altLang="en-US" dirty="0"/>
-              <a:t>変更履歴</a:t>
-            </a:r>
-          </a:p>
-        </p:txBody>
-      </p:sp>
-      <p:sp>
-        <p:nvSpPr>
-          <p:cNvPr id="17" name="四角形: 角を丸くする 16">
-            <a:extLst>
-              <a:ext uri="{FF2B5EF4-FFF2-40B4-BE49-F238E27FC236}">
-                <a16:creationId xmlns:a16="http://schemas.microsoft.com/office/drawing/2014/main" id="{FAAF2DBD-3162-971D-AFEC-2C9B76795AB0}"/>
-              </a:ext>
-            </a:extLst>
-          </p:cNvPr>
-          <p:cNvSpPr/>
-          <p:nvPr/>
-        </p:nvSpPr>
-        <p:spPr>
-          <a:xfrm>
-            <a:off x="6298963" y="6232782"/>
-            <a:ext cx="2042160" cy="563880"/>
-          </a:xfrm>
-          <a:prstGeom prst="roundRect">
-            <a:avLst/>
-          </a:prstGeom>
-          <a:ln w="38100">
-            <a:solidFill>
-              <a:srgbClr val="FFC000"/>
-            </a:solidFill>
-          </a:ln>
-        </p:spPr>
-        <p:style>
-          <a:lnRef idx="2">
-            <a:schemeClr val="accent6"/>
-          </a:lnRef>
-          <a:fillRef idx="1">
-            <a:schemeClr val="lt1"/>
-          </a:fillRef>
-          <a:effectRef idx="0">
-            <a:schemeClr val="accent6"/>
-          </a:effectRef>
-          <a:fontRef idx="minor">
-            <a:schemeClr val="dk1"/>
-          </a:fontRef>
-        </p:style>
-        <p:txBody>
-          <a:bodyPr rtlCol="0" anchor="ctr"/>
-          <a:lstStyle/>
-          <a:p>
-            <a:pPr algn="ctr"/>
-            <a:r>
-              <a:rPr kumimoji="1" lang="ja-JP" altLang="en-US" dirty="0"/>
-              <a:t>変更履歴</a:t>
-            </a:r>
-          </a:p>
-        </p:txBody>
-      </p:sp>
-      <p:sp>
-        <p:nvSpPr>
-          <p:cNvPr id="20" name="四角形: 角を丸くする 19">
-            <a:extLst>
-              <a:ext uri="{FF2B5EF4-FFF2-40B4-BE49-F238E27FC236}">
-                <a16:creationId xmlns:a16="http://schemas.microsoft.com/office/drawing/2014/main" id="{AD682B44-A40C-73E3-1C1F-8BD234C03F98}"/>
-              </a:ext>
-            </a:extLst>
-          </p:cNvPr>
-          <p:cNvSpPr/>
-          <p:nvPr/>
-        </p:nvSpPr>
-        <p:spPr>
-          <a:xfrm>
-            <a:off x="6298963" y="6936132"/>
-            <a:ext cx="2042160" cy="563880"/>
-          </a:xfrm>
-          <a:prstGeom prst="roundRect">
-            <a:avLst/>
-          </a:prstGeom>
-          <a:ln w="38100">
-            <a:solidFill>
-              <a:srgbClr val="00B0F0"/>
-            </a:solidFill>
-          </a:ln>
-        </p:spPr>
-        <p:style>
-          <a:lnRef idx="2">
-            <a:schemeClr val="accent6"/>
-          </a:lnRef>
-          <a:fillRef idx="1">
-            <a:schemeClr val="lt1"/>
-          </a:fillRef>
-          <a:effectRef idx="0">
-            <a:schemeClr val="accent6"/>
-          </a:effectRef>
-          <a:fontRef idx="minor">
-            <a:schemeClr val="dk1"/>
-          </a:fontRef>
-        </p:style>
-        <p:txBody>
-          <a:bodyPr rtlCol="0" anchor="ctr"/>
-          <a:lstStyle/>
-          <a:p>
-            <a:pPr algn="ctr"/>
-            <a:r>
-              <a:rPr kumimoji="1" lang="ja-JP" altLang="en-US" dirty="0"/>
-              <a:t>変更履歴</a:t>
-            </a:r>
-          </a:p>
-        </p:txBody>
-      </p:sp>
-    </p:spTree>
-    <p:extLst>
-      <p:ext uri="{BB962C8B-B14F-4D97-AF65-F5344CB8AC3E}">
-        <p14:creationId xmlns:p14="http://schemas.microsoft.com/office/powerpoint/2010/main" val="981742287"/>
-      </p:ext>
-    </p:extLst>
-  </p:cSld>
-  <p:clrMapOvr>
-    <a:masterClrMapping/>
-  </p:clrMapOvr>
-</p:sld>
-</file>
-
-<file path=ppt/slides/slide14.xml><?xml version="1.0" encoding="utf-8"?>
-<p:sld xmlns:a="http://schemas.openxmlformats.org/drawingml/2006/main" xmlns:r="http://schemas.openxmlformats.org/officeDocument/2006/relationships" xmlns:p="http://schemas.openxmlformats.org/presentationml/2006/main">
-  <p:cSld>
-    <p:spTree>
-      <p:nvGrpSpPr>
-        <p:cNvPr id="1" name="">
-          <a:extLst>
-            <a:ext uri="{FF2B5EF4-FFF2-40B4-BE49-F238E27FC236}">
-              <a16:creationId xmlns:a16="http://schemas.microsoft.com/office/drawing/2014/main" id="{7B82E340-85E8-FB33-24B7-1F0B520495D7}"/>
-            </a:ext>
-          </a:extLst>
-        </p:cNvPr>
-        <p:cNvGrpSpPr/>
-        <p:nvPr/>
-      </p:nvGrpSpPr>
-      <p:grpSpPr>
-        <a:xfrm>
-          <a:off x="0" y="0"/>
-          <a:ext cx="0" cy="0"/>
-          <a:chOff x="0" y="0"/>
-          <a:chExt cx="0" cy="0"/>
-        </a:xfrm>
-      </p:grpSpPr>
-      <p:sp>
-        <p:nvSpPr>
-          <p:cNvPr id="6" name="四角形: 角を丸くする 5">
-            <a:extLst>
-              <a:ext uri="{FF2B5EF4-FFF2-40B4-BE49-F238E27FC236}">
-                <a16:creationId xmlns:a16="http://schemas.microsoft.com/office/drawing/2014/main" id="{146B6114-42A3-66E9-5A3C-CB58EC5151D2}"/>
-              </a:ext>
-            </a:extLst>
-          </p:cNvPr>
-          <p:cNvSpPr/>
-          <p:nvPr/>
-        </p:nvSpPr>
-        <p:spPr>
-          <a:xfrm>
-            <a:off x="2833972" y="177884"/>
-            <a:ext cx="7200000" cy="3980981"/>
-          </a:xfrm>
-          <a:prstGeom prst="roundRect">
-            <a:avLst/>
-          </a:prstGeom>
-          <a:solidFill>
-            <a:srgbClr val="FFCCFF"/>
-          </a:solidFill>
-          <a:ln w="38100">
-            <a:solidFill>
-              <a:schemeClr val="tx1"/>
-            </a:solidFill>
-          </a:ln>
-        </p:spPr>
-        <p:style>
-          <a:lnRef idx="2">
-            <a:schemeClr val="accent6"/>
-          </a:lnRef>
-          <a:fillRef idx="1">
-            <a:schemeClr val="lt1"/>
-          </a:fillRef>
-          <a:effectRef idx="0">
-            <a:schemeClr val="accent6"/>
-          </a:effectRef>
-          <a:fontRef idx="minor">
-            <a:schemeClr val="dk1"/>
-          </a:fontRef>
-        </p:style>
-        <p:txBody>
-          <a:bodyPr rtlCol="0" anchor="t"/>
-          <a:lstStyle/>
-          <a:p>
-            <a:pPr algn="ctr"/>
-            <a:r>
-              <a:rPr lang="ja-JP" altLang="en-US" b="1" dirty="0"/>
-              <a:t>リモートリポジトリ</a:t>
-            </a:r>
-          </a:p>
-        </p:txBody>
-      </p:sp>
-      <p:sp>
-        <p:nvSpPr>
-          <p:cNvPr id="86" name="矢印: 右 85">
-            <a:extLst>
-              <a:ext uri="{FF2B5EF4-FFF2-40B4-BE49-F238E27FC236}">
-                <a16:creationId xmlns:a16="http://schemas.microsoft.com/office/drawing/2014/main" id="{186AED3C-ABF1-25FE-0908-3492478F4B43}"/>
-              </a:ext>
-            </a:extLst>
-          </p:cNvPr>
-          <p:cNvSpPr/>
-          <p:nvPr/>
-        </p:nvSpPr>
-        <p:spPr>
-          <a:xfrm rot="5400000">
-            <a:off x="6200571" y="4406894"/>
-            <a:ext cx="468086" cy="677228"/>
-          </a:xfrm>
-          <a:prstGeom prst="rightArrow">
-            <a:avLst/>
-          </a:prstGeom>
-        </p:spPr>
-        <p:style>
-          <a:lnRef idx="2">
-            <a:schemeClr val="dk1">
-              <a:shade val="15000"/>
-            </a:schemeClr>
-          </a:lnRef>
-          <a:fillRef idx="1">
-            <a:schemeClr val="dk1"/>
-          </a:fillRef>
-          <a:effectRef idx="0">
-            <a:schemeClr val="dk1"/>
-          </a:effectRef>
-          <a:fontRef idx="minor">
-            <a:schemeClr val="lt1"/>
-          </a:fontRef>
-        </p:style>
-        <p:txBody>
-          <a:bodyPr rtlCol="0" anchor="ctr"/>
-          <a:lstStyle/>
-          <a:p>
-            <a:pPr algn="ctr"/>
-            <a:endParaRPr kumimoji="1" lang="ja-JP" altLang="en-US"/>
-          </a:p>
-        </p:txBody>
-      </p:sp>
-      <p:sp>
-        <p:nvSpPr>
-          <p:cNvPr id="98" name="テキスト ボックス 97">
-            <a:extLst>
-              <a:ext uri="{FF2B5EF4-FFF2-40B4-BE49-F238E27FC236}">
-                <a16:creationId xmlns:a16="http://schemas.microsoft.com/office/drawing/2014/main" id="{8E5938E4-9CB3-0E1E-699F-A579C2F0E6DF}"/>
-              </a:ext>
-            </a:extLst>
-          </p:cNvPr>
-          <p:cNvSpPr txBox="1"/>
-          <p:nvPr/>
-        </p:nvSpPr>
-        <p:spPr>
-          <a:xfrm>
-            <a:off x="6961686" y="4560822"/>
-            <a:ext cx="646331" cy="369332"/>
-          </a:xfrm>
-          <a:prstGeom prst="rect">
-            <a:avLst/>
-          </a:prstGeom>
-          <a:noFill/>
-        </p:spPr>
-        <p:txBody>
-          <a:bodyPr wrap="none" rtlCol="0">
-            <a:spAutoFit/>
-          </a:bodyPr>
-          <a:lstStyle/>
-          <a:p>
-            <a:r>
-              <a:rPr kumimoji="1" lang="ja-JP" altLang="en-US" b="1" dirty="0"/>
-              <a:t>プル</a:t>
-            </a:r>
-          </a:p>
-        </p:txBody>
-      </p:sp>
-      <p:grpSp>
-        <p:nvGrpSpPr>
-          <p:cNvPr id="7" name="グループ化 6">
-            <a:extLst>
-              <a:ext uri="{FF2B5EF4-FFF2-40B4-BE49-F238E27FC236}">
-                <a16:creationId xmlns:a16="http://schemas.microsoft.com/office/drawing/2014/main" id="{AE9D9435-3656-9A81-CFCB-9163C8AA5A53}"/>
-              </a:ext>
-            </a:extLst>
-          </p:cNvPr>
-          <p:cNvGrpSpPr/>
-          <p:nvPr/>
-        </p:nvGrpSpPr>
-        <p:grpSpPr>
-          <a:xfrm>
-            <a:off x="3944660" y="2864981"/>
-            <a:ext cx="1217310" cy="1293884"/>
-            <a:chOff x="5938864" y="3124197"/>
-            <a:chExt cx="1217310" cy="1364976"/>
-          </a:xfrm>
-        </p:grpSpPr>
-        <p:pic>
-          <p:nvPicPr>
-            <p:cNvPr id="8" name="図 7">
-              <a:extLst>
-                <a:ext uri="{FF2B5EF4-FFF2-40B4-BE49-F238E27FC236}">
-                  <a16:creationId xmlns:a16="http://schemas.microsoft.com/office/drawing/2014/main" id="{ECE3044D-7BBE-ECA9-A854-1EE48637D7AC}"/>
-                </a:ext>
-              </a:extLst>
-            </p:cNvPr>
-            <p:cNvPicPr>
-              <a:picLocks noChangeAspect="1"/>
-            </p:cNvPicPr>
-            <p:nvPr/>
-          </p:nvPicPr>
-          <p:blipFill>
-            <a:blip r:embed="rId2">
-              <a:extLst>
-                <a:ext uri="{28A0092B-C50C-407E-A947-70E740481C1C}">
-                  <a14:useLocalDpi xmlns:a14="http://schemas.microsoft.com/office/drawing/2010/main" val="0"/>
-                </a:ext>
-              </a:extLst>
-            </a:blip>
-            <a:stretch>
-              <a:fillRect/>
-            </a:stretch>
-          </p:blipFill>
-          <p:spPr>
-            <a:xfrm>
-              <a:off x="5938864" y="3124197"/>
-              <a:ext cx="1217310" cy="1364976"/>
-            </a:xfrm>
-            <a:prstGeom prst="rect">
-              <a:avLst/>
-            </a:prstGeom>
-          </p:spPr>
-        </p:pic>
-        <p:pic>
-          <p:nvPicPr>
-            <p:cNvPr id="9" name="図 8">
-              <a:extLst>
-                <a:ext uri="{FF2B5EF4-FFF2-40B4-BE49-F238E27FC236}">
-                  <a16:creationId xmlns:a16="http://schemas.microsoft.com/office/drawing/2014/main" id="{4B94DFD8-7D83-2B6A-A570-FAA5FFBC2306}"/>
-                </a:ext>
-              </a:extLst>
-            </p:cNvPr>
-            <p:cNvPicPr>
-              <a:picLocks noChangeAspect="1"/>
-            </p:cNvPicPr>
-            <p:nvPr/>
-          </p:nvPicPr>
-          <p:blipFill>
-            <a:blip r:embed="rId3">
-              <a:extLst>
-                <a:ext uri="{28A0092B-C50C-407E-A947-70E740481C1C}">
-                  <a14:useLocalDpi xmlns:a14="http://schemas.microsoft.com/office/drawing/2010/main" val="0"/>
-                </a:ext>
-              </a:extLst>
-            </a:blip>
-            <a:stretch>
-              <a:fillRect/>
-            </a:stretch>
-          </p:blipFill>
-          <p:spPr>
-            <a:xfrm>
-              <a:off x="6133519" y="3493589"/>
-              <a:ext cx="828000" cy="828000"/>
-            </a:xfrm>
-            <a:prstGeom prst="rect">
-              <a:avLst/>
-            </a:prstGeom>
-          </p:spPr>
-        </p:pic>
-      </p:grpSp>
-      <p:sp>
-        <p:nvSpPr>
-          <p:cNvPr id="10" name="四角形: 角を丸くする 9">
-            <a:extLst>
-              <a:ext uri="{FF2B5EF4-FFF2-40B4-BE49-F238E27FC236}">
-                <a16:creationId xmlns:a16="http://schemas.microsoft.com/office/drawing/2014/main" id="{C094C39D-CAE7-1E56-BE36-33CE2CBA65DA}"/>
-              </a:ext>
-            </a:extLst>
-          </p:cNvPr>
-          <p:cNvSpPr/>
-          <p:nvPr/>
-        </p:nvSpPr>
-        <p:spPr>
-          <a:xfrm>
-            <a:off x="2833972" y="5332110"/>
-            <a:ext cx="7200000" cy="4054973"/>
-          </a:xfrm>
-          <a:prstGeom prst="roundRect">
-            <a:avLst/>
-          </a:prstGeom>
-          <a:solidFill>
-            <a:schemeClr val="accent1">
-              <a:lumMod val="20000"/>
-              <a:lumOff val="80000"/>
-            </a:schemeClr>
-          </a:solidFill>
-          <a:ln w="38100">
-            <a:solidFill>
-              <a:schemeClr val="tx1"/>
-            </a:solidFill>
-          </a:ln>
-        </p:spPr>
-        <p:style>
-          <a:lnRef idx="2">
-            <a:schemeClr val="accent6"/>
-          </a:lnRef>
-          <a:fillRef idx="1">
-            <a:schemeClr val="lt1"/>
-          </a:fillRef>
-          <a:effectRef idx="0">
-            <a:schemeClr val="accent6"/>
-          </a:effectRef>
-          <a:fontRef idx="minor">
-            <a:schemeClr val="dk1"/>
-          </a:fontRef>
-        </p:style>
-        <p:txBody>
-          <a:bodyPr rtlCol="0" anchor="t"/>
-          <a:lstStyle/>
-          <a:p>
-            <a:pPr algn="ctr"/>
-            <a:r>
-              <a:rPr lang="ja-JP" altLang="en-US" b="1" dirty="0"/>
-              <a:t>ローカルリポジトリ</a:t>
-            </a:r>
-          </a:p>
-        </p:txBody>
-      </p:sp>
-      <p:pic>
-        <p:nvPicPr>
-          <p:cNvPr id="12" name="図 11">
-            <a:extLst>
-              <a:ext uri="{FF2B5EF4-FFF2-40B4-BE49-F238E27FC236}">
-                <a16:creationId xmlns:a16="http://schemas.microsoft.com/office/drawing/2014/main" id="{CC3B264A-6266-0D89-9553-404DCFCDEAA5}"/>
-              </a:ext>
-            </a:extLst>
-          </p:cNvPr>
-          <p:cNvPicPr>
-            <a:picLocks noChangeAspect="1"/>
-          </p:cNvPicPr>
-          <p:nvPr/>
-        </p:nvPicPr>
-        <p:blipFill>
-          <a:blip r:embed="rId4">
-            <a:extLst>
-              <a:ext uri="{28A0092B-C50C-407E-A947-70E740481C1C}">
-                <a14:useLocalDpi xmlns:a14="http://schemas.microsoft.com/office/drawing/2010/main" val="0"/>
-              </a:ext>
-            </a:extLst>
-          </a:blip>
-          <a:stretch>
-            <a:fillRect/>
-          </a:stretch>
-        </p:blipFill>
-        <p:spPr>
-          <a:xfrm>
-            <a:off x="4139315" y="8379084"/>
-            <a:ext cx="1008000" cy="1008000"/>
-          </a:xfrm>
-          <a:prstGeom prst="rect">
-            <a:avLst/>
-          </a:prstGeom>
-        </p:spPr>
-      </p:pic>
-      <p:sp>
-        <p:nvSpPr>
-          <p:cNvPr id="14" name="吹き出し: 四角形 13">
-            <a:extLst>
-              <a:ext uri="{FF2B5EF4-FFF2-40B4-BE49-F238E27FC236}">
-                <a16:creationId xmlns:a16="http://schemas.microsoft.com/office/drawing/2014/main" id="{6D1DAFE4-66EA-F72B-320D-53DDB8E09F7A}"/>
-              </a:ext>
-            </a:extLst>
-          </p:cNvPr>
-          <p:cNvSpPr/>
-          <p:nvPr/>
-        </p:nvSpPr>
-        <p:spPr>
-          <a:xfrm>
-            <a:off x="5349670" y="821306"/>
-            <a:ext cx="3887947" cy="2286000"/>
-          </a:xfrm>
-          <a:prstGeom prst="wedgeRectCallout">
-            <a:avLst>
-              <a:gd name="adj1" fmla="val -52807"/>
-              <a:gd name="adj2" fmla="val 66171"/>
-            </a:avLst>
-          </a:prstGeom>
-          <a:ln w="28575">
-            <a:solidFill>
-              <a:schemeClr val="tx1"/>
-            </a:solidFill>
-          </a:ln>
-        </p:spPr>
-        <p:style>
-          <a:lnRef idx="2">
-            <a:schemeClr val="accent6"/>
-          </a:lnRef>
-          <a:fillRef idx="1">
-            <a:schemeClr val="lt1"/>
-          </a:fillRef>
-          <a:effectRef idx="0">
-            <a:schemeClr val="accent6"/>
-          </a:effectRef>
-          <a:fontRef idx="minor">
-            <a:schemeClr val="dk1"/>
-          </a:fontRef>
-        </p:style>
-        <p:txBody>
-          <a:bodyPr rtlCol="0" anchor="ctr"/>
-          <a:lstStyle/>
-          <a:p>
-            <a:pPr algn="ctr"/>
-            <a:endParaRPr kumimoji="1" lang="ja-JP" altLang="en-US" dirty="0"/>
-          </a:p>
-        </p:txBody>
-      </p:sp>
-      <p:sp>
-        <p:nvSpPr>
-          <p:cNvPr id="15" name="四角形: 角を丸くする 14">
-            <a:extLst>
-              <a:ext uri="{FF2B5EF4-FFF2-40B4-BE49-F238E27FC236}">
-                <a16:creationId xmlns:a16="http://schemas.microsoft.com/office/drawing/2014/main" id="{810C7F15-4126-967D-BDBC-A6F46ADC320D}"/>
-              </a:ext>
-            </a:extLst>
-          </p:cNvPr>
-          <p:cNvSpPr/>
-          <p:nvPr/>
-        </p:nvSpPr>
-        <p:spPr>
-          <a:xfrm>
-            <a:off x="6273747" y="971017"/>
-            <a:ext cx="2042160" cy="563880"/>
-          </a:xfrm>
-          <a:prstGeom prst="roundRect">
-            <a:avLst/>
-          </a:prstGeom>
-          <a:ln w="38100"/>
-        </p:spPr>
-        <p:style>
-          <a:lnRef idx="2">
-            <a:schemeClr val="accent6"/>
-          </a:lnRef>
-          <a:fillRef idx="1">
-            <a:schemeClr val="lt1"/>
-          </a:fillRef>
-          <a:effectRef idx="0">
-            <a:schemeClr val="accent6"/>
-          </a:effectRef>
-          <a:fontRef idx="minor">
-            <a:schemeClr val="dk1"/>
-          </a:fontRef>
-        </p:style>
-        <p:txBody>
-          <a:bodyPr rtlCol="0" anchor="ctr"/>
-          <a:lstStyle/>
-          <a:p>
-            <a:pPr algn="ctr"/>
-            <a:r>
-              <a:rPr kumimoji="1" lang="ja-JP" altLang="en-US" dirty="0"/>
-              <a:t>変更履歴</a:t>
-            </a:r>
-          </a:p>
-        </p:txBody>
-      </p:sp>
-      <p:sp>
-        <p:nvSpPr>
-          <p:cNvPr id="17" name="四角形: 角を丸くする 16">
-            <a:extLst>
-              <a:ext uri="{FF2B5EF4-FFF2-40B4-BE49-F238E27FC236}">
-                <a16:creationId xmlns:a16="http://schemas.microsoft.com/office/drawing/2014/main" id="{45EC6968-1B82-897D-4F9E-B458094BBCD8}"/>
-              </a:ext>
-            </a:extLst>
-          </p:cNvPr>
-          <p:cNvSpPr/>
-          <p:nvPr/>
-        </p:nvSpPr>
-        <p:spPr>
-          <a:xfrm>
-            <a:off x="6273747" y="1664641"/>
-            <a:ext cx="2042160" cy="563880"/>
-          </a:xfrm>
-          <a:prstGeom prst="roundRect">
-            <a:avLst/>
-          </a:prstGeom>
-          <a:ln w="38100">
-            <a:solidFill>
-              <a:srgbClr val="FFC000"/>
-            </a:solidFill>
-          </a:ln>
-        </p:spPr>
-        <p:style>
-          <a:lnRef idx="2">
-            <a:schemeClr val="accent6"/>
-          </a:lnRef>
-          <a:fillRef idx="1">
-            <a:schemeClr val="lt1"/>
-          </a:fillRef>
-          <a:effectRef idx="0">
-            <a:schemeClr val="accent6"/>
-          </a:effectRef>
-          <a:fontRef idx="minor">
-            <a:schemeClr val="dk1"/>
-          </a:fontRef>
-        </p:style>
-        <p:txBody>
-          <a:bodyPr rtlCol="0" anchor="ctr"/>
-          <a:lstStyle/>
-          <a:p>
-            <a:pPr algn="ctr"/>
-            <a:r>
-              <a:rPr kumimoji="1" lang="ja-JP" altLang="en-US" dirty="0"/>
-              <a:t>変更履歴</a:t>
-            </a:r>
-          </a:p>
-        </p:txBody>
-      </p:sp>
-      <p:sp>
-        <p:nvSpPr>
-          <p:cNvPr id="3" name="四角形: 角を丸くする 2">
-            <a:extLst>
-              <a:ext uri="{FF2B5EF4-FFF2-40B4-BE49-F238E27FC236}">
-                <a16:creationId xmlns:a16="http://schemas.microsoft.com/office/drawing/2014/main" id="{5200D8D7-8886-C502-2265-ECCAAB75D5CA}"/>
-              </a:ext>
-            </a:extLst>
-          </p:cNvPr>
-          <p:cNvSpPr/>
-          <p:nvPr/>
-        </p:nvSpPr>
-        <p:spPr>
-          <a:xfrm>
-            <a:off x="6273747" y="2358265"/>
-            <a:ext cx="2042160" cy="563880"/>
-          </a:xfrm>
-          <a:prstGeom prst="roundRect">
-            <a:avLst/>
-          </a:prstGeom>
-          <a:ln w="38100">
-            <a:solidFill>
-              <a:srgbClr val="00B0F0"/>
-            </a:solidFill>
-          </a:ln>
-        </p:spPr>
-        <p:style>
-          <a:lnRef idx="2">
-            <a:schemeClr val="accent6"/>
-          </a:lnRef>
-          <a:fillRef idx="1">
-            <a:schemeClr val="lt1"/>
-          </a:fillRef>
-          <a:effectRef idx="0">
-            <a:schemeClr val="accent6"/>
-          </a:effectRef>
-          <a:fontRef idx="minor">
-            <a:schemeClr val="dk1"/>
-          </a:fontRef>
-        </p:style>
-        <p:txBody>
-          <a:bodyPr rtlCol="0" anchor="ctr"/>
-          <a:lstStyle/>
-          <a:p>
-            <a:pPr algn="ctr"/>
-            <a:r>
-              <a:rPr kumimoji="1" lang="ja-JP" altLang="en-US" dirty="0"/>
-              <a:t>変更履歴</a:t>
-            </a:r>
-          </a:p>
-        </p:txBody>
-      </p:sp>
-      <p:sp>
-        <p:nvSpPr>
-          <p:cNvPr id="4" name="吹き出し: 四角形 3">
-            <a:extLst>
-              <a:ext uri="{FF2B5EF4-FFF2-40B4-BE49-F238E27FC236}">
-                <a16:creationId xmlns:a16="http://schemas.microsoft.com/office/drawing/2014/main" id="{E1115A5C-009C-7C02-F078-842CAEC9E797}"/>
-              </a:ext>
-            </a:extLst>
-          </p:cNvPr>
-          <p:cNvSpPr/>
-          <p:nvPr/>
-        </p:nvSpPr>
-        <p:spPr>
-          <a:xfrm>
-            <a:off x="5349670" y="6017111"/>
-            <a:ext cx="3887947" cy="2286000"/>
-          </a:xfrm>
-          <a:prstGeom prst="wedgeRectCallout">
-            <a:avLst>
-              <a:gd name="adj1" fmla="val -52807"/>
-              <a:gd name="adj2" fmla="val 66171"/>
-            </a:avLst>
-          </a:prstGeom>
-          <a:ln w="28575">
-            <a:solidFill>
-              <a:schemeClr val="tx1"/>
-            </a:solidFill>
-          </a:ln>
-        </p:spPr>
-        <p:style>
-          <a:lnRef idx="2">
-            <a:schemeClr val="accent6"/>
-          </a:lnRef>
-          <a:fillRef idx="1">
-            <a:schemeClr val="lt1"/>
-          </a:fillRef>
-          <a:effectRef idx="0">
-            <a:schemeClr val="accent6"/>
-          </a:effectRef>
-          <a:fontRef idx="minor">
-            <a:schemeClr val="dk1"/>
-          </a:fontRef>
-        </p:style>
-        <p:txBody>
-          <a:bodyPr rtlCol="0" anchor="ctr"/>
-          <a:lstStyle/>
-          <a:p>
-            <a:pPr algn="ctr"/>
-            <a:endParaRPr kumimoji="1" lang="ja-JP" altLang="en-US" dirty="0"/>
-          </a:p>
-        </p:txBody>
-      </p:sp>
-      <p:sp>
-        <p:nvSpPr>
-          <p:cNvPr id="5" name="四角形: 角を丸くする 4">
-            <a:extLst>
-              <a:ext uri="{FF2B5EF4-FFF2-40B4-BE49-F238E27FC236}">
-                <a16:creationId xmlns:a16="http://schemas.microsoft.com/office/drawing/2014/main" id="{135FBE9E-920D-99C6-6F1E-E5245260B7DD}"/>
-              </a:ext>
-            </a:extLst>
-          </p:cNvPr>
-          <p:cNvSpPr/>
-          <p:nvPr/>
-        </p:nvSpPr>
-        <p:spPr>
-          <a:xfrm>
-            <a:off x="6273747" y="6166822"/>
-            <a:ext cx="2042160" cy="563880"/>
-          </a:xfrm>
-          <a:prstGeom prst="roundRect">
-            <a:avLst/>
-          </a:prstGeom>
-          <a:ln w="38100"/>
-        </p:spPr>
-        <p:style>
-          <a:lnRef idx="2">
-            <a:schemeClr val="accent6"/>
-          </a:lnRef>
-          <a:fillRef idx="1">
-            <a:schemeClr val="lt1"/>
-          </a:fillRef>
-          <a:effectRef idx="0">
-            <a:schemeClr val="accent6"/>
-          </a:effectRef>
-          <a:fontRef idx="minor">
-            <a:schemeClr val="dk1"/>
-          </a:fontRef>
-        </p:style>
-        <p:txBody>
-          <a:bodyPr rtlCol="0" anchor="ctr"/>
-          <a:lstStyle/>
-          <a:p>
-            <a:pPr algn="ctr"/>
-            <a:r>
-              <a:rPr kumimoji="1" lang="ja-JP" altLang="en-US" dirty="0"/>
-              <a:t>変更履歴</a:t>
-            </a:r>
-          </a:p>
-        </p:txBody>
-      </p:sp>
-      <p:sp>
-        <p:nvSpPr>
-          <p:cNvPr id="16" name="四角形: 角を丸くする 15">
-            <a:extLst>
-              <a:ext uri="{FF2B5EF4-FFF2-40B4-BE49-F238E27FC236}">
-                <a16:creationId xmlns:a16="http://schemas.microsoft.com/office/drawing/2014/main" id="{A0A84FC3-9D93-78F9-6B55-BFBA3E16E93C}"/>
-              </a:ext>
-            </a:extLst>
-          </p:cNvPr>
-          <p:cNvSpPr/>
-          <p:nvPr/>
-        </p:nvSpPr>
-        <p:spPr>
-          <a:xfrm>
-            <a:off x="6273747" y="6860446"/>
-            <a:ext cx="2042160" cy="563880"/>
-          </a:xfrm>
-          <a:prstGeom prst="roundRect">
-            <a:avLst/>
-          </a:prstGeom>
-          <a:ln w="38100">
-            <a:solidFill>
-              <a:srgbClr val="FFC000"/>
-            </a:solidFill>
-          </a:ln>
-        </p:spPr>
-        <p:style>
-          <a:lnRef idx="2">
-            <a:schemeClr val="accent6"/>
-          </a:lnRef>
-          <a:fillRef idx="1">
-            <a:schemeClr val="lt1"/>
-          </a:fillRef>
-          <a:effectRef idx="0">
-            <a:schemeClr val="accent6"/>
-          </a:effectRef>
-          <a:fontRef idx="minor">
-            <a:schemeClr val="dk1"/>
-          </a:fontRef>
-        </p:style>
-        <p:txBody>
-          <a:bodyPr rtlCol="0" anchor="ctr"/>
-          <a:lstStyle/>
-          <a:p>
-            <a:pPr algn="ctr"/>
-            <a:r>
-              <a:rPr kumimoji="1" lang="ja-JP" altLang="en-US" dirty="0"/>
-              <a:t>変更履歴</a:t>
-            </a:r>
-          </a:p>
-        </p:txBody>
-      </p:sp>
-      <p:sp>
-        <p:nvSpPr>
-          <p:cNvPr id="18" name="四角形: 角を丸くする 17">
-            <a:extLst>
-              <a:ext uri="{FF2B5EF4-FFF2-40B4-BE49-F238E27FC236}">
-                <a16:creationId xmlns:a16="http://schemas.microsoft.com/office/drawing/2014/main" id="{A80FCBB7-B90F-F56C-3DFF-718DF0EBA926}"/>
-              </a:ext>
-            </a:extLst>
-          </p:cNvPr>
-          <p:cNvSpPr/>
-          <p:nvPr/>
-        </p:nvSpPr>
-        <p:spPr>
-          <a:xfrm>
-            <a:off x="6273747" y="7554070"/>
-            <a:ext cx="2042160" cy="563880"/>
-          </a:xfrm>
-          <a:prstGeom prst="roundRect">
-            <a:avLst/>
-          </a:prstGeom>
-          <a:ln w="38100">
-            <a:solidFill>
-              <a:srgbClr val="00B0F0"/>
-            </a:solidFill>
-          </a:ln>
-        </p:spPr>
-        <p:style>
-          <a:lnRef idx="2">
-            <a:schemeClr val="accent6"/>
-          </a:lnRef>
-          <a:fillRef idx="1">
-            <a:schemeClr val="lt1"/>
-          </a:fillRef>
-          <a:effectRef idx="0">
-            <a:schemeClr val="accent6"/>
-          </a:effectRef>
-          <a:fontRef idx="minor">
-            <a:schemeClr val="dk1"/>
-          </a:fontRef>
-        </p:style>
-        <p:txBody>
-          <a:bodyPr rtlCol="0" anchor="ctr"/>
-          <a:lstStyle/>
-          <a:p>
-            <a:pPr algn="ctr"/>
-            <a:r>
-              <a:rPr kumimoji="1" lang="ja-JP" altLang="en-US" dirty="0"/>
-              <a:t>変更履歴</a:t>
-            </a:r>
-          </a:p>
-        </p:txBody>
-      </p:sp>
-    </p:spTree>
-    <p:extLst>
-      <p:ext uri="{BB962C8B-B14F-4D97-AF65-F5344CB8AC3E}">
-        <p14:creationId xmlns:p14="http://schemas.microsoft.com/office/powerpoint/2010/main" val="461882835"/>
-      </p:ext>
-    </p:extLst>
-  </p:cSld>
-  <p:clrMapOvr>
-    <a:masterClrMapping/>
-  </p:clrMapOvr>
-</p:sld>
-</file>
-
-<file path=ppt/slides/slide2.xml><?xml version="1.0" encoding="utf-8"?>
-<p:sld xmlns:a="http://schemas.openxmlformats.org/drawingml/2006/main" xmlns:r="http://schemas.openxmlformats.org/officeDocument/2006/relationships" xmlns:p="http://schemas.openxmlformats.org/presentationml/2006/main">
-  <p:cSld>
-    <p:spTree>
-      <p:nvGrpSpPr>
-        <p:cNvPr id="1" name=""/>
-        <p:cNvGrpSpPr/>
-        <p:nvPr/>
-      </p:nvGrpSpPr>
-      <p:grpSpPr>
-        <a:xfrm>
-          <a:off x="0" y="0"/>
-          <a:ext cx="0" cy="0"/>
-          <a:chOff x="0" y="0"/>
-          <a:chExt cx="0" cy="0"/>
-        </a:xfrm>
-      </p:grpSpPr>
       <p:grpSp>
         <p:nvGrpSpPr>
           <p:cNvPr id="45" name="グループ化 44">
             <a:extLst>
               <a:ext uri="{FF2B5EF4-FFF2-40B4-BE49-F238E27FC236}">
-                <a16:creationId xmlns:a16="http://schemas.microsoft.com/office/drawing/2014/main" id="{78006FC7-63AE-4E0B-30C3-925430481E52}"/>
+                <a16:creationId xmlns:a16="http://schemas.microsoft.com/office/drawing/2014/main" id="{6D966593-13C4-A82D-9203-C800B5DC55CB}"/>
               </a:ext>
             </a:extLst>
           </p:cNvPr>
@@ -6444,7 +3783,7 @@
             <p:cNvPr id="4" name="四角形: 角を丸くする 3">
               <a:extLst>
                 <a:ext uri="{FF2B5EF4-FFF2-40B4-BE49-F238E27FC236}">
-                  <a16:creationId xmlns:a16="http://schemas.microsoft.com/office/drawing/2014/main" id="{BBAAF965-8911-B170-FCA1-EDCD8EFBD988}"/>
+                  <a16:creationId xmlns:a16="http://schemas.microsoft.com/office/drawing/2014/main" id="{7E31A682-DD55-49EB-8BD5-6AE614651D3A}"/>
                 </a:ext>
               </a:extLst>
             </p:cNvPr>
@@ -6502,7 +3841,7 @@
             <p:cNvPr id="6" name="図 5">
               <a:extLst>
                 <a:ext uri="{FF2B5EF4-FFF2-40B4-BE49-F238E27FC236}">
-                  <a16:creationId xmlns:a16="http://schemas.microsoft.com/office/drawing/2014/main" id="{36F53BD9-1DB2-4204-B214-4FDE53BD46DB}"/>
+                  <a16:creationId xmlns:a16="http://schemas.microsoft.com/office/drawing/2014/main" id="{104827A8-234F-A1B9-5518-78344CD1BA99}"/>
                 </a:ext>
               </a:extLst>
             </p:cNvPr>
@@ -6539,7 +3878,7 @@
           <p:cNvPr id="46" name="グループ化 45">
             <a:extLst>
               <a:ext uri="{FF2B5EF4-FFF2-40B4-BE49-F238E27FC236}">
-                <a16:creationId xmlns:a16="http://schemas.microsoft.com/office/drawing/2014/main" id="{07C742BF-ABB3-A011-4C24-0A9D18E15B69}"/>
+                <a16:creationId xmlns:a16="http://schemas.microsoft.com/office/drawing/2014/main" id="{A80EB5A0-5A6D-4BD3-EE1C-0CCD92323E07}"/>
               </a:ext>
             </a:extLst>
           </p:cNvPr>
@@ -6559,7 +3898,7 @@
             <p:cNvPr id="27" name="四角形: 角を丸くする 26">
               <a:extLst>
                 <a:ext uri="{FF2B5EF4-FFF2-40B4-BE49-F238E27FC236}">
-                  <a16:creationId xmlns:a16="http://schemas.microsoft.com/office/drawing/2014/main" id="{51396580-295D-2BA4-D8D5-E5AF12F3EC5A}"/>
+                  <a16:creationId xmlns:a16="http://schemas.microsoft.com/office/drawing/2014/main" id="{7B7B67A5-35B8-D52D-870B-8EE0C0DE39BC}"/>
                 </a:ext>
               </a:extLst>
             </p:cNvPr>
@@ -6617,7 +3956,7 @@
             <p:cNvPr id="10" name="図 9">
               <a:extLst>
                 <a:ext uri="{FF2B5EF4-FFF2-40B4-BE49-F238E27FC236}">
-                  <a16:creationId xmlns:a16="http://schemas.microsoft.com/office/drawing/2014/main" id="{CC0451E4-E829-7CB1-0E8F-3446E18D5C35}"/>
+                  <a16:creationId xmlns:a16="http://schemas.microsoft.com/office/drawing/2014/main" id="{972BFA98-2B6E-2E34-7098-A5852F08E322}"/>
                 </a:ext>
               </a:extLst>
             </p:cNvPr>
@@ -6654,7 +3993,7 @@
           <p:cNvPr id="26" name="四角形: 角を丸くする 25">
             <a:extLst>
               <a:ext uri="{FF2B5EF4-FFF2-40B4-BE49-F238E27FC236}">
-                <a16:creationId xmlns:a16="http://schemas.microsoft.com/office/drawing/2014/main" id="{9B7951AD-0279-72F0-00AD-4F8A8E23F088}"/>
+                <a16:creationId xmlns:a16="http://schemas.microsoft.com/office/drawing/2014/main" id="{53BCC381-1FA9-F551-4F3F-AE52F3F969CF}"/>
               </a:ext>
             </a:extLst>
           </p:cNvPr>
@@ -6709,7 +4048,7 @@
           <p:cNvPr id="21" name="グループ化 20">
             <a:extLst>
               <a:ext uri="{FF2B5EF4-FFF2-40B4-BE49-F238E27FC236}">
-                <a16:creationId xmlns:a16="http://schemas.microsoft.com/office/drawing/2014/main" id="{6DC53D3F-BA9F-7C02-BD8E-5CC3A5363E76}"/>
+                <a16:creationId xmlns:a16="http://schemas.microsoft.com/office/drawing/2014/main" id="{A2A39241-7B36-B66E-EB63-139473F54C70}"/>
               </a:ext>
             </a:extLst>
           </p:cNvPr>
@@ -6729,7 +4068,7 @@
             <p:cNvPr id="14" name="図 13">
               <a:extLst>
                 <a:ext uri="{FF2B5EF4-FFF2-40B4-BE49-F238E27FC236}">
-                  <a16:creationId xmlns:a16="http://schemas.microsoft.com/office/drawing/2014/main" id="{50DAD071-50F7-1A45-8DE6-90DA74E48425}"/>
+                  <a16:creationId xmlns:a16="http://schemas.microsoft.com/office/drawing/2014/main" id="{91EABEE8-009A-FDEE-8A05-A31E5558B1E3}"/>
                 </a:ext>
               </a:extLst>
             </p:cNvPr>
@@ -6765,7 +4104,7 @@
             <p:cNvPr id="12" name="図 11">
               <a:extLst>
                 <a:ext uri="{FF2B5EF4-FFF2-40B4-BE49-F238E27FC236}">
-                  <a16:creationId xmlns:a16="http://schemas.microsoft.com/office/drawing/2014/main" id="{6ABEF186-A6DD-351D-F798-93614A54CF4D}"/>
+                  <a16:creationId xmlns:a16="http://schemas.microsoft.com/office/drawing/2014/main" id="{71EA3974-AE2C-B692-54DD-3BB32B61F8F3}"/>
                 </a:ext>
               </a:extLst>
             </p:cNvPr>
@@ -6802,7 +4141,7 @@
           <p:cNvPr id="44" name="グループ化 43">
             <a:extLst>
               <a:ext uri="{FF2B5EF4-FFF2-40B4-BE49-F238E27FC236}">
-                <a16:creationId xmlns:a16="http://schemas.microsoft.com/office/drawing/2014/main" id="{52691EB4-5824-5D80-05ED-DCE6A25B556D}"/>
+                <a16:creationId xmlns:a16="http://schemas.microsoft.com/office/drawing/2014/main" id="{241BFA92-7F42-C342-B13A-879CBF336C1C}"/>
               </a:ext>
             </a:extLst>
           </p:cNvPr>
@@ -6822,7 +4161,7 @@
             <p:cNvPr id="22" name="四角形: 角を丸くする 21">
               <a:extLst>
                 <a:ext uri="{FF2B5EF4-FFF2-40B4-BE49-F238E27FC236}">
-                  <a16:creationId xmlns:a16="http://schemas.microsoft.com/office/drawing/2014/main" id="{00044E3F-530F-43B8-AB81-54AD1DD5A361}"/>
+                  <a16:creationId xmlns:a16="http://schemas.microsoft.com/office/drawing/2014/main" id="{6960821B-C01C-1959-D15B-082115FAEC61}"/>
                 </a:ext>
               </a:extLst>
             </p:cNvPr>
@@ -6880,7 +4219,7 @@
             <p:cNvPr id="41" name="グループ化 40">
               <a:extLst>
                 <a:ext uri="{FF2B5EF4-FFF2-40B4-BE49-F238E27FC236}">
-                  <a16:creationId xmlns:a16="http://schemas.microsoft.com/office/drawing/2014/main" id="{08119CF4-3B8F-CF69-0BBD-AEB2B4D0D883}"/>
+                  <a16:creationId xmlns:a16="http://schemas.microsoft.com/office/drawing/2014/main" id="{352AFF58-CBCF-22BD-C899-6A6CA6A9A62C}"/>
                 </a:ext>
               </a:extLst>
             </p:cNvPr>
@@ -6900,7 +4239,7 @@
               <p:cNvPr id="16" name="フローチャート: 手作業 15">
                 <a:extLst>
                   <a:ext uri="{FF2B5EF4-FFF2-40B4-BE49-F238E27FC236}">
-                    <a16:creationId xmlns:a16="http://schemas.microsoft.com/office/drawing/2014/main" id="{FA7EA4CA-1DD6-2E31-C537-FD44928E1EF6}"/>
+                    <a16:creationId xmlns:a16="http://schemas.microsoft.com/office/drawing/2014/main" id="{EB9ADF27-FAA7-E86D-05B2-27E1D95B50B2}"/>
                   </a:ext>
                 </a:extLst>
               </p:cNvPr>
@@ -6959,7 +4298,7 @@
               <p:cNvPr id="15" name="四角形: 角を丸くする 14">
                 <a:extLst>
                   <a:ext uri="{FF2B5EF4-FFF2-40B4-BE49-F238E27FC236}">
-                    <a16:creationId xmlns:a16="http://schemas.microsoft.com/office/drawing/2014/main" id="{1925BFAD-BFBC-47A4-614B-1CBAA4941E54}"/>
+                    <a16:creationId xmlns:a16="http://schemas.microsoft.com/office/drawing/2014/main" id="{1EDE99A0-C775-8EAD-6AB9-3352CFC46616}"/>
                   </a:ext>
                 </a:extLst>
               </p:cNvPr>
@@ -7016,7 +4355,7 @@
           <p:cNvPr id="51" name="グループ化 50">
             <a:extLst>
               <a:ext uri="{FF2B5EF4-FFF2-40B4-BE49-F238E27FC236}">
-                <a16:creationId xmlns:a16="http://schemas.microsoft.com/office/drawing/2014/main" id="{3E5DB29E-5B60-1CA8-5B0E-F59E5A07DCFA}"/>
+                <a16:creationId xmlns:a16="http://schemas.microsoft.com/office/drawing/2014/main" id="{8D73FD9A-34C2-727C-61D9-D5D268A72D37}"/>
               </a:ext>
             </a:extLst>
           </p:cNvPr>
@@ -7036,7 +4375,7 @@
             <p:cNvPr id="49" name="直線矢印コネクタ 48">
               <a:extLst>
                 <a:ext uri="{FF2B5EF4-FFF2-40B4-BE49-F238E27FC236}">
-                  <a16:creationId xmlns:a16="http://schemas.microsoft.com/office/drawing/2014/main" id="{C20FC22A-36FF-A5F8-622F-AD2C55EBCC3C}"/>
+                  <a16:creationId xmlns:a16="http://schemas.microsoft.com/office/drawing/2014/main" id="{70D2EB4C-E690-5ACA-D33B-556CC9AEBDE3}"/>
                 </a:ext>
               </a:extLst>
             </p:cNvPr>
@@ -7077,7 +4416,7 @@
             <p:cNvPr id="50" name="テキスト ボックス 49">
               <a:extLst>
                 <a:ext uri="{FF2B5EF4-FFF2-40B4-BE49-F238E27FC236}">
-                  <a16:creationId xmlns:a16="http://schemas.microsoft.com/office/drawing/2014/main" id="{BA76AC4F-B0C6-E05A-BC26-31344C4D0A9E}"/>
+                  <a16:creationId xmlns:a16="http://schemas.microsoft.com/office/drawing/2014/main" id="{C6FFCE5C-1AE9-A94E-F2AA-33808A0383BB}"/>
                 </a:ext>
               </a:extLst>
             </p:cNvPr>
@@ -7113,7 +4452,7 @@
           <p:cNvPr id="52" name="グループ化 51">
             <a:extLst>
               <a:ext uri="{FF2B5EF4-FFF2-40B4-BE49-F238E27FC236}">
-                <a16:creationId xmlns:a16="http://schemas.microsoft.com/office/drawing/2014/main" id="{C8AFC08A-EE17-F6F2-7506-6020B491FF4A}"/>
+                <a16:creationId xmlns:a16="http://schemas.microsoft.com/office/drawing/2014/main" id="{AE394B0D-F5C1-516A-C20E-ABE6D86A51CE}"/>
               </a:ext>
             </a:extLst>
           </p:cNvPr>
@@ -7133,7 +4472,7 @@
             <p:cNvPr id="53" name="直線矢印コネクタ 52">
               <a:extLst>
                 <a:ext uri="{FF2B5EF4-FFF2-40B4-BE49-F238E27FC236}">
-                  <a16:creationId xmlns:a16="http://schemas.microsoft.com/office/drawing/2014/main" id="{2881E667-FB3C-4CF0-3F4E-DDBDAE06C447}"/>
+                  <a16:creationId xmlns:a16="http://schemas.microsoft.com/office/drawing/2014/main" id="{BFFDAC02-07A8-691F-C201-7844C2B708A3}"/>
                 </a:ext>
               </a:extLst>
             </p:cNvPr>
@@ -7174,7 +4513,7 @@
             <p:cNvPr id="54" name="テキスト ボックス 53">
               <a:extLst>
                 <a:ext uri="{FF2B5EF4-FFF2-40B4-BE49-F238E27FC236}">
-                  <a16:creationId xmlns:a16="http://schemas.microsoft.com/office/drawing/2014/main" id="{A6015185-5341-0610-ADCF-1AE748113F22}"/>
+                  <a16:creationId xmlns:a16="http://schemas.microsoft.com/office/drawing/2014/main" id="{DA98C0E2-C58C-D1C6-2A11-4394D86E4785}"/>
                 </a:ext>
               </a:extLst>
             </p:cNvPr>
@@ -7210,7 +4549,7 @@
           <p:cNvPr id="55" name="グループ化 54">
             <a:extLst>
               <a:ext uri="{FF2B5EF4-FFF2-40B4-BE49-F238E27FC236}">
-                <a16:creationId xmlns:a16="http://schemas.microsoft.com/office/drawing/2014/main" id="{1D96B618-9284-54C0-8233-89E36E1036FB}"/>
+                <a16:creationId xmlns:a16="http://schemas.microsoft.com/office/drawing/2014/main" id="{B3BCAFB3-C544-52B3-E153-00A4F95BA7F5}"/>
               </a:ext>
             </a:extLst>
           </p:cNvPr>
@@ -7230,7 +4569,7 @@
             <p:cNvPr id="56" name="直線矢印コネクタ 55">
               <a:extLst>
                 <a:ext uri="{FF2B5EF4-FFF2-40B4-BE49-F238E27FC236}">
-                  <a16:creationId xmlns:a16="http://schemas.microsoft.com/office/drawing/2014/main" id="{1BDB9212-1782-CE7D-EA81-FDF426C4FFAE}"/>
+                  <a16:creationId xmlns:a16="http://schemas.microsoft.com/office/drawing/2014/main" id="{DE5CA77C-F7A0-28BF-BDA8-979E3F3DA965}"/>
                 </a:ext>
               </a:extLst>
             </p:cNvPr>
@@ -7271,7 +4610,7 @@
             <p:cNvPr id="57" name="テキスト ボックス 56">
               <a:extLst>
                 <a:ext uri="{FF2B5EF4-FFF2-40B4-BE49-F238E27FC236}">
-                  <a16:creationId xmlns:a16="http://schemas.microsoft.com/office/drawing/2014/main" id="{CF8B5023-4FCB-0B04-EF7B-2B8914765534}"/>
+                  <a16:creationId xmlns:a16="http://schemas.microsoft.com/office/drawing/2014/main" id="{ACB01365-492C-16DA-810D-57D1ECAF1416}"/>
                 </a:ext>
               </a:extLst>
             </p:cNvPr>
@@ -7307,7 +4646,7 @@
           <p:cNvPr id="61" name="図 60">
             <a:extLst>
               <a:ext uri="{FF2B5EF4-FFF2-40B4-BE49-F238E27FC236}">
-                <a16:creationId xmlns:a16="http://schemas.microsoft.com/office/drawing/2014/main" id="{3F9F924F-403A-E011-B193-671796FD8FC6}"/>
+                <a16:creationId xmlns:a16="http://schemas.microsoft.com/office/drawing/2014/main" id="{4C20C321-A104-452C-14F6-66A6B90FFD46}"/>
               </a:ext>
             </a:extLst>
           </p:cNvPr>
@@ -7342,7 +4681,7 @@
     </p:spTree>
     <p:extLst>
       <p:ext uri="{BB962C8B-B14F-4D97-AF65-F5344CB8AC3E}">
-        <p14:creationId xmlns:p14="http://schemas.microsoft.com/office/powerpoint/2010/main" val="1451288093"/>
+        <p14:creationId xmlns:p14="http://schemas.microsoft.com/office/powerpoint/2010/main" val="1761840300"/>
       </p:ext>
     </p:extLst>
   </p:cSld>
@@ -7352,7 +4691,7 @@
 </p:sld>
 </file>
 
-<file path=ppt/slides/slide3.xml><?xml version="1.0" encoding="utf-8"?>
+<file path=ppt/slides/slide12.xml><?xml version="1.0" encoding="utf-8"?>
 <p:sld xmlns:a="http://schemas.openxmlformats.org/drawingml/2006/main" xmlns:r="http://schemas.openxmlformats.org/officeDocument/2006/relationships" xmlns:p="http://schemas.openxmlformats.org/presentationml/2006/main">
   <p:cSld>
     <p:spTree>
@@ -7766,7 +5105,7 @@
 </p:sld>
 </file>
 
-<file path=ppt/slides/slide4.xml><?xml version="1.0" encoding="utf-8"?>
+<file path=ppt/slides/slide13.xml><?xml version="1.0" encoding="utf-8"?>
 <p:sld xmlns:a="http://schemas.openxmlformats.org/drawingml/2006/main" xmlns:r="http://schemas.openxmlformats.org/officeDocument/2006/relationships" xmlns:p="http://schemas.openxmlformats.org/presentationml/2006/main">
   <p:cSld>
     <p:spTree>
@@ -8646,7 +5985,7 @@
 </p:sld>
 </file>
 
-<file path=ppt/slides/slide5.xml><?xml version="1.0" encoding="utf-8"?>
+<file path=ppt/slides/slide14.xml><?xml version="1.0" encoding="utf-8"?>
 <p:sld xmlns:a="http://schemas.openxmlformats.org/drawingml/2006/main" xmlns:r="http://schemas.openxmlformats.org/officeDocument/2006/relationships" xmlns:p="http://schemas.openxmlformats.org/presentationml/2006/main">
   <p:cSld>
     <p:spTree>
@@ -8875,7 +6214,7 @@
 </p:sld>
 </file>
 
-<file path=ppt/slides/slide6.xml><?xml version="1.0" encoding="utf-8"?>
+<file path=ppt/slides/slide15.xml><?xml version="1.0" encoding="utf-8"?>
 <p:sld xmlns:a="http://schemas.openxmlformats.org/drawingml/2006/main" xmlns:r="http://schemas.openxmlformats.org/officeDocument/2006/relationships" xmlns:p="http://schemas.openxmlformats.org/presentationml/2006/main">
   <p:cSld>
     <p:spTree>
@@ -9584,7 +6923,7 @@
 </p:sld>
 </file>
 
-<file path=ppt/slides/slide7.xml><?xml version="1.0" encoding="utf-8"?>
+<file path=ppt/slides/slide16.xml><?xml version="1.0" encoding="utf-8"?>
 <p:sld xmlns:a="http://schemas.openxmlformats.org/drawingml/2006/main" xmlns:r="http://schemas.openxmlformats.org/officeDocument/2006/relationships" xmlns:p="http://schemas.openxmlformats.org/presentationml/2006/main">
   <p:cSld>
     <p:spTree>
@@ -10492,7 +7831,7 @@
 </p:sld>
 </file>
 
-<file path=ppt/slides/slide8.xml><?xml version="1.0" encoding="utf-8"?>
+<file path=ppt/slides/slide17.xml><?xml version="1.0" encoding="utf-8"?>
 <p:sld xmlns:a="http://schemas.openxmlformats.org/drawingml/2006/main" xmlns:r="http://schemas.openxmlformats.org/officeDocument/2006/relationships" xmlns:p="http://schemas.openxmlformats.org/presentationml/2006/main">
   <p:cSld>
     <p:spTree>
@@ -10722,7 +8061,7 @@
 </p:sld>
 </file>
 
-<file path=ppt/slides/slide9.xml><?xml version="1.0" encoding="utf-8"?>
+<file path=ppt/slides/slide18.xml><?xml version="1.0" encoding="utf-8"?>
 <p:sld xmlns:a="http://schemas.openxmlformats.org/drawingml/2006/main" xmlns:r="http://schemas.openxmlformats.org/officeDocument/2006/relationships" xmlns:p="http://schemas.openxmlformats.org/presentationml/2006/main">
   <p:cSld>
     <p:spTree>
@@ -11348,6 +8687,5538 @@
     <p:extLst>
       <p:ext uri="{BB962C8B-B14F-4D97-AF65-F5344CB8AC3E}">
         <p14:creationId xmlns:p14="http://schemas.microsoft.com/office/powerpoint/2010/main" val="2719289260"/>
+      </p:ext>
+    </p:extLst>
+  </p:cSld>
+  <p:clrMapOvr>
+    <a:masterClrMapping/>
+  </p:clrMapOvr>
+</p:sld>
+</file>
+
+<file path=ppt/slides/slide19.xml><?xml version="1.0" encoding="utf-8"?>
+<p:sld xmlns:a="http://schemas.openxmlformats.org/drawingml/2006/main" xmlns:r="http://schemas.openxmlformats.org/officeDocument/2006/relationships" xmlns:p="http://schemas.openxmlformats.org/presentationml/2006/main">
+  <p:cSld>
+    <p:spTree>
+      <p:nvGrpSpPr>
+        <p:cNvPr id="1" name="">
+          <a:extLst>
+            <a:ext uri="{FF2B5EF4-FFF2-40B4-BE49-F238E27FC236}">
+              <a16:creationId xmlns:a16="http://schemas.microsoft.com/office/drawing/2014/main" id="{D1FF64E0-DCBA-A10C-3DEF-D712CE5A9E78}"/>
+            </a:ext>
+          </a:extLst>
+        </p:cNvPr>
+        <p:cNvGrpSpPr/>
+        <p:nvPr/>
+      </p:nvGrpSpPr>
+      <p:grpSpPr>
+        <a:xfrm>
+          <a:off x="0" y="0"/>
+          <a:ext cx="0" cy="0"/>
+          <a:chOff x="0" y="0"/>
+          <a:chExt cx="0" cy="0"/>
+        </a:xfrm>
+      </p:grpSpPr>
+      <p:sp>
+        <p:nvSpPr>
+          <p:cNvPr id="18" name="四角形: 角を丸くする 17">
+            <a:extLst>
+              <a:ext uri="{FF2B5EF4-FFF2-40B4-BE49-F238E27FC236}">
+                <a16:creationId xmlns:a16="http://schemas.microsoft.com/office/drawing/2014/main" id="{A460C1F1-ED3C-9715-C975-41E255747B0A}"/>
+              </a:ext>
+            </a:extLst>
+          </p:cNvPr>
+          <p:cNvSpPr/>
+          <p:nvPr/>
+        </p:nvSpPr>
+        <p:spPr>
+          <a:xfrm>
+            <a:off x="2849212" y="189000"/>
+            <a:ext cx="7200000" cy="3240000"/>
+          </a:xfrm>
+          <a:prstGeom prst="roundRect">
+            <a:avLst/>
+          </a:prstGeom>
+          <a:solidFill>
+            <a:schemeClr val="accent1">
+              <a:lumMod val="20000"/>
+              <a:lumOff val="80000"/>
+            </a:schemeClr>
+          </a:solidFill>
+          <a:ln w="38100">
+            <a:solidFill>
+              <a:schemeClr val="tx1"/>
+            </a:solidFill>
+          </a:ln>
+        </p:spPr>
+        <p:style>
+          <a:lnRef idx="2">
+            <a:schemeClr val="accent6"/>
+          </a:lnRef>
+          <a:fillRef idx="1">
+            <a:schemeClr val="lt1"/>
+          </a:fillRef>
+          <a:effectRef idx="0">
+            <a:schemeClr val="accent6"/>
+          </a:effectRef>
+          <a:fontRef idx="minor">
+            <a:schemeClr val="dk1"/>
+          </a:fontRef>
+        </p:style>
+        <p:txBody>
+          <a:bodyPr rtlCol="0" anchor="t"/>
+          <a:lstStyle/>
+          <a:p>
+            <a:pPr algn="ctr"/>
+            <a:r>
+              <a:rPr lang="ja-JP" altLang="en-US" b="1" dirty="0"/>
+              <a:t>ローカルリポジトリ</a:t>
+            </a:r>
+          </a:p>
+        </p:txBody>
+      </p:sp>
+      <p:sp>
+        <p:nvSpPr>
+          <p:cNvPr id="19" name="吹き出し: 四角形 18">
+            <a:extLst>
+              <a:ext uri="{FF2B5EF4-FFF2-40B4-BE49-F238E27FC236}">
+                <a16:creationId xmlns:a16="http://schemas.microsoft.com/office/drawing/2014/main" id="{E4CCD4BE-B4B4-92DB-0984-3D2844912B6B}"/>
+              </a:ext>
+            </a:extLst>
+          </p:cNvPr>
+          <p:cNvSpPr/>
+          <p:nvPr/>
+        </p:nvSpPr>
+        <p:spPr>
+          <a:xfrm>
+            <a:off x="5364910" y="838200"/>
+            <a:ext cx="3887947" cy="1691639"/>
+          </a:xfrm>
+          <a:prstGeom prst="wedgeRectCallout">
+            <a:avLst>
+              <a:gd name="adj1" fmla="val -52807"/>
+              <a:gd name="adj2" fmla="val 66171"/>
+            </a:avLst>
+          </a:prstGeom>
+          <a:ln w="28575">
+            <a:solidFill>
+              <a:schemeClr val="tx1"/>
+            </a:solidFill>
+          </a:ln>
+        </p:spPr>
+        <p:style>
+          <a:lnRef idx="2">
+            <a:schemeClr val="accent6"/>
+          </a:lnRef>
+          <a:fillRef idx="1">
+            <a:schemeClr val="lt1"/>
+          </a:fillRef>
+          <a:effectRef idx="0">
+            <a:schemeClr val="accent6"/>
+          </a:effectRef>
+          <a:fontRef idx="minor">
+            <a:schemeClr val="dk1"/>
+          </a:fontRef>
+        </p:style>
+        <p:txBody>
+          <a:bodyPr rtlCol="0" anchor="ctr"/>
+          <a:lstStyle/>
+          <a:p>
+            <a:pPr algn="ctr"/>
+            <a:endParaRPr kumimoji="1" lang="ja-JP" altLang="en-US" dirty="0"/>
+          </a:p>
+        </p:txBody>
+      </p:sp>
+      <p:pic>
+        <p:nvPicPr>
+          <p:cNvPr id="20" name="図 19">
+            <a:extLst>
+              <a:ext uri="{FF2B5EF4-FFF2-40B4-BE49-F238E27FC236}">
+                <a16:creationId xmlns:a16="http://schemas.microsoft.com/office/drawing/2014/main" id="{B129C5B2-2266-9C0B-97FD-317E4C4F6566}"/>
+              </a:ext>
+            </a:extLst>
+          </p:cNvPr>
+          <p:cNvPicPr>
+            <a:picLocks noChangeAspect="1"/>
+          </p:cNvPicPr>
+          <p:nvPr/>
+        </p:nvPicPr>
+        <p:blipFill>
+          <a:blip r:embed="rId2">
+            <a:extLst>
+              <a:ext uri="{28A0092B-C50C-407E-A947-70E740481C1C}">
+                <a14:useLocalDpi xmlns:a14="http://schemas.microsoft.com/office/drawing/2010/main" val="0"/>
+              </a:ext>
+            </a:extLst>
+          </a:blip>
+          <a:stretch>
+            <a:fillRect/>
+          </a:stretch>
+        </p:blipFill>
+        <p:spPr>
+          <a:xfrm>
+            <a:off x="4331855" y="2212907"/>
+            <a:ext cx="1008000" cy="1008000"/>
+          </a:xfrm>
+          <a:prstGeom prst="rect">
+            <a:avLst/>
+          </a:prstGeom>
+        </p:spPr>
+      </p:pic>
+      <p:sp>
+        <p:nvSpPr>
+          <p:cNvPr id="4" name="四角形: 角を丸くする 3">
+            <a:extLst>
+              <a:ext uri="{FF2B5EF4-FFF2-40B4-BE49-F238E27FC236}">
+                <a16:creationId xmlns:a16="http://schemas.microsoft.com/office/drawing/2014/main" id="{BB7EF791-752D-C789-65B2-5014F5DE91D0}"/>
+              </a:ext>
+            </a:extLst>
+          </p:cNvPr>
+          <p:cNvSpPr/>
+          <p:nvPr/>
+        </p:nvSpPr>
+        <p:spPr>
+          <a:xfrm>
+            <a:off x="6287803" y="1079351"/>
+            <a:ext cx="2042160" cy="563880"/>
+          </a:xfrm>
+          <a:prstGeom prst="roundRect">
+            <a:avLst/>
+          </a:prstGeom>
+          <a:ln w="38100"/>
+        </p:spPr>
+        <p:style>
+          <a:lnRef idx="2">
+            <a:schemeClr val="accent6"/>
+          </a:lnRef>
+          <a:fillRef idx="1">
+            <a:schemeClr val="lt1"/>
+          </a:fillRef>
+          <a:effectRef idx="0">
+            <a:schemeClr val="accent6"/>
+          </a:effectRef>
+          <a:fontRef idx="minor">
+            <a:schemeClr val="dk1"/>
+          </a:fontRef>
+        </p:style>
+        <p:txBody>
+          <a:bodyPr rtlCol="0" anchor="ctr"/>
+          <a:lstStyle/>
+          <a:p>
+            <a:pPr algn="ctr"/>
+            <a:r>
+              <a:rPr kumimoji="1" lang="ja-JP" altLang="en-US" dirty="0"/>
+              <a:t>変更履歴</a:t>
+            </a:r>
+          </a:p>
+        </p:txBody>
+      </p:sp>
+      <p:sp>
+        <p:nvSpPr>
+          <p:cNvPr id="2" name="四角形: 角を丸くする 1">
+            <a:extLst>
+              <a:ext uri="{FF2B5EF4-FFF2-40B4-BE49-F238E27FC236}">
+                <a16:creationId xmlns:a16="http://schemas.microsoft.com/office/drawing/2014/main" id="{77F57688-0D5E-B7B5-BE64-5214C448FB6B}"/>
+              </a:ext>
+            </a:extLst>
+          </p:cNvPr>
+          <p:cNvSpPr/>
+          <p:nvPr/>
+        </p:nvSpPr>
+        <p:spPr>
+          <a:xfrm>
+            <a:off x="6287803" y="1774271"/>
+            <a:ext cx="2042160" cy="563880"/>
+          </a:xfrm>
+          <a:prstGeom prst="roundRect">
+            <a:avLst/>
+          </a:prstGeom>
+          <a:ln w="38100">
+            <a:solidFill>
+              <a:srgbClr val="FFC000"/>
+            </a:solidFill>
+          </a:ln>
+        </p:spPr>
+        <p:style>
+          <a:lnRef idx="2">
+            <a:schemeClr val="accent6"/>
+          </a:lnRef>
+          <a:fillRef idx="1">
+            <a:schemeClr val="lt1"/>
+          </a:fillRef>
+          <a:effectRef idx="0">
+            <a:schemeClr val="accent6"/>
+          </a:effectRef>
+          <a:fontRef idx="minor">
+            <a:schemeClr val="dk1"/>
+          </a:fontRef>
+        </p:style>
+        <p:txBody>
+          <a:bodyPr rtlCol="0" anchor="ctr"/>
+          <a:lstStyle/>
+          <a:p>
+            <a:pPr algn="ctr"/>
+            <a:r>
+              <a:rPr kumimoji="1" lang="ja-JP" altLang="en-US" dirty="0"/>
+              <a:t>変更履歴</a:t>
+            </a:r>
+          </a:p>
+        </p:txBody>
+      </p:sp>
+    </p:spTree>
+    <p:extLst>
+      <p:ext uri="{BB962C8B-B14F-4D97-AF65-F5344CB8AC3E}">
+        <p14:creationId xmlns:p14="http://schemas.microsoft.com/office/powerpoint/2010/main" val="1999392000"/>
+      </p:ext>
+    </p:extLst>
+  </p:cSld>
+  <p:clrMapOvr>
+    <a:masterClrMapping/>
+  </p:clrMapOvr>
+</p:sld>
+</file>
+
+<file path=ppt/slides/slide2.xml><?xml version="1.0" encoding="utf-8"?>
+<p:sld xmlns:a="http://schemas.openxmlformats.org/drawingml/2006/main" xmlns:r="http://schemas.openxmlformats.org/officeDocument/2006/relationships" xmlns:p="http://schemas.openxmlformats.org/presentationml/2006/main">
+  <p:cSld>
+    <p:spTree>
+      <p:nvGrpSpPr>
+        <p:cNvPr id="1" name="">
+          <a:extLst>
+            <a:ext uri="{FF2B5EF4-FFF2-40B4-BE49-F238E27FC236}">
+              <a16:creationId xmlns:a16="http://schemas.microsoft.com/office/drawing/2014/main" id="{483B3AC8-7F53-B3EC-8C78-F629F06393A5}"/>
+            </a:ext>
+          </a:extLst>
+        </p:cNvPr>
+        <p:cNvGrpSpPr/>
+        <p:nvPr/>
+      </p:nvGrpSpPr>
+      <p:grpSpPr>
+        <a:xfrm>
+          <a:off x="0" y="0"/>
+          <a:ext cx="0" cy="0"/>
+          <a:chOff x="0" y="0"/>
+          <a:chExt cx="0" cy="0"/>
+        </a:xfrm>
+      </p:grpSpPr>
+      <p:pic>
+        <p:nvPicPr>
+          <p:cNvPr id="5" name="図 4">
+            <a:extLst>
+              <a:ext uri="{FF2B5EF4-FFF2-40B4-BE49-F238E27FC236}">
+                <a16:creationId xmlns:a16="http://schemas.microsoft.com/office/drawing/2014/main" id="{BC477E55-7668-9E39-6FCF-BD2A5593F13D}"/>
+              </a:ext>
+            </a:extLst>
+          </p:cNvPr>
+          <p:cNvPicPr>
+            <a:picLocks noChangeAspect="1"/>
+          </p:cNvPicPr>
+          <p:nvPr/>
+        </p:nvPicPr>
+        <p:blipFill>
+          <a:blip r:embed="rId2">
+            <a:biLevel thresh="25000"/>
+            <a:extLst>
+              <a:ext uri="{28A0092B-C50C-407E-A947-70E740481C1C}">
+                <a14:useLocalDpi xmlns:a14="http://schemas.microsoft.com/office/drawing/2010/main" val="0"/>
+              </a:ext>
+            </a:extLst>
+          </a:blip>
+          <a:stretch>
+            <a:fillRect/>
+          </a:stretch>
+        </p:blipFill>
+        <p:spPr>
+          <a:xfrm>
+            <a:off x="2296583" y="2000888"/>
+            <a:ext cx="756449" cy="756449"/>
+          </a:xfrm>
+          <a:prstGeom prst="rect">
+            <a:avLst/>
+          </a:prstGeom>
+        </p:spPr>
+      </p:pic>
+      <p:pic>
+        <p:nvPicPr>
+          <p:cNvPr id="7" name="図 6">
+            <a:extLst>
+              <a:ext uri="{FF2B5EF4-FFF2-40B4-BE49-F238E27FC236}">
+                <a16:creationId xmlns:a16="http://schemas.microsoft.com/office/drawing/2014/main" id="{59471A06-E386-21B5-E957-807AA90C7A45}"/>
+              </a:ext>
+            </a:extLst>
+          </p:cNvPr>
+          <p:cNvPicPr>
+            <a:picLocks noChangeAspect="1"/>
+          </p:cNvPicPr>
+          <p:nvPr/>
+        </p:nvPicPr>
+        <p:blipFill>
+          <a:blip r:embed="rId3">
+            <a:extLst>
+              <a:ext uri="{28A0092B-C50C-407E-A947-70E740481C1C}">
+                <a14:useLocalDpi xmlns:a14="http://schemas.microsoft.com/office/drawing/2010/main" val="0"/>
+              </a:ext>
+            </a:extLst>
+          </a:blip>
+          <a:stretch>
+            <a:fillRect/>
+          </a:stretch>
+        </p:blipFill>
+        <p:spPr>
+          <a:xfrm>
+            <a:off x="2459503" y="3232852"/>
+            <a:ext cx="2359792" cy="1769844"/>
+          </a:xfrm>
+          <a:prstGeom prst="rect">
+            <a:avLst/>
+          </a:prstGeom>
+        </p:spPr>
+      </p:pic>
+      <p:pic>
+        <p:nvPicPr>
+          <p:cNvPr id="8" name="図 7">
+            <a:extLst>
+              <a:ext uri="{FF2B5EF4-FFF2-40B4-BE49-F238E27FC236}">
+                <a16:creationId xmlns:a16="http://schemas.microsoft.com/office/drawing/2014/main" id="{E9E1F957-9CE1-927D-A7F6-C64CDE85C5E9}"/>
+              </a:ext>
+            </a:extLst>
+          </p:cNvPr>
+          <p:cNvPicPr>
+            <a:picLocks noChangeAspect="1"/>
+          </p:cNvPicPr>
+          <p:nvPr/>
+        </p:nvPicPr>
+        <p:blipFill>
+          <a:blip r:embed="rId2">
+            <a:biLevel thresh="25000"/>
+            <a:extLst>
+              <a:ext uri="{28A0092B-C50C-407E-A947-70E740481C1C}">
+                <a14:useLocalDpi xmlns:a14="http://schemas.microsoft.com/office/drawing/2010/main" val="0"/>
+              </a:ext>
+            </a:extLst>
+          </a:blip>
+          <a:stretch>
+            <a:fillRect/>
+          </a:stretch>
+        </p:blipFill>
+        <p:spPr>
+          <a:xfrm>
+            <a:off x="3124546" y="2353754"/>
+            <a:ext cx="756449" cy="756449"/>
+          </a:xfrm>
+          <a:prstGeom prst="rect">
+            <a:avLst/>
+          </a:prstGeom>
+        </p:spPr>
+      </p:pic>
+      <p:pic>
+        <p:nvPicPr>
+          <p:cNvPr id="10" name="図 9">
+            <a:extLst>
+              <a:ext uri="{FF2B5EF4-FFF2-40B4-BE49-F238E27FC236}">
+                <a16:creationId xmlns:a16="http://schemas.microsoft.com/office/drawing/2014/main" id="{FFBB55A2-61A4-B7EE-4500-09AF8CB74244}"/>
+              </a:ext>
+            </a:extLst>
+          </p:cNvPr>
+          <p:cNvPicPr>
+            <a:picLocks noChangeAspect="1"/>
+          </p:cNvPicPr>
+          <p:nvPr/>
+        </p:nvPicPr>
+        <p:blipFill>
+          <a:blip r:embed="rId2">
+            <a:biLevel thresh="25000"/>
+            <a:extLst>
+              <a:ext uri="{28A0092B-C50C-407E-A947-70E740481C1C}">
+                <a14:useLocalDpi xmlns:a14="http://schemas.microsoft.com/office/drawing/2010/main" val="0"/>
+              </a:ext>
+            </a:extLst>
+          </a:blip>
+          <a:stretch>
+            <a:fillRect/>
+          </a:stretch>
+        </p:blipFill>
+        <p:spPr>
+          <a:xfrm>
+            <a:off x="4151067" y="2520622"/>
+            <a:ext cx="756449" cy="756449"/>
+          </a:xfrm>
+          <a:prstGeom prst="rect">
+            <a:avLst/>
+          </a:prstGeom>
+        </p:spPr>
+      </p:pic>
+      <p:pic>
+        <p:nvPicPr>
+          <p:cNvPr id="11" name="図 10">
+            <a:extLst>
+              <a:ext uri="{FF2B5EF4-FFF2-40B4-BE49-F238E27FC236}">
+                <a16:creationId xmlns:a16="http://schemas.microsoft.com/office/drawing/2014/main" id="{DCB71749-4AE8-E6D8-798A-65D814D56419}"/>
+              </a:ext>
+            </a:extLst>
+          </p:cNvPr>
+          <p:cNvPicPr>
+            <a:picLocks noChangeAspect="1"/>
+          </p:cNvPicPr>
+          <p:nvPr/>
+        </p:nvPicPr>
+        <p:blipFill>
+          <a:blip r:embed="rId2">
+            <a:biLevel thresh="25000"/>
+            <a:extLst>
+              <a:ext uri="{28A0092B-C50C-407E-A947-70E740481C1C}">
+                <a14:useLocalDpi xmlns:a14="http://schemas.microsoft.com/office/drawing/2010/main" val="0"/>
+              </a:ext>
+            </a:extLst>
+          </a:blip>
+          <a:stretch>
+            <a:fillRect/>
+          </a:stretch>
+        </p:blipFill>
+        <p:spPr>
+          <a:xfrm>
+            <a:off x="3941474" y="1577651"/>
+            <a:ext cx="756449" cy="756449"/>
+          </a:xfrm>
+          <a:prstGeom prst="rect">
+            <a:avLst/>
+          </a:prstGeom>
+        </p:spPr>
+      </p:pic>
+      <p:sp>
+        <p:nvSpPr>
+          <p:cNvPr id="16" name="テキスト ボックス 15">
+            <a:extLst>
+              <a:ext uri="{FF2B5EF4-FFF2-40B4-BE49-F238E27FC236}">
+                <a16:creationId xmlns:a16="http://schemas.microsoft.com/office/drawing/2014/main" id="{0722C355-2014-0625-7116-F25FE279BF0F}"/>
+              </a:ext>
+            </a:extLst>
+          </p:cNvPr>
+          <p:cNvSpPr txBox="1"/>
+          <p:nvPr/>
+        </p:nvSpPr>
+        <p:spPr>
+          <a:xfrm>
+            <a:off x="2233020" y="2593656"/>
+            <a:ext cx="883575" cy="276999"/>
+          </a:xfrm>
+          <a:prstGeom prst="rect">
+            <a:avLst/>
+          </a:prstGeom>
+          <a:noFill/>
+        </p:spPr>
+        <p:txBody>
+          <a:bodyPr wrap="none" rtlCol="0">
+            <a:spAutoFit/>
+          </a:bodyPr>
+          <a:lstStyle/>
+          <a:p>
+            <a:r>
+              <a:rPr lang="ja-JP" altLang="ja-JP" sz="1200" dirty="0"/>
+              <a:t>仕様書</a:t>
+            </a:r>
+            <a:r>
+              <a:rPr lang="en-US" altLang="ja-JP" sz="1200" dirty="0"/>
+              <a:t>_v1</a:t>
+            </a:r>
+            <a:endParaRPr kumimoji="1" lang="ja-JP" altLang="en-US" sz="1200" dirty="0"/>
+          </a:p>
+        </p:txBody>
+      </p:sp>
+      <p:sp>
+        <p:nvSpPr>
+          <p:cNvPr id="17" name="テキスト ボックス 16">
+            <a:extLst>
+              <a:ext uri="{FF2B5EF4-FFF2-40B4-BE49-F238E27FC236}">
+                <a16:creationId xmlns:a16="http://schemas.microsoft.com/office/drawing/2014/main" id="{06B78697-051F-B7C3-0BFA-6A5584FF6498}"/>
+              </a:ext>
+            </a:extLst>
+          </p:cNvPr>
+          <p:cNvSpPr txBox="1"/>
+          <p:nvPr/>
+        </p:nvSpPr>
+        <p:spPr>
+          <a:xfrm>
+            <a:off x="3060983" y="2937191"/>
+            <a:ext cx="883575" cy="276999"/>
+          </a:xfrm>
+          <a:prstGeom prst="rect">
+            <a:avLst/>
+          </a:prstGeom>
+          <a:noFill/>
+        </p:spPr>
+        <p:txBody>
+          <a:bodyPr wrap="none" rtlCol="0">
+            <a:spAutoFit/>
+          </a:bodyPr>
+          <a:lstStyle/>
+          <a:p>
+            <a:r>
+              <a:rPr lang="ja-JP" altLang="ja-JP" sz="1200" dirty="0"/>
+              <a:t>仕様書</a:t>
+            </a:r>
+            <a:r>
+              <a:rPr lang="en-US" altLang="ja-JP" sz="1200" dirty="0"/>
+              <a:t>_v2</a:t>
+            </a:r>
+            <a:endParaRPr kumimoji="1" lang="ja-JP" altLang="en-US" sz="1200" dirty="0"/>
+          </a:p>
+        </p:txBody>
+      </p:sp>
+      <p:sp>
+        <p:nvSpPr>
+          <p:cNvPr id="18" name="テキスト ボックス 17">
+            <a:extLst>
+              <a:ext uri="{FF2B5EF4-FFF2-40B4-BE49-F238E27FC236}">
+                <a16:creationId xmlns:a16="http://schemas.microsoft.com/office/drawing/2014/main" id="{494F4B37-A73B-1A37-6735-88211127C46C}"/>
+              </a:ext>
+            </a:extLst>
+          </p:cNvPr>
+          <p:cNvSpPr txBox="1"/>
+          <p:nvPr/>
+        </p:nvSpPr>
+        <p:spPr>
+          <a:xfrm>
+            <a:off x="4183324" y="3105346"/>
+            <a:ext cx="877163" cy="276999"/>
+          </a:xfrm>
+          <a:prstGeom prst="rect">
+            <a:avLst/>
+          </a:prstGeom>
+          <a:noFill/>
+        </p:spPr>
+        <p:txBody>
+          <a:bodyPr wrap="none" rtlCol="0">
+            <a:spAutoFit/>
+          </a:bodyPr>
+          <a:lstStyle/>
+          <a:p>
+            <a:r>
+              <a:rPr lang="ja-JP" altLang="ja-JP" sz="1200" dirty="0"/>
+              <a:t>仕様書</a:t>
+            </a:r>
+            <a:r>
+              <a:rPr lang="en-US" altLang="ja-JP" sz="1200" dirty="0"/>
+              <a:t>_…</a:t>
+            </a:r>
+            <a:endParaRPr kumimoji="1" lang="ja-JP" altLang="en-US" sz="1200" dirty="0"/>
+          </a:p>
+        </p:txBody>
+      </p:sp>
+      <p:sp>
+        <p:nvSpPr>
+          <p:cNvPr id="19" name="テキスト ボックス 18">
+            <a:extLst>
+              <a:ext uri="{FF2B5EF4-FFF2-40B4-BE49-F238E27FC236}">
+                <a16:creationId xmlns:a16="http://schemas.microsoft.com/office/drawing/2014/main" id="{12BD2DF3-815B-E062-9E36-17EC2E205F88}"/>
+              </a:ext>
+            </a:extLst>
+          </p:cNvPr>
+          <p:cNvSpPr txBox="1"/>
+          <p:nvPr/>
+        </p:nvSpPr>
+        <p:spPr>
+          <a:xfrm>
+            <a:off x="3727228" y="2167229"/>
+            <a:ext cx="1184940" cy="276999"/>
+          </a:xfrm>
+          <a:prstGeom prst="rect">
+            <a:avLst/>
+          </a:prstGeom>
+          <a:noFill/>
+        </p:spPr>
+        <p:txBody>
+          <a:bodyPr wrap="none" rtlCol="0">
+            <a:spAutoFit/>
+          </a:bodyPr>
+          <a:lstStyle/>
+          <a:p>
+            <a:r>
+              <a:rPr lang="ja-JP" altLang="ja-JP" sz="1200" dirty="0"/>
+              <a:t>仕様書</a:t>
+            </a:r>
+            <a:r>
+              <a:rPr lang="en-US" altLang="ja-JP" sz="1200" dirty="0"/>
+              <a:t>_</a:t>
+            </a:r>
+            <a:r>
+              <a:rPr lang="ja-JP" altLang="en-US" sz="1200" dirty="0"/>
+              <a:t>最終版</a:t>
+            </a:r>
+            <a:endParaRPr kumimoji="1" lang="ja-JP" altLang="en-US" sz="1200" dirty="0"/>
+          </a:p>
+        </p:txBody>
+      </p:sp>
+    </p:spTree>
+    <p:extLst>
+      <p:ext uri="{BB962C8B-B14F-4D97-AF65-F5344CB8AC3E}">
+        <p14:creationId xmlns:p14="http://schemas.microsoft.com/office/powerpoint/2010/main" val="3824441708"/>
+      </p:ext>
+    </p:extLst>
+  </p:cSld>
+  <p:clrMapOvr>
+    <a:masterClrMapping/>
+  </p:clrMapOvr>
+</p:sld>
+</file>
+
+<file path=ppt/slides/slide20.xml><?xml version="1.0" encoding="utf-8"?>
+<p:sld xmlns:a="http://schemas.openxmlformats.org/drawingml/2006/main" xmlns:r="http://schemas.openxmlformats.org/officeDocument/2006/relationships" xmlns:p="http://schemas.openxmlformats.org/presentationml/2006/main">
+  <p:cSld>
+    <p:spTree>
+      <p:nvGrpSpPr>
+        <p:cNvPr id="1" name="">
+          <a:extLst>
+            <a:ext uri="{FF2B5EF4-FFF2-40B4-BE49-F238E27FC236}">
+              <a16:creationId xmlns:a16="http://schemas.microsoft.com/office/drawing/2014/main" id="{C00E0F32-64FE-CA19-CAE4-A4FE03E3E1AC}"/>
+            </a:ext>
+          </a:extLst>
+        </p:cNvPr>
+        <p:cNvGrpSpPr/>
+        <p:nvPr/>
+      </p:nvGrpSpPr>
+      <p:grpSpPr>
+        <a:xfrm>
+          <a:off x="0" y="0"/>
+          <a:ext cx="0" cy="0"/>
+          <a:chOff x="0" y="0"/>
+          <a:chExt cx="0" cy="0"/>
+        </a:xfrm>
+      </p:grpSpPr>
+      <p:sp>
+        <p:nvSpPr>
+          <p:cNvPr id="18" name="四角形: 角を丸くする 17">
+            <a:extLst>
+              <a:ext uri="{FF2B5EF4-FFF2-40B4-BE49-F238E27FC236}">
+                <a16:creationId xmlns:a16="http://schemas.microsoft.com/office/drawing/2014/main" id="{102C2E7E-F0D2-B0AA-114D-8332D35BD01C}"/>
+              </a:ext>
+            </a:extLst>
+          </p:cNvPr>
+          <p:cNvSpPr/>
+          <p:nvPr/>
+        </p:nvSpPr>
+        <p:spPr>
+          <a:xfrm>
+            <a:off x="2849212" y="189000"/>
+            <a:ext cx="7200000" cy="3240000"/>
+          </a:xfrm>
+          <a:prstGeom prst="roundRect">
+            <a:avLst/>
+          </a:prstGeom>
+          <a:solidFill>
+            <a:srgbClr val="FFCCFF"/>
+          </a:solidFill>
+          <a:ln w="38100">
+            <a:solidFill>
+              <a:schemeClr val="tx1"/>
+            </a:solidFill>
+          </a:ln>
+        </p:spPr>
+        <p:style>
+          <a:lnRef idx="2">
+            <a:schemeClr val="accent6"/>
+          </a:lnRef>
+          <a:fillRef idx="1">
+            <a:schemeClr val="lt1"/>
+          </a:fillRef>
+          <a:effectRef idx="0">
+            <a:schemeClr val="accent6"/>
+          </a:effectRef>
+          <a:fontRef idx="minor">
+            <a:schemeClr val="dk1"/>
+          </a:fontRef>
+        </p:style>
+        <p:txBody>
+          <a:bodyPr rtlCol="0" anchor="t"/>
+          <a:lstStyle/>
+          <a:p>
+            <a:pPr algn="ctr"/>
+            <a:r>
+              <a:rPr lang="ja-JP" altLang="en-US" b="1" dirty="0"/>
+              <a:t>リモートリポジトリ</a:t>
+            </a:r>
+          </a:p>
+        </p:txBody>
+      </p:sp>
+      <p:sp>
+        <p:nvSpPr>
+          <p:cNvPr id="8" name="吹き出し: 四角形 7">
+            <a:extLst>
+              <a:ext uri="{FF2B5EF4-FFF2-40B4-BE49-F238E27FC236}">
+                <a16:creationId xmlns:a16="http://schemas.microsoft.com/office/drawing/2014/main" id="{7B70CD6C-C0A2-E59F-5E06-88CF4D8C2250}"/>
+              </a:ext>
+            </a:extLst>
+          </p:cNvPr>
+          <p:cNvSpPr/>
+          <p:nvPr/>
+        </p:nvSpPr>
+        <p:spPr>
+          <a:xfrm>
+            <a:off x="5364910" y="838200"/>
+            <a:ext cx="3887947" cy="1691639"/>
+          </a:xfrm>
+          <a:prstGeom prst="wedgeRectCallout">
+            <a:avLst>
+              <a:gd name="adj1" fmla="val -52807"/>
+              <a:gd name="adj2" fmla="val 66171"/>
+            </a:avLst>
+          </a:prstGeom>
+          <a:ln w="28575">
+            <a:solidFill>
+              <a:schemeClr val="tx1"/>
+            </a:solidFill>
+          </a:ln>
+        </p:spPr>
+        <p:style>
+          <a:lnRef idx="2">
+            <a:schemeClr val="accent6"/>
+          </a:lnRef>
+          <a:fillRef idx="1">
+            <a:schemeClr val="lt1"/>
+          </a:fillRef>
+          <a:effectRef idx="0">
+            <a:schemeClr val="accent6"/>
+          </a:effectRef>
+          <a:fontRef idx="minor">
+            <a:schemeClr val="dk1"/>
+          </a:fontRef>
+        </p:style>
+        <p:txBody>
+          <a:bodyPr rtlCol="0" anchor="ctr"/>
+          <a:lstStyle/>
+          <a:p>
+            <a:pPr algn="ctr"/>
+            <a:endParaRPr kumimoji="1" lang="ja-JP" altLang="en-US" dirty="0"/>
+          </a:p>
+        </p:txBody>
+      </p:sp>
+      <p:grpSp>
+        <p:nvGrpSpPr>
+          <p:cNvPr id="3" name="グループ化 2">
+            <a:extLst>
+              <a:ext uri="{FF2B5EF4-FFF2-40B4-BE49-F238E27FC236}">
+                <a16:creationId xmlns:a16="http://schemas.microsoft.com/office/drawing/2014/main" id="{AE5BED5A-D86F-3820-1FAB-4D492B9EA4B8}"/>
+              </a:ext>
+            </a:extLst>
+          </p:cNvPr>
+          <p:cNvGrpSpPr/>
+          <p:nvPr/>
+        </p:nvGrpSpPr>
+        <p:grpSpPr>
+          <a:xfrm>
+            <a:off x="4111901" y="2257036"/>
+            <a:ext cx="1217310" cy="1293884"/>
+            <a:chOff x="5938864" y="3124197"/>
+            <a:chExt cx="1217310" cy="1364976"/>
+          </a:xfrm>
+        </p:grpSpPr>
+        <p:pic>
+          <p:nvPicPr>
+            <p:cNvPr id="5" name="図 4">
+              <a:extLst>
+                <a:ext uri="{FF2B5EF4-FFF2-40B4-BE49-F238E27FC236}">
+                  <a16:creationId xmlns:a16="http://schemas.microsoft.com/office/drawing/2014/main" id="{0F3DA0C4-30D4-A281-89EB-0F2154D9CB9C}"/>
+                </a:ext>
+              </a:extLst>
+            </p:cNvPr>
+            <p:cNvPicPr>
+              <a:picLocks noChangeAspect="1"/>
+            </p:cNvPicPr>
+            <p:nvPr/>
+          </p:nvPicPr>
+          <p:blipFill>
+            <a:blip r:embed="rId2">
+              <a:extLst>
+                <a:ext uri="{28A0092B-C50C-407E-A947-70E740481C1C}">
+                  <a14:useLocalDpi xmlns:a14="http://schemas.microsoft.com/office/drawing/2010/main" val="0"/>
+                </a:ext>
+              </a:extLst>
+            </a:blip>
+            <a:stretch>
+              <a:fillRect/>
+            </a:stretch>
+          </p:blipFill>
+          <p:spPr>
+            <a:xfrm>
+              <a:off x="5938864" y="3124197"/>
+              <a:ext cx="1217310" cy="1364976"/>
+            </a:xfrm>
+            <a:prstGeom prst="rect">
+              <a:avLst/>
+            </a:prstGeom>
+          </p:spPr>
+        </p:pic>
+        <p:pic>
+          <p:nvPicPr>
+            <p:cNvPr id="6" name="図 5">
+              <a:extLst>
+                <a:ext uri="{FF2B5EF4-FFF2-40B4-BE49-F238E27FC236}">
+                  <a16:creationId xmlns:a16="http://schemas.microsoft.com/office/drawing/2014/main" id="{E4FA44E5-969E-8323-0C1D-F35118D67CE8}"/>
+                </a:ext>
+              </a:extLst>
+            </p:cNvPr>
+            <p:cNvPicPr>
+              <a:picLocks noChangeAspect="1"/>
+            </p:cNvPicPr>
+            <p:nvPr/>
+          </p:nvPicPr>
+          <p:blipFill>
+            <a:blip r:embed="rId3">
+              <a:extLst>
+                <a:ext uri="{28A0092B-C50C-407E-A947-70E740481C1C}">
+                  <a14:useLocalDpi xmlns:a14="http://schemas.microsoft.com/office/drawing/2010/main" val="0"/>
+                </a:ext>
+              </a:extLst>
+            </a:blip>
+            <a:stretch>
+              <a:fillRect/>
+            </a:stretch>
+          </p:blipFill>
+          <p:spPr>
+            <a:xfrm>
+              <a:off x="6133519" y="3493589"/>
+              <a:ext cx="828000" cy="828000"/>
+            </a:xfrm>
+            <a:prstGeom prst="rect">
+              <a:avLst/>
+            </a:prstGeom>
+          </p:spPr>
+        </p:pic>
+      </p:grpSp>
+      <p:sp>
+        <p:nvSpPr>
+          <p:cNvPr id="9" name="四角形: 角を丸くする 8">
+            <a:extLst>
+              <a:ext uri="{FF2B5EF4-FFF2-40B4-BE49-F238E27FC236}">
+                <a16:creationId xmlns:a16="http://schemas.microsoft.com/office/drawing/2014/main" id="{2FD17F26-F1AA-4F08-9EA8-AF323AB20E78}"/>
+              </a:ext>
+            </a:extLst>
+          </p:cNvPr>
+          <p:cNvSpPr/>
+          <p:nvPr/>
+        </p:nvSpPr>
+        <p:spPr>
+          <a:xfrm>
+            <a:off x="6287803" y="1079351"/>
+            <a:ext cx="2042160" cy="563880"/>
+          </a:xfrm>
+          <a:prstGeom prst="roundRect">
+            <a:avLst/>
+          </a:prstGeom>
+          <a:ln w="38100"/>
+        </p:spPr>
+        <p:style>
+          <a:lnRef idx="2">
+            <a:schemeClr val="accent6"/>
+          </a:lnRef>
+          <a:fillRef idx="1">
+            <a:schemeClr val="lt1"/>
+          </a:fillRef>
+          <a:effectRef idx="0">
+            <a:schemeClr val="accent6"/>
+          </a:effectRef>
+          <a:fontRef idx="minor">
+            <a:schemeClr val="dk1"/>
+          </a:fontRef>
+        </p:style>
+        <p:txBody>
+          <a:bodyPr rtlCol="0" anchor="ctr"/>
+          <a:lstStyle/>
+          <a:p>
+            <a:pPr algn="ctr"/>
+            <a:r>
+              <a:rPr kumimoji="1" lang="ja-JP" altLang="en-US" dirty="0"/>
+              <a:t>変更履歴</a:t>
+            </a:r>
+          </a:p>
+        </p:txBody>
+      </p:sp>
+      <p:sp>
+        <p:nvSpPr>
+          <p:cNvPr id="10" name="四角形: 角を丸くする 9">
+            <a:extLst>
+              <a:ext uri="{FF2B5EF4-FFF2-40B4-BE49-F238E27FC236}">
+                <a16:creationId xmlns:a16="http://schemas.microsoft.com/office/drawing/2014/main" id="{33A4DC48-52C9-A2E5-4F62-A8D86102686E}"/>
+              </a:ext>
+            </a:extLst>
+          </p:cNvPr>
+          <p:cNvSpPr/>
+          <p:nvPr/>
+        </p:nvSpPr>
+        <p:spPr>
+          <a:xfrm>
+            <a:off x="6287803" y="1774271"/>
+            <a:ext cx="2042160" cy="563880"/>
+          </a:xfrm>
+          <a:prstGeom prst="roundRect">
+            <a:avLst/>
+          </a:prstGeom>
+          <a:ln w="38100">
+            <a:solidFill>
+              <a:srgbClr val="FFC000"/>
+            </a:solidFill>
+          </a:ln>
+        </p:spPr>
+        <p:style>
+          <a:lnRef idx="2">
+            <a:schemeClr val="accent6"/>
+          </a:lnRef>
+          <a:fillRef idx="1">
+            <a:schemeClr val="lt1"/>
+          </a:fillRef>
+          <a:effectRef idx="0">
+            <a:schemeClr val="accent6"/>
+          </a:effectRef>
+          <a:fontRef idx="minor">
+            <a:schemeClr val="dk1"/>
+          </a:fontRef>
+        </p:style>
+        <p:txBody>
+          <a:bodyPr rtlCol="0" anchor="ctr"/>
+          <a:lstStyle/>
+          <a:p>
+            <a:pPr algn="ctr"/>
+            <a:r>
+              <a:rPr kumimoji="1" lang="ja-JP" altLang="en-US" dirty="0"/>
+              <a:t>変更履歴</a:t>
+            </a:r>
+          </a:p>
+        </p:txBody>
+      </p:sp>
+    </p:spTree>
+    <p:extLst>
+      <p:ext uri="{BB962C8B-B14F-4D97-AF65-F5344CB8AC3E}">
+        <p14:creationId xmlns:p14="http://schemas.microsoft.com/office/powerpoint/2010/main" val="16440777"/>
+      </p:ext>
+    </p:extLst>
+  </p:cSld>
+  <p:clrMapOvr>
+    <a:masterClrMapping/>
+  </p:clrMapOvr>
+</p:sld>
+</file>
+
+<file path=ppt/slides/slide21.xml><?xml version="1.0" encoding="utf-8"?>
+<p:sld xmlns:a="http://schemas.openxmlformats.org/drawingml/2006/main" xmlns:r="http://schemas.openxmlformats.org/officeDocument/2006/relationships" xmlns:p="http://schemas.openxmlformats.org/presentationml/2006/main">
+  <p:cSld>
+    <p:spTree>
+      <p:nvGrpSpPr>
+        <p:cNvPr id="1" name="">
+          <a:extLst>
+            <a:ext uri="{FF2B5EF4-FFF2-40B4-BE49-F238E27FC236}">
+              <a16:creationId xmlns:a16="http://schemas.microsoft.com/office/drawing/2014/main" id="{646C35AC-F1A8-B0B4-BA7D-B37B05E8B9D5}"/>
+            </a:ext>
+          </a:extLst>
+        </p:cNvPr>
+        <p:cNvGrpSpPr/>
+        <p:nvPr/>
+      </p:nvGrpSpPr>
+      <p:grpSpPr>
+        <a:xfrm>
+          <a:off x="0" y="0"/>
+          <a:ext cx="0" cy="0"/>
+          <a:chOff x="0" y="0"/>
+          <a:chExt cx="0" cy="0"/>
+        </a:xfrm>
+      </p:grpSpPr>
+      <p:sp>
+        <p:nvSpPr>
+          <p:cNvPr id="6" name="四角形: 角を丸くする 5">
+            <a:extLst>
+              <a:ext uri="{FF2B5EF4-FFF2-40B4-BE49-F238E27FC236}">
+                <a16:creationId xmlns:a16="http://schemas.microsoft.com/office/drawing/2014/main" id="{D85BEA2E-432B-2807-3E72-41884802D25D}"/>
+              </a:ext>
+            </a:extLst>
+          </p:cNvPr>
+          <p:cNvSpPr/>
+          <p:nvPr/>
+        </p:nvSpPr>
+        <p:spPr>
+          <a:xfrm>
+            <a:off x="2849212" y="4736299"/>
+            <a:ext cx="7200000" cy="3240000"/>
+          </a:xfrm>
+          <a:prstGeom prst="roundRect">
+            <a:avLst/>
+          </a:prstGeom>
+          <a:solidFill>
+            <a:srgbClr val="FFCCFF"/>
+          </a:solidFill>
+          <a:ln w="38100">
+            <a:solidFill>
+              <a:schemeClr val="tx1"/>
+            </a:solidFill>
+          </a:ln>
+        </p:spPr>
+        <p:style>
+          <a:lnRef idx="2">
+            <a:schemeClr val="accent6"/>
+          </a:lnRef>
+          <a:fillRef idx="1">
+            <a:schemeClr val="lt1"/>
+          </a:fillRef>
+          <a:effectRef idx="0">
+            <a:schemeClr val="accent6"/>
+          </a:effectRef>
+          <a:fontRef idx="minor">
+            <a:schemeClr val="dk1"/>
+          </a:fontRef>
+        </p:style>
+        <p:txBody>
+          <a:bodyPr rtlCol="0" anchor="t"/>
+          <a:lstStyle/>
+          <a:p>
+            <a:pPr algn="ctr"/>
+            <a:r>
+              <a:rPr lang="ja-JP" altLang="en-US" b="1" dirty="0"/>
+              <a:t>リモートリポジトリ（プッシュ後）</a:t>
+            </a:r>
+          </a:p>
+        </p:txBody>
+      </p:sp>
+      <p:sp>
+        <p:nvSpPr>
+          <p:cNvPr id="16" name="吹き出し: 四角形 15">
+            <a:extLst>
+              <a:ext uri="{FF2B5EF4-FFF2-40B4-BE49-F238E27FC236}">
+                <a16:creationId xmlns:a16="http://schemas.microsoft.com/office/drawing/2014/main" id="{98306C84-8B6C-9CE8-8886-B1F82CB4472E}"/>
+              </a:ext>
+            </a:extLst>
+          </p:cNvPr>
+          <p:cNvSpPr/>
+          <p:nvPr/>
+        </p:nvSpPr>
+        <p:spPr>
+          <a:xfrm>
+            <a:off x="5364910" y="5584870"/>
+            <a:ext cx="3887947" cy="1104641"/>
+          </a:xfrm>
+          <a:prstGeom prst="wedgeRectCallout">
+            <a:avLst>
+              <a:gd name="adj1" fmla="val -51631"/>
+              <a:gd name="adj2" fmla="val 86892"/>
+            </a:avLst>
+          </a:prstGeom>
+          <a:ln w="28575">
+            <a:solidFill>
+              <a:schemeClr val="tx1"/>
+            </a:solidFill>
+          </a:ln>
+        </p:spPr>
+        <p:style>
+          <a:lnRef idx="2">
+            <a:schemeClr val="accent6"/>
+          </a:lnRef>
+          <a:fillRef idx="1">
+            <a:schemeClr val="lt1"/>
+          </a:fillRef>
+          <a:effectRef idx="0">
+            <a:schemeClr val="accent6"/>
+          </a:effectRef>
+          <a:fontRef idx="minor">
+            <a:schemeClr val="dk1"/>
+          </a:fontRef>
+        </p:style>
+        <p:txBody>
+          <a:bodyPr rtlCol="0" anchor="ctr"/>
+          <a:lstStyle/>
+          <a:p>
+            <a:pPr algn="ctr"/>
+            <a:endParaRPr kumimoji="1" lang="ja-JP" altLang="en-US" dirty="0"/>
+          </a:p>
+        </p:txBody>
+      </p:sp>
+      <p:sp>
+        <p:nvSpPr>
+          <p:cNvPr id="86" name="矢印: 右 85">
+            <a:extLst>
+              <a:ext uri="{FF2B5EF4-FFF2-40B4-BE49-F238E27FC236}">
+                <a16:creationId xmlns:a16="http://schemas.microsoft.com/office/drawing/2014/main" id="{8BD89B26-D3FB-4B9B-99A0-F01F7166E333}"/>
+              </a:ext>
+            </a:extLst>
+          </p:cNvPr>
+          <p:cNvSpPr/>
+          <p:nvPr/>
+        </p:nvSpPr>
+        <p:spPr>
+          <a:xfrm rot="5400000">
+            <a:off x="6215169" y="3733800"/>
+            <a:ext cx="468086" cy="677228"/>
+          </a:xfrm>
+          <a:prstGeom prst="rightArrow">
+            <a:avLst/>
+          </a:prstGeom>
+        </p:spPr>
+        <p:style>
+          <a:lnRef idx="2">
+            <a:schemeClr val="dk1">
+              <a:shade val="15000"/>
+            </a:schemeClr>
+          </a:lnRef>
+          <a:fillRef idx="1">
+            <a:schemeClr val="dk1"/>
+          </a:fillRef>
+          <a:effectRef idx="0">
+            <a:schemeClr val="dk1"/>
+          </a:effectRef>
+          <a:fontRef idx="minor">
+            <a:schemeClr val="lt1"/>
+          </a:fontRef>
+        </p:style>
+        <p:txBody>
+          <a:bodyPr rtlCol="0" anchor="ctr"/>
+          <a:lstStyle/>
+          <a:p>
+            <a:pPr algn="ctr"/>
+            <a:endParaRPr kumimoji="1" lang="ja-JP" altLang="en-US"/>
+          </a:p>
+        </p:txBody>
+      </p:sp>
+      <p:sp>
+        <p:nvSpPr>
+          <p:cNvPr id="98" name="テキスト ボックス 97">
+            <a:extLst>
+              <a:ext uri="{FF2B5EF4-FFF2-40B4-BE49-F238E27FC236}">
+                <a16:creationId xmlns:a16="http://schemas.microsoft.com/office/drawing/2014/main" id="{7E82DF4A-5345-3FB1-3CBD-63D347E1D7C8}"/>
+              </a:ext>
+            </a:extLst>
+          </p:cNvPr>
+          <p:cNvSpPr txBox="1"/>
+          <p:nvPr/>
+        </p:nvSpPr>
+        <p:spPr>
+          <a:xfrm>
+            <a:off x="6976284" y="3887728"/>
+            <a:ext cx="1107996" cy="369332"/>
+          </a:xfrm>
+          <a:prstGeom prst="rect">
+            <a:avLst/>
+          </a:prstGeom>
+          <a:noFill/>
+        </p:spPr>
+        <p:txBody>
+          <a:bodyPr wrap="none" rtlCol="0">
+            <a:spAutoFit/>
+          </a:bodyPr>
+          <a:lstStyle/>
+          <a:p>
+            <a:r>
+              <a:rPr kumimoji="1" lang="ja-JP" altLang="en-US" b="1" dirty="0"/>
+              <a:t>プッシュ</a:t>
+            </a:r>
+          </a:p>
+        </p:txBody>
+      </p:sp>
+      <p:sp>
+        <p:nvSpPr>
+          <p:cNvPr id="18" name="四角形: 角を丸くする 17">
+            <a:extLst>
+              <a:ext uri="{FF2B5EF4-FFF2-40B4-BE49-F238E27FC236}">
+                <a16:creationId xmlns:a16="http://schemas.microsoft.com/office/drawing/2014/main" id="{B7980B84-A156-1C2C-CD56-4C44C12D1693}"/>
+              </a:ext>
+            </a:extLst>
+          </p:cNvPr>
+          <p:cNvSpPr/>
+          <p:nvPr/>
+        </p:nvSpPr>
+        <p:spPr>
+          <a:xfrm>
+            <a:off x="2849212" y="189000"/>
+            <a:ext cx="7200000" cy="3240000"/>
+          </a:xfrm>
+          <a:prstGeom prst="roundRect">
+            <a:avLst/>
+          </a:prstGeom>
+          <a:solidFill>
+            <a:srgbClr val="FFCCFF"/>
+          </a:solidFill>
+          <a:ln w="38100">
+            <a:solidFill>
+              <a:schemeClr val="tx1"/>
+            </a:solidFill>
+          </a:ln>
+        </p:spPr>
+        <p:style>
+          <a:lnRef idx="2">
+            <a:schemeClr val="accent6"/>
+          </a:lnRef>
+          <a:fillRef idx="1">
+            <a:schemeClr val="lt1"/>
+          </a:fillRef>
+          <a:effectRef idx="0">
+            <a:schemeClr val="accent6"/>
+          </a:effectRef>
+          <a:fontRef idx="minor">
+            <a:schemeClr val="dk1"/>
+          </a:fontRef>
+        </p:style>
+        <p:txBody>
+          <a:bodyPr rtlCol="0" anchor="t"/>
+          <a:lstStyle/>
+          <a:p>
+            <a:pPr algn="ctr"/>
+            <a:r>
+              <a:rPr lang="ja-JP" altLang="en-US" b="1" dirty="0"/>
+              <a:t>リモートリポジトリ（プッシュ前）</a:t>
+            </a:r>
+          </a:p>
+        </p:txBody>
+      </p:sp>
+      <p:sp>
+        <p:nvSpPr>
+          <p:cNvPr id="19" name="吹き出し: 四角形 18">
+            <a:extLst>
+              <a:ext uri="{FF2B5EF4-FFF2-40B4-BE49-F238E27FC236}">
+                <a16:creationId xmlns:a16="http://schemas.microsoft.com/office/drawing/2014/main" id="{A50EC7D7-24EA-8158-41DA-75811BAECDF9}"/>
+              </a:ext>
+            </a:extLst>
+          </p:cNvPr>
+          <p:cNvSpPr/>
+          <p:nvPr/>
+        </p:nvSpPr>
+        <p:spPr>
+          <a:xfrm>
+            <a:off x="5364910" y="1037571"/>
+            <a:ext cx="3887947" cy="1104641"/>
+          </a:xfrm>
+          <a:prstGeom prst="wedgeRectCallout">
+            <a:avLst>
+              <a:gd name="adj1" fmla="val -51631"/>
+              <a:gd name="adj2" fmla="val 86892"/>
+            </a:avLst>
+          </a:prstGeom>
+          <a:ln w="28575">
+            <a:solidFill>
+              <a:schemeClr val="tx1"/>
+            </a:solidFill>
+          </a:ln>
+        </p:spPr>
+        <p:style>
+          <a:lnRef idx="2">
+            <a:schemeClr val="accent6"/>
+          </a:lnRef>
+          <a:fillRef idx="1">
+            <a:schemeClr val="lt1"/>
+          </a:fillRef>
+          <a:effectRef idx="0">
+            <a:schemeClr val="accent6"/>
+          </a:effectRef>
+          <a:fontRef idx="minor">
+            <a:schemeClr val="dk1"/>
+          </a:fontRef>
+        </p:style>
+        <p:txBody>
+          <a:bodyPr rtlCol="0" anchor="ctr"/>
+          <a:lstStyle/>
+          <a:p>
+            <a:pPr algn="ctr"/>
+            <a:endParaRPr kumimoji="1" lang="ja-JP" altLang="en-US" dirty="0"/>
+          </a:p>
+        </p:txBody>
+      </p:sp>
+      <p:sp>
+        <p:nvSpPr>
+          <p:cNvPr id="37" name="四角形: 角を丸くする 36">
+            <a:extLst>
+              <a:ext uri="{FF2B5EF4-FFF2-40B4-BE49-F238E27FC236}">
+                <a16:creationId xmlns:a16="http://schemas.microsoft.com/office/drawing/2014/main" id="{F3F32988-2F07-724E-069D-DCFD68E0CEC1}"/>
+              </a:ext>
+            </a:extLst>
+          </p:cNvPr>
+          <p:cNvSpPr/>
+          <p:nvPr/>
+        </p:nvSpPr>
+        <p:spPr>
+          <a:xfrm>
+            <a:off x="6287803" y="5855250"/>
+            <a:ext cx="2042160" cy="563880"/>
+          </a:xfrm>
+          <a:prstGeom prst="roundRect">
+            <a:avLst/>
+          </a:prstGeom>
+          <a:ln w="38100"/>
+        </p:spPr>
+        <p:style>
+          <a:lnRef idx="2">
+            <a:schemeClr val="accent6"/>
+          </a:lnRef>
+          <a:fillRef idx="1">
+            <a:schemeClr val="lt1"/>
+          </a:fillRef>
+          <a:effectRef idx="0">
+            <a:schemeClr val="accent6"/>
+          </a:effectRef>
+          <a:fontRef idx="minor">
+            <a:schemeClr val="dk1"/>
+          </a:fontRef>
+        </p:style>
+        <p:txBody>
+          <a:bodyPr rtlCol="0" anchor="ctr"/>
+          <a:lstStyle/>
+          <a:p>
+            <a:pPr algn="ctr"/>
+            <a:r>
+              <a:rPr kumimoji="1" lang="ja-JP" altLang="en-US" dirty="0"/>
+              <a:t>変更履歴</a:t>
+            </a:r>
+          </a:p>
+        </p:txBody>
+      </p:sp>
+      <p:sp>
+        <p:nvSpPr>
+          <p:cNvPr id="2" name="四角形: 角を丸くする 1">
+            <a:extLst>
+              <a:ext uri="{FF2B5EF4-FFF2-40B4-BE49-F238E27FC236}">
+                <a16:creationId xmlns:a16="http://schemas.microsoft.com/office/drawing/2014/main" id="{2F8D038D-C893-87CA-82F9-051B287F8E64}"/>
+              </a:ext>
+            </a:extLst>
+          </p:cNvPr>
+          <p:cNvSpPr/>
+          <p:nvPr/>
+        </p:nvSpPr>
+        <p:spPr>
+          <a:xfrm>
+            <a:off x="8084280" y="3790454"/>
+            <a:ext cx="2042160" cy="563880"/>
+          </a:xfrm>
+          <a:prstGeom prst="roundRect">
+            <a:avLst/>
+          </a:prstGeom>
+          <a:ln w="38100"/>
+        </p:spPr>
+        <p:style>
+          <a:lnRef idx="2">
+            <a:schemeClr val="accent6"/>
+          </a:lnRef>
+          <a:fillRef idx="1">
+            <a:schemeClr val="lt1"/>
+          </a:fillRef>
+          <a:effectRef idx="0">
+            <a:schemeClr val="accent6"/>
+          </a:effectRef>
+          <a:fontRef idx="minor">
+            <a:schemeClr val="dk1"/>
+          </a:fontRef>
+        </p:style>
+        <p:txBody>
+          <a:bodyPr rtlCol="0" anchor="ctr"/>
+          <a:lstStyle/>
+          <a:p>
+            <a:pPr algn="ctr"/>
+            <a:r>
+              <a:rPr kumimoji="1" lang="ja-JP" altLang="en-US" dirty="0"/>
+              <a:t>変更履歴</a:t>
+            </a:r>
+          </a:p>
+        </p:txBody>
+      </p:sp>
+      <p:grpSp>
+        <p:nvGrpSpPr>
+          <p:cNvPr id="3" name="グループ化 2">
+            <a:extLst>
+              <a:ext uri="{FF2B5EF4-FFF2-40B4-BE49-F238E27FC236}">
+                <a16:creationId xmlns:a16="http://schemas.microsoft.com/office/drawing/2014/main" id="{E1700060-A145-EB99-47E1-04C8A6FCEE4A}"/>
+              </a:ext>
+            </a:extLst>
+          </p:cNvPr>
+          <p:cNvGrpSpPr/>
+          <p:nvPr/>
+        </p:nvGrpSpPr>
+        <p:grpSpPr>
+          <a:xfrm>
+            <a:off x="4111901" y="2043676"/>
+            <a:ext cx="1217310" cy="1293884"/>
+            <a:chOff x="5938864" y="3124197"/>
+            <a:chExt cx="1217310" cy="1364976"/>
+          </a:xfrm>
+        </p:grpSpPr>
+        <p:pic>
+          <p:nvPicPr>
+            <p:cNvPr id="4" name="図 3">
+              <a:extLst>
+                <a:ext uri="{FF2B5EF4-FFF2-40B4-BE49-F238E27FC236}">
+                  <a16:creationId xmlns:a16="http://schemas.microsoft.com/office/drawing/2014/main" id="{C967C753-AB82-8144-CA57-729E68F2373B}"/>
+                </a:ext>
+              </a:extLst>
+            </p:cNvPr>
+            <p:cNvPicPr>
+              <a:picLocks noChangeAspect="1"/>
+            </p:cNvPicPr>
+            <p:nvPr/>
+          </p:nvPicPr>
+          <p:blipFill>
+            <a:blip r:embed="rId2">
+              <a:extLst>
+                <a:ext uri="{28A0092B-C50C-407E-A947-70E740481C1C}">
+                  <a14:useLocalDpi xmlns:a14="http://schemas.microsoft.com/office/drawing/2010/main" val="0"/>
+                </a:ext>
+              </a:extLst>
+            </a:blip>
+            <a:stretch>
+              <a:fillRect/>
+            </a:stretch>
+          </p:blipFill>
+          <p:spPr>
+            <a:xfrm>
+              <a:off x="5938864" y="3124197"/>
+              <a:ext cx="1217310" cy="1364976"/>
+            </a:xfrm>
+            <a:prstGeom prst="rect">
+              <a:avLst/>
+            </a:prstGeom>
+          </p:spPr>
+        </p:pic>
+        <p:pic>
+          <p:nvPicPr>
+            <p:cNvPr id="5" name="図 4">
+              <a:extLst>
+                <a:ext uri="{FF2B5EF4-FFF2-40B4-BE49-F238E27FC236}">
+                  <a16:creationId xmlns:a16="http://schemas.microsoft.com/office/drawing/2014/main" id="{AFD375C7-E4ED-A27B-D788-0E93D82F06C7}"/>
+                </a:ext>
+              </a:extLst>
+            </p:cNvPr>
+            <p:cNvPicPr>
+              <a:picLocks noChangeAspect="1"/>
+            </p:cNvPicPr>
+            <p:nvPr/>
+          </p:nvPicPr>
+          <p:blipFill>
+            <a:blip r:embed="rId3">
+              <a:extLst>
+                <a:ext uri="{28A0092B-C50C-407E-A947-70E740481C1C}">
+                  <a14:useLocalDpi xmlns:a14="http://schemas.microsoft.com/office/drawing/2010/main" val="0"/>
+                </a:ext>
+              </a:extLst>
+            </a:blip>
+            <a:stretch>
+              <a:fillRect/>
+            </a:stretch>
+          </p:blipFill>
+          <p:spPr>
+            <a:xfrm>
+              <a:off x="6133519" y="3493589"/>
+              <a:ext cx="828000" cy="828000"/>
+            </a:xfrm>
+            <a:prstGeom prst="rect">
+              <a:avLst/>
+            </a:prstGeom>
+          </p:spPr>
+        </p:pic>
+      </p:grpSp>
+      <p:grpSp>
+        <p:nvGrpSpPr>
+          <p:cNvPr id="7" name="グループ化 6">
+            <a:extLst>
+              <a:ext uri="{FF2B5EF4-FFF2-40B4-BE49-F238E27FC236}">
+                <a16:creationId xmlns:a16="http://schemas.microsoft.com/office/drawing/2014/main" id="{2DCB563A-BE72-B728-5B9B-9DF556F249BF}"/>
+              </a:ext>
+            </a:extLst>
+          </p:cNvPr>
+          <p:cNvGrpSpPr/>
+          <p:nvPr/>
+        </p:nvGrpSpPr>
+        <p:grpSpPr>
+          <a:xfrm>
+            <a:off x="4132360" y="6630916"/>
+            <a:ext cx="1217310" cy="1293884"/>
+            <a:chOff x="5938864" y="3124197"/>
+            <a:chExt cx="1217310" cy="1364976"/>
+          </a:xfrm>
+        </p:grpSpPr>
+        <p:pic>
+          <p:nvPicPr>
+            <p:cNvPr id="8" name="図 7">
+              <a:extLst>
+                <a:ext uri="{FF2B5EF4-FFF2-40B4-BE49-F238E27FC236}">
+                  <a16:creationId xmlns:a16="http://schemas.microsoft.com/office/drawing/2014/main" id="{7F1F740D-3B58-9AE6-5E6E-E0FD43276D0F}"/>
+                </a:ext>
+              </a:extLst>
+            </p:cNvPr>
+            <p:cNvPicPr>
+              <a:picLocks noChangeAspect="1"/>
+            </p:cNvPicPr>
+            <p:nvPr/>
+          </p:nvPicPr>
+          <p:blipFill>
+            <a:blip r:embed="rId2">
+              <a:extLst>
+                <a:ext uri="{28A0092B-C50C-407E-A947-70E740481C1C}">
+                  <a14:useLocalDpi xmlns:a14="http://schemas.microsoft.com/office/drawing/2010/main" val="0"/>
+                </a:ext>
+              </a:extLst>
+            </a:blip>
+            <a:stretch>
+              <a:fillRect/>
+            </a:stretch>
+          </p:blipFill>
+          <p:spPr>
+            <a:xfrm>
+              <a:off x="5938864" y="3124197"/>
+              <a:ext cx="1217310" cy="1364976"/>
+            </a:xfrm>
+            <a:prstGeom prst="rect">
+              <a:avLst/>
+            </a:prstGeom>
+          </p:spPr>
+        </p:pic>
+        <p:pic>
+          <p:nvPicPr>
+            <p:cNvPr id="9" name="図 8">
+              <a:extLst>
+                <a:ext uri="{FF2B5EF4-FFF2-40B4-BE49-F238E27FC236}">
+                  <a16:creationId xmlns:a16="http://schemas.microsoft.com/office/drawing/2014/main" id="{C3A68F92-3830-CF1D-7038-B28A704DC78D}"/>
+                </a:ext>
+              </a:extLst>
+            </p:cNvPr>
+            <p:cNvPicPr>
+              <a:picLocks noChangeAspect="1"/>
+            </p:cNvPicPr>
+            <p:nvPr/>
+          </p:nvPicPr>
+          <p:blipFill>
+            <a:blip r:embed="rId3">
+              <a:extLst>
+                <a:ext uri="{28A0092B-C50C-407E-A947-70E740481C1C}">
+                  <a14:useLocalDpi xmlns:a14="http://schemas.microsoft.com/office/drawing/2010/main" val="0"/>
+                </a:ext>
+              </a:extLst>
+            </a:blip>
+            <a:stretch>
+              <a:fillRect/>
+            </a:stretch>
+          </p:blipFill>
+          <p:spPr>
+            <a:xfrm>
+              <a:off x="6133519" y="3493589"/>
+              <a:ext cx="828000" cy="828000"/>
+            </a:xfrm>
+            <a:prstGeom prst="rect">
+              <a:avLst/>
+            </a:prstGeom>
+          </p:spPr>
+        </p:pic>
+      </p:grpSp>
+    </p:spTree>
+    <p:extLst>
+      <p:ext uri="{BB962C8B-B14F-4D97-AF65-F5344CB8AC3E}">
+        <p14:creationId xmlns:p14="http://schemas.microsoft.com/office/powerpoint/2010/main" val="403509543"/>
+      </p:ext>
+    </p:extLst>
+  </p:cSld>
+  <p:clrMapOvr>
+    <a:masterClrMapping/>
+  </p:clrMapOvr>
+</p:sld>
+</file>
+
+<file path=ppt/slides/slide22.xml><?xml version="1.0" encoding="utf-8"?>
+<p:sld xmlns:a="http://schemas.openxmlformats.org/drawingml/2006/main" xmlns:r="http://schemas.openxmlformats.org/officeDocument/2006/relationships" xmlns:p="http://schemas.openxmlformats.org/presentationml/2006/main">
+  <p:cSld>
+    <p:spTree>
+      <p:nvGrpSpPr>
+        <p:cNvPr id="1" name="">
+          <a:extLst>
+            <a:ext uri="{FF2B5EF4-FFF2-40B4-BE49-F238E27FC236}">
+              <a16:creationId xmlns:a16="http://schemas.microsoft.com/office/drawing/2014/main" id="{47F8275F-89CA-A608-D720-7D05871625DE}"/>
+            </a:ext>
+          </a:extLst>
+        </p:cNvPr>
+        <p:cNvGrpSpPr/>
+        <p:nvPr/>
+      </p:nvGrpSpPr>
+      <p:grpSpPr>
+        <a:xfrm>
+          <a:off x="0" y="0"/>
+          <a:ext cx="0" cy="0"/>
+          <a:chOff x="0" y="0"/>
+          <a:chExt cx="0" cy="0"/>
+        </a:xfrm>
+      </p:grpSpPr>
+      <p:sp>
+        <p:nvSpPr>
+          <p:cNvPr id="6" name="四角形: 角を丸くする 5">
+            <a:extLst>
+              <a:ext uri="{FF2B5EF4-FFF2-40B4-BE49-F238E27FC236}">
+                <a16:creationId xmlns:a16="http://schemas.microsoft.com/office/drawing/2014/main" id="{05790355-C491-6BCB-1AF1-C036E4592FB0}"/>
+              </a:ext>
+            </a:extLst>
+          </p:cNvPr>
+          <p:cNvSpPr/>
+          <p:nvPr/>
+        </p:nvSpPr>
+        <p:spPr>
+          <a:xfrm>
+            <a:off x="2849212" y="4736298"/>
+            <a:ext cx="7200000" cy="3980981"/>
+          </a:xfrm>
+          <a:prstGeom prst="roundRect">
+            <a:avLst/>
+          </a:prstGeom>
+          <a:solidFill>
+            <a:srgbClr val="FFCCFF"/>
+          </a:solidFill>
+          <a:ln w="38100">
+            <a:solidFill>
+              <a:schemeClr val="tx1"/>
+            </a:solidFill>
+          </a:ln>
+        </p:spPr>
+        <p:style>
+          <a:lnRef idx="2">
+            <a:schemeClr val="accent6"/>
+          </a:lnRef>
+          <a:fillRef idx="1">
+            <a:schemeClr val="lt1"/>
+          </a:fillRef>
+          <a:effectRef idx="0">
+            <a:schemeClr val="accent6"/>
+          </a:effectRef>
+          <a:fontRef idx="minor">
+            <a:schemeClr val="dk1"/>
+          </a:fontRef>
+        </p:style>
+        <p:txBody>
+          <a:bodyPr rtlCol="0" anchor="t"/>
+          <a:lstStyle/>
+          <a:p>
+            <a:pPr algn="ctr"/>
+            <a:r>
+              <a:rPr lang="ja-JP" altLang="en-US" b="1" dirty="0"/>
+              <a:t>リモートリポジトリ（プッシュ後）</a:t>
+            </a:r>
+          </a:p>
+        </p:txBody>
+      </p:sp>
+      <p:sp>
+        <p:nvSpPr>
+          <p:cNvPr id="86" name="矢印: 右 85">
+            <a:extLst>
+              <a:ext uri="{FF2B5EF4-FFF2-40B4-BE49-F238E27FC236}">
+                <a16:creationId xmlns:a16="http://schemas.microsoft.com/office/drawing/2014/main" id="{F87D0DC1-A2F6-BB46-4F6C-07475B3ABED4}"/>
+              </a:ext>
+            </a:extLst>
+          </p:cNvPr>
+          <p:cNvSpPr/>
+          <p:nvPr/>
+        </p:nvSpPr>
+        <p:spPr>
+          <a:xfrm rot="5400000">
+            <a:off x="6215169" y="3733800"/>
+            <a:ext cx="468086" cy="677228"/>
+          </a:xfrm>
+          <a:prstGeom prst="rightArrow">
+            <a:avLst/>
+          </a:prstGeom>
+        </p:spPr>
+        <p:style>
+          <a:lnRef idx="2">
+            <a:schemeClr val="dk1">
+              <a:shade val="15000"/>
+            </a:schemeClr>
+          </a:lnRef>
+          <a:fillRef idx="1">
+            <a:schemeClr val="dk1"/>
+          </a:fillRef>
+          <a:effectRef idx="0">
+            <a:schemeClr val="dk1"/>
+          </a:effectRef>
+          <a:fontRef idx="minor">
+            <a:schemeClr val="lt1"/>
+          </a:fontRef>
+        </p:style>
+        <p:txBody>
+          <a:bodyPr rtlCol="0" anchor="ctr"/>
+          <a:lstStyle/>
+          <a:p>
+            <a:pPr algn="ctr"/>
+            <a:endParaRPr kumimoji="1" lang="ja-JP" altLang="en-US"/>
+          </a:p>
+        </p:txBody>
+      </p:sp>
+      <p:sp>
+        <p:nvSpPr>
+          <p:cNvPr id="98" name="テキスト ボックス 97">
+            <a:extLst>
+              <a:ext uri="{FF2B5EF4-FFF2-40B4-BE49-F238E27FC236}">
+                <a16:creationId xmlns:a16="http://schemas.microsoft.com/office/drawing/2014/main" id="{38A37C87-32BB-99FE-C815-74FFBE3ECB4D}"/>
+              </a:ext>
+            </a:extLst>
+          </p:cNvPr>
+          <p:cNvSpPr txBox="1"/>
+          <p:nvPr/>
+        </p:nvSpPr>
+        <p:spPr>
+          <a:xfrm>
+            <a:off x="6976284" y="3887728"/>
+            <a:ext cx="1107996" cy="369332"/>
+          </a:xfrm>
+          <a:prstGeom prst="rect">
+            <a:avLst/>
+          </a:prstGeom>
+          <a:noFill/>
+        </p:spPr>
+        <p:txBody>
+          <a:bodyPr wrap="none" rtlCol="0">
+            <a:spAutoFit/>
+          </a:bodyPr>
+          <a:lstStyle/>
+          <a:p>
+            <a:r>
+              <a:rPr kumimoji="1" lang="ja-JP" altLang="en-US" b="1" dirty="0"/>
+              <a:t>プッシュ</a:t>
+            </a:r>
+          </a:p>
+        </p:txBody>
+      </p:sp>
+      <p:sp>
+        <p:nvSpPr>
+          <p:cNvPr id="2" name="四角形: 角を丸くする 1">
+            <a:extLst>
+              <a:ext uri="{FF2B5EF4-FFF2-40B4-BE49-F238E27FC236}">
+                <a16:creationId xmlns:a16="http://schemas.microsoft.com/office/drawing/2014/main" id="{79BF06C3-242E-A3F7-8BE0-AF18FC0EA369}"/>
+              </a:ext>
+            </a:extLst>
+          </p:cNvPr>
+          <p:cNvSpPr/>
+          <p:nvPr/>
+        </p:nvSpPr>
+        <p:spPr>
+          <a:xfrm>
+            <a:off x="8084280" y="3790454"/>
+            <a:ext cx="2042160" cy="563880"/>
+          </a:xfrm>
+          <a:prstGeom prst="roundRect">
+            <a:avLst/>
+          </a:prstGeom>
+          <a:ln w="38100">
+            <a:solidFill>
+              <a:srgbClr val="00B0F0"/>
+            </a:solidFill>
+          </a:ln>
+        </p:spPr>
+        <p:style>
+          <a:lnRef idx="2">
+            <a:schemeClr val="accent6"/>
+          </a:lnRef>
+          <a:fillRef idx="1">
+            <a:schemeClr val="lt1"/>
+          </a:fillRef>
+          <a:effectRef idx="0">
+            <a:schemeClr val="accent6"/>
+          </a:effectRef>
+          <a:fontRef idx="minor">
+            <a:schemeClr val="dk1"/>
+          </a:fontRef>
+        </p:style>
+        <p:txBody>
+          <a:bodyPr rtlCol="0" anchor="ctr"/>
+          <a:lstStyle/>
+          <a:p>
+            <a:pPr algn="ctr"/>
+            <a:r>
+              <a:rPr kumimoji="1" lang="ja-JP" altLang="en-US" dirty="0"/>
+              <a:t>変更履歴</a:t>
+            </a:r>
+          </a:p>
+        </p:txBody>
+      </p:sp>
+      <p:grpSp>
+        <p:nvGrpSpPr>
+          <p:cNvPr id="7" name="グループ化 6">
+            <a:extLst>
+              <a:ext uri="{FF2B5EF4-FFF2-40B4-BE49-F238E27FC236}">
+                <a16:creationId xmlns:a16="http://schemas.microsoft.com/office/drawing/2014/main" id="{E78327BF-8BE7-AE56-E7DB-F63242ACFA3D}"/>
+              </a:ext>
+            </a:extLst>
+          </p:cNvPr>
+          <p:cNvGrpSpPr/>
+          <p:nvPr/>
+        </p:nvGrpSpPr>
+        <p:grpSpPr>
+          <a:xfrm>
+            <a:off x="4132360" y="7423396"/>
+            <a:ext cx="1217310" cy="1293884"/>
+            <a:chOff x="5938864" y="3124197"/>
+            <a:chExt cx="1217310" cy="1364976"/>
+          </a:xfrm>
+        </p:grpSpPr>
+        <p:pic>
+          <p:nvPicPr>
+            <p:cNvPr id="8" name="図 7">
+              <a:extLst>
+                <a:ext uri="{FF2B5EF4-FFF2-40B4-BE49-F238E27FC236}">
+                  <a16:creationId xmlns:a16="http://schemas.microsoft.com/office/drawing/2014/main" id="{49483B10-DB47-6F04-BE2A-63DC7B9FF356}"/>
+                </a:ext>
+              </a:extLst>
+            </p:cNvPr>
+            <p:cNvPicPr>
+              <a:picLocks noChangeAspect="1"/>
+            </p:cNvPicPr>
+            <p:nvPr/>
+          </p:nvPicPr>
+          <p:blipFill>
+            <a:blip r:embed="rId2">
+              <a:extLst>
+                <a:ext uri="{28A0092B-C50C-407E-A947-70E740481C1C}">
+                  <a14:useLocalDpi xmlns:a14="http://schemas.microsoft.com/office/drawing/2010/main" val="0"/>
+                </a:ext>
+              </a:extLst>
+            </a:blip>
+            <a:stretch>
+              <a:fillRect/>
+            </a:stretch>
+          </p:blipFill>
+          <p:spPr>
+            <a:xfrm>
+              <a:off x="5938864" y="3124197"/>
+              <a:ext cx="1217310" cy="1364976"/>
+            </a:xfrm>
+            <a:prstGeom prst="rect">
+              <a:avLst/>
+            </a:prstGeom>
+          </p:spPr>
+        </p:pic>
+        <p:pic>
+          <p:nvPicPr>
+            <p:cNvPr id="9" name="図 8">
+              <a:extLst>
+                <a:ext uri="{FF2B5EF4-FFF2-40B4-BE49-F238E27FC236}">
+                  <a16:creationId xmlns:a16="http://schemas.microsoft.com/office/drawing/2014/main" id="{3B9A9C92-DDBC-574A-A794-B6AFD70A62A7}"/>
+                </a:ext>
+              </a:extLst>
+            </p:cNvPr>
+            <p:cNvPicPr>
+              <a:picLocks noChangeAspect="1"/>
+            </p:cNvPicPr>
+            <p:nvPr/>
+          </p:nvPicPr>
+          <p:blipFill>
+            <a:blip r:embed="rId3">
+              <a:extLst>
+                <a:ext uri="{28A0092B-C50C-407E-A947-70E740481C1C}">
+                  <a14:useLocalDpi xmlns:a14="http://schemas.microsoft.com/office/drawing/2010/main" val="0"/>
+                </a:ext>
+              </a:extLst>
+            </a:blip>
+            <a:stretch>
+              <a:fillRect/>
+            </a:stretch>
+          </p:blipFill>
+          <p:spPr>
+            <a:xfrm>
+              <a:off x="6133519" y="3493589"/>
+              <a:ext cx="828000" cy="828000"/>
+            </a:xfrm>
+            <a:prstGeom prst="rect">
+              <a:avLst/>
+            </a:prstGeom>
+          </p:spPr>
+        </p:pic>
+      </p:grpSp>
+      <p:sp>
+        <p:nvSpPr>
+          <p:cNvPr id="10" name="四角形: 角を丸くする 9">
+            <a:extLst>
+              <a:ext uri="{FF2B5EF4-FFF2-40B4-BE49-F238E27FC236}">
+                <a16:creationId xmlns:a16="http://schemas.microsoft.com/office/drawing/2014/main" id="{8A294784-95D2-4D1C-3C17-14C98F1D077B}"/>
+              </a:ext>
+            </a:extLst>
+          </p:cNvPr>
+          <p:cNvSpPr/>
+          <p:nvPr/>
+        </p:nvSpPr>
+        <p:spPr>
+          <a:xfrm>
+            <a:off x="2833972" y="179539"/>
+            <a:ext cx="7200000" cy="3240000"/>
+          </a:xfrm>
+          <a:prstGeom prst="roundRect">
+            <a:avLst/>
+          </a:prstGeom>
+          <a:solidFill>
+            <a:schemeClr val="accent1">
+              <a:lumMod val="20000"/>
+              <a:lumOff val="80000"/>
+            </a:schemeClr>
+          </a:solidFill>
+          <a:ln w="38100">
+            <a:solidFill>
+              <a:schemeClr val="tx1"/>
+            </a:solidFill>
+          </a:ln>
+        </p:spPr>
+        <p:style>
+          <a:lnRef idx="2">
+            <a:schemeClr val="accent6"/>
+          </a:lnRef>
+          <a:fillRef idx="1">
+            <a:schemeClr val="lt1"/>
+          </a:fillRef>
+          <a:effectRef idx="0">
+            <a:schemeClr val="accent6"/>
+          </a:effectRef>
+          <a:fontRef idx="minor">
+            <a:schemeClr val="dk1"/>
+          </a:fontRef>
+        </p:style>
+        <p:txBody>
+          <a:bodyPr rtlCol="0" anchor="t"/>
+          <a:lstStyle/>
+          <a:p>
+            <a:pPr algn="ctr"/>
+            <a:r>
+              <a:rPr lang="ja-JP" altLang="en-US" b="1" dirty="0"/>
+              <a:t>ローカルリポジトリ（コミット後）</a:t>
+            </a:r>
+          </a:p>
+        </p:txBody>
+      </p:sp>
+      <p:sp>
+        <p:nvSpPr>
+          <p:cNvPr id="11" name="吹き出し: 四角形 10">
+            <a:extLst>
+              <a:ext uri="{FF2B5EF4-FFF2-40B4-BE49-F238E27FC236}">
+                <a16:creationId xmlns:a16="http://schemas.microsoft.com/office/drawing/2014/main" id="{DE4BF4AD-12FA-C03E-83A6-9F8C18822C69}"/>
+              </a:ext>
+            </a:extLst>
+          </p:cNvPr>
+          <p:cNvSpPr/>
+          <p:nvPr/>
+        </p:nvSpPr>
+        <p:spPr>
+          <a:xfrm>
+            <a:off x="5349670" y="1028110"/>
+            <a:ext cx="3887947" cy="1104641"/>
+          </a:xfrm>
+          <a:prstGeom prst="wedgeRectCallout">
+            <a:avLst>
+              <a:gd name="adj1" fmla="val -51631"/>
+              <a:gd name="adj2" fmla="val 86892"/>
+            </a:avLst>
+          </a:prstGeom>
+          <a:ln w="28575">
+            <a:solidFill>
+              <a:schemeClr val="tx1"/>
+            </a:solidFill>
+          </a:ln>
+        </p:spPr>
+        <p:style>
+          <a:lnRef idx="2">
+            <a:schemeClr val="accent6"/>
+          </a:lnRef>
+          <a:fillRef idx="1">
+            <a:schemeClr val="lt1"/>
+          </a:fillRef>
+          <a:effectRef idx="0">
+            <a:schemeClr val="accent6"/>
+          </a:effectRef>
+          <a:fontRef idx="minor">
+            <a:schemeClr val="dk1"/>
+          </a:fontRef>
+        </p:style>
+        <p:txBody>
+          <a:bodyPr rtlCol="0" anchor="ctr"/>
+          <a:lstStyle/>
+          <a:p>
+            <a:pPr algn="ctr"/>
+            <a:endParaRPr kumimoji="1" lang="ja-JP" altLang="en-US" dirty="0"/>
+          </a:p>
+        </p:txBody>
+      </p:sp>
+      <p:pic>
+        <p:nvPicPr>
+          <p:cNvPr id="12" name="図 11">
+            <a:extLst>
+              <a:ext uri="{FF2B5EF4-FFF2-40B4-BE49-F238E27FC236}">
+                <a16:creationId xmlns:a16="http://schemas.microsoft.com/office/drawing/2014/main" id="{FE52B36B-74CD-D2E0-564B-116B5FD998BD}"/>
+              </a:ext>
+            </a:extLst>
+          </p:cNvPr>
+          <p:cNvPicPr>
+            <a:picLocks noChangeAspect="1"/>
+          </p:cNvPicPr>
+          <p:nvPr/>
+        </p:nvPicPr>
+        <p:blipFill>
+          <a:blip r:embed="rId4">
+            <a:extLst>
+              <a:ext uri="{28A0092B-C50C-407E-A947-70E740481C1C}">
+                <a14:useLocalDpi xmlns:a14="http://schemas.microsoft.com/office/drawing/2010/main" val="0"/>
+              </a:ext>
+            </a:extLst>
+          </a:blip>
+          <a:stretch>
+            <a:fillRect/>
+          </a:stretch>
+        </p:blipFill>
+        <p:spPr>
+          <a:xfrm>
+            <a:off x="4316615" y="2203446"/>
+            <a:ext cx="1008000" cy="1008000"/>
+          </a:xfrm>
+          <a:prstGeom prst="rect">
+            <a:avLst/>
+          </a:prstGeom>
+        </p:spPr>
+      </p:pic>
+      <p:sp>
+        <p:nvSpPr>
+          <p:cNvPr id="13" name="四角形: 角を丸くする 12">
+            <a:extLst>
+              <a:ext uri="{FF2B5EF4-FFF2-40B4-BE49-F238E27FC236}">
+                <a16:creationId xmlns:a16="http://schemas.microsoft.com/office/drawing/2014/main" id="{BFDA74DD-57FD-523C-E8A7-D7390899FA7E}"/>
+              </a:ext>
+            </a:extLst>
+          </p:cNvPr>
+          <p:cNvSpPr/>
+          <p:nvPr/>
+        </p:nvSpPr>
+        <p:spPr>
+          <a:xfrm>
+            <a:off x="6272563" y="1298490"/>
+            <a:ext cx="2042160" cy="563880"/>
+          </a:xfrm>
+          <a:prstGeom prst="roundRect">
+            <a:avLst/>
+          </a:prstGeom>
+          <a:ln w="38100">
+            <a:solidFill>
+              <a:srgbClr val="00B0F0"/>
+            </a:solidFill>
+          </a:ln>
+        </p:spPr>
+        <p:style>
+          <a:lnRef idx="2">
+            <a:schemeClr val="accent6"/>
+          </a:lnRef>
+          <a:fillRef idx="1">
+            <a:schemeClr val="lt1"/>
+          </a:fillRef>
+          <a:effectRef idx="0">
+            <a:schemeClr val="accent6"/>
+          </a:effectRef>
+          <a:fontRef idx="minor">
+            <a:schemeClr val="dk1"/>
+          </a:fontRef>
+        </p:style>
+        <p:txBody>
+          <a:bodyPr rtlCol="0" anchor="ctr"/>
+          <a:lstStyle/>
+          <a:p>
+            <a:pPr algn="ctr"/>
+            <a:r>
+              <a:rPr kumimoji="1" lang="ja-JP" altLang="en-US" dirty="0"/>
+              <a:t>変更履歴</a:t>
+            </a:r>
+          </a:p>
+        </p:txBody>
+      </p:sp>
+      <p:sp>
+        <p:nvSpPr>
+          <p:cNvPr id="14" name="吹き出し: 四角形 13">
+            <a:extLst>
+              <a:ext uri="{FF2B5EF4-FFF2-40B4-BE49-F238E27FC236}">
+                <a16:creationId xmlns:a16="http://schemas.microsoft.com/office/drawing/2014/main" id="{BFE1C366-B10F-2D38-9F9F-CEA852B2A35E}"/>
+              </a:ext>
+            </a:extLst>
+          </p:cNvPr>
+          <p:cNvSpPr/>
+          <p:nvPr/>
+        </p:nvSpPr>
+        <p:spPr>
+          <a:xfrm>
+            <a:off x="5364910" y="5379720"/>
+            <a:ext cx="3887947" cy="2286000"/>
+          </a:xfrm>
+          <a:prstGeom prst="wedgeRectCallout">
+            <a:avLst>
+              <a:gd name="adj1" fmla="val -52807"/>
+              <a:gd name="adj2" fmla="val 66171"/>
+            </a:avLst>
+          </a:prstGeom>
+          <a:ln w="28575">
+            <a:solidFill>
+              <a:schemeClr val="tx1"/>
+            </a:solidFill>
+          </a:ln>
+        </p:spPr>
+        <p:style>
+          <a:lnRef idx="2">
+            <a:schemeClr val="accent6"/>
+          </a:lnRef>
+          <a:fillRef idx="1">
+            <a:schemeClr val="lt1"/>
+          </a:fillRef>
+          <a:effectRef idx="0">
+            <a:schemeClr val="accent6"/>
+          </a:effectRef>
+          <a:fontRef idx="minor">
+            <a:schemeClr val="dk1"/>
+          </a:fontRef>
+        </p:style>
+        <p:txBody>
+          <a:bodyPr rtlCol="0" anchor="ctr"/>
+          <a:lstStyle/>
+          <a:p>
+            <a:pPr algn="ctr"/>
+            <a:endParaRPr kumimoji="1" lang="ja-JP" altLang="en-US" dirty="0"/>
+          </a:p>
+        </p:txBody>
+      </p:sp>
+      <p:sp>
+        <p:nvSpPr>
+          <p:cNvPr id="15" name="四角形: 角を丸くする 14">
+            <a:extLst>
+              <a:ext uri="{FF2B5EF4-FFF2-40B4-BE49-F238E27FC236}">
+                <a16:creationId xmlns:a16="http://schemas.microsoft.com/office/drawing/2014/main" id="{28779FEC-BF07-D6EE-D4E1-976D4EBB232E}"/>
+              </a:ext>
+            </a:extLst>
+          </p:cNvPr>
+          <p:cNvSpPr/>
+          <p:nvPr/>
+        </p:nvSpPr>
+        <p:spPr>
+          <a:xfrm>
+            <a:off x="6298963" y="5529431"/>
+            <a:ext cx="2042160" cy="563880"/>
+          </a:xfrm>
+          <a:prstGeom prst="roundRect">
+            <a:avLst/>
+          </a:prstGeom>
+          <a:ln w="38100"/>
+        </p:spPr>
+        <p:style>
+          <a:lnRef idx="2">
+            <a:schemeClr val="accent6"/>
+          </a:lnRef>
+          <a:fillRef idx="1">
+            <a:schemeClr val="lt1"/>
+          </a:fillRef>
+          <a:effectRef idx="0">
+            <a:schemeClr val="accent6"/>
+          </a:effectRef>
+          <a:fontRef idx="minor">
+            <a:schemeClr val="dk1"/>
+          </a:fontRef>
+        </p:style>
+        <p:txBody>
+          <a:bodyPr rtlCol="0" anchor="ctr"/>
+          <a:lstStyle/>
+          <a:p>
+            <a:pPr algn="ctr"/>
+            <a:r>
+              <a:rPr kumimoji="1" lang="ja-JP" altLang="en-US" dirty="0"/>
+              <a:t>変更履歴</a:t>
+            </a:r>
+          </a:p>
+        </p:txBody>
+      </p:sp>
+      <p:sp>
+        <p:nvSpPr>
+          <p:cNvPr id="17" name="四角形: 角を丸くする 16">
+            <a:extLst>
+              <a:ext uri="{FF2B5EF4-FFF2-40B4-BE49-F238E27FC236}">
+                <a16:creationId xmlns:a16="http://schemas.microsoft.com/office/drawing/2014/main" id="{FAAF2DBD-3162-971D-AFEC-2C9B76795AB0}"/>
+              </a:ext>
+            </a:extLst>
+          </p:cNvPr>
+          <p:cNvSpPr/>
+          <p:nvPr/>
+        </p:nvSpPr>
+        <p:spPr>
+          <a:xfrm>
+            <a:off x="6298963" y="6232782"/>
+            <a:ext cx="2042160" cy="563880"/>
+          </a:xfrm>
+          <a:prstGeom prst="roundRect">
+            <a:avLst/>
+          </a:prstGeom>
+          <a:ln w="38100">
+            <a:solidFill>
+              <a:srgbClr val="FFC000"/>
+            </a:solidFill>
+          </a:ln>
+        </p:spPr>
+        <p:style>
+          <a:lnRef idx="2">
+            <a:schemeClr val="accent6"/>
+          </a:lnRef>
+          <a:fillRef idx="1">
+            <a:schemeClr val="lt1"/>
+          </a:fillRef>
+          <a:effectRef idx="0">
+            <a:schemeClr val="accent6"/>
+          </a:effectRef>
+          <a:fontRef idx="minor">
+            <a:schemeClr val="dk1"/>
+          </a:fontRef>
+        </p:style>
+        <p:txBody>
+          <a:bodyPr rtlCol="0" anchor="ctr"/>
+          <a:lstStyle/>
+          <a:p>
+            <a:pPr algn="ctr"/>
+            <a:r>
+              <a:rPr kumimoji="1" lang="ja-JP" altLang="en-US" dirty="0"/>
+              <a:t>変更履歴</a:t>
+            </a:r>
+          </a:p>
+        </p:txBody>
+      </p:sp>
+      <p:sp>
+        <p:nvSpPr>
+          <p:cNvPr id="20" name="四角形: 角を丸くする 19">
+            <a:extLst>
+              <a:ext uri="{FF2B5EF4-FFF2-40B4-BE49-F238E27FC236}">
+                <a16:creationId xmlns:a16="http://schemas.microsoft.com/office/drawing/2014/main" id="{AD682B44-A40C-73E3-1C1F-8BD234C03F98}"/>
+              </a:ext>
+            </a:extLst>
+          </p:cNvPr>
+          <p:cNvSpPr/>
+          <p:nvPr/>
+        </p:nvSpPr>
+        <p:spPr>
+          <a:xfrm>
+            <a:off x="6298963" y="6936132"/>
+            <a:ext cx="2042160" cy="563880"/>
+          </a:xfrm>
+          <a:prstGeom prst="roundRect">
+            <a:avLst/>
+          </a:prstGeom>
+          <a:ln w="38100">
+            <a:solidFill>
+              <a:srgbClr val="00B0F0"/>
+            </a:solidFill>
+          </a:ln>
+        </p:spPr>
+        <p:style>
+          <a:lnRef idx="2">
+            <a:schemeClr val="accent6"/>
+          </a:lnRef>
+          <a:fillRef idx="1">
+            <a:schemeClr val="lt1"/>
+          </a:fillRef>
+          <a:effectRef idx="0">
+            <a:schemeClr val="accent6"/>
+          </a:effectRef>
+          <a:fontRef idx="minor">
+            <a:schemeClr val="dk1"/>
+          </a:fontRef>
+        </p:style>
+        <p:txBody>
+          <a:bodyPr rtlCol="0" anchor="ctr"/>
+          <a:lstStyle/>
+          <a:p>
+            <a:pPr algn="ctr"/>
+            <a:r>
+              <a:rPr kumimoji="1" lang="ja-JP" altLang="en-US" dirty="0"/>
+              <a:t>変更履歴</a:t>
+            </a:r>
+          </a:p>
+        </p:txBody>
+      </p:sp>
+    </p:spTree>
+    <p:extLst>
+      <p:ext uri="{BB962C8B-B14F-4D97-AF65-F5344CB8AC3E}">
+        <p14:creationId xmlns:p14="http://schemas.microsoft.com/office/powerpoint/2010/main" val="981742287"/>
+      </p:ext>
+    </p:extLst>
+  </p:cSld>
+  <p:clrMapOvr>
+    <a:masterClrMapping/>
+  </p:clrMapOvr>
+</p:sld>
+</file>
+
+<file path=ppt/slides/slide23.xml><?xml version="1.0" encoding="utf-8"?>
+<p:sld xmlns:a="http://schemas.openxmlformats.org/drawingml/2006/main" xmlns:r="http://schemas.openxmlformats.org/officeDocument/2006/relationships" xmlns:p="http://schemas.openxmlformats.org/presentationml/2006/main">
+  <p:cSld>
+    <p:spTree>
+      <p:nvGrpSpPr>
+        <p:cNvPr id="1" name="">
+          <a:extLst>
+            <a:ext uri="{FF2B5EF4-FFF2-40B4-BE49-F238E27FC236}">
+              <a16:creationId xmlns:a16="http://schemas.microsoft.com/office/drawing/2014/main" id="{7B82E340-85E8-FB33-24B7-1F0B520495D7}"/>
+            </a:ext>
+          </a:extLst>
+        </p:cNvPr>
+        <p:cNvGrpSpPr/>
+        <p:nvPr/>
+      </p:nvGrpSpPr>
+      <p:grpSpPr>
+        <a:xfrm>
+          <a:off x="0" y="0"/>
+          <a:ext cx="0" cy="0"/>
+          <a:chOff x="0" y="0"/>
+          <a:chExt cx="0" cy="0"/>
+        </a:xfrm>
+      </p:grpSpPr>
+      <p:sp>
+        <p:nvSpPr>
+          <p:cNvPr id="6" name="四角形: 角を丸くする 5">
+            <a:extLst>
+              <a:ext uri="{FF2B5EF4-FFF2-40B4-BE49-F238E27FC236}">
+                <a16:creationId xmlns:a16="http://schemas.microsoft.com/office/drawing/2014/main" id="{146B6114-42A3-66E9-5A3C-CB58EC5151D2}"/>
+              </a:ext>
+            </a:extLst>
+          </p:cNvPr>
+          <p:cNvSpPr/>
+          <p:nvPr/>
+        </p:nvSpPr>
+        <p:spPr>
+          <a:xfrm>
+            <a:off x="2833972" y="177884"/>
+            <a:ext cx="7200000" cy="3980981"/>
+          </a:xfrm>
+          <a:prstGeom prst="roundRect">
+            <a:avLst/>
+          </a:prstGeom>
+          <a:solidFill>
+            <a:srgbClr val="FFCCFF"/>
+          </a:solidFill>
+          <a:ln w="38100">
+            <a:solidFill>
+              <a:schemeClr val="tx1"/>
+            </a:solidFill>
+          </a:ln>
+        </p:spPr>
+        <p:style>
+          <a:lnRef idx="2">
+            <a:schemeClr val="accent6"/>
+          </a:lnRef>
+          <a:fillRef idx="1">
+            <a:schemeClr val="lt1"/>
+          </a:fillRef>
+          <a:effectRef idx="0">
+            <a:schemeClr val="accent6"/>
+          </a:effectRef>
+          <a:fontRef idx="minor">
+            <a:schemeClr val="dk1"/>
+          </a:fontRef>
+        </p:style>
+        <p:txBody>
+          <a:bodyPr rtlCol="0" anchor="t"/>
+          <a:lstStyle/>
+          <a:p>
+            <a:pPr algn="ctr"/>
+            <a:r>
+              <a:rPr lang="ja-JP" altLang="en-US" b="1" dirty="0"/>
+              <a:t>リモートリポジトリ</a:t>
+            </a:r>
+          </a:p>
+        </p:txBody>
+      </p:sp>
+      <p:sp>
+        <p:nvSpPr>
+          <p:cNvPr id="86" name="矢印: 右 85">
+            <a:extLst>
+              <a:ext uri="{FF2B5EF4-FFF2-40B4-BE49-F238E27FC236}">
+                <a16:creationId xmlns:a16="http://schemas.microsoft.com/office/drawing/2014/main" id="{186AED3C-ABF1-25FE-0908-3492478F4B43}"/>
+              </a:ext>
+            </a:extLst>
+          </p:cNvPr>
+          <p:cNvSpPr/>
+          <p:nvPr/>
+        </p:nvSpPr>
+        <p:spPr>
+          <a:xfrm rot="5400000">
+            <a:off x="6200571" y="4406894"/>
+            <a:ext cx="468086" cy="677228"/>
+          </a:xfrm>
+          <a:prstGeom prst="rightArrow">
+            <a:avLst/>
+          </a:prstGeom>
+        </p:spPr>
+        <p:style>
+          <a:lnRef idx="2">
+            <a:schemeClr val="dk1">
+              <a:shade val="15000"/>
+            </a:schemeClr>
+          </a:lnRef>
+          <a:fillRef idx="1">
+            <a:schemeClr val="dk1"/>
+          </a:fillRef>
+          <a:effectRef idx="0">
+            <a:schemeClr val="dk1"/>
+          </a:effectRef>
+          <a:fontRef idx="minor">
+            <a:schemeClr val="lt1"/>
+          </a:fontRef>
+        </p:style>
+        <p:txBody>
+          <a:bodyPr rtlCol="0" anchor="ctr"/>
+          <a:lstStyle/>
+          <a:p>
+            <a:pPr algn="ctr"/>
+            <a:endParaRPr kumimoji="1" lang="ja-JP" altLang="en-US"/>
+          </a:p>
+        </p:txBody>
+      </p:sp>
+      <p:sp>
+        <p:nvSpPr>
+          <p:cNvPr id="98" name="テキスト ボックス 97">
+            <a:extLst>
+              <a:ext uri="{FF2B5EF4-FFF2-40B4-BE49-F238E27FC236}">
+                <a16:creationId xmlns:a16="http://schemas.microsoft.com/office/drawing/2014/main" id="{8E5938E4-9CB3-0E1E-699F-A579C2F0E6DF}"/>
+              </a:ext>
+            </a:extLst>
+          </p:cNvPr>
+          <p:cNvSpPr txBox="1"/>
+          <p:nvPr/>
+        </p:nvSpPr>
+        <p:spPr>
+          <a:xfrm>
+            <a:off x="6961686" y="4560822"/>
+            <a:ext cx="646331" cy="369332"/>
+          </a:xfrm>
+          <a:prstGeom prst="rect">
+            <a:avLst/>
+          </a:prstGeom>
+          <a:noFill/>
+        </p:spPr>
+        <p:txBody>
+          <a:bodyPr wrap="none" rtlCol="0">
+            <a:spAutoFit/>
+          </a:bodyPr>
+          <a:lstStyle/>
+          <a:p>
+            <a:r>
+              <a:rPr kumimoji="1" lang="ja-JP" altLang="en-US" b="1" dirty="0"/>
+              <a:t>プル</a:t>
+            </a:r>
+          </a:p>
+        </p:txBody>
+      </p:sp>
+      <p:grpSp>
+        <p:nvGrpSpPr>
+          <p:cNvPr id="7" name="グループ化 6">
+            <a:extLst>
+              <a:ext uri="{FF2B5EF4-FFF2-40B4-BE49-F238E27FC236}">
+                <a16:creationId xmlns:a16="http://schemas.microsoft.com/office/drawing/2014/main" id="{AE9D9435-3656-9A81-CFCB-9163C8AA5A53}"/>
+              </a:ext>
+            </a:extLst>
+          </p:cNvPr>
+          <p:cNvGrpSpPr/>
+          <p:nvPr/>
+        </p:nvGrpSpPr>
+        <p:grpSpPr>
+          <a:xfrm>
+            <a:off x="3944660" y="2864981"/>
+            <a:ext cx="1217310" cy="1293884"/>
+            <a:chOff x="5938864" y="3124197"/>
+            <a:chExt cx="1217310" cy="1364976"/>
+          </a:xfrm>
+        </p:grpSpPr>
+        <p:pic>
+          <p:nvPicPr>
+            <p:cNvPr id="8" name="図 7">
+              <a:extLst>
+                <a:ext uri="{FF2B5EF4-FFF2-40B4-BE49-F238E27FC236}">
+                  <a16:creationId xmlns:a16="http://schemas.microsoft.com/office/drawing/2014/main" id="{ECE3044D-7BBE-ECA9-A854-1EE48637D7AC}"/>
+                </a:ext>
+              </a:extLst>
+            </p:cNvPr>
+            <p:cNvPicPr>
+              <a:picLocks noChangeAspect="1"/>
+            </p:cNvPicPr>
+            <p:nvPr/>
+          </p:nvPicPr>
+          <p:blipFill>
+            <a:blip r:embed="rId2">
+              <a:extLst>
+                <a:ext uri="{28A0092B-C50C-407E-A947-70E740481C1C}">
+                  <a14:useLocalDpi xmlns:a14="http://schemas.microsoft.com/office/drawing/2010/main" val="0"/>
+                </a:ext>
+              </a:extLst>
+            </a:blip>
+            <a:stretch>
+              <a:fillRect/>
+            </a:stretch>
+          </p:blipFill>
+          <p:spPr>
+            <a:xfrm>
+              <a:off x="5938864" y="3124197"/>
+              <a:ext cx="1217310" cy="1364976"/>
+            </a:xfrm>
+            <a:prstGeom prst="rect">
+              <a:avLst/>
+            </a:prstGeom>
+          </p:spPr>
+        </p:pic>
+        <p:pic>
+          <p:nvPicPr>
+            <p:cNvPr id="9" name="図 8">
+              <a:extLst>
+                <a:ext uri="{FF2B5EF4-FFF2-40B4-BE49-F238E27FC236}">
+                  <a16:creationId xmlns:a16="http://schemas.microsoft.com/office/drawing/2014/main" id="{4B94DFD8-7D83-2B6A-A570-FAA5FFBC2306}"/>
+                </a:ext>
+              </a:extLst>
+            </p:cNvPr>
+            <p:cNvPicPr>
+              <a:picLocks noChangeAspect="1"/>
+            </p:cNvPicPr>
+            <p:nvPr/>
+          </p:nvPicPr>
+          <p:blipFill>
+            <a:blip r:embed="rId3">
+              <a:extLst>
+                <a:ext uri="{28A0092B-C50C-407E-A947-70E740481C1C}">
+                  <a14:useLocalDpi xmlns:a14="http://schemas.microsoft.com/office/drawing/2010/main" val="0"/>
+                </a:ext>
+              </a:extLst>
+            </a:blip>
+            <a:stretch>
+              <a:fillRect/>
+            </a:stretch>
+          </p:blipFill>
+          <p:spPr>
+            <a:xfrm>
+              <a:off x="6133519" y="3493589"/>
+              <a:ext cx="828000" cy="828000"/>
+            </a:xfrm>
+            <a:prstGeom prst="rect">
+              <a:avLst/>
+            </a:prstGeom>
+          </p:spPr>
+        </p:pic>
+      </p:grpSp>
+      <p:sp>
+        <p:nvSpPr>
+          <p:cNvPr id="10" name="四角形: 角を丸くする 9">
+            <a:extLst>
+              <a:ext uri="{FF2B5EF4-FFF2-40B4-BE49-F238E27FC236}">
+                <a16:creationId xmlns:a16="http://schemas.microsoft.com/office/drawing/2014/main" id="{C094C39D-CAE7-1E56-BE36-33CE2CBA65DA}"/>
+              </a:ext>
+            </a:extLst>
+          </p:cNvPr>
+          <p:cNvSpPr/>
+          <p:nvPr/>
+        </p:nvSpPr>
+        <p:spPr>
+          <a:xfrm>
+            <a:off x="2833972" y="5332110"/>
+            <a:ext cx="7200000" cy="4054973"/>
+          </a:xfrm>
+          <a:prstGeom prst="roundRect">
+            <a:avLst/>
+          </a:prstGeom>
+          <a:solidFill>
+            <a:schemeClr val="accent1">
+              <a:lumMod val="20000"/>
+              <a:lumOff val="80000"/>
+            </a:schemeClr>
+          </a:solidFill>
+          <a:ln w="38100">
+            <a:solidFill>
+              <a:schemeClr val="tx1"/>
+            </a:solidFill>
+          </a:ln>
+        </p:spPr>
+        <p:style>
+          <a:lnRef idx="2">
+            <a:schemeClr val="accent6"/>
+          </a:lnRef>
+          <a:fillRef idx="1">
+            <a:schemeClr val="lt1"/>
+          </a:fillRef>
+          <a:effectRef idx="0">
+            <a:schemeClr val="accent6"/>
+          </a:effectRef>
+          <a:fontRef idx="minor">
+            <a:schemeClr val="dk1"/>
+          </a:fontRef>
+        </p:style>
+        <p:txBody>
+          <a:bodyPr rtlCol="0" anchor="t"/>
+          <a:lstStyle/>
+          <a:p>
+            <a:pPr algn="ctr"/>
+            <a:r>
+              <a:rPr lang="ja-JP" altLang="en-US" b="1" dirty="0"/>
+              <a:t>ローカルリポジトリ</a:t>
+            </a:r>
+          </a:p>
+        </p:txBody>
+      </p:sp>
+      <p:pic>
+        <p:nvPicPr>
+          <p:cNvPr id="12" name="図 11">
+            <a:extLst>
+              <a:ext uri="{FF2B5EF4-FFF2-40B4-BE49-F238E27FC236}">
+                <a16:creationId xmlns:a16="http://schemas.microsoft.com/office/drawing/2014/main" id="{CC3B264A-6266-0D89-9553-404DCFCDEAA5}"/>
+              </a:ext>
+            </a:extLst>
+          </p:cNvPr>
+          <p:cNvPicPr>
+            <a:picLocks noChangeAspect="1"/>
+          </p:cNvPicPr>
+          <p:nvPr/>
+        </p:nvPicPr>
+        <p:blipFill>
+          <a:blip r:embed="rId4">
+            <a:extLst>
+              <a:ext uri="{28A0092B-C50C-407E-A947-70E740481C1C}">
+                <a14:useLocalDpi xmlns:a14="http://schemas.microsoft.com/office/drawing/2010/main" val="0"/>
+              </a:ext>
+            </a:extLst>
+          </a:blip>
+          <a:stretch>
+            <a:fillRect/>
+          </a:stretch>
+        </p:blipFill>
+        <p:spPr>
+          <a:xfrm>
+            <a:off x="4139315" y="8379084"/>
+            <a:ext cx="1008000" cy="1008000"/>
+          </a:xfrm>
+          <a:prstGeom prst="rect">
+            <a:avLst/>
+          </a:prstGeom>
+        </p:spPr>
+      </p:pic>
+      <p:sp>
+        <p:nvSpPr>
+          <p:cNvPr id="14" name="吹き出し: 四角形 13">
+            <a:extLst>
+              <a:ext uri="{FF2B5EF4-FFF2-40B4-BE49-F238E27FC236}">
+                <a16:creationId xmlns:a16="http://schemas.microsoft.com/office/drawing/2014/main" id="{6D1DAFE4-66EA-F72B-320D-53DDB8E09F7A}"/>
+              </a:ext>
+            </a:extLst>
+          </p:cNvPr>
+          <p:cNvSpPr/>
+          <p:nvPr/>
+        </p:nvSpPr>
+        <p:spPr>
+          <a:xfrm>
+            <a:off x="5349670" y="821306"/>
+            <a:ext cx="3887947" cy="2286000"/>
+          </a:xfrm>
+          <a:prstGeom prst="wedgeRectCallout">
+            <a:avLst>
+              <a:gd name="adj1" fmla="val -52807"/>
+              <a:gd name="adj2" fmla="val 66171"/>
+            </a:avLst>
+          </a:prstGeom>
+          <a:ln w="28575">
+            <a:solidFill>
+              <a:schemeClr val="tx1"/>
+            </a:solidFill>
+          </a:ln>
+        </p:spPr>
+        <p:style>
+          <a:lnRef idx="2">
+            <a:schemeClr val="accent6"/>
+          </a:lnRef>
+          <a:fillRef idx="1">
+            <a:schemeClr val="lt1"/>
+          </a:fillRef>
+          <a:effectRef idx="0">
+            <a:schemeClr val="accent6"/>
+          </a:effectRef>
+          <a:fontRef idx="minor">
+            <a:schemeClr val="dk1"/>
+          </a:fontRef>
+        </p:style>
+        <p:txBody>
+          <a:bodyPr rtlCol="0" anchor="ctr"/>
+          <a:lstStyle/>
+          <a:p>
+            <a:pPr algn="ctr"/>
+            <a:endParaRPr kumimoji="1" lang="ja-JP" altLang="en-US" dirty="0"/>
+          </a:p>
+        </p:txBody>
+      </p:sp>
+      <p:sp>
+        <p:nvSpPr>
+          <p:cNvPr id="15" name="四角形: 角を丸くする 14">
+            <a:extLst>
+              <a:ext uri="{FF2B5EF4-FFF2-40B4-BE49-F238E27FC236}">
+                <a16:creationId xmlns:a16="http://schemas.microsoft.com/office/drawing/2014/main" id="{810C7F15-4126-967D-BDBC-A6F46ADC320D}"/>
+              </a:ext>
+            </a:extLst>
+          </p:cNvPr>
+          <p:cNvSpPr/>
+          <p:nvPr/>
+        </p:nvSpPr>
+        <p:spPr>
+          <a:xfrm>
+            <a:off x="6273747" y="971017"/>
+            <a:ext cx="2042160" cy="563880"/>
+          </a:xfrm>
+          <a:prstGeom prst="roundRect">
+            <a:avLst/>
+          </a:prstGeom>
+          <a:ln w="38100"/>
+        </p:spPr>
+        <p:style>
+          <a:lnRef idx="2">
+            <a:schemeClr val="accent6"/>
+          </a:lnRef>
+          <a:fillRef idx="1">
+            <a:schemeClr val="lt1"/>
+          </a:fillRef>
+          <a:effectRef idx="0">
+            <a:schemeClr val="accent6"/>
+          </a:effectRef>
+          <a:fontRef idx="minor">
+            <a:schemeClr val="dk1"/>
+          </a:fontRef>
+        </p:style>
+        <p:txBody>
+          <a:bodyPr rtlCol="0" anchor="ctr"/>
+          <a:lstStyle/>
+          <a:p>
+            <a:pPr algn="ctr"/>
+            <a:r>
+              <a:rPr kumimoji="1" lang="ja-JP" altLang="en-US" dirty="0"/>
+              <a:t>変更履歴</a:t>
+            </a:r>
+          </a:p>
+        </p:txBody>
+      </p:sp>
+      <p:sp>
+        <p:nvSpPr>
+          <p:cNvPr id="17" name="四角形: 角を丸くする 16">
+            <a:extLst>
+              <a:ext uri="{FF2B5EF4-FFF2-40B4-BE49-F238E27FC236}">
+                <a16:creationId xmlns:a16="http://schemas.microsoft.com/office/drawing/2014/main" id="{45EC6968-1B82-897D-4F9E-B458094BBCD8}"/>
+              </a:ext>
+            </a:extLst>
+          </p:cNvPr>
+          <p:cNvSpPr/>
+          <p:nvPr/>
+        </p:nvSpPr>
+        <p:spPr>
+          <a:xfrm>
+            <a:off x="6273747" y="1664641"/>
+            <a:ext cx="2042160" cy="563880"/>
+          </a:xfrm>
+          <a:prstGeom prst="roundRect">
+            <a:avLst/>
+          </a:prstGeom>
+          <a:ln w="38100">
+            <a:solidFill>
+              <a:srgbClr val="FFC000"/>
+            </a:solidFill>
+          </a:ln>
+        </p:spPr>
+        <p:style>
+          <a:lnRef idx="2">
+            <a:schemeClr val="accent6"/>
+          </a:lnRef>
+          <a:fillRef idx="1">
+            <a:schemeClr val="lt1"/>
+          </a:fillRef>
+          <a:effectRef idx="0">
+            <a:schemeClr val="accent6"/>
+          </a:effectRef>
+          <a:fontRef idx="minor">
+            <a:schemeClr val="dk1"/>
+          </a:fontRef>
+        </p:style>
+        <p:txBody>
+          <a:bodyPr rtlCol="0" anchor="ctr"/>
+          <a:lstStyle/>
+          <a:p>
+            <a:pPr algn="ctr"/>
+            <a:r>
+              <a:rPr kumimoji="1" lang="ja-JP" altLang="en-US" dirty="0"/>
+              <a:t>変更履歴</a:t>
+            </a:r>
+          </a:p>
+        </p:txBody>
+      </p:sp>
+      <p:sp>
+        <p:nvSpPr>
+          <p:cNvPr id="3" name="四角形: 角を丸くする 2">
+            <a:extLst>
+              <a:ext uri="{FF2B5EF4-FFF2-40B4-BE49-F238E27FC236}">
+                <a16:creationId xmlns:a16="http://schemas.microsoft.com/office/drawing/2014/main" id="{5200D8D7-8886-C502-2265-ECCAAB75D5CA}"/>
+              </a:ext>
+            </a:extLst>
+          </p:cNvPr>
+          <p:cNvSpPr/>
+          <p:nvPr/>
+        </p:nvSpPr>
+        <p:spPr>
+          <a:xfrm>
+            <a:off x="6273747" y="2358265"/>
+            <a:ext cx="2042160" cy="563880"/>
+          </a:xfrm>
+          <a:prstGeom prst="roundRect">
+            <a:avLst/>
+          </a:prstGeom>
+          <a:ln w="38100">
+            <a:solidFill>
+              <a:srgbClr val="00B0F0"/>
+            </a:solidFill>
+          </a:ln>
+        </p:spPr>
+        <p:style>
+          <a:lnRef idx="2">
+            <a:schemeClr val="accent6"/>
+          </a:lnRef>
+          <a:fillRef idx="1">
+            <a:schemeClr val="lt1"/>
+          </a:fillRef>
+          <a:effectRef idx="0">
+            <a:schemeClr val="accent6"/>
+          </a:effectRef>
+          <a:fontRef idx="minor">
+            <a:schemeClr val="dk1"/>
+          </a:fontRef>
+        </p:style>
+        <p:txBody>
+          <a:bodyPr rtlCol="0" anchor="ctr"/>
+          <a:lstStyle/>
+          <a:p>
+            <a:pPr algn="ctr"/>
+            <a:r>
+              <a:rPr kumimoji="1" lang="ja-JP" altLang="en-US" dirty="0"/>
+              <a:t>変更履歴</a:t>
+            </a:r>
+          </a:p>
+        </p:txBody>
+      </p:sp>
+      <p:sp>
+        <p:nvSpPr>
+          <p:cNvPr id="4" name="吹き出し: 四角形 3">
+            <a:extLst>
+              <a:ext uri="{FF2B5EF4-FFF2-40B4-BE49-F238E27FC236}">
+                <a16:creationId xmlns:a16="http://schemas.microsoft.com/office/drawing/2014/main" id="{E1115A5C-009C-7C02-F078-842CAEC9E797}"/>
+              </a:ext>
+            </a:extLst>
+          </p:cNvPr>
+          <p:cNvSpPr/>
+          <p:nvPr/>
+        </p:nvSpPr>
+        <p:spPr>
+          <a:xfrm>
+            <a:off x="5349670" y="6017111"/>
+            <a:ext cx="3887947" cy="2286000"/>
+          </a:xfrm>
+          <a:prstGeom prst="wedgeRectCallout">
+            <a:avLst>
+              <a:gd name="adj1" fmla="val -52807"/>
+              <a:gd name="adj2" fmla="val 66171"/>
+            </a:avLst>
+          </a:prstGeom>
+          <a:ln w="28575">
+            <a:solidFill>
+              <a:schemeClr val="tx1"/>
+            </a:solidFill>
+          </a:ln>
+        </p:spPr>
+        <p:style>
+          <a:lnRef idx="2">
+            <a:schemeClr val="accent6"/>
+          </a:lnRef>
+          <a:fillRef idx="1">
+            <a:schemeClr val="lt1"/>
+          </a:fillRef>
+          <a:effectRef idx="0">
+            <a:schemeClr val="accent6"/>
+          </a:effectRef>
+          <a:fontRef idx="minor">
+            <a:schemeClr val="dk1"/>
+          </a:fontRef>
+        </p:style>
+        <p:txBody>
+          <a:bodyPr rtlCol="0" anchor="ctr"/>
+          <a:lstStyle/>
+          <a:p>
+            <a:pPr algn="ctr"/>
+            <a:endParaRPr kumimoji="1" lang="ja-JP" altLang="en-US" dirty="0"/>
+          </a:p>
+        </p:txBody>
+      </p:sp>
+      <p:sp>
+        <p:nvSpPr>
+          <p:cNvPr id="5" name="四角形: 角を丸くする 4">
+            <a:extLst>
+              <a:ext uri="{FF2B5EF4-FFF2-40B4-BE49-F238E27FC236}">
+                <a16:creationId xmlns:a16="http://schemas.microsoft.com/office/drawing/2014/main" id="{135FBE9E-920D-99C6-6F1E-E5245260B7DD}"/>
+              </a:ext>
+            </a:extLst>
+          </p:cNvPr>
+          <p:cNvSpPr/>
+          <p:nvPr/>
+        </p:nvSpPr>
+        <p:spPr>
+          <a:xfrm>
+            <a:off x="6273747" y="6166822"/>
+            <a:ext cx="2042160" cy="563880"/>
+          </a:xfrm>
+          <a:prstGeom prst="roundRect">
+            <a:avLst/>
+          </a:prstGeom>
+          <a:ln w="38100"/>
+        </p:spPr>
+        <p:style>
+          <a:lnRef idx="2">
+            <a:schemeClr val="accent6"/>
+          </a:lnRef>
+          <a:fillRef idx="1">
+            <a:schemeClr val="lt1"/>
+          </a:fillRef>
+          <a:effectRef idx="0">
+            <a:schemeClr val="accent6"/>
+          </a:effectRef>
+          <a:fontRef idx="minor">
+            <a:schemeClr val="dk1"/>
+          </a:fontRef>
+        </p:style>
+        <p:txBody>
+          <a:bodyPr rtlCol="0" anchor="ctr"/>
+          <a:lstStyle/>
+          <a:p>
+            <a:pPr algn="ctr"/>
+            <a:r>
+              <a:rPr kumimoji="1" lang="ja-JP" altLang="en-US" dirty="0"/>
+              <a:t>変更履歴</a:t>
+            </a:r>
+          </a:p>
+        </p:txBody>
+      </p:sp>
+      <p:sp>
+        <p:nvSpPr>
+          <p:cNvPr id="16" name="四角形: 角を丸くする 15">
+            <a:extLst>
+              <a:ext uri="{FF2B5EF4-FFF2-40B4-BE49-F238E27FC236}">
+                <a16:creationId xmlns:a16="http://schemas.microsoft.com/office/drawing/2014/main" id="{A0A84FC3-9D93-78F9-6B55-BFBA3E16E93C}"/>
+              </a:ext>
+            </a:extLst>
+          </p:cNvPr>
+          <p:cNvSpPr/>
+          <p:nvPr/>
+        </p:nvSpPr>
+        <p:spPr>
+          <a:xfrm>
+            <a:off x="6273747" y="6860446"/>
+            <a:ext cx="2042160" cy="563880"/>
+          </a:xfrm>
+          <a:prstGeom prst="roundRect">
+            <a:avLst/>
+          </a:prstGeom>
+          <a:ln w="38100">
+            <a:solidFill>
+              <a:srgbClr val="FFC000"/>
+            </a:solidFill>
+          </a:ln>
+        </p:spPr>
+        <p:style>
+          <a:lnRef idx="2">
+            <a:schemeClr val="accent6"/>
+          </a:lnRef>
+          <a:fillRef idx="1">
+            <a:schemeClr val="lt1"/>
+          </a:fillRef>
+          <a:effectRef idx="0">
+            <a:schemeClr val="accent6"/>
+          </a:effectRef>
+          <a:fontRef idx="minor">
+            <a:schemeClr val="dk1"/>
+          </a:fontRef>
+        </p:style>
+        <p:txBody>
+          <a:bodyPr rtlCol="0" anchor="ctr"/>
+          <a:lstStyle/>
+          <a:p>
+            <a:pPr algn="ctr"/>
+            <a:r>
+              <a:rPr kumimoji="1" lang="ja-JP" altLang="en-US" dirty="0"/>
+              <a:t>変更履歴</a:t>
+            </a:r>
+          </a:p>
+        </p:txBody>
+      </p:sp>
+      <p:sp>
+        <p:nvSpPr>
+          <p:cNvPr id="18" name="四角形: 角を丸くする 17">
+            <a:extLst>
+              <a:ext uri="{FF2B5EF4-FFF2-40B4-BE49-F238E27FC236}">
+                <a16:creationId xmlns:a16="http://schemas.microsoft.com/office/drawing/2014/main" id="{A80FCBB7-B90F-F56C-3DFF-718DF0EBA926}"/>
+              </a:ext>
+            </a:extLst>
+          </p:cNvPr>
+          <p:cNvSpPr/>
+          <p:nvPr/>
+        </p:nvSpPr>
+        <p:spPr>
+          <a:xfrm>
+            <a:off x="6273747" y="7554070"/>
+            <a:ext cx="2042160" cy="563880"/>
+          </a:xfrm>
+          <a:prstGeom prst="roundRect">
+            <a:avLst/>
+          </a:prstGeom>
+          <a:ln w="38100">
+            <a:solidFill>
+              <a:srgbClr val="00B0F0"/>
+            </a:solidFill>
+          </a:ln>
+        </p:spPr>
+        <p:style>
+          <a:lnRef idx="2">
+            <a:schemeClr val="accent6"/>
+          </a:lnRef>
+          <a:fillRef idx="1">
+            <a:schemeClr val="lt1"/>
+          </a:fillRef>
+          <a:effectRef idx="0">
+            <a:schemeClr val="accent6"/>
+          </a:effectRef>
+          <a:fontRef idx="minor">
+            <a:schemeClr val="dk1"/>
+          </a:fontRef>
+        </p:style>
+        <p:txBody>
+          <a:bodyPr rtlCol="0" anchor="ctr"/>
+          <a:lstStyle/>
+          <a:p>
+            <a:pPr algn="ctr"/>
+            <a:r>
+              <a:rPr kumimoji="1" lang="ja-JP" altLang="en-US" dirty="0"/>
+              <a:t>変更履歴</a:t>
+            </a:r>
+          </a:p>
+        </p:txBody>
+      </p:sp>
+    </p:spTree>
+    <p:extLst>
+      <p:ext uri="{BB962C8B-B14F-4D97-AF65-F5344CB8AC3E}">
+        <p14:creationId xmlns:p14="http://schemas.microsoft.com/office/powerpoint/2010/main" val="461882835"/>
+      </p:ext>
+    </p:extLst>
+  </p:cSld>
+  <p:clrMapOvr>
+    <a:masterClrMapping/>
+  </p:clrMapOvr>
+</p:sld>
+</file>
+
+<file path=ppt/slides/slide3.xml><?xml version="1.0" encoding="utf-8"?>
+<p:sld xmlns:a="http://schemas.openxmlformats.org/drawingml/2006/main" xmlns:r="http://schemas.openxmlformats.org/officeDocument/2006/relationships" xmlns:p="http://schemas.openxmlformats.org/presentationml/2006/main">
+  <p:cSld>
+    <p:spTree>
+      <p:nvGrpSpPr>
+        <p:cNvPr id="1" name=""/>
+        <p:cNvGrpSpPr/>
+        <p:nvPr/>
+      </p:nvGrpSpPr>
+      <p:grpSpPr>
+        <a:xfrm>
+          <a:off x="0" y="0"/>
+          <a:ext cx="0" cy="0"/>
+          <a:chOff x="0" y="0"/>
+          <a:chExt cx="0" cy="0"/>
+        </a:xfrm>
+      </p:grpSpPr>
+      <p:pic>
+        <p:nvPicPr>
+          <p:cNvPr id="1028" name="Picture 4">
+            <a:extLst>
+              <a:ext uri="{FF2B5EF4-FFF2-40B4-BE49-F238E27FC236}">
+                <a16:creationId xmlns:a16="http://schemas.microsoft.com/office/drawing/2014/main" id="{76C3C845-63E2-25D5-3260-3402A990F2B6}"/>
+              </a:ext>
+            </a:extLst>
+          </p:cNvPr>
+          <p:cNvPicPr>
+            <a:picLocks noChangeAspect="1" noChangeArrowheads="1"/>
+          </p:cNvPicPr>
+          <p:nvPr/>
+        </p:nvPicPr>
+        <p:blipFill>
+          <a:blip r:embed="rId2">
+            <a:extLst>
+              <a:ext uri="{28A0092B-C50C-407E-A947-70E740481C1C}">
+                <a14:useLocalDpi xmlns:a14="http://schemas.microsoft.com/office/drawing/2010/main" val="0"/>
+              </a:ext>
+            </a:extLst>
+          </a:blip>
+          <a:srcRect/>
+          <a:stretch>
+            <a:fillRect/>
+          </a:stretch>
+        </p:blipFill>
+        <p:spPr bwMode="auto">
+          <a:xfrm>
+            <a:off x="4667250" y="2833688"/>
+            <a:ext cx="2857500" cy="1190625"/>
+          </a:xfrm>
+          <a:prstGeom prst="rect">
+            <a:avLst/>
+          </a:prstGeom>
+          <a:noFill/>
+          <a:extLst>
+            <a:ext uri="{909E8E84-426E-40DD-AFC4-6F175D3DCCD1}">
+              <a14:hiddenFill xmlns:a14="http://schemas.microsoft.com/office/drawing/2010/main">
+                <a:solidFill>
+                  <a:srgbClr val="FFFFFF"/>
+                </a:solidFill>
+              </a14:hiddenFill>
+            </a:ext>
+          </a:extLst>
+        </p:spPr>
+      </p:pic>
+    </p:spTree>
+    <p:extLst>
+      <p:ext uri="{BB962C8B-B14F-4D97-AF65-F5344CB8AC3E}">
+        <p14:creationId xmlns:p14="http://schemas.microsoft.com/office/powerpoint/2010/main" val="1451288093"/>
+      </p:ext>
+    </p:extLst>
+  </p:cSld>
+  <p:clrMapOvr>
+    <a:masterClrMapping/>
+  </p:clrMapOvr>
+</p:sld>
+</file>
+
+<file path=ppt/slides/slide4.xml><?xml version="1.0" encoding="utf-8"?>
+<p:sld xmlns:a="http://schemas.openxmlformats.org/drawingml/2006/main" xmlns:r="http://schemas.openxmlformats.org/officeDocument/2006/relationships" xmlns:p="http://schemas.openxmlformats.org/presentationml/2006/main">
+  <p:cSld>
+    <p:spTree>
+      <p:nvGrpSpPr>
+        <p:cNvPr id="1" name="">
+          <a:extLst>
+            <a:ext uri="{FF2B5EF4-FFF2-40B4-BE49-F238E27FC236}">
+              <a16:creationId xmlns:a16="http://schemas.microsoft.com/office/drawing/2014/main" id="{56A0EDB1-BA91-83E2-B943-A8B013752F3A}"/>
+            </a:ext>
+          </a:extLst>
+        </p:cNvPr>
+        <p:cNvGrpSpPr/>
+        <p:nvPr/>
+      </p:nvGrpSpPr>
+      <p:grpSpPr>
+        <a:xfrm>
+          <a:off x="0" y="0"/>
+          <a:ext cx="0" cy="0"/>
+          <a:chOff x="0" y="0"/>
+          <a:chExt cx="0" cy="0"/>
+        </a:xfrm>
+      </p:grpSpPr>
+      <p:sp>
+        <p:nvSpPr>
+          <p:cNvPr id="9" name="四角形: 角を丸くする 8">
+            <a:extLst>
+              <a:ext uri="{FF2B5EF4-FFF2-40B4-BE49-F238E27FC236}">
+                <a16:creationId xmlns:a16="http://schemas.microsoft.com/office/drawing/2014/main" id="{206CFAF4-95BD-BC36-6F4C-A0D92B3E98A3}"/>
+              </a:ext>
+            </a:extLst>
+          </p:cNvPr>
+          <p:cNvSpPr/>
+          <p:nvPr/>
+        </p:nvSpPr>
+        <p:spPr>
+          <a:xfrm>
+            <a:off x="979714" y="2453951"/>
+            <a:ext cx="4133462" cy="1408922"/>
+          </a:xfrm>
+          <a:prstGeom prst="roundRect">
+            <a:avLst/>
+          </a:prstGeom>
+          <a:ln w="28575">
+            <a:solidFill>
+              <a:schemeClr val="tx1"/>
+            </a:solidFill>
+          </a:ln>
+        </p:spPr>
+        <p:style>
+          <a:lnRef idx="2">
+            <a:schemeClr val="accent6"/>
+          </a:lnRef>
+          <a:fillRef idx="1">
+            <a:schemeClr val="lt1"/>
+          </a:fillRef>
+          <a:effectRef idx="0">
+            <a:schemeClr val="accent6"/>
+          </a:effectRef>
+          <a:fontRef idx="minor">
+            <a:schemeClr val="dk1"/>
+          </a:fontRef>
+        </p:style>
+        <p:txBody>
+          <a:bodyPr rtlCol="0" anchor="ctr"/>
+          <a:lstStyle/>
+          <a:p>
+            <a:pPr algn="ctr"/>
+            <a:endParaRPr kumimoji="1" lang="ja-JP" altLang="en-US"/>
+          </a:p>
+        </p:txBody>
+      </p:sp>
+      <p:sp>
+        <p:nvSpPr>
+          <p:cNvPr id="10" name="テキスト ボックス 9">
+            <a:extLst>
+              <a:ext uri="{FF2B5EF4-FFF2-40B4-BE49-F238E27FC236}">
+                <a16:creationId xmlns:a16="http://schemas.microsoft.com/office/drawing/2014/main" id="{68010BA1-6CEC-B951-5C6A-80D85C4E50A7}"/>
+              </a:ext>
+            </a:extLst>
+          </p:cNvPr>
+          <p:cNvSpPr txBox="1"/>
+          <p:nvPr/>
+        </p:nvSpPr>
+        <p:spPr>
+          <a:xfrm>
+            <a:off x="945244" y="2089688"/>
+            <a:ext cx="877163" cy="369332"/>
+          </a:xfrm>
+          <a:prstGeom prst="rect">
+            <a:avLst/>
+          </a:prstGeom>
+          <a:noFill/>
+        </p:spPr>
+        <p:txBody>
+          <a:bodyPr wrap="none" rtlCol="0">
+            <a:spAutoFit/>
+          </a:bodyPr>
+          <a:lstStyle/>
+          <a:p>
+            <a:r>
+              <a:rPr lang="ja-JP" altLang="ja-JP" b="1" dirty="0"/>
+              <a:t>仕様書</a:t>
+            </a:r>
+            <a:endParaRPr kumimoji="1" lang="ja-JP" altLang="en-US" b="1" dirty="0"/>
+          </a:p>
+        </p:txBody>
+      </p:sp>
+      <p:cxnSp>
+        <p:nvCxnSpPr>
+          <p:cNvPr id="12" name="直線矢印コネクタ 11">
+            <a:extLst>
+              <a:ext uri="{FF2B5EF4-FFF2-40B4-BE49-F238E27FC236}">
+                <a16:creationId xmlns:a16="http://schemas.microsoft.com/office/drawing/2014/main" id="{FCCE081E-61D4-6AC9-6C8E-02762764F880}"/>
+              </a:ext>
+            </a:extLst>
+          </p:cNvPr>
+          <p:cNvCxnSpPr>
+            <a:cxnSpLocks/>
+          </p:cNvCxnSpPr>
+          <p:nvPr/>
+        </p:nvCxnSpPr>
+        <p:spPr>
+          <a:xfrm flipV="1">
+            <a:off x="2317229" y="3092912"/>
+            <a:ext cx="360000" cy="1"/>
+          </a:xfrm>
+          <a:prstGeom prst="straightConnector1">
+            <a:avLst/>
+          </a:prstGeom>
+          <a:ln w="28575">
+            <a:tailEnd type="triangle"/>
+          </a:ln>
+        </p:spPr>
+        <p:style>
+          <a:lnRef idx="1">
+            <a:schemeClr val="dk1"/>
+          </a:lnRef>
+          <a:fillRef idx="0">
+            <a:schemeClr val="dk1"/>
+          </a:fillRef>
+          <a:effectRef idx="0">
+            <a:schemeClr val="dk1"/>
+          </a:effectRef>
+          <a:fontRef idx="minor">
+            <a:schemeClr val="tx1"/>
+          </a:fontRef>
+        </p:style>
+      </p:cxnSp>
+      <p:cxnSp>
+        <p:nvCxnSpPr>
+          <p:cNvPr id="14" name="直線矢印コネクタ 13">
+            <a:extLst>
+              <a:ext uri="{FF2B5EF4-FFF2-40B4-BE49-F238E27FC236}">
+                <a16:creationId xmlns:a16="http://schemas.microsoft.com/office/drawing/2014/main" id="{3DF9E1C8-CD3C-FED7-CDFF-728128CDD98E}"/>
+              </a:ext>
+            </a:extLst>
+          </p:cNvPr>
+          <p:cNvCxnSpPr>
+            <a:cxnSpLocks/>
+          </p:cNvCxnSpPr>
+          <p:nvPr/>
+        </p:nvCxnSpPr>
+        <p:spPr>
+          <a:xfrm flipV="1">
+            <a:off x="3556410" y="3092912"/>
+            <a:ext cx="360000" cy="1"/>
+          </a:xfrm>
+          <a:prstGeom prst="straightConnector1">
+            <a:avLst/>
+          </a:prstGeom>
+          <a:ln w="28575">
+            <a:tailEnd type="triangle"/>
+          </a:ln>
+        </p:spPr>
+        <p:style>
+          <a:lnRef idx="1">
+            <a:schemeClr val="dk1"/>
+          </a:lnRef>
+          <a:fillRef idx="0">
+            <a:schemeClr val="dk1"/>
+          </a:fillRef>
+          <a:effectRef idx="0">
+            <a:schemeClr val="dk1"/>
+          </a:effectRef>
+          <a:fontRef idx="minor">
+            <a:schemeClr val="tx1"/>
+          </a:fontRef>
+        </p:style>
+      </p:cxnSp>
+      <p:grpSp>
+        <p:nvGrpSpPr>
+          <p:cNvPr id="28" name="グループ化 27">
+            <a:extLst>
+              <a:ext uri="{FF2B5EF4-FFF2-40B4-BE49-F238E27FC236}">
+                <a16:creationId xmlns:a16="http://schemas.microsoft.com/office/drawing/2014/main" id="{63F5A78E-4DA2-F082-4334-70B930985D4A}"/>
+              </a:ext>
+            </a:extLst>
+          </p:cNvPr>
+          <p:cNvGrpSpPr/>
+          <p:nvPr/>
+        </p:nvGrpSpPr>
+        <p:grpSpPr>
+          <a:xfrm>
+            <a:off x="1456001" y="2694724"/>
+            <a:ext cx="843275" cy="964330"/>
+            <a:chOff x="1456001" y="2778396"/>
+            <a:chExt cx="843275" cy="964330"/>
+          </a:xfrm>
+        </p:grpSpPr>
+        <p:pic>
+          <p:nvPicPr>
+            <p:cNvPr id="4" name="図 3">
+              <a:extLst>
+                <a:ext uri="{FF2B5EF4-FFF2-40B4-BE49-F238E27FC236}">
+                  <a16:creationId xmlns:a16="http://schemas.microsoft.com/office/drawing/2014/main" id="{6175C0D5-5A35-6A02-BC9B-55E08FF76323}"/>
+                </a:ext>
+              </a:extLst>
+            </p:cNvPr>
+            <p:cNvPicPr>
+              <a:picLocks noChangeAspect="1"/>
+            </p:cNvPicPr>
+            <p:nvPr/>
+          </p:nvPicPr>
+          <p:blipFill>
+            <a:blip r:embed="rId2">
+              <a:biLevel thresh="25000"/>
+              <a:extLst>
+                <a:ext uri="{28A0092B-C50C-407E-A947-70E740481C1C}">
+                  <a14:useLocalDpi xmlns:a14="http://schemas.microsoft.com/office/drawing/2010/main" val="0"/>
+                </a:ext>
+              </a:extLst>
+            </a:blip>
+            <a:stretch>
+              <a:fillRect/>
+            </a:stretch>
+          </p:blipFill>
+          <p:spPr>
+            <a:xfrm>
+              <a:off x="1456001" y="2778396"/>
+              <a:ext cx="756449" cy="756449"/>
+            </a:xfrm>
+            <a:prstGeom prst="rect">
+              <a:avLst/>
+            </a:prstGeom>
+          </p:spPr>
+        </p:pic>
+        <p:grpSp>
+          <p:nvGrpSpPr>
+            <p:cNvPr id="27" name="グループ化 26">
+              <a:extLst>
+                <a:ext uri="{FF2B5EF4-FFF2-40B4-BE49-F238E27FC236}">
+                  <a16:creationId xmlns:a16="http://schemas.microsoft.com/office/drawing/2014/main" id="{B3D6D603-90D0-561E-B338-67C44356207C}"/>
+                </a:ext>
+              </a:extLst>
+            </p:cNvPr>
+            <p:cNvGrpSpPr/>
+            <p:nvPr/>
+          </p:nvGrpSpPr>
+          <p:grpSpPr>
+            <a:xfrm>
+              <a:off x="1545787" y="3462036"/>
+              <a:ext cx="753489" cy="280690"/>
+              <a:chOff x="1545787" y="3462036"/>
+              <a:chExt cx="753489" cy="280690"/>
+            </a:xfrm>
+          </p:grpSpPr>
+          <p:sp>
+            <p:nvSpPr>
+              <p:cNvPr id="17" name="フローチャート: 書類 16">
+                <a:extLst>
+                  <a:ext uri="{FF2B5EF4-FFF2-40B4-BE49-F238E27FC236}">
+                    <a16:creationId xmlns:a16="http://schemas.microsoft.com/office/drawing/2014/main" id="{5181CF98-32F0-209F-1388-0DA2C878B667}"/>
+                  </a:ext>
+                </a:extLst>
+              </p:cNvPr>
+              <p:cNvSpPr/>
+              <p:nvPr/>
+            </p:nvSpPr>
+            <p:spPr>
+              <a:xfrm rot="5400000" flipV="1">
+                <a:off x="1782187" y="3225636"/>
+                <a:ext cx="280690" cy="753489"/>
+              </a:xfrm>
+              <a:prstGeom prst="flowChartDocument">
+                <a:avLst/>
+              </a:prstGeom>
+              <a:solidFill>
+                <a:schemeClr val="bg1"/>
+              </a:solidFill>
+              <a:ln w="28575"/>
+            </p:spPr>
+            <p:style>
+              <a:lnRef idx="2">
+                <a:schemeClr val="accent1">
+                  <a:shade val="15000"/>
+                </a:schemeClr>
+              </a:lnRef>
+              <a:fillRef idx="1">
+                <a:schemeClr val="accent1"/>
+              </a:fillRef>
+              <a:effectRef idx="0">
+                <a:schemeClr val="accent1"/>
+              </a:effectRef>
+              <a:fontRef idx="minor">
+                <a:schemeClr val="lt1"/>
+              </a:fontRef>
+            </p:style>
+            <p:txBody>
+              <a:bodyPr rtlCol="0" anchor="ctr"/>
+              <a:lstStyle/>
+              <a:p>
+                <a:pPr algn="ctr"/>
+                <a:endParaRPr kumimoji="1" lang="ja-JP" altLang="en-US" dirty="0"/>
+              </a:p>
+            </p:txBody>
+          </p:sp>
+          <p:sp>
+            <p:nvSpPr>
+              <p:cNvPr id="18" name="テキスト ボックス 17">
+                <a:extLst>
+                  <a:ext uri="{FF2B5EF4-FFF2-40B4-BE49-F238E27FC236}">
+                    <a16:creationId xmlns:a16="http://schemas.microsoft.com/office/drawing/2014/main" id="{5E346611-2F14-D31A-5469-0688C5DECAA1}"/>
+                  </a:ext>
+                </a:extLst>
+              </p:cNvPr>
+              <p:cNvSpPr txBox="1"/>
+              <p:nvPr/>
+            </p:nvSpPr>
+            <p:spPr>
+              <a:xfrm>
+                <a:off x="1545787" y="3500392"/>
+                <a:ext cx="276620" cy="203976"/>
+              </a:xfrm>
+              <a:prstGeom prst="rect">
+                <a:avLst/>
+              </a:prstGeom>
+              <a:noFill/>
+            </p:spPr>
+            <p:txBody>
+              <a:bodyPr wrap="none" rtlCol="0">
+                <a:spAutoFit/>
+              </a:bodyPr>
+              <a:lstStyle/>
+              <a:p>
+                <a:r>
+                  <a:rPr kumimoji="1" lang="en-US" altLang="ja-JP" sz="1100" b="1" dirty="0"/>
+                  <a:t>V1</a:t>
+                </a:r>
+                <a:endParaRPr kumimoji="1" lang="ja-JP" altLang="en-US" sz="1100" b="1" dirty="0"/>
+              </a:p>
+            </p:txBody>
+          </p:sp>
+        </p:grpSp>
+      </p:grpSp>
+      <p:sp>
+        <p:nvSpPr>
+          <p:cNvPr id="26" name="吹き出し: 線 25">
+            <a:extLst>
+              <a:ext uri="{FF2B5EF4-FFF2-40B4-BE49-F238E27FC236}">
+                <a16:creationId xmlns:a16="http://schemas.microsoft.com/office/drawing/2014/main" id="{A0640CC0-0392-BF88-905A-33E093B33D7F}"/>
+              </a:ext>
+            </a:extLst>
+          </p:cNvPr>
+          <p:cNvSpPr/>
+          <p:nvPr/>
+        </p:nvSpPr>
+        <p:spPr>
+          <a:xfrm>
+            <a:off x="5646828" y="2363517"/>
+            <a:ext cx="1464906" cy="631609"/>
+          </a:xfrm>
+          <a:prstGeom prst="borderCallout1">
+            <a:avLst>
+              <a:gd name="adj1" fmla="val 46818"/>
+              <a:gd name="adj2" fmla="val -8333"/>
+              <a:gd name="adj3" fmla="val 120089"/>
+              <a:gd name="adj4" fmla="val -70642"/>
+            </a:avLst>
+          </a:prstGeom>
+          <a:ln>
+            <a:solidFill>
+              <a:schemeClr val="tx1"/>
+            </a:solidFill>
+          </a:ln>
+        </p:spPr>
+        <p:style>
+          <a:lnRef idx="2">
+            <a:schemeClr val="accent6"/>
+          </a:lnRef>
+          <a:fillRef idx="1">
+            <a:schemeClr val="lt1"/>
+          </a:fillRef>
+          <a:effectRef idx="0">
+            <a:schemeClr val="accent6"/>
+          </a:effectRef>
+          <a:fontRef idx="minor">
+            <a:schemeClr val="dk1"/>
+          </a:fontRef>
+        </p:style>
+        <p:txBody>
+          <a:bodyPr rtlCol="0" anchor="ctr"/>
+          <a:lstStyle/>
+          <a:p>
+            <a:pPr algn="ctr"/>
+            <a:r>
+              <a:rPr kumimoji="1" lang="ja-JP" altLang="en-US" dirty="0"/>
+              <a:t>最終版</a:t>
+            </a:r>
+          </a:p>
+        </p:txBody>
+      </p:sp>
+      <p:grpSp>
+        <p:nvGrpSpPr>
+          <p:cNvPr id="29" name="グループ化 28">
+            <a:extLst>
+              <a:ext uri="{FF2B5EF4-FFF2-40B4-BE49-F238E27FC236}">
+                <a16:creationId xmlns:a16="http://schemas.microsoft.com/office/drawing/2014/main" id="{AC1409EF-F5D8-B91B-0EDB-78810CBC93FD}"/>
+              </a:ext>
+            </a:extLst>
+          </p:cNvPr>
+          <p:cNvGrpSpPr/>
+          <p:nvPr/>
+        </p:nvGrpSpPr>
+        <p:grpSpPr>
+          <a:xfrm>
+            <a:off x="2695182" y="2685086"/>
+            <a:ext cx="843275" cy="983606"/>
+            <a:chOff x="1456001" y="2778396"/>
+            <a:chExt cx="843275" cy="983606"/>
+          </a:xfrm>
+        </p:grpSpPr>
+        <p:pic>
+          <p:nvPicPr>
+            <p:cNvPr id="30" name="図 29">
+              <a:extLst>
+                <a:ext uri="{FF2B5EF4-FFF2-40B4-BE49-F238E27FC236}">
+                  <a16:creationId xmlns:a16="http://schemas.microsoft.com/office/drawing/2014/main" id="{AFC111F5-A332-8761-0875-BA2C87D59048}"/>
+                </a:ext>
+              </a:extLst>
+            </p:cNvPr>
+            <p:cNvPicPr>
+              <a:picLocks noChangeAspect="1"/>
+            </p:cNvPicPr>
+            <p:nvPr/>
+          </p:nvPicPr>
+          <p:blipFill>
+            <a:blip r:embed="rId2">
+              <a:biLevel thresh="25000"/>
+              <a:extLst>
+                <a:ext uri="{28A0092B-C50C-407E-A947-70E740481C1C}">
+                  <a14:useLocalDpi xmlns:a14="http://schemas.microsoft.com/office/drawing/2010/main" val="0"/>
+                </a:ext>
+              </a:extLst>
+            </a:blip>
+            <a:stretch>
+              <a:fillRect/>
+            </a:stretch>
+          </p:blipFill>
+          <p:spPr>
+            <a:xfrm>
+              <a:off x="1456001" y="2778396"/>
+              <a:ext cx="756449" cy="756449"/>
+            </a:xfrm>
+            <a:prstGeom prst="rect">
+              <a:avLst/>
+            </a:prstGeom>
+          </p:spPr>
+        </p:pic>
+        <p:grpSp>
+          <p:nvGrpSpPr>
+            <p:cNvPr id="31" name="グループ化 30">
+              <a:extLst>
+                <a:ext uri="{FF2B5EF4-FFF2-40B4-BE49-F238E27FC236}">
+                  <a16:creationId xmlns:a16="http://schemas.microsoft.com/office/drawing/2014/main" id="{A0B6D03F-8AD9-02FB-BF92-CE7AB2905DEB}"/>
+                </a:ext>
+              </a:extLst>
+            </p:cNvPr>
+            <p:cNvGrpSpPr/>
+            <p:nvPr/>
+          </p:nvGrpSpPr>
+          <p:grpSpPr>
+            <a:xfrm>
+              <a:off x="1545787" y="3462036"/>
+              <a:ext cx="753489" cy="299966"/>
+              <a:chOff x="1545787" y="3462036"/>
+              <a:chExt cx="753489" cy="299966"/>
+            </a:xfrm>
+          </p:grpSpPr>
+          <p:sp>
+            <p:nvSpPr>
+              <p:cNvPr id="32" name="フローチャート: 書類 31">
+                <a:extLst>
+                  <a:ext uri="{FF2B5EF4-FFF2-40B4-BE49-F238E27FC236}">
+                    <a16:creationId xmlns:a16="http://schemas.microsoft.com/office/drawing/2014/main" id="{76F71627-10B1-2322-C5DD-377D735FD575}"/>
+                  </a:ext>
+                </a:extLst>
+              </p:cNvPr>
+              <p:cNvSpPr/>
+              <p:nvPr/>
+            </p:nvSpPr>
+            <p:spPr>
+              <a:xfrm rot="5400000" flipV="1">
+                <a:off x="1782187" y="3225636"/>
+                <a:ext cx="280690" cy="753489"/>
+              </a:xfrm>
+              <a:prstGeom prst="flowChartDocument">
+                <a:avLst/>
+              </a:prstGeom>
+              <a:solidFill>
+                <a:schemeClr val="bg1"/>
+              </a:solidFill>
+              <a:ln w="28575"/>
+            </p:spPr>
+            <p:style>
+              <a:lnRef idx="2">
+                <a:schemeClr val="accent1">
+                  <a:shade val="15000"/>
+                </a:schemeClr>
+              </a:lnRef>
+              <a:fillRef idx="1">
+                <a:schemeClr val="accent1"/>
+              </a:fillRef>
+              <a:effectRef idx="0">
+                <a:schemeClr val="accent1"/>
+              </a:effectRef>
+              <a:fontRef idx="minor">
+                <a:schemeClr val="lt1"/>
+              </a:fontRef>
+            </p:style>
+            <p:txBody>
+              <a:bodyPr rtlCol="0" anchor="ctr"/>
+              <a:lstStyle/>
+              <a:p>
+                <a:pPr algn="ctr"/>
+                <a:endParaRPr kumimoji="1" lang="ja-JP" altLang="en-US" dirty="0"/>
+              </a:p>
+            </p:txBody>
+          </p:sp>
+          <p:sp>
+            <p:nvSpPr>
+              <p:cNvPr id="33" name="テキスト ボックス 32">
+                <a:extLst>
+                  <a:ext uri="{FF2B5EF4-FFF2-40B4-BE49-F238E27FC236}">
+                    <a16:creationId xmlns:a16="http://schemas.microsoft.com/office/drawing/2014/main" id="{8FC96312-6E60-89C6-AB70-DB156304E132}"/>
+                  </a:ext>
+                </a:extLst>
+              </p:cNvPr>
+              <p:cNvSpPr txBox="1"/>
+              <p:nvPr/>
+            </p:nvSpPr>
+            <p:spPr>
+              <a:xfrm>
+                <a:off x="1545787" y="3500392"/>
+                <a:ext cx="360996" cy="261610"/>
+              </a:xfrm>
+              <a:prstGeom prst="rect">
+                <a:avLst/>
+              </a:prstGeom>
+              <a:noFill/>
+            </p:spPr>
+            <p:txBody>
+              <a:bodyPr wrap="none" rtlCol="0">
+                <a:spAutoFit/>
+              </a:bodyPr>
+              <a:lstStyle/>
+              <a:p>
+                <a:r>
+                  <a:rPr kumimoji="1" lang="en-US" altLang="ja-JP" sz="1100" b="1" dirty="0"/>
+                  <a:t>V2</a:t>
+                </a:r>
+                <a:endParaRPr kumimoji="1" lang="ja-JP" altLang="en-US" sz="1100" b="1" dirty="0"/>
+              </a:p>
+            </p:txBody>
+          </p:sp>
+        </p:grpSp>
+      </p:grpSp>
+      <p:grpSp>
+        <p:nvGrpSpPr>
+          <p:cNvPr id="34" name="グループ化 33">
+            <a:extLst>
+              <a:ext uri="{FF2B5EF4-FFF2-40B4-BE49-F238E27FC236}">
+                <a16:creationId xmlns:a16="http://schemas.microsoft.com/office/drawing/2014/main" id="{39F312E6-342F-3C94-BFEE-EDE2520F22D0}"/>
+              </a:ext>
+            </a:extLst>
+          </p:cNvPr>
+          <p:cNvGrpSpPr/>
+          <p:nvPr/>
+        </p:nvGrpSpPr>
+        <p:grpSpPr>
+          <a:xfrm>
+            <a:off x="3934364" y="2685086"/>
+            <a:ext cx="843275" cy="983606"/>
+            <a:chOff x="1456001" y="2778396"/>
+            <a:chExt cx="843275" cy="983606"/>
+          </a:xfrm>
+        </p:grpSpPr>
+        <p:pic>
+          <p:nvPicPr>
+            <p:cNvPr id="35" name="図 34">
+              <a:extLst>
+                <a:ext uri="{FF2B5EF4-FFF2-40B4-BE49-F238E27FC236}">
+                  <a16:creationId xmlns:a16="http://schemas.microsoft.com/office/drawing/2014/main" id="{0CADB9E6-5CF4-B14E-D298-CFBAEFAC8FDD}"/>
+                </a:ext>
+              </a:extLst>
+            </p:cNvPr>
+            <p:cNvPicPr>
+              <a:picLocks noChangeAspect="1"/>
+            </p:cNvPicPr>
+            <p:nvPr/>
+          </p:nvPicPr>
+          <p:blipFill>
+            <a:blip r:embed="rId2">
+              <a:biLevel thresh="25000"/>
+              <a:extLst>
+                <a:ext uri="{28A0092B-C50C-407E-A947-70E740481C1C}">
+                  <a14:useLocalDpi xmlns:a14="http://schemas.microsoft.com/office/drawing/2010/main" val="0"/>
+                </a:ext>
+              </a:extLst>
+            </a:blip>
+            <a:stretch>
+              <a:fillRect/>
+            </a:stretch>
+          </p:blipFill>
+          <p:spPr>
+            <a:xfrm>
+              <a:off x="1456001" y="2778396"/>
+              <a:ext cx="756449" cy="756449"/>
+            </a:xfrm>
+            <a:prstGeom prst="rect">
+              <a:avLst/>
+            </a:prstGeom>
+          </p:spPr>
+        </p:pic>
+        <p:grpSp>
+          <p:nvGrpSpPr>
+            <p:cNvPr id="36" name="グループ化 35">
+              <a:extLst>
+                <a:ext uri="{FF2B5EF4-FFF2-40B4-BE49-F238E27FC236}">
+                  <a16:creationId xmlns:a16="http://schemas.microsoft.com/office/drawing/2014/main" id="{EC8B446D-8C25-80EE-C89B-0F08B3F5B50D}"/>
+                </a:ext>
+              </a:extLst>
+            </p:cNvPr>
+            <p:cNvGrpSpPr/>
+            <p:nvPr/>
+          </p:nvGrpSpPr>
+          <p:grpSpPr>
+            <a:xfrm>
+              <a:off x="1545787" y="3462036"/>
+              <a:ext cx="753489" cy="299966"/>
+              <a:chOff x="1545787" y="3462036"/>
+              <a:chExt cx="753489" cy="299966"/>
+            </a:xfrm>
+          </p:grpSpPr>
+          <p:sp>
+            <p:nvSpPr>
+              <p:cNvPr id="37" name="フローチャート: 書類 36">
+                <a:extLst>
+                  <a:ext uri="{FF2B5EF4-FFF2-40B4-BE49-F238E27FC236}">
+                    <a16:creationId xmlns:a16="http://schemas.microsoft.com/office/drawing/2014/main" id="{17652807-C517-7F09-D16A-B0A7A31C366A}"/>
+                  </a:ext>
+                </a:extLst>
+              </p:cNvPr>
+              <p:cNvSpPr/>
+              <p:nvPr/>
+            </p:nvSpPr>
+            <p:spPr>
+              <a:xfrm rot="5400000" flipV="1">
+                <a:off x="1782187" y="3225636"/>
+                <a:ext cx="280690" cy="753489"/>
+              </a:xfrm>
+              <a:prstGeom prst="flowChartDocument">
+                <a:avLst/>
+              </a:prstGeom>
+              <a:solidFill>
+                <a:schemeClr val="bg1"/>
+              </a:solidFill>
+              <a:ln w="28575"/>
+            </p:spPr>
+            <p:style>
+              <a:lnRef idx="2">
+                <a:schemeClr val="accent1">
+                  <a:shade val="15000"/>
+                </a:schemeClr>
+              </a:lnRef>
+              <a:fillRef idx="1">
+                <a:schemeClr val="accent1"/>
+              </a:fillRef>
+              <a:effectRef idx="0">
+                <a:schemeClr val="accent1"/>
+              </a:effectRef>
+              <a:fontRef idx="minor">
+                <a:schemeClr val="lt1"/>
+              </a:fontRef>
+            </p:style>
+            <p:txBody>
+              <a:bodyPr rtlCol="0" anchor="ctr"/>
+              <a:lstStyle/>
+              <a:p>
+                <a:pPr algn="ctr"/>
+                <a:endParaRPr kumimoji="1" lang="ja-JP" altLang="en-US" dirty="0"/>
+              </a:p>
+            </p:txBody>
+          </p:sp>
+          <p:sp>
+            <p:nvSpPr>
+              <p:cNvPr id="38" name="テキスト ボックス 37">
+                <a:extLst>
+                  <a:ext uri="{FF2B5EF4-FFF2-40B4-BE49-F238E27FC236}">
+                    <a16:creationId xmlns:a16="http://schemas.microsoft.com/office/drawing/2014/main" id="{C9CDCD93-3D15-6C8B-88CA-D1ABAA0D8E71}"/>
+                  </a:ext>
+                </a:extLst>
+              </p:cNvPr>
+              <p:cNvSpPr txBox="1"/>
+              <p:nvPr/>
+            </p:nvSpPr>
+            <p:spPr>
+              <a:xfrm>
+                <a:off x="1545787" y="3500392"/>
+                <a:ext cx="704039" cy="261610"/>
+              </a:xfrm>
+              <a:prstGeom prst="rect">
+                <a:avLst/>
+              </a:prstGeom>
+              <a:noFill/>
+            </p:spPr>
+            <p:txBody>
+              <a:bodyPr wrap="none" rtlCol="0">
+                <a:spAutoFit/>
+              </a:bodyPr>
+              <a:lstStyle/>
+              <a:p>
+                <a:r>
+                  <a:rPr kumimoji="1" lang="en-US" altLang="ja-JP" sz="1100" b="1" dirty="0"/>
+                  <a:t>V</a:t>
+                </a:r>
+                <a:r>
+                  <a:rPr kumimoji="1" lang="ja-JP" altLang="en-US" sz="1100" b="1" dirty="0"/>
+                  <a:t>・・・</a:t>
+                </a:r>
+              </a:p>
+            </p:txBody>
+          </p:sp>
+        </p:grpSp>
+      </p:grpSp>
+    </p:spTree>
+    <p:extLst>
+      <p:ext uri="{BB962C8B-B14F-4D97-AF65-F5344CB8AC3E}">
+        <p14:creationId xmlns:p14="http://schemas.microsoft.com/office/powerpoint/2010/main" val="2638460635"/>
+      </p:ext>
+    </p:extLst>
+  </p:cSld>
+  <p:clrMapOvr>
+    <a:masterClrMapping/>
+  </p:clrMapOvr>
+</p:sld>
+</file>
+
+<file path=ppt/slides/slide5.xml><?xml version="1.0" encoding="utf-8"?>
+<p:sld xmlns:a="http://schemas.openxmlformats.org/drawingml/2006/main" xmlns:r="http://schemas.openxmlformats.org/officeDocument/2006/relationships" xmlns:p="http://schemas.openxmlformats.org/presentationml/2006/main">
+  <p:cSld>
+    <p:spTree>
+      <p:nvGrpSpPr>
+        <p:cNvPr id="1" name="">
+          <a:extLst>
+            <a:ext uri="{FF2B5EF4-FFF2-40B4-BE49-F238E27FC236}">
+              <a16:creationId xmlns:a16="http://schemas.microsoft.com/office/drawing/2014/main" id="{11DD33B4-F237-7ADF-1955-C5809F4DF370}"/>
+            </a:ext>
+          </a:extLst>
+        </p:cNvPr>
+        <p:cNvGrpSpPr/>
+        <p:nvPr/>
+      </p:nvGrpSpPr>
+      <p:grpSpPr>
+        <a:xfrm>
+          <a:off x="0" y="0"/>
+          <a:ext cx="0" cy="0"/>
+          <a:chOff x="0" y="0"/>
+          <a:chExt cx="0" cy="0"/>
+        </a:xfrm>
+      </p:grpSpPr>
+    </p:spTree>
+    <p:extLst>
+      <p:ext uri="{BB962C8B-B14F-4D97-AF65-F5344CB8AC3E}">
+        <p14:creationId xmlns:p14="http://schemas.microsoft.com/office/powerpoint/2010/main" val="1803346533"/>
+      </p:ext>
+    </p:extLst>
+  </p:cSld>
+  <p:clrMapOvr>
+    <a:masterClrMapping/>
+  </p:clrMapOvr>
+</p:sld>
+</file>
+
+<file path=ppt/slides/slide6.xml><?xml version="1.0" encoding="utf-8"?>
+<p:sld xmlns:a="http://schemas.openxmlformats.org/drawingml/2006/main" xmlns:r="http://schemas.openxmlformats.org/officeDocument/2006/relationships" xmlns:p="http://schemas.openxmlformats.org/presentationml/2006/main">
+  <p:cSld>
+    <p:spTree>
+      <p:nvGrpSpPr>
+        <p:cNvPr id="1" name="">
+          <a:extLst>
+            <a:ext uri="{FF2B5EF4-FFF2-40B4-BE49-F238E27FC236}">
+              <a16:creationId xmlns:a16="http://schemas.microsoft.com/office/drawing/2014/main" id="{F07A6E4B-D34F-9558-DD3D-691C814EC4AC}"/>
+            </a:ext>
+          </a:extLst>
+        </p:cNvPr>
+        <p:cNvGrpSpPr/>
+        <p:nvPr/>
+      </p:nvGrpSpPr>
+      <p:grpSpPr>
+        <a:xfrm>
+          <a:off x="0" y="0"/>
+          <a:ext cx="0" cy="0"/>
+          <a:chOff x="0" y="0"/>
+          <a:chExt cx="0" cy="0"/>
+        </a:xfrm>
+      </p:grpSpPr>
+      <p:pic>
+        <p:nvPicPr>
+          <p:cNvPr id="2050" name="Picture 2" descr="顔のシルエット | 無料のAi・PNG白黒シルエットイラスト">
+            <a:extLst>
+              <a:ext uri="{FF2B5EF4-FFF2-40B4-BE49-F238E27FC236}">
+                <a16:creationId xmlns:a16="http://schemas.microsoft.com/office/drawing/2014/main" id="{D41AE714-5CC7-2426-82D4-69D5DD4AF92B}"/>
+              </a:ext>
+            </a:extLst>
+          </p:cNvPr>
+          <p:cNvPicPr>
+            <a:picLocks noChangeAspect="1" noChangeArrowheads="1"/>
+          </p:cNvPicPr>
+          <p:nvPr/>
+        </p:nvPicPr>
+        <p:blipFill>
+          <a:blip r:embed="rId2">
+            <a:duotone>
+              <a:schemeClr val="accent4">
+                <a:shade val="45000"/>
+                <a:satMod val="135000"/>
+              </a:schemeClr>
+              <a:prstClr val="white"/>
+            </a:duotone>
+            <a:extLst>
+              <a:ext uri="{28A0092B-C50C-407E-A947-70E740481C1C}">
+                <a14:useLocalDpi xmlns:a14="http://schemas.microsoft.com/office/drawing/2010/main" val="0"/>
+              </a:ext>
+            </a:extLst>
+          </a:blip>
+          <a:srcRect/>
+          <a:stretch>
+            <a:fillRect/>
+          </a:stretch>
+        </p:blipFill>
+        <p:spPr bwMode="auto">
+          <a:xfrm>
+            <a:off x="8131884" y="3991947"/>
+            <a:ext cx="1178385" cy="1109068"/>
+          </a:xfrm>
+          <a:prstGeom prst="rect">
+            <a:avLst/>
+          </a:prstGeom>
+          <a:noFill/>
+          <a:extLst>
+            <a:ext uri="{909E8E84-426E-40DD-AFC4-6F175D3DCCD1}">
+              <a14:hiddenFill xmlns:a14="http://schemas.microsoft.com/office/drawing/2010/main">
+                <a:solidFill>
+                  <a:srgbClr val="FFFFFF"/>
+                </a:solidFill>
+              </a14:hiddenFill>
+            </a:ext>
+          </a:extLst>
+        </p:spPr>
+      </p:pic>
+      <p:pic>
+        <p:nvPicPr>
+          <p:cNvPr id="2052" name="Picture 4" descr="デスクトップ型パソコン・サーバのシルエット02 | 無料のAi・PNG ...">
+            <a:extLst>
+              <a:ext uri="{FF2B5EF4-FFF2-40B4-BE49-F238E27FC236}">
+                <a16:creationId xmlns:a16="http://schemas.microsoft.com/office/drawing/2014/main" id="{951A8F52-7B7A-CDDA-249A-92E530B993E6}"/>
+              </a:ext>
+            </a:extLst>
+          </p:cNvPr>
+          <p:cNvPicPr>
+            <a:picLocks noChangeAspect="1" noChangeArrowheads="1"/>
+          </p:cNvPicPr>
+          <p:nvPr/>
+        </p:nvPicPr>
+        <p:blipFill>
+          <a:blip r:embed="rId3">
+            <a:extLst>
+              <a:ext uri="{28A0092B-C50C-407E-A947-70E740481C1C}">
+                <a14:useLocalDpi xmlns:a14="http://schemas.microsoft.com/office/drawing/2010/main" val="0"/>
+              </a:ext>
+            </a:extLst>
+          </a:blip>
+          <a:srcRect/>
+          <a:stretch>
+            <a:fillRect/>
+          </a:stretch>
+        </p:blipFill>
+        <p:spPr bwMode="auto">
+          <a:xfrm>
+            <a:off x="3637518" y="2201381"/>
+            <a:ext cx="1066532" cy="950884"/>
+          </a:xfrm>
+          <a:prstGeom prst="rect">
+            <a:avLst/>
+          </a:prstGeom>
+          <a:noFill/>
+          <a:extLst>
+            <a:ext uri="{909E8E84-426E-40DD-AFC4-6F175D3DCCD1}">
+              <a14:hiddenFill xmlns:a14="http://schemas.microsoft.com/office/drawing/2010/main">
+                <a:solidFill>
+                  <a:srgbClr val="FFFFFF"/>
+                </a:solidFill>
+              </a14:hiddenFill>
+            </a:ext>
+          </a:extLst>
+        </p:spPr>
+      </p:pic>
+      <p:pic>
+        <p:nvPicPr>
+          <p:cNvPr id="5" name="Picture 2" descr="顔のシルエット | 無料のAi・PNG白黒シルエットイラスト">
+            <a:extLst>
+              <a:ext uri="{FF2B5EF4-FFF2-40B4-BE49-F238E27FC236}">
+                <a16:creationId xmlns:a16="http://schemas.microsoft.com/office/drawing/2014/main" id="{AD461FC0-9EFE-CC82-BA6D-FF8343E9BD87}"/>
+              </a:ext>
+            </a:extLst>
+          </p:cNvPr>
+          <p:cNvPicPr>
+            <a:picLocks noChangeAspect="1" noChangeArrowheads="1"/>
+          </p:cNvPicPr>
+          <p:nvPr/>
+        </p:nvPicPr>
+        <p:blipFill>
+          <a:blip r:embed="rId2">
+            <a:extLst>
+              <a:ext uri="{28A0092B-C50C-407E-A947-70E740481C1C}">
+                <a14:useLocalDpi xmlns:a14="http://schemas.microsoft.com/office/drawing/2010/main" val="0"/>
+              </a:ext>
+            </a:extLst>
+          </a:blip>
+          <a:srcRect/>
+          <a:stretch>
+            <a:fillRect/>
+          </a:stretch>
+        </p:blipFill>
+        <p:spPr bwMode="auto">
+          <a:xfrm>
+            <a:off x="2163402" y="3991947"/>
+            <a:ext cx="1178385" cy="1109068"/>
+          </a:xfrm>
+          <a:prstGeom prst="rect">
+            <a:avLst/>
+          </a:prstGeom>
+          <a:noFill/>
+          <a:extLst>
+            <a:ext uri="{909E8E84-426E-40DD-AFC4-6F175D3DCCD1}">
+              <a14:hiddenFill xmlns:a14="http://schemas.microsoft.com/office/drawing/2010/main">
+                <a:solidFill>
+                  <a:srgbClr val="FFFFFF"/>
+                </a:solidFill>
+              </a14:hiddenFill>
+            </a:ext>
+          </a:extLst>
+        </p:spPr>
+      </p:pic>
+      <p:grpSp>
+        <p:nvGrpSpPr>
+          <p:cNvPr id="12" name="グループ化 11">
+            <a:extLst>
+              <a:ext uri="{FF2B5EF4-FFF2-40B4-BE49-F238E27FC236}">
+                <a16:creationId xmlns:a16="http://schemas.microsoft.com/office/drawing/2014/main" id="{5810DA68-7A5D-8C21-6180-D33ABB27BF73}"/>
+              </a:ext>
+            </a:extLst>
+          </p:cNvPr>
+          <p:cNvGrpSpPr/>
+          <p:nvPr/>
+        </p:nvGrpSpPr>
+        <p:grpSpPr>
+          <a:xfrm>
+            <a:off x="3341787" y="3496842"/>
+            <a:ext cx="828997" cy="926341"/>
+            <a:chOff x="3341787" y="3496842"/>
+            <a:chExt cx="828997" cy="926341"/>
+          </a:xfrm>
+        </p:grpSpPr>
+        <p:cxnSp>
+          <p:nvCxnSpPr>
+            <p:cNvPr id="8" name="直線矢印コネクタ 7">
+              <a:extLst>
+                <a:ext uri="{FF2B5EF4-FFF2-40B4-BE49-F238E27FC236}">
+                  <a16:creationId xmlns:a16="http://schemas.microsoft.com/office/drawing/2014/main" id="{CD8ACAEA-117B-5B3E-D520-CCA18C8B99A0}"/>
+                </a:ext>
+              </a:extLst>
+            </p:cNvPr>
+            <p:cNvCxnSpPr/>
+            <p:nvPr/>
+          </p:nvCxnSpPr>
+          <p:spPr>
+            <a:xfrm flipV="1">
+              <a:off x="3341787" y="3496842"/>
+              <a:ext cx="828997" cy="664611"/>
+            </a:xfrm>
+            <a:prstGeom prst="straightConnector1">
+              <a:avLst/>
+            </a:prstGeom>
+            <a:ln w="57150">
+              <a:solidFill>
+                <a:schemeClr val="tx1"/>
+              </a:solidFill>
+              <a:tailEnd type="triangle"/>
+            </a:ln>
+          </p:spPr>
+          <p:style>
+            <a:lnRef idx="1">
+              <a:schemeClr val="accent1"/>
+            </a:lnRef>
+            <a:fillRef idx="0">
+              <a:schemeClr val="accent1"/>
+            </a:fillRef>
+            <a:effectRef idx="0">
+              <a:schemeClr val="accent1"/>
+            </a:effectRef>
+            <a:fontRef idx="minor">
+              <a:schemeClr val="tx1"/>
+            </a:fontRef>
+          </p:style>
+        </p:cxnSp>
+        <p:cxnSp>
+          <p:nvCxnSpPr>
+            <p:cNvPr id="9" name="直線矢印コネクタ 8">
+              <a:extLst>
+                <a:ext uri="{FF2B5EF4-FFF2-40B4-BE49-F238E27FC236}">
+                  <a16:creationId xmlns:a16="http://schemas.microsoft.com/office/drawing/2014/main" id="{D27594ED-81D5-AECB-6433-EEA5FAC6E6FE}"/>
+                </a:ext>
+              </a:extLst>
+            </p:cNvPr>
+            <p:cNvCxnSpPr>
+              <a:cxnSpLocks/>
+            </p:cNvCxnSpPr>
+            <p:nvPr/>
+          </p:nvCxnSpPr>
+          <p:spPr>
+            <a:xfrm rot="10800000" flipV="1">
+              <a:off x="3341787" y="3758572"/>
+              <a:ext cx="828997" cy="664611"/>
+            </a:xfrm>
+            <a:prstGeom prst="straightConnector1">
+              <a:avLst/>
+            </a:prstGeom>
+            <a:ln w="57150">
+              <a:solidFill>
+                <a:schemeClr val="tx1"/>
+              </a:solidFill>
+              <a:tailEnd type="triangle"/>
+            </a:ln>
+          </p:spPr>
+          <p:style>
+            <a:lnRef idx="1">
+              <a:schemeClr val="accent1"/>
+            </a:lnRef>
+            <a:fillRef idx="0">
+              <a:schemeClr val="accent1"/>
+            </a:fillRef>
+            <a:effectRef idx="0">
+              <a:schemeClr val="accent1"/>
+            </a:effectRef>
+            <a:fontRef idx="minor">
+              <a:schemeClr val="tx1"/>
+            </a:fontRef>
+          </p:style>
+        </p:cxnSp>
+      </p:grpSp>
+      <p:grpSp>
+        <p:nvGrpSpPr>
+          <p:cNvPr id="13" name="グループ化 12">
+            <a:extLst>
+              <a:ext uri="{FF2B5EF4-FFF2-40B4-BE49-F238E27FC236}">
+                <a16:creationId xmlns:a16="http://schemas.microsoft.com/office/drawing/2014/main" id="{7498E612-0918-931A-16D9-A645DBB77331}"/>
+              </a:ext>
+            </a:extLst>
+          </p:cNvPr>
+          <p:cNvGrpSpPr/>
+          <p:nvPr/>
+        </p:nvGrpSpPr>
+        <p:grpSpPr>
+          <a:xfrm flipV="1">
+            <a:off x="7153217" y="3496842"/>
+            <a:ext cx="828997" cy="926341"/>
+            <a:chOff x="3341787" y="3496842"/>
+            <a:chExt cx="828997" cy="926341"/>
+          </a:xfrm>
+        </p:grpSpPr>
+        <p:cxnSp>
+          <p:nvCxnSpPr>
+            <p:cNvPr id="14" name="直線矢印コネクタ 13">
+              <a:extLst>
+                <a:ext uri="{FF2B5EF4-FFF2-40B4-BE49-F238E27FC236}">
+                  <a16:creationId xmlns:a16="http://schemas.microsoft.com/office/drawing/2014/main" id="{013C4CE9-63B0-EFB7-7982-F03C8B1A4345}"/>
+                </a:ext>
+              </a:extLst>
+            </p:cNvPr>
+            <p:cNvCxnSpPr/>
+            <p:nvPr/>
+          </p:nvCxnSpPr>
+          <p:spPr>
+            <a:xfrm flipV="1">
+              <a:off x="3341787" y="3496842"/>
+              <a:ext cx="828997" cy="664611"/>
+            </a:xfrm>
+            <a:prstGeom prst="straightConnector1">
+              <a:avLst/>
+            </a:prstGeom>
+            <a:ln w="57150">
+              <a:solidFill>
+                <a:schemeClr val="tx1"/>
+              </a:solidFill>
+              <a:tailEnd type="triangle"/>
+            </a:ln>
+          </p:spPr>
+          <p:style>
+            <a:lnRef idx="1">
+              <a:schemeClr val="accent1"/>
+            </a:lnRef>
+            <a:fillRef idx="0">
+              <a:schemeClr val="accent1"/>
+            </a:fillRef>
+            <a:effectRef idx="0">
+              <a:schemeClr val="accent1"/>
+            </a:effectRef>
+            <a:fontRef idx="minor">
+              <a:schemeClr val="tx1"/>
+            </a:fontRef>
+          </p:style>
+        </p:cxnSp>
+        <p:cxnSp>
+          <p:nvCxnSpPr>
+            <p:cNvPr id="15" name="直線矢印コネクタ 14">
+              <a:extLst>
+                <a:ext uri="{FF2B5EF4-FFF2-40B4-BE49-F238E27FC236}">
+                  <a16:creationId xmlns:a16="http://schemas.microsoft.com/office/drawing/2014/main" id="{16DA9C5B-8FC0-1E97-B7C6-B7445E57E3AD}"/>
+                </a:ext>
+              </a:extLst>
+            </p:cNvPr>
+            <p:cNvCxnSpPr>
+              <a:cxnSpLocks/>
+            </p:cNvCxnSpPr>
+            <p:nvPr/>
+          </p:nvCxnSpPr>
+          <p:spPr>
+            <a:xfrm rot="10800000" flipV="1">
+              <a:off x="3341787" y="3758572"/>
+              <a:ext cx="828997" cy="664611"/>
+            </a:xfrm>
+            <a:prstGeom prst="straightConnector1">
+              <a:avLst/>
+            </a:prstGeom>
+            <a:ln w="57150">
+              <a:solidFill>
+                <a:schemeClr val="tx1"/>
+              </a:solidFill>
+              <a:tailEnd type="triangle"/>
+            </a:ln>
+          </p:spPr>
+          <p:style>
+            <a:lnRef idx="1">
+              <a:schemeClr val="accent1"/>
+            </a:lnRef>
+            <a:fillRef idx="0">
+              <a:schemeClr val="accent1"/>
+            </a:fillRef>
+            <a:effectRef idx="0">
+              <a:schemeClr val="accent1"/>
+            </a:effectRef>
+            <a:fontRef idx="minor">
+              <a:schemeClr val="tx1"/>
+            </a:fontRef>
+          </p:style>
+        </p:cxnSp>
+      </p:grpSp>
+      <p:grpSp>
+        <p:nvGrpSpPr>
+          <p:cNvPr id="16" name="グループ化 15">
+            <a:extLst>
+              <a:ext uri="{FF2B5EF4-FFF2-40B4-BE49-F238E27FC236}">
+                <a16:creationId xmlns:a16="http://schemas.microsoft.com/office/drawing/2014/main" id="{43E9089A-A473-49F3-F8FF-C7E0B527D169}"/>
+              </a:ext>
+            </a:extLst>
+          </p:cNvPr>
+          <p:cNvGrpSpPr/>
+          <p:nvPr/>
+        </p:nvGrpSpPr>
+        <p:grpSpPr>
+          <a:xfrm>
+            <a:off x="4494330" y="1912776"/>
+            <a:ext cx="2272978" cy="1707502"/>
+            <a:chOff x="4494330" y="1912776"/>
+            <a:chExt cx="2272978" cy="1707502"/>
+          </a:xfrm>
+        </p:grpSpPr>
+        <p:pic>
+          <p:nvPicPr>
+            <p:cNvPr id="17" name="図 16">
+              <a:extLst>
+                <a:ext uri="{FF2B5EF4-FFF2-40B4-BE49-F238E27FC236}">
+                  <a16:creationId xmlns:a16="http://schemas.microsoft.com/office/drawing/2014/main" id="{BF20F755-46F2-BDFF-0BA6-FB305902BBC6}"/>
+                </a:ext>
+              </a:extLst>
+            </p:cNvPr>
+            <p:cNvPicPr>
+              <a:picLocks noChangeAspect="1"/>
+            </p:cNvPicPr>
+            <p:nvPr/>
+          </p:nvPicPr>
+          <p:blipFill>
+            <a:blip r:embed="rId4">
+              <a:extLst>
+                <a:ext uri="{28A0092B-C50C-407E-A947-70E740481C1C}">
+                  <a14:useLocalDpi xmlns:a14="http://schemas.microsoft.com/office/drawing/2010/main" val="0"/>
+                </a:ext>
+              </a:extLst>
+            </a:blip>
+            <a:stretch>
+              <a:fillRect/>
+            </a:stretch>
+          </p:blipFill>
+          <p:spPr>
+            <a:xfrm>
+              <a:off x="5126819" y="2488842"/>
+              <a:ext cx="1008000" cy="1008000"/>
+            </a:xfrm>
+            <a:prstGeom prst="rect">
+              <a:avLst/>
+            </a:prstGeom>
+          </p:spPr>
+        </p:pic>
+        <p:sp>
+          <p:nvSpPr>
+            <p:cNvPr id="18" name="テキスト ボックス 17">
+              <a:extLst>
+                <a:ext uri="{FF2B5EF4-FFF2-40B4-BE49-F238E27FC236}">
+                  <a16:creationId xmlns:a16="http://schemas.microsoft.com/office/drawing/2014/main" id="{AC586BB4-4348-B731-C7EE-10846915D00E}"/>
+                </a:ext>
+              </a:extLst>
+            </p:cNvPr>
+            <p:cNvSpPr txBox="1"/>
+            <p:nvPr/>
+          </p:nvSpPr>
+          <p:spPr>
+            <a:xfrm>
+              <a:off x="4961405" y="2306990"/>
+              <a:ext cx="1338828" cy="369332"/>
+            </a:xfrm>
+            <a:prstGeom prst="rect">
+              <a:avLst/>
+            </a:prstGeom>
+            <a:noFill/>
+          </p:spPr>
+          <p:txBody>
+            <a:bodyPr wrap="none" rtlCol="0">
+              <a:spAutoFit/>
+            </a:bodyPr>
+            <a:lstStyle/>
+            <a:p>
+              <a:r>
+                <a:rPr kumimoji="1" lang="ja-JP" altLang="en-US" b="1" dirty="0"/>
+                <a:t>リポジトリ</a:t>
+              </a:r>
+            </a:p>
+          </p:txBody>
+        </p:sp>
+        <p:sp>
+          <p:nvSpPr>
+            <p:cNvPr id="19" name="四角形: 角を丸くする 18">
+              <a:extLst>
+                <a:ext uri="{FF2B5EF4-FFF2-40B4-BE49-F238E27FC236}">
+                  <a16:creationId xmlns:a16="http://schemas.microsoft.com/office/drawing/2014/main" id="{6E021068-454D-D7A7-AE2C-CCD625C39CAF}"/>
+                </a:ext>
+              </a:extLst>
+            </p:cNvPr>
+            <p:cNvSpPr/>
+            <p:nvPr/>
+          </p:nvSpPr>
+          <p:spPr>
+            <a:xfrm>
+              <a:off x="4494330" y="1912776"/>
+              <a:ext cx="2272978" cy="1707502"/>
+            </a:xfrm>
+            <a:prstGeom prst="roundRect">
+              <a:avLst/>
+            </a:prstGeom>
+            <a:noFill/>
+            <a:ln w="38100"/>
+          </p:spPr>
+          <p:style>
+            <a:lnRef idx="2">
+              <a:schemeClr val="accent1">
+                <a:shade val="15000"/>
+              </a:schemeClr>
+            </a:lnRef>
+            <a:fillRef idx="1">
+              <a:schemeClr val="accent1"/>
+            </a:fillRef>
+            <a:effectRef idx="0">
+              <a:schemeClr val="accent1"/>
+            </a:effectRef>
+            <a:fontRef idx="minor">
+              <a:schemeClr val="lt1"/>
+            </a:fontRef>
+          </p:style>
+          <p:txBody>
+            <a:bodyPr rtlCol="0" anchor="ctr"/>
+            <a:lstStyle/>
+            <a:p>
+              <a:pPr algn="ctr"/>
+              <a:endParaRPr kumimoji="1" lang="ja-JP" altLang="en-US"/>
+            </a:p>
+          </p:txBody>
+        </p:sp>
+      </p:grpSp>
+    </p:spTree>
+    <p:extLst>
+      <p:ext uri="{BB962C8B-B14F-4D97-AF65-F5344CB8AC3E}">
+        <p14:creationId xmlns:p14="http://schemas.microsoft.com/office/powerpoint/2010/main" val="3121286043"/>
+      </p:ext>
+    </p:extLst>
+  </p:cSld>
+  <p:clrMapOvr>
+    <a:masterClrMapping/>
+  </p:clrMapOvr>
+</p:sld>
+</file>
+
+<file path=ppt/slides/slide7.xml><?xml version="1.0" encoding="utf-8"?>
+<p:sld xmlns:a="http://schemas.openxmlformats.org/drawingml/2006/main" xmlns:r="http://schemas.openxmlformats.org/officeDocument/2006/relationships" xmlns:p="http://schemas.openxmlformats.org/presentationml/2006/main">
+  <p:cSld>
+    <p:spTree>
+      <p:nvGrpSpPr>
+        <p:cNvPr id="1" name="">
+          <a:extLst>
+            <a:ext uri="{FF2B5EF4-FFF2-40B4-BE49-F238E27FC236}">
+              <a16:creationId xmlns:a16="http://schemas.microsoft.com/office/drawing/2014/main" id="{4DDFA4EB-1937-8BB7-3BFC-8583DDB0A22B}"/>
+            </a:ext>
+          </a:extLst>
+        </p:cNvPr>
+        <p:cNvGrpSpPr/>
+        <p:nvPr/>
+      </p:nvGrpSpPr>
+      <p:grpSpPr>
+        <a:xfrm>
+          <a:off x="0" y="0"/>
+          <a:ext cx="0" cy="0"/>
+          <a:chOff x="0" y="0"/>
+          <a:chExt cx="0" cy="0"/>
+        </a:xfrm>
+      </p:grpSpPr>
+      <p:pic>
+        <p:nvPicPr>
+          <p:cNvPr id="2050" name="Picture 2" descr="顔のシルエット | 無料のAi・PNG白黒シルエットイラスト">
+            <a:extLst>
+              <a:ext uri="{FF2B5EF4-FFF2-40B4-BE49-F238E27FC236}">
+                <a16:creationId xmlns:a16="http://schemas.microsoft.com/office/drawing/2014/main" id="{8045AF82-E393-A598-79A9-6BD75E912F0F}"/>
+              </a:ext>
+            </a:extLst>
+          </p:cNvPr>
+          <p:cNvPicPr>
+            <a:picLocks noChangeAspect="1" noChangeArrowheads="1"/>
+          </p:cNvPicPr>
+          <p:nvPr/>
+        </p:nvPicPr>
+        <p:blipFill>
+          <a:blip r:embed="rId2">
+            <a:duotone>
+              <a:schemeClr val="accent4">
+                <a:shade val="45000"/>
+                <a:satMod val="135000"/>
+              </a:schemeClr>
+              <a:prstClr val="white"/>
+            </a:duotone>
+            <a:extLst>
+              <a:ext uri="{28A0092B-C50C-407E-A947-70E740481C1C}">
+                <a14:useLocalDpi xmlns:a14="http://schemas.microsoft.com/office/drawing/2010/main" val="0"/>
+              </a:ext>
+            </a:extLst>
+          </a:blip>
+          <a:srcRect/>
+          <a:stretch>
+            <a:fillRect/>
+          </a:stretch>
+        </p:blipFill>
+        <p:spPr bwMode="auto">
+          <a:xfrm>
+            <a:off x="8131884" y="3991947"/>
+            <a:ext cx="1178385" cy="1109068"/>
+          </a:xfrm>
+          <a:prstGeom prst="rect">
+            <a:avLst/>
+          </a:prstGeom>
+          <a:noFill/>
+          <a:extLst>
+            <a:ext uri="{909E8E84-426E-40DD-AFC4-6F175D3DCCD1}">
+              <a14:hiddenFill xmlns:a14="http://schemas.microsoft.com/office/drawing/2010/main">
+                <a:solidFill>
+                  <a:srgbClr val="FFFFFF"/>
+                </a:solidFill>
+              </a14:hiddenFill>
+            </a:ext>
+          </a:extLst>
+        </p:spPr>
+      </p:pic>
+      <p:pic>
+        <p:nvPicPr>
+          <p:cNvPr id="2052" name="Picture 4" descr="デスクトップ型パソコン・サーバのシルエット02 | 無料のAi・PNG ...">
+            <a:extLst>
+              <a:ext uri="{FF2B5EF4-FFF2-40B4-BE49-F238E27FC236}">
+                <a16:creationId xmlns:a16="http://schemas.microsoft.com/office/drawing/2014/main" id="{A6CAF1B5-2841-F427-3653-1D05F0805921}"/>
+              </a:ext>
+            </a:extLst>
+          </p:cNvPr>
+          <p:cNvPicPr>
+            <a:picLocks noChangeAspect="1" noChangeArrowheads="1"/>
+          </p:cNvPicPr>
+          <p:nvPr/>
+        </p:nvPicPr>
+        <p:blipFill>
+          <a:blip r:embed="rId3">
+            <a:extLst>
+              <a:ext uri="{28A0092B-C50C-407E-A947-70E740481C1C}">
+                <a14:useLocalDpi xmlns:a14="http://schemas.microsoft.com/office/drawing/2010/main" val="0"/>
+              </a:ext>
+            </a:extLst>
+          </a:blip>
+          <a:srcRect/>
+          <a:stretch>
+            <a:fillRect/>
+          </a:stretch>
+        </p:blipFill>
+        <p:spPr bwMode="auto">
+          <a:xfrm>
+            <a:off x="3637518" y="2201381"/>
+            <a:ext cx="1066532" cy="950884"/>
+          </a:xfrm>
+          <a:prstGeom prst="rect">
+            <a:avLst/>
+          </a:prstGeom>
+          <a:noFill/>
+          <a:extLst>
+            <a:ext uri="{909E8E84-426E-40DD-AFC4-6F175D3DCCD1}">
+              <a14:hiddenFill xmlns:a14="http://schemas.microsoft.com/office/drawing/2010/main">
+                <a:solidFill>
+                  <a:srgbClr val="FFFFFF"/>
+                </a:solidFill>
+              </a14:hiddenFill>
+            </a:ext>
+          </a:extLst>
+        </p:spPr>
+      </p:pic>
+      <p:pic>
+        <p:nvPicPr>
+          <p:cNvPr id="5" name="Picture 2" descr="顔のシルエット | 無料のAi・PNG白黒シルエットイラスト">
+            <a:extLst>
+              <a:ext uri="{FF2B5EF4-FFF2-40B4-BE49-F238E27FC236}">
+                <a16:creationId xmlns:a16="http://schemas.microsoft.com/office/drawing/2014/main" id="{CB115048-653A-1EF0-241F-53D7EA4FC493}"/>
+              </a:ext>
+            </a:extLst>
+          </p:cNvPr>
+          <p:cNvPicPr>
+            <a:picLocks noChangeAspect="1" noChangeArrowheads="1"/>
+          </p:cNvPicPr>
+          <p:nvPr/>
+        </p:nvPicPr>
+        <p:blipFill>
+          <a:blip r:embed="rId2">
+            <a:extLst>
+              <a:ext uri="{28A0092B-C50C-407E-A947-70E740481C1C}">
+                <a14:useLocalDpi xmlns:a14="http://schemas.microsoft.com/office/drawing/2010/main" val="0"/>
+              </a:ext>
+            </a:extLst>
+          </a:blip>
+          <a:srcRect/>
+          <a:stretch>
+            <a:fillRect/>
+          </a:stretch>
+        </p:blipFill>
+        <p:spPr bwMode="auto">
+          <a:xfrm>
+            <a:off x="2163402" y="3991947"/>
+            <a:ext cx="1178385" cy="1109068"/>
+          </a:xfrm>
+          <a:prstGeom prst="rect">
+            <a:avLst/>
+          </a:prstGeom>
+          <a:noFill/>
+          <a:extLst>
+            <a:ext uri="{909E8E84-426E-40DD-AFC4-6F175D3DCCD1}">
+              <a14:hiddenFill xmlns:a14="http://schemas.microsoft.com/office/drawing/2010/main">
+                <a:solidFill>
+                  <a:srgbClr val="FFFFFF"/>
+                </a:solidFill>
+              </a14:hiddenFill>
+            </a:ext>
+          </a:extLst>
+        </p:spPr>
+      </p:pic>
+      <p:grpSp>
+        <p:nvGrpSpPr>
+          <p:cNvPr id="12" name="グループ化 11">
+            <a:extLst>
+              <a:ext uri="{FF2B5EF4-FFF2-40B4-BE49-F238E27FC236}">
+                <a16:creationId xmlns:a16="http://schemas.microsoft.com/office/drawing/2014/main" id="{389F36B9-F56A-3A22-FFD5-ACD43F68613F}"/>
+              </a:ext>
+            </a:extLst>
+          </p:cNvPr>
+          <p:cNvGrpSpPr/>
+          <p:nvPr/>
+        </p:nvGrpSpPr>
+        <p:grpSpPr>
+          <a:xfrm>
+            <a:off x="3341787" y="3496842"/>
+            <a:ext cx="828997" cy="926341"/>
+            <a:chOff x="3341787" y="3496842"/>
+            <a:chExt cx="828997" cy="926341"/>
+          </a:xfrm>
+        </p:grpSpPr>
+        <p:cxnSp>
+          <p:nvCxnSpPr>
+            <p:cNvPr id="8" name="直線矢印コネクタ 7">
+              <a:extLst>
+                <a:ext uri="{FF2B5EF4-FFF2-40B4-BE49-F238E27FC236}">
+                  <a16:creationId xmlns:a16="http://schemas.microsoft.com/office/drawing/2014/main" id="{38F60766-228F-B356-1E77-F3ADCA23F20A}"/>
+                </a:ext>
+              </a:extLst>
+            </p:cNvPr>
+            <p:cNvCxnSpPr/>
+            <p:nvPr/>
+          </p:nvCxnSpPr>
+          <p:spPr>
+            <a:xfrm flipV="1">
+              <a:off x="3341787" y="3496842"/>
+              <a:ext cx="828997" cy="664611"/>
+            </a:xfrm>
+            <a:prstGeom prst="straightConnector1">
+              <a:avLst/>
+            </a:prstGeom>
+            <a:ln w="57150">
+              <a:solidFill>
+                <a:schemeClr val="tx1"/>
+              </a:solidFill>
+              <a:tailEnd type="triangle"/>
+            </a:ln>
+          </p:spPr>
+          <p:style>
+            <a:lnRef idx="1">
+              <a:schemeClr val="accent1"/>
+            </a:lnRef>
+            <a:fillRef idx="0">
+              <a:schemeClr val="accent1"/>
+            </a:fillRef>
+            <a:effectRef idx="0">
+              <a:schemeClr val="accent1"/>
+            </a:effectRef>
+            <a:fontRef idx="minor">
+              <a:schemeClr val="tx1"/>
+            </a:fontRef>
+          </p:style>
+        </p:cxnSp>
+        <p:cxnSp>
+          <p:nvCxnSpPr>
+            <p:cNvPr id="9" name="直線矢印コネクタ 8">
+              <a:extLst>
+                <a:ext uri="{FF2B5EF4-FFF2-40B4-BE49-F238E27FC236}">
+                  <a16:creationId xmlns:a16="http://schemas.microsoft.com/office/drawing/2014/main" id="{DAA1D066-284D-44FF-3AC2-182679597C8F}"/>
+                </a:ext>
+              </a:extLst>
+            </p:cNvPr>
+            <p:cNvCxnSpPr>
+              <a:cxnSpLocks/>
+            </p:cNvCxnSpPr>
+            <p:nvPr/>
+          </p:nvCxnSpPr>
+          <p:spPr>
+            <a:xfrm rot="10800000" flipV="1">
+              <a:off x="3341787" y="3758572"/>
+              <a:ext cx="828997" cy="664611"/>
+            </a:xfrm>
+            <a:prstGeom prst="straightConnector1">
+              <a:avLst/>
+            </a:prstGeom>
+            <a:ln w="57150">
+              <a:solidFill>
+                <a:schemeClr val="tx1"/>
+              </a:solidFill>
+              <a:tailEnd type="triangle"/>
+            </a:ln>
+          </p:spPr>
+          <p:style>
+            <a:lnRef idx="1">
+              <a:schemeClr val="accent1"/>
+            </a:lnRef>
+            <a:fillRef idx="0">
+              <a:schemeClr val="accent1"/>
+            </a:fillRef>
+            <a:effectRef idx="0">
+              <a:schemeClr val="accent1"/>
+            </a:effectRef>
+            <a:fontRef idx="minor">
+              <a:schemeClr val="tx1"/>
+            </a:fontRef>
+          </p:style>
+        </p:cxnSp>
+      </p:grpSp>
+      <p:grpSp>
+        <p:nvGrpSpPr>
+          <p:cNvPr id="13" name="グループ化 12">
+            <a:extLst>
+              <a:ext uri="{FF2B5EF4-FFF2-40B4-BE49-F238E27FC236}">
+                <a16:creationId xmlns:a16="http://schemas.microsoft.com/office/drawing/2014/main" id="{6830991E-F2D8-0842-CAFB-E72CC55DFD29}"/>
+              </a:ext>
+            </a:extLst>
+          </p:cNvPr>
+          <p:cNvGrpSpPr/>
+          <p:nvPr/>
+        </p:nvGrpSpPr>
+        <p:grpSpPr>
+          <a:xfrm flipV="1">
+            <a:off x="7153217" y="3496842"/>
+            <a:ext cx="828997" cy="926341"/>
+            <a:chOff x="3341787" y="3496842"/>
+            <a:chExt cx="828997" cy="926341"/>
+          </a:xfrm>
+        </p:grpSpPr>
+        <p:cxnSp>
+          <p:nvCxnSpPr>
+            <p:cNvPr id="14" name="直線矢印コネクタ 13">
+              <a:extLst>
+                <a:ext uri="{FF2B5EF4-FFF2-40B4-BE49-F238E27FC236}">
+                  <a16:creationId xmlns:a16="http://schemas.microsoft.com/office/drawing/2014/main" id="{E9D022F2-B9A0-DAE9-0F82-46C6E53DFFBD}"/>
+                </a:ext>
+              </a:extLst>
+            </p:cNvPr>
+            <p:cNvCxnSpPr/>
+            <p:nvPr/>
+          </p:nvCxnSpPr>
+          <p:spPr>
+            <a:xfrm flipV="1">
+              <a:off x="3341787" y="3496842"/>
+              <a:ext cx="828997" cy="664611"/>
+            </a:xfrm>
+            <a:prstGeom prst="straightConnector1">
+              <a:avLst/>
+            </a:prstGeom>
+            <a:ln w="57150">
+              <a:solidFill>
+                <a:schemeClr val="tx1"/>
+              </a:solidFill>
+              <a:tailEnd type="triangle"/>
+            </a:ln>
+          </p:spPr>
+          <p:style>
+            <a:lnRef idx="1">
+              <a:schemeClr val="accent1"/>
+            </a:lnRef>
+            <a:fillRef idx="0">
+              <a:schemeClr val="accent1"/>
+            </a:fillRef>
+            <a:effectRef idx="0">
+              <a:schemeClr val="accent1"/>
+            </a:effectRef>
+            <a:fontRef idx="minor">
+              <a:schemeClr val="tx1"/>
+            </a:fontRef>
+          </p:style>
+        </p:cxnSp>
+        <p:cxnSp>
+          <p:nvCxnSpPr>
+            <p:cNvPr id="15" name="直線矢印コネクタ 14">
+              <a:extLst>
+                <a:ext uri="{FF2B5EF4-FFF2-40B4-BE49-F238E27FC236}">
+                  <a16:creationId xmlns:a16="http://schemas.microsoft.com/office/drawing/2014/main" id="{347D9DFD-EF7E-A5C7-E61B-4261D2D8AA53}"/>
+                </a:ext>
+              </a:extLst>
+            </p:cNvPr>
+            <p:cNvCxnSpPr>
+              <a:cxnSpLocks/>
+            </p:cNvCxnSpPr>
+            <p:nvPr/>
+          </p:nvCxnSpPr>
+          <p:spPr>
+            <a:xfrm rot="10800000" flipV="1">
+              <a:off x="3341787" y="3758572"/>
+              <a:ext cx="828997" cy="664611"/>
+            </a:xfrm>
+            <a:prstGeom prst="straightConnector1">
+              <a:avLst/>
+            </a:prstGeom>
+            <a:ln w="57150">
+              <a:solidFill>
+                <a:schemeClr val="tx1"/>
+              </a:solidFill>
+              <a:tailEnd type="triangle"/>
+            </a:ln>
+          </p:spPr>
+          <p:style>
+            <a:lnRef idx="1">
+              <a:schemeClr val="accent1"/>
+            </a:lnRef>
+            <a:fillRef idx="0">
+              <a:schemeClr val="accent1"/>
+            </a:fillRef>
+            <a:effectRef idx="0">
+              <a:schemeClr val="accent1"/>
+            </a:effectRef>
+            <a:fontRef idx="minor">
+              <a:schemeClr val="tx1"/>
+            </a:fontRef>
+          </p:style>
+        </p:cxnSp>
+      </p:grpSp>
+      <p:grpSp>
+        <p:nvGrpSpPr>
+          <p:cNvPr id="19" name="グループ化 18">
+            <a:extLst>
+              <a:ext uri="{FF2B5EF4-FFF2-40B4-BE49-F238E27FC236}">
+                <a16:creationId xmlns:a16="http://schemas.microsoft.com/office/drawing/2014/main" id="{51812B50-C613-D78C-771B-4DAD4652A8D3}"/>
+              </a:ext>
+            </a:extLst>
+          </p:cNvPr>
+          <p:cNvGrpSpPr/>
+          <p:nvPr/>
+        </p:nvGrpSpPr>
+        <p:grpSpPr>
+          <a:xfrm>
+            <a:off x="4494330" y="1912776"/>
+            <a:ext cx="2272978" cy="1707502"/>
+            <a:chOff x="4494330" y="1912776"/>
+            <a:chExt cx="2272978" cy="1707502"/>
+          </a:xfrm>
+        </p:grpSpPr>
+        <p:pic>
+          <p:nvPicPr>
+            <p:cNvPr id="20" name="図 19">
+              <a:extLst>
+                <a:ext uri="{FF2B5EF4-FFF2-40B4-BE49-F238E27FC236}">
+                  <a16:creationId xmlns:a16="http://schemas.microsoft.com/office/drawing/2014/main" id="{2F8F6CC4-FD6F-8A63-18DE-7CC6E80CB703}"/>
+                </a:ext>
+              </a:extLst>
+            </p:cNvPr>
+            <p:cNvPicPr>
+              <a:picLocks noChangeAspect="1"/>
+            </p:cNvPicPr>
+            <p:nvPr/>
+          </p:nvPicPr>
+          <p:blipFill>
+            <a:blip r:embed="rId4">
+              <a:extLst>
+                <a:ext uri="{28A0092B-C50C-407E-A947-70E740481C1C}">
+                  <a14:useLocalDpi xmlns:a14="http://schemas.microsoft.com/office/drawing/2010/main" val="0"/>
+                </a:ext>
+              </a:extLst>
+            </a:blip>
+            <a:stretch>
+              <a:fillRect/>
+            </a:stretch>
+          </p:blipFill>
+          <p:spPr>
+            <a:xfrm>
+              <a:off x="5126819" y="2488842"/>
+              <a:ext cx="1008000" cy="1008000"/>
+            </a:xfrm>
+            <a:prstGeom prst="rect">
+              <a:avLst/>
+            </a:prstGeom>
+          </p:spPr>
+        </p:pic>
+        <p:sp>
+          <p:nvSpPr>
+            <p:cNvPr id="21" name="テキスト ボックス 20">
+              <a:extLst>
+                <a:ext uri="{FF2B5EF4-FFF2-40B4-BE49-F238E27FC236}">
+                  <a16:creationId xmlns:a16="http://schemas.microsoft.com/office/drawing/2014/main" id="{26857F98-C92D-DA3A-73AC-EBBB5DE601FD}"/>
+                </a:ext>
+              </a:extLst>
+            </p:cNvPr>
+            <p:cNvSpPr txBox="1"/>
+            <p:nvPr/>
+          </p:nvSpPr>
+          <p:spPr>
+            <a:xfrm>
+              <a:off x="4961405" y="2306990"/>
+              <a:ext cx="1338828" cy="369332"/>
+            </a:xfrm>
+            <a:prstGeom prst="rect">
+              <a:avLst/>
+            </a:prstGeom>
+            <a:noFill/>
+          </p:spPr>
+          <p:txBody>
+            <a:bodyPr wrap="none" rtlCol="0">
+              <a:spAutoFit/>
+            </a:bodyPr>
+            <a:lstStyle/>
+            <a:p>
+              <a:r>
+                <a:rPr kumimoji="1" lang="ja-JP" altLang="en-US" b="1" dirty="0"/>
+                <a:t>リポジトリ</a:t>
+              </a:r>
+            </a:p>
+          </p:txBody>
+        </p:sp>
+        <p:sp>
+          <p:nvSpPr>
+            <p:cNvPr id="22" name="四角形: 角を丸くする 21">
+              <a:extLst>
+                <a:ext uri="{FF2B5EF4-FFF2-40B4-BE49-F238E27FC236}">
+                  <a16:creationId xmlns:a16="http://schemas.microsoft.com/office/drawing/2014/main" id="{1E5BE2E2-2A15-0E1F-519B-EE2510F95C6B}"/>
+                </a:ext>
+              </a:extLst>
+            </p:cNvPr>
+            <p:cNvSpPr/>
+            <p:nvPr/>
+          </p:nvSpPr>
+          <p:spPr>
+            <a:xfrm>
+              <a:off x="4494330" y="1912776"/>
+              <a:ext cx="2272978" cy="1707502"/>
+            </a:xfrm>
+            <a:prstGeom prst="roundRect">
+              <a:avLst/>
+            </a:prstGeom>
+            <a:noFill/>
+            <a:ln w="38100"/>
+          </p:spPr>
+          <p:style>
+            <a:lnRef idx="2">
+              <a:schemeClr val="accent1">
+                <a:shade val="15000"/>
+              </a:schemeClr>
+            </a:lnRef>
+            <a:fillRef idx="1">
+              <a:schemeClr val="accent1"/>
+            </a:fillRef>
+            <a:effectRef idx="0">
+              <a:schemeClr val="accent1"/>
+            </a:effectRef>
+            <a:fontRef idx="minor">
+              <a:schemeClr val="lt1"/>
+            </a:fontRef>
+          </p:style>
+          <p:txBody>
+            <a:bodyPr rtlCol="0" anchor="ctr"/>
+            <a:lstStyle/>
+            <a:p>
+              <a:pPr algn="ctr"/>
+              <a:endParaRPr kumimoji="1" lang="ja-JP" altLang="en-US"/>
+            </a:p>
+          </p:txBody>
+        </p:sp>
+      </p:grpSp>
+      <p:grpSp>
+        <p:nvGrpSpPr>
+          <p:cNvPr id="23" name="グループ化 22">
+            <a:extLst>
+              <a:ext uri="{FF2B5EF4-FFF2-40B4-BE49-F238E27FC236}">
+                <a16:creationId xmlns:a16="http://schemas.microsoft.com/office/drawing/2014/main" id="{A412211B-2602-3E11-D4D0-AA839C0C2570}"/>
+              </a:ext>
+            </a:extLst>
+          </p:cNvPr>
+          <p:cNvGrpSpPr/>
+          <p:nvPr/>
+        </p:nvGrpSpPr>
+        <p:grpSpPr>
+          <a:xfrm>
+            <a:off x="1616105" y="5101015"/>
+            <a:ext cx="2272978" cy="1707502"/>
+            <a:chOff x="4494330" y="1912776"/>
+            <a:chExt cx="2272978" cy="1707502"/>
+          </a:xfrm>
+        </p:grpSpPr>
+        <p:pic>
+          <p:nvPicPr>
+            <p:cNvPr id="24" name="図 23">
+              <a:extLst>
+                <a:ext uri="{FF2B5EF4-FFF2-40B4-BE49-F238E27FC236}">
+                  <a16:creationId xmlns:a16="http://schemas.microsoft.com/office/drawing/2014/main" id="{C1527471-4A83-DE04-5D1E-D7CCFFD6F893}"/>
+                </a:ext>
+              </a:extLst>
+            </p:cNvPr>
+            <p:cNvPicPr>
+              <a:picLocks noChangeAspect="1"/>
+            </p:cNvPicPr>
+            <p:nvPr/>
+          </p:nvPicPr>
+          <p:blipFill>
+            <a:blip r:embed="rId4">
+              <a:extLst>
+                <a:ext uri="{28A0092B-C50C-407E-A947-70E740481C1C}">
+                  <a14:useLocalDpi xmlns:a14="http://schemas.microsoft.com/office/drawing/2010/main" val="0"/>
+                </a:ext>
+              </a:extLst>
+            </a:blip>
+            <a:stretch>
+              <a:fillRect/>
+            </a:stretch>
+          </p:blipFill>
+          <p:spPr>
+            <a:xfrm>
+              <a:off x="5126819" y="2488842"/>
+              <a:ext cx="1008000" cy="1008000"/>
+            </a:xfrm>
+            <a:prstGeom prst="rect">
+              <a:avLst/>
+            </a:prstGeom>
+          </p:spPr>
+        </p:pic>
+        <p:sp>
+          <p:nvSpPr>
+            <p:cNvPr id="25" name="テキスト ボックス 24">
+              <a:extLst>
+                <a:ext uri="{FF2B5EF4-FFF2-40B4-BE49-F238E27FC236}">
+                  <a16:creationId xmlns:a16="http://schemas.microsoft.com/office/drawing/2014/main" id="{3DED1CF9-4E55-4CB0-B9B4-63282F3471A6}"/>
+                </a:ext>
+              </a:extLst>
+            </p:cNvPr>
+            <p:cNvSpPr txBox="1"/>
+            <p:nvPr/>
+          </p:nvSpPr>
+          <p:spPr>
+            <a:xfrm>
+              <a:off x="4961405" y="2306990"/>
+              <a:ext cx="1338828" cy="369332"/>
+            </a:xfrm>
+            <a:prstGeom prst="rect">
+              <a:avLst/>
+            </a:prstGeom>
+            <a:noFill/>
+          </p:spPr>
+          <p:txBody>
+            <a:bodyPr wrap="none" rtlCol="0">
+              <a:spAutoFit/>
+            </a:bodyPr>
+            <a:lstStyle/>
+            <a:p>
+              <a:r>
+                <a:rPr kumimoji="1" lang="ja-JP" altLang="en-US" b="1" dirty="0"/>
+                <a:t>リポジトリ</a:t>
+              </a:r>
+            </a:p>
+          </p:txBody>
+        </p:sp>
+        <p:sp>
+          <p:nvSpPr>
+            <p:cNvPr id="26" name="四角形: 角を丸くする 25">
+              <a:extLst>
+                <a:ext uri="{FF2B5EF4-FFF2-40B4-BE49-F238E27FC236}">
+                  <a16:creationId xmlns:a16="http://schemas.microsoft.com/office/drawing/2014/main" id="{1C9E4B79-BE39-666E-AEC7-1036E9058486}"/>
+                </a:ext>
+              </a:extLst>
+            </p:cNvPr>
+            <p:cNvSpPr/>
+            <p:nvPr/>
+          </p:nvSpPr>
+          <p:spPr>
+            <a:xfrm>
+              <a:off x="4494330" y="1912776"/>
+              <a:ext cx="2272978" cy="1707502"/>
+            </a:xfrm>
+            <a:prstGeom prst="roundRect">
+              <a:avLst/>
+            </a:prstGeom>
+            <a:noFill/>
+            <a:ln w="38100"/>
+          </p:spPr>
+          <p:style>
+            <a:lnRef idx="2">
+              <a:schemeClr val="accent1">
+                <a:shade val="15000"/>
+              </a:schemeClr>
+            </a:lnRef>
+            <a:fillRef idx="1">
+              <a:schemeClr val="accent1"/>
+            </a:fillRef>
+            <a:effectRef idx="0">
+              <a:schemeClr val="accent1"/>
+            </a:effectRef>
+            <a:fontRef idx="minor">
+              <a:schemeClr val="lt1"/>
+            </a:fontRef>
+          </p:style>
+          <p:txBody>
+            <a:bodyPr rtlCol="0" anchor="ctr"/>
+            <a:lstStyle/>
+            <a:p>
+              <a:pPr algn="ctr"/>
+              <a:endParaRPr kumimoji="1" lang="ja-JP" altLang="en-US"/>
+            </a:p>
+          </p:txBody>
+        </p:sp>
+      </p:grpSp>
+      <p:grpSp>
+        <p:nvGrpSpPr>
+          <p:cNvPr id="27" name="グループ化 26">
+            <a:extLst>
+              <a:ext uri="{FF2B5EF4-FFF2-40B4-BE49-F238E27FC236}">
+                <a16:creationId xmlns:a16="http://schemas.microsoft.com/office/drawing/2014/main" id="{6760F33E-A6B5-BC17-454C-8BB9D91D0D73}"/>
+              </a:ext>
+            </a:extLst>
+          </p:cNvPr>
+          <p:cNvGrpSpPr/>
+          <p:nvPr/>
+        </p:nvGrpSpPr>
+        <p:grpSpPr>
+          <a:xfrm>
+            <a:off x="7584587" y="5101015"/>
+            <a:ext cx="2272978" cy="1707502"/>
+            <a:chOff x="4494330" y="1912776"/>
+            <a:chExt cx="2272978" cy="1707502"/>
+          </a:xfrm>
+        </p:grpSpPr>
+        <p:pic>
+          <p:nvPicPr>
+            <p:cNvPr id="28" name="図 27">
+              <a:extLst>
+                <a:ext uri="{FF2B5EF4-FFF2-40B4-BE49-F238E27FC236}">
+                  <a16:creationId xmlns:a16="http://schemas.microsoft.com/office/drawing/2014/main" id="{C3212736-D05A-7211-839E-D49C499DDEAD}"/>
+                </a:ext>
+              </a:extLst>
+            </p:cNvPr>
+            <p:cNvPicPr>
+              <a:picLocks noChangeAspect="1"/>
+            </p:cNvPicPr>
+            <p:nvPr/>
+          </p:nvPicPr>
+          <p:blipFill>
+            <a:blip r:embed="rId4">
+              <a:extLst>
+                <a:ext uri="{28A0092B-C50C-407E-A947-70E740481C1C}">
+                  <a14:useLocalDpi xmlns:a14="http://schemas.microsoft.com/office/drawing/2010/main" val="0"/>
+                </a:ext>
+              </a:extLst>
+            </a:blip>
+            <a:stretch>
+              <a:fillRect/>
+            </a:stretch>
+          </p:blipFill>
+          <p:spPr>
+            <a:xfrm>
+              <a:off x="5126819" y="2488842"/>
+              <a:ext cx="1008000" cy="1008000"/>
+            </a:xfrm>
+            <a:prstGeom prst="rect">
+              <a:avLst/>
+            </a:prstGeom>
+          </p:spPr>
+        </p:pic>
+        <p:sp>
+          <p:nvSpPr>
+            <p:cNvPr id="29" name="テキスト ボックス 28">
+              <a:extLst>
+                <a:ext uri="{FF2B5EF4-FFF2-40B4-BE49-F238E27FC236}">
+                  <a16:creationId xmlns:a16="http://schemas.microsoft.com/office/drawing/2014/main" id="{521D0927-013E-E624-AC9C-FBB92BF68793}"/>
+                </a:ext>
+              </a:extLst>
+            </p:cNvPr>
+            <p:cNvSpPr txBox="1"/>
+            <p:nvPr/>
+          </p:nvSpPr>
+          <p:spPr>
+            <a:xfrm>
+              <a:off x="4961405" y="2306990"/>
+              <a:ext cx="1338828" cy="369332"/>
+            </a:xfrm>
+            <a:prstGeom prst="rect">
+              <a:avLst/>
+            </a:prstGeom>
+            <a:noFill/>
+          </p:spPr>
+          <p:txBody>
+            <a:bodyPr wrap="none" rtlCol="0">
+              <a:spAutoFit/>
+            </a:bodyPr>
+            <a:lstStyle/>
+            <a:p>
+              <a:r>
+                <a:rPr kumimoji="1" lang="ja-JP" altLang="en-US" b="1" dirty="0"/>
+                <a:t>リポジトリ</a:t>
+              </a:r>
+            </a:p>
+          </p:txBody>
+        </p:sp>
+        <p:sp>
+          <p:nvSpPr>
+            <p:cNvPr id="30" name="四角形: 角を丸くする 29">
+              <a:extLst>
+                <a:ext uri="{FF2B5EF4-FFF2-40B4-BE49-F238E27FC236}">
+                  <a16:creationId xmlns:a16="http://schemas.microsoft.com/office/drawing/2014/main" id="{C4F2A461-A5A7-D191-87A7-83EECDD0765B}"/>
+                </a:ext>
+              </a:extLst>
+            </p:cNvPr>
+            <p:cNvSpPr/>
+            <p:nvPr/>
+          </p:nvSpPr>
+          <p:spPr>
+            <a:xfrm>
+              <a:off x="4494330" y="1912776"/>
+              <a:ext cx="2272978" cy="1707502"/>
+            </a:xfrm>
+            <a:prstGeom prst="roundRect">
+              <a:avLst/>
+            </a:prstGeom>
+            <a:noFill/>
+            <a:ln w="38100"/>
+          </p:spPr>
+          <p:style>
+            <a:lnRef idx="2">
+              <a:schemeClr val="accent1">
+                <a:shade val="15000"/>
+              </a:schemeClr>
+            </a:lnRef>
+            <a:fillRef idx="1">
+              <a:schemeClr val="accent1"/>
+            </a:fillRef>
+            <a:effectRef idx="0">
+              <a:schemeClr val="accent1"/>
+            </a:effectRef>
+            <a:fontRef idx="minor">
+              <a:schemeClr val="lt1"/>
+            </a:fontRef>
+          </p:style>
+          <p:txBody>
+            <a:bodyPr rtlCol="0" anchor="ctr"/>
+            <a:lstStyle/>
+            <a:p>
+              <a:pPr algn="ctr"/>
+              <a:endParaRPr kumimoji="1" lang="ja-JP" altLang="en-US"/>
+            </a:p>
+          </p:txBody>
+        </p:sp>
+      </p:grpSp>
+    </p:spTree>
+    <p:extLst>
+      <p:ext uri="{BB962C8B-B14F-4D97-AF65-F5344CB8AC3E}">
+        <p14:creationId xmlns:p14="http://schemas.microsoft.com/office/powerpoint/2010/main" val="833067222"/>
+      </p:ext>
+    </p:extLst>
+  </p:cSld>
+  <p:clrMapOvr>
+    <a:masterClrMapping/>
+  </p:clrMapOvr>
+</p:sld>
+</file>
+
+<file path=ppt/slides/slide8.xml><?xml version="1.0" encoding="utf-8"?>
+<p:sld xmlns:a="http://schemas.openxmlformats.org/drawingml/2006/main" xmlns:r="http://schemas.openxmlformats.org/officeDocument/2006/relationships" xmlns:p="http://schemas.openxmlformats.org/presentationml/2006/main">
+  <p:cSld>
+    <p:spTree>
+      <p:nvGrpSpPr>
+        <p:cNvPr id="1" name="">
+          <a:extLst>
+            <a:ext uri="{FF2B5EF4-FFF2-40B4-BE49-F238E27FC236}">
+              <a16:creationId xmlns:a16="http://schemas.microsoft.com/office/drawing/2014/main" id="{0F2CF571-7B7A-6AE7-C741-EBE08968FB5A}"/>
+            </a:ext>
+          </a:extLst>
+        </p:cNvPr>
+        <p:cNvGrpSpPr/>
+        <p:nvPr/>
+      </p:nvGrpSpPr>
+      <p:grpSpPr>
+        <a:xfrm>
+          <a:off x="0" y="0"/>
+          <a:ext cx="0" cy="0"/>
+          <a:chOff x="0" y="0"/>
+          <a:chExt cx="0" cy="0"/>
+        </a:xfrm>
+      </p:grpSpPr>
+      <p:pic>
+        <p:nvPicPr>
+          <p:cNvPr id="20" name="図 19">
+            <a:extLst>
+              <a:ext uri="{FF2B5EF4-FFF2-40B4-BE49-F238E27FC236}">
+                <a16:creationId xmlns:a16="http://schemas.microsoft.com/office/drawing/2014/main" id="{DBD61B87-176C-AB96-62AF-A7C6A572050A}"/>
+              </a:ext>
+            </a:extLst>
+          </p:cNvPr>
+          <p:cNvPicPr>
+            <a:picLocks noChangeAspect="1"/>
+          </p:cNvPicPr>
+          <p:nvPr/>
+        </p:nvPicPr>
+        <p:blipFill>
+          <a:blip r:embed="rId2"/>
+          <a:stretch>
+            <a:fillRect/>
+          </a:stretch>
+        </p:blipFill>
+        <p:spPr>
+          <a:xfrm>
+            <a:off x="545343" y="3388303"/>
+            <a:ext cx="4238257" cy="1902153"/>
+          </a:xfrm>
+          <a:prstGeom prst="rect">
+            <a:avLst/>
+          </a:prstGeom>
+        </p:spPr>
+      </p:pic>
+      <p:pic>
+        <p:nvPicPr>
+          <p:cNvPr id="32" name="図 31">
+            <a:extLst>
+              <a:ext uri="{FF2B5EF4-FFF2-40B4-BE49-F238E27FC236}">
+                <a16:creationId xmlns:a16="http://schemas.microsoft.com/office/drawing/2014/main" id="{094DA389-896D-05FA-ADF5-6882554D12D1}"/>
+              </a:ext>
+            </a:extLst>
+          </p:cNvPr>
+          <p:cNvPicPr>
+            <a:picLocks noChangeAspect="1"/>
+          </p:cNvPicPr>
+          <p:nvPr/>
+        </p:nvPicPr>
+        <p:blipFill>
+          <a:blip r:embed="rId3"/>
+          <a:stretch>
+            <a:fillRect/>
+          </a:stretch>
+        </p:blipFill>
+        <p:spPr>
+          <a:xfrm>
+            <a:off x="6827037" y="2801768"/>
+            <a:ext cx="4640286" cy="2764353"/>
+          </a:xfrm>
+          <a:prstGeom prst="rect">
+            <a:avLst/>
+          </a:prstGeom>
+        </p:spPr>
+      </p:pic>
+      <p:sp>
+        <p:nvSpPr>
+          <p:cNvPr id="2" name="テキスト ボックス 1">
+            <a:extLst>
+              <a:ext uri="{FF2B5EF4-FFF2-40B4-BE49-F238E27FC236}">
+                <a16:creationId xmlns:a16="http://schemas.microsoft.com/office/drawing/2014/main" id="{B964AE69-D814-5707-A3D6-A47DB7677AC6}"/>
+              </a:ext>
+            </a:extLst>
+          </p:cNvPr>
+          <p:cNvSpPr txBox="1"/>
+          <p:nvPr/>
+        </p:nvSpPr>
+        <p:spPr>
+          <a:xfrm>
+            <a:off x="1920412" y="2192694"/>
+            <a:ext cx="1338828" cy="369332"/>
+          </a:xfrm>
+          <a:prstGeom prst="rect">
+            <a:avLst/>
+          </a:prstGeom>
+          <a:noFill/>
+        </p:spPr>
+        <p:txBody>
+          <a:bodyPr wrap="none" rtlCol="0">
+            <a:spAutoFit/>
+          </a:bodyPr>
+          <a:lstStyle/>
+          <a:p>
+            <a:r>
+              <a:rPr lang="ja-JP" altLang="en-US" b="1" dirty="0"/>
+              <a:t>中央集中型</a:t>
+            </a:r>
+            <a:endParaRPr kumimoji="1" lang="ja-JP" altLang="en-US" b="1" dirty="0"/>
+          </a:p>
+        </p:txBody>
+      </p:sp>
+      <p:sp>
+        <p:nvSpPr>
+          <p:cNvPr id="3" name="テキスト ボックス 2">
+            <a:extLst>
+              <a:ext uri="{FF2B5EF4-FFF2-40B4-BE49-F238E27FC236}">
+                <a16:creationId xmlns:a16="http://schemas.microsoft.com/office/drawing/2014/main" id="{EEC0A959-A4F8-2F4F-795C-3AA09013805D}"/>
+              </a:ext>
+            </a:extLst>
+          </p:cNvPr>
+          <p:cNvSpPr txBox="1"/>
+          <p:nvPr/>
+        </p:nvSpPr>
+        <p:spPr>
+          <a:xfrm>
+            <a:off x="8605961" y="2192694"/>
+            <a:ext cx="877163" cy="369332"/>
+          </a:xfrm>
+          <a:prstGeom prst="rect">
+            <a:avLst/>
+          </a:prstGeom>
+          <a:noFill/>
+        </p:spPr>
+        <p:txBody>
+          <a:bodyPr wrap="none" rtlCol="0">
+            <a:spAutoFit/>
+          </a:bodyPr>
+          <a:lstStyle/>
+          <a:p>
+            <a:r>
+              <a:rPr lang="ja-JP" altLang="en-US" b="1" dirty="0"/>
+              <a:t>分散型</a:t>
+            </a:r>
+            <a:endParaRPr kumimoji="1" lang="ja-JP" altLang="en-US" b="1" dirty="0"/>
+          </a:p>
+        </p:txBody>
+      </p:sp>
+    </p:spTree>
+    <p:extLst>
+      <p:ext uri="{BB962C8B-B14F-4D97-AF65-F5344CB8AC3E}">
+        <p14:creationId xmlns:p14="http://schemas.microsoft.com/office/powerpoint/2010/main" val="2440945783"/>
+      </p:ext>
+    </p:extLst>
+  </p:cSld>
+  <p:clrMapOvr>
+    <a:masterClrMapping/>
+  </p:clrMapOvr>
+</p:sld>
+</file>
+
+<file path=ppt/slides/slide9.xml><?xml version="1.0" encoding="utf-8"?>
+<p:sld xmlns:a="http://schemas.openxmlformats.org/drawingml/2006/main" xmlns:r="http://schemas.openxmlformats.org/officeDocument/2006/relationships" xmlns:p="http://schemas.openxmlformats.org/presentationml/2006/main">
+  <p:cSld>
+    <p:spTree>
+      <p:nvGrpSpPr>
+        <p:cNvPr id="1" name="">
+          <a:extLst>
+            <a:ext uri="{FF2B5EF4-FFF2-40B4-BE49-F238E27FC236}">
+              <a16:creationId xmlns:a16="http://schemas.microsoft.com/office/drawing/2014/main" id="{C412DDF4-F2BA-0DB5-48A8-37CEEAD07597}"/>
+            </a:ext>
+          </a:extLst>
+        </p:cNvPr>
+        <p:cNvGrpSpPr/>
+        <p:nvPr/>
+      </p:nvGrpSpPr>
+      <p:grpSpPr>
+        <a:xfrm>
+          <a:off x="0" y="0"/>
+          <a:ext cx="0" cy="0"/>
+          <a:chOff x="0" y="0"/>
+          <a:chExt cx="0" cy="0"/>
+        </a:xfrm>
+      </p:grpSpPr>
+    </p:spTree>
+    <p:extLst>
+      <p:ext uri="{BB962C8B-B14F-4D97-AF65-F5344CB8AC3E}">
+        <p14:creationId xmlns:p14="http://schemas.microsoft.com/office/powerpoint/2010/main" val="1371548627"/>
       </p:ext>
     </p:extLst>
   </p:cSld>

--- a/01_テキスト/Git入門_図.pptx
+++ b/01_テキスト/Git入門_図.pptx
@@ -28,6 +28,13 @@
     <p:sldId id="269" r:id="rId22"/>
     <p:sldId id="270" r:id="rId23"/>
     <p:sldId id="271" r:id="rId24"/>
+    <p:sldId id="281" r:id="rId25"/>
+    <p:sldId id="282" r:id="rId26"/>
+    <p:sldId id="286" r:id="rId27"/>
+    <p:sldId id="287" r:id="rId28"/>
+    <p:sldId id="283" r:id="rId29"/>
+    <p:sldId id="284" r:id="rId30"/>
+    <p:sldId id="285" r:id="rId31"/>
   </p:sldIdLst>
   <p:sldSz cx="12192000" cy="6858000"/>
   <p:notesSz cx="6858000" cy="9144000"/>
@@ -11797,6 +11804,2363 @@
 </p:sld>
 </file>
 
+<file path=ppt/slides/slide24.xml><?xml version="1.0" encoding="utf-8"?>
+<p:sld xmlns:a="http://schemas.openxmlformats.org/drawingml/2006/main" xmlns:r="http://schemas.openxmlformats.org/officeDocument/2006/relationships" xmlns:p="http://schemas.openxmlformats.org/presentationml/2006/main">
+  <p:cSld>
+    <p:spTree>
+      <p:nvGrpSpPr>
+        <p:cNvPr id="1" name="">
+          <a:extLst>
+            <a:ext uri="{FF2B5EF4-FFF2-40B4-BE49-F238E27FC236}">
+              <a16:creationId xmlns:a16="http://schemas.microsoft.com/office/drawing/2014/main" id="{96CC1BAA-C278-6CF6-6B78-7B806AC1536B}"/>
+            </a:ext>
+          </a:extLst>
+        </p:cNvPr>
+        <p:cNvGrpSpPr/>
+        <p:nvPr/>
+      </p:nvGrpSpPr>
+      <p:grpSpPr>
+        <a:xfrm>
+          <a:off x="0" y="0"/>
+          <a:ext cx="0" cy="0"/>
+          <a:chOff x="0" y="0"/>
+          <a:chExt cx="0" cy="0"/>
+        </a:xfrm>
+      </p:grpSpPr>
+      <p:grpSp>
+        <p:nvGrpSpPr>
+          <p:cNvPr id="3" name="グループ化 2">
+            <a:extLst>
+              <a:ext uri="{FF2B5EF4-FFF2-40B4-BE49-F238E27FC236}">
+                <a16:creationId xmlns:a16="http://schemas.microsoft.com/office/drawing/2014/main" id="{D1960EE7-25F0-243B-2A87-39643BBCC9D5}"/>
+              </a:ext>
+            </a:extLst>
+          </p:cNvPr>
+          <p:cNvGrpSpPr/>
+          <p:nvPr/>
+        </p:nvGrpSpPr>
+        <p:grpSpPr>
+          <a:xfrm>
+            <a:off x="2849214" y="3809486"/>
+            <a:ext cx="4680000" cy="1080000"/>
+            <a:chOff x="2849214" y="3397749"/>
+            <a:chExt cx="4680000" cy="1080000"/>
+          </a:xfrm>
+        </p:grpSpPr>
+        <p:sp>
+          <p:nvSpPr>
+            <p:cNvPr id="4" name="四角形: 角を丸くする 3">
+              <a:extLst>
+                <a:ext uri="{FF2B5EF4-FFF2-40B4-BE49-F238E27FC236}">
+                  <a16:creationId xmlns:a16="http://schemas.microsoft.com/office/drawing/2014/main" id="{DE788118-A90F-3A74-DE84-F951C36CF753}"/>
+                </a:ext>
+              </a:extLst>
+            </p:cNvPr>
+            <p:cNvSpPr/>
+            <p:nvPr/>
+          </p:nvSpPr>
+          <p:spPr>
+            <a:xfrm>
+              <a:off x="2849214" y="3397749"/>
+              <a:ext cx="4680000" cy="1080000"/>
+            </a:xfrm>
+            <a:prstGeom prst="roundRect">
+              <a:avLst/>
+            </a:prstGeom>
+            <a:solidFill>
+              <a:schemeClr val="accent1">
+                <a:lumMod val="20000"/>
+                <a:lumOff val="80000"/>
+              </a:schemeClr>
+            </a:solidFill>
+            <a:ln w="38100">
+              <a:solidFill>
+                <a:schemeClr val="tx1"/>
+              </a:solidFill>
+            </a:ln>
+          </p:spPr>
+          <p:style>
+            <a:lnRef idx="2">
+              <a:schemeClr val="accent6"/>
+            </a:lnRef>
+            <a:fillRef idx="1">
+              <a:schemeClr val="lt1"/>
+            </a:fillRef>
+            <a:effectRef idx="0">
+              <a:schemeClr val="accent6"/>
+            </a:effectRef>
+            <a:fontRef idx="minor">
+              <a:schemeClr val="dk1"/>
+            </a:fontRef>
+          </p:style>
+          <p:txBody>
+            <a:bodyPr rtlCol="0" anchor="ctr"/>
+            <a:lstStyle/>
+            <a:p>
+              <a:pPr lvl="4"/>
+              <a:r>
+                <a:rPr lang="ja-JP" altLang="en-US" b="1" dirty="0"/>
+                <a:t>ローカルリポジトリ</a:t>
+              </a:r>
+            </a:p>
+          </p:txBody>
+        </p:sp>
+        <p:pic>
+          <p:nvPicPr>
+            <p:cNvPr id="5" name="図 4">
+              <a:extLst>
+                <a:ext uri="{FF2B5EF4-FFF2-40B4-BE49-F238E27FC236}">
+                  <a16:creationId xmlns:a16="http://schemas.microsoft.com/office/drawing/2014/main" id="{F0C894CF-29BB-E97B-E7E8-EC04B7C21DAE}"/>
+                </a:ext>
+              </a:extLst>
+            </p:cNvPr>
+            <p:cNvPicPr>
+              <a:picLocks noChangeAspect="1"/>
+            </p:cNvPicPr>
+            <p:nvPr/>
+          </p:nvPicPr>
+          <p:blipFill>
+            <a:blip r:embed="rId2">
+              <a:extLst>
+                <a:ext uri="{28A0092B-C50C-407E-A947-70E740481C1C}">
+                  <a14:useLocalDpi xmlns:a14="http://schemas.microsoft.com/office/drawing/2010/main" val="0"/>
+                </a:ext>
+              </a:extLst>
+            </a:blip>
+            <a:stretch>
+              <a:fillRect/>
+            </a:stretch>
+          </p:blipFill>
+          <p:spPr>
+            <a:xfrm>
+              <a:off x="3122365" y="3433749"/>
+              <a:ext cx="1008000" cy="1008000"/>
+            </a:xfrm>
+            <a:prstGeom prst="rect">
+              <a:avLst/>
+            </a:prstGeom>
+          </p:spPr>
+        </p:pic>
+      </p:grpSp>
+      <p:pic>
+        <p:nvPicPr>
+          <p:cNvPr id="17" name="Picture 2" descr="顔のシルエット | 無料のAi・PNG白黒シルエットイラスト">
+            <a:extLst>
+              <a:ext uri="{FF2B5EF4-FFF2-40B4-BE49-F238E27FC236}">
+                <a16:creationId xmlns:a16="http://schemas.microsoft.com/office/drawing/2014/main" id="{762F170C-0C86-43B0-BB9B-A687D092A4C7}"/>
+              </a:ext>
+            </a:extLst>
+          </p:cNvPr>
+          <p:cNvPicPr>
+            <a:picLocks noChangeAspect="1" noChangeArrowheads="1"/>
+          </p:cNvPicPr>
+          <p:nvPr/>
+        </p:nvPicPr>
+        <p:blipFill>
+          <a:blip r:embed="rId3">
+            <a:extLst>
+              <a:ext uri="{28A0092B-C50C-407E-A947-70E740481C1C}">
+                <a14:useLocalDpi xmlns:a14="http://schemas.microsoft.com/office/drawing/2010/main" val="0"/>
+              </a:ext>
+            </a:extLst>
+          </a:blip>
+          <a:srcRect/>
+          <a:stretch>
+            <a:fillRect/>
+          </a:stretch>
+        </p:blipFill>
+        <p:spPr bwMode="auto">
+          <a:xfrm>
+            <a:off x="2163402" y="3991947"/>
+            <a:ext cx="1178385" cy="1109068"/>
+          </a:xfrm>
+          <a:prstGeom prst="rect">
+            <a:avLst/>
+          </a:prstGeom>
+          <a:noFill/>
+          <a:extLst>
+            <a:ext uri="{909E8E84-426E-40DD-AFC4-6F175D3DCCD1}">
+              <a14:hiddenFill xmlns:a14="http://schemas.microsoft.com/office/drawing/2010/main">
+                <a:solidFill>
+                  <a:srgbClr val="FFFFFF"/>
+                </a:solidFill>
+              </a14:hiddenFill>
+            </a:ext>
+          </a:extLst>
+        </p:spPr>
+      </p:pic>
+      <p:grpSp>
+        <p:nvGrpSpPr>
+          <p:cNvPr id="18" name="グループ化 17">
+            <a:extLst>
+              <a:ext uri="{FF2B5EF4-FFF2-40B4-BE49-F238E27FC236}">
+                <a16:creationId xmlns:a16="http://schemas.microsoft.com/office/drawing/2014/main" id="{287FF660-B168-A24E-6572-852F32DD2566}"/>
+              </a:ext>
+            </a:extLst>
+          </p:cNvPr>
+          <p:cNvGrpSpPr/>
+          <p:nvPr/>
+        </p:nvGrpSpPr>
+        <p:grpSpPr>
+          <a:xfrm>
+            <a:off x="1616105" y="5101015"/>
+            <a:ext cx="2272978" cy="1707502"/>
+            <a:chOff x="4494330" y="1912776"/>
+            <a:chExt cx="2272978" cy="1707502"/>
+          </a:xfrm>
+        </p:grpSpPr>
+        <p:pic>
+          <p:nvPicPr>
+            <p:cNvPr id="19" name="図 18">
+              <a:extLst>
+                <a:ext uri="{FF2B5EF4-FFF2-40B4-BE49-F238E27FC236}">
+                  <a16:creationId xmlns:a16="http://schemas.microsoft.com/office/drawing/2014/main" id="{8D204D53-AEC6-D07C-1CC2-1608630536EA}"/>
+                </a:ext>
+              </a:extLst>
+            </p:cNvPr>
+            <p:cNvPicPr>
+              <a:picLocks noChangeAspect="1"/>
+            </p:cNvPicPr>
+            <p:nvPr/>
+          </p:nvPicPr>
+          <p:blipFill>
+            <a:blip r:embed="rId2">
+              <a:extLst>
+                <a:ext uri="{28A0092B-C50C-407E-A947-70E740481C1C}">
+                  <a14:useLocalDpi xmlns:a14="http://schemas.microsoft.com/office/drawing/2010/main" val="0"/>
+                </a:ext>
+              </a:extLst>
+            </a:blip>
+            <a:stretch>
+              <a:fillRect/>
+            </a:stretch>
+          </p:blipFill>
+          <p:spPr>
+            <a:xfrm>
+              <a:off x="5126819" y="2488842"/>
+              <a:ext cx="1008000" cy="1008000"/>
+            </a:xfrm>
+            <a:prstGeom prst="rect">
+              <a:avLst/>
+            </a:prstGeom>
+          </p:spPr>
+        </p:pic>
+        <p:sp>
+          <p:nvSpPr>
+            <p:cNvPr id="20" name="四角形: 角を丸くする 19">
+              <a:extLst>
+                <a:ext uri="{FF2B5EF4-FFF2-40B4-BE49-F238E27FC236}">
+                  <a16:creationId xmlns:a16="http://schemas.microsoft.com/office/drawing/2014/main" id="{6F838A21-8A72-9E10-024E-9840FE6307AA}"/>
+                </a:ext>
+              </a:extLst>
+            </p:cNvPr>
+            <p:cNvSpPr/>
+            <p:nvPr/>
+          </p:nvSpPr>
+          <p:spPr>
+            <a:xfrm>
+              <a:off x="4494330" y="1912776"/>
+              <a:ext cx="2272978" cy="1707502"/>
+            </a:xfrm>
+            <a:prstGeom prst="roundRect">
+              <a:avLst/>
+            </a:prstGeom>
+            <a:noFill/>
+            <a:ln w="38100"/>
+          </p:spPr>
+          <p:style>
+            <a:lnRef idx="2">
+              <a:schemeClr val="accent1">
+                <a:shade val="15000"/>
+              </a:schemeClr>
+            </a:lnRef>
+            <a:fillRef idx="1">
+              <a:schemeClr val="accent1"/>
+            </a:fillRef>
+            <a:effectRef idx="0">
+              <a:schemeClr val="accent1"/>
+            </a:effectRef>
+            <a:fontRef idx="minor">
+              <a:schemeClr val="lt1"/>
+            </a:fontRef>
+          </p:style>
+          <p:txBody>
+            <a:bodyPr rtlCol="0" anchor="t"/>
+            <a:lstStyle/>
+            <a:p>
+              <a:pPr algn="ctr"/>
+              <a:r>
+                <a:rPr lang="ja-JP" altLang="en-US" b="1" dirty="0">
+                  <a:solidFill>
+                    <a:schemeClr val="tx1"/>
+                  </a:solidFill>
+                </a:rPr>
+                <a:t>リポジトリ</a:t>
+              </a:r>
+              <a:endParaRPr kumimoji="1" lang="ja-JP" altLang="en-US" dirty="0">
+                <a:solidFill>
+                  <a:schemeClr val="tx1"/>
+                </a:solidFill>
+              </a:endParaRPr>
+            </a:p>
+          </p:txBody>
+        </p:sp>
+      </p:grpSp>
+    </p:spTree>
+    <p:extLst>
+      <p:ext uri="{BB962C8B-B14F-4D97-AF65-F5344CB8AC3E}">
+        <p14:creationId xmlns:p14="http://schemas.microsoft.com/office/powerpoint/2010/main" val="3101646527"/>
+      </p:ext>
+    </p:extLst>
+  </p:cSld>
+  <p:clrMapOvr>
+    <a:masterClrMapping/>
+  </p:clrMapOvr>
+</p:sld>
+</file>
+
+<file path=ppt/slides/slide25.xml><?xml version="1.0" encoding="utf-8"?>
+<p:sld xmlns:a="http://schemas.openxmlformats.org/drawingml/2006/main" xmlns:r="http://schemas.openxmlformats.org/officeDocument/2006/relationships" xmlns:p="http://schemas.openxmlformats.org/presentationml/2006/main">
+  <p:cSld>
+    <p:spTree>
+      <p:nvGrpSpPr>
+        <p:cNvPr id="1" name="">
+          <a:extLst>
+            <a:ext uri="{FF2B5EF4-FFF2-40B4-BE49-F238E27FC236}">
+              <a16:creationId xmlns:a16="http://schemas.microsoft.com/office/drawing/2014/main" id="{8982C918-07A6-148F-D509-C778927146EF}"/>
+            </a:ext>
+          </a:extLst>
+        </p:cNvPr>
+        <p:cNvGrpSpPr/>
+        <p:nvPr/>
+      </p:nvGrpSpPr>
+      <p:grpSpPr>
+        <a:xfrm>
+          <a:off x="0" y="0"/>
+          <a:ext cx="0" cy="0"/>
+          <a:chOff x="0" y="0"/>
+          <a:chExt cx="0" cy="0"/>
+        </a:xfrm>
+      </p:grpSpPr>
+      <p:pic>
+        <p:nvPicPr>
+          <p:cNvPr id="3" name="図 2">
+            <a:extLst>
+              <a:ext uri="{FF2B5EF4-FFF2-40B4-BE49-F238E27FC236}">
+                <a16:creationId xmlns:a16="http://schemas.microsoft.com/office/drawing/2014/main" id="{D6208FE0-32B6-33D1-18FC-757A3978144F}"/>
+              </a:ext>
+            </a:extLst>
+          </p:cNvPr>
+          <p:cNvPicPr>
+            <a:picLocks noChangeAspect="1"/>
+          </p:cNvPicPr>
+          <p:nvPr/>
+        </p:nvPicPr>
+        <p:blipFill>
+          <a:blip r:embed="rId2">
+            <a:extLst>
+              <a:ext uri="{28A0092B-C50C-407E-A947-70E740481C1C}">
+                <a14:useLocalDpi xmlns:a14="http://schemas.microsoft.com/office/drawing/2010/main" val="0"/>
+              </a:ext>
+            </a:extLst>
+          </a:blip>
+          <a:stretch>
+            <a:fillRect/>
+          </a:stretch>
+        </p:blipFill>
+        <p:spPr>
+          <a:xfrm>
+            <a:off x="3890816" y="204269"/>
+            <a:ext cx="1080000" cy="1080000"/>
+          </a:xfrm>
+          <a:prstGeom prst="rect">
+            <a:avLst/>
+          </a:prstGeom>
+        </p:spPr>
+      </p:pic>
+      <p:sp>
+        <p:nvSpPr>
+          <p:cNvPr id="4" name="テキスト ボックス 3">
+            <a:extLst>
+              <a:ext uri="{FF2B5EF4-FFF2-40B4-BE49-F238E27FC236}">
+                <a16:creationId xmlns:a16="http://schemas.microsoft.com/office/drawing/2014/main" id="{D3807AFD-4DE2-2A10-C8FB-44F03D19B0D5}"/>
+              </a:ext>
+            </a:extLst>
+          </p:cNvPr>
+          <p:cNvSpPr txBox="1"/>
+          <p:nvPr/>
+        </p:nvSpPr>
+        <p:spPr>
+          <a:xfrm>
+            <a:off x="4853937" y="583399"/>
+            <a:ext cx="2262158" cy="369332"/>
+          </a:xfrm>
+          <a:prstGeom prst="rect">
+            <a:avLst/>
+          </a:prstGeom>
+          <a:noFill/>
+        </p:spPr>
+        <p:txBody>
+          <a:bodyPr wrap="none" rtlCol="0">
+            <a:spAutoFit/>
+          </a:bodyPr>
+          <a:lstStyle/>
+          <a:p>
+            <a:r>
+              <a:rPr kumimoji="1" lang="ja-JP" altLang="en-US" b="1" dirty="0"/>
+              <a:t>現在のディレクトリ</a:t>
+            </a:r>
+          </a:p>
+        </p:txBody>
+      </p:sp>
+      <p:pic>
+        <p:nvPicPr>
+          <p:cNvPr id="14" name="図 13">
+            <a:extLst>
+              <a:ext uri="{FF2B5EF4-FFF2-40B4-BE49-F238E27FC236}">
+                <a16:creationId xmlns:a16="http://schemas.microsoft.com/office/drawing/2014/main" id="{B1FAAAD4-FA04-5F72-3BBA-5E91DB9DD15C}"/>
+              </a:ext>
+            </a:extLst>
+          </p:cNvPr>
+          <p:cNvPicPr>
+            <a:picLocks noChangeAspect="1"/>
+          </p:cNvPicPr>
+          <p:nvPr/>
+        </p:nvPicPr>
+        <p:blipFill>
+          <a:blip r:embed="rId2">
+            <a:extLst>
+              <a:ext uri="{28A0092B-C50C-407E-A947-70E740481C1C}">
+                <a14:useLocalDpi xmlns:a14="http://schemas.microsoft.com/office/drawing/2010/main" val="0"/>
+              </a:ext>
+            </a:extLst>
+          </a:blip>
+          <a:stretch>
+            <a:fillRect/>
+          </a:stretch>
+        </p:blipFill>
+        <p:spPr>
+          <a:xfrm>
+            <a:off x="3890816" y="2298652"/>
+            <a:ext cx="1080000" cy="1080000"/>
+          </a:xfrm>
+          <a:prstGeom prst="rect">
+            <a:avLst/>
+          </a:prstGeom>
+        </p:spPr>
+      </p:pic>
+      <p:sp>
+        <p:nvSpPr>
+          <p:cNvPr id="15" name="テキスト ボックス 14">
+            <a:extLst>
+              <a:ext uri="{FF2B5EF4-FFF2-40B4-BE49-F238E27FC236}">
+                <a16:creationId xmlns:a16="http://schemas.microsoft.com/office/drawing/2014/main" id="{8978E55E-D1F4-61EA-29F7-7FE7588AC8F0}"/>
+              </a:ext>
+            </a:extLst>
+          </p:cNvPr>
+          <p:cNvSpPr txBox="1"/>
+          <p:nvPr/>
+        </p:nvSpPr>
+        <p:spPr>
+          <a:xfrm>
+            <a:off x="4853937" y="2677782"/>
+            <a:ext cx="2262158" cy="369332"/>
+          </a:xfrm>
+          <a:prstGeom prst="rect">
+            <a:avLst/>
+          </a:prstGeom>
+          <a:noFill/>
+        </p:spPr>
+        <p:txBody>
+          <a:bodyPr wrap="none" rtlCol="0">
+            <a:spAutoFit/>
+          </a:bodyPr>
+          <a:lstStyle/>
+          <a:p>
+            <a:r>
+              <a:rPr kumimoji="1" lang="ja-JP" altLang="en-US" b="1" dirty="0"/>
+              <a:t>現在のディレクトリ</a:t>
+            </a:r>
+          </a:p>
+        </p:txBody>
+      </p:sp>
+      <p:cxnSp>
+        <p:nvCxnSpPr>
+          <p:cNvPr id="18" name="コネクタ: カギ線 17">
+            <a:extLst>
+              <a:ext uri="{FF2B5EF4-FFF2-40B4-BE49-F238E27FC236}">
+                <a16:creationId xmlns:a16="http://schemas.microsoft.com/office/drawing/2014/main" id="{582C82A7-84A5-90A1-242F-296D5F02A17D}"/>
+              </a:ext>
+            </a:extLst>
+          </p:cNvPr>
+          <p:cNvCxnSpPr>
+            <a:cxnSpLocks/>
+          </p:cNvCxnSpPr>
+          <p:nvPr/>
+        </p:nvCxnSpPr>
+        <p:spPr>
+          <a:xfrm>
+            <a:off x="4419224" y="3193495"/>
+            <a:ext cx="1408521" cy="504000"/>
+          </a:xfrm>
+          <a:prstGeom prst="bentConnector3">
+            <a:avLst>
+              <a:gd name="adj1" fmla="val -235"/>
+            </a:avLst>
+          </a:prstGeom>
+          <a:ln w="38100"/>
+        </p:spPr>
+        <p:style>
+          <a:lnRef idx="1">
+            <a:schemeClr val="dk1"/>
+          </a:lnRef>
+          <a:fillRef idx="0">
+            <a:schemeClr val="dk1"/>
+          </a:fillRef>
+          <a:effectRef idx="0">
+            <a:schemeClr val="dk1"/>
+          </a:effectRef>
+          <a:fontRef idx="minor">
+            <a:schemeClr val="tx1"/>
+          </a:fontRef>
+        </p:style>
+      </p:cxnSp>
+      <p:pic>
+        <p:nvPicPr>
+          <p:cNvPr id="23" name="図 22">
+            <a:extLst>
+              <a:ext uri="{FF2B5EF4-FFF2-40B4-BE49-F238E27FC236}">
+                <a16:creationId xmlns:a16="http://schemas.microsoft.com/office/drawing/2014/main" id="{25E9AD5A-0F78-CDAD-B26D-41699AF46FC5}"/>
+              </a:ext>
+            </a:extLst>
+          </p:cNvPr>
+          <p:cNvPicPr>
+            <a:picLocks noChangeAspect="1"/>
+          </p:cNvPicPr>
+          <p:nvPr/>
+        </p:nvPicPr>
+        <p:blipFill>
+          <a:blip r:embed="rId2">
+            <a:extLst>
+              <a:ext uri="{28A0092B-C50C-407E-A947-70E740481C1C}">
+                <a14:useLocalDpi xmlns:a14="http://schemas.microsoft.com/office/drawing/2010/main" val="0"/>
+              </a:ext>
+            </a:extLst>
+          </a:blip>
+          <a:stretch>
+            <a:fillRect/>
+          </a:stretch>
+        </p:blipFill>
+        <p:spPr>
+          <a:xfrm>
+            <a:off x="5814926" y="3080533"/>
+            <a:ext cx="1080000" cy="1080000"/>
+          </a:xfrm>
+          <a:prstGeom prst="rect">
+            <a:avLst/>
+          </a:prstGeom>
+        </p:spPr>
+      </p:pic>
+      <p:sp>
+        <p:nvSpPr>
+          <p:cNvPr id="24" name="四角形: 角を丸くする 23">
+            <a:extLst>
+              <a:ext uri="{FF2B5EF4-FFF2-40B4-BE49-F238E27FC236}">
+                <a16:creationId xmlns:a16="http://schemas.microsoft.com/office/drawing/2014/main" id="{8D489AE9-8BB2-998A-48F5-5A707D1C350E}"/>
+              </a:ext>
+            </a:extLst>
+          </p:cNvPr>
+          <p:cNvSpPr/>
+          <p:nvPr/>
+        </p:nvSpPr>
+        <p:spPr>
+          <a:xfrm>
+            <a:off x="4030824" y="3225678"/>
+            <a:ext cx="8042988" cy="1915488"/>
+          </a:xfrm>
+          <a:prstGeom prst="roundRect">
+            <a:avLst/>
+          </a:prstGeom>
+          <a:noFill/>
+          <a:ln w="38100">
+            <a:solidFill>
+              <a:srgbClr val="00B0F0"/>
+            </a:solidFill>
+            <a:prstDash val="dash"/>
+          </a:ln>
+        </p:spPr>
+        <p:style>
+          <a:lnRef idx="2">
+            <a:schemeClr val="accent1">
+              <a:shade val="15000"/>
+            </a:schemeClr>
+          </a:lnRef>
+          <a:fillRef idx="1">
+            <a:schemeClr val="accent1"/>
+          </a:fillRef>
+          <a:effectRef idx="0">
+            <a:schemeClr val="accent1"/>
+          </a:effectRef>
+          <a:fontRef idx="minor">
+            <a:schemeClr val="lt1"/>
+          </a:fontRef>
+        </p:style>
+        <p:txBody>
+          <a:bodyPr rtlCol="0" anchor="ctr"/>
+          <a:lstStyle/>
+          <a:p>
+            <a:pPr algn="ctr"/>
+            <a:endParaRPr kumimoji="1" lang="ja-JP" altLang="en-US"/>
+          </a:p>
+        </p:txBody>
+      </p:sp>
+      <p:sp>
+        <p:nvSpPr>
+          <p:cNvPr id="25" name="テキスト ボックス 24">
+            <a:extLst>
+              <a:ext uri="{FF2B5EF4-FFF2-40B4-BE49-F238E27FC236}">
+                <a16:creationId xmlns:a16="http://schemas.microsoft.com/office/drawing/2014/main" id="{FEFACEC3-9A56-A1B8-AB47-8E802BDD7300}"/>
+              </a:ext>
+            </a:extLst>
+          </p:cNvPr>
+          <p:cNvSpPr txBox="1"/>
+          <p:nvPr/>
+        </p:nvSpPr>
+        <p:spPr>
+          <a:xfrm>
+            <a:off x="5642149" y="5311049"/>
+            <a:ext cx="2262158" cy="369332"/>
+          </a:xfrm>
+          <a:prstGeom prst="rect">
+            <a:avLst/>
+          </a:prstGeom>
+          <a:noFill/>
+        </p:spPr>
+        <p:txBody>
+          <a:bodyPr wrap="none" rtlCol="0">
+            <a:spAutoFit/>
+          </a:bodyPr>
+          <a:lstStyle/>
+          <a:p>
+            <a:r>
+              <a:rPr kumimoji="1" lang="ja-JP" altLang="en-US" b="1" dirty="0">
+                <a:solidFill>
+                  <a:srgbClr val="00B0F0"/>
+                </a:solidFill>
+              </a:rPr>
+              <a:t>ローカルリポジトリ</a:t>
+            </a:r>
+          </a:p>
+        </p:txBody>
+      </p:sp>
+      <p:sp>
+        <p:nvSpPr>
+          <p:cNvPr id="27" name="四角形: 角を丸くする 26">
+            <a:extLst>
+              <a:ext uri="{FF2B5EF4-FFF2-40B4-BE49-F238E27FC236}">
+                <a16:creationId xmlns:a16="http://schemas.microsoft.com/office/drawing/2014/main" id="{FF3A030C-F3CC-8C47-B759-082500F8BD03}"/>
+              </a:ext>
+            </a:extLst>
+          </p:cNvPr>
+          <p:cNvSpPr/>
+          <p:nvPr/>
+        </p:nvSpPr>
+        <p:spPr>
+          <a:xfrm>
+            <a:off x="4282751" y="4137966"/>
+            <a:ext cx="5040000" cy="720000"/>
+          </a:xfrm>
+          <a:prstGeom prst="roundRect">
+            <a:avLst/>
+          </a:prstGeom>
+          <a:noFill/>
+          <a:ln w="38100">
+            <a:solidFill>
+              <a:srgbClr val="00B050"/>
+            </a:solidFill>
+            <a:prstDash val="dash"/>
+          </a:ln>
+        </p:spPr>
+        <p:style>
+          <a:lnRef idx="2">
+            <a:schemeClr val="accent1">
+              <a:shade val="15000"/>
+            </a:schemeClr>
+          </a:lnRef>
+          <a:fillRef idx="1">
+            <a:schemeClr val="accent1"/>
+          </a:fillRef>
+          <a:effectRef idx="0">
+            <a:schemeClr val="accent1"/>
+          </a:effectRef>
+          <a:fontRef idx="minor">
+            <a:schemeClr val="lt1"/>
+          </a:fontRef>
+        </p:style>
+        <p:txBody>
+          <a:bodyPr rtlCol="0" anchor="ctr"/>
+          <a:lstStyle/>
+          <a:p>
+            <a:pPr algn="ctr"/>
+            <a:r>
+              <a:rPr kumimoji="1" lang="ja-JP" altLang="en-US" b="1" dirty="0">
+                <a:solidFill>
+                  <a:srgbClr val="00B050"/>
+                </a:solidFill>
+              </a:rPr>
+              <a:t>ワーキングツリー</a:t>
+            </a:r>
+          </a:p>
+        </p:txBody>
+      </p:sp>
+      <p:cxnSp>
+        <p:nvCxnSpPr>
+          <p:cNvPr id="28" name="コネクタ: カギ線 27">
+            <a:extLst>
+              <a:ext uri="{FF2B5EF4-FFF2-40B4-BE49-F238E27FC236}">
+                <a16:creationId xmlns:a16="http://schemas.microsoft.com/office/drawing/2014/main" id="{84A91EF5-DD81-C7F5-E06B-632EFDEA8FCA}"/>
+              </a:ext>
+            </a:extLst>
+          </p:cNvPr>
+          <p:cNvCxnSpPr>
+            <a:cxnSpLocks/>
+          </p:cNvCxnSpPr>
+          <p:nvPr/>
+        </p:nvCxnSpPr>
+        <p:spPr>
+          <a:xfrm>
+            <a:off x="4427084" y="3197006"/>
+            <a:ext cx="1408521" cy="1296000"/>
+          </a:xfrm>
+          <a:prstGeom prst="bentConnector3">
+            <a:avLst>
+              <a:gd name="adj1" fmla="val -235"/>
+            </a:avLst>
+          </a:prstGeom>
+          <a:ln w="38100"/>
+        </p:spPr>
+        <p:style>
+          <a:lnRef idx="1">
+            <a:schemeClr val="dk1"/>
+          </a:lnRef>
+          <a:fillRef idx="0">
+            <a:schemeClr val="dk1"/>
+          </a:fillRef>
+          <a:effectRef idx="0">
+            <a:schemeClr val="dk1"/>
+          </a:effectRef>
+          <a:fontRef idx="minor">
+            <a:schemeClr val="tx1"/>
+          </a:fontRef>
+        </p:style>
+      </p:cxnSp>
+      <p:sp>
+        <p:nvSpPr>
+          <p:cNvPr id="32" name="矢印: 右 31">
+            <a:extLst>
+              <a:ext uri="{FF2B5EF4-FFF2-40B4-BE49-F238E27FC236}">
+                <a16:creationId xmlns:a16="http://schemas.microsoft.com/office/drawing/2014/main" id="{490B61F3-7FA6-A7E9-3FA8-CF12C922251C}"/>
+              </a:ext>
+            </a:extLst>
+          </p:cNvPr>
+          <p:cNvSpPr/>
+          <p:nvPr/>
+        </p:nvSpPr>
+        <p:spPr>
+          <a:xfrm rot="5400000">
+            <a:off x="7818275" y="1516548"/>
+            <a:ext cx="468086" cy="677228"/>
+          </a:xfrm>
+          <a:prstGeom prst="rightArrow">
+            <a:avLst/>
+          </a:prstGeom>
+        </p:spPr>
+        <p:style>
+          <a:lnRef idx="2">
+            <a:schemeClr val="dk1">
+              <a:shade val="15000"/>
+            </a:schemeClr>
+          </a:lnRef>
+          <a:fillRef idx="1">
+            <a:schemeClr val="dk1"/>
+          </a:fillRef>
+          <a:effectRef idx="0">
+            <a:schemeClr val="dk1"/>
+          </a:effectRef>
+          <a:fontRef idx="minor">
+            <a:schemeClr val="lt1"/>
+          </a:fontRef>
+        </p:style>
+        <p:txBody>
+          <a:bodyPr rtlCol="0" anchor="ctr"/>
+          <a:lstStyle/>
+          <a:p>
+            <a:pPr algn="ctr"/>
+            <a:endParaRPr kumimoji="1" lang="ja-JP" altLang="en-US"/>
+          </a:p>
+        </p:txBody>
+      </p:sp>
+      <p:sp>
+        <p:nvSpPr>
+          <p:cNvPr id="33" name="テキスト ボックス 32">
+            <a:extLst>
+              <a:ext uri="{FF2B5EF4-FFF2-40B4-BE49-F238E27FC236}">
+                <a16:creationId xmlns:a16="http://schemas.microsoft.com/office/drawing/2014/main" id="{E0D644E9-E5A1-61E6-D4FC-14934CD4CBED}"/>
+              </a:ext>
+            </a:extLst>
+          </p:cNvPr>
+          <p:cNvSpPr txBox="1"/>
+          <p:nvPr/>
+        </p:nvSpPr>
+        <p:spPr>
+          <a:xfrm>
+            <a:off x="6761672" y="3459726"/>
+            <a:ext cx="537327" cy="369332"/>
+          </a:xfrm>
+          <a:prstGeom prst="rect">
+            <a:avLst/>
+          </a:prstGeom>
+          <a:noFill/>
+        </p:spPr>
+        <p:txBody>
+          <a:bodyPr wrap="none" rtlCol="0">
+            <a:spAutoFit/>
+          </a:bodyPr>
+          <a:lstStyle/>
+          <a:p>
+            <a:r>
+              <a:rPr kumimoji="1" lang="en-US" altLang="ja-JP" b="1" dirty="0"/>
+              <a:t>.git</a:t>
+            </a:r>
+            <a:endParaRPr kumimoji="1" lang="ja-JP" altLang="en-US" b="1" dirty="0"/>
+          </a:p>
+        </p:txBody>
+      </p:sp>
+      <p:sp>
+        <p:nvSpPr>
+          <p:cNvPr id="35" name="四角形: 角を丸くする 34">
+            <a:extLst>
+              <a:ext uri="{FF2B5EF4-FFF2-40B4-BE49-F238E27FC236}">
+                <a16:creationId xmlns:a16="http://schemas.microsoft.com/office/drawing/2014/main" id="{E0BD46DE-2E3D-528A-9DBC-6A77D9C3E0E5}"/>
+              </a:ext>
+            </a:extLst>
+          </p:cNvPr>
+          <p:cNvSpPr/>
+          <p:nvPr/>
+        </p:nvSpPr>
+        <p:spPr>
+          <a:xfrm>
+            <a:off x="5833587" y="3310127"/>
+            <a:ext cx="6090935" cy="720000"/>
+          </a:xfrm>
+          <a:prstGeom prst="roundRect">
+            <a:avLst/>
+          </a:prstGeom>
+          <a:noFill/>
+          <a:ln w="38100">
+            <a:solidFill>
+              <a:srgbClr val="FFC000"/>
+            </a:solidFill>
+            <a:prstDash val="dash"/>
+          </a:ln>
+        </p:spPr>
+        <p:style>
+          <a:lnRef idx="2">
+            <a:schemeClr val="accent1">
+              <a:shade val="15000"/>
+            </a:schemeClr>
+          </a:lnRef>
+          <a:fillRef idx="1">
+            <a:schemeClr val="accent1"/>
+          </a:fillRef>
+          <a:effectRef idx="0">
+            <a:schemeClr val="accent1"/>
+          </a:effectRef>
+          <a:fontRef idx="minor">
+            <a:schemeClr val="lt1"/>
+          </a:fontRef>
+        </p:style>
+        <p:txBody>
+          <a:bodyPr rtlCol="0" anchor="ctr"/>
+          <a:lstStyle/>
+          <a:p>
+            <a:pPr algn="r"/>
+            <a:r>
+              <a:rPr kumimoji="1" lang="ja-JP" altLang="en-US" b="1" dirty="0">
+                <a:solidFill>
+                  <a:srgbClr val="FFC000"/>
+                </a:solidFill>
+              </a:rPr>
+              <a:t>ステージングエリアや変更履歴などの情報</a:t>
+            </a:r>
+          </a:p>
+        </p:txBody>
+      </p:sp>
+    </p:spTree>
+    <p:extLst>
+      <p:ext uri="{BB962C8B-B14F-4D97-AF65-F5344CB8AC3E}">
+        <p14:creationId xmlns:p14="http://schemas.microsoft.com/office/powerpoint/2010/main" val="254460218"/>
+      </p:ext>
+    </p:extLst>
+  </p:cSld>
+  <p:clrMapOvr>
+    <a:masterClrMapping/>
+  </p:clrMapOvr>
+</p:sld>
+</file>
+
+<file path=ppt/slides/slide26.xml><?xml version="1.0" encoding="utf-8"?>
+<p:sld xmlns:a="http://schemas.openxmlformats.org/drawingml/2006/main" xmlns:r="http://schemas.openxmlformats.org/officeDocument/2006/relationships" xmlns:p="http://schemas.openxmlformats.org/presentationml/2006/main">
+  <p:cSld>
+    <p:spTree>
+      <p:nvGrpSpPr>
+        <p:cNvPr id="1" name="">
+          <a:extLst>
+            <a:ext uri="{FF2B5EF4-FFF2-40B4-BE49-F238E27FC236}">
+              <a16:creationId xmlns:a16="http://schemas.microsoft.com/office/drawing/2014/main" id="{3DB517B7-392F-AF19-90F3-E6C20E61A08D}"/>
+            </a:ext>
+          </a:extLst>
+        </p:cNvPr>
+        <p:cNvGrpSpPr/>
+        <p:nvPr/>
+      </p:nvGrpSpPr>
+      <p:grpSpPr>
+        <a:xfrm>
+          <a:off x="0" y="0"/>
+          <a:ext cx="0" cy="0"/>
+          <a:chOff x="0" y="0"/>
+          <a:chExt cx="0" cy="0"/>
+        </a:xfrm>
+      </p:grpSpPr>
+      <p:sp>
+        <p:nvSpPr>
+          <p:cNvPr id="12" name="矢印: 右 11">
+            <a:extLst>
+              <a:ext uri="{FF2B5EF4-FFF2-40B4-BE49-F238E27FC236}">
+                <a16:creationId xmlns:a16="http://schemas.microsoft.com/office/drawing/2014/main" id="{475A0190-6ECA-B767-7BE3-B2C0968AF607}"/>
+              </a:ext>
+            </a:extLst>
+          </p:cNvPr>
+          <p:cNvSpPr/>
+          <p:nvPr/>
+        </p:nvSpPr>
+        <p:spPr>
+          <a:xfrm rot="5400000">
+            <a:off x="6660883" y="3176499"/>
+            <a:ext cx="468086" cy="677228"/>
+          </a:xfrm>
+          <a:prstGeom prst="rightArrow">
+            <a:avLst/>
+          </a:prstGeom>
+        </p:spPr>
+        <p:style>
+          <a:lnRef idx="2">
+            <a:schemeClr val="dk1">
+              <a:shade val="15000"/>
+            </a:schemeClr>
+          </a:lnRef>
+          <a:fillRef idx="1">
+            <a:schemeClr val="dk1"/>
+          </a:fillRef>
+          <a:effectRef idx="0">
+            <a:schemeClr val="dk1"/>
+          </a:effectRef>
+          <a:fontRef idx="minor">
+            <a:schemeClr val="lt1"/>
+          </a:fontRef>
+        </p:style>
+        <p:txBody>
+          <a:bodyPr rtlCol="0" anchor="ctr"/>
+          <a:lstStyle/>
+          <a:p>
+            <a:pPr algn="ctr"/>
+            <a:endParaRPr kumimoji="1" lang="ja-JP" altLang="en-US"/>
+          </a:p>
+        </p:txBody>
+      </p:sp>
+      <p:pic>
+        <p:nvPicPr>
+          <p:cNvPr id="14" name="図 13">
+            <a:extLst>
+              <a:ext uri="{FF2B5EF4-FFF2-40B4-BE49-F238E27FC236}">
+                <a16:creationId xmlns:a16="http://schemas.microsoft.com/office/drawing/2014/main" id="{858A2D48-31BD-8451-C2E0-B044ADCEF85F}"/>
+              </a:ext>
+            </a:extLst>
+          </p:cNvPr>
+          <p:cNvPicPr>
+            <a:picLocks noChangeAspect="1"/>
+          </p:cNvPicPr>
+          <p:nvPr/>
+        </p:nvPicPr>
+        <p:blipFill>
+          <a:blip r:embed="rId2">
+            <a:extLst>
+              <a:ext uri="{28A0092B-C50C-407E-A947-70E740481C1C}">
+                <a14:useLocalDpi xmlns:a14="http://schemas.microsoft.com/office/drawing/2010/main" val="0"/>
+              </a:ext>
+            </a:extLst>
+          </a:blip>
+          <a:stretch>
+            <a:fillRect/>
+          </a:stretch>
+        </p:blipFill>
+        <p:spPr>
+          <a:xfrm>
+            <a:off x="3890816" y="3847535"/>
+            <a:ext cx="1080000" cy="1080000"/>
+          </a:xfrm>
+          <a:prstGeom prst="rect">
+            <a:avLst/>
+          </a:prstGeom>
+        </p:spPr>
+      </p:pic>
+      <p:sp>
+        <p:nvSpPr>
+          <p:cNvPr id="15" name="テキスト ボックス 14">
+            <a:extLst>
+              <a:ext uri="{FF2B5EF4-FFF2-40B4-BE49-F238E27FC236}">
+                <a16:creationId xmlns:a16="http://schemas.microsoft.com/office/drawing/2014/main" id="{BC05DAF5-5502-93C6-81F3-3761D1C7B0D7}"/>
+              </a:ext>
+            </a:extLst>
+          </p:cNvPr>
+          <p:cNvSpPr txBox="1"/>
+          <p:nvPr/>
+        </p:nvSpPr>
+        <p:spPr>
+          <a:xfrm>
+            <a:off x="4853937" y="4226665"/>
+            <a:ext cx="2262158" cy="369332"/>
+          </a:xfrm>
+          <a:prstGeom prst="rect">
+            <a:avLst/>
+          </a:prstGeom>
+          <a:noFill/>
+        </p:spPr>
+        <p:txBody>
+          <a:bodyPr wrap="none" rtlCol="0">
+            <a:spAutoFit/>
+          </a:bodyPr>
+          <a:lstStyle/>
+          <a:p>
+            <a:r>
+              <a:rPr kumimoji="1" lang="ja-JP" altLang="en-US" b="1" dirty="0"/>
+              <a:t>現在のディレクトリ</a:t>
+            </a:r>
+          </a:p>
+        </p:txBody>
+      </p:sp>
+      <p:cxnSp>
+        <p:nvCxnSpPr>
+          <p:cNvPr id="18" name="コネクタ: カギ線 17">
+            <a:extLst>
+              <a:ext uri="{FF2B5EF4-FFF2-40B4-BE49-F238E27FC236}">
+                <a16:creationId xmlns:a16="http://schemas.microsoft.com/office/drawing/2014/main" id="{3708E6CE-5B3D-3CA5-EC5B-A9409E744174}"/>
+              </a:ext>
+            </a:extLst>
+          </p:cNvPr>
+          <p:cNvCxnSpPr>
+            <a:cxnSpLocks/>
+          </p:cNvCxnSpPr>
+          <p:nvPr/>
+        </p:nvCxnSpPr>
+        <p:spPr>
+          <a:xfrm>
+            <a:off x="4419224" y="4742378"/>
+            <a:ext cx="1408521" cy="504000"/>
+          </a:xfrm>
+          <a:prstGeom prst="bentConnector3">
+            <a:avLst>
+              <a:gd name="adj1" fmla="val -235"/>
+            </a:avLst>
+          </a:prstGeom>
+          <a:ln w="38100"/>
+        </p:spPr>
+        <p:style>
+          <a:lnRef idx="1">
+            <a:schemeClr val="dk1"/>
+          </a:lnRef>
+          <a:fillRef idx="0">
+            <a:schemeClr val="dk1"/>
+          </a:fillRef>
+          <a:effectRef idx="0">
+            <a:schemeClr val="dk1"/>
+          </a:effectRef>
+          <a:fontRef idx="minor">
+            <a:schemeClr val="tx1"/>
+          </a:fontRef>
+        </p:style>
+      </p:cxnSp>
+      <p:pic>
+        <p:nvPicPr>
+          <p:cNvPr id="23" name="図 22">
+            <a:extLst>
+              <a:ext uri="{FF2B5EF4-FFF2-40B4-BE49-F238E27FC236}">
+                <a16:creationId xmlns:a16="http://schemas.microsoft.com/office/drawing/2014/main" id="{614CA35A-EBDC-533F-E45D-D1A8BDBF94BA}"/>
+              </a:ext>
+            </a:extLst>
+          </p:cNvPr>
+          <p:cNvPicPr>
+            <a:picLocks noChangeAspect="1"/>
+          </p:cNvPicPr>
+          <p:nvPr/>
+        </p:nvPicPr>
+        <p:blipFill>
+          <a:blip r:embed="rId2">
+            <a:extLst>
+              <a:ext uri="{28A0092B-C50C-407E-A947-70E740481C1C}">
+                <a14:useLocalDpi xmlns:a14="http://schemas.microsoft.com/office/drawing/2010/main" val="0"/>
+              </a:ext>
+            </a:extLst>
+          </a:blip>
+          <a:stretch>
+            <a:fillRect/>
+          </a:stretch>
+        </p:blipFill>
+        <p:spPr>
+          <a:xfrm>
+            <a:off x="5814926" y="4629416"/>
+            <a:ext cx="1080000" cy="1080000"/>
+          </a:xfrm>
+          <a:prstGeom prst="rect">
+            <a:avLst/>
+          </a:prstGeom>
+        </p:spPr>
+      </p:pic>
+      <p:sp>
+        <p:nvSpPr>
+          <p:cNvPr id="24" name="四角形: 角を丸くする 23">
+            <a:extLst>
+              <a:ext uri="{FF2B5EF4-FFF2-40B4-BE49-F238E27FC236}">
+                <a16:creationId xmlns:a16="http://schemas.microsoft.com/office/drawing/2014/main" id="{E0F72E2F-78D1-775C-C67E-0569560C0A65}"/>
+              </a:ext>
+            </a:extLst>
+          </p:cNvPr>
+          <p:cNvSpPr/>
+          <p:nvPr/>
+        </p:nvSpPr>
+        <p:spPr>
+          <a:xfrm>
+            <a:off x="4030824" y="4802554"/>
+            <a:ext cx="5467739" cy="1915488"/>
+          </a:xfrm>
+          <a:prstGeom prst="roundRect">
+            <a:avLst/>
+          </a:prstGeom>
+          <a:noFill/>
+          <a:ln w="38100">
+            <a:solidFill>
+              <a:srgbClr val="00B0F0"/>
+            </a:solidFill>
+            <a:prstDash val="dash"/>
+          </a:ln>
+        </p:spPr>
+        <p:style>
+          <a:lnRef idx="2">
+            <a:schemeClr val="accent1">
+              <a:shade val="15000"/>
+            </a:schemeClr>
+          </a:lnRef>
+          <a:fillRef idx="1">
+            <a:schemeClr val="accent1"/>
+          </a:fillRef>
+          <a:effectRef idx="0">
+            <a:schemeClr val="accent1"/>
+          </a:effectRef>
+          <a:fontRef idx="minor">
+            <a:schemeClr val="lt1"/>
+          </a:fontRef>
+        </p:style>
+        <p:txBody>
+          <a:bodyPr rtlCol="0" anchor="ctr"/>
+          <a:lstStyle/>
+          <a:p>
+            <a:pPr algn="ctr"/>
+            <a:endParaRPr kumimoji="1" lang="ja-JP" altLang="en-US"/>
+          </a:p>
+        </p:txBody>
+      </p:sp>
+      <p:sp>
+        <p:nvSpPr>
+          <p:cNvPr id="27" name="四角形: 角を丸くする 26">
+            <a:extLst>
+              <a:ext uri="{FF2B5EF4-FFF2-40B4-BE49-F238E27FC236}">
+                <a16:creationId xmlns:a16="http://schemas.microsoft.com/office/drawing/2014/main" id="{311D7DE6-6EB2-DC85-FEAE-D63994B459B1}"/>
+              </a:ext>
+            </a:extLst>
+          </p:cNvPr>
+          <p:cNvSpPr/>
+          <p:nvPr/>
+        </p:nvSpPr>
+        <p:spPr>
+          <a:xfrm>
+            <a:off x="4282751" y="5686849"/>
+            <a:ext cx="5040000" cy="720000"/>
+          </a:xfrm>
+          <a:prstGeom prst="roundRect">
+            <a:avLst/>
+          </a:prstGeom>
+          <a:noFill/>
+          <a:ln w="38100">
+            <a:solidFill>
+              <a:srgbClr val="00B050"/>
+            </a:solidFill>
+            <a:prstDash val="dash"/>
+          </a:ln>
+        </p:spPr>
+        <p:style>
+          <a:lnRef idx="2">
+            <a:schemeClr val="accent1">
+              <a:shade val="15000"/>
+            </a:schemeClr>
+          </a:lnRef>
+          <a:fillRef idx="1">
+            <a:schemeClr val="accent1"/>
+          </a:fillRef>
+          <a:effectRef idx="0">
+            <a:schemeClr val="accent1"/>
+          </a:effectRef>
+          <a:fontRef idx="minor">
+            <a:schemeClr val="lt1"/>
+          </a:fontRef>
+        </p:style>
+        <p:txBody>
+          <a:bodyPr rtlCol="0" anchor="ctr"/>
+          <a:lstStyle/>
+          <a:p>
+            <a:pPr algn="ctr"/>
+            <a:endParaRPr kumimoji="1" lang="ja-JP" altLang="en-US" b="1" dirty="0">
+              <a:solidFill>
+                <a:srgbClr val="00B050"/>
+              </a:solidFill>
+            </a:endParaRPr>
+          </a:p>
+        </p:txBody>
+      </p:sp>
+      <p:cxnSp>
+        <p:nvCxnSpPr>
+          <p:cNvPr id="28" name="コネクタ: カギ線 27">
+            <a:extLst>
+              <a:ext uri="{FF2B5EF4-FFF2-40B4-BE49-F238E27FC236}">
+                <a16:creationId xmlns:a16="http://schemas.microsoft.com/office/drawing/2014/main" id="{283EC7C2-45BE-A4D5-26AE-195498E13A7B}"/>
+              </a:ext>
+            </a:extLst>
+          </p:cNvPr>
+          <p:cNvCxnSpPr>
+            <a:cxnSpLocks/>
+          </p:cNvCxnSpPr>
+          <p:nvPr/>
+        </p:nvCxnSpPr>
+        <p:spPr>
+          <a:xfrm>
+            <a:off x="4427084" y="4745889"/>
+            <a:ext cx="1408521" cy="1296000"/>
+          </a:xfrm>
+          <a:prstGeom prst="bentConnector3">
+            <a:avLst>
+              <a:gd name="adj1" fmla="val -235"/>
+            </a:avLst>
+          </a:prstGeom>
+          <a:ln w="38100"/>
+        </p:spPr>
+        <p:style>
+          <a:lnRef idx="1">
+            <a:schemeClr val="dk1"/>
+          </a:lnRef>
+          <a:fillRef idx="0">
+            <a:schemeClr val="dk1"/>
+          </a:fillRef>
+          <a:effectRef idx="0">
+            <a:schemeClr val="dk1"/>
+          </a:effectRef>
+          <a:fontRef idx="minor">
+            <a:schemeClr val="tx1"/>
+          </a:fontRef>
+        </p:style>
+      </p:cxnSp>
+      <p:pic>
+        <p:nvPicPr>
+          <p:cNvPr id="2" name="図 1">
+            <a:extLst>
+              <a:ext uri="{FF2B5EF4-FFF2-40B4-BE49-F238E27FC236}">
+                <a16:creationId xmlns:a16="http://schemas.microsoft.com/office/drawing/2014/main" id="{9CB39E36-D204-9010-21BA-A70770FA0A8C}"/>
+              </a:ext>
+            </a:extLst>
+          </p:cNvPr>
+          <p:cNvPicPr>
+            <a:picLocks noChangeAspect="1"/>
+          </p:cNvPicPr>
+          <p:nvPr/>
+        </p:nvPicPr>
+        <p:blipFill>
+          <a:blip r:embed="rId3">
+            <a:extLst>
+              <a:ext uri="{28A0092B-C50C-407E-A947-70E740481C1C}">
+                <a14:useLocalDpi xmlns:a14="http://schemas.microsoft.com/office/drawing/2010/main" val="0"/>
+              </a:ext>
+            </a:extLst>
+          </a:blip>
+          <a:stretch>
+            <a:fillRect/>
+          </a:stretch>
+        </p:blipFill>
+        <p:spPr>
+          <a:xfrm>
+            <a:off x="5919313" y="5606276"/>
+            <a:ext cx="871225" cy="871225"/>
+          </a:xfrm>
+          <a:prstGeom prst="rect">
+            <a:avLst/>
+          </a:prstGeom>
+        </p:spPr>
+      </p:pic>
+      <p:pic>
+        <p:nvPicPr>
+          <p:cNvPr id="5" name="図 4">
+            <a:extLst>
+              <a:ext uri="{FF2B5EF4-FFF2-40B4-BE49-F238E27FC236}">
+                <a16:creationId xmlns:a16="http://schemas.microsoft.com/office/drawing/2014/main" id="{C668754C-23A2-9991-E237-33F0083D051E}"/>
+              </a:ext>
+            </a:extLst>
+          </p:cNvPr>
+          <p:cNvPicPr>
+            <a:picLocks noChangeAspect="1"/>
+          </p:cNvPicPr>
+          <p:nvPr/>
+        </p:nvPicPr>
+        <p:blipFill>
+          <a:blip r:embed="rId2">
+            <a:extLst>
+              <a:ext uri="{28A0092B-C50C-407E-A947-70E740481C1C}">
+                <a14:useLocalDpi xmlns:a14="http://schemas.microsoft.com/office/drawing/2010/main" val="0"/>
+              </a:ext>
+            </a:extLst>
+          </a:blip>
+          <a:stretch>
+            <a:fillRect/>
+          </a:stretch>
+        </p:blipFill>
+        <p:spPr>
+          <a:xfrm>
+            <a:off x="3890816" y="52034"/>
+            <a:ext cx="1080000" cy="1080000"/>
+          </a:xfrm>
+          <a:prstGeom prst="rect">
+            <a:avLst/>
+          </a:prstGeom>
+        </p:spPr>
+      </p:pic>
+      <p:sp>
+        <p:nvSpPr>
+          <p:cNvPr id="6" name="テキスト ボックス 5">
+            <a:extLst>
+              <a:ext uri="{FF2B5EF4-FFF2-40B4-BE49-F238E27FC236}">
+                <a16:creationId xmlns:a16="http://schemas.microsoft.com/office/drawing/2014/main" id="{E0BE13FB-3B40-A2A5-8AC9-AFE2F89368A8}"/>
+              </a:ext>
+            </a:extLst>
+          </p:cNvPr>
+          <p:cNvSpPr txBox="1"/>
+          <p:nvPr/>
+        </p:nvSpPr>
+        <p:spPr>
+          <a:xfrm>
+            <a:off x="4853937" y="431164"/>
+            <a:ext cx="2262158" cy="369332"/>
+          </a:xfrm>
+          <a:prstGeom prst="rect">
+            <a:avLst/>
+          </a:prstGeom>
+          <a:noFill/>
+        </p:spPr>
+        <p:txBody>
+          <a:bodyPr wrap="none" rtlCol="0">
+            <a:spAutoFit/>
+          </a:bodyPr>
+          <a:lstStyle/>
+          <a:p>
+            <a:r>
+              <a:rPr kumimoji="1" lang="ja-JP" altLang="en-US" b="1" dirty="0"/>
+              <a:t>現在のディレクトリ</a:t>
+            </a:r>
+          </a:p>
+        </p:txBody>
+      </p:sp>
+      <p:cxnSp>
+        <p:nvCxnSpPr>
+          <p:cNvPr id="7" name="コネクタ: カギ線 6">
+            <a:extLst>
+              <a:ext uri="{FF2B5EF4-FFF2-40B4-BE49-F238E27FC236}">
+                <a16:creationId xmlns:a16="http://schemas.microsoft.com/office/drawing/2014/main" id="{CF8B3338-B660-8479-84FF-3BF3F4FE80FD}"/>
+              </a:ext>
+            </a:extLst>
+          </p:cNvPr>
+          <p:cNvCxnSpPr>
+            <a:cxnSpLocks/>
+          </p:cNvCxnSpPr>
+          <p:nvPr/>
+        </p:nvCxnSpPr>
+        <p:spPr>
+          <a:xfrm>
+            <a:off x="4419224" y="946877"/>
+            <a:ext cx="1408521" cy="504000"/>
+          </a:xfrm>
+          <a:prstGeom prst="bentConnector3">
+            <a:avLst>
+              <a:gd name="adj1" fmla="val -235"/>
+            </a:avLst>
+          </a:prstGeom>
+          <a:ln w="38100"/>
+        </p:spPr>
+        <p:style>
+          <a:lnRef idx="1">
+            <a:schemeClr val="dk1"/>
+          </a:lnRef>
+          <a:fillRef idx="0">
+            <a:schemeClr val="dk1"/>
+          </a:fillRef>
+          <a:effectRef idx="0">
+            <a:schemeClr val="dk1"/>
+          </a:effectRef>
+          <a:fontRef idx="minor">
+            <a:schemeClr val="tx1"/>
+          </a:fontRef>
+        </p:style>
+      </p:cxnSp>
+      <p:pic>
+        <p:nvPicPr>
+          <p:cNvPr id="9" name="図 8">
+            <a:extLst>
+              <a:ext uri="{FF2B5EF4-FFF2-40B4-BE49-F238E27FC236}">
+                <a16:creationId xmlns:a16="http://schemas.microsoft.com/office/drawing/2014/main" id="{F2E2D3A8-108F-8192-7E10-A7BBE84A0AFC}"/>
+              </a:ext>
+            </a:extLst>
+          </p:cNvPr>
+          <p:cNvPicPr>
+            <a:picLocks noChangeAspect="1"/>
+          </p:cNvPicPr>
+          <p:nvPr/>
+        </p:nvPicPr>
+        <p:blipFill>
+          <a:blip r:embed="rId2">
+            <a:extLst>
+              <a:ext uri="{28A0092B-C50C-407E-A947-70E740481C1C}">
+                <a14:useLocalDpi xmlns:a14="http://schemas.microsoft.com/office/drawing/2010/main" val="0"/>
+              </a:ext>
+            </a:extLst>
+          </a:blip>
+          <a:stretch>
+            <a:fillRect/>
+          </a:stretch>
+        </p:blipFill>
+        <p:spPr>
+          <a:xfrm>
+            <a:off x="5814926" y="833915"/>
+            <a:ext cx="1080000" cy="1080000"/>
+          </a:xfrm>
+          <a:prstGeom prst="rect">
+            <a:avLst/>
+          </a:prstGeom>
+        </p:spPr>
+      </p:pic>
+      <p:sp>
+        <p:nvSpPr>
+          <p:cNvPr id="10" name="四角形: 角を丸くする 9">
+            <a:extLst>
+              <a:ext uri="{FF2B5EF4-FFF2-40B4-BE49-F238E27FC236}">
+                <a16:creationId xmlns:a16="http://schemas.microsoft.com/office/drawing/2014/main" id="{DC4741B1-34C8-CDA2-431F-EF5C2E997010}"/>
+              </a:ext>
+            </a:extLst>
+          </p:cNvPr>
+          <p:cNvSpPr/>
+          <p:nvPr/>
+        </p:nvSpPr>
+        <p:spPr>
+          <a:xfrm>
+            <a:off x="4030824" y="1007053"/>
+            <a:ext cx="5467739" cy="1915488"/>
+          </a:xfrm>
+          <a:prstGeom prst="roundRect">
+            <a:avLst/>
+          </a:prstGeom>
+          <a:noFill/>
+          <a:ln w="38100">
+            <a:solidFill>
+              <a:srgbClr val="00B0F0"/>
+            </a:solidFill>
+            <a:prstDash val="dash"/>
+          </a:ln>
+        </p:spPr>
+        <p:style>
+          <a:lnRef idx="2">
+            <a:schemeClr val="accent1">
+              <a:shade val="15000"/>
+            </a:schemeClr>
+          </a:lnRef>
+          <a:fillRef idx="1">
+            <a:schemeClr val="accent1"/>
+          </a:fillRef>
+          <a:effectRef idx="0">
+            <a:schemeClr val="accent1"/>
+          </a:effectRef>
+          <a:fontRef idx="minor">
+            <a:schemeClr val="lt1"/>
+          </a:fontRef>
+        </p:style>
+        <p:txBody>
+          <a:bodyPr rtlCol="0" anchor="ctr"/>
+          <a:lstStyle/>
+          <a:p>
+            <a:pPr algn="ctr"/>
+            <a:endParaRPr kumimoji="1" lang="ja-JP" altLang="en-US"/>
+          </a:p>
+        </p:txBody>
+      </p:sp>
+      <p:sp>
+        <p:nvSpPr>
+          <p:cNvPr id="11" name="四角形: 角を丸くする 10">
+            <a:extLst>
+              <a:ext uri="{FF2B5EF4-FFF2-40B4-BE49-F238E27FC236}">
+                <a16:creationId xmlns:a16="http://schemas.microsoft.com/office/drawing/2014/main" id="{6DEDE76D-048A-884B-6E0B-54C3FE117A04}"/>
+              </a:ext>
+            </a:extLst>
+          </p:cNvPr>
+          <p:cNvSpPr/>
+          <p:nvPr/>
+        </p:nvSpPr>
+        <p:spPr>
+          <a:xfrm>
+            <a:off x="4282751" y="1891348"/>
+            <a:ext cx="5040000" cy="720000"/>
+          </a:xfrm>
+          <a:prstGeom prst="roundRect">
+            <a:avLst/>
+          </a:prstGeom>
+          <a:noFill/>
+          <a:ln w="38100">
+            <a:solidFill>
+              <a:srgbClr val="00B050"/>
+            </a:solidFill>
+            <a:prstDash val="dash"/>
+          </a:ln>
+        </p:spPr>
+        <p:style>
+          <a:lnRef idx="2">
+            <a:schemeClr val="accent1">
+              <a:shade val="15000"/>
+            </a:schemeClr>
+          </a:lnRef>
+          <a:fillRef idx="1">
+            <a:schemeClr val="accent1"/>
+          </a:fillRef>
+          <a:effectRef idx="0">
+            <a:schemeClr val="accent1"/>
+          </a:effectRef>
+          <a:fontRef idx="minor">
+            <a:schemeClr val="lt1"/>
+          </a:fontRef>
+        </p:style>
+        <p:txBody>
+          <a:bodyPr rtlCol="0" anchor="ctr"/>
+          <a:lstStyle/>
+          <a:p>
+            <a:pPr algn="ctr"/>
+            <a:endParaRPr kumimoji="1" lang="ja-JP" altLang="en-US" b="1" dirty="0">
+              <a:solidFill>
+                <a:srgbClr val="00B050"/>
+              </a:solidFill>
+            </a:endParaRPr>
+          </a:p>
+        </p:txBody>
+      </p:sp>
+      <p:cxnSp>
+        <p:nvCxnSpPr>
+          <p:cNvPr id="13" name="コネクタ: カギ線 12">
+            <a:extLst>
+              <a:ext uri="{FF2B5EF4-FFF2-40B4-BE49-F238E27FC236}">
+                <a16:creationId xmlns:a16="http://schemas.microsoft.com/office/drawing/2014/main" id="{5BC9A3F7-F243-298C-033C-DDA3C2864CD9}"/>
+              </a:ext>
+            </a:extLst>
+          </p:cNvPr>
+          <p:cNvCxnSpPr>
+            <a:cxnSpLocks/>
+          </p:cNvCxnSpPr>
+          <p:nvPr/>
+        </p:nvCxnSpPr>
+        <p:spPr>
+          <a:xfrm>
+            <a:off x="4427084" y="950388"/>
+            <a:ext cx="1408521" cy="1296000"/>
+          </a:xfrm>
+          <a:prstGeom prst="bentConnector3">
+            <a:avLst>
+              <a:gd name="adj1" fmla="val -235"/>
+            </a:avLst>
+          </a:prstGeom>
+          <a:ln w="38100"/>
+        </p:spPr>
+        <p:style>
+          <a:lnRef idx="1">
+            <a:schemeClr val="dk1"/>
+          </a:lnRef>
+          <a:fillRef idx="0">
+            <a:schemeClr val="dk1"/>
+          </a:fillRef>
+          <a:effectRef idx="0">
+            <a:schemeClr val="dk1"/>
+          </a:effectRef>
+          <a:fontRef idx="minor">
+            <a:schemeClr val="tx1"/>
+          </a:fontRef>
+        </p:style>
+      </p:cxnSp>
+      <p:sp>
+        <p:nvSpPr>
+          <p:cNvPr id="16" name="テキスト ボックス 15">
+            <a:extLst>
+              <a:ext uri="{FF2B5EF4-FFF2-40B4-BE49-F238E27FC236}">
+                <a16:creationId xmlns:a16="http://schemas.microsoft.com/office/drawing/2014/main" id="{E7808924-7EFE-89F9-F834-A570E0E838BB}"/>
+              </a:ext>
+            </a:extLst>
+          </p:cNvPr>
+          <p:cNvSpPr txBox="1"/>
+          <p:nvPr/>
+        </p:nvSpPr>
+        <p:spPr>
+          <a:xfrm>
+            <a:off x="6748892" y="5910550"/>
+            <a:ext cx="723275" cy="307777"/>
+          </a:xfrm>
+          <a:prstGeom prst="rect">
+            <a:avLst/>
+          </a:prstGeom>
+          <a:noFill/>
+        </p:spPr>
+        <p:txBody>
+          <a:bodyPr wrap="none" rtlCol="0">
+            <a:spAutoFit/>
+          </a:bodyPr>
+          <a:lstStyle/>
+          <a:p>
+            <a:r>
+              <a:rPr kumimoji="1" lang="ja-JP" altLang="en-US" sz="1400" b="1" dirty="0"/>
+              <a:t>または</a:t>
+            </a:r>
+          </a:p>
+        </p:txBody>
+      </p:sp>
+      <p:grpSp>
+        <p:nvGrpSpPr>
+          <p:cNvPr id="26" name="グループ化 25">
+            <a:extLst>
+              <a:ext uri="{FF2B5EF4-FFF2-40B4-BE49-F238E27FC236}">
+                <a16:creationId xmlns:a16="http://schemas.microsoft.com/office/drawing/2014/main" id="{7E2FDB25-17B0-9D56-0B0B-743510D1854F}"/>
+              </a:ext>
+            </a:extLst>
+          </p:cNvPr>
+          <p:cNvGrpSpPr/>
+          <p:nvPr/>
+        </p:nvGrpSpPr>
+        <p:grpSpPr>
+          <a:xfrm>
+            <a:off x="7472167" y="5617292"/>
+            <a:ext cx="1751021" cy="871225"/>
+            <a:chOff x="7288481" y="5613979"/>
+            <a:chExt cx="1751021" cy="871225"/>
+          </a:xfrm>
+        </p:grpSpPr>
+        <p:pic>
+          <p:nvPicPr>
+            <p:cNvPr id="17" name="図 16">
+              <a:extLst>
+                <a:ext uri="{FF2B5EF4-FFF2-40B4-BE49-F238E27FC236}">
+                  <a16:creationId xmlns:a16="http://schemas.microsoft.com/office/drawing/2014/main" id="{5139B4A2-E884-1187-22FA-F34FCA52DDBF}"/>
+                </a:ext>
+              </a:extLst>
+            </p:cNvPr>
+            <p:cNvPicPr>
+              <a:picLocks noChangeAspect="1"/>
+            </p:cNvPicPr>
+            <p:nvPr/>
+          </p:nvPicPr>
+          <p:blipFill>
+            <a:blip r:embed="rId3">
+              <a:extLst>
+                <a:ext uri="{28A0092B-C50C-407E-A947-70E740481C1C}">
+                  <a14:useLocalDpi xmlns:a14="http://schemas.microsoft.com/office/drawing/2010/main" val="0"/>
+                </a:ext>
+              </a:extLst>
+            </a:blip>
+            <a:stretch>
+              <a:fillRect/>
+            </a:stretch>
+          </p:blipFill>
+          <p:spPr>
+            <a:xfrm>
+              <a:off x="7288481" y="5613979"/>
+              <a:ext cx="871225" cy="871225"/>
+            </a:xfrm>
+            <a:prstGeom prst="rect">
+              <a:avLst/>
+            </a:prstGeom>
+          </p:spPr>
+        </p:pic>
+        <p:pic>
+          <p:nvPicPr>
+            <p:cNvPr id="21" name="図 20">
+              <a:extLst>
+                <a:ext uri="{FF2B5EF4-FFF2-40B4-BE49-F238E27FC236}">
+                  <a16:creationId xmlns:a16="http://schemas.microsoft.com/office/drawing/2014/main" id="{1804D995-F681-0CDE-4C4B-85FCCB319B5C}"/>
+                </a:ext>
+              </a:extLst>
+            </p:cNvPr>
+            <p:cNvPicPr>
+              <a:picLocks noChangeAspect="1"/>
+            </p:cNvPicPr>
+            <p:nvPr/>
+          </p:nvPicPr>
+          <p:blipFill>
+            <a:blip r:embed="rId3">
+              <a:duotone>
+                <a:schemeClr val="accent2">
+                  <a:shade val="45000"/>
+                  <a:satMod val="135000"/>
+                </a:schemeClr>
+                <a:prstClr val="white"/>
+              </a:duotone>
+              <a:extLst>
+                <a:ext uri="{28A0092B-C50C-407E-A947-70E740481C1C}">
+                  <a14:useLocalDpi xmlns:a14="http://schemas.microsoft.com/office/drawing/2010/main" val="0"/>
+                </a:ext>
+              </a:extLst>
+            </a:blip>
+            <a:stretch>
+              <a:fillRect/>
+            </a:stretch>
+          </p:blipFill>
+          <p:spPr>
+            <a:xfrm>
+              <a:off x="8168277" y="5613979"/>
+              <a:ext cx="871225" cy="871225"/>
+            </a:xfrm>
+            <a:prstGeom prst="rect">
+              <a:avLst/>
+            </a:prstGeom>
+          </p:spPr>
+        </p:pic>
+        <p:cxnSp>
+          <p:nvCxnSpPr>
+            <p:cNvPr id="22" name="直線矢印コネクタ 21">
+              <a:extLst>
+                <a:ext uri="{FF2B5EF4-FFF2-40B4-BE49-F238E27FC236}">
+                  <a16:creationId xmlns:a16="http://schemas.microsoft.com/office/drawing/2014/main" id="{FF593104-7518-71DF-1EFC-0B7A223CF042}"/>
+                </a:ext>
+              </a:extLst>
+            </p:cNvPr>
+            <p:cNvCxnSpPr>
+              <a:cxnSpLocks/>
+            </p:cNvCxnSpPr>
+            <p:nvPr/>
+          </p:nvCxnSpPr>
+          <p:spPr>
+            <a:xfrm flipV="1">
+              <a:off x="7983991" y="6049591"/>
+              <a:ext cx="360000" cy="1"/>
+            </a:xfrm>
+            <a:prstGeom prst="straightConnector1">
+              <a:avLst/>
+            </a:prstGeom>
+            <a:ln w="28575">
+              <a:tailEnd type="triangle"/>
+            </a:ln>
+          </p:spPr>
+          <p:style>
+            <a:lnRef idx="1">
+              <a:schemeClr val="dk1"/>
+            </a:lnRef>
+            <a:fillRef idx="0">
+              <a:schemeClr val="dk1"/>
+            </a:fillRef>
+            <a:effectRef idx="0">
+              <a:schemeClr val="dk1"/>
+            </a:effectRef>
+            <a:fontRef idx="minor">
+              <a:schemeClr val="tx1"/>
+            </a:fontRef>
+          </p:style>
+        </p:cxnSp>
+      </p:grpSp>
+      <p:sp>
+        <p:nvSpPr>
+          <p:cNvPr id="32" name="テキスト ボックス 31">
+            <a:extLst>
+              <a:ext uri="{FF2B5EF4-FFF2-40B4-BE49-F238E27FC236}">
+                <a16:creationId xmlns:a16="http://schemas.microsoft.com/office/drawing/2014/main" id="{D4C58CA9-F931-708E-12F8-7643C4A3D6BE}"/>
+              </a:ext>
+            </a:extLst>
+          </p:cNvPr>
+          <p:cNvSpPr txBox="1"/>
+          <p:nvPr/>
+        </p:nvSpPr>
+        <p:spPr>
+          <a:xfrm>
+            <a:off x="6761672" y="1192382"/>
+            <a:ext cx="537327" cy="369332"/>
+          </a:xfrm>
+          <a:prstGeom prst="rect">
+            <a:avLst/>
+          </a:prstGeom>
+          <a:noFill/>
+        </p:spPr>
+        <p:txBody>
+          <a:bodyPr wrap="none" rtlCol="0">
+            <a:spAutoFit/>
+          </a:bodyPr>
+          <a:lstStyle/>
+          <a:p>
+            <a:r>
+              <a:rPr kumimoji="1" lang="en-US" altLang="ja-JP" b="1" dirty="0"/>
+              <a:t>.git</a:t>
+            </a:r>
+            <a:endParaRPr kumimoji="1" lang="ja-JP" altLang="en-US" b="1" dirty="0"/>
+          </a:p>
+        </p:txBody>
+      </p:sp>
+      <p:sp>
+        <p:nvSpPr>
+          <p:cNvPr id="33" name="テキスト ボックス 32">
+            <a:extLst>
+              <a:ext uri="{FF2B5EF4-FFF2-40B4-BE49-F238E27FC236}">
+                <a16:creationId xmlns:a16="http://schemas.microsoft.com/office/drawing/2014/main" id="{0F8720C4-C7DE-B2FA-1DF2-686AB92C9253}"/>
+              </a:ext>
+            </a:extLst>
+          </p:cNvPr>
+          <p:cNvSpPr txBox="1"/>
+          <p:nvPr/>
+        </p:nvSpPr>
+        <p:spPr>
+          <a:xfrm>
+            <a:off x="6761672" y="4989947"/>
+            <a:ext cx="537327" cy="369332"/>
+          </a:xfrm>
+          <a:prstGeom prst="rect">
+            <a:avLst/>
+          </a:prstGeom>
+          <a:noFill/>
+        </p:spPr>
+        <p:txBody>
+          <a:bodyPr wrap="none" rtlCol="0">
+            <a:spAutoFit/>
+          </a:bodyPr>
+          <a:lstStyle/>
+          <a:p>
+            <a:r>
+              <a:rPr kumimoji="1" lang="en-US" altLang="ja-JP" b="1" dirty="0"/>
+              <a:t>.git</a:t>
+            </a:r>
+            <a:endParaRPr kumimoji="1" lang="ja-JP" altLang="en-US" b="1" dirty="0"/>
+          </a:p>
+        </p:txBody>
+      </p:sp>
+    </p:spTree>
+    <p:extLst>
+      <p:ext uri="{BB962C8B-B14F-4D97-AF65-F5344CB8AC3E}">
+        <p14:creationId xmlns:p14="http://schemas.microsoft.com/office/powerpoint/2010/main" val="3330970351"/>
+      </p:ext>
+    </p:extLst>
+  </p:cSld>
+  <p:clrMapOvr>
+    <a:masterClrMapping/>
+  </p:clrMapOvr>
+</p:sld>
+</file>
+
+<file path=ppt/slides/slide27.xml><?xml version="1.0" encoding="utf-8"?>
+<p:sld xmlns:a="http://schemas.openxmlformats.org/drawingml/2006/main" xmlns:r="http://schemas.openxmlformats.org/officeDocument/2006/relationships" xmlns:p="http://schemas.openxmlformats.org/presentationml/2006/main">
+  <p:cSld>
+    <p:spTree>
+      <p:nvGrpSpPr>
+        <p:cNvPr id="1" name="">
+          <a:extLst>
+            <a:ext uri="{FF2B5EF4-FFF2-40B4-BE49-F238E27FC236}">
+              <a16:creationId xmlns:a16="http://schemas.microsoft.com/office/drawing/2014/main" id="{6ADBD472-C2FF-6515-1F0A-E326D66D0E92}"/>
+            </a:ext>
+          </a:extLst>
+        </p:cNvPr>
+        <p:cNvGrpSpPr/>
+        <p:nvPr/>
+      </p:nvGrpSpPr>
+      <p:grpSpPr>
+        <a:xfrm>
+          <a:off x="0" y="0"/>
+          <a:ext cx="0" cy="0"/>
+          <a:chOff x="0" y="0"/>
+          <a:chExt cx="0" cy="0"/>
+        </a:xfrm>
+      </p:grpSpPr>
+      <p:sp>
+        <p:nvSpPr>
+          <p:cNvPr id="3" name="四角形: 角を丸くする 2">
+            <a:extLst>
+              <a:ext uri="{FF2B5EF4-FFF2-40B4-BE49-F238E27FC236}">
+                <a16:creationId xmlns:a16="http://schemas.microsoft.com/office/drawing/2014/main" id="{CF6BC256-F926-9A86-BEDA-2F4E5710F474}"/>
+              </a:ext>
+            </a:extLst>
+          </p:cNvPr>
+          <p:cNvSpPr/>
+          <p:nvPr/>
+        </p:nvSpPr>
+        <p:spPr>
+          <a:xfrm>
+            <a:off x="5844665" y="3377801"/>
+            <a:ext cx="5040000" cy="720000"/>
+          </a:xfrm>
+          <a:prstGeom prst="roundRect">
+            <a:avLst/>
+          </a:prstGeom>
+          <a:noFill/>
+          <a:ln w="38100">
+            <a:solidFill>
+              <a:srgbClr val="FFC000"/>
+            </a:solidFill>
+            <a:prstDash val="dash"/>
+          </a:ln>
+        </p:spPr>
+        <p:style>
+          <a:lnRef idx="2">
+            <a:schemeClr val="accent1">
+              <a:shade val="15000"/>
+            </a:schemeClr>
+          </a:lnRef>
+          <a:fillRef idx="1">
+            <a:schemeClr val="accent1"/>
+          </a:fillRef>
+          <a:effectRef idx="0">
+            <a:schemeClr val="accent1"/>
+          </a:effectRef>
+          <a:fontRef idx="minor">
+            <a:schemeClr val="lt1"/>
+          </a:fontRef>
+        </p:style>
+        <p:txBody>
+          <a:bodyPr rtlCol="0" anchor="ctr"/>
+          <a:lstStyle/>
+          <a:p>
+            <a:pPr lvl="1" algn="ctr"/>
+            <a:r>
+              <a:rPr kumimoji="1" lang="ja-JP" altLang="en-US" b="1" dirty="0">
+                <a:solidFill>
+                  <a:srgbClr val="FFC000"/>
+                </a:solidFill>
+              </a:rPr>
+              <a:t>ステージングエリア</a:t>
+            </a:r>
+          </a:p>
+        </p:txBody>
+      </p:sp>
+      <p:pic>
+        <p:nvPicPr>
+          <p:cNvPr id="14" name="図 13">
+            <a:extLst>
+              <a:ext uri="{FF2B5EF4-FFF2-40B4-BE49-F238E27FC236}">
+                <a16:creationId xmlns:a16="http://schemas.microsoft.com/office/drawing/2014/main" id="{48162DE6-BFCA-6DE5-49DB-F73D12216F9C}"/>
+              </a:ext>
+            </a:extLst>
+          </p:cNvPr>
+          <p:cNvPicPr>
+            <a:picLocks noChangeAspect="1"/>
+          </p:cNvPicPr>
+          <p:nvPr/>
+        </p:nvPicPr>
+        <p:blipFill>
+          <a:blip r:embed="rId2">
+            <a:extLst>
+              <a:ext uri="{28A0092B-C50C-407E-A947-70E740481C1C}">
+                <a14:useLocalDpi xmlns:a14="http://schemas.microsoft.com/office/drawing/2010/main" val="0"/>
+              </a:ext>
+            </a:extLst>
+          </a:blip>
+          <a:stretch>
+            <a:fillRect/>
+          </a:stretch>
+        </p:blipFill>
+        <p:spPr>
+          <a:xfrm>
+            <a:off x="3890816" y="2391958"/>
+            <a:ext cx="1080000" cy="1080000"/>
+          </a:xfrm>
+          <a:prstGeom prst="rect">
+            <a:avLst/>
+          </a:prstGeom>
+        </p:spPr>
+      </p:pic>
+      <p:sp>
+        <p:nvSpPr>
+          <p:cNvPr id="15" name="テキスト ボックス 14">
+            <a:extLst>
+              <a:ext uri="{FF2B5EF4-FFF2-40B4-BE49-F238E27FC236}">
+                <a16:creationId xmlns:a16="http://schemas.microsoft.com/office/drawing/2014/main" id="{20499307-C644-0612-974E-A9C34452FD6C}"/>
+              </a:ext>
+            </a:extLst>
+          </p:cNvPr>
+          <p:cNvSpPr txBox="1"/>
+          <p:nvPr/>
+        </p:nvSpPr>
+        <p:spPr>
+          <a:xfrm>
+            <a:off x="4853937" y="2771088"/>
+            <a:ext cx="2262158" cy="369332"/>
+          </a:xfrm>
+          <a:prstGeom prst="rect">
+            <a:avLst/>
+          </a:prstGeom>
+          <a:noFill/>
+        </p:spPr>
+        <p:txBody>
+          <a:bodyPr wrap="none" rtlCol="0">
+            <a:spAutoFit/>
+          </a:bodyPr>
+          <a:lstStyle/>
+          <a:p>
+            <a:r>
+              <a:rPr kumimoji="1" lang="ja-JP" altLang="en-US" b="1" dirty="0"/>
+              <a:t>現在のディレクトリ</a:t>
+            </a:r>
+          </a:p>
+        </p:txBody>
+      </p:sp>
+      <p:cxnSp>
+        <p:nvCxnSpPr>
+          <p:cNvPr id="18" name="コネクタ: カギ線 17">
+            <a:extLst>
+              <a:ext uri="{FF2B5EF4-FFF2-40B4-BE49-F238E27FC236}">
+                <a16:creationId xmlns:a16="http://schemas.microsoft.com/office/drawing/2014/main" id="{4453DACD-759C-8097-984A-39F3DA4FFFA5}"/>
+              </a:ext>
+            </a:extLst>
+          </p:cNvPr>
+          <p:cNvCxnSpPr>
+            <a:cxnSpLocks/>
+          </p:cNvCxnSpPr>
+          <p:nvPr/>
+        </p:nvCxnSpPr>
+        <p:spPr>
+          <a:xfrm>
+            <a:off x="4419224" y="3286801"/>
+            <a:ext cx="1408521" cy="504000"/>
+          </a:xfrm>
+          <a:prstGeom prst="bentConnector3">
+            <a:avLst>
+              <a:gd name="adj1" fmla="val -235"/>
+            </a:avLst>
+          </a:prstGeom>
+          <a:ln w="38100"/>
+        </p:spPr>
+        <p:style>
+          <a:lnRef idx="1">
+            <a:schemeClr val="dk1"/>
+          </a:lnRef>
+          <a:fillRef idx="0">
+            <a:schemeClr val="dk1"/>
+          </a:fillRef>
+          <a:effectRef idx="0">
+            <a:schemeClr val="dk1"/>
+          </a:effectRef>
+          <a:fontRef idx="minor">
+            <a:schemeClr val="tx1"/>
+          </a:fontRef>
+        </p:style>
+      </p:cxnSp>
+      <p:pic>
+        <p:nvPicPr>
+          <p:cNvPr id="23" name="図 22">
+            <a:extLst>
+              <a:ext uri="{FF2B5EF4-FFF2-40B4-BE49-F238E27FC236}">
+                <a16:creationId xmlns:a16="http://schemas.microsoft.com/office/drawing/2014/main" id="{08181574-FB49-0C4C-6118-99DD3247DD59}"/>
+              </a:ext>
+            </a:extLst>
+          </p:cNvPr>
+          <p:cNvPicPr>
+            <a:picLocks noChangeAspect="1"/>
+          </p:cNvPicPr>
+          <p:nvPr/>
+        </p:nvPicPr>
+        <p:blipFill>
+          <a:blip r:embed="rId2">
+            <a:extLst>
+              <a:ext uri="{28A0092B-C50C-407E-A947-70E740481C1C}">
+                <a14:useLocalDpi xmlns:a14="http://schemas.microsoft.com/office/drawing/2010/main" val="0"/>
+              </a:ext>
+            </a:extLst>
+          </a:blip>
+          <a:stretch>
+            <a:fillRect/>
+          </a:stretch>
+        </p:blipFill>
+        <p:spPr>
+          <a:xfrm>
+            <a:off x="5814926" y="3173839"/>
+            <a:ext cx="1080000" cy="1080000"/>
+          </a:xfrm>
+          <a:prstGeom prst="rect">
+            <a:avLst/>
+          </a:prstGeom>
+        </p:spPr>
+      </p:pic>
+      <p:sp>
+        <p:nvSpPr>
+          <p:cNvPr id="27" name="四角形: 角を丸くする 26">
+            <a:extLst>
+              <a:ext uri="{FF2B5EF4-FFF2-40B4-BE49-F238E27FC236}">
+                <a16:creationId xmlns:a16="http://schemas.microsoft.com/office/drawing/2014/main" id="{5BA05DF7-A939-F8A5-6D4C-B9D8326A0C45}"/>
+              </a:ext>
+            </a:extLst>
+          </p:cNvPr>
+          <p:cNvSpPr/>
+          <p:nvPr/>
+        </p:nvSpPr>
+        <p:spPr>
+          <a:xfrm>
+            <a:off x="4282751" y="4651157"/>
+            <a:ext cx="5040000" cy="720000"/>
+          </a:xfrm>
+          <a:prstGeom prst="roundRect">
+            <a:avLst/>
+          </a:prstGeom>
+          <a:noFill/>
+          <a:ln w="38100">
+            <a:solidFill>
+              <a:srgbClr val="00B050"/>
+            </a:solidFill>
+            <a:prstDash val="dash"/>
+          </a:ln>
+        </p:spPr>
+        <p:style>
+          <a:lnRef idx="2">
+            <a:schemeClr val="accent1">
+              <a:shade val="15000"/>
+            </a:schemeClr>
+          </a:lnRef>
+          <a:fillRef idx="1">
+            <a:schemeClr val="accent1"/>
+          </a:fillRef>
+          <a:effectRef idx="0">
+            <a:schemeClr val="accent1"/>
+          </a:effectRef>
+          <a:fontRef idx="minor">
+            <a:schemeClr val="lt1"/>
+          </a:fontRef>
+        </p:style>
+        <p:txBody>
+          <a:bodyPr rtlCol="0" anchor="ctr"/>
+          <a:lstStyle/>
+          <a:p>
+            <a:pPr lvl="4" algn="ctr"/>
+            <a:r>
+              <a:rPr kumimoji="1" lang="ja-JP" altLang="en-US" b="1" dirty="0">
+                <a:solidFill>
+                  <a:srgbClr val="00B050"/>
+                </a:solidFill>
+              </a:rPr>
+              <a:t>ワーキングツリー</a:t>
+            </a:r>
+          </a:p>
+        </p:txBody>
+      </p:sp>
+      <p:cxnSp>
+        <p:nvCxnSpPr>
+          <p:cNvPr id="28" name="コネクタ: カギ線 27">
+            <a:extLst>
+              <a:ext uri="{FF2B5EF4-FFF2-40B4-BE49-F238E27FC236}">
+                <a16:creationId xmlns:a16="http://schemas.microsoft.com/office/drawing/2014/main" id="{8C1C7292-B9DC-6587-D601-27A6BEEA0B76}"/>
+              </a:ext>
+            </a:extLst>
+          </p:cNvPr>
+          <p:cNvCxnSpPr>
+            <a:cxnSpLocks/>
+          </p:cNvCxnSpPr>
+          <p:nvPr/>
+        </p:nvCxnSpPr>
+        <p:spPr>
+          <a:xfrm>
+            <a:off x="4427084" y="3290312"/>
+            <a:ext cx="1408521" cy="1692000"/>
+          </a:xfrm>
+          <a:prstGeom prst="bentConnector3">
+            <a:avLst>
+              <a:gd name="adj1" fmla="val -235"/>
+            </a:avLst>
+          </a:prstGeom>
+          <a:ln w="38100"/>
+        </p:spPr>
+        <p:style>
+          <a:lnRef idx="1">
+            <a:schemeClr val="dk1"/>
+          </a:lnRef>
+          <a:fillRef idx="0">
+            <a:schemeClr val="dk1"/>
+          </a:fillRef>
+          <a:effectRef idx="0">
+            <a:schemeClr val="dk1"/>
+          </a:effectRef>
+          <a:fontRef idx="minor">
+            <a:schemeClr val="tx1"/>
+          </a:fontRef>
+        </p:style>
+      </p:cxnSp>
+      <p:pic>
+        <p:nvPicPr>
+          <p:cNvPr id="8" name="図 7">
+            <a:extLst>
+              <a:ext uri="{FF2B5EF4-FFF2-40B4-BE49-F238E27FC236}">
+                <a16:creationId xmlns:a16="http://schemas.microsoft.com/office/drawing/2014/main" id="{B48F111C-5883-5771-4075-AC5D0414397E}"/>
+              </a:ext>
+            </a:extLst>
+          </p:cNvPr>
+          <p:cNvPicPr>
+            <a:picLocks noChangeAspect="1"/>
+          </p:cNvPicPr>
+          <p:nvPr/>
+        </p:nvPicPr>
+        <p:blipFill>
+          <a:blip r:embed="rId3">
+            <a:extLst>
+              <a:ext uri="{28A0092B-C50C-407E-A947-70E740481C1C}">
+                <a14:useLocalDpi xmlns:a14="http://schemas.microsoft.com/office/drawing/2010/main" val="0"/>
+              </a:ext>
+            </a:extLst>
+          </a:blip>
+          <a:stretch>
+            <a:fillRect/>
+          </a:stretch>
+        </p:blipFill>
+        <p:spPr>
+          <a:xfrm>
+            <a:off x="5919313" y="4570584"/>
+            <a:ext cx="871225" cy="871225"/>
+          </a:xfrm>
+          <a:prstGeom prst="rect">
+            <a:avLst/>
+          </a:prstGeom>
+        </p:spPr>
+      </p:pic>
+      <p:sp>
+        <p:nvSpPr>
+          <p:cNvPr id="30" name="テキスト ボックス 29">
+            <a:extLst>
+              <a:ext uri="{FF2B5EF4-FFF2-40B4-BE49-F238E27FC236}">
+                <a16:creationId xmlns:a16="http://schemas.microsoft.com/office/drawing/2014/main" id="{7C6E6382-38D5-090C-805B-E2661597414A}"/>
+              </a:ext>
+            </a:extLst>
+          </p:cNvPr>
+          <p:cNvSpPr txBox="1"/>
+          <p:nvPr/>
+        </p:nvSpPr>
+        <p:spPr>
+          <a:xfrm>
+            <a:off x="7636437" y="4201252"/>
+            <a:ext cx="646331" cy="369332"/>
+          </a:xfrm>
+          <a:prstGeom prst="rect">
+            <a:avLst/>
+          </a:prstGeom>
+          <a:noFill/>
+        </p:spPr>
+        <p:txBody>
+          <a:bodyPr wrap="none" rtlCol="0">
+            <a:spAutoFit/>
+          </a:bodyPr>
+          <a:lstStyle/>
+          <a:p>
+            <a:r>
+              <a:rPr kumimoji="1" lang="ja-JP" altLang="en-US" b="1" dirty="0"/>
+              <a:t>比較</a:t>
+            </a:r>
+          </a:p>
+        </p:txBody>
+      </p:sp>
+    </p:spTree>
+    <p:extLst>
+      <p:ext uri="{BB962C8B-B14F-4D97-AF65-F5344CB8AC3E}">
+        <p14:creationId xmlns:p14="http://schemas.microsoft.com/office/powerpoint/2010/main" val="3478854695"/>
+      </p:ext>
+    </p:extLst>
+  </p:cSld>
+  <p:clrMapOvr>
+    <a:masterClrMapping/>
+  </p:clrMapOvr>
+</p:sld>
+</file>
+
+<file path=ppt/slides/slide28.xml><?xml version="1.0" encoding="utf-8"?>
+<p:sld xmlns:a="http://schemas.openxmlformats.org/drawingml/2006/main" xmlns:r="http://schemas.openxmlformats.org/officeDocument/2006/relationships" xmlns:p="http://schemas.openxmlformats.org/presentationml/2006/main">
+  <p:cSld>
+    <p:spTree>
+      <p:nvGrpSpPr>
+        <p:cNvPr id="1" name="">
+          <a:extLst>
+            <a:ext uri="{FF2B5EF4-FFF2-40B4-BE49-F238E27FC236}">
+              <a16:creationId xmlns:a16="http://schemas.microsoft.com/office/drawing/2014/main" id="{9095A7FD-F001-63B0-FF1E-AF34BEE64592}"/>
+            </a:ext>
+          </a:extLst>
+        </p:cNvPr>
+        <p:cNvGrpSpPr/>
+        <p:nvPr/>
+      </p:nvGrpSpPr>
+      <p:grpSpPr>
+        <a:xfrm>
+          <a:off x="0" y="0"/>
+          <a:ext cx="0" cy="0"/>
+          <a:chOff x="0" y="0"/>
+          <a:chExt cx="0" cy="0"/>
+        </a:xfrm>
+      </p:grpSpPr>
+    </p:spTree>
+    <p:extLst>
+      <p:ext uri="{BB962C8B-B14F-4D97-AF65-F5344CB8AC3E}">
+        <p14:creationId xmlns:p14="http://schemas.microsoft.com/office/powerpoint/2010/main" val="3097698180"/>
+      </p:ext>
+    </p:extLst>
+  </p:cSld>
+  <p:clrMapOvr>
+    <a:masterClrMapping/>
+  </p:clrMapOvr>
+</p:sld>
+</file>
+
+<file path=ppt/slides/slide29.xml><?xml version="1.0" encoding="utf-8"?>
+<p:sld xmlns:a="http://schemas.openxmlformats.org/drawingml/2006/main" xmlns:r="http://schemas.openxmlformats.org/officeDocument/2006/relationships" xmlns:p="http://schemas.openxmlformats.org/presentationml/2006/main">
+  <p:cSld>
+    <p:spTree>
+      <p:nvGrpSpPr>
+        <p:cNvPr id="1" name="">
+          <a:extLst>
+            <a:ext uri="{FF2B5EF4-FFF2-40B4-BE49-F238E27FC236}">
+              <a16:creationId xmlns:a16="http://schemas.microsoft.com/office/drawing/2014/main" id="{AB43F069-A745-B247-0F5E-45C0434DD6A5}"/>
+            </a:ext>
+          </a:extLst>
+        </p:cNvPr>
+        <p:cNvGrpSpPr/>
+        <p:nvPr/>
+      </p:nvGrpSpPr>
+      <p:grpSpPr>
+        <a:xfrm>
+          <a:off x="0" y="0"/>
+          <a:ext cx="0" cy="0"/>
+          <a:chOff x="0" y="0"/>
+          <a:chExt cx="0" cy="0"/>
+        </a:xfrm>
+      </p:grpSpPr>
+    </p:spTree>
+    <p:extLst>
+      <p:ext uri="{BB962C8B-B14F-4D97-AF65-F5344CB8AC3E}">
+        <p14:creationId xmlns:p14="http://schemas.microsoft.com/office/powerpoint/2010/main" val="4030702387"/>
+      </p:ext>
+    </p:extLst>
+  </p:cSld>
+  <p:clrMapOvr>
+    <a:masterClrMapping/>
+  </p:clrMapOvr>
+</p:sld>
+</file>
+
 <file path=ppt/slides/slide3.xml><?xml version="1.0" encoding="utf-8"?>
 <p:sld xmlns:a="http://schemas.openxmlformats.org/drawingml/2006/main" xmlns:r="http://schemas.openxmlformats.org/officeDocument/2006/relationships" xmlns:p="http://schemas.openxmlformats.org/presentationml/2006/main">
   <p:cSld>
@@ -11865,6 +14229,42 @@
     <p:extLst>
       <p:ext uri="{BB962C8B-B14F-4D97-AF65-F5344CB8AC3E}">
         <p14:creationId xmlns:p14="http://schemas.microsoft.com/office/powerpoint/2010/main" val="1451288093"/>
+      </p:ext>
+    </p:extLst>
+  </p:cSld>
+  <p:clrMapOvr>
+    <a:masterClrMapping/>
+  </p:clrMapOvr>
+</p:sld>
+</file>
+
+<file path=ppt/slides/slide30.xml><?xml version="1.0" encoding="utf-8"?>
+<p:sld xmlns:a="http://schemas.openxmlformats.org/drawingml/2006/main" xmlns:r="http://schemas.openxmlformats.org/officeDocument/2006/relationships" xmlns:p="http://schemas.openxmlformats.org/presentationml/2006/main">
+  <p:cSld>
+    <p:spTree>
+      <p:nvGrpSpPr>
+        <p:cNvPr id="1" name="">
+          <a:extLst>
+            <a:ext uri="{FF2B5EF4-FFF2-40B4-BE49-F238E27FC236}">
+              <a16:creationId xmlns:a16="http://schemas.microsoft.com/office/drawing/2014/main" id="{1B8EF3CB-4EC7-3969-7D3F-34E3C6BC394E}"/>
+            </a:ext>
+          </a:extLst>
+        </p:cNvPr>
+        <p:cNvGrpSpPr/>
+        <p:nvPr/>
+      </p:nvGrpSpPr>
+      <p:grpSpPr>
+        <a:xfrm>
+          <a:off x="0" y="0"/>
+          <a:ext cx="0" cy="0"/>
+          <a:chOff x="0" y="0"/>
+          <a:chExt cx="0" cy="0"/>
+        </a:xfrm>
+      </p:grpSpPr>
+    </p:spTree>
+    <p:extLst>
+      <p:ext uri="{BB962C8B-B14F-4D97-AF65-F5344CB8AC3E}">
+        <p14:creationId xmlns:p14="http://schemas.microsoft.com/office/powerpoint/2010/main" val="2709493387"/>
       </p:ext>
     </p:extLst>
   </p:cSld>
@@ -13111,41 +15511,6 @@
         </p:pic>
         <p:sp>
           <p:nvSpPr>
-            <p:cNvPr id="18" name="テキスト ボックス 17">
-              <a:extLst>
-                <a:ext uri="{FF2B5EF4-FFF2-40B4-BE49-F238E27FC236}">
-                  <a16:creationId xmlns:a16="http://schemas.microsoft.com/office/drawing/2014/main" id="{AC586BB4-4348-B731-C7EE-10846915D00E}"/>
-                </a:ext>
-              </a:extLst>
-            </p:cNvPr>
-            <p:cNvSpPr txBox="1"/>
-            <p:nvPr/>
-          </p:nvSpPr>
-          <p:spPr>
-            <a:xfrm>
-              <a:off x="4961405" y="2306990"/>
-              <a:ext cx="1338828" cy="369332"/>
-            </a:xfrm>
-            <a:prstGeom prst="rect">
-              <a:avLst/>
-            </a:prstGeom>
-            <a:noFill/>
-          </p:spPr>
-          <p:txBody>
-            <a:bodyPr wrap="none" rtlCol="0">
-              <a:spAutoFit/>
-            </a:bodyPr>
-            <a:lstStyle/>
-            <a:p>
-              <a:r>
-                <a:rPr kumimoji="1" lang="ja-JP" altLang="en-US" b="1" dirty="0"/>
-                <a:t>リポジトリ</a:t>
-              </a:r>
-            </a:p>
-          </p:txBody>
-        </p:sp>
-        <p:sp>
-          <p:nvSpPr>
             <p:cNvPr id="19" name="四角形: 角を丸くする 18">
               <a:extLst>
                 <a:ext uri="{FF2B5EF4-FFF2-40B4-BE49-F238E27FC236}">
@@ -13184,11 +15549,23 @@
             </a:fontRef>
           </p:style>
           <p:txBody>
-            <a:bodyPr rtlCol="0" anchor="ctr"/>
+            <a:bodyPr rtlCol="0" anchor="t"/>
             <a:lstStyle/>
             <a:p>
               <a:pPr algn="ctr"/>
-              <a:endParaRPr kumimoji="1" lang="ja-JP" altLang="en-US"/>
+              <a:r>
+                <a:rPr lang="ja-JP" altLang="en-US" b="1" dirty="0">
+                  <a:solidFill>
+                    <a:schemeClr val="tx1"/>
+                  </a:solidFill>
+                </a:rPr>
+                <a:t>リポジトリ</a:t>
+              </a:r>
+              <a:endParaRPr kumimoji="1" lang="ja-JP" altLang="en-US" dirty="0">
+                <a:solidFill>
+                  <a:schemeClr val="tx1"/>
+                </a:solidFill>
+              </a:endParaRPr>
             </a:p>
           </p:txBody>
         </p:sp>
@@ -13649,41 +16026,6 @@
         </p:pic>
         <p:sp>
           <p:nvSpPr>
-            <p:cNvPr id="21" name="テキスト ボックス 20">
-              <a:extLst>
-                <a:ext uri="{FF2B5EF4-FFF2-40B4-BE49-F238E27FC236}">
-                  <a16:creationId xmlns:a16="http://schemas.microsoft.com/office/drawing/2014/main" id="{26857F98-C92D-DA3A-73AC-EBBB5DE601FD}"/>
-                </a:ext>
-              </a:extLst>
-            </p:cNvPr>
-            <p:cNvSpPr txBox="1"/>
-            <p:nvPr/>
-          </p:nvSpPr>
-          <p:spPr>
-            <a:xfrm>
-              <a:off x="4961405" y="2306990"/>
-              <a:ext cx="1338828" cy="369332"/>
-            </a:xfrm>
-            <a:prstGeom prst="rect">
-              <a:avLst/>
-            </a:prstGeom>
-            <a:noFill/>
-          </p:spPr>
-          <p:txBody>
-            <a:bodyPr wrap="none" rtlCol="0">
-              <a:spAutoFit/>
-            </a:bodyPr>
-            <a:lstStyle/>
-            <a:p>
-              <a:r>
-                <a:rPr kumimoji="1" lang="ja-JP" altLang="en-US" b="1" dirty="0"/>
-                <a:t>リポジトリ</a:t>
-              </a:r>
-            </a:p>
-          </p:txBody>
-        </p:sp>
-        <p:sp>
-          <p:nvSpPr>
             <p:cNvPr id="22" name="四角形: 角を丸くする 21">
               <a:extLst>
                 <a:ext uri="{FF2B5EF4-FFF2-40B4-BE49-F238E27FC236}">
@@ -13722,11 +16064,18 @@
             </a:fontRef>
           </p:style>
           <p:txBody>
-            <a:bodyPr rtlCol="0" anchor="ctr"/>
+            <a:bodyPr rtlCol="0" anchor="t"/>
             <a:lstStyle/>
             <a:p>
               <a:pPr algn="ctr"/>
-              <a:endParaRPr kumimoji="1" lang="ja-JP" altLang="en-US"/>
+              <a:r>
+                <a:rPr kumimoji="1" lang="ja-JP" altLang="en-US" b="1" dirty="0">
+                  <a:solidFill>
+                    <a:schemeClr val="tx1"/>
+                  </a:solidFill>
+                </a:rPr>
+                <a:t>リポジトリ</a:t>
+              </a:r>
             </a:p>
           </p:txBody>
         </p:sp>
@@ -13787,41 +16136,6 @@
             </a:prstGeom>
           </p:spPr>
         </p:pic>
-        <p:sp>
-          <p:nvSpPr>
-            <p:cNvPr id="25" name="テキスト ボックス 24">
-              <a:extLst>
-                <a:ext uri="{FF2B5EF4-FFF2-40B4-BE49-F238E27FC236}">
-                  <a16:creationId xmlns:a16="http://schemas.microsoft.com/office/drawing/2014/main" id="{3DED1CF9-4E55-4CB0-B9B4-63282F3471A6}"/>
-                </a:ext>
-              </a:extLst>
-            </p:cNvPr>
-            <p:cNvSpPr txBox="1"/>
-            <p:nvPr/>
-          </p:nvSpPr>
-          <p:spPr>
-            <a:xfrm>
-              <a:off x="4961405" y="2306990"/>
-              <a:ext cx="1338828" cy="369332"/>
-            </a:xfrm>
-            <a:prstGeom prst="rect">
-              <a:avLst/>
-            </a:prstGeom>
-            <a:noFill/>
-          </p:spPr>
-          <p:txBody>
-            <a:bodyPr wrap="none" rtlCol="0">
-              <a:spAutoFit/>
-            </a:bodyPr>
-            <a:lstStyle/>
-            <a:p>
-              <a:r>
-                <a:rPr kumimoji="1" lang="ja-JP" altLang="en-US" b="1" dirty="0"/>
-                <a:t>リポジトリ</a:t>
-              </a:r>
-            </a:p>
-          </p:txBody>
-        </p:sp>
         <p:sp>
           <p:nvSpPr>
             <p:cNvPr id="26" name="四角形: 角を丸くする 25">
@@ -13862,11 +16176,23 @@
             </a:fontRef>
           </p:style>
           <p:txBody>
-            <a:bodyPr rtlCol="0" anchor="ctr"/>
+            <a:bodyPr rtlCol="0" anchor="t"/>
             <a:lstStyle/>
             <a:p>
               <a:pPr algn="ctr"/>
-              <a:endParaRPr kumimoji="1" lang="ja-JP" altLang="en-US"/>
+              <a:r>
+                <a:rPr lang="ja-JP" altLang="en-US" b="1" dirty="0">
+                  <a:solidFill>
+                    <a:schemeClr val="tx1"/>
+                  </a:solidFill>
+                </a:rPr>
+                <a:t>リポジトリ</a:t>
+              </a:r>
+              <a:endParaRPr kumimoji="1" lang="ja-JP" altLang="en-US" dirty="0">
+                <a:solidFill>
+                  <a:schemeClr val="tx1"/>
+                </a:solidFill>
+              </a:endParaRPr>
             </a:p>
           </p:txBody>
         </p:sp>
@@ -13927,41 +16253,6 @@
             </a:prstGeom>
           </p:spPr>
         </p:pic>
-        <p:sp>
-          <p:nvSpPr>
-            <p:cNvPr id="29" name="テキスト ボックス 28">
-              <a:extLst>
-                <a:ext uri="{FF2B5EF4-FFF2-40B4-BE49-F238E27FC236}">
-                  <a16:creationId xmlns:a16="http://schemas.microsoft.com/office/drawing/2014/main" id="{521D0927-013E-E624-AC9C-FBB92BF68793}"/>
-                </a:ext>
-              </a:extLst>
-            </p:cNvPr>
-            <p:cNvSpPr txBox="1"/>
-            <p:nvPr/>
-          </p:nvSpPr>
-          <p:spPr>
-            <a:xfrm>
-              <a:off x="4961405" y="2306990"/>
-              <a:ext cx="1338828" cy="369332"/>
-            </a:xfrm>
-            <a:prstGeom prst="rect">
-              <a:avLst/>
-            </a:prstGeom>
-            <a:noFill/>
-          </p:spPr>
-          <p:txBody>
-            <a:bodyPr wrap="none" rtlCol="0">
-              <a:spAutoFit/>
-            </a:bodyPr>
-            <a:lstStyle/>
-            <a:p>
-              <a:r>
-                <a:rPr kumimoji="1" lang="ja-JP" altLang="en-US" b="1" dirty="0"/>
-                <a:t>リポジトリ</a:t>
-              </a:r>
-            </a:p>
-          </p:txBody>
-        </p:sp>
         <p:sp>
           <p:nvSpPr>
             <p:cNvPr id="30" name="四角形: 角を丸くする 29">
@@ -14002,11 +16293,23 @@
             </a:fontRef>
           </p:style>
           <p:txBody>
-            <a:bodyPr rtlCol="0" anchor="ctr"/>
+            <a:bodyPr rtlCol="0" anchor="t"/>
             <a:lstStyle/>
             <a:p>
               <a:pPr algn="ctr"/>
-              <a:endParaRPr kumimoji="1" lang="ja-JP" altLang="en-US"/>
+              <a:r>
+                <a:rPr lang="ja-JP" altLang="en-US" b="1" dirty="0">
+                  <a:solidFill>
+                    <a:schemeClr val="tx1"/>
+                  </a:solidFill>
+                </a:rPr>
+                <a:t>リポジトリ</a:t>
+              </a:r>
+              <a:endParaRPr kumimoji="1" lang="ja-JP" altLang="en-US" dirty="0">
+                <a:solidFill>
+                  <a:schemeClr val="tx1"/>
+                </a:solidFill>
+              </a:endParaRPr>
             </a:p>
           </p:txBody>
         </p:sp>
@@ -14047,66 +16350,6 @@
           <a:chExt cx="0" cy="0"/>
         </a:xfrm>
       </p:grpSpPr>
-      <p:pic>
-        <p:nvPicPr>
-          <p:cNvPr id="20" name="図 19">
-            <a:extLst>
-              <a:ext uri="{FF2B5EF4-FFF2-40B4-BE49-F238E27FC236}">
-                <a16:creationId xmlns:a16="http://schemas.microsoft.com/office/drawing/2014/main" id="{DBD61B87-176C-AB96-62AF-A7C6A572050A}"/>
-              </a:ext>
-            </a:extLst>
-          </p:cNvPr>
-          <p:cNvPicPr>
-            <a:picLocks noChangeAspect="1"/>
-          </p:cNvPicPr>
-          <p:nvPr/>
-        </p:nvPicPr>
-        <p:blipFill>
-          <a:blip r:embed="rId2"/>
-          <a:stretch>
-            <a:fillRect/>
-          </a:stretch>
-        </p:blipFill>
-        <p:spPr>
-          <a:xfrm>
-            <a:off x="545343" y="3388303"/>
-            <a:ext cx="4238257" cy="1902153"/>
-          </a:xfrm>
-          <a:prstGeom prst="rect">
-            <a:avLst/>
-          </a:prstGeom>
-        </p:spPr>
-      </p:pic>
-      <p:pic>
-        <p:nvPicPr>
-          <p:cNvPr id="32" name="図 31">
-            <a:extLst>
-              <a:ext uri="{FF2B5EF4-FFF2-40B4-BE49-F238E27FC236}">
-                <a16:creationId xmlns:a16="http://schemas.microsoft.com/office/drawing/2014/main" id="{094DA389-896D-05FA-ADF5-6882554D12D1}"/>
-              </a:ext>
-            </a:extLst>
-          </p:cNvPr>
-          <p:cNvPicPr>
-            <a:picLocks noChangeAspect="1"/>
-          </p:cNvPicPr>
-          <p:nvPr/>
-        </p:nvPicPr>
-        <p:blipFill>
-          <a:blip r:embed="rId3"/>
-          <a:stretch>
-            <a:fillRect/>
-          </a:stretch>
-        </p:blipFill>
-        <p:spPr>
-          <a:xfrm>
-            <a:off x="6827037" y="2801768"/>
-            <a:ext cx="4640286" cy="2764353"/>
-          </a:xfrm>
-          <a:prstGeom prst="rect">
-            <a:avLst/>
-          </a:prstGeom>
-        </p:spPr>
-      </p:pic>
       <p:sp>
         <p:nvSpPr>
           <p:cNvPr id="2" name="テキスト ボックス 1">
@@ -14179,6 +16422,66 @@
           </a:p>
         </p:txBody>
       </p:sp>
+      <p:pic>
+        <p:nvPicPr>
+          <p:cNvPr id="16" name="図 15">
+            <a:extLst>
+              <a:ext uri="{FF2B5EF4-FFF2-40B4-BE49-F238E27FC236}">
+                <a16:creationId xmlns:a16="http://schemas.microsoft.com/office/drawing/2014/main" id="{A6314BF5-D09E-FD4D-F67E-9B9F2900F1EA}"/>
+              </a:ext>
+            </a:extLst>
+          </p:cNvPr>
+          <p:cNvPicPr>
+            <a:picLocks noChangeAspect="1"/>
+          </p:cNvPicPr>
+          <p:nvPr/>
+        </p:nvPicPr>
+        <p:blipFill>
+          <a:blip r:embed="rId2"/>
+          <a:stretch>
+            <a:fillRect/>
+          </a:stretch>
+        </p:blipFill>
+        <p:spPr>
+          <a:xfrm>
+            <a:off x="497188" y="3356786"/>
+            <a:ext cx="4185276" cy="1878375"/>
+          </a:xfrm>
+          <a:prstGeom prst="rect">
+            <a:avLst/>
+          </a:prstGeom>
+        </p:spPr>
+      </p:pic>
+      <p:pic>
+        <p:nvPicPr>
+          <p:cNvPr id="17" name="図 16">
+            <a:extLst>
+              <a:ext uri="{FF2B5EF4-FFF2-40B4-BE49-F238E27FC236}">
+                <a16:creationId xmlns:a16="http://schemas.microsoft.com/office/drawing/2014/main" id="{151711FE-B427-49CF-D725-A0CE66989E7C}"/>
+              </a:ext>
+            </a:extLst>
+          </p:cNvPr>
+          <p:cNvPicPr>
+            <a:picLocks noChangeAspect="1"/>
+          </p:cNvPicPr>
+          <p:nvPr/>
+        </p:nvPicPr>
+        <p:blipFill>
+          <a:blip r:embed="rId3"/>
+          <a:stretch>
+            <a:fillRect/>
+          </a:stretch>
+        </p:blipFill>
+        <p:spPr>
+          <a:xfrm>
+            <a:off x="6528520" y="2797107"/>
+            <a:ext cx="5032043" cy="2997734"/>
+          </a:xfrm>
+          <a:prstGeom prst="rect">
+            <a:avLst/>
+          </a:prstGeom>
+        </p:spPr>
+      </p:pic>
     </p:spTree>
     <p:extLst>
       <p:ext uri="{BB962C8B-B14F-4D97-AF65-F5344CB8AC3E}">

--- a/01_テキスト/Git入門_図.pptx
+++ b/01_テキスト/Git入門_図.pptx
@@ -92,6 +92,19 @@
     <p:sldId id="348" r:id="rId86"/>
     <p:sldId id="339" r:id="rId87"/>
     <p:sldId id="349" r:id="rId88"/>
+    <p:sldId id="350" r:id="rId89"/>
+    <p:sldId id="351" r:id="rId90"/>
+    <p:sldId id="362" r:id="rId91"/>
+    <p:sldId id="352" r:id="rId92"/>
+    <p:sldId id="353" r:id="rId93"/>
+    <p:sldId id="354" r:id="rId94"/>
+    <p:sldId id="355" r:id="rId95"/>
+    <p:sldId id="356" r:id="rId96"/>
+    <p:sldId id="357" r:id="rId97"/>
+    <p:sldId id="358" r:id="rId98"/>
+    <p:sldId id="359" r:id="rId99"/>
+    <p:sldId id="360" r:id="rId100"/>
+    <p:sldId id="361" r:id="rId101"/>
   </p:sldIdLst>
   <p:sldSz cx="12192000" cy="6858000"/>
   <p:notesSz cx="6858000" cy="9144000"/>
@@ -3790,6 +3803,42 @@
     <p:extLst>
       <p:ext uri="{BB962C8B-B14F-4D97-AF65-F5344CB8AC3E}">
         <p14:creationId xmlns:p14="http://schemas.microsoft.com/office/powerpoint/2010/main" val="1082417098"/>
+      </p:ext>
+    </p:extLst>
+  </p:cSld>
+  <p:clrMapOvr>
+    <a:masterClrMapping/>
+  </p:clrMapOvr>
+</p:sld>
+</file>
+
+<file path=ppt/slides/slide100.xml><?xml version="1.0" encoding="utf-8"?>
+<p:sld xmlns:a="http://schemas.openxmlformats.org/drawingml/2006/main" xmlns:r="http://schemas.openxmlformats.org/officeDocument/2006/relationships" xmlns:p="http://schemas.openxmlformats.org/presentationml/2006/main">
+  <p:cSld>
+    <p:spTree>
+      <p:nvGrpSpPr>
+        <p:cNvPr id="1" name="">
+          <a:extLst>
+            <a:ext uri="{FF2B5EF4-FFF2-40B4-BE49-F238E27FC236}">
+              <a16:creationId xmlns:a16="http://schemas.microsoft.com/office/drawing/2014/main" id="{D0582A56-9299-8BA4-A612-FFCC22A778B1}"/>
+            </a:ext>
+          </a:extLst>
+        </p:cNvPr>
+        <p:cNvGrpSpPr/>
+        <p:nvPr/>
+      </p:nvGrpSpPr>
+      <p:grpSpPr>
+        <a:xfrm>
+          <a:off x="0" y="0"/>
+          <a:ext cx="0" cy="0"/>
+          <a:chOff x="0" y="0"/>
+          <a:chExt cx="0" cy="0"/>
+        </a:xfrm>
+      </p:grpSpPr>
+    </p:spTree>
+    <p:extLst>
+      <p:ext uri="{BB962C8B-B14F-4D97-AF65-F5344CB8AC3E}">
+        <p14:creationId xmlns:p14="http://schemas.microsoft.com/office/powerpoint/2010/main" val="197829752"/>
       </p:ext>
     </p:extLst>
   </p:cSld>
@@ -43958,6 +44007,300 @@
 </p:sld>
 </file>
 
+<file path=ppt/slides/slide88.xml><?xml version="1.0" encoding="utf-8"?>
+<p:sld xmlns:a="http://schemas.openxmlformats.org/drawingml/2006/main" xmlns:r="http://schemas.openxmlformats.org/officeDocument/2006/relationships" xmlns:p="http://schemas.openxmlformats.org/presentationml/2006/main">
+  <p:cSld>
+    <p:spTree>
+      <p:nvGrpSpPr>
+        <p:cNvPr id="1" name="">
+          <a:extLst>
+            <a:ext uri="{FF2B5EF4-FFF2-40B4-BE49-F238E27FC236}">
+              <a16:creationId xmlns:a16="http://schemas.microsoft.com/office/drawing/2014/main" id="{FAC0D25C-6A29-01E9-846F-046819C39AF5}"/>
+            </a:ext>
+          </a:extLst>
+        </p:cNvPr>
+        <p:cNvGrpSpPr/>
+        <p:nvPr/>
+      </p:nvGrpSpPr>
+      <p:grpSpPr>
+        <a:xfrm>
+          <a:off x="0" y="0"/>
+          <a:ext cx="0" cy="0"/>
+          <a:chOff x="0" y="0"/>
+          <a:chExt cx="0" cy="0"/>
+        </a:xfrm>
+      </p:grpSpPr>
+      <p:pic>
+        <p:nvPicPr>
+          <p:cNvPr id="3" name="図 2">
+            <a:extLst>
+              <a:ext uri="{FF2B5EF4-FFF2-40B4-BE49-F238E27FC236}">
+                <a16:creationId xmlns:a16="http://schemas.microsoft.com/office/drawing/2014/main" id="{52978002-0DBB-4251-AE07-FC7EBB6DE182}"/>
+              </a:ext>
+            </a:extLst>
+          </p:cNvPr>
+          <p:cNvPicPr>
+            <a:picLocks noChangeAspect="1"/>
+          </p:cNvPicPr>
+          <p:nvPr/>
+        </p:nvPicPr>
+        <p:blipFill>
+          <a:blip r:embed="rId2">
+            <a:extLst>
+              <a:ext uri="{28A0092B-C50C-407E-A947-70E740481C1C}">
+                <a14:useLocalDpi xmlns:a14="http://schemas.microsoft.com/office/drawing/2010/main" val="0"/>
+              </a:ext>
+            </a:extLst>
+          </a:blip>
+          <a:stretch>
+            <a:fillRect/>
+          </a:stretch>
+        </p:blipFill>
+        <p:spPr>
+          <a:xfrm>
+            <a:off x="3939948" y="1520501"/>
+            <a:ext cx="4181475" cy="2324100"/>
+          </a:xfrm>
+          <a:prstGeom prst="rect">
+            <a:avLst/>
+          </a:prstGeom>
+        </p:spPr>
+      </p:pic>
+      <p:sp>
+        <p:nvSpPr>
+          <p:cNvPr id="4" name="正方形/長方形 3">
+            <a:extLst>
+              <a:ext uri="{FF2B5EF4-FFF2-40B4-BE49-F238E27FC236}">
+                <a16:creationId xmlns:a16="http://schemas.microsoft.com/office/drawing/2014/main" id="{5FE7F7BB-B499-878B-24D6-61BDD0C41241}"/>
+              </a:ext>
+            </a:extLst>
+          </p:cNvPr>
+          <p:cNvSpPr/>
+          <p:nvPr/>
+        </p:nvSpPr>
+        <p:spPr>
+          <a:xfrm flipV="1">
+            <a:off x="4341826" y="2505139"/>
+            <a:ext cx="3779597" cy="228730"/>
+          </a:xfrm>
+          <a:prstGeom prst="rect">
+            <a:avLst/>
+          </a:prstGeom>
+          <a:noFill/>
+          <a:ln w="28575">
+            <a:solidFill>
+              <a:srgbClr val="FF0000"/>
+            </a:solidFill>
+          </a:ln>
+        </p:spPr>
+        <p:style>
+          <a:lnRef idx="2">
+            <a:schemeClr val="accent6"/>
+          </a:lnRef>
+          <a:fillRef idx="1">
+            <a:schemeClr val="lt1"/>
+          </a:fillRef>
+          <a:effectRef idx="0">
+            <a:schemeClr val="accent6"/>
+          </a:effectRef>
+          <a:fontRef idx="minor">
+            <a:schemeClr val="dk1"/>
+          </a:fontRef>
+        </p:style>
+        <p:txBody>
+          <a:bodyPr rtlCol="0" anchor="ctr"/>
+          <a:lstStyle/>
+          <a:p>
+            <a:pPr algn="ctr"/>
+            <a:endParaRPr kumimoji="1" lang="ja-JP" altLang="en-US"/>
+          </a:p>
+        </p:txBody>
+      </p:sp>
+      <p:sp>
+        <p:nvSpPr>
+          <p:cNvPr id="5" name="正方形/長方形 4">
+            <a:extLst>
+              <a:ext uri="{FF2B5EF4-FFF2-40B4-BE49-F238E27FC236}">
+                <a16:creationId xmlns:a16="http://schemas.microsoft.com/office/drawing/2014/main" id="{CA23A74D-2065-9A02-3508-A7C364F9B168}"/>
+              </a:ext>
+            </a:extLst>
+          </p:cNvPr>
+          <p:cNvSpPr/>
+          <p:nvPr/>
+        </p:nvSpPr>
+        <p:spPr>
+          <a:xfrm flipV="1">
+            <a:off x="4279623" y="1548493"/>
+            <a:ext cx="908198" cy="308299"/>
+          </a:xfrm>
+          <a:prstGeom prst="rect">
+            <a:avLst/>
+          </a:prstGeom>
+          <a:noFill/>
+          <a:ln w="28575">
+            <a:solidFill>
+              <a:srgbClr val="FF0000"/>
+            </a:solidFill>
+          </a:ln>
+        </p:spPr>
+        <p:style>
+          <a:lnRef idx="2">
+            <a:schemeClr val="accent6"/>
+          </a:lnRef>
+          <a:fillRef idx="1">
+            <a:schemeClr val="lt1"/>
+          </a:fillRef>
+          <a:effectRef idx="0">
+            <a:schemeClr val="accent6"/>
+          </a:effectRef>
+          <a:fontRef idx="minor">
+            <a:schemeClr val="dk1"/>
+          </a:fontRef>
+        </p:style>
+        <p:txBody>
+          <a:bodyPr rtlCol="0" anchor="ctr"/>
+          <a:lstStyle/>
+          <a:p>
+            <a:pPr algn="ctr"/>
+            <a:endParaRPr kumimoji="1" lang="ja-JP" altLang="en-US"/>
+          </a:p>
+        </p:txBody>
+      </p:sp>
+    </p:spTree>
+    <p:extLst>
+      <p:ext uri="{BB962C8B-B14F-4D97-AF65-F5344CB8AC3E}">
+        <p14:creationId xmlns:p14="http://schemas.microsoft.com/office/powerpoint/2010/main" val="251339051"/>
+      </p:ext>
+    </p:extLst>
+  </p:cSld>
+  <p:clrMapOvr>
+    <a:masterClrMapping/>
+  </p:clrMapOvr>
+</p:sld>
+</file>
+
+<file path=ppt/slides/slide89.xml><?xml version="1.0" encoding="utf-8"?>
+<p:sld xmlns:a="http://schemas.openxmlformats.org/drawingml/2006/main" xmlns:r="http://schemas.openxmlformats.org/officeDocument/2006/relationships" xmlns:p="http://schemas.openxmlformats.org/presentationml/2006/main">
+  <p:cSld>
+    <p:spTree>
+      <p:nvGrpSpPr>
+        <p:cNvPr id="1" name="">
+          <a:extLst>
+            <a:ext uri="{FF2B5EF4-FFF2-40B4-BE49-F238E27FC236}">
+              <a16:creationId xmlns:a16="http://schemas.microsoft.com/office/drawing/2014/main" id="{FC9F031F-B6B7-40F1-7623-40E901DC0750}"/>
+            </a:ext>
+          </a:extLst>
+        </p:cNvPr>
+        <p:cNvGrpSpPr/>
+        <p:nvPr/>
+      </p:nvGrpSpPr>
+      <p:grpSpPr>
+        <a:xfrm>
+          <a:off x="0" y="0"/>
+          <a:ext cx="0" cy="0"/>
+          <a:chOff x="0" y="0"/>
+          <a:chExt cx="0" cy="0"/>
+        </a:xfrm>
+      </p:grpSpPr>
+      <p:pic>
+        <p:nvPicPr>
+          <p:cNvPr id="3" name="図 2">
+            <a:extLst>
+              <a:ext uri="{FF2B5EF4-FFF2-40B4-BE49-F238E27FC236}">
+                <a16:creationId xmlns:a16="http://schemas.microsoft.com/office/drawing/2014/main" id="{EB0907B9-ECF1-88BC-F2C8-6D127F0613E3}"/>
+              </a:ext>
+            </a:extLst>
+          </p:cNvPr>
+          <p:cNvPicPr>
+            <a:picLocks noChangeAspect="1"/>
+          </p:cNvPicPr>
+          <p:nvPr/>
+        </p:nvPicPr>
+        <p:blipFill>
+          <a:blip r:embed="rId2">
+            <a:extLst>
+              <a:ext uri="{28A0092B-C50C-407E-A947-70E740481C1C}">
+                <a14:useLocalDpi xmlns:a14="http://schemas.microsoft.com/office/drawing/2010/main" val="0"/>
+              </a:ext>
+            </a:extLst>
+          </a:blip>
+          <a:stretch>
+            <a:fillRect/>
+          </a:stretch>
+        </p:blipFill>
+        <p:spPr>
+          <a:xfrm>
+            <a:off x="4100512" y="2047875"/>
+            <a:ext cx="3990975" cy="2762250"/>
+          </a:xfrm>
+          <a:prstGeom prst="rect">
+            <a:avLst/>
+          </a:prstGeom>
+        </p:spPr>
+      </p:pic>
+      <p:sp>
+        <p:nvSpPr>
+          <p:cNvPr id="4" name="正方形/長方形 3">
+            <a:extLst>
+              <a:ext uri="{FF2B5EF4-FFF2-40B4-BE49-F238E27FC236}">
+                <a16:creationId xmlns:a16="http://schemas.microsoft.com/office/drawing/2014/main" id="{D7AB3F89-760F-870B-1AD5-2978E08F310A}"/>
+              </a:ext>
+            </a:extLst>
+          </p:cNvPr>
+          <p:cNvSpPr/>
+          <p:nvPr/>
+        </p:nvSpPr>
+        <p:spPr>
+          <a:xfrm flipV="1">
+            <a:off x="4119175" y="3221326"/>
+            <a:ext cx="432000" cy="432000"/>
+          </a:xfrm>
+          <a:prstGeom prst="rect">
+            <a:avLst/>
+          </a:prstGeom>
+          <a:noFill/>
+          <a:ln w="28575">
+            <a:solidFill>
+              <a:srgbClr val="FF0000"/>
+            </a:solidFill>
+          </a:ln>
+        </p:spPr>
+        <p:style>
+          <a:lnRef idx="2">
+            <a:schemeClr val="accent6"/>
+          </a:lnRef>
+          <a:fillRef idx="1">
+            <a:schemeClr val="lt1"/>
+          </a:fillRef>
+          <a:effectRef idx="0">
+            <a:schemeClr val="accent6"/>
+          </a:effectRef>
+          <a:fontRef idx="minor">
+            <a:schemeClr val="dk1"/>
+          </a:fontRef>
+        </p:style>
+        <p:txBody>
+          <a:bodyPr rtlCol="0" anchor="ctr"/>
+          <a:lstStyle/>
+          <a:p>
+            <a:pPr algn="ctr"/>
+            <a:endParaRPr kumimoji="1" lang="ja-JP" altLang="en-US"/>
+          </a:p>
+        </p:txBody>
+      </p:sp>
+    </p:spTree>
+    <p:extLst>
+      <p:ext uri="{BB962C8B-B14F-4D97-AF65-F5344CB8AC3E}">
+        <p14:creationId xmlns:p14="http://schemas.microsoft.com/office/powerpoint/2010/main" val="2214367467"/>
+      </p:ext>
+    </p:extLst>
+  </p:cSld>
+  <p:clrMapOvr>
+    <a:masterClrMapping/>
+  </p:clrMapOvr>
+</p:sld>
+</file>
+
 <file path=ppt/slides/slide9.xml><?xml version="1.0" encoding="utf-8"?>
 <p:sld xmlns:a="http://schemas.openxmlformats.org/drawingml/2006/main" xmlns:r="http://schemas.openxmlformats.org/officeDocument/2006/relationships" xmlns:p="http://schemas.openxmlformats.org/presentationml/2006/main">
   <p:cSld>
@@ -43985,6 +44328,1137 @@
     <p:extLst>
       <p:ext uri="{BB962C8B-B14F-4D97-AF65-F5344CB8AC3E}">
         <p14:creationId xmlns:p14="http://schemas.microsoft.com/office/powerpoint/2010/main" val="1371548627"/>
+      </p:ext>
+    </p:extLst>
+  </p:cSld>
+  <p:clrMapOvr>
+    <a:masterClrMapping/>
+  </p:clrMapOvr>
+</p:sld>
+</file>
+
+<file path=ppt/slides/slide90.xml><?xml version="1.0" encoding="utf-8"?>
+<p:sld xmlns:a="http://schemas.openxmlformats.org/drawingml/2006/main" xmlns:r="http://schemas.openxmlformats.org/officeDocument/2006/relationships" xmlns:p="http://schemas.openxmlformats.org/presentationml/2006/main">
+  <p:cSld>
+    <p:spTree>
+      <p:nvGrpSpPr>
+        <p:cNvPr id="1" name="">
+          <a:extLst>
+            <a:ext uri="{FF2B5EF4-FFF2-40B4-BE49-F238E27FC236}">
+              <a16:creationId xmlns:a16="http://schemas.microsoft.com/office/drawing/2014/main" id="{35A34F90-D11B-B88F-3B83-5669E338DB12}"/>
+            </a:ext>
+          </a:extLst>
+        </p:cNvPr>
+        <p:cNvGrpSpPr/>
+        <p:nvPr/>
+      </p:nvGrpSpPr>
+      <p:grpSpPr>
+        <a:xfrm>
+          <a:off x="0" y="0"/>
+          <a:ext cx="0" cy="0"/>
+          <a:chOff x="0" y="0"/>
+          <a:chExt cx="0" cy="0"/>
+        </a:xfrm>
+      </p:grpSpPr>
+      <p:pic>
+        <p:nvPicPr>
+          <p:cNvPr id="3" name="図 2">
+            <a:extLst>
+              <a:ext uri="{FF2B5EF4-FFF2-40B4-BE49-F238E27FC236}">
+                <a16:creationId xmlns:a16="http://schemas.microsoft.com/office/drawing/2014/main" id="{3BF08F29-0B44-0C55-9DA6-5B14CFDA67DB}"/>
+              </a:ext>
+            </a:extLst>
+          </p:cNvPr>
+          <p:cNvPicPr>
+            <a:picLocks noChangeAspect="1"/>
+          </p:cNvPicPr>
+          <p:nvPr/>
+        </p:nvPicPr>
+        <p:blipFill>
+          <a:blip r:embed="rId2">
+            <a:extLst>
+              <a:ext uri="{28A0092B-C50C-407E-A947-70E740481C1C}">
+                <a14:useLocalDpi xmlns:a14="http://schemas.microsoft.com/office/drawing/2010/main" val="0"/>
+              </a:ext>
+            </a:extLst>
+          </a:blip>
+          <a:stretch>
+            <a:fillRect/>
+          </a:stretch>
+        </p:blipFill>
+        <p:spPr>
+          <a:xfrm>
+            <a:off x="4100512" y="2047875"/>
+            <a:ext cx="3990975" cy="2762250"/>
+          </a:xfrm>
+          <a:prstGeom prst="rect">
+            <a:avLst/>
+          </a:prstGeom>
+        </p:spPr>
+      </p:pic>
+      <p:sp>
+        <p:nvSpPr>
+          <p:cNvPr id="4" name="正方形/長方形 3">
+            <a:extLst>
+              <a:ext uri="{FF2B5EF4-FFF2-40B4-BE49-F238E27FC236}">
+                <a16:creationId xmlns:a16="http://schemas.microsoft.com/office/drawing/2014/main" id="{B82A1EBE-D6DC-37EC-6F15-26376CFEBE50}"/>
+              </a:ext>
+            </a:extLst>
+          </p:cNvPr>
+          <p:cNvSpPr/>
+          <p:nvPr/>
+        </p:nvSpPr>
+        <p:spPr>
+          <a:xfrm flipV="1">
+            <a:off x="4855010" y="3643473"/>
+            <a:ext cx="3085341" cy="303376"/>
+          </a:xfrm>
+          <a:prstGeom prst="rect">
+            <a:avLst/>
+          </a:prstGeom>
+          <a:noFill/>
+          <a:ln w="28575">
+            <a:solidFill>
+              <a:srgbClr val="FF0000"/>
+            </a:solidFill>
+          </a:ln>
+        </p:spPr>
+        <p:style>
+          <a:lnRef idx="2">
+            <a:schemeClr val="accent6"/>
+          </a:lnRef>
+          <a:fillRef idx="1">
+            <a:schemeClr val="lt1"/>
+          </a:fillRef>
+          <a:effectRef idx="0">
+            <a:schemeClr val="accent6"/>
+          </a:effectRef>
+          <a:fontRef idx="minor">
+            <a:schemeClr val="dk1"/>
+          </a:fontRef>
+        </p:style>
+        <p:txBody>
+          <a:bodyPr rtlCol="0" anchor="ctr"/>
+          <a:lstStyle/>
+          <a:p>
+            <a:pPr algn="ctr"/>
+            <a:endParaRPr kumimoji="1" lang="ja-JP" altLang="en-US"/>
+          </a:p>
+        </p:txBody>
+      </p:sp>
+    </p:spTree>
+    <p:extLst>
+      <p:ext uri="{BB962C8B-B14F-4D97-AF65-F5344CB8AC3E}">
+        <p14:creationId xmlns:p14="http://schemas.microsoft.com/office/powerpoint/2010/main" val="4207540437"/>
+      </p:ext>
+    </p:extLst>
+  </p:cSld>
+  <p:clrMapOvr>
+    <a:masterClrMapping/>
+  </p:clrMapOvr>
+</p:sld>
+</file>
+
+<file path=ppt/slides/slide91.xml><?xml version="1.0" encoding="utf-8"?>
+<p:sld xmlns:a="http://schemas.openxmlformats.org/drawingml/2006/main" xmlns:r="http://schemas.openxmlformats.org/officeDocument/2006/relationships" xmlns:p="http://schemas.openxmlformats.org/presentationml/2006/main">
+  <p:cSld>
+    <p:spTree>
+      <p:nvGrpSpPr>
+        <p:cNvPr id="1" name="">
+          <a:extLst>
+            <a:ext uri="{FF2B5EF4-FFF2-40B4-BE49-F238E27FC236}">
+              <a16:creationId xmlns:a16="http://schemas.microsoft.com/office/drawing/2014/main" id="{873E88B6-D598-F7E8-A535-3D65B9035EBD}"/>
+            </a:ext>
+          </a:extLst>
+        </p:cNvPr>
+        <p:cNvGrpSpPr/>
+        <p:nvPr/>
+      </p:nvGrpSpPr>
+      <p:grpSpPr>
+        <a:xfrm>
+          <a:off x="0" y="0"/>
+          <a:ext cx="0" cy="0"/>
+          <a:chOff x="0" y="0"/>
+          <a:chExt cx="0" cy="0"/>
+        </a:xfrm>
+      </p:grpSpPr>
+      <p:pic>
+        <p:nvPicPr>
+          <p:cNvPr id="3" name="図 2">
+            <a:extLst>
+              <a:ext uri="{FF2B5EF4-FFF2-40B4-BE49-F238E27FC236}">
+                <a16:creationId xmlns:a16="http://schemas.microsoft.com/office/drawing/2014/main" id="{05E57869-176F-19DC-B7D1-B4D5B163B274}"/>
+              </a:ext>
+            </a:extLst>
+          </p:cNvPr>
+          <p:cNvPicPr>
+            <a:picLocks noChangeAspect="1"/>
+          </p:cNvPicPr>
+          <p:nvPr/>
+        </p:nvPicPr>
+        <p:blipFill>
+          <a:blip r:embed="rId2">
+            <a:extLst>
+              <a:ext uri="{28A0092B-C50C-407E-A947-70E740481C1C}">
+                <a14:useLocalDpi xmlns:a14="http://schemas.microsoft.com/office/drawing/2010/main" val="0"/>
+              </a:ext>
+            </a:extLst>
+          </a:blip>
+          <a:stretch>
+            <a:fillRect/>
+          </a:stretch>
+        </p:blipFill>
+        <p:spPr>
+          <a:xfrm>
+            <a:off x="0" y="2168216"/>
+            <a:ext cx="12192000" cy="2521567"/>
+          </a:xfrm>
+          <a:prstGeom prst="rect">
+            <a:avLst/>
+          </a:prstGeom>
+        </p:spPr>
+      </p:pic>
+      <p:sp>
+        <p:nvSpPr>
+          <p:cNvPr id="4" name="正方形/長方形 3">
+            <a:extLst>
+              <a:ext uri="{FF2B5EF4-FFF2-40B4-BE49-F238E27FC236}">
+                <a16:creationId xmlns:a16="http://schemas.microsoft.com/office/drawing/2014/main" id="{B34CD63A-D6AE-2E8F-52B8-DD2B9FC0873E}"/>
+              </a:ext>
+            </a:extLst>
+          </p:cNvPr>
+          <p:cNvSpPr/>
+          <p:nvPr/>
+        </p:nvSpPr>
+        <p:spPr>
+          <a:xfrm flipV="1">
+            <a:off x="5200243" y="2309195"/>
+            <a:ext cx="4382296" cy="303375"/>
+          </a:xfrm>
+          <a:prstGeom prst="rect">
+            <a:avLst/>
+          </a:prstGeom>
+          <a:noFill/>
+          <a:ln w="28575">
+            <a:solidFill>
+              <a:srgbClr val="FF0000"/>
+            </a:solidFill>
+          </a:ln>
+        </p:spPr>
+        <p:style>
+          <a:lnRef idx="2">
+            <a:schemeClr val="accent6"/>
+          </a:lnRef>
+          <a:fillRef idx="1">
+            <a:schemeClr val="lt1"/>
+          </a:fillRef>
+          <a:effectRef idx="0">
+            <a:schemeClr val="accent6"/>
+          </a:effectRef>
+          <a:fontRef idx="minor">
+            <a:schemeClr val="dk1"/>
+          </a:fontRef>
+        </p:style>
+        <p:txBody>
+          <a:bodyPr rtlCol="0" anchor="ctr"/>
+          <a:lstStyle/>
+          <a:p>
+            <a:pPr algn="ctr"/>
+            <a:endParaRPr kumimoji="1" lang="ja-JP" altLang="en-US"/>
+          </a:p>
+        </p:txBody>
+      </p:sp>
+      <p:sp>
+        <p:nvSpPr>
+          <p:cNvPr id="5" name="正方形/長方形 4">
+            <a:extLst>
+              <a:ext uri="{FF2B5EF4-FFF2-40B4-BE49-F238E27FC236}">
+                <a16:creationId xmlns:a16="http://schemas.microsoft.com/office/drawing/2014/main" id="{6BD30DB9-83C6-ED7E-DA6E-CA40C9FC2C2E}"/>
+              </a:ext>
+            </a:extLst>
+          </p:cNvPr>
+          <p:cNvSpPr/>
+          <p:nvPr/>
+        </p:nvSpPr>
+        <p:spPr>
+          <a:xfrm>
+            <a:off x="6532975" y="2381572"/>
+            <a:ext cx="763564" cy="156355"/>
+          </a:xfrm>
+          <a:prstGeom prst="rect">
+            <a:avLst/>
+          </a:prstGeom>
+          <a:ln>
+            <a:solidFill>
+              <a:schemeClr val="tx1"/>
+            </a:solidFill>
+          </a:ln>
+        </p:spPr>
+        <p:style>
+          <a:lnRef idx="2">
+            <a:schemeClr val="dk1">
+              <a:shade val="15000"/>
+            </a:schemeClr>
+          </a:lnRef>
+          <a:fillRef idx="1">
+            <a:schemeClr val="dk1"/>
+          </a:fillRef>
+          <a:effectRef idx="0">
+            <a:schemeClr val="dk1"/>
+          </a:effectRef>
+          <a:fontRef idx="minor">
+            <a:schemeClr val="lt1"/>
+          </a:fontRef>
+        </p:style>
+        <p:txBody>
+          <a:bodyPr rtlCol="0" anchor="ctr"/>
+          <a:lstStyle/>
+          <a:p>
+            <a:pPr algn="ctr"/>
+            <a:endParaRPr kumimoji="1" lang="ja-JP" altLang="en-US"/>
+          </a:p>
+        </p:txBody>
+      </p:sp>
+      <p:sp>
+        <p:nvSpPr>
+          <p:cNvPr id="6" name="正方形/長方形 5">
+            <a:extLst>
+              <a:ext uri="{FF2B5EF4-FFF2-40B4-BE49-F238E27FC236}">
+                <a16:creationId xmlns:a16="http://schemas.microsoft.com/office/drawing/2014/main" id="{9A6DCEBD-B464-85EF-98DA-8F6B656FC064}"/>
+              </a:ext>
+            </a:extLst>
+          </p:cNvPr>
+          <p:cNvSpPr/>
+          <p:nvPr/>
+        </p:nvSpPr>
+        <p:spPr>
+          <a:xfrm>
+            <a:off x="7478474" y="2716225"/>
+            <a:ext cx="684000" cy="156355"/>
+          </a:xfrm>
+          <a:prstGeom prst="rect">
+            <a:avLst/>
+          </a:prstGeom>
+          <a:ln>
+            <a:solidFill>
+              <a:schemeClr val="tx1"/>
+            </a:solidFill>
+          </a:ln>
+        </p:spPr>
+        <p:style>
+          <a:lnRef idx="2">
+            <a:schemeClr val="dk1">
+              <a:shade val="15000"/>
+            </a:schemeClr>
+          </a:lnRef>
+          <a:fillRef idx="1">
+            <a:schemeClr val="dk1"/>
+          </a:fillRef>
+          <a:effectRef idx="0">
+            <a:schemeClr val="dk1"/>
+          </a:effectRef>
+          <a:fontRef idx="minor">
+            <a:schemeClr val="lt1"/>
+          </a:fontRef>
+        </p:style>
+        <p:txBody>
+          <a:bodyPr rtlCol="0" anchor="ctr"/>
+          <a:lstStyle/>
+          <a:p>
+            <a:pPr algn="ctr"/>
+            <a:endParaRPr kumimoji="1" lang="ja-JP" altLang="en-US"/>
+          </a:p>
+        </p:txBody>
+      </p:sp>
+    </p:spTree>
+    <p:extLst>
+      <p:ext uri="{BB962C8B-B14F-4D97-AF65-F5344CB8AC3E}">
+        <p14:creationId xmlns:p14="http://schemas.microsoft.com/office/powerpoint/2010/main" val="78606690"/>
+      </p:ext>
+    </p:extLst>
+  </p:cSld>
+  <p:clrMapOvr>
+    <a:masterClrMapping/>
+  </p:clrMapOvr>
+</p:sld>
+</file>
+
+<file path=ppt/slides/slide92.xml><?xml version="1.0" encoding="utf-8"?>
+<p:sld xmlns:a="http://schemas.openxmlformats.org/drawingml/2006/main" xmlns:r="http://schemas.openxmlformats.org/officeDocument/2006/relationships" xmlns:p="http://schemas.openxmlformats.org/presentationml/2006/main">
+  <p:cSld>
+    <p:spTree>
+      <p:nvGrpSpPr>
+        <p:cNvPr id="1" name="">
+          <a:extLst>
+            <a:ext uri="{FF2B5EF4-FFF2-40B4-BE49-F238E27FC236}">
+              <a16:creationId xmlns:a16="http://schemas.microsoft.com/office/drawing/2014/main" id="{F6D0B66A-BEF2-1AA4-FC8E-D2B921C0170A}"/>
+            </a:ext>
+          </a:extLst>
+        </p:cNvPr>
+        <p:cNvGrpSpPr/>
+        <p:nvPr/>
+      </p:nvGrpSpPr>
+      <p:grpSpPr>
+        <a:xfrm>
+          <a:off x="0" y="0"/>
+          <a:ext cx="0" cy="0"/>
+          <a:chOff x="0" y="0"/>
+          <a:chExt cx="0" cy="0"/>
+        </a:xfrm>
+      </p:grpSpPr>
+      <p:pic>
+        <p:nvPicPr>
+          <p:cNvPr id="3" name="図 2">
+            <a:extLst>
+              <a:ext uri="{FF2B5EF4-FFF2-40B4-BE49-F238E27FC236}">
+                <a16:creationId xmlns:a16="http://schemas.microsoft.com/office/drawing/2014/main" id="{FAB30BC0-6141-EA0C-AC1F-C0B6869C24A9}"/>
+              </a:ext>
+            </a:extLst>
+          </p:cNvPr>
+          <p:cNvPicPr>
+            <a:picLocks noChangeAspect="1"/>
+          </p:cNvPicPr>
+          <p:nvPr/>
+        </p:nvPicPr>
+        <p:blipFill>
+          <a:blip r:embed="rId2">
+            <a:extLst>
+              <a:ext uri="{28A0092B-C50C-407E-A947-70E740481C1C}">
+                <a14:useLocalDpi xmlns:a14="http://schemas.microsoft.com/office/drawing/2010/main" val="0"/>
+              </a:ext>
+            </a:extLst>
+          </a:blip>
+          <a:stretch>
+            <a:fillRect/>
+          </a:stretch>
+        </p:blipFill>
+        <p:spPr>
+          <a:xfrm>
+            <a:off x="4095750" y="1838325"/>
+            <a:ext cx="4000500" cy="3181350"/>
+          </a:xfrm>
+          <a:prstGeom prst="rect">
+            <a:avLst/>
+          </a:prstGeom>
+        </p:spPr>
+      </p:pic>
+    </p:spTree>
+    <p:extLst>
+      <p:ext uri="{BB962C8B-B14F-4D97-AF65-F5344CB8AC3E}">
+        <p14:creationId xmlns:p14="http://schemas.microsoft.com/office/powerpoint/2010/main" val="2257015293"/>
+      </p:ext>
+    </p:extLst>
+  </p:cSld>
+  <p:clrMapOvr>
+    <a:masterClrMapping/>
+  </p:clrMapOvr>
+</p:sld>
+</file>
+
+<file path=ppt/slides/slide93.xml><?xml version="1.0" encoding="utf-8"?>
+<p:sld xmlns:a="http://schemas.openxmlformats.org/drawingml/2006/main" xmlns:r="http://schemas.openxmlformats.org/officeDocument/2006/relationships" xmlns:p="http://schemas.openxmlformats.org/presentationml/2006/main">
+  <p:cSld>
+    <p:spTree>
+      <p:nvGrpSpPr>
+        <p:cNvPr id="1" name="">
+          <a:extLst>
+            <a:ext uri="{FF2B5EF4-FFF2-40B4-BE49-F238E27FC236}">
+              <a16:creationId xmlns:a16="http://schemas.microsoft.com/office/drawing/2014/main" id="{8077FDBF-58E5-D72A-BC91-65598BFBDB3B}"/>
+            </a:ext>
+          </a:extLst>
+        </p:cNvPr>
+        <p:cNvGrpSpPr/>
+        <p:nvPr/>
+      </p:nvGrpSpPr>
+      <p:grpSpPr>
+        <a:xfrm>
+          <a:off x="0" y="0"/>
+          <a:ext cx="0" cy="0"/>
+          <a:chOff x="0" y="0"/>
+          <a:chExt cx="0" cy="0"/>
+        </a:xfrm>
+      </p:grpSpPr>
+      <p:pic>
+        <p:nvPicPr>
+          <p:cNvPr id="3" name="図 2">
+            <a:extLst>
+              <a:ext uri="{FF2B5EF4-FFF2-40B4-BE49-F238E27FC236}">
+                <a16:creationId xmlns:a16="http://schemas.microsoft.com/office/drawing/2014/main" id="{F159A3E3-D7E5-5F4D-DA1C-725524EFC7B2}"/>
+              </a:ext>
+            </a:extLst>
+          </p:cNvPr>
+          <p:cNvPicPr>
+            <a:picLocks noChangeAspect="1"/>
+          </p:cNvPicPr>
+          <p:nvPr/>
+        </p:nvPicPr>
+        <p:blipFill>
+          <a:blip r:embed="rId2">
+            <a:extLst>
+              <a:ext uri="{28A0092B-C50C-407E-A947-70E740481C1C}">
+                <a14:useLocalDpi xmlns:a14="http://schemas.microsoft.com/office/drawing/2010/main" val="0"/>
+              </a:ext>
+            </a:extLst>
+          </a:blip>
+          <a:stretch>
+            <a:fillRect/>
+          </a:stretch>
+        </p:blipFill>
+        <p:spPr>
+          <a:xfrm>
+            <a:off x="3157537" y="2504881"/>
+            <a:ext cx="5876925" cy="1866900"/>
+          </a:xfrm>
+          <a:prstGeom prst="rect">
+            <a:avLst/>
+          </a:prstGeom>
+          <a:ln>
+            <a:solidFill>
+              <a:schemeClr val="tx1"/>
+            </a:solidFill>
+          </a:ln>
+        </p:spPr>
+      </p:pic>
+    </p:spTree>
+    <p:extLst>
+      <p:ext uri="{BB962C8B-B14F-4D97-AF65-F5344CB8AC3E}">
+        <p14:creationId xmlns:p14="http://schemas.microsoft.com/office/powerpoint/2010/main" val="2207235445"/>
+      </p:ext>
+    </p:extLst>
+  </p:cSld>
+  <p:clrMapOvr>
+    <a:masterClrMapping/>
+  </p:clrMapOvr>
+</p:sld>
+</file>
+
+<file path=ppt/slides/slide94.xml><?xml version="1.0" encoding="utf-8"?>
+<p:sld xmlns:a="http://schemas.openxmlformats.org/drawingml/2006/main" xmlns:r="http://schemas.openxmlformats.org/officeDocument/2006/relationships" xmlns:p="http://schemas.openxmlformats.org/presentationml/2006/main">
+  <p:cSld>
+    <p:spTree>
+      <p:nvGrpSpPr>
+        <p:cNvPr id="1" name="">
+          <a:extLst>
+            <a:ext uri="{FF2B5EF4-FFF2-40B4-BE49-F238E27FC236}">
+              <a16:creationId xmlns:a16="http://schemas.microsoft.com/office/drawing/2014/main" id="{26EDF21A-C93B-12C6-F830-B38DD5F9259B}"/>
+            </a:ext>
+          </a:extLst>
+        </p:cNvPr>
+        <p:cNvGrpSpPr/>
+        <p:nvPr/>
+      </p:nvGrpSpPr>
+      <p:grpSpPr>
+        <a:xfrm>
+          <a:off x="0" y="0"/>
+          <a:ext cx="0" cy="0"/>
+          <a:chOff x="0" y="0"/>
+          <a:chExt cx="0" cy="0"/>
+        </a:xfrm>
+      </p:grpSpPr>
+    </p:spTree>
+    <p:extLst>
+      <p:ext uri="{BB962C8B-B14F-4D97-AF65-F5344CB8AC3E}">
+        <p14:creationId xmlns:p14="http://schemas.microsoft.com/office/powerpoint/2010/main" val="3543807343"/>
+      </p:ext>
+    </p:extLst>
+  </p:cSld>
+  <p:clrMapOvr>
+    <a:masterClrMapping/>
+  </p:clrMapOvr>
+</p:sld>
+</file>
+
+<file path=ppt/slides/slide95.xml><?xml version="1.0" encoding="utf-8"?>
+<p:sld xmlns:a="http://schemas.openxmlformats.org/drawingml/2006/main" xmlns:r="http://schemas.openxmlformats.org/officeDocument/2006/relationships" xmlns:p="http://schemas.openxmlformats.org/presentationml/2006/main">
+  <p:cSld>
+    <p:spTree>
+      <p:nvGrpSpPr>
+        <p:cNvPr id="1" name="">
+          <a:extLst>
+            <a:ext uri="{FF2B5EF4-FFF2-40B4-BE49-F238E27FC236}">
+              <a16:creationId xmlns:a16="http://schemas.microsoft.com/office/drawing/2014/main" id="{A457482D-A7D2-8CD5-2A96-65FC5E352E31}"/>
+            </a:ext>
+          </a:extLst>
+        </p:cNvPr>
+        <p:cNvGrpSpPr/>
+        <p:nvPr/>
+      </p:nvGrpSpPr>
+      <p:grpSpPr>
+        <a:xfrm>
+          <a:off x="0" y="0"/>
+          <a:ext cx="0" cy="0"/>
+          <a:chOff x="0" y="0"/>
+          <a:chExt cx="0" cy="0"/>
+        </a:xfrm>
+      </p:grpSpPr>
+      <p:pic>
+        <p:nvPicPr>
+          <p:cNvPr id="2" name="図 1">
+            <a:extLst>
+              <a:ext uri="{FF2B5EF4-FFF2-40B4-BE49-F238E27FC236}">
+                <a16:creationId xmlns:a16="http://schemas.microsoft.com/office/drawing/2014/main" id="{340B3760-AA89-EEB8-D740-832785031D59}"/>
+              </a:ext>
+            </a:extLst>
+          </p:cNvPr>
+          <p:cNvPicPr>
+            <a:picLocks noChangeAspect="1"/>
+          </p:cNvPicPr>
+          <p:nvPr/>
+        </p:nvPicPr>
+        <p:blipFill>
+          <a:blip r:embed="rId2">
+            <a:extLst>
+              <a:ext uri="{28A0092B-C50C-407E-A947-70E740481C1C}">
+                <a14:useLocalDpi xmlns:a14="http://schemas.microsoft.com/office/drawing/2010/main" val="0"/>
+              </a:ext>
+            </a:extLst>
+          </a:blip>
+          <a:stretch>
+            <a:fillRect/>
+          </a:stretch>
+        </p:blipFill>
+        <p:spPr>
+          <a:xfrm>
+            <a:off x="4095750" y="1838325"/>
+            <a:ext cx="4000500" cy="3181350"/>
+          </a:xfrm>
+          <a:prstGeom prst="rect">
+            <a:avLst/>
+          </a:prstGeom>
+        </p:spPr>
+      </p:pic>
+      <p:sp>
+        <p:nvSpPr>
+          <p:cNvPr id="9" name="正方形/長方形 8">
+            <a:extLst>
+              <a:ext uri="{FF2B5EF4-FFF2-40B4-BE49-F238E27FC236}">
+                <a16:creationId xmlns:a16="http://schemas.microsoft.com/office/drawing/2014/main" id="{80876F6F-21B3-1621-2208-74AE651A53F9}"/>
+              </a:ext>
+            </a:extLst>
+          </p:cNvPr>
+          <p:cNvSpPr/>
+          <p:nvPr/>
+        </p:nvSpPr>
+        <p:spPr>
+          <a:xfrm flipV="1">
+            <a:off x="4119175" y="3426603"/>
+            <a:ext cx="432000" cy="432000"/>
+          </a:xfrm>
+          <a:prstGeom prst="rect">
+            <a:avLst/>
+          </a:prstGeom>
+          <a:noFill/>
+          <a:ln w="28575">
+            <a:solidFill>
+              <a:srgbClr val="FF0000"/>
+            </a:solidFill>
+          </a:ln>
+        </p:spPr>
+        <p:style>
+          <a:lnRef idx="2">
+            <a:schemeClr val="accent6"/>
+          </a:lnRef>
+          <a:fillRef idx="1">
+            <a:schemeClr val="lt1"/>
+          </a:fillRef>
+          <a:effectRef idx="0">
+            <a:schemeClr val="accent6"/>
+          </a:effectRef>
+          <a:fontRef idx="minor">
+            <a:schemeClr val="dk1"/>
+          </a:fontRef>
+        </p:style>
+        <p:txBody>
+          <a:bodyPr rtlCol="0" anchor="ctr"/>
+          <a:lstStyle/>
+          <a:p>
+            <a:pPr algn="ctr"/>
+            <a:endParaRPr kumimoji="1" lang="ja-JP" altLang="en-US"/>
+          </a:p>
+        </p:txBody>
+      </p:sp>
+    </p:spTree>
+    <p:extLst>
+      <p:ext uri="{BB962C8B-B14F-4D97-AF65-F5344CB8AC3E}">
+        <p14:creationId xmlns:p14="http://schemas.microsoft.com/office/powerpoint/2010/main" val="565009452"/>
+      </p:ext>
+    </p:extLst>
+  </p:cSld>
+  <p:clrMapOvr>
+    <a:masterClrMapping/>
+  </p:clrMapOvr>
+</p:sld>
+</file>
+
+<file path=ppt/slides/slide96.xml><?xml version="1.0" encoding="utf-8"?>
+<p:sld xmlns:a="http://schemas.openxmlformats.org/drawingml/2006/main" xmlns:r="http://schemas.openxmlformats.org/officeDocument/2006/relationships" xmlns:p="http://schemas.openxmlformats.org/presentationml/2006/main">
+  <p:cSld>
+    <p:spTree>
+      <p:nvGrpSpPr>
+        <p:cNvPr id="1" name="">
+          <a:extLst>
+            <a:ext uri="{FF2B5EF4-FFF2-40B4-BE49-F238E27FC236}">
+              <a16:creationId xmlns:a16="http://schemas.microsoft.com/office/drawing/2014/main" id="{045FC740-4586-7F3E-A0A2-AFF1311FB3DE}"/>
+            </a:ext>
+          </a:extLst>
+        </p:cNvPr>
+        <p:cNvGrpSpPr/>
+        <p:nvPr/>
+      </p:nvGrpSpPr>
+      <p:grpSpPr>
+        <a:xfrm>
+          <a:off x="0" y="0"/>
+          <a:ext cx="0" cy="0"/>
+          <a:chOff x="0" y="0"/>
+          <a:chExt cx="0" cy="0"/>
+        </a:xfrm>
+      </p:grpSpPr>
+      <p:pic>
+        <p:nvPicPr>
+          <p:cNvPr id="4" name="図 3">
+            <a:extLst>
+              <a:ext uri="{FF2B5EF4-FFF2-40B4-BE49-F238E27FC236}">
+                <a16:creationId xmlns:a16="http://schemas.microsoft.com/office/drawing/2014/main" id="{9052F17A-C3DF-06EE-CF59-079F6EDC2ACD}"/>
+              </a:ext>
+            </a:extLst>
+          </p:cNvPr>
+          <p:cNvPicPr>
+            <a:picLocks noChangeAspect="1"/>
+          </p:cNvPicPr>
+          <p:nvPr/>
+        </p:nvPicPr>
+        <p:blipFill>
+          <a:blip r:embed="rId2">
+            <a:extLst>
+              <a:ext uri="{28A0092B-C50C-407E-A947-70E740481C1C}">
+                <a14:useLocalDpi xmlns:a14="http://schemas.microsoft.com/office/drawing/2010/main" val="0"/>
+              </a:ext>
+            </a:extLst>
+          </a:blip>
+          <a:stretch>
+            <a:fillRect/>
+          </a:stretch>
+        </p:blipFill>
+        <p:spPr>
+          <a:xfrm>
+            <a:off x="4086225" y="1819275"/>
+            <a:ext cx="4019550" cy="3219450"/>
+          </a:xfrm>
+          <a:prstGeom prst="rect">
+            <a:avLst/>
+          </a:prstGeom>
+        </p:spPr>
+      </p:pic>
+      <p:sp>
+        <p:nvSpPr>
+          <p:cNvPr id="5" name="正方形/長方形 4">
+            <a:extLst>
+              <a:ext uri="{FF2B5EF4-FFF2-40B4-BE49-F238E27FC236}">
+                <a16:creationId xmlns:a16="http://schemas.microsoft.com/office/drawing/2014/main" id="{E0BC4836-EFBB-E6B6-1BCA-7552E6EF1CD7}"/>
+              </a:ext>
+            </a:extLst>
+          </p:cNvPr>
+          <p:cNvSpPr/>
+          <p:nvPr/>
+        </p:nvSpPr>
+        <p:spPr>
+          <a:xfrm flipV="1">
+            <a:off x="4565761" y="4427243"/>
+            <a:ext cx="3540014" cy="322038"/>
+          </a:xfrm>
+          <a:prstGeom prst="rect">
+            <a:avLst/>
+          </a:prstGeom>
+          <a:noFill/>
+          <a:ln w="28575">
+            <a:solidFill>
+              <a:srgbClr val="FF0000"/>
+            </a:solidFill>
+          </a:ln>
+        </p:spPr>
+        <p:style>
+          <a:lnRef idx="2">
+            <a:schemeClr val="accent6"/>
+          </a:lnRef>
+          <a:fillRef idx="1">
+            <a:schemeClr val="lt1"/>
+          </a:fillRef>
+          <a:effectRef idx="0">
+            <a:schemeClr val="accent6"/>
+          </a:effectRef>
+          <a:fontRef idx="minor">
+            <a:schemeClr val="dk1"/>
+          </a:fontRef>
+        </p:style>
+        <p:txBody>
+          <a:bodyPr rtlCol="0" anchor="ctr"/>
+          <a:lstStyle/>
+          <a:p>
+            <a:pPr algn="ctr"/>
+            <a:endParaRPr kumimoji="1" lang="ja-JP" altLang="en-US"/>
+          </a:p>
+        </p:txBody>
+      </p:sp>
+      <p:sp>
+        <p:nvSpPr>
+          <p:cNvPr id="6" name="テキスト ボックス 5">
+            <a:extLst>
+              <a:ext uri="{FF2B5EF4-FFF2-40B4-BE49-F238E27FC236}">
+                <a16:creationId xmlns:a16="http://schemas.microsoft.com/office/drawing/2014/main" id="{E4EB76DA-63C0-9F70-E578-78382A937284}"/>
+              </a:ext>
+            </a:extLst>
+          </p:cNvPr>
+          <p:cNvSpPr txBox="1"/>
+          <p:nvPr/>
+        </p:nvSpPr>
+        <p:spPr>
+          <a:xfrm>
+            <a:off x="5898733" y="4451227"/>
+            <a:ext cx="889000" cy="246221"/>
+          </a:xfrm>
+          <a:prstGeom prst="rect">
+            <a:avLst/>
+          </a:prstGeom>
+          <a:solidFill>
+            <a:schemeClr val="tx1"/>
+          </a:solidFill>
+        </p:spPr>
+        <p:txBody>
+          <a:bodyPr wrap="square" rtlCol="0" anchor="ctr">
+            <a:spAutoFit/>
+          </a:bodyPr>
+          <a:lstStyle/>
+          <a:p>
+            <a:r>
+              <a:rPr kumimoji="1" lang="en-US" altLang="ja-JP" sz="1000" dirty="0">
+                <a:solidFill>
+                  <a:schemeClr val="bg1"/>
+                </a:solidFill>
+              </a:rPr>
+              <a:t>guest</a:t>
+            </a:r>
+            <a:endParaRPr kumimoji="1" lang="ja-JP" altLang="en-US" sz="1000" dirty="0">
+              <a:solidFill>
+                <a:schemeClr val="bg1"/>
+              </a:solidFill>
+            </a:endParaRPr>
+          </a:p>
+        </p:txBody>
+      </p:sp>
+      <p:pic>
+        <p:nvPicPr>
+          <p:cNvPr id="7" name="図 6">
+            <a:extLst>
+              <a:ext uri="{FF2B5EF4-FFF2-40B4-BE49-F238E27FC236}">
+                <a16:creationId xmlns:a16="http://schemas.microsoft.com/office/drawing/2014/main" id="{724DB63E-0DE5-7B53-DBEA-E4C885917D20}"/>
+              </a:ext>
+            </a:extLst>
+          </p:cNvPr>
+          <p:cNvPicPr>
+            <a:picLocks noChangeAspect="1"/>
+          </p:cNvPicPr>
+          <p:nvPr/>
+        </p:nvPicPr>
+        <p:blipFill>
+          <a:blip r:embed="rId3"/>
+          <a:stretch>
+            <a:fillRect/>
+          </a:stretch>
+        </p:blipFill>
+        <p:spPr>
+          <a:xfrm>
+            <a:off x="4075001" y="1816468"/>
+            <a:ext cx="4041998" cy="3225064"/>
+          </a:xfrm>
+          <a:prstGeom prst="rect">
+            <a:avLst/>
+          </a:prstGeom>
+        </p:spPr>
+      </p:pic>
+    </p:spTree>
+    <p:extLst>
+      <p:ext uri="{BB962C8B-B14F-4D97-AF65-F5344CB8AC3E}">
+        <p14:creationId xmlns:p14="http://schemas.microsoft.com/office/powerpoint/2010/main" val="1483300555"/>
+      </p:ext>
+    </p:extLst>
+  </p:cSld>
+  <p:clrMapOvr>
+    <a:masterClrMapping/>
+  </p:clrMapOvr>
+</p:sld>
+</file>
+
+<file path=ppt/slides/slide97.xml><?xml version="1.0" encoding="utf-8"?>
+<p:sld xmlns:a="http://schemas.openxmlformats.org/drawingml/2006/main" xmlns:r="http://schemas.openxmlformats.org/officeDocument/2006/relationships" xmlns:p="http://schemas.openxmlformats.org/presentationml/2006/main">
+  <p:cSld>
+    <p:spTree>
+      <p:nvGrpSpPr>
+        <p:cNvPr id="1" name="">
+          <a:extLst>
+            <a:ext uri="{FF2B5EF4-FFF2-40B4-BE49-F238E27FC236}">
+              <a16:creationId xmlns:a16="http://schemas.microsoft.com/office/drawing/2014/main" id="{0ADF6FE1-269F-B8BF-9868-66A48CBE2B8F}"/>
+            </a:ext>
+          </a:extLst>
+        </p:cNvPr>
+        <p:cNvGrpSpPr/>
+        <p:nvPr/>
+      </p:nvGrpSpPr>
+      <p:grpSpPr>
+        <a:xfrm>
+          <a:off x="0" y="0"/>
+          <a:ext cx="0" cy="0"/>
+          <a:chOff x="0" y="0"/>
+          <a:chExt cx="0" cy="0"/>
+        </a:xfrm>
+      </p:grpSpPr>
+      <p:pic>
+        <p:nvPicPr>
+          <p:cNvPr id="5" name="図 4">
+            <a:extLst>
+              <a:ext uri="{FF2B5EF4-FFF2-40B4-BE49-F238E27FC236}">
+                <a16:creationId xmlns:a16="http://schemas.microsoft.com/office/drawing/2014/main" id="{750667E3-C732-C730-60AC-028199B3AC5F}"/>
+              </a:ext>
+            </a:extLst>
+          </p:cNvPr>
+          <p:cNvPicPr>
+            <a:picLocks noChangeAspect="1"/>
+          </p:cNvPicPr>
+          <p:nvPr/>
+        </p:nvPicPr>
+        <p:blipFill>
+          <a:blip r:embed="rId2">
+            <a:extLst>
+              <a:ext uri="{28A0092B-C50C-407E-A947-70E740481C1C}">
+                <a14:useLocalDpi xmlns:a14="http://schemas.microsoft.com/office/drawing/2010/main" val="0"/>
+              </a:ext>
+            </a:extLst>
+          </a:blip>
+          <a:stretch>
+            <a:fillRect/>
+          </a:stretch>
+        </p:blipFill>
+        <p:spPr>
+          <a:xfrm>
+            <a:off x="4003124" y="1325432"/>
+            <a:ext cx="4391025" cy="2695575"/>
+          </a:xfrm>
+          <a:prstGeom prst="rect">
+            <a:avLst/>
+          </a:prstGeom>
+        </p:spPr>
+      </p:pic>
+      <p:sp>
+        <p:nvSpPr>
+          <p:cNvPr id="6" name="正方形/長方形 5">
+            <a:extLst>
+              <a:ext uri="{FF2B5EF4-FFF2-40B4-BE49-F238E27FC236}">
+                <a16:creationId xmlns:a16="http://schemas.microsoft.com/office/drawing/2014/main" id="{68DB976C-B7D6-14F3-2AF0-92B3953B9B78}"/>
+              </a:ext>
+            </a:extLst>
+          </p:cNvPr>
+          <p:cNvSpPr/>
+          <p:nvPr/>
+        </p:nvSpPr>
+        <p:spPr>
+          <a:xfrm flipV="1">
+            <a:off x="4743044" y="2439823"/>
+            <a:ext cx="3540014" cy="322038"/>
+          </a:xfrm>
+          <a:prstGeom prst="rect">
+            <a:avLst/>
+          </a:prstGeom>
+          <a:noFill/>
+          <a:ln w="28575">
+            <a:solidFill>
+              <a:srgbClr val="FF0000"/>
+            </a:solidFill>
+          </a:ln>
+        </p:spPr>
+        <p:style>
+          <a:lnRef idx="2">
+            <a:schemeClr val="accent6"/>
+          </a:lnRef>
+          <a:fillRef idx="1">
+            <a:schemeClr val="lt1"/>
+          </a:fillRef>
+          <a:effectRef idx="0">
+            <a:schemeClr val="accent6"/>
+          </a:effectRef>
+          <a:fontRef idx="minor">
+            <a:schemeClr val="dk1"/>
+          </a:fontRef>
+        </p:style>
+        <p:txBody>
+          <a:bodyPr rtlCol="0" anchor="ctr"/>
+          <a:lstStyle/>
+          <a:p>
+            <a:pPr algn="ctr"/>
+            <a:endParaRPr kumimoji="1" lang="ja-JP" altLang="en-US"/>
+          </a:p>
+        </p:txBody>
+      </p:sp>
+    </p:spTree>
+    <p:extLst>
+      <p:ext uri="{BB962C8B-B14F-4D97-AF65-F5344CB8AC3E}">
+        <p14:creationId xmlns:p14="http://schemas.microsoft.com/office/powerpoint/2010/main" val="3593246101"/>
+      </p:ext>
+    </p:extLst>
+  </p:cSld>
+  <p:clrMapOvr>
+    <a:masterClrMapping/>
+  </p:clrMapOvr>
+</p:sld>
+</file>
+
+<file path=ppt/slides/slide98.xml><?xml version="1.0" encoding="utf-8"?>
+<p:sld xmlns:a="http://schemas.openxmlformats.org/drawingml/2006/main" xmlns:r="http://schemas.openxmlformats.org/officeDocument/2006/relationships" xmlns:p="http://schemas.openxmlformats.org/presentationml/2006/main">
+  <p:cSld>
+    <p:spTree>
+      <p:nvGrpSpPr>
+        <p:cNvPr id="1" name="">
+          <a:extLst>
+            <a:ext uri="{FF2B5EF4-FFF2-40B4-BE49-F238E27FC236}">
+              <a16:creationId xmlns:a16="http://schemas.microsoft.com/office/drawing/2014/main" id="{5A3EFC4D-CF07-DCBA-2B86-244DF57D6EF6}"/>
+            </a:ext>
+          </a:extLst>
+        </p:cNvPr>
+        <p:cNvGrpSpPr/>
+        <p:nvPr/>
+      </p:nvGrpSpPr>
+      <p:grpSpPr>
+        <a:xfrm>
+          <a:off x="0" y="0"/>
+          <a:ext cx="0" cy="0"/>
+          <a:chOff x="0" y="0"/>
+          <a:chExt cx="0" cy="0"/>
+        </a:xfrm>
+      </p:grpSpPr>
+      <p:pic>
+        <p:nvPicPr>
+          <p:cNvPr id="3" name="図 2">
+            <a:extLst>
+              <a:ext uri="{FF2B5EF4-FFF2-40B4-BE49-F238E27FC236}">
+                <a16:creationId xmlns:a16="http://schemas.microsoft.com/office/drawing/2014/main" id="{5998D52D-C0A0-A7CD-731E-DF305A7206E3}"/>
+              </a:ext>
+            </a:extLst>
+          </p:cNvPr>
+          <p:cNvPicPr>
+            <a:picLocks noChangeAspect="1"/>
+          </p:cNvPicPr>
+          <p:nvPr/>
+        </p:nvPicPr>
+        <p:blipFill>
+          <a:blip r:embed="rId2">
+            <a:extLst>
+              <a:ext uri="{28A0092B-C50C-407E-A947-70E740481C1C}">
+                <a14:useLocalDpi xmlns:a14="http://schemas.microsoft.com/office/drawing/2010/main" val="0"/>
+              </a:ext>
+            </a:extLst>
+          </a:blip>
+          <a:stretch>
+            <a:fillRect/>
+          </a:stretch>
+        </p:blipFill>
+        <p:spPr>
+          <a:xfrm>
+            <a:off x="4086225" y="1828800"/>
+            <a:ext cx="4019550" cy="3200400"/>
+          </a:xfrm>
+          <a:prstGeom prst="rect">
+            <a:avLst/>
+          </a:prstGeom>
+        </p:spPr>
+      </p:pic>
+      <p:sp>
+        <p:nvSpPr>
+          <p:cNvPr id="4" name="正方形/長方形 3">
+            <a:extLst>
+              <a:ext uri="{FF2B5EF4-FFF2-40B4-BE49-F238E27FC236}">
+                <a16:creationId xmlns:a16="http://schemas.microsoft.com/office/drawing/2014/main" id="{D97513E8-FA49-A64E-9FD4-8B6C659E3D55}"/>
+              </a:ext>
+            </a:extLst>
+          </p:cNvPr>
+          <p:cNvSpPr/>
+          <p:nvPr/>
+        </p:nvSpPr>
+        <p:spPr>
+          <a:xfrm flipV="1">
+            <a:off x="7763065" y="4707162"/>
+            <a:ext cx="324000" cy="322038"/>
+          </a:xfrm>
+          <a:prstGeom prst="rect">
+            <a:avLst/>
+          </a:prstGeom>
+          <a:noFill/>
+          <a:ln w="28575">
+            <a:solidFill>
+              <a:srgbClr val="FF0000"/>
+            </a:solidFill>
+          </a:ln>
+        </p:spPr>
+        <p:style>
+          <a:lnRef idx="2">
+            <a:schemeClr val="accent6"/>
+          </a:lnRef>
+          <a:fillRef idx="1">
+            <a:schemeClr val="lt1"/>
+          </a:fillRef>
+          <a:effectRef idx="0">
+            <a:schemeClr val="accent6"/>
+          </a:effectRef>
+          <a:fontRef idx="minor">
+            <a:schemeClr val="dk1"/>
+          </a:fontRef>
+        </p:style>
+        <p:txBody>
+          <a:bodyPr rtlCol="0" anchor="ctr"/>
+          <a:lstStyle/>
+          <a:p>
+            <a:pPr algn="ctr"/>
+            <a:endParaRPr kumimoji="1" lang="ja-JP" altLang="en-US"/>
+          </a:p>
+        </p:txBody>
+      </p:sp>
+    </p:spTree>
+    <p:extLst>
+      <p:ext uri="{BB962C8B-B14F-4D97-AF65-F5344CB8AC3E}">
+        <p14:creationId xmlns:p14="http://schemas.microsoft.com/office/powerpoint/2010/main" val="1673256633"/>
+      </p:ext>
+    </p:extLst>
+  </p:cSld>
+  <p:clrMapOvr>
+    <a:masterClrMapping/>
+  </p:clrMapOvr>
+</p:sld>
+</file>
+
+<file path=ppt/slides/slide99.xml><?xml version="1.0" encoding="utf-8"?>
+<p:sld xmlns:a="http://schemas.openxmlformats.org/drawingml/2006/main" xmlns:r="http://schemas.openxmlformats.org/officeDocument/2006/relationships" xmlns:p="http://schemas.openxmlformats.org/presentationml/2006/main">
+  <p:cSld>
+    <p:spTree>
+      <p:nvGrpSpPr>
+        <p:cNvPr id="1" name="">
+          <a:extLst>
+            <a:ext uri="{FF2B5EF4-FFF2-40B4-BE49-F238E27FC236}">
+              <a16:creationId xmlns:a16="http://schemas.microsoft.com/office/drawing/2014/main" id="{3E1076F6-F09B-6C65-709A-A33333D53F07}"/>
+            </a:ext>
+          </a:extLst>
+        </p:cNvPr>
+        <p:cNvGrpSpPr/>
+        <p:nvPr/>
+      </p:nvGrpSpPr>
+      <p:grpSpPr>
+        <a:xfrm>
+          <a:off x="0" y="0"/>
+          <a:ext cx="0" cy="0"/>
+          <a:chOff x="0" y="0"/>
+          <a:chExt cx="0" cy="0"/>
+        </a:xfrm>
+      </p:grpSpPr>
+    </p:spTree>
+    <p:extLst>
+      <p:ext uri="{BB962C8B-B14F-4D97-AF65-F5344CB8AC3E}">
+        <p14:creationId xmlns:p14="http://schemas.microsoft.com/office/powerpoint/2010/main" val="3798773095"/>
       </p:ext>
     </p:extLst>
   </p:cSld>

--- a/01_テキスト/Git入門_図.pptx
+++ b/01_テキスト/Git入門_図.pptx
@@ -105,6 +105,36 @@
     <p:sldId id="359" r:id="rId99"/>
     <p:sldId id="360" r:id="rId100"/>
     <p:sldId id="361" r:id="rId101"/>
+    <p:sldId id="363" r:id="rId102"/>
+    <p:sldId id="364" r:id="rId103"/>
+    <p:sldId id="365" r:id="rId104"/>
+    <p:sldId id="366" r:id="rId105"/>
+    <p:sldId id="367" r:id="rId106"/>
+    <p:sldId id="369" r:id="rId107"/>
+    <p:sldId id="370" r:id="rId108"/>
+    <p:sldId id="371" r:id="rId109"/>
+    <p:sldId id="372" r:id="rId110"/>
+    <p:sldId id="373" r:id="rId111"/>
+    <p:sldId id="368" r:id="rId112"/>
+    <p:sldId id="374" r:id="rId113"/>
+    <p:sldId id="379" r:id="rId114"/>
+    <p:sldId id="375" r:id="rId115"/>
+    <p:sldId id="378" r:id="rId116"/>
+    <p:sldId id="376" r:id="rId117"/>
+    <p:sldId id="380" r:id="rId118"/>
+    <p:sldId id="385" r:id="rId119"/>
+    <p:sldId id="377" r:id="rId120"/>
+    <p:sldId id="381" r:id="rId121"/>
+    <p:sldId id="382" r:id="rId122"/>
+    <p:sldId id="383" r:id="rId123"/>
+    <p:sldId id="384" r:id="rId124"/>
+    <p:sldId id="386" r:id="rId125"/>
+    <p:sldId id="387" r:id="rId126"/>
+    <p:sldId id="388" r:id="rId127"/>
+    <p:sldId id="392" r:id="rId128"/>
+    <p:sldId id="389" r:id="rId129"/>
+    <p:sldId id="390" r:id="rId130"/>
+    <p:sldId id="391" r:id="rId131"/>
   </p:sldIdLst>
   <p:sldSz cx="12192000" cy="6858000"/>
   <p:notesSz cx="6858000" cy="9144000"/>
@@ -3848,6 +3878,1236 @@
 </p:sld>
 </file>
 
+<file path=ppt/slides/slide101.xml><?xml version="1.0" encoding="utf-8"?>
+<p:sld xmlns:a="http://schemas.openxmlformats.org/drawingml/2006/main" xmlns:r="http://schemas.openxmlformats.org/officeDocument/2006/relationships" xmlns:p="http://schemas.openxmlformats.org/presentationml/2006/main">
+  <p:cSld>
+    <p:spTree>
+      <p:nvGrpSpPr>
+        <p:cNvPr id="1" name="">
+          <a:extLst>
+            <a:ext uri="{FF2B5EF4-FFF2-40B4-BE49-F238E27FC236}">
+              <a16:creationId xmlns:a16="http://schemas.microsoft.com/office/drawing/2014/main" id="{729587C2-D6A7-95CA-6149-A5CFF200D0B9}"/>
+            </a:ext>
+          </a:extLst>
+        </p:cNvPr>
+        <p:cNvGrpSpPr/>
+        <p:nvPr/>
+      </p:nvGrpSpPr>
+      <p:grpSpPr>
+        <a:xfrm>
+          <a:off x="0" y="0"/>
+          <a:ext cx="0" cy="0"/>
+          <a:chOff x="0" y="0"/>
+          <a:chExt cx="0" cy="0"/>
+        </a:xfrm>
+      </p:grpSpPr>
+      <p:pic>
+        <p:nvPicPr>
+          <p:cNvPr id="2" name="図 1">
+            <a:extLst>
+              <a:ext uri="{FF2B5EF4-FFF2-40B4-BE49-F238E27FC236}">
+                <a16:creationId xmlns:a16="http://schemas.microsoft.com/office/drawing/2014/main" id="{300A255F-D081-51C6-8C67-977B0E3ACDC5}"/>
+              </a:ext>
+            </a:extLst>
+          </p:cNvPr>
+          <p:cNvPicPr>
+            <a:picLocks noChangeAspect="1"/>
+          </p:cNvPicPr>
+          <p:nvPr/>
+        </p:nvPicPr>
+        <p:blipFill>
+          <a:blip r:embed="rId2">
+            <a:extLst>
+              <a:ext uri="{28A0092B-C50C-407E-A947-70E740481C1C}">
+                <a14:useLocalDpi xmlns:a14="http://schemas.microsoft.com/office/drawing/2010/main" val="0"/>
+              </a:ext>
+            </a:extLst>
+          </a:blip>
+          <a:stretch>
+            <a:fillRect/>
+          </a:stretch>
+        </p:blipFill>
+        <p:spPr>
+          <a:xfrm>
+            <a:off x="4095750" y="1838325"/>
+            <a:ext cx="4000500" cy="3181350"/>
+          </a:xfrm>
+          <a:prstGeom prst="rect">
+            <a:avLst/>
+          </a:prstGeom>
+        </p:spPr>
+      </p:pic>
+      <p:sp>
+        <p:nvSpPr>
+          <p:cNvPr id="9" name="正方形/長方形 8">
+            <a:extLst>
+              <a:ext uri="{FF2B5EF4-FFF2-40B4-BE49-F238E27FC236}">
+                <a16:creationId xmlns:a16="http://schemas.microsoft.com/office/drawing/2014/main" id="{D515A2A1-7FD1-72CE-A80E-B5446ABC38B6}"/>
+              </a:ext>
+            </a:extLst>
+          </p:cNvPr>
+          <p:cNvSpPr/>
+          <p:nvPr/>
+        </p:nvSpPr>
+        <p:spPr>
+          <a:xfrm flipV="1">
+            <a:off x="4119175" y="3426603"/>
+            <a:ext cx="432000" cy="432000"/>
+          </a:xfrm>
+          <a:prstGeom prst="rect">
+            <a:avLst/>
+          </a:prstGeom>
+          <a:noFill/>
+          <a:ln w="28575">
+            <a:solidFill>
+              <a:srgbClr val="FF0000"/>
+            </a:solidFill>
+          </a:ln>
+        </p:spPr>
+        <p:style>
+          <a:lnRef idx="2">
+            <a:schemeClr val="accent6"/>
+          </a:lnRef>
+          <a:fillRef idx="1">
+            <a:schemeClr val="lt1"/>
+          </a:fillRef>
+          <a:effectRef idx="0">
+            <a:schemeClr val="accent6"/>
+          </a:effectRef>
+          <a:fontRef idx="minor">
+            <a:schemeClr val="dk1"/>
+          </a:fontRef>
+        </p:style>
+        <p:txBody>
+          <a:bodyPr rtlCol="0" anchor="ctr"/>
+          <a:lstStyle/>
+          <a:p>
+            <a:pPr algn="ctr"/>
+            <a:endParaRPr kumimoji="1" lang="ja-JP" altLang="en-US"/>
+          </a:p>
+        </p:txBody>
+      </p:sp>
+    </p:spTree>
+    <p:extLst>
+      <p:ext uri="{BB962C8B-B14F-4D97-AF65-F5344CB8AC3E}">
+        <p14:creationId xmlns:p14="http://schemas.microsoft.com/office/powerpoint/2010/main" val="3492484552"/>
+      </p:ext>
+    </p:extLst>
+  </p:cSld>
+  <p:clrMapOvr>
+    <a:masterClrMapping/>
+  </p:clrMapOvr>
+</p:sld>
+</file>
+
+<file path=ppt/slides/slide102.xml><?xml version="1.0" encoding="utf-8"?>
+<p:sld xmlns:a="http://schemas.openxmlformats.org/drawingml/2006/main" xmlns:r="http://schemas.openxmlformats.org/officeDocument/2006/relationships" xmlns:p="http://schemas.openxmlformats.org/presentationml/2006/main">
+  <p:cSld>
+    <p:spTree>
+      <p:nvGrpSpPr>
+        <p:cNvPr id="1" name="">
+          <a:extLst>
+            <a:ext uri="{FF2B5EF4-FFF2-40B4-BE49-F238E27FC236}">
+              <a16:creationId xmlns:a16="http://schemas.microsoft.com/office/drawing/2014/main" id="{7F1C2442-00DB-6C11-DE82-BC2F7053C34E}"/>
+            </a:ext>
+          </a:extLst>
+        </p:cNvPr>
+        <p:cNvGrpSpPr/>
+        <p:nvPr/>
+      </p:nvGrpSpPr>
+      <p:grpSpPr>
+        <a:xfrm>
+          <a:off x="0" y="0"/>
+          <a:ext cx="0" cy="0"/>
+          <a:chOff x="0" y="0"/>
+          <a:chExt cx="0" cy="0"/>
+        </a:xfrm>
+      </p:grpSpPr>
+      <p:pic>
+        <p:nvPicPr>
+          <p:cNvPr id="3" name="図 2">
+            <a:extLst>
+              <a:ext uri="{FF2B5EF4-FFF2-40B4-BE49-F238E27FC236}">
+                <a16:creationId xmlns:a16="http://schemas.microsoft.com/office/drawing/2014/main" id="{F01DF50A-94EF-D0A4-DC32-D76788987B5D}"/>
+              </a:ext>
+            </a:extLst>
+          </p:cNvPr>
+          <p:cNvPicPr>
+            <a:picLocks noChangeAspect="1"/>
+          </p:cNvPicPr>
+          <p:nvPr/>
+        </p:nvPicPr>
+        <p:blipFill>
+          <a:blip r:embed="rId2">
+            <a:extLst>
+              <a:ext uri="{28A0092B-C50C-407E-A947-70E740481C1C}">
+                <a14:useLocalDpi xmlns:a14="http://schemas.microsoft.com/office/drawing/2010/main" val="0"/>
+              </a:ext>
+            </a:extLst>
+          </a:blip>
+          <a:stretch>
+            <a:fillRect/>
+          </a:stretch>
+        </p:blipFill>
+        <p:spPr>
+          <a:xfrm>
+            <a:off x="3028950" y="2057400"/>
+            <a:ext cx="6134100" cy="2743200"/>
+          </a:xfrm>
+          <a:prstGeom prst="rect">
+            <a:avLst/>
+          </a:prstGeom>
+        </p:spPr>
+      </p:pic>
+      <p:sp>
+        <p:nvSpPr>
+          <p:cNvPr id="4" name="正方形/長方形 3">
+            <a:extLst>
+              <a:ext uri="{FF2B5EF4-FFF2-40B4-BE49-F238E27FC236}">
+                <a16:creationId xmlns:a16="http://schemas.microsoft.com/office/drawing/2014/main" id="{0F6DF857-F8D1-1E3F-2238-A8CB55443FED}"/>
+              </a:ext>
+            </a:extLst>
+          </p:cNvPr>
+          <p:cNvSpPr/>
+          <p:nvPr/>
+        </p:nvSpPr>
+        <p:spPr>
+          <a:xfrm flipV="1">
+            <a:off x="6731745" y="2465548"/>
+            <a:ext cx="252000" cy="252000"/>
+          </a:xfrm>
+          <a:prstGeom prst="rect">
+            <a:avLst/>
+          </a:prstGeom>
+          <a:noFill/>
+          <a:ln w="28575">
+            <a:solidFill>
+              <a:srgbClr val="FF0000"/>
+            </a:solidFill>
+          </a:ln>
+        </p:spPr>
+        <p:style>
+          <a:lnRef idx="2">
+            <a:schemeClr val="accent6"/>
+          </a:lnRef>
+          <a:fillRef idx="1">
+            <a:schemeClr val="lt1"/>
+          </a:fillRef>
+          <a:effectRef idx="0">
+            <a:schemeClr val="accent6"/>
+          </a:effectRef>
+          <a:fontRef idx="minor">
+            <a:schemeClr val="dk1"/>
+          </a:fontRef>
+        </p:style>
+        <p:txBody>
+          <a:bodyPr rtlCol="0" anchor="ctr"/>
+          <a:lstStyle/>
+          <a:p>
+            <a:pPr algn="ctr"/>
+            <a:endParaRPr kumimoji="1" lang="ja-JP" altLang="en-US"/>
+          </a:p>
+        </p:txBody>
+      </p:sp>
+      <p:sp>
+        <p:nvSpPr>
+          <p:cNvPr id="5" name="正方形/長方形 4">
+            <a:extLst>
+              <a:ext uri="{FF2B5EF4-FFF2-40B4-BE49-F238E27FC236}">
+                <a16:creationId xmlns:a16="http://schemas.microsoft.com/office/drawing/2014/main" id="{7F1256E8-56AA-F545-94B0-7371D7EAB395}"/>
+              </a:ext>
+            </a:extLst>
+          </p:cNvPr>
+          <p:cNvSpPr/>
+          <p:nvPr/>
+        </p:nvSpPr>
+        <p:spPr>
+          <a:xfrm flipV="1">
+            <a:off x="6759738" y="3594547"/>
+            <a:ext cx="2340000" cy="288000"/>
+          </a:xfrm>
+          <a:prstGeom prst="rect">
+            <a:avLst/>
+          </a:prstGeom>
+          <a:noFill/>
+          <a:ln w="28575">
+            <a:solidFill>
+              <a:srgbClr val="FF0000"/>
+            </a:solidFill>
+          </a:ln>
+        </p:spPr>
+        <p:style>
+          <a:lnRef idx="2">
+            <a:schemeClr val="accent6"/>
+          </a:lnRef>
+          <a:fillRef idx="1">
+            <a:schemeClr val="lt1"/>
+          </a:fillRef>
+          <a:effectRef idx="0">
+            <a:schemeClr val="accent6"/>
+          </a:effectRef>
+          <a:fontRef idx="minor">
+            <a:schemeClr val="dk1"/>
+          </a:fontRef>
+        </p:style>
+        <p:txBody>
+          <a:bodyPr rtlCol="0" anchor="ctr"/>
+          <a:lstStyle/>
+          <a:p>
+            <a:pPr algn="ctr"/>
+            <a:endParaRPr kumimoji="1" lang="ja-JP" altLang="en-US"/>
+          </a:p>
+        </p:txBody>
+      </p:sp>
+    </p:spTree>
+    <p:extLst>
+      <p:ext uri="{BB962C8B-B14F-4D97-AF65-F5344CB8AC3E}">
+        <p14:creationId xmlns:p14="http://schemas.microsoft.com/office/powerpoint/2010/main" val="2779914957"/>
+      </p:ext>
+    </p:extLst>
+  </p:cSld>
+  <p:clrMapOvr>
+    <a:masterClrMapping/>
+  </p:clrMapOvr>
+</p:sld>
+</file>
+
+<file path=ppt/slides/slide103.xml><?xml version="1.0" encoding="utf-8"?>
+<p:sld xmlns:a="http://schemas.openxmlformats.org/drawingml/2006/main" xmlns:r="http://schemas.openxmlformats.org/officeDocument/2006/relationships" xmlns:p="http://schemas.openxmlformats.org/presentationml/2006/main">
+  <p:cSld>
+    <p:spTree>
+      <p:nvGrpSpPr>
+        <p:cNvPr id="1" name="">
+          <a:extLst>
+            <a:ext uri="{FF2B5EF4-FFF2-40B4-BE49-F238E27FC236}">
+              <a16:creationId xmlns:a16="http://schemas.microsoft.com/office/drawing/2014/main" id="{AD8FF697-422D-DCDC-C32B-D693B41EB8EB}"/>
+            </a:ext>
+          </a:extLst>
+        </p:cNvPr>
+        <p:cNvGrpSpPr/>
+        <p:nvPr/>
+      </p:nvGrpSpPr>
+      <p:grpSpPr>
+        <a:xfrm>
+          <a:off x="0" y="0"/>
+          <a:ext cx="0" cy="0"/>
+          <a:chOff x="0" y="0"/>
+          <a:chExt cx="0" cy="0"/>
+        </a:xfrm>
+      </p:grpSpPr>
+      <p:pic>
+        <p:nvPicPr>
+          <p:cNvPr id="3" name="図 2">
+            <a:extLst>
+              <a:ext uri="{FF2B5EF4-FFF2-40B4-BE49-F238E27FC236}">
+                <a16:creationId xmlns:a16="http://schemas.microsoft.com/office/drawing/2014/main" id="{46B478A4-D3EC-2343-2217-E068C14DDDF4}"/>
+              </a:ext>
+            </a:extLst>
+          </p:cNvPr>
+          <p:cNvPicPr>
+            <a:picLocks noChangeAspect="1"/>
+          </p:cNvPicPr>
+          <p:nvPr/>
+        </p:nvPicPr>
+        <p:blipFill>
+          <a:blip r:embed="rId2">
+            <a:extLst>
+              <a:ext uri="{28A0092B-C50C-407E-A947-70E740481C1C}">
+                <a14:useLocalDpi xmlns:a14="http://schemas.microsoft.com/office/drawing/2010/main" val="0"/>
+              </a:ext>
+            </a:extLst>
+          </a:blip>
+          <a:stretch>
+            <a:fillRect/>
+          </a:stretch>
+        </p:blipFill>
+        <p:spPr>
+          <a:xfrm>
+            <a:off x="4090987" y="1809750"/>
+            <a:ext cx="4010025" cy="3238500"/>
+          </a:xfrm>
+          <a:prstGeom prst="rect">
+            <a:avLst/>
+          </a:prstGeom>
+        </p:spPr>
+      </p:pic>
+      <p:sp>
+        <p:nvSpPr>
+          <p:cNvPr id="5" name="テキスト ボックス 4">
+            <a:extLst>
+              <a:ext uri="{FF2B5EF4-FFF2-40B4-BE49-F238E27FC236}">
+                <a16:creationId xmlns:a16="http://schemas.microsoft.com/office/drawing/2014/main" id="{D88F0626-EA91-361F-2FD5-413195406128}"/>
+              </a:ext>
+            </a:extLst>
+          </p:cNvPr>
+          <p:cNvSpPr txBox="1"/>
+          <p:nvPr/>
+        </p:nvSpPr>
+        <p:spPr>
+          <a:xfrm>
+            <a:off x="5898733" y="4787129"/>
+            <a:ext cx="889000" cy="246221"/>
+          </a:xfrm>
+          <a:prstGeom prst="rect">
+            <a:avLst/>
+          </a:prstGeom>
+          <a:solidFill>
+            <a:schemeClr val="tx1"/>
+          </a:solidFill>
+        </p:spPr>
+        <p:txBody>
+          <a:bodyPr wrap="square" rtlCol="0" anchor="ctr">
+            <a:spAutoFit/>
+          </a:bodyPr>
+          <a:lstStyle/>
+          <a:p>
+            <a:endParaRPr kumimoji="1" lang="ja-JP" altLang="en-US" sz="1000" dirty="0">
+              <a:solidFill>
+                <a:schemeClr val="bg1"/>
+              </a:solidFill>
+            </a:endParaRPr>
+          </a:p>
+        </p:txBody>
+      </p:sp>
+      <p:sp>
+        <p:nvSpPr>
+          <p:cNvPr id="4" name="正方形/長方形 3">
+            <a:extLst>
+              <a:ext uri="{FF2B5EF4-FFF2-40B4-BE49-F238E27FC236}">
+                <a16:creationId xmlns:a16="http://schemas.microsoft.com/office/drawing/2014/main" id="{AAF10AC9-162A-8419-0D5D-FE907AFBFD4B}"/>
+              </a:ext>
+            </a:extLst>
+          </p:cNvPr>
+          <p:cNvSpPr/>
+          <p:nvPr/>
+        </p:nvSpPr>
+        <p:spPr>
+          <a:xfrm flipV="1">
+            <a:off x="4609322" y="4707162"/>
+            <a:ext cx="3449750" cy="322038"/>
+          </a:xfrm>
+          <a:prstGeom prst="rect">
+            <a:avLst/>
+          </a:prstGeom>
+          <a:noFill/>
+          <a:ln w="28575">
+            <a:solidFill>
+              <a:srgbClr val="FF0000"/>
+            </a:solidFill>
+          </a:ln>
+        </p:spPr>
+        <p:style>
+          <a:lnRef idx="2">
+            <a:schemeClr val="accent6"/>
+          </a:lnRef>
+          <a:fillRef idx="1">
+            <a:schemeClr val="lt1"/>
+          </a:fillRef>
+          <a:effectRef idx="0">
+            <a:schemeClr val="accent6"/>
+          </a:effectRef>
+          <a:fontRef idx="minor">
+            <a:schemeClr val="dk1"/>
+          </a:fontRef>
+        </p:style>
+        <p:txBody>
+          <a:bodyPr rtlCol="0" anchor="ctr"/>
+          <a:lstStyle/>
+          <a:p>
+            <a:pPr algn="ctr"/>
+            <a:endParaRPr kumimoji="1" lang="ja-JP" altLang="en-US"/>
+          </a:p>
+        </p:txBody>
+      </p:sp>
+    </p:spTree>
+    <p:extLst>
+      <p:ext uri="{BB962C8B-B14F-4D97-AF65-F5344CB8AC3E}">
+        <p14:creationId xmlns:p14="http://schemas.microsoft.com/office/powerpoint/2010/main" val="720484910"/>
+      </p:ext>
+    </p:extLst>
+  </p:cSld>
+  <p:clrMapOvr>
+    <a:masterClrMapping/>
+  </p:clrMapOvr>
+</p:sld>
+</file>
+
+<file path=ppt/slides/slide104.xml><?xml version="1.0" encoding="utf-8"?>
+<p:sld xmlns:a="http://schemas.openxmlformats.org/drawingml/2006/main" xmlns:r="http://schemas.openxmlformats.org/officeDocument/2006/relationships" xmlns:p="http://schemas.openxmlformats.org/presentationml/2006/main">
+  <p:cSld>
+    <p:spTree>
+      <p:nvGrpSpPr>
+        <p:cNvPr id="1" name="">
+          <a:extLst>
+            <a:ext uri="{FF2B5EF4-FFF2-40B4-BE49-F238E27FC236}">
+              <a16:creationId xmlns:a16="http://schemas.microsoft.com/office/drawing/2014/main" id="{7E56821A-6831-E938-9C3B-F7573F25DD68}"/>
+            </a:ext>
+          </a:extLst>
+        </p:cNvPr>
+        <p:cNvGrpSpPr/>
+        <p:nvPr/>
+      </p:nvGrpSpPr>
+      <p:grpSpPr>
+        <a:xfrm>
+          <a:off x="0" y="0"/>
+          <a:ext cx="0" cy="0"/>
+          <a:chOff x="0" y="0"/>
+          <a:chExt cx="0" cy="0"/>
+        </a:xfrm>
+      </p:grpSpPr>
+      <p:pic>
+        <p:nvPicPr>
+          <p:cNvPr id="3" name="図 2">
+            <a:extLst>
+              <a:ext uri="{FF2B5EF4-FFF2-40B4-BE49-F238E27FC236}">
+                <a16:creationId xmlns:a16="http://schemas.microsoft.com/office/drawing/2014/main" id="{1BF6AA3D-B096-EA00-21A2-353FD90D7E95}"/>
+              </a:ext>
+            </a:extLst>
+          </p:cNvPr>
+          <p:cNvPicPr>
+            <a:picLocks noChangeAspect="1"/>
+          </p:cNvPicPr>
+          <p:nvPr/>
+        </p:nvPicPr>
+        <p:blipFill>
+          <a:blip r:embed="rId2">
+            <a:extLst>
+              <a:ext uri="{28A0092B-C50C-407E-A947-70E740481C1C}">
+                <a14:useLocalDpi xmlns:a14="http://schemas.microsoft.com/office/drawing/2010/main" val="0"/>
+              </a:ext>
+            </a:extLst>
+          </a:blip>
+          <a:stretch>
+            <a:fillRect/>
+          </a:stretch>
+        </p:blipFill>
+        <p:spPr>
+          <a:xfrm>
+            <a:off x="1866900" y="1695450"/>
+            <a:ext cx="8458200" cy="3467100"/>
+          </a:xfrm>
+          <a:prstGeom prst="rect">
+            <a:avLst/>
+          </a:prstGeom>
+        </p:spPr>
+      </p:pic>
+      <p:sp>
+        <p:nvSpPr>
+          <p:cNvPr id="4" name="正方形/長方形 3">
+            <a:extLst>
+              <a:ext uri="{FF2B5EF4-FFF2-40B4-BE49-F238E27FC236}">
+                <a16:creationId xmlns:a16="http://schemas.microsoft.com/office/drawing/2014/main" id="{93B4308E-FEA8-32FE-BF8C-2E478B439AD3}"/>
+              </a:ext>
+            </a:extLst>
+          </p:cNvPr>
+          <p:cNvSpPr/>
+          <p:nvPr/>
+        </p:nvSpPr>
+        <p:spPr>
+          <a:xfrm flipV="1">
+            <a:off x="5772000" y="2197226"/>
+            <a:ext cx="4473012" cy="853883"/>
+          </a:xfrm>
+          <a:prstGeom prst="rect">
+            <a:avLst/>
+          </a:prstGeom>
+          <a:noFill/>
+          <a:ln w="28575">
+            <a:solidFill>
+              <a:srgbClr val="FF0000"/>
+            </a:solidFill>
+          </a:ln>
+        </p:spPr>
+        <p:style>
+          <a:lnRef idx="2">
+            <a:schemeClr val="accent6"/>
+          </a:lnRef>
+          <a:fillRef idx="1">
+            <a:schemeClr val="lt1"/>
+          </a:fillRef>
+          <a:effectRef idx="0">
+            <a:schemeClr val="accent6"/>
+          </a:effectRef>
+          <a:fontRef idx="minor">
+            <a:schemeClr val="dk1"/>
+          </a:fontRef>
+        </p:style>
+        <p:txBody>
+          <a:bodyPr rtlCol="0" anchor="ctr"/>
+          <a:lstStyle/>
+          <a:p>
+            <a:pPr algn="ctr"/>
+            <a:endParaRPr kumimoji="1" lang="ja-JP" altLang="en-US"/>
+          </a:p>
+        </p:txBody>
+      </p:sp>
+      <p:sp>
+        <p:nvSpPr>
+          <p:cNvPr id="5" name="テキスト ボックス 4">
+            <a:extLst>
+              <a:ext uri="{FF2B5EF4-FFF2-40B4-BE49-F238E27FC236}">
+                <a16:creationId xmlns:a16="http://schemas.microsoft.com/office/drawing/2014/main" id="{60C43B91-B94C-32B0-B335-F9D97D6B8374}"/>
+              </a:ext>
+            </a:extLst>
+          </p:cNvPr>
+          <p:cNvSpPr txBox="1"/>
+          <p:nvPr/>
+        </p:nvSpPr>
+        <p:spPr>
+          <a:xfrm>
+            <a:off x="3108879" y="4628510"/>
+            <a:ext cx="889000" cy="246221"/>
+          </a:xfrm>
+          <a:prstGeom prst="rect">
+            <a:avLst/>
+          </a:prstGeom>
+          <a:solidFill>
+            <a:schemeClr val="tx1"/>
+          </a:solidFill>
+        </p:spPr>
+        <p:txBody>
+          <a:bodyPr wrap="square" rtlCol="0" anchor="ctr">
+            <a:spAutoFit/>
+          </a:bodyPr>
+          <a:lstStyle/>
+          <a:p>
+            <a:endParaRPr kumimoji="1" lang="ja-JP" altLang="en-US" sz="1000" dirty="0">
+              <a:solidFill>
+                <a:schemeClr val="bg1"/>
+              </a:solidFill>
+            </a:endParaRPr>
+          </a:p>
+        </p:txBody>
+      </p:sp>
+    </p:spTree>
+    <p:extLst>
+      <p:ext uri="{BB962C8B-B14F-4D97-AF65-F5344CB8AC3E}">
+        <p14:creationId xmlns:p14="http://schemas.microsoft.com/office/powerpoint/2010/main" val="2317979742"/>
+      </p:ext>
+    </p:extLst>
+  </p:cSld>
+  <p:clrMapOvr>
+    <a:masterClrMapping/>
+  </p:clrMapOvr>
+</p:sld>
+</file>
+
+<file path=ppt/slides/slide105.xml><?xml version="1.0" encoding="utf-8"?>
+<p:sld xmlns:a="http://schemas.openxmlformats.org/drawingml/2006/main" xmlns:r="http://schemas.openxmlformats.org/officeDocument/2006/relationships" xmlns:p="http://schemas.openxmlformats.org/presentationml/2006/main">
+  <p:cSld>
+    <p:spTree>
+      <p:nvGrpSpPr>
+        <p:cNvPr id="1" name="">
+          <a:extLst>
+            <a:ext uri="{FF2B5EF4-FFF2-40B4-BE49-F238E27FC236}">
+              <a16:creationId xmlns:a16="http://schemas.microsoft.com/office/drawing/2014/main" id="{A7C950DC-84F2-A293-2479-BF267F4B25A6}"/>
+            </a:ext>
+          </a:extLst>
+        </p:cNvPr>
+        <p:cNvGrpSpPr/>
+        <p:nvPr/>
+      </p:nvGrpSpPr>
+      <p:grpSpPr>
+        <a:xfrm>
+          <a:off x="0" y="0"/>
+          <a:ext cx="0" cy="0"/>
+          <a:chOff x="0" y="0"/>
+          <a:chExt cx="0" cy="0"/>
+        </a:xfrm>
+      </p:grpSpPr>
+    </p:spTree>
+    <p:extLst>
+      <p:ext uri="{BB962C8B-B14F-4D97-AF65-F5344CB8AC3E}">
+        <p14:creationId xmlns:p14="http://schemas.microsoft.com/office/powerpoint/2010/main" val="2815932081"/>
+      </p:ext>
+    </p:extLst>
+  </p:cSld>
+  <p:clrMapOvr>
+    <a:masterClrMapping/>
+  </p:clrMapOvr>
+</p:sld>
+</file>
+
+<file path=ppt/slides/slide106.xml><?xml version="1.0" encoding="utf-8"?>
+<p:sld xmlns:a="http://schemas.openxmlformats.org/drawingml/2006/main" xmlns:r="http://schemas.openxmlformats.org/officeDocument/2006/relationships" xmlns:p="http://schemas.openxmlformats.org/presentationml/2006/main">
+  <p:cSld>
+    <p:spTree>
+      <p:nvGrpSpPr>
+        <p:cNvPr id="1" name="">
+          <a:extLst>
+            <a:ext uri="{FF2B5EF4-FFF2-40B4-BE49-F238E27FC236}">
+              <a16:creationId xmlns:a16="http://schemas.microsoft.com/office/drawing/2014/main" id="{26AA375B-371A-A128-1427-5091F5B56F05}"/>
+            </a:ext>
+          </a:extLst>
+        </p:cNvPr>
+        <p:cNvGrpSpPr/>
+        <p:nvPr/>
+      </p:nvGrpSpPr>
+      <p:grpSpPr>
+        <a:xfrm>
+          <a:off x="0" y="0"/>
+          <a:ext cx="0" cy="0"/>
+          <a:chOff x="0" y="0"/>
+          <a:chExt cx="0" cy="0"/>
+        </a:xfrm>
+      </p:grpSpPr>
+      <p:pic>
+        <p:nvPicPr>
+          <p:cNvPr id="2" name="図 1">
+            <a:extLst>
+              <a:ext uri="{FF2B5EF4-FFF2-40B4-BE49-F238E27FC236}">
+                <a16:creationId xmlns:a16="http://schemas.microsoft.com/office/drawing/2014/main" id="{06033509-3AB7-415C-0F40-16EADC9844A4}"/>
+              </a:ext>
+            </a:extLst>
+          </p:cNvPr>
+          <p:cNvPicPr>
+            <a:picLocks noChangeAspect="1"/>
+          </p:cNvPicPr>
+          <p:nvPr/>
+        </p:nvPicPr>
+        <p:blipFill>
+          <a:blip r:embed="rId2">
+            <a:extLst>
+              <a:ext uri="{28A0092B-C50C-407E-A947-70E740481C1C}">
+                <a14:useLocalDpi xmlns:a14="http://schemas.microsoft.com/office/drawing/2010/main" val="0"/>
+              </a:ext>
+            </a:extLst>
+          </a:blip>
+          <a:stretch>
+            <a:fillRect/>
+          </a:stretch>
+        </p:blipFill>
+        <p:spPr>
+          <a:xfrm>
+            <a:off x="4095750" y="1838325"/>
+            <a:ext cx="4000500" cy="3181350"/>
+          </a:xfrm>
+          <a:prstGeom prst="rect">
+            <a:avLst/>
+          </a:prstGeom>
+        </p:spPr>
+      </p:pic>
+      <p:sp>
+        <p:nvSpPr>
+          <p:cNvPr id="3" name="正方形/長方形 2">
+            <a:extLst>
+              <a:ext uri="{FF2B5EF4-FFF2-40B4-BE49-F238E27FC236}">
+                <a16:creationId xmlns:a16="http://schemas.microsoft.com/office/drawing/2014/main" id="{7DAEBA38-A7A7-6E7F-9208-7172E5D69514}"/>
+              </a:ext>
+            </a:extLst>
+          </p:cNvPr>
+          <p:cNvSpPr/>
+          <p:nvPr/>
+        </p:nvSpPr>
+        <p:spPr>
+          <a:xfrm flipV="1">
+            <a:off x="4119175" y="3426603"/>
+            <a:ext cx="432000" cy="432000"/>
+          </a:xfrm>
+          <a:prstGeom prst="rect">
+            <a:avLst/>
+          </a:prstGeom>
+          <a:noFill/>
+          <a:ln w="28575">
+            <a:solidFill>
+              <a:srgbClr val="FF0000"/>
+            </a:solidFill>
+          </a:ln>
+        </p:spPr>
+        <p:style>
+          <a:lnRef idx="2">
+            <a:schemeClr val="accent6"/>
+          </a:lnRef>
+          <a:fillRef idx="1">
+            <a:schemeClr val="lt1"/>
+          </a:fillRef>
+          <a:effectRef idx="0">
+            <a:schemeClr val="accent6"/>
+          </a:effectRef>
+          <a:fontRef idx="minor">
+            <a:schemeClr val="dk1"/>
+          </a:fontRef>
+        </p:style>
+        <p:txBody>
+          <a:bodyPr rtlCol="0" anchor="ctr"/>
+          <a:lstStyle/>
+          <a:p>
+            <a:pPr algn="ctr"/>
+            <a:endParaRPr kumimoji="1" lang="ja-JP" altLang="en-US"/>
+          </a:p>
+        </p:txBody>
+      </p:sp>
+    </p:spTree>
+    <p:extLst>
+      <p:ext uri="{BB962C8B-B14F-4D97-AF65-F5344CB8AC3E}">
+        <p14:creationId xmlns:p14="http://schemas.microsoft.com/office/powerpoint/2010/main" val="83576110"/>
+      </p:ext>
+    </p:extLst>
+  </p:cSld>
+  <p:clrMapOvr>
+    <a:masterClrMapping/>
+  </p:clrMapOvr>
+</p:sld>
+</file>
+
+<file path=ppt/slides/slide107.xml><?xml version="1.0" encoding="utf-8"?>
+<p:sld xmlns:a="http://schemas.openxmlformats.org/drawingml/2006/main" xmlns:r="http://schemas.openxmlformats.org/officeDocument/2006/relationships" xmlns:p="http://schemas.openxmlformats.org/presentationml/2006/main">
+  <p:cSld>
+    <p:spTree>
+      <p:nvGrpSpPr>
+        <p:cNvPr id="1" name="">
+          <a:extLst>
+            <a:ext uri="{FF2B5EF4-FFF2-40B4-BE49-F238E27FC236}">
+              <a16:creationId xmlns:a16="http://schemas.microsoft.com/office/drawing/2014/main" id="{450D1B0B-B912-EB01-C597-3349E8E3CBDF}"/>
+            </a:ext>
+          </a:extLst>
+        </p:cNvPr>
+        <p:cNvGrpSpPr/>
+        <p:nvPr/>
+      </p:nvGrpSpPr>
+      <p:grpSpPr>
+        <a:xfrm>
+          <a:off x="0" y="0"/>
+          <a:ext cx="0" cy="0"/>
+          <a:chOff x="0" y="0"/>
+          <a:chExt cx="0" cy="0"/>
+        </a:xfrm>
+      </p:grpSpPr>
+      <p:pic>
+        <p:nvPicPr>
+          <p:cNvPr id="7" name="図 6">
+            <a:extLst>
+              <a:ext uri="{FF2B5EF4-FFF2-40B4-BE49-F238E27FC236}">
+                <a16:creationId xmlns:a16="http://schemas.microsoft.com/office/drawing/2014/main" id="{A531A52A-105F-1407-656A-AEE5355236CB}"/>
+              </a:ext>
+            </a:extLst>
+          </p:cNvPr>
+          <p:cNvPicPr>
+            <a:picLocks noChangeAspect="1"/>
+          </p:cNvPicPr>
+          <p:nvPr/>
+        </p:nvPicPr>
+        <p:blipFill>
+          <a:blip r:embed="rId2">
+            <a:extLst>
+              <a:ext uri="{28A0092B-C50C-407E-A947-70E740481C1C}">
+                <a14:useLocalDpi xmlns:a14="http://schemas.microsoft.com/office/drawing/2010/main" val="0"/>
+              </a:ext>
+            </a:extLst>
+          </a:blip>
+          <a:stretch>
+            <a:fillRect/>
+          </a:stretch>
+        </p:blipFill>
+        <p:spPr>
+          <a:xfrm>
+            <a:off x="4086225" y="1366837"/>
+            <a:ext cx="4019550" cy="4124325"/>
+          </a:xfrm>
+          <a:prstGeom prst="rect">
+            <a:avLst/>
+          </a:prstGeom>
+        </p:spPr>
+      </p:pic>
+      <p:sp>
+        <p:nvSpPr>
+          <p:cNvPr id="4" name="正方形/長方形 3">
+            <a:extLst>
+              <a:ext uri="{FF2B5EF4-FFF2-40B4-BE49-F238E27FC236}">
+                <a16:creationId xmlns:a16="http://schemas.microsoft.com/office/drawing/2014/main" id="{9F89996C-6C0F-C407-2218-05D69DB27543}"/>
+              </a:ext>
+            </a:extLst>
+          </p:cNvPr>
+          <p:cNvSpPr/>
+          <p:nvPr/>
+        </p:nvSpPr>
+        <p:spPr>
+          <a:xfrm flipV="1">
+            <a:off x="4492400" y="5242055"/>
+            <a:ext cx="676760" cy="239777"/>
+          </a:xfrm>
+          <a:prstGeom prst="rect">
+            <a:avLst/>
+          </a:prstGeom>
+          <a:noFill/>
+          <a:ln w="28575">
+            <a:solidFill>
+              <a:srgbClr val="FF0000"/>
+            </a:solidFill>
+          </a:ln>
+        </p:spPr>
+        <p:style>
+          <a:lnRef idx="2">
+            <a:schemeClr val="accent6"/>
+          </a:lnRef>
+          <a:fillRef idx="1">
+            <a:schemeClr val="lt1"/>
+          </a:fillRef>
+          <a:effectRef idx="0">
+            <a:schemeClr val="accent6"/>
+          </a:effectRef>
+          <a:fontRef idx="minor">
+            <a:schemeClr val="dk1"/>
+          </a:fontRef>
+        </p:style>
+        <p:txBody>
+          <a:bodyPr rtlCol="0" anchor="ctr"/>
+          <a:lstStyle/>
+          <a:p>
+            <a:pPr algn="ctr"/>
+            <a:endParaRPr kumimoji="1" lang="ja-JP" altLang="en-US"/>
+          </a:p>
+        </p:txBody>
+      </p:sp>
+    </p:spTree>
+    <p:extLst>
+      <p:ext uri="{BB962C8B-B14F-4D97-AF65-F5344CB8AC3E}">
+        <p14:creationId xmlns:p14="http://schemas.microsoft.com/office/powerpoint/2010/main" val="461929769"/>
+      </p:ext>
+    </p:extLst>
+  </p:cSld>
+  <p:clrMapOvr>
+    <a:masterClrMapping/>
+  </p:clrMapOvr>
+</p:sld>
+</file>
+
+<file path=ppt/slides/slide108.xml><?xml version="1.0" encoding="utf-8"?>
+<p:sld xmlns:a="http://schemas.openxmlformats.org/drawingml/2006/main" xmlns:r="http://schemas.openxmlformats.org/officeDocument/2006/relationships" xmlns:p="http://schemas.openxmlformats.org/presentationml/2006/main">
+  <p:cSld>
+    <p:spTree>
+      <p:nvGrpSpPr>
+        <p:cNvPr id="1" name="">
+          <a:extLst>
+            <a:ext uri="{FF2B5EF4-FFF2-40B4-BE49-F238E27FC236}">
+              <a16:creationId xmlns:a16="http://schemas.microsoft.com/office/drawing/2014/main" id="{390B310F-1AD5-B2D8-9DE9-E9E21C97F35D}"/>
+            </a:ext>
+          </a:extLst>
+        </p:cNvPr>
+        <p:cNvGrpSpPr/>
+        <p:nvPr/>
+      </p:nvGrpSpPr>
+      <p:grpSpPr>
+        <a:xfrm>
+          <a:off x="0" y="0"/>
+          <a:ext cx="0" cy="0"/>
+          <a:chOff x="0" y="0"/>
+          <a:chExt cx="0" cy="0"/>
+        </a:xfrm>
+      </p:grpSpPr>
+      <p:pic>
+        <p:nvPicPr>
+          <p:cNvPr id="3" name="図 2">
+            <a:extLst>
+              <a:ext uri="{FF2B5EF4-FFF2-40B4-BE49-F238E27FC236}">
+                <a16:creationId xmlns:a16="http://schemas.microsoft.com/office/drawing/2014/main" id="{D6D17DCB-0B28-903E-8447-52C3C7602EAD}"/>
+              </a:ext>
+            </a:extLst>
+          </p:cNvPr>
+          <p:cNvPicPr>
+            <a:picLocks noChangeAspect="1"/>
+          </p:cNvPicPr>
+          <p:nvPr/>
+        </p:nvPicPr>
+        <p:blipFill>
+          <a:blip r:embed="rId2">
+            <a:extLst>
+              <a:ext uri="{28A0092B-C50C-407E-A947-70E740481C1C}">
+                <a14:useLocalDpi xmlns:a14="http://schemas.microsoft.com/office/drawing/2010/main" val="0"/>
+              </a:ext>
+            </a:extLst>
+          </a:blip>
+          <a:stretch>
+            <a:fillRect/>
+          </a:stretch>
+        </p:blipFill>
+        <p:spPr>
+          <a:xfrm>
+            <a:off x="719137" y="804862"/>
+            <a:ext cx="10753725" cy="5248275"/>
+          </a:xfrm>
+          <a:prstGeom prst="rect">
+            <a:avLst/>
+          </a:prstGeom>
+        </p:spPr>
+      </p:pic>
+      <p:sp>
+        <p:nvSpPr>
+          <p:cNvPr id="4" name="正方形/長方形 3">
+            <a:extLst>
+              <a:ext uri="{FF2B5EF4-FFF2-40B4-BE49-F238E27FC236}">
+                <a16:creationId xmlns:a16="http://schemas.microsoft.com/office/drawing/2014/main" id="{31A85901-8E8D-848E-AAE0-985E558A87BB}"/>
+              </a:ext>
+            </a:extLst>
+          </p:cNvPr>
+          <p:cNvSpPr/>
+          <p:nvPr/>
+        </p:nvSpPr>
+        <p:spPr>
+          <a:xfrm flipV="1">
+            <a:off x="4380432" y="1317885"/>
+            <a:ext cx="6993584" cy="277650"/>
+          </a:xfrm>
+          <a:prstGeom prst="rect">
+            <a:avLst/>
+          </a:prstGeom>
+          <a:noFill/>
+          <a:ln w="28575">
+            <a:solidFill>
+              <a:srgbClr val="FF0000"/>
+            </a:solidFill>
+          </a:ln>
+        </p:spPr>
+        <p:style>
+          <a:lnRef idx="2">
+            <a:schemeClr val="accent6"/>
+          </a:lnRef>
+          <a:fillRef idx="1">
+            <a:schemeClr val="lt1"/>
+          </a:fillRef>
+          <a:effectRef idx="0">
+            <a:schemeClr val="accent6"/>
+          </a:effectRef>
+          <a:fontRef idx="minor">
+            <a:schemeClr val="dk1"/>
+          </a:fontRef>
+        </p:style>
+        <p:txBody>
+          <a:bodyPr rtlCol="0" anchor="ctr"/>
+          <a:lstStyle/>
+          <a:p>
+            <a:pPr algn="ctr"/>
+            <a:endParaRPr kumimoji="1" lang="ja-JP" altLang="en-US"/>
+          </a:p>
+        </p:txBody>
+      </p:sp>
+      <p:sp>
+        <p:nvSpPr>
+          <p:cNvPr id="7" name="正方形/長方形 6">
+            <a:extLst>
+              <a:ext uri="{FF2B5EF4-FFF2-40B4-BE49-F238E27FC236}">
+                <a16:creationId xmlns:a16="http://schemas.microsoft.com/office/drawing/2014/main" id="{FC0355E6-3CAF-C213-B8E3-5A8C5C098200}"/>
+              </a:ext>
+            </a:extLst>
+          </p:cNvPr>
+          <p:cNvSpPr/>
+          <p:nvPr/>
+        </p:nvSpPr>
+        <p:spPr>
+          <a:xfrm>
+            <a:off x="4447590" y="2929807"/>
+            <a:ext cx="914400" cy="223935"/>
+          </a:xfrm>
+          <a:prstGeom prst="rect">
+            <a:avLst/>
+          </a:prstGeom>
+        </p:spPr>
+        <p:style>
+          <a:lnRef idx="2">
+            <a:schemeClr val="dk1">
+              <a:shade val="15000"/>
+            </a:schemeClr>
+          </a:lnRef>
+          <a:fillRef idx="1">
+            <a:schemeClr val="dk1"/>
+          </a:fillRef>
+          <a:effectRef idx="0">
+            <a:schemeClr val="dk1"/>
+          </a:effectRef>
+          <a:fontRef idx="minor">
+            <a:schemeClr val="lt1"/>
+          </a:fontRef>
+        </p:style>
+        <p:txBody>
+          <a:bodyPr rtlCol="0" anchor="ctr"/>
+          <a:lstStyle/>
+          <a:p>
+            <a:pPr algn="ctr"/>
+            <a:endParaRPr kumimoji="1" lang="ja-JP" altLang="en-US"/>
+          </a:p>
+        </p:txBody>
+      </p:sp>
+      <p:sp>
+        <p:nvSpPr>
+          <p:cNvPr id="8" name="正方形/長方形 7">
+            <a:extLst>
+              <a:ext uri="{FF2B5EF4-FFF2-40B4-BE49-F238E27FC236}">
+                <a16:creationId xmlns:a16="http://schemas.microsoft.com/office/drawing/2014/main" id="{02BEA961-1A12-F119-0E0F-ED97A54EFA54}"/>
+              </a:ext>
+            </a:extLst>
+          </p:cNvPr>
+          <p:cNvSpPr/>
+          <p:nvPr/>
+        </p:nvSpPr>
+        <p:spPr>
+          <a:xfrm>
+            <a:off x="4447590" y="2373082"/>
+            <a:ext cx="914400" cy="223935"/>
+          </a:xfrm>
+          <a:prstGeom prst="rect">
+            <a:avLst/>
+          </a:prstGeom>
+        </p:spPr>
+        <p:style>
+          <a:lnRef idx="2">
+            <a:schemeClr val="dk1">
+              <a:shade val="15000"/>
+            </a:schemeClr>
+          </a:lnRef>
+          <a:fillRef idx="1">
+            <a:schemeClr val="dk1"/>
+          </a:fillRef>
+          <a:effectRef idx="0">
+            <a:schemeClr val="dk1"/>
+          </a:effectRef>
+          <a:fontRef idx="minor">
+            <a:schemeClr val="lt1"/>
+          </a:fontRef>
+        </p:style>
+        <p:txBody>
+          <a:bodyPr rtlCol="0" anchor="ctr"/>
+          <a:lstStyle/>
+          <a:p>
+            <a:pPr algn="ctr"/>
+            <a:endParaRPr kumimoji="1" lang="ja-JP" altLang="en-US"/>
+          </a:p>
+        </p:txBody>
+      </p:sp>
+    </p:spTree>
+    <p:extLst>
+      <p:ext uri="{BB962C8B-B14F-4D97-AF65-F5344CB8AC3E}">
+        <p14:creationId xmlns:p14="http://schemas.microsoft.com/office/powerpoint/2010/main" val="273952792"/>
+      </p:ext>
+    </p:extLst>
+  </p:cSld>
+  <p:clrMapOvr>
+    <a:masterClrMapping/>
+  </p:clrMapOvr>
+</p:sld>
+</file>
+
+<file path=ppt/slides/slide109.xml><?xml version="1.0" encoding="utf-8"?>
+<p:sld xmlns:a="http://schemas.openxmlformats.org/drawingml/2006/main" xmlns:r="http://schemas.openxmlformats.org/officeDocument/2006/relationships" xmlns:p="http://schemas.openxmlformats.org/presentationml/2006/main">
+  <p:cSld>
+    <p:spTree>
+      <p:nvGrpSpPr>
+        <p:cNvPr id="1" name="">
+          <a:extLst>
+            <a:ext uri="{FF2B5EF4-FFF2-40B4-BE49-F238E27FC236}">
+              <a16:creationId xmlns:a16="http://schemas.microsoft.com/office/drawing/2014/main" id="{B71FC471-BBAD-E5B5-07B5-21BC635FB18B}"/>
+            </a:ext>
+          </a:extLst>
+        </p:cNvPr>
+        <p:cNvGrpSpPr/>
+        <p:nvPr/>
+      </p:nvGrpSpPr>
+      <p:grpSpPr>
+        <a:xfrm>
+          <a:off x="0" y="0"/>
+          <a:ext cx="0" cy="0"/>
+          <a:chOff x="0" y="0"/>
+          <a:chExt cx="0" cy="0"/>
+        </a:xfrm>
+      </p:grpSpPr>
+      <p:pic>
+        <p:nvPicPr>
+          <p:cNvPr id="3" name="図 2">
+            <a:extLst>
+              <a:ext uri="{FF2B5EF4-FFF2-40B4-BE49-F238E27FC236}">
+                <a16:creationId xmlns:a16="http://schemas.microsoft.com/office/drawing/2014/main" id="{DDC5B758-CAB3-7764-9571-E962D5AF9BA3}"/>
+              </a:ext>
+            </a:extLst>
+          </p:cNvPr>
+          <p:cNvPicPr>
+            <a:picLocks noChangeAspect="1"/>
+          </p:cNvPicPr>
+          <p:nvPr/>
+        </p:nvPicPr>
+        <p:blipFill>
+          <a:blip r:embed="rId2">
+            <a:extLst>
+              <a:ext uri="{28A0092B-C50C-407E-A947-70E740481C1C}">
+                <a14:useLocalDpi xmlns:a14="http://schemas.microsoft.com/office/drawing/2010/main" val="0"/>
+              </a:ext>
+            </a:extLst>
+          </a:blip>
+          <a:stretch>
+            <a:fillRect/>
+          </a:stretch>
+        </p:blipFill>
+        <p:spPr>
+          <a:xfrm>
+            <a:off x="2533650" y="3076575"/>
+            <a:ext cx="7124700" cy="704850"/>
+          </a:xfrm>
+          <a:prstGeom prst="rect">
+            <a:avLst/>
+          </a:prstGeom>
+        </p:spPr>
+      </p:pic>
+      <p:sp>
+        <p:nvSpPr>
+          <p:cNvPr id="4" name="正方形/長方形 3">
+            <a:extLst>
+              <a:ext uri="{FF2B5EF4-FFF2-40B4-BE49-F238E27FC236}">
+                <a16:creationId xmlns:a16="http://schemas.microsoft.com/office/drawing/2014/main" id="{7B6E4A8D-1FF8-AE2E-A24E-BAA54DF79C2B}"/>
+              </a:ext>
+            </a:extLst>
+          </p:cNvPr>
+          <p:cNvSpPr/>
+          <p:nvPr/>
+        </p:nvSpPr>
+        <p:spPr>
+          <a:xfrm flipV="1">
+            <a:off x="2599208" y="3151350"/>
+            <a:ext cx="6993584" cy="277650"/>
+          </a:xfrm>
+          <a:prstGeom prst="rect">
+            <a:avLst/>
+          </a:prstGeom>
+          <a:noFill/>
+          <a:ln w="28575">
+            <a:solidFill>
+              <a:srgbClr val="FF0000"/>
+            </a:solidFill>
+          </a:ln>
+        </p:spPr>
+        <p:style>
+          <a:lnRef idx="2">
+            <a:schemeClr val="accent6"/>
+          </a:lnRef>
+          <a:fillRef idx="1">
+            <a:schemeClr val="lt1"/>
+          </a:fillRef>
+          <a:effectRef idx="0">
+            <a:schemeClr val="accent6"/>
+          </a:effectRef>
+          <a:fontRef idx="minor">
+            <a:schemeClr val="dk1"/>
+          </a:fontRef>
+        </p:style>
+        <p:txBody>
+          <a:bodyPr rtlCol="0" anchor="ctr"/>
+          <a:lstStyle/>
+          <a:p>
+            <a:pPr algn="ctr"/>
+            <a:endParaRPr kumimoji="1" lang="ja-JP" altLang="en-US"/>
+          </a:p>
+        </p:txBody>
+      </p:sp>
+    </p:spTree>
+    <p:extLst>
+      <p:ext uri="{BB962C8B-B14F-4D97-AF65-F5344CB8AC3E}">
+        <p14:creationId xmlns:p14="http://schemas.microsoft.com/office/powerpoint/2010/main" val="223273275"/>
+      </p:ext>
+    </p:extLst>
+  </p:cSld>
+  <p:clrMapOvr>
+    <a:masterClrMapping/>
+  </p:clrMapOvr>
+</p:sld>
+</file>
+
 <file path=ppt/slides/slide11.xml><?xml version="1.0" encoding="utf-8"?>
 <p:sld xmlns:a="http://schemas.openxmlformats.org/drawingml/2006/main" xmlns:r="http://schemas.openxmlformats.org/officeDocument/2006/relationships" xmlns:p="http://schemas.openxmlformats.org/presentationml/2006/main">
   <p:cSld>
@@ -4795,6 +6055,1196 @@
     <p:extLst>
       <p:ext uri="{BB962C8B-B14F-4D97-AF65-F5344CB8AC3E}">
         <p14:creationId xmlns:p14="http://schemas.microsoft.com/office/powerpoint/2010/main" val="1761840300"/>
+      </p:ext>
+    </p:extLst>
+  </p:cSld>
+  <p:clrMapOvr>
+    <a:masterClrMapping/>
+  </p:clrMapOvr>
+</p:sld>
+</file>
+
+<file path=ppt/slides/slide110.xml><?xml version="1.0" encoding="utf-8"?>
+<p:sld xmlns:a="http://schemas.openxmlformats.org/drawingml/2006/main" xmlns:r="http://schemas.openxmlformats.org/officeDocument/2006/relationships" xmlns:p="http://schemas.openxmlformats.org/presentationml/2006/main">
+  <p:cSld>
+    <p:spTree>
+      <p:nvGrpSpPr>
+        <p:cNvPr id="1" name="">
+          <a:extLst>
+            <a:ext uri="{FF2B5EF4-FFF2-40B4-BE49-F238E27FC236}">
+              <a16:creationId xmlns:a16="http://schemas.microsoft.com/office/drawing/2014/main" id="{217C13C0-CB77-14EF-4668-D29C7B20EFC6}"/>
+            </a:ext>
+          </a:extLst>
+        </p:cNvPr>
+        <p:cNvGrpSpPr/>
+        <p:nvPr/>
+      </p:nvGrpSpPr>
+      <p:grpSpPr>
+        <a:xfrm>
+          <a:off x="0" y="0"/>
+          <a:ext cx="0" cy="0"/>
+          <a:chOff x="0" y="0"/>
+          <a:chExt cx="0" cy="0"/>
+        </a:xfrm>
+      </p:grpSpPr>
+      <p:pic>
+        <p:nvPicPr>
+          <p:cNvPr id="7" name="図 6">
+            <a:extLst>
+              <a:ext uri="{FF2B5EF4-FFF2-40B4-BE49-F238E27FC236}">
+                <a16:creationId xmlns:a16="http://schemas.microsoft.com/office/drawing/2014/main" id="{B5EBF5F1-3227-267F-F24E-7749F359BBE3}"/>
+              </a:ext>
+            </a:extLst>
+          </p:cNvPr>
+          <p:cNvPicPr>
+            <a:picLocks noChangeAspect="1"/>
+          </p:cNvPicPr>
+          <p:nvPr/>
+        </p:nvPicPr>
+        <p:blipFill>
+          <a:blip r:embed="rId2">
+            <a:extLst>
+              <a:ext uri="{28A0092B-C50C-407E-A947-70E740481C1C}">
+                <a14:useLocalDpi xmlns:a14="http://schemas.microsoft.com/office/drawing/2010/main" val="0"/>
+              </a:ext>
+            </a:extLst>
+          </a:blip>
+          <a:stretch>
+            <a:fillRect/>
+          </a:stretch>
+        </p:blipFill>
+        <p:spPr>
+          <a:xfrm>
+            <a:off x="4100512" y="1371600"/>
+            <a:ext cx="3990975" cy="4114800"/>
+          </a:xfrm>
+          <a:prstGeom prst="rect">
+            <a:avLst/>
+          </a:prstGeom>
+        </p:spPr>
+      </p:pic>
+      <p:sp>
+        <p:nvSpPr>
+          <p:cNvPr id="5" name="正方形/長方形 4">
+            <a:extLst>
+              <a:ext uri="{FF2B5EF4-FFF2-40B4-BE49-F238E27FC236}">
+                <a16:creationId xmlns:a16="http://schemas.microsoft.com/office/drawing/2014/main" id="{A9AFD9DB-6BEA-1EB8-B943-423114ACDB5D}"/>
+              </a:ext>
+            </a:extLst>
+          </p:cNvPr>
+          <p:cNvSpPr/>
+          <p:nvPr/>
+        </p:nvSpPr>
+        <p:spPr>
+          <a:xfrm flipV="1">
+            <a:off x="4529722" y="5234667"/>
+            <a:ext cx="779396" cy="239777"/>
+          </a:xfrm>
+          <a:prstGeom prst="rect">
+            <a:avLst/>
+          </a:prstGeom>
+          <a:noFill/>
+          <a:ln w="28575">
+            <a:solidFill>
+              <a:srgbClr val="FF0000"/>
+            </a:solidFill>
+          </a:ln>
+        </p:spPr>
+        <p:style>
+          <a:lnRef idx="2">
+            <a:schemeClr val="accent6"/>
+          </a:lnRef>
+          <a:fillRef idx="1">
+            <a:schemeClr val="lt1"/>
+          </a:fillRef>
+          <a:effectRef idx="0">
+            <a:schemeClr val="accent6"/>
+          </a:effectRef>
+          <a:fontRef idx="minor">
+            <a:schemeClr val="dk1"/>
+          </a:fontRef>
+        </p:style>
+        <p:txBody>
+          <a:bodyPr rtlCol="0" anchor="ctr"/>
+          <a:lstStyle/>
+          <a:p>
+            <a:pPr algn="ctr"/>
+            <a:endParaRPr kumimoji="1" lang="ja-JP" altLang="en-US"/>
+          </a:p>
+        </p:txBody>
+      </p:sp>
+    </p:spTree>
+    <p:extLst>
+      <p:ext uri="{BB962C8B-B14F-4D97-AF65-F5344CB8AC3E}">
+        <p14:creationId xmlns:p14="http://schemas.microsoft.com/office/powerpoint/2010/main" val="309199172"/>
+      </p:ext>
+    </p:extLst>
+  </p:cSld>
+  <p:clrMapOvr>
+    <a:masterClrMapping/>
+  </p:clrMapOvr>
+</p:sld>
+</file>
+
+<file path=ppt/slides/slide111.xml><?xml version="1.0" encoding="utf-8"?>
+<p:sld xmlns:a="http://schemas.openxmlformats.org/drawingml/2006/main" xmlns:r="http://schemas.openxmlformats.org/officeDocument/2006/relationships" xmlns:p="http://schemas.openxmlformats.org/presentationml/2006/main">
+  <p:cSld>
+    <p:spTree>
+      <p:nvGrpSpPr>
+        <p:cNvPr id="1" name="">
+          <a:extLst>
+            <a:ext uri="{FF2B5EF4-FFF2-40B4-BE49-F238E27FC236}">
+              <a16:creationId xmlns:a16="http://schemas.microsoft.com/office/drawing/2014/main" id="{852D4FAB-5896-DF08-15C5-A3C4C39AD945}"/>
+            </a:ext>
+          </a:extLst>
+        </p:cNvPr>
+        <p:cNvGrpSpPr/>
+        <p:nvPr/>
+      </p:nvGrpSpPr>
+      <p:grpSpPr>
+        <a:xfrm>
+          <a:off x="0" y="0"/>
+          <a:ext cx="0" cy="0"/>
+          <a:chOff x="0" y="0"/>
+          <a:chExt cx="0" cy="0"/>
+        </a:xfrm>
+      </p:grpSpPr>
+    </p:spTree>
+    <p:extLst>
+      <p:ext uri="{BB962C8B-B14F-4D97-AF65-F5344CB8AC3E}">
+        <p14:creationId xmlns:p14="http://schemas.microsoft.com/office/powerpoint/2010/main" val="1429901857"/>
+      </p:ext>
+    </p:extLst>
+  </p:cSld>
+  <p:clrMapOvr>
+    <a:masterClrMapping/>
+  </p:clrMapOvr>
+</p:sld>
+</file>
+
+<file path=ppt/slides/slide112.xml><?xml version="1.0" encoding="utf-8"?>
+<p:sld xmlns:a="http://schemas.openxmlformats.org/drawingml/2006/main" xmlns:r="http://schemas.openxmlformats.org/officeDocument/2006/relationships" xmlns:p="http://schemas.openxmlformats.org/presentationml/2006/main">
+  <p:cSld>
+    <p:spTree>
+      <p:nvGrpSpPr>
+        <p:cNvPr id="1" name="">
+          <a:extLst>
+            <a:ext uri="{FF2B5EF4-FFF2-40B4-BE49-F238E27FC236}">
+              <a16:creationId xmlns:a16="http://schemas.microsoft.com/office/drawing/2014/main" id="{0478A96D-7AA4-82CB-D6C6-B6189A133209}"/>
+            </a:ext>
+          </a:extLst>
+        </p:cNvPr>
+        <p:cNvGrpSpPr/>
+        <p:nvPr/>
+      </p:nvGrpSpPr>
+      <p:grpSpPr>
+        <a:xfrm>
+          <a:off x="0" y="0"/>
+          <a:ext cx="0" cy="0"/>
+          <a:chOff x="0" y="0"/>
+          <a:chExt cx="0" cy="0"/>
+        </a:xfrm>
+      </p:grpSpPr>
+      <p:pic>
+        <p:nvPicPr>
+          <p:cNvPr id="2" name="図 1">
+            <a:extLst>
+              <a:ext uri="{FF2B5EF4-FFF2-40B4-BE49-F238E27FC236}">
+                <a16:creationId xmlns:a16="http://schemas.microsoft.com/office/drawing/2014/main" id="{D964CFF9-8CB8-302A-8A2A-CB669A5CC855}"/>
+              </a:ext>
+            </a:extLst>
+          </p:cNvPr>
+          <p:cNvPicPr>
+            <a:picLocks noChangeAspect="1"/>
+          </p:cNvPicPr>
+          <p:nvPr/>
+        </p:nvPicPr>
+        <p:blipFill>
+          <a:blip r:embed="rId2">
+            <a:extLst>
+              <a:ext uri="{28A0092B-C50C-407E-A947-70E740481C1C}">
+                <a14:useLocalDpi xmlns:a14="http://schemas.microsoft.com/office/drawing/2010/main" val="0"/>
+              </a:ext>
+            </a:extLst>
+          </a:blip>
+          <a:stretch>
+            <a:fillRect/>
+          </a:stretch>
+        </p:blipFill>
+        <p:spPr>
+          <a:xfrm>
+            <a:off x="4095750" y="1838325"/>
+            <a:ext cx="4000500" cy="3181350"/>
+          </a:xfrm>
+          <a:prstGeom prst="rect">
+            <a:avLst/>
+          </a:prstGeom>
+        </p:spPr>
+      </p:pic>
+      <p:sp>
+        <p:nvSpPr>
+          <p:cNvPr id="3" name="正方形/長方形 2">
+            <a:extLst>
+              <a:ext uri="{FF2B5EF4-FFF2-40B4-BE49-F238E27FC236}">
+                <a16:creationId xmlns:a16="http://schemas.microsoft.com/office/drawing/2014/main" id="{6C1D0B01-1BBE-AF3B-66F3-19D672AF63E6}"/>
+              </a:ext>
+            </a:extLst>
+          </p:cNvPr>
+          <p:cNvSpPr/>
+          <p:nvPr/>
+        </p:nvSpPr>
+        <p:spPr>
+          <a:xfrm flipV="1">
+            <a:off x="4119175" y="3426603"/>
+            <a:ext cx="432000" cy="432000"/>
+          </a:xfrm>
+          <a:prstGeom prst="rect">
+            <a:avLst/>
+          </a:prstGeom>
+          <a:noFill/>
+          <a:ln w="28575">
+            <a:solidFill>
+              <a:srgbClr val="FF0000"/>
+            </a:solidFill>
+          </a:ln>
+        </p:spPr>
+        <p:style>
+          <a:lnRef idx="2">
+            <a:schemeClr val="accent6"/>
+          </a:lnRef>
+          <a:fillRef idx="1">
+            <a:schemeClr val="lt1"/>
+          </a:fillRef>
+          <a:effectRef idx="0">
+            <a:schemeClr val="accent6"/>
+          </a:effectRef>
+          <a:fontRef idx="minor">
+            <a:schemeClr val="dk1"/>
+          </a:fontRef>
+        </p:style>
+        <p:txBody>
+          <a:bodyPr rtlCol="0" anchor="ctr"/>
+          <a:lstStyle/>
+          <a:p>
+            <a:pPr algn="ctr"/>
+            <a:endParaRPr kumimoji="1" lang="ja-JP" altLang="en-US"/>
+          </a:p>
+        </p:txBody>
+      </p:sp>
+    </p:spTree>
+    <p:extLst>
+      <p:ext uri="{BB962C8B-B14F-4D97-AF65-F5344CB8AC3E}">
+        <p14:creationId xmlns:p14="http://schemas.microsoft.com/office/powerpoint/2010/main" val="1162902369"/>
+      </p:ext>
+    </p:extLst>
+  </p:cSld>
+  <p:clrMapOvr>
+    <a:masterClrMapping/>
+  </p:clrMapOvr>
+</p:sld>
+</file>
+
+<file path=ppt/slides/slide113.xml><?xml version="1.0" encoding="utf-8"?>
+<p:sld xmlns:a="http://schemas.openxmlformats.org/drawingml/2006/main" xmlns:r="http://schemas.openxmlformats.org/officeDocument/2006/relationships" xmlns:p="http://schemas.openxmlformats.org/presentationml/2006/main">
+  <p:cSld>
+    <p:spTree>
+      <p:nvGrpSpPr>
+        <p:cNvPr id="1" name="">
+          <a:extLst>
+            <a:ext uri="{FF2B5EF4-FFF2-40B4-BE49-F238E27FC236}">
+              <a16:creationId xmlns:a16="http://schemas.microsoft.com/office/drawing/2014/main" id="{A9C636DA-5D53-F4A7-C5DD-22177BA3F604}"/>
+            </a:ext>
+          </a:extLst>
+        </p:cNvPr>
+        <p:cNvGrpSpPr/>
+        <p:nvPr/>
+      </p:nvGrpSpPr>
+      <p:grpSpPr>
+        <a:xfrm>
+          <a:off x="0" y="0"/>
+          <a:ext cx="0" cy="0"/>
+          <a:chOff x="0" y="0"/>
+          <a:chExt cx="0" cy="0"/>
+        </a:xfrm>
+      </p:grpSpPr>
+      <p:pic>
+        <p:nvPicPr>
+          <p:cNvPr id="7" name="図 6">
+            <a:extLst>
+              <a:ext uri="{FF2B5EF4-FFF2-40B4-BE49-F238E27FC236}">
+                <a16:creationId xmlns:a16="http://schemas.microsoft.com/office/drawing/2014/main" id="{B095C851-75E6-4661-B27E-ED17C928984F}"/>
+              </a:ext>
+            </a:extLst>
+          </p:cNvPr>
+          <p:cNvPicPr>
+            <a:picLocks noChangeAspect="1"/>
+          </p:cNvPicPr>
+          <p:nvPr/>
+        </p:nvPicPr>
+        <p:blipFill>
+          <a:blip r:embed="rId2">
+            <a:extLst>
+              <a:ext uri="{28A0092B-C50C-407E-A947-70E740481C1C}">
+                <a14:useLocalDpi xmlns:a14="http://schemas.microsoft.com/office/drawing/2010/main" val="0"/>
+              </a:ext>
+            </a:extLst>
+          </a:blip>
+          <a:stretch>
+            <a:fillRect/>
+          </a:stretch>
+        </p:blipFill>
+        <p:spPr>
+          <a:xfrm>
+            <a:off x="4100512" y="1371600"/>
+            <a:ext cx="3990975" cy="4114800"/>
+          </a:xfrm>
+          <a:prstGeom prst="rect">
+            <a:avLst/>
+          </a:prstGeom>
+        </p:spPr>
+      </p:pic>
+      <p:sp>
+        <p:nvSpPr>
+          <p:cNvPr id="5" name="正方形/長方形 4">
+            <a:extLst>
+              <a:ext uri="{FF2B5EF4-FFF2-40B4-BE49-F238E27FC236}">
+                <a16:creationId xmlns:a16="http://schemas.microsoft.com/office/drawing/2014/main" id="{E5D00F09-5C93-6727-A785-D56AC6F095FE}"/>
+              </a:ext>
+            </a:extLst>
+          </p:cNvPr>
+          <p:cNvSpPr/>
+          <p:nvPr/>
+        </p:nvSpPr>
+        <p:spPr>
+          <a:xfrm flipV="1">
+            <a:off x="4529722" y="5234667"/>
+            <a:ext cx="779396" cy="239777"/>
+          </a:xfrm>
+          <a:prstGeom prst="rect">
+            <a:avLst/>
+          </a:prstGeom>
+          <a:noFill/>
+          <a:ln w="28575">
+            <a:solidFill>
+              <a:srgbClr val="FF0000"/>
+            </a:solidFill>
+          </a:ln>
+        </p:spPr>
+        <p:style>
+          <a:lnRef idx="2">
+            <a:schemeClr val="accent6"/>
+          </a:lnRef>
+          <a:fillRef idx="1">
+            <a:schemeClr val="lt1"/>
+          </a:fillRef>
+          <a:effectRef idx="0">
+            <a:schemeClr val="accent6"/>
+          </a:effectRef>
+          <a:fontRef idx="minor">
+            <a:schemeClr val="dk1"/>
+          </a:fontRef>
+        </p:style>
+        <p:txBody>
+          <a:bodyPr rtlCol="0" anchor="ctr"/>
+          <a:lstStyle/>
+          <a:p>
+            <a:pPr algn="ctr"/>
+            <a:endParaRPr kumimoji="1" lang="ja-JP" altLang="en-US"/>
+          </a:p>
+        </p:txBody>
+      </p:sp>
+    </p:spTree>
+    <p:extLst>
+      <p:ext uri="{BB962C8B-B14F-4D97-AF65-F5344CB8AC3E}">
+        <p14:creationId xmlns:p14="http://schemas.microsoft.com/office/powerpoint/2010/main" val="575003878"/>
+      </p:ext>
+    </p:extLst>
+  </p:cSld>
+  <p:clrMapOvr>
+    <a:masterClrMapping/>
+  </p:clrMapOvr>
+</p:sld>
+</file>
+
+<file path=ppt/slides/slide114.xml><?xml version="1.0" encoding="utf-8"?>
+<p:sld xmlns:a="http://schemas.openxmlformats.org/drawingml/2006/main" xmlns:r="http://schemas.openxmlformats.org/officeDocument/2006/relationships" xmlns:p="http://schemas.openxmlformats.org/presentationml/2006/main">
+  <p:cSld>
+    <p:spTree>
+      <p:nvGrpSpPr>
+        <p:cNvPr id="1" name="">
+          <a:extLst>
+            <a:ext uri="{FF2B5EF4-FFF2-40B4-BE49-F238E27FC236}">
+              <a16:creationId xmlns:a16="http://schemas.microsoft.com/office/drawing/2014/main" id="{5200755A-8DFF-4AB9-93B9-AF9F0DAF5B90}"/>
+            </a:ext>
+          </a:extLst>
+        </p:cNvPr>
+        <p:cNvGrpSpPr/>
+        <p:nvPr/>
+      </p:nvGrpSpPr>
+      <p:grpSpPr>
+        <a:xfrm>
+          <a:off x="0" y="0"/>
+          <a:ext cx="0" cy="0"/>
+          <a:chOff x="0" y="0"/>
+          <a:chExt cx="0" cy="0"/>
+        </a:xfrm>
+      </p:grpSpPr>
+      <p:pic>
+        <p:nvPicPr>
+          <p:cNvPr id="3" name="図 2">
+            <a:extLst>
+              <a:ext uri="{FF2B5EF4-FFF2-40B4-BE49-F238E27FC236}">
+                <a16:creationId xmlns:a16="http://schemas.microsoft.com/office/drawing/2014/main" id="{7BD7AB54-CA6C-DAE7-6D5D-1BC6EC095598}"/>
+              </a:ext>
+            </a:extLst>
+          </p:cNvPr>
+          <p:cNvPicPr>
+            <a:picLocks noChangeAspect="1"/>
+          </p:cNvPicPr>
+          <p:nvPr/>
+        </p:nvPicPr>
+        <p:blipFill>
+          <a:blip r:embed="rId2">
+            <a:extLst>
+              <a:ext uri="{28A0092B-C50C-407E-A947-70E740481C1C}">
+                <a14:useLocalDpi xmlns:a14="http://schemas.microsoft.com/office/drawing/2010/main" val="0"/>
+              </a:ext>
+            </a:extLst>
+          </a:blip>
+          <a:stretch>
+            <a:fillRect/>
+          </a:stretch>
+        </p:blipFill>
+        <p:spPr>
+          <a:xfrm>
+            <a:off x="2547937" y="2319337"/>
+            <a:ext cx="7096125" cy="2219325"/>
+          </a:xfrm>
+          <a:prstGeom prst="rect">
+            <a:avLst/>
+          </a:prstGeom>
+        </p:spPr>
+      </p:pic>
+      <p:sp>
+        <p:nvSpPr>
+          <p:cNvPr id="4" name="正方形/長方形 3">
+            <a:extLst>
+              <a:ext uri="{FF2B5EF4-FFF2-40B4-BE49-F238E27FC236}">
+                <a16:creationId xmlns:a16="http://schemas.microsoft.com/office/drawing/2014/main" id="{58D4F0AD-6449-059D-8813-071177BECB67}"/>
+              </a:ext>
+            </a:extLst>
+          </p:cNvPr>
+          <p:cNvSpPr/>
+          <p:nvPr/>
+        </p:nvSpPr>
+        <p:spPr>
+          <a:xfrm>
+            <a:off x="2680996" y="3853542"/>
+            <a:ext cx="914400" cy="223935"/>
+          </a:xfrm>
+          <a:prstGeom prst="rect">
+            <a:avLst/>
+          </a:prstGeom>
+        </p:spPr>
+        <p:style>
+          <a:lnRef idx="2">
+            <a:schemeClr val="dk1">
+              <a:shade val="15000"/>
+            </a:schemeClr>
+          </a:lnRef>
+          <a:fillRef idx="1">
+            <a:schemeClr val="dk1"/>
+          </a:fillRef>
+          <a:effectRef idx="0">
+            <a:schemeClr val="dk1"/>
+          </a:effectRef>
+          <a:fontRef idx="minor">
+            <a:schemeClr val="lt1"/>
+          </a:fontRef>
+        </p:style>
+        <p:txBody>
+          <a:bodyPr rtlCol="0" anchor="ctr"/>
+          <a:lstStyle/>
+          <a:p>
+            <a:pPr algn="ctr"/>
+            <a:endParaRPr kumimoji="1" lang="ja-JP" altLang="en-US"/>
+          </a:p>
+        </p:txBody>
+      </p:sp>
+      <p:sp>
+        <p:nvSpPr>
+          <p:cNvPr id="5" name="正方形/長方形 4">
+            <a:extLst>
+              <a:ext uri="{FF2B5EF4-FFF2-40B4-BE49-F238E27FC236}">
+                <a16:creationId xmlns:a16="http://schemas.microsoft.com/office/drawing/2014/main" id="{D8E64411-26C1-E1A5-F6CD-775CB72F347C}"/>
+              </a:ext>
+            </a:extLst>
+          </p:cNvPr>
+          <p:cNvSpPr/>
+          <p:nvPr/>
+        </p:nvSpPr>
+        <p:spPr>
+          <a:xfrm>
+            <a:off x="2680996" y="4397827"/>
+            <a:ext cx="914400" cy="122174"/>
+          </a:xfrm>
+          <a:prstGeom prst="rect">
+            <a:avLst/>
+          </a:prstGeom>
+        </p:spPr>
+        <p:style>
+          <a:lnRef idx="2">
+            <a:schemeClr val="dk1">
+              <a:shade val="15000"/>
+            </a:schemeClr>
+          </a:lnRef>
+          <a:fillRef idx="1">
+            <a:schemeClr val="dk1"/>
+          </a:fillRef>
+          <a:effectRef idx="0">
+            <a:schemeClr val="dk1"/>
+          </a:effectRef>
+          <a:fontRef idx="minor">
+            <a:schemeClr val="lt1"/>
+          </a:fontRef>
+        </p:style>
+        <p:txBody>
+          <a:bodyPr rtlCol="0" anchor="ctr"/>
+          <a:lstStyle/>
+          <a:p>
+            <a:pPr algn="ctr"/>
+            <a:endParaRPr kumimoji="1" lang="ja-JP" altLang="en-US"/>
+          </a:p>
+        </p:txBody>
+      </p:sp>
+      <p:sp>
+        <p:nvSpPr>
+          <p:cNvPr id="6" name="正方形/長方形 5">
+            <a:extLst>
+              <a:ext uri="{FF2B5EF4-FFF2-40B4-BE49-F238E27FC236}">
+                <a16:creationId xmlns:a16="http://schemas.microsoft.com/office/drawing/2014/main" id="{E9CC7C87-3DB8-71A5-87E9-2C3250BDAF0C}"/>
+              </a:ext>
+            </a:extLst>
+          </p:cNvPr>
+          <p:cNvSpPr/>
+          <p:nvPr/>
+        </p:nvSpPr>
+        <p:spPr>
+          <a:xfrm flipV="1">
+            <a:off x="2680996" y="4114800"/>
+            <a:ext cx="6892212" cy="223934"/>
+          </a:xfrm>
+          <a:prstGeom prst="rect">
+            <a:avLst/>
+          </a:prstGeom>
+          <a:noFill/>
+          <a:ln w="28575">
+            <a:solidFill>
+              <a:srgbClr val="FF0000"/>
+            </a:solidFill>
+          </a:ln>
+        </p:spPr>
+        <p:style>
+          <a:lnRef idx="2">
+            <a:schemeClr val="accent6"/>
+          </a:lnRef>
+          <a:fillRef idx="1">
+            <a:schemeClr val="lt1"/>
+          </a:fillRef>
+          <a:effectRef idx="0">
+            <a:schemeClr val="accent6"/>
+          </a:effectRef>
+          <a:fontRef idx="minor">
+            <a:schemeClr val="dk1"/>
+          </a:fontRef>
+        </p:style>
+        <p:txBody>
+          <a:bodyPr rtlCol="0" anchor="ctr"/>
+          <a:lstStyle/>
+          <a:p>
+            <a:pPr algn="ctr"/>
+            <a:endParaRPr kumimoji="1" lang="ja-JP" altLang="en-US"/>
+          </a:p>
+        </p:txBody>
+      </p:sp>
+    </p:spTree>
+    <p:extLst>
+      <p:ext uri="{BB962C8B-B14F-4D97-AF65-F5344CB8AC3E}">
+        <p14:creationId xmlns:p14="http://schemas.microsoft.com/office/powerpoint/2010/main" val="1787207874"/>
+      </p:ext>
+    </p:extLst>
+  </p:cSld>
+  <p:clrMapOvr>
+    <a:masterClrMapping/>
+  </p:clrMapOvr>
+</p:sld>
+</file>
+
+<file path=ppt/slides/slide115.xml><?xml version="1.0" encoding="utf-8"?>
+<p:sld xmlns:a="http://schemas.openxmlformats.org/drawingml/2006/main" xmlns:r="http://schemas.openxmlformats.org/officeDocument/2006/relationships" xmlns:p="http://schemas.openxmlformats.org/presentationml/2006/main">
+  <p:cSld>
+    <p:spTree>
+      <p:nvGrpSpPr>
+        <p:cNvPr id="1" name="">
+          <a:extLst>
+            <a:ext uri="{FF2B5EF4-FFF2-40B4-BE49-F238E27FC236}">
+              <a16:creationId xmlns:a16="http://schemas.microsoft.com/office/drawing/2014/main" id="{0C7F44C8-51FB-7423-E16B-A311BE186D42}"/>
+            </a:ext>
+          </a:extLst>
+        </p:cNvPr>
+        <p:cNvGrpSpPr/>
+        <p:nvPr/>
+      </p:nvGrpSpPr>
+      <p:grpSpPr>
+        <a:xfrm>
+          <a:off x="0" y="0"/>
+          <a:ext cx="0" cy="0"/>
+          <a:chOff x="0" y="0"/>
+          <a:chExt cx="0" cy="0"/>
+        </a:xfrm>
+      </p:grpSpPr>
+      <p:pic>
+        <p:nvPicPr>
+          <p:cNvPr id="7" name="図 6">
+            <a:extLst>
+              <a:ext uri="{FF2B5EF4-FFF2-40B4-BE49-F238E27FC236}">
+                <a16:creationId xmlns:a16="http://schemas.microsoft.com/office/drawing/2014/main" id="{D27DA15E-ABD3-A8FB-3FFD-C1DDFEDB7D17}"/>
+              </a:ext>
+            </a:extLst>
+          </p:cNvPr>
+          <p:cNvPicPr>
+            <a:picLocks noChangeAspect="1"/>
+          </p:cNvPicPr>
+          <p:nvPr/>
+        </p:nvPicPr>
+        <p:blipFill>
+          <a:blip r:embed="rId2">
+            <a:extLst>
+              <a:ext uri="{28A0092B-C50C-407E-A947-70E740481C1C}">
+                <a14:useLocalDpi xmlns:a14="http://schemas.microsoft.com/office/drawing/2010/main" val="0"/>
+              </a:ext>
+            </a:extLst>
+          </a:blip>
+          <a:stretch>
+            <a:fillRect/>
+          </a:stretch>
+        </p:blipFill>
+        <p:spPr>
+          <a:xfrm>
+            <a:off x="4086225" y="1366837"/>
+            <a:ext cx="4019550" cy="4124325"/>
+          </a:xfrm>
+          <a:prstGeom prst="rect">
+            <a:avLst/>
+          </a:prstGeom>
+        </p:spPr>
+      </p:pic>
+      <p:sp>
+        <p:nvSpPr>
+          <p:cNvPr id="4" name="正方形/長方形 3">
+            <a:extLst>
+              <a:ext uri="{FF2B5EF4-FFF2-40B4-BE49-F238E27FC236}">
+                <a16:creationId xmlns:a16="http://schemas.microsoft.com/office/drawing/2014/main" id="{C780EA19-CF10-5F4E-43CA-0148EEAA15BE}"/>
+              </a:ext>
+            </a:extLst>
+          </p:cNvPr>
+          <p:cNvSpPr/>
+          <p:nvPr/>
+        </p:nvSpPr>
+        <p:spPr>
+          <a:xfrm flipV="1">
+            <a:off x="4492400" y="5242055"/>
+            <a:ext cx="676760" cy="239777"/>
+          </a:xfrm>
+          <a:prstGeom prst="rect">
+            <a:avLst/>
+          </a:prstGeom>
+          <a:noFill/>
+          <a:ln w="28575">
+            <a:solidFill>
+              <a:srgbClr val="FF0000"/>
+            </a:solidFill>
+          </a:ln>
+        </p:spPr>
+        <p:style>
+          <a:lnRef idx="2">
+            <a:schemeClr val="accent6"/>
+          </a:lnRef>
+          <a:fillRef idx="1">
+            <a:schemeClr val="lt1"/>
+          </a:fillRef>
+          <a:effectRef idx="0">
+            <a:schemeClr val="accent6"/>
+          </a:effectRef>
+          <a:fontRef idx="minor">
+            <a:schemeClr val="dk1"/>
+          </a:fontRef>
+        </p:style>
+        <p:txBody>
+          <a:bodyPr rtlCol="0" anchor="ctr"/>
+          <a:lstStyle/>
+          <a:p>
+            <a:pPr algn="ctr"/>
+            <a:endParaRPr kumimoji="1" lang="ja-JP" altLang="en-US"/>
+          </a:p>
+        </p:txBody>
+      </p:sp>
+    </p:spTree>
+    <p:extLst>
+      <p:ext uri="{BB962C8B-B14F-4D97-AF65-F5344CB8AC3E}">
+        <p14:creationId xmlns:p14="http://schemas.microsoft.com/office/powerpoint/2010/main" val="1098197827"/>
+      </p:ext>
+    </p:extLst>
+  </p:cSld>
+  <p:clrMapOvr>
+    <a:masterClrMapping/>
+  </p:clrMapOvr>
+</p:sld>
+</file>
+
+<file path=ppt/slides/slide116.xml><?xml version="1.0" encoding="utf-8"?>
+<p:sld xmlns:a="http://schemas.openxmlformats.org/drawingml/2006/main" xmlns:r="http://schemas.openxmlformats.org/officeDocument/2006/relationships" xmlns:p="http://schemas.openxmlformats.org/presentationml/2006/main">
+  <p:cSld>
+    <p:spTree>
+      <p:nvGrpSpPr>
+        <p:cNvPr id="1" name="">
+          <a:extLst>
+            <a:ext uri="{FF2B5EF4-FFF2-40B4-BE49-F238E27FC236}">
+              <a16:creationId xmlns:a16="http://schemas.microsoft.com/office/drawing/2014/main" id="{C8E3AA0B-99AA-1CE4-D159-C644D5C9934F}"/>
+            </a:ext>
+          </a:extLst>
+        </p:cNvPr>
+        <p:cNvGrpSpPr/>
+        <p:nvPr/>
+      </p:nvGrpSpPr>
+      <p:grpSpPr>
+        <a:xfrm>
+          <a:off x="0" y="0"/>
+          <a:ext cx="0" cy="0"/>
+          <a:chOff x="0" y="0"/>
+          <a:chExt cx="0" cy="0"/>
+        </a:xfrm>
+      </p:grpSpPr>
+    </p:spTree>
+    <p:extLst>
+      <p:ext uri="{BB962C8B-B14F-4D97-AF65-F5344CB8AC3E}">
+        <p14:creationId xmlns:p14="http://schemas.microsoft.com/office/powerpoint/2010/main" val="63312096"/>
+      </p:ext>
+    </p:extLst>
+  </p:cSld>
+  <p:clrMapOvr>
+    <a:masterClrMapping/>
+  </p:clrMapOvr>
+</p:sld>
+</file>
+
+<file path=ppt/slides/slide117.xml><?xml version="1.0" encoding="utf-8"?>
+<p:sld xmlns:a="http://schemas.openxmlformats.org/drawingml/2006/main" xmlns:r="http://schemas.openxmlformats.org/officeDocument/2006/relationships" xmlns:p="http://schemas.openxmlformats.org/presentationml/2006/main">
+  <p:cSld>
+    <p:spTree>
+      <p:nvGrpSpPr>
+        <p:cNvPr id="1" name="">
+          <a:extLst>
+            <a:ext uri="{FF2B5EF4-FFF2-40B4-BE49-F238E27FC236}">
+              <a16:creationId xmlns:a16="http://schemas.microsoft.com/office/drawing/2014/main" id="{0CC3F891-6507-2667-B945-6F24BB50DA48}"/>
+            </a:ext>
+          </a:extLst>
+        </p:cNvPr>
+        <p:cNvGrpSpPr/>
+        <p:nvPr/>
+      </p:nvGrpSpPr>
+      <p:grpSpPr>
+        <a:xfrm>
+          <a:off x="0" y="0"/>
+          <a:ext cx="0" cy="0"/>
+          <a:chOff x="0" y="0"/>
+          <a:chExt cx="0" cy="0"/>
+        </a:xfrm>
+      </p:grpSpPr>
+      <p:pic>
+        <p:nvPicPr>
+          <p:cNvPr id="2" name="図 1">
+            <a:extLst>
+              <a:ext uri="{FF2B5EF4-FFF2-40B4-BE49-F238E27FC236}">
+                <a16:creationId xmlns:a16="http://schemas.microsoft.com/office/drawing/2014/main" id="{4A48FDF4-17E7-08AF-7DC4-2A4B380B89DC}"/>
+              </a:ext>
+            </a:extLst>
+          </p:cNvPr>
+          <p:cNvPicPr>
+            <a:picLocks noChangeAspect="1"/>
+          </p:cNvPicPr>
+          <p:nvPr/>
+        </p:nvPicPr>
+        <p:blipFill>
+          <a:blip r:embed="rId2">
+            <a:extLst>
+              <a:ext uri="{28A0092B-C50C-407E-A947-70E740481C1C}">
+                <a14:useLocalDpi xmlns:a14="http://schemas.microsoft.com/office/drawing/2010/main" val="0"/>
+              </a:ext>
+            </a:extLst>
+          </a:blip>
+          <a:stretch>
+            <a:fillRect/>
+          </a:stretch>
+        </p:blipFill>
+        <p:spPr>
+          <a:xfrm>
+            <a:off x="4095750" y="1838325"/>
+            <a:ext cx="4000500" cy="3181350"/>
+          </a:xfrm>
+          <a:prstGeom prst="rect">
+            <a:avLst/>
+          </a:prstGeom>
+        </p:spPr>
+      </p:pic>
+      <p:sp>
+        <p:nvSpPr>
+          <p:cNvPr id="3" name="正方形/長方形 2">
+            <a:extLst>
+              <a:ext uri="{FF2B5EF4-FFF2-40B4-BE49-F238E27FC236}">
+                <a16:creationId xmlns:a16="http://schemas.microsoft.com/office/drawing/2014/main" id="{EC373E83-2442-6C86-959F-013CB02B37A2}"/>
+              </a:ext>
+            </a:extLst>
+          </p:cNvPr>
+          <p:cNvSpPr/>
+          <p:nvPr/>
+        </p:nvSpPr>
+        <p:spPr>
+          <a:xfrm flipV="1">
+            <a:off x="4119175" y="3426603"/>
+            <a:ext cx="432000" cy="432000"/>
+          </a:xfrm>
+          <a:prstGeom prst="rect">
+            <a:avLst/>
+          </a:prstGeom>
+          <a:noFill/>
+          <a:ln w="28575">
+            <a:solidFill>
+              <a:srgbClr val="FF0000"/>
+            </a:solidFill>
+          </a:ln>
+        </p:spPr>
+        <p:style>
+          <a:lnRef idx="2">
+            <a:schemeClr val="accent6"/>
+          </a:lnRef>
+          <a:fillRef idx="1">
+            <a:schemeClr val="lt1"/>
+          </a:fillRef>
+          <a:effectRef idx="0">
+            <a:schemeClr val="accent6"/>
+          </a:effectRef>
+          <a:fontRef idx="minor">
+            <a:schemeClr val="dk1"/>
+          </a:fontRef>
+        </p:style>
+        <p:txBody>
+          <a:bodyPr rtlCol="0" anchor="ctr"/>
+          <a:lstStyle/>
+          <a:p>
+            <a:pPr algn="ctr"/>
+            <a:endParaRPr kumimoji="1" lang="ja-JP" altLang="en-US"/>
+          </a:p>
+        </p:txBody>
+      </p:sp>
+    </p:spTree>
+    <p:extLst>
+      <p:ext uri="{BB962C8B-B14F-4D97-AF65-F5344CB8AC3E}">
+        <p14:creationId xmlns:p14="http://schemas.microsoft.com/office/powerpoint/2010/main" val="1175383197"/>
+      </p:ext>
+    </p:extLst>
+  </p:cSld>
+  <p:clrMapOvr>
+    <a:masterClrMapping/>
+  </p:clrMapOvr>
+</p:sld>
+</file>
+
+<file path=ppt/slides/slide118.xml><?xml version="1.0" encoding="utf-8"?>
+<p:sld xmlns:a="http://schemas.openxmlformats.org/drawingml/2006/main" xmlns:r="http://schemas.openxmlformats.org/officeDocument/2006/relationships" xmlns:p="http://schemas.openxmlformats.org/presentationml/2006/main">
+  <p:cSld>
+    <p:spTree>
+      <p:nvGrpSpPr>
+        <p:cNvPr id="1" name="">
+          <a:extLst>
+            <a:ext uri="{FF2B5EF4-FFF2-40B4-BE49-F238E27FC236}">
+              <a16:creationId xmlns:a16="http://schemas.microsoft.com/office/drawing/2014/main" id="{35939055-A6EC-C53B-888C-C7A0FFC59CF5}"/>
+            </a:ext>
+          </a:extLst>
+        </p:cNvPr>
+        <p:cNvGrpSpPr/>
+        <p:nvPr/>
+      </p:nvGrpSpPr>
+      <p:grpSpPr>
+        <a:xfrm>
+          <a:off x="0" y="0"/>
+          <a:ext cx="0" cy="0"/>
+          <a:chOff x="0" y="0"/>
+          <a:chExt cx="0" cy="0"/>
+        </a:xfrm>
+      </p:grpSpPr>
+      <p:pic>
+        <p:nvPicPr>
+          <p:cNvPr id="7" name="図 6">
+            <a:extLst>
+              <a:ext uri="{FF2B5EF4-FFF2-40B4-BE49-F238E27FC236}">
+                <a16:creationId xmlns:a16="http://schemas.microsoft.com/office/drawing/2014/main" id="{9DC5916B-9368-85AB-EBAB-B90458873000}"/>
+              </a:ext>
+            </a:extLst>
+          </p:cNvPr>
+          <p:cNvPicPr>
+            <a:picLocks noChangeAspect="1"/>
+          </p:cNvPicPr>
+          <p:nvPr/>
+        </p:nvPicPr>
+        <p:blipFill>
+          <a:blip r:embed="rId2">
+            <a:extLst>
+              <a:ext uri="{28A0092B-C50C-407E-A947-70E740481C1C}">
+                <a14:useLocalDpi xmlns:a14="http://schemas.microsoft.com/office/drawing/2010/main" val="0"/>
+              </a:ext>
+            </a:extLst>
+          </a:blip>
+          <a:stretch>
+            <a:fillRect/>
+          </a:stretch>
+        </p:blipFill>
+        <p:spPr>
+          <a:xfrm>
+            <a:off x="4086225" y="1366837"/>
+            <a:ext cx="4019550" cy="4124325"/>
+          </a:xfrm>
+          <a:prstGeom prst="rect">
+            <a:avLst/>
+          </a:prstGeom>
+        </p:spPr>
+      </p:pic>
+      <p:sp>
+        <p:nvSpPr>
+          <p:cNvPr id="4" name="正方形/長方形 3">
+            <a:extLst>
+              <a:ext uri="{FF2B5EF4-FFF2-40B4-BE49-F238E27FC236}">
+                <a16:creationId xmlns:a16="http://schemas.microsoft.com/office/drawing/2014/main" id="{FB9AC71D-F56F-95A9-230F-2BAB83E5EC8D}"/>
+              </a:ext>
+            </a:extLst>
+          </p:cNvPr>
+          <p:cNvSpPr/>
+          <p:nvPr/>
+        </p:nvSpPr>
+        <p:spPr>
+          <a:xfrm flipV="1">
+            <a:off x="4492400" y="5242055"/>
+            <a:ext cx="676760" cy="239777"/>
+          </a:xfrm>
+          <a:prstGeom prst="rect">
+            <a:avLst/>
+          </a:prstGeom>
+          <a:noFill/>
+          <a:ln w="28575">
+            <a:solidFill>
+              <a:srgbClr val="FF0000"/>
+            </a:solidFill>
+          </a:ln>
+        </p:spPr>
+        <p:style>
+          <a:lnRef idx="2">
+            <a:schemeClr val="accent6"/>
+          </a:lnRef>
+          <a:fillRef idx="1">
+            <a:schemeClr val="lt1"/>
+          </a:fillRef>
+          <a:effectRef idx="0">
+            <a:schemeClr val="accent6"/>
+          </a:effectRef>
+          <a:fontRef idx="minor">
+            <a:schemeClr val="dk1"/>
+          </a:fontRef>
+        </p:style>
+        <p:txBody>
+          <a:bodyPr rtlCol="0" anchor="ctr"/>
+          <a:lstStyle/>
+          <a:p>
+            <a:pPr algn="ctr"/>
+            <a:endParaRPr kumimoji="1" lang="ja-JP" altLang="en-US"/>
+          </a:p>
+        </p:txBody>
+      </p:sp>
+    </p:spTree>
+    <p:extLst>
+      <p:ext uri="{BB962C8B-B14F-4D97-AF65-F5344CB8AC3E}">
+        <p14:creationId xmlns:p14="http://schemas.microsoft.com/office/powerpoint/2010/main" val="1229748770"/>
+      </p:ext>
+    </p:extLst>
+  </p:cSld>
+  <p:clrMapOvr>
+    <a:masterClrMapping/>
+  </p:clrMapOvr>
+</p:sld>
+</file>
+
+<file path=ppt/slides/slide119.xml><?xml version="1.0" encoding="utf-8"?>
+<p:sld xmlns:a="http://schemas.openxmlformats.org/drawingml/2006/main" xmlns:r="http://schemas.openxmlformats.org/officeDocument/2006/relationships" xmlns:p="http://schemas.openxmlformats.org/presentationml/2006/main">
+  <p:cSld>
+    <p:spTree>
+      <p:nvGrpSpPr>
+        <p:cNvPr id="1" name="">
+          <a:extLst>
+            <a:ext uri="{FF2B5EF4-FFF2-40B4-BE49-F238E27FC236}">
+              <a16:creationId xmlns:a16="http://schemas.microsoft.com/office/drawing/2014/main" id="{0143B866-BF9A-40CA-34BC-55CC59492A78}"/>
+            </a:ext>
+          </a:extLst>
+        </p:cNvPr>
+        <p:cNvGrpSpPr/>
+        <p:nvPr/>
+      </p:nvGrpSpPr>
+      <p:grpSpPr>
+        <a:xfrm>
+          <a:off x="0" y="0"/>
+          <a:ext cx="0" cy="0"/>
+          <a:chOff x="0" y="0"/>
+          <a:chExt cx="0" cy="0"/>
+        </a:xfrm>
+      </p:grpSpPr>
+      <p:pic>
+        <p:nvPicPr>
+          <p:cNvPr id="5" name="図 4">
+            <a:extLst>
+              <a:ext uri="{FF2B5EF4-FFF2-40B4-BE49-F238E27FC236}">
+                <a16:creationId xmlns:a16="http://schemas.microsoft.com/office/drawing/2014/main" id="{2CB8022C-69C4-4D55-BA78-B5F10A76C16B}"/>
+              </a:ext>
+            </a:extLst>
+          </p:cNvPr>
+          <p:cNvPicPr>
+            <a:picLocks noChangeAspect="1"/>
+          </p:cNvPicPr>
+          <p:nvPr/>
+        </p:nvPicPr>
+        <p:blipFill>
+          <a:blip r:embed="rId2">
+            <a:extLst>
+              <a:ext uri="{28A0092B-C50C-407E-A947-70E740481C1C}">
+                <a14:useLocalDpi xmlns:a14="http://schemas.microsoft.com/office/drawing/2010/main" val="0"/>
+              </a:ext>
+            </a:extLst>
+          </a:blip>
+          <a:stretch>
+            <a:fillRect/>
+          </a:stretch>
+        </p:blipFill>
+        <p:spPr>
+          <a:xfrm>
+            <a:off x="1781175" y="1328737"/>
+            <a:ext cx="8629650" cy="4200525"/>
+          </a:xfrm>
+          <a:prstGeom prst="rect">
+            <a:avLst/>
+          </a:prstGeom>
+        </p:spPr>
+      </p:pic>
+      <p:sp>
+        <p:nvSpPr>
+          <p:cNvPr id="10" name="正方形/長方形 9">
+            <a:extLst>
+              <a:ext uri="{FF2B5EF4-FFF2-40B4-BE49-F238E27FC236}">
+                <a16:creationId xmlns:a16="http://schemas.microsoft.com/office/drawing/2014/main" id="{957D965B-A67D-ACD5-2D42-ABC1C7B46B35}"/>
+              </a:ext>
+            </a:extLst>
+          </p:cNvPr>
+          <p:cNvSpPr/>
+          <p:nvPr/>
+        </p:nvSpPr>
+        <p:spPr>
+          <a:xfrm flipV="1">
+            <a:off x="5770692" y="5012808"/>
+            <a:ext cx="2272295" cy="286980"/>
+          </a:xfrm>
+          <a:prstGeom prst="rect">
+            <a:avLst/>
+          </a:prstGeom>
+          <a:noFill/>
+          <a:ln w="28575">
+            <a:solidFill>
+              <a:srgbClr val="FF0000"/>
+            </a:solidFill>
+          </a:ln>
+        </p:spPr>
+        <p:style>
+          <a:lnRef idx="2">
+            <a:schemeClr val="accent6"/>
+          </a:lnRef>
+          <a:fillRef idx="1">
+            <a:schemeClr val="lt1"/>
+          </a:fillRef>
+          <a:effectRef idx="0">
+            <a:schemeClr val="accent6"/>
+          </a:effectRef>
+          <a:fontRef idx="minor">
+            <a:schemeClr val="dk1"/>
+          </a:fontRef>
+        </p:style>
+        <p:txBody>
+          <a:bodyPr rtlCol="0" anchor="ctr"/>
+          <a:lstStyle/>
+          <a:p>
+            <a:pPr algn="ctr"/>
+            <a:endParaRPr kumimoji="1" lang="ja-JP" altLang="en-US"/>
+          </a:p>
+        </p:txBody>
+      </p:sp>
+      <p:sp>
+        <p:nvSpPr>
+          <p:cNvPr id="11" name="正方形/長方形 10">
+            <a:extLst>
+              <a:ext uri="{FF2B5EF4-FFF2-40B4-BE49-F238E27FC236}">
+                <a16:creationId xmlns:a16="http://schemas.microsoft.com/office/drawing/2014/main" id="{3745A6F7-BF32-2795-30DE-C5588FBCAA38}"/>
+              </a:ext>
+            </a:extLst>
+          </p:cNvPr>
+          <p:cNvSpPr/>
+          <p:nvPr/>
+        </p:nvSpPr>
+        <p:spPr>
+          <a:xfrm flipV="1">
+            <a:off x="8138530" y="2608622"/>
+            <a:ext cx="2143805" cy="274539"/>
+          </a:xfrm>
+          <a:prstGeom prst="rect">
+            <a:avLst/>
+          </a:prstGeom>
+          <a:noFill/>
+          <a:ln w="28575">
+            <a:solidFill>
+              <a:srgbClr val="FF0000"/>
+            </a:solidFill>
+          </a:ln>
+        </p:spPr>
+        <p:style>
+          <a:lnRef idx="2">
+            <a:schemeClr val="accent6"/>
+          </a:lnRef>
+          <a:fillRef idx="1">
+            <a:schemeClr val="lt1"/>
+          </a:fillRef>
+          <a:effectRef idx="0">
+            <a:schemeClr val="accent6"/>
+          </a:effectRef>
+          <a:fontRef idx="minor">
+            <a:schemeClr val="dk1"/>
+          </a:fontRef>
+        </p:style>
+        <p:txBody>
+          <a:bodyPr rtlCol="0" anchor="ctr"/>
+          <a:lstStyle/>
+          <a:p>
+            <a:pPr algn="ctr"/>
+            <a:endParaRPr kumimoji="1" lang="ja-JP" altLang="en-US"/>
+          </a:p>
+        </p:txBody>
+      </p:sp>
+    </p:spTree>
+    <p:extLst>
+      <p:ext uri="{BB962C8B-B14F-4D97-AF65-F5344CB8AC3E}">
+        <p14:creationId xmlns:p14="http://schemas.microsoft.com/office/powerpoint/2010/main" val="2488181164"/>
       </p:ext>
     </p:extLst>
   </p:cSld>
@@ -5218,6 +7668,1238 @@
 </p:sld>
 </file>
 
+<file path=ppt/slides/slide120.xml><?xml version="1.0" encoding="utf-8"?>
+<p:sld xmlns:a="http://schemas.openxmlformats.org/drawingml/2006/main" xmlns:r="http://schemas.openxmlformats.org/officeDocument/2006/relationships" xmlns:p="http://schemas.openxmlformats.org/presentationml/2006/main">
+  <p:cSld>
+    <p:spTree>
+      <p:nvGrpSpPr>
+        <p:cNvPr id="1" name="">
+          <a:extLst>
+            <a:ext uri="{FF2B5EF4-FFF2-40B4-BE49-F238E27FC236}">
+              <a16:creationId xmlns:a16="http://schemas.microsoft.com/office/drawing/2014/main" id="{324E939D-5C1B-B62B-7A57-A3683D8C7352}"/>
+            </a:ext>
+          </a:extLst>
+        </p:cNvPr>
+        <p:cNvGrpSpPr/>
+        <p:nvPr/>
+      </p:nvGrpSpPr>
+      <p:grpSpPr>
+        <a:xfrm>
+          <a:off x="0" y="0"/>
+          <a:ext cx="0" cy="0"/>
+          <a:chOff x="0" y="0"/>
+          <a:chExt cx="0" cy="0"/>
+        </a:xfrm>
+      </p:grpSpPr>
+      <p:pic>
+        <p:nvPicPr>
+          <p:cNvPr id="10" name="図 9">
+            <a:extLst>
+              <a:ext uri="{FF2B5EF4-FFF2-40B4-BE49-F238E27FC236}">
+                <a16:creationId xmlns:a16="http://schemas.microsoft.com/office/drawing/2014/main" id="{5711C9AC-9822-5341-2A7A-6F4619347A81}"/>
+              </a:ext>
+            </a:extLst>
+          </p:cNvPr>
+          <p:cNvPicPr>
+            <a:picLocks noChangeAspect="1"/>
+          </p:cNvPicPr>
+          <p:nvPr/>
+        </p:nvPicPr>
+        <p:blipFill>
+          <a:blip r:embed="rId2">
+            <a:extLst>
+              <a:ext uri="{28A0092B-C50C-407E-A947-70E740481C1C}">
+                <a14:useLocalDpi xmlns:a14="http://schemas.microsoft.com/office/drawing/2010/main" val="0"/>
+              </a:ext>
+            </a:extLst>
+          </a:blip>
+          <a:stretch>
+            <a:fillRect/>
+          </a:stretch>
+        </p:blipFill>
+        <p:spPr>
+          <a:xfrm>
+            <a:off x="671512" y="2466975"/>
+            <a:ext cx="10848975" cy="1924050"/>
+          </a:xfrm>
+          <a:prstGeom prst="rect">
+            <a:avLst/>
+          </a:prstGeom>
+        </p:spPr>
+      </p:pic>
+      <p:sp>
+        <p:nvSpPr>
+          <p:cNvPr id="2" name="正方形/長方形 1">
+            <a:extLst>
+              <a:ext uri="{FF2B5EF4-FFF2-40B4-BE49-F238E27FC236}">
+                <a16:creationId xmlns:a16="http://schemas.microsoft.com/office/drawing/2014/main" id="{873699D0-51FB-0F4A-DB12-F98DC278CA41}"/>
+              </a:ext>
+            </a:extLst>
+          </p:cNvPr>
+          <p:cNvSpPr/>
+          <p:nvPr/>
+        </p:nvSpPr>
+        <p:spPr>
+          <a:xfrm>
+            <a:off x="4435148" y="3247048"/>
+            <a:ext cx="914400" cy="223935"/>
+          </a:xfrm>
+          <a:prstGeom prst="rect">
+            <a:avLst/>
+          </a:prstGeom>
+        </p:spPr>
+        <p:style>
+          <a:lnRef idx="2">
+            <a:schemeClr val="dk1">
+              <a:shade val="15000"/>
+            </a:schemeClr>
+          </a:lnRef>
+          <a:fillRef idx="1">
+            <a:schemeClr val="dk1"/>
+          </a:fillRef>
+          <a:effectRef idx="0">
+            <a:schemeClr val="dk1"/>
+          </a:effectRef>
+          <a:fontRef idx="minor">
+            <a:schemeClr val="lt1"/>
+          </a:fontRef>
+        </p:style>
+        <p:txBody>
+          <a:bodyPr rtlCol="0" anchor="ctr"/>
+          <a:lstStyle/>
+          <a:p>
+            <a:pPr algn="ctr"/>
+            <a:endParaRPr kumimoji="1" lang="ja-JP" altLang="en-US"/>
+          </a:p>
+        </p:txBody>
+      </p:sp>
+      <p:sp>
+        <p:nvSpPr>
+          <p:cNvPr id="3" name="正方形/長方形 2">
+            <a:extLst>
+              <a:ext uri="{FF2B5EF4-FFF2-40B4-BE49-F238E27FC236}">
+                <a16:creationId xmlns:a16="http://schemas.microsoft.com/office/drawing/2014/main" id="{EB24DB6D-E800-38A7-00CF-FAFCF53CEF0B}"/>
+              </a:ext>
+            </a:extLst>
+          </p:cNvPr>
+          <p:cNvSpPr/>
+          <p:nvPr/>
+        </p:nvSpPr>
+        <p:spPr>
+          <a:xfrm>
+            <a:off x="4435146" y="3750906"/>
+            <a:ext cx="914400" cy="223935"/>
+          </a:xfrm>
+          <a:prstGeom prst="rect">
+            <a:avLst/>
+          </a:prstGeom>
+        </p:spPr>
+        <p:style>
+          <a:lnRef idx="2">
+            <a:schemeClr val="dk1">
+              <a:shade val="15000"/>
+            </a:schemeClr>
+          </a:lnRef>
+          <a:fillRef idx="1">
+            <a:schemeClr val="dk1"/>
+          </a:fillRef>
+          <a:effectRef idx="0">
+            <a:schemeClr val="dk1"/>
+          </a:effectRef>
+          <a:fontRef idx="minor">
+            <a:schemeClr val="lt1"/>
+          </a:fontRef>
+        </p:style>
+        <p:txBody>
+          <a:bodyPr rtlCol="0" anchor="ctr"/>
+          <a:lstStyle/>
+          <a:p>
+            <a:pPr algn="ctr"/>
+            <a:endParaRPr kumimoji="1" lang="ja-JP" altLang="en-US"/>
+          </a:p>
+        </p:txBody>
+      </p:sp>
+      <p:sp>
+        <p:nvSpPr>
+          <p:cNvPr id="4" name="正方形/長方形 3">
+            <a:extLst>
+              <a:ext uri="{FF2B5EF4-FFF2-40B4-BE49-F238E27FC236}">
+                <a16:creationId xmlns:a16="http://schemas.microsoft.com/office/drawing/2014/main" id="{6AEAF9A6-727B-1BA1-AEA7-DE5713313A34}"/>
+              </a:ext>
+            </a:extLst>
+          </p:cNvPr>
+          <p:cNvSpPr/>
+          <p:nvPr/>
+        </p:nvSpPr>
+        <p:spPr>
+          <a:xfrm flipV="1">
+            <a:off x="4318228" y="2960067"/>
+            <a:ext cx="7046456" cy="510915"/>
+          </a:xfrm>
+          <a:prstGeom prst="rect">
+            <a:avLst/>
+          </a:prstGeom>
+          <a:noFill/>
+          <a:ln w="28575">
+            <a:solidFill>
+              <a:srgbClr val="FF0000"/>
+            </a:solidFill>
+          </a:ln>
+        </p:spPr>
+        <p:style>
+          <a:lnRef idx="2">
+            <a:schemeClr val="accent6"/>
+          </a:lnRef>
+          <a:fillRef idx="1">
+            <a:schemeClr val="lt1"/>
+          </a:fillRef>
+          <a:effectRef idx="0">
+            <a:schemeClr val="accent6"/>
+          </a:effectRef>
+          <a:fontRef idx="minor">
+            <a:schemeClr val="dk1"/>
+          </a:fontRef>
+        </p:style>
+        <p:txBody>
+          <a:bodyPr rtlCol="0" anchor="ctr"/>
+          <a:lstStyle/>
+          <a:p>
+            <a:pPr algn="ctr"/>
+            <a:endParaRPr kumimoji="1" lang="ja-JP" altLang="en-US"/>
+          </a:p>
+        </p:txBody>
+      </p:sp>
+    </p:spTree>
+    <p:extLst>
+      <p:ext uri="{BB962C8B-B14F-4D97-AF65-F5344CB8AC3E}">
+        <p14:creationId xmlns:p14="http://schemas.microsoft.com/office/powerpoint/2010/main" val="638310228"/>
+      </p:ext>
+    </p:extLst>
+  </p:cSld>
+  <p:clrMapOvr>
+    <a:masterClrMapping/>
+  </p:clrMapOvr>
+</p:sld>
+</file>
+
+<file path=ppt/slides/slide121.xml><?xml version="1.0" encoding="utf-8"?>
+<p:sld xmlns:a="http://schemas.openxmlformats.org/drawingml/2006/main" xmlns:r="http://schemas.openxmlformats.org/officeDocument/2006/relationships" xmlns:p="http://schemas.openxmlformats.org/presentationml/2006/main">
+  <p:cSld>
+    <p:spTree>
+      <p:nvGrpSpPr>
+        <p:cNvPr id="1" name="">
+          <a:extLst>
+            <a:ext uri="{FF2B5EF4-FFF2-40B4-BE49-F238E27FC236}">
+              <a16:creationId xmlns:a16="http://schemas.microsoft.com/office/drawing/2014/main" id="{8721F151-66D6-FDE3-946B-D2FCF8090F5F}"/>
+            </a:ext>
+          </a:extLst>
+        </p:cNvPr>
+        <p:cNvGrpSpPr/>
+        <p:nvPr/>
+      </p:nvGrpSpPr>
+      <p:grpSpPr>
+        <a:xfrm>
+          <a:off x="0" y="0"/>
+          <a:ext cx="0" cy="0"/>
+          <a:chOff x="0" y="0"/>
+          <a:chExt cx="0" cy="0"/>
+        </a:xfrm>
+      </p:grpSpPr>
+      <p:pic>
+        <p:nvPicPr>
+          <p:cNvPr id="9" name="図 8">
+            <a:extLst>
+              <a:ext uri="{FF2B5EF4-FFF2-40B4-BE49-F238E27FC236}">
+                <a16:creationId xmlns:a16="http://schemas.microsoft.com/office/drawing/2014/main" id="{52E01105-4A77-DFD5-3738-EF6637598504}"/>
+              </a:ext>
+            </a:extLst>
+          </p:cNvPr>
+          <p:cNvPicPr>
+            <a:picLocks noChangeAspect="1"/>
+          </p:cNvPicPr>
+          <p:nvPr/>
+        </p:nvPicPr>
+        <p:blipFill>
+          <a:blip r:embed="rId2">
+            <a:extLst>
+              <a:ext uri="{28A0092B-C50C-407E-A947-70E740481C1C}">
+                <a14:useLocalDpi xmlns:a14="http://schemas.microsoft.com/office/drawing/2010/main" val="0"/>
+              </a:ext>
+            </a:extLst>
+          </a:blip>
+          <a:stretch>
+            <a:fillRect/>
+          </a:stretch>
+        </p:blipFill>
+        <p:spPr>
+          <a:xfrm>
+            <a:off x="3600412" y="2976525"/>
+            <a:ext cx="5591175" cy="1504950"/>
+          </a:xfrm>
+          <a:prstGeom prst="rect">
+            <a:avLst/>
+          </a:prstGeom>
+        </p:spPr>
+      </p:pic>
+      <p:sp>
+        <p:nvSpPr>
+          <p:cNvPr id="2" name="正方形/長方形 1">
+            <a:extLst>
+              <a:ext uri="{FF2B5EF4-FFF2-40B4-BE49-F238E27FC236}">
+                <a16:creationId xmlns:a16="http://schemas.microsoft.com/office/drawing/2014/main" id="{EFE82D26-2444-353C-EC7D-AF29EB82606C}"/>
+              </a:ext>
+            </a:extLst>
+          </p:cNvPr>
+          <p:cNvSpPr/>
+          <p:nvPr/>
+        </p:nvSpPr>
+        <p:spPr>
+          <a:xfrm flipV="1">
+            <a:off x="3628405" y="2976525"/>
+            <a:ext cx="5510952" cy="1250242"/>
+          </a:xfrm>
+          <a:prstGeom prst="rect">
+            <a:avLst/>
+          </a:prstGeom>
+          <a:noFill/>
+          <a:ln w="28575">
+            <a:solidFill>
+              <a:srgbClr val="FF0000"/>
+            </a:solidFill>
+          </a:ln>
+        </p:spPr>
+        <p:style>
+          <a:lnRef idx="2">
+            <a:schemeClr val="accent6"/>
+          </a:lnRef>
+          <a:fillRef idx="1">
+            <a:schemeClr val="lt1"/>
+          </a:fillRef>
+          <a:effectRef idx="0">
+            <a:schemeClr val="accent6"/>
+          </a:effectRef>
+          <a:fontRef idx="minor">
+            <a:schemeClr val="dk1"/>
+          </a:fontRef>
+        </p:style>
+        <p:txBody>
+          <a:bodyPr rtlCol="0" anchor="ctr"/>
+          <a:lstStyle/>
+          <a:p>
+            <a:pPr algn="ctr"/>
+            <a:endParaRPr kumimoji="1" lang="ja-JP" altLang="en-US"/>
+          </a:p>
+        </p:txBody>
+      </p:sp>
+    </p:spTree>
+    <p:extLst>
+      <p:ext uri="{BB962C8B-B14F-4D97-AF65-F5344CB8AC3E}">
+        <p14:creationId xmlns:p14="http://schemas.microsoft.com/office/powerpoint/2010/main" val="49707847"/>
+      </p:ext>
+    </p:extLst>
+  </p:cSld>
+  <p:clrMapOvr>
+    <a:masterClrMapping/>
+  </p:clrMapOvr>
+</p:sld>
+</file>
+
+<file path=ppt/slides/slide122.xml><?xml version="1.0" encoding="utf-8"?>
+<p:sld xmlns:a="http://schemas.openxmlformats.org/drawingml/2006/main" xmlns:r="http://schemas.openxmlformats.org/officeDocument/2006/relationships" xmlns:p="http://schemas.openxmlformats.org/presentationml/2006/main">
+  <p:cSld>
+    <p:spTree>
+      <p:nvGrpSpPr>
+        <p:cNvPr id="1" name="">
+          <a:extLst>
+            <a:ext uri="{FF2B5EF4-FFF2-40B4-BE49-F238E27FC236}">
+              <a16:creationId xmlns:a16="http://schemas.microsoft.com/office/drawing/2014/main" id="{9C8FCF57-D75B-2BE1-AF4D-21E9B46D67BC}"/>
+            </a:ext>
+          </a:extLst>
+        </p:cNvPr>
+        <p:cNvGrpSpPr/>
+        <p:nvPr/>
+      </p:nvGrpSpPr>
+      <p:grpSpPr>
+        <a:xfrm>
+          <a:off x="0" y="0"/>
+          <a:ext cx="0" cy="0"/>
+          <a:chOff x="0" y="0"/>
+          <a:chExt cx="0" cy="0"/>
+        </a:xfrm>
+      </p:grpSpPr>
+    </p:spTree>
+    <p:extLst>
+      <p:ext uri="{BB962C8B-B14F-4D97-AF65-F5344CB8AC3E}">
+        <p14:creationId xmlns:p14="http://schemas.microsoft.com/office/powerpoint/2010/main" val="3781842566"/>
+      </p:ext>
+    </p:extLst>
+  </p:cSld>
+  <p:clrMapOvr>
+    <a:masterClrMapping/>
+  </p:clrMapOvr>
+</p:sld>
+</file>
+
+<file path=ppt/slides/slide123.xml><?xml version="1.0" encoding="utf-8"?>
+<p:sld xmlns:a="http://schemas.openxmlformats.org/drawingml/2006/main" xmlns:r="http://schemas.openxmlformats.org/officeDocument/2006/relationships" xmlns:p="http://schemas.openxmlformats.org/presentationml/2006/main">
+  <p:cSld>
+    <p:spTree>
+      <p:nvGrpSpPr>
+        <p:cNvPr id="1" name="">
+          <a:extLst>
+            <a:ext uri="{FF2B5EF4-FFF2-40B4-BE49-F238E27FC236}">
+              <a16:creationId xmlns:a16="http://schemas.microsoft.com/office/drawing/2014/main" id="{C03AFA2F-85E4-42F0-2B1F-CC1346CC79A1}"/>
+            </a:ext>
+          </a:extLst>
+        </p:cNvPr>
+        <p:cNvGrpSpPr/>
+        <p:nvPr/>
+      </p:nvGrpSpPr>
+      <p:grpSpPr>
+        <a:xfrm>
+          <a:off x="0" y="0"/>
+          <a:ext cx="0" cy="0"/>
+          <a:chOff x="0" y="0"/>
+          <a:chExt cx="0" cy="0"/>
+        </a:xfrm>
+      </p:grpSpPr>
+    </p:spTree>
+    <p:extLst>
+      <p:ext uri="{BB962C8B-B14F-4D97-AF65-F5344CB8AC3E}">
+        <p14:creationId xmlns:p14="http://schemas.microsoft.com/office/powerpoint/2010/main" val="887096851"/>
+      </p:ext>
+    </p:extLst>
+  </p:cSld>
+  <p:clrMapOvr>
+    <a:masterClrMapping/>
+  </p:clrMapOvr>
+</p:sld>
+</file>
+
+<file path=ppt/slides/slide124.xml><?xml version="1.0" encoding="utf-8"?>
+<p:sld xmlns:a="http://schemas.openxmlformats.org/drawingml/2006/main" xmlns:r="http://schemas.openxmlformats.org/officeDocument/2006/relationships" xmlns:p="http://schemas.openxmlformats.org/presentationml/2006/main">
+  <p:cSld>
+    <p:spTree>
+      <p:nvGrpSpPr>
+        <p:cNvPr id="1" name="">
+          <a:extLst>
+            <a:ext uri="{FF2B5EF4-FFF2-40B4-BE49-F238E27FC236}">
+              <a16:creationId xmlns:a16="http://schemas.microsoft.com/office/drawing/2014/main" id="{24D75C8D-5A73-52CE-E878-96625523380A}"/>
+            </a:ext>
+          </a:extLst>
+        </p:cNvPr>
+        <p:cNvGrpSpPr/>
+        <p:nvPr/>
+      </p:nvGrpSpPr>
+      <p:grpSpPr>
+        <a:xfrm>
+          <a:off x="0" y="0"/>
+          <a:ext cx="0" cy="0"/>
+          <a:chOff x="0" y="0"/>
+          <a:chExt cx="0" cy="0"/>
+        </a:xfrm>
+      </p:grpSpPr>
+      <p:pic>
+        <p:nvPicPr>
+          <p:cNvPr id="2" name="図 1">
+            <a:extLst>
+              <a:ext uri="{FF2B5EF4-FFF2-40B4-BE49-F238E27FC236}">
+                <a16:creationId xmlns:a16="http://schemas.microsoft.com/office/drawing/2014/main" id="{ADC037B2-570A-6D03-E80F-BF07620D5E35}"/>
+              </a:ext>
+            </a:extLst>
+          </p:cNvPr>
+          <p:cNvPicPr>
+            <a:picLocks noChangeAspect="1"/>
+          </p:cNvPicPr>
+          <p:nvPr/>
+        </p:nvPicPr>
+        <p:blipFill>
+          <a:blip r:embed="rId2">
+            <a:extLst>
+              <a:ext uri="{28A0092B-C50C-407E-A947-70E740481C1C}">
+                <a14:useLocalDpi xmlns:a14="http://schemas.microsoft.com/office/drawing/2010/main" val="0"/>
+              </a:ext>
+            </a:extLst>
+          </a:blip>
+          <a:stretch>
+            <a:fillRect/>
+          </a:stretch>
+        </p:blipFill>
+        <p:spPr>
+          <a:xfrm>
+            <a:off x="4095750" y="1838325"/>
+            <a:ext cx="4000500" cy="3181350"/>
+          </a:xfrm>
+          <a:prstGeom prst="rect">
+            <a:avLst/>
+          </a:prstGeom>
+        </p:spPr>
+      </p:pic>
+      <p:sp>
+        <p:nvSpPr>
+          <p:cNvPr id="3" name="正方形/長方形 2">
+            <a:extLst>
+              <a:ext uri="{FF2B5EF4-FFF2-40B4-BE49-F238E27FC236}">
+                <a16:creationId xmlns:a16="http://schemas.microsoft.com/office/drawing/2014/main" id="{916477A9-F2AF-D68B-0BC2-AC57750BC3CE}"/>
+              </a:ext>
+            </a:extLst>
+          </p:cNvPr>
+          <p:cNvSpPr/>
+          <p:nvPr/>
+        </p:nvSpPr>
+        <p:spPr>
+          <a:xfrm flipV="1">
+            <a:off x="4119175" y="3426603"/>
+            <a:ext cx="432000" cy="432000"/>
+          </a:xfrm>
+          <a:prstGeom prst="rect">
+            <a:avLst/>
+          </a:prstGeom>
+          <a:noFill/>
+          <a:ln w="28575">
+            <a:solidFill>
+              <a:srgbClr val="FF0000"/>
+            </a:solidFill>
+          </a:ln>
+        </p:spPr>
+        <p:style>
+          <a:lnRef idx="2">
+            <a:schemeClr val="accent6"/>
+          </a:lnRef>
+          <a:fillRef idx="1">
+            <a:schemeClr val="lt1"/>
+          </a:fillRef>
+          <a:effectRef idx="0">
+            <a:schemeClr val="accent6"/>
+          </a:effectRef>
+          <a:fontRef idx="minor">
+            <a:schemeClr val="dk1"/>
+          </a:fontRef>
+        </p:style>
+        <p:txBody>
+          <a:bodyPr rtlCol="0" anchor="ctr"/>
+          <a:lstStyle/>
+          <a:p>
+            <a:pPr algn="ctr"/>
+            <a:endParaRPr kumimoji="1" lang="ja-JP" altLang="en-US"/>
+          </a:p>
+        </p:txBody>
+      </p:sp>
+    </p:spTree>
+    <p:extLst>
+      <p:ext uri="{BB962C8B-B14F-4D97-AF65-F5344CB8AC3E}">
+        <p14:creationId xmlns:p14="http://schemas.microsoft.com/office/powerpoint/2010/main" val="2155091631"/>
+      </p:ext>
+    </p:extLst>
+  </p:cSld>
+  <p:clrMapOvr>
+    <a:masterClrMapping/>
+  </p:clrMapOvr>
+</p:sld>
+</file>
+
+<file path=ppt/slides/slide125.xml><?xml version="1.0" encoding="utf-8"?>
+<p:sld xmlns:a="http://schemas.openxmlformats.org/drawingml/2006/main" xmlns:r="http://schemas.openxmlformats.org/officeDocument/2006/relationships" xmlns:p="http://schemas.openxmlformats.org/presentationml/2006/main">
+  <p:cSld>
+    <p:spTree>
+      <p:nvGrpSpPr>
+        <p:cNvPr id="1" name="">
+          <a:extLst>
+            <a:ext uri="{FF2B5EF4-FFF2-40B4-BE49-F238E27FC236}">
+              <a16:creationId xmlns:a16="http://schemas.microsoft.com/office/drawing/2014/main" id="{C271332C-4CDE-9C43-848B-B33DDD66CDB6}"/>
+            </a:ext>
+          </a:extLst>
+        </p:cNvPr>
+        <p:cNvGrpSpPr/>
+        <p:nvPr/>
+      </p:nvGrpSpPr>
+      <p:grpSpPr>
+        <a:xfrm>
+          <a:off x="0" y="0"/>
+          <a:ext cx="0" cy="0"/>
+          <a:chOff x="0" y="0"/>
+          <a:chExt cx="0" cy="0"/>
+        </a:xfrm>
+      </p:grpSpPr>
+      <p:pic>
+        <p:nvPicPr>
+          <p:cNvPr id="3" name="図 2">
+            <a:extLst>
+              <a:ext uri="{FF2B5EF4-FFF2-40B4-BE49-F238E27FC236}">
+                <a16:creationId xmlns:a16="http://schemas.microsoft.com/office/drawing/2014/main" id="{21ABFEF9-6905-BB44-FEC9-C7AE57B0E10E}"/>
+              </a:ext>
+            </a:extLst>
+          </p:cNvPr>
+          <p:cNvPicPr>
+            <a:picLocks noChangeAspect="1"/>
+          </p:cNvPicPr>
+          <p:nvPr/>
+        </p:nvPicPr>
+        <p:blipFill>
+          <a:blip r:embed="rId2">
+            <a:extLst>
+              <a:ext uri="{28A0092B-C50C-407E-A947-70E740481C1C}">
+                <a14:useLocalDpi xmlns:a14="http://schemas.microsoft.com/office/drawing/2010/main" val="0"/>
+              </a:ext>
+            </a:extLst>
+          </a:blip>
+          <a:stretch>
+            <a:fillRect/>
+          </a:stretch>
+        </p:blipFill>
+        <p:spPr>
+          <a:xfrm>
+            <a:off x="4062412" y="2000250"/>
+            <a:ext cx="4067175" cy="2857500"/>
+          </a:xfrm>
+          <a:prstGeom prst="rect">
+            <a:avLst/>
+          </a:prstGeom>
+        </p:spPr>
+      </p:pic>
+      <p:sp>
+        <p:nvSpPr>
+          <p:cNvPr id="4" name="正方形/長方形 3">
+            <a:extLst>
+              <a:ext uri="{FF2B5EF4-FFF2-40B4-BE49-F238E27FC236}">
+                <a16:creationId xmlns:a16="http://schemas.microsoft.com/office/drawing/2014/main" id="{0976FBC9-9102-6DF7-353F-136BDB55F8AA}"/>
+              </a:ext>
+            </a:extLst>
+          </p:cNvPr>
+          <p:cNvSpPr/>
+          <p:nvPr/>
+        </p:nvSpPr>
+        <p:spPr>
+          <a:xfrm flipV="1">
+            <a:off x="4567045" y="4197026"/>
+            <a:ext cx="3562542" cy="309659"/>
+          </a:xfrm>
+          <a:prstGeom prst="rect">
+            <a:avLst/>
+          </a:prstGeom>
+          <a:noFill/>
+          <a:ln w="28575">
+            <a:solidFill>
+              <a:srgbClr val="FF0000"/>
+            </a:solidFill>
+          </a:ln>
+        </p:spPr>
+        <p:style>
+          <a:lnRef idx="2">
+            <a:schemeClr val="accent6"/>
+          </a:lnRef>
+          <a:fillRef idx="1">
+            <a:schemeClr val="lt1"/>
+          </a:fillRef>
+          <a:effectRef idx="0">
+            <a:schemeClr val="accent6"/>
+          </a:effectRef>
+          <a:fontRef idx="minor">
+            <a:schemeClr val="dk1"/>
+          </a:fontRef>
+        </p:style>
+        <p:txBody>
+          <a:bodyPr rtlCol="0" anchor="ctr"/>
+          <a:lstStyle/>
+          <a:p>
+            <a:pPr algn="ctr"/>
+            <a:endParaRPr kumimoji="1" lang="ja-JP" altLang="en-US"/>
+          </a:p>
+        </p:txBody>
+      </p:sp>
+      <p:sp>
+        <p:nvSpPr>
+          <p:cNvPr id="6" name="正方形/長方形 5">
+            <a:extLst>
+              <a:ext uri="{FF2B5EF4-FFF2-40B4-BE49-F238E27FC236}">
+                <a16:creationId xmlns:a16="http://schemas.microsoft.com/office/drawing/2014/main" id="{96DE9728-0D2E-3058-FDA1-1EB30DCC75F3}"/>
+              </a:ext>
+            </a:extLst>
+          </p:cNvPr>
+          <p:cNvSpPr/>
+          <p:nvPr/>
+        </p:nvSpPr>
+        <p:spPr>
+          <a:xfrm>
+            <a:off x="6226624" y="2986672"/>
+            <a:ext cx="789997" cy="195068"/>
+          </a:xfrm>
+          <a:prstGeom prst="rect">
+            <a:avLst/>
+          </a:prstGeom>
+        </p:spPr>
+        <p:style>
+          <a:lnRef idx="2">
+            <a:schemeClr val="dk1">
+              <a:shade val="15000"/>
+            </a:schemeClr>
+          </a:lnRef>
+          <a:fillRef idx="1">
+            <a:schemeClr val="dk1"/>
+          </a:fillRef>
+          <a:effectRef idx="0">
+            <a:schemeClr val="dk1"/>
+          </a:effectRef>
+          <a:fontRef idx="minor">
+            <a:schemeClr val="lt1"/>
+          </a:fontRef>
+        </p:style>
+        <p:txBody>
+          <a:bodyPr rtlCol="0" anchor="ctr"/>
+          <a:lstStyle/>
+          <a:p>
+            <a:pPr algn="ctr"/>
+            <a:endParaRPr kumimoji="1" lang="ja-JP" altLang="en-US"/>
+          </a:p>
+        </p:txBody>
+      </p:sp>
+    </p:spTree>
+    <p:extLst>
+      <p:ext uri="{BB962C8B-B14F-4D97-AF65-F5344CB8AC3E}">
+        <p14:creationId xmlns:p14="http://schemas.microsoft.com/office/powerpoint/2010/main" val="785930039"/>
+      </p:ext>
+    </p:extLst>
+  </p:cSld>
+  <p:clrMapOvr>
+    <a:masterClrMapping/>
+  </p:clrMapOvr>
+</p:sld>
+</file>
+
+<file path=ppt/slides/slide126.xml><?xml version="1.0" encoding="utf-8"?>
+<p:sld xmlns:a="http://schemas.openxmlformats.org/drawingml/2006/main" xmlns:r="http://schemas.openxmlformats.org/officeDocument/2006/relationships" xmlns:p="http://schemas.openxmlformats.org/presentationml/2006/main">
+  <p:cSld>
+    <p:spTree>
+      <p:nvGrpSpPr>
+        <p:cNvPr id="1" name="">
+          <a:extLst>
+            <a:ext uri="{FF2B5EF4-FFF2-40B4-BE49-F238E27FC236}">
+              <a16:creationId xmlns:a16="http://schemas.microsoft.com/office/drawing/2014/main" id="{44213A13-0E67-F602-0AA2-4B88632C7E97}"/>
+            </a:ext>
+          </a:extLst>
+        </p:cNvPr>
+        <p:cNvGrpSpPr/>
+        <p:nvPr/>
+      </p:nvGrpSpPr>
+      <p:grpSpPr>
+        <a:xfrm>
+          <a:off x="0" y="0"/>
+          <a:ext cx="0" cy="0"/>
+          <a:chOff x="0" y="0"/>
+          <a:chExt cx="0" cy="0"/>
+        </a:xfrm>
+      </p:grpSpPr>
+      <p:pic>
+        <p:nvPicPr>
+          <p:cNvPr id="3" name="図 2">
+            <a:extLst>
+              <a:ext uri="{FF2B5EF4-FFF2-40B4-BE49-F238E27FC236}">
+                <a16:creationId xmlns:a16="http://schemas.microsoft.com/office/drawing/2014/main" id="{ADA48059-A9E2-24F8-B90A-CE06DDF717B1}"/>
+              </a:ext>
+            </a:extLst>
+          </p:cNvPr>
+          <p:cNvPicPr>
+            <a:picLocks noChangeAspect="1"/>
+          </p:cNvPicPr>
+          <p:nvPr/>
+        </p:nvPicPr>
+        <p:blipFill>
+          <a:blip r:embed="rId2">
+            <a:extLst>
+              <a:ext uri="{28A0092B-C50C-407E-A947-70E740481C1C}">
+                <a14:useLocalDpi xmlns:a14="http://schemas.microsoft.com/office/drawing/2010/main" val="0"/>
+              </a:ext>
+            </a:extLst>
+          </a:blip>
+          <a:stretch>
+            <a:fillRect/>
+          </a:stretch>
+        </p:blipFill>
+        <p:spPr>
+          <a:xfrm>
+            <a:off x="1371600" y="2114550"/>
+            <a:ext cx="9448800" cy="2628900"/>
+          </a:xfrm>
+          <a:prstGeom prst="rect">
+            <a:avLst/>
+          </a:prstGeom>
+        </p:spPr>
+      </p:pic>
+    </p:spTree>
+    <p:extLst>
+      <p:ext uri="{BB962C8B-B14F-4D97-AF65-F5344CB8AC3E}">
+        <p14:creationId xmlns:p14="http://schemas.microsoft.com/office/powerpoint/2010/main" val="1884917529"/>
+      </p:ext>
+    </p:extLst>
+  </p:cSld>
+  <p:clrMapOvr>
+    <a:masterClrMapping/>
+  </p:clrMapOvr>
+</p:sld>
+</file>
+
+<file path=ppt/slides/slide127.xml><?xml version="1.0" encoding="utf-8"?>
+<p:sld xmlns:a="http://schemas.openxmlformats.org/drawingml/2006/main" xmlns:r="http://schemas.openxmlformats.org/officeDocument/2006/relationships" xmlns:p="http://schemas.openxmlformats.org/presentationml/2006/main">
+  <p:cSld>
+    <p:spTree>
+      <p:nvGrpSpPr>
+        <p:cNvPr id="1" name="">
+          <a:extLst>
+            <a:ext uri="{FF2B5EF4-FFF2-40B4-BE49-F238E27FC236}">
+              <a16:creationId xmlns:a16="http://schemas.microsoft.com/office/drawing/2014/main" id="{8F5BBE21-9588-2294-23F3-2B3A90D6A40D}"/>
+            </a:ext>
+          </a:extLst>
+        </p:cNvPr>
+        <p:cNvGrpSpPr/>
+        <p:nvPr/>
+      </p:nvGrpSpPr>
+      <p:grpSpPr>
+        <a:xfrm>
+          <a:off x="0" y="0"/>
+          <a:ext cx="0" cy="0"/>
+          <a:chOff x="0" y="0"/>
+          <a:chExt cx="0" cy="0"/>
+        </a:xfrm>
+      </p:grpSpPr>
+      <p:pic>
+        <p:nvPicPr>
+          <p:cNvPr id="3" name="図 2">
+            <a:extLst>
+              <a:ext uri="{FF2B5EF4-FFF2-40B4-BE49-F238E27FC236}">
+                <a16:creationId xmlns:a16="http://schemas.microsoft.com/office/drawing/2014/main" id="{ABE071D5-DB49-D056-C197-AC2B1BBFA856}"/>
+              </a:ext>
+            </a:extLst>
+          </p:cNvPr>
+          <p:cNvPicPr>
+            <a:picLocks noChangeAspect="1"/>
+          </p:cNvPicPr>
+          <p:nvPr/>
+        </p:nvPicPr>
+        <p:blipFill>
+          <a:blip r:embed="rId2">
+            <a:extLst>
+              <a:ext uri="{28A0092B-C50C-407E-A947-70E740481C1C}">
+                <a14:useLocalDpi xmlns:a14="http://schemas.microsoft.com/office/drawing/2010/main" val="0"/>
+              </a:ext>
+            </a:extLst>
+          </a:blip>
+          <a:stretch>
+            <a:fillRect/>
+          </a:stretch>
+        </p:blipFill>
+        <p:spPr>
+          <a:xfrm>
+            <a:off x="1623916" y="3037405"/>
+            <a:ext cx="9448800" cy="2628900"/>
+          </a:xfrm>
+          <a:prstGeom prst="rect">
+            <a:avLst/>
+          </a:prstGeom>
+        </p:spPr>
+      </p:pic>
+      <p:sp>
+        <p:nvSpPr>
+          <p:cNvPr id="2" name="正方形/長方形 1">
+            <a:extLst>
+              <a:ext uri="{FF2B5EF4-FFF2-40B4-BE49-F238E27FC236}">
+                <a16:creationId xmlns:a16="http://schemas.microsoft.com/office/drawing/2014/main" id="{0DD78FC3-12A8-5134-4A86-12397F6AC6B7}"/>
+              </a:ext>
+            </a:extLst>
+          </p:cNvPr>
+          <p:cNvSpPr/>
+          <p:nvPr/>
+        </p:nvSpPr>
+        <p:spPr>
+          <a:xfrm flipV="1">
+            <a:off x="2346359" y="3655851"/>
+            <a:ext cx="5202106" cy="253676"/>
+          </a:xfrm>
+          <a:prstGeom prst="rect">
+            <a:avLst/>
+          </a:prstGeom>
+          <a:noFill/>
+          <a:ln w="28575">
+            <a:solidFill>
+              <a:srgbClr val="FF0000"/>
+            </a:solidFill>
+          </a:ln>
+        </p:spPr>
+        <p:style>
+          <a:lnRef idx="2">
+            <a:schemeClr val="accent6"/>
+          </a:lnRef>
+          <a:fillRef idx="1">
+            <a:schemeClr val="lt1"/>
+          </a:fillRef>
+          <a:effectRef idx="0">
+            <a:schemeClr val="accent6"/>
+          </a:effectRef>
+          <a:fontRef idx="minor">
+            <a:schemeClr val="dk1"/>
+          </a:fontRef>
+        </p:style>
+        <p:txBody>
+          <a:bodyPr rtlCol="0" anchor="ctr"/>
+          <a:lstStyle/>
+          <a:p>
+            <a:pPr algn="ctr"/>
+            <a:endParaRPr kumimoji="1" lang="ja-JP" altLang="en-US"/>
+          </a:p>
+        </p:txBody>
+      </p:sp>
+    </p:spTree>
+    <p:extLst>
+      <p:ext uri="{BB962C8B-B14F-4D97-AF65-F5344CB8AC3E}">
+        <p14:creationId xmlns:p14="http://schemas.microsoft.com/office/powerpoint/2010/main" val="3721798521"/>
+      </p:ext>
+    </p:extLst>
+  </p:cSld>
+  <p:clrMapOvr>
+    <a:masterClrMapping/>
+  </p:clrMapOvr>
+</p:sld>
+</file>
+
+<file path=ppt/slides/slide128.xml><?xml version="1.0" encoding="utf-8"?>
+<p:sld xmlns:a="http://schemas.openxmlformats.org/drawingml/2006/main" xmlns:r="http://schemas.openxmlformats.org/officeDocument/2006/relationships" xmlns:p="http://schemas.openxmlformats.org/presentationml/2006/main">
+  <p:cSld>
+    <p:spTree>
+      <p:nvGrpSpPr>
+        <p:cNvPr id="1" name="">
+          <a:extLst>
+            <a:ext uri="{FF2B5EF4-FFF2-40B4-BE49-F238E27FC236}">
+              <a16:creationId xmlns:a16="http://schemas.microsoft.com/office/drawing/2014/main" id="{DF3EC184-A1C0-9270-C238-BD9256A2CA88}"/>
+            </a:ext>
+          </a:extLst>
+        </p:cNvPr>
+        <p:cNvGrpSpPr/>
+        <p:nvPr/>
+      </p:nvGrpSpPr>
+      <p:grpSpPr>
+        <a:xfrm>
+          <a:off x="0" y="0"/>
+          <a:ext cx="0" cy="0"/>
+          <a:chOff x="0" y="0"/>
+          <a:chExt cx="0" cy="0"/>
+        </a:xfrm>
+      </p:grpSpPr>
+      <p:pic>
+        <p:nvPicPr>
+          <p:cNvPr id="7" name="図 6">
+            <a:extLst>
+              <a:ext uri="{FF2B5EF4-FFF2-40B4-BE49-F238E27FC236}">
+                <a16:creationId xmlns:a16="http://schemas.microsoft.com/office/drawing/2014/main" id="{D1083CF1-9B23-C3AF-62C8-25DFF304C1D6}"/>
+              </a:ext>
+            </a:extLst>
+          </p:cNvPr>
+          <p:cNvPicPr>
+            <a:picLocks noChangeAspect="1"/>
+          </p:cNvPicPr>
+          <p:nvPr/>
+        </p:nvPicPr>
+        <p:blipFill>
+          <a:blip r:embed="rId2">
+            <a:extLst>
+              <a:ext uri="{28A0092B-C50C-407E-A947-70E740481C1C}">
+                <a14:useLocalDpi xmlns:a14="http://schemas.microsoft.com/office/drawing/2010/main" val="0"/>
+              </a:ext>
+            </a:extLst>
+          </a:blip>
+          <a:stretch>
+            <a:fillRect/>
+          </a:stretch>
+        </p:blipFill>
+        <p:spPr>
+          <a:xfrm>
+            <a:off x="4257675" y="2576512"/>
+            <a:ext cx="3676650" cy="1704975"/>
+          </a:xfrm>
+          <a:prstGeom prst="rect">
+            <a:avLst/>
+          </a:prstGeom>
+        </p:spPr>
+      </p:pic>
+      <p:sp>
+        <p:nvSpPr>
+          <p:cNvPr id="4" name="正方形/長方形 3">
+            <a:extLst>
+              <a:ext uri="{FF2B5EF4-FFF2-40B4-BE49-F238E27FC236}">
+                <a16:creationId xmlns:a16="http://schemas.microsoft.com/office/drawing/2014/main" id="{69905C48-E9D9-3059-83D1-13E8BAB5B20F}"/>
+              </a:ext>
+            </a:extLst>
+          </p:cNvPr>
+          <p:cNvSpPr/>
+          <p:nvPr/>
+        </p:nvSpPr>
+        <p:spPr>
+          <a:xfrm flipV="1">
+            <a:off x="4427084" y="2981129"/>
+            <a:ext cx="2393593" cy="993712"/>
+          </a:xfrm>
+          <a:prstGeom prst="rect">
+            <a:avLst/>
+          </a:prstGeom>
+          <a:noFill/>
+          <a:ln w="28575">
+            <a:solidFill>
+              <a:srgbClr val="FF0000"/>
+            </a:solidFill>
+          </a:ln>
+        </p:spPr>
+        <p:style>
+          <a:lnRef idx="2">
+            <a:schemeClr val="accent6"/>
+          </a:lnRef>
+          <a:fillRef idx="1">
+            <a:schemeClr val="lt1"/>
+          </a:fillRef>
+          <a:effectRef idx="0">
+            <a:schemeClr val="accent6"/>
+          </a:effectRef>
+          <a:fontRef idx="minor">
+            <a:schemeClr val="dk1"/>
+          </a:fontRef>
+        </p:style>
+        <p:txBody>
+          <a:bodyPr rtlCol="0" anchor="ctr"/>
+          <a:lstStyle/>
+          <a:p>
+            <a:pPr algn="ctr"/>
+            <a:endParaRPr kumimoji="1" lang="ja-JP" altLang="en-US"/>
+          </a:p>
+        </p:txBody>
+      </p:sp>
+    </p:spTree>
+    <p:extLst>
+      <p:ext uri="{BB962C8B-B14F-4D97-AF65-F5344CB8AC3E}">
+        <p14:creationId xmlns:p14="http://schemas.microsoft.com/office/powerpoint/2010/main" val="653901759"/>
+      </p:ext>
+    </p:extLst>
+  </p:cSld>
+  <p:clrMapOvr>
+    <a:masterClrMapping/>
+  </p:clrMapOvr>
+</p:sld>
+</file>
+
+<file path=ppt/slides/slide129.xml><?xml version="1.0" encoding="utf-8"?>
+<p:sld xmlns:a="http://schemas.openxmlformats.org/drawingml/2006/main" xmlns:r="http://schemas.openxmlformats.org/officeDocument/2006/relationships" xmlns:p="http://schemas.openxmlformats.org/presentationml/2006/main">
+  <p:cSld>
+    <p:spTree>
+      <p:nvGrpSpPr>
+        <p:cNvPr id="1" name="">
+          <a:extLst>
+            <a:ext uri="{FF2B5EF4-FFF2-40B4-BE49-F238E27FC236}">
+              <a16:creationId xmlns:a16="http://schemas.microsoft.com/office/drawing/2014/main" id="{9AC5E81D-CFBC-FB85-185C-48802FF4C230}"/>
+            </a:ext>
+          </a:extLst>
+        </p:cNvPr>
+        <p:cNvGrpSpPr/>
+        <p:nvPr/>
+      </p:nvGrpSpPr>
+      <p:grpSpPr>
+        <a:xfrm>
+          <a:off x="0" y="0"/>
+          <a:ext cx="0" cy="0"/>
+          <a:chOff x="0" y="0"/>
+          <a:chExt cx="0" cy="0"/>
+        </a:xfrm>
+      </p:grpSpPr>
+      <p:pic>
+        <p:nvPicPr>
+          <p:cNvPr id="3" name="図 2">
+            <a:extLst>
+              <a:ext uri="{FF2B5EF4-FFF2-40B4-BE49-F238E27FC236}">
+                <a16:creationId xmlns:a16="http://schemas.microsoft.com/office/drawing/2014/main" id="{36C92991-D2D8-EFAE-9B95-CEA1E486DF6E}"/>
+              </a:ext>
+            </a:extLst>
+          </p:cNvPr>
+          <p:cNvPicPr>
+            <a:picLocks noChangeAspect="1"/>
+          </p:cNvPicPr>
+          <p:nvPr/>
+        </p:nvPicPr>
+        <p:blipFill>
+          <a:blip r:embed="rId2">
+            <a:extLst>
+              <a:ext uri="{28A0092B-C50C-407E-A947-70E740481C1C}">
+                <a14:useLocalDpi xmlns:a14="http://schemas.microsoft.com/office/drawing/2010/main" val="0"/>
+              </a:ext>
+            </a:extLst>
+          </a:blip>
+          <a:stretch>
+            <a:fillRect/>
+          </a:stretch>
+        </p:blipFill>
+        <p:spPr>
+          <a:xfrm>
+            <a:off x="3752850" y="1866900"/>
+            <a:ext cx="4686300" cy="3124200"/>
+          </a:xfrm>
+          <a:prstGeom prst="rect">
+            <a:avLst/>
+          </a:prstGeom>
+        </p:spPr>
+      </p:pic>
+      <p:sp>
+        <p:nvSpPr>
+          <p:cNvPr id="4" name="正方形/長方形 3">
+            <a:extLst>
+              <a:ext uri="{FF2B5EF4-FFF2-40B4-BE49-F238E27FC236}">
+                <a16:creationId xmlns:a16="http://schemas.microsoft.com/office/drawing/2014/main" id="{199E8ABE-3D73-7EB0-A936-8A6823A0A0DE}"/>
+              </a:ext>
+            </a:extLst>
+          </p:cNvPr>
+          <p:cNvSpPr/>
+          <p:nvPr/>
+        </p:nvSpPr>
+        <p:spPr>
+          <a:xfrm flipV="1">
+            <a:off x="4501729" y="3522305"/>
+            <a:ext cx="3839838" cy="303246"/>
+          </a:xfrm>
+          <a:prstGeom prst="rect">
+            <a:avLst/>
+          </a:prstGeom>
+          <a:noFill/>
+          <a:ln w="28575">
+            <a:solidFill>
+              <a:srgbClr val="FF0000"/>
+            </a:solidFill>
+          </a:ln>
+        </p:spPr>
+        <p:style>
+          <a:lnRef idx="2">
+            <a:schemeClr val="accent6"/>
+          </a:lnRef>
+          <a:fillRef idx="1">
+            <a:schemeClr val="lt1"/>
+          </a:fillRef>
+          <a:effectRef idx="0">
+            <a:schemeClr val="accent6"/>
+          </a:effectRef>
+          <a:fontRef idx="minor">
+            <a:schemeClr val="dk1"/>
+          </a:fontRef>
+        </p:style>
+        <p:txBody>
+          <a:bodyPr rtlCol="0" anchor="ctr"/>
+          <a:lstStyle/>
+          <a:p>
+            <a:pPr algn="ctr"/>
+            <a:endParaRPr kumimoji="1" lang="ja-JP" altLang="en-US"/>
+          </a:p>
+        </p:txBody>
+      </p:sp>
+      <p:sp>
+        <p:nvSpPr>
+          <p:cNvPr id="5" name="正方形/長方形 4">
+            <a:extLst>
+              <a:ext uri="{FF2B5EF4-FFF2-40B4-BE49-F238E27FC236}">
+                <a16:creationId xmlns:a16="http://schemas.microsoft.com/office/drawing/2014/main" id="{E88749D9-F0C3-3921-A8CB-A60D88B71D60}"/>
+              </a:ext>
+            </a:extLst>
+          </p:cNvPr>
+          <p:cNvSpPr/>
+          <p:nvPr/>
+        </p:nvSpPr>
+        <p:spPr>
+          <a:xfrm flipV="1">
+            <a:off x="4430195" y="3906801"/>
+            <a:ext cx="3911372" cy="534570"/>
+          </a:xfrm>
+          <a:prstGeom prst="rect">
+            <a:avLst/>
+          </a:prstGeom>
+          <a:noFill/>
+          <a:ln w="28575">
+            <a:solidFill>
+              <a:srgbClr val="FF0000"/>
+            </a:solidFill>
+          </a:ln>
+        </p:spPr>
+        <p:style>
+          <a:lnRef idx="2">
+            <a:schemeClr val="accent6"/>
+          </a:lnRef>
+          <a:fillRef idx="1">
+            <a:schemeClr val="lt1"/>
+          </a:fillRef>
+          <a:effectRef idx="0">
+            <a:schemeClr val="accent6"/>
+          </a:effectRef>
+          <a:fontRef idx="minor">
+            <a:schemeClr val="dk1"/>
+          </a:fontRef>
+        </p:style>
+        <p:txBody>
+          <a:bodyPr rtlCol="0" anchor="ctr"/>
+          <a:lstStyle/>
+          <a:p>
+            <a:pPr algn="ctr"/>
+            <a:endParaRPr kumimoji="1" lang="ja-JP" altLang="en-US"/>
+          </a:p>
+        </p:txBody>
+      </p:sp>
+      <p:sp>
+        <p:nvSpPr>
+          <p:cNvPr id="7" name="正方形/長方形 6">
+            <a:extLst>
+              <a:ext uri="{FF2B5EF4-FFF2-40B4-BE49-F238E27FC236}">
+                <a16:creationId xmlns:a16="http://schemas.microsoft.com/office/drawing/2014/main" id="{7CE282FC-F3E2-A90C-560A-C104F7F0D8F3}"/>
+              </a:ext>
+            </a:extLst>
+          </p:cNvPr>
+          <p:cNvSpPr/>
+          <p:nvPr/>
+        </p:nvSpPr>
+        <p:spPr>
+          <a:xfrm>
+            <a:off x="5928047" y="2902696"/>
+            <a:ext cx="789997" cy="195068"/>
+          </a:xfrm>
+          <a:prstGeom prst="rect">
+            <a:avLst/>
+          </a:prstGeom>
+        </p:spPr>
+        <p:style>
+          <a:lnRef idx="2">
+            <a:schemeClr val="dk1">
+              <a:shade val="15000"/>
+            </a:schemeClr>
+          </a:lnRef>
+          <a:fillRef idx="1">
+            <a:schemeClr val="dk1"/>
+          </a:fillRef>
+          <a:effectRef idx="0">
+            <a:schemeClr val="dk1"/>
+          </a:effectRef>
+          <a:fontRef idx="minor">
+            <a:schemeClr val="lt1"/>
+          </a:fontRef>
+        </p:style>
+        <p:txBody>
+          <a:bodyPr rtlCol="0" anchor="ctr"/>
+          <a:lstStyle/>
+          <a:p>
+            <a:pPr algn="ctr"/>
+            <a:endParaRPr kumimoji="1" lang="ja-JP" altLang="en-US"/>
+          </a:p>
+        </p:txBody>
+      </p:sp>
+    </p:spTree>
+    <p:extLst>
+      <p:ext uri="{BB962C8B-B14F-4D97-AF65-F5344CB8AC3E}">
+        <p14:creationId xmlns:p14="http://schemas.microsoft.com/office/powerpoint/2010/main" val="504583617"/>
+      </p:ext>
+    </p:extLst>
+  </p:cSld>
+  <p:clrMapOvr>
+    <a:masterClrMapping/>
+  </p:clrMapOvr>
+</p:sld>
+</file>
+
 <file path=ppt/slides/slide13.xml><?xml version="1.0" encoding="utf-8"?>
 <p:sld xmlns:a="http://schemas.openxmlformats.org/drawingml/2006/main" xmlns:r="http://schemas.openxmlformats.org/officeDocument/2006/relationships" xmlns:p="http://schemas.openxmlformats.org/presentationml/2006/main">
   <p:cSld>
@@ -6089,6 +9771,42 @@
     <p:extLst>
       <p:ext uri="{BB962C8B-B14F-4D97-AF65-F5344CB8AC3E}">
         <p14:creationId xmlns:p14="http://schemas.microsoft.com/office/powerpoint/2010/main" val="1689130612"/>
+      </p:ext>
+    </p:extLst>
+  </p:cSld>
+  <p:clrMapOvr>
+    <a:masterClrMapping/>
+  </p:clrMapOvr>
+</p:sld>
+</file>
+
+<file path=ppt/slides/slide130.xml><?xml version="1.0" encoding="utf-8"?>
+<p:sld xmlns:a="http://schemas.openxmlformats.org/drawingml/2006/main" xmlns:r="http://schemas.openxmlformats.org/officeDocument/2006/relationships" xmlns:p="http://schemas.openxmlformats.org/presentationml/2006/main">
+  <p:cSld>
+    <p:spTree>
+      <p:nvGrpSpPr>
+        <p:cNvPr id="1" name="">
+          <a:extLst>
+            <a:ext uri="{FF2B5EF4-FFF2-40B4-BE49-F238E27FC236}">
+              <a16:creationId xmlns:a16="http://schemas.microsoft.com/office/drawing/2014/main" id="{E0E46EE9-5CCA-A21F-4D55-EFB9CB10BDF1}"/>
+            </a:ext>
+          </a:extLst>
+        </p:cNvPr>
+        <p:cNvGrpSpPr/>
+        <p:nvPr/>
+      </p:nvGrpSpPr>
+      <p:grpSpPr>
+        <a:xfrm>
+          <a:off x="0" y="0"/>
+          <a:ext cx="0" cy="0"/>
+          <a:chOff x="0" y="0"/>
+          <a:chExt cx="0" cy="0"/>
+        </a:xfrm>
+      </p:grpSpPr>
+    </p:spTree>
+    <p:extLst>
+      <p:ext uri="{BB962C8B-B14F-4D97-AF65-F5344CB8AC3E}">
+        <p14:creationId xmlns:p14="http://schemas.microsoft.com/office/powerpoint/2010/main" val="4111096504"/>
       </p:ext>
     </p:extLst>
   </p:cSld>
@@ -44919,7 +48637,7 @@
         </p:blipFill>
         <p:spPr>
           <a:xfrm>
-            <a:off x="4095750" y="1838325"/>
+            <a:off x="4095750" y="1810332"/>
             <a:ext cx="4000500" cy="3181350"/>
           </a:xfrm>
           <a:prstGeom prst="rect">
@@ -44941,7 +48659,7 @@
         </p:nvSpPr>
         <p:spPr>
           <a:xfrm flipV="1">
-            <a:off x="4119175" y="3426603"/>
+            <a:off x="4119175" y="3398610"/>
             <a:ext cx="432000" cy="432000"/>
           </a:xfrm>
           <a:prstGeom prst="rect">
@@ -45129,14 +48847,6 @@
           </a:bodyPr>
           <a:lstStyle/>
           <a:p>
-            <a:r>
-              <a:rPr kumimoji="1" lang="en-US" altLang="ja-JP" sz="1000" dirty="0">
-                <a:solidFill>
-                  <a:schemeClr val="bg1"/>
-                </a:solidFill>
-              </a:rPr>
-              <a:t>guest</a:t>
-            </a:r>
             <a:endParaRPr kumimoji="1" lang="ja-JP" altLang="en-US" sz="1000" dirty="0">
               <a:solidFill>
                 <a:schemeClr val="bg1"/>
@@ -45145,36 +48855,6 @@
           </a:p>
         </p:txBody>
       </p:sp>
-      <p:pic>
-        <p:nvPicPr>
-          <p:cNvPr id="7" name="図 6">
-            <a:extLst>
-              <a:ext uri="{FF2B5EF4-FFF2-40B4-BE49-F238E27FC236}">
-                <a16:creationId xmlns:a16="http://schemas.microsoft.com/office/drawing/2014/main" id="{724DB63E-0DE5-7B53-DBEA-E4C885917D20}"/>
-              </a:ext>
-            </a:extLst>
-          </p:cNvPr>
-          <p:cNvPicPr>
-            <a:picLocks noChangeAspect="1"/>
-          </p:cNvPicPr>
-          <p:nvPr/>
-        </p:nvPicPr>
-        <p:blipFill>
-          <a:blip r:embed="rId3"/>
-          <a:stretch>
-            <a:fillRect/>
-          </a:stretch>
-        </p:blipFill>
-        <p:spPr>
-          <a:xfrm>
-            <a:off x="4075001" y="1816468"/>
-            <a:ext cx="4041998" cy="3225064"/>
-          </a:xfrm>
-          <a:prstGeom prst="rect">
-            <a:avLst/>
-          </a:prstGeom>
-        </p:spPr>
-      </p:pic>
     </p:spTree>
     <p:extLst>
       <p:ext uri="{BB962C8B-B14F-4D97-AF65-F5344CB8AC3E}">
@@ -45383,7 +49063,7 @@
         </p:nvSpPr>
         <p:spPr>
           <a:xfrm flipV="1">
-            <a:off x="7763065" y="4707162"/>
+            <a:off x="7744403" y="4697831"/>
             <a:ext cx="324000" cy="322038"/>
           </a:xfrm>
           <a:prstGeom prst="rect">
@@ -45416,6 +49096,44 @@
           <a:p>
             <a:pPr algn="ctr"/>
             <a:endParaRPr kumimoji="1" lang="ja-JP" altLang="en-US"/>
+          </a:p>
+        </p:txBody>
+      </p:sp>
+      <p:sp>
+        <p:nvSpPr>
+          <p:cNvPr id="6" name="テキスト ボックス 5">
+            <a:extLst>
+              <a:ext uri="{FF2B5EF4-FFF2-40B4-BE49-F238E27FC236}">
+                <a16:creationId xmlns:a16="http://schemas.microsoft.com/office/drawing/2014/main" id="{A6D54B3C-45CA-F48F-6115-9C876FA54D6B}"/>
+              </a:ext>
+            </a:extLst>
+          </p:cNvPr>
+          <p:cNvSpPr txBox="1"/>
+          <p:nvPr/>
+        </p:nvSpPr>
+        <p:spPr>
+          <a:xfrm>
+            <a:off x="5898733" y="4740476"/>
+            <a:ext cx="889000" cy="246221"/>
+          </a:xfrm>
+          <a:prstGeom prst="rect">
+            <a:avLst/>
+          </a:prstGeom>
+          <a:solidFill>
+            <a:schemeClr val="tx1"/>
+          </a:solidFill>
+        </p:spPr>
+        <p:txBody>
+          <a:bodyPr wrap="square" rtlCol="0" anchor="ctr">
+            <a:spAutoFit/>
+          </a:bodyPr>
+          <a:lstStyle/>
+          <a:p>
+            <a:endParaRPr kumimoji="1" lang="ja-JP" altLang="en-US" sz="1000" dirty="0">
+              <a:solidFill>
+                <a:schemeClr val="bg1"/>
+              </a:solidFill>
+            </a:endParaRPr>
           </a:p>
         </p:txBody>
       </p:sp>

--- a/01_テキスト/Git入門_図.pptx
+++ b/01_テキスト/Git入門_図.pptx
@@ -135,6 +135,15 @@
     <p:sldId id="389" r:id="rId129"/>
     <p:sldId id="390" r:id="rId130"/>
     <p:sldId id="391" r:id="rId131"/>
+    <p:sldId id="393" r:id="rId132"/>
+    <p:sldId id="394" r:id="rId133"/>
+    <p:sldId id="399" r:id="rId134"/>
+    <p:sldId id="400" r:id="rId135"/>
+    <p:sldId id="401" r:id="rId136"/>
+    <p:sldId id="405" r:id="rId137"/>
+    <p:sldId id="403" r:id="rId138"/>
+    <p:sldId id="402" r:id="rId139"/>
+    <p:sldId id="404" r:id="rId140"/>
   </p:sldIdLst>
   <p:sldSz cx="12192000" cy="6858000"/>
   <p:notesSz cx="6858000" cy="9144000"/>
@@ -3987,6 +3996,42 @@
           </a:p>
         </p:txBody>
       </p:sp>
+      <p:pic>
+        <p:nvPicPr>
+          <p:cNvPr id="4" name="図 3">
+            <a:extLst>
+              <a:ext uri="{FF2B5EF4-FFF2-40B4-BE49-F238E27FC236}">
+                <a16:creationId xmlns:a16="http://schemas.microsoft.com/office/drawing/2014/main" id="{263FCD6D-7416-DFFE-1E39-C57CC0D3138D}"/>
+              </a:ext>
+            </a:extLst>
+          </p:cNvPr>
+          <p:cNvPicPr>
+            <a:picLocks noChangeAspect="1"/>
+          </p:cNvPicPr>
+          <p:nvPr/>
+        </p:nvPicPr>
+        <p:blipFill>
+          <a:blip r:embed="rId3">
+            <a:extLst>
+              <a:ext uri="{28A0092B-C50C-407E-A947-70E740481C1C}">
+                <a14:useLocalDpi xmlns:a14="http://schemas.microsoft.com/office/drawing/2010/main" val="0"/>
+              </a:ext>
+            </a:extLst>
+          </a:blip>
+          <a:stretch>
+            <a:fillRect/>
+          </a:stretch>
+        </p:blipFill>
+        <p:spPr>
+          <a:xfrm>
+            <a:off x="4833063" y="2694698"/>
+            <a:ext cx="1228725" cy="180975"/>
+          </a:xfrm>
+          <a:prstGeom prst="rect">
+            <a:avLst/>
+          </a:prstGeom>
+        </p:spPr>
+      </p:pic>
     </p:spTree>
     <p:extLst>
       <p:ext uri="{BB962C8B-B14F-4D97-AF65-F5344CB8AC3E}">
@@ -4393,6 +4438,80 @@
       </p:pic>
       <p:sp>
         <p:nvSpPr>
+          <p:cNvPr id="5" name="テキスト ボックス 4">
+            <a:extLst>
+              <a:ext uri="{FF2B5EF4-FFF2-40B4-BE49-F238E27FC236}">
+                <a16:creationId xmlns:a16="http://schemas.microsoft.com/office/drawing/2014/main" id="{60C43B91-B94C-32B0-B335-F9D97D6B8374}"/>
+              </a:ext>
+            </a:extLst>
+          </p:cNvPr>
+          <p:cNvSpPr txBox="1"/>
+          <p:nvPr/>
+        </p:nvSpPr>
+        <p:spPr>
+          <a:xfrm>
+            <a:off x="3108879" y="4628510"/>
+            <a:ext cx="889000" cy="246221"/>
+          </a:xfrm>
+          <a:prstGeom prst="rect">
+            <a:avLst/>
+          </a:prstGeom>
+          <a:solidFill>
+            <a:schemeClr val="tx1"/>
+          </a:solidFill>
+        </p:spPr>
+        <p:txBody>
+          <a:bodyPr wrap="square" rtlCol="0" anchor="ctr">
+            <a:spAutoFit/>
+          </a:bodyPr>
+          <a:lstStyle/>
+          <a:p>
+            <a:endParaRPr kumimoji="1" lang="ja-JP" altLang="en-US" sz="1000" dirty="0">
+              <a:solidFill>
+                <a:schemeClr val="bg1"/>
+              </a:solidFill>
+            </a:endParaRPr>
+          </a:p>
+        </p:txBody>
+      </p:sp>
+      <p:pic>
+        <p:nvPicPr>
+          <p:cNvPr id="9" name="図 8">
+            <a:extLst>
+              <a:ext uri="{FF2B5EF4-FFF2-40B4-BE49-F238E27FC236}">
+                <a16:creationId xmlns:a16="http://schemas.microsoft.com/office/drawing/2014/main" id="{861F51EB-1A85-BBA0-E124-488156158C6D}"/>
+              </a:ext>
+            </a:extLst>
+          </p:cNvPr>
+          <p:cNvPicPr>
+            <a:picLocks noChangeAspect="1"/>
+          </p:cNvPicPr>
+          <p:nvPr/>
+        </p:nvPicPr>
+        <p:blipFill>
+          <a:blip r:embed="rId3">
+            <a:extLst>
+              <a:ext uri="{28A0092B-C50C-407E-A947-70E740481C1C}">
+                <a14:useLocalDpi xmlns:a14="http://schemas.microsoft.com/office/drawing/2010/main" val="0"/>
+              </a:ext>
+            </a:extLst>
+          </a:blip>
+          <a:stretch>
+            <a:fillRect/>
+          </a:stretch>
+        </p:blipFill>
+        <p:spPr>
+          <a:xfrm>
+            <a:off x="5335457" y="2271874"/>
+            <a:ext cx="2752725" cy="1085850"/>
+          </a:xfrm>
+          <a:prstGeom prst="rect">
+            <a:avLst/>
+          </a:prstGeom>
+        </p:spPr>
+      </p:pic>
+      <p:sp>
+        <p:nvSpPr>
           <p:cNvPr id="4" name="正方形/長方形 3">
             <a:extLst>
               <a:ext uri="{FF2B5EF4-FFF2-40B4-BE49-F238E27FC236}">
@@ -4405,8 +4524,8 @@
         </p:nvSpPr>
         <p:spPr>
           <a:xfrm flipV="1">
-            <a:off x="5772000" y="2197226"/>
-            <a:ext cx="4473012" cy="853883"/>
+            <a:off x="5335457" y="2481942"/>
+            <a:ext cx="4909555" cy="569165"/>
           </a:xfrm>
           <a:prstGeom prst="rect">
             <a:avLst/>
@@ -4438,44 +4557,6 @@
           <a:p>
             <a:pPr algn="ctr"/>
             <a:endParaRPr kumimoji="1" lang="ja-JP" altLang="en-US"/>
-          </a:p>
-        </p:txBody>
-      </p:sp>
-      <p:sp>
-        <p:nvSpPr>
-          <p:cNvPr id="5" name="テキスト ボックス 4">
-            <a:extLst>
-              <a:ext uri="{FF2B5EF4-FFF2-40B4-BE49-F238E27FC236}">
-                <a16:creationId xmlns:a16="http://schemas.microsoft.com/office/drawing/2014/main" id="{60C43B91-B94C-32B0-B335-F9D97D6B8374}"/>
-              </a:ext>
-            </a:extLst>
-          </p:cNvPr>
-          <p:cNvSpPr txBox="1"/>
-          <p:nvPr/>
-        </p:nvSpPr>
-        <p:spPr>
-          <a:xfrm>
-            <a:off x="3108879" y="4628510"/>
-            <a:ext cx="889000" cy="246221"/>
-          </a:xfrm>
-          <a:prstGeom prst="rect">
-            <a:avLst/>
-          </a:prstGeom>
-          <a:solidFill>
-            <a:schemeClr val="tx1"/>
-          </a:solidFill>
-        </p:spPr>
-        <p:txBody>
-          <a:bodyPr wrap="square" rtlCol="0" anchor="ctr">
-            <a:spAutoFit/>
-          </a:bodyPr>
-          <a:lstStyle/>
-          <a:p>
-            <a:endParaRPr kumimoji="1" lang="ja-JP" altLang="en-US" sz="1000" dirty="0">
-              <a:solidFill>
-                <a:schemeClr val="bg1"/>
-              </a:solidFill>
-            </a:endParaRPr>
           </a:p>
         </p:txBody>
       </p:sp>
@@ -4637,6 +4718,42 @@
           </a:p>
         </p:txBody>
       </p:sp>
+      <p:pic>
+        <p:nvPicPr>
+          <p:cNvPr id="5" name="図 4">
+            <a:extLst>
+              <a:ext uri="{FF2B5EF4-FFF2-40B4-BE49-F238E27FC236}">
+                <a16:creationId xmlns:a16="http://schemas.microsoft.com/office/drawing/2014/main" id="{FD017095-AFF9-59A9-50EB-9B811B34534C}"/>
+              </a:ext>
+            </a:extLst>
+          </p:cNvPr>
+          <p:cNvPicPr>
+            <a:picLocks noChangeAspect="1"/>
+          </p:cNvPicPr>
+          <p:nvPr/>
+        </p:nvPicPr>
+        <p:blipFill>
+          <a:blip r:embed="rId3">
+            <a:extLst>
+              <a:ext uri="{28A0092B-C50C-407E-A947-70E740481C1C}">
+                <a14:useLocalDpi xmlns:a14="http://schemas.microsoft.com/office/drawing/2010/main" val="0"/>
+              </a:ext>
+            </a:extLst>
+          </a:blip>
+          <a:stretch>
+            <a:fillRect/>
+          </a:stretch>
+        </p:blipFill>
+        <p:spPr>
+          <a:xfrm>
+            <a:off x="4833063" y="2694698"/>
+            <a:ext cx="1228725" cy="180975"/>
+          </a:xfrm>
+          <a:prstGeom prst="rect">
+            <a:avLst/>
+          </a:prstGeom>
+        </p:spPr>
+      </p:pic>
     </p:spTree>
     <p:extLst>
       <p:ext uri="{BB962C8B-B14F-4D97-AF65-F5344CB8AC3E}">
@@ -6331,6 +6448,42 @@
           </a:p>
         </p:txBody>
       </p:sp>
+      <p:pic>
+        <p:nvPicPr>
+          <p:cNvPr id="5" name="図 4">
+            <a:extLst>
+              <a:ext uri="{FF2B5EF4-FFF2-40B4-BE49-F238E27FC236}">
+                <a16:creationId xmlns:a16="http://schemas.microsoft.com/office/drawing/2014/main" id="{76748932-A50F-01F2-E9C2-8CB07FF175FB}"/>
+              </a:ext>
+            </a:extLst>
+          </p:cNvPr>
+          <p:cNvPicPr>
+            <a:picLocks noChangeAspect="1"/>
+          </p:cNvPicPr>
+          <p:nvPr/>
+        </p:nvPicPr>
+        <p:blipFill>
+          <a:blip r:embed="rId3">
+            <a:extLst>
+              <a:ext uri="{28A0092B-C50C-407E-A947-70E740481C1C}">
+                <a14:useLocalDpi xmlns:a14="http://schemas.microsoft.com/office/drawing/2010/main" val="0"/>
+              </a:ext>
+            </a:extLst>
+          </a:blip>
+          <a:stretch>
+            <a:fillRect/>
+          </a:stretch>
+        </p:blipFill>
+        <p:spPr>
+          <a:xfrm>
+            <a:off x="4833063" y="2694698"/>
+            <a:ext cx="1228725" cy="180975"/>
+          </a:xfrm>
+          <a:prstGeom prst="rect">
+            <a:avLst/>
+          </a:prstGeom>
+        </p:spPr>
+      </p:pic>
     </p:spTree>
     <p:extLst>
       <p:ext uri="{BB962C8B-B14F-4D97-AF65-F5344CB8AC3E}">
@@ -6947,6 +7100,42 @@
           </a:p>
         </p:txBody>
       </p:sp>
+      <p:pic>
+        <p:nvPicPr>
+          <p:cNvPr id="6" name="図 5">
+            <a:extLst>
+              <a:ext uri="{FF2B5EF4-FFF2-40B4-BE49-F238E27FC236}">
+                <a16:creationId xmlns:a16="http://schemas.microsoft.com/office/drawing/2014/main" id="{C5B0CD27-9FD4-32C7-B0AD-1C11CD2F3A91}"/>
+              </a:ext>
+            </a:extLst>
+          </p:cNvPr>
+          <p:cNvPicPr>
+            <a:picLocks noChangeAspect="1"/>
+          </p:cNvPicPr>
+          <p:nvPr/>
+        </p:nvPicPr>
+        <p:blipFill>
+          <a:blip r:embed="rId3">
+            <a:extLst>
+              <a:ext uri="{28A0092B-C50C-407E-A947-70E740481C1C}">
+                <a14:useLocalDpi xmlns:a14="http://schemas.microsoft.com/office/drawing/2010/main" val="0"/>
+              </a:ext>
+            </a:extLst>
+          </a:blip>
+          <a:stretch>
+            <a:fillRect/>
+          </a:stretch>
+        </p:blipFill>
+        <p:spPr>
+          <a:xfrm>
+            <a:off x="4833063" y="2694698"/>
+            <a:ext cx="1228725" cy="180975"/>
+          </a:xfrm>
+          <a:prstGeom prst="rect">
+            <a:avLst/>
+          </a:prstGeom>
+        </p:spPr>
+      </p:pic>
     </p:spTree>
     <p:extLst>
       <p:ext uri="{BB962C8B-B14F-4D97-AF65-F5344CB8AC3E}">
@@ -7991,6 +8180,42 @@
           </a:p>
         </p:txBody>
       </p:sp>
+      <p:pic>
+        <p:nvPicPr>
+          <p:cNvPr id="5" name="図 4">
+            <a:extLst>
+              <a:ext uri="{FF2B5EF4-FFF2-40B4-BE49-F238E27FC236}">
+                <a16:creationId xmlns:a16="http://schemas.microsoft.com/office/drawing/2014/main" id="{73D6FD4C-B592-EEEE-AC59-A2B88DD15D62}"/>
+              </a:ext>
+            </a:extLst>
+          </p:cNvPr>
+          <p:cNvPicPr>
+            <a:picLocks noChangeAspect="1"/>
+          </p:cNvPicPr>
+          <p:nvPr/>
+        </p:nvPicPr>
+        <p:blipFill>
+          <a:blip r:embed="rId3">
+            <a:extLst>
+              <a:ext uri="{28A0092B-C50C-407E-A947-70E740481C1C}">
+                <a14:useLocalDpi xmlns:a14="http://schemas.microsoft.com/office/drawing/2010/main" val="0"/>
+              </a:ext>
+            </a:extLst>
+          </a:blip>
+          <a:stretch>
+            <a:fillRect/>
+          </a:stretch>
+        </p:blipFill>
+        <p:spPr>
+          <a:xfrm>
+            <a:off x="3693722" y="3353996"/>
+            <a:ext cx="2581275" cy="247650"/>
+          </a:xfrm>
+          <a:prstGeom prst="rect">
+            <a:avLst/>
+          </a:prstGeom>
+        </p:spPr>
+      </p:pic>
     </p:spTree>
     <p:extLst>
       <p:ext uri="{BB962C8B-B14F-4D97-AF65-F5344CB8AC3E}">
@@ -8185,6 +8410,42 @@
           </a:p>
         </p:txBody>
       </p:sp>
+      <p:pic>
+        <p:nvPicPr>
+          <p:cNvPr id="5" name="図 4">
+            <a:extLst>
+              <a:ext uri="{FF2B5EF4-FFF2-40B4-BE49-F238E27FC236}">
+                <a16:creationId xmlns:a16="http://schemas.microsoft.com/office/drawing/2014/main" id="{3F62AFA7-DDF6-A489-FEB1-13ED35114296}"/>
+              </a:ext>
+            </a:extLst>
+          </p:cNvPr>
+          <p:cNvPicPr>
+            <a:picLocks noChangeAspect="1"/>
+          </p:cNvPicPr>
+          <p:nvPr/>
+        </p:nvPicPr>
+        <p:blipFill>
+          <a:blip r:embed="rId3">
+            <a:extLst>
+              <a:ext uri="{28A0092B-C50C-407E-A947-70E740481C1C}">
+                <a14:useLocalDpi xmlns:a14="http://schemas.microsoft.com/office/drawing/2010/main" val="0"/>
+              </a:ext>
+            </a:extLst>
+          </a:blip>
+          <a:stretch>
+            <a:fillRect/>
+          </a:stretch>
+        </p:blipFill>
+        <p:spPr>
+          <a:xfrm>
+            <a:off x="4833063" y="2694698"/>
+            <a:ext cx="1228725" cy="180975"/>
+          </a:xfrm>
+          <a:prstGeom prst="rect">
+            <a:avLst/>
+          </a:prstGeom>
+        </p:spPr>
+      </p:pic>
     </p:spTree>
     <p:extLst>
       <p:ext uri="{BB962C8B-B14F-4D97-AF65-F5344CB8AC3E}">
@@ -8257,6 +8518,42 @@
           </a:prstGeom>
         </p:spPr>
       </p:pic>
+      <p:pic>
+        <p:nvPicPr>
+          <p:cNvPr id="15" name="図 14">
+            <a:extLst>
+              <a:ext uri="{FF2B5EF4-FFF2-40B4-BE49-F238E27FC236}">
+                <a16:creationId xmlns:a16="http://schemas.microsoft.com/office/drawing/2014/main" id="{329B5375-B548-7C91-A648-7DE142D405E5}"/>
+              </a:ext>
+            </a:extLst>
+          </p:cNvPr>
+          <p:cNvPicPr>
+            <a:picLocks noChangeAspect="1"/>
+          </p:cNvPicPr>
+          <p:nvPr/>
+        </p:nvPicPr>
+        <p:blipFill>
+          <a:blip r:embed="rId3">
+            <a:extLst>
+              <a:ext uri="{28A0092B-C50C-407E-A947-70E740481C1C}">
+                <a14:useLocalDpi xmlns:a14="http://schemas.microsoft.com/office/drawing/2010/main" val="0"/>
+              </a:ext>
+            </a:extLst>
+          </a:blip>
+          <a:stretch>
+            <a:fillRect/>
+          </a:stretch>
+        </p:blipFill>
+        <p:spPr>
+          <a:xfrm>
+            <a:off x="4864845" y="2723762"/>
+            <a:ext cx="3152775" cy="723900"/>
+          </a:xfrm>
+          <a:prstGeom prst="rect">
+            <a:avLst/>
+          </a:prstGeom>
+        </p:spPr>
+      </p:pic>
       <p:sp>
         <p:nvSpPr>
           <p:cNvPr id="4" name="正方形/長方形 3">
@@ -8321,8 +8618,8 @@
         </p:nvSpPr>
         <p:spPr>
           <a:xfrm>
-            <a:off x="6226624" y="2986672"/>
-            <a:ext cx="789997" cy="195068"/>
+            <a:off x="6235955" y="3023117"/>
+            <a:ext cx="873972" cy="186612"/>
           </a:xfrm>
           <a:prstGeom prst="rect">
             <a:avLst/>
@@ -8349,7 +8646,7 @@
           <a:lstStyle/>
           <a:p>
             <a:pPr algn="ctr"/>
-            <a:endParaRPr kumimoji="1" lang="ja-JP" altLang="en-US"/>
+            <a:endParaRPr kumimoji="1" lang="ja-JP" altLang="en-US" dirty="0"/>
           </a:p>
         </p:txBody>
       </p:sp>
@@ -8707,10 +9004,10 @@
       </p:grpSpPr>
       <p:pic>
         <p:nvPicPr>
-          <p:cNvPr id="3" name="図 2">
-            <a:extLst>
-              <a:ext uri="{FF2B5EF4-FFF2-40B4-BE49-F238E27FC236}">
-                <a16:creationId xmlns:a16="http://schemas.microsoft.com/office/drawing/2014/main" id="{36C92991-D2D8-EFAE-9B95-CEA1E486DF6E}"/>
+          <p:cNvPr id="18" name="図 17">
+            <a:extLst>
+              <a:ext uri="{FF2B5EF4-FFF2-40B4-BE49-F238E27FC236}">
+                <a16:creationId xmlns:a16="http://schemas.microsoft.com/office/drawing/2014/main" id="{565E928C-1691-6541-EEB7-08A3C2A12E14}"/>
               </a:ext>
             </a:extLst>
           </p:cNvPr>
@@ -8733,8 +9030,8 @@
         </p:blipFill>
         <p:spPr>
           <a:xfrm>
-            <a:off x="3752850" y="1866900"/>
-            <a:ext cx="4686300" cy="3124200"/>
+            <a:off x="3778120" y="1883132"/>
+            <a:ext cx="4038600" cy="2905125"/>
           </a:xfrm>
           <a:prstGeom prst="rect">
             <a:avLst/>
@@ -8755,8 +9052,8 @@
         </p:nvSpPr>
         <p:spPr>
           <a:xfrm flipV="1">
-            <a:off x="4501729" y="3522305"/>
-            <a:ext cx="3839838" cy="303246"/>
+            <a:off x="4501729" y="3475653"/>
+            <a:ext cx="3205357" cy="303246"/>
           </a:xfrm>
           <a:prstGeom prst="rect">
             <a:avLst/>
@@ -8805,8 +9102,8 @@
         </p:nvSpPr>
         <p:spPr>
           <a:xfrm flipV="1">
-            <a:off x="4430195" y="3906801"/>
-            <a:ext cx="3911372" cy="534570"/>
+            <a:off x="4395349" y="3831381"/>
+            <a:ext cx="3311737" cy="544676"/>
           </a:xfrm>
           <a:prstGeom prst="rect">
             <a:avLst/>
@@ -8856,7 +9153,7 @@
         <p:spPr>
           <a:xfrm>
             <a:off x="5928047" y="2902696"/>
-            <a:ext cx="789997" cy="195068"/>
+            <a:ext cx="845977" cy="176406"/>
           </a:xfrm>
           <a:prstGeom prst="rect">
             <a:avLst/>
@@ -9816,6 +10113,1572 @@
 </p:sld>
 </file>
 
+<file path=ppt/slides/slide131.xml><?xml version="1.0" encoding="utf-8"?>
+<p:sld xmlns:a="http://schemas.openxmlformats.org/drawingml/2006/main" xmlns:r="http://schemas.openxmlformats.org/officeDocument/2006/relationships" xmlns:p="http://schemas.openxmlformats.org/presentationml/2006/main">
+  <p:cSld>
+    <p:spTree>
+      <p:nvGrpSpPr>
+        <p:cNvPr id="1" name="">
+          <a:extLst>
+            <a:ext uri="{FF2B5EF4-FFF2-40B4-BE49-F238E27FC236}">
+              <a16:creationId xmlns:a16="http://schemas.microsoft.com/office/drawing/2014/main" id="{146215C6-2428-4119-1C9D-E5ADB1CA039F}"/>
+            </a:ext>
+          </a:extLst>
+        </p:cNvPr>
+        <p:cNvGrpSpPr/>
+        <p:nvPr/>
+      </p:nvGrpSpPr>
+      <p:grpSpPr>
+        <a:xfrm>
+          <a:off x="0" y="0"/>
+          <a:ext cx="0" cy="0"/>
+          <a:chOff x="0" y="0"/>
+          <a:chExt cx="0" cy="0"/>
+        </a:xfrm>
+      </p:grpSpPr>
+      <p:sp>
+        <p:nvSpPr>
+          <p:cNvPr id="2" name="正方形/長方形 1">
+            <a:extLst>
+              <a:ext uri="{FF2B5EF4-FFF2-40B4-BE49-F238E27FC236}">
+                <a16:creationId xmlns:a16="http://schemas.microsoft.com/office/drawing/2014/main" id="{A2F42EBA-D11C-47BC-EE88-B399B16A91E7}"/>
+              </a:ext>
+            </a:extLst>
+          </p:cNvPr>
+          <p:cNvSpPr/>
+          <p:nvPr/>
+        </p:nvSpPr>
+        <p:spPr>
+          <a:xfrm>
+            <a:off x="3470986" y="1530218"/>
+            <a:ext cx="7200000" cy="3498981"/>
+          </a:xfrm>
+          <a:prstGeom prst="rect">
+            <a:avLst/>
+          </a:prstGeom>
+          <a:solidFill>
+            <a:schemeClr val="tx1"/>
+          </a:solidFill>
+          <a:ln>
+            <a:solidFill>
+              <a:schemeClr val="tx1"/>
+            </a:solidFill>
+          </a:ln>
+        </p:spPr>
+        <p:style>
+          <a:lnRef idx="2">
+            <a:schemeClr val="accent6"/>
+          </a:lnRef>
+          <a:fillRef idx="1">
+            <a:schemeClr val="lt1"/>
+          </a:fillRef>
+          <a:effectRef idx="0">
+            <a:schemeClr val="accent6"/>
+          </a:effectRef>
+          <a:fontRef idx="minor">
+            <a:schemeClr val="dk1"/>
+          </a:fontRef>
+        </p:style>
+        <p:txBody>
+          <a:bodyPr rtlCol="0" anchor="t"/>
+          <a:lstStyle/>
+          <a:p>
+            <a:r>
+              <a:rPr lang="en-US" altLang="ja-JP" sz="1400" dirty="0">
+                <a:solidFill>
+                  <a:schemeClr val="bg1"/>
+                </a:solidFill>
+              </a:rPr>
+              <a:t>C:\git-test&gt;git </a:t>
+            </a:r>
+            <a:r>
+              <a:rPr lang="en-US" altLang="ja-JP" sz="1400" dirty="0" err="1">
+                <a:solidFill>
+                  <a:schemeClr val="bg1"/>
+                </a:solidFill>
+              </a:rPr>
+              <a:t>init</a:t>
+            </a:r>
+            <a:endParaRPr lang="en-US" altLang="ja-JP" sz="1400" dirty="0">
+              <a:solidFill>
+                <a:schemeClr val="bg1"/>
+              </a:solidFill>
+            </a:endParaRPr>
+          </a:p>
+          <a:p>
+            <a:r>
+              <a:rPr lang="en-US" altLang="ja-JP" sz="1400" dirty="0">
+                <a:solidFill>
+                  <a:schemeClr val="bg1"/>
+                </a:solidFill>
+              </a:rPr>
+              <a:t>Initialized empty Git repository in C:/git-test/.git/</a:t>
+            </a:r>
+          </a:p>
+          <a:p>
+            <a:endParaRPr lang="en-US" altLang="ja-JP" sz="1400" dirty="0">
+              <a:solidFill>
+                <a:schemeClr val="bg1"/>
+              </a:solidFill>
+            </a:endParaRPr>
+          </a:p>
+          <a:p>
+            <a:r>
+              <a:rPr lang="en-US" altLang="ja-JP" sz="1400" dirty="0">
+                <a:solidFill>
+                  <a:schemeClr val="bg1"/>
+                </a:solidFill>
+              </a:rPr>
+              <a:t>C:\git-test&gt;dir /a</a:t>
+            </a:r>
+          </a:p>
+          <a:p>
+            <a:r>
+              <a:rPr lang="en-US" altLang="ja-JP" sz="1400" dirty="0">
+                <a:solidFill>
+                  <a:schemeClr val="bg1"/>
+                </a:solidFill>
+              </a:rPr>
+              <a:t> </a:t>
+            </a:r>
+            <a:r>
+              <a:rPr lang="ja-JP" altLang="en-US" sz="1400" dirty="0">
+                <a:solidFill>
+                  <a:schemeClr val="bg1"/>
+                </a:solidFill>
+              </a:rPr>
+              <a:t>ドライブ </a:t>
+            </a:r>
+            <a:r>
+              <a:rPr lang="en-US" altLang="ja-JP" sz="1400" dirty="0">
+                <a:solidFill>
+                  <a:schemeClr val="bg1"/>
+                </a:solidFill>
+              </a:rPr>
+              <a:t>C </a:t>
+            </a:r>
+            <a:r>
+              <a:rPr lang="ja-JP" altLang="en-US" sz="1400" dirty="0">
+                <a:solidFill>
+                  <a:schemeClr val="bg1"/>
+                </a:solidFill>
+              </a:rPr>
+              <a:t>のボリューム ラベルがありません。</a:t>
+            </a:r>
+          </a:p>
+          <a:p>
+            <a:r>
+              <a:rPr lang="ja-JP" altLang="en-US" sz="1400" dirty="0">
+                <a:solidFill>
+                  <a:schemeClr val="bg1"/>
+                </a:solidFill>
+              </a:rPr>
+              <a:t> ボリューム シリアル番号は </a:t>
+            </a:r>
+            <a:r>
+              <a:rPr lang="en-US" altLang="ja-JP" sz="1400" dirty="0">
+                <a:solidFill>
+                  <a:schemeClr val="bg1"/>
+                </a:solidFill>
+              </a:rPr>
+              <a:t>A869-D627 </a:t>
+            </a:r>
+            <a:r>
+              <a:rPr lang="ja-JP" altLang="en-US" sz="1400" dirty="0">
+                <a:solidFill>
+                  <a:schemeClr val="bg1"/>
+                </a:solidFill>
+              </a:rPr>
+              <a:t>です</a:t>
+            </a:r>
+          </a:p>
+          <a:p>
+            <a:endParaRPr lang="ja-JP" altLang="en-US" sz="1400" dirty="0">
+              <a:solidFill>
+                <a:schemeClr val="bg1"/>
+              </a:solidFill>
+            </a:endParaRPr>
+          </a:p>
+          <a:p>
+            <a:r>
+              <a:rPr lang="ja-JP" altLang="en-US" sz="1400" dirty="0">
+                <a:solidFill>
+                  <a:schemeClr val="bg1"/>
+                </a:solidFill>
+              </a:rPr>
+              <a:t> </a:t>
+            </a:r>
+            <a:r>
+              <a:rPr lang="en-US" altLang="ja-JP" sz="1400" dirty="0">
+                <a:solidFill>
+                  <a:schemeClr val="bg1"/>
+                </a:solidFill>
+              </a:rPr>
+              <a:t>C:\git-test </a:t>
+            </a:r>
+            <a:r>
+              <a:rPr lang="ja-JP" altLang="en-US" sz="1400" dirty="0">
+                <a:solidFill>
+                  <a:schemeClr val="bg1"/>
+                </a:solidFill>
+              </a:rPr>
+              <a:t>のディレクトリ</a:t>
+            </a:r>
+          </a:p>
+          <a:p>
+            <a:endParaRPr lang="ja-JP" altLang="en-US" sz="1400" dirty="0">
+              <a:solidFill>
+                <a:schemeClr val="bg1"/>
+              </a:solidFill>
+            </a:endParaRPr>
+          </a:p>
+          <a:p>
+            <a:r>
+              <a:rPr lang="en-US" altLang="ja-JP" sz="1400" dirty="0">
+                <a:solidFill>
+                  <a:schemeClr val="bg1"/>
+                </a:solidFill>
+              </a:rPr>
+              <a:t>2026/06/21  12:48    &lt;DIR&gt;          .</a:t>
+            </a:r>
+          </a:p>
+          <a:p>
+            <a:r>
+              <a:rPr lang="en-US" altLang="ja-JP" sz="1400" dirty="0">
+                <a:solidFill>
+                  <a:schemeClr val="bg1"/>
+                </a:solidFill>
+              </a:rPr>
+              <a:t>2026/06/21  09:49    &lt;DIR&gt;          ..</a:t>
+            </a:r>
+          </a:p>
+          <a:p>
+            <a:r>
+              <a:rPr lang="en-US" altLang="ja-JP" sz="1400" dirty="0">
+                <a:solidFill>
+                  <a:schemeClr val="bg1"/>
+                </a:solidFill>
+              </a:rPr>
+              <a:t>2026/06/21  12:48    &lt;DIR&gt;          .git</a:t>
+            </a:r>
+          </a:p>
+          <a:p>
+            <a:r>
+              <a:rPr lang="en-US" altLang="ja-JP" sz="1400" dirty="0">
+                <a:solidFill>
+                  <a:schemeClr val="bg1"/>
+                </a:solidFill>
+              </a:rPr>
+              <a:t>               0 </a:t>
+            </a:r>
+            <a:r>
+              <a:rPr lang="ja-JP" altLang="en-US" sz="1400" dirty="0">
+                <a:solidFill>
+                  <a:schemeClr val="bg1"/>
+                </a:solidFill>
+              </a:rPr>
+              <a:t>個のファイル                   </a:t>
+            </a:r>
+            <a:r>
+              <a:rPr lang="en-US" altLang="ja-JP" sz="1400" dirty="0">
+                <a:solidFill>
+                  <a:schemeClr val="bg1"/>
+                </a:solidFill>
+              </a:rPr>
+              <a:t>0 </a:t>
+            </a:r>
+            <a:r>
+              <a:rPr lang="ja-JP" altLang="en-US" sz="1400" dirty="0">
+                <a:solidFill>
+                  <a:schemeClr val="bg1"/>
+                </a:solidFill>
+              </a:rPr>
+              <a:t>バイト</a:t>
+            </a:r>
+          </a:p>
+          <a:p>
+            <a:r>
+              <a:rPr lang="ja-JP" altLang="en-US" sz="1400" dirty="0">
+                <a:solidFill>
+                  <a:schemeClr val="bg1"/>
+                </a:solidFill>
+              </a:rPr>
+              <a:t>               </a:t>
+            </a:r>
+            <a:r>
+              <a:rPr lang="en-US" altLang="ja-JP" sz="1400" dirty="0">
+                <a:solidFill>
+                  <a:schemeClr val="bg1"/>
+                </a:solidFill>
+              </a:rPr>
+              <a:t>3 </a:t>
+            </a:r>
+            <a:r>
+              <a:rPr lang="ja-JP" altLang="en-US" sz="1400" dirty="0">
+                <a:solidFill>
+                  <a:schemeClr val="bg1"/>
+                </a:solidFill>
+              </a:rPr>
+              <a:t>個のディレクトリ  </a:t>
+            </a:r>
+            <a:r>
+              <a:rPr lang="en-US" altLang="ja-JP" sz="1400" dirty="0">
+                <a:solidFill>
+                  <a:schemeClr val="bg1"/>
+                </a:solidFill>
+              </a:rPr>
+              <a:t>32,260,476,928 </a:t>
+            </a:r>
+            <a:r>
+              <a:rPr lang="ja-JP" altLang="en-US" sz="1400" dirty="0">
+                <a:solidFill>
+                  <a:schemeClr val="bg1"/>
+                </a:solidFill>
+              </a:rPr>
+              <a:t>バイトの空き領域</a:t>
+            </a:r>
+            <a:endParaRPr lang="en-US" altLang="ja-JP" sz="1400" dirty="0">
+              <a:solidFill>
+                <a:schemeClr val="bg1"/>
+              </a:solidFill>
+            </a:endParaRPr>
+          </a:p>
+          <a:p>
+            <a:endParaRPr kumimoji="1" lang="en-US" altLang="ja-JP" sz="1400" dirty="0">
+              <a:solidFill>
+                <a:schemeClr val="bg1"/>
+              </a:solidFill>
+            </a:endParaRPr>
+          </a:p>
+          <a:p>
+            <a:r>
+              <a:rPr lang="en-US" altLang="ja-JP" sz="1400" dirty="0">
+                <a:solidFill>
+                  <a:schemeClr val="bg1"/>
+                </a:solidFill>
+              </a:rPr>
+              <a:t>C:\git-test&gt;</a:t>
+            </a:r>
+            <a:endParaRPr kumimoji="1" lang="ja-JP" altLang="en-US" sz="1400" dirty="0">
+              <a:solidFill>
+                <a:schemeClr val="bg1"/>
+              </a:solidFill>
+            </a:endParaRPr>
+          </a:p>
+        </p:txBody>
+      </p:sp>
+    </p:spTree>
+    <p:extLst>
+      <p:ext uri="{BB962C8B-B14F-4D97-AF65-F5344CB8AC3E}">
+        <p14:creationId xmlns:p14="http://schemas.microsoft.com/office/powerpoint/2010/main" val="3163239811"/>
+      </p:ext>
+    </p:extLst>
+  </p:cSld>
+  <p:clrMapOvr>
+    <a:masterClrMapping/>
+  </p:clrMapOvr>
+</p:sld>
+</file>
+
+<file path=ppt/slides/slide132.xml><?xml version="1.0" encoding="utf-8"?>
+<p:sld xmlns:a="http://schemas.openxmlformats.org/drawingml/2006/main" xmlns:r="http://schemas.openxmlformats.org/officeDocument/2006/relationships" xmlns:p="http://schemas.openxmlformats.org/presentationml/2006/main">
+  <p:cSld>
+    <p:spTree>
+      <p:nvGrpSpPr>
+        <p:cNvPr id="1" name="">
+          <a:extLst>
+            <a:ext uri="{FF2B5EF4-FFF2-40B4-BE49-F238E27FC236}">
+              <a16:creationId xmlns:a16="http://schemas.microsoft.com/office/drawing/2014/main" id="{981BF9C5-E02B-09C1-5F66-8CF5ECA658DC}"/>
+            </a:ext>
+          </a:extLst>
+        </p:cNvPr>
+        <p:cNvGrpSpPr/>
+        <p:nvPr/>
+      </p:nvGrpSpPr>
+      <p:grpSpPr>
+        <a:xfrm>
+          <a:off x="0" y="0"/>
+          <a:ext cx="0" cy="0"/>
+          <a:chOff x="0" y="0"/>
+          <a:chExt cx="0" cy="0"/>
+        </a:xfrm>
+      </p:grpSpPr>
+      <p:sp>
+        <p:nvSpPr>
+          <p:cNvPr id="2" name="正方形/長方形 1">
+            <a:extLst>
+              <a:ext uri="{FF2B5EF4-FFF2-40B4-BE49-F238E27FC236}">
+                <a16:creationId xmlns:a16="http://schemas.microsoft.com/office/drawing/2014/main" id="{5B6AE237-4E4E-1893-5558-0E3717051E10}"/>
+              </a:ext>
+            </a:extLst>
+          </p:cNvPr>
+          <p:cNvSpPr/>
+          <p:nvPr/>
+        </p:nvSpPr>
+        <p:spPr>
+          <a:xfrm>
+            <a:off x="3470986" y="1530218"/>
+            <a:ext cx="7200000" cy="3498982"/>
+          </a:xfrm>
+          <a:prstGeom prst="rect">
+            <a:avLst/>
+          </a:prstGeom>
+          <a:solidFill>
+            <a:schemeClr val="tx1"/>
+          </a:solidFill>
+          <a:ln>
+            <a:solidFill>
+              <a:schemeClr val="tx1"/>
+            </a:solidFill>
+          </a:ln>
+        </p:spPr>
+        <p:style>
+          <a:lnRef idx="2">
+            <a:schemeClr val="accent6"/>
+          </a:lnRef>
+          <a:fillRef idx="1">
+            <a:schemeClr val="lt1"/>
+          </a:fillRef>
+          <a:effectRef idx="0">
+            <a:schemeClr val="accent6"/>
+          </a:effectRef>
+          <a:fontRef idx="minor">
+            <a:schemeClr val="dk1"/>
+          </a:fontRef>
+        </p:style>
+        <p:txBody>
+          <a:bodyPr rtlCol="0" anchor="t"/>
+          <a:lstStyle/>
+          <a:p>
+            <a:r>
+              <a:rPr lang="en-US" altLang="ja-JP" sz="1400" dirty="0">
+                <a:solidFill>
+                  <a:schemeClr val="bg1"/>
+                </a:solidFill>
+              </a:rPr>
+              <a:t>C:\git-test&gt;echo hello &gt; test.txt</a:t>
+            </a:r>
+          </a:p>
+          <a:p>
+            <a:endParaRPr lang="en-US" altLang="ja-JP" sz="1400" dirty="0">
+              <a:solidFill>
+                <a:schemeClr val="bg1"/>
+              </a:solidFill>
+            </a:endParaRPr>
+          </a:p>
+          <a:p>
+            <a:r>
+              <a:rPr lang="en-US" altLang="ja-JP" sz="1400" dirty="0">
+                <a:solidFill>
+                  <a:schemeClr val="bg1"/>
+                </a:solidFill>
+              </a:rPr>
+              <a:t>C:\git-test&gt;dir /a</a:t>
+            </a:r>
+          </a:p>
+          <a:p>
+            <a:r>
+              <a:rPr lang="en-US" altLang="ja-JP" sz="1400" dirty="0">
+                <a:solidFill>
+                  <a:schemeClr val="bg1"/>
+                </a:solidFill>
+              </a:rPr>
+              <a:t> </a:t>
+            </a:r>
+            <a:r>
+              <a:rPr lang="ja-JP" altLang="en-US" sz="1400" dirty="0">
+                <a:solidFill>
+                  <a:schemeClr val="bg1"/>
+                </a:solidFill>
+              </a:rPr>
+              <a:t>ドライブ </a:t>
+            </a:r>
+            <a:r>
+              <a:rPr lang="en-US" altLang="ja-JP" sz="1400" dirty="0">
+                <a:solidFill>
+                  <a:schemeClr val="bg1"/>
+                </a:solidFill>
+              </a:rPr>
+              <a:t>C </a:t>
+            </a:r>
+            <a:r>
+              <a:rPr lang="ja-JP" altLang="en-US" sz="1400" dirty="0">
+                <a:solidFill>
+                  <a:schemeClr val="bg1"/>
+                </a:solidFill>
+              </a:rPr>
+              <a:t>のボリューム ラベルがありません。</a:t>
+            </a:r>
+          </a:p>
+          <a:p>
+            <a:r>
+              <a:rPr lang="ja-JP" altLang="en-US" sz="1400" dirty="0">
+                <a:solidFill>
+                  <a:schemeClr val="bg1"/>
+                </a:solidFill>
+              </a:rPr>
+              <a:t> ボリューム シリアル番号は </a:t>
+            </a:r>
+            <a:r>
+              <a:rPr lang="en-US" altLang="ja-JP" sz="1400" dirty="0">
+                <a:solidFill>
+                  <a:schemeClr val="bg1"/>
+                </a:solidFill>
+              </a:rPr>
+              <a:t>A869-D627 </a:t>
+            </a:r>
+            <a:r>
+              <a:rPr lang="ja-JP" altLang="en-US" sz="1400" dirty="0">
+                <a:solidFill>
+                  <a:schemeClr val="bg1"/>
+                </a:solidFill>
+              </a:rPr>
+              <a:t>です</a:t>
+            </a:r>
+          </a:p>
+          <a:p>
+            <a:endParaRPr lang="ja-JP" altLang="en-US" sz="1400" dirty="0">
+              <a:solidFill>
+                <a:schemeClr val="bg1"/>
+              </a:solidFill>
+            </a:endParaRPr>
+          </a:p>
+          <a:p>
+            <a:r>
+              <a:rPr lang="ja-JP" altLang="en-US" sz="1400" dirty="0">
+                <a:solidFill>
+                  <a:schemeClr val="bg1"/>
+                </a:solidFill>
+              </a:rPr>
+              <a:t> </a:t>
+            </a:r>
+            <a:r>
+              <a:rPr lang="en-US" altLang="ja-JP" sz="1400" dirty="0">
+                <a:solidFill>
+                  <a:schemeClr val="bg1"/>
+                </a:solidFill>
+              </a:rPr>
+              <a:t>C:\git-test </a:t>
+            </a:r>
+            <a:r>
+              <a:rPr lang="ja-JP" altLang="en-US" sz="1400" dirty="0">
+                <a:solidFill>
+                  <a:schemeClr val="bg1"/>
+                </a:solidFill>
+              </a:rPr>
+              <a:t>のディレクトリ</a:t>
+            </a:r>
+          </a:p>
+          <a:p>
+            <a:endParaRPr lang="ja-JP" altLang="en-US" sz="1400" dirty="0">
+              <a:solidFill>
+                <a:schemeClr val="bg1"/>
+              </a:solidFill>
+            </a:endParaRPr>
+          </a:p>
+          <a:p>
+            <a:r>
+              <a:rPr lang="en-US" altLang="ja-JP" sz="1400" dirty="0">
+                <a:solidFill>
+                  <a:schemeClr val="bg1"/>
+                </a:solidFill>
+              </a:rPr>
+              <a:t>2026/06/21  12:53    &lt;DIR&gt;          .</a:t>
+            </a:r>
+          </a:p>
+          <a:p>
+            <a:r>
+              <a:rPr lang="en-US" altLang="ja-JP" sz="1400" dirty="0">
+                <a:solidFill>
+                  <a:schemeClr val="bg1"/>
+                </a:solidFill>
+              </a:rPr>
+              <a:t>2026/06/21  09:49    &lt;DIR&gt;          ..</a:t>
+            </a:r>
+          </a:p>
+          <a:p>
+            <a:r>
+              <a:rPr lang="en-US" altLang="ja-JP" sz="1400" dirty="0">
+                <a:solidFill>
+                  <a:schemeClr val="bg1"/>
+                </a:solidFill>
+              </a:rPr>
+              <a:t>2026/06/21  12:48    &lt;DIR&gt;          .git</a:t>
+            </a:r>
+          </a:p>
+          <a:p>
+            <a:r>
+              <a:rPr lang="en-US" altLang="ja-JP" sz="1400" dirty="0">
+                <a:solidFill>
+                  <a:schemeClr val="bg1"/>
+                </a:solidFill>
+              </a:rPr>
+              <a:t>2026/06/21  12:54                12 test.txt</a:t>
+            </a:r>
+          </a:p>
+          <a:p>
+            <a:r>
+              <a:rPr lang="en-US" altLang="ja-JP" sz="1400" dirty="0">
+                <a:solidFill>
+                  <a:schemeClr val="bg1"/>
+                </a:solidFill>
+              </a:rPr>
+              <a:t>               1 </a:t>
+            </a:r>
+            <a:r>
+              <a:rPr lang="ja-JP" altLang="en-US" sz="1400" dirty="0">
+                <a:solidFill>
+                  <a:schemeClr val="bg1"/>
+                </a:solidFill>
+              </a:rPr>
+              <a:t>個のファイル                  </a:t>
+            </a:r>
+            <a:r>
+              <a:rPr lang="en-US" altLang="ja-JP" sz="1400" dirty="0">
+                <a:solidFill>
+                  <a:schemeClr val="bg1"/>
+                </a:solidFill>
+              </a:rPr>
+              <a:t>12 </a:t>
+            </a:r>
+            <a:r>
+              <a:rPr lang="ja-JP" altLang="en-US" sz="1400" dirty="0">
+                <a:solidFill>
+                  <a:schemeClr val="bg1"/>
+                </a:solidFill>
+              </a:rPr>
+              <a:t>バイト</a:t>
+            </a:r>
+          </a:p>
+          <a:p>
+            <a:r>
+              <a:rPr lang="ja-JP" altLang="en-US" sz="1400" dirty="0">
+                <a:solidFill>
+                  <a:schemeClr val="bg1"/>
+                </a:solidFill>
+              </a:rPr>
+              <a:t>               </a:t>
+            </a:r>
+            <a:r>
+              <a:rPr lang="en-US" altLang="ja-JP" sz="1400" dirty="0">
+                <a:solidFill>
+                  <a:schemeClr val="bg1"/>
+                </a:solidFill>
+              </a:rPr>
+              <a:t>3 </a:t>
+            </a:r>
+            <a:r>
+              <a:rPr lang="ja-JP" altLang="en-US" sz="1400" dirty="0">
+                <a:solidFill>
+                  <a:schemeClr val="bg1"/>
+                </a:solidFill>
+              </a:rPr>
+              <a:t>個のディレクトリ  </a:t>
+            </a:r>
+            <a:r>
+              <a:rPr lang="en-US" altLang="ja-JP" sz="1400" dirty="0">
+                <a:solidFill>
+                  <a:schemeClr val="bg1"/>
+                </a:solidFill>
+              </a:rPr>
+              <a:t>32,251,666,432 </a:t>
+            </a:r>
+            <a:r>
+              <a:rPr lang="ja-JP" altLang="en-US" sz="1400" dirty="0">
+                <a:solidFill>
+                  <a:schemeClr val="bg1"/>
+                </a:solidFill>
+              </a:rPr>
+              <a:t>バイトの空き領域</a:t>
+            </a:r>
+            <a:endParaRPr lang="en-US" altLang="ja-JP" sz="1400" dirty="0">
+              <a:solidFill>
+                <a:schemeClr val="bg1"/>
+              </a:solidFill>
+            </a:endParaRPr>
+          </a:p>
+          <a:p>
+            <a:endParaRPr kumimoji="1" lang="en-US" altLang="ja-JP" sz="1400" dirty="0">
+              <a:solidFill>
+                <a:schemeClr val="bg1"/>
+              </a:solidFill>
+            </a:endParaRPr>
+          </a:p>
+          <a:p>
+            <a:r>
+              <a:rPr lang="en-US" altLang="ja-JP" sz="1400" dirty="0">
+                <a:solidFill>
+                  <a:schemeClr val="bg1"/>
+                </a:solidFill>
+              </a:rPr>
+              <a:t>C:\git-test&gt;</a:t>
+            </a:r>
+            <a:endParaRPr kumimoji="1" lang="ja-JP" altLang="en-US" sz="1400" dirty="0">
+              <a:solidFill>
+                <a:schemeClr val="bg1"/>
+              </a:solidFill>
+            </a:endParaRPr>
+          </a:p>
+        </p:txBody>
+      </p:sp>
+    </p:spTree>
+    <p:extLst>
+      <p:ext uri="{BB962C8B-B14F-4D97-AF65-F5344CB8AC3E}">
+        <p14:creationId xmlns:p14="http://schemas.microsoft.com/office/powerpoint/2010/main" val="3412231482"/>
+      </p:ext>
+    </p:extLst>
+  </p:cSld>
+  <p:clrMapOvr>
+    <a:masterClrMapping/>
+  </p:clrMapOvr>
+</p:sld>
+</file>
+
+<file path=ppt/slides/slide133.xml><?xml version="1.0" encoding="utf-8"?>
+<p:sld xmlns:a="http://schemas.openxmlformats.org/drawingml/2006/main" xmlns:r="http://schemas.openxmlformats.org/officeDocument/2006/relationships" xmlns:p="http://schemas.openxmlformats.org/presentationml/2006/main">
+  <p:cSld>
+    <p:spTree>
+      <p:nvGrpSpPr>
+        <p:cNvPr id="1" name="">
+          <a:extLst>
+            <a:ext uri="{FF2B5EF4-FFF2-40B4-BE49-F238E27FC236}">
+              <a16:creationId xmlns:a16="http://schemas.microsoft.com/office/drawing/2014/main" id="{CF7F78A9-831F-CD8B-1F8C-47A315A81723}"/>
+            </a:ext>
+          </a:extLst>
+        </p:cNvPr>
+        <p:cNvGrpSpPr/>
+        <p:nvPr/>
+      </p:nvGrpSpPr>
+      <p:grpSpPr>
+        <a:xfrm>
+          <a:off x="0" y="0"/>
+          <a:ext cx="0" cy="0"/>
+          <a:chOff x="0" y="0"/>
+          <a:chExt cx="0" cy="0"/>
+        </a:xfrm>
+      </p:grpSpPr>
+      <p:sp>
+        <p:nvSpPr>
+          <p:cNvPr id="2" name="正方形/長方形 1">
+            <a:extLst>
+              <a:ext uri="{FF2B5EF4-FFF2-40B4-BE49-F238E27FC236}">
+                <a16:creationId xmlns:a16="http://schemas.microsoft.com/office/drawing/2014/main" id="{B3766FAB-F82B-5251-791B-DC66A0DC3C86}"/>
+              </a:ext>
+            </a:extLst>
+          </p:cNvPr>
+          <p:cNvSpPr/>
+          <p:nvPr/>
+        </p:nvSpPr>
+        <p:spPr>
+          <a:xfrm>
+            <a:off x="3470986" y="1586201"/>
+            <a:ext cx="7200000" cy="2631235"/>
+          </a:xfrm>
+          <a:prstGeom prst="rect">
+            <a:avLst/>
+          </a:prstGeom>
+          <a:solidFill>
+            <a:schemeClr val="tx1"/>
+          </a:solidFill>
+          <a:ln>
+            <a:solidFill>
+              <a:schemeClr val="tx1"/>
+            </a:solidFill>
+          </a:ln>
+        </p:spPr>
+        <p:style>
+          <a:lnRef idx="2">
+            <a:schemeClr val="accent6"/>
+          </a:lnRef>
+          <a:fillRef idx="1">
+            <a:schemeClr val="lt1"/>
+          </a:fillRef>
+          <a:effectRef idx="0">
+            <a:schemeClr val="accent6"/>
+          </a:effectRef>
+          <a:fontRef idx="minor">
+            <a:schemeClr val="dk1"/>
+          </a:fontRef>
+        </p:style>
+        <p:txBody>
+          <a:bodyPr rtlCol="0" anchor="t"/>
+          <a:lstStyle/>
+          <a:p>
+            <a:r>
+              <a:rPr lang="en-US" altLang="ja-JP" sz="1400" dirty="0">
+                <a:solidFill>
+                  <a:schemeClr val="bg1"/>
+                </a:solidFill>
+              </a:rPr>
+              <a:t>C:\git-test&gt;git status</a:t>
+            </a:r>
+          </a:p>
+          <a:p>
+            <a:r>
+              <a:rPr lang="en-US" altLang="ja-JP" sz="1400" dirty="0">
+                <a:solidFill>
+                  <a:schemeClr val="bg1"/>
+                </a:solidFill>
+              </a:rPr>
+              <a:t>On branch master</a:t>
+            </a:r>
+          </a:p>
+          <a:p>
+            <a:endParaRPr lang="en-US" altLang="ja-JP" sz="1400" dirty="0">
+              <a:solidFill>
+                <a:schemeClr val="bg1"/>
+              </a:solidFill>
+            </a:endParaRPr>
+          </a:p>
+          <a:p>
+            <a:r>
+              <a:rPr lang="en-US" altLang="ja-JP" sz="1400" dirty="0">
+                <a:solidFill>
+                  <a:schemeClr val="bg1"/>
+                </a:solidFill>
+              </a:rPr>
+              <a:t>No commits yet</a:t>
+            </a:r>
+          </a:p>
+          <a:p>
+            <a:endParaRPr lang="en-US" altLang="ja-JP" sz="1400" dirty="0">
+              <a:solidFill>
+                <a:schemeClr val="bg1"/>
+              </a:solidFill>
+            </a:endParaRPr>
+          </a:p>
+          <a:p>
+            <a:r>
+              <a:rPr lang="en-US" altLang="ja-JP" sz="1400" dirty="0">
+                <a:solidFill>
+                  <a:schemeClr val="bg1"/>
+                </a:solidFill>
+              </a:rPr>
+              <a:t>Untracked files:</a:t>
+            </a:r>
+          </a:p>
+          <a:p>
+            <a:r>
+              <a:rPr lang="en-US" altLang="ja-JP" sz="1400" dirty="0">
+                <a:solidFill>
+                  <a:schemeClr val="bg1"/>
+                </a:solidFill>
+              </a:rPr>
+              <a:t>  (use "git add &lt;file&gt;..." to include in what will be committed)</a:t>
+            </a:r>
+          </a:p>
+          <a:p>
+            <a:r>
+              <a:rPr lang="en-US" altLang="ja-JP" sz="1400" dirty="0">
+                <a:solidFill>
+                  <a:schemeClr val="bg1"/>
+                </a:solidFill>
+              </a:rPr>
+              <a:t>        test.txt</a:t>
+            </a:r>
+          </a:p>
+          <a:p>
+            <a:endParaRPr lang="en-US" altLang="ja-JP" sz="1400" dirty="0">
+              <a:solidFill>
+                <a:schemeClr val="bg1"/>
+              </a:solidFill>
+            </a:endParaRPr>
+          </a:p>
+          <a:p>
+            <a:r>
+              <a:rPr lang="en-US" altLang="ja-JP" sz="1400" dirty="0">
+                <a:solidFill>
+                  <a:schemeClr val="bg1"/>
+                </a:solidFill>
+              </a:rPr>
+              <a:t>nothing added to commit but untracked files present (use "git add" to track)</a:t>
+            </a:r>
+          </a:p>
+          <a:p>
+            <a:endParaRPr kumimoji="1" lang="en-US" altLang="ja-JP" sz="1400" dirty="0">
+              <a:solidFill>
+                <a:schemeClr val="bg1"/>
+              </a:solidFill>
+            </a:endParaRPr>
+          </a:p>
+          <a:p>
+            <a:r>
+              <a:rPr lang="en-US" altLang="ja-JP" sz="1400" dirty="0">
+                <a:solidFill>
+                  <a:schemeClr val="bg1"/>
+                </a:solidFill>
+              </a:rPr>
+              <a:t>C:\git-test&gt;</a:t>
+            </a:r>
+            <a:endParaRPr kumimoji="1" lang="ja-JP" altLang="en-US" sz="1400" dirty="0">
+              <a:solidFill>
+                <a:schemeClr val="bg1"/>
+              </a:solidFill>
+            </a:endParaRPr>
+          </a:p>
+        </p:txBody>
+      </p:sp>
+    </p:spTree>
+    <p:extLst>
+      <p:ext uri="{BB962C8B-B14F-4D97-AF65-F5344CB8AC3E}">
+        <p14:creationId xmlns:p14="http://schemas.microsoft.com/office/powerpoint/2010/main" val="1999855878"/>
+      </p:ext>
+    </p:extLst>
+  </p:cSld>
+  <p:clrMapOvr>
+    <a:masterClrMapping/>
+  </p:clrMapOvr>
+</p:sld>
+</file>
+
+<file path=ppt/slides/slide134.xml><?xml version="1.0" encoding="utf-8"?>
+<p:sld xmlns:a="http://schemas.openxmlformats.org/drawingml/2006/main" xmlns:r="http://schemas.openxmlformats.org/officeDocument/2006/relationships" xmlns:p="http://schemas.openxmlformats.org/presentationml/2006/main">
+  <p:cSld>
+    <p:spTree>
+      <p:nvGrpSpPr>
+        <p:cNvPr id="1" name="">
+          <a:extLst>
+            <a:ext uri="{FF2B5EF4-FFF2-40B4-BE49-F238E27FC236}">
+              <a16:creationId xmlns:a16="http://schemas.microsoft.com/office/drawing/2014/main" id="{7A1BFD28-A982-97FA-1FAA-8C1C51FBBD62}"/>
+            </a:ext>
+          </a:extLst>
+        </p:cNvPr>
+        <p:cNvGrpSpPr/>
+        <p:nvPr/>
+      </p:nvGrpSpPr>
+      <p:grpSpPr>
+        <a:xfrm>
+          <a:off x="0" y="0"/>
+          <a:ext cx="0" cy="0"/>
+          <a:chOff x="0" y="0"/>
+          <a:chExt cx="0" cy="0"/>
+        </a:xfrm>
+      </p:grpSpPr>
+      <p:sp>
+        <p:nvSpPr>
+          <p:cNvPr id="2" name="正方形/長方形 1">
+            <a:extLst>
+              <a:ext uri="{FF2B5EF4-FFF2-40B4-BE49-F238E27FC236}">
+                <a16:creationId xmlns:a16="http://schemas.microsoft.com/office/drawing/2014/main" id="{EF191B43-DBAA-8341-5371-A13405C8537C}"/>
+              </a:ext>
+            </a:extLst>
+          </p:cNvPr>
+          <p:cNvSpPr/>
+          <p:nvPr/>
+        </p:nvSpPr>
+        <p:spPr>
+          <a:xfrm>
+            <a:off x="3470986" y="1530220"/>
+            <a:ext cx="7200000" cy="793102"/>
+          </a:xfrm>
+          <a:prstGeom prst="rect">
+            <a:avLst/>
+          </a:prstGeom>
+          <a:solidFill>
+            <a:schemeClr val="tx1"/>
+          </a:solidFill>
+          <a:ln>
+            <a:solidFill>
+              <a:schemeClr val="tx1"/>
+            </a:solidFill>
+          </a:ln>
+        </p:spPr>
+        <p:style>
+          <a:lnRef idx="2">
+            <a:schemeClr val="accent6"/>
+          </a:lnRef>
+          <a:fillRef idx="1">
+            <a:schemeClr val="lt1"/>
+          </a:fillRef>
+          <a:effectRef idx="0">
+            <a:schemeClr val="accent6"/>
+          </a:effectRef>
+          <a:fontRef idx="minor">
+            <a:schemeClr val="dk1"/>
+          </a:fontRef>
+        </p:style>
+        <p:txBody>
+          <a:bodyPr rtlCol="0" anchor="t"/>
+          <a:lstStyle/>
+          <a:p>
+            <a:r>
+              <a:rPr lang="en-US" altLang="ja-JP" sz="1400" dirty="0">
+                <a:solidFill>
+                  <a:schemeClr val="bg1"/>
+                </a:solidFill>
+              </a:rPr>
+              <a:t>C:\git-test&gt;git add test.txt</a:t>
+            </a:r>
+          </a:p>
+          <a:p>
+            <a:endParaRPr lang="en-US" altLang="ja-JP" sz="1400" dirty="0">
+              <a:solidFill>
+                <a:schemeClr val="bg1"/>
+              </a:solidFill>
+            </a:endParaRPr>
+          </a:p>
+          <a:p>
+            <a:r>
+              <a:rPr lang="en-US" altLang="ja-JP" sz="1400" dirty="0">
+                <a:solidFill>
+                  <a:schemeClr val="bg1"/>
+                </a:solidFill>
+              </a:rPr>
+              <a:t>C:\git-test&gt;</a:t>
+            </a:r>
+            <a:endParaRPr kumimoji="1" lang="ja-JP" altLang="en-US" sz="1400" dirty="0">
+              <a:solidFill>
+                <a:schemeClr val="bg1"/>
+              </a:solidFill>
+            </a:endParaRPr>
+          </a:p>
+        </p:txBody>
+      </p:sp>
+    </p:spTree>
+    <p:extLst>
+      <p:ext uri="{BB962C8B-B14F-4D97-AF65-F5344CB8AC3E}">
+        <p14:creationId xmlns:p14="http://schemas.microsoft.com/office/powerpoint/2010/main" val="3218276701"/>
+      </p:ext>
+    </p:extLst>
+  </p:cSld>
+  <p:clrMapOvr>
+    <a:masterClrMapping/>
+  </p:clrMapOvr>
+</p:sld>
+</file>
+
+<file path=ppt/slides/slide135.xml><?xml version="1.0" encoding="utf-8"?>
+<p:sld xmlns:a="http://schemas.openxmlformats.org/drawingml/2006/main" xmlns:r="http://schemas.openxmlformats.org/officeDocument/2006/relationships" xmlns:p="http://schemas.openxmlformats.org/presentationml/2006/main">
+  <p:cSld>
+    <p:spTree>
+      <p:nvGrpSpPr>
+        <p:cNvPr id="1" name="">
+          <a:extLst>
+            <a:ext uri="{FF2B5EF4-FFF2-40B4-BE49-F238E27FC236}">
+              <a16:creationId xmlns:a16="http://schemas.microsoft.com/office/drawing/2014/main" id="{A541EC57-574E-505F-899A-EE0835DF7A7E}"/>
+            </a:ext>
+          </a:extLst>
+        </p:cNvPr>
+        <p:cNvGrpSpPr/>
+        <p:nvPr/>
+      </p:nvGrpSpPr>
+      <p:grpSpPr>
+        <a:xfrm>
+          <a:off x="0" y="0"/>
+          <a:ext cx="0" cy="0"/>
+          <a:chOff x="0" y="0"/>
+          <a:chExt cx="0" cy="0"/>
+        </a:xfrm>
+      </p:grpSpPr>
+      <p:sp>
+        <p:nvSpPr>
+          <p:cNvPr id="2" name="正方形/長方形 1">
+            <a:extLst>
+              <a:ext uri="{FF2B5EF4-FFF2-40B4-BE49-F238E27FC236}">
+                <a16:creationId xmlns:a16="http://schemas.microsoft.com/office/drawing/2014/main" id="{4C66B004-6E66-EF6B-84F5-C204982FF942}"/>
+              </a:ext>
+            </a:extLst>
+          </p:cNvPr>
+          <p:cNvSpPr/>
+          <p:nvPr/>
+        </p:nvSpPr>
+        <p:spPr>
+          <a:xfrm>
+            <a:off x="3470986" y="1530219"/>
+            <a:ext cx="7200000" cy="1380931"/>
+          </a:xfrm>
+          <a:prstGeom prst="rect">
+            <a:avLst/>
+          </a:prstGeom>
+          <a:solidFill>
+            <a:schemeClr val="tx1"/>
+          </a:solidFill>
+          <a:ln>
+            <a:solidFill>
+              <a:schemeClr val="tx1"/>
+            </a:solidFill>
+          </a:ln>
+        </p:spPr>
+        <p:style>
+          <a:lnRef idx="2">
+            <a:schemeClr val="accent6"/>
+          </a:lnRef>
+          <a:fillRef idx="1">
+            <a:schemeClr val="lt1"/>
+          </a:fillRef>
+          <a:effectRef idx="0">
+            <a:schemeClr val="accent6"/>
+          </a:effectRef>
+          <a:fontRef idx="minor">
+            <a:schemeClr val="dk1"/>
+          </a:fontRef>
+        </p:style>
+        <p:txBody>
+          <a:bodyPr rtlCol="0" anchor="t"/>
+          <a:lstStyle/>
+          <a:p>
+            <a:r>
+              <a:rPr lang="en-US" altLang="ja-JP" sz="1400" dirty="0">
+                <a:solidFill>
+                  <a:schemeClr val="bg1"/>
+                </a:solidFill>
+              </a:rPr>
+              <a:t>C:\git-test&gt;git commit -m "</a:t>
+            </a:r>
+            <a:r>
+              <a:rPr lang="ja-JP" altLang="en-US" sz="1400" dirty="0">
+                <a:solidFill>
+                  <a:schemeClr val="bg1"/>
+                </a:solidFill>
+              </a:rPr>
+              <a:t>テストデータ登録</a:t>
+            </a:r>
+            <a:r>
+              <a:rPr lang="en-US" altLang="ja-JP" sz="1400" dirty="0">
+                <a:solidFill>
+                  <a:schemeClr val="bg1"/>
+                </a:solidFill>
+              </a:rPr>
+              <a:t>"</a:t>
+            </a:r>
+          </a:p>
+          <a:p>
+            <a:r>
+              <a:rPr lang="en-US" altLang="ja-JP" sz="1400" dirty="0">
+                <a:solidFill>
+                  <a:schemeClr val="bg1"/>
+                </a:solidFill>
+              </a:rPr>
+              <a:t>[master (root-commit) 9e326ae] </a:t>
+            </a:r>
+            <a:r>
+              <a:rPr lang="ja-JP" altLang="en-US" sz="1400" dirty="0">
+                <a:solidFill>
+                  <a:schemeClr val="bg1"/>
+                </a:solidFill>
+              </a:rPr>
+              <a:t>テストデータ登録</a:t>
+            </a:r>
+          </a:p>
+          <a:p>
+            <a:r>
+              <a:rPr lang="ja-JP" altLang="en-US" sz="1400" dirty="0">
+                <a:solidFill>
+                  <a:schemeClr val="bg1"/>
+                </a:solidFill>
+              </a:rPr>
+              <a:t> </a:t>
+            </a:r>
+            <a:r>
+              <a:rPr lang="en-US" altLang="ja-JP" sz="1400" dirty="0">
+                <a:solidFill>
+                  <a:schemeClr val="bg1"/>
+                </a:solidFill>
+              </a:rPr>
+              <a:t>1 file changed, 1 insertion(+)</a:t>
+            </a:r>
+          </a:p>
+          <a:p>
+            <a:r>
+              <a:rPr lang="en-US" altLang="ja-JP" sz="1400" dirty="0">
+                <a:solidFill>
+                  <a:schemeClr val="bg1"/>
+                </a:solidFill>
+              </a:rPr>
+              <a:t> create mode 100644 test.txt</a:t>
+            </a:r>
+          </a:p>
+          <a:p>
+            <a:endParaRPr lang="en-US" altLang="ja-JP" sz="1400" dirty="0">
+              <a:solidFill>
+                <a:schemeClr val="bg1"/>
+              </a:solidFill>
+            </a:endParaRPr>
+          </a:p>
+          <a:p>
+            <a:r>
+              <a:rPr lang="en-US" altLang="ja-JP" sz="1400" dirty="0">
+                <a:solidFill>
+                  <a:schemeClr val="bg1"/>
+                </a:solidFill>
+              </a:rPr>
+              <a:t>C:\git-test&gt;</a:t>
+            </a:r>
+            <a:endParaRPr kumimoji="1" lang="ja-JP" altLang="en-US" sz="1400" dirty="0">
+              <a:solidFill>
+                <a:schemeClr val="bg1"/>
+              </a:solidFill>
+            </a:endParaRPr>
+          </a:p>
+        </p:txBody>
+      </p:sp>
+    </p:spTree>
+    <p:extLst>
+      <p:ext uri="{BB962C8B-B14F-4D97-AF65-F5344CB8AC3E}">
+        <p14:creationId xmlns:p14="http://schemas.microsoft.com/office/powerpoint/2010/main" val="2830637044"/>
+      </p:ext>
+    </p:extLst>
+  </p:cSld>
+  <p:clrMapOvr>
+    <a:masterClrMapping/>
+  </p:clrMapOvr>
+</p:sld>
+</file>
+
+<file path=ppt/slides/slide136.xml><?xml version="1.0" encoding="utf-8"?>
+<p:sld xmlns:a="http://schemas.openxmlformats.org/drawingml/2006/main" xmlns:r="http://schemas.openxmlformats.org/officeDocument/2006/relationships" xmlns:p="http://schemas.openxmlformats.org/presentationml/2006/main">
+  <p:cSld>
+    <p:spTree>
+      <p:nvGrpSpPr>
+        <p:cNvPr id="1" name="">
+          <a:extLst>
+            <a:ext uri="{FF2B5EF4-FFF2-40B4-BE49-F238E27FC236}">
+              <a16:creationId xmlns:a16="http://schemas.microsoft.com/office/drawing/2014/main" id="{0BB99027-BF16-D5DE-0CE0-52E78B5EAC16}"/>
+            </a:ext>
+          </a:extLst>
+        </p:cNvPr>
+        <p:cNvGrpSpPr/>
+        <p:nvPr/>
+      </p:nvGrpSpPr>
+      <p:grpSpPr>
+        <a:xfrm>
+          <a:off x="0" y="0"/>
+          <a:ext cx="0" cy="0"/>
+          <a:chOff x="0" y="0"/>
+          <a:chExt cx="0" cy="0"/>
+        </a:xfrm>
+      </p:grpSpPr>
+    </p:spTree>
+    <p:extLst>
+      <p:ext uri="{BB962C8B-B14F-4D97-AF65-F5344CB8AC3E}">
+        <p14:creationId xmlns:p14="http://schemas.microsoft.com/office/powerpoint/2010/main" val="2779613218"/>
+      </p:ext>
+    </p:extLst>
+  </p:cSld>
+  <p:clrMapOvr>
+    <a:masterClrMapping/>
+  </p:clrMapOvr>
+</p:sld>
+</file>
+
+<file path=ppt/slides/slide137.xml><?xml version="1.0" encoding="utf-8"?>
+<p:sld xmlns:a="http://schemas.openxmlformats.org/drawingml/2006/main" xmlns:r="http://schemas.openxmlformats.org/officeDocument/2006/relationships" xmlns:p="http://schemas.openxmlformats.org/presentationml/2006/main">
+  <p:cSld>
+    <p:spTree>
+      <p:nvGrpSpPr>
+        <p:cNvPr id="1" name="">
+          <a:extLst>
+            <a:ext uri="{FF2B5EF4-FFF2-40B4-BE49-F238E27FC236}">
+              <a16:creationId xmlns:a16="http://schemas.microsoft.com/office/drawing/2014/main" id="{2210D1BC-5020-1241-5571-C91E2E24724E}"/>
+            </a:ext>
+          </a:extLst>
+        </p:cNvPr>
+        <p:cNvGrpSpPr/>
+        <p:nvPr/>
+      </p:nvGrpSpPr>
+      <p:grpSpPr>
+        <a:xfrm>
+          <a:off x="0" y="0"/>
+          <a:ext cx="0" cy="0"/>
+          <a:chOff x="0" y="0"/>
+          <a:chExt cx="0" cy="0"/>
+        </a:xfrm>
+      </p:grpSpPr>
+      <p:sp>
+        <p:nvSpPr>
+          <p:cNvPr id="2" name="正方形/長方形 1">
+            <a:extLst>
+              <a:ext uri="{FF2B5EF4-FFF2-40B4-BE49-F238E27FC236}">
+                <a16:creationId xmlns:a16="http://schemas.microsoft.com/office/drawing/2014/main" id="{A92ADDFE-2D55-EA3F-A83C-EA5075717876}"/>
+              </a:ext>
+            </a:extLst>
+          </p:cNvPr>
+          <p:cNvSpPr/>
+          <p:nvPr/>
+        </p:nvSpPr>
+        <p:spPr>
+          <a:xfrm>
+            <a:off x="3470986" y="1530219"/>
+            <a:ext cx="7200000" cy="2230017"/>
+          </a:xfrm>
+          <a:prstGeom prst="rect">
+            <a:avLst/>
+          </a:prstGeom>
+          <a:solidFill>
+            <a:schemeClr val="tx1"/>
+          </a:solidFill>
+          <a:ln>
+            <a:solidFill>
+              <a:schemeClr val="tx1"/>
+            </a:solidFill>
+          </a:ln>
+        </p:spPr>
+        <p:style>
+          <a:lnRef idx="2">
+            <a:schemeClr val="accent6"/>
+          </a:lnRef>
+          <a:fillRef idx="1">
+            <a:schemeClr val="lt1"/>
+          </a:fillRef>
+          <a:effectRef idx="0">
+            <a:schemeClr val="accent6"/>
+          </a:effectRef>
+          <a:fontRef idx="minor">
+            <a:schemeClr val="dk1"/>
+          </a:fontRef>
+        </p:style>
+        <p:txBody>
+          <a:bodyPr rtlCol="0" anchor="t"/>
+          <a:lstStyle/>
+          <a:p>
+            <a:r>
+              <a:rPr lang="en-US" altLang="ja-JP" sz="1400" dirty="0">
+                <a:solidFill>
+                  <a:schemeClr val="bg1"/>
+                </a:solidFill>
+              </a:rPr>
+              <a:t>C:\&gt;git clone https://github.com/nishida2073/git-test-remote.git</a:t>
+            </a:r>
+          </a:p>
+          <a:p>
+            <a:r>
+              <a:rPr lang="en-US" altLang="ja-JP" sz="1400" dirty="0">
+                <a:solidFill>
+                  <a:schemeClr val="bg1"/>
+                </a:solidFill>
+              </a:rPr>
+              <a:t>Cloning into 'git-test-remote'...</a:t>
+            </a:r>
+          </a:p>
+          <a:p>
+            <a:r>
+              <a:rPr lang="en-US" altLang="ja-JP" sz="1400" dirty="0">
+                <a:solidFill>
+                  <a:schemeClr val="bg1"/>
+                </a:solidFill>
+              </a:rPr>
+              <a:t>warning: You appear to have cloned an empty repository.</a:t>
+            </a:r>
+          </a:p>
+          <a:p>
+            <a:endParaRPr lang="en-US" altLang="ja-JP" sz="1400" dirty="0">
+              <a:solidFill>
+                <a:schemeClr val="bg1"/>
+              </a:solidFill>
+            </a:endParaRPr>
+          </a:p>
+          <a:p>
+            <a:r>
+              <a:rPr lang="en-US" altLang="ja-JP" sz="1400" dirty="0">
+                <a:solidFill>
+                  <a:schemeClr val="bg1"/>
+                </a:solidFill>
+              </a:rPr>
+              <a:t>C:\&gt;</a:t>
+            </a:r>
+            <a:endParaRPr kumimoji="1" lang="ja-JP" altLang="en-US" sz="1400" dirty="0">
+              <a:solidFill>
+                <a:schemeClr val="bg1"/>
+              </a:solidFill>
+            </a:endParaRPr>
+          </a:p>
+        </p:txBody>
+      </p:sp>
+    </p:spTree>
+    <p:extLst>
+      <p:ext uri="{BB962C8B-B14F-4D97-AF65-F5344CB8AC3E}">
+        <p14:creationId xmlns:p14="http://schemas.microsoft.com/office/powerpoint/2010/main" val="2539621988"/>
+      </p:ext>
+    </p:extLst>
+  </p:cSld>
+  <p:clrMapOvr>
+    <a:masterClrMapping/>
+  </p:clrMapOvr>
+</p:sld>
+</file>
+
+<file path=ppt/slides/slide138.xml><?xml version="1.0" encoding="utf-8"?>
+<p:sld xmlns:a="http://schemas.openxmlformats.org/drawingml/2006/main" xmlns:r="http://schemas.openxmlformats.org/officeDocument/2006/relationships" xmlns:p="http://schemas.openxmlformats.org/presentationml/2006/main">
+  <p:cSld>
+    <p:spTree>
+      <p:nvGrpSpPr>
+        <p:cNvPr id="1" name="">
+          <a:extLst>
+            <a:ext uri="{FF2B5EF4-FFF2-40B4-BE49-F238E27FC236}">
+              <a16:creationId xmlns:a16="http://schemas.microsoft.com/office/drawing/2014/main" id="{070BCA65-953D-4A6A-C002-71E8A1D7475C}"/>
+            </a:ext>
+          </a:extLst>
+        </p:cNvPr>
+        <p:cNvGrpSpPr/>
+        <p:nvPr/>
+      </p:nvGrpSpPr>
+      <p:grpSpPr>
+        <a:xfrm>
+          <a:off x="0" y="0"/>
+          <a:ext cx="0" cy="0"/>
+          <a:chOff x="0" y="0"/>
+          <a:chExt cx="0" cy="0"/>
+        </a:xfrm>
+      </p:grpSpPr>
+      <p:sp>
+        <p:nvSpPr>
+          <p:cNvPr id="2" name="正方形/長方形 1">
+            <a:extLst>
+              <a:ext uri="{FF2B5EF4-FFF2-40B4-BE49-F238E27FC236}">
+                <a16:creationId xmlns:a16="http://schemas.microsoft.com/office/drawing/2014/main" id="{9561DF63-5595-6139-7880-96905D96EF97}"/>
+              </a:ext>
+            </a:extLst>
+          </p:cNvPr>
+          <p:cNvSpPr/>
+          <p:nvPr/>
+        </p:nvSpPr>
+        <p:spPr>
+          <a:xfrm>
+            <a:off x="3470986" y="1530220"/>
+            <a:ext cx="7200000" cy="1260000"/>
+          </a:xfrm>
+          <a:prstGeom prst="rect">
+            <a:avLst/>
+          </a:prstGeom>
+          <a:solidFill>
+            <a:schemeClr val="tx1"/>
+          </a:solidFill>
+          <a:ln>
+            <a:solidFill>
+              <a:schemeClr val="tx1"/>
+            </a:solidFill>
+          </a:ln>
+        </p:spPr>
+        <p:style>
+          <a:lnRef idx="2">
+            <a:schemeClr val="accent6"/>
+          </a:lnRef>
+          <a:fillRef idx="1">
+            <a:schemeClr val="lt1"/>
+          </a:fillRef>
+          <a:effectRef idx="0">
+            <a:schemeClr val="accent6"/>
+          </a:effectRef>
+          <a:fontRef idx="minor">
+            <a:schemeClr val="dk1"/>
+          </a:fontRef>
+        </p:style>
+        <p:txBody>
+          <a:bodyPr rtlCol="0" anchor="t"/>
+          <a:lstStyle/>
+          <a:p>
+            <a:endParaRPr kumimoji="1" lang="ja-JP" altLang="en-US" sz="1400" dirty="0">
+              <a:solidFill>
+                <a:schemeClr val="bg1"/>
+              </a:solidFill>
+            </a:endParaRPr>
+          </a:p>
+        </p:txBody>
+      </p:sp>
+    </p:spTree>
+    <p:extLst>
+      <p:ext uri="{BB962C8B-B14F-4D97-AF65-F5344CB8AC3E}">
+        <p14:creationId xmlns:p14="http://schemas.microsoft.com/office/powerpoint/2010/main" val="2480898616"/>
+      </p:ext>
+    </p:extLst>
+  </p:cSld>
+  <p:clrMapOvr>
+    <a:masterClrMapping/>
+  </p:clrMapOvr>
+</p:sld>
+</file>
+
+<file path=ppt/slides/slide139.xml><?xml version="1.0" encoding="utf-8"?>
+<p:sld xmlns:a="http://schemas.openxmlformats.org/drawingml/2006/main" xmlns:r="http://schemas.openxmlformats.org/officeDocument/2006/relationships" xmlns:p="http://schemas.openxmlformats.org/presentationml/2006/main">
+  <p:cSld>
+    <p:spTree>
+      <p:nvGrpSpPr>
+        <p:cNvPr id="1" name="">
+          <a:extLst>
+            <a:ext uri="{FF2B5EF4-FFF2-40B4-BE49-F238E27FC236}">
+              <a16:creationId xmlns:a16="http://schemas.microsoft.com/office/drawing/2014/main" id="{51EE2214-693A-2BB0-8489-F7BEA02B61FA}"/>
+            </a:ext>
+          </a:extLst>
+        </p:cNvPr>
+        <p:cNvGrpSpPr/>
+        <p:nvPr/>
+      </p:nvGrpSpPr>
+      <p:grpSpPr>
+        <a:xfrm>
+          <a:off x="0" y="0"/>
+          <a:ext cx="0" cy="0"/>
+          <a:chOff x="0" y="0"/>
+          <a:chExt cx="0" cy="0"/>
+        </a:xfrm>
+      </p:grpSpPr>
+      <p:sp>
+        <p:nvSpPr>
+          <p:cNvPr id="2" name="正方形/長方形 1">
+            <a:extLst>
+              <a:ext uri="{FF2B5EF4-FFF2-40B4-BE49-F238E27FC236}">
+                <a16:creationId xmlns:a16="http://schemas.microsoft.com/office/drawing/2014/main" id="{FD28412C-31CF-E482-8941-E80B7FA268F3}"/>
+              </a:ext>
+            </a:extLst>
+          </p:cNvPr>
+          <p:cNvSpPr/>
+          <p:nvPr/>
+        </p:nvSpPr>
+        <p:spPr>
+          <a:xfrm>
+            <a:off x="3470986" y="1530220"/>
+            <a:ext cx="7200000" cy="1260000"/>
+          </a:xfrm>
+          <a:prstGeom prst="rect">
+            <a:avLst/>
+          </a:prstGeom>
+          <a:solidFill>
+            <a:schemeClr val="tx1"/>
+          </a:solidFill>
+          <a:ln>
+            <a:solidFill>
+              <a:schemeClr val="tx1"/>
+            </a:solidFill>
+          </a:ln>
+        </p:spPr>
+        <p:style>
+          <a:lnRef idx="2">
+            <a:schemeClr val="accent6"/>
+          </a:lnRef>
+          <a:fillRef idx="1">
+            <a:schemeClr val="lt1"/>
+          </a:fillRef>
+          <a:effectRef idx="0">
+            <a:schemeClr val="accent6"/>
+          </a:effectRef>
+          <a:fontRef idx="minor">
+            <a:schemeClr val="dk1"/>
+          </a:fontRef>
+        </p:style>
+        <p:txBody>
+          <a:bodyPr rtlCol="0" anchor="t"/>
+          <a:lstStyle/>
+          <a:p>
+            <a:endParaRPr kumimoji="1" lang="ja-JP" altLang="en-US" sz="1400" dirty="0">
+              <a:solidFill>
+                <a:schemeClr val="bg1"/>
+              </a:solidFill>
+            </a:endParaRPr>
+          </a:p>
+        </p:txBody>
+      </p:sp>
+    </p:spTree>
+    <p:extLst>
+      <p:ext uri="{BB962C8B-B14F-4D97-AF65-F5344CB8AC3E}">
+        <p14:creationId xmlns:p14="http://schemas.microsoft.com/office/powerpoint/2010/main" val="4123166572"/>
+      </p:ext>
+    </p:extLst>
+  </p:cSld>
+  <p:clrMapOvr>
+    <a:masterClrMapping/>
+  </p:clrMapOvr>
+</p:sld>
+</file>
+
 <file path=ppt/slides/slide14.xml><?xml version="1.0" encoding="utf-8"?>
 <p:sld xmlns:a="http://schemas.openxmlformats.org/drawingml/2006/main" xmlns:r="http://schemas.openxmlformats.org/officeDocument/2006/relationships" xmlns:p="http://schemas.openxmlformats.org/presentationml/2006/main">
   <p:cSld>
@@ -48236,6 +50099,42 @@
           </a:prstGeom>
         </p:spPr>
       </p:pic>
+      <p:pic>
+        <p:nvPicPr>
+          <p:cNvPr id="9" name="図 8">
+            <a:extLst>
+              <a:ext uri="{FF2B5EF4-FFF2-40B4-BE49-F238E27FC236}">
+                <a16:creationId xmlns:a16="http://schemas.microsoft.com/office/drawing/2014/main" id="{4D64A938-31FD-E8B4-4A11-EE4DD134B11E}"/>
+              </a:ext>
+            </a:extLst>
+          </p:cNvPr>
+          <p:cNvPicPr>
+            <a:picLocks noChangeAspect="1"/>
+          </p:cNvPicPr>
+          <p:nvPr/>
+        </p:nvPicPr>
+        <p:blipFill>
+          <a:blip r:embed="rId3">
+            <a:extLst>
+              <a:ext uri="{28A0092B-C50C-407E-A947-70E740481C1C}">
+                <a14:useLocalDpi xmlns:a14="http://schemas.microsoft.com/office/drawing/2010/main" val="0"/>
+              </a:ext>
+            </a:extLst>
+          </a:blip>
+          <a:stretch>
+            <a:fillRect/>
+          </a:stretch>
+        </p:blipFill>
+        <p:spPr>
+          <a:xfrm>
+            <a:off x="5200244" y="2238461"/>
+            <a:ext cx="6584320" cy="963344"/>
+          </a:xfrm>
+          <a:prstGeom prst="rect">
+            <a:avLst/>
+          </a:prstGeom>
+        </p:spPr>
+      </p:pic>
       <p:sp>
         <p:nvSpPr>
           <p:cNvPr id="4" name="正方形/長方形 3">
@@ -48250,7 +50149,7 @@
         </p:nvSpPr>
         <p:spPr>
           <a:xfrm flipV="1">
-            <a:off x="5200243" y="2309195"/>
+            <a:off x="5200243" y="2234548"/>
             <a:ext cx="4382296" cy="303375"/>
           </a:xfrm>
           <a:prstGeom prst="rect">
@@ -48300,8 +50199,8 @@
         </p:nvSpPr>
         <p:spPr>
           <a:xfrm>
-            <a:off x="6532975" y="2381572"/>
-            <a:ext cx="763564" cy="156355"/>
+            <a:off x="6578082" y="2326719"/>
+            <a:ext cx="727788" cy="155225"/>
           </a:xfrm>
           <a:prstGeom prst="rect">
             <a:avLst/>
@@ -48333,16 +50232,16 @@
           <a:lstStyle/>
           <a:p>
             <a:pPr algn="ctr"/>
-            <a:endParaRPr kumimoji="1" lang="ja-JP" altLang="en-US"/>
+            <a:endParaRPr kumimoji="1" lang="ja-JP" altLang="en-US" dirty="0"/>
           </a:p>
         </p:txBody>
       </p:sp>
       <p:sp>
         <p:nvSpPr>
-          <p:cNvPr id="6" name="正方形/長方形 5">
-            <a:extLst>
-              <a:ext uri="{FF2B5EF4-FFF2-40B4-BE49-F238E27FC236}">
-                <a16:creationId xmlns:a16="http://schemas.microsoft.com/office/drawing/2014/main" id="{9A6DCEBD-B464-85EF-98DA-8F6B656FC064}"/>
+          <p:cNvPr id="11" name="正方形/長方形 10">
+            <a:extLst>
+              <a:ext uri="{FF2B5EF4-FFF2-40B4-BE49-F238E27FC236}">
+                <a16:creationId xmlns:a16="http://schemas.microsoft.com/office/drawing/2014/main" id="{D15E00B3-CEE5-81CD-A0EB-000FBD9D6D23}"/>
               </a:ext>
             </a:extLst>
           </p:cNvPr>
@@ -48351,8 +50250,8 @@
         </p:nvSpPr>
         <p:spPr>
           <a:xfrm>
-            <a:off x="7478474" y="2716225"/>
-            <a:ext cx="684000" cy="156355"/>
+            <a:off x="7484697" y="2661182"/>
+            <a:ext cx="684000" cy="155225"/>
           </a:xfrm>
           <a:prstGeom prst="rect">
             <a:avLst/>
@@ -48384,7 +50283,7 @@
           <a:lstStyle/>
           <a:p>
             <a:pPr algn="ctr"/>
-            <a:endParaRPr kumimoji="1" lang="ja-JP" altLang="en-US"/>
+            <a:endParaRPr kumimoji="1" lang="ja-JP" altLang="en-US" dirty="0"/>
           </a:p>
         </p:txBody>
       </p:sp>
@@ -48460,6 +50359,42 @@
           </a:prstGeom>
         </p:spPr>
       </p:pic>
+      <p:pic>
+        <p:nvPicPr>
+          <p:cNvPr id="8" name="図 7">
+            <a:extLst>
+              <a:ext uri="{FF2B5EF4-FFF2-40B4-BE49-F238E27FC236}">
+                <a16:creationId xmlns:a16="http://schemas.microsoft.com/office/drawing/2014/main" id="{E3C8F11D-E58E-A955-9281-420FA5A00FBA}"/>
+              </a:ext>
+            </a:extLst>
+          </p:cNvPr>
+          <p:cNvPicPr>
+            <a:picLocks noChangeAspect="1"/>
+          </p:cNvPicPr>
+          <p:nvPr/>
+        </p:nvPicPr>
+        <p:blipFill>
+          <a:blip r:embed="rId3">
+            <a:extLst>
+              <a:ext uri="{28A0092B-C50C-407E-A947-70E740481C1C}">
+                <a14:useLocalDpi xmlns:a14="http://schemas.microsoft.com/office/drawing/2010/main" val="0"/>
+              </a:ext>
+            </a:extLst>
+          </a:blip>
+          <a:stretch>
+            <a:fillRect/>
+          </a:stretch>
+        </p:blipFill>
+        <p:spPr>
+          <a:xfrm>
+            <a:off x="4833063" y="2704031"/>
+            <a:ext cx="1228725" cy="180975"/>
+          </a:xfrm>
+          <a:prstGeom prst="rect">
+            <a:avLst/>
+          </a:prstGeom>
+        </p:spPr>
+      </p:pic>
     </p:spTree>
     <p:extLst>
       <p:ext uri="{BB962C8B-B14F-4D97-AF65-F5344CB8AC3E}">
@@ -48498,10 +50433,10 @@
       </p:grpSpPr>
       <p:pic>
         <p:nvPicPr>
-          <p:cNvPr id="3" name="図 2">
-            <a:extLst>
-              <a:ext uri="{FF2B5EF4-FFF2-40B4-BE49-F238E27FC236}">
-                <a16:creationId xmlns:a16="http://schemas.microsoft.com/office/drawing/2014/main" id="{F159A3E3-D7E5-5F4D-DA1C-725524EFC7B2}"/>
+          <p:cNvPr id="5" name="図 4">
+            <a:extLst>
+              <a:ext uri="{FF2B5EF4-FFF2-40B4-BE49-F238E27FC236}">
+                <a16:creationId xmlns:a16="http://schemas.microsoft.com/office/drawing/2014/main" id="{9B7BCBAB-1359-8B09-384E-11D76D9726D4}"/>
               </a:ext>
             </a:extLst>
           </p:cNvPr>
@@ -48524,8 +50459,8 @@
         </p:blipFill>
         <p:spPr>
           <a:xfrm>
-            <a:off x="3157537" y="2504881"/>
-            <a:ext cx="5876925" cy="1866900"/>
+            <a:off x="2957512" y="1930174"/>
+            <a:ext cx="6276975" cy="1952625"/>
           </a:xfrm>
           <a:prstGeom prst="rect">
             <a:avLst/>
@@ -48695,6 +50630,42 @@
           </a:p>
         </p:txBody>
       </p:sp>
+      <p:pic>
+        <p:nvPicPr>
+          <p:cNvPr id="11" name="図 10">
+            <a:extLst>
+              <a:ext uri="{FF2B5EF4-FFF2-40B4-BE49-F238E27FC236}">
+                <a16:creationId xmlns:a16="http://schemas.microsoft.com/office/drawing/2014/main" id="{F2EF6662-6DCB-3BEC-5A8E-7216CBF795DD}"/>
+              </a:ext>
+            </a:extLst>
+          </p:cNvPr>
+          <p:cNvPicPr>
+            <a:picLocks noChangeAspect="1"/>
+          </p:cNvPicPr>
+          <p:nvPr/>
+        </p:nvPicPr>
+        <p:blipFill>
+          <a:blip r:embed="rId3">
+            <a:extLst>
+              <a:ext uri="{28A0092B-C50C-407E-A947-70E740481C1C}">
+                <a14:useLocalDpi xmlns:a14="http://schemas.microsoft.com/office/drawing/2010/main" val="0"/>
+              </a:ext>
+            </a:extLst>
+          </a:blip>
+          <a:stretch>
+            <a:fillRect/>
+          </a:stretch>
+        </p:blipFill>
+        <p:spPr>
+          <a:xfrm>
+            <a:off x="4833063" y="2694698"/>
+            <a:ext cx="1228725" cy="180975"/>
+          </a:xfrm>
+          <a:prstGeom prst="rect">
+            <a:avLst/>
+          </a:prstGeom>
+        </p:spPr>
+      </p:pic>
     </p:spTree>
     <p:extLst>
       <p:ext uri="{BB962C8B-B14F-4D97-AF65-F5344CB8AC3E}">

--- a/01_テキスト/Git入門_図.pptx
+++ b/01_テキスト/Git入門_図.pptx
@@ -44,106 +44,113 @@
     <p:sldId id="297" r:id="rId38"/>
     <p:sldId id="298" r:id="rId39"/>
     <p:sldId id="285" r:id="rId40"/>
-    <p:sldId id="299" r:id="rId41"/>
-    <p:sldId id="304" r:id="rId42"/>
-    <p:sldId id="300" r:id="rId43"/>
-    <p:sldId id="305" r:id="rId44"/>
-    <p:sldId id="301" r:id="rId45"/>
-    <p:sldId id="306" r:id="rId46"/>
-    <p:sldId id="310" r:id="rId47"/>
-    <p:sldId id="302" r:id="rId48"/>
-    <p:sldId id="303" r:id="rId49"/>
-    <p:sldId id="311" r:id="rId50"/>
-    <p:sldId id="312" r:id="rId51"/>
-    <p:sldId id="313" r:id="rId52"/>
-    <p:sldId id="314" r:id="rId53"/>
-    <p:sldId id="315" r:id="rId54"/>
-    <p:sldId id="316" r:id="rId55"/>
-    <p:sldId id="317" r:id="rId56"/>
-    <p:sldId id="318" r:id="rId57"/>
-    <p:sldId id="319" r:id="rId58"/>
-    <p:sldId id="320" r:id="rId59"/>
-    <p:sldId id="321" r:id="rId60"/>
-    <p:sldId id="324" r:id="rId61"/>
-    <p:sldId id="325" r:id="rId62"/>
-    <p:sldId id="326" r:id="rId63"/>
-    <p:sldId id="327" r:id="rId64"/>
-    <p:sldId id="322" r:id="rId65"/>
-    <p:sldId id="328" r:id="rId66"/>
-    <p:sldId id="323" r:id="rId67"/>
-    <p:sldId id="329" r:id="rId68"/>
-    <p:sldId id="330" r:id="rId69"/>
-    <p:sldId id="332" r:id="rId70"/>
-    <p:sldId id="331" r:id="rId71"/>
-    <p:sldId id="333" r:id="rId72"/>
-    <p:sldId id="334" r:id="rId73"/>
-    <p:sldId id="335" r:id="rId74"/>
-    <p:sldId id="340" r:id="rId75"/>
-    <p:sldId id="336" r:id="rId76"/>
-    <p:sldId id="341" r:id="rId77"/>
-    <p:sldId id="342" r:id="rId78"/>
-    <p:sldId id="344" r:id="rId79"/>
-    <p:sldId id="337" r:id="rId80"/>
-    <p:sldId id="343" r:id="rId81"/>
-    <p:sldId id="345" r:id="rId82"/>
-    <p:sldId id="346" r:id="rId83"/>
-    <p:sldId id="347" r:id="rId84"/>
-    <p:sldId id="338" r:id="rId85"/>
-    <p:sldId id="348" r:id="rId86"/>
-    <p:sldId id="339" r:id="rId87"/>
-    <p:sldId id="349" r:id="rId88"/>
-    <p:sldId id="350" r:id="rId89"/>
-    <p:sldId id="351" r:id="rId90"/>
-    <p:sldId id="362" r:id="rId91"/>
-    <p:sldId id="352" r:id="rId92"/>
-    <p:sldId id="353" r:id="rId93"/>
-    <p:sldId id="354" r:id="rId94"/>
-    <p:sldId id="355" r:id="rId95"/>
-    <p:sldId id="356" r:id="rId96"/>
-    <p:sldId id="357" r:id="rId97"/>
-    <p:sldId id="358" r:id="rId98"/>
-    <p:sldId id="359" r:id="rId99"/>
-    <p:sldId id="360" r:id="rId100"/>
-    <p:sldId id="361" r:id="rId101"/>
-    <p:sldId id="363" r:id="rId102"/>
-    <p:sldId id="364" r:id="rId103"/>
-    <p:sldId id="365" r:id="rId104"/>
-    <p:sldId id="366" r:id="rId105"/>
-    <p:sldId id="367" r:id="rId106"/>
-    <p:sldId id="369" r:id="rId107"/>
-    <p:sldId id="370" r:id="rId108"/>
-    <p:sldId id="371" r:id="rId109"/>
-    <p:sldId id="372" r:id="rId110"/>
-    <p:sldId id="373" r:id="rId111"/>
-    <p:sldId id="368" r:id="rId112"/>
-    <p:sldId id="374" r:id="rId113"/>
-    <p:sldId id="379" r:id="rId114"/>
-    <p:sldId id="375" r:id="rId115"/>
-    <p:sldId id="378" r:id="rId116"/>
-    <p:sldId id="376" r:id="rId117"/>
-    <p:sldId id="380" r:id="rId118"/>
-    <p:sldId id="385" r:id="rId119"/>
-    <p:sldId id="377" r:id="rId120"/>
-    <p:sldId id="381" r:id="rId121"/>
-    <p:sldId id="382" r:id="rId122"/>
-    <p:sldId id="383" r:id="rId123"/>
-    <p:sldId id="384" r:id="rId124"/>
-    <p:sldId id="386" r:id="rId125"/>
-    <p:sldId id="387" r:id="rId126"/>
-    <p:sldId id="388" r:id="rId127"/>
-    <p:sldId id="392" r:id="rId128"/>
-    <p:sldId id="389" r:id="rId129"/>
-    <p:sldId id="390" r:id="rId130"/>
-    <p:sldId id="391" r:id="rId131"/>
-    <p:sldId id="393" r:id="rId132"/>
-    <p:sldId id="394" r:id="rId133"/>
-    <p:sldId id="399" r:id="rId134"/>
-    <p:sldId id="400" r:id="rId135"/>
-    <p:sldId id="401" r:id="rId136"/>
-    <p:sldId id="405" r:id="rId137"/>
-    <p:sldId id="403" r:id="rId138"/>
-    <p:sldId id="402" r:id="rId139"/>
-    <p:sldId id="404" r:id="rId140"/>
+    <p:sldId id="406" r:id="rId41"/>
+    <p:sldId id="299" r:id="rId42"/>
+    <p:sldId id="304" r:id="rId43"/>
+    <p:sldId id="300" r:id="rId44"/>
+    <p:sldId id="305" r:id="rId45"/>
+    <p:sldId id="301" r:id="rId46"/>
+    <p:sldId id="306" r:id="rId47"/>
+    <p:sldId id="407" r:id="rId48"/>
+    <p:sldId id="302" r:id="rId49"/>
+    <p:sldId id="303" r:id="rId50"/>
+    <p:sldId id="311" r:id="rId51"/>
+    <p:sldId id="312" r:id="rId52"/>
+    <p:sldId id="313" r:id="rId53"/>
+    <p:sldId id="314" r:id="rId54"/>
+    <p:sldId id="315" r:id="rId55"/>
+    <p:sldId id="316" r:id="rId56"/>
+    <p:sldId id="317" r:id="rId57"/>
+    <p:sldId id="318" r:id="rId58"/>
+    <p:sldId id="319" r:id="rId59"/>
+    <p:sldId id="320" r:id="rId60"/>
+    <p:sldId id="321" r:id="rId61"/>
+    <p:sldId id="324" r:id="rId62"/>
+    <p:sldId id="325" r:id="rId63"/>
+    <p:sldId id="326" r:id="rId64"/>
+    <p:sldId id="327" r:id="rId65"/>
+    <p:sldId id="322" r:id="rId66"/>
+    <p:sldId id="328" r:id="rId67"/>
+    <p:sldId id="323" r:id="rId68"/>
+    <p:sldId id="329" r:id="rId69"/>
+    <p:sldId id="330" r:id="rId70"/>
+    <p:sldId id="332" r:id="rId71"/>
+    <p:sldId id="331" r:id="rId72"/>
+    <p:sldId id="333" r:id="rId73"/>
+    <p:sldId id="334" r:id="rId74"/>
+    <p:sldId id="335" r:id="rId75"/>
+    <p:sldId id="340" r:id="rId76"/>
+    <p:sldId id="336" r:id="rId77"/>
+    <p:sldId id="341" r:id="rId78"/>
+    <p:sldId id="342" r:id="rId79"/>
+    <p:sldId id="344" r:id="rId80"/>
+    <p:sldId id="337" r:id="rId81"/>
+    <p:sldId id="343" r:id="rId82"/>
+    <p:sldId id="345" r:id="rId83"/>
+    <p:sldId id="346" r:id="rId84"/>
+    <p:sldId id="347" r:id="rId85"/>
+    <p:sldId id="338" r:id="rId86"/>
+    <p:sldId id="348" r:id="rId87"/>
+    <p:sldId id="339" r:id="rId88"/>
+    <p:sldId id="349" r:id="rId89"/>
+    <p:sldId id="350" r:id="rId90"/>
+    <p:sldId id="351" r:id="rId91"/>
+    <p:sldId id="362" r:id="rId92"/>
+    <p:sldId id="352" r:id="rId93"/>
+    <p:sldId id="353" r:id="rId94"/>
+    <p:sldId id="354" r:id="rId95"/>
+    <p:sldId id="355" r:id="rId96"/>
+    <p:sldId id="356" r:id="rId97"/>
+    <p:sldId id="357" r:id="rId98"/>
+    <p:sldId id="358" r:id="rId99"/>
+    <p:sldId id="359" r:id="rId100"/>
+    <p:sldId id="360" r:id="rId101"/>
+    <p:sldId id="361" r:id="rId102"/>
+    <p:sldId id="363" r:id="rId103"/>
+    <p:sldId id="364" r:id="rId104"/>
+    <p:sldId id="365" r:id="rId105"/>
+    <p:sldId id="366" r:id="rId106"/>
+    <p:sldId id="367" r:id="rId107"/>
+    <p:sldId id="369" r:id="rId108"/>
+    <p:sldId id="370" r:id="rId109"/>
+    <p:sldId id="371" r:id="rId110"/>
+    <p:sldId id="372" r:id="rId111"/>
+    <p:sldId id="373" r:id="rId112"/>
+    <p:sldId id="368" r:id="rId113"/>
+    <p:sldId id="374" r:id="rId114"/>
+    <p:sldId id="379" r:id="rId115"/>
+    <p:sldId id="375" r:id="rId116"/>
+    <p:sldId id="378" r:id="rId117"/>
+    <p:sldId id="376" r:id="rId118"/>
+    <p:sldId id="380" r:id="rId119"/>
+    <p:sldId id="385" r:id="rId120"/>
+    <p:sldId id="377" r:id="rId121"/>
+    <p:sldId id="381" r:id="rId122"/>
+    <p:sldId id="382" r:id="rId123"/>
+    <p:sldId id="383" r:id="rId124"/>
+    <p:sldId id="384" r:id="rId125"/>
+    <p:sldId id="386" r:id="rId126"/>
+    <p:sldId id="387" r:id="rId127"/>
+    <p:sldId id="388" r:id="rId128"/>
+    <p:sldId id="392" r:id="rId129"/>
+    <p:sldId id="389" r:id="rId130"/>
+    <p:sldId id="390" r:id="rId131"/>
+    <p:sldId id="391" r:id="rId132"/>
+    <p:sldId id="393" r:id="rId133"/>
+    <p:sldId id="394" r:id="rId134"/>
+    <p:sldId id="399" r:id="rId135"/>
+    <p:sldId id="400" r:id="rId136"/>
+    <p:sldId id="401" r:id="rId137"/>
+    <p:sldId id="405" r:id="rId138"/>
+    <p:sldId id="403" r:id="rId139"/>
+    <p:sldId id="402" r:id="rId140"/>
+    <p:sldId id="404" r:id="rId141"/>
+    <p:sldId id="408" r:id="rId142"/>
+    <p:sldId id="409" r:id="rId143"/>
+    <p:sldId id="410" r:id="rId144"/>
+    <p:sldId id="411" r:id="rId145"/>
+    <p:sldId id="412" r:id="rId146"/>
+    <p:sldId id="413" r:id="rId147"/>
   </p:sldIdLst>
   <p:sldSz cx="12192000" cy="6858000"/>
   <p:notesSz cx="6858000" cy="9144000"/>
@@ -397,7 +404,7 @@
           <a:p>
             <a:fld id="{7D4D8970-2F0F-4F19-9427-F451CC43E670}" type="datetimeFigureOut">
               <a:rPr kumimoji="1" lang="ja-JP" altLang="en-US" smtClean="0"/>
-              <a:t>2026/6/20</a:t>
+              <a:t>2026/6/21</a:t>
             </a:fld>
             <a:endParaRPr kumimoji="1" lang="ja-JP" altLang="en-US"/>
           </a:p>
@@ -627,7 +634,7 @@
           <a:p>
             <a:fld id="{7D4D8970-2F0F-4F19-9427-F451CC43E670}" type="datetimeFigureOut">
               <a:rPr kumimoji="1" lang="ja-JP" altLang="en-US" smtClean="0"/>
-              <a:t>2026/6/20</a:t>
+              <a:t>2026/6/21</a:t>
             </a:fld>
             <a:endParaRPr kumimoji="1" lang="ja-JP" altLang="en-US"/>
           </a:p>
@@ -867,7 +874,7 @@
           <a:p>
             <a:fld id="{7D4D8970-2F0F-4F19-9427-F451CC43E670}" type="datetimeFigureOut">
               <a:rPr kumimoji="1" lang="ja-JP" altLang="en-US" smtClean="0"/>
-              <a:t>2026/6/20</a:t>
+              <a:t>2026/6/21</a:t>
             </a:fld>
             <a:endParaRPr kumimoji="1" lang="ja-JP" altLang="en-US"/>
           </a:p>
@@ -1097,7 +1104,7 @@
           <a:p>
             <a:fld id="{7D4D8970-2F0F-4F19-9427-F451CC43E670}" type="datetimeFigureOut">
               <a:rPr kumimoji="1" lang="ja-JP" altLang="en-US" smtClean="0"/>
-              <a:t>2026/6/20</a:t>
+              <a:t>2026/6/21</a:t>
             </a:fld>
             <a:endParaRPr kumimoji="1" lang="ja-JP" altLang="en-US"/>
           </a:p>
@@ -1372,7 +1379,7 @@
           <a:p>
             <a:fld id="{7D4D8970-2F0F-4F19-9427-F451CC43E670}" type="datetimeFigureOut">
               <a:rPr kumimoji="1" lang="ja-JP" altLang="en-US" smtClean="0"/>
-              <a:t>2026/6/20</a:t>
+              <a:t>2026/6/21</a:t>
             </a:fld>
             <a:endParaRPr kumimoji="1" lang="ja-JP" altLang="en-US"/>
           </a:p>
@@ -1701,7 +1708,7 @@
           <a:p>
             <a:fld id="{7D4D8970-2F0F-4F19-9427-F451CC43E670}" type="datetimeFigureOut">
               <a:rPr kumimoji="1" lang="ja-JP" altLang="en-US" smtClean="0"/>
-              <a:t>2026/6/20</a:t>
+              <a:t>2026/6/21</a:t>
             </a:fld>
             <a:endParaRPr kumimoji="1" lang="ja-JP" altLang="en-US"/>
           </a:p>
@@ -2177,7 +2184,7 @@
           <a:p>
             <a:fld id="{7D4D8970-2F0F-4F19-9427-F451CC43E670}" type="datetimeFigureOut">
               <a:rPr kumimoji="1" lang="ja-JP" altLang="en-US" smtClean="0"/>
-              <a:t>2026/6/20</a:t>
+              <a:t>2026/6/21</a:t>
             </a:fld>
             <a:endParaRPr kumimoji="1" lang="ja-JP" altLang="en-US"/>
           </a:p>
@@ -2318,7 +2325,7 @@
           <a:p>
             <a:fld id="{7D4D8970-2F0F-4F19-9427-F451CC43E670}" type="datetimeFigureOut">
               <a:rPr kumimoji="1" lang="ja-JP" altLang="en-US" smtClean="0"/>
-              <a:t>2026/6/20</a:t>
+              <a:t>2026/6/21</a:t>
             </a:fld>
             <a:endParaRPr kumimoji="1" lang="ja-JP" altLang="en-US"/>
           </a:p>
@@ -2431,7 +2438,7 @@
           <a:p>
             <a:fld id="{7D4D8970-2F0F-4F19-9427-F451CC43E670}" type="datetimeFigureOut">
               <a:rPr kumimoji="1" lang="ja-JP" altLang="en-US" smtClean="0"/>
-              <a:t>2026/6/20</a:t>
+              <a:t>2026/6/21</a:t>
             </a:fld>
             <a:endParaRPr kumimoji="1" lang="ja-JP" altLang="en-US"/>
           </a:p>
@@ -2774,7 +2781,7 @@
           <a:p>
             <a:fld id="{7D4D8970-2F0F-4F19-9427-F451CC43E670}" type="datetimeFigureOut">
               <a:rPr kumimoji="1" lang="ja-JP" altLang="en-US" smtClean="0"/>
-              <a:t>2026/6/20</a:t>
+              <a:t>2026/6/21</a:t>
             </a:fld>
             <a:endParaRPr kumimoji="1" lang="ja-JP" altLang="en-US"/>
           </a:p>
@@ -3062,7 +3069,7 @@
           <a:p>
             <a:fld id="{7D4D8970-2F0F-4F19-9427-F451CC43E670}" type="datetimeFigureOut">
               <a:rPr kumimoji="1" lang="ja-JP" altLang="en-US" smtClean="0"/>
-              <a:t>2026/6/20</a:t>
+              <a:t>2026/6/21</a:t>
             </a:fld>
             <a:endParaRPr kumimoji="1" lang="ja-JP" altLang="en-US"/>
           </a:p>
@@ -3335,7 +3342,7 @@
           <a:p>
             <a:fld id="{7D4D8970-2F0F-4F19-9427-F451CC43E670}" type="datetimeFigureOut">
               <a:rPr kumimoji="1" lang="ja-JP" altLang="en-US" smtClean="0"/>
-              <a:t>2026/6/20</a:t>
+              <a:t>2026/6/21</a:t>
             </a:fld>
             <a:endParaRPr kumimoji="1" lang="ja-JP" altLang="en-US"/>
           </a:p>
@@ -3859,6 +3866,42 @@
         <p:cNvPr id="1" name="">
           <a:extLst>
             <a:ext uri="{FF2B5EF4-FFF2-40B4-BE49-F238E27FC236}">
+              <a16:creationId xmlns:a16="http://schemas.microsoft.com/office/drawing/2014/main" id="{3E1076F6-F09B-6C65-709A-A33333D53F07}"/>
+            </a:ext>
+          </a:extLst>
+        </p:cNvPr>
+        <p:cNvGrpSpPr/>
+        <p:nvPr/>
+      </p:nvGrpSpPr>
+      <p:grpSpPr>
+        <a:xfrm>
+          <a:off x="0" y="0"/>
+          <a:ext cx="0" cy="0"/>
+          <a:chOff x="0" y="0"/>
+          <a:chExt cx="0" cy="0"/>
+        </a:xfrm>
+      </p:grpSpPr>
+    </p:spTree>
+    <p:extLst>
+      <p:ext uri="{BB962C8B-B14F-4D97-AF65-F5344CB8AC3E}">
+        <p14:creationId xmlns:p14="http://schemas.microsoft.com/office/powerpoint/2010/main" val="3798773095"/>
+      </p:ext>
+    </p:extLst>
+  </p:cSld>
+  <p:clrMapOvr>
+    <a:masterClrMapping/>
+  </p:clrMapOvr>
+</p:sld>
+</file>
+
+<file path=ppt/slides/slide101.xml><?xml version="1.0" encoding="utf-8"?>
+<p:sld xmlns:a="http://schemas.openxmlformats.org/drawingml/2006/main" xmlns:r="http://schemas.openxmlformats.org/officeDocument/2006/relationships" xmlns:p="http://schemas.openxmlformats.org/presentationml/2006/main">
+  <p:cSld>
+    <p:spTree>
+      <p:nvGrpSpPr>
+        <p:cNvPr id="1" name="">
+          <a:extLst>
+            <a:ext uri="{FF2B5EF4-FFF2-40B4-BE49-F238E27FC236}">
               <a16:creationId xmlns:a16="http://schemas.microsoft.com/office/drawing/2014/main" id="{D0582A56-9299-8BA4-A612-FFCC22A778B1}"/>
             </a:ext>
           </a:extLst>
@@ -3887,7 +3930,7 @@
 </p:sld>
 </file>
 
-<file path=ppt/slides/slide101.xml><?xml version="1.0" encoding="utf-8"?>
+<file path=ppt/slides/slide102.xml><?xml version="1.0" encoding="utf-8"?>
 <p:sld xmlns:a="http://schemas.openxmlformats.org/drawingml/2006/main" xmlns:r="http://schemas.openxmlformats.org/officeDocument/2006/relationships" xmlns:p="http://schemas.openxmlformats.org/presentationml/2006/main">
   <p:cSld>
     <p:spTree>
@@ -4045,7 +4088,7 @@
 </p:sld>
 </file>
 
-<file path=ppt/slides/slide102.xml><?xml version="1.0" encoding="utf-8"?>
+<file path=ppt/slides/slide103.xml><?xml version="1.0" encoding="utf-8"?>
 <p:sld xmlns:a="http://schemas.openxmlformats.org/drawingml/2006/main" xmlns:r="http://schemas.openxmlformats.org/officeDocument/2006/relationships" xmlns:p="http://schemas.openxmlformats.org/presentationml/2006/main">
   <p:cSld>
     <p:spTree>
@@ -4217,7 +4260,7 @@
 </p:sld>
 </file>
 
-<file path=ppt/slides/slide103.xml><?xml version="1.0" encoding="utf-8"?>
+<file path=ppt/slides/slide104.xml><?xml version="1.0" encoding="utf-8"?>
 <p:sld xmlns:a="http://schemas.openxmlformats.org/drawingml/2006/main" xmlns:r="http://schemas.openxmlformats.org/officeDocument/2006/relationships" xmlns:p="http://schemas.openxmlformats.org/presentationml/2006/main">
   <p:cSld>
     <p:spTree>
@@ -4377,7 +4420,7 @@
 </p:sld>
 </file>
 
-<file path=ppt/slides/slide104.xml><?xml version="1.0" encoding="utf-8"?>
+<file path=ppt/slides/slide105.xml><?xml version="1.0" encoding="utf-8"?>
 <p:sld xmlns:a="http://schemas.openxmlformats.org/drawingml/2006/main" xmlns:r="http://schemas.openxmlformats.org/officeDocument/2006/relationships" xmlns:p="http://schemas.openxmlformats.org/presentationml/2006/main">
   <p:cSld>
     <p:spTree>
@@ -4573,7 +4616,7 @@
 </p:sld>
 </file>
 
-<file path=ppt/slides/slide105.xml><?xml version="1.0" encoding="utf-8"?>
+<file path=ppt/slides/slide106.xml><?xml version="1.0" encoding="utf-8"?>
 <p:sld xmlns:a="http://schemas.openxmlformats.org/drawingml/2006/main" xmlns:r="http://schemas.openxmlformats.org/officeDocument/2006/relationships" xmlns:p="http://schemas.openxmlformats.org/presentationml/2006/main">
   <p:cSld>
     <p:spTree>
@@ -4609,7 +4652,7 @@
 </p:sld>
 </file>
 
-<file path=ppt/slides/slide106.xml><?xml version="1.0" encoding="utf-8"?>
+<file path=ppt/slides/slide107.xml><?xml version="1.0" encoding="utf-8"?>
 <p:sld xmlns:a="http://schemas.openxmlformats.org/drawingml/2006/main" xmlns:r="http://schemas.openxmlformats.org/officeDocument/2006/relationships" xmlns:p="http://schemas.openxmlformats.org/presentationml/2006/main">
   <p:cSld>
     <p:spTree>
@@ -4767,7 +4810,7 @@
 </p:sld>
 </file>
 
-<file path=ppt/slides/slide107.xml><?xml version="1.0" encoding="utf-8"?>
+<file path=ppt/slides/slide108.xml><?xml version="1.0" encoding="utf-8"?>
 <p:sld xmlns:a="http://schemas.openxmlformats.org/drawingml/2006/main" xmlns:r="http://schemas.openxmlformats.org/officeDocument/2006/relationships" xmlns:p="http://schemas.openxmlformats.org/presentationml/2006/main">
   <p:cSld>
     <p:spTree>
@@ -4889,7 +4932,7 @@
 </p:sld>
 </file>
 
-<file path=ppt/slides/slide108.xml><?xml version="1.0" encoding="utf-8"?>
+<file path=ppt/slides/slide109.xml><?xml version="1.0" encoding="utf-8"?>
 <p:sld xmlns:a="http://schemas.openxmlformats.org/drawingml/2006/main" xmlns:r="http://schemas.openxmlformats.org/officeDocument/2006/relationships" xmlns:p="http://schemas.openxmlformats.org/presentationml/2006/main">
   <p:cSld>
     <p:spTree>
@@ -5094,128 +5137,6 @@
     <p:extLst>
       <p:ext uri="{BB962C8B-B14F-4D97-AF65-F5344CB8AC3E}">
         <p14:creationId xmlns:p14="http://schemas.microsoft.com/office/powerpoint/2010/main" val="273952792"/>
-      </p:ext>
-    </p:extLst>
-  </p:cSld>
-  <p:clrMapOvr>
-    <a:masterClrMapping/>
-  </p:clrMapOvr>
-</p:sld>
-</file>
-
-<file path=ppt/slides/slide109.xml><?xml version="1.0" encoding="utf-8"?>
-<p:sld xmlns:a="http://schemas.openxmlformats.org/drawingml/2006/main" xmlns:r="http://schemas.openxmlformats.org/officeDocument/2006/relationships" xmlns:p="http://schemas.openxmlformats.org/presentationml/2006/main">
-  <p:cSld>
-    <p:spTree>
-      <p:nvGrpSpPr>
-        <p:cNvPr id="1" name="">
-          <a:extLst>
-            <a:ext uri="{FF2B5EF4-FFF2-40B4-BE49-F238E27FC236}">
-              <a16:creationId xmlns:a16="http://schemas.microsoft.com/office/drawing/2014/main" id="{B71FC471-BBAD-E5B5-07B5-21BC635FB18B}"/>
-            </a:ext>
-          </a:extLst>
-        </p:cNvPr>
-        <p:cNvGrpSpPr/>
-        <p:nvPr/>
-      </p:nvGrpSpPr>
-      <p:grpSpPr>
-        <a:xfrm>
-          <a:off x="0" y="0"/>
-          <a:ext cx="0" cy="0"/>
-          <a:chOff x="0" y="0"/>
-          <a:chExt cx="0" cy="0"/>
-        </a:xfrm>
-      </p:grpSpPr>
-      <p:pic>
-        <p:nvPicPr>
-          <p:cNvPr id="3" name="図 2">
-            <a:extLst>
-              <a:ext uri="{FF2B5EF4-FFF2-40B4-BE49-F238E27FC236}">
-                <a16:creationId xmlns:a16="http://schemas.microsoft.com/office/drawing/2014/main" id="{DDC5B758-CAB3-7764-9571-E962D5AF9BA3}"/>
-              </a:ext>
-            </a:extLst>
-          </p:cNvPr>
-          <p:cNvPicPr>
-            <a:picLocks noChangeAspect="1"/>
-          </p:cNvPicPr>
-          <p:nvPr/>
-        </p:nvPicPr>
-        <p:blipFill>
-          <a:blip r:embed="rId2">
-            <a:extLst>
-              <a:ext uri="{28A0092B-C50C-407E-A947-70E740481C1C}">
-                <a14:useLocalDpi xmlns:a14="http://schemas.microsoft.com/office/drawing/2010/main" val="0"/>
-              </a:ext>
-            </a:extLst>
-          </a:blip>
-          <a:stretch>
-            <a:fillRect/>
-          </a:stretch>
-        </p:blipFill>
-        <p:spPr>
-          <a:xfrm>
-            <a:off x="2533650" y="3076575"/>
-            <a:ext cx="7124700" cy="704850"/>
-          </a:xfrm>
-          <a:prstGeom prst="rect">
-            <a:avLst/>
-          </a:prstGeom>
-        </p:spPr>
-      </p:pic>
-      <p:sp>
-        <p:nvSpPr>
-          <p:cNvPr id="4" name="正方形/長方形 3">
-            <a:extLst>
-              <a:ext uri="{FF2B5EF4-FFF2-40B4-BE49-F238E27FC236}">
-                <a16:creationId xmlns:a16="http://schemas.microsoft.com/office/drawing/2014/main" id="{7B6E4A8D-1FF8-AE2E-A24E-BAA54DF79C2B}"/>
-              </a:ext>
-            </a:extLst>
-          </p:cNvPr>
-          <p:cNvSpPr/>
-          <p:nvPr/>
-        </p:nvSpPr>
-        <p:spPr>
-          <a:xfrm flipV="1">
-            <a:off x="2599208" y="3151350"/>
-            <a:ext cx="6993584" cy="277650"/>
-          </a:xfrm>
-          <a:prstGeom prst="rect">
-            <a:avLst/>
-          </a:prstGeom>
-          <a:noFill/>
-          <a:ln w="28575">
-            <a:solidFill>
-              <a:srgbClr val="FF0000"/>
-            </a:solidFill>
-          </a:ln>
-        </p:spPr>
-        <p:style>
-          <a:lnRef idx="2">
-            <a:schemeClr val="accent6"/>
-          </a:lnRef>
-          <a:fillRef idx="1">
-            <a:schemeClr val="lt1"/>
-          </a:fillRef>
-          <a:effectRef idx="0">
-            <a:schemeClr val="accent6"/>
-          </a:effectRef>
-          <a:fontRef idx="minor">
-            <a:schemeClr val="dk1"/>
-          </a:fontRef>
-        </p:style>
-        <p:txBody>
-          <a:bodyPr rtlCol="0" anchor="ctr"/>
-          <a:lstStyle/>
-          <a:p>
-            <a:pPr algn="ctr"/>
-            <a:endParaRPr kumimoji="1" lang="ja-JP" altLang="en-US"/>
-          </a:p>
-        </p:txBody>
-      </p:sp>
-    </p:spTree>
-    <p:extLst>
-      <p:ext uri="{BB962C8B-B14F-4D97-AF65-F5344CB8AC3E}">
-        <p14:creationId xmlns:p14="http://schemas.microsoft.com/office/powerpoint/2010/main" val="223273275"/>
       </p:ext>
     </p:extLst>
   </p:cSld>
@@ -6189,6 +6110,128 @@
         <p:cNvPr id="1" name="">
           <a:extLst>
             <a:ext uri="{FF2B5EF4-FFF2-40B4-BE49-F238E27FC236}">
+              <a16:creationId xmlns:a16="http://schemas.microsoft.com/office/drawing/2014/main" id="{B71FC471-BBAD-E5B5-07B5-21BC635FB18B}"/>
+            </a:ext>
+          </a:extLst>
+        </p:cNvPr>
+        <p:cNvGrpSpPr/>
+        <p:nvPr/>
+      </p:nvGrpSpPr>
+      <p:grpSpPr>
+        <a:xfrm>
+          <a:off x="0" y="0"/>
+          <a:ext cx="0" cy="0"/>
+          <a:chOff x="0" y="0"/>
+          <a:chExt cx="0" cy="0"/>
+        </a:xfrm>
+      </p:grpSpPr>
+      <p:pic>
+        <p:nvPicPr>
+          <p:cNvPr id="3" name="図 2">
+            <a:extLst>
+              <a:ext uri="{FF2B5EF4-FFF2-40B4-BE49-F238E27FC236}">
+                <a16:creationId xmlns:a16="http://schemas.microsoft.com/office/drawing/2014/main" id="{DDC5B758-CAB3-7764-9571-E962D5AF9BA3}"/>
+              </a:ext>
+            </a:extLst>
+          </p:cNvPr>
+          <p:cNvPicPr>
+            <a:picLocks noChangeAspect="1"/>
+          </p:cNvPicPr>
+          <p:nvPr/>
+        </p:nvPicPr>
+        <p:blipFill>
+          <a:blip r:embed="rId2">
+            <a:extLst>
+              <a:ext uri="{28A0092B-C50C-407E-A947-70E740481C1C}">
+                <a14:useLocalDpi xmlns:a14="http://schemas.microsoft.com/office/drawing/2010/main" val="0"/>
+              </a:ext>
+            </a:extLst>
+          </a:blip>
+          <a:stretch>
+            <a:fillRect/>
+          </a:stretch>
+        </p:blipFill>
+        <p:spPr>
+          <a:xfrm>
+            <a:off x="2533650" y="3076575"/>
+            <a:ext cx="7124700" cy="704850"/>
+          </a:xfrm>
+          <a:prstGeom prst="rect">
+            <a:avLst/>
+          </a:prstGeom>
+        </p:spPr>
+      </p:pic>
+      <p:sp>
+        <p:nvSpPr>
+          <p:cNvPr id="4" name="正方形/長方形 3">
+            <a:extLst>
+              <a:ext uri="{FF2B5EF4-FFF2-40B4-BE49-F238E27FC236}">
+                <a16:creationId xmlns:a16="http://schemas.microsoft.com/office/drawing/2014/main" id="{7B6E4A8D-1FF8-AE2E-A24E-BAA54DF79C2B}"/>
+              </a:ext>
+            </a:extLst>
+          </p:cNvPr>
+          <p:cNvSpPr/>
+          <p:nvPr/>
+        </p:nvSpPr>
+        <p:spPr>
+          <a:xfrm flipV="1">
+            <a:off x="2599208" y="3151350"/>
+            <a:ext cx="6993584" cy="277650"/>
+          </a:xfrm>
+          <a:prstGeom prst="rect">
+            <a:avLst/>
+          </a:prstGeom>
+          <a:noFill/>
+          <a:ln w="28575">
+            <a:solidFill>
+              <a:srgbClr val="FF0000"/>
+            </a:solidFill>
+          </a:ln>
+        </p:spPr>
+        <p:style>
+          <a:lnRef idx="2">
+            <a:schemeClr val="accent6"/>
+          </a:lnRef>
+          <a:fillRef idx="1">
+            <a:schemeClr val="lt1"/>
+          </a:fillRef>
+          <a:effectRef idx="0">
+            <a:schemeClr val="accent6"/>
+          </a:effectRef>
+          <a:fontRef idx="minor">
+            <a:schemeClr val="dk1"/>
+          </a:fontRef>
+        </p:style>
+        <p:txBody>
+          <a:bodyPr rtlCol="0" anchor="ctr"/>
+          <a:lstStyle/>
+          <a:p>
+            <a:pPr algn="ctr"/>
+            <a:endParaRPr kumimoji="1" lang="ja-JP" altLang="en-US"/>
+          </a:p>
+        </p:txBody>
+      </p:sp>
+    </p:spTree>
+    <p:extLst>
+      <p:ext uri="{BB962C8B-B14F-4D97-AF65-F5344CB8AC3E}">
+        <p14:creationId xmlns:p14="http://schemas.microsoft.com/office/powerpoint/2010/main" val="223273275"/>
+      </p:ext>
+    </p:extLst>
+  </p:cSld>
+  <p:clrMapOvr>
+    <a:masterClrMapping/>
+  </p:clrMapOvr>
+</p:sld>
+</file>
+
+<file path=ppt/slides/slide111.xml><?xml version="1.0" encoding="utf-8"?>
+<p:sld xmlns:a="http://schemas.openxmlformats.org/drawingml/2006/main" xmlns:r="http://schemas.openxmlformats.org/officeDocument/2006/relationships" xmlns:p="http://schemas.openxmlformats.org/presentationml/2006/main">
+  <p:cSld>
+    <p:spTree>
+      <p:nvGrpSpPr>
+        <p:cNvPr id="1" name="">
+          <a:extLst>
+            <a:ext uri="{FF2B5EF4-FFF2-40B4-BE49-F238E27FC236}">
               <a16:creationId xmlns:a16="http://schemas.microsoft.com/office/drawing/2014/main" id="{217C13C0-CB77-14EF-4668-D29C7B20EFC6}"/>
             </a:ext>
           </a:extLst>
@@ -6303,7 +6346,7 @@
 </p:sld>
 </file>
 
-<file path=ppt/slides/slide111.xml><?xml version="1.0" encoding="utf-8"?>
+<file path=ppt/slides/slide112.xml><?xml version="1.0" encoding="utf-8"?>
 <p:sld xmlns:a="http://schemas.openxmlformats.org/drawingml/2006/main" xmlns:r="http://schemas.openxmlformats.org/officeDocument/2006/relationships" xmlns:p="http://schemas.openxmlformats.org/presentationml/2006/main">
   <p:cSld>
     <p:spTree>
@@ -6339,7 +6382,7 @@
 </p:sld>
 </file>
 
-<file path=ppt/slides/slide112.xml><?xml version="1.0" encoding="utf-8"?>
+<file path=ppt/slides/slide113.xml><?xml version="1.0" encoding="utf-8"?>
 <p:sld xmlns:a="http://schemas.openxmlformats.org/drawingml/2006/main" xmlns:r="http://schemas.openxmlformats.org/officeDocument/2006/relationships" xmlns:p="http://schemas.openxmlformats.org/presentationml/2006/main">
   <p:cSld>
     <p:spTree>
@@ -6497,7 +6540,7 @@
 </p:sld>
 </file>
 
-<file path=ppt/slides/slide113.xml><?xml version="1.0" encoding="utf-8"?>
+<file path=ppt/slides/slide114.xml><?xml version="1.0" encoding="utf-8"?>
 <p:sld xmlns:a="http://schemas.openxmlformats.org/drawingml/2006/main" xmlns:r="http://schemas.openxmlformats.org/officeDocument/2006/relationships" xmlns:p="http://schemas.openxmlformats.org/presentationml/2006/main">
   <p:cSld>
     <p:spTree>
@@ -6619,7 +6662,7 @@
 </p:sld>
 </file>
 
-<file path=ppt/slides/slide114.xml><?xml version="1.0" encoding="utf-8"?>
+<file path=ppt/slides/slide115.xml><?xml version="1.0" encoding="utf-8"?>
 <p:sld xmlns:a="http://schemas.openxmlformats.org/drawingml/2006/main" xmlns:r="http://schemas.openxmlformats.org/officeDocument/2006/relationships" xmlns:p="http://schemas.openxmlformats.org/presentationml/2006/main">
   <p:cSld>
     <p:spTree>
@@ -6833,7 +6876,7 @@
 </p:sld>
 </file>
 
-<file path=ppt/slides/slide115.xml><?xml version="1.0" encoding="utf-8"?>
+<file path=ppt/slides/slide116.xml><?xml version="1.0" encoding="utf-8"?>
 <p:sld xmlns:a="http://schemas.openxmlformats.org/drawingml/2006/main" xmlns:r="http://schemas.openxmlformats.org/officeDocument/2006/relationships" xmlns:p="http://schemas.openxmlformats.org/presentationml/2006/main">
   <p:cSld>
     <p:spTree>
@@ -6955,7 +6998,7 @@
 </p:sld>
 </file>
 
-<file path=ppt/slides/slide116.xml><?xml version="1.0" encoding="utf-8"?>
+<file path=ppt/slides/slide117.xml><?xml version="1.0" encoding="utf-8"?>
 <p:sld xmlns:a="http://schemas.openxmlformats.org/drawingml/2006/main" xmlns:r="http://schemas.openxmlformats.org/officeDocument/2006/relationships" xmlns:p="http://schemas.openxmlformats.org/presentationml/2006/main">
   <p:cSld>
     <p:spTree>
@@ -6991,7 +7034,7 @@
 </p:sld>
 </file>
 
-<file path=ppt/slides/slide117.xml><?xml version="1.0" encoding="utf-8"?>
+<file path=ppt/slides/slide118.xml><?xml version="1.0" encoding="utf-8"?>
 <p:sld xmlns:a="http://schemas.openxmlformats.org/drawingml/2006/main" xmlns:r="http://schemas.openxmlformats.org/officeDocument/2006/relationships" xmlns:p="http://schemas.openxmlformats.org/presentationml/2006/main">
   <p:cSld>
     <p:spTree>
@@ -7149,7 +7192,7 @@
 </p:sld>
 </file>
 
-<file path=ppt/slides/slide118.xml><?xml version="1.0" encoding="utf-8"?>
+<file path=ppt/slides/slide119.xml><?xml version="1.0" encoding="utf-8"?>
 <p:sld xmlns:a="http://schemas.openxmlformats.org/drawingml/2006/main" xmlns:r="http://schemas.openxmlformats.org/officeDocument/2006/relationships" xmlns:p="http://schemas.openxmlformats.org/presentationml/2006/main">
   <p:cSld>
     <p:spTree>
@@ -7262,178 +7305,6 @@
     <p:extLst>
       <p:ext uri="{BB962C8B-B14F-4D97-AF65-F5344CB8AC3E}">
         <p14:creationId xmlns:p14="http://schemas.microsoft.com/office/powerpoint/2010/main" val="1229748770"/>
-      </p:ext>
-    </p:extLst>
-  </p:cSld>
-  <p:clrMapOvr>
-    <a:masterClrMapping/>
-  </p:clrMapOvr>
-</p:sld>
-</file>
-
-<file path=ppt/slides/slide119.xml><?xml version="1.0" encoding="utf-8"?>
-<p:sld xmlns:a="http://schemas.openxmlformats.org/drawingml/2006/main" xmlns:r="http://schemas.openxmlformats.org/officeDocument/2006/relationships" xmlns:p="http://schemas.openxmlformats.org/presentationml/2006/main">
-  <p:cSld>
-    <p:spTree>
-      <p:nvGrpSpPr>
-        <p:cNvPr id="1" name="">
-          <a:extLst>
-            <a:ext uri="{FF2B5EF4-FFF2-40B4-BE49-F238E27FC236}">
-              <a16:creationId xmlns:a16="http://schemas.microsoft.com/office/drawing/2014/main" id="{0143B866-BF9A-40CA-34BC-55CC59492A78}"/>
-            </a:ext>
-          </a:extLst>
-        </p:cNvPr>
-        <p:cNvGrpSpPr/>
-        <p:nvPr/>
-      </p:nvGrpSpPr>
-      <p:grpSpPr>
-        <a:xfrm>
-          <a:off x="0" y="0"/>
-          <a:ext cx="0" cy="0"/>
-          <a:chOff x="0" y="0"/>
-          <a:chExt cx="0" cy="0"/>
-        </a:xfrm>
-      </p:grpSpPr>
-      <p:pic>
-        <p:nvPicPr>
-          <p:cNvPr id="5" name="図 4">
-            <a:extLst>
-              <a:ext uri="{FF2B5EF4-FFF2-40B4-BE49-F238E27FC236}">
-                <a16:creationId xmlns:a16="http://schemas.microsoft.com/office/drawing/2014/main" id="{2CB8022C-69C4-4D55-BA78-B5F10A76C16B}"/>
-              </a:ext>
-            </a:extLst>
-          </p:cNvPr>
-          <p:cNvPicPr>
-            <a:picLocks noChangeAspect="1"/>
-          </p:cNvPicPr>
-          <p:nvPr/>
-        </p:nvPicPr>
-        <p:blipFill>
-          <a:blip r:embed="rId2">
-            <a:extLst>
-              <a:ext uri="{28A0092B-C50C-407E-A947-70E740481C1C}">
-                <a14:useLocalDpi xmlns:a14="http://schemas.microsoft.com/office/drawing/2010/main" val="0"/>
-              </a:ext>
-            </a:extLst>
-          </a:blip>
-          <a:stretch>
-            <a:fillRect/>
-          </a:stretch>
-        </p:blipFill>
-        <p:spPr>
-          <a:xfrm>
-            <a:off x="1781175" y="1328737"/>
-            <a:ext cx="8629650" cy="4200525"/>
-          </a:xfrm>
-          <a:prstGeom prst="rect">
-            <a:avLst/>
-          </a:prstGeom>
-        </p:spPr>
-      </p:pic>
-      <p:sp>
-        <p:nvSpPr>
-          <p:cNvPr id="10" name="正方形/長方形 9">
-            <a:extLst>
-              <a:ext uri="{FF2B5EF4-FFF2-40B4-BE49-F238E27FC236}">
-                <a16:creationId xmlns:a16="http://schemas.microsoft.com/office/drawing/2014/main" id="{957D965B-A67D-ACD5-2D42-ABC1C7B46B35}"/>
-              </a:ext>
-            </a:extLst>
-          </p:cNvPr>
-          <p:cNvSpPr/>
-          <p:nvPr/>
-        </p:nvSpPr>
-        <p:spPr>
-          <a:xfrm flipV="1">
-            <a:off x="5770692" y="5012808"/>
-            <a:ext cx="2272295" cy="286980"/>
-          </a:xfrm>
-          <a:prstGeom prst="rect">
-            <a:avLst/>
-          </a:prstGeom>
-          <a:noFill/>
-          <a:ln w="28575">
-            <a:solidFill>
-              <a:srgbClr val="FF0000"/>
-            </a:solidFill>
-          </a:ln>
-        </p:spPr>
-        <p:style>
-          <a:lnRef idx="2">
-            <a:schemeClr val="accent6"/>
-          </a:lnRef>
-          <a:fillRef idx="1">
-            <a:schemeClr val="lt1"/>
-          </a:fillRef>
-          <a:effectRef idx="0">
-            <a:schemeClr val="accent6"/>
-          </a:effectRef>
-          <a:fontRef idx="minor">
-            <a:schemeClr val="dk1"/>
-          </a:fontRef>
-        </p:style>
-        <p:txBody>
-          <a:bodyPr rtlCol="0" anchor="ctr"/>
-          <a:lstStyle/>
-          <a:p>
-            <a:pPr algn="ctr"/>
-            <a:endParaRPr kumimoji="1" lang="ja-JP" altLang="en-US"/>
-          </a:p>
-        </p:txBody>
-      </p:sp>
-      <p:sp>
-        <p:nvSpPr>
-          <p:cNvPr id="11" name="正方形/長方形 10">
-            <a:extLst>
-              <a:ext uri="{FF2B5EF4-FFF2-40B4-BE49-F238E27FC236}">
-                <a16:creationId xmlns:a16="http://schemas.microsoft.com/office/drawing/2014/main" id="{3745A6F7-BF32-2795-30DE-C5588FBCAA38}"/>
-              </a:ext>
-            </a:extLst>
-          </p:cNvPr>
-          <p:cNvSpPr/>
-          <p:nvPr/>
-        </p:nvSpPr>
-        <p:spPr>
-          <a:xfrm flipV="1">
-            <a:off x="8138530" y="2608622"/>
-            <a:ext cx="2143805" cy="274539"/>
-          </a:xfrm>
-          <a:prstGeom prst="rect">
-            <a:avLst/>
-          </a:prstGeom>
-          <a:noFill/>
-          <a:ln w="28575">
-            <a:solidFill>
-              <a:srgbClr val="FF0000"/>
-            </a:solidFill>
-          </a:ln>
-        </p:spPr>
-        <p:style>
-          <a:lnRef idx="2">
-            <a:schemeClr val="accent6"/>
-          </a:lnRef>
-          <a:fillRef idx="1">
-            <a:schemeClr val="lt1"/>
-          </a:fillRef>
-          <a:effectRef idx="0">
-            <a:schemeClr val="accent6"/>
-          </a:effectRef>
-          <a:fontRef idx="minor">
-            <a:schemeClr val="dk1"/>
-          </a:fontRef>
-        </p:style>
-        <p:txBody>
-          <a:bodyPr rtlCol="0" anchor="ctr"/>
-          <a:lstStyle/>
-          <a:p>
-            <a:pPr algn="ctr"/>
-            <a:endParaRPr kumimoji="1" lang="ja-JP" altLang="en-US"/>
-          </a:p>
-        </p:txBody>
-      </p:sp>
-    </p:spTree>
-    <p:extLst>
-      <p:ext uri="{BB962C8B-B14F-4D97-AF65-F5344CB8AC3E}">
-        <p14:creationId xmlns:p14="http://schemas.microsoft.com/office/powerpoint/2010/main" val="2488181164"/>
       </p:ext>
     </p:extLst>
   </p:cSld>
@@ -7865,6 +7736,178 @@
         <p:cNvPr id="1" name="">
           <a:extLst>
             <a:ext uri="{FF2B5EF4-FFF2-40B4-BE49-F238E27FC236}">
+              <a16:creationId xmlns:a16="http://schemas.microsoft.com/office/drawing/2014/main" id="{0143B866-BF9A-40CA-34BC-55CC59492A78}"/>
+            </a:ext>
+          </a:extLst>
+        </p:cNvPr>
+        <p:cNvGrpSpPr/>
+        <p:nvPr/>
+      </p:nvGrpSpPr>
+      <p:grpSpPr>
+        <a:xfrm>
+          <a:off x="0" y="0"/>
+          <a:ext cx="0" cy="0"/>
+          <a:chOff x="0" y="0"/>
+          <a:chExt cx="0" cy="0"/>
+        </a:xfrm>
+      </p:grpSpPr>
+      <p:pic>
+        <p:nvPicPr>
+          <p:cNvPr id="5" name="図 4">
+            <a:extLst>
+              <a:ext uri="{FF2B5EF4-FFF2-40B4-BE49-F238E27FC236}">
+                <a16:creationId xmlns:a16="http://schemas.microsoft.com/office/drawing/2014/main" id="{2CB8022C-69C4-4D55-BA78-B5F10A76C16B}"/>
+              </a:ext>
+            </a:extLst>
+          </p:cNvPr>
+          <p:cNvPicPr>
+            <a:picLocks noChangeAspect="1"/>
+          </p:cNvPicPr>
+          <p:nvPr/>
+        </p:nvPicPr>
+        <p:blipFill>
+          <a:blip r:embed="rId2">
+            <a:extLst>
+              <a:ext uri="{28A0092B-C50C-407E-A947-70E740481C1C}">
+                <a14:useLocalDpi xmlns:a14="http://schemas.microsoft.com/office/drawing/2010/main" val="0"/>
+              </a:ext>
+            </a:extLst>
+          </a:blip>
+          <a:stretch>
+            <a:fillRect/>
+          </a:stretch>
+        </p:blipFill>
+        <p:spPr>
+          <a:xfrm>
+            <a:off x="1781175" y="1328737"/>
+            <a:ext cx="8629650" cy="4200525"/>
+          </a:xfrm>
+          <a:prstGeom prst="rect">
+            <a:avLst/>
+          </a:prstGeom>
+        </p:spPr>
+      </p:pic>
+      <p:sp>
+        <p:nvSpPr>
+          <p:cNvPr id="10" name="正方形/長方形 9">
+            <a:extLst>
+              <a:ext uri="{FF2B5EF4-FFF2-40B4-BE49-F238E27FC236}">
+                <a16:creationId xmlns:a16="http://schemas.microsoft.com/office/drawing/2014/main" id="{957D965B-A67D-ACD5-2D42-ABC1C7B46B35}"/>
+              </a:ext>
+            </a:extLst>
+          </p:cNvPr>
+          <p:cNvSpPr/>
+          <p:nvPr/>
+        </p:nvSpPr>
+        <p:spPr>
+          <a:xfrm flipV="1">
+            <a:off x="5770692" y="5012808"/>
+            <a:ext cx="2272295" cy="286980"/>
+          </a:xfrm>
+          <a:prstGeom prst="rect">
+            <a:avLst/>
+          </a:prstGeom>
+          <a:noFill/>
+          <a:ln w="28575">
+            <a:solidFill>
+              <a:srgbClr val="FF0000"/>
+            </a:solidFill>
+          </a:ln>
+        </p:spPr>
+        <p:style>
+          <a:lnRef idx="2">
+            <a:schemeClr val="accent6"/>
+          </a:lnRef>
+          <a:fillRef idx="1">
+            <a:schemeClr val="lt1"/>
+          </a:fillRef>
+          <a:effectRef idx="0">
+            <a:schemeClr val="accent6"/>
+          </a:effectRef>
+          <a:fontRef idx="minor">
+            <a:schemeClr val="dk1"/>
+          </a:fontRef>
+        </p:style>
+        <p:txBody>
+          <a:bodyPr rtlCol="0" anchor="ctr"/>
+          <a:lstStyle/>
+          <a:p>
+            <a:pPr algn="ctr"/>
+            <a:endParaRPr kumimoji="1" lang="ja-JP" altLang="en-US"/>
+          </a:p>
+        </p:txBody>
+      </p:sp>
+      <p:sp>
+        <p:nvSpPr>
+          <p:cNvPr id="11" name="正方形/長方形 10">
+            <a:extLst>
+              <a:ext uri="{FF2B5EF4-FFF2-40B4-BE49-F238E27FC236}">
+                <a16:creationId xmlns:a16="http://schemas.microsoft.com/office/drawing/2014/main" id="{3745A6F7-BF32-2795-30DE-C5588FBCAA38}"/>
+              </a:ext>
+            </a:extLst>
+          </p:cNvPr>
+          <p:cNvSpPr/>
+          <p:nvPr/>
+        </p:nvSpPr>
+        <p:spPr>
+          <a:xfrm flipV="1">
+            <a:off x="8138530" y="2608622"/>
+            <a:ext cx="2143805" cy="274539"/>
+          </a:xfrm>
+          <a:prstGeom prst="rect">
+            <a:avLst/>
+          </a:prstGeom>
+          <a:noFill/>
+          <a:ln w="28575">
+            <a:solidFill>
+              <a:srgbClr val="FF0000"/>
+            </a:solidFill>
+          </a:ln>
+        </p:spPr>
+        <p:style>
+          <a:lnRef idx="2">
+            <a:schemeClr val="accent6"/>
+          </a:lnRef>
+          <a:fillRef idx="1">
+            <a:schemeClr val="lt1"/>
+          </a:fillRef>
+          <a:effectRef idx="0">
+            <a:schemeClr val="accent6"/>
+          </a:effectRef>
+          <a:fontRef idx="minor">
+            <a:schemeClr val="dk1"/>
+          </a:fontRef>
+        </p:style>
+        <p:txBody>
+          <a:bodyPr rtlCol="0" anchor="ctr"/>
+          <a:lstStyle/>
+          <a:p>
+            <a:pPr algn="ctr"/>
+            <a:endParaRPr kumimoji="1" lang="ja-JP" altLang="en-US"/>
+          </a:p>
+        </p:txBody>
+      </p:sp>
+    </p:spTree>
+    <p:extLst>
+      <p:ext uri="{BB962C8B-B14F-4D97-AF65-F5344CB8AC3E}">
+        <p14:creationId xmlns:p14="http://schemas.microsoft.com/office/powerpoint/2010/main" val="2488181164"/>
+      </p:ext>
+    </p:extLst>
+  </p:cSld>
+  <p:clrMapOvr>
+    <a:masterClrMapping/>
+  </p:clrMapOvr>
+</p:sld>
+</file>
+
+<file path=ppt/slides/slide121.xml><?xml version="1.0" encoding="utf-8"?>
+<p:sld xmlns:a="http://schemas.openxmlformats.org/drawingml/2006/main" xmlns:r="http://schemas.openxmlformats.org/officeDocument/2006/relationships" xmlns:p="http://schemas.openxmlformats.org/presentationml/2006/main">
+  <p:cSld>
+    <p:spTree>
+      <p:nvGrpSpPr>
+        <p:cNvPr id="1" name="">
+          <a:extLst>
+            <a:ext uri="{FF2B5EF4-FFF2-40B4-BE49-F238E27FC236}">
               <a16:creationId xmlns:a16="http://schemas.microsoft.com/office/drawing/2014/main" id="{324E939D-5C1B-B62B-7A57-A3683D8C7352}"/>
             </a:ext>
           </a:extLst>
@@ -8071,7 +8114,7 @@
 </p:sld>
 </file>
 
-<file path=ppt/slides/slide121.xml><?xml version="1.0" encoding="utf-8"?>
+<file path=ppt/slides/slide122.xml><?xml version="1.0" encoding="utf-8"?>
 <p:sld xmlns:a="http://schemas.openxmlformats.org/drawingml/2006/main" xmlns:r="http://schemas.openxmlformats.org/officeDocument/2006/relationships" xmlns:p="http://schemas.openxmlformats.org/presentationml/2006/main">
   <p:cSld>
     <p:spTree>
@@ -8229,7 +8272,7 @@
 </p:sld>
 </file>
 
-<file path=ppt/slides/slide122.xml><?xml version="1.0" encoding="utf-8"?>
+<file path=ppt/slides/slide123.xml><?xml version="1.0" encoding="utf-8"?>
 <p:sld xmlns:a="http://schemas.openxmlformats.org/drawingml/2006/main" xmlns:r="http://schemas.openxmlformats.org/officeDocument/2006/relationships" xmlns:p="http://schemas.openxmlformats.org/presentationml/2006/main">
   <p:cSld>
     <p:spTree>
@@ -8265,7 +8308,7 @@
 </p:sld>
 </file>
 
-<file path=ppt/slides/slide123.xml><?xml version="1.0" encoding="utf-8"?>
+<file path=ppt/slides/slide124.xml><?xml version="1.0" encoding="utf-8"?>
 <p:sld xmlns:a="http://schemas.openxmlformats.org/drawingml/2006/main" xmlns:r="http://schemas.openxmlformats.org/officeDocument/2006/relationships" xmlns:p="http://schemas.openxmlformats.org/presentationml/2006/main">
   <p:cSld>
     <p:spTree>
@@ -8301,7 +8344,7 @@
 </p:sld>
 </file>
 
-<file path=ppt/slides/slide124.xml><?xml version="1.0" encoding="utf-8"?>
+<file path=ppt/slides/slide125.xml><?xml version="1.0" encoding="utf-8"?>
 <p:sld xmlns:a="http://schemas.openxmlformats.org/drawingml/2006/main" xmlns:r="http://schemas.openxmlformats.org/officeDocument/2006/relationships" xmlns:p="http://schemas.openxmlformats.org/presentationml/2006/main">
   <p:cSld>
     <p:spTree>
@@ -8459,7 +8502,7 @@
 </p:sld>
 </file>
 
-<file path=ppt/slides/slide125.xml><?xml version="1.0" encoding="utf-8"?>
+<file path=ppt/slides/slide126.xml><?xml version="1.0" encoding="utf-8"?>
 <p:sld xmlns:a="http://schemas.openxmlformats.org/drawingml/2006/main" xmlns:r="http://schemas.openxmlformats.org/officeDocument/2006/relationships" xmlns:p="http://schemas.openxmlformats.org/presentationml/2006/main">
   <p:cSld>
     <p:spTree>
@@ -8663,7 +8706,7 @@
 </p:sld>
 </file>
 
-<file path=ppt/slides/slide126.xml><?xml version="1.0" encoding="utf-8"?>
+<file path=ppt/slides/slide127.xml><?xml version="1.0" encoding="utf-8"?>
 <p:sld xmlns:a="http://schemas.openxmlformats.org/drawingml/2006/main" xmlns:r="http://schemas.openxmlformats.org/officeDocument/2006/relationships" xmlns:p="http://schemas.openxmlformats.org/presentationml/2006/main">
   <p:cSld>
     <p:spTree>
@@ -8735,7 +8778,7 @@
 </p:sld>
 </file>
 
-<file path=ppt/slides/slide127.xml><?xml version="1.0" encoding="utf-8"?>
+<file path=ppt/slides/slide128.xml><?xml version="1.0" encoding="utf-8"?>
 <p:sld xmlns:a="http://schemas.openxmlformats.org/drawingml/2006/main" xmlns:r="http://schemas.openxmlformats.org/officeDocument/2006/relationships" xmlns:p="http://schemas.openxmlformats.org/presentationml/2006/main">
   <p:cSld>
     <p:spTree>
@@ -8857,7 +8900,7 @@
 </p:sld>
 </file>
 
-<file path=ppt/slides/slide128.xml><?xml version="1.0" encoding="utf-8"?>
+<file path=ppt/slides/slide129.xml><?xml version="1.0" encoding="utf-8"?>
 <p:sld xmlns:a="http://schemas.openxmlformats.org/drawingml/2006/main" xmlns:r="http://schemas.openxmlformats.org/officeDocument/2006/relationships" xmlns:p="http://schemas.openxmlformats.org/presentationml/2006/main">
   <p:cSld>
     <p:spTree>
@@ -8970,224 +9013,6 @@
     <p:extLst>
       <p:ext uri="{BB962C8B-B14F-4D97-AF65-F5344CB8AC3E}">
         <p14:creationId xmlns:p14="http://schemas.microsoft.com/office/powerpoint/2010/main" val="653901759"/>
-      </p:ext>
-    </p:extLst>
-  </p:cSld>
-  <p:clrMapOvr>
-    <a:masterClrMapping/>
-  </p:clrMapOvr>
-</p:sld>
-</file>
-
-<file path=ppt/slides/slide129.xml><?xml version="1.0" encoding="utf-8"?>
-<p:sld xmlns:a="http://schemas.openxmlformats.org/drawingml/2006/main" xmlns:r="http://schemas.openxmlformats.org/officeDocument/2006/relationships" xmlns:p="http://schemas.openxmlformats.org/presentationml/2006/main">
-  <p:cSld>
-    <p:spTree>
-      <p:nvGrpSpPr>
-        <p:cNvPr id="1" name="">
-          <a:extLst>
-            <a:ext uri="{FF2B5EF4-FFF2-40B4-BE49-F238E27FC236}">
-              <a16:creationId xmlns:a16="http://schemas.microsoft.com/office/drawing/2014/main" id="{9AC5E81D-CFBC-FB85-185C-48802FF4C230}"/>
-            </a:ext>
-          </a:extLst>
-        </p:cNvPr>
-        <p:cNvGrpSpPr/>
-        <p:nvPr/>
-      </p:nvGrpSpPr>
-      <p:grpSpPr>
-        <a:xfrm>
-          <a:off x="0" y="0"/>
-          <a:ext cx="0" cy="0"/>
-          <a:chOff x="0" y="0"/>
-          <a:chExt cx="0" cy="0"/>
-        </a:xfrm>
-      </p:grpSpPr>
-      <p:pic>
-        <p:nvPicPr>
-          <p:cNvPr id="18" name="図 17">
-            <a:extLst>
-              <a:ext uri="{FF2B5EF4-FFF2-40B4-BE49-F238E27FC236}">
-                <a16:creationId xmlns:a16="http://schemas.microsoft.com/office/drawing/2014/main" id="{565E928C-1691-6541-EEB7-08A3C2A12E14}"/>
-              </a:ext>
-            </a:extLst>
-          </p:cNvPr>
-          <p:cNvPicPr>
-            <a:picLocks noChangeAspect="1"/>
-          </p:cNvPicPr>
-          <p:nvPr/>
-        </p:nvPicPr>
-        <p:blipFill>
-          <a:blip r:embed="rId2">
-            <a:extLst>
-              <a:ext uri="{28A0092B-C50C-407E-A947-70E740481C1C}">
-                <a14:useLocalDpi xmlns:a14="http://schemas.microsoft.com/office/drawing/2010/main" val="0"/>
-              </a:ext>
-            </a:extLst>
-          </a:blip>
-          <a:stretch>
-            <a:fillRect/>
-          </a:stretch>
-        </p:blipFill>
-        <p:spPr>
-          <a:xfrm>
-            <a:off x="3778120" y="1883132"/>
-            <a:ext cx="4038600" cy="2905125"/>
-          </a:xfrm>
-          <a:prstGeom prst="rect">
-            <a:avLst/>
-          </a:prstGeom>
-        </p:spPr>
-      </p:pic>
-      <p:sp>
-        <p:nvSpPr>
-          <p:cNvPr id="4" name="正方形/長方形 3">
-            <a:extLst>
-              <a:ext uri="{FF2B5EF4-FFF2-40B4-BE49-F238E27FC236}">
-                <a16:creationId xmlns:a16="http://schemas.microsoft.com/office/drawing/2014/main" id="{199E8ABE-3D73-7EB0-A936-8A6823A0A0DE}"/>
-              </a:ext>
-            </a:extLst>
-          </p:cNvPr>
-          <p:cNvSpPr/>
-          <p:nvPr/>
-        </p:nvSpPr>
-        <p:spPr>
-          <a:xfrm flipV="1">
-            <a:off x="4501729" y="3475653"/>
-            <a:ext cx="3205357" cy="303246"/>
-          </a:xfrm>
-          <a:prstGeom prst="rect">
-            <a:avLst/>
-          </a:prstGeom>
-          <a:noFill/>
-          <a:ln w="28575">
-            <a:solidFill>
-              <a:srgbClr val="FF0000"/>
-            </a:solidFill>
-          </a:ln>
-        </p:spPr>
-        <p:style>
-          <a:lnRef idx="2">
-            <a:schemeClr val="accent6"/>
-          </a:lnRef>
-          <a:fillRef idx="1">
-            <a:schemeClr val="lt1"/>
-          </a:fillRef>
-          <a:effectRef idx="0">
-            <a:schemeClr val="accent6"/>
-          </a:effectRef>
-          <a:fontRef idx="minor">
-            <a:schemeClr val="dk1"/>
-          </a:fontRef>
-        </p:style>
-        <p:txBody>
-          <a:bodyPr rtlCol="0" anchor="ctr"/>
-          <a:lstStyle/>
-          <a:p>
-            <a:pPr algn="ctr"/>
-            <a:endParaRPr kumimoji="1" lang="ja-JP" altLang="en-US"/>
-          </a:p>
-        </p:txBody>
-      </p:sp>
-      <p:sp>
-        <p:nvSpPr>
-          <p:cNvPr id="5" name="正方形/長方形 4">
-            <a:extLst>
-              <a:ext uri="{FF2B5EF4-FFF2-40B4-BE49-F238E27FC236}">
-                <a16:creationId xmlns:a16="http://schemas.microsoft.com/office/drawing/2014/main" id="{E88749D9-F0C3-3921-A8CB-A60D88B71D60}"/>
-              </a:ext>
-            </a:extLst>
-          </p:cNvPr>
-          <p:cNvSpPr/>
-          <p:nvPr/>
-        </p:nvSpPr>
-        <p:spPr>
-          <a:xfrm flipV="1">
-            <a:off x="4395349" y="3831381"/>
-            <a:ext cx="3311737" cy="544676"/>
-          </a:xfrm>
-          <a:prstGeom prst="rect">
-            <a:avLst/>
-          </a:prstGeom>
-          <a:noFill/>
-          <a:ln w="28575">
-            <a:solidFill>
-              <a:srgbClr val="FF0000"/>
-            </a:solidFill>
-          </a:ln>
-        </p:spPr>
-        <p:style>
-          <a:lnRef idx="2">
-            <a:schemeClr val="accent6"/>
-          </a:lnRef>
-          <a:fillRef idx="1">
-            <a:schemeClr val="lt1"/>
-          </a:fillRef>
-          <a:effectRef idx="0">
-            <a:schemeClr val="accent6"/>
-          </a:effectRef>
-          <a:fontRef idx="minor">
-            <a:schemeClr val="dk1"/>
-          </a:fontRef>
-        </p:style>
-        <p:txBody>
-          <a:bodyPr rtlCol="0" anchor="ctr"/>
-          <a:lstStyle/>
-          <a:p>
-            <a:pPr algn="ctr"/>
-            <a:endParaRPr kumimoji="1" lang="ja-JP" altLang="en-US"/>
-          </a:p>
-        </p:txBody>
-      </p:sp>
-      <p:sp>
-        <p:nvSpPr>
-          <p:cNvPr id="7" name="正方形/長方形 6">
-            <a:extLst>
-              <a:ext uri="{FF2B5EF4-FFF2-40B4-BE49-F238E27FC236}">
-                <a16:creationId xmlns:a16="http://schemas.microsoft.com/office/drawing/2014/main" id="{7CE282FC-F3E2-A90C-560A-C104F7F0D8F3}"/>
-              </a:ext>
-            </a:extLst>
-          </p:cNvPr>
-          <p:cNvSpPr/>
-          <p:nvPr/>
-        </p:nvSpPr>
-        <p:spPr>
-          <a:xfrm>
-            <a:off x="5928047" y="2902696"/>
-            <a:ext cx="845977" cy="176406"/>
-          </a:xfrm>
-          <a:prstGeom prst="rect">
-            <a:avLst/>
-          </a:prstGeom>
-        </p:spPr>
-        <p:style>
-          <a:lnRef idx="2">
-            <a:schemeClr val="dk1">
-              <a:shade val="15000"/>
-            </a:schemeClr>
-          </a:lnRef>
-          <a:fillRef idx="1">
-            <a:schemeClr val="dk1"/>
-          </a:fillRef>
-          <a:effectRef idx="0">
-            <a:schemeClr val="dk1"/>
-          </a:effectRef>
-          <a:fontRef idx="minor">
-            <a:schemeClr val="lt1"/>
-          </a:fontRef>
-        </p:style>
-        <p:txBody>
-          <a:bodyPr rtlCol="0" anchor="ctr"/>
-          <a:lstStyle/>
-          <a:p>
-            <a:pPr algn="ctr"/>
-            <a:endParaRPr kumimoji="1" lang="ja-JP" altLang="en-US"/>
-          </a:p>
-        </p:txBody>
-      </p:sp>
-    </p:spTree>
-    <p:extLst>
-      <p:ext uri="{BB962C8B-B14F-4D97-AF65-F5344CB8AC3E}">
-        <p14:creationId xmlns:p14="http://schemas.microsoft.com/office/powerpoint/2010/main" val="504583617"/>
       </p:ext>
     </p:extLst>
   </p:cSld>
@@ -10085,6 +9910,224 @@
         <p:cNvPr id="1" name="">
           <a:extLst>
             <a:ext uri="{FF2B5EF4-FFF2-40B4-BE49-F238E27FC236}">
+              <a16:creationId xmlns:a16="http://schemas.microsoft.com/office/drawing/2014/main" id="{9AC5E81D-CFBC-FB85-185C-48802FF4C230}"/>
+            </a:ext>
+          </a:extLst>
+        </p:cNvPr>
+        <p:cNvGrpSpPr/>
+        <p:nvPr/>
+      </p:nvGrpSpPr>
+      <p:grpSpPr>
+        <a:xfrm>
+          <a:off x="0" y="0"/>
+          <a:ext cx="0" cy="0"/>
+          <a:chOff x="0" y="0"/>
+          <a:chExt cx="0" cy="0"/>
+        </a:xfrm>
+      </p:grpSpPr>
+      <p:pic>
+        <p:nvPicPr>
+          <p:cNvPr id="18" name="図 17">
+            <a:extLst>
+              <a:ext uri="{FF2B5EF4-FFF2-40B4-BE49-F238E27FC236}">
+                <a16:creationId xmlns:a16="http://schemas.microsoft.com/office/drawing/2014/main" id="{565E928C-1691-6541-EEB7-08A3C2A12E14}"/>
+              </a:ext>
+            </a:extLst>
+          </p:cNvPr>
+          <p:cNvPicPr>
+            <a:picLocks noChangeAspect="1"/>
+          </p:cNvPicPr>
+          <p:nvPr/>
+        </p:nvPicPr>
+        <p:blipFill>
+          <a:blip r:embed="rId2">
+            <a:extLst>
+              <a:ext uri="{28A0092B-C50C-407E-A947-70E740481C1C}">
+                <a14:useLocalDpi xmlns:a14="http://schemas.microsoft.com/office/drawing/2010/main" val="0"/>
+              </a:ext>
+            </a:extLst>
+          </a:blip>
+          <a:stretch>
+            <a:fillRect/>
+          </a:stretch>
+        </p:blipFill>
+        <p:spPr>
+          <a:xfrm>
+            <a:off x="3778120" y="1883132"/>
+            <a:ext cx="4038600" cy="2905125"/>
+          </a:xfrm>
+          <a:prstGeom prst="rect">
+            <a:avLst/>
+          </a:prstGeom>
+        </p:spPr>
+      </p:pic>
+      <p:sp>
+        <p:nvSpPr>
+          <p:cNvPr id="4" name="正方形/長方形 3">
+            <a:extLst>
+              <a:ext uri="{FF2B5EF4-FFF2-40B4-BE49-F238E27FC236}">
+                <a16:creationId xmlns:a16="http://schemas.microsoft.com/office/drawing/2014/main" id="{199E8ABE-3D73-7EB0-A936-8A6823A0A0DE}"/>
+              </a:ext>
+            </a:extLst>
+          </p:cNvPr>
+          <p:cNvSpPr/>
+          <p:nvPr/>
+        </p:nvSpPr>
+        <p:spPr>
+          <a:xfrm flipV="1">
+            <a:off x="4501729" y="3475653"/>
+            <a:ext cx="3205357" cy="303246"/>
+          </a:xfrm>
+          <a:prstGeom prst="rect">
+            <a:avLst/>
+          </a:prstGeom>
+          <a:noFill/>
+          <a:ln w="28575">
+            <a:solidFill>
+              <a:srgbClr val="FF0000"/>
+            </a:solidFill>
+          </a:ln>
+        </p:spPr>
+        <p:style>
+          <a:lnRef idx="2">
+            <a:schemeClr val="accent6"/>
+          </a:lnRef>
+          <a:fillRef idx="1">
+            <a:schemeClr val="lt1"/>
+          </a:fillRef>
+          <a:effectRef idx="0">
+            <a:schemeClr val="accent6"/>
+          </a:effectRef>
+          <a:fontRef idx="minor">
+            <a:schemeClr val="dk1"/>
+          </a:fontRef>
+        </p:style>
+        <p:txBody>
+          <a:bodyPr rtlCol="0" anchor="ctr"/>
+          <a:lstStyle/>
+          <a:p>
+            <a:pPr algn="ctr"/>
+            <a:endParaRPr kumimoji="1" lang="ja-JP" altLang="en-US"/>
+          </a:p>
+        </p:txBody>
+      </p:sp>
+      <p:sp>
+        <p:nvSpPr>
+          <p:cNvPr id="5" name="正方形/長方形 4">
+            <a:extLst>
+              <a:ext uri="{FF2B5EF4-FFF2-40B4-BE49-F238E27FC236}">
+                <a16:creationId xmlns:a16="http://schemas.microsoft.com/office/drawing/2014/main" id="{E88749D9-F0C3-3921-A8CB-A60D88B71D60}"/>
+              </a:ext>
+            </a:extLst>
+          </p:cNvPr>
+          <p:cNvSpPr/>
+          <p:nvPr/>
+        </p:nvSpPr>
+        <p:spPr>
+          <a:xfrm flipV="1">
+            <a:off x="4395349" y="3831381"/>
+            <a:ext cx="3311737" cy="544676"/>
+          </a:xfrm>
+          <a:prstGeom prst="rect">
+            <a:avLst/>
+          </a:prstGeom>
+          <a:noFill/>
+          <a:ln w="28575">
+            <a:solidFill>
+              <a:srgbClr val="FF0000"/>
+            </a:solidFill>
+          </a:ln>
+        </p:spPr>
+        <p:style>
+          <a:lnRef idx="2">
+            <a:schemeClr val="accent6"/>
+          </a:lnRef>
+          <a:fillRef idx="1">
+            <a:schemeClr val="lt1"/>
+          </a:fillRef>
+          <a:effectRef idx="0">
+            <a:schemeClr val="accent6"/>
+          </a:effectRef>
+          <a:fontRef idx="minor">
+            <a:schemeClr val="dk1"/>
+          </a:fontRef>
+        </p:style>
+        <p:txBody>
+          <a:bodyPr rtlCol="0" anchor="ctr"/>
+          <a:lstStyle/>
+          <a:p>
+            <a:pPr algn="ctr"/>
+            <a:endParaRPr kumimoji="1" lang="ja-JP" altLang="en-US"/>
+          </a:p>
+        </p:txBody>
+      </p:sp>
+      <p:sp>
+        <p:nvSpPr>
+          <p:cNvPr id="7" name="正方形/長方形 6">
+            <a:extLst>
+              <a:ext uri="{FF2B5EF4-FFF2-40B4-BE49-F238E27FC236}">
+                <a16:creationId xmlns:a16="http://schemas.microsoft.com/office/drawing/2014/main" id="{7CE282FC-F3E2-A90C-560A-C104F7F0D8F3}"/>
+              </a:ext>
+            </a:extLst>
+          </p:cNvPr>
+          <p:cNvSpPr/>
+          <p:nvPr/>
+        </p:nvSpPr>
+        <p:spPr>
+          <a:xfrm>
+            <a:off x="5928047" y="2902696"/>
+            <a:ext cx="845977" cy="176406"/>
+          </a:xfrm>
+          <a:prstGeom prst="rect">
+            <a:avLst/>
+          </a:prstGeom>
+        </p:spPr>
+        <p:style>
+          <a:lnRef idx="2">
+            <a:schemeClr val="dk1">
+              <a:shade val="15000"/>
+            </a:schemeClr>
+          </a:lnRef>
+          <a:fillRef idx="1">
+            <a:schemeClr val="dk1"/>
+          </a:fillRef>
+          <a:effectRef idx="0">
+            <a:schemeClr val="dk1"/>
+          </a:effectRef>
+          <a:fontRef idx="minor">
+            <a:schemeClr val="lt1"/>
+          </a:fontRef>
+        </p:style>
+        <p:txBody>
+          <a:bodyPr rtlCol="0" anchor="ctr"/>
+          <a:lstStyle/>
+          <a:p>
+            <a:pPr algn="ctr"/>
+            <a:endParaRPr kumimoji="1" lang="ja-JP" altLang="en-US"/>
+          </a:p>
+        </p:txBody>
+      </p:sp>
+    </p:spTree>
+    <p:extLst>
+      <p:ext uri="{BB962C8B-B14F-4D97-AF65-F5344CB8AC3E}">
+        <p14:creationId xmlns:p14="http://schemas.microsoft.com/office/powerpoint/2010/main" val="504583617"/>
+      </p:ext>
+    </p:extLst>
+  </p:cSld>
+  <p:clrMapOvr>
+    <a:masterClrMapping/>
+  </p:clrMapOvr>
+</p:sld>
+</file>
+
+<file path=ppt/slides/slide131.xml><?xml version="1.0" encoding="utf-8"?>
+<p:sld xmlns:a="http://schemas.openxmlformats.org/drawingml/2006/main" xmlns:r="http://schemas.openxmlformats.org/officeDocument/2006/relationships" xmlns:p="http://schemas.openxmlformats.org/presentationml/2006/main">
+  <p:cSld>
+    <p:spTree>
+      <p:nvGrpSpPr>
+        <p:cNvPr id="1" name="">
+          <a:extLst>
+            <a:ext uri="{FF2B5EF4-FFF2-40B4-BE49-F238E27FC236}">
               <a16:creationId xmlns:a16="http://schemas.microsoft.com/office/drawing/2014/main" id="{E0E46EE9-5CCA-A21F-4D55-EFB9CB10BDF1}"/>
             </a:ext>
           </a:extLst>
@@ -10113,7 +10156,7 @@
 </p:sld>
 </file>
 
-<file path=ppt/slides/slide131.xml><?xml version="1.0" encoding="utf-8"?>
+<file path=ppt/slides/slide132.xml><?xml version="1.0" encoding="utf-8"?>
 <p:sld xmlns:a="http://schemas.openxmlformats.org/drawingml/2006/main" xmlns:r="http://schemas.openxmlformats.org/officeDocument/2006/relationships" xmlns:p="http://schemas.openxmlformats.org/presentationml/2006/main">
   <p:cSld>
     <p:spTree>
@@ -10480,7 +10523,7 @@
 </p:sld>
 </file>
 
-<file path=ppt/slides/slide132.xml><?xml version="1.0" encoding="utf-8"?>
+<file path=ppt/slides/slide133.xml><?xml version="1.0" encoding="utf-8"?>
 <p:sld xmlns:a="http://schemas.openxmlformats.org/drawingml/2006/main" xmlns:r="http://schemas.openxmlformats.org/officeDocument/2006/relationships" xmlns:p="http://schemas.openxmlformats.org/presentationml/2006/main">
   <p:cSld>
     <p:spTree>
@@ -10834,7 +10877,7 @@
 </p:sld>
 </file>
 
-<file path=ppt/slides/slide133.xml><?xml version="1.0" encoding="utf-8"?>
+<file path=ppt/slides/slide134.xml><?xml version="1.0" encoding="utf-8"?>
 <p:sld xmlns:a="http://schemas.openxmlformats.org/drawingml/2006/main" xmlns:r="http://schemas.openxmlformats.org/officeDocument/2006/relationships" xmlns:p="http://schemas.openxmlformats.org/presentationml/2006/main">
   <p:cSld>
     <p:spTree>
@@ -11031,7 +11074,7 @@
 </p:sld>
 </file>
 
-<file path=ppt/slides/slide134.xml><?xml version="1.0" encoding="utf-8"?>
+<file path=ppt/slides/slide135.xml><?xml version="1.0" encoding="utf-8"?>
 <p:sld xmlns:a="http://schemas.openxmlformats.org/drawingml/2006/main" xmlns:r="http://schemas.openxmlformats.org/officeDocument/2006/relationships" xmlns:p="http://schemas.openxmlformats.org/presentationml/2006/main">
   <p:cSld>
     <p:spTree>
@@ -11147,7 +11190,7 @@
 </p:sld>
 </file>
 
-<file path=ppt/slides/slide135.xml><?xml version="1.0" encoding="utf-8"?>
+<file path=ppt/slides/slide136.xml><?xml version="1.0" encoding="utf-8"?>
 <p:sld xmlns:a="http://schemas.openxmlformats.org/drawingml/2006/main" xmlns:r="http://schemas.openxmlformats.org/officeDocument/2006/relationships" xmlns:p="http://schemas.openxmlformats.org/presentationml/2006/main">
   <p:cSld>
     <p:spTree>
@@ -11325,7 +11368,7 @@
 </p:sld>
 </file>
 
-<file path=ppt/slides/slide136.xml><?xml version="1.0" encoding="utf-8"?>
+<file path=ppt/slides/slide137.xml><?xml version="1.0" encoding="utf-8"?>
 <p:sld xmlns:a="http://schemas.openxmlformats.org/drawingml/2006/main" xmlns:r="http://schemas.openxmlformats.org/officeDocument/2006/relationships" xmlns:p="http://schemas.openxmlformats.org/presentationml/2006/main">
   <p:cSld>
     <p:spTree>
@@ -11361,7 +11404,7 @@
 </p:sld>
 </file>
 
-<file path=ppt/slides/slide137.xml><?xml version="1.0" encoding="utf-8"?>
+<file path=ppt/slides/slide138.xml><?xml version="1.0" encoding="utf-8"?>
 <p:sld xmlns:a="http://schemas.openxmlformats.org/drawingml/2006/main" xmlns:r="http://schemas.openxmlformats.org/officeDocument/2006/relationships" xmlns:p="http://schemas.openxmlformats.org/presentationml/2006/main">
   <p:cSld>
     <p:spTree>
@@ -11398,8 +11441,8 @@
         </p:nvSpPr>
         <p:spPr>
           <a:xfrm>
-            <a:off x="3470986" y="1530219"/>
-            <a:ext cx="7200000" cy="2230017"/>
+            <a:off x="3470986" y="438537"/>
+            <a:ext cx="7200000" cy="4385390"/>
           </a:xfrm>
           <a:prstGeom prst="rect">
             <a:avLst/>
@@ -11474,7 +11517,257 @@
                   <a:schemeClr val="bg1"/>
                 </a:solidFill>
               </a:rPr>
-              <a:t>C:\&gt;</a:t>
+              <a:t>C:\&gt;cd git-test-remote</a:t>
+            </a:r>
+          </a:p>
+          <a:p>
+            <a:endParaRPr lang="en-US" altLang="ja-JP" sz="1400" dirty="0">
+              <a:solidFill>
+                <a:schemeClr val="bg1"/>
+              </a:solidFill>
+            </a:endParaRPr>
+          </a:p>
+          <a:p>
+            <a:r>
+              <a:rPr lang="en-US" altLang="ja-JP" sz="1400" dirty="0">
+                <a:solidFill>
+                  <a:schemeClr val="bg1"/>
+                </a:solidFill>
+              </a:rPr>
+              <a:t>C:\git-test-remote&gt;dir /a</a:t>
+            </a:r>
+          </a:p>
+          <a:p>
+            <a:r>
+              <a:rPr lang="en-US" altLang="ja-JP" sz="1400" dirty="0">
+                <a:solidFill>
+                  <a:schemeClr val="bg1"/>
+                </a:solidFill>
+              </a:rPr>
+              <a:t> </a:t>
+            </a:r>
+            <a:r>
+              <a:rPr lang="ja-JP" altLang="en-US" sz="1400" dirty="0">
+                <a:solidFill>
+                  <a:schemeClr val="bg1"/>
+                </a:solidFill>
+              </a:rPr>
+              <a:t>ドライブ </a:t>
+            </a:r>
+            <a:r>
+              <a:rPr lang="en-US" altLang="ja-JP" sz="1400" dirty="0">
+                <a:solidFill>
+                  <a:schemeClr val="bg1"/>
+                </a:solidFill>
+              </a:rPr>
+              <a:t>C </a:t>
+            </a:r>
+            <a:r>
+              <a:rPr lang="ja-JP" altLang="en-US" sz="1400" dirty="0">
+                <a:solidFill>
+                  <a:schemeClr val="bg1"/>
+                </a:solidFill>
+              </a:rPr>
+              <a:t>のボリューム ラベルがありません。</a:t>
+            </a:r>
+          </a:p>
+          <a:p>
+            <a:r>
+              <a:rPr lang="ja-JP" altLang="en-US" sz="1400" dirty="0">
+                <a:solidFill>
+                  <a:schemeClr val="bg1"/>
+                </a:solidFill>
+              </a:rPr>
+              <a:t> ボリューム シリアル番号は </a:t>
+            </a:r>
+            <a:r>
+              <a:rPr lang="en-US" altLang="ja-JP" sz="1400" dirty="0">
+                <a:solidFill>
+                  <a:schemeClr val="bg1"/>
+                </a:solidFill>
+              </a:rPr>
+              <a:t>A869-D627 </a:t>
+            </a:r>
+            <a:r>
+              <a:rPr lang="ja-JP" altLang="en-US" sz="1400" dirty="0">
+                <a:solidFill>
+                  <a:schemeClr val="bg1"/>
+                </a:solidFill>
+              </a:rPr>
+              <a:t>です</a:t>
+            </a:r>
+          </a:p>
+          <a:p>
+            <a:endParaRPr lang="ja-JP" altLang="en-US" sz="1400" dirty="0">
+              <a:solidFill>
+                <a:schemeClr val="bg1"/>
+              </a:solidFill>
+            </a:endParaRPr>
+          </a:p>
+          <a:p>
+            <a:r>
+              <a:rPr lang="ja-JP" altLang="en-US" sz="1400" dirty="0">
+                <a:solidFill>
+                  <a:schemeClr val="bg1"/>
+                </a:solidFill>
+              </a:rPr>
+              <a:t> </a:t>
+            </a:r>
+            <a:r>
+              <a:rPr lang="en-US" altLang="ja-JP" sz="1400" dirty="0">
+                <a:solidFill>
+                  <a:schemeClr val="bg1"/>
+                </a:solidFill>
+              </a:rPr>
+              <a:t>C:\git-test-remote </a:t>
+            </a:r>
+            <a:r>
+              <a:rPr lang="ja-JP" altLang="en-US" sz="1400" dirty="0">
+                <a:solidFill>
+                  <a:schemeClr val="bg1"/>
+                </a:solidFill>
+              </a:rPr>
+              <a:t>のディレクトリ</a:t>
+            </a:r>
+          </a:p>
+          <a:p>
+            <a:endParaRPr lang="ja-JP" altLang="en-US" sz="1400" dirty="0">
+              <a:solidFill>
+                <a:schemeClr val="bg1"/>
+              </a:solidFill>
+            </a:endParaRPr>
+          </a:p>
+          <a:p>
+            <a:r>
+              <a:rPr lang="en-US" altLang="ja-JP" sz="1400" dirty="0">
+                <a:solidFill>
+                  <a:schemeClr val="bg1"/>
+                </a:solidFill>
+              </a:rPr>
+              <a:t>2026/06/21  13:46    &lt;DIR&gt;          .</a:t>
+            </a:r>
+          </a:p>
+          <a:p>
+            <a:r>
+              <a:rPr lang="en-US" altLang="ja-JP" sz="1400" dirty="0">
+                <a:solidFill>
+                  <a:schemeClr val="bg1"/>
+                </a:solidFill>
+              </a:rPr>
+              <a:t>2026/06/21  13:03    &lt;DIR&gt;          ..</a:t>
+            </a:r>
+          </a:p>
+          <a:p>
+            <a:r>
+              <a:rPr lang="en-US" altLang="ja-JP" sz="1400" dirty="0">
+                <a:solidFill>
+                  <a:schemeClr val="bg1"/>
+                </a:solidFill>
+              </a:rPr>
+              <a:t>2026/06/21  13:46    &lt;DIR&gt;          .git</a:t>
+            </a:r>
+          </a:p>
+          <a:p>
+            <a:r>
+              <a:rPr lang="en-US" altLang="ja-JP" sz="1400" dirty="0">
+                <a:solidFill>
+                  <a:schemeClr val="bg1"/>
+                </a:solidFill>
+              </a:rPr>
+              <a:t>2026/06/21  13:46                 6 test.txt</a:t>
+            </a:r>
+          </a:p>
+          <a:p>
+            <a:r>
+              <a:rPr lang="en-US" altLang="ja-JP" sz="1400" dirty="0">
+                <a:solidFill>
+                  <a:schemeClr val="bg1"/>
+                </a:solidFill>
+              </a:rPr>
+              <a:t>               1 </a:t>
+            </a:r>
+            <a:r>
+              <a:rPr lang="ja-JP" altLang="en-US" sz="1400" dirty="0">
+                <a:solidFill>
+                  <a:schemeClr val="bg1"/>
+                </a:solidFill>
+              </a:rPr>
+              <a:t>個のファイル                   </a:t>
+            </a:r>
+            <a:r>
+              <a:rPr lang="en-US" altLang="ja-JP" sz="1400" dirty="0">
+                <a:solidFill>
+                  <a:schemeClr val="bg1"/>
+                </a:solidFill>
+              </a:rPr>
+              <a:t>6 </a:t>
+            </a:r>
+            <a:r>
+              <a:rPr lang="ja-JP" altLang="en-US" sz="1400" dirty="0">
+                <a:solidFill>
+                  <a:schemeClr val="bg1"/>
+                </a:solidFill>
+              </a:rPr>
+              <a:t>バイト</a:t>
+            </a:r>
+          </a:p>
+          <a:p>
+            <a:r>
+              <a:rPr lang="ja-JP" altLang="en-US" sz="1400" dirty="0">
+                <a:solidFill>
+                  <a:schemeClr val="bg1"/>
+                </a:solidFill>
+              </a:rPr>
+              <a:t>               </a:t>
+            </a:r>
+            <a:r>
+              <a:rPr lang="en-US" altLang="ja-JP" sz="1400" dirty="0">
+                <a:solidFill>
+                  <a:schemeClr val="bg1"/>
+                </a:solidFill>
+              </a:rPr>
+              <a:t>3 </a:t>
+            </a:r>
+            <a:r>
+              <a:rPr lang="ja-JP" altLang="en-US" sz="1400" dirty="0">
+                <a:solidFill>
+                  <a:schemeClr val="bg1"/>
+                </a:solidFill>
+              </a:rPr>
+              <a:t>個のディレクトリ  </a:t>
+            </a:r>
+            <a:r>
+              <a:rPr lang="en-US" altLang="ja-JP" sz="1400" dirty="0">
+                <a:solidFill>
+                  <a:schemeClr val="bg1"/>
+                </a:solidFill>
+              </a:rPr>
+              <a:t>28,382,502,912 </a:t>
+            </a:r>
+            <a:r>
+              <a:rPr lang="ja-JP" altLang="en-US" sz="1400" dirty="0">
+                <a:solidFill>
+                  <a:schemeClr val="bg1"/>
+                </a:solidFill>
+              </a:rPr>
+              <a:t>バイトの空き領域</a:t>
+            </a:r>
+          </a:p>
+          <a:p>
+            <a:endParaRPr lang="ja-JP" altLang="en-US" sz="1400" dirty="0">
+              <a:solidFill>
+                <a:schemeClr val="bg1"/>
+              </a:solidFill>
+            </a:endParaRPr>
+          </a:p>
+          <a:p>
+            <a:r>
+              <a:rPr lang="en-US" altLang="ja-JP" sz="1400" dirty="0">
+                <a:solidFill>
+                  <a:schemeClr val="bg1"/>
+                </a:solidFill>
+              </a:rPr>
+              <a:t>C:\git-test-remote&gt;</a:t>
             </a:r>
             <a:endParaRPr kumimoji="1" lang="ja-JP" altLang="en-US" sz="1400" dirty="0">
               <a:solidFill>
@@ -11484,6 +11777,42 @@
           </a:p>
         </p:txBody>
       </p:sp>
+      <p:pic>
+        <p:nvPicPr>
+          <p:cNvPr id="4" name="図 3">
+            <a:extLst>
+              <a:ext uri="{FF2B5EF4-FFF2-40B4-BE49-F238E27FC236}">
+                <a16:creationId xmlns:a16="http://schemas.microsoft.com/office/drawing/2014/main" id="{FA8BF6A1-67FC-63AD-F8C1-11AB1BD1FB74}"/>
+              </a:ext>
+            </a:extLst>
+          </p:cNvPr>
+          <p:cNvPicPr>
+            <a:picLocks noChangeAspect="1"/>
+          </p:cNvPicPr>
+          <p:nvPr/>
+        </p:nvPicPr>
+        <p:blipFill>
+          <a:blip r:embed="rId2">
+            <a:extLst>
+              <a:ext uri="{28A0092B-C50C-407E-A947-70E740481C1C}">
+                <a14:useLocalDpi xmlns:a14="http://schemas.microsoft.com/office/drawing/2010/main" val="0"/>
+              </a:ext>
+            </a:extLst>
+          </a:blip>
+          <a:stretch>
+            <a:fillRect/>
+          </a:stretch>
+        </p:blipFill>
+        <p:spPr>
+          <a:xfrm>
+            <a:off x="6363478" y="438537"/>
+            <a:ext cx="980004" cy="223936"/>
+          </a:xfrm>
+          <a:prstGeom prst="rect">
+            <a:avLst/>
+          </a:prstGeom>
+        </p:spPr>
+      </p:pic>
     </p:spTree>
     <p:extLst>
       <p:ext uri="{BB962C8B-B14F-4D97-AF65-F5344CB8AC3E}">
@@ -11497,7 +11826,7 @@
 </p:sld>
 </file>
 
-<file path=ppt/slides/slide138.xml><?xml version="1.0" encoding="utf-8"?>
+<file path=ppt/slides/slide139.xml><?xml version="1.0" encoding="utf-8"?>
 <p:sld xmlns:a="http://schemas.openxmlformats.org/drawingml/2006/main" xmlns:r="http://schemas.openxmlformats.org/officeDocument/2006/relationships" xmlns:p="http://schemas.openxmlformats.org/presentationml/2006/main">
   <p:cSld>
     <p:spTree>
@@ -11534,8 +11863,8 @@
         </p:nvSpPr>
         <p:spPr>
           <a:xfrm>
-            <a:off x="3470986" y="1530220"/>
-            <a:ext cx="7200000" cy="1260000"/>
+            <a:off x="3470986" y="1530219"/>
+            <a:ext cx="7200000" cy="2052735"/>
           </a:xfrm>
           <a:prstGeom prst="rect">
             <a:avLst/>
@@ -11567,6 +11896,91 @@
           <a:bodyPr rtlCol="0" anchor="t"/>
           <a:lstStyle/>
           <a:p>
+            <a:r>
+              <a:rPr lang="en-US" altLang="ja-JP" sz="1400" dirty="0">
+                <a:solidFill>
+                  <a:schemeClr val="bg1"/>
+                </a:solidFill>
+              </a:rPr>
+              <a:t>C:\git-test-remote&gt;git push origin main</a:t>
+            </a:r>
+          </a:p>
+          <a:p>
+            <a:r>
+              <a:rPr lang="en-US" altLang="ja-JP" sz="1400" dirty="0">
+                <a:solidFill>
+                  <a:schemeClr val="bg1"/>
+                </a:solidFill>
+              </a:rPr>
+              <a:t>Enumerating objects: 5, done.</a:t>
+            </a:r>
+          </a:p>
+          <a:p>
+            <a:r>
+              <a:rPr lang="en-US" altLang="ja-JP" sz="1400" dirty="0">
+                <a:solidFill>
+                  <a:schemeClr val="bg1"/>
+                </a:solidFill>
+              </a:rPr>
+              <a:t>Counting objects: 100% (5/5), done.</a:t>
+            </a:r>
+          </a:p>
+          <a:p>
+            <a:r>
+              <a:rPr lang="en-US" altLang="ja-JP" sz="1400" dirty="0">
+                <a:solidFill>
+                  <a:schemeClr val="bg1"/>
+                </a:solidFill>
+              </a:rPr>
+              <a:t>Writing objects: 100% (3/3), 247 bytes | 247.00 KiB/s, done.</a:t>
+            </a:r>
+          </a:p>
+          <a:p>
+            <a:r>
+              <a:rPr lang="en-US" altLang="ja-JP" sz="1400" dirty="0">
+                <a:solidFill>
+                  <a:schemeClr val="bg1"/>
+                </a:solidFill>
+              </a:rPr>
+              <a:t>Total 3 (delta 0), reused 0 (delta 0), pack-reused 0</a:t>
+            </a:r>
+          </a:p>
+          <a:p>
+            <a:r>
+              <a:rPr lang="en-US" altLang="ja-JP" sz="1400" dirty="0">
+                <a:solidFill>
+                  <a:schemeClr val="bg1"/>
+                </a:solidFill>
+              </a:rPr>
+              <a:t>To https://github.com/nishida2073/git-test-remote.git</a:t>
+            </a:r>
+          </a:p>
+          <a:p>
+            <a:r>
+              <a:rPr lang="en-US" altLang="ja-JP" sz="1400" dirty="0">
+                <a:solidFill>
+                  <a:schemeClr val="bg1"/>
+                </a:solidFill>
+              </a:rPr>
+              <a:t>   2e4e3ac..7ceea93  main -&gt; main</a:t>
+            </a:r>
+          </a:p>
+          <a:p>
+            <a:endParaRPr lang="en-US" altLang="ja-JP" sz="1400" dirty="0">
+              <a:solidFill>
+                <a:schemeClr val="bg1"/>
+              </a:solidFill>
+            </a:endParaRPr>
+          </a:p>
+          <a:p>
+            <a:r>
+              <a:rPr lang="en-US" altLang="ja-JP" sz="1400" dirty="0">
+                <a:solidFill>
+                  <a:schemeClr val="bg1"/>
+                </a:solidFill>
+              </a:rPr>
+              <a:t>C:\git-test-remote&gt;</a:t>
+            </a:r>
             <a:endParaRPr kumimoji="1" lang="ja-JP" altLang="en-US" sz="1400" dirty="0">
               <a:solidFill>
                 <a:schemeClr val="bg1"/>
@@ -11575,101 +11989,46 @@
           </a:p>
         </p:txBody>
       </p:sp>
+      <p:pic>
+        <p:nvPicPr>
+          <p:cNvPr id="3" name="図 2">
+            <a:extLst>
+              <a:ext uri="{FF2B5EF4-FFF2-40B4-BE49-F238E27FC236}">
+                <a16:creationId xmlns:a16="http://schemas.microsoft.com/office/drawing/2014/main" id="{668CFA45-3B6F-1963-2CCC-960380B4F70B}"/>
+              </a:ext>
+            </a:extLst>
+          </p:cNvPr>
+          <p:cNvPicPr>
+            <a:picLocks noChangeAspect="1"/>
+          </p:cNvPicPr>
+          <p:nvPr/>
+        </p:nvPicPr>
+        <p:blipFill>
+          <a:blip r:embed="rId2">
+            <a:extLst>
+              <a:ext uri="{28A0092B-C50C-407E-A947-70E740481C1C}">
+                <a14:useLocalDpi xmlns:a14="http://schemas.microsoft.com/office/drawing/2010/main" val="0"/>
+              </a:ext>
+            </a:extLst>
+          </a:blip>
+          <a:stretch>
+            <a:fillRect/>
+          </a:stretch>
+        </p:blipFill>
+        <p:spPr>
+          <a:xfrm>
+            <a:off x="5467739" y="2668553"/>
+            <a:ext cx="980004" cy="223936"/>
+          </a:xfrm>
+          <a:prstGeom prst="rect">
+            <a:avLst/>
+          </a:prstGeom>
+        </p:spPr>
+      </p:pic>
     </p:spTree>
     <p:extLst>
       <p:ext uri="{BB962C8B-B14F-4D97-AF65-F5344CB8AC3E}">
         <p14:creationId xmlns:p14="http://schemas.microsoft.com/office/powerpoint/2010/main" val="2480898616"/>
-      </p:ext>
-    </p:extLst>
-  </p:cSld>
-  <p:clrMapOvr>
-    <a:masterClrMapping/>
-  </p:clrMapOvr>
-</p:sld>
-</file>
-
-<file path=ppt/slides/slide139.xml><?xml version="1.0" encoding="utf-8"?>
-<p:sld xmlns:a="http://schemas.openxmlformats.org/drawingml/2006/main" xmlns:r="http://schemas.openxmlformats.org/officeDocument/2006/relationships" xmlns:p="http://schemas.openxmlformats.org/presentationml/2006/main">
-  <p:cSld>
-    <p:spTree>
-      <p:nvGrpSpPr>
-        <p:cNvPr id="1" name="">
-          <a:extLst>
-            <a:ext uri="{FF2B5EF4-FFF2-40B4-BE49-F238E27FC236}">
-              <a16:creationId xmlns:a16="http://schemas.microsoft.com/office/drawing/2014/main" id="{51EE2214-693A-2BB0-8489-F7BEA02B61FA}"/>
-            </a:ext>
-          </a:extLst>
-        </p:cNvPr>
-        <p:cNvGrpSpPr/>
-        <p:nvPr/>
-      </p:nvGrpSpPr>
-      <p:grpSpPr>
-        <a:xfrm>
-          <a:off x="0" y="0"/>
-          <a:ext cx="0" cy="0"/>
-          <a:chOff x="0" y="0"/>
-          <a:chExt cx="0" cy="0"/>
-        </a:xfrm>
-      </p:grpSpPr>
-      <p:sp>
-        <p:nvSpPr>
-          <p:cNvPr id="2" name="正方形/長方形 1">
-            <a:extLst>
-              <a:ext uri="{FF2B5EF4-FFF2-40B4-BE49-F238E27FC236}">
-                <a16:creationId xmlns:a16="http://schemas.microsoft.com/office/drawing/2014/main" id="{FD28412C-31CF-E482-8941-E80B7FA268F3}"/>
-              </a:ext>
-            </a:extLst>
-          </p:cNvPr>
-          <p:cNvSpPr/>
-          <p:nvPr/>
-        </p:nvSpPr>
-        <p:spPr>
-          <a:xfrm>
-            <a:off x="3470986" y="1530220"/>
-            <a:ext cx="7200000" cy="1260000"/>
-          </a:xfrm>
-          <a:prstGeom prst="rect">
-            <a:avLst/>
-          </a:prstGeom>
-          <a:solidFill>
-            <a:schemeClr val="tx1"/>
-          </a:solidFill>
-          <a:ln>
-            <a:solidFill>
-              <a:schemeClr val="tx1"/>
-            </a:solidFill>
-          </a:ln>
-        </p:spPr>
-        <p:style>
-          <a:lnRef idx="2">
-            <a:schemeClr val="accent6"/>
-          </a:lnRef>
-          <a:fillRef idx="1">
-            <a:schemeClr val="lt1"/>
-          </a:fillRef>
-          <a:effectRef idx="0">
-            <a:schemeClr val="accent6"/>
-          </a:effectRef>
-          <a:fontRef idx="minor">
-            <a:schemeClr val="dk1"/>
-          </a:fontRef>
-        </p:style>
-        <p:txBody>
-          <a:bodyPr rtlCol="0" anchor="t"/>
-          <a:lstStyle/>
-          <a:p>
-            <a:endParaRPr kumimoji="1" lang="ja-JP" altLang="en-US" sz="1400" dirty="0">
-              <a:solidFill>
-                <a:schemeClr val="bg1"/>
-              </a:solidFill>
-            </a:endParaRPr>
-          </a:p>
-        </p:txBody>
-      </p:sp>
-    </p:spTree>
-    <p:extLst>
-      <p:ext uri="{BB962C8B-B14F-4D97-AF65-F5344CB8AC3E}">
-        <p14:creationId xmlns:p14="http://schemas.microsoft.com/office/powerpoint/2010/main" val="4123166572"/>
       </p:ext>
     </p:extLst>
   </p:cSld>
@@ -11899,6 +12258,1076 @@
     <p:extLst>
       <p:ext uri="{BB962C8B-B14F-4D97-AF65-F5344CB8AC3E}">
         <p14:creationId xmlns:p14="http://schemas.microsoft.com/office/powerpoint/2010/main" val="2212931319"/>
+      </p:ext>
+    </p:extLst>
+  </p:cSld>
+  <p:clrMapOvr>
+    <a:masterClrMapping/>
+  </p:clrMapOvr>
+</p:sld>
+</file>
+
+<file path=ppt/slides/slide140.xml><?xml version="1.0" encoding="utf-8"?>
+<p:sld xmlns:a="http://schemas.openxmlformats.org/drawingml/2006/main" xmlns:r="http://schemas.openxmlformats.org/officeDocument/2006/relationships" xmlns:p="http://schemas.openxmlformats.org/presentationml/2006/main">
+  <p:cSld>
+    <p:spTree>
+      <p:nvGrpSpPr>
+        <p:cNvPr id="1" name="">
+          <a:extLst>
+            <a:ext uri="{FF2B5EF4-FFF2-40B4-BE49-F238E27FC236}">
+              <a16:creationId xmlns:a16="http://schemas.microsoft.com/office/drawing/2014/main" id="{51EE2214-693A-2BB0-8489-F7BEA02B61FA}"/>
+            </a:ext>
+          </a:extLst>
+        </p:cNvPr>
+        <p:cNvGrpSpPr/>
+        <p:nvPr/>
+      </p:nvGrpSpPr>
+      <p:grpSpPr>
+        <a:xfrm>
+          <a:off x="0" y="0"/>
+          <a:ext cx="0" cy="0"/>
+          <a:chOff x="0" y="0"/>
+          <a:chExt cx="0" cy="0"/>
+        </a:xfrm>
+      </p:grpSpPr>
+      <p:sp>
+        <p:nvSpPr>
+          <p:cNvPr id="2" name="正方形/長方形 1">
+            <a:extLst>
+              <a:ext uri="{FF2B5EF4-FFF2-40B4-BE49-F238E27FC236}">
+                <a16:creationId xmlns:a16="http://schemas.microsoft.com/office/drawing/2014/main" id="{FD28412C-31CF-E482-8941-E80B7FA268F3}"/>
+              </a:ext>
+            </a:extLst>
+          </p:cNvPr>
+          <p:cNvSpPr/>
+          <p:nvPr/>
+        </p:nvSpPr>
+        <p:spPr>
+          <a:xfrm>
+            <a:off x="3470986" y="1530219"/>
+            <a:ext cx="7200000" cy="2015413"/>
+          </a:xfrm>
+          <a:prstGeom prst="rect">
+            <a:avLst/>
+          </a:prstGeom>
+          <a:solidFill>
+            <a:schemeClr val="tx1"/>
+          </a:solidFill>
+          <a:ln>
+            <a:solidFill>
+              <a:schemeClr val="tx1"/>
+            </a:solidFill>
+          </a:ln>
+        </p:spPr>
+        <p:style>
+          <a:lnRef idx="2">
+            <a:schemeClr val="accent6"/>
+          </a:lnRef>
+          <a:fillRef idx="1">
+            <a:schemeClr val="lt1"/>
+          </a:fillRef>
+          <a:effectRef idx="0">
+            <a:schemeClr val="accent6"/>
+          </a:effectRef>
+          <a:fontRef idx="minor">
+            <a:schemeClr val="dk1"/>
+          </a:fontRef>
+        </p:style>
+        <p:txBody>
+          <a:bodyPr rtlCol="0" anchor="t"/>
+          <a:lstStyle/>
+          <a:p>
+            <a:r>
+              <a:rPr lang="en-US" altLang="ja-JP" sz="1400" dirty="0">
+                <a:solidFill>
+                  <a:schemeClr val="bg1"/>
+                </a:solidFill>
+              </a:rPr>
+              <a:t>C:\git-test-remote&gt;git pull origin main</a:t>
+            </a:r>
+          </a:p>
+          <a:p>
+            <a:r>
+              <a:rPr lang="en-US" altLang="ja-JP" sz="1400" dirty="0">
+                <a:solidFill>
+                  <a:schemeClr val="bg1"/>
+                </a:solidFill>
+              </a:rPr>
+              <a:t>From https://github.com/nishida2073/git-test-remote</a:t>
+            </a:r>
+          </a:p>
+          <a:p>
+            <a:r>
+              <a:rPr lang="en-US" altLang="ja-JP" sz="1400" dirty="0">
+                <a:solidFill>
+                  <a:schemeClr val="bg1"/>
+                </a:solidFill>
+              </a:rPr>
+              <a:t> * branch            main       -&gt; FETCH_HEAD</a:t>
+            </a:r>
+          </a:p>
+          <a:p>
+            <a:r>
+              <a:rPr lang="en-US" altLang="ja-JP" sz="1400" dirty="0">
+                <a:solidFill>
+                  <a:schemeClr val="bg1"/>
+                </a:solidFill>
+              </a:rPr>
+              <a:t>Updating 7ceea93..924ec4d</a:t>
+            </a:r>
+          </a:p>
+          <a:p>
+            <a:r>
+              <a:rPr lang="en-US" altLang="ja-JP" sz="1400" dirty="0">
+                <a:solidFill>
+                  <a:schemeClr val="bg1"/>
+                </a:solidFill>
+              </a:rPr>
+              <a:t>Fast-forward</a:t>
+            </a:r>
+          </a:p>
+          <a:p>
+            <a:r>
+              <a:rPr lang="en-US" altLang="ja-JP" sz="1400" dirty="0">
+                <a:solidFill>
+                  <a:schemeClr val="bg1"/>
+                </a:solidFill>
+              </a:rPr>
+              <a:t> test.txt | 2 +-</a:t>
+            </a:r>
+          </a:p>
+          <a:p>
+            <a:r>
+              <a:rPr lang="en-US" altLang="ja-JP" sz="1400" dirty="0">
+                <a:solidFill>
+                  <a:schemeClr val="bg1"/>
+                </a:solidFill>
+              </a:rPr>
+              <a:t> 1 file changed, 1 insertion(+), 1 deletion(-)</a:t>
+            </a:r>
+          </a:p>
+          <a:p>
+            <a:endParaRPr lang="en-US" altLang="ja-JP" sz="1400" dirty="0">
+              <a:solidFill>
+                <a:schemeClr val="bg1"/>
+              </a:solidFill>
+            </a:endParaRPr>
+          </a:p>
+          <a:p>
+            <a:r>
+              <a:rPr lang="en-US" altLang="ja-JP" sz="1400" dirty="0">
+                <a:solidFill>
+                  <a:schemeClr val="bg1"/>
+                </a:solidFill>
+              </a:rPr>
+              <a:t>C:\git-test-remote&gt;</a:t>
+            </a:r>
+            <a:endParaRPr kumimoji="1" lang="ja-JP" altLang="en-US" sz="1400" dirty="0">
+              <a:solidFill>
+                <a:schemeClr val="bg1"/>
+              </a:solidFill>
+            </a:endParaRPr>
+          </a:p>
+        </p:txBody>
+      </p:sp>
+      <p:pic>
+        <p:nvPicPr>
+          <p:cNvPr id="3" name="図 2">
+            <a:extLst>
+              <a:ext uri="{FF2B5EF4-FFF2-40B4-BE49-F238E27FC236}">
+                <a16:creationId xmlns:a16="http://schemas.microsoft.com/office/drawing/2014/main" id="{27AD116D-967A-5887-C9C1-ED518F56A0E4}"/>
+              </a:ext>
+            </a:extLst>
+          </p:cNvPr>
+          <p:cNvPicPr>
+            <a:picLocks noChangeAspect="1"/>
+          </p:cNvPicPr>
+          <p:nvPr/>
+        </p:nvPicPr>
+        <p:blipFill>
+          <a:blip r:embed="rId2">
+            <a:extLst>
+              <a:ext uri="{28A0092B-C50C-407E-A947-70E740481C1C}">
+                <a14:useLocalDpi xmlns:a14="http://schemas.microsoft.com/office/drawing/2010/main" val="0"/>
+              </a:ext>
+            </a:extLst>
+          </a:blip>
+          <a:stretch>
+            <a:fillRect/>
+          </a:stretch>
+        </p:blipFill>
+        <p:spPr>
+          <a:xfrm>
+            <a:off x="5691674" y="1810137"/>
+            <a:ext cx="980004" cy="223936"/>
+          </a:xfrm>
+          <a:prstGeom prst="rect">
+            <a:avLst/>
+          </a:prstGeom>
+        </p:spPr>
+      </p:pic>
+    </p:spTree>
+    <p:extLst>
+      <p:ext uri="{BB962C8B-B14F-4D97-AF65-F5344CB8AC3E}">
+        <p14:creationId xmlns:p14="http://schemas.microsoft.com/office/powerpoint/2010/main" val="4123166572"/>
+      </p:ext>
+    </p:extLst>
+  </p:cSld>
+  <p:clrMapOvr>
+    <a:masterClrMapping/>
+  </p:clrMapOvr>
+</p:sld>
+</file>
+
+<file path=ppt/slides/slide141.xml><?xml version="1.0" encoding="utf-8"?>
+<p:sld xmlns:a="http://schemas.openxmlformats.org/drawingml/2006/main" xmlns:r="http://schemas.openxmlformats.org/officeDocument/2006/relationships" xmlns:p="http://schemas.openxmlformats.org/presentationml/2006/main">
+  <p:cSld>
+    <p:spTree>
+      <p:nvGrpSpPr>
+        <p:cNvPr id="1" name="">
+          <a:extLst>
+            <a:ext uri="{FF2B5EF4-FFF2-40B4-BE49-F238E27FC236}">
+              <a16:creationId xmlns:a16="http://schemas.microsoft.com/office/drawing/2014/main" id="{234154BB-3551-8E9E-55D9-7D88F78E575C}"/>
+            </a:ext>
+          </a:extLst>
+        </p:cNvPr>
+        <p:cNvGrpSpPr/>
+        <p:nvPr/>
+      </p:nvGrpSpPr>
+      <p:grpSpPr>
+        <a:xfrm>
+          <a:off x="0" y="0"/>
+          <a:ext cx="0" cy="0"/>
+          <a:chOff x="0" y="0"/>
+          <a:chExt cx="0" cy="0"/>
+        </a:xfrm>
+      </p:grpSpPr>
+    </p:spTree>
+    <p:extLst>
+      <p:ext uri="{BB962C8B-B14F-4D97-AF65-F5344CB8AC3E}">
+        <p14:creationId xmlns:p14="http://schemas.microsoft.com/office/powerpoint/2010/main" val="2316390152"/>
+      </p:ext>
+    </p:extLst>
+  </p:cSld>
+  <p:clrMapOvr>
+    <a:masterClrMapping/>
+  </p:clrMapOvr>
+</p:sld>
+</file>
+
+<file path=ppt/slides/slide142.xml><?xml version="1.0" encoding="utf-8"?>
+<p:sld xmlns:a="http://schemas.openxmlformats.org/drawingml/2006/main" xmlns:r="http://schemas.openxmlformats.org/officeDocument/2006/relationships" xmlns:p="http://schemas.openxmlformats.org/presentationml/2006/main">
+  <p:cSld>
+    <p:spTree>
+      <p:nvGrpSpPr>
+        <p:cNvPr id="1" name="">
+          <a:extLst>
+            <a:ext uri="{FF2B5EF4-FFF2-40B4-BE49-F238E27FC236}">
+              <a16:creationId xmlns:a16="http://schemas.microsoft.com/office/drawing/2014/main" id="{4721D5FF-5858-712E-ED6A-D93B02FD537D}"/>
+            </a:ext>
+          </a:extLst>
+        </p:cNvPr>
+        <p:cNvGrpSpPr/>
+        <p:nvPr/>
+      </p:nvGrpSpPr>
+      <p:grpSpPr>
+        <a:xfrm>
+          <a:off x="0" y="0"/>
+          <a:ext cx="0" cy="0"/>
+          <a:chOff x="0" y="0"/>
+          <a:chExt cx="0" cy="0"/>
+        </a:xfrm>
+      </p:grpSpPr>
+      <p:sp>
+        <p:nvSpPr>
+          <p:cNvPr id="2" name="正方形/長方形 1">
+            <a:extLst>
+              <a:ext uri="{FF2B5EF4-FFF2-40B4-BE49-F238E27FC236}">
+                <a16:creationId xmlns:a16="http://schemas.microsoft.com/office/drawing/2014/main" id="{60EE1130-BA8F-6A63-6AB6-5E3EDFF4AA89}"/>
+              </a:ext>
+            </a:extLst>
+          </p:cNvPr>
+          <p:cNvSpPr/>
+          <p:nvPr/>
+        </p:nvSpPr>
+        <p:spPr>
+          <a:xfrm>
+            <a:off x="3470986" y="1530220"/>
+            <a:ext cx="7200000" cy="1716834"/>
+          </a:xfrm>
+          <a:prstGeom prst="rect">
+            <a:avLst/>
+          </a:prstGeom>
+          <a:solidFill>
+            <a:schemeClr val="tx1"/>
+          </a:solidFill>
+          <a:ln>
+            <a:solidFill>
+              <a:schemeClr val="tx1"/>
+            </a:solidFill>
+          </a:ln>
+        </p:spPr>
+        <p:style>
+          <a:lnRef idx="2">
+            <a:schemeClr val="accent6"/>
+          </a:lnRef>
+          <a:fillRef idx="1">
+            <a:schemeClr val="lt1"/>
+          </a:fillRef>
+          <a:effectRef idx="0">
+            <a:schemeClr val="accent6"/>
+          </a:effectRef>
+          <a:fontRef idx="minor">
+            <a:schemeClr val="dk1"/>
+          </a:fontRef>
+        </p:style>
+        <p:txBody>
+          <a:bodyPr rtlCol="0" anchor="t"/>
+          <a:lstStyle/>
+          <a:p>
+            <a:r>
+              <a:rPr lang="en-US" altLang="ja-JP" sz="1400" dirty="0">
+                <a:solidFill>
+                  <a:schemeClr val="bg1"/>
+                </a:solidFill>
+              </a:rPr>
+              <a:t>C:\git-test-remote&gt;git branch branch1</a:t>
+            </a:r>
+          </a:p>
+          <a:p>
+            <a:endParaRPr lang="en-US" altLang="ja-JP" sz="1400" dirty="0">
+              <a:solidFill>
+                <a:schemeClr val="bg1"/>
+              </a:solidFill>
+            </a:endParaRPr>
+          </a:p>
+          <a:p>
+            <a:r>
+              <a:rPr lang="en-US" altLang="ja-JP" sz="1400" dirty="0">
+                <a:solidFill>
+                  <a:schemeClr val="bg1"/>
+                </a:solidFill>
+              </a:rPr>
+              <a:t>C:\git-test-remote&gt;git branch</a:t>
+            </a:r>
+          </a:p>
+          <a:p>
+            <a:r>
+              <a:rPr lang="en-US" altLang="ja-JP" sz="1400" dirty="0">
+                <a:solidFill>
+                  <a:schemeClr val="bg1"/>
+                </a:solidFill>
+              </a:rPr>
+              <a:t>  branch1</a:t>
+            </a:r>
+          </a:p>
+          <a:p>
+            <a:r>
+              <a:rPr lang="en-US" altLang="ja-JP" sz="1400" dirty="0">
+                <a:solidFill>
+                  <a:schemeClr val="bg1"/>
+                </a:solidFill>
+              </a:rPr>
+              <a:t>* main</a:t>
+            </a:r>
+          </a:p>
+          <a:p>
+            <a:endParaRPr lang="en-US" altLang="ja-JP" sz="1400" dirty="0">
+              <a:solidFill>
+                <a:schemeClr val="bg1"/>
+              </a:solidFill>
+            </a:endParaRPr>
+          </a:p>
+          <a:p>
+            <a:r>
+              <a:rPr lang="en-US" altLang="ja-JP" sz="1400" dirty="0">
+                <a:solidFill>
+                  <a:schemeClr val="bg1"/>
+                </a:solidFill>
+              </a:rPr>
+              <a:t>C:\git-test-remote&gt;</a:t>
+            </a:r>
+            <a:endParaRPr kumimoji="1" lang="ja-JP" altLang="en-US" sz="1400" dirty="0">
+              <a:solidFill>
+                <a:schemeClr val="bg1"/>
+              </a:solidFill>
+            </a:endParaRPr>
+          </a:p>
+        </p:txBody>
+      </p:sp>
+    </p:spTree>
+    <p:extLst>
+      <p:ext uri="{BB962C8B-B14F-4D97-AF65-F5344CB8AC3E}">
+        <p14:creationId xmlns:p14="http://schemas.microsoft.com/office/powerpoint/2010/main" val="4263291755"/>
+      </p:ext>
+    </p:extLst>
+  </p:cSld>
+  <p:clrMapOvr>
+    <a:masterClrMapping/>
+  </p:clrMapOvr>
+</p:sld>
+</file>
+
+<file path=ppt/slides/slide143.xml><?xml version="1.0" encoding="utf-8"?>
+<p:sld xmlns:a="http://schemas.openxmlformats.org/drawingml/2006/main" xmlns:r="http://schemas.openxmlformats.org/officeDocument/2006/relationships" xmlns:p="http://schemas.openxmlformats.org/presentationml/2006/main">
+  <p:cSld>
+    <p:spTree>
+      <p:nvGrpSpPr>
+        <p:cNvPr id="1" name="">
+          <a:extLst>
+            <a:ext uri="{FF2B5EF4-FFF2-40B4-BE49-F238E27FC236}">
+              <a16:creationId xmlns:a16="http://schemas.microsoft.com/office/drawing/2014/main" id="{0E69E7E7-D0E8-9A04-E29A-C385012AC803}"/>
+            </a:ext>
+          </a:extLst>
+        </p:cNvPr>
+        <p:cNvGrpSpPr/>
+        <p:nvPr/>
+      </p:nvGrpSpPr>
+      <p:grpSpPr>
+        <a:xfrm>
+          <a:off x="0" y="0"/>
+          <a:ext cx="0" cy="0"/>
+          <a:chOff x="0" y="0"/>
+          <a:chExt cx="0" cy="0"/>
+        </a:xfrm>
+      </p:grpSpPr>
+      <p:sp>
+        <p:nvSpPr>
+          <p:cNvPr id="2" name="正方形/長方形 1">
+            <a:extLst>
+              <a:ext uri="{FF2B5EF4-FFF2-40B4-BE49-F238E27FC236}">
+                <a16:creationId xmlns:a16="http://schemas.microsoft.com/office/drawing/2014/main" id="{2B6F1DF1-2127-74E2-8A42-0E269181C1F5}"/>
+              </a:ext>
+            </a:extLst>
+          </p:cNvPr>
+          <p:cNvSpPr/>
+          <p:nvPr/>
+        </p:nvSpPr>
+        <p:spPr>
+          <a:xfrm>
+            <a:off x="3470986" y="1530219"/>
+            <a:ext cx="7200000" cy="2015413"/>
+          </a:xfrm>
+          <a:prstGeom prst="rect">
+            <a:avLst/>
+          </a:prstGeom>
+          <a:solidFill>
+            <a:schemeClr val="tx1"/>
+          </a:solidFill>
+          <a:ln>
+            <a:solidFill>
+              <a:schemeClr val="tx1"/>
+            </a:solidFill>
+          </a:ln>
+        </p:spPr>
+        <p:style>
+          <a:lnRef idx="2">
+            <a:schemeClr val="accent6"/>
+          </a:lnRef>
+          <a:fillRef idx="1">
+            <a:schemeClr val="lt1"/>
+          </a:fillRef>
+          <a:effectRef idx="0">
+            <a:schemeClr val="accent6"/>
+          </a:effectRef>
+          <a:fontRef idx="minor">
+            <a:schemeClr val="dk1"/>
+          </a:fontRef>
+        </p:style>
+        <p:txBody>
+          <a:bodyPr rtlCol="0" anchor="t"/>
+          <a:lstStyle/>
+          <a:p>
+            <a:r>
+              <a:rPr lang="en-US" altLang="ja-JP" sz="1400" dirty="0">
+                <a:solidFill>
+                  <a:schemeClr val="bg1"/>
+                </a:solidFill>
+              </a:rPr>
+              <a:t>C:\git-test-remote&gt;git switch branch1</a:t>
+            </a:r>
+          </a:p>
+          <a:p>
+            <a:r>
+              <a:rPr lang="en-US" altLang="ja-JP" sz="1400" dirty="0">
+                <a:solidFill>
+                  <a:schemeClr val="bg1"/>
+                </a:solidFill>
+              </a:rPr>
+              <a:t>Switched to branch 'branch1'</a:t>
+            </a:r>
+          </a:p>
+          <a:p>
+            <a:endParaRPr lang="en-US" altLang="ja-JP" sz="1400" dirty="0">
+              <a:solidFill>
+                <a:schemeClr val="bg1"/>
+              </a:solidFill>
+            </a:endParaRPr>
+          </a:p>
+          <a:p>
+            <a:r>
+              <a:rPr lang="en-US" altLang="ja-JP" sz="1400" dirty="0">
+                <a:solidFill>
+                  <a:schemeClr val="bg1"/>
+                </a:solidFill>
+              </a:rPr>
+              <a:t>C:\git-test-remote&gt;git branch</a:t>
+            </a:r>
+          </a:p>
+          <a:p>
+            <a:r>
+              <a:rPr lang="en-US" altLang="ja-JP" sz="1400" dirty="0">
+                <a:solidFill>
+                  <a:schemeClr val="bg1"/>
+                </a:solidFill>
+              </a:rPr>
+              <a:t>* branch1</a:t>
+            </a:r>
+          </a:p>
+          <a:p>
+            <a:r>
+              <a:rPr lang="en-US" altLang="ja-JP" sz="1400" dirty="0">
+                <a:solidFill>
+                  <a:schemeClr val="bg1"/>
+                </a:solidFill>
+              </a:rPr>
+              <a:t>main</a:t>
+            </a:r>
+          </a:p>
+          <a:p>
+            <a:endParaRPr lang="en-US" altLang="ja-JP" sz="1400" dirty="0">
+              <a:solidFill>
+                <a:schemeClr val="bg1"/>
+              </a:solidFill>
+            </a:endParaRPr>
+          </a:p>
+          <a:p>
+            <a:r>
+              <a:rPr lang="en-US" altLang="ja-JP" sz="1400" dirty="0">
+                <a:solidFill>
+                  <a:schemeClr val="bg1"/>
+                </a:solidFill>
+              </a:rPr>
+              <a:t>C:\git-test-remote&gt;</a:t>
+            </a:r>
+            <a:endParaRPr kumimoji="1" lang="ja-JP" altLang="en-US" sz="1400" dirty="0">
+              <a:solidFill>
+                <a:schemeClr val="bg1"/>
+              </a:solidFill>
+            </a:endParaRPr>
+          </a:p>
+        </p:txBody>
+      </p:sp>
+    </p:spTree>
+    <p:extLst>
+      <p:ext uri="{BB962C8B-B14F-4D97-AF65-F5344CB8AC3E}">
+        <p14:creationId xmlns:p14="http://schemas.microsoft.com/office/powerpoint/2010/main" val="4064478448"/>
+      </p:ext>
+    </p:extLst>
+  </p:cSld>
+  <p:clrMapOvr>
+    <a:masterClrMapping/>
+  </p:clrMapOvr>
+</p:sld>
+</file>
+
+<file path=ppt/slides/slide144.xml><?xml version="1.0" encoding="utf-8"?>
+<p:sld xmlns:a="http://schemas.openxmlformats.org/drawingml/2006/main" xmlns:r="http://schemas.openxmlformats.org/officeDocument/2006/relationships" xmlns:p="http://schemas.openxmlformats.org/presentationml/2006/main">
+  <p:cSld>
+    <p:spTree>
+      <p:nvGrpSpPr>
+        <p:cNvPr id="1" name="">
+          <a:extLst>
+            <a:ext uri="{FF2B5EF4-FFF2-40B4-BE49-F238E27FC236}">
+              <a16:creationId xmlns:a16="http://schemas.microsoft.com/office/drawing/2014/main" id="{B54C038E-CFCB-A9B4-C18B-484443E228FB}"/>
+            </a:ext>
+          </a:extLst>
+        </p:cNvPr>
+        <p:cNvGrpSpPr/>
+        <p:nvPr/>
+      </p:nvGrpSpPr>
+      <p:grpSpPr>
+        <a:xfrm>
+          <a:off x="0" y="0"/>
+          <a:ext cx="0" cy="0"/>
+          <a:chOff x="0" y="0"/>
+          <a:chExt cx="0" cy="0"/>
+        </a:xfrm>
+      </p:grpSpPr>
+      <p:sp>
+        <p:nvSpPr>
+          <p:cNvPr id="2" name="正方形/長方形 1">
+            <a:extLst>
+              <a:ext uri="{FF2B5EF4-FFF2-40B4-BE49-F238E27FC236}">
+                <a16:creationId xmlns:a16="http://schemas.microsoft.com/office/drawing/2014/main" id="{5C8057B1-CDAE-8AB2-3151-EEC68739CBCD}"/>
+              </a:ext>
+            </a:extLst>
+          </p:cNvPr>
+          <p:cNvSpPr/>
+          <p:nvPr/>
+        </p:nvSpPr>
+        <p:spPr>
+          <a:xfrm>
+            <a:off x="3470986" y="1530219"/>
+            <a:ext cx="7200000" cy="3377683"/>
+          </a:xfrm>
+          <a:prstGeom prst="rect">
+            <a:avLst/>
+          </a:prstGeom>
+          <a:solidFill>
+            <a:schemeClr val="tx1"/>
+          </a:solidFill>
+          <a:ln>
+            <a:solidFill>
+              <a:schemeClr val="tx1"/>
+            </a:solidFill>
+          </a:ln>
+        </p:spPr>
+        <p:style>
+          <a:lnRef idx="2">
+            <a:schemeClr val="accent6"/>
+          </a:lnRef>
+          <a:fillRef idx="1">
+            <a:schemeClr val="lt1"/>
+          </a:fillRef>
+          <a:effectRef idx="0">
+            <a:schemeClr val="accent6"/>
+          </a:effectRef>
+          <a:fontRef idx="minor">
+            <a:schemeClr val="dk1"/>
+          </a:fontRef>
+        </p:style>
+        <p:txBody>
+          <a:bodyPr rtlCol="0" anchor="t"/>
+          <a:lstStyle/>
+          <a:p>
+            <a:r>
+              <a:rPr lang="en-US" altLang="ja-JP" sz="1400" dirty="0">
+                <a:solidFill>
+                  <a:schemeClr val="bg1"/>
+                </a:solidFill>
+              </a:rPr>
+              <a:t>C:\git-test-remote&gt;git fetch</a:t>
+            </a:r>
+          </a:p>
+          <a:p>
+            <a:r>
+              <a:rPr lang="en-US" altLang="ja-JP" sz="1400" dirty="0">
+                <a:solidFill>
+                  <a:schemeClr val="bg1"/>
+                </a:solidFill>
+              </a:rPr>
+              <a:t>remote: Enumerating objects: 5, done.</a:t>
+            </a:r>
+          </a:p>
+          <a:p>
+            <a:r>
+              <a:rPr lang="en-US" altLang="ja-JP" sz="1400" dirty="0">
+                <a:solidFill>
+                  <a:schemeClr val="bg1"/>
+                </a:solidFill>
+              </a:rPr>
+              <a:t>remote: Counting objects: 100% (5/5), done.</a:t>
+            </a:r>
+          </a:p>
+          <a:p>
+            <a:r>
+              <a:rPr lang="en-US" altLang="ja-JP" sz="1400" dirty="0">
+                <a:solidFill>
+                  <a:schemeClr val="bg1"/>
+                </a:solidFill>
+              </a:rPr>
+              <a:t>remote: Total 3 (delta 0), reused 3 (delta 0), pack-reused 0 (from 0)</a:t>
+            </a:r>
+          </a:p>
+          <a:p>
+            <a:r>
+              <a:rPr lang="en-US" altLang="ja-JP" sz="1400" dirty="0">
+                <a:solidFill>
+                  <a:schemeClr val="bg1"/>
+                </a:solidFill>
+              </a:rPr>
+              <a:t>Unpacking objects: 100% (3/3), 227 bytes | 17.00 KiB/s, done.</a:t>
+            </a:r>
+          </a:p>
+          <a:p>
+            <a:r>
+              <a:rPr lang="en-US" altLang="ja-JP" sz="1400" dirty="0">
+                <a:solidFill>
+                  <a:schemeClr val="bg1"/>
+                </a:solidFill>
+              </a:rPr>
+              <a:t>From https://github.com/nishida2073/git-test-remote</a:t>
+            </a:r>
+          </a:p>
+          <a:p>
+            <a:r>
+              <a:rPr lang="en-US" altLang="ja-JP" sz="1400" dirty="0">
+                <a:solidFill>
+                  <a:schemeClr val="bg1"/>
+                </a:solidFill>
+              </a:rPr>
+              <a:t>   2d2c8a7..9ae7e8e  branch1    -&gt; origin/branch1</a:t>
+            </a:r>
+          </a:p>
+          <a:p>
+            <a:endParaRPr lang="en-US" altLang="ja-JP" sz="1400" dirty="0">
+              <a:solidFill>
+                <a:schemeClr val="bg1"/>
+              </a:solidFill>
+            </a:endParaRPr>
+          </a:p>
+          <a:p>
+            <a:r>
+              <a:rPr lang="en-US" altLang="ja-JP" sz="1400" dirty="0">
+                <a:solidFill>
+                  <a:schemeClr val="bg1"/>
+                </a:solidFill>
+              </a:rPr>
+              <a:t>C:\git-test-remote&gt;git merge origin/branch1</a:t>
+            </a:r>
+          </a:p>
+          <a:p>
+            <a:r>
+              <a:rPr lang="en-US" altLang="ja-JP" sz="1400" dirty="0">
+                <a:solidFill>
+                  <a:schemeClr val="bg1"/>
+                </a:solidFill>
+              </a:rPr>
+              <a:t>Updating 2ecb494..9ae7e8e</a:t>
+            </a:r>
+          </a:p>
+          <a:p>
+            <a:r>
+              <a:rPr lang="en-US" altLang="ja-JP" sz="1400" dirty="0">
+                <a:solidFill>
+                  <a:schemeClr val="bg1"/>
+                </a:solidFill>
+              </a:rPr>
+              <a:t>Fast-forward</a:t>
+            </a:r>
+          </a:p>
+          <a:p>
+            <a:r>
+              <a:rPr lang="en-US" altLang="ja-JP" sz="1400" dirty="0">
+                <a:solidFill>
+                  <a:schemeClr val="bg1"/>
+                </a:solidFill>
+              </a:rPr>
+              <a:t> test.txt | 2 +-</a:t>
+            </a:r>
+          </a:p>
+          <a:p>
+            <a:r>
+              <a:rPr lang="en-US" altLang="ja-JP" sz="1400" dirty="0">
+                <a:solidFill>
+                  <a:schemeClr val="bg1"/>
+                </a:solidFill>
+              </a:rPr>
+              <a:t> 1 file changed, 1 insertion(+), 1 deletion(-)</a:t>
+            </a:r>
+          </a:p>
+          <a:p>
+            <a:endParaRPr lang="en-US" altLang="ja-JP" sz="1400" dirty="0">
+              <a:solidFill>
+                <a:schemeClr val="bg1"/>
+              </a:solidFill>
+            </a:endParaRPr>
+          </a:p>
+          <a:p>
+            <a:r>
+              <a:rPr lang="en-US" altLang="ja-JP" sz="1400" dirty="0">
+                <a:solidFill>
+                  <a:schemeClr val="bg1"/>
+                </a:solidFill>
+              </a:rPr>
+              <a:t>C:\git-test-remote&gt;</a:t>
+            </a:r>
+            <a:endParaRPr kumimoji="1" lang="ja-JP" altLang="en-US" sz="1400" dirty="0">
+              <a:solidFill>
+                <a:schemeClr val="bg1"/>
+              </a:solidFill>
+            </a:endParaRPr>
+          </a:p>
+        </p:txBody>
+      </p:sp>
+      <p:pic>
+        <p:nvPicPr>
+          <p:cNvPr id="4" name="図 3">
+            <a:extLst>
+              <a:ext uri="{FF2B5EF4-FFF2-40B4-BE49-F238E27FC236}">
+                <a16:creationId xmlns:a16="http://schemas.microsoft.com/office/drawing/2014/main" id="{84514281-DD21-603B-D13F-0759ADB37090}"/>
+              </a:ext>
+            </a:extLst>
+          </p:cNvPr>
+          <p:cNvPicPr>
+            <a:picLocks noChangeAspect="1"/>
+          </p:cNvPicPr>
+          <p:nvPr/>
+        </p:nvPicPr>
+        <p:blipFill>
+          <a:blip r:embed="rId2">
+            <a:extLst>
+              <a:ext uri="{28A0092B-C50C-407E-A947-70E740481C1C}">
+                <a14:useLocalDpi xmlns:a14="http://schemas.microsoft.com/office/drawing/2010/main" val="0"/>
+              </a:ext>
+            </a:extLst>
+          </a:blip>
+          <a:stretch>
+            <a:fillRect/>
+          </a:stretch>
+        </p:blipFill>
+        <p:spPr>
+          <a:xfrm>
+            <a:off x="5682343" y="2640561"/>
+            <a:ext cx="980004" cy="223936"/>
+          </a:xfrm>
+          <a:prstGeom prst="rect">
+            <a:avLst/>
+          </a:prstGeom>
+        </p:spPr>
+      </p:pic>
+    </p:spTree>
+    <p:extLst>
+      <p:ext uri="{BB962C8B-B14F-4D97-AF65-F5344CB8AC3E}">
+        <p14:creationId xmlns:p14="http://schemas.microsoft.com/office/powerpoint/2010/main" val="1051006001"/>
+      </p:ext>
+    </p:extLst>
+  </p:cSld>
+  <p:clrMapOvr>
+    <a:masterClrMapping/>
+  </p:clrMapOvr>
+</p:sld>
+</file>
+
+<file path=ppt/slides/slide145.xml><?xml version="1.0" encoding="utf-8"?>
+<p:sld xmlns:a="http://schemas.openxmlformats.org/drawingml/2006/main" xmlns:r="http://schemas.openxmlformats.org/officeDocument/2006/relationships" xmlns:p="http://schemas.openxmlformats.org/presentationml/2006/main">
+  <p:cSld>
+    <p:spTree>
+      <p:nvGrpSpPr>
+        <p:cNvPr id="1" name="">
+          <a:extLst>
+            <a:ext uri="{FF2B5EF4-FFF2-40B4-BE49-F238E27FC236}">
+              <a16:creationId xmlns:a16="http://schemas.microsoft.com/office/drawing/2014/main" id="{19240F6A-0F09-69DF-6080-4AAF0F2296B2}"/>
+            </a:ext>
+          </a:extLst>
+        </p:cNvPr>
+        <p:cNvGrpSpPr/>
+        <p:nvPr/>
+      </p:nvGrpSpPr>
+      <p:grpSpPr>
+        <a:xfrm>
+          <a:off x="0" y="0"/>
+          <a:ext cx="0" cy="0"/>
+          <a:chOff x="0" y="0"/>
+          <a:chExt cx="0" cy="0"/>
+        </a:xfrm>
+      </p:grpSpPr>
+      <p:sp>
+        <p:nvSpPr>
+          <p:cNvPr id="2" name="正方形/長方形 1">
+            <a:extLst>
+              <a:ext uri="{FF2B5EF4-FFF2-40B4-BE49-F238E27FC236}">
+                <a16:creationId xmlns:a16="http://schemas.microsoft.com/office/drawing/2014/main" id="{D9492C21-5D16-A915-1BAC-1C6D4BD53041}"/>
+              </a:ext>
+            </a:extLst>
+          </p:cNvPr>
+          <p:cNvSpPr/>
+          <p:nvPr/>
+        </p:nvSpPr>
+        <p:spPr>
+          <a:xfrm>
+            <a:off x="3470986" y="1530220"/>
+            <a:ext cx="7200000" cy="1567544"/>
+          </a:xfrm>
+          <a:prstGeom prst="rect">
+            <a:avLst/>
+          </a:prstGeom>
+          <a:solidFill>
+            <a:schemeClr val="tx1"/>
+          </a:solidFill>
+          <a:ln>
+            <a:solidFill>
+              <a:schemeClr val="tx1"/>
+            </a:solidFill>
+          </a:ln>
+        </p:spPr>
+        <p:style>
+          <a:lnRef idx="2">
+            <a:schemeClr val="accent6"/>
+          </a:lnRef>
+          <a:fillRef idx="1">
+            <a:schemeClr val="lt1"/>
+          </a:fillRef>
+          <a:effectRef idx="0">
+            <a:schemeClr val="accent6"/>
+          </a:effectRef>
+          <a:fontRef idx="minor">
+            <a:schemeClr val="dk1"/>
+          </a:fontRef>
+        </p:style>
+        <p:txBody>
+          <a:bodyPr rtlCol="0" anchor="t"/>
+          <a:lstStyle/>
+          <a:p>
+            <a:r>
+              <a:rPr lang="en-US" altLang="ja-JP" sz="1400" dirty="0">
+                <a:solidFill>
+                  <a:schemeClr val="bg1"/>
+                </a:solidFill>
+              </a:rPr>
+              <a:t>C:\git-test-remote&gt;git merge origin/branch1</a:t>
+            </a:r>
+          </a:p>
+          <a:p>
+            <a:r>
+              <a:rPr lang="en-US" altLang="ja-JP" sz="1400" dirty="0">
+                <a:solidFill>
+                  <a:schemeClr val="bg1"/>
+                </a:solidFill>
+              </a:rPr>
+              <a:t>Auto-merging test.txt</a:t>
+            </a:r>
+          </a:p>
+          <a:p>
+            <a:r>
+              <a:rPr lang="en-US" altLang="ja-JP" sz="1400" dirty="0">
+                <a:solidFill>
+                  <a:schemeClr val="bg1"/>
+                </a:solidFill>
+              </a:rPr>
+              <a:t>CONFLICT (content): Merge conflict in test.txt</a:t>
+            </a:r>
+          </a:p>
+          <a:p>
+            <a:r>
+              <a:rPr lang="en-US" altLang="ja-JP" sz="1400" dirty="0">
+                <a:solidFill>
+                  <a:schemeClr val="bg1"/>
+                </a:solidFill>
+              </a:rPr>
+              <a:t>Automatic merge failed; fix conflicts and then commit the result.</a:t>
+            </a:r>
+          </a:p>
+          <a:p>
+            <a:endParaRPr kumimoji="1" lang="en-US" altLang="ja-JP" sz="1400" dirty="0">
+              <a:solidFill>
+                <a:schemeClr val="bg1"/>
+              </a:solidFill>
+            </a:endParaRPr>
+          </a:p>
+          <a:p>
+            <a:r>
+              <a:rPr lang="en-US" altLang="ja-JP" sz="1400" dirty="0">
+                <a:solidFill>
+                  <a:schemeClr val="bg1"/>
+                </a:solidFill>
+              </a:rPr>
+              <a:t>C:\git-test-remote&gt;</a:t>
+            </a:r>
+            <a:endParaRPr kumimoji="1" lang="ja-JP" altLang="en-US" sz="1400" dirty="0">
+              <a:solidFill>
+                <a:schemeClr val="bg1"/>
+              </a:solidFill>
+            </a:endParaRPr>
+          </a:p>
+        </p:txBody>
+      </p:sp>
+    </p:spTree>
+    <p:extLst>
+      <p:ext uri="{BB962C8B-B14F-4D97-AF65-F5344CB8AC3E}">
+        <p14:creationId xmlns:p14="http://schemas.microsoft.com/office/powerpoint/2010/main" val="2335755136"/>
+      </p:ext>
+    </p:extLst>
+  </p:cSld>
+  <p:clrMapOvr>
+    <a:masterClrMapping/>
+  </p:clrMapOvr>
+</p:sld>
+</file>
+
+<file path=ppt/slides/slide146.xml><?xml version="1.0" encoding="utf-8"?>
+<p:sld xmlns:a="http://schemas.openxmlformats.org/drawingml/2006/main" xmlns:r="http://schemas.openxmlformats.org/officeDocument/2006/relationships" xmlns:p="http://schemas.openxmlformats.org/presentationml/2006/main">
+  <p:cSld>
+    <p:spTree>
+      <p:nvGrpSpPr>
+        <p:cNvPr id="1" name="">
+          <a:extLst>
+            <a:ext uri="{FF2B5EF4-FFF2-40B4-BE49-F238E27FC236}">
+              <a16:creationId xmlns:a16="http://schemas.microsoft.com/office/drawing/2014/main" id="{F98D689A-AD32-78E3-A791-FF8DB707CBCE}"/>
+            </a:ext>
+          </a:extLst>
+        </p:cNvPr>
+        <p:cNvGrpSpPr/>
+        <p:nvPr/>
+      </p:nvGrpSpPr>
+      <p:grpSpPr>
+        <a:xfrm>
+          <a:off x="0" y="0"/>
+          <a:ext cx="0" cy="0"/>
+          <a:chOff x="0" y="0"/>
+          <a:chExt cx="0" cy="0"/>
+        </a:xfrm>
+      </p:grpSpPr>
+      <p:sp>
+        <p:nvSpPr>
+          <p:cNvPr id="2" name="正方形/長方形 1">
+            <a:extLst>
+              <a:ext uri="{FF2B5EF4-FFF2-40B4-BE49-F238E27FC236}">
+                <a16:creationId xmlns:a16="http://schemas.microsoft.com/office/drawing/2014/main" id="{663418CD-C525-88D0-70C8-63C9CC69E9EE}"/>
+              </a:ext>
+            </a:extLst>
+          </p:cNvPr>
+          <p:cNvSpPr/>
+          <p:nvPr/>
+        </p:nvSpPr>
+        <p:spPr>
+          <a:xfrm>
+            <a:off x="3470986" y="1530219"/>
+            <a:ext cx="7200000" cy="2015413"/>
+          </a:xfrm>
+          <a:prstGeom prst="rect">
+            <a:avLst/>
+          </a:prstGeom>
+          <a:solidFill>
+            <a:schemeClr val="tx1"/>
+          </a:solidFill>
+          <a:ln>
+            <a:solidFill>
+              <a:schemeClr val="tx1"/>
+            </a:solidFill>
+          </a:ln>
+        </p:spPr>
+        <p:style>
+          <a:lnRef idx="2">
+            <a:schemeClr val="accent6"/>
+          </a:lnRef>
+          <a:fillRef idx="1">
+            <a:schemeClr val="lt1"/>
+          </a:fillRef>
+          <a:effectRef idx="0">
+            <a:schemeClr val="accent6"/>
+          </a:effectRef>
+          <a:fontRef idx="minor">
+            <a:schemeClr val="dk1"/>
+          </a:fontRef>
+        </p:style>
+        <p:txBody>
+          <a:bodyPr rtlCol="0" anchor="t"/>
+          <a:lstStyle/>
+          <a:p>
+            <a:endParaRPr kumimoji="1" lang="ja-JP" altLang="en-US" sz="1400" dirty="0">
+              <a:solidFill>
+                <a:schemeClr val="bg1"/>
+              </a:solidFill>
+            </a:endParaRPr>
+          </a:p>
+        </p:txBody>
+      </p:sp>
+    </p:spTree>
+    <p:extLst>
+      <p:ext uri="{BB962C8B-B14F-4D97-AF65-F5344CB8AC3E}">
+        <p14:creationId xmlns:p14="http://schemas.microsoft.com/office/powerpoint/2010/main" val="1999918027"/>
       </p:ext>
     </p:extLst>
   </p:cSld>
@@ -29361,6 +30790,447 @@
         <p:cNvPr id="1" name="">
           <a:extLst>
             <a:ext uri="{FF2B5EF4-FFF2-40B4-BE49-F238E27FC236}">
+              <a16:creationId xmlns:a16="http://schemas.microsoft.com/office/drawing/2014/main" id="{E6711B58-FCD1-4600-6BCF-BBB7293D14C3}"/>
+            </a:ext>
+          </a:extLst>
+        </p:cNvPr>
+        <p:cNvGrpSpPr/>
+        <p:nvPr/>
+      </p:nvGrpSpPr>
+      <p:grpSpPr>
+        <a:xfrm>
+          <a:off x="0" y="0"/>
+          <a:ext cx="0" cy="0"/>
+          <a:chOff x="0" y="0"/>
+          <a:chExt cx="0" cy="0"/>
+        </a:xfrm>
+      </p:grpSpPr>
+      <p:pic>
+        <p:nvPicPr>
+          <p:cNvPr id="14" name="図 13">
+            <a:extLst>
+              <a:ext uri="{FF2B5EF4-FFF2-40B4-BE49-F238E27FC236}">
+                <a16:creationId xmlns:a16="http://schemas.microsoft.com/office/drawing/2014/main" id="{28DD81DA-9A17-929F-1C69-31225BFD1C26}"/>
+              </a:ext>
+            </a:extLst>
+          </p:cNvPr>
+          <p:cNvPicPr>
+            <a:picLocks noChangeAspect="1"/>
+          </p:cNvPicPr>
+          <p:nvPr/>
+        </p:nvPicPr>
+        <p:blipFill>
+          <a:blip r:embed="rId2">
+            <a:extLst>
+              <a:ext uri="{28A0092B-C50C-407E-A947-70E740481C1C}">
+                <a14:useLocalDpi xmlns:a14="http://schemas.microsoft.com/office/drawing/2010/main" val="0"/>
+              </a:ext>
+            </a:extLst>
+          </a:blip>
+          <a:stretch>
+            <a:fillRect/>
+          </a:stretch>
+        </p:blipFill>
+        <p:spPr>
+          <a:xfrm>
+            <a:off x="3890816" y="2298652"/>
+            <a:ext cx="1080000" cy="1080000"/>
+          </a:xfrm>
+          <a:prstGeom prst="rect">
+            <a:avLst/>
+          </a:prstGeom>
+        </p:spPr>
+      </p:pic>
+      <p:sp>
+        <p:nvSpPr>
+          <p:cNvPr id="15" name="テキスト ボックス 14">
+            <a:extLst>
+              <a:ext uri="{FF2B5EF4-FFF2-40B4-BE49-F238E27FC236}">
+                <a16:creationId xmlns:a16="http://schemas.microsoft.com/office/drawing/2014/main" id="{9CF27B9C-2604-B2D3-D018-0D86D81B7F73}"/>
+              </a:ext>
+            </a:extLst>
+          </p:cNvPr>
+          <p:cNvSpPr txBox="1"/>
+          <p:nvPr/>
+        </p:nvSpPr>
+        <p:spPr>
+          <a:xfrm>
+            <a:off x="4853937" y="2677782"/>
+            <a:ext cx="2262158" cy="369332"/>
+          </a:xfrm>
+          <a:prstGeom prst="rect">
+            <a:avLst/>
+          </a:prstGeom>
+          <a:noFill/>
+        </p:spPr>
+        <p:txBody>
+          <a:bodyPr wrap="none" rtlCol="0">
+            <a:spAutoFit/>
+          </a:bodyPr>
+          <a:lstStyle/>
+          <a:p>
+            <a:r>
+              <a:rPr kumimoji="1" lang="ja-JP" altLang="en-US" b="1" dirty="0"/>
+              <a:t>現在のディレクトリ</a:t>
+            </a:r>
+          </a:p>
+        </p:txBody>
+      </p:sp>
+      <p:cxnSp>
+        <p:nvCxnSpPr>
+          <p:cNvPr id="18" name="コネクタ: カギ線 17">
+            <a:extLst>
+              <a:ext uri="{FF2B5EF4-FFF2-40B4-BE49-F238E27FC236}">
+                <a16:creationId xmlns:a16="http://schemas.microsoft.com/office/drawing/2014/main" id="{B10EB6E0-D7B7-BB68-9EFE-2E3DDCE53A95}"/>
+              </a:ext>
+            </a:extLst>
+          </p:cNvPr>
+          <p:cNvCxnSpPr>
+            <a:cxnSpLocks/>
+          </p:cNvCxnSpPr>
+          <p:nvPr/>
+        </p:nvCxnSpPr>
+        <p:spPr>
+          <a:xfrm>
+            <a:off x="4419224" y="3193495"/>
+            <a:ext cx="1408521" cy="504000"/>
+          </a:xfrm>
+          <a:prstGeom prst="bentConnector3">
+            <a:avLst>
+              <a:gd name="adj1" fmla="val -235"/>
+            </a:avLst>
+          </a:prstGeom>
+          <a:ln w="38100"/>
+        </p:spPr>
+        <p:style>
+          <a:lnRef idx="1">
+            <a:schemeClr val="dk1"/>
+          </a:lnRef>
+          <a:fillRef idx="0">
+            <a:schemeClr val="dk1"/>
+          </a:fillRef>
+          <a:effectRef idx="0">
+            <a:schemeClr val="dk1"/>
+          </a:effectRef>
+          <a:fontRef idx="minor">
+            <a:schemeClr val="tx1"/>
+          </a:fontRef>
+        </p:style>
+      </p:cxnSp>
+      <p:pic>
+        <p:nvPicPr>
+          <p:cNvPr id="23" name="図 22">
+            <a:extLst>
+              <a:ext uri="{FF2B5EF4-FFF2-40B4-BE49-F238E27FC236}">
+                <a16:creationId xmlns:a16="http://schemas.microsoft.com/office/drawing/2014/main" id="{05044BF6-FD6B-F00C-37B5-C6A617D57F1D}"/>
+              </a:ext>
+            </a:extLst>
+          </p:cNvPr>
+          <p:cNvPicPr>
+            <a:picLocks noChangeAspect="1"/>
+          </p:cNvPicPr>
+          <p:nvPr/>
+        </p:nvPicPr>
+        <p:blipFill>
+          <a:blip r:embed="rId2">
+            <a:extLst>
+              <a:ext uri="{28A0092B-C50C-407E-A947-70E740481C1C}">
+                <a14:useLocalDpi xmlns:a14="http://schemas.microsoft.com/office/drawing/2010/main" val="0"/>
+              </a:ext>
+            </a:extLst>
+          </a:blip>
+          <a:stretch>
+            <a:fillRect/>
+          </a:stretch>
+        </p:blipFill>
+        <p:spPr>
+          <a:xfrm>
+            <a:off x="5814926" y="3080533"/>
+            <a:ext cx="1080000" cy="1080000"/>
+          </a:xfrm>
+          <a:prstGeom prst="rect">
+            <a:avLst/>
+          </a:prstGeom>
+        </p:spPr>
+      </p:pic>
+      <p:sp>
+        <p:nvSpPr>
+          <p:cNvPr id="24" name="四角形: 角を丸くする 23">
+            <a:extLst>
+              <a:ext uri="{FF2B5EF4-FFF2-40B4-BE49-F238E27FC236}">
+                <a16:creationId xmlns:a16="http://schemas.microsoft.com/office/drawing/2014/main" id="{119FEC79-8775-4C4C-AA4B-A7F0D9150785}"/>
+              </a:ext>
+            </a:extLst>
+          </p:cNvPr>
+          <p:cNvSpPr/>
+          <p:nvPr/>
+        </p:nvSpPr>
+        <p:spPr>
+          <a:xfrm>
+            <a:off x="4030824" y="3225677"/>
+            <a:ext cx="8042988" cy="2454703"/>
+          </a:xfrm>
+          <a:prstGeom prst="roundRect">
+            <a:avLst/>
+          </a:prstGeom>
+          <a:noFill/>
+          <a:ln w="38100">
+            <a:solidFill>
+              <a:srgbClr val="00B0F0"/>
+            </a:solidFill>
+            <a:prstDash val="dash"/>
+          </a:ln>
+        </p:spPr>
+        <p:style>
+          <a:lnRef idx="2">
+            <a:schemeClr val="accent1">
+              <a:shade val="15000"/>
+            </a:schemeClr>
+          </a:lnRef>
+          <a:fillRef idx="1">
+            <a:schemeClr val="accent1"/>
+          </a:fillRef>
+          <a:effectRef idx="0">
+            <a:schemeClr val="accent1"/>
+          </a:effectRef>
+          <a:fontRef idx="minor">
+            <a:schemeClr val="lt1"/>
+          </a:fontRef>
+        </p:style>
+        <p:txBody>
+          <a:bodyPr rtlCol="0" anchor="b"/>
+          <a:lstStyle/>
+          <a:p>
+            <a:r>
+              <a:rPr lang="ja-JP" altLang="en-US" b="1" dirty="0">
+                <a:solidFill>
+                  <a:srgbClr val="00B0F0"/>
+                </a:solidFill>
+              </a:rPr>
+              <a:t>ローカルリポジトリ</a:t>
+            </a:r>
+            <a:endParaRPr kumimoji="1" lang="ja-JP" altLang="en-US" dirty="0"/>
+          </a:p>
+        </p:txBody>
+      </p:sp>
+      <p:sp>
+        <p:nvSpPr>
+          <p:cNvPr id="27" name="四角形: 角を丸くする 26">
+            <a:extLst>
+              <a:ext uri="{FF2B5EF4-FFF2-40B4-BE49-F238E27FC236}">
+                <a16:creationId xmlns:a16="http://schemas.microsoft.com/office/drawing/2014/main" id="{95D72625-1421-5BCE-35C1-E471DBF33B67}"/>
+              </a:ext>
+            </a:extLst>
+          </p:cNvPr>
+          <p:cNvSpPr/>
+          <p:nvPr/>
+        </p:nvSpPr>
+        <p:spPr>
+          <a:xfrm>
+            <a:off x="4282751" y="4137966"/>
+            <a:ext cx="5040000" cy="720000"/>
+          </a:xfrm>
+          <a:prstGeom prst="roundRect">
+            <a:avLst/>
+          </a:prstGeom>
+          <a:noFill/>
+          <a:ln w="38100">
+            <a:solidFill>
+              <a:srgbClr val="00B050"/>
+            </a:solidFill>
+            <a:prstDash val="dash"/>
+          </a:ln>
+        </p:spPr>
+        <p:style>
+          <a:lnRef idx="2">
+            <a:schemeClr val="accent1">
+              <a:shade val="15000"/>
+            </a:schemeClr>
+          </a:lnRef>
+          <a:fillRef idx="1">
+            <a:schemeClr val="accent1"/>
+          </a:fillRef>
+          <a:effectRef idx="0">
+            <a:schemeClr val="accent1"/>
+          </a:effectRef>
+          <a:fontRef idx="minor">
+            <a:schemeClr val="lt1"/>
+          </a:fontRef>
+        </p:style>
+        <p:txBody>
+          <a:bodyPr rtlCol="0" anchor="ctr"/>
+          <a:lstStyle/>
+          <a:p>
+            <a:pPr algn="ctr"/>
+            <a:r>
+              <a:rPr kumimoji="1" lang="ja-JP" altLang="en-US" b="1" dirty="0">
+                <a:solidFill>
+                  <a:srgbClr val="00B050"/>
+                </a:solidFill>
+              </a:rPr>
+              <a:t>ワーキングツリー</a:t>
+            </a:r>
+          </a:p>
+        </p:txBody>
+      </p:sp>
+      <p:cxnSp>
+        <p:nvCxnSpPr>
+          <p:cNvPr id="28" name="コネクタ: カギ線 27">
+            <a:extLst>
+              <a:ext uri="{FF2B5EF4-FFF2-40B4-BE49-F238E27FC236}">
+                <a16:creationId xmlns:a16="http://schemas.microsoft.com/office/drawing/2014/main" id="{462762B9-D477-C6B9-4D18-90FD420F4A1E}"/>
+              </a:ext>
+            </a:extLst>
+          </p:cNvPr>
+          <p:cNvCxnSpPr>
+            <a:cxnSpLocks/>
+          </p:cNvCxnSpPr>
+          <p:nvPr/>
+        </p:nvCxnSpPr>
+        <p:spPr>
+          <a:xfrm>
+            <a:off x="4414384" y="3197006"/>
+            <a:ext cx="1408521" cy="1296000"/>
+          </a:xfrm>
+          <a:prstGeom prst="bentConnector3">
+            <a:avLst>
+              <a:gd name="adj1" fmla="val -235"/>
+            </a:avLst>
+          </a:prstGeom>
+          <a:ln w="38100"/>
+        </p:spPr>
+        <p:style>
+          <a:lnRef idx="1">
+            <a:schemeClr val="dk1"/>
+          </a:lnRef>
+          <a:fillRef idx="0">
+            <a:schemeClr val="dk1"/>
+          </a:fillRef>
+          <a:effectRef idx="0">
+            <a:schemeClr val="dk1"/>
+          </a:effectRef>
+          <a:fontRef idx="minor">
+            <a:schemeClr val="tx1"/>
+          </a:fontRef>
+        </p:style>
+      </p:cxnSp>
+      <p:sp>
+        <p:nvSpPr>
+          <p:cNvPr id="33" name="テキスト ボックス 32">
+            <a:extLst>
+              <a:ext uri="{FF2B5EF4-FFF2-40B4-BE49-F238E27FC236}">
+                <a16:creationId xmlns:a16="http://schemas.microsoft.com/office/drawing/2014/main" id="{983EC35A-F761-0ADA-9BAD-49907A586DC4}"/>
+              </a:ext>
+            </a:extLst>
+          </p:cNvPr>
+          <p:cNvSpPr txBox="1"/>
+          <p:nvPr/>
+        </p:nvSpPr>
+        <p:spPr>
+          <a:xfrm>
+            <a:off x="6761672" y="3459726"/>
+            <a:ext cx="537327" cy="369332"/>
+          </a:xfrm>
+          <a:prstGeom prst="rect">
+            <a:avLst/>
+          </a:prstGeom>
+          <a:noFill/>
+        </p:spPr>
+        <p:txBody>
+          <a:bodyPr wrap="none" rtlCol="0">
+            <a:spAutoFit/>
+          </a:bodyPr>
+          <a:lstStyle/>
+          <a:p>
+            <a:r>
+              <a:rPr kumimoji="1" lang="en-US" altLang="ja-JP" b="1" dirty="0"/>
+              <a:t>.git</a:t>
+            </a:r>
+            <a:endParaRPr kumimoji="1" lang="ja-JP" altLang="en-US" b="1" dirty="0"/>
+          </a:p>
+        </p:txBody>
+      </p:sp>
+      <p:sp>
+        <p:nvSpPr>
+          <p:cNvPr id="35" name="四角形: 角を丸くする 34">
+            <a:extLst>
+              <a:ext uri="{FF2B5EF4-FFF2-40B4-BE49-F238E27FC236}">
+                <a16:creationId xmlns:a16="http://schemas.microsoft.com/office/drawing/2014/main" id="{261FD4CB-39F7-48F9-E343-66E06835D6D7}"/>
+              </a:ext>
+            </a:extLst>
+          </p:cNvPr>
+          <p:cNvSpPr/>
+          <p:nvPr/>
+        </p:nvSpPr>
+        <p:spPr>
+          <a:xfrm>
+            <a:off x="5833587" y="3310127"/>
+            <a:ext cx="6090935" cy="720000"/>
+          </a:xfrm>
+          <a:prstGeom prst="roundRect">
+            <a:avLst/>
+          </a:prstGeom>
+          <a:noFill/>
+          <a:ln w="38100">
+            <a:solidFill>
+              <a:srgbClr val="FFC000"/>
+            </a:solidFill>
+            <a:prstDash val="dash"/>
+          </a:ln>
+        </p:spPr>
+        <p:style>
+          <a:lnRef idx="2">
+            <a:schemeClr val="accent1">
+              <a:shade val="15000"/>
+            </a:schemeClr>
+          </a:lnRef>
+          <a:fillRef idx="1">
+            <a:schemeClr val="accent1"/>
+          </a:fillRef>
+          <a:effectRef idx="0">
+            <a:schemeClr val="accent1"/>
+          </a:effectRef>
+          <a:fontRef idx="minor">
+            <a:schemeClr val="lt1"/>
+          </a:fontRef>
+        </p:style>
+        <p:txBody>
+          <a:bodyPr rtlCol="0" anchor="ctr"/>
+          <a:lstStyle/>
+          <a:p>
+            <a:pPr lvl="3"/>
+            <a:r>
+              <a:rPr lang="ja-JP" altLang="en-US" b="1" dirty="0">
+                <a:solidFill>
+                  <a:srgbClr val="FFC000"/>
+                </a:solidFill>
+              </a:rPr>
+              <a:t>ブランチ情報など</a:t>
+            </a:r>
+          </a:p>
+        </p:txBody>
+      </p:sp>
+    </p:spTree>
+    <p:extLst>
+      <p:ext uri="{BB962C8B-B14F-4D97-AF65-F5344CB8AC3E}">
+        <p14:creationId xmlns:p14="http://schemas.microsoft.com/office/powerpoint/2010/main" val="1003559266"/>
+      </p:ext>
+    </p:extLst>
+  </p:cSld>
+  <p:clrMapOvr>
+    <a:masterClrMapping/>
+  </p:clrMapOvr>
+</p:sld>
+</file>
+
+<file path=ppt/slides/slide41.xml><?xml version="1.0" encoding="utf-8"?>
+<p:sld xmlns:a="http://schemas.openxmlformats.org/drawingml/2006/main" xmlns:r="http://schemas.openxmlformats.org/officeDocument/2006/relationships" xmlns:p="http://schemas.openxmlformats.org/presentationml/2006/main">
+  <p:cSld>
+    <p:spTree>
+      <p:nvGrpSpPr>
+        <p:cNvPr id="1" name="">
+          <a:extLst>
+            <a:ext uri="{FF2B5EF4-FFF2-40B4-BE49-F238E27FC236}">
               <a16:creationId xmlns:a16="http://schemas.microsoft.com/office/drawing/2014/main" id="{A0429E5F-B17D-1966-DF33-ECC586158E82}"/>
             </a:ext>
           </a:extLst>
@@ -30043,7 +31913,7 @@
 </p:sld>
 </file>
 
-<file path=ppt/slides/slide41.xml><?xml version="1.0" encoding="utf-8"?>
+<file path=ppt/slides/slide42.xml><?xml version="1.0" encoding="utf-8"?>
 <p:sld xmlns:a="http://schemas.openxmlformats.org/drawingml/2006/main" xmlns:r="http://schemas.openxmlformats.org/officeDocument/2006/relationships" xmlns:p="http://schemas.openxmlformats.org/presentationml/2006/main">
   <p:cSld>
     <p:spTree>
@@ -30184,7 +32054,7 @@
         <p:spPr>
           <a:xfrm>
             <a:off x="945493" y="724802"/>
-            <a:ext cx="554960" cy="369332"/>
+            <a:ext cx="737702" cy="369332"/>
           </a:xfrm>
           <a:prstGeom prst="rect">
             <a:avLst/>
@@ -30198,8 +32068,8 @@
           <a:lstStyle/>
           <a:p>
             <a:r>
-              <a:rPr lang="en-US" altLang="ja-JP" b="1" dirty="0"/>
-              <a:t>xxx</a:t>
+              <a:rPr kumimoji="1" lang="en-US" altLang="ja-JP" b="1" dirty="0"/>
+              <a:t>main</a:t>
             </a:r>
             <a:endParaRPr kumimoji="1" lang="ja-JP" altLang="en-US" b="1" dirty="0"/>
           </a:p>
@@ -30331,10 +32201,10 @@
       </p:cxnSp>
       <p:sp>
         <p:nvSpPr>
-          <p:cNvPr id="4" name="楕円 3">
-            <a:extLst>
-              <a:ext uri="{FF2B5EF4-FFF2-40B4-BE49-F238E27FC236}">
-                <a16:creationId xmlns:a16="http://schemas.microsoft.com/office/drawing/2014/main" id="{C5CF04BB-9428-9ABA-8A6A-5AC584FA426D}"/>
+          <p:cNvPr id="5" name="楕円 4">
+            <a:extLst>
+              <a:ext uri="{FF2B5EF4-FFF2-40B4-BE49-F238E27FC236}">
+                <a16:creationId xmlns:a16="http://schemas.microsoft.com/office/drawing/2014/main" id="{1C3AF1B5-E6CD-EE89-340D-507A95ACD47B}"/>
               </a:ext>
             </a:extLst>
           </p:cNvPr>
@@ -30343,7 +32213,7 @@
         </p:nvSpPr>
         <p:spPr>
           <a:xfrm>
-            <a:off x="5461999" y="4735536"/>
+            <a:off x="3332358" y="3067436"/>
             <a:ext cx="720000" cy="720000"/>
           </a:xfrm>
           <a:prstGeom prst="ellipse">
@@ -30377,71 +32247,6 @@
             <a:pPr algn="ctr"/>
             <a:r>
               <a:rPr lang="en-US" altLang="ja-JP" b="1" dirty="0">
-                <a:ln w="0"/>
-                <a:solidFill>
-                  <a:schemeClr val="tx1"/>
-                </a:solidFill>
-                <a:effectLst>
-                  <a:outerShdw blurRad="38100" dist="19050" dir="2700000" algn="tl" rotWithShape="0">
-                    <a:schemeClr val="dk1">
-                      <a:alpha val="40000"/>
-                    </a:schemeClr>
-                  </a:outerShdw>
-                </a:effectLst>
-              </a:rPr>
-              <a:t>B</a:t>
-            </a:r>
-          </a:p>
-        </p:txBody>
-      </p:sp>
-      <p:sp>
-        <p:nvSpPr>
-          <p:cNvPr id="5" name="楕円 4">
-            <a:extLst>
-              <a:ext uri="{FF2B5EF4-FFF2-40B4-BE49-F238E27FC236}">
-                <a16:creationId xmlns:a16="http://schemas.microsoft.com/office/drawing/2014/main" id="{1C3AF1B5-E6CD-EE89-340D-507A95ACD47B}"/>
-              </a:ext>
-            </a:extLst>
-          </p:cNvPr>
-          <p:cNvSpPr/>
-          <p:nvPr/>
-        </p:nvSpPr>
-        <p:spPr>
-          <a:xfrm>
-            <a:off x="3332358" y="3067436"/>
-            <a:ext cx="720000" cy="720000"/>
-          </a:xfrm>
-          <a:prstGeom prst="ellipse">
-            <a:avLst/>
-          </a:prstGeom>
-          <a:solidFill>
-            <a:schemeClr val="bg1"/>
-          </a:solidFill>
-          <a:ln w="38100"/>
-        </p:spPr>
-        <p:style>
-          <a:lnRef idx="2">
-            <a:schemeClr val="dk1">
-              <a:shade val="15000"/>
-            </a:schemeClr>
-          </a:lnRef>
-          <a:fillRef idx="1">
-            <a:schemeClr val="dk1"/>
-          </a:fillRef>
-          <a:effectRef idx="0">
-            <a:schemeClr val="dk1"/>
-          </a:effectRef>
-          <a:fontRef idx="minor">
-            <a:schemeClr val="lt1"/>
-          </a:fontRef>
-        </p:style>
-        <p:txBody>
-          <a:bodyPr rtlCol="0" anchor="ctr"/>
-          <a:lstStyle/>
-          <a:p>
-            <a:pPr algn="ctr"/>
-            <a:r>
-              <a:rPr lang="en-US" altLang="ja-JP" b="1" dirty="0">
                 <a:solidFill>
                   <a:schemeClr val="tx1"/>
                 </a:solidFill>
@@ -30471,7 +32276,7 @@
         <p:spPr>
           <a:xfrm>
             <a:off x="945493" y="3242770"/>
-            <a:ext cx="554960" cy="369332"/>
+            <a:ext cx="737702" cy="369332"/>
           </a:xfrm>
           <a:prstGeom prst="rect">
             <a:avLst/>
@@ -30486,55 +32291,12 @@
           <a:p>
             <a:r>
               <a:rPr kumimoji="1" lang="en-US" altLang="ja-JP" b="1" dirty="0"/>
-              <a:t>xxx</a:t>
+              <a:t>main</a:t>
             </a:r>
             <a:endParaRPr kumimoji="1" lang="ja-JP" altLang="en-US" b="1" dirty="0"/>
           </a:p>
         </p:txBody>
       </p:sp>
-      <p:cxnSp>
-        <p:nvCxnSpPr>
-          <p:cNvPr id="7" name="直線矢印コネクタ 6">
-            <a:extLst>
-              <a:ext uri="{FF2B5EF4-FFF2-40B4-BE49-F238E27FC236}">
-                <a16:creationId xmlns:a16="http://schemas.microsoft.com/office/drawing/2014/main" id="{317FA4A3-7838-5753-FC07-75330D54C38D}"/>
-              </a:ext>
-            </a:extLst>
-          </p:cNvPr>
-          <p:cNvCxnSpPr>
-            <a:cxnSpLocks/>
-            <a:stCxn id="5" idx="4"/>
-            <a:endCxn id="4" idx="2"/>
-          </p:cNvCxnSpPr>
-          <p:nvPr/>
-        </p:nvCxnSpPr>
-        <p:spPr>
-          <a:xfrm>
-            <a:off x="3692358" y="3787436"/>
-            <a:ext cx="1769641" cy="1308100"/>
-          </a:xfrm>
-          <a:prstGeom prst="straightConnector1">
-            <a:avLst/>
-          </a:prstGeom>
-          <a:ln w="38100">
-            <a:tailEnd type="triangle"/>
-          </a:ln>
-        </p:spPr>
-        <p:style>
-          <a:lnRef idx="1">
-            <a:schemeClr val="dk1"/>
-          </a:lnRef>
-          <a:fillRef idx="0">
-            <a:schemeClr val="dk1"/>
-          </a:fillRef>
-          <a:effectRef idx="0">
-            <a:schemeClr val="dk1"/>
-          </a:effectRef>
-          <a:fontRef idx="minor">
-            <a:schemeClr val="tx1"/>
-          </a:fontRef>
-        </p:style>
-      </p:cxnSp>
       <p:cxnSp>
         <p:nvCxnSpPr>
           <p:cNvPr id="10" name="直線矢印コネクタ 9">
@@ -30591,7 +32353,7 @@
         </p:nvSpPr>
         <p:spPr>
           <a:xfrm>
-            <a:off x="889073" y="4910870"/>
+            <a:off x="961523" y="4910870"/>
             <a:ext cx="721672" cy="369332"/>
           </a:xfrm>
           <a:prstGeom prst="rect">
@@ -30672,7 +32434,7 @@
 </p:sld>
 </file>
 
-<file path=ppt/slides/slide42.xml><?xml version="1.0" encoding="utf-8"?>
+<file path=ppt/slides/slide43.xml><?xml version="1.0" encoding="utf-8"?>
 <p:sld xmlns:a="http://schemas.openxmlformats.org/drawingml/2006/main" xmlns:r="http://schemas.openxmlformats.org/officeDocument/2006/relationships" xmlns:p="http://schemas.openxmlformats.org/presentationml/2006/main">
   <p:cSld>
     <p:spTree>
@@ -31882,7 +33644,7 @@
 </p:sld>
 </file>
 
-<file path=ppt/slides/slide43.xml><?xml version="1.0" encoding="utf-8"?>
+<file path=ppt/slides/slide44.xml><?xml version="1.0" encoding="utf-8"?>
 <p:sld xmlns:a="http://schemas.openxmlformats.org/drawingml/2006/main" xmlns:r="http://schemas.openxmlformats.org/officeDocument/2006/relationships" xmlns:p="http://schemas.openxmlformats.org/presentationml/2006/main">
   <p:cSld>
     <p:spTree>
@@ -32715,6 +34477,9 @@
             <a:avLst/>
           </a:prstGeom>
           <a:ln w="38100">
+            <a:solidFill>
+              <a:schemeClr val="accent1"/>
+            </a:solidFill>
             <a:tailEnd type="triangle"/>
           </a:ln>
         </p:spPr>
@@ -32864,7 +34629,11 @@
           <a:solidFill>
             <a:schemeClr val="bg1"/>
           </a:solidFill>
-          <a:ln w="38100"/>
+          <a:ln w="38100">
+            <a:solidFill>
+              <a:schemeClr val="accent1"/>
+            </a:solidFill>
+          </a:ln>
         </p:spPr>
         <p:style>
           <a:lnRef idx="2">
@@ -32891,7 +34660,7 @@
               <a:rPr lang="en-US" altLang="ja-JP" b="1" dirty="0">
                 <a:ln w="0"/>
                 <a:solidFill>
-                  <a:schemeClr val="tx1"/>
+                  <a:srgbClr val="0070C0"/>
                 </a:solidFill>
                 <a:effectLst>
                   <a:outerShdw blurRad="38100" dist="19050" dir="2700000" algn="tl" rotWithShape="0">
@@ -32901,7 +34670,7 @@
                   </a:outerShdw>
                 </a:effectLst>
               </a:rPr>
-              <a:t>C0</a:t>
+              <a:t>B1</a:t>
             </a:r>
           </a:p>
         </p:txBody>
@@ -33211,7 +34980,7 @@
 </p:sld>
 </file>
 
-<file path=ppt/slides/slide44.xml><?xml version="1.0" encoding="utf-8"?>
+<file path=ppt/slides/slide45.xml><?xml version="1.0" encoding="utf-8"?>
 <p:sld xmlns:a="http://schemas.openxmlformats.org/drawingml/2006/main" xmlns:r="http://schemas.openxmlformats.org/officeDocument/2006/relationships" xmlns:p="http://schemas.openxmlformats.org/presentationml/2006/main">
   <p:cSld>
     <p:spTree>
@@ -33745,7 +35514,7 @@
 </p:sld>
 </file>
 
-<file path=ppt/slides/slide45.xml><?xml version="1.0" encoding="utf-8"?>
+<file path=ppt/slides/slide46.xml><?xml version="1.0" encoding="utf-8"?>
 <p:sld xmlns:a="http://schemas.openxmlformats.org/drawingml/2006/main" xmlns:r="http://schemas.openxmlformats.org/officeDocument/2006/relationships" xmlns:p="http://schemas.openxmlformats.org/presentationml/2006/main">
   <p:cSld>
     <p:spTree>
@@ -34422,7 +36191,11 @@
           <a:solidFill>
             <a:schemeClr val="bg1"/>
           </a:solidFill>
-          <a:ln w="38100"/>
+          <a:ln w="38100">
+            <a:solidFill>
+              <a:schemeClr val="accent1"/>
+            </a:solidFill>
+          </a:ln>
         </p:spPr>
         <p:style>
           <a:lnRef idx="2">
@@ -34449,7 +36222,7 @@
               <a:rPr lang="en-US" altLang="ja-JP" b="1" dirty="0">
                 <a:ln w="0"/>
                 <a:solidFill>
-                  <a:schemeClr val="tx1"/>
+                  <a:srgbClr val="0070C0"/>
                 </a:solidFill>
                 <a:effectLst>
                   <a:outerShdw blurRad="38100" dist="19050" dir="2700000" algn="tl" rotWithShape="0">
@@ -34460,62 +36233,6 @@
                 </a:effectLst>
               </a:rPr>
               <a:t>A1</a:t>
-            </a:r>
-          </a:p>
-        </p:txBody>
-      </p:sp>
-      <p:sp>
-        <p:nvSpPr>
-          <p:cNvPr id="10" name="爆発: 8 pt 9">
-            <a:extLst>
-              <a:ext uri="{FF2B5EF4-FFF2-40B4-BE49-F238E27FC236}">
-                <a16:creationId xmlns:a16="http://schemas.microsoft.com/office/drawing/2014/main" id="{65410D5E-DC63-DA28-9567-1E90F0218E71}"/>
-              </a:ext>
-            </a:extLst>
-          </p:cNvPr>
-          <p:cNvSpPr/>
-          <p:nvPr/>
-        </p:nvSpPr>
-        <p:spPr>
-          <a:xfrm>
-            <a:off x="6998090" y="4249568"/>
-            <a:ext cx="3492500" cy="1222449"/>
-          </a:xfrm>
-          <a:prstGeom prst="irregularSeal1">
-            <a:avLst/>
-          </a:prstGeom>
-          <a:ln>
-            <a:solidFill>
-              <a:srgbClr val="FF0000"/>
-            </a:solidFill>
-          </a:ln>
-        </p:spPr>
-        <p:style>
-          <a:lnRef idx="2">
-            <a:schemeClr val="accent6"/>
-          </a:lnRef>
-          <a:fillRef idx="1">
-            <a:schemeClr val="lt1"/>
-          </a:fillRef>
-          <a:effectRef idx="0">
-            <a:schemeClr val="accent6"/>
-          </a:effectRef>
-          <a:fontRef idx="minor">
-            <a:schemeClr val="dk1"/>
-          </a:fontRef>
-        </p:style>
-        <p:txBody>
-          <a:bodyPr rtlCol="0" anchor="ctr"/>
-          <a:lstStyle/>
-          <a:p>
-            <a:pPr algn="ctr"/>
-            <a:r>
-              <a:rPr kumimoji="1" lang="ja-JP" altLang="en-US" b="1" dirty="0">
-                <a:solidFill>
-                  <a:srgbClr val="FF0000"/>
-                </a:solidFill>
-              </a:rPr>
-              <a:t>コンフリクト</a:t>
             </a:r>
           </a:p>
         </p:txBody>
@@ -35115,7 +36832,11 @@
           <a:solidFill>
             <a:schemeClr val="bg1"/>
           </a:solidFill>
-          <a:ln w="38100"/>
+          <a:ln w="38100">
+            <a:solidFill>
+              <a:srgbClr val="FF0000"/>
+            </a:solidFill>
+          </a:ln>
         </p:spPr>
         <p:style>
           <a:lnRef idx="2">
@@ -35142,7 +36863,7 @@
               <a:rPr lang="en-US" altLang="ja-JP" b="1" dirty="0">
                 <a:ln w="0"/>
                 <a:solidFill>
-                  <a:schemeClr val="tx1"/>
+                  <a:srgbClr val="FF0000"/>
                 </a:solidFill>
                 <a:effectLst>
                   <a:outerShdw blurRad="38100" dist="19050" dir="2700000" algn="tl" rotWithShape="0">
@@ -35157,49 +36878,6 @@
           </a:p>
         </p:txBody>
       </p:sp>
-      <p:cxnSp>
-        <p:nvCxnSpPr>
-          <p:cNvPr id="47" name="直線矢印コネクタ 46">
-            <a:extLst>
-              <a:ext uri="{FF2B5EF4-FFF2-40B4-BE49-F238E27FC236}">
-                <a16:creationId xmlns:a16="http://schemas.microsoft.com/office/drawing/2014/main" id="{1E6E7EAA-431F-B48E-B0EB-F64F838AD23B}"/>
-              </a:ext>
-            </a:extLst>
-          </p:cNvPr>
-          <p:cNvCxnSpPr/>
-          <p:nvPr/>
-        </p:nvCxnSpPr>
-        <p:spPr>
-          <a:xfrm>
-            <a:off x="6345042" y="4587513"/>
-            <a:ext cx="1130300" cy="896451"/>
-          </a:xfrm>
-          <a:prstGeom prst="straightConnector1">
-            <a:avLst/>
-          </a:prstGeom>
-          <a:ln w="38100">
-            <a:solidFill>
-              <a:srgbClr val="FF0000"/>
-            </a:solidFill>
-            <a:headEnd type="triangle" w="med" len="med"/>
-            <a:tailEnd type="triangle" w="med" len="med"/>
-          </a:ln>
-        </p:spPr>
-        <p:style>
-          <a:lnRef idx="1">
-            <a:schemeClr val="dk1"/>
-          </a:lnRef>
-          <a:fillRef idx="0">
-            <a:schemeClr val="dk1"/>
-          </a:fillRef>
-          <a:effectRef idx="0">
-            <a:schemeClr val="dk1"/>
-          </a:effectRef>
-          <a:fontRef idx="minor">
-            <a:schemeClr val="tx1"/>
-          </a:fontRef>
-        </p:style>
-      </p:cxnSp>
       <p:sp>
         <p:nvSpPr>
           <p:cNvPr id="48" name="四角形: 角を丸くする 47">
@@ -35384,41 +37062,106 @@
           </a:p>
         </p:txBody>
       </p:sp>
+      <p:cxnSp>
+        <p:nvCxnSpPr>
+          <p:cNvPr id="3" name="直線矢印コネクタ 2">
+            <a:extLst>
+              <a:ext uri="{FF2B5EF4-FFF2-40B4-BE49-F238E27FC236}">
+                <a16:creationId xmlns:a16="http://schemas.microsoft.com/office/drawing/2014/main" id="{9F37FD5A-AD01-5DB5-3BBF-EF36B103CF36}"/>
+              </a:ext>
+            </a:extLst>
+          </p:cNvPr>
+          <p:cNvCxnSpPr>
+            <a:cxnSpLocks/>
+          </p:cNvCxnSpPr>
+          <p:nvPr/>
+        </p:nvCxnSpPr>
+        <p:spPr>
+          <a:xfrm>
+            <a:off x="6286920" y="4595055"/>
+            <a:ext cx="1367600" cy="951949"/>
+          </a:xfrm>
+          <a:prstGeom prst="straightConnector1">
+            <a:avLst/>
+          </a:prstGeom>
+          <a:ln w="38100">
+            <a:solidFill>
+              <a:srgbClr val="FFC000"/>
+            </a:solidFill>
+            <a:headEnd type="triangle" w="med" len="med"/>
+            <a:tailEnd type="triangle" w="med" len="med"/>
+          </a:ln>
+        </p:spPr>
+        <p:style>
+          <a:lnRef idx="1">
+            <a:schemeClr val="dk1"/>
+          </a:lnRef>
+          <a:fillRef idx="0">
+            <a:schemeClr val="dk1"/>
+          </a:fillRef>
+          <a:effectRef idx="0">
+            <a:schemeClr val="dk1"/>
+          </a:effectRef>
+          <a:fontRef idx="minor">
+            <a:schemeClr val="tx1"/>
+          </a:fontRef>
+        </p:style>
+      </p:cxnSp>
       <p:sp>
         <p:nvSpPr>
-          <p:cNvPr id="11" name="テキスト ボックス 10">
-            <a:extLst>
-              <a:ext uri="{FF2B5EF4-FFF2-40B4-BE49-F238E27FC236}">
-                <a16:creationId xmlns:a16="http://schemas.microsoft.com/office/drawing/2014/main" id="{8E05067D-1715-8FCE-89D5-D296BAC303F5}"/>
-              </a:ext>
-            </a:extLst>
-          </p:cNvPr>
-          <p:cNvSpPr txBox="1"/>
+          <p:cNvPr id="10" name="爆発: 8 pt 9">
+            <a:extLst>
+              <a:ext uri="{FF2B5EF4-FFF2-40B4-BE49-F238E27FC236}">
+                <a16:creationId xmlns:a16="http://schemas.microsoft.com/office/drawing/2014/main" id="{65410D5E-DC63-DA28-9567-1E90F0218E71}"/>
+              </a:ext>
+            </a:extLst>
+          </p:cNvPr>
+          <p:cNvSpPr/>
           <p:nvPr/>
         </p:nvSpPr>
         <p:spPr>
           <a:xfrm>
-            <a:off x="8744340" y="5491506"/>
-            <a:ext cx="688009" cy="830997"/>
-          </a:xfrm>
-          <a:prstGeom prst="rect">
-            <a:avLst/>
-          </a:prstGeom>
-          <a:noFill/>
-        </p:spPr>
+            <a:off x="6637647" y="4245418"/>
+            <a:ext cx="3492500" cy="1222449"/>
+          </a:xfrm>
+          <a:prstGeom prst="irregularSeal1">
+            <a:avLst/>
+          </a:prstGeom>
+          <a:solidFill>
+            <a:schemeClr val="bg1"/>
+          </a:solidFill>
+          <a:ln w="38100">
+            <a:solidFill>
+              <a:srgbClr val="FFC000"/>
+            </a:solidFill>
+          </a:ln>
+        </p:spPr>
+        <p:style>
+          <a:lnRef idx="2">
+            <a:schemeClr val="accent6"/>
+          </a:lnRef>
+          <a:fillRef idx="1">
+            <a:schemeClr val="lt1"/>
+          </a:fillRef>
+          <a:effectRef idx="0">
+            <a:schemeClr val="accent6"/>
+          </a:effectRef>
+          <a:fontRef idx="minor">
+            <a:schemeClr val="dk1"/>
+          </a:fontRef>
+        </p:style>
         <p:txBody>
-          <a:bodyPr wrap="none" rtlCol="0">
-            <a:spAutoFit/>
-          </a:bodyPr>
+          <a:bodyPr rtlCol="0" anchor="ctr"/>
           <a:lstStyle/>
           <a:p>
-            <a:r>
-              <a:rPr kumimoji="1" lang="ja-JP" altLang="en-US" sz="4800" b="1" dirty="0">
+            <a:pPr algn="ctr"/>
+            <a:r>
+              <a:rPr kumimoji="1" lang="ja-JP" altLang="en-US" b="1" dirty="0">
                 <a:solidFill>
-                  <a:srgbClr val="FF0000"/>
+                  <a:srgbClr val="FFC000"/>
                 </a:solidFill>
               </a:rPr>
-              <a:t>✕</a:t>
+              <a:t>コンフリクト</a:t>
             </a:r>
           </a:p>
         </p:txBody>
@@ -35436,7 +37179,7 @@
 </p:sld>
 </file>
 
-<file path=ppt/slides/slide46.xml><?xml version="1.0" encoding="utf-8"?>
+<file path=ppt/slides/slide47.xml><?xml version="1.0" encoding="utf-8"?>
 <p:sld xmlns:a="http://schemas.openxmlformats.org/drawingml/2006/main" xmlns:r="http://schemas.openxmlformats.org/officeDocument/2006/relationships" xmlns:p="http://schemas.openxmlformats.org/presentationml/2006/main">
   <p:cSld>
     <p:spTree>
@@ -35444,7 +37187,7 @@
         <p:cNvPr id="1" name="">
           <a:extLst>
             <a:ext uri="{FF2B5EF4-FFF2-40B4-BE49-F238E27FC236}">
-              <a16:creationId xmlns:a16="http://schemas.microsoft.com/office/drawing/2014/main" id="{4FC27C00-8C19-80C8-54E9-186603233C89}"/>
+              <a16:creationId xmlns:a16="http://schemas.microsoft.com/office/drawing/2014/main" id="{F47BB867-5CF7-66FE-EC96-2D0F01230A6B}"/>
             </a:ext>
           </a:extLst>
         </p:cNvPr>
@@ -35464,7 +37207,7 @@
           <p:cNvPr id="20" name="直線コネクタ 19">
             <a:extLst>
               <a:ext uri="{FF2B5EF4-FFF2-40B4-BE49-F238E27FC236}">
-                <a16:creationId xmlns:a16="http://schemas.microsoft.com/office/drawing/2014/main" id="{7791B62A-9648-EA30-A169-7C899591CDB0}"/>
+                <a16:creationId xmlns:a16="http://schemas.microsoft.com/office/drawing/2014/main" id="{CB9E9A0F-80E2-530B-EEE3-7ED96167B4CE}"/>
               </a:ext>
             </a:extLst>
           </p:cNvPr>
@@ -35505,7 +37248,7 @@
           <p:cNvPr id="21" name="直線コネクタ 20">
             <a:extLst>
               <a:ext uri="{FF2B5EF4-FFF2-40B4-BE49-F238E27FC236}">
-                <a16:creationId xmlns:a16="http://schemas.microsoft.com/office/drawing/2014/main" id="{33D078A7-5F8E-2197-3350-D8EB0609F225}"/>
+                <a16:creationId xmlns:a16="http://schemas.microsoft.com/office/drawing/2014/main" id="{89357B5A-EE4A-5CD0-BB1A-0885CB8334C9}"/>
               </a:ext>
             </a:extLst>
           </p:cNvPr>
@@ -35546,7 +37289,7 @@
           <p:cNvPr id="22" name="楕円 21">
             <a:extLst>
               <a:ext uri="{FF2B5EF4-FFF2-40B4-BE49-F238E27FC236}">
-                <a16:creationId xmlns:a16="http://schemas.microsoft.com/office/drawing/2014/main" id="{704EDEC2-845B-26B4-FED2-2FA250820553}"/>
+                <a16:creationId xmlns:a16="http://schemas.microsoft.com/office/drawing/2014/main" id="{983A2C6A-5B3E-C3F1-CCC1-85569B9B3CE1}"/>
               </a:ext>
             </a:extLst>
           </p:cNvPr>
@@ -35601,7 +37344,7 @@
                   </a:outerShdw>
                 </a:effectLst>
               </a:rPr>
-              <a:t>B0</a:t>
+              <a:t>A0</a:t>
             </a:r>
           </a:p>
         </p:txBody>
@@ -35611,7 +37354,7 @@
           <p:cNvPr id="23" name="楕円 22">
             <a:extLst>
               <a:ext uri="{FF2B5EF4-FFF2-40B4-BE49-F238E27FC236}">
-                <a16:creationId xmlns:a16="http://schemas.microsoft.com/office/drawing/2014/main" id="{B4CC93F8-06B7-A8B4-A3EE-CEB4D42DE9CC}"/>
+                <a16:creationId xmlns:a16="http://schemas.microsoft.com/office/drawing/2014/main" id="{BD333434-7273-4EF3-F36E-58A7DCD12802}"/>
               </a:ext>
             </a:extLst>
           </p:cNvPr>
@@ -35673,7 +37416,7 @@
           <p:cNvPr id="25" name="直線矢印コネクタ 24">
             <a:extLst>
               <a:ext uri="{FF2B5EF4-FFF2-40B4-BE49-F238E27FC236}">
-                <a16:creationId xmlns:a16="http://schemas.microsoft.com/office/drawing/2014/main" id="{F5C5AA6F-438F-4F00-DD8F-DEFBA9B3B73C}"/>
+                <a16:creationId xmlns:a16="http://schemas.microsoft.com/office/drawing/2014/main" id="{F15B582F-B952-EDDC-2FA1-95C8AF81B608}"/>
               </a:ext>
             </a:extLst>
           </p:cNvPr>
@@ -35716,7 +37459,7 @@
           <p:cNvPr id="26" name="直線矢印コネクタ 25">
             <a:extLst>
               <a:ext uri="{FF2B5EF4-FFF2-40B4-BE49-F238E27FC236}">
-                <a16:creationId xmlns:a16="http://schemas.microsoft.com/office/drawing/2014/main" id="{374EAEC2-1390-7C43-3D00-3D33721E37B6}"/>
+                <a16:creationId xmlns:a16="http://schemas.microsoft.com/office/drawing/2014/main" id="{91E2F77A-C4C6-DE19-51E0-8332C03B9095}"/>
               </a:ext>
             </a:extLst>
           </p:cNvPr>
@@ -35758,7 +37501,7 @@
           <p:cNvPr id="27" name="直線矢印コネクタ 26">
             <a:extLst>
               <a:ext uri="{FF2B5EF4-FFF2-40B4-BE49-F238E27FC236}">
-                <a16:creationId xmlns:a16="http://schemas.microsoft.com/office/drawing/2014/main" id="{C4E610DC-DF2C-9508-0A85-256CD9CA21E8}"/>
+                <a16:creationId xmlns:a16="http://schemas.microsoft.com/office/drawing/2014/main" id="{A4916312-1086-590C-1318-DA62C39477FC}"/>
               </a:ext>
             </a:extLst>
           </p:cNvPr>
@@ -35801,7 +37544,7 @@
           <p:cNvPr id="29" name="直線コネクタ 28">
             <a:extLst>
               <a:ext uri="{FF2B5EF4-FFF2-40B4-BE49-F238E27FC236}">
-                <a16:creationId xmlns:a16="http://schemas.microsoft.com/office/drawing/2014/main" id="{160E8E7D-B35B-26FE-1FB9-F4F52BA176A6}"/>
+                <a16:creationId xmlns:a16="http://schemas.microsoft.com/office/drawing/2014/main" id="{7011A9C6-1060-4738-9E56-DA39F93E61F2}"/>
               </a:ext>
             </a:extLst>
           </p:cNvPr>
@@ -35842,7 +37585,7 @@
           <p:cNvPr id="30" name="直線コネクタ 29">
             <a:extLst>
               <a:ext uri="{FF2B5EF4-FFF2-40B4-BE49-F238E27FC236}">
-                <a16:creationId xmlns:a16="http://schemas.microsoft.com/office/drawing/2014/main" id="{13F3B278-6343-D962-25E4-46C2C1AB5E7D}"/>
+                <a16:creationId xmlns:a16="http://schemas.microsoft.com/office/drawing/2014/main" id="{8BFAC68A-C257-4157-3289-07D4C681253A}"/>
               </a:ext>
             </a:extLst>
           </p:cNvPr>
@@ -35883,7 +37626,7 @@
           <p:cNvPr id="31" name="楕円 30">
             <a:extLst>
               <a:ext uri="{FF2B5EF4-FFF2-40B4-BE49-F238E27FC236}">
-                <a16:creationId xmlns:a16="http://schemas.microsoft.com/office/drawing/2014/main" id="{8BDE1A4D-48D6-1D4F-14C5-31AF8FAB9225}"/>
+                <a16:creationId xmlns:a16="http://schemas.microsoft.com/office/drawing/2014/main" id="{9EF53D12-601E-CD92-4BFB-B35E63168D25}"/>
               </a:ext>
             </a:extLst>
           </p:cNvPr>
@@ -35938,7 +37681,7 @@
                   </a:outerShdw>
                 </a:effectLst>
               </a:rPr>
-              <a:t>B0</a:t>
+              <a:t>A0</a:t>
             </a:r>
           </a:p>
         </p:txBody>
@@ -35948,7 +37691,7 @@
           <p:cNvPr id="32" name="楕円 31">
             <a:extLst>
               <a:ext uri="{FF2B5EF4-FFF2-40B4-BE49-F238E27FC236}">
-                <a16:creationId xmlns:a16="http://schemas.microsoft.com/office/drawing/2014/main" id="{26897F87-0839-3650-C3A3-B628D594BFFB}"/>
+                <a16:creationId xmlns:a16="http://schemas.microsoft.com/office/drawing/2014/main" id="{54D16167-0E7B-ED13-EADA-A6155F3C5D66}"/>
               </a:ext>
             </a:extLst>
           </p:cNvPr>
@@ -36010,7 +37753,7 @@
           <p:cNvPr id="34" name="直線矢印コネクタ 33">
             <a:extLst>
               <a:ext uri="{FF2B5EF4-FFF2-40B4-BE49-F238E27FC236}">
-                <a16:creationId xmlns:a16="http://schemas.microsoft.com/office/drawing/2014/main" id="{8A3BD7DD-625A-0469-3C68-F673DC8D9EC3}"/>
+                <a16:creationId xmlns:a16="http://schemas.microsoft.com/office/drawing/2014/main" id="{18A9A044-5D57-46D4-06B1-93AA91952BA1}"/>
               </a:ext>
             </a:extLst>
           </p:cNvPr>
@@ -36053,7 +37796,7 @@
           <p:cNvPr id="35" name="直線矢印コネクタ 34">
             <a:extLst>
               <a:ext uri="{FF2B5EF4-FFF2-40B4-BE49-F238E27FC236}">
-                <a16:creationId xmlns:a16="http://schemas.microsoft.com/office/drawing/2014/main" id="{29A1B39F-5CA4-2F43-4D52-CC03146BE385}"/>
+                <a16:creationId xmlns:a16="http://schemas.microsoft.com/office/drawing/2014/main" id="{5283C707-BA86-FC93-C130-4441E87255E7}"/>
               </a:ext>
             </a:extLst>
           </p:cNvPr>
@@ -36095,7 +37838,7 @@
           <p:cNvPr id="8" name="楕円 7">
             <a:extLst>
               <a:ext uri="{FF2B5EF4-FFF2-40B4-BE49-F238E27FC236}">
-                <a16:creationId xmlns:a16="http://schemas.microsoft.com/office/drawing/2014/main" id="{1C6FDAFA-A875-825F-2D51-17781D4F5AFF}"/>
+                <a16:creationId xmlns:a16="http://schemas.microsoft.com/office/drawing/2014/main" id="{A0A59863-F161-D947-AB42-323126E0FF68}"/>
               </a:ext>
             </a:extLst>
           </p:cNvPr>
@@ -36160,7 +37903,7 @@
           <p:cNvPr id="13" name="楕円 12">
             <a:extLst>
               <a:ext uri="{FF2B5EF4-FFF2-40B4-BE49-F238E27FC236}">
-                <a16:creationId xmlns:a16="http://schemas.microsoft.com/office/drawing/2014/main" id="{27094D77-1FC5-F8FE-12B5-75B58FBA241F}"/>
+                <a16:creationId xmlns:a16="http://schemas.microsoft.com/office/drawing/2014/main" id="{57275503-481F-11AF-2717-766863021C47}"/>
               </a:ext>
             </a:extLst>
           </p:cNvPr>
@@ -36178,7 +37921,11 @@
           <a:solidFill>
             <a:schemeClr val="bg1"/>
           </a:solidFill>
-          <a:ln w="38100"/>
+          <a:ln w="38100">
+            <a:solidFill>
+              <a:schemeClr val="accent1"/>
+            </a:solidFill>
+          </a:ln>
         </p:spPr>
         <p:style>
           <a:lnRef idx="2">
@@ -36205,7 +37952,7 @@
               <a:rPr lang="en-US" altLang="ja-JP" b="1" dirty="0">
                 <a:ln w="0"/>
                 <a:solidFill>
-                  <a:schemeClr val="tx1"/>
+                  <a:srgbClr val="0070C0"/>
                 </a:solidFill>
                 <a:effectLst>
                   <a:outerShdw blurRad="38100" dist="19050" dir="2700000" algn="tl" rotWithShape="0">
@@ -36225,7 +37972,7 @@
           <p:cNvPr id="14" name="直線矢印コネクタ 13">
             <a:extLst>
               <a:ext uri="{FF2B5EF4-FFF2-40B4-BE49-F238E27FC236}">
-                <a16:creationId xmlns:a16="http://schemas.microsoft.com/office/drawing/2014/main" id="{3A7C1F02-48BC-ED1B-9897-7163D3C84539}"/>
+                <a16:creationId xmlns:a16="http://schemas.microsoft.com/office/drawing/2014/main" id="{0F5B1189-187E-D33A-2935-3AD5E031CF1E}"/>
               </a:ext>
             </a:extLst>
           </p:cNvPr>
@@ -36268,7 +38015,7 @@
           <p:cNvPr id="18" name="矢印: 右 17">
             <a:extLst>
               <a:ext uri="{FF2B5EF4-FFF2-40B4-BE49-F238E27FC236}">
-                <a16:creationId xmlns:a16="http://schemas.microsoft.com/office/drawing/2014/main" id="{F514685A-E7AA-06B2-979E-0D24359E7985}"/>
+                <a16:creationId xmlns:a16="http://schemas.microsoft.com/office/drawing/2014/main" id="{77E29E0F-81AB-BB74-E48E-DD7A9BF4C6F8}"/>
               </a:ext>
             </a:extLst>
           </p:cNvPr>
@@ -36314,7 +38061,7 @@
           <p:cNvPr id="19" name="テキスト ボックス 18">
             <a:extLst>
               <a:ext uri="{FF2B5EF4-FFF2-40B4-BE49-F238E27FC236}">
-                <a16:creationId xmlns:a16="http://schemas.microsoft.com/office/drawing/2014/main" id="{4FDE8E91-798E-83B0-BF07-03EBFFDE7A65}"/>
+                <a16:creationId xmlns:a16="http://schemas.microsoft.com/office/drawing/2014/main" id="{7DAE30B0-7573-3373-140E-18EAE65A413C}"/>
               </a:ext>
             </a:extLst>
           </p:cNvPr>
@@ -36354,7 +38101,7 @@
           <p:cNvPr id="24" name="テキスト ボックス 23">
             <a:extLst>
               <a:ext uri="{FF2B5EF4-FFF2-40B4-BE49-F238E27FC236}">
-                <a16:creationId xmlns:a16="http://schemas.microsoft.com/office/drawing/2014/main" id="{104586A7-06C6-CBF5-9175-7755609DBA3A}"/>
+                <a16:creationId xmlns:a16="http://schemas.microsoft.com/office/drawing/2014/main" id="{C356AC0F-2FA1-6BD3-6E4D-302B15FBEBED}"/>
               </a:ext>
             </a:extLst>
           </p:cNvPr>
@@ -36394,7 +38141,7 @@
           <p:cNvPr id="33" name="テキスト ボックス 32">
             <a:extLst>
               <a:ext uri="{FF2B5EF4-FFF2-40B4-BE49-F238E27FC236}">
-                <a16:creationId xmlns:a16="http://schemas.microsoft.com/office/drawing/2014/main" id="{00081B9E-0010-91F1-B1CF-C4001DFC1EC2}"/>
+                <a16:creationId xmlns:a16="http://schemas.microsoft.com/office/drawing/2014/main" id="{6D905DDA-D82A-090A-7092-05D6566E807F}"/>
               </a:ext>
             </a:extLst>
           </p:cNvPr>
@@ -36430,7 +38177,7 @@
           <p:cNvPr id="36" name="テキスト ボックス 35">
             <a:extLst>
               <a:ext uri="{FF2B5EF4-FFF2-40B4-BE49-F238E27FC236}">
-                <a16:creationId xmlns:a16="http://schemas.microsoft.com/office/drawing/2014/main" id="{23CCDCDD-17B4-0801-D6D4-165148C1ED6A}"/>
+                <a16:creationId xmlns:a16="http://schemas.microsoft.com/office/drawing/2014/main" id="{27069D6E-0E97-DF95-1AB2-67C4CA1E48F6}"/>
               </a:ext>
             </a:extLst>
           </p:cNvPr>
@@ -36466,7 +38213,7 @@
           <p:cNvPr id="40" name="直線矢印コネクタ 39">
             <a:extLst>
               <a:ext uri="{FF2B5EF4-FFF2-40B4-BE49-F238E27FC236}">
-                <a16:creationId xmlns:a16="http://schemas.microsoft.com/office/drawing/2014/main" id="{89BB7B75-3BCF-B9C3-7A84-71415C4817AC}"/>
+                <a16:creationId xmlns:a16="http://schemas.microsoft.com/office/drawing/2014/main" id="{443E383D-4D7E-A58D-00E4-EDFA08ED4C48}"/>
               </a:ext>
             </a:extLst>
           </p:cNvPr>
@@ -36484,6 +38231,9 @@
             <a:avLst/>
           </a:prstGeom>
           <a:ln w="38100">
+            <a:solidFill>
+              <a:srgbClr val="7030A0"/>
+            </a:solidFill>
             <a:tailEnd type="triangle"/>
           </a:ln>
         </p:spPr>
@@ -36507,7 +38257,7 @@
           <p:cNvPr id="41" name="楕円 40">
             <a:extLst>
               <a:ext uri="{FF2B5EF4-FFF2-40B4-BE49-F238E27FC236}">
-                <a16:creationId xmlns:a16="http://schemas.microsoft.com/office/drawing/2014/main" id="{1FB11349-1396-CE3D-4D53-CB9682241B3B}"/>
+                <a16:creationId xmlns:a16="http://schemas.microsoft.com/office/drawing/2014/main" id="{DB921EF5-2DB8-4811-6500-CA21B7AEF022}"/>
               </a:ext>
             </a:extLst>
           </p:cNvPr>
@@ -36525,7 +38275,11 @@
           <a:solidFill>
             <a:schemeClr val="bg1"/>
           </a:solidFill>
-          <a:ln w="38100"/>
+          <a:ln w="38100">
+            <a:solidFill>
+              <a:srgbClr val="7030A0"/>
+            </a:solidFill>
+          </a:ln>
         </p:spPr>
         <p:style>
           <a:lnRef idx="2">
@@ -36552,7 +38306,7 @@
               <a:rPr lang="en-US" altLang="ja-JP" b="1" dirty="0">
                 <a:ln w="0"/>
                 <a:solidFill>
-                  <a:schemeClr val="tx1"/>
+                  <a:srgbClr val="7030A0"/>
                 </a:solidFill>
                 <a:effectLst>
                   <a:outerShdw blurRad="38100" dist="19050" dir="2700000" algn="tl" rotWithShape="0">
@@ -36572,7 +38326,7 @@
           <p:cNvPr id="42" name="直線矢印コネクタ 41">
             <a:extLst>
               <a:ext uri="{FF2B5EF4-FFF2-40B4-BE49-F238E27FC236}">
-                <a16:creationId xmlns:a16="http://schemas.microsoft.com/office/drawing/2014/main" id="{FE32B037-E24D-54A1-39C3-49221A65ED84}"/>
+                <a16:creationId xmlns:a16="http://schemas.microsoft.com/office/drawing/2014/main" id="{4A0E17CF-CD99-093C-AD55-50D1B21F113A}"/>
               </a:ext>
             </a:extLst>
           </p:cNvPr>
@@ -36613,7 +38367,7 @@
           <p:cNvPr id="43" name="楕円 42">
             <a:extLst>
               <a:ext uri="{FF2B5EF4-FFF2-40B4-BE49-F238E27FC236}">
-                <a16:creationId xmlns:a16="http://schemas.microsoft.com/office/drawing/2014/main" id="{3AC1B121-6CA5-B206-4973-F97ACDA8C6DD}"/>
+                <a16:creationId xmlns:a16="http://schemas.microsoft.com/office/drawing/2014/main" id="{0ED74AAB-D2F7-D4CC-CC0E-5CEB42C62041}"/>
               </a:ext>
             </a:extLst>
           </p:cNvPr>
@@ -36623,6 +38377,116 @@
         <p:spPr>
           <a:xfrm>
             <a:off x="7708900" y="2148103"/>
+            <a:ext cx="720000" cy="720000"/>
+          </a:xfrm>
+          <a:prstGeom prst="ellipse">
+            <a:avLst/>
+          </a:prstGeom>
+          <a:solidFill>
+            <a:schemeClr val="bg1"/>
+          </a:solidFill>
+          <a:ln w="38100">
+            <a:solidFill>
+              <a:srgbClr val="FF0000"/>
+            </a:solidFill>
+          </a:ln>
+        </p:spPr>
+        <p:style>
+          <a:lnRef idx="2">
+            <a:schemeClr val="dk1">
+              <a:shade val="15000"/>
+            </a:schemeClr>
+          </a:lnRef>
+          <a:fillRef idx="1">
+            <a:schemeClr val="dk1"/>
+          </a:fillRef>
+          <a:effectRef idx="0">
+            <a:schemeClr val="dk1"/>
+          </a:effectRef>
+          <a:fontRef idx="minor">
+            <a:schemeClr val="lt1"/>
+          </a:fontRef>
+        </p:style>
+        <p:txBody>
+          <a:bodyPr rtlCol="0" anchor="ctr"/>
+          <a:lstStyle/>
+          <a:p>
+            <a:pPr algn="ctr"/>
+            <a:r>
+              <a:rPr lang="en-US" altLang="ja-JP" b="1" dirty="0">
+                <a:ln w="0"/>
+                <a:solidFill>
+                  <a:srgbClr val="FF0000"/>
+                </a:solidFill>
+                <a:effectLst>
+                  <a:outerShdw blurRad="38100" dist="19050" dir="2700000" algn="tl" rotWithShape="0">
+                    <a:schemeClr val="dk1">
+                      <a:alpha val="40000"/>
+                    </a:schemeClr>
+                  </a:outerShdw>
+                </a:effectLst>
+              </a:rPr>
+              <a:t>B1</a:t>
+            </a:r>
+          </a:p>
+        </p:txBody>
+      </p:sp>
+      <p:cxnSp>
+        <p:nvCxnSpPr>
+          <p:cNvPr id="44" name="直線矢印コネクタ 43">
+            <a:extLst>
+              <a:ext uri="{FF2B5EF4-FFF2-40B4-BE49-F238E27FC236}">
+                <a16:creationId xmlns:a16="http://schemas.microsoft.com/office/drawing/2014/main" id="{FE34FBCB-6C41-04AD-4F00-7B793F2F9A23}"/>
+              </a:ext>
+            </a:extLst>
+          </p:cNvPr>
+          <p:cNvCxnSpPr>
+            <a:cxnSpLocks/>
+          </p:cNvCxnSpPr>
+          <p:nvPr/>
+        </p:nvCxnSpPr>
+        <p:spPr>
+          <a:xfrm flipV="1">
+            <a:off x="6316100" y="5902338"/>
+            <a:ext cx="1400594" cy="9333"/>
+          </a:xfrm>
+          <a:prstGeom prst="straightConnector1">
+            <a:avLst/>
+          </a:prstGeom>
+          <a:ln w="38100">
+            <a:tailEnd type="triangle"/>
+          </a:ln>
+        </p:spPr>
+        <p:style>
+          <a:lnRef idx="1">
+            <a:schemeClr val="dk1"/>
+          </a:lnRef>
+          <a:fillRef idx="0">
+            <a:schemeClr val="dk1"/>
+          </a:fillRef>
+          <a:effectRef idx="0">
+            <a:schemeClr val="dk1"/>
+          </a:effectRef>
+          <a:fontRef idx="minor">
+            <a:schemeClr val="tx1"/>
+          </a:fontRef>
+        </p:style>
+      </p:cxnSp>
+      <p:sp>
+        <p:nvSpPr>
+          <p:cNvPr id="45" name="楕円 44">
+            <a:extLst>
+              <a:ext uri="{FF2B5EF4-FFF2-40B4-BE49-F238E27FC236}">
+                <a16:creationId xmlns:a16="http://schemas.microsoft.com/office/drawing/2014/main" id="{5CA4832A-9A73-1754-3AEB-25917FAC8201}"/>
+              </a:ext>
+            </a:extLst>
+          </p:cNvPr>
+          <p:cNvSpPr/>
+          <p:nvPr/>
+        </p:nvSpPr>
+        <p:spPr>
+          <a:xfrm>
+            <a:off x="7708900" y="5547004"/>
             <a:ext cx="720000" cy="720000"/>
           </a:xfrm>
           <a:prstGeom prst="ellipse">
@@ -36673,118 +38537,12 @@
           </a:p>
         </p:txBody>
       </p:sp>
-      <p:cxnSp>
-        <p:nvCxnSpPr>
-          <p:cNvPr id="44" name="直線矢印コネクタ 43">
-            <a:extLst>
-              <a:ext uri="{FF2B5EF4-FFF2-40B4-BE49-F238E27FC236}">
-                <a16:creationId xmlns:a16="http://schemas.microsoft.com/office/drawing/2014/main" id="{D5A3336B-1475-2DC1-E9E1-E16682EF63A8}"/>
-              </a:ext>
-            </a:extLst>
-          </p:cNvPr>
-          <p:cNvCxnSpPr>
-            <a:cxnSpLocks/>
-          </p:cNvCxnSpPr>
-          <p:nvPr/>
-        </p:nvCxnSpPr>
-        <p:spPr>
-          <a:xfrm flipV="1">
-            <a:off x="6316100" y="5902338"/>
-            <a:ext cx="1400594" cy="9333"/>
-          </a:xfrm>
-          <a:prstGeom prst="straightConnector1">
-            <a:avLst/>
-          </a:prstGeom>
-          <a:ln w="38100">
-            <a:tailEnd type="triangle"/>
-          </a:ln>
-        </p:spPr>
-        <p:style>
-          <a:lnRef idx="1">
-            <a:schemeClr val="dk1"/>
-          </a:lnRef>
-          <a:fillRef idx="0">
-            <a:schemeClr val="dk1"/>
-          </a:fillRef>
-          <a:effectRef idx="0">
-            <a:schemeClr val="dk1"/>
-          </a:effectRef>
-          <a:fontRef idx="minor">
-            <a:schemeClr val="tx1"/>
-          </a:fontRef>
-        </p:style>
-      </p:cxnSp>
-      <p:sp>
-        <p:nvSpPr>
-          <p:cNvPr id="45" name="楕円 44">
-            <a:extLst>
-              <a:ext uri="{FF2B5EF4-FFF2-40B4-BE49-F238E27FC236}">
-                <a16:creationId xmlns:a16="http://schemas.microsoft.com/office/drawing/2014/main" id="{C65ED29C-FA4B-CEAD-2355-BA885B2C21BB}"/>
-              </a:ext>
-            </a:extLst>
-          </p:cNvPr>
-          <p:cNvSpPr/>
-          <p:nvPr/>
-        </p:nvSpPr>
-        <p:spPr>
-          <a:xfrm>
-            <a:off x="7708900" y="5547004"/>
-            <a:ext cx="720000" cy="720000"/>
-          </a:xfrm>
-          <a:prstGeom prst="ellipse">
-            <a:avLst/>
-          </a:prstGeom>
-          <a:solidFill>
-            <a:schemeClr val="bg1"/>
-          </a:solidFill>
-          <a:ln w="38100"/>
-        </p:spPr>
-        <p:style>
-          <a:lnRef idx="2">
-            <a:schemeClr val="dk1">
-              <a:shade val="15000"/>
-            </a:schemeClr>
-          </a:lnRef>
-          <a:fillRef idx="1">
-            <a:schemeClr val="dk1"/>
-          </a:fillRef>
-          <a:effectRef idx="0">
-            <a:schemeClr val="dk1"/>
-          </a:effectRef>
-          <a:fontRef idx="minor">
-            <a:schemeClr val="lt1"/>
-          </a:fontRef>
-        </p:style>
-        <p:txBody>
-          <a:bodyPr rtlCol="0" anchor="ctr"/>
-          <a:lstStyle/>
-          <a:p>
-            <a:pPr algn="ctr"/>
-            <a:r>
-              <a:rPr lang="en-US" altLang="ja-JP" b="1" dirty="0">
-                <a:ln w="0"/>
-                <a:solidFill>
-                  <a:schemeClr val="tx1"/>
-                </a:solidFill>
-                <a:effectLst>
-                  <a:outerShdw blurRad="38100" dist="19050" dir="2700000" algn="tl" rotWithShape="0">
-                    <a:schemeClr val="dk1">
-                      <a:alpha val="40000"/>
-                    </a:schemeClr>
-                  </a:outerShdw>
-                </a:effectLst>
-              </a:rPr>
-              <a:t>B1</a:t>
-            </a:r>
-          </a:p>
-        </p:txBody>
-      </p:sp>
       <p:sp>
         <p:nvSpPr>
           <p:cNvPr id="6" name="テキスト ボックス 5">
             <a:extLst>
               <a:ext uri="{FF2B5EF4-FFF2-40B4-BE49-F238E27FC236}">
-                <a16:creationId xmlns:a16="http://schemas.microsoft.com/office/drawing/2014/main" id="{DC872796-509F-A325-32D0-DA18DEBB2A4D}"/>
+                <a16:creationId xmlns:a16="http://schemas.microsoft.com/office/drawing/2014/main" id="{49B66781-F288-C206-ED4E-123087A2B894}"/>
               </a:ext>
             </a:extLst>
           </p:cNvPr>
@@ -36823,7 +38581,7 @@
           <p:cNvPr id="9" name="テキスト ボックス 8">
             <a:extLst>
               <a:ext uri="{FF2B5EF4-FFF2-40B4-BE49-F238E27FC236}">
-                <a16:creationId xmlns:a16="http://schemas.microsoft.com/office/drawing/2014/main" id="{2332E283-362C-F2D4-915B-E3CEACC6B15C}"/>
+                <a16:creationId xmlns:a16="http://schemas.microsoft.com/office/drawing/2014/main" id="{9EEA621B-191A-B072-0C09-E47A8736CBEC}"/>
               </a:ext>
             </a:extLst>
           </p:cNvPr>
@@ -36862,7 +38620,7 @@
           <p:cNvPr id="15" name="四角形: 角を丸くする 14">
             <a:extLst>
               <a:ext uri="{FF2B5EF4-FFF2-40B4-BE49-F238E27FC236}">
-                <a16:creationId xmlns:a16="http://schemas.microsoft.com/office/drawing/2014/main" id="{666EBEEE-C150-E547-CFF3-38610AB5894C}"/>
+                <a16:creationId xmlns:a16="http://schemas.microsoft.com/office/drawing/2014/main" id="{8C26DDAE-8A93-107D-DA98-700BB1AD99C1}"/>
               </a:ext>
             </a:extLst>
           </p:cNvPr>
@@ -36915,7 +38673,7 @@
           <p:cNvPr id="16" name="四角形: 角を丸くする 15">
             <a:extLst>
               <a:ext uri="{FF2B5EF4-FFF2-40B4-BE49-F238E27FC236}">
-                <a16:creationId xmlns:a16="http://schemas.microsoft.com/office/drawing/2014/main" id="{B106FB74-095A-F3D0-2DAE-38F160E473AD}"/>
+                <a16:creationId xmlns:a16="http://schemas.microsoft.com/office/drawing/2014/main" id="{FA111CCC-B986-AC06-A371-98B1A874B131}"/>
               </a:ext>
             </a:extLst>
           </p:cNvPr>
@@ -36963,10 +38721,114 @@
           </a:p>
         </p:txBody>
       </p:sp>
+      <p:cxnSp>
+        <p:nvCxnSpPr>
+          <p:cNvPr id="10" name="直線矢印コネクタ 9">
+            <a:extLst>
+              <a:ext uri="{FF2B5EF4-FFF2-40B4-BE49-F238E27FC236}">
+                <a16:creationId xmlns:a16="http://schemas.microsoft.com/office/drawing/2014/main" id="{308244BB-BA6B-3CD9-3EF3-2737CF22F522}"/>
+              </a:ext>
+            </a:extLst>
+          </p:cNvPr>
+          <p:cNvCxnSpPr>
+            <a:cxnSpLocks/>
+          </p:cNvCxnSpPr>
+          <p:nvPr/>
+        </p:nvCxnSpPr>
+        <p:spPr>
+          <a:xfrm>
+            <a:off x="6286920" y="1217372"/>
+            <a:ext cx="1367600" cy="951949"/>
+          </a:xfrm>
+          <a:prstGeom prst="straightConnector1">
+            <a:avLst/>
+          </a:prstGeom>
+          <a:ln w="38100">
+            <a:solidFill>
+              <a:srgbClr val="FFC000"/>
+            </a:solidFill>
+            <a:headEnd type="triangle" w="med" len="med"/>
+            <a:tailEnd type="triangle" w="med" len="med"/>
+          </a:ln>
+        </p:spPr>
+        <p:style>
+          <a:lnRef idx="1">
+            <a:schemeClr val="dk1"/>
+          </a:lnRef>
+          <a:fillRef idx="0">
+            <a:schemeClr val="dk1"/>
+          </a:fillRef>
+          <a:effectRef idx="0">
+            <a:schemeClr val="dk1"/>
+          </a:effectRef>
+          <a:fontRef idx="minor">
+            <a:schemeClr val="tx1"/>
+          </a:fontRef>
+        </p:style>
+      </p:cxnSp>
+      <p:sp>
+        <p:nvSpPr>
+          <p:cNvPr id="11" name="爆発: 8 pt 10">
+            <a:extLst>
+              <a:ext uri="{FF2B5EF4-FFF2-40B4-BE49-F238E27FC236}">
+                <a16:creationId xmlns:a16="http://schemas.microsoft.com/office/drawing/2014/main" id="{53130C2E-FD70-A2BC-F1BC-55DA140AC439}"/>
+              </a:ext>
+            </a:extLst>
+          </p:cNvPr>
+          <p:cNvSpPr/>
+          <p:nvPr/>
+        </p:nvSpPr>
+        <p:spPr>
+          <a:xfrm>
+            <a:off x="6637647" y="867735"/>
+            <a:ext cx="3492500" cy="1222449"/>
+          </a:xfrm>
+          <a:prstGeom prst="irregularSeal1">
+            <a:avLst/>
+          </a:prstGeom>
+          <a:solidFill>
+            <a:schemeClr val="bg1"/>
+          </a:solidFill>
+          <a:ln w="38100">
+            <a:solidFill>
+              <a:srgbClr val="FFC000"/>
+            </a:solidFill>
+          </a:ln>
+        </p:spPr>
+        <p:style>
+          <a:lnRef idx="2">
+            <a:schemeClr val="accent6"/>
+          </a:lnRef>
+          <a:fillRef idx="1">
+            <a:schemeClr val="lt1"/>
+          </a:fillRef>
+          <a:effectRef idx="0">
+            <a:schemeClr val="accent6"/>
+          </a:effectRef>
+          <a:fontRef idx="minor">
+            <a:schemeClr val="dk1"/>
+          </a:fontRef>
+        </p:style>
+        <p:txBody>
+          <a:bodyPr rtlCol="0" anchor="ctr"/>
+          <a:lstStyle/>
+          <a:p>
+            <a:pPr algn="ctr"/>
+            <a:r>
+              <a:rPr kumimoji="1" lang="ja-JP" altLang="en-US" b="1" dirty="0">
+                <a:solidFill>
+                  <a:srgbClr val="FFC000"/>
+                </a:solidFill>
+              </a:rPr>
+              <a:t>コンフリクト</a:t>
+            </a:r>
+          </a:p>
+        </p:txBody>
+      </p:sp>
     </p:spTree>
     <p:extLst>
       <p:ext uri="{BB962C8B-B14F-4D97-AF65-F5344CB8AC3E}">
-        <p14:creationId xmlns:p14="http://schemas.microsoft.com/office/powerpoint/2010/main" val="2625889269"/>
+        <p14:creationId xmlns:p14="http://schemas.microsoft.com/office/powerpoint/2010/main" val="3808907058"/>
       </p:ext>
     </p:extLst>
   </p:cSld>
@@ -36976,7 +38838,7 @@
 </p:sld>
 </file>
 
-<file path=ppt/slides/slide47.xml><?xml version="1.0" encoding="utf-8"?>
+<file path=ppt/slides/slide48.xml><?xml version="1.0" encoding="utf-8"?>
 <p:sld xmlns:a="http://schemas.openxmlformats.org/drawingml/2006/main" xmlns:r="http://schemas.openxmlformats.org/officeDocument/2006/relationships" xmlns:p="http://schemas.openxmlformats.org/presentationml/2006/main">
   <p:cSld>
     <p:spTree>
@@ -37012,7 +38874,7 @@
 </p:sld>
 </file>
 
-<file path=ppt/slides/slide48.xml><?xml version="1.0" encoding="utf-8"?>
+<file path=ppt/slides/slide49.xml><?xml version="1.0" encoding="utf-8"?>
 <p:sld xmlns:a="http://schemas.openxmlformats.org/drawingml/2006/main" xmlns:r="http://schemas.openxmlformats.org/officeDocument/2006/relationships" xmlns:p="http://schemas.openxmlformats.org/presentationml/2006/main">
   <p:cSld>
     <p:spTree>
@@ -37039,696 +38901,6 @@
     <p:extLst>
       <p:ext uri="{BB962C8B-B14F-4D97-AF65-F5344CB8AC3E}">
         <p14:creationId xmlns:p14="http://schemas.microsoft.com/office/powerpoint/2010/main" val="4047675846"/>
-      </p:ext>
-    </p:extLst>
-  </p:cSld>
-  <p:clrMapOvr>
-    <a:masterClrMapping/>
-  </p:clrMapOvr>
-</p:sld>
-</file>
-
-<file path=ppt/slides/slide49.xml><?xml version="1.0" encoding="utf-8"?>
-<p:sld xmlns:a="http://schemas.openxmlformats.org/drawingml/2006/main" xmlns:r="http://schemas.openxmlformats.org/officeDocument/2006/relationships" xmlns:p="http://schemas.openxmlformats.org/presentationml/2006/main">
-  <p:cSld>
-    <p:spTree>
-      <p:nvGrpSpPr>
-        <p:cNvPr id="1" name="">
-          <a:extLst>
-            <a:ext uri="{FF2B5EF4-FFF2-40B4-BE49-F238E27FC236}">
-              <a16:creationId xmlns:a16="http://schemas.microsoft.com/office/drawing/2014/main" id="{D3D296E8-EA97-7349-AE84-605B0AC723F5}"/>
-            </a:ext>
-          </a:extLst>
-        </p:cNvPr>
-        <p:cNvGrpSpPr/>
-        <p:nvPr/>
-      </p:nvGrpSpPr>
-      <p:grpSpPr>
-        <a:xfrm>
-          <a:off x="0" y="0"/>
-          <a:ext cx="0" cy="0"/>
-          <a:chOff x="0" y="0"/>
-          <a:chExt cx="0" cy="0"/>
-        </a:xfrm>
-      </p:grpSpPr>
-      <p:cxnSp>
-        <p:nvCxnSpPr>
-          <p:cNvPr id="41" name="直線コネクタ 40">
-            <a:extLst>
-              <a:ext uri="{FF2B5EF4-FFF2-40B4-BE49-F238E27FC236}">
-                <a16:creationId xmlns:a16="http://schemas.microsoft.com/office/drawing/2014/main" id="{6499AE2B-6DA7-F6F2-B41E-D1074AD609B0}"/>
-              </a:ext>
-            </a:extLst>
-          </p:cNvPr>
-          <p:cNvCxnSpPr>
-            <a:cxnSpLocks/>
-          </p:cNvCxnSpPr>
-          <p:nvPr/>
-        </p:nvCxnSpPr>
-        <p:spPr>
-          <a:xfrm>
-            <a:off x="1816100" y="2569018"/>
-            <a:ext cx="9000000" cy="0"/>
-          </a:xfrm>
-          <a:prstGeom prst="line">
-            <a:avLst/>
-          </a:prstGeom>
-          <a:ln>
-            <a:prstDash val="dash"/>
-          </a:ln>
-        </p:spPr>
-        <p:style>
-          <a:lnRef idx="1">
-            <a:schemeClr val="accent1"/>
-          </a:lnRef>
-          <a:fillRef idx="0">
-            <a:schemeClr val="accent1"/>
-          </a:fillRef>
-          <a:effectRef idx="0">
-            <a:schemeClr val="accent1"/>
-          </a:effectRef>
-          <a:fontRef idx="minor">
-            <a:schemeClr val="tx1"/>
-          </a:fontRef>
-        </p:style>
-      </p:cxnSp>
-      <p:cxnSp>
-        <p:nvCxnSpPr>
-          <p:cNvPr id="38" name="直線コネクタ 37">
-            <a:extLst>
-              <a:ext uri="{FF2B5EF4-FFF2-40B4-BE49-F238E27FC236}">
-                <a16:creationId xmlns:a16="http://schemas.microsoft.com/office/drawing/2014/main" id="{9558E5C8-5B1C-AE27-C2E4-D72E03976114}"/>
-              </a:ext>
-            </a:extLst>
-          </p:cNvPr>
-          <p:cNvCxnSpPr>
-            <a:cxnSpLocks/>
-          </p:cNvCxnSpPr>
-          <p:nvPr/>
-        </p:nvCxnSpPr>
-        <p:spPr>
-          <a:xfrm>
-            <a:off x="1816100" y="909468"/>
-            <a:ext cx="9000000" cy="0"/>
-          </a:xfrm>
-          <a:prstGeom prst="line">
-            <a:avLst/>
-          </a:prstGeom>
-          <a:ln>
-            <a:prstDash val="dash"/>
-          </a:ln>
-        </p:spPr>
-        <p:style>
-          <a:lnRef idx="1">
-            <a:schemeClr val="accent1"/>
-          </a:lnRef>
-          <a:fillRef idx="0">
-            <a:schemeClr val="accent1"/>
-          </a:fillRef>
-          <a:effectRef idx="0">
-            <a:schemeClr val="accent1"/>
-          </a:effectRef>
-          <a:fontRef idx="minor">
-            <a:schemeClr val="tx1"/>
-          </a:fontRef>
-        </p:style>
-      </p:cxnSp>
-      <p:sp>
-        <p:nvSpPr>
-          <p:cNvPr id="8" name="楕円 7">
-            <a:extLst>
-              <a:ext uri="{FF2B5EF4-FFF2-40B4-BE49-F238E27FC236}">
-                <a16:creationId xmlns:a16="http://schemas.microsoft.com/office/drawing/2014/main" id="{5A5F5CBA-F95F-512E-EF73-22030E192D9C}"/>
-              </a:ext>
-            </a:extLst>
-          </p:cNvPr>
-          <p:cNvSpPr/>
-          <p:nvPr/>
-        </p:nvSpPr>
-        <p:spPr>
-          <a:xfrm>
-            <a:off x="5461999" y="2217568"/>
-            <a:ext cx="720000" cy="720000"/>
-          </a:xfrm>
-          <a:prstGeom prst="ellipse">
-            <a:avLst/>
-          </a:prstGeom>
-          <a:solidFill>
-            <a:schemeClr val="bg1"/>
-          </a:solidFill>
-          <a:ln w="38100"/>
-        </p:spPr>
-        <p:style>
-          <a:lnRef idx="2">
-            <a:schemeClr val="dk1">
-              <a:shade val="15000"/>
-            </a:schemeClr>
-          </a:lnRef>
-          <a:fillRef idx="1">
-            <a:schemeClr val="dk1"/>
-          </a:fillRef>
-          <a:effectRef idx="0">
-            <a:schemeClr val="dk1"/>
-          </a:effectRef>
-          <a:fontRef idx="minor">
-            <a:schemeClr val="lt1"/>
-          </a:fontRef>
-        </p:style>
-        <p:txBody>
-          <a:bodyPr rtlCol="0" anchor="ctr"/>
-          <a:lstStyle/>
-          <a:p>
-            <a:pPr algn="ctr"/>
-            <a:r>
-              <a:rPr lang="en-US" altLang="ja-JP" b="1" dirty="0">
-                <a:ln w="0"/>
-                <a:solidFill>
-                  <a:schemeClr val="tx1"/>
-                </a:solidFill>
-                <a:effectLst>
-                  <a:outerShdw blurRad="38100" dist="19050" dir="2700000" algn="tl" rotWithShape="0">
-                    <a:schemeClr val="dk1">
-                      <a:alpha val="40000"/>
-                    </a:schemeClr>
-                  </a:outerShdw>
-                </a:effectLst>
-              </a:rPr>
-              <a:t>A</a:t>
-            </a:r>
-          </a:p>
-        </p:txBody>
-      </p:sp>
-      <p:sp>
-        <p:nvSpPr>
-          <p:cNvPr id="9" name="楕円 8">
-            <a:extLst>
-              <a:ext uri="{FF2B5EF4-FFF2-40B4-BE49-F238E27FC236}">
-                <a16:creationId xmlns:a16="http://schemas.microsoft.com/office/drawing/2014/main" id="{F92A035C-C8E4-D883-D4DD-DB64157496E5}"/>
-              </a:ext>
-            </a:extLst>
-          </p:cNvPr>
-          <p:cNvSpPr/>
-          <p:nvPr/>
-        </p:nvSpPr>
-        <p:spPr>
-          <a:xfrm>
-            <a:off x="3332358" y="549468"/>
-            <a:ext cx="720000" cy="720000"/>
-          </a:xfrm>
-          <a:prstGeom prst="ellipse">
-            <a:avLst/>
-          </a:prstGeom>
-          <a:solidFill>
-            <a:schemeClr val="bg1"/>
-          </a:solidFill>
-          <a:ln w="38100"/>
-        </p:spPr>
-        <p:style>
-          <a:lnRef idx="2">
-            <a:schemeClr val="dk1">
-              <a:shade val="15000"/>
-            </a:schemeClr>
-          </a:lnRef>
-          <a:fillRef idx="1">
-            <a:schemeClr val="dk1"/>
-          </a:fillRef>
-          <a:effectRef idx="0">
-            <a:schemeClr val="dk1"/>
-          </a:effectRef>
-          <a:fontRef idx="minor">
-            <a:schemeClr val="lt1"/>
-          </a:fontRef>
-        </p:style>
-        <p:txBody>
-          <a:bodyPr rtlCol="0" anchor="ctr"/>
-          <a:lstStyle/>
-          <a:p>
-            <a:pPr algn="ctr"/>
-            <a:r>
-              <a:rPr lang="en-US" altLang="ja-JP" b="1" dirty="0">
-                <a:solidFill>
-                  <a:schemeClr val="tx1"/>
-                </a:solidFill>
-              </a:rPr>
-              <a:t>A</a:t>
-            </a:r>
-            <a:endParaRPr lang="ja-JP" altLang="en-US" b="1" dirty="0">
-              <a:solidFill>
-                <a:schemeClr val="tx1"/>
-              </a:solidFill>
-            </a:endParaRPr>
-          </a:p>
-        </p:txBody>
-      </p:sp>
-      <p:sp>
-        <p:nvSpPr>
-          <p:cNvPr id="16" name="テキスト ボックス 15">
-            <a:extLst>
-              <a:ext uri="{FF2B5EF4-FFF2-40B4-BE49-F238E27FC236}">
-                <a16:creationId xmlns:a16="http://schemas.microsoft.com/office/drawing/2014/main" id="{A49CDB26-2107-0496-702D-5D677295D2F1}"/>
-              </a:ext>
-            </a:extLst>
-          </p:cNvPr>
-          <p:cNvSpPr txBox="1"/>
-          <p:nvPr/>
-        </p:nvSpPr>
-        <p:spPr>
-          <a:xfrm>
-            <a:off x="945493" y="724802"/>
-            <a:ext cx="737702" cy="369332"/>
-          </a:xfrm>
-          <a:prstGeom prst="rect">
-            <a:avLst/>
-          </a:prstGeom>
-          <a:noFill/>
-        </p:spPr>
-        <p:txBody>
-          <a:bodyPr wrap="none" rtlCol="0">
-            <a:spAutoFit/>
-          </a:bodyPr>
-          <a:lstStyle/>
-          <a:p>
-            <a:r>
-              <a:rPr lang="en-US" altLang="ja-JP" b="1" dirty="0"/>
-              <a:t>main</a:t>
-            </a:r>
-            <a:endParaRPr kumimoji="1" lang="ja-JP" altLang="en-US" b="1" dirty="0"/>
-          </a:p>
-        </p:txBody>
-      </p:sp>
-      <p:cxnSp>
-        <p:nvCxnSpPr>
-          <p:cNvPr id="18" name="直線矢印コネクタ 17">
-            <a:extLst>
-              <a:ext uri="{FF2B5EF4-FFF2-40B4-BE49-F238E27FC236}">
-                <a16:creationId xmlns:a16="http://schemas.microsoft.com/office/drawing/2014/main" id="{78A9850C-50B0-6C69-A636-7D822AA2BBA0}"/>
-              </a:ext>
-            </a:extLst>
-          </p:cNvPr>
-          <p:cNvCxnSpPr>
-            <a:cxnSpLocks/>
-            <a:stCxn id="9" idx="4"/>
-            <a:endCxn id="8" idx="2"/>
-          </p:cNvCxnSpPr>
-          <p:nvPr/>
-        </p:nvCxnSpPr>
-        <p:spPr>
-          <a:xfrm>
-            <a:off x="3692358" y="1269468"/>
-            <a:ext cx="1769641" cy="1308100"/>
-          </a:xfrm>
-          <a:prstGeom prst="straightConnector1">
-            <a:avLst/>
-          </a:prstGeom>
-          <a:ln w="38100">
-            <a:tailEnd type="triangle"/>
-          </a:ln>
-        </p:spPr>
-        <p:style>
-          <a:lnRef idx="1">
-            <a:schemeClr val="dk1"/>
-          </a:lnRef>
-          <a:fillRef idx="0">
-            <a:schemeClr val="dk1"/>
-          </a:fillRef>
-          <a:effectRef idx="0">
-            <a:schemeClr val="dk1"/>
-          </a:effectRef>
-          <a:fontRef idx="minor">
-            <a:schemeClr val="tx1"/>
-          </a:fontRef>
-        </p:style>
-      </p:cxnSp>
-      <p:cxnSp>
-        <p:nvCxnSpPr>
-          <p:cNvPr id="19" name="直線矢印コネクタ 18">
-            <a:extLst>
-              <a:ext uri="{FF2B5EF4-FFF2-40B4-BE49-F238E27FC236}">
-                <a16:creationId xmlns:a16="http://schemas.microsoft.com/office/drawing/2014/main" id="{C465DCE8-33B4-801B-D5FD-87F1E284906B}"/>
-              </a:ext>
-            </a:extLst>
-          </p:cNvPr>
-          <p:cNvCxnSpPr>
-            <a:cxnSpLocks/>
-            <a:endCxn id="9" idx="2"/>
-          </p:cNvCxnSpPr>
-          <p:nvPr/>
-        </p:nvCxnSpPr>
-        <p:spPr>
-          <a:xfrm>
-            <a:off x="2202058" y="900136"/>
-            <a:ext cx="1130300" cy="9332"/>
-          </a:xfrm>
-          <a:prstGeom prst="straightConnector1">
-            <a:avLst/>
-          </a:prstGeom>
-          <a:ln w="38100">
-            <a:tailEnd type="triangle"/>
-          </a:ln>
-        </p:spPr>
-        <p:style>
-          <a:lnRef idx="1">
-            <a:schemeClr val="dk1"/>
-          </a:lnRef>
-          <a:fillRef idx="0">
-            <a:schemeClr val="dk1"/>
-          </a:fillRef>
-          <a:effectRef idx="0">
-            <a:schemeClr val="dk1"/>
-          </a:effectRef>
-          <a:fontRef idx="minor">
-            <a:schemeClr val="tx1"/>
-          </a:fontRef>
-        </p:style>
-      </p:cxnSp>
-      <p:sp>
-        <p:nvSpPr>
-          <p:cNvPr id="26" name="楕円 25">
-            <a:extLst>
-              <a:ext uri="{FF2B5EF4-FFF2-40B4-BE49-F238E27FC236}">
-                <a16:creationId xmlns:a16="http://schemas.microsoft.com/office/drawing/2014/main" id="{22B256F5-3EDA-18F7-75F4-39B6964A064A}"/>
-              </a:ext>
-            </a:extLst>
-          </p:cNvPr>
-          <p:cNvSpPr/>
-          <p:nvPr/>
-        </p:nvSpPr>
-        <p:spPr>
-          <a:xfrm>
-            <a:off x="7621999" y="2217568"/>
-            <a:ext cx="720000" cy="720000"/>
-          </a:xfrm>
-          <a:prstGeom prst="ellipse">
-            <a:avLst/>
-          </a:prstGeom>
-          <a:solidFill>
-            <a:schemeClr val="bg1"/>
-          </a:solidFill>
-          <a:ln w="38100"/>
-        </p:spPr>
-        <p:style>
-          <a:lnRef idx="2">
-            <a:schemeClr val="dk1">
-              <a:shade val="15000"/>
-            </a:schemeClr>
-          </a:lnRef>
-          <a:fillRef idx="1">
-            <a:schemeClr val="dk1"/>
-          </a:fillRef>
-          <a:effectRef idx="0">
-            <a:schemeClr val="dk1"/>
-          </a:effectRef>
-          <a:fontRef idx="minor">
-            <a:schemeClr val="lt1"/>
-          </a:fontRef>
-        </p:style>
-        <p:txBody>
-          <a:bodyPr rtlCol="0" anchor="ctr"/>
-          <a:lstStyle/>
-          <a:p>
-            <a:pPr algn="ctr"/>
-            <a:r>
-              <a:rPr lang="en-US" altLang="ja-JP" b="1" dirty="0">
-                <a:solidFill>
-                  <a:schemeClr val="tx1"/>
-                </a:solidFill>
-              </a:rPr>
-              <a:t>B</a:t>
-            </a:r>
-            <a:endParaRPr lang="ja-JP" altLang="en-US" b="1" dirty="0">
-              <a:solidFill>
-                <a:schemeClr val="tx1"/>
-              </a:solidFill>
-            </a:endParaRPr>
-          </a:p>
-        </p:txBody>
-      </p:sp>
-      <p:cxnSp>
-        <p:nvCxnSpPr>
-          <p:cNvPr id="27" name="直線矢印コネクタ 26">
-            <a:extLst>
-              <a:ext uri="{FF2B5EF4-FFF2-40B4-BE49-F238E27FC236}">
-                <a16:creationId xmlns:a16="http://schemas.microsoft.com/office/drawing/2014/main" id="{779BCEC9-AB36-2533-5ED2-E5475B8CE9FD}"/>
-              </a:ext>
-            </a:extLst>
-          </p:cNvPr>
-          <p:cNvCxnSpPr>
-            <a:cxnSpLocks/>
-          </p:cNvCxnSpPr>
-          <p:nvPr/>
-        </p:nvCxnSpPr>
-        <p:spPr>
-          <a:xfrm flipV="1">
-            <a:off x="6181999" y="2577568"/>
-            <a:ext cx="1440000" cy="0"/>
-          </a:xfrm>
-          <a:prstGeom prst="straightConnector1">
-            <a:avLst/>
-          </a:prstGeom>
-          <a:ln w="38100">
-            <a:tailEnd type="triangle"/>
-          </a:ln>
-        </p:spPr>
-        <p:style>
-          <a:lnRef idx="1">
-            <a:schemeClr val="dk1"/>
-          </a:lnRef>
-          <a:fillRef idx="0">
-            <a:schemeClr val="dk1"/>
-          </a:fillRef>
-          <a:effectRef idx="0">
-            <a:schemeClr val="dk1"/>
-          </a:effectRef>
-          <a:fontRef idx="minor">
-            <a:schemeClr val="tx1"/>
-          </a:fontRef>
-        </p:style>
-      </p:cxnSp>
-      <p:sp>
-        <p:nvSpPr>
-          <p:cNvPr id="39" name="テキスト ボックス 38">
-            <a:extLst>
-              <a:ext uri="{FF2B5EF4-FFF2-40B4-BE49-F238E27FC236}">
-                <a16:creationId xmlns:a16="http://schemas.microsoft.com/office/drawing/2014/main" id="{AA70A16A-B7C2-37A9-EB5C-5F1B9B409BBF}"/>
-              </a:ext>
-            </a:extLst>
-          </p:cNvPr>
-          <p:cNvSpPr txBox="1"/>
-          <p:nvPr/>
-        </p:nvSpPr>
-        <p:spPr>
-          <a:xfrm>
-            <a:off x="774773" y="2392902"/>
-            <a:ext cx="1160895" cy="369332"/>
-          </a:xfrm>
-          <a:prstGeom prst="rect">
-            <a:avLst/>
-          </a:prstGeom>
-          <a:noFill/>
-        </p:spPr>
-        <p:txBody>
-          <a:bodyPr wrap="none" rtlCol="0">
-            <a:spAutoFit/>
-          </a:bodyPr>
-          <a:lstStyle/>
-          <a:p>
-            <a:r>
-              <a:rPr lang="en-US" altLang="ja-JP" b="1" dirty="0"/>
-              <a:t>branch1 </a:t>
-            </a:r>
-            <a:endParaRPr kumimoji="1" lang="ja-JP" altLang="en-US" b="1" dirty="0"/>
-          </a:p>
-        </p:txBody>
-      </p:sp>
-      <p:cxnSp>
-        <p:nvCxnSpPr>
-          <p:cNvPr id="44" name="直線コネクタ 43">
-            <a:extLst>
-              <a:ext uri="{FF2B5EF4-FFF2-40B4-BE49-F238E27FC236}">
-                <a16:creationId xmlns:a16="http://schemas.microsoft.com/office/drawing/2014/main" id="{A46D8CDB-03F4-C0BF-5090-F243C9C37728}"/>
-              </a:ext>
-            </a:extLst>
-          </p:cNvPr>
-          <p:cNvCxnSpPr>
-            <a:cxnSpLocks/>
-          </p:cNvCxnSpPr>
-          <p:nvPr/>
-        </p:nvCxnSpPr>
-        <p:spPr>
-          <a:xfrm>
-            <a:off x="1816100" y="4228568"/>
-            <a:ext cx="9000000" cy="0"/>
-          </a:xfrm>
-          <a:prstGeom prst="line">
-            <a:avLst/>
-          </a:prstGeom>
-          <a:ln>
-            <a:prstDash val="dash"/>
-          </a:ln>
-        </p:spPr>
-        <p:style>
-          <a:lnRef idx="1">
-            <a:schemeClr val="accent1"/>
-          </a:lnRef>
-          <a:fillRef idx="0">
-            <a:schemeClr val="accent1"/>
-          </a:fillRef>
-          <a:effectRef idx="0">
-            <a:schemeClr val="accent1"/>
-          </a:effectRef>
-          <a:fontRef idx="minor">
-            <a:schemeClr val="tx1"/>
-          </a:fontRef>
-        </p:style>
-      </p:cxnSp>
-      <p:sp>
-        <p:nvSpPr>
-          <p:cNvPr id="45" name="楕円 44">
-            <a:extLst>
-              <a:ext uri="{FF2B5EF4-FFF2-40B4-BE49-F238E27FC236}">
-                <a16:creationId xmlns:a16="http://schemas.microsoft.com/office/drawing/2014/main" id="{1B50FDEA-C177-5A6F-7D83-6C0E3D99D1CD}"/>
-              </a:ext>
-            </a:extLst>
-          </p:cNvPr>
-          <p:cNvSpPr/>
-          <p:nvPr/>
-        </p:nvSpPr>
-        <p:spPr>
-          <a:xfrm>
-            <a:off x="5411199" y="3868568"/>
-            <a:ext cx="720000" cy="720000"/>
-          </a:xfrm>
-          <a:prstGeom prst="ellipse">
-            <a:avLst/>
-          </a:prstGeom>
-          <a:solidFill>
-            <a:schemeClr val="bg1"/>
-          </a:solidFill>
-          <a:ln w="38100"/>
-        </p:spPr>
-        <p:style>
-          <a:lnRef idx="2">
-            <a:schemeClr val="dk1">
-              <a:shade val="15000"/>
-            </a:schemeClr>
-          </a:lnRef>
-          <a:fillRef idx="1">
-            <a:schemeClr val="dk1"/>
-          </a:fillRef>
-          <a:effectRef idx="0">
-            <a:schemeClr val="dk1"/>
-          </a:effectRef>
-          <a:fontRef idx="minor">
-            <a:schemeClr val="lt1"/>
-          </a:fontRef>
-        </p:style>
-        <p:txBody>
-          <a:bodyPr rtlCol="0" anchor="ctr"/>
-          <a:lstStyle/>
-          <a:p>
-            <a:pPr algn="ctr"/>
-            <a:r>
-              <a:rPr lang="en-US" altLang="ja-JP" b="1" dirty="0">
-                <a:ln w="0"/>
-                <a:solidFill>
-                  <a:schemeClr val="tx1"/>
-                </a:solidFill>
-                <a:effectLst>
-                  <a:outerShdw blurRad="38100" dist="19050" dir="2700000" algn="tl" rotWithShape="0">
-                    <a:schemeClr val="dk1">
-                      <a:alpha val="40000"/>
-                    </a:schemeClr>
-                  </a:outerShdw>
-                </a:effectLst>
-              </a:rPr>
-              <a:t>A</a:t>
-            </a:r>
-          </a:p>
-        </p:txBody>
-      </p:sp>
-      <p:sp>
-        <p:nvSpPr>
-          <p:cNvPr id="48" name="テキスト ボックス 47">
-            <a:extLst>
-              <a:ext uri="{FF2B5EF4-FFF2-40B4-BE49-F238E27FC236}">
-                <a16:creationId xmlns:a16="http://schemas.microsoft.com/office/drawing/2014/main" id="{FFAFBDCD-340A-A1B8-A5DF-E62B0D794F9B}"/>
-              </a:ext>
-            </a:extLst>
-          </p:cNvPr>
-          <p:cNvSpPr txBox="1"/>
-          <p:nvPr/>
-        </p:nvSpPr>
-        <p:spPr>
-          <a:xfrm>
-            <a:off x="774773" y="4043902"/>
-            <a:ext cx="1120820" cy="369332"/>
-          </a:xfrm>
-          <a:prstGeom prst="rect">
-            <a:avLst/>
-          </a:prstGeom>
-          <a:noFill/>
-        </p:spPr>
-        <p:txBody>
-          <a:bodyPr wrap="none" rtlCol="0">
-            <a:spAutoFit/>
-          </a:bodyPr>
-          <a:lstStyle/>
-          <a:p>
-            <a:r>
-              <a:rPr lang="en-US" altLang="ja-JP" b="1" dirty="0" err="1"/>
-              <a:t>branchX</a:t>
-            </a:r>
-            <a:endParaRPr lang="ja-JP" altLang="en-US" b="1" dirty="0"/>
-          </a:p>
-        </p:txBody>
-      </p:sp>
-      <p:cxnSp>
-        <p:nvCxnSpPr>
-          <p:cNvPr id="49" name="直線矢印コネクタ 48">
-            <a:extLst>
-              <a:ext uri="{FF2B5EF4-FFF2-40B4-BE49-F238E27FC236}">
-                <a16:creationId xmlns:a16="http://schemas.microsoft.com/office/drawing/2014/main" id="{B94C4627-E923-B051-DD99-6A31F8097971}"/>
-              </a:ext>
-            </a:extLst>
-          </p:cNvPr>
-          <p:cNvCxnSpPr>
-            <a:cxnSpLocks/>
-            <a:stCxn id="9" idx="4"/>
-            <a:endCxn id="45" idx="2"/>
-          </p:cNvCxnSpPr>
-          <p:nvPr/>
-        </p:nvCxnSpPr>
-        <p:spPr>
-          <a:xfrm>
-            <a:off x="3692358" y="1269468"/>
-            <a:ext cx="1718841" cy="2959100"/>
-          </a:xfrm>
-          <a:prstGeom prst="straightConnector1">
-            <a:avLst/>
-          </a:prstGeom>
-          <a:ln w="38100">
-            <a:tailEnd type="triangle"/>
-          </a:ln>
-        </p:spPr>
-        <p:style>
-          <a:lnRef idx="1">
-            <a:schemeClr val="dk1"/>
-          </a:lnRef>
-          <a:fillRef idx="0">
-            <a:schemeClr val="dk1"/>
-          </a:fillRef>
-          <a:effectRef idx="0">
-            <a:schemeClr val="dk1"/>
-          </a:effectRef>
-          <a:fontRef idx="minor">
-            <a:schemeClr val="tx1"/>
-          </a:fontRef>
-        </p:style>
-      </p:cxnSp>
-    </p:spTree>
-    <p:extLst>
-      <p:ext uri="{BB962C8B-B14F-4D97-AF65-F5344CB8AC3E}">
-        <p14:creationId xmlns:p14="http://schemas.microsoft.com/office/powerpoint/2010/main" val="3142681971"/>
       </p:ext>
     </p:extLst>
   </p:cSld>
@@ -37782,6 +38954,696 @@
         <p:cNvPr id="1" name="">
           <a:extLst>
             <a:ext uri="{FF2B5EF4-FFF2-40B4-BE49-F238E27FC236}">
+              <a16:creationId xmlns:a16="http://schemas.microsoft.com/office/drawing/2014/main" id="{D3D296E8-EA97-7349-AE84-605B0AC723F5}"/>
+            </a:ext>
+          </a:extLst>
+        </p:cNvPr>
+        <p:cNvGrpSpPr/>
+        <p:nvPr/>
+      </p:nvGrpSpPr>
+      <p:grpSpPr>
+        <a:xfrm>
+          <a:off x="0" y="0"/>
+          <a:ext cx="0" cy="0"/>
+          <a:chOff x="0" y="0"/>
+          <a:chExt cx="0" cy="0"/>
+        </a:xfrm>
+      </p:grpSpPr>
+      <p:cxnSp>
+        <p:nvCxnSpPr>
+          <p:cNvPr id="41" name="直線コネクタ 40">
+            <a:extLst>
+              <a:ext uri="{FF2B5EF4-FFF2-40B4-BE49-F238E27FC236}">
+                <a16:creationId xmlns:a16="http://schemas.microsoft.com/office/drawing/2014/main" id="{6499AE2B-6DA7-F6F2-B41E-D1074AD609B0}"/>
+              </a:ext>
+            </a:extLst>
+          </p:cNvPr>
+          <p:cNvCxnSpPr>
+            <a:cxnSpLocks/>
+          </p:cNvCxnSpPr>
+          <p:nvPr/>
+        </p:nvCxnSpPr>
+        <p:spPr>
+          <a:xfrm>
+            <a:off x="1816100" y="2569018"/>
+            <a:ext cx="9000000" cy="0"/>
+          </a:xfrm>
+          <a:prstGeom prst="line">
+            <a:avLst/>
+          </a:prstGeom>
+          <a:ln>
+            <a:prstDash val="dash"/>
+          </a:ln>
+        </p:spPr>
+        <p:style>
+          <a:lnRef idx="1">
+            <a:schemeClr val="accent1"/>
+          </a:lnRef>
+          <a:fillRef idx="0">
+            <a:schemeClr val="accent1"/>
+          </a:fillRef>
+          <a:effectRef idx="0">
+            <a:schemeClr val="accent1"/>
+          </a:effectRef>
+          <a:fontRef idx="minor">
+            <a:schemeClr val="tx1"/>
+          </a:fontRef>
+        </p:style>
+      </p:cxnSp>
+      <p:cxnSp>
+        <p:nvCxnSpPr>
+          <p:cNvPr id="38" name="直線コネクタ 37">
+            <a:extLst>
+              <a:ext uri="{FF2B5EF4-FFF2-40B4-BE49-F238E27FC236}">
+                <a16:creationId xmlns:a16="http://schemas.microsoft.com/office/drawing/2014/main" id="{9558E5C8-5B1C-AE27-C2E4-D72E03976114}"/>
+              </a:ext>
+            </a:extLst>
+          </p:cNvPr>
+          <p:cNvCxnSpPr>
+            <a:cxnSpLocks/>
+          </p:cNvCxnSpPr>
+          <p:nvPr/>
+        </p:nvCxnSpPr>
+        <p:spPr>
+          <a:xfrm>
+            <a:off x="1816100" y="909468"/>
+            <a:ext cx="9000000" cy="0"/>
+          </a:xfrm>
+          <a:prstGeom prst="line">
+            <a:avLst/>
+          </a:prstGeom>
+          <a:ln>
+            <a:prstDash val="dash"/>
+          </a:ln>
+        </p:spPr>
+        <p:style>
+          <a:lnRef idx="1">
+            <a:schemeClr val="accent1"/>
+          </a:lnRef>
+          <a:fillRef idx="0">
+            <a:schemeClr val="accent1"/>
+          </a:fillRef>
+          <a:effectRef idx="0">
+            <a:schemeClr val="accent1"/>
+          </a:effectRef>
+          <a:fontRef idx="minor">
+            <a:schemeClr val="tx1"/>
+          </a:fontRef>
+        </p:style>
+      </p:cxnSp>
+      <p:sp>
+        <p:nvSpPr>
+          <p:cNvPr id="8" name="楕円 7">
+            <a:extLst>
+              <a:ext uri="{FF2B5EF4-FFF2-40B4-BE49-F238E27FC236}">
+                <a16:creationId xmlns:a16="http://schemas.microsoft.com/office/drawing/2014/main" id="{5A5F5CBA-F95F-512E-EF73-22030E192D9C}"/>
+              </a:ext>
+            </a:extLst>
+          </p:cNvPr>
+          <p:cNvSpPr/>
+          <p:nvPr/>
+        </p:nvSpPr>
+        <p:spPr>
+          <a:xfrm>
+            <a:off x="5461999" y="2217568"/>
+            <a:ext cx="720000" cy="720000"/>
+          </a:xfrm>
+          <a:prstGeom prst="ellipse">
+            <a:avLst/>
+          </a:prstGeom>
+          <a:solidFill>
+            <a:schemeClr val="bg1"/>
+          </a:solidFill>
+          <a:ln w="38100"/>
+        </p:spPr>
+        <p:style>
+          <a:lnRef idx="2">
+            <a:schemeClr val="dk1">
+              <a:shade val="15000"/>
+            </a:schemeClr>
+          </a:lnRef>
+          <a:fillRef idx="1">
+            <a:schemeClr val="dk1"/>
+          </a:fillRef>
+          <a:effectRef idx="0">
+            <a:schemeClr val="dk1"/>
+          </a:effectRef>
+          <a:fontRef idx="minor">
+            <a:schemeClr val="lt1"/>
+          </a:fontRef>
+        </p:style>
+        <p:txBody>
+          <a:bodyPr rtlCol="0" anchor="ctr"/>
+          <a:lstStyle/>
+          <a:p>
+            <a:pPr algn="ctr"/>
+            <a:r>
+              <a:rPr lang="en-US" altLang="ja-JP" b="1" dirty="0">
+                <a:ln w="0"/>
+                <a:solidFill>
+                  <a:schemeClr val="tx1"/>
+                </a:solidFill>
+                <a:effectLst>
+                  <a:outerShdw blurRad="38100" dist="19050" dir="2700000" algn="tl" rotWithShape="0">
+                    <a:schemeClr val="dk1">
+                      <a:alpha val="40000"/>
+                    </a:schemeClr>
+                  </a:outerShdw>
+                </a:effectLst>
+              </a:rPr>
+              <a:t>A</a:t>
+            </a:r>
+          </a:p>
+        </p:txBody>
+      </p:sp>
+      <p:sp>
+        <p:nvSpPr>
+          <p:cNvPr id="9" name="楕円 8">
+            <a:extLst>
+              <a:ext uri="{FF2B5EF4-FFF2-40B4-BE49-F238E27FC236}">
+                <a16:creationId xmlns:a16="http://schemas.microsoft.com/office/drawing/2014/main" id="{F92A035C-C8E4-D883-D4DD-DB64157496E5}"/>
+              </a:ext>
+            </a:extLst>
+          </p:cNvPr>
+          <p:cNvSpPr/>
+          <p:nvPr/>
+        </p:nvSpPr>
+        <p:spPr>
+          <a:xfrm>
+            <a:off x="3332358" y="549468"/>
+            <a:ext cx="720000" cy="720000"/>
+          </a:xfrm>
+          <a:prstGeom prst="ellipse">
+            <a:avLst/>
+          </a:prstGeom>
+          <a:solidFill>
+            <a:schemeClr val="bg1"/>
+          </a:solidFill>
+          <a:ln w="38100"/>
+        </p:spPr>
+        <p:style>
+          <a:lnRef idx="2">
+            <a:schemeClr val="dk1">
+              <a:shade val="15000"/>
+            </a:schemeClr>
+          </a:lnRef>
+          <a:fillRef idx="1">
+            <a:schemeClr val="dk1"/>
+          </a:fillRef>
+          <a:effectRef idx="0">
+            <a:schemeClr val="dk1"/>
+          </a:effectRef>
+          <a:fontRef idx="minor">
+            <a:schemeClr val="lt1"/>
+          </a:fontRef>
+        </p:style>
+        <p:txBody>
+          <a:bodyPr rtlCol="0" anchor="ctr"/>
+          <a:lstStyle/>
+          <a:p>
+            <a:pPr algn="ctr"/>
+            <a:r>
+              <a:rPr lang="en-US" altLang="ja-JP" b="1" dirty="0">
+                <a:solidFill>
+                  <a:schemeClr val="tx1"/>
+                </a:solidFill>
+              </a:rPr>
+              <a:t>A</a:t>
+            </a:r>
+            <a:endParaRPr lang="ja-JP" altLang="en-US" b="1" dirty="0">
+              <a:solidFill>
+                <a:schemeClr val="tx1"/>
+              </a:solidFill>
+            </a:endParaRPr>
+          </a:p>
+        </p:txBody>
+      </p:sp>
+      <p:sp>
+        <p:nvSpPr>
+          <p:cNvPr id="16" name="テキスト ボックス 15">
+            <a:extLst>
+              <a:ext uri="{FF2B5EF4-FFF2-40B4-BE49-F238E27FC236}">
+                <a16:creationId xmlns:a16="http://schemas.microsoft.com/office/drawing/2014/main" id="{A49CDB26-2107-0496-702D-5D677295D2F1}"/>
+              </a:ext>
+            </a:extLst>
+          </p:cNvPr>
+          <p:cNvSpPr txBox="1"/>
+          <p:nvPr/>
+        </p:nvSpPr>
+        <p:spPr>
+          <a:xfrm>
+            <a:off x="945493" y="724802"/>
+            <a:ext cx="737702" cy="369332"/>
+          </a:xfrm>
+          <a:prstGeom prst="rect">
+            <a:avLst/>
+          </a:prstGeom>
+          <a:noFill/>
+        </p:spPr>
+        <p:txBody>
+          <a:bodyPr wrap="none" rtlCol="0">
+            <a:spAutoFit/>
+          </a:bodyPr>
+          <a:lstStyle/>
+          <a:p>
+            <a:r>
+              <a:rPr lang="en-US" altLang="ja-JP" b="1" dirty="0"/>
+              <a:t>main</a:t>
+            </a:r>
+            <a:endParaRPr kumimoji="1" lang="ja-JP" altLang="en-US" b="1" dirty="0"/>
+          </a:p>
+        </p:txBody>
+      </p:sp>
+      <p:cxnSp>
+        <p:nvCxnSpPr>
+          <p:cNvPr id="18" name="直線矢印コネクタ 17">
+            <a:extLst>
+              <a:ext uri="{FF2B5EF4-FFF2-40B4-BE49-F238E27FC236}">
+                <a16:creationId xmlns:a16="http://schemas.microsoft.com/office/drawing/2014/main" id="{78A9850C-50B0-6C69-A636-7D822AA2BBA0}"/>
+              </a:ext>
+            </a:extLst>
+          </p:cNvPr>
+          <p:cNvCxnSpPr>
+            <a:cxnSpLocks/>
+            <a:stCxn id="9" idx="4"/>
+            <a:endCxn id="8" idx="2"/>
+          </p:cNvCxnSpPr>
+          <p:nvPr/>
+        </p:nvCxnSpPr>
+        <p:spPr>
+          <a:xfrm>
+            <a:off x="3692358" y="1269468"/>
+            <a:ext cx="1769641" cy="1308100"/>
+          </a:xfrm>
+          <a:prstGeom prst="straightConnector1">
+            <a:avLst/>
+          </a:prstGeom>
+          <a:ln w="38100">
+            <a:tailEnd type="triangle"/>
+          </a:ln>
+        </p:spPr>
+        <p:style>
+          <a:lnRef idx="1">
+            <a:schemeClr val="dk1"/>
+          </a:lnRef>
+          <a:fillRef idx="0">
+            <a:schemeClr val="dk1"/>
+          </a:fillRef>
+          <a:effectRef idx="0">
+            <a:schemeClr val="dk1"/>
+          </a:effectRef>
+          <a:fontRef idx="minor">
+            <a:schemeClr val="tx1"/>
+          </a:fontRef>
+        </p:style>
+      </p:cxnSp>
+      <p:cxnSp>
+        <p:nvCxnSpPr>
+          <p:cNvPr id="19" name="直線矢印コネクタ 18">
+            <a:extLst>
+              <a:ext uri="{FF2B5EF4-FFF2-40B4-BE49-F238E27FC236}">
+                <a16:creationId xmlns:a16="http://schemas.microsoft.com/office/drawing/2014/main" id="{C465DCE8-33B4-801B-D5FD-87F1E284906B}"/>
+              </a:ext>
+            </a:extLst>
+          </p:cNvPr>
+          <p:cNvCxnSpPr>
+            <a:cxnSpLocks/>
+            <a:endCxn id="9" idx="2"/>
+          </p:cNvCxnSpPr>
+          <p:nvPr/>
+        </p:nvCxnSpPr>
+        <p:spPr>
+          <a:xfrm>
+            <a:off x="2202058" y="900136"/>
+            <a:ext cx="1130300" cy="9332"/>
+          </a:xfrm>
+          <a:prstGeom prst="straightConnector1">
+            <a:avLst/>
+          </a:prstGeom>
+          <a:ln w="38100">
+            <a:tailEnd type="triangle"/>
+          </a:ln>
+        </p:spPr>
+        <p:style>
+          <a:lnRef idx="1">
+            <a:schemeClr val="dk1"/>
+          </a:lnRef>
+          <a:fillRef idx="0">
+            <a:schemeClr val="dk1"/>
+          </a:fillRef>
+          <a:effectRef idx="0">
+            <a:schemeClr val="dk1"/>
+          </a:effectRef>
+          <a:fontRef idx="minor">
+            <a:schemeClr val="tx1"/>
+          </a:fontRef>
+        </p:style>
+      </p:cxnSp>
+      <p:sp>
+        <p:nvSpPr>
+          <p:cNvPr id="26" name="楕円 25">
+            <a:extLst>
+              <a:ext uri="{FF2B5EF4-FFF2-40B4-BE49-F238E27FC236}">
+                <a16:creationId xmlns:a16="http://schemas.microsoft.com/office/drawing/2014/main" id="{22B256F5-3EDA-18F7-75F4-39B6964A064A}"/>
+              </a:ext>
+            </a:extLst>
+          </p:cNvPr>
+          <p:cNvSpPr/>
+          <p:nvPr/>
+        </p:nvSpPr>
+        <p:spPr>
+          <a:xfrm>
+            <a:off x="7621999" y="2217568"/>
+            <a:ext cx="720000" cy="720000"/>
+          </a:xfrm>
+          <a:prstGeom prst="ellipse">
+            <a:avLst/>
+          </a:prstGeom>
+          <a:solidFill>
+            <a:schemeClr val="bg1"/>
+          </a:solidFill>
+          <a:ln w="38100"/>
+        </p:spPr>
+        <p:style>
+          <a:lnRef idx="2">
+            <a:schemeClr val="dk1">
+              <a:shade val="15000"/>
+            </a:schemeClr>
+          </a:lnRef>
+          <a:fillRef idx="1">
+            <a:schemeClr val="dk1"/>
+          </a:fillRef>
+          <a:effectRef idx="0">
+            <a:schemeClr val="dk1"/>
+          </a:effectRef>
+          <a:fontRef idx="minor">
+            <a:schemeClr val="lt1"/>
+          </a:fontRef>
+        </p:style>
+        <p:txBody>
+          <a:bodyPr rtlCol="0" anchor="ctr"/>
+          <a:lstStyle/>
+          <a:p>
+            <a:pPr algn="ctr"/>
+            <a:r>
+              <a:rPr lang="en-US" altLang="ja-JP" b="1" dirty="0">
+                <a:solidFill>
+                  <a:schemeClr val="tx1"/>
+                </a:solidFill>
+              </a:rPr>
+              <a:t>B</a:t>
+            </a:r>
+            <a:endParaRPr lang="ja-JP" altLang="en-US" b="1" dirty="0">
+              <a:solidFill>
+                <a:schemeClr val="tx1"/>
+              </a:solidFill>
+            </a:endParaRPr>
+          </a:p>
+        </p:txBody>
+      </p:sp>
+      <p:cxnSp>
+        <p:nvCxnSpPr>
+          <p:cNvPr id="27" name="直線矢印コネクタ 26">
+            <a:extLst>
+              <a:ext uri="{FF2B5EF4-FFF2-40B4-BE49-F238E27FC236}">
+                <a16:creationId xmlns:a16="http://schemas.microsoft.com/office/drawing/2014/main" id="{779BCEC9-AB36-2533-5ED2-E5475B8CE9FD}"/>
+              </a:ext>
+            </a:extLst>
+          </p:cNvPr>
+          <p:cNvCxnSpPr>
+            <a:cxnSpLocks/>
+          </p:cNvCxnSpPr>
+          <p:nvPr/>
+        </p:nvCxnSpPr>
+        <p:spPr>
+          <a:xfrm flipV="1">
+            <a:off x="6181999" y="2577568"/>
+            <a:ext cx="1440000" cy="0"/>
+          </a:xfrm>
+          <a:prstGeom prst="straightConnector1">
+            <a:avLst/>
+          </a:prstGeom>
+          <a:ln w="38100">
+            <a:tailEnd type="triangle"/>
+          </a:ln>
+        </p:spPr>
+        <p:style>
+          <a:lnRef idx="1">
+            <a:schemeClr val="dk1"/>
+          </a:lnRef>
+          <a:fillRef idx="0">
+            <a:schemeClr val="dk1"/>
+          </a:fillRef>
+          <a:effectRef idx="0">
+            <a:schemeClr val="dk1"/>
+          </a:effectRef>
+          <a:fontRef idx="minor">
+            <a:schemeClr val="tx1"/>
+          </a:fontRef>
+        </p:style>
+      </p:cxnSp>
+      <p:sp>
+        <p:nvSpPr>
+          <p:cNvPr id="39" name="テキスト ボックス 38">
+            <a:extLst>
+              <a:ext uri="{FF2B5EF4-FFF2-40B4-BE49-F238E27FC236}">
+                <a16:creationId xmlns:a16="http://schemas.microsoft.com/office/drawing/2014/main" id="{AA70A16A-B7C2-37A9-EB5C-5F1B9B409BBF}"/>
+              </a:ext>
+            </a:extLst>
+          </p:cNvPr>
+          <p:cNvSpPr txBox="1"/>
+          <p:nvPr/>
+        </p:nvSpPr>
+        <p:spPr>
+          <a:xfrm>
+            <a:off x="774773" y="2392902"/>
+            <a:ext cx="1160895" cy="369332"/>
+          </a:xfrm>
+          <a:prstGeom prst="rect">
+            <a:avLst/>
+          </a:prstGeom>
+          <a:noFill/>
+        </p:spPr>
+        <p:txBody>
+          <a:bodyPr wrap="none" rtlCol="0">
+            <a:spAutoFit/>
+          </a:bodyPr>
+          <a:lstStyle/>
+          <a:p>
+            <a:r>
+              <a:rPr lang="en-US" altLang="ja-JP" b="1" dirty="0"/>
+              <a:t>branch1 </a:t>
+            </a:r>
+            <a:endParaRPr kumimoji="1" lang="ja-JP" altLang="en-US" b="1" dirty="0"/>
+          </a:p>
+        </p:txBody>
+      </p:sp>
+      <p:cxnSp>
+        <p:nvCxnSpPr>
+          <p:cNvPr id="44" name="直線コネクタ 43">
+            <a:extLst>
+              <a:ext uri="{FF2B5EF4-FFF2-40B4-BE49-F238E27FC236}">
+                <a16:creationId xmlns:a16="http://schemas.microsoft.com/office/drawing/2014/main" id="{A46D8CDB-03F4-C0BF-5090-F243C9C37728}"/>
+              </a:ext>
+            </a:extLst>
+          </p:cNvPr>
+          <p:cNvCxnSpPr>
+            <a:cxnSpLocks/>
+          </p:cNvCxnSpPr>
+          <p:nvPr/>
+        </p:nvCxnSpPr>
+        <p:spPr>
+          <a:xfrm>
+            <a:off x="1816100" y="4228568"/>
+            <a:ext cx="9000000" cy="0"/>
+          </a:xfrm>
+          <a:prstGeom prst="line">
+            <a:avLst/>
+          </a:prstGeom>
+          <a:ln>
+            <a:prstDash val="dash"/>
+          </a:ln>
+        </p:spPr>
+        <p:style>
+          <a:lnRef idx="1">
+            <a:schemeClr val="accent1"/>
+          </a:lnRef>
+          <a:fillRef idx="0">
+            <a:schemeClr val="accent1"/>
+          </a:fillRef>
+          <a:effectRef idx="0">
+            <a:schemeClr val="accent1"/>
+          </a:effectRef>
+          <a:fontRef idx="minor">
+            <a:schemeClr val="tx1"/>
+          </a:fontRef>
+        </p:style>
+      </p:cxnSp>
+      <p:sp>
+        <p:nvSpPr>
+          <p:cNvPr id="45" name="楕円 44">
+            <a:extLst>
+              <a:ext uri="{FF2B5EF4-FFF2-40B4-BE49-F238E27FC236}">
+                <a16:creationId xmlns:a16="http://schemas.microsoft.com/office/drawing/2014/main" id="{1B50FDEA-C177-5A6F-7D83-6C0E3D99D1CD}"/>
+              </a:ext>
+            </a:extLst>
+          </p:cNvPr>
+          <p:cNvSpPr/>
+          <p:nvPr/>
+        </p:nvSpPr>
+        <p:spPr>
+          <a:xfrm>
+            <a:off x="5411199" y="3868568"/>
+            <a:ext cx="720000" cy="720000"/>
+          </a:xfrm>
+          <a:prstGeom prst="ellipse">
+            <a:avLst/>
+          </a:prstGeom>
+          <a:solidFill>
+            <a:schemeClr val="bg1"/>
+          </a:solidFill>
+          <a:ln w="38100"/>
+        </p:spPr>
+        <p:style>
+          <a:lnRef idx="2">
+            <a:schemeClr val="dk1">
+              <a:shade val="15000"/>
+            </a:schemeClr>
+          </a:lnRef>
+          <a:fillRef idx="1">
+            <a:schemeClr val="dk1"/>
+          </a:fillRef>
+          <a:effectRef idx="0">
+            <a:schemeClr val="dk1"/>
+          </a:effectRef>
+          <a:fontRef idx="minor">
+            <a:schemeClr val="lt1"/>
+          </a:fontRef>
+        </p:style>
+        <p:txBody>
+          <a:bodyPr rtlCol="0" anchor="ctr"/>
+          <a:lstStyle/>
+          <a:p>
+            <a:pPr algn="ctr"/>
+            <a:r>
+              <a:rPr lang="en-US" altLang="ja-JP" b="1" dirty="0">
+                <a:ln w="0"/>
+                <a:solidFill>
+                  <a:schemeClr val="tx1"/>
+                </a:solidFill>
+                <a:effectLst>
+                  <a:outerShdw blurRad="38100" dist="19050" dir="2700000" algn="tl" rotWithShape="0">
+                    <a:schemeClr val="dk1">
+                      <a:alpha val="40000"/>
+                    </a:schemeClr>
+                  </a:outerShdw>
+                </a:effectLst>
+              </a:rPr>
+              <a:t>A</a:t>
+            </a:r>
+          </a:p>
+        </p:txBody>
+      </p:sp>
+      <p:sp>
+        <p:nvSpPr>
+          <p:cNvPr id="48" name="テキスト ボックス 47">
+            <a:extLst>
+              <a:ext uri="{FF2B5EF4-FFF2-40B4-BE49-F238E27FC236}">
+                <a16:creationId xmlns:a16="http://schemas.microsoft.com/office/drawing/2014/main" id="{FFAFBDCD-340A-A1B8-A5DF-E62B0D794F9B}"/>
+              </a:ext>
+            </a:extLst>
+          </p:cNvPr>
+          <p:cNvSpPr txBox="1"/>
+          <p:nvPr/>
+        </p:nvSpPr>
+        <p:spPr>
+          <a:xfrm>
+            <a:off x="774773" y="4043902"/>
+            <a:ext cx="1120820" cy="369332"/>
+          </a:xfrm>
+          <a:prstGeom prst="rect">
+            <a:avLst/>
+          </a:prstGeom>
+          <a:noFill/>
+        </p:spPr>
+        <p:txBody>
+          <a:bodyPr wrap="none" rtlCol="0">
+            <a:spAutoFit/>
+          </a:bodyPr>
+          <a:lstStyle/>
+          <a:p>
+            <a:r>
+              <a:rPr lang="en-US" altLang="ja-JP" b="1" dirty="0" err="1"/>
+              <a:t>branchX</a:t>
+            </a:r>
+            <a:endParaRPr lang="ja-JP" altLang="en-US" b="1" dirty="0"/>
+          </a:p>
+        </p:txBody>
+      </p:sp>
+      <p:cxnSp>
+        <p:nvCxnSpPr>
+          <p:cNvPr id="49" name="直線矢印コネクタ 48">
+            <a:extLst>
+              <a:ext uri="{FF2B5EF4-FFF2-40B4-BE49-F238E27FC236}">
+                <a16:creationId xmlns:a16="http://schemas.microsoft.com/office/drawing/2014/main" id="{B94C4627-E923-B051-DD99-6A31F8097971}"/>
+              </a:ext>
+            </a:extLst>
+          </p:cNvPr>
+          <p:cNvCxnSpPr>
+            <a:cxnSpLocks/>
+            <a:stCxn id="9" idx="4"/>
+            <a:endCxn id="45" idx="2"/>
+          </p:cNvCxnSpPr>
+          <p:nvPr/>
+        </p:nvCxnSpPr>
+        <p:spPr>
+          <a:xfrm>
+            <a:off x="3692358" y="1269468"/>
+            <a:ext cx="1718841" cy="2959100"/>
+          </a:xfrm>
+          <a:prstGeom prst="straightConnector1">
+            <a:avLst/>
+          </a:prstGeom>
+          <a:ln w="38100">
+            <a:tailEnd type="triangle"/>
+          </a:ln>
+        </p:spPr>
+        <p:style>
+          <a:lnRef idx="1">
+            <a:schemeClr val="dk1"/>
+          </a:lnRef>
+          <a:fillRef idx="0">
+            <a:schemeClr val="dk1"/>
+          </a:fillRef>
+          <a:effectRef idx="0">
+            <a:schemeClr val="dk1"/>
+          </a:effectRef>
+          <a:fontRef idx="minor">
+            <a:schemeClr val="tx1"/>
+          </a:fontRef>
+        </p:style>
+      </p:cxnSp>
+    </p:spTree>
+    <p:extLst>
+      <p:ext uri="{BB962C8B-B14F-4D97-AF65-F5344CB8AC3E}">
+        <p14:creationId xmlns:p14="http://schemas.microsoft.com/office/powerpoint/2010/main" val="3142681971"/>
+      </p:ext>
+    </p:extLst>
+  </p:cSld>
+  <p:clrMapOvr>
+    <a:masterClrMapping/>
+  </p:clrMapOvr>
+</p:sld>
+</file>
+
+<file path=ppt/slides/slide51.xml><?xml version="1.0" encoding="utf-8"?>
+<p:sld xmlns:a="http://schemas.openxmlformats.org/drawingml/2006/main" xmlns:r="http://schemas.openxmlformats.org/officeDocument/2006/relationships" xmlns:p="http://schemas.openxmlformats.org/presentationml/2006/main">
+  <p:cSld>
+    <p:spTree>
+      <p:nvGrpSpPr>
+        <p:cNvPr id="1" name="">
+          <a:extLst>
+            <a:ext uri="{FF2B5EF4-FFF2-40B4-BE49-F238E27FC236}">
               <a16:creationId xmlns:a16="http://schemas.microsoft.com/office/drawing/2014/main" id="{8E06D92F-062F-1B0A-86BF-63465C686373}"/>
             </a:ext>
           </a:extLst>
@@ -38403,7 +40265,7 @@
 </p:sld>
 </file>
 
-<file path=ppt/slides/slide51.xml><?xml version="1.0" encoding="utf-8"?>
+<file path=ppt/slides/slide52.xml><?xml version="1.0" encoding="utf-8"?>
 <p:sld xmlns:a="http://schemas.openxmlformats.org/drawingml/2006/main" xmlns:r="http://schemas.openxmlformats.org/officeDocument/2006/relationships" xmlns:p="http://schemas.openxmlformats.org/presentationml/2006/main">
   <p:cSld>
     <p:spTree>
@@ -39615,7 +41477,7 @@
 </p:sld>
 </file>
 
-<file path=ppt/slides/slide52.xml><?xml version="1.0" encoding="utf-8"?>
+<file path=ppt/slides/slide53.xml><?xml version="1.0" encoding="utf-8"?>
 <p:sld xmlns:a="http://schemas.openxmlformats.org/drawingml/2006/main" xmlns:r="http://schemas.openxmlformats.org/officeDocument/2006/relationships" xmlns:p="http://schemas.openxmlformats.org/presentationml/2006/main">
   <p:cSld>
     <p:spTree>
@@ -40944,7 +42806,7 @@
 </p:sld>
 </file>
 
-<file path=ppt/slides/slide53.xml><?xml version="1.0" encoding="utf-8"?>
+<file path=ppt/slides/slide54.xml><?xml version="1.0" encoding="utf-8"?>
 <p:sld xmlns:a="http://schemas.openxmlformats.org/drawingml/2006/main" xmlns:r="http://schemas.openxmlformats.org/officeDocument/2006/relationships" xmlns:p="http://schemas.openxmlformats.org/presentationml/2006/main">
   <p:cSld>
     <p:spTree>
@@ -41478,7 +43340,7 @@
 </p:sld>
 </file>
 
-<file path=ppt/slides/slide54.xml><?xml version="1.0" encoding="utf-8"?>
+<file path=ppt/slides/slide55.xml><?xml version="1.0" encoding="utf-8"?>
 <p:sld xmlns:a="http://schemas.openxmlformats.org/drawingml/2006/main" xmlns:r="http://schemas.openxmlformats.org/officeDocument/2006/relationships" xmlns:p="http://schemas.openxmlformats.org/presentationml/2006/main">
   <p:cSld>
     <p:spTree>
@@ -43011,7 +44873,7 @@
 </p:sld>
 </file>
 
-<file path=ppt/slides/slide55.xml><?xml version="1.0" encoding="utf-8"?>
+<file path=ppt/slides/slide56.xml><?xml version="1.0" encoding="utf-8"?>
 <p:sld xmlns:a="http://schemas.openxmlformats.org/drawingml/2006/main" xmlns:r="http://schemas.openxmlformats.org/officeDocument/2006/relationships" xmlns:p="http://schemas.openxmlformats.org/presentationml/2006/main">
   <p:cSld>
     <p:spTree>
@@ -44650,7 +46512,7 @@
 </p:sld>
 </file>
 
-<file path=ppt/slides/slide56.xml><?xml version="1.0" encoding="utf-8"?>
+<file path=ppt/slides/slide57.xml><?xml version="1.0" encoding="utf-8"?>
 <p:sld xmlns:a="http://schemas.openxmlformats.org/drawingml/2006/main" xmlns:r="http://schemas.openxmlformats.org/officeDocument/2006/relationships" xmlns:p="http://schemas.openxmlformats.org/presentationml/2006/main">
   <p:cSld>
     <p:spTree>
@@ -44686,7 +46548,7 @@
 </p:sld>
 </file>
 
-<file path=ppt/slides/slide57.xml><?xml version="1.0" encoding="utf-8"?>
+<file path=ppt/slides/slide58.xml><?xml version="1.0" encoding="utf-8"?>
 <p:sld xmlns:a="http://schemas.openxmlformats.org/drawingml/2006/main" xmlns:r="http://schemas.openxmlformats.org/officeDocument/2006/relationships" xmlns:p="http://schemas.openxmlformats.org/presentationml/2006/main">
   <p:cSld>
     <p:spTree>
@@ -44769,7 +46631,7 @@
 </p:sld>
 </file>
 
-<file path=ppt/slides/slide58.xml><?xml version="1.0" encoding="utf-8"?>
+<file path=ppt/slides/slide59.xml><?xml version="1.0" encoding="utf-8"?>
 <p:sld xmlns:a="http://schemas.openxmlformats.org/drawingml/2006/main" xmlns:r="http://schemas.openxmlformats.org/officeDocument/2006/relationships" xmlns:p="http://schemas.openxmlformats.org/presentationml/2006/main">
   <p:cSld>
     <p:spTree>
@@ -44936,78 +46798,6 @@
     <p:extLst>
       <p:ext uri="{BB962C8B-B14F-4D97-AF65-F5344CB8AC3E}">
         <p14:creationId xmlns:p14="http://schemas.microsoft.com/office/powerpoint/2010/main" val="894963790"/>
-      </p:ext>
-    </p:extLst>
-  </p:cSld>
-  <p:clrMapOvr>
-    <a:masterClrMapping/>
-  </p:clrMapOvr>
-</p:sld>
-</file>
-
-<file path=ppt/slides/slide59.xml><?xml version="1.0" encoding="utf-8"?>
-<p:sld xmlns:a="http://schemas.openxmlformats.org/drawingml/2006/main" xmlns:r="http://schemas.openxmlformats.org/officeDocument/2006/relationships" xmlns:p="http://schemas.openxmlformats.org/presentationml/2006/main">
-  <p:cSld>
-    <p:spTree>
-      <p:nvGrpSpPr>
-        <p:cNvPr id="1" name="">
-          <a:extLst>
-            <a:ext uri="{FF2B5EF4-FFF2-40B4-BE49-F238E27FC236}">
-              <a16:creationId xmlns:a16="http://schemas.microsoft.com/office/drawing/2014/main" id="{F3A682E2-D352-A701-9043-CBC0414C7479}"/>
-            </a:ext>
-          </a:extLst>
-        </p:cNvPr>
-        <p:cNvGrpSpPr/>
-        <p:nvPr/>
-      </p:nvGrpSpPr>
-      <p:grpSpPr>
-        <a:xfrm>
-          <a:off x="0" y="0"/>
-          <a:ext cx="0" cy="0"/>
-          <a:chOff x="0" y="0"/>
-          <a:chExt cx="0" cy="0"/>
-        </a:xfrm>
-      </p:grpSpPr>
-      <p:pic>
-        <p:nvPicPr>
-          <p:cNvPr id="3" name="図 2">
-            <a:extLst>
-              <a:ext uri="{FF2B5EF4-FFF2-40B4-BE49-F238E27FC236}">
-                <a16:creationId xmlns:a16="http://schemas.microsoft.com/office/drawing/2014/main" id="{B72770B2-309F-75EE-FF87-E7E09F61FFBE}"/>
-              </a:ext>
-            </a:extLst>
-          </p:cNvPr>
-          <p:cNvPicPr>
-            <a:picLocks noChangeAspect="1"/>
-          </p:cNvPicPr>
-          <p:nvPr/>
-        </p:nvPicPr>
-        <p:blipFill>
-          <a:blip r:embed="rId2">
-            <a:extLst>
-              <a:ext uri="{28A0092B-C50C-407E-A947-70E740481C1C}">
-                <a14:useLocalDpi xmlns:a14="http://schemas.microsoft.com/office/drawing/2010/main" val="0"/>
-              </a:ext>
-            </a:extLst>
-          </a:blip>
-          <a:stretch>
-            <a:fillRect/>
-          </a:stretch>
-        </p:blipFill>
-        <p:spPr>
-          <a:xfrm>
-            <a:off x="5072062" y="2686050"/>
-            <a:ext cx="1153636" cy="1080000"/>
-          </a:xfrm>
-          <a:prstGeom prst="rect">
-            <a:avLst/>
-          </a:prstGeom>
-        </p:spPr>
-      </p:pic>
-    </p:spTree>
-    <p:extLst>
-      <p:ext uri="{BB962C8B-B14F-4D97-AF65-F5344CB8AC3E}">
-        <p14:creationId xmlns:p14="http://schemas.microsoft.com/office/powerpoint/2010/main" val="2362055097"/>
       </p:ext>
     </p:extLst>
   </p:cSld>
@@ -45540,6 +47330,78 @@
         <p:cNvPr id="1" name="">
           <a:extLst>
             <a:ext uri="{FF2B5EF4-FFF2-40B4-BE49-F238E27FC236}">
+              <a16:creationId xmlns:a16="http://schemas.microsoft.com/office/drawing/2014/main" id="{F3A682E2-D352-A701-9043-CBC0414C7479}"/>
+            </a:ext>
+          </a:extLst>
+        </p:cNvPr>
+        <p:cNvGrpSpPr/>
+        <p:nvPr/>
+      </p:nvGrpSpPr>
+      <p:grpSpPr>
+        <a:xfrm>
+          <a:off x="0" y="0"/>
+          <a:ext cx="0" cy="0"/>
+          <a:chOff x="0" y="0"/>
+          <a:chExt cx="0" cy="0"/>
+        </a:xfrm>
+      </p:grpSpPr>
+      <p:pic>
+        <p:nvPicPr>
+          <p:cNvPr id="3" name="図 2">
+            <a:extLst>
+              <a:ext uri="{FF2B5EF4-FFF2-40B4-BE49-F238E27FC236}">
+                <a16:creationId xmlns:a16="http://schemas.microsoft.com/office/drawing/2014/main" id="{B72770B2-309F-75EE-FF87-E7E09F61FFBE}"/>
+              </a:ext>
+            </a:extLst>
+          </p:cNvPr>
+          <p:cNvPicPr>
+            <a:picLocks noChangeAspect="1"/>
+          </p:cNvPicPr>
+          <p:nvPr/>
+        </p:nvPicPr>
+        <p:blipFill>
+          <a:blip r:embed="rId2">
+            <a:extLst>
+              <a:ext uri="{28A0092B-C50C-407E-A947-70E740481C1C}">
+                <a14:useLocalDpi xmlns:a14="http://schemas.microsoft.com/office/drawing/2010/main" val="0"/>
+              </a:ext>
+            </a:extLst>
+          </a:blip>
+          <a:stretch>
+            <a:fillRect/>
+          </a:stretch>
+        </p:blipFill>
+        <p:spPr>
+          <a:xfrm>
+            <a:off x="5072062" y="2686050"/>
+            <a:ext cx="1153636" cy="1080000"/>
+          </a:xfrm>
+          <a:prstGeom prst="rect">
+            <a:avLst/>
+          </a:prstGeom>
+        </p:spPr>
+      </p:pic>
+    </p:spTree>
+    <p:extLst>
+      <p:ext uri="{BB962C8B-B14F-4D97-AF65-F5344CB8AC3E}">
+        <p14:creationId xmlns:p14="http://schemas.microsoft.com/office/powerpoint/2010/main" val="2362055097"/>
+      </p:ext>
+    </p:extLst>
+  </p:cSld>
+  <p:clrMapOvr>
+    <a:masterClrMapping/>
+  </p:clrMapOvr>
+</p:sld>
+</file>
+
+<file path=ppt/slides/slide61.xml><?xml version="1.0" encoding="utf-8"?>
+<p:sld xmlns:a="http://schemas.openxmlformats.org/drawingml/2006/main" xmlns:r="http://schemas.openxmlformats.org/officeDocument/2006/relationships" xmlns:p="http://schemas.openxmlformats.org/presentationml/2006/main">
+  <p:cSld>
+    <p:spTree>
+      <p:nvGrpSpPr>
+        <p:cNvPr id="1" name="">
+          <a:extLst>
+            <a:ext uri="{FF2B5EF4-FFF2-40B4-BE49-F238E27FC236}">
               <a16:creationId xmlns:a16="http://schemas.microsoft.com/office/drawing/2014/main" id="{FB41574C-373B-1394-C2FE-149B7DA3B16B}"/>
             </a:ext>
           </a:extLst>
@@ -45704,7 +47566,7 @@
 </p:sld>
 </file>
 
-<file path=ppt/slides/slide61.xml><?xml version="1.0" encoding="utf-8"?>
+<file path=ppt/slides/slide62.xml><?xml version="1.0" encoding="utf-8"?>
 <p:sld xmlns:a="http://schemas.openxmlformats.org/drawingml/2006/main" xmlns:r="http://schemas.openxmlformats.org/officeDocument/2006/relationships" xmlns:p="http://schemas.openxmlformats.org/presentationml/2006/main">
   <p:cSld>
     <p:spTree>
@@ -45826,7 +47688,7 @@
 </p:sld>
 </file>
 
-<file path=ppt/slides/slide62.xml><?xml version="1.0" encoding="utf-8"?>
+<file path=ppt/slides/slide63.xml><?xml version="1.0" encoding="utf-8"?>
 <p:sld xmlns:a="http://schemas.openxmlformats.org/drawingml/2006/main" xmlns:r="http://schemas.openxmlformats.org/officeDocument/2006/relationships" xmlns:p="http://schemas.openxmlformats.org/presentationml/2006/main">
   <p:cSld>
     <p:spTree>
@@ -45948,7 +47810,7 @@
 </p:sld>
 </file>
 
-<file path=ppt/slides/slide63.xml><?xml version="1.0" encoding="utf-8"?>
+<file path=ppt/slides/slide64.xml><?xml version="1.0" encoding="utf-8"?>
 <p:sld xmlns:a="http://schemas.openxmlformats.org/drawingml/2006/main" xmlns:r="http://schemas.openxmlformats.org/officeDocument/2006/relationships" xmlns:p="http://schemas.openxmlformats.org/presentationml/2006/main">
   <p:cSld>
     <p:spTree>
@@ -46075,7 +47937,7 @@
 </p:sld>
 </file>
 
-<file path=ppt/slides/slide64.xml><?xml version="1.0" encoding="utf-8"?>
+<file path=ppt/slides/slide65.xml><?xml version="1.0" encoding="utf-8"?>
 <p:sld xmlns:a="http://schemas.openxmlformats.org/drawingml/2006/main" xmlns:r="http://schemas.openxmlformats.org/officeDocument/2006/relationships" xmlns:p="http://schemas.openxmlformats.org/presentationml/2006/main">
   <p:cSld>
     <p:spTree>
@@ -46147,7 +48009,7 @@
 </p:sld>
 </file>
 
-<file path=ppt/slides/slide65.xml><?xml version="1.0" encoding="utf-8"?>
+<file path=ppt/slides/slide66.xml><?xml version="1.0" encoding="utf-8"?>
 <p:sld xmlns:a="http://schemas.openxmlformats.org/drawingml/2006/main" xmlns:r="http://schemas.openxmlformats.org/officeDocument/2006/relationships" xmlns:p="http://schemas.openxmlformats.org/presentationml/2006/main">
   <p:cSld>
     <p:spTree>
@@ -46183,7 +48045,7 @@
 </p:sld>
 </file>
 
-<file path=ppt/slides/slide66.xml><?xml version="1.0" encoding="utf-8"?>
+<file path=ppt/slides/slide67.xml><?xml version="1.0" encoding="utf-8"?>
 <p:sld xmlns:a="http://schemas.openxmlformats.org/drawingml/2006/main" xmlns:r="http://schemas.openxmlformats.org/officeDocument/2006/relationships" xmlns:p="http://schemas.openxmlformats.org/presentationml/2006/main">
   <p:cSld>
     <p:spTree>
@@ -46305,7 +48167,7 @@
 </p:sld>
 </file>
 
-<file path=ppt/slides/slide67.xml><?xml version="1.0" encoding="utf-8"?>
+<file path=ppt/slides/slide68.xml><?xml version="1.0" encoding="utf-8"?>
 <p:sld xmlns:a="http://schemas.openxmlformats.org/drawingml/2006/main" xmlns:r="http://schemas.openxmlformats.org/officeDocument/2006/relationships" xmlns:p="http://schemas.openxmlformats.org/presentationml/2006/main">
   <p:cSld>
     <p:spTree>
@@ -46427,7 +48289,7 @@
 </p:sld>
 </file>
 
-<file path=ppt/slides/slide68.xml><?xml version="1.0" encoding="utf-8"?>
+<file path=ppt/slides/slide69.xml><?xml version="1.0" encoding="utf-8"?>
 <p:sld xmlns:a="http://schemas.openxmlformats.org/drawingml/2006/main" xmlns:r="http://schemas.openxmlformats.org/officeDocument/2006/relationships" xmlns:p="http://schemas.openxmlformats.org/presentationml/2006/main">
   <p:cSld>
     <p:spTree>
@@ -46540,128 +48402,6 @@
     <p:extLst>
       <p:ext uri="{BB962C8B-B14F-4D97-AF65-F5344CB8AC3E}">
         <p14:creationId xmlns:p14="http://schemas.microsoft.com/office/powerpoint/2010/main" val="2871749264"/>
-      </p:ext>
-    </p:extLst>
-  </p:cSld>
-  <p:clrMapOvr>
-    <a:masterClrMapping/>
-  </p:clrMapOvr>
-</p:sld>
-</file>
-
-<file path=ppt/slides/slide69.xml><?xml version="1.0" encoding="utf-8"?>
-<p:sld xmlns:a="http://schemas.openxmlformats.org/drawingml/2006/main" xmlns:r="http://schemas.openxmlformats.org/officeDocument/2006/relationships" xmlns:p="http://schemas.openxmlformats.org/presentationml/2006/main">
-  <p:cSld>
-    <p:spTree>
-      <p:nvGrpSpPr>
-        <p:cNvPr id="1" name="">
-          <a:extLst>
-            <a:ext uri="{FF2B5EF4-FFF2-40B4-BE49-F238E27FC236}">
-              <a16:creationId xmlns:a16="http://schemas.microsoft.com/office/drawing/2014/main" id="{1570C996-A1FD-17C5-12F9-C185A44FA454}"/>
-            </a:ext>
-          </a:extLst>
-        </p:cNvPr>
-        <p:cNvGrpSpPr/>
-        <p:nvPr/>
-      </p:nvGrpSpPr>
-      <p:grpSpPr>
-        <a:xfrm>
-          <a:off x="0" y="0"/>
-          <a:ext cx="0" cy="0"/>
-          <a:chOff x="0" y="0"/>
-          <a:chExt cx="0" cy="0"/>
-        </a:xfrm>
-      </p:grpSpPr>
-      <p:pic>
-        <p:nvPicPr>
-          <p:cNvPr id="3" name="図 2">
-            <a:extLst>
-              <a:ext uri="{FF2B5EF4-FFF2-40B4-BE49-F238E27FC236}">
-                <a16:creationId xmlns:a16="http://schemas.microsoft.com/office/drawing/2014/main" id="{19800585-E009-681D-F973-4FFDBCB24A6D}"/>
-              </a:ext>
-            </a:extLst>
-          </p:cNvPr>
-          <p:cNvPicPr>
-            <a:picLocks noChangeAspect="1"/>
-          </p:cNvPicPr>
-          <p:nvPr/>
-        </p:nvPicPr>
-        <p:blipFill>
-          <a:blip r:embed="rId2">
-            <a:extLst>
-              <a:ext uri="{28A0092B-C50C-407E-A947-70E740481C1C}">
-                <a14:useLocalDpi xmlns:a14="http://schemas.microsoft.com/office/drawing/2010/main" val="0"/>
-              </a:ext>
-            </a:extLst>
-          </a:blip>
-          <a:stretch>
-            <a:fillRect/>
-          </a:stretch>
-        </p:blipFill>
-        <p:spPr>
-          <a:xfrm>
-            <a:off x="3957637" y="2800350"/>
-            <a:ext cx="4276725" cy="1257300"/>
-          </a:xfrm>
-          <a:prstGeom prst="rect">
-            <a:avLst/>
-          </a:prstGeom>
-        </p:spPr>
-      </p:pic>
-      <p:sp>
-        <p:nvSpPr>
-          <p:cNvPr id="6" name="正方形/長方形 5">
-            <a:extLst>
-              <a:ext uri="{FF2B5EF4-FFF2-40B4-BE49-F238E27FC236}">
-                <a16:creationId xmlns:a16="http://schemas.microsoft.com/office/drawing/2014/main" id="{90116AF5-5E12-C6B5-BE85-9EE686683A5D}"/>
-              </a:ext>
-            </a:extLst>
-          </p:cNvPr>
-          <p:cNvSpPr/>
-          <p:nvPr/>
-        </p:nvSpPr>
-        <p:spPr>
-          <a:xfrm>
-            <a:off x="4665661" y="3429000"/>
-            <a:ext cx="947739" cy="279400"/>
-          </a:xfrm>
-          <a:prstGeom prst="rect">
-            <a:avLst/>
-          </a:prstGeom>
-          <a:noFill/>
-          <a:ln w="28575">
-            <a:solidFill>
-              <a:srgbClr val="FF0000"/>
-            </a:solidFill>
-          </a:ln>
-        </p:spPr>
-        <p:style>
-          <a:lnRef idx="2">
-            <a:schemeClr val="accent6"/>
-          </a:lnRef>
-          <a:fillRef idx="1">
-            <a:schemeClr val="lt1"/>
-          </a:fillRef>
-          <a:effectRef idx="0">
-            <a:schemeClr val="accent6"/>
-          </a:effectRef>
-          <a:fontRef idx="minor">
-            <a:schemeClr val="dk1"/>
-          </a:fontRef>
-        </p:style>
-        <p:txBody>
-          <a:bodyPr rtlCol="0" anchor="ctr"/>
-          <a:lstStyle/>
-          <a:p>
-            <a:pPr algn="ctr"/>
-            <a:endParaRPr kumimoji="1" lang="ja-JP" altLang="en-US"/>
-          </a:p>
-        </p:txBody>
-      </p:sp>
-    </p:spTree>
-    <p:extLst>
-      <p:ext uri="{BB962C8B-B14F-4D97-AF65-F5344CB8AC3E}">
-        <p14:creationId xmlns:p14="http://schemas.microsoft.com/office/powerpoint/2010/main" val="3776241511"/>
       </p:ext>
     </p:extLst>
   </p:cSld>
@@ -47423,6 +49163,128 @@
         <p:cNvPr id="1" name="">
           <a:extLst>
             <a:ext uri="{FF2B5EF4-FFF2-40B4-BE49-F238E27FC236}">
+              <a16:creationId xmlns:a16="http://schemas.microsoft.com/office/drawing/2014/main" id="{1570C996-A1FD-17C5-12F9-C185A44FA454}"/>
+            </a:ext>
+          </a:extLst>
+        </p:cNvPr>
+        <p:cNvGrpSpPr/>
+        <p:nvPr/>
+      </p:nvGrpSpPr>
+      <p:grpSpPr>
+        <a:xfrm>
+          <a:off x="0" y="0"/>
+          <a:ext cx="0" cy="0"/>
+          <a:chOff x="0" y="0"/>
+          <a:chExt cx="0" cy="0"/>
+        </a:xfrm>
+      </p:grpSpPr>
+      <p:pic>
+        <p:nvPicPr>
+          <p:cNvPr id="3" name="図 2">
+            <a:extLst>
+              <a:ext uri="{FF2B5EF4-FFF2-40B4-BE49-F238E27FC236}">
+                <a16:creationId xmlns:a16="http://schemas.microsoft.com/office/drawing/2014/main" id="{19800585-E009-681D-F973-4FFDBCB24A6D}"/>
+              </a:ext>
+            </a:extLst>
+          </p:cNvPr>
+          <p:cNvPicPr>
+            <a:picLocks noChangeAspect="1"/>
+          </p:cNvPicPr>
+          <p:nvPr/>
+        </p:nvPicPr>
+        <p:blipFill>
+          <a:blip r:embed="rId2">
+            <a:extLst>
+              <a:ext uri="{28A0092B-C50C-407E-A947-70E740481C1C}">
+                <a14:useLocalDpi xmlns:a14="http://schemas.microsoft.com/office/drawing/2010/main" val="0"/>
+              </a:ext>
+            </a:extLst>
+          </a:blip>
+          <a:stretch>
+            <a:fillRect/>
+          </a:stretch>
+        </p:blipFill>
+        <p:spPr>
+          <a:xfrm>
+            <a:off x="3957637" y="2800350"/>
+            <a:ext cx="4276725" cy="1257300"/>
+          </a:xfrm>
+          <a:prstGeom prst="rect">
+            <a:avLst/>
+          </a:prstGeom>
+        </p:spPr>
+      </p:pic>
+      <p:sp>
+        <p:nvSpPr>
+          <p:cNvPr id="6" name="正方形/長方形 5">
+            <a:extLst>
+              <a:ext uri="{FF2B5EF4-FFF2-40B4-BE49-F238E27FC236}">
+                <a16:creationId xmlns:a16="http://schemas.microsoft.com/office/drawing/2014/main" id="{90116AF5-5E12-C6B5-BE85-9EE686683A5D}"/>
+              </a:ext>
+            </a:extLst>
+          </p:cNvPr>
+          <p:cNvSpPr/>
+          <p:nvPr/>
+        </p:nvSpPr>
+        <p:spPr>
+          <a:xfrm>
+            <a:off x="4665661" y="3429000"/>
+            <a:ext cx="947739" cy="279400"/>
+          </a:xfrm>
+          <a:prstGeom prst="rect">
+            <a:avLst/>
+          </a:prstGeom>
+          <a:noFill/>
+          <a:ln w="28575">
+            <a:solidFill>
+              <a:srgbClr val="FF0000"/>
+            </a:solidFill>
+          </a:ln>
+        </p:spPr>
+        <p:style>
+          <a:lnRef idx="2">
+            <a:schemeClr val="accent6"/>
+          </a:lnRef>
+          <a:fillRef idx="1">
+            <a:schemeClr val="lt1"/>
+          </a:fillRef>
+          <a:effectRef idx="0">
+            <a:schemeClr val="accent6"/>
+          </a:effectRef>
+          <a:fontRef idx="minor">
+            <a:schemeClr val="dk1"/>
+          </a:fontRef>
+        </p:style>
+        <p:txBody>
+          <a:bodyPr rtlCol="0" anchor="ctr"/>
+          <a:lstStyle/>
+          <a:p>
+            <a:pPr algn="ctr"/>
+            <a:endParaRPr kumimoji="1" lang="ja-JP" altLang="en-US"/>
+          </a:p>
+        </p:txBody>
+      </p:sp>
+    </p:spTree>
+    <p:extLst>
+      <p:ext uri="{BB962C8B-B14F-4D97-AF65-F5344CB8AC3E}">
+        <p14:creationId xmlns:p14="http://schemas.microsoft.com/office/powerpoint/2010/main" val="3776241511"/>
+      </p:ext>
+    </p:extLst>
+  </p:cSld>
+  <p:clrMapOvr>
+    <a:masterClrMapping/>
+  </p:clrMapOvr>
+</p:sld>
+</file>
+
+<file path=ppt/slides/slide71.xml><?xml version="1.0" encoding="utf-8"?>
+<p:sld xmlns:a="http://schemas.openxmlformats.org/drawingml/2006/main" xmlns:r="http://schemas.openxmlformats.org/officeDocument/2006/relationships" xmlns:p="http://schemas.openxmlformats.org/presentationml/2006/main">
+  <p:cSld>
+    <p:spTree>
+      <p:nvGrpSpPr>
+        <p:cNvPr id="1" name="">
+          <a:extLst>
+            <a:ext uri="{FF2B5EF4-FFF2-40B4-BE49-F238E27FC236}">
               <a16:creationId xmlns:a16="http://schemas.microsoft.com/office/drawing/2014/main" id="{D6D51AFC-4130-139A-CECD-676A26A3A7DD}"/>
             </a:ext>
           </a:extLst>
@@ -47544,7 +49406,7 @@
 </p:sld>
 </file>
 
-<file path=ppt/slides/slide71.xml><?xml version="1.0" encoding="utf-8"?>
+<file path=ppt/slides/slide72.xml><?xml version="1.0" encoding="utf-8"?>
 <p:sld xmlns:a="http://schemas.openxmlformats.org/drawingml/2006/main" xmlns:r="http://schemas.openxmlformats.org/officeDocument/2006/relationships" xmlns:p="http://schemas.openxmlformats.org/presentationml/2006/main">
   <p:cSld>
     <p:spTree>
@@ -47580,7 +49442,7 @@
 </p:sld>
 </file>
 
-<file path=ppt/slides/slide72.xml><?xml version="1.0" encoding="utf-8"?>
+<file path=ppt/slides/slide73.xml><?xml version="1.0" encoding="utf-8"?>
 <p:sld xmlns:a="http://schemas.openxmlformats.org/drawingml/2006/main" xmlns:r="http://schemas.openxmlformats.org/officeDocument/2006/relationships" xmlns:p="http://schemas.openxmlformats.org/presentationml/2006/main">
   <p:cSld>
     <p:spTree>
@@ -47702,7 +49564,7 @@
 </p:sld>
 </file>
 
-<file path=ppt/slides/slide73.xml><?xml version="1.0" encoding="utf-8"?>
+<file path=ppt/slides/slide74.xml><?xml version="1.0" encoding="utf-8"?>
 <p:sld xmlns:a="http://schemas.openxmlformats.org/drawingml/2006/main" xmlns:r="http://schemas.openxmlformats.org/officeDocument/2006/relationships" xmlns:p="http://schemas.openxmlformats.org/presentationml/2006/main">
   <p:cSld>
     <p:spTree>
@@ -47824,7 +49686,7 @@
 </p:sld>
 </file>
 
-<file path=ppt/slides/slide74.xml><?xml version="1.0" encoding="utf-8"?>
+<file path=ppt/slides/slide75.xml><?xml version="1.0" encoding="utf-8"?>
 <p:sld xmlns:a="http://schemas.openxmlformats.org/drawingml/2006/main" xmlns:r="http://schemas.openxmlformats.org/officeDocument/2006/relationships" xmlns:p="http://schemas.openxmlformats.org/presentationml/2006/main">
   <p:cSld>
     <p:spTree>
@@ -47996,7 +49858,7 @@
 </p:sld>
 </file>
 
-<file path=ppt/slides/slide75.xml><?xml version="1.0" encoding="utf-8"?>
+<file path=ppt/slides/slide76.xml><?xml version="1.0" encoding="utf-8"?>
 <p:sld xmlns:a="http://schemas.openxmlformats.org/drawingml/2006/main" xmlns:r="http://schemas.openxmlformats.org/officeDocument/2006/relationships" xmlns:p="http://schemas.openxmlformats.org/presentationml/2006/main">
   <p:cSld>
     <p:spTree>
@@ -48032,7 +49894,7 @@
 </p:sld>
 </file>
 
-<file path=ppt/slides/slide76.xml><?xml version="1.0" encoding="utf-8"?>
+<file path=ppt/slides/slide77.xml><?xml version="1.0" encoding="utf-8"?>
 <p:sld xmlns:a="http://schemas.openxmlformats.org/drawingml/2006/main" xmlns:r="http://schemas.openxmlformats.org/officeDocument/2006/relationships" xmlns:p="http://schemas.openxmlformats.org/presentationml/2006/main">
   <p:cSld>
     <p:spTree>
@@ -48154,7 +50016,7 @@
 </p:sld>
 </file>
 
-<file path=ppt/slides/slide77.xml><?xml version="1.0" encoding="utf-8"?>
+<file path=ppt/slides/slide78.xml><?xml version="1.0" encoding="utf-8"?>
 <p:sld xmlns:a="http://schemas.openxmlformats.org/drawingml/2006/main" xmlns:r="http://schemas.openxmlformats.org/officeDocument/2006/relationships" xmlns:p="http://schemas.openxmlformats.org/presentationml/2006/main">
   <p:cSld>
     <p:spTree>
@@ -48276,7 +50138,7 @@
 </p:sld>
 </file>
 
-<file path=ppt/slides/slide78.xml><?xml version="1.0" encoding="utf-8"?>
+<file path=ppt/slides/slide79.xml><?xml version="1.0" encoding="utf-8"?>
 <p:sld xmlns:a="http://schemas.openxmlformats.org/drawingml/2006/main" xmlns:r="http://schemas.openxmlformats.org/officeDocument/2006/relationships" xmlns:p="http://schemas.openxmlformats.org/presentationml/2006/main">
   <p:cSld>
     <p:spTree>
@@ -48389,128 +50251,6 @@
     <p:extLst>
       <p:ext uri="{BB962C8B-B14F-4D97-AF65-F5344CB8AC3E}">
         <p14:creationId xmlns:p14="http://schemas.microsoft.com/office/powerpoint/2010/main" val="2512079859"/>
-      </p:ext>
-    </p:extLst>
-  </p:cSld>
-  <p:clrMapOvr>
-    <a:masterClrMapping/>
-  </p:clrMapOvr>
-</p:sld>
-</file>
-
-<file path=ppt/slides/slide79.xml><?xml version="1.0" encoding="utf-8"?>
-<p:sld xmlns:a="http://schemas.openxmlformats.org/drawingml/2006/main" xmlns:r="http://schemas.openxmlformats.org/officeDocument/2006/relationships" xmlns:p="http://schemas.openxmlformats.org/presentationml/2006/main">
-  <p:cSld>
-    <p:spTree>
-      <p:nvGrpSpPr>
-        <p:cNvPr id="1" name="">
-          <a:extLst>
-            <a:ext uri="{FF2B5EF4-FFF2-40B4-BE49-F238E27FC236}">
-              <a16:creationId xmlns:a16="http://schemas.microsoft.com/office/drawing/2014/main" id="{F253F93B-975B-B902-761D-FE8F9E9A482E}"/>
-            </a:ext>
-          </a:extLst>
-        </p:cNvPr>
-        <p:cNvGrpSpPr/>
-        <p:nvPr/>
-      </p:nvGrpSpPr>
-      <p:grpSpPr>
-        <a:xfrm>
-          <a:off x="0" y="0"/>
-          <a:ext cx="0" cy="0"/>
-          <a:chOff x="0" y="0"/>
-          <a:chExt cx="0" cy="0"/>
-        </a:xfrm>
-      </p:grpSpPr>
-      <p:pic>
-        <p:nvPicPr>
-          <p:cNvPr id="3" name="図 2">
-            <a:extLst>
-              <a:ext uri="{FF2B5EF4-FFF2-40B4-BE49-F238E27FC236}">
-                <a16:creationId xmlns:a16="http://schemas.microsoft.com/office/drawing/2014/main" id="{C1FCD0C8-B622-9B6D-6C98-467B170875CE}"/>
-              </a:ext>
-            </a:extLst>
-          </p:cNvPr>
-          <p:cNvPicPr>
-            <a:picLocks noChangeAspect="1"/>
-          </p:cNvPicPr>
-          <p:nvPr/>
-        </p:nvPicPr>
-        <p:blipFill>
-          <a:blip r:embed="rId2">
-            <a:extLst>
-              <a:ext uri="{28A0092B-C50C-407E-A947-70E740481C1C}">
-                <a14:useLocalDpi xmlns:a14="http://schemas.microsoft.com/office/drawing/2010/main" val="0"/>
-              </a:ext>
-            </a:extLst>
-          </a:blip>
-          <a:stretch>
-            <a:fillRect/>
-          </a:stretch>
-        </p:blipFill>
-        <p:spPr>
-          <a:xfrm>
-            <a:off x="4295775" y="2047875"/>
-            <a:ext cx="3600450" cy="2762250"/>
-          </a:xfrm>
-          <a:prstGeom prst="rect">
-            <a:avLst/>
-          </a:prstGeom>
-        </p:spPr>
-      </p:pic>
-      <p:sp>
-        <p:nvSpPr>
-          <p:cNvPr id="4" name="正方形/長方形 3">
-            <a:extLst>
-              <a:ext uri="{FF2B5EF4-FFF2-40B4-BE49-F238E27FC236}">
-                <a16:creationId xmlns:a16="http://schemas.microsoft.com/office/drawing/2014/main" id="{BF03B34E-2C76-5DD7-F3B7-6AC9B92CF3A1}"/>
-              </a:ext>
-            </a:extLst>
-          </p:cNvPr>
-          <p:cNvSpPr/>
-          <p:nvPr/>
-        </p:nvSpPr>
-        <p:spPr>
-          <a:xfrm flipV="1">
-            <a:off x="4965699" y="3556000"/>
-            <a:ext cx="2879725" cy="495300"/>
-          </a:xfrm>
-          <a:prstGeom prst="rect">
-            <a:avLst/>
-          </a:prstGeom>
-          <a:noFill/>
-          <a:ln w="28575">
-            <a:solidFill>
-              <a:srgbClr val="FF0000"/>
-            </a:solidFill>
-          </a:ln>
-        </p:spPr>
-        <p:style>
-          <a:lnRef idx="2">
-            <a:schemeClr val="accent6"/>
-          </a:lnRef>
-          <a:fillRef idx="1">
-            <a:schemeClr val="lt1"/>
-          </a:fillRef>
-          <a:effectRef idx="0">
-            <a:schemeClr val="accent6"/>
-          </a:effectRef>
-          <a:fontRef idx="minor">
-            <a:schemeClr val="dk1"/>
-          </a:fontRef>
-        </p:style>
-        <p:txBody>
-          <a:bodyPr rtlCol="0" anchor="ctr"/>
-          <a:lstStyle/>
-          <a:p>
-            <a:pPr algn="ctr"/>
-            <a:endParaRPr kumimoji="1" lang="ja-JP" altLang="en-US"/>
-          </a:p>
-        </p:txBody>
-      </p:sp>
-    </p:spTree>
-    <p:extLst>
-      <p:ext uri="{BB962C8B-B14F-4D97-AF65-F5344CB8AC3E}">
-        <p14:creationId xmlns:p14="http://schemas.microsoft.com/office/powerpoint/2010/main" val="1711747926"/>
       </p:ext>
     </p:extLst>
   </p:cSld>
@@ -48696,6 +50436,128 @@
         <p:cNvPr id="1" name="">
           <a:extLst>
             <a:ext uri="{FF2B5EF4-FFF2-40B4-BE49-F238E27FC236}">
+              <a16:creationId xmlns:a16="http://schemas.microsoft.com/office/drawing/2014/main" id="{F253F93B-975B-B902-761D-FE8F9E9A482E}"/>
+            </a:ext>
+          </a:extLst>
+        </p:cNvPr>
+        <p:cNvGrpSpPr/>
+        <p:nvPr/>
+      </p:nvGrpSpPr>
+      <p:grpSpPr>
+        <a:xfrm>
+          <a:off x="0" y="0"/>
+          <a:ext cx="0" cy="0"/>
+          <a:chOff x="0" y="0"/>
+          <a:chExt cx="0" cy="0"/>
+        </a:xfrm>
+      </p:grpSpPr>
+      <p:pic>
+        <p:nvPicPr>
+          <p:cNvPr id="3" name="図 2">
+            <a:extLst>
+              <a:ext uri="{FF2B5EF4-FFF2-40B4-BE49-F238E27FC236}">
+                <a16:creationId xmlns:a16="http://schemas.microsoft.com/office/drawing/2014/main" id="{C1FCD0C8-B622-9B6D-6C98-467B170875CE}"/>
+              </a:ext>
+            </a:extLst>
+          </p:cNvPr>
+          <p:cNvPicPr>
+            <a:picLocks noChangeAspect="1"/>
+          </p:cNvPicPr>
+          <p:nvPr/>
+        </p:nvPicPr>
+        <p:blipFill>
+          <a:blip r:embed="rId2">
+            <a:extLst>
+              <a:ext uri="{28A0092B-C50C-407E-A947-70E740481C1C}">
+                <a14:useLocalDpi xmlns:a14="http://schemas.microsoft.com/office/drawing/2010/main" val="0"/>
+              </a:ext>
+            </a:extLst>
+          </a:blip>
+          <a:stretch>
+            <a:fillRect/>
+          </a:stretch>
+        </p:blipFill>
+        <p:spPr>
+          <a:xfrm>
+            <a:off x="4295775" y="2047875"/>
+            <a:ext cx="3600450" cy="2762250"/>
+          </a:xfrm>
+          <a:prstGeom prst="rect">
+            <a:avLst/>
+          </a:prstGeom>
+        </p:spPr>
+      </p:pic>
+      <p:sp>
+        <p:nvSpPr>
+          <p:cNvPr id="4" name="正方形/長方形 3">
+            <a:extLst>
+              <a:ext uri="{FF2B5EF4-FFF2-40B4-BE49-F238E27FC236}">
+                <a16:creationId xmlns:a16="http://schemas.microsoft.com/office/drawing/2014/main" id="{BF03B34E-2C76-5DD7-F3B7-6AC9B92CF3A1}"/>
+              </a:ext>
+            </a:extLst>
+          </p:cNvPr>
+          <p:cNvSpPr/>
+          <p:nvPr/>
+        </p:nvSpPr>
+        <p:spPr>
+          <a:xfrm flipV="1">
+            <a:off x="4965699" y="3556000"/>
+            <a:ext cx="2879725" cy="495300"/>
+          </a:xfrm>
+          <a:prstGeom prst="rect">
+            <a:avLst/>
+          </a:prstGeom>
+          <a:noFill/>
+          <a:ln w="28575">
+            <a:solidFill>
+              <a:srgbClr val="FF0000"/>
+            </a:solidFill>
+          </a:ln>
+        </p:spPr>
+        <p:style>
+          <a:lnRef idx="2">
+            <a:schemeClr val="accent6"/>
+          </a:lnRef>
+          <a:fillRef idx="1">
+            <a:schemeClr val="lt1"/>
+          </a:fillRef>
+          <a:effectRef idx="0">
+            <a:schemeClr val="accent6"/>
+          </a:effectRef>
+          <a:fontRef idx="minor">
+            <a:schemeClr val="dk1"/>
+          </a:fontRef>
+        </p:style>
+        <p:txBody>
+          <a:bodyPr rtlCol="0" anchor="ctr"/>
+          <a:lstStyle/>
+          <a:p>
+            <a:pPr algn="ctr"/>
+            <a:endParaRPr kumimoji="1" lang="ja-JP" altLang="en-US"/>
+          </a:p>
+        </p:txBody>
+      </p:sp>
+    </p:spTree>
+    <p:extLst>
+      <p:ext uri="{BB962C8B-B14F-4D97-AF65-F5344CB8AC3E}">
+        <p14:creationId xmlns:p14="http://schemas.microsoft.com/office/powerpoint/2010/main" val="1711747926"/>
+      </p:ext>
+    </p:extLst>
+  </p:cSld>
+  <p:clrMapOvr>
+    <a:masterClrMapping/>
+  </p:clrMapOvr>
+</p:sld>
+</file>
+
+<file path=ppt/slides/slide81.xml><?xml version="1.0" encoding="utf-8"?>
+<p:sld xmlns:a="http://schemas.openxmlformats.org/drawingml/2006/main" xmlns:r="http://schemas.openxmlformats.org/officeDocument/2006/relationships" xmlns:p="http://schemas.openxmlformats.org/presentationml/2006/main">
+  <p:cSld>
+    <p:spTree>
+      <p:nvGrpSpPr>
+        <p:cNvPr id="1" name="">
+          <a:extLst>
+            <a:ext uri="{FF2B5EF4-FFF2-40B4-BE49-F238E27FC236}">
               <a16:creationId xmlns:a16="http://schemas.microsoft.com/office/drawing/2014/main" id="{F44319D2-0EC2-A0CA-2AC2-0623598CBEB6}"/>
             </a:ext>
           </a:extLst>
@@ -48810,7 +50672,7 @@
 </p:sld>
 </file>
 
-<file path=ppt/slides/slide81.xml><?xml version="1.0" encoding="utf-8"?>
+<file path=ppt/slides/slide82.xml><?xml version="1.0" encoding="utf-8"?>
 <p:sld xmlns:a="http://schemas.openxmlformats.org/drawingml/2006/main" xmlns:r="http://schemas.openxmlformats.org/officeDocument/2006/relationships" xmlns:p="http://schemas.openxmlformats.org/presentationml/2006/main">
   <p:cSld>
     <p:spTree>
@@ -48846,7 +50708,7 @@
 </p:sld>
 </file>
 
-<file path=ppt/slides/slide82.xml><?xml version="1.0" encoding="utf-8"?>
+<file path=ppt/slides/slide83.xml><?xml version="1.0" encoding="utf-8"?>
 <p:sld xmlns:a="http://schemas.openxmlformats.org/drawingml/2006/main" xmlns:r="http://schemas.openxmlformats.org/officeDocument/2006/relationships" xmlns:p="http://schemas.openxmlformats.org/presentationml/2006/main">
   <p:cSld>
     <p:spTree>
@@ -48968,7 +50830,7 @@
 </p:sld>
 </file>
 
-<file path=ppt/slides/slide83.xml><?xml version="1.0" encoding="utf-8"?>
+<file path=ppt/slides/slide84.xml><?xml version="1.0" encoding="utf-8"?>
 <p:sld xmlns:a="http://schemas.openxmlformats.org/drawingml/2006/main" xmlns:r="http://schemas.openxmlformats.org/officeDocument/2006/relationships" xmlns:p="http://schemas.openxmlformats.org/presentationml/2006/main">
   <p:cSld>
     <p:spTree>
@@ -49140,7 +51002,7 @@
 </p:sld>
 </file>
 
-<file path=ppt/slides/slide84.xml><?xml version="1.0" encoding="utf-8"?>
+<file path=ppt/slides/slide85.xml><?xml version="1.0" encoding="utf-8"?>
 <p:sld xmlns:a="http://schemas.openxmlformats.org/drawingml/2006/main" xmlns:r="http://schemas.openxmlformats.org/officeDocument/2006/relationships" xmlns:p="http://schemas.openxmlformats.org/presentationml/2006/main">
   <p:cSld>
     <p:spTree>
@@ -49262,7 +51124,7 @@
 </p:sld>
 </file>
 
-<file path=ppt/slides/slide85.xml><?xml version="1.0" encoding="utf-8"?>
+<file path=ppt/slides/slide86.xml><?xml version="1.0" encoding="utf-8"?>
 <p:sld xmlns:a="http://schemas.openxmlformats.org/drawingml/2006/main" xmlns:r="http://schemas.openxmlformats.org/officeDocument/2006/relationships" xmlns:p="http://schemas.openxmlformats.org/presentationml/2006/main">
   <p:cSld>
     <p:spTree>
@@ -49384,7 +51246,7 @@
 </p:sld>
 </file>
 
-<file path=ppt/slides/slide86.xml><?xml version="1.0" encoding="utf-8"?>
+<file path=ppt/slides/slide87.xml><?xml version="1.0" encoding="utf-8"?>
 <p:sld xmlns:a="http://schemas.openxmlformats.org/drawingml/2006/main" xmlns:r="http://schemas.openxmlformats.org/officeDocument/2006/relationships" xmlns:p="http://schemas.openxmlformats.org/presentationml/2006/main">
   <p:cSld>
     <p:spTree>
@@ -49552,7 +51414,7 @@
 </p:sld>
 </file>
 
-<file path=ppt/slides/slide87.xml><?xml version="1.0" encoding="utf-8"?>
+<file path=ppt/slides/slide88.xml><?xml version="1.0" encoding="utf-8"?>
 <p:sld xmlns:a="http://schemas.openxmlformats.org/drawingml/2006/main" xmlns:r="http://schemas.openxmlformats.org/officeDocument/2006/relationships" xmlns:p="http://schemas.openxmlformats.org/presentationml/2006/main">
   <p:cSld>
     <p:spTree>
@@ -49588,7 +51450,7 @@
 </p:sld>
 </file>
 
-<file path=ppt/slides/slide88.xml><?xml version="1.0" encoding="utf-8"?>
+<file path=ppt/slides/slide89.xml><?xml version="1.0" encoding="utf-8"?>
 <p:sld xmlns:a="http://schemas.openxmlformats.org/drawingml/2006/main" xmlns:r="http://schemas.openxmlformats.org/officeDocument/2006/relationships" xmlns:p="http://schemas.openxmlformats.org/presentationml/2006/main">
   <p:cSld>
     <p:spTree>
@@ -49751,128 +51613,6 @@
     <p:extLst>
       <p:ext uri="{BB962C8B-B14F-4D97-AF65-F5344CB8AC3E}">
         <p14:creationId xmlns:p14="http://schemas.microsoft.com/office/powerpoint/2010/main" val="251339051"/>
-      </p:ext>
-    </p:extLst>
-  </p:cSld>
-  <p:clrMapOvr>
-    <a:masterClrMapping/>
-  </p:clrMapOvr>
-</p:sld>
-</file>
-
-<file path=ppt/slides/slide89.xml><?xml version="1.0" encoding="utf-8"?>
-<p:sld xmlns:a="http://schemas.openxmlformats.org/drawingml/2006/main" xmlns:r="http://schemas.openxmlformats.org/officeDocument/2006/relationships" xmlns:p="http://schemas.openxmlformats.org/presentationml/2006/main">
-  <p:cSld>
-    <p:spTree>
-      <p:nvGrpSpPr>
-        <p:cNvPr id="1" name="">
-          <a:extLst>
-            <a:ext uri="{FF2B5EF4-FFF2-40B4-BE49-F238E27FC236}">
-              <a16:creationId xmlns:a16="http://schemas.microsoft.com/office/drawing/2014/main" id="{FC9F031F-B6B7-40F1-7623-40E901DC0750}"/>
-            </a:ext>
-          </a:extLst>
-        </p:cNvPr>
-        <p:cNvGrpSpPr/>
-        <p:nvPr/>
-      </p:nvGrpSpPr>
-      <p:grpSpPr>
-        <a:xfrm>
-          <a:off x="0" y="0"/>
-          <a:ext cx="0" cy="0"/>
-          <a:chOff x="0" y="0"/>
-          <a:chExt cx="0" cy="0"/>
-        </a:xfrm>
-      </p:grpSpPr>
-      <p:pic>
-        <p:nvPicPr>
-          <p:cNvPr id="3" name="図 2">
-            <a:extLst>
-              <a:ext uri="{FF2B5EF4-FFF2-40B4-BE49-F238E27FC236}">
-                <a16:creationId xmlns:a16="http://schemas.microsoft.com/office/drawing/2014/main" id="{EB0907B9-ECF1-88BC-F2C8-6D127F0613E3}"/>
-              </a:ext>
-            </a:extLst>
-          </p:cNvPr>
-          <p:cNvPicPr>
-            <a:picLocks noChangeAspect="1"/>
-          </p:cNvPicPr>
-          <p:nvPr/>
-        </p:nvPicPr>
-        <p:blipFill>
-          <a:blip r:embed="rId2">
-            <a:extLst>
-              <a:ext uri="{28A0092B-C50C-407E-A947-70E740481C1C}">
-                <a14:useLocalDpi xmlns:a14="http://schemas.microsoft.com/office/drawing/2010/main" val="0"/>
-              </a:ext>
-            </a:extLst>
-          </a:blip>
-          <a:stretch>
-            <a:fillRect/>
-          </a:stretch>
-        </p:blipFill>
-        <p:spPr>
-          <a:xfrm>
-            <a:off x="4100512" y="2047875"/>
-            <a:ext cx="3990975" cy="2762250"/>
-          </a:xfrm>
-          <a:prstGeom prst="rect">
-            <a:avLst/>
-          </a:prstGeom>
-        </p:spPr>
-      </p:pic>
-      <p:sp>
-        <p:nvSpPr>
-          <p:cNvPr id="4" name="正方形/長方形 3">
-            <a:extLst>
-              <a:ext uri="{FF2B5EF4-FFF2-40B4-BE49-F238E27FC236}">
-                <a16:creationId xmlns:a16="http://schemas.microsoft.com/office/drawing/2014/main" id="{D7AB3F89-760F-870B-1AD5-2978E08F310A}"/>
-              </a:ext>
-            </a:extLst>
-          </p:cNvPr>
-          <p:cNvSpPr/>
-          <p:nvPr/>
-        </p:nvSpPr>
-        <p:spPr>
-          <a:xfrm flipV="1">
-            <a:off x="4119175" y="3221326"/>
-            <a:ext cx="432000" cy="432000"/>
-          </a:xfrm>
-          <a:prstGeom prst="rect">
-            <a:avLst/>
-          </a:prstGeom>
-          <a:noFill/>
-          <a:ln w="28575">
-            <a:solidFill>
-              <a:srgbClr val="FF0000"/>
-            </a:solidFill>
-          </a:ln>
-        </p:spPr>
-        <p:style>
-          <a:lnRef idx="2">
-            <a:schemeClr val="accent6"/>
-          </a:lnRef>
-          <a:fillRef idx="1">
-            <a:schemeClr val="lt1"/>
-          </a:fillRef>
-          <a:effectRef idx="0">
-            <a:schemeClr val="accent6"/>
-          </a:effectRef>
-          <a:fontRef idx="minor">
-            <a:schemeClr val="dk1"/>
-          </a:fontRef>
-        </p:style>
-        <p:txBody>
-          <a:bodyPr rtlCol="0" anchor="ctr"/>
-          <a:lstStyle/>
-          <a:p>
-            <a:pPr algn="ctr"/>
-            <a:endParaRPr kumimoji="1" lang="ja-JP" altLang="en-US"/>
-          </a:p>
-        </p:txBody>
-      </p:sp>
-    </p:spTree>
-    <p:extLst>
-      <p:ext uri="{BB962C8B-B14F-4D97-AF65-F5344CB8AC3E}">
-        <p14:creationId xmlns:p14="http://schemas.microsoft.com/office/powerpoint/2010/main" val="2214367467"/>
       </p:ext>
     </p:extLst>
   </p:cSld>
@@ -49926,6 +51666,128 @@
         <p:cNvPr id="1" name="">
           <a:extLst>
             <a:ext uri="{FF2B5EF4-FFF2-40B4-BE49-F238E27FC236}">
+              <a16:creationId xmlns:a16="http://schemas.microsoft.com/office/drawing/2014/main" id="{FC9F031F-B6B7-40F1-7623-40E901DC0750}"/>
+            </a:ext>
+          </a:extLst>
+        </p:cNvPr>
+        <p:cNvGrpSpPr/>
+        <p:nvPr/>
+      </p:nvGrpSpPr>
+      <p:grpSpPr>
+        <a:xfrm>
+          <a:off x="0" y="0"/>
+          <a:ext cx="0" cy="0"/>
+          <a:chOff x="0" y="0"/>
+          <a:chExt cx="0" cy="0"/>
+        </a:xfrm>
+      </p:grpSpPr>
+      <p:pic>
+        <p:nvPicPr>
+          <p:cNvPr id="3" name="図 2">
+            <a:extLst>
+              <a:ext uri="{FF2B5EF4-FFF2-40B4-BE49-F238E27FC236}">
+                <a16:creationId xmlns:a16="http://schemas.microsoft.com/office/drawing/2014/main" id="{EB0907B9-ECF1-88BC-F2C8-6D127F0613E3}"/>
+              </a:ext>
+            </a:extLst>
+          </p:cNvPr>
+          <p:cNvPicPr>
+            <a:picLocks noChangeAspect="1"/>
+          </p:cNvPicPr>
+          <p:nvPr/>
+        </p:nvPicPr>
+        <p:blipFill>
+          <a:blip r:embed="rId2">
+            <a:extLst>
+              <a:ext uri="{28A0092B-C50C-407E-A947-70E740481C1C}">
+                <a14:useLocalDpi xmlns:a14="http://schemas.microsoft.com/office/drawing/2010/main" val="0"/>
+              </a:ext>
+            </a:extLst>
+          </a:blip>
+          <a:stretch>
+            <a:fillRect/>
+          </a:stretch>
+        </p:blipFill>
+        <p:spPr>
+          <a:xfrm>
+            <a:off x="4100512" y="2047875"/>
+            <a:ext cx="3990975" cy="2762250"/>
+          </a:xfrm>
+          <a:prstGeom prst="rect">
+            <a:avLst/>
+          </a:prstGeom>
+        </p:spPr>
+      </p:pic>
+      <p:sp>
+        <p:nvSpPr>
+          <p:cNvPr id="4" name="正方形/長方形 3">
+            <a:extLst>
+              <a:ext uri="{FF2B5EF4-FFF2-40B4-BE49-F238E27FC236}">
+                <a16:creationId xmlns:a16="http://schemas.microsoft.com/office/drawing/2014/main" id="{D7AB3F89-760F-870B-1AD5-2978E08F310A}"/>
+              </a:ext>
+            </a:extLst>
+          </p:cNvPr>
+          <p:cNvSpPr/>
+          <p:nvPr/>
+        </p:nvSpPr>
+        <p:spPr>
+          <a:xfrm flipV="1">
+            <a:off x="4119175" y="3221326"/>
+            <a:ext cx="432000" cy="432000"/>
+          </a:xfrm>
+          <a:prstGeom prst="rect">
+            <a:avLst/>
+          </a:prstGeom>
+          <a:noFill/>
+          <a:ln w="28575">
+            <a:solidFill>
+              <a:srgbClr val="FF0000"/>
+            </a:solidFill>
+          </a:ln>
+        </p:spPr>
+        <p:style>
+          <a:lnRef idx="2">
+            <a:schemeClr val="accent6"/>
+          </a:lnRef>
+          <a:fillRef idx="1">
+            <a:schemeClr val="lt1"/>
+          </a:fillRef>
+          <a:effectRef idx="0">
+            <a:schemeClr val="accent6"/>
+          </a:effectRef>
+          <a:fontRef idx="minor">
+            <a:schemeClr val="dk1"/>
+          </a:fontRef>
+        </p:style>
+        <p:txBody>
+          <a:bodyPr rtlCol="0" anchor="ctr"/>
+          <a:lstStyle/>
+          <a:p>
+            <a:pPr algn="ctr"/>
+            <a:endParaRPr kumimoji="1" lang="ja-JP" altLang="en-US"/>
+          </a:p>
+        </p:txBody>
+      </p:sp>
+    </p:spTree>
+    <p:extLst>
+      <p:ext uri="{BB962C8B-B14F-4D97-AF65-F5344CB8AC3E}">
+        <p14:creationId xmlns:p14="http://schemas.microsoft.com/office/powerpoint/2010/main" val="2214367467"/>
+      </p:ext>
+    </p:extLst>
+  </p:cSld>
+  <p:clrMapOvr>
+    <a:masterClrMapping/>
+  </p:clrMapOvr>
+</p:sld>
+</file>
+
+<file path=ppt/slides/slide91.xml><?xml version="1.0" encoding="utf-8"?>
+<p:sld xmlns:a="http://schemas.openxmlformats.org/drawingml/2006/main" xmlns:r="http://schemas.openxmlformats.org/officeDocument/2006/relationships" xmlns:p="http://schemas.openxmlformats.org/presentationml/2006/main">
+  <p:cSld>
+    <p:spTree>
+      <p:nvGrpSpPr>
+        <p:cNvPr id="1" name="">
+          <a:extLst>
+            <a:ext uri="{FF2B5EF4-FFF2-40B4-BE49-F238E27FC236}">
               <a16:creationId xmlns:a16="http://schemas.microsoft.com/office/drawing/2014/main" id="{35A34F90-D11B-B88F-3B83-5669E338DB12}"/>
             </a:ext>
           </a:extLst>
@@ -50040,7 +51902,7 @@
 </p:sld>
 </file>
 
-<file path=ppt/slides/slide91.xml><?xml version="1.0" encoding="utf-8"?>
+<file path=ppt/slides/slide92.xml><?xml version="1.0" encoding="utf-8"?>
 <p:sld xmlns:a="http://schemas.openxmlformats.org/drawingml/2006/main" xmlns:r="http://schemas.openxmlformats.org/officeDocument/2006/relationships" xmlns:p="http://schemas.openxmlformats.org/presentationml/2006/main">
   <p:cSld>
     <p:spTree>
@@ -50300,7 +52162,7 @@
 </p:sld>
 </file>
 
-<file path=ppt/slides/slide92.xml><?xml version="1.0" encoding="utf-8"?>
+<file path=ppt/slides/slide93.xml><?xml version="1.0" encoding="utf-8"?>
 <p:sld xmlns:a="http://schemas.openxmlformats.org/drawingml/2006/main" xmlns:r="http://schemas.openxmlformats.org/officeDocument/2006/relationships" xmlns:p="http://schemas.openxmlformats.org/presentationml/2006/main">
   <p:cSld>
     <p:spTree>
@@ -50408,7 +52270,7 @@
 </p:sld>
 </file>
 
-<file path=ppt/slides/slide93.xml><?xml version="1.0" encoding="utf-8"?>
+<file path=ppt/slides/slide94.xml><?xml version="1.0" encoding="utf-8"?>
 <p:sld xmlns:a="http://schemas.openxmlformats.org/drawingml/2006/main" xmlns:r="http://schemas.openxmlformats.org/officeDocument/2006/relationships" xmlns:p="http://schemas.openxmlformats.org/presentationml/2006/main">
   <p:cSld>
     <p:spTree>
@@ -50485,7 +52347,7 @@
 </p:sld>
 </file>
 
-<file path=ppt/slides/slide94.xml><?xml version="1.0" encoding="utf-8"?>
+<file path=ppt/slides/slide95.xml><?xml version="1.0" encoding="utf-8"?>
 <p:sld xmlns:a="http://schemas.openxmlformats.org/drawingml/2006/main" xmlns:r="http://schemas.openxmlformats.org/officeDocument/2006/relationships" xmlns:p="http://schemas.openxmlformats.org/presentationml/2006/main">
   <p:cSld>
     <p:spTree>
@@ -50521,7 +52383,7 @@
 </p:sld>
 </file>
 
-<file path=ppt/slides/slide95.xml><?xml version="1.0" encoding="utf-8"?>
+<file path=ppt/slides/slide96.xml><?xml version="1.0" encoding="utf-8"?>
 <p:sld xmlns:a="http://schemas.openxmlformats.org/drawingml/2006/main" xmlns:r="http://schemas.openxmlformats.org/officeDocument/2006/relationships" xmlns:p="http://schemas.openxmlformats.org/presentationml/2006/main">
   <p:cSld>
     <p:spTree>
@@ -50679,7 +52541,7 @@
 </p:sld>
 </file>
 
-<file path=ppt/slides/slide96.xml><?xml version="1.0" encoding="utf-8"?>
+<file path=ppt/slides/slide97.xml><?xml version="1.0" encoding="utf-8"?>
 <p:sld xmlns:a="http://schemas.openxmlformats.org/drawingml/2006/main" xmlns:r="http://schemas.openxmlformats.org/officeDocument/2006/relationships" xmlns:p="http://schemas.openxmlformats.org/presentationml/2006/main">
   <p:cSld>
     <p:spTree>
@@ -50839,7 +52701,7 @@
 </p:sld>
 </file>
 
-<file path=ppt/slides/slide97.xml><?xml version="1.0" encoding="utf-8"?>
+<file path=ppt/slides/slide98.xml><?xml version="1.0" encoding="utf-8"?>
 <p:sld xmlns:a="http://schemas.openxmlformats.org/drawingml/2006/main" xmlns:r="http://schemas.openxmlformats.org/officeDocument/2006/relationships" xmlns:p="http://schemas.openxmlformats.org/presentationml/2006/main">
   <p:cSld>
     <p:spTree>
@@ -50961,7 +52823,7 @@
 </p:sld>
 </file>
 
-<file path=ppt/slides/slide98.xml><?xml version="1.0" encoding="utf-8"?>
+<file path=ppt/slides/slide99.xml><?xml version="1.0" encoding="utf-8"?>
 <p:sld xmlns:a="http://schemas.openxmlformats.org/drawingml/2006/main" xmlns:r="http://schemas.openxmlformats.org/officeDocument/2006/relationships" xmlns:p="http://schemas.openxmlformats.org/presentationml/2006/main">
   <p:cSld>
     <p:spTree>
@@ -51112,42 +52974,6 @@
     <p:extLst>
       <p:ext uri="{BB962C8B-B14F-4D97-AF65-F5344CB8AC3E}">
         <p14:creationId xmlns:p14="http://schemas.microsoft.com/office/powerpoint/2010/main" val="1673256633"/>
-      </p:ext>
-    </p:extLst>
-  </p:cSld>
-  <p:clrMapOvr>
-    <a:masterClrMapping/>
-  </p:clrMapOvr>
-</p:sld>
-</file>
-
-<file path=ppt/slides/slide99.xml><?xml version="1.0" encoding="utf-8"?>
-<p:sld xmlns:a="http://schemas.openxmlformats.org/drawingml/2006/main" xmlns:r="http://schemas.openxmlformats.org/officeDocument/2006/relationships" xmlns:p="http://schemas.openxmlformats.org/presentationml/2006/main">
-  <p:cSld>
-    <p:spTree>
-      <p:nvGrpSpPr>
-        <p:cNvPr id="1" name="">
-          <a:extLst>
-            <a:ext uri="{FF2B5EF4-FFF2-40B4-BE49-F238E27FC236}">
-              <a16:creationId xmlns:a16="http://schemas.microsoft.com/office/drawing/2014/main" id="{3E1076F6-F09B-6C65-709A-A33333D53F07}"/>
-            </a:ext>
-          </a:extLst>
-        </p:cNvPr>
-        <p:cNvGrpSpPr/>
-        <p:nvPr/>
-      </p:nvGrpSpPr>
-      <p:grpSpPr>
-        <a:xfrm>
-          <a:off x="0" y="0"/>
-          <a:ext cx="0" cy="0"/>
-          <a:chOff x="0" y="0"/>
-          <a:chExt cx="0" cy="0"/>
-        </a:xfrm>
-      </p:grpSpPr>
-    </p:spTree>
-    <p:extLst>
-      <p:ext uri="{BB962C8B-B14F-4D97-AF65-F5344CB8AC3E}">
-        <p14:creationId xmlns:p14="http://schemas.microsoft.com/office/powerpoint/2010/main" val="3798773095"/>
       </p:ext>
     </p:extLst>
   </p:cSld>

--- a/01_テキスト/Git入門_図.pptx
+++ b/01_テキスト/Git入門_図.pptx
@@ -27,130 +27,129 @@
     <p:sldId id="289" r:id="rId21"/>
     <p:sldId id="266" r:id="rId22"/>
     <p:sldId id="267" r:id="rId23"/>
-    <p:sldId id="269" r:id="rId24"/>
-    <p:sldId id="270" r:id="rId25"/>
-    <p:sldId id="271" r:id="rId26"/>
-    <p:sldId id="281" r:id="rId27"/>
-    <p:sldId id="282" r:id="rId28"/>
-    <p:sldId id="286" r:id="rId29"/>
-    <p:sldId id="287" r:id="rId30"/>
-    <p:sldId id="296" r:id="rId31"/>
-    <p:sldId id="291" r:id="rId32"/>
-    <p:sldId id="292" r:id="rId33"/>
-    <p:sldId id="283" r:id="rId34"/>
-    <p:sldId id="284" r:id="rId35"/>
-    <p:sldId id="293" r:id="rId36"/>
-    <p:sldId id="294" r:id="rId37"/>
-    <p:sldId id="297" r:id="rId38"/>
-    <p:sldId id="298" r:id="rId39"/>
-    <p:sldId id="285" r:id="rId40"/>
-    <p:sldId id="406" r:id="rId41"/>
-    <p:sldId id="299" r:id="rId42"/>
-    <p:sldId id="304" r:id="rId43"/>
-    <p:sldId id="300" r:id="rId44"/>
-    <p:sldId id="305" r:id="rId45"/>
-    <p:sldId id="301" r:id="rId46"/>
-    <p:sldId id="306" r:id="rId47"/>
-    <p:sldId id="407" r:id="rId48"/>
-    <p:sldId id="302" r:id="rId49"/>
-    <p:sldId id="303" r:id="rId50"/>
-    <p:sldId id="311" r:id="rId51"/>
-    <p:sldId id="312" r:id="rId52"/>
-    <p:sldId id="313" r:id="rId53"/>
-    <p:sldId id="314" r:id="rId54"/>
-    <p:sldId id="315" r:id="rId55"/>
-    <p:sldId id="316" r:id="rId56"/>
-    <p:sldId id="317" r:id="rId57"/>
-    <p:sldId id="318" r:id="rId58"/>
-    <p:sldId id="319" r:id="rId59"/>
-    <p:sldId id="320" r:id="rId60"/>
-    <p:sldId id="321" r:id="rId61"/>
-    <p:sldId id="324" r:id="rId62"/>
-    <p:sldId id="325" r:id="rId63"/>
-    <p:sldId id="326" r:id="rId64"/>
-    <p:sldId id="327" r:id="rId65"/>
-    <p:sldId id="322" r:id="rId66"/>
-    <p:sldId id="328" r:id="rId67"/>
-    <p:sldId id="323" r:id="rId68"/>
-    <p:sldId id="329" r:id="rId69"/>
-    <p:sldId id="330" r:id="rId70"/>
-    <p:sldId id="332" r:id="rId71"/>
-    <p:sldId id="331" r:id="rId72"/>
-    <p:sldId id="333" r:id="rId73"/>
-    <p:sldId id="334" r:id="rId74"/>
-    <p:sldId id="335" r:id="rId75"/>
-    <p:sldId id="340" r:id="rId76"/>
-    <p:sldId id="336" r:id="rId77"/>
-    <p:sldId id="341" r:id="rId78"/>
-    <p:sldId id="342" r:id="rId79"/>
-    <p:sldId id="344" r:id="rId80"/>
-    <p:sldId id="337" r:id="rId81"/>
-    <p:sldId id="343" r:id="rId82"/>
-    <p:sldId id="345" r:id="rId83"/>
-    <p:sldId id="346" r:id="rId84"/>
-    <p:sldId id="347" r:id="rId85"/>
-    <p:sldId id="338" r:id="rId86"/>
-    <p:sldId id="348" r:id="rId87"/>
-    <p:sldId id="339" r:id="rId88"/>
-    <p:sldId id="349" r:id="rId89"/>
-    <p:sldId id="350" r:id="rId90"/>
-    <p:sldId id="351" r:id="rId91"/>
-    <p:sldId id="362" r:id="rId92"/>
-    <p:sldId id="352" r:id="rId93"/>
-    <p:sldId id="353" r:id="rId94"/>
-    <p:sldId id="354" r:id="rId95"/>
-    <p:sldId id="355" r:id="rId96"/>
-    <p:sldId id="356" r:id="rId97"/>
-    <p:sldId id="357" r:id="rId98"/>
-    <p:sldId id="358" r:id="rId99"/>
-    <p:sldId id="359" r:id="rId100"/>
-    <p:sldId id="360" r:id="rId101"/>
-    <p:sldId id="361" r:id="rId102"/>
-    <p:sldId id="363" r:id="rId103"/>
-    <p:sldId id="364" r:id="rId104"/>
-    <p:sldId id="365" r:id="rId105"/>
-    <p:sldId id="366" r:id="rId106"/>
-    <p:sldId id="367" r:id="rId107"/>
-    <p:sldId id="369" r:id="rId108"/>
-    <p:sldId id="370" r:id="rId109"/>
-    <p:sldId id="371" r:id="rId110"/>
-    <p:sldId id="372" r:id="rId111"/>
-    <p:sldId id="373" r:id="rId112"/>
-    <p:sldId id="368" r:id="rId113"/>
-    <p:sldId id="374" r:id="rId114"/>
-    <p:sldId id="379" r:id="rId115"/>
-    <p:sldId id="375" r:id="rId116"/>
-    <p:sldId id="378" r:id="rId117"/>
-    <p:sldId id="376" r:id="rId118"/>
-    <p:sldId id="380" r:id="rId119"/>
-    <p:sldId id="385" r:id="rId120"/>
-    <p:sldId id="377" r:id="rId121"/>
-    <p:sldId id="381" r:id="rId122"/>
-    <p:sldId id="382" r:id="rId123"/>
-    <p:sldId id="383" r:id="rId124"/>
-    <p:sldId id="384" r:id="rId125"/>
-    <p:sldId id="386" r:id="rId126"/>
-    <p:sldId id="387" r:id="rId127"/>
-    <p:sldId id="388" r:id="rId128"/>
-    <p:sldId id="392" r:id="rId129"/>
-    <p:sldId id="389" r:id="rId130"/>
-    <p:sldId id="390" r:id="rId131"/>
-    <p:sldId id="391" r:id="rId132"/>
-    <p:sldId id="393" r:id="rId133"/>
-    <p:sldId id="394" r:id="rId134"/>
-    <p:sldId id="399" r:id="rId135"/>
-    <p:sldId id="400" r:id="rId136"/>
-    <p:sldId id="401" r:id="rId137"/>
-    <p:sldId id="405" r:id="rId138"/>
-    <p:sldId id="403" r:id="rId139"/>
-    <p:sldId id="402" r:id="rId140"/>
-    <p:sldId id="404" r:id="rId141"/>
-    <p:sldId id="408" r:id="rId142"/>
-    <p:sldId id="409" r:id="rId143"/>
-    <p:sldId id="410" r:id="rId144"/>
-    <p:sldId id="411" r:id="rId145"/>
-    <p:sldId id="412" r:id="rId146"/>
-    <p:sldId id="413" r:id="rId147"/>
+    <p:sldId id="270" r:id="rId24"/>
+    <p:sldId id="271" r:id="rId25"/>
+    <p:sldId id="281" r:id="rId26"/>
+    <p:sldId id="282" r:id="rId27"/>
+    <p:sldId id="286" r:id="rId28"/>
+    <p:sldId id="287" r:id="rId29"/>
+    <p:sldId id="296" r:id="rId30"/>
+    <p:sldId id="291" r:id="rId31"/>
+    <p:sldId id="292" r:id="rId32"/>
+    <p:sldId id="283" r:id="rId33"/>
+    <p:sldId id="284" r:id="rId34"/>
+    <p:sldId id="293" r:id="rId35"/>
+    <p:sldId id="294" r:id="rId36"/>
+    <p:sldId id="297" r:id="rId37"/>
+    <p:sldId id="298" r:id="rId38"/>
+    <p:sldId id="285" r:id="rId39"/>
+    <p:sldId id="406" r:id="rId40"/>
+    <p:sldId id="299" r:id="rId41"/>
+    <p:sldId id="304" r:id="rId42"/>
+    <p:sldId id="300" r:id="rId43"/>
+    <p:sldId id="305" r:id="rId44"/>
+    <p:sldId id="301" r:id="rId45"/>
+    <p:sldId id="306" r:id="rId46"/>
+    <p:sldId id="407" r:id="rId47"/>
+    <p:sldId id="302" r:id="rId48"/>
+    <p:sldId id="303" r:id="rId49"/>
+    <p:sldId id="311" r:id="rId50"/>
+    <p:sldId id="312" r:id="rId51"/>
+    <p:sldId id="313" r:id="rId52"/>
+    <p:sldId id="314" r:id="rId53"/>
+    <p:sldId id="315" r:id="rId54"/>
+    <p:sldId id="316" r:id="rId55"/>
+    <p:sldId id="317" r:id="rId56"/>
+    <p:sldId id="318" r:id="rId57"/>
+    <p:sldId id="319" r:id="rId58"/>
+    <p:sldId id="320" r:id="rId59"/>
+    <p:sldId id="321" r:id="rId60"/>
+    <p:sldId id="324" r:id="rId61"/>
+    <p:sldId id="325" r:id="rId62"/>
+    <p:sldId id="326" r:id="rId63"/>
+    <p:sldId id="327" r:id="rId64"/>
+    <p:sldId id="322" r:id="rId65"/>
+    <p:sldId id="328" r:id="rId66"/>
+    <p:sldId id="323" r:id="rId67"/>
+    <p:sldId id="329" r:id="rId68"/>
+    <p:sldId id="330" r:id="rId69"/>
+    <p:sldId id="332" r:id="rId70"/>
+    <p:sldId id="331" r:id="rId71"/>
+    <p:sldId id="333" r:id="rId72"/>
+    <p:sldId id="334" r:id="rId73"/>
+    <p:sldId id="335" r:id="rId74"/>
+    <p:sldId id="340" r:id="rId75"/>
+    <p:sldId id="336" r:id="rId76"/>
+    <p:sldId id="341" r:id="rId77"/>
+    <p:sldId id="342" r:id="rId78"/>
+    <p:sldId id="344" r:id="rId79"/>
+    <p:sldId id="337" r:id="rId80"/>
+    <p:sldId id="343" r:id="rId81"/>
+    <p:sldId id="345" r:id="rId82"/>
+    <p:sldId id="346" r:id="rId83"/>
+    <p:sldId id="347" r:id="rId84"/>
+    <p:sldId id="338" r:id="rId85"/>
+    <p:sldId id="348" r:id="rId86"/>
+    <p:sldId id="339" r:id="rId87"/>
+    <p:sldId id="349" r:id="rId88"/>
+    <p:sldId id="350" r:id="rId89"/>
+    <p:sldId id="351" r:id="rId90"/>
+    <p:sldId id="362" r:id="rId91"/>
+    <p:sldId id="352" r:id="rId92"/>
+    <p:sldId id="353" r:id="rId93"/>
+    <p:sldId id="354" r:id="rId94"/>
+    <p:sldId id="355" r:id="rId95"/>
+    <p:sldId id="356" r:id="rId96"/>
+    <p:sldId id="357" r:id="rId97"/>
+    <p:sldId id="358" r:id="rId98"/>
+    <p:sldId id="359" r:id="rId99"/>
+    <p:sldId id="360" r:id="rId100"/>
+    <p:sldId id="361" r:id="rId101"/>
+    <p:sldId id="363" r:id="rId102"/>
+    <p:sldId id="364" r:id="rId103"/>
+    <p:sldId id="365" r:id="rId104"/>
+    <p:sldId id="366" r:id="rId105"/>
+    <p:sldId id="367" r:id="rId106"/>
+    <p:sldId id="369" r:id="rId107"/>
+    <p:sldId id="370" r:id="rId108"/>
+    <p:sldId id="371" r:id="rId109"/>
+    <p:sldId id="372" r:id="rId110"/>
+    <p:sldId id="373" r:id="rId111"/>
+    <p:sldId id="368" r:id="rId112"/>
+    <p:sldId id="374" r:id="rId113"/>
+    <p:sldId id="379" r:id="rId114"/>
+    <p:sldId id="375" r:id="rId115"/>
+    <p:sldId id="378" r:id="rId116"/>
+    <p:sldId id="376" r:id="rId117"/>
+    <p:sldId id="380" r:id="rId118"/>
+    <p:sldId id="385" r:id="rId119"/>
+    <p:sldId id="377" r:id="rId120"/>
+    <p:sldId id="381" r:id="rId121"/>
+    <p:sldId id="382" r:id="rId122"/>
+    <p:sldId id="383" r:id="rId123"/>
+    <p:sldId id="384" r:id="rId124"/>
+    <p:sldId id="386" r:id="rId125"/>
+    <p:sldId id="387" r:id="rId126"/>
+    <p:sldId id="388" r:id="rId127"/>
+    <p:sldId id="392" r:id="rId128"/>
+    <p:sldId id="389" r:id="rId129"/>
+    <p:sldId id="390" r:id="rId130"/>
+    <p:sldId id="391" r:id="rId131"/>
+    <p:sldId id="393" r:id="rId132"/>
+    <p:sldId id="394" r:id="rId133"/>
+    <p:sldId id="399" r:id="rId134"/>
+    <p:sldId id="400" r:id="rId135"/>
+    <p:sldId id="401" r:id="rId136"/>
+    <p:sldId id="405" r:id="rId137"/>
+    <p:sldId id="403" r:id="rId138"/>
+    <p:sldId id="402" r:id="rId139"/>
+    <p:sldId id="404" r:id="rId140"/>
+    <p:sldId id="408" r:id="rId141"/>
+    <p:sldId id="409" r:id="rId142"/>
+    <p:sldId id="410" r:id="rId143"/>
+    <p:sldId id="411" r:id="rId144"/>
+    <p:sldId id="412" r:id="rId145"/>
+    <p:sldId id="413" r:id="rId146"/>
   </p:sldIdLst>
   <p:sldSz cx="12192000" cy="6858000"/>
   <p:notesSz cx="6858000" cy="9144000"/>
@@ -404,7 +403,7 @@
           <a:p>
             <a:fld id="{7D4D8970-2F0F-4F19-9427-F451CC43E670}" type="datetimeFigureOut">
               <a:rPr kumimoji="1" lang="ja-JP" altLang="en-US" smtClean="0"/>
-              <a:t>2026/6/21</a:t>
+              <a:t>2026/6/22</a:t>
             </a:fld>
             <a:endParaRPr kumimoji="1" lang="ja-JP" altLang="en-US"/>
           </a:p>
@@ -634,7 +633,7 @@
           <a:p>
             <a:fld id="{7D4D8970-2F0F-4F19-9427-F451CC43E670}" type="datetimeFigureOut">
               <a:rPr kumimoji="1" lang="ja-JP" altLang="en-US" smtClean="0"/>
-              <a:t>2026/6/21</a:t>
+              <a:t>2026/6/22</a:t>
             </a:fld>
             <a:endParaRPr kumimoji="1" lang="ja-JP" altLang="en-US"/>
           </a:p>
@@ -874,7 +873,7 @@
           <a:p>
             <a:fld id="{7D4D8970-2F0F-4F19-9427-F451CC43E670}" type="datetimeFigureOut">
               <a:rPr kumimoji="1" lang="ja-JP" altLang="en-US" smtClean="0"/>
-              <a:t>2026/6/21</a:t>
+              <a:t>2026/6/22</a:t>
             </a:fld>
             <a:endParaRPr kumimoji="1" lang="ja-JP" altLang="en-US"/>
           </a:p>
@@ -1104,7 +1103,7 @@
           <a:p>
             <a:fld id="{7D4D8970-2F0F-4F19-9427-F451CC43E670}" type="datetimeFigureOut">
               <a:rPr kumimoji="1" lang="ja-JP" altLang="en-US" smtClean="0"/>
-              <a:t>2026/6/21</a:t>
+              <a:t>2026/6/22</a:t>
             </a:fld>
             <a:endParaRPr kumimoji="1" lang="ja-JP" altLang="en-US"/>
           </a:p>
@@ -1379,7 +1378,7 @@
           <a:p>
             <a:fld id="{7D4D8970-2F0F-4F19-9427-F451CC43E670}" type="datetimeFigureOut">
               <a:rPr kumimoji="1" lang="ja-JP" altLang="en-US" smtClean="0"/>
-              <a:t>2026/6/21</a:t>
+              <a:t>2026/6/22</a:t>
             </a:fld>
             <a:endParaRPr kumimoji="1" lang="ja-JP" altLang="en-US"/>
           </a:p>
@@ -1708,7 +1707,7 @@
           <a:p>
             <a:fld id="{7D4D8970-2F0F-4F19-9427-F451CC43E670}" type="datetimeFigureOut">
               <a:rPr kumimoji="1" lang="ja-JP" altLang="en-US" smtClean="0"/>
-              <a:t>2026/6/21</a:t>
+              <a:t>2026/6/22</a:t>
             </a:fld>
             <a:endParaRPr kumimoji="1" lang="ja-JP" altLang="en-US"/>
           </a:p>
@@ -2184,7 +2183,7 @@
           <a:p>
             <a:fld id="{7D4D8970-2F0F-4F19-9427-F451CC43E670}" type="datetimeFigureOut">
               <a:rPr kumimoji="1" lang="ja-JP" altLang="en-US" smtClean="0"/>
-              <a:t>2026/6/21</a:t>
+              <a:t>2026/6/22</a:t>
             </a:fld>
             <a:endParaRPr kumimoji="1" lang="ja-JP" altLang="en-US"/>
           </a:p>
@@ -2325,7 +2324,7 @@
           <a:p>
             <a:fld id="{7D4D8970-2F0F-4F19-9427-F451CC43E670}" type="datetimeFigureOut">
               <a:rPr kumimoji="1" lang="ja-JP" altLang="en-US" smtClean="0"/>
-              <a:t>2026/6/21</a:t>
+              <a:t>2026/6/22</a:t>
             </a:fld>
             <a:endParaRPr kumimoji="1" lang="ja-JP" altLang="en-US"/>
           </a:p>
@@ -2438,7 +2437,7 @@
           <a:p>
             <a:fld id="{7D4D8970-2F0F-4F19-9427-F451CC43E670}" type="datetimeFigureOut">
               <a:rPr kumimoji="1" lang="ja-JP" altLang="en-US" smtClean="0"/>
-              <a:t>2026/6/21</a:t>
+              <a:t>2026/6/22</a:t>
             </a:fld>
             <a:endParaRPr kumimoji="1" lang="ja-JP" altLang="en-US"/>
           </a:p>
@@ -2781,7 +2780,7 @@
           <a:p>
             <a:fld id="{7D4D8970-2F0F-4F19-9427-F451CC43E670}" type="datetimeFigureOut">
               <a:rPr kumimoji="1" lang="ja-JP" altLang="en-US" smtClean="0"/>
-              <a:t>2026/6/21</a:t>
+              <a:t>2026/6/22</a:t>
             </a:fld>
             <a:endParaRPr kumimoji="1" lang="ja-JP" altLang="en-US"/>
           </a:p>
@@ -3069,7 +3068,7 @@
           <a:p>
             <a:fld id="{7D4D8970-2F0F-4F19-9427-F451CC43E670}" type="datetimeFigureOut">
               <a:rPr kumimoji="1" lang="ja-JP" altLang="en-US" smtClean="0"/>
-              <a:t>2026/6/21</a:t>
+              <a:t>2026/6/22</a:t>
             </a:fld>
             <a:endParaRPr kumimoji="1" lang="ja-JP" altLang="en-US"/>
           </a:p>
@@ -3342,7 +3341,7 @@
           <a:p>
             <a:fld id="{7D4D8970-2F0F-4F19-9427-F451CC43E670}" type="datetimeFigureOut">
               <a:rPr kumimoji="1" lang="ja-JP" altLang="en-US" smtClean="0"/>
-              <a:t>2026/6/21</a:t>
+              <a:t>2026/6/22</a:t>
             </a:fld>
             <a:endParaRPr kumimoji="1" lang="ja-JP" altLang="en-US"/>
           </a:p>
@@ -3866,42 +3865,6 @@
         <p:cNvPr id="1" name="">
           <a:extLst>
             <a:ext uri="{FF2B5EF4-FFF2-40B4-BE49-F238E27FC236}">
-              <a16:creationId xmlns:a16="http://schemas.microsoft.com/office/drawing/2014/main" id="{3E1076F6-F09B-6C65-709A-A33333D53F07}"/>
-            </a:ext>
-          </a:extLst>
-        </p:cNvPr>
-        <p:cNvGrpSpPr/>
-        <p:nvPr/>
-      </p:nvGrpSpPr>
-      <p:grpSpPr>
-        <a:xfrm>
-          <a:off x="0" y="0"/>
-          <a:ext cx="0" cy="0"/>
-          <a:chOff x="0" y="0"/>
-          <a:chExt cx="0" cy="0"/>
-        </a:xfrm>
-      </p:grpSpPr>
-    </p:spTree>
-    <p:extLst>
-      <p:ext uri="{BB962C8B-B14F-4D97-AF65-F5344CB8AC3E}">
-        <p14:creationId xmlns:p14="http://schemas.microsoft.com/office/powerpoint/2010/main" val="3798773095"/>
-      </p:ext>
-    </p:extLst>
-  </p:cSld>
-  <p:clrMapOvr>
-    <a:masterClrMapping/>
-  </p:clrMapOvr>
-</p:sld>
-</file>
-
-<file path=ppt/slides/slide101.xml><?xml version="1.0" encoding="utf-8"?>
-<p:sld xmlns:a="http://schemas.openxmlformats.org/drawingml/2006/main" xmlns:r="http://schemas.openxmlformats.org/officeDocument/2006/relationships" xmlns:p="http://schemas.openxmlformats.org/presentationml/2006/main">
-  <p:cSld>
-    <p:spTree>
-      <p:nvGrpSpPr>
-        <p:cNvPr id="1" name="">
-          <a:extLst>
-            <a:ext uri="{FF2B5EF4-FFF2-40B4-BE49-F238E27FC236}">
               <a16:creationId xmlns:a16="http://schemas.microsoft.com/office/drawing/2014/main" id="{D0582A56-9299-8BA4-A612-FFCC22A778B1}"/>
             </a:ext>
           </a:extLst>
@@ -3930,7 +3893,7 @@
 </p:sld>
 </file>
 
-<file path=ppt/slides/slide102.xml><?xml version="1.0" encoding="utf-8"?>
+<file path=ppt/slides/slide101.xml><?xml version="1.0" encoding="utf-8"?>
 <p:sld xmlns:a="http://schemas.openxmlformats.org/drawingml/2006/main" xmlns:r="http://schemas.openxmlformats.org/officeDocument/2006/relationships" xmlns:p="http://schemas.openxmlformats.org/presentationml/2006/main">
   <p:cSld>
     <p:spTree>
@@ -4088,7 +4051,7 @@
 </p:sld>
 </file>
 
-<file path=ppt/slides/slide103.xml><?xml version="1.0" encoding="utf-8"?>
+<file path=ppt/slides/slide102.xml><?xml version="1.0" encoding="utf-8"?>
 <p:sld xmlns:a="http://schemas.openxmlformats.org/drawingml/2006/main" xmlns:r="http://schemas.openxmlformats.org/officeDocument/2006/relationships" xmlns:p="http://schemas.openxmlformats.org/presentationml/2006/main">
   <p:cSld>
     <p:spTree>
@@ -4260,7 +4223,7 @@
 </p:sld>
 </file>
 
-<file path=ppt/slides/slide104.xml><?xml version="1.0" encoding="utf-8"?>
+<file path=ppt/slides/slide103.xml><?xml version="1.0" encoding="utf-8"?>
 <p:sld xmlns:a="http://schemas.openxmlformats.org/drawingml/2006/main" xmlns:r="http://schemas.openxmlformats.org/officeDocument/2006/relationships" xmlns:p="http://schemas.openxmlformats.org/presentationml/2006/main">
   <p:cSld>
     <p:spTree>
@@ -4420,7 +4383,7 @@
 </p:sld>
 </file>
 
-<file path=ppt/slides/slide105.xml><?xml version="1.0" encoding="utf-8"?>
+<file path=ppt/slides/slide104.xml><?xml version="1.0" encoding="utf-8"?>
 <p:sld xmlns:a="http://schemas.openxmlformats.org/drawingml/2006/main" xmlns:r="http://schemas.openxmlformats.org/officeDocument/2006/relationships" xmlns:p="http://schemas.openxmlformats.org/presentationml/2006/main">
   <p:cSld>
     <p:spTree>
@@ -4616,7 +4579,7 @@
 </p:sld>
 </file>
 
-<file path=ppt/slides/slide106.xml><?xml version="1.0" encoding="utf-8"?>
+<file path=ppt/slides/slide105.xml><?xml version="1.0" encoding="utf-8"?>
 <p:sld xmlns:a="http://schemas.openxmlformats.org/drawingml/2006/main" xmlns:r="http://schemas.openxmlformats.org/officeDocument/2006/relationships" xmlns:p="http://schemas.openxmlformats.org/presentationml/2006/main">
   <p:cSld>
     <p:spTree>
@@ -4652,7 +4615,7 @@
 </p:sld>
 </file>
 
-<file path=ppt/slides/slide107.xml><?xml version="1.0" encoding="utf-8"?>
+<file path=ppt/slides/slide106.xml><?xml version="1.0" encoding="utf-8"?>
 <p:sld xmlns:a="http://schemas.openxmlformats.org/drawingml/2006/main" xmlns:r="http://schemas.openxmlformats.org/officeDocument/2006/relationships" xmlns:p="http://schemas.openxmlformats.org/presentationml/2006/main">
   <p:cSld>
     <p:spTree>
@@ -4810,7 +4773,7 @@
 </p:sld>
 </file>
 
-<file path=ppt/slides/slide108.xml><?xml version="1.0" encoding="utf-8"?>
+<file path=ppt/slides/slide107.xml><?xml version="1.0" encoding="utf-8"?>
 <p:sld xmlns:a="http://schemas.openxmlformats.org/drawingml/2006/main" xmlns:r="http://schemas.openxmlformats.org/officeDocument/2006/relationships" xmlns:p="http://schemas.openxmlformats.org/presentationml/2006/main">
   <p:cSld>
     <p:spTree>
@@ -4932,7 +4895,7 @@
 </p:sld>
 </file>
 
-<file path=ppt/slides/slide109.xml><?xml version="1.0" encoding="utf-8"?>
+<file path=ppt/slides/slide108.xml><?xml version="1.0" encoding="utf-8"?>
 <p:sld xmlns:a="http://schemas.openxmlformats.org/drawingml/2006/main" xmlns:r="http://schemas.openxmlformats.org/officeDocument/2006/relationships" xmlns:p="http://schemas.openxmlformats.org/presentationml/2006/main">
   <p:cSld>
     <p:spTree>
@@ -5137,6 +5100,128 @@
     <p:extLst>
       <p:ext uri="{BB962C8B-B14F-4D97-AF65-F5344CB8AC3E}">
         <p14:creationId xmlns:p14="http://schemas.microsoft.com/office/powerpoint/2010/main" val="273952792"/>
+      </p:ext>
+    </p:extLst>
+  </p:cSld>
+  <p:clrMapOvr>
+    <a:masterClrMapping/>
+  </p:clrMapOvr>
+</p:sld>
+</file>
+
+<file path=ppt/slides/slide109.xml><?xml version="1.0" encoding="utf-8"?>
+<p:sld xmlns:a="http://schemas.openxmlformats.org/drawingml/2006/main" xmlns:r="http://schemas.openxmlformats.org/officeDocument/2006/relationships" xmlns:p="http://schemas.openxmlformats.org/presentationml/2006/main">
+  <p:cSld>
+    <p:spTree>
+      <p:nvGrpSpPr>
+        <p:cNvPr id="1" name="">
+          <a:extLst>
+            <a:ext uri="{FF2B5EF4-FFF2-40B4-BE49-F238E27FC236}">
+              <a16:creationId xmlns:a16="http://schemas.microsoft.com/office/drawing/2014/main" id="{B71FC471-BBAD-E5B5-07B5-21BC635FB18B}"/>
+            </a:ext>
+          </a:extLst>
+        </p:cNvPr>
+        <p:cNvGrpSpPr/>
+        <p:nvPr/>
+      </p:nvGrpSpPr>
+      <p:grpSpPr>
+        <a:xfrm>
+          <a:off x="0" y="0"/>
+          <a:ext cx="0" cy="0"/>
+          <a:chOff x="0" y="0"/>
+          <a:chExt cx="0" cy="0"/>
+        </a:xfrm>
+      </p:grpSpPr>
+      <p:pic>
+        <p:nvPicPr>
+          <p:cNvPr id="3" name="図 2">
+            <a:extLst>
+              <a:ext uri="{FF2B5EF4-FFF2-40B4-BE49-F238E27FC236}">
+                <a16:creationId xmlns:a16="http://schemas.microsoft.com/office/drawing/2014/main" id="{DDC5B758-CAB3-7764-9571-E962D5AF9BA3}"/>
+              </a:ext>
+            </a:extLst>
+          </p:cNvPr>
+          <p:cNvPicPr>
+            <a:picLocks noChangeAspect="1"/>
+          </p:cNvPicPr>
+          <p:nvPr/>
+        </p:nvPicPr>
+        <p:blipFill>
+          <a:blip r:embed="rId2">
+            <a:extLst>
+              <a:ext uri="{28A0092B-C50C-407E-A947-70E740481C1C}">
+                <a14:useLocalDpi xmlns:a14="http://schemas.microsoft.com/office/drawing/2010/main" val="0"/>
+              </a:ext>
+            </a:extLst>
+          </a:blip>
+          <a:stretch>
+            <a:fillRect/>
+          </a:stretch>
+        </p:blipFill>
+        <p:spPr>
+          <a:xfrm>
+            <a:off x="2533650" y="3076575"/>
+            <a:ext cx="7124700" cy="704850"/>
+          </a:xfrm>
+          <a:prstGeom prst="rect">
+            <a:avLst/>
+          </a:prstGeom>
+        </p:spPr>
+      </p:pic>
+      <p:sp>
+        <p:nvSpPr>
+          <p:cNvPr id="4" name="正方形/長方形 3">
+            <a:extLst>
+              <a:ext uri="{FF2B5EF4-FFF2-40B4-BE49-F238E27FC236}">
+                <a16:creationId xmlns:a16="http://schemas.microsoft.com/office/drawing/2014/main" id="{7B6E4A8D-1FF8-AE2E-A24E-BAA54DF79C2B}"/>
+              </a:ext>
+            </a:extLst>
+          </p:cNvPr>
+          <p:cNvSpPr/>
+          <p:nvPr/>
+        </p:nvSpPr>
+        <p:spPr>
+          <a:xfrm flipV="1">
+            <a:off x="2599208" y="3151350"/>
+            <a:ext cx="6993584" cy="277650"/>
+          </a:xfrm>
+          <a:prstGeom prst="rect">
+            <a:avLst/>
+          </a:prstGeom>
+          <a:noFill/>
+          <a:ln w="28575">
+            <a:solidFill>
+              <a:srgbClr val="FF0000"/>
+            </a:solidFill>
+          </a:ln>
+        </p:spPr>
+        <p:style>
+          <a:lnRef idx="2">
+            <a:schemeClr val="accent6"/>
+          </a:lnRef>
+          <a:fillRef idx="1">
+            <a:schemeClr val="lt1"/>
+          </a:fillRef>
+          <a:effectRef idx="0">
+            <a:schemeClr val="accent6"/>
+          </a:effectRef>
+          <a:fontRef idx="minor">
+            <a:schemeClr val="dk1"/>
+          </a:fontRef>
+        </p:style>
+        <p:txBody>
+          <a:bodyPr rtlCol="0" anchor="ctr"/>
+          <a:lstStyle/>
+          <a:p>
+            <a:pPr algn="ctr"/>
+            <a:endParaRPr kumimoji="1" lang="ja-JP" altLang="en-US"/>
+          </a:p>
+        </p:txBody>
+      </p:sp>
+    </p:spTree>
+    <p:extLst>
+      <p:ext uri="{BB962C8B-B14F-4D97-AF65-F5344CB8AC3E}">
+        <p14:creationId xmlns:p14="http://schemas.microsoft.com/office/powerpoint/2010/main" val="223273275"/>
       </p:ext>
     </p:extLst>
   </p:cSld>
@@ -5284,143 +5369,31 @@
           </p:spPr>
         </p:pic>
       </p:grpSp>
-      <p:grpSp>
-        <p:nvGrpSpPr>
-          <p:cNvPr id="46" name="グループ化 45">
-            <a:extLst>
-              <a:ext uri="{FF2B5EF4-FFF2-40B4-BE49-F238E27FC236}">
-                <a16:creationId xmlns:a16="http://schemas.microsoft.com/office/drawing/2014/main" id="{A80EB5A0-5A6D-4BD3-EE1C-0CCD92323E07}"/>
-              </a:ext>
-            </a:extLst>
-          </p:cNvPr>
-          <p:cNvGrpSpPr/>
-          <p:nvPr/>
-        </p:nvGrpSpPr>
-        <p:grpSpPr>
+      <p:sp>
+        <p:nvSpPr>
+          <p:cNvPr id="27" name="四角形: 角を丸くする 26">
+            <a:extLst>
+              <a:ext uri="{FF2B5EF4-FFF2-40B4-BE49-F238E27FC236}">
+                <a16:creationId xmlns:a16="http://schemas.microsoft.com/office/drawing/2014/main" id="{7B7B67A5-35B8-D52D-870B-8EE0C0DE39BC}"/>
+              </a:ext>
+            </a:extLst>
+          </p:cNvPr>
+          <p:cNvSpPr/>
+          <p:nvPr/>
+        </p:nvSpPr>
+        <p:spPr>
           <a:xfrm>
             <a:off x="2849214" y="3809486"/>
             <a:ext cx="4680000" cy="1080000"/>
-            <a:chOff x="2849214" y="3397749"/>
-            <a:chExt cx="4680000" cy="1080000"/>
-          </a:xfrm>
-        </p:grpSpPr>
-        <p:sp>
-          <p:nvSpPr>
-            <p:cNvPr id="27" name="四角形: 角を丸くする 26">
-              <a:extLst>
-                <a:ext uri="{FF2B5EF4-FFF2-40B4-BE49-F238E27FC236}">
-                  <a16:creationId xmlns:a16="http://schemas.microsoft.com/office/drawing/2014/main" id="{7B7B67A5-35B8-D52D-870B-8EE0C0DE39BC}"/>
-                </a:ext>
-              </a:extLst>
-            </p:cNvPr>
-            <p:cNvSpPr/>
-            <p:nvPr/>
-          </p:nvSpPr>
-          <p:spPr>
-            <a:xfrm>
-              <a:off x="2849214" y="3397749"/>
-              <a:ext cx="4680000" cy="1080000"/>
-            </a:xfrm>
-            <a:prstGeom prst="roundRect">
-              <a:avLst/>
-            </a:prstGeom>
-            <a:solidFill>
-              <a:schemeClr val="accent1">
-                <a:lumMod val="20000"/>
-                <a:lumOff val="80000"/>
-              </a:schemeClr>
-            </a:solidFill>
-            <a:ln w="38100">
-              <a:solidFill>
-                <a:schemeClr val="tx1"/>
-              </a:solidFill>
-            </a:ln>
-          </p:spPr>
-          <p:style>
-            <a:lnRef idx="2">
-              <a:schemeClr val="accent6"/>
-            </a:lnRef>
-            <a:fillRef idx="1">
-              <a:schemeClr val="lt1"/>
-            </a:fillRef>
-            <a:effectRef idx="0">
-              <a:schemeClr val="accent6"/>
-            </a:effectRef>
-            <a:fontRef idx="minor">
-              <a:schemeClr val="dk1"/>
-            </a:fontRef>
-          </p:style>
-          <p:txBody>
-            <a:bodyPr rtlCol="0" anchor="ctr"/>
-            <a:lstStyle/>
-            <a:p>
-              <a:pPr lvl="4"/>
-              <a:r>
-                <a:rPr lang="ja-JP" altLang="en-US" b="1" dirty="0"/>
-                <a:t>ローカルリポジトリ</a:t>
-              </a:r>
-            </a:p>
-          </p:txBody>
-        </p:sp>
-        <p:pic>
-          <p:nvPicPr>
-            <p:cNvPr id="10" name="図 9">
-              <a:extLst>
-                <a:ext uri="{FF2B5EF4-FFF2-40B4-BE49-F238E27FC236}">
-                  <a16:creationId xmlns:a16="http://schemas.microsoft.com/office/drawing/2014/main" id="{972BFA98-2B6E-2E34-7098-A5852F08E322}"/>
-                </a:ext>
-              </a:extLst>
-            </p:cNvPr>
-            <p:cNvPicPr>
-              <a:picLocks noChangeAspect="1"/>
-            </p:cNvPicPr>
-            <p:nvPr/>
-          </p:nvPicPr>
-          <p:blipFill>
-            <a:blip r:embed="rId3">
-              <a:extLst>
-                <a:ext uri="{28A0092B-C50C-407E-A947-70E740481C1C}">
-                  <a14:useLocalDpi xmlns:a14="http://schemas.microsoft.com/office/drawing/2010/main" val="0"/>
-                </a:ext>
-              </a:extLst>
-            </a:blip>
-            <a:stretch>
-              <a:fillRect/>
-            </a:stretch>
-          </p:blipFill>
-          <p:spPr>
-            <a:xfrm>
-              <a:off x="3122365" y="3433749"/>
-              <a:ext cx="1008000" cy="1008000"/>
-            </a:xfrm>
-            <a:prstGeom prst="rect">
-              <a:avLst/>
-            </a:prstGeom>
-          </p:spPr>
-        </p:pic>
-      </p:grpSp>
-      <p:sp>
-        <p:nvSpPr>
-          <p:cNvPr id="26" name="四角形: 角を丸くする 25">
-            <a:extLst>
-              <a:ext uri="{FF2B5EF4-FFF2-40B4-BE49-F238E27FC236}">
-                <a16:creationId xmlns:a16="http://schemas.microsoft.com/office/drawing/2014/main" id="{53BCC381-1FA9-F551-4F3F-AE52F3F969CF}"/>
-              </a:ext>
-            </a:extLst>
-          </p:cNvPr>
-          <p:cNvSpPr/>
-          <p:nvPr/>
-        </p:nvSpPr>
-        <p:spPr>
-          <a:xfrm>
-            <a:off x="2849214" y="5620069"/>
-            <a:ext cx="4680000" cy="1080000"/>
           </a:xfrm>
           <a:prstGeom prst="roundRect">
             <a:avLst/>
           </a:prstGeom>
           <a:solidFill>
-            <a:srgbClr val="FFCCFF"/>
+            <a:schemeClr val="accent1">
+              <a:lumMod val="20000"/>
+              <a:lumOff val="80000"/>
+            </a:schemeClr>
           </a:solidFill>
           <a:ln w="38100">
             <a:solidFill>
@@ -5449,104 +5422,102 @@
             <a:pPr lvl="4"/>
             <a:r>
               <a:rPr lang="ja-JP" altLang="en-US" b="1" dirty="0"/>
-              <a:t>リモートリポジトリ</a:t>
+              <a:t>ローカルリポジトリ</a:t>
             </a:r>
           </a:p>
         </p:txBody>
       </p:sp>
-      <p:grpSp>
-        <p:nvGrpSpPr>
-          <p:cNvPr id="21" name="グループ化 20">
-            <a:extLst>
-              <a:ext uri="{FF2B5EF4-FFF2-40B4-BE49-F238E27FC236}">
-                <a16:creationId xmlns:a16="http://schemas.microsoft.com/office/drawing/2014/main" id="{A2A39241-7B36-B66E-EB63-139473F54C70}"/>
-              </a:ext>
-            </a:extLst>
-          </p:cNvPr>
-          <p:cNvGrpSpPr/>
-          <p:nvPr/>
-        </p:nvGrpSpPr>
-        <p:grpSpPr>
-          <a:xfrm>
-            <a:off x="3017710" y="5567557"/>
-            <a:ext cx="1217310" cy="1293884"/>
-            <a:chOff x="5938864" y="3124197"/>
-            <a:chExt cx="1217310" cy="1364976"/>
-          </a:xfrm>
-        </p:grpSpPr>
-        <p:pic>
-          <p:nvPicPr>
-            <p:cNvPr id="14" name="図 13">
-              <a:extLst>
-                <a:ext uri="{FF2B5EF4-FFF2-40B4-BE49-F238E27FC236}">
-                  <a16:creationId xmlns:a16="http://schemas.microsoft.com/office/drawing/2014/main" id="{91EABEE8-009A-FDEE-8A05-A31E5558B1E3}"/>
-                </a:ext>
-              </a:extLst>
-            </p:cNvPr>
-            <p:cNvPicPr>
-              <a:picLocks noChangeAspect="1"/>
-            </p:cNvPicPr>
-            <p:nvPr/>
-          </p:nvPicPr>
-          <p:blipFill>
-            <a:blip r:embed="rId4">
-              <a:extLst>
-                <a:ext uri="{28A0092B-C50C-407E-A947-70E740481C1C}">
-                  <a14:useLocalDpi xmlns:a14="http://schemas.microsoft.com/office/drawing/2010/main" val="0"/>
-                </a:ext>
-              </a:extLst>
-            </a:blip>
-            <a:stretch>
-              <a:fillRect/>
-            </a:stretch>
-          </p:blipFill>
-          <p:spPr>
-            <a:xfrm>
-              <a:off x="5938864" y="3124197"/>
-              <a:ext cx="1217310" cy="1364976"/>
-            </a:xfrm>
-            <a:prstGeom prst="rect">
-              <a:avLst/>
-            </a:prstGeom>
-          </p:spPr>
-        </p:pic>
-        <p:pic>
-          <p:nvPicPr>
-            <p:cNvPr id="12" name="図 11">
-              <a:extLst>
-                <a:ext uri="{FF2B5EF4-FFF2-40B4-BE49-F238E27FC236}">
-                  <a16:creationId xmlns:a16="http://schemas.microsoft.com/office/drawing/2014/main" id="{71EA3974-AE2C-B692-54DD-3BB32B61F8F3}"/>
-                </a:ext>
-              </a:extLst>
-            </p:cNvPr>
-            <p:cNvPicPr>
-              <a:picLocks noChangeAspect="1"/>
-            </p:cNvPicPr>
-            <p:nvPr/>
-          </p:nvPicPr>
-          <p:blipFill>
-            <a:blip r:embed="rId5">
-              <a:extLst>
-                <a:ext uri="{28A0092B-C50C-407E-A947-70E740481C1C}">
-                  <a14:useLocalDpi xmlns:a14="http://schemas.microsoft.com/office/drawing/2010/main" val="0"/>
-                </a:ext>
-              </a:extLst>
-            </a:blip>
-            <a:stretch>
-              <a:fillRect/>
-            </a:stretch>
-          </p:blipFill>
-          <p:spPr>
-            <a:xfrm>
-              <a:off x="6133519" y="3493589"/>
-              <a:ext cx="828000" cy="828000"/>
-            </a:xfrm>
-            <a:prstGeom prst="rect">
-              <a:avLst/>
-            </a:prstGeom>
-          </p:spPr>
-        </p:pic>
-      </p:grpSp>
+      <p:pic>
+        <p:nvPicPr>
+          <p:cNvPr id="10" name="図 9">
+            <a:extLst>
+              <a:ext uri="{FF2B5EF4-FFF2-40B4-BE49-F238E27FC236}">
+                <a16:creationId xmlns:a16="http://schemas.microsoft.com/office/drawing/2014/main" id="{972BFA98-2B6E-2E34-7098-A5852F08E322}"/>
+              </a:ext>
+            </a:extLst>
+          </p:cNvPr>
+          <p:cNvPicPr>
+            <a:picLocks noChangeAspect="1"/>
+          </p:cNvPicPr>
+          <p:nvPr/>
+        </p:nvPicPr>
+        <p:blipFill>
+          <a:blip r:embed="rId3">
+            <a:extLst>
+              <a:ext uri="{28A0092B-C50C-407E-A947-70E740481C1C}">
+                <a14:useLocalDpi xmlns:a14="http://schemas.microsoft.com/office/drawing/2010/main" val="0"/>
+              </a:ext>
+            </a:extLst>
+          </a:blip>
+          <a:stretch>
+            <a:fillRect/>
+          </a:stretch>
+        </p:blipFill>
+        <p:spPr>
+          <a:xfrm>
+            <a:off x="3113365" y="3845486"/>
+            <a:ext cx="1008000" cy="1008000"/>
+          </a:xfrm>
+          <a:prstGeom prst="rect">
+            <a:avLst/>
+          </a:prstGeom>
+        </p:spPr>
+      </p:pic>
+      <p:sp>
+        <p:nvSpPr>
+          <p:cNvPr id="26" name="四角形: 角を丸くする 25">
+            <a:extLst>
+              <a:ext uri="{FF2B5EF4-FFF2-40B4-BE49-F238E27FC236}">
+                <a16:creationId xmlns:a16="http://schemas.microsoft.com/office/drawing/2014/main" id="{53BCC381-1FA9-F551-4F3F-AE52F3F969CF}"/>
+              </a:ext>
+            </a:extLst>
+          </p:cNvPr>
+          <p:cNvSpPr/>
+          <p:nvPr/>
+        </p:nvSpPr>
+        <p:spPr>
+          <a:xfrm>
+            <a:off x="2849214" y="5620069"/>
+            <a:ext cx="4680000" cy="1080000"/>
+          </a:xfrm>
+          <a:prstGeom prst="roundRect">
+            <a:avLst/>
+          </a:prstGeom>
+          <a:solidFill>
+            <a:srgbClr val="FFCCFF"/>
+          </a:solidFill>
+          <a:ln w="38100">
+            <a:solidFill>
+              <a:schemeClr val="tx1"/>
+            </a:solidFill>
+          </a:ln>
+        </p:spPr>
+        <p:style>
+          <a:lnRef idx="2">
+            <a:schemeClr val="accent6"/>
+          </a:lnRef>
+          <a:fillRef idx="1">
+            <a:schemeClr val="lt1"/>
+          </a:fillRef>
+          <a:effectRef idx="0">
+            <a:schemeClr val="accent6"/>
+          </a:effectRef>
+          <a:fontRef idx="minor">
+            <a:schemeClr val="dk1"/>
+          </a:fontRef>
+        </p:style>
+        <p:txBody>
+          <a:bodyPr rtlCol="0" anchor="ctr"/>
+          <a:lstStyle/>
+          <a:p>
+            <a:pPr lvl="4"/>
+            <a:r>
+              <a:rPr lang="ja-JP" altLang="en-US" b="1" dirty="0"/>
+              <a:t>リモートリポジトリ</a:t>
+            </a:r>
+          </a:p>
+        </p:txBody>
+      </p:sp>
       <p:grpSp>
         <p:nvGrpSpPr>
           <p:cNvPr id="44" name="グループ化 43">
@@ -5969,7 +5940,7 @@
         </p:nvGrpSpPr>
         <p:grpSpPr>
           <a:xfrm>
-            <a:off x="5184931" y="4969407"/>
+            <a:off x="4419820" y="4969407"/>
             <a:ext cx="1127427" cy="540000"/>
             <a:chOff x="925286" y="1153886"/>
             <a:chExt cx="1127427" cy="540000"/>
@@ -6067,7 +6038,7 @@
           <p:nvPr/>
         </p:nvPicPr>
         <p:blipFill>
-          <a:blip r:embed="rId6">
+          <a:blip r:embed="rId4">
             <a:biLevel thresh="25000"/>
             <a:extLst>
               <a:ext uri="{28A0092B-C50C-407E-A947-70E740481C1C}">
@@ -6083,6 +6054,327 @@
           <a:xfrm>
             <a:off x="3283916" y="1983778"/>
             <a:ext cx="756449" cy="756449"/>
+          </a:xfrm>
+          <a:prstGeom prst="rect">
+            <a:avLst/>
+          </a:prstGeom>
+        </p:spPr>
+      </p:pic>
+      <p:pic>
+        <p:nvPicPr>
+          <p:cNvPr id="5" name="Picture 4" descr="デスクトップ型パソコン・サーバのシルエット02 | 無料のAi・PNG ...">
+            <a:extLst>
+              <a:ext uri="{FF2B5EF4-FFF2-40B4-BE49-F238E27FC236}">
+                <a16:creationId xmlns:a16="http://schemas.microsoft.com/office/drawing/2014/main" id="{BD68CEA1-13DC-0A0A-B09D-F770000AD303}"/>
+              </a:ext>
+            </a:extLst>
+          </p:cNvPr>
+          <p:cNvPicPr>
+            <a:picLocks noChangeAspect="1" noChangeArrowheads="1"/>
+          </p:cNvPicPr>
+          <p:nvPr/>
+        </p:nvPicPr>
+        <p:blipFill>
+          <a:blip r:embed="rId5">
+            <a:extLst>
+              <a:ext uri="{28A0092B-C50C-407E-A947-70E740481C1C}">
+                <a14:useLocalDpi xmlns:a14="http://schemas.microsoft.com/office/drawing/2010/main" val="0"/>
+              </a:ext>
+            </a:extLst>
+          </a:blip>
+          <a:srcRect/>
+          <a:stretch>
+            <a:fillRect/>
+          </a:stretch>
+        </p:blipFill>
+        <p:spPr bwMode="auto">
+          <a:xfrm>
+            <a:off x="1960218" y="5814271"/>
+            <a:ext cx="775708" cy="691595"/>
+          </a:xfrm>
+          <a:prstGeom prst="rect">
+            <a:avLst/>
+          </a:prstGeom>
+          <a:noFill/>
+          <a:extLst>
+            <a:ext uri="{909E8E84-426E-40DD-AFC4-6F175D3DCCD1}">
+              <a14:hiddenFill xmlns:a14="http://schemas.microsoft.com/office/drawing/2010/main">
+                <a:solidFill>
+                  <a:srgbClr val="FFFFFF"/>
+                </a:solidFill>
+              </a14:hiddenFill>
+            </a:ext>
+          </a:extLst>
+        </p:spPr>
+      </p:pic>
+      <p:pic>
+        <p:nvPicPr>
+          <p:cNvPr id="7" name="Picture 2" descr="顔のシルエット | 無料のAi・PNG白黒シルエットイラスト">
+            <a:extLst>
+              <a:ext uri="{FF2B5EF4-FFF2-40B4-BE49-F238E27FC236}">
+                <a16:creationId xmlns:a16="http://schemas.microsoft.com/office/drawing/2014/main" id="{0E18E603-98DB-0A28-DC84-69153E42AB6E}"/>
+              </a:ext>
+            </a:extLst>
+          </p:cNvPr>
+          <p:cNvPicPr>
+            <a:picLocks noChangeAspect="1" noChangeArrowheads="1"/>
+          </p:cNvPicPr>
+          <p:nvPr/>
+        </p:nvPicPr>
+        <p:blipFill>
+          <a:blip r:embed="rId6">
+            <a:extLst>
+              <a:ext uri="{28A0092B-C50C-407E-A947-70E740481C1C}">
+                <a14:useLocalDpi xmlns:a14="http://schemas.microsoft.com/office/drawing/2010/main" val="0"/>
+              </a:ext>
+            </a:extLst>
+          </a:blip>
+          <a:srcRect/>
+          <a:stretch>
+            <a:fillRect/>
+          </a:stretch>
+        </p:blipFill>
+        <p:spPr bwMode="auto">
+          <a:xfrm>
+            <a:off x="1980662" y="4003688"/>
+            <a:ext cx="734820" cy="691595"/>
+          </a:xfrm>
+          <a:prstGeom prst="rect">
+            <a:avLst/>
+          </a:prstGeom>
+          <a:noFill/>
+          <a:extLst>
+            <a:ext uri="{909E8E84-426E-40DD-AFC4-6F175D3DCCD1}">
+              <a14:hiddenFill xmlns:a14="http://schemas.microsoft.com/office/drawing/2010/main">
+                <a:solidFill>
+                  <a:srgbClr val="FFFFFF"/>
+                </a:solidFill>
+              </a14:hiddenFill>
+            </a:ext>
+          </a:extLst>
+        </p:spPr>
+      </p:pic>
+      <p:pic>
+        <p:nvPicPr>
+          <p:cNvPr id="8" name="Picture 2" descr="顔のシルエット | 無料のAi・PNG白黒シルエットイラスト">
+            <a:extLst>
+              <a:ext uri="{FF2B5EF4-FFF2-40B4-BE49-F238E27FC236}">
+                <a16:creationId xmlns:a16="http://schemas.microsoft.com/office/drawing/2014/main" id="{60525653-9DED-EBC0-A021-E8CA336B5D85}"/>
+              </a:ext>
+            </a:extLst>
+          </p:cNvPr>
+          <p:cNvPicPr>
+            <a:picLocks noChangeAspect="1" noChangeArrowheads="1"/>
+          </p:cNvPicPr>
+          <p:nvPr/>
+        </p:nvPicPr>
+        <p:blipFill>
+          <a:blip r:embed="rId6">
+            <a:extLst>
+              <a:ext uri="{28A0092B-C50C-407E-A947-70E740481C1C}">
+                <a14:useLocalDpi xmlns:a14="http://schemas.microsoft.com/office/drawing/2010/main" val="0"/>
+              </a:ext>
+            </a:extLst>
+          </a:blip>
+          <a:srcRect/>
+          <a:stretch>
+            <a:fillRect/>
+          </a:stretch>
+        </p:blipFill>
+        <p:spPr bwMode="auto">
+          <a:xfrm>
+            <a:off x="1980662" y="2124613"/>
+            <a:ext cx="734820" cy="691595"/>
+          </a:xfrm>
+          <a:prstGeom prst="rect">
+            <a:avLst/>
+          </a:prstGeom>
+          <a:noFill/>
+          <a:extLst>
+            <a:ext uri="{909E8E84-426E-40DD-AFC4-6F175D3DCCD1}">
+              <a14:hiddenFill xmlns:a14="http://schemas.microsoft.com/office/drawing/2010/main">
+                <a:solidFill>
+                  <a:srgbClr val="FFFFFF"/>
+                </a:solidFill>
+              </a14:hiddenFill>
+            </a:ext>
+          </a:extLst>
+        </p:spPr>
+      </p:pic>
+      <p:pic>
+        <p:nvPicPr>
+          <p:cNvPr id="9" name="Picture 2" descr="顔のシルエット | 無料のAi・PNG白黒シルエットイラスト">
+            <a:extLst>
+              <a:ext uri="{FF2B5EF4-FFF2-40B4-BE49-F238E27FC236}">
+                <a16:creationId xmlns:a16="http://schemas.microsoft.com/office/drawing/2014/main" id="{82F27B95-159C-C379-7608-648FAA3F5E60}"/>
+              </a:ext>
+            </a:extLst>
+          </p:cNvPr>
+          <p:cNvPicPr>
+            <a:picLocks noChangeAspect="1" noChangeArrowheads="1"/>
+          </p:cNvPicPr>
+          <p:nvPr/>
+        </p:nvPicPr>
+        <p:blipFill>
+          <a:blip r:embed="rId6">
+            <a:extLst>
+              <a:ext uri="{28A0092B-C50C-407E-A947-70E740481C1C}">
+                <a14:useLocalDpi xmlns:a14="http://schemas.microsoft.com/office/drawing/2010/main" val="0"/>
+              </a:ext>
+            </a:extLst>
+          </a:blip>
+          <a:srcRect/>
+          <a:stretch>
+            <a:fillRect/>
+          </a:stretch>
+        </p:blipFill>
+        <p:spPr bwMode="auto">
+          <a:xfrm>
+            <a:off x="1980662" y="362693"/>
+            <a:ext cx="734820" cy="691595"/>
+          </a:xfrm>
+          <a:prstGeom prst="rect">
+            <a:avLst/>
+          </a:prstGeom>
+          <a:noFill/>
+          <a:extLst>
+            <a:ext uri="{909E8E84-426E-40DD-AFC4-6F175D3DCCD1}">
+              <a14:hiddenFill xmlns:a14="http://schemas.microsoft.com/office/drawing/2010/main">
+                <a:solidFill>
+                  <a:srgbClr val="FFFFFF"/>
+                </a:solidFill>
+              </a14:hiddenFill>
+            </a:ext>
+          </a:extLst>
+        </p:spPr>
+      </p:pic>
+      <p:grpSp>
+        <p:nvGrpSpPr>
+          <p:cNvPr id="11" name="グループ化 10">
+            <a:extLst>
+              <a:ext uri="{FF2B5EF4-FFF2-40B4-BE49-F238E27FC236}">
+                <a16:creationId xmlns:a16="http://schemas.microsoft.com/office/drawing/2014/main" id="{630E0EC0-3D5E-8E8C-AC43-0467FB2B4D98}"/>
+              </a:ext>
+            </a:extLst>
+          </p:cNvPr>
+          <p:cNvGrpSpPr/>
+          <p:nvPr/>
+        </p:nvGrpSpPr>
+        <p:grpSpPr>
+          <a:xfrm>
+            <a:off x="5678245" y="4969407"/>
+            <a:ext cx="665762" cy="540000"/>
+            <a:chOff x="925286" y="1153886"/>
+            <a:chExt cx="665762" cy="540000"/>
+          </a:xfrm>
+        </p:grpSpPr>
+        <p:cxnSp>
+          <p:nvCxnSpPr>
+            <p:cNvPr id="13" name="直線矢印コネクタ 12">
+              <a:extLst>
+                <a:ext uri="{FF2B5EF4-FFF2-40B4-BE49-F238E27FC236}">
+                  <a16:creationId xmlns:a16="http://schemas.microsoft.com/office/drawing/2014/main" id="{AE6597DD-3837-37EF-D601-902CC5E11E89}"/>
+                </a:ext>
+              </a:extLst>
+            </p:cNvPr>
+            <p:cNvCxnSpPr>
+              <a:cxnSpLocks/>
+            </p:cNvCxnSpPr>
+            <p:nvPr/>
+          </p:nvCxnSpPr>
+          <p:spPr>
+            <a:xfrm flipV="1">
+              <a:off x="925286" y="1153886"/>
+              <a:ext cx="0" cy="540000"/>
+            </a:xfrm>
+            <a:prstGeom prst="straightConnector1">
+              <a:avLst/>
+            </a:prstGeom>
+            <a:ln w="38100">
+              <a:tailEnd type="triangle"/>
+            </a:ln>
+          </p:spPr>
+          <p:style>
+            <a:lnRef idx="1">
+              <a:schemeClr val="dk1"/>
+            </a:lnRef>
+            <a:fillRef idx="0">
+              <a:schemeClr val="dk1"/>
+            </a:fillRef>
+            <a:effectRef idx="0">
+              <a:schemeClr val="dk1"/>
+            </a:effectRef>
+            <a:fontRef idx="minor">
+              <a:schemeClr val="tx1"/>
+            </a:fontRef>
+          </p:style>
+        </p:cxnSp>
+        <p:sp>
+          <p:nvSpPr>
+            <p:cNvPr id="17" name="テキスト ボックス 16">
+              <a:extLst>
+                <a:ext uri="{FF2B5EF4-FFF2-40B4-BE49-F238E27FC236}">
+                  <a16:creationId xmlns:a16="http://schemas.microsoft.com/office/drawing/2014/main" id="{C3D947B2-1419-C9E6-897B-D7A172F4778C}"/>
+                </a:ext>
+              </a:extLst>
+            </p:cNvPr>
+            <p:cNvSpPr txBox="1"/>
+            <p:nvPr/>
+          </p:nvSpPr>
+          <p:spPr>
+            <a:xfrm>
+              <a:off x="944717" y="1275220"/>
+              <a:ext cx="646331" cy="369332"/>
+            </a:xfrm>
+            <a:prstGeom prst="rect">
+              <a:avLst/>
+            </a:prstGeom>
+            <a:noFill/>
+          </p:spPr>
+          <p:txBody>
+            <a:bodyPr wrap="none" rtlCol="0">
+              <a:spAutoFit/>
+            </a:bodyPr>
+            <a:lstStyle/>
+            <a:p>
+              <a:r>
+                <a:rPr kumimoji="1" lang="ja-JP" altLang="en-US" b="1" dirty="0"/>
+                <a:t>プル</a:t>
+              </a:r>
+            </a:p>
+          </p:txBody>
+        </p:sp>
+      </p:grpSp>
+      <p:pic>
+        <p:nvPicPr>
+          <p:cNvPr id="18" name="図 17">
+            <a:extLst>
+              <a:ext uri="{FF2B5EF4-FFF2-40B4-BE49-F238E27FC236}">
+                <a16:creationId xmlns:a16="http://schemas.microsoft.com/office/drawing/2014/main" id="{11E05709-C179-0977-21C3-5DD3DB79CF6B}"/>
+              </a:ext>
+            </a:extLst>
+          </p:cNvPr>
+          <p:cNvPicPr>
+            <a:picLocks noChangeAspect="1"/>
+          </p:cNvPicPr>
+          <p:nvPr/>
+        </p:nvPicPr>
+        <p:blipFill>
+          <a:blip r:embed="rId7">
+            <a:extLst>
+              <a:ext uri="{28A0092B-C50C-407E-A947-70E740481C1C}">
+                <a14:useLocalDpi xmlns:a14="http://schemas.microsoft.com/office/drawing/2010/main" val="0"/>
+              </a:ext>
+            </a:extLst>
+          </a:blip>
+          <a:stretch>
+            <a:fillRect/>
+          </a:stretch>
+        </p:blipFill>
+        <p:spPr>
+          <a:xfrm>
+            <a:off x="3104365" y="5655672"/>
+            <a:ext cx="1008000" cy="1008791"/>
           </a:xfrm>
           <a:prstGeom prst="rect">
             <a:avLst/>
@@ -6103,128 +6395,6 @@
 </file>
 
 <file path=ppt/slides/slide110.xml><?xml version="1.0" encoding="utf-8"?>
-<p:sld xmlns:a="http://schemas.openxmlformats.org/drawingml/2006/main" xmlns:r="http://schemas.openxmlformats.org/officeDocument/2006/relationships" xmlns:p="http://schemas.openxmlformats.org/presentationml/2006/main">
-  <p:cSld>
-    <p:spTree>
-      <p:nvGrpSpPr>
-        <p:cNvPr id="1" name="">
-          <a:extLst>
-            <a:ext uri="{FF2B5EF4-FFF2-40B4-BE49-F238E27FC236}">
-              <a16:creationId xmlns:a16="http://schemas.microsoft.com/office/drawing/2014/main" id="{B71FC471-BBAD-E5B5-07B5-21BC635FB18B}"/>
-            </a:ext>
-          </a:extLst>
-        </p:cNvPr>
-        <p:cNvGrpSpPr/>
-        <p:nvPr/>
-      </p:nvGrpSpPr>
-      <p:grpSpPr>
-        <a:xfrm>
-          <a:off x="0" y="0"/>
-          <a:ext cx="0" cy="0"/>
-          <a:chOff x="0" y="0"/>
-          <a:chExt cx="0" cy="0"/>
-        </a:xfrm>
-      </p:grpSpPr>
-      <p:pic>
-        <p:nvPicPr>
-          <p:cNvPr id="3" name="図 2">
-            <a:extLst>
-              <a:ext uri="{FF2B5EF4-FFF2-40B4-BE49-F238E27FC236}">
-                <a16:creationId xmlns:a16="http://schemas.microsoft.com/office/drawing/2014/main" id="{DDC5B758-CAB3-7764-9571-E962D5AF9BA3}"/>
-              </a:ext>
-            </a:extLst>
-          </p:cNvPr>
-          <p:cNvPicPr>
-            <a:picLocks noChangeAspect="1"/>
-          </p:cNvPicPr>
-          <p:nvPr/>
-        </p:nvPicPr>
-        <p:blipFill>
-          <a:blip r:embed="rId2">
-            <a:extLst>
-              <a:ext uri="{28A0092B-C50C-407E-A947-70E740481C1C}">
-                <a14:useLocalDpi xmlns:a14="http://schemas.microsoft.com/office/drawing/2010/main" val="0"/>
-              </a:ext>
-            </a:extLst>
-          </a:blip>
-          <a:stretch>
-            <a:fillRect/>
-          </a:stretch>
-        </p:blipFill>
-        <p:spPr>
-          <a:xfrm>
-            <a:off x="2533650" y="3076575"/>
-            <a:ext cx="7124700" cy="704850"/>
-          </a:xfrm>
-          <a:prstGeom prst="rect">
-            <a:avLst/>
-          </a:prstGeom>
-        </p:spPr>
-      </p:pic>
-      <p:sp>
-        <p:nvSpPr>
-          <p:cNvPr id="4" name="正方形/長方形 3">
-            <a:extLst>
-              <a:ext uri="{FF2B5EF4-FFF2-40B4-BE49-F238E27FC236}">
-                <a16:creationId xmlns:a16="http://schemas.microsoft.com/office/drawing/2014/main" id="{7B6E4A8D-1FF8-AE2E-A24E-BAA54DF79C2B}"/>
-              </a:ext>
-            </a:extLst>
-          </p:cNvPr>
-          <p:cNvSpPr/>
-          <p:nvPr/>
-        </p:nvSpPr>
-        <p:spPr>
-          <a:xfrm flipV="1">
-            <a:off x="2599208" y="3151350"/>
-            <a:ext cx="6993584" cy="277650"/>
-          </a:xfrm>
-          <a:prstGeom prst="rect">
-            <a:avLst/>
-          </a:prstGeom>
-          <a:noFill/>
-          <a:ln w="28575">
-            <a:solidFill>
-              <a:srgbClr val="FF0000"/>
-            </a:solidFill>
-          </a:ln>
-        </p:spPr>
-        <p:style>
-          <a:lnRef idx="2">
-            <a:schemeClr val="accent6"/>
-          </a:lnRef>
-          <a:fillRef idx="1">
-            <a:schemeClr val="lt1"/>
-          </a:fillRef>
-          <a:effectRef idx="0">
-            <a:schemeClr val="accent6"/>
-          </a:effectRef>
-          <a:fontRef idx="minor">
-            <a:schemeClr val="dk1"/>
-          </a:fontRef>
-        </p:style>
-        <p:txBody>
-          <a:bodyPr rtlCol="0" anchor="ctr"/>
-          <a:lstStyle/>
-          <a:p>
-            <a:pPr algn="ctr"/>
-            <a:endParaRPr kumimoji="1" lang="ja-JP" altLang="en-US"/>
-          </a:p>
-        </p:txBody>
-      </p:sp>
-    </p:spTree>
-    <p:extLst>
-      <p:ext uri="{BB962C8B-B14F-4D97-AF65-F5344CB8AC3E}">
-        <p14:creationId xmlns:p14="http://schemas.microsoft.com/office/powerpoint/2010/main" val="223273275"/>
-      </p:ext>
-    </p:extLst>
-  </p:cSld>
-  <p:clrMapOvr>
-    <a:masterClrMapping/>
-  </p:clrMapOvr>
-</p:sld>
-</file>
-
-<file path=ppt/slides/slide111.xml><?xml version="1.0" encoding="utf-8"?>
 <p:sld xmlns:a="http://schemas.openxmlformats.org/drawingml/2006/main" xmlns:r="http://schemas.openxmlformats.org/officeDocument/2006/relationships" xmlns:p="http://schemas.openxmlformats.org/presentationml/2006/main">
   <p:cSld>
     <p:spTree>
@@ -6346,7 +6516,7 @@
 </p:sld>
 </file>
 
-<file path=ppt/slides/slide112.xml><?xml version="1.0" encoding="utf-8"?>
+<file path=ppt/slides/slide111.xml><?xml version="1.0" encoding="utf-8"?>
 <p:sld xmlns:a="http://schemas.openxmlformats.org/drawingml/2006/main" xmlns:r="http://schemas.openxmlformats.org/officeDocument/2006/relationships" xmlns:p="http://schemas.openxmlformats.org/presentationml/2006/main">
   <p:cSld>
     <p:spTree>
@@ -6382,7 +6552,7 @@
 </p:sld>
 </file>
 
-<file path=ppt/slides/slide113.xml><?xml version="1.0" encoding="utf-8"?>
+<file path=ppt/slides/slide112.xml><?xml version="1.0" encoding="utf-8"?>
 <p:sld xmlns:a="http://schemas.openxmlformats.org/drawingml/2006/main" xmlns:r="http://schemas.openxmlformats.org/officeDocument/2006/relationships" xmlns:p="http://schemas.openxmlformats.org/presentationml/2006/main">
   <p:cSld>
     <p:spTree>
@@ -6540,7 +6710,7 @@
 </p:sld>
 </file>
 
-<file path=ppt/slides/slide114.xml><?xml version="1.0" encoding="utf-8"?>
+<file path=ppt/slides/slide113.xml><?xml version="1.0" encoding="utf-8"?>
 <p:sld xmlns:a="http://schemas.openxmlformats.org/drawingml/2006/main" xmlns:r="http://schemas.openxmlformats.org/officeDocument/2006/relationships" xmlns:p="http://schemas.openxmlformats.org/presentationml/2006/main">
   <p:cSld>
     <p:spTree>
@@ -6662,7 +6832,7 @@
 </p:sld>
 </file>
 
-<file path=ppt/slides/slide115.xml><?xml version="1.0" encoding="utf-8"?>
+<file path=ppt/slides/slide114.xml><?xml version="1.0" encoding="utf-8"?>
 <p:sld xmlns:a="http://schemas.openxmlformats.org/drawingml/2006/main" xmlns:r="http://schemas.openxmlformats.org/officeDocument/2006/relationships" xmlns:p="http://schemas.openxmlformats.org/presentationml/2006/main">
   <p:cSld>
     <p:spTree>
@@ -6876,7 +7046,7 @@
 </p:sld>
 </file>
 
-<file path=ppt/slides/slide116.xml><?xml version="1.0" encoding="utf-8"?>
+<file path=ppt/slides/slide115.xml><?xml version="1.0" encoding="utf-8"?>
 <p:sld xmlns:a="http://schemas.openxmlformats.org/drawingml/2006/main" xmlns:r="http://schemas.openxmlformats.org/officeDocument/2006/relationships" xmlns:p="http://schemas.openxmlformats.org/presentationml/2006/main">
   <p:cSld>
     <p:spTree>
@@ -6998,7 +7168,7 @@
 </p:sld>
 </file>
 
-<file path=ppt/slides/slide117.xml><?xml version="1.0" encoding="utf-8"?>
+<file path=ppt/slides/slide116.xml><?xml version="1.0" encoding="utf-8"?>
 <p:sld xmlns:a="http://schemas.openxmlformats.org/drawingml/2006/main" xmlns:r="http://schemas.openxmlformats.org/officeDocument/2006/relationships" xmlns:p="http://schemas.openxmlformats.org/presentationml/2006/main">
   <p:cSld>
     <p:spTree>
@@ -7034,7 +7204,7 @@
 </p:sld>
 </file>
 
-<file path=ppt/slides/slide118.xml><?xml version="1.0" encoding="utf-8"?>
+<file path=ppt/slides/slide117.xml><?xml version="1.0" encoding="utf-8"?>
 <p:sld xmlns:a="http://schemas.openxmlformats.org/drawingml/2006/main" xmlns:r="http://schemas.openxmlformats.org/officeDocument/2006/relationships" xmlns:p="http://schemas.openxmlformats.org/presentationml/2006/main">
   <p:cSld>
     <p:spTree>
@@ -7192,7 +7362,7 @@
 </p:sld>
 </file>
 
-<file path=ppt/slides/slide119.xml><?xml version="1.0" encoding="utf-8"?>
+<file path=ppt/slides/slide118.xml><?xml version="1.0" encoding="utf-8"?>
 <p:sld xmlns:a="http://schemas.openxmlformats.org/drawingml/2006/main" xmlns:r="http://schemas.openxmlformats.org/officeDocument/2006/relationships" xmlns:p="http://schemas.openxmlformats.org/presentationml/2006/main">
   <p:cSld>
     <p:spTree>
@@ -7305,6 +7475,178 @@
     <p:extLst>
       <p:ext uri="{BB962C8B-B14F-4D97-AF65-F5344CB8AC3E}">
         <p14:creationId xmlns:p14="http://schemas.microsoft.com/office/powerpoint/2010/main" val="1229748770"/>
+      </p:ext>
+    </p:extLst>
+  </p:cSld>
+  <p:clrMapOvr>
+    <a:masterClrMapping/>
+  </p:clrMapOvr>
+</p:sld>
+</file>
+
+<file path=ppt/slides/slide119.xml><?xml version="1.0" encoding="utf-8"?>
+<p:sld xmlns:a="http://schemas.openxmlformats.org/drawingml/2006/main" xmlns:r="http://schemas.openxmlformats.org/officeDocument/2006/relationships" xmlns:p="http://schemas.openxmlformats.org/presentationml/2006/main">
+  <p:cSld>
+    <p:spTree>
+      <p:nvGrpSpPr>
+        <p:cNvPr id="1" name="">
+          <a:extLst>
+            <a:ext uri="{FF2B5EF4-FFF2-40B4-BE49-F238E27FC236}">
+              <a16:creationId xmlns:a16="http://schemas.microsoft.com/office/drawing/2014/main" id="{0143B866-BF9A-40CA-34BC-55CC59492A78}"/>
+            </a:ext>
+          </a:extLst>
+        </p:cNvPr>
+        <p:cNvGrpSpPr/>
+        <p:nvPr/>
+      </p:nvGrpSpPr>
+      <p:grpSpPr>
+        <a:xfrm>
+          <a:off x="0" y="0"/>
+          <a:ext cx="0" cy="0"/>
+          <a:chOff x="0" y="0"/>
+          <a:chExt cx="0" cy="0"/>
+        </a:xfrm>
+      </p:grpSpPr>
+      <p:pic>
+        <p:nvPicPr>
+          <p:cNvPr id="5" name="図 4">
+            <a:extLst>
+              <a:ext uri="{FF2B5EF4-FFF2-40B4-BE49-F238E27FC236}">
+                <a16:creationId xmlns:a16="http://schemas.microsoft.com/office/drawing/2014/main" id="{2CB8022C-69C4-4D55-BA78-B5F10A76C16B}"/>
+              </a:ext>
+            </a:extLst>
+          </p:cNvPr>
+          <p:cNvPicPr>
+            <a:picLocks noChangeAspect="1"/>
+          </p:cNvPicPr>
+          <p:nvPr/>
+        </p:nvPicPr>
+        <p:blipFill>
+          <a:blip r:embed="rId2">
+            <a:extLst>
+              <a:ext uri="{28A0092B-C50C-407E-A947-70E740481C1C}">
+                <a14:useLocalDpi xmlns:a14="http://schemas.microsoft.com/office/drawing/2010/main" val="0"/>
+              </a:ext>
+            </a:extLst>
+          </a:blip>
+          <a:stretch>
+            <a:fillRect/>
+          </a:stretch>
+        </p:blipFill>
+        <p:spPr>
+          <a:xfrm>
+            <a:off x="1781175" y="1328737"/>
+            <a:ext cx="8629650" cy="4200525"/>
+          </a:xfrm>
+          <a:prstGeom prst="rect">
+            <a:avLst/>
+          </a:prstGeom>
+        </p:spPr>
+      </p:pic>
+      <p:sp>
+        <p:nvSpPr>
+          <p:cNvPr id="10" name="正方形/長方形 9">
+            <a:extLst>
+              <a:ext uri="{FF2B5EF4-FFF2-40B4-BE49-F238E27FC236}">
+                <a16:creationId xmlns:a16="http://schemas.microsoft.com/office/drawing/2014/main" id="{957D965B-A67D-ACD5-2D42-ABC1C7B46B35}"/>
+              </a:ext>
+            </a:extLst>
+          </p:cNvPr>
+          <p:cNvSpPr/>
+          <p:nvPr/>
+        </p:nvSpPr>
+        <p:spPr>
+          <a:xfrm flipV="1">
+            <a:off x="5770692" y="5012808"/>
+            <a:ext cx="2272295" cy="286980"/>
+          </a:xfrm>
+          <a:prstGeom prst="rect">
+            <a:avLst/>
+          </a:prstGeom>
+          <a:noFill/>
+          <a:ln w="28575">
+            <a:solidFill>
+              <a:srgbClr val="FF0000"/>
+            </a:solidFill>
+          </a:ln>
+        </p:spPr>
+        <p:style>
+          <a:lnRef idx="2">
+            <a:schemeClr val="accent6"/>
+          </a:lnRef>
+          <a:fillRef idx="1">
+            <a:schemeClr val="lt1"/>
+          </a:fillRef>
+          <a:effectRef idx="0">
+            <a:schemeClr val="accent6"/>
+          </a:effectRef>
+          <a:fontRef idx="minor">
+            <a:schemeClr val="dk1"/>
+          </a:fontRef>
+        </p:style>
+        <p:txBody>
+          <a:bodyPr rtlCol="0" anchor="ctr"/>
+          <a:lstStyle/>
+          <a:p>
+            <a:pPr algn="ctr"/>
+            <a:endParaRPr kumimoji="1" lang="ja-JP" altLang="en-US"/>
+          </a:p>
+        </p:txBody>
+      </p:sp>
+      <p:sp>
+        <p:nvSpPr>
+          <p:cNvPr id="11" name="正方形/長方形 10">
+            <a:extLst>
+              <a:ext uri="{FF2B5EF4-FFF2-40B4-BE49-F238E27FC236}">
+                <a16:creationId xmlns:a16="http://schemas.microsoft.com/office/drawing/2014/main" id="{3745A6F7-BF32-2795-30DE-C5588FBCAA38}"/>
+              </a:ext>
+            </a:extLst>
+          </p:cNvPr>
+          <p:cNvSpPr/>
+          <p:nvPr/>
+        </p:nvSpPr>
+        <p:spPr>
+          <a:xfrm flipV="1">
+            <a:off x="8138530" y="2608622"/>
+            <a:ext cx="2143805" cy="274539"/>
+          </a:xfrm>
+          <a:prstGeom prst="rect">
+            <a:avLst/>
+          </a:prstGeom>
+          <a:noFill/>
+          <a:ln w="28575">
+            <a:solidFill>
+              <a:srgbClr val="FF0000"/>
+            </a:solidFill>
+          </a:ln>
+        </p:spPr>
+        <p:style>
+          <a:lnRef idx="2">
+            <a:schemeClr val="accent6"/>
+          </a:lnRef>
+          <a:fillRef idx="1">
+            <a:schemeClr val="lt1"/>
+          </a:fillRef>
+          <a:effectRef idx="0">
+            <a:schemeClr val="accent6"/>
+          </a:effectRef>
+          <a:fontRef idx="minor">
+            <a:schemeClr val="dk1"/>
+          </a:fontRef>
+        </p:style>
+        <p:txBody>
+          <a:bodyPr rtlCol="0" anchor="ctr"/>
+          <a:lstStyle/>
+          <a:p>
+            <a:pPr algn="ctr"/>
+            <a:endParaRPr kumimoji="1" lang="ja-JP" altLang="en-US"/>
+          </a:p>
+        </p:txBody>
+      </p:sp>
+    </p:spTree>
+    <p:extLst>
+      <p:ext uri="{BB962C8B-B14F-4D97-AF65-F5344CB8AC3E}">
+        <p14:creationId xmlns:p14="http://schemas.microsoft.com/office/powerpoint/2010/main" val="2488181164"/>
       </p:ext>
     </p:extLst>
   </p:cSld>
@@ -7736,178 +8078,6 @@
         <p:cNvPr id="1" name="">
           <a:extLst>
             <a:ext uri="{FF2B5EF4-FFF2-40B4-BE49-F238E27FC236}">
-              <a16:creationId xmlns:a16="http://schemas.microsoft.com/office/drawing/2014/main" id="{0143B866-BF9A-40CA-34BC-55CC59492A78}"/>
-            </a:ext>
-          </a:extLst>
-        </p:cNvPr>
-        <p:cNvGrpSpPr/>
-        <p:nvPr/>
-      </p:nvGrpSpPr>
-      <p:grpSpPr>
-        <a:xfrm>
-          <a:off x="0" y="0"/>
-          <a:ext cx="0" cy="0"/>
-          <a:chOff x="0" y="0"/>
-          <a:chExt cx="0" cy="0"/>
-        </a:xfrm>
-      </p:grpSpPr>
-      <p:pic>
-        <p:nvPicPr>
-          <p:cNvPr id="5" name="図 4">
-            <a:extLst>
-              <a:ext uri="{FF2B5EF4-FFF2-40B4-BE49-F238E27FC236}">
-                <a16:creationId xmlns:a16="http://schemas.microsoft.com/office/drawing/2014/main" id="{2CB8022C-69C4-4D55-BA78-B5F10A76C16B}"/>
-              </a:ext>
-            </a:extLst>
-          </p:cNvPr>
-          <p:cNvPicPr>
-            <a:picLocks noChangeAspect="1"/>
-          </p:cNvPicPr>
-          <p:nvPr/>
-        </p:nvPicPr>
-        <p:blipFill>
-          <a:blip r:embed="rId2">
-            <a:extLst>
-              <a:ext uri="{28A0092B-C50C-407E-A947-70E740481C1C}">
-                <a14:useLocalDpi xmlns:a14="http://schemas.microsoft.com/office/drawing/2010/main" val="0"/>
-              </a:ext>
-            </a:extLst>
-          </a:blip>
-          <a:stretch>
-            <a:fillRect/>
-          </a:stretch>
-        </p:blipFill>
-        <p:spPr>
-          <a:xfrm>
-            <a:off x="1781175" y="1328737"/>
-            <a:ext cx="8629650" cy="4200525"/>
-          </a:xfrm>
-          <a:prstGeom prst="rect">
-            <a:avLst/>
-          </a:prstGeom>
-        </p:spPr>
-      </p:pic>
-      <p:sp>
-        <p:nvSpPr>
-          <p:cNvPr id="10" name="正方形/長方形 9">
-            <a:extLst>
-              <a:ext uri="{FF2B5EF4-FFF2-40B4-BE49-F238E27FC236}">
-                <a16:creationId xmlns:a16="http://schemas.microsoft.com/office/drawing/2014/main" id="{957D965B-A67D-ACD5-2D42-ABC1C7B46B35}"/>
-              </a:ext>
-            </a:extLst>
-          </p:cNvPr>
-          <p:cNvSpPr/>
-          <p:nvPr/>
-        </p:nvSpPr>
-        <p:spPr>
-          <a:xfrm flipV="1">
-            <a:off x="5770692" y="5012808"/>
-            <a:ext cx="2272295" cy="286980"/>
-          </a:xfrm>
-          <a:prstGeom prst="rect">
-            <a:avLst/>
-          </a:prstGeom>
-          <a:noFill/>
-          <a:ln w="28575">
-            <a:solidFill>
-              <a:srgbClr val="FF0000"/>
-            </a:solidFill>
-          </a:ln>
-        </p:spPr>
-        <p:style>
-          <a:lnRef idx="2">
-            <a:schemeClr val="accent6"/>
-          </a:lnRef>
-          <a:fillRef idx="1">
-            <a:schemeClr val="lt1"/>
-          </a:fillRef>
-          <a:effectRef idx="0">
-            <a:schemeClr val="accent6"/>
-          </a:effectRef>
-          <a:fontRef idx="minor">
-            <a:schemeClr val="dk1"/>
-          </a:fontRef>
-        </p:style>
-        <p:txBody>
-          <a:bodyPr rtlCol="0" anchor="ctr"/>
-          <a:lstStyle/>
-          <a:p>
-            <a:pPr algn="ctr"/>
-            <a:endParaRPr kumimoji="1" lang="ja-JP" altLang="en-US"/>
-          </a:p>
-        </p:txBody>
-      </p:sp>
-      <p:sp>
-        <p:nvSpPr>
-          <p:cNvPr id="11" name="正方形/長方形 10">
-            <a:extLst>
-              <a:ext uri="{FF2B5EF4-FFF2-40B4-BE49-F238E27FC236}">
-                <a16:creationId xmlns:a16="http://schemas.microsoft.com/office/drawing/2014/main" id="{3745A6F7-BF32-2795-30DE-C5588FBCAA38}"/>
-              </a:ext>
-            </a:extLst>
-          </p:cNvPr>
-          <p:cNvSpPr/>
-          <p:nvPr/>
-        </p:nvSpPr>
-        <p:spPr>
-          <a:xfrm flipV="1">
-            <a:off x="8138530" y="2608622"/>
-            <a:ext cx="2143805" cy="274539"/>
-          </a:xfrm>
-          <a:prstGeom prst="rect">
-            <a:avLst/>
-          </a:prstGeom>
-          <a:noFill/>
-          <a:ln w="28575">
-            <a:solidFill>
-              <a:srgbClr val="FF0000"/>
-            </a:solidFill>
-          </a:ln>
-        </p:spPr>
-        <p:style>
-          <a:lnRef idx="2">
-            <a:schemeClr val="accent6"/>
-          </a:lnRef>
-          <a:fillRef idx="1">
-            <a:schemeClr val="lt1"/>
-          </a:fillRef>
-          <a:effectRef idx="0">
-            <a:schemeClr val="accent6"/>
-          </a:effectRef>
-          <a:fontRef idx="minor">
-            <a:schemeClr val="dk1"/>
-          </a:fontRef>
-        </p:style>
-        <p:txBody>
-          <a:bodyPr rtlCol="0" anchor="ctr"/>
-          <a:lstStyle/>
-          <a:p>
-            <a:pPr algn="ctr"/>
-            <a:endParaRPr kumimoji="1" lang="ja-JP" altLang="en-US"/>
-          </a:p>
-        </p:txBody>
-      </p:sp>
-    </p:spTree>
-    <p:extLst>
-      <p:ext uri="{BB962C8B-B14F-4D97-AF65-F5344CB8AC3E}">
-        <p14:creationId xmlns:p14="http://schemas.microsoft.com/office/powerpoint/2010/main" val="2488181164"/>
-      </p:ext>
-    </p:extLst>
-  </p:cSld>
-  <p:clrMapOvr>
-    <a:masterClrMapping/>
-  </p:clrMapOvr>
-</p:sld>
-</file>
-
-<file path=ppt/slides/slide121.xml><?xml version="1.0" encoding="utf-8"?>
-<p:sld xmlns:a="http://schemas.openxmlformats.org/drawingml/2006/main" xmlns:r="http://schemas.openxmlformats.org/officeDocument/2006/relationships" xmlns:p="http://schemas.openxmlformats.org/presentationml/2006/main">
-  <p:cSld>
-    <p:spTree>
-      <p:nvGrpSpPr>
-        <p:cNvPr id="1" name="">
-          <a:extLst>
-            <a:ext uri="{FF2B5EF4-FFF2-40B4-BE49-F238E27FC236}">
               <a16:creationId xmlns:a16="http://schemas.microsoft.com/office/drawing/2014/main" id="{324E939D-5C1B-B62B-7A57-A3683D8C7352}"/>
             </a:ext>
           </a:extLst>
@@ -8114,7 +8284,7 @@
 </p:sld>
 </file>
 
-<file path=ppt/slides/slide122.xml><?xml version="1.0" encoding="utf-8"?>
+<file path=ppt/slides/slide121.xml><?xml version="1.0" encoding="utf-8"?>
 <p:sld xmlns:a="http://schemas.openxmlformats.org/drawingml/2006/main" xmlns:r="http://schemas.openxmlformats.org/officeDocument/2006/relationships" xmlns:p="http://schemas.openxmlformats.org/presentationml/2006/main">
   <p:cSld>
     <p:spTree>
@@ -8272,7 +8442,7 @@
 </p:sld>
 </file>
 
-<file path=ppt/slides/slide123.xml><?xml version="1.0" encoding="utf-8"?>
+<file path=ppt/slides/slide122.xml><?xml version="1.0" encoding="utf-8"?>
 <p:sld xmlns:a="http://schemas.openxmlformats.org/drawingml/2006/main" xmlns:r="http://schemas.openxmlformats.org/officeDocument/2006/relationships" xmlns:p="http://schemas.openxmlformats.org/presentationml/2006/main">
   <p:cSld>
     <p:spTree>
@@ -8308,7 +8478,7 @@
 </p:sld>
 </file>
 
-<file path=ppt/slides/slide124.xml><?xml version="1.0" encoding="utf-8"?>
+<file path=ppt/slides/slide123.xml><?xml version="1.0" encoding="utf-8"?>
 <p:sld xmlns:a="http://schemas.openxmlformats.org/drawingml/2006/main" xmlns:r="http://schemas.openxmlformats.org/officeDocument/2006/relationships" xmlns:p="http://schemas.openxmlformats.org/presentationml/2006/main">
   <p:cSld>
     <p:spTree>
@@ -8344,7 +8514,7 @@
 </p:sld>
 </file>
 
-<file path=ppt/slides/slide125.xml><?xml version="1.0" encoding="utf-8"?>
+<file path=ppt/slides/slide124.xml><?xml version="1.0" encoding="utf-8"?>
 <p:sld xmlns:a="http://schemas.openxmlformats.org/drawingml/2006/main" xmlns:r="http://schemas.openxmlformats.org/officeDocument/2006/relationships" xmlns:p="http://schemas.openxmlformats.org/presentationml/2006/main">
   <p:cSld>
     <p:spTree>
@@ -8502,7 +8672,7 @@
 </p:sld>
 </file>
 
-<file path=ppt/slides/slide126.xml><?xml version="1.0" encoding="utf-8"?>
+<file path=ppt/slides/slide125.xml><?xml version="1.0" encoding="utf-8"?>
 <p:sld xmlns:a="http://schemas.openxmlformats.org/drawingml/2006/main" xmlns:r="http://schemas.openxmlformats.org/officeDocument/2006/relationships" xmlns:p="http://schemas.openxmlformats.org/presentationml/2006/main">
   <p:cSld>
     <p:spTree>
@@ -8706,7 +8876,7 @@
 </p:sld>
 </file>
 
-<file path=ppt/slides/slide127.xml><?xml version="1.0" encoding="utf-8"?>
+<file path=ppt/slides/slide126.xml><?xml version="1.0" encoding="utf-8"?>
 <p:sld xmlns:a="http://schemas.openxmlformats.org/drawingml/2006/main" xmlns:r="http://schemas.openxmlformats.org/officeDocument/2006/relationships" xmlns:p="http://schemas.openxmlformats.org/presentationml/2006/main">
   <p:cSld>
     <p:spTree>
@@ -8778,7 +8948,7 @@
 </p:sld>
 </file>
 
-<file path=ppt/slides/slide128.xml><?xml version="1.0" encoding="utf-8"?>
+<file path=ppt/slides/slide127.xml><?xml version="1.0" encoding="utf-8"?>
 <p:sld xmlns:a="http://schemas.openxmlformats.org/drawingml/2006/main" xmlns:r="http://schemas.openxmlformats.org/officeDocument/2006/relationships" xmlns:p="http://schemas.openxmlformats.org/presentationml/2006/main">
   <p:cSld>
     <p:spTree>
@@ -8900,7 +9070,7 @@
 </p:sld>
 </file>
 
-<file path=ppt/slides/slide129.xml><?xml version="1.0" encoding="utf-8"?>
+<file path=ppt/slides/slide128.xml><?xml version="1.0" encoding="utf-8"?>
 <p:sld xmlns:a="http://schemas.openxmlformats.org/drawingml/2006/main" xmlns:r="http://schemas.openxmlformats.org/officeDocument/2006/relationships" xmlns:p="http://schemas.openxmlformats.org/presentationml/2006/main">
   <p:cSld>
     <p:spTree>
@@ -9013,6 +9183,224 @@
     <p:extLst>
       <p:ext uri="{BB962C8B-B14F-4D97-AF65-F5344CB8AC3E}">
         <p14:creationId xmlns:p14="http://schemas.microsoft.com/office/powerpoint/2010/main" val="653901759"/>
+      </p:ext>
+    </p:extLst>
+  </p:cSld>
+  <p:clrMapOvr>
+    <a:masterClrMapping/>
+  </p:clrMapOvr>
+</p:sld>
+</file>
+
+<file path=ppt/slides/slide129.xml><?xml version="1.0" encoding="utf-8"?>
+<p:sld xmlns:a="http://schemas.openxmlformats.org/drawingml/2006/main" xmlns:r="http://schemas.openxmlformats.org/officeDocument/2006/relationships" xmlns:p="http://schemas.openxmlformats.org/presentationml/2006/main">
+  <p:cSld>
+    <p:spTree>
+      <p:nvGrpSpPr>
+        <p:cNvPr id="1" name="">
+          <a:extLst>
+            <a:ext uri="{FF2B5EF4-FFF2-40B4-BE49-F238E27FC236}">
+              <a16:creationId xmlns:a16="http://schemas.microsoft.com/office/drawing/2014/main" id="{9AC5E81D-CFBC-FB85-185C-48802FF4C230}"/>
+            </a:ext>
+          </a:extLst>
+        </p:cNvPr>
+        <p:cNvGrpSpPr/>
+        <p:nvPr/>
+      </p:nvGrpSpPr>
+      <p:grpSpPr>
+        <a:xfrm>
+          <a:off x="0" y="0"/>
+          <a:ext cx="0" cy="0"/>
+          <a:chOff x="0" y="0"/>
+          <a:chExt cx="0" cy="0"/>
+        </a:xfrm>
+      </p:grpSpPr>
+      <p:pic>
+        <p:nvPicPr>
+          <p:cNvPr id="18" name="図 17">
+            <a:extLst>
+              <a:ext uri="{FF2B5EF4-FFF2-40B4-BE49-F238E27FC236}">
+                <a16:creationId xmlns:a16="http://schemas.microsoft.com/office/drawing/2014/main" id="{565E928C-1691-6541-EEB7-08A3C2A12E14}"/>
+              </a:ext>
+            </a:extLst>
+          </p:cNvPr>
+          <p:cNvPicPr>
+            <a:picLocks noChangeAspect="1"/>
+          </p:cNvPicPr>
+          <p:nvPr/>
+        </p:nvPicPr>
+        <p:blipFill>
+          <a:blip r:embed="rId2">
+            <a:extLst>
+              <a:ext uri="{28A0092B-C50C-407E-A947-70E740481C1C}">
+                <a14:useLocalDpi xmlns:a14="http://schemas.microsoft.com/office/drawing/2010/main" val="0"/>
+              </a:ext>
+            </a:extLst>
+          </a:blip>
+          <a:stretch>
+            <a:fillRect/>
+          </a:stretch>
+        </p:blipFill>
+        <p:spPr>
+          <a:xfrm>
+            <a:off x="3778120" y="1883132"/>
+            <a:ext cx="4038600" cy="2905125"/>
+          </a:xfrm>
+          <a:prstGeom prst="rect">
+            <a:avLst/>
+          </a:prstGeom>
+        </p:spPr>
+      </p:pic>
+      <p:sp>
+        <p:nvSpPr>
+          <p:cNvPr id="4" name="正方形/長方形 3">
+            <a:extLst>
+              <a:ext uri="{FF2B5EF4-FFF2-40B4-BE49-F238E27FC236}">
+                <a16:creationId xmlns:a16="http://schemas.microsoft.com/office/drawing/2014/main" id="{199E8ABE-3D73-7EB0-A936-8A6823A0A0DE}"/>
+              </a:ext>
+            </a:extLst>
+          </p:cNvPr>
+          <p:cNvSpPr/>
+          <p:nvPr/>
+        </p:nvSpPr>
+        <p:spPr>
+          <a:xfrm flipV="1">
+            <a:off x="4501729" y="3475653"/>
+            <a:ext cx="3205357" cy="303246"/>
+          </a:xfrm>
+          <a:prstGeom prst="rect">
+            <a:avLst/>
+          </a:prstGeom>
+          <a:noFill/>
+          <a:ln w="28575">
+            <a:solidFill>
+              <a:srgbClr val="FF0000"/>
+            </a:solidFill>
+          </a:ln>
+        </p:spPr>
+        <p:style>
+          <a:lnRef idx="2">
+            <a:schemeClr val="accent6"/>
+          </a:lnRef>
+          <a:fillRef idx="1">
+            <a:schemeClr val="lt1"/>
+          </a:fillRef>
+          <a:effectRef idx="0">
+            <a:schemeClr val="accent6"/>
+          </a:effectRef>
+          <a:fontRef idx="minor">
+            <a:schemeClr val="dk1"/>
+          </a:fontRef>
+        </p:style>
+        <p:txBody>
+          <a:bodyPr rtlCol="0" anchor="ctr"/>
+          <a:lstStyle/>
+          <a:p>
+            <a:pPr algn="ctr"/>
+            <a:endParaRPr kumimoji="1" lang="ja-JP" altLang="en-US"/>
+          </a:p>
+        </p:txBody>
+      </p:sp>
+      <p:sp>
+        <p:nvSpPr>
+          <p:cNvPr id="5" name="正方形/長方形 4">
+            <a:extLst>
+              <a:ext uri="{FF2B5EF4-FFF2-40B4-BE49-F238E27FC236}">
+                <a16:creationId xmlns:a16="http://schemas.microsoft.com/office/drawing/2014/main" id="{E88749D9-F0C3-3921-A8CB-A60D88B71D60}"/>
+              </a:ext>
+            </a:extLst>
+          </p:cNvPr>
+          <p:cNvSpPr/>
+          <p:nvPr/>
+        </p:nvSpPr>
+        <p:spPr>
+          <a:xfrm flipV="1">
+            <a:off x="4395349" y="3831381"/>
+            <a:ext cx="3311737" cy="544676"/>
+          </a:xfrm>
+          <a:prstGeom prst="rect">
+            <a:avLst/>
+          </a:prstGeom>
+          <a:noFill/>
+          <a:ln w="28575">
+            <a:solidFill>
+              <a:srgbClr val="FF0000"/>
+            </a:solidFill>
+          </a:ln>
+        </p:spPr>
+        <p:style>
+          <a:lnRef idx="2">
+            <a:schemeClr val="accent6"/>
+          </a:lnRef>
+          <a:fillRef idx="1">
+            <a:schemeClr val="lt1"/>
+          </a:fillRef>
+          <a:effectRef idx="0">
+            <a:schemeClr val="accent6"/>
+          </a:effectRef>
+          <a:fontRef idx="minor">
+            <a:schemeClr val="dk1"/>
+          </a:fontRef>
+        </p:style>
+        <p:txBody>
+          <a:bodyPr rtlCol="0" anchor="ctr"/>
+          <a:lstStyle/>
+          <a:p>
+            <a:pPr algn="ctr"/>
+            <a:endParaRPr kumimoji="1" lang="ja-JP" altLang="en-US"/>
+          </a:p>
+        </p:txBody>
+      </p:sp>
+      <p:sp>
+        <p:nvSpPr>
+          <p:cNvPr id="7" name="正方形/長方形 6">
+            <a:extLst>
+              <a:ext uri="{FF2B5EF4-FFF2-40B4-BE49-F238E27FC236}">
+                <a16:creationId xmlns:a16="http://schemas.microsoft.com/office/drawing/2014/main" id="{7CE282FC-F3E2-A90C-560A-C104F7F0D8F3}"/>
+              </a:ext>
+            </a:extLst>
+          </p:cNvPr>
+          <p:cNvSpPr/>
+          <p:nvPr/>
+        </p:nvSpPr>
+        <p:spPr>
+          <a:xfrm>
+            <a:off x="5928047" y="2902696"/>
+            <a:ext cx="845977" cy="176406"/>
+          </a:xfrm>
+          <a:prstGeom prst="rect">
+            <a:avLst/>
+          </a:prstGeom>
+        </p:spPr>
+        <p:style>
+          <a:lnRef idx="2">
+            <a:schemeClr val="dk1">
+              <a:shade val="15000"/>
+            </a:schemeClr>
+          </a:lnRef>
+          <a:fillRef idx="1">
+            <a:schemeClr val="dk1"/>
+          </a:fillRef>
+          <a:effectRef idx="0">
+            <a:schemeClr val="dk1"/>
+          </a:effectRef>
+          <a:fontRef idx="minor">
+            <a:schemeClr val="lt1"/>
+          </a:fontRef>
+        </p:style>
+        <p:txBody>
+          <a:bodyPr rtlCol="0" anchor="ctr"/>
+          <a:lstStyle/>
+          <a:p>
+            <a:pPr algn="ctr"/>
+            <a:endParaRPr kumimoji="1" lang="ja-JP" altLang="en-US"/>
+          </a:p>
+        </p:txBody>
+      </p:sp>
+    </p:spTree>
+    <p:extLst>
+      <p:ext uri="{BB962C8B-B14F-4D97-AF65-F5344CB8AC3E}">
+        <p14:creationId xmlns:p14="http://schemas.microsoft.com/office/powerpoint/2010/main" val="504583617"/>
       </p:ext>
     </p:extLst>
   </p:cSld>
@@ -9910,224 +10298,6 @@
         <p:cNvPr id="1" name="">
           <a:extLst>
             <a:ext uri="{FF2B5EF4-FFF2-40B4-BE49-F238E27FC236}">
-              <a16:creationId xmlns:a16="http://schemas.microsoft.com/office/drawing/2014/main" id="{9AC5E81D-CFBC-FB85-185C-48802FF4C230}"/>
-            </a:ext>
-          </a:extLst>
-        </p:cNvPr>
-        <p:cNvGrpSpPr/>
-        <p:nvPr/>
-      </p:nvGrpSpPr>
-      <p:grpSpPr>
-        <a:xfrm>
-          <a:off x="0" y="0"/>
-          <a:ext cx="0" cy="0"/>
-          <a:chOff x="0" y="0"/>
-          <a:chExt cx="0" cy="0"/>
-        </a:xfrm>
-      </p:grpSpPr>
-      <p:pic>
-        <p:nvPicPr>
-          <p:cNvPr id="18" name="図 17">
-            <a:extLst>
-              <a:ext uri="{FF2B5EF4-FFF2-40B4-BE49-F238E27FC236}">
-                <a16:creationId xmlns:a16="http://schemas.microsoft.com/office/drawing/2014/main" id="{565E928C-1691-6541-EEB7-08A3C2A12E14}"/>
-              </a:ext>
-            </a:extLst>
-          </p:cNvPr>
-          <p:cNvPicPr>
-            <a:picLocks noChangeAspect="1"/>
-          </p:cNvPicPr>
-          <p:nvPr/>
-        </p:nvPicPr>
-        <p:blipFill>
-          <a:blip r:embed="rId2">
-            <a:extLst>
-              <a:ext uri="{28A0092B-C50C-407E-A947-70E740481C1C}">
-                <a14:useLocalDpi xmlns:a14="http://schemas.microsoft.com/office/drawing/2010/main" val="0"/>
-              </a:ext>
-            </a:extLst>
-          </a:blip>
-          <a:stretch>
-            <a:fillRect/>
-          </a:stretch>
-        </p:blipFill>
-        <p:spPr>
-          <a:xfrm>
-            <a:off x="3778120" y="1883132"/>
-            <a:ext cx="4038600" cy="2905125"/>
-          </a:xfrm>
-          <a:prstGeom prst="rect">
-            <a:avLst/>
-          </a:prstGeom>
-        </p:spPr>
-      </p:pic>
-      <p:sp>
-        <p:nvSpPr>
-          <p:cNvPr id="4" name="正方形/長方形 3">
-            <a:extLst>
-              <a:ext uri="{FF2B5EF4-FFF2-40B4-BE49-F238E27FC236}">
-                <a16:creationId xmlns:a16="http://schemas.microsoft.com/office/drawing/2014/main" id="{199E8ABE-3D73-7EB0-A936-8A6823A0A0DE}"/>
-              </a:ext>
-            </a:extLst>
-          </p:cNvPr>
-          <p:cNvSpPr/>
-          <p:nvPr/>
-        </p:nvSpPr>
-        <p:spPr>
-          <a:xfrm flipV="1">
-            <a:off x="4501729" y="3475653"/>
-            <a:ext cx="3205357" cy="303246"/>
-          </a:xfrm>
-          <a:prstGeom prst="rect">
-            <a:avLst/>
-          </a:prstGeom>
-          <a:noFill/>
-          <a:ln w="28575">
-            <a:solidFill>
-              <a:srgbClr val="FF0000"/>
-            </a:solidFill>
-          </a:ln>
-        </p:spPr>
-        <p:style>
-          <a:lnRef idx="2">
-            <a:schemeClr val="accent6"/>
-          </a:lnRef>
-          <a:fillRef idx="1">
-            <a:schemeClr val="lt1"/>
-          </a:fillRef>
-          <a:effectRef idx="0">
-            <a:schemeClr val="accent6"/>
-          </a:effectRef>
-          <a:fontRef idx="minor">
-            <a:schemeClr val="dk1"/>
-          </a:fontRef>
-        </p:style>
-        <p:txBody>
-          <a:bodyPr rtlCol="0" anchor="ctr"/>
-          <a:lstStyle/>
-          <a:p>
-            <a:pPr algn="ctr"/>
-            <a:endParaRPr kumimoji="1" lang="ja-JP" altLang="en-US"/>
-          </a:p>
-        </p:txBody>
-      </p:sp>
-      <p:sp>
-        <p:nvSpPr>
-          <p:cNvPr id="5" name="正方形/長方形 4">
-            <a:extLst>
-              <a:ext uri="{FF2B5EF4-FFF2-40B4-BE49-F238E27FC236}">
-                <a16:creationId xmlns:a16="http://schemas.microsoft.com/office/drawing/2014/main" id="{E88749D9-F0C3-3921-A8CB-A60D88B71D60}"/>
-              </a:ext>
-            </a:extLst>
-          </p:cNvPr>
-          <p:cNvSpPr/>
-          <p:nvPr/>
-        </p:nvSpPr>
-        <p:spPr>
-          <a:xfrm flipV="1">
-            <a:off x="4395349" y="3831381"/>
-            <a:ext cx="3311737" cy="544676"/>
-          </a:xfrm>
-          <a:prstGeom prst="rect">
-            <a:avLst/>
-          </a:prstGeom>
-          <a:noFill/>
-          <a:ln w="28575">
-            <a:solidFill>
-              <a:srgbClr val="FF0000"/>
-            </a:solidFill>
-          </a:ln>
-        </p:spPr>
-        <p:style>
-          <a:lnRef idx="2">
-            <a:schemeClr val="accent6"/>
-          </a:lnRef>
-          <a:fillRef idx="1">
-            <a:schemeClr val="lt1"/>
-          </a:fillRef>
-          <a:effectRef idx="0">
-            <a:schemeClr val="accent6"/>
-          </a:effectRef>
-          <a:fontRef idx="minor">
-            <a:schemeClr val="dk1"/>
-          </a:fontRef>
-        </p:style>
-        <p:txBody>
-          <a:bodyPr rtlCol="0" anchor="ctr"/>
-          <a:lstStyle/>
-          <a:p>
-            <a:pPr algn="ctr"/>
-            <a:endParaRPr kumimoji="1" lang="ja-JP" altLang="en-US"/>
-          </a:p>
-        </p:txBody>
-      </p:sp>
-      <p:sp>
-        <p:nvSpPr>
-          <p:cNvPr id="7" name="正方形/長方形 6">
-            <a:extLst>
-              <a:ext uri="{FF2B5EF4-FFF2-40B4-BE49-F238E27FC236}">
-                <a16:creationId xmlns:a16="http://schemas.microsoft.com/office/drawing/2014/main" id="{7CE282FC-F3E2-A90C-560A-C104F7F0D8F3}"/>
-              </a:ext>
-            </a:extLst>
-          </p:cNvPr>
-          <p:cNvSpPr/>
-          <p:nvPr/>
-        </p:nvSpPr>
-        <p:spPr>
-          <a:xfrm>
-            <a:off x="5928047" y="2902696"/>
-            <a:ext cx="845977" cy="176406"/>
-          </a:xfrm>
-          <a:prstGeom prst="rect">
-            <a:avLst/>
-          </a:prstGeom>
-        </p:spPr>
-        <p:style>
-          <a:lnRef idx="2">
-            <a:schemeClr val="dk1">
-              <a:shade val="15000"/>
-            </a:schemeClr>
-          </a:lnRef>
-          <a:fillRef idx="1">
-            <a:schemeClr val="dk1"/>
-          </a:fillRef>
-          <a:effectRef idx="0">
-            <a:schemeClr val="dk1"/>
-          </a:effectRef>
-          <a:fontRef idx="minor">
-            <a:schemeClr val="lt1"/>
-          </a:fontRef>
-        </p:style>
-        <p:txBody>
-          <a:bodyPr rtlCol="0" anchor="ctr"/>
-          <a:lstStyle/>
-          <a:p>
-            <a:pPr algn="ctr"/>
-            <a:endParaRPr kumimoji="1" lang="ja-JP" altLang="en-US"/>
-          </a:p>
-        </p:txBody>
-      </p:sp>
-    </p:spTree>
-    <p:extLst>
-      <p:ext uri="{BB962C8B-B14F-4D97-AF65-F5344CB8AC3E}">
-        <p14:creationId xmlns:p14="http://schemas.microsoft.com/office/powerpoint/2010/main" val="504583617"/>
-      </p:ext>
-    </p:extLst>
-  </p:cSld>
-  <p:clrMapOvr>
-    <a:masterClrMapping/>
-  </p:clrMapOvr>
-</p:sld>
-</file>
-
-<file path=ppt/slides/slide131.xml><?xml version="1.0" encoding="utf-8"?>
-<p:sld xmlns:a="http://schemas.openxmlformats.org/drawingml/2006/main" xmlns:r="http://schemas.openxmlformats.org/officeDocument/2006/relationships" xmlns:p="http://schemas.openxmlformats.org/presentationml/2006/main">
-  <p:cSld>
-    <p:spTree>
-      <p:nvGrpSpPr>
-        <p:cNvPr id="1" name="">
-          <a:extLst>
-            <a:ext uri="{FF2B5EF4-FFF2-40B4-BE49-F238E27FC236}">
               <a16:creationId xmlns:a16="http://schemas.microsoft.com/office/drawing/2014/main" id="{E0E46EE9-5CCA-A21F-4D55-EFB9CB10BDF1}"/>
             </a:ext>
           </a:extLst>
@@ -10156,7 +10326,7 @@
 </p:sld>
 </file>
 
-<file path=ppt/slides/slide132.xml><?xml version="1.0" encoding="utf-8"?>
+<file path=ppt/slides/slide131.xml><?xml version="1.0" encoding="utf-8"?>
 <p:sld xmlns:a="http://schemas.openxmlformats.org/drawingml/2006/main" xmlns:r="http://schemas.openxmlformats.org/officeDocument/2006/relationships" xmlns:p="http://schemas.openxmlformats.org/presentationml/2006/main">
   <p:cSld>
     <p:spTree>
@@ -10523,7 +10693,7 @@
 </p:sld>
 </file>
 
-<file path=ppt/slides/slide133.xml><?xml version="1.0" encoding="utf-8"?>
+<file path=ppt/slides/slide132.xml><?xml version="1.0" encoding="utf-8"?>
 <p:sld xmlns:a="http://schemas.openxmlformats.org/drawingml/2006/main" xmlns:r="http://schemas.openxmlformats.org/officeDocument/2006/relationships" xmlns:p="http://schemas.openxmlformats.org/presentationml/2006/main">
   <p:cSld>
     <p:spTree>
@@ -10877,7 +11047,7 @@
 </p:sld>
 </file>
 
-<file path=ppt/slides/slide134.xml><?xml version="1.0" encoding="utf-8"?>
+<file path=ppt/slides/slide133.xml><?xml version="1.0" encoding="utf-8"?>
 <p:sld xmlns:a="http://schemas.openxmlformats.org/drawingml/2006/main" xmlns:r="http://schemas.openxmlformats.org/officeDocument/2006/relationships" xmlns:p="http://schemas.openxmlformats.org/presentationml/2006/main">
   <p:cSld>
     <p:spTree>
@@ -11074,7 +11244,7 @@
 </p:sld>
 </file>
 
-<file path=ppt/slides/slide135.xml><?xml version="1.0" encoding="utf-8"?>
+<file path=ppt/slides/slide134.xml><?xml version="1.0" encoding="utf-8"?>
 <p:sld xmlns:a="http://schemas.openxmlformats.org/drawingml/2006/main" xmlns:r="http://schemas.openxmlformats.org/officeDocument/2006/relationships" xmlns:p="http://schemas.openxmlformats.org/presentationml/2006/main">
   <p:cSld>
     <p:spTree>
@@ -11190,7 +11360,7 @@
 </p:sld>
 </file>
 
-<file path=ppt/slides/slide136.xml><?xml version="1.0" encoding="utf-8"?>
+<file path=ppt/slides/slide135.xml><?xml version="1.0" encoding="utf-8"?>
 <p:sld xmlns:a="http://schemas.openxmlformats.org/drawingml/2006/main" xmlns:r="http://schemas.openxmlformats.org/officeDocument/2006/relationships" xmlns:p="http://schemas.openxmlformats.org/presentationml/2006/main">
   <p:cSld>
     <p:spTree>
@@ -11368,7 +11538,7 @@
 </p:sld>
 </file>
 
-<file path=ppt/slides/slide137.xml><?xml version="1.0" encoding="utf-8"?>
+<file path=ppt/slides/slide136.xml><?xml version="1.0" encoding="utf-8"?>
 <p:sld xmlns:a="http://schemas.openxmlformats.org/drawingml/2006/main" xmlns:r="http://schemas.openxmlformats.org/officeDocument/2006/relationships" xmlns:p="http://schemas.openxmlformats.org/presentationml/2006/main">
   <p:cSld>
     <p:spTree>
@@ -11404,7 +11574,7 @@
 </p:sld>
 </file>
 
-<file path=ppt/slides/slide138.xml><?xml version="1.0" encoding="utf-8"?>
+<file path=ppt/slides/slide137.xml><?xml version="1.0" encoding="utf-8"?>
 <p:sld xmlns:a="http://schemas.openxmlformats.org/drawingml/2006/main" xmlns:r="http://schemas.openxmlformats.org/officeDocument/2006/relationships" xmlns:p="http://schemas.openxmlformats.org/presentationml/2006/main">
   <p:cSld>
     <p:spTree>
@@ -11826,7 +11996,7 @@
 </p:sld>
 </file>
 
-<file path=ppt/slides/slide139.xml><?xml version="1.0" encoding="utf-8"?>
+<file path=ppt/slides/slide138.xml><?xml version="1.0" encoding="utf-8"?>
 <p:sld xmlns:a="http://schemas.openxmlformats.org/drawingml/2006/main" xmlns:r="http://schemas.openxmlformats.org/officeDocument/2006/relationships" xmlns:p="http://schemas.openxmlformats.org/presentationml/2006/main">
   <p:cSld>
     <p:spTree>
@@ -12029,6 +12199,218 @@
     <p:extLst>
       <p:ext uri="{BB962C8B-B14F-4D97-AF65-F5344CB8AC3E}">
         <p14:creationId xmlns:p14="http://schemas.microsoft.com/office/powerpoint/2010/main" val="2480898616"/>
+      </p:ext>
+    </p:extLst>
+  </p:cSld>
+  <p:clrMapOvr>
+    <a:masterClrMapping/>
+  </p:clrMapOvr>
+</p:sld>
+</file>
+
+<file path=ppt/slides/slide139.xml><?xml version="1.0" encoding="utf-8"?>
+<p:sld xmlns:a="http://schemas.openxmlformats.org/drawingml/2006/main" xmlns:r="http://schemas.openxmlformats.org/officeDocument/2006/relationships" xmlns:p="http://schemas.openxmlformats.org/presentationml/2006/main">
+  <p:cSld>
+    <p:spTree>
+      <p:nvGrpSpPr>
+        <p:cNvPr id="1" name="">
+          <a:extLst>
+            <a:ext uri="{FF2B5EF4-FFF2-40B4-BE49-F238E27FC236}">
+              <a16:creationId xmlns:a16="http://schemas.microsoft.com/office/drawing/2014/main" id="{51EE2214-693A-2BB0-8489-F7BEA02B61FA}"/>
+            </a:ext>
+          </a:extLst>
+        </p:cNvPr>
+        <p:cNvGrpSpPr/>
+        <p:nvPr/>
+      </p:nvGrpSpPr>
+      <p:grpSpPr>
+        <a:xfrm>
+          <a:off x="0" y="0"/>
+          <a:ext cx="0" cy="0"/>
+          <a:chOff x="0" y="0"/>
+          <a:chExt cx="0" cy="0"/>
+        </a:xfrm>
+      </p:grpSpPr>
+      <p:sp>
+        <p:nvSpPr>
+          <p:cNvPr id="2" name="正方形/長方形 1">
+            <a:extLst>
+              <a:ext uri="{FF2B5EF4-FFF2-40B4-BE49-F238E27FC236}">
+                <a16:creationId xmlns:a16="http://schemas.microsoft.com/office/drawing/2014/main" id="{FD28412C-31CF-E482-8941-E80B7FA268F3}"/>
+              </a:ext>
+            </a:extLst>
+          </p:cNvPr>
+          <p:cNvSpPr/>
+          <p:nvPr/>
+        </p:nvSpPr>
+        <p:spPr>
+          <a:xfrm>
+            <a:off x="3470986" y="1530219"/>
+            <a:ext cx="7200000" cy="2015413"/>
+          </a:xfrm>
+          <a:prstGeom prst="rect">
+            <a:avLst/>
+          </a:prstGeom>
+          <a:solidFill>
+            <a:schemeClr val="tx1"/>
+          </a:solidFill>
+          <a:ln>
+            <a:solidFill>
+              <a:schemeClr val="tx1"/>
+            </a:solidFill>
+          </a:ln>
+        </p:spPr>
+        <p:style>
+          <a:lnRef idx="2">
+            <a:schemeClr val="accent6"/>
+          </a:lnRef>
+          <a:fillRef idx="1">
+            <a:schemeClr val="lt1"/>
+          </a:fillRef>
+          <a:effectRef idx="0">
+            <a:schemeClr val="accent6"/>
+          </a:effectRef>
+          <a:fontRef idx="minor">
+            <a:schemeClr val="dk1"/>
+          </a:fontRef>
+        </p:style>
+        <p:txBody>
+          <a:bodyPr rtlCol="0" anchor="t"/>
+          <a:lstStyle/>
+          <a:p>
+            <a:r>
+              <a:rPr lang="en-US" altLang="ja-JP" sz="1400" dirty="0">
+                <a:solidFill>
+                  <a:schemeClr val="bg1"/>
+                </a:solidFill>
+              </a:rPr>
+              <a:t>C:\git-test-remote&gt;git pull origin main</a:t>
+            </a:r>
+          </a:p>
+          <a:p>
+            <a:r>
+              <a:rPr lang="en-US" altLang="ja-JP" sz="1400" dirty="0">
+                <a:solidFill>
+                  <a:schemeClr val="bg1"/>
+                </a:solidFill>
+              </a:rPr>
+              <a:t>From https://github.com/nishida2073/git-test-remote</a:t>
+            </a:r>
+          </a:p>
+          <a:p>
+            <a:r>
+              <a:rPr lang="en-US" altLang="ja-JP" sz="1400" dirty="0">
+                <a:solidFill>
+                  <a:schemeClr val="bg1"/>
+                </a:solidFill>
+              </a:rPr>
+              <a:t> * branch            main       -&gt; FETCH_HEAD</a:t>
+            </a:r>
+          </a:p>
+          <a:p>
+            <a:r>
+              <a:rPr lang="en-US" altLang="ja-JP" sz="1400" dirty="0">
+                <a:solidFill>
+                  <a:schemeClr val="bg1"/>
+                </a:solidFill>
+              </a:rPr>
+              <a:t>Updating 7ceea93..924ec4d</a:t>
+            </a:r>
+          </a:p>
+          <a:p>
+            <a:r>
+              <a:rPr lang="en-US" altLang="ja-JP" sz="1400" dirty="0">
+                <a:solidFill>
+                  <a:schemeClr val="bg1"/>
+                </a:solidFill>
+              </a:rPr>
+              <a:t>Fast-forward</a:t>
+            </a:r>
+          </a:p>
+          <a:p>
+            <a:r>
+              <a:rPr lang="en-US" altLang="ja-JP" sz="1400" dirty="0">
+                <a:solidFill>
+                  <a:schemeClr val="bg1"/>
+                </a:solidFill>
+              </a:rPr>
+              <a:t> test.txt | 2 +-</a:t>
+            </a:r>
+          </a:p>
+          <a:p>
+            <a:r>
+              <a:rPr lang="en-US" altLang="ja-JP" sz="1400" dirty="0">
+                <a:solidFill>
+                  <a:schemeClr val="bg1"/>
+                </a:solidFill>
+              </a:rPr>
+              <a:t> 1 file changed, 1 insertion(+), 1 deletion(-)</a:t>
+            </a:r>
+          </a:p>
+          <a:p>
+            <a:endParaRPr lang="en-US" altLang="ja-JP" sz="1400" dirty="0">
+              <a:solidFill>
+                <a:schemeClr val="bg1"/>
+              </a:solidFill>
+            </a:endParaRPr>
+          </a:p>
+          <a:p>
+            <a:r>
+              <a:rPr lang="en-US" altLang="ja-JP" sz="1400" dirty="0">
+                <a:solidFill>
+                  <a:schemeClr val="bg1"/>
+                </a:solidFill>
+              </a:rPr>
+              <a:t>C:\git-test-remote&gt;</a:t>
+            </a:r>
+            <a:endParaRPr kumimoji="1" lang="ja-JP" altLang="en-US" sz="1400" dirty="0">
+              <a:solidFill>
+                <a:schemeClr val="bg1"/>
+              </a:solidFill>
+            </a:endParaRPr>
+          </a:p>
+        </p:txBody>
+      </p:sp>
+      <p:pic>
+        <p:nvPicPr>
+          <p:cNvPr id="3" name="図 2">
+            <a:extLst>
+              <a:ext uri="{FF2B5EF4-FFF2-40B4-BE49-F238E27FC236}">
+                <a16:creationId xmlns:a16="http://schemas.microsoft.com/office/drawing/2014/main" id="{27AD116D-967A-5887-C9C1-ED518F56A0E4}"/>
+              </a:ext>
+            </a:extLst>
+          </p:cNvPr>
+          <p:cNvPicPr>
+            <a:picLocks noChangeAspect="1"/>
+          </p:cNvPicPr>
+          <p:nvPr/>
+        </p:nvPicPr>
+        <p:blipFill>
+          <a:blip r:embed="rId2">
+            <a:extLst>
+              <a:ext uri="{28A0092B-C50C-407E-A947-70E740481C1C}">
+                <a14:useLocalDpi xmlns:a14="http://schemas.microsoft.com/office/drawing/2010/main" val="0"/>
+              </a:ext>
+            </a:extLst>
+          </a:blip>
+          <a:stretch>
+            <a:fillRect/>
+          </a:stretch>
+        </p:blipFill>
+        <p:spPr>
+          <a:xfrm>
+            <a:off x="5691674" y="1810137"/>
+            <a:ext cx="980004" cy="223936"/>
+          </a:xfrm>
+          <a:prstGeom prst="rect">
+            <a:avLst/>
+          </a:prstGeom>
+        </p:spPr>
+      </p:pic>
+    </p:spTree>
+    <p:extLst>
+      <p:ext uri="{BB962C8B-B14F-4D97-AF65-F5344CB8AC3E}">
+        <p14:creationId xmlns:p14="http://schemas.microsoft.com/office/powerpoint/2010/main" val="4123166572"/>
       </p:ext>
     </p:extLst>
   </p:cSld>
@@ -12275,218 +12657,6 @@
         <p:cNvPr id="1" name="">
           <a:extLst>
             <a:ext uri="{FF2B5EF4-FFF2-40B4-BE49-F238E27FC236}">
-              <a16:creationId xmlns:a16="http://schemas.microsoft.com/office/drawing/2014/main" id="{51EE2214-693A-2BB0-8489-F7BEA02B61FA}"/>
-            </a:ext>
-          </a:extLst>
-        </p:cNvPr>
-        <p:cNvGrpSpPr/>
-        <p:nvPr/>
-      </p:nvGrpSpPr>
-      <p:grpSpPr>
-        <a:xfrm>
-          <a:off x="0" y="0"/>
-          <a:ext cx="0" cy="0"/>
-          <a:chOff x="0" y="0"/>
-          <a:chExt cx="0" cy="0"/>
-        </a:xfrm>
-      </p:grpSpPr>
-      <p:sp>
-        <p:nvSpPr>
-          <p:cNvPr id="2" name="正方形/長方形 1">
-            <a:extLst>
-              <a:ext uri="{FF2B5EF4-FFF2-40B4-BE49-F238E27FC236}">
-                <a16:creationId xmlns:a16="http://schemas.microsoft.com/office/drawing/2014/main" id="{FD28412C-31CF-E482-8941-E80B7FA268F3}"/>
-              </a:ext>
-            </a:extLst>
-          </p:cNvPr>
-          <p:cNvSpPr/>
-          <p:nvPr/>
-        </p:nvSpPr>
-        <p:spPr>
-          <a:xfrm>
-            <a:off x="3470986" y="1530219"/>
-            <a:ext cx="7200000" cy="2015413"/>
-          </a:xfrm>
-          <a:prstGeom prst="rect">
-            <a:avLst/>
-          </a:prstGeom>
-          <a:solidFill>
-            <a:schemeClr val="tx1"/>
-          </a:solidFill>
-          <a:ln>
-            <a:solidFill>
-              <a:schemeClr val="tx1"/>
-            </a:solidFill>
-          </a:ln>
-        </p:spPr>
-        <p:style>
-          <a:lnRef idx="2">
-            <a:schemeClr val="accent6"/>
-          </a:lnRef>
-          <a:fillRef idx="1">
-            <a:schemeClr val="lt1"/>
-          </a:fillRef>
-          <a:effectRef idx="0">
-            <a:schemeClr val="accent6"/>
-          </a:effectRef>
-          <a:fontRef idx="minor">
-            <a:schemeClr val="dk1"/>
-          </a:fontRef>
-        </p:style>
-        <p:txBody>
-          <a:bodyPr rtlCol="0" anchor="t"/>
-          <a:lstStyle/>
-          <a:p>
-            <a:r>
-              <a:rPr lang="en-US" altLang="ja-JP" sz="1400" dirty="0">
-                <a:solidFill>
-                  <a:schemeClr val="bg1"/>
-                </a:solidFill>
-              </a:rPr>
-              <a:t>C:\git-test-remote&gt;git pull origin main</a:t>
-            </a:r>
-          </a:p>
-          <a:p>
-            <a:r>
-              <a:rPr lang="en-US" altLang="ja-JP" sz="1400" dirty="0">
-                <a:solidFill>
-                  <a:schemeClr val="bg1"/>
-                </a:solidFill>
-              </a:rPr>
-              <a:t>From https://github.com/nishida2073/git-test-remote</a:t>
-            </a:r>
-          </a:p>
-          <a:p>
-            <a:r>
-              <a:rPr lang="en-US" altLang="ja-JP" sz="1400" dirty="0">
-                <a:solidFill>
-                  <a:schemeClr val="bg1"/>
-                </a:solidFill>
-              </a:rPr>
-              <a:t> * branch            main       -&gt; FETCH_HEAD</a:t>
-            </a:r>
-          </a:p>
-          <a:p>
-            <a:r>
-              <a:rPr lang="en-US" altLang="ja-JP" sz="1400" dirty="0">
-                <a:solidFill>
-                  <a:schemeClr val="bg1"/>
-                </a:solidFill>
-              </a:rPr>
-              <a:t>Updating 7ceea93..924ec4d</a:t>
-            </a:r>
-          </a:p>
-          <a:p>
-            <a:r>
-              <a:rPr lang="en-US" altLang="ja-JP" sz="1400" dirty="0">
-                <a:solidFill>
-                  <a:schemeClr val="bg1"/>
-                </a:solidFill>
-              </a:rPr>
-              <a:t>Fast-forward</a:t>
-            </a:r>
-          </a:p>
-          <a:p>
-            <a:r>
-              <a:rPr lang="en-US" altLang="ja-JP" sz="1400" dirty="0">
-                <a:solidFill>
-                  <a:schemeClr val="bg1"/>
-                </a:solidFill>
-              </a:rPr>
-              <a:t> test.txt | 2 +-</a:t>
-            </a:r>
-          </a:p>
-          <a:p>
-            <a:r>
-              <a:rPr lang="en-US" altLang="ja-JP" sz="1400" dirty="0">
-                <a:solidFill>
-                  <a:schemeClr val="bg1"/>
-                </a:solidFill>
-              </a:rPr>
-              <a:t> 1 file changed, 1 insertion(+), 1 deletion(-)</a:t>
-            </a:r>
-          </a:p>
-          <a:p>
-            <a:endParaRPr lang="en-US" altLang="ja-JP" sz="1400" dirty="0">
-              <a:solidFill>
-                <a:schemeClr val="bg1"/>
-              </a:solidFill>
-            </a:endParaRPr>
-          </a:p>
-          <a:p>
-            <a:r>
-              <a:rPr lang="en-US" altLang="ja-JP" sz="1400" dirty="0">
-                <a:solidFill>
-                  <a:schemeClr val="bg1"/>
-                </a:solidFill>
-              </a:rPr>
-              <a:t>C:\git-test-remote&gt;</a:t>
-            </a:r>
-            <a:endParaRPr kumimoji="1" lang="ja-JP" altLang="en-US" sz="1400" dirty="0">
-              <a:solidFill>
-                <a:schemeClr val="bg1"/>
-              </a:solidFill>
-            </a:endParaRPr>
-          </a:p>
-        </p:txBody>
-      </p:sp>
-      <p:pic>
-        <p:nvPicPr>
-          <p:cNvPr id="3" name="図 2">
-            <a:extLst>
-              <a:ext uri="{FF2B5EF4-FFF2-40B4-BE49-F238E27FC236}">
-                <a16:creationId xmlns:a16="http://schemas.microsoft.com/office/drawing/2014/main" id="{27AD116D-967A-5887-C9C1-ED518F56A0E4}"/>
-              </a:ext>
-            </a:extLst>
-          </p:cNvPr>
-          <p:cNvPicPr>
-            <a:picLocks noChangeAspect="1"/>
-          </p:cNvPicPr>
-          <p:nvPr/>
-        </p:nvPicPr>
-        <p:blipFill>
-          <a:blip r:embed="rId2">
-            <a:extLst>
-              <a:ext uri="{28A0092B-C50C-407E-A947-70E740481C1C}">
-                <a14:useLocalDpi xmlns:a14="http://schemas.microsoft.com/office/drawing/2010/main" val="0"/>
-              </a:ext>
-            </a:extLst>
-          </a:blip>
-          <a:stretch>
-            <a:fillRect/>
-          </a:stretch>
-        </p:blipFill>
-        <p:spPr>
-          <a:xfrm>
-            <a:off x="5691674" y="1810137"/>
-            <a:ext cx="980004" cy="223936"/>
-          </a:xfrm>
-          <a:prstGeom prst="rect">
-            <a:avLst/>
-          </a:prstGeom>
-        </p:spPr>
-      </p:pic>
-    </p:spTree>
-    <p:extLst>
-      <p:ext uri="{BB962C8B-B14F-4D97-AF65-F5344CB8AC3E}">
-        <p14:creationId xmlns:p14="http://schemas.microsoft.com/office/powerpoint/2010/main" val="4123166572"/>
-      </p:ext>
-    </p:extLst>
-  </p:cSld>
-  <p:clrMapOvr>
-    <a:masterClrMapping/>
-  </p:clrMapOvr>
-</p:sld>
-</file>
-
-<file path=ppt/slides/slide141.xml><?xml version="1.0" encoding="utf-8"?>
-<p:sld xmlns:a="http://schemas.openxmlformats.org/drawingml/2006/main" xmlns:r="http://schemas.openxmlformats.org/officeDocument/2006/relationships" xmlns:p="http://schemas.openxmlformats.org/presentationml/2006/main">
-  <p:cSld>
-    <p:spTree>
-      <p:nvGrpSpPr>
-        <p:cNvPr id="1" name="">
-          <a:extLst>
-            <a:ext uri="{FF2B5EF4-FFF2-40B4-BE49-F238E27FC236}">
               <a16:creationId xmlns:a16="http://schemas.microsoft.com/office/drawing/2014/main" id="{234154BB-3551-8E9E-55D9-7D88F78E575C}"/>
             </a:ext>
           </a:extLst>
@@ -12515,7 +12685,7 @@
 </p:sld>
 </file>
 
-<file path=ppt/slides/slide142.xml><?xml version="1.0" encoding="utf-8"?>
+<file path=ppt/slides/slide141.xml><?xml version="1.0" encoding="utf-8"?>
 <p:sld xmlns:a="http://schemas.openxmlformats.org/drawingml/2006/main" xmlns:r="http://schemas.openxmlformats.org/officeDocument/2006/relationships" xmlns:p="http://schemas.openxmlformats.org/presentationml/2006/main">
   <p:cSld>
     <p:spTree>
@@ -12668,7 +12838,7 @@
 </p:sld>
 </file>
 
-<file path=ppt/slides/slide143.xml><?xml version="1.0" encoding="utf-8"?>
+<file path=ppt/slides/slide142.xml><?xml version="1.0" encoding="utf-8"?>
 <p:sld xmlns:a="http://schemas.openxmlformats.org/drawingml/2006/main" xmlns:r="http://schemas.openxmlformats.org/officeDocument/2006/relationships" xmlns:p="http://schemas.openxmlformats.org/presentationml/2006/main">
   <p:cSld>
     <p:spTree>
@@ -12831,7 +13001,7 @@
 </p:sld>
 </file>
 
-<file path=ppt/slides/slide144.xml><?xml version="1.0" encoding="utf-8"?>
+<file path=ppt/slides/slide143.xml><?xml version="1.0" encoding="utf-8"?>
 <p:sld xmlns:a="http://schemas.openxmlformats.org/drawingml/2006/main" xmlns:r="http://schemas.openxmlformats.org/officeDocument/2006/relationships" xmlns:p="http://schemas.openxmlformats.org/presentationml/2006/main">
   <p:cSld>
     <p:spTree>
@@ -13100,7 +13270,7 @@
 </p:sld>
 </file>
 
-<file path=ppt/slides/slide145.xml><?xml version="1.0" encoding="utf-8"?>
+<file path=ppt/slides/slide144.xml><?xml version="1.0" encoding="utf-8"?>
 <p:sld xmlns:a="http://schemas.openxmlformats.org/drawingml/2006/main" xmlns:r="http://schemas.openxmlformats.org/officeDocument/2006/relationships" xmlns:p="http://schemas.openxmlformats.org/presentationml/2006/main">
   <p:cSld>
     <p:spTree>
@@ -13246,7 +13416,7 @@
 </p:sld>
 </file>
 
-<file path=ppt/slides/slide146.xml><?xml version="1.0" encoding="utf-8"?>
+<file path=ppt/slides/slide145.xml><?xml version="1.0" encoding="utf-8"?>
 <p:sld xmlns:a="http://schemas.openxmlformats.org/drawingml/2006/main" xmlns:r="http://schemas.openxmlformats.org/officeDocument/2006/relationships" xmlns:p="http://schemas.openxmlformats.org/presentationml/2006/main">
   <p:cSld>
     <p:spTree>
@@ -17838,7 +18008,7 @@
         </p:blipFill>
         <p:spPr>
           <a:xfrm>
-            <a:off x="4331855" y="2212907"/>
+            <a:off x="4275869" y="2408858"/>
             <a:ext cx="1008000" cy="1008000"/>
           </a:xfrm>
           <a:prstGeom prst="rect">
@@ -18101,99 +18271,6 @@
           </a:p>
         </p:txBody>
       </p:sp>
-      <p:grpSp>
-        <p:nvGrpSpPr>
-          <p:cNvPr id="3" name="グループ化 2">
-            <a:extLst>
-              <a:ext uri="{FF2B5EF4-FFF2-40B4-BE49-F238E27FC236}">
-                <a16:creationId xmlns:a16="http://schemas.microsoft.com/office/drawing/2014/main" id="{AE5BED5A-D86F-3820-1FAB-4D492B9EA4B8}"/>
-              </a:ext>
-            </a:extLst>
-          </p:cNvPr>
-          <p:cNvGrpSpPr/>
-          <p:nvPr/>
-        </p:nvGrpSpPr>
-        <p:grpSpPr>
-          <a:xfrm>
-            <a:off x="4111901" y="2257036"/>
-            <a:ext cx="1217310" cy="1293884"/>
-            <a:chOff x="5938864" y="3124197"/>
-            <a:chExt cx="1217310" cy="1364976"/>
-          </a:xfrm>
-        </p:grpSpPr>
-        <p:pic>
-          <p:nvPicPr>
-            <p:cNvPr id="5" name="図 4">
-              <a:extLst>
-                <a:ext uri="{FF2B5EF4-FFF2-40B4-BE49-F238E27FC236}">
-                  <a16:creationId xmlns:a16="http://schemas.microsoft.com/office/drawing/2014/main" id="{0F3DA0C4-30D4-A281-89EB-0F2154D9CB9C}"/>
-                </a:ext>
-              </a:extLst>
-            </p:cNvPr>
-            <p:cNvPicPr>
-              <a:picLocks noChangeAspect="1"/>
-            </p:cNvPicPr>
-            <p:nvPr/>
-          </p:nvPicPr>
-          <p:blipFill>
-            <a:blip r:embed="rId2">
-              <a:extLst>
-                <a:ext uri="{28A0092B-C50C-407E-A947-70E740481C1C}">
-                  <a14:useLocalDpi xmlns:a14="http://schemas.microsoft.com/office/drawing/2010/main" val="0"/>
-                </a:ext>
-              </a:extLst>
-            </a:blip>
-            <a:stretch>
-              <a:fillRect/>
-            </a:stretch>
-          </p:blipFill>
-          <p:spPr>
-            <a:xfrm>
-              <a:off x="5938864" y="3124197"/>
-              <a:ext cx="1217310" cy="1364976"/>
-            </a:xfrm>
-            <a:prstGeom prst="rect">
-              <a:avLst/>
-            </a:prstGeom>
-          </p:spPr>
-        </p:pic>
-        <p:pic>
-          <p:nvPicPr>
-            <p:cNvPr id="6" name="図 5">
-              <a:extLst>
-                <a:ext uri="{FF2B5EF4-FFF2-40B4-BE49-F238E27FC236}">
-                  <a16:creationId xmlns:a16="http://schemas.microsoft.com/office/drawing/2014/main" id="{E4FA44E5-969E-8323-0C1D-F35118D67CE8}"/>
-                </a:ext>
-              </a:extLst>
-            </p:cNvPr>
-            <p:cNvPicPr>
-              <a:picLocks noChangeAspect="1"/>
-            </p:cNvPicPr>
-            <p:nvPr/>
-          </p:nvPicPr>
-          <p:blipFill>
-            <a:blip r:embed="rId3">
-              <a:extLst>
-                <a:ext uri="{28A0092B-C50C-407E-A947-70E740481C1C}">
-                  <a14:useLocalDpi xmlns:a14="http://schemas.microsoft.com/office/drawing/2010/main" val="0"/>
-                </a:ext>
-              </a:extLst>
-            </a:blip>
-            <a:stretch>
-              <a:fillRect/>
-            </a:stretch>
-          </p:blipFill>
-          <p:spPr>
-            <a:xfrm>
-              <a:off x="6133519" y="3493589"/>
-              <a:ext cx="828000" cy="828000"/>
-            </a:xfrm>
-            <a:prstGeom prst="rect">
-              <a:avLst/>
-            </a:prstGeom>
-          </p:spPr>
-        </p:pic>
-      </p:grpSp>
       <p:sp>
         <p:nvSpPr>
           <p:cNvPr id="2" name="四角形: 角を丸くする 1">
@@ -18306,6 +18383,42 @@
           </a:p>
         </p:txBody>
       </p:sp>
+      <p:pic>
+        <p:nvPicPr>
+          <p:cNvPr id="9" name="図 8">
+            <a:extLst>
+              <a:ext uri="{FF2B5EF4-FFF2-40B4-BE49-F238E27FC236}">
+                <a16:creationId xmlns:a16="http://schemas.microsoft.com/office/drawing/2014/main" id="{B79D1735-95CE-53D8-21C4-EAFE29B4CCB1}"/>
+              </a:ext>
+            </a:extLst>
+          </p:cNvPr>
+          <p:cNvPicPr>
+            <a:picLocks noChangeAspect="1"/>
+          </p:cNvPicPr>
+          <p:nvPr/>
+        </p:nvPicPr>
+        <p:blipFill>
+          <a:blip r:embed="rId2">
+            <a:extLst>
+              <a:ext uri="{28A0092B-C50C-407E-A947-70E740481C1C}">
+                <a14:useLocalDpi xmlns:a14="http://schemas.microsoft.com/office/drawing/2010/main" val="0"/>
+              </a:ext>
+            </a:extLst>
+          </a:blip>
+          <a:stretch>
+            <a:fillRect/>
+          </a:stretch>
+        </p:blipFill>
+        <p:spPr>
+          <a:xfrm>
+            <a:off x="4268690" y="2410879"/>
+            <a:ext cx="1008000" cy="1008791"/>
+          </a:xfrm>
+          <a:prstGeom prst="rect">
+            <a:avLst/>
+          </a:prstGeom>
+        </p:spPr>
+      </p:pic>
     </p:spTree>
     <p:extLst>
       <p:ext uri="{BB962C8B-B14F-4D97-AF65-F5344CB8AC3E}">
@@ -18320,619 +18433,6 @@
 </file>
 
 <file path=ppt/slides/slide23.xml><?xml version="1.0" encoding="utf-8"?>
-<p:sld xmlns:a="http://schemas.openxmlformats.org/drawingml/2006/main" xmlns:r="http://schemas.openxmlformats.org/officeDocument/2006/relationships" xmlns:p="http://schemas.openxmlformats.org/presentationml/2006/main">
-  <p:cSld>
-    <p:spTree>
-      <p:nvGrpSpPr>
-        <p:cNvPr id="1" name="">
-          <a:extLst>
-            <a:ext uri="{FF2B5EF4-FFF2-40B4-BE49-F238E27FC236}">
-              <a16:creationId xmlns:a16="http://schemas.microsoft.com/office/drawing/2014/main" id="{646C35AC-F1A8-B0B4-BA7D-B37B05E8B9D5}"/>
-            </a:ext>
-          </a:extLst>
-        </p:cNvPr>
-        <p:cNvGrpSpPr/>
-        <p:nvPr/>
-      </p:nvGrpSpPr>
-      <p:grpSpPr>
-        <a:xfrm>
-          <a:off x="0" y="0"/>
-          <a:ext cx="0" cy="0"/>
-          <a:chOff x="0" y="0"/>
-          <a:chExt cx="0" cy="0"/>
-        </a:xfrm>
-      </p:grpSpPr>
-      <p:sp>
-        <p:nvSpPr>
-          <p:cNvPr id="6" name="四角形: 角を丸くする 5">
-            <a:extLst>
-              <a:ext uri="{FF2B5EF4-FFF2-40B4-BE49-F238E27FC236}">
-                <a16:creationId xmlns:a16="http://schemas.microsoft.com/office/drawing/2014/main" id="{D85BEA2E-432B-2807-3E72-41884802D25D}"/>
-              </a:ext>
-            </a:extLst>
-          </p:cNvPr>
-          <p:cNvSpPr/>
-          <p:nvPr/>
-        </p:nvSpPr>
-        <p:spPr>
-          <a:xfrm>
-            <a:off x="2849212" y="4736299"/>
-            <a:ext cx="7200000" cy="3240000"/>
-          </a:xfrm>
-          <a:prstGeom prst="roundRect">
-            <a:avLst/>
-          </a:prstGeom>
-          <a:solidFill>
-            <a:srgbClr val="FFCCFF"/>
-          </a:solidFill>
-          <a:ln w="38100">
-            <a:solidFill>
-              <a:schemeClr val="tx1"/>
-            </a:solidFill>
-          </a:ln>
-        </p:spPr>
-        <p:style>
-          <a:lnRef idx="2">
-            <a:schemeClr val="accent6"/>
-          </a:lnRef>
-          <a:fillRef idx="1">
-            <a:schemeClr val="lt1"/>
-          </a:fillRef>
-          <a:effectRef idx="0">
-            <a:schemeClr val="accent6"/>
-          </a:effectRef>
-          <a:fontRef idx="minor">
-            <a:schemeClr val="dk1"/>
-          </a:fontRef>
-        </p:style>
-        <p:txBody>
-          <a:bodyPr rtlCol="0" anchor="t"/>
-          <a:lstStyle/>
-          <a:p>
-            <a:pPr algn="ctr"/>
-            <a:r>
-              <a:rPr lang="ja-JP" altLang="en-US" b="1" dirty="0"/>
-              <a:t>リモートリポジトリ（プッシュ後）</a:t>
-            </a:r>
-          </a:p>
-        </p:txBody>
-      </p:sp>
-      <p:sp>
-        <p:nvSpPr>
-          <p:cNvPr id="16" name="吹き出し: 四角形 15">
-            <a:extLst>
-              <a:ext uri="{FF2B5EF4-FFF2-40B4-BE49-F238E27FC236}">
-                <a16:creationId xmlns:a16="http://schemas.microsoft.com/office/drawing/2014/main" id="{98306C84-8B6C-9CE8-8886-B1F82CB4472E}"/>
-              </a:ext>
-            </a:extLst>
-          </p:cNvPr>
-          <p:cNvSpPr/>
-          <p:nvPr/>
-        </p:nvSpPr>
-        <p:spPr>
-          <a:xfrm>
-            <a:off x="5364910" y="5584870"/>
-            <a:ext cx="3887947" cy="1104641"/>
-          </a:xfrm>
-          <a:prstGeom prst="wedgeRectCallout">
-            <a:avLst>
-              <a:gd name="adj1" fmla="val -51631"/>
-              <a:gd name="adj2" fmla="val 86892"/>
-            </a:avLst>
-          </a:prstGeom>
-          <a:ln w="28575">
-            <a:solidFill>
-              <a:schemeClr val="tx1"/>
-            </a:solidFill>
-          </a:ln>
-        </p:spPr>
-        <p:style>
-          <a:lnRef idx="2">
-            <a:schemeClr val="accent6"/>
-          </a:lnRef>
-          <a:fillRef idx="1">
-            <a:schemeClr val="lt1"/>
-          </a:fillRef>
-          <a:effectRef idx="0">
-            <a:schemeClr val="accent6"/>
-          </a:effectRef>
-          <a:fontRef idx="minor">
-            <a:schemeClr val="dk1"/>
-          </a:fontRef>
-        </p:style>
-        <p:txBody>
-          <a:bodyPr rtlCol="0" anchor="ctr"/>
-          <a:lstStyle/>
-          <a:p>
-            <a:pPr algn="ctr"/>
-            <a:endParaRPr kumimoji="1" lang="ja-JP" altLang="en-US" dirty="0"/>
-          </a:p>
-        </p:txBody>
-      </p:sp>
-      <p:sp>
-        <p:nvSpPr>
-          <p:cNvPr id="86" name="矢印: 右 85">
-            <a:extLst>
-              <a:ext uri="{FF2B5EF4-FFF2-40B4-BE49-F238E27FC236}">
-                <a16:creationId xmlns:a16="http://schemas.microsoft.com/office/drawing/2014/main" id="{8BD89B26-D3FB-4B9B-99A0-F01F7166E333}"/>
-              </a:ext>
-            </a:extLst>
-          </p:cNvPr>
-          <p:cNvSpPr/>
-          <p:nvPr/>
-        </p:nvSpPr>
-        <p:spPr>
-          <a:xfrm rot="5400000">
-            <a:off x="6215169" y="3733800"/>
-            <a:ext cx="468086" cy="677228"/>
-          </a:xfrm>
-          <a:prstGeom prst="rightArrow">
-            <a:avLst/>
-          </a:prstGeom>
-        </p:spPr>
-        <p:style>
-          <a:lnRef idx="2">
-            <a:schemeClr val="dk1">
-              <a:shade val="15000"/>
-            </a:schemeClr>
-          </a:lnRef>
-          <a:fillRef idx="1">
-            <a:schemeClr val="dk1"/>
-          </a:fillRef>
-          <a:effectRef idx="0">
-            <a:schemeClr val="dk1"/>
-          </a:effectRef>
-          <a:fontRef idx="minor">
-            <a:schemeClr val="lt1"/>
-          </a:fontRef>
-        </p:style>
-        <p:txBody>
-          <a:bodyPr rtlCol="0" anchor="ctr"/>
-          <a:lstStyle/>
-          <a:p>
-            <a:pPr algn="ctr"/>
-            <a:endParaRPr kumimoji="1" lang="ja-JP" altLang="en-US"/>
-          </a:p>
-        </p:txBody>
-      </p:sp>
-      <p:sp>
-        <p:nvSpPr>
-          <p:cNvPr id="98" name="テキスト ボックス 97">
-            <a:extLst>
-              <a:ext uri="{FF2B5EF4-FFF2-40B4-BE49-F238E27FC236}">
-                <a16:creationId xmlns:a16="http://schemas.microsoft.com/office/drawing/2014/main" id="{7E82DF4A-5345-3FB1-3CBD-63D347E1D7C8}"/>
-              </a:ext>
-            </a:extLst>
-          </p:cNvPr>
-          <p:cNvSpPr txBox="1"/>
-          <p:nvPr/>
-        </p:nvSpPr>
-        <p:spPr>
-          <a:xfrm>
-            <a:off x="6976284" y="3887728"/>
-            <a:ext cx="1107996" cy="369332"/>
-          </a:xfrm>
-          <a:prstGeom prst="rect">
-            <a:avLst/>
-          </a:prstGeom>
-          <a:noFill/>
-        </p:spPr>
-        <p:txBody>
-          <a:bodyPr wrap="none" rtlCol="0">
-            <a:spAutoFit/>
-          </a:bodyPr>
-          <a:lstStyle/>
-          <a:p>
-            <a:r>
-              <a:rPr kumimoji="1" lang="ja-JP" altLang="en-US" b="1" dirty="0"/>
-              <a:t>プッシュ</a:t>
-            </a:r>
-          </a:p>
-        </p:txBody>
-      </p:sp>
-      <p:sp>
-        <p:nvSpPr>
-          <p:cNvPr id="18" name="四角形: 角を丸くする 17">
-            <a:extLst>
-              <a:ext uri="{FF2B5EF4-FFF2-40B4-BE49-F238E27FC236}">
-                <a16:creationId xmlns:a16="http://schemas.microsoft.com/office/drawing/2014/main" id="{B7980B84-A156-1C2C-CD56-4C44C12D1693}"/>
-              </a:ext>
-            </a:extLst>
-          </p:cNvPr>
-          <p:cNvSpPr/>
-          <p:nvPr/>
-        </p:nvSpPr>
-        <p:spPr>
-          <a:xfrm>
-            <a:off x="2849212" y="189000"/>
-            <a:ext cx="7200000" cy="3240000"/>
-          </a:xfrm>
-          <a:prstGeom prst="roundRect">
-            <a:avLst/>
-          </a:prstGeom>
-          <a:solidFill>
-            <a:srgbClr val="FFCCFF"/>
-          </a:solidFill>
-          <a:ln w="38100">
-            <a:solidFill>
-              <a:schemeClr val="tx1"/>
-            </a:solidFill>
-          </a:ln>
-        </p:spPr>
-        <p:style>
-          <a:lnRef idx="2">
-            <a:schemeClr val="accent6"/>
-          </a:lnRef>
-          <a:fillRef idx="1">
-            <a:schemeClr val="lt1"/>
-          </a:fillRef>
-          <a:effectRef idx="0">
-            <a:schemeClr val="accent6"/>
-          </a:effectRef>
-          <a:fontRef idx="minor">
-            <a:schemeClr val="dk1"/>
-          </a:fontRef>
-        </p:style>
-        <p:txBody>
-          <a:bodyPr rtlCol="0" anchor="t"/>
-          <a:lstStyle/>
-          <a:p>
-            <a:pPr algn="ctr"/>
-            <a:r>
-              <a:rPr lang="ja-JP" altLang="en-US" b="1" dirty="0"/>
-              <a:t>リモートリポジトリ（プッシュ前）</a:t>
-            </a:r>
-          </a:p>
-        </p:txBody>
-      </p:sp>
-      <p:sp>
-        <p:nvSpPr>
-          <p:cNvPr id="19" name="吹き出し: 四角形 18">
-            <a:extLst>
-              <a:ext uri="{FF2B5EF4-FFF2-40B4-BE49-F238E27FC236}">
-                <a16:creationId xmlns:a16="http://schemas.microsoft.com/office/drawing/2014/main" id="{A50EC7D7-24EA-8158-41DA-75811BAECDF9}"/>
-              </a:ext>
-            </a:extLst>
-          </p:cNvPr>
-          <p:cNvSpPr/>
-          <p:nvPr/>
-        </p:nvSpPr>
-        <p:spPr>
-          <a:xfrm>
-            <a:off x="5364910" y="1037571"/>
-            <a:ext cx="3887947" cy="1104641"/>
-          </a:xfrm>
-          <a:prstGeom prst="wedgeRectCallout">
-            <a:avLst>
-              <a:gd name="adj1" fmla="val -51631"/>
-              <a:gd name="adj2" fmla="val 86892"/>
-            </a:avLst>
-          </a:prstGeom>
-          <a:ln w="28575">
-            <a:solidFill>
-              <a:schemeClr val="tx1"/>
-            </a:solidFill>
-          </a:ln>
-        </p:spPr>
-        <p:style>
-          <a:lnRef idx="2">
-            <a:schemeClr val="accent6"/>
-          </a:lnRef>
-          <a:fillRef idx="1">
-            <a:schemeClr val="lt1"/>
-          </a:fillRef>
-          <a:effectRef idx="0">
-            <a:schemeClr val="accent6"/>
-          </a:effectRef>
-          <a:fontRef idx="minor">
-            <a:schemeClr val="dk1"/>
-          </a:fontRef>
-        </p:style>
-        <p:txBody>
-          <a:bodyPr rtlCol="0" anchor="ctr"/>
-          <a:lstStyle/>
-          <a:p>
-            <a:pPr algn="ctr"/>
-            <a:endParaRPr kumimoji="1" lang="ja-JP" altLang="en-US" dirty="0"/>
-          </a:p>
-        </p:txBody>
-      </p:sp>
-      <p:sp>
-        <p:nvSpPr>
-          <p:cNvPr id="37" name="四角形: 角を丸くする 36">
-            <a:extLst>
-              <a:ext uri="{FF2B5EF4-FFF2-40B4-BE49-F238E27FC236}">
-                <a16:creationId xmlns:a16="http://schemas.microsoft.com/office/drawing/2014/main" id="{F3F32988-2F07-724E-069D-DCFD68E0CEC1}"/>
-              </a:ext>
-            </a:extLst>
-          </p:cNvPr>
-          <p:cNvSpPr/>
-          <p:nvPr/>
-        </p:nvSpPr>
-        <p:spPr>
-          <a:xfrm>
-            <a:off x="6287803" y="5855250"/>
-            <a:ext cx="2042160" cy="563880"/>
-          </a:xfrm>
-          <a:prstGeom prst="roundRect">
-            <a:avLst/>
-          </a:prstGeom>
-          <a:ln w="38100"/>
-        </p:spPr>
-        <p:style>
-          <a:lnRef idx="2">
-            <a:schemeClr val="accent6"/>
-          </a:lnRef>
-          <a:fillRef idx="1">
-            <a:schemeClr val="lt1"/>
-          </a:fillRef>
-          <a:effectRef idx="0">
-            <a:schemeClr val="accent6"/>
-          </a:effectRef>
-          <a:fontRef idx="minor">
-            <a:schemeClr val="dk1"/>
-          </a:fontRef>
-        </p:style>
-        <p:txBody>
-          <a:bodyPr rtlCol="0" anchor="ctr"/>
-          <a:lstStyle/>
-          <a:p>
-            <a:pPr algn="ctr"/>
-            <a:r>
-              <a:rPr kumimoji="1" lang="ja-JP" altLang="en-US" dirty="0"/>
-              <a:t>変更履歴</a:t>
-            </a:r>
-          </a:p>
-        </p:txBody>
-      </p:sp>
-      <p:sp>
-        <p:nvSpPr>
-          <p:cNvPr id="2" name="四角形: 角を丸くする 1">
-            <a:extLst>
-              <a:ext uri="{FF2B5EF4-FFF2-40B4-BE49-F238E27FC236}">
-                <a16:creationId xmlns:a16="http://schemas.microsoft.com/office/drawing/2014/main" id="{2F8D038D-C893-87CA-82F9-051B287F8E64}"/>
-              </a:ext>
-            </a:extLst>
-          </p:cNvPr>
-          <p:cNvSpPr/>
-          <p:nvPr/>
-        </p:nvSpPr>
-        <p:spPr>
-          <a:xfrm>
-            <a:off x="8084280" y="3790454"/>
-            <a:ext cx="2042160" cy="563880"/>
-          </a:xfrm>
-          <a:prstGeom prst="roundRect">
-            <a:avLst/>
-          </a:prstGeom>
-          <a:ln w="38100"/>
-        </p:spPr>
-        <p:style>
-          <a:lnRef idx="2">
-            <a:schemeClr val="accent6"/>
-          </a:lnRef>
-          <a:fillRef idx="1">
-            <a:schemeClr val="lt1"/>
-          </a:fillRef>
-          <a:effectRef idx="0">
-            <a:schemeClr val="accent6"/>
-          </a:effectRef>
-          <a:fontRef idx="minor">
-            <a:schemeClr val="dk1"/>
-          </a:fontRef>
-        </p:style>
-        <p:txBody>
-          <a:bodyPr rtlCol="0" anchor="ctr"/>
-          <a:lstStyle/>
-          <a:p>
-            <a:pPr algn="ctr"/>
-            <a:r>
-              <a:rPr kumimoji="1" lang="ja-JP" altLang="en-US" dirty="0"/>
-              <a:t>変更履歴</a:t>
-            </a:r>
-          </a:p>
-        </p:txBody>
-      </p:sp>
-      <p:grpSp>
-        <p:nvGrpSpPr>
-          <p:cNvPr id="3" name="グループ化 2">
-            <a:extLst>
-              <a:ext uri="{FF2B5EF4-FFF2-40B4-BE49-F238E27FC236}">
-                <a16:creationId xmlns:a16="http://schemas.microsoft.com/office/drawing/2014/main" id="{E1700060-A145-EB99-47E1-04C8A6FCEE4A}"/>
-              </a:ext>
-            </a:extLst>
-          </p:cNvPr>
-          <p:cNvGrpSpPr/>
-          <p:nvPr/>
-        </p:nvGrpSpPr>
-        <p:grpSpPr>
-          <a:xfrm>
-            <a:off x="4111901" y="2043676"/>
-            <a:ext cx="1217310" cy="1293884"/>
-            <a:chOff x="5938864" y="3124197"/>
-            <a:chExt cx="1217310" cy="1364976"/>
-          </a:xfrm>
-        </p:grpSpPr>
-        <p:pic>
-          <p:nvPicPr>
-            <p:cNvPr id="4" name="図 3">
-              <a:extLst>
-                <a:ext uri="{FF2B5EF4-FFF2-40B4-BE49-F238E27FC236}">
-                  <a16:creationId xmlns:a16="http://schemas.microsoft.com/office/drawing/2014/main" id="{C967C753-AB82-8144-CA57-729E68F2373B}"/>
-                </a:ext>
-              </a:extLst>
-            </p:cNvPr>
-            <p:cNvPicPr>
-              <a:picLocks noChangeAspect="1"/>
-            </p:cNvPicPr>
-            <p:nvPr/>
-          </p:nvPicPr>
-          <p:blipFill>
-            <a:blip r:embed="rId2">
-              <a:extLst>
-                <a:ext uri="{28A0092B-C50C-407E-A947-70E740481C1C}">
-                  <a14:useLocalDpi xmlns:a14="http://schemas.microsoft.com/office/drawing/2010/main" val="0"/>
-                </a:ext>
-              </a:extLst>
-            </a:blip>
-            <a:stretch>
-              <a:fillRect/>
-            </a:stretch>
-          </p:blipFill>
-          <p:spPr>
-            <a:xfrm>
-              <a:off x="5938864" y="3124197"/>
-              <a:ext cx="1217310" cy="1364976"/>
-            </a:xfrm>
-            <a:prstGeom prst="rect">
-              <a:avLst/>
-            </a:prstGeom>
-          </p:spPr>
-        </p:pic>
-        <p:pic>
-          <p:nvPicPr>
-            <p:cNvPr id="5" name="図 4">
-              <a:extLst>
-                <a:ext uri="{FF2B5EF4-FFF2-40B4-BE49-F238E27FC236}">
-                  <a16:creationId xmlns:a16="http://schemas.microsoft.com/office/drawing/2014/main" id="{AFD375C7-E4ED-A27B-D788-0E93D82F06C7}"/>
-                </a:ext>
-              </a:extLst>
-            </p:cNvPr>
-            <p:cNvPicPr>
-              <a:picLocks noChangeAspect="1"/>
-            </p:cNvPicPr>
-            <p:nvPr/>
-          </p:nvPicPr>
-          <p:blipFill>
-            <a:blip r:embed="rId3">
-              <a:extLst>
-                <a:ext uri="{28A0092B-C50C-407E-A947-70E740481C1C}">
-                  <a14:useLocalDpi xmlns:a14="http://schemas.microsoft.com/office/drawing/2010/main" val="0"/>
-                </a:ext>
-              </a:extLst>
-            </a:blip>
-            <a:stretch>
-              <a:fillRect/>
-            </a:stretch>
-          </p:blipFill>
-          <p:spPr>
-            <a:xfrm>
-              <a:off x="6133519" y="3493589"/>
-              <a:ext cx="828000" cy="828000"/>
-            </a:xfrm>
-            <a:prstGeom prst="rect">
-              <a:avLst/>
-            </a:prstGeom>
-          </p:spPr>
-        </p:pic>
-      </p:grpSp>
-      <p:grpSp>
-        <p:nvGrpSpPr>
-          <p:cNvPr id="7" name="グループ化 6">
-            <a:extLst>
-              <a:ext uri="{FF2B5EF4-FFF2-40B4-BE49-F238E27FC236}">
-                <a16:creationId xmlns:a16="http://schemas.microsoft.com/office/drawing/2014/main" id="{2DCB563A-BE72-B728-5B9B-9DF556F249BF}"/>
-              </a:ext>
-            </a:extLst>
-          </p:cNvPr>
-          <p:cNvGrpSpPr/>
-          <p:nvPr/>
-        </p:nvGrpSpPr>
-        <p:grpSpPr>
-          <a:xfrm>
-            <a:off x="4132360" y="6630916"/>
-            <a:ext cx="1217310" cy="1293884"/>
-            <a:chOff x="5938864" y="3124197"/>
-            <a:chExt cx="1217310" cy="1364976"/>
-          </a:xfrm>
-        </p:grpSpPr>
-        <p:pic>
-          <p:nvPicPr>
-            <p:cNvPr id="8" name="図 7">
-              <a:extLst>
-                <a:ext uri="{FF2B5EF4-FFF2-40B4-BE49-F238E27FC236}">
-                  <a16:creationId xmlns:a16="http://schemas.microsoft.com/office/drawing/2014/main" id="{7F1F740D-3B58-9AE6-5E6E-E0FD43276D0F}"/>
-                </a:ext>
-              </a:extLst>
-            </p:cNvPr>
-            <p:cNvPicPr>
-              <a:picLocks noChangeAspect="1"/>
-            </p:cNvPicPr>
-            <p:nvPr/>
-          </p:nvPicPr>
-          <p:blipFill>
-            <a:blip r:embed="rId2">
-              <a:extLst>
-                <a:ext uri="{28A0092B-C50C-407E-A947-70E740481C1C}">
-                  <a14:useLocalDpi xmlns:a14="http://schemas.microsoft.com/office/drawing/2010/main" val="0"/>
-                </a:ext>
-              </a:extLst>
-            </a:blip>
-            <a:stretch>
-              <a:fillRect/>
-            </a:stretch>
-          </p:blipFill>
-          <p:spPr>
-            <a:xfrm>
-              <a:off x="5938864" y="3124197"/>
-              <a:ext cx="1217310" cy="1364976"/>
-            </a:xfrm>
-            <a:prstGeom prst="rect">
-              <a:avLst/>
-            </a:prstGeom>
-          </p:spPr>
-        </p:pic>
-        <p:pic>
-          <p:nvPicPr>
-            <p:cNvPr id="9" name="図 8">
-              <a:extLst>
-                <a:ext uri="{FF2B5EF4-FFF2-40B4-BE49-F238E27FC236}">
-                  <a16:creationId xmlns:a16="http://schemas.microsoft.com/office/drawing/2014/main" id="{C3A68F92-3830-CF1D-7038-B28A704DC78D}"/>
-                </a:ext>
-              </a:extLst>
-            </p:cNvPr>
-            <p:cNvPicPr>
-              <a:picLocks noChangeAspect="1"/>
-            </p:cNvPicPr>
-            <p:nvPr/>
-          </p:nvPicPr>
-          <p:blipFill>
-            <a:blip r:embed="rId3">
-              <a:extLst>
-                <a:ext uri="{28A0092B-C50C-407E-A947-70E740481C1C}">
-                  <a14:useLocalDpi xmlns:a14="http://schemas.microsoft.com/office/drawing/2010/main" val="0"/>
-                </a:ext>
-              </a:extLst>
-            </a:blip>
-            <a:stretch>
-              <a:fillRect/>
-            </a:stretch>
-          </p:blipFill>
-          <p:spPr>
-            <a:xfrm>
-              <a:off x="6133519" y="3493589"/>
-              <a:ext cx="828000" cy="828000"/>
-            </a:xfrm>
-            <a:prstGeom prst="rect">
-              <a:avLst/>
-            </a:prstGeom>
-          </p:spPr>
-        </p:pic>
-      </p:grpSp>
-    </p:spTree>
-    <p:extLst>
-      <p:ext uri="{BB962C8B-B14F-4D97-AF65-F5344CB8AC3E}">
-        <p14:creationId xmlns:p14="http://schemas.microsoft.com/office/powerpoint/2010/main" val="403509543"/>
-      </p:ext>
-    </p:extLst>
-  </p:cSld>
-  <p:clrMapOvr>
-    <a:masterClrMapping/>
-  </p:clrMapOvr>
-</p:sld>
-</file>
-
-<file path=ppt/slides/slide24.xml><?xml version="1.0" encoding="utf-8"?>
 <p:sld xmlns:a="http://schemas.openxmlformats.org/drawingml/2006/main" xmlns:r="http://schemas.openxmlformats.org/officeDocument/2006/relationships" xmlns:p="http://schemas.openxmlformats.org/presentationml/2006/main">
   <p:cSld>
     <p:spTree>
@@ -19147,99 +18647,6 @@
           </a:p>
         </p:txBody>
       </p:sp>
-      <p:grpSp>
-        <p:nvGrpSpPr>
-          <p:cNvPr id="7" name="グループ化 6">
-            <a:extLst>
-              <a:ext uri="{FF2B5EF4-FFF2-40B4-BE49-F238E27FC236}">
-                <a16:creationId xmlns:a16="http://schemas.microsoft.com/office/drawing/2014/main" id="{E78327BF-8BE7-AE56-E7DB-F63242ACFA3D}"/>
-              </a:ext>
-            </a:extLst>
-          </p:cNvPr>
-          <p:cNvGrpSpPr/>
-          <p:nvPr/>
-        </p:nvGrpSpPr>
-        <p:grpSpPr>
-          <a:xfrm>
-            <a:off x="4132360" y="7423396"/>
-            <a:ext cx="1217310" cy="1293884"/>
-            <a:chOff x="5938864" y="3124197"/>
-            <a:chExt cx="1217310" cy="1364976"/>
-          </a:xfrm>
-        </p:grpSpPr>
-        <p:pic>
-          <p:nvPicPr>
-            <p:cNvPr id="8" name="図 7">
-              <a:extLst>
-                <a:ext uri="{FF2B5EF4-FFF2-40B4-BE49-F238E27FC236}">
-                  <a16:creationId xmlns:a16="http://schemas.microsoft.com/office/drawing/2014/main" id="{49483B10-DB47-6F04-BE2A-63DC7B9FF356}"/>
-                </a:ext>
-              </a:extLst>
-            </p:cNvPr>
-            <p:cNvPicPr>
-              <a:picLocks noChangeAspect="1"/>
-            </p:cNvPicPr>
-            <p:nvPr/>
-          </p:nvPicPr>
-          <p:blipFill>
-            <a:blip r:embed="rId2">
-              <a:extLst>
-                <a:ext uri="{28A0092B-C50C-407E-A947-70E740481C1C}">
-                  <a14:useLocalDpi xmlns:a14="http://schemas.microsoft.com/office/drawing/2010/main" val="0"/>
-                </a:ext>
-              </a:extLst>
-            </a:blip>
-            <a:stretch>
-              <a:fillRect/>
-            </a:stretch>
-          </p:blipFill>
-          <p:spPr>
-            <a:xfrm>
-              <a:off x="5938864" y="3124197"/>
-              <a:ext cx="1217310" cy="1364976"/>
-            </a:xfrm>
-            <a:prstGeom prst="rect">
-              <a:avLst/>
-            </a:prstGeom>
-          </p:spPr>
-        </p:pic>
-        <p:pic>
-          <p:nvPicPr>
-            <p:cNvPr id="9" name="図 8">
-              <a:extLst>
-                <a:ext uri="{FF2B5EF4-FFF2-40B4-BE49-F238E27FC236}">
-                  <a16:creationId xmlns:a16="http://schemas.microsoft.com/office/drawing/2014/main" id="{3B9A9C92-DDBC-574A-A794-B6AFD70A62A7}"/>
-                </a:ext>
-              </a:extLst>
-            </p:cNvPr>
-            <p:cNvPicPr>
-              <a:picLocks noChangeAspect="1"/>
-            </p:cNvPicPr>
-            <p:nvPr/>
-          </p:nvPicPr>
-          <p:blipFill>
-            <a:blip r:embed="rId3">
-              <a:extLst>
-                <a:ext uri="{28A0092B-C50C-407E-A947-70E740481C1C}">
-                  <a14:useLocalDpi xmlns:a14="http://schemas.microsoft.com/office/drawing/2010/main" val="0"/>
-                </a:ext>
-              </a:extLst>
-            </a:blip>
-            <a:stretch>
-              <a:fillRect/>
-            </a:stretch>
-          </p:blipFill>
-          <p:spPr>
-            <a:xfrm>
-              <a:off x="6133519" y="3493589"/>
-              <a:ext cx="828000" cy="828000"/>
-            </a:xfrm>
-            <a:prstGeom prst="rect">
-              <a:avLst/>
-            </a:prstGeom>
-          </p:spPr>
-        </p:pic>
-      </p:grpSp>
       <p:sp>
         <p:nvSpPr>
           <p:cNvPr id="10" name="四角形: 角を丸くする 9">
@@ -19365,7 +18772,7 @@
           <p:nvPr/>
         </p:nvPicPr>
         <p:blipFill>
-          <a:blip r:embed="rId4">
+          <a:blip r:embed="rId2">
             <a:extLst>
               <a:ext uri="{28A0092B-C50C-407E-A947-70E740481C1C}">
                 <a14:useLocalDpi xmlns:a14="http://schemas.microsoft.com/office/drawing/2010/main" val="0"/>
@@ -19662,6 +19069,85 @@
           </a:p>
         </p:txBody>
       </p:sp>
+      <p:pic>
+        <p:nvPicPr>
+          <p:cNvPr id="15" name="図 14">
+            <a:extLst>
+              <a:ext uri="{FF2B5EF4-FFF2-40B4-BE49-F238E27FC236}">
+                <a16:creationId xmlns:a16="http://schemas.microsoft.com/office/drawing/2014/main" id="{5E79BD0B-6C2D-BED9-D3F3-B887E23E36A7}"/>
+              </a:ext>
+            </a:extLst>
+          </p:cNvPr>
+          <p:cNvPicPr>
+            <a:picLocks noChangeAspect="1"/>
+          </p:cNvPicPr>
+          <p:nvPr/>
+        </p:nvPicPr>
+        <p:blipFill>
+          <a:blip r:embed="rId3">
+            <a:extLst>
+              <a:ext uri="{28A0092B-C50C-407E-A947-70E740481C1C}">
+                <a14:useLocalDpi xmlns:a14="http://schemas.microsoft.com/office/drawing/2010/main" val="0"/>
+              </a:ext>
+            </a:extLst>
+          </a:blip>
+          <a:stretch>
+            <a:fillRect/>
+          </a:stretch>
+        </p:blipFill>
+        <p:spPr>
+          <a:xfrm>
+            <a:off x="4268690" y="7691148"/>
+            <a:ext cx="1008000" cy="1008791"/>
+          </a:xfrm>
+          <a:prstGeom prst="rect">
+            <a:avLst/>
+          </a:prstGeom>
+        </p:spPr>
+      </p:pic>
+      <p:cxnSp>
+        <p:nvCxnSpPr>
+          <p:cNvPr id="18" name="直線コネクタ 17">
+            <a:extLst>
+              <a:ext uri="{FF2B5EF4-FFF2-40B4-BE49-F238E27FC236}">
+                <a16:creationId xmlns:a16="http://schemas.microsoft.com/office/drawing/2014/main" id="{8229EA8A-CB2B-D28D-FE3D-3A97A2BCB9DB}"/>
+              </a:ext>
+            </a:extLst>
+          </p:cNvPr>
+          <p:cNvCxnSpPr>
+            <a:cxnSpLocks/>
+          </p:cNvCxnSpPr>
+          <p:nvPr/>
+        </p:nvCxnSpPr>
+        <p:spPr>
+          <a:xfrm>
+            <a:off x="5498756" y="6864052"/>
+            <a:ext cx="3608173" cy="0"/>
+          </a:xfrm>
+          <a:prstGeom prst="line">
+            <a:avLst/>
+          </a:prstGeom>
+          <a:ln w="19050">
+            <a:solidFill>
+              <a:schemeClr val="tx1"/>
+            </a:solidFill>
+          </a:ln>
+        </p:spPr>
+        <p:style>
+          <a:lnRef idx="1">
+            <a:schemeClr val="dk1"/>
+          </a:lnRef>
+          <a:fillRef idx="0">
+            <a:schemeClr val="dk1"/>
+          </a:fillRef>
+          <a:effectRef idx="0">
+            <a:schemeClr val="dk1"/>
+          </a:effectRef>
+          <a:fontRef idx="minor">
+            <a:schemeClr val="tx1"/>
+          </a:fontRef>
+        </p:style>
+      </p:cxnSp>
     </p:spTree>
     <p:extLst>
       <p:ext uri="{BB962C8B-B14F-4D97-AF65-F5344CB8AC3E}">
@@ -19675,7 +19161,7 @@
 </p:sld>
 </file>
 
-<file path=ppt/slides/slide25.xml><?xml version="1.0" encoding="utf-8"?>
+<file path=ppt/slides/slide24.xml><?xml version="1.0" encoding="utf-8"?>
 <p:sld xmlns:a="http://schemas.openxmlformats.org/drawingml/2006/main" xmlns:r="http://schemas.openxmlformats.org/officeDocument/2006/relationships" xmlns:p="http://schemas.openxmlformats.org/presentationml/2006/main">
   <p:cSld>
     <p:spTree>
@@ -19834,99 +19320,6 @@
           </a:p>
         </p:txBody>
       </p:sp>
-      <p:grpSp>
-        <p:nvGrpSpPr>
-          <p:cNvPr id="7" name="グループ化 6">
-            <a:extLst>
-              <a:ext uri="{FF2B5EF4-FFF2-40B4-BE49-F238E27FC236}">
-                <a16:creationId xmlns:a16="http://schemas.microsoft.com/office/drawing/2014/main" id="{AE9D9435-3656-9A81-CFCB-9163C8AA5A53}"/>
-              </a:ext>
-            </a:extLst>
-          </p:cNvPr>
-          <p:cNvGrpSpPr/>
-          <p:nvPr/>
-        </p:nvGrpSpPr>
-        <p:grpSpPr>
-          <a:xfrm>
-            <a:off x="3944660" y="2864981"/>
-            <a:ext cx="1217310" cy="1293884"/>
-            <a:chOff x="5938864" y="3124197"/>
-            <a:chExt cx="1217310" cy="1364976"/>
-          </a:xfrm>
-        </p:grpSpPr>
-        <p:pic>
-          <p:nvPicPr>
-            <p:cNvPr id="8" name="図 7">
-              <a:extLst>
-                <a:ext uri="{FF2B5EF4-FFF2-40B4-BE49-F238E27FC236}">
-                  <a16:creationId xmlns:a16="http://schemas.microsoft.com/office/drawing/2014/main" id="{ECE3044D-7BBE-ECA9-A854-1EE48637D7AC}"/>
-                </a:ext>
-              </a:extLst>
-            </p:cNvPr>
-            <p:cNvPicPr>
-              <a:picLocks noChangeAspect="1"/>
-            </p:cNvPicPr>
-            <p:nvPr/>
-          </p:nvPicPr>
-          <p:blipFill>
-            <a:blip r:embed="rId2">
-              <a:extLst>
-                <a:ext uri="{28A0092B-C50C-407E-A947-70E740481C1C}">
-                  <a14:useLocalDpi xmlns:a14="http://schemas.microsoft.com/office/drawing/2010/main" val="0"/>
-                </a:ext>
-              </a:extLst>
-            </a:blip>
-            <a:stretch>
-              <a:fillRect/>
-            </a:stretch>
-          </p:blipFill>
-          <p:spPr>
-            <a:xfrm>
-              <a:off x="5938864" y="3124197"/>
-              <a:ext cx="1217310" cy="1364976"/>
-            </a:xfrm>
-            <a:prstGeom prst="rect">
-              <a:avLst/>
-            </a:prstGeom>
-          </p:spPr>
-        </p:pic>
-        <p:pic>
-          <p:nvPicPr>
-            <p:cNvPr id="9" name="図 8">
-              <a:extLst>
-                <a:ext uri="{FF2B5EF4-FFF2-40B4-BE49-F238E27FC236}">
-                  <a16:creationId xmlns:a16="http://schemas.microsoft.com/office/drawing/2014/main" id="{4B94DFD8-7D83-2B6A-A570-FAA5FFBC2306}"/>
-                </a:ext>
-              </a:extLst>
-            </p:cNvPr>
-            <p:cNvPicPr>
-              <a:picLocks noChangeAspect="1"/>
-            </p:cNvPicPr>
-            <p:nvPr/>
-          </p:nvPicPr>
-          <p:blipFill>
-            <a:blip r:embed="rId3">
-              <a:extLst>
-                <a:ext uri="{28A0092B-C50C-407E-A947-70E740481C1C}">
-                  <a14:useLocalDpi xmlns:a14="http://schemas.microsoft.com/office/drawing/2010/main" val="0"/>
-                </a:ext>
-              </a:extLst>
-            </a:blip>
-            <a:stretch>
-              <a:fillRect/>
-            </a:stretch>
-          </p:blipFill>
-          <p:spPr>
-            <a:xfrm>
-              <a:off x="6133519" y="3493589"/>
-              <a:ext cx="828000" cy="828000"/>
-            </a:xfrm>
-            <a:prstGeom prst="rect">
-              <a:avLst/>
-            </a:prstGeom>
-          </p:spPr>
-        </p:pic>
-      </p:grpSp>
       <p:sp>
         <p:nvSpPr>
           <p:cNvPr id="10" name="四角形: 角を丸くする 9">
@@ -20000,7 +19393,7 @@
           <p:nvPr/>
         </p:nvPicPr>
         <p:blipFill>
-          <a:blip r:embed="rId4">
+          <a:blip r:embed="rId2">
             <a:extLst>
               <a:ext uri="{28A0092B-C50C-407E-A947-70E740481C1C}">
                 <a14:useLocalDpi xmlns:a14="http://schemas.microsoft.com/office/drawing/2010/main" val="0"/>
@@ -20259,7 +19652,7 @@
           </a:prstGeom>
           <a:ln w="38100">
             <a:solidFill>
-              <a:srgbClr val="00B0F0"/>
+              <a:srgbClr val="7030A0"/>
             </a:solidFill>
           </a:ln>
         </p:spPr>
@@ -20285,7 +19678,7 @@
             <a:r>
               <a:rPr kumimoji="1" lang="ja-JP" altLang="en-US" b="1" dirty="0">
                 <a:solidFill>
-                  <a:srgbClr val="00B0F0"/>
+                  <a:srgbClr val="7030A0"/>
                 </a:solidFill>
               </a:rPr>
               <a:t>変更履歴</a:t>
@@ -20427,7 +19820,7 @@
           </a:prstGeom>
           <a:ln w="38100">
             <a:solidFill>
-              <a:srgbClr val="00B0F0"/>
+              <a:srgbClr val="7030A0"/>
             </a:solidFill>
           </a:ln>
         </p:spPr>
@@ -20453,7 +19846,7 @@
             <a:r>
               <a:rPr kumimoji="1" lang="ja-JP" altLang="en-US" b="1" dirty="0">
                 <a:solidFill>
-                  <a:srgbClr val="00B0F0"/>
+                  <a:srgbClr val="7030A0"/>
                 </a:solidFill>
               </a:rPr>
               <a:t>変更履歴</a:t>
@@ -20461,6 +19854,141 @@
           </a:p>
         </p:txBody>
       </p:sp>
+      <p:pic>
+        <p:nvPicPr>
+          <p:cNvPr id="3" name="図 2">
+            <a:extLst>
+              <a:ext uri="{FF2B5EF4-FFF2-40B4-BE49-F238E27FC236}">
+                <a16:creationId xmlns:a16="http://schemas.microsoft.com/office/drawing/2014/main" id="{D4EB0F74-E5A8-D385-8139-498F3183257B}"/>
+              </a:ext>
+            </a:extLst>
+          </p:cNvPr>
+          <p:cNvPicPr>
+            <a:picLocks noChangeAspect="1"/>
+          </p:cNvPicPr>
+          <p:nvPr/>
+        </p:nvPicPr>
+        <p:blipFill>
+          <a:blip r:embed="rId3">
+            <a:extLst>
+              <a:ext uri="{28A0092B-C50C-407E-A947-70E740481C1C}">
+                <a14:useLocalDpi xmlns:a14="http://schemas.microsoft.com/office/drawing/2010/main" val="0"/>
+              </a:ext>
+            </a:extLst>
+          </a:blip>
+          <a:stretch>
+            <a:fillRect/>
+          </a:stretch>
+        </p:blipFill>
+        <p:spPr>
+          <a:xfrm>
+            <a:off x="4268690" y="3139931"/>
+            <a:ext cx="1008000" cy="1008791"/>
+          </a:xfrm>
+          <a:prstGeom prst="rect">
+            <a:avLst/>
+          </a:prstGeom>
+        </p:spPr>
+      </p:pic>
+      <p:sp>
+        <p:nvSpPr>
+          <p:cNvPr id="5" name="四角形: 角を丸くする 4">
+            <a:extLst>
+              <a:ext uri="{FF2B5EF4-FFF2-40B4-BE49-F238E27FC236}">
+                <a16:creationId xmlns:a16="http://schemas.microsoft.com/office/drawing/2014/main" id="{439CB7C3-1218-57F3-5EBD-4E24BFCCDA4A}"/>
+              </a:ext>
+            </a:extLst>
+          </p:cNvPr>
+          <p:cNvSpPr/>
+          <p:nvPr/>
+        </p:nvSpPr>
+        <p:spPr>
+          <a:xfrm>
+            <a:off x="7796475" y="4463548"/>
+            <a:ext cx="2042160" cy="563880"/>
+          </a:xfrm>
+          <a:prstGeom prst="roundRect">
+            <a:avLst/>
+          </a:prstGeom>
+          <a:ln w="38100">
+            <a:solidFill>
+              <a:srgbClr val="7030A0"/>
+            </a:solidFill>
+          </a:ln>
+        </p:spPr>
+        <p:style>
+          <a:lnRef idx="2">
+            <a:schemeClr val="accent6"/>
+          </a:lnRef>
+          <a:fillRef idx="1">
+            <a:schemeClr val="lt1"/>
+          </a:fillRef>
+          <a:effectRef idx="0">
+            <a:schemeClr val="accent6"/>
+          </a:effectRef>
+          <a:fontRef idx="minor">
+            <a:schemeClr val="dk1"/>
+          </a:fontRef>
+        </p:style>
+        <p:txBody>
+          <a:bodyPr rtlCol="0" anchor="ctr"/>
+          <a:lstStyle/>
+          <a:p>
+            <a:pPr algn="ctr"/>
+            <a:r>
+              <a:rPr kumimoji="1" lang="ja-JP" altLang="en-US" b="1" dirty="0">
+                <a:solidFill>
+                  <a:srgbClr val="7030A0"/>
+                </a:solidFill>
+              </a:rPr>
+              <a:t>変更履歴</a:t>
+            </a:r>
+          </a:p>
+        </p:txBody>
+      </p:sp>
+      <p:cxnSp>
+        <p:nvCxnSpPr>
+          <p:cNvPr id="22" name="直線コネクタ 21">
+            <a:extLst>
+              <a:ext uri="{FF2B5EF4-FFF2-40B4-BE49-F238E27FC236}">
+                <a16:creationId xmlns:a16="http://schemas.microsoft.com/office/drawing/2014/main" id="{9590B9B9-BD48-F236-62D9-A2E210D22FFA}"/>
+              </a:ext>
+            </a:extLst>
+          </p:cNvPr>
+          <p:cNvCxnSpPr>
+            <a:cxnSpLocks/>
+          </p:cNvCxnSpPr>
+          <p:nvPr/>
+        </p:nvCxnSpPr>
+        <p:spPr>
+          <a:xfrm>
+            <a:off x="5498756" y="7543678"/>
+            <a:ext cx="3608173" cy="0"/>
+          </a:xfrm>
+          <a:prstGeom prst="line">
+            <a:avLst/>
+          </a:prstGeom>
+          <a:ln w="19050">
+            <a:solidFill>
+              <a:schemeClr val="tx1"/>
+            </a:solidFill>
+          </a:ln>
+        </p:spPr>
+        <p:style>
+          <a:lnRef idx="1">
+            <a:schemeClr val="dk1"/>
+          </a:lnRef>
+          <a:fillRef idx="0">
+            <a:schemeClr val="dk1"/>
+          </a:fillRef>
+          <a:effectRef idx="0">
+            <a:schemeClr val="dk1"/>
+          </a:effectRef>
+          <a:fontRef idx="minor">
+            <a:schemeClr val="tx1"/>
+          </a:fontRef>
+        </p:style>
+      </p:cxnSp>
     </p:spTree>
     <p:extLst>
       <p:ext uri="{BB962C8B-B14F-4D97-AF65-F5344CB8AC3E}">
@@ -20474,7 +20002,7 @@
 </p:sld>
 </file>
 
-<file path=ppt/slides/slide26.xml><?xml version="1.0" encoding="utf-8"?>
+<file path=ppt/slides/slide25.xml><?xml version="1.0" encoding="utf-8"?>
 <p:sld xmlns:a="http://schemas.openxmlformats.org/drawingml/2006/main" xmlns:r="http://schemas.openxmlformats.org/officeDocument/2006/relationships" xmlns:p="http://schemas.openxmlformats.org/presentationml/2006/main">
   <p:cSld>
     <p:spTree>
@@ -20789,7 +20317,7 @@
 </p:sld>
 </file>
 
-<file path=ppt/slides/slide27.xml><?xml version="1.0" encoding="utf-8"?>
+<file path=ppt/slides/slide26.xml><?xml version="1.0" encoding="utf-8"?>
 <p:sld xmlns:a="http://schemas.openxmlformats.org/drawingml/2006/main" xmlns:r="http://schemas.openxmlformats.org/officeDocument/2006/relationships" xmlns:p="http://schemas.openxmlformats.org/presentationml/2006/main">
   <p:cSld>
     <p:spTree>
@@ -21347,7 +20875,7 @@
 </p:sld>
 </file>
 
-<file path=ppt/slides/slide28.xml><?xml version="1.0" encoding="utf-8"?>
+<file path=ppt/slides/slide27.xml><?xml version="1.0" encoding="utf-8"?>
 <p:sld xmlns:a="http://schemas.openxmlformats.org/drawingml/2006/main" xmlns:r="http://schemas.openxmlformats.org/officeDocument/2006/relationships" xmlns:p="http://schemas.openxmlformats.org/presentationml/2006/main">
   <p:cSld>
     <p:spTree>
@@ -22311,7 +21839,7 @@
 </p:sld>
 </file>
 
-<file path=ppt/slides/slide29.xml><?xml version="1.0" encoding="utf-8"?>
+<file path=ppt/slides/slide28.xml><?xml version="1.0" encoding="utf-8"?>
 <p:sld xmlns:a="http://schemas.openxmlformats.org/drawingml/2006/main" xmlns:r="http://schemas.openxmlformats.org/officeDocument/2006/relationships" xmlns:p="http://schemas.openxmlformats.org/presentationml/2006/main">
   <p:cSld>
     <p:spTree>
@@ -22727,84 +22255,7 @@
 </p:sld>
 </file>
 
-<file path=ppt/slides/slide3.xml><?xml version="1.0" encoding="utf-8"?>
-<p:sld xmlns:a="http://schemas.openxmlformats.org/drawingml/2006/main" xmlns:r="http://schemas.openxmlformats.org/officeDocument/2006/relationships" xmlns:p="http://schemas.openxmlformats.org/presentationml/2006/main">
-  <p:cSld>
-    <p:spTree>
-      <p:nvGrpSpPr>
-        <p:cNvPr id="1" name=""/>
-        <p:cNvGrpSpPr/>
-        <p:nvPr/>
-      </p:nvGrpSpPr>
-      <p:grpSpPr>
-        <a:xfrm>
-          <a:off x="0" y="0"/>
-          <a:ext cx="0" cy="0"/>
-          <a:chOff x="0" y="0"/>
-          <a:chExt cx="0" cy="0"/>
-        </a:xfrm>
-      </p:grpSpPr>
-      <p:pic>
-        <p:nvPicPr>
-          <p:cNvPr id="1028" name="Picture 4">
-            <a:extLst>
-              <a:ext uri="{FF2B5EF4-FFF2-40B4-BE49-F238E27FC236}">
-                <a16:creationId xmlns:a16="http://schemas.microsoft.com/office/drawing/2014/main" id="{76C3C845-63E2-25D5-3260-3402A990F2B6}"/>
-              </a:ext>
-            </a:extLst>
-          </p:cNvPr>
-          <p:cNvPicPr>
-            <a:picLocks noChangeAspect="1" noChangeArrowheads="1"/>
-          </p:cNvPicPr>
-          <p:nvPr/>
-        </p:nvPicPr>
-        <p:blipFill>
-          <a:blip r:embed="rId2">
-            <a:extLst>
-              <a:ext uri="{28A0092B-C50C-407E-A947-70E740481C1C}">
-                <a14:useLocalDpi xmlns:a14="http://schemas.microsoft.com/office/drawing/2010/main" val="0"/>
-              </a:ext>
-            </a:extLst>
-          </a:blip>
-          <a:srcRect/>
-          <a:stretch>
-            <a:fillRect/>
-          </a:stretch>
-        </p:blipFill>
-        <p:spPr bwMode="auto">
-          <a:xfrm>
-            <a:off x="4667250" y="2833688"/>
-            <a:ext cx="2857500" cy="1190625"/>
-          </a:xfrm>
-          <a:prstGeom prst="rect">
-            <a:avLst/>
-          </a:prstGeom>
-          <a:noFill/>
-          <a:extLst>
-            <a:ext uri="{909E8E84-426E-40DD-AFC4-6F175D3DCCD1}">
-              <a14:hiddenFill xmlns:a14="http://schemas.microsoft.com/office/drawing/2010/main">
-                <a:solidFill>
-                  <a:srgbClr val="FFFFFF"/>
-                </a:solidFill>
-              </a14:hiddenFill>
-            </a:ext>
-          </a:extLst>
-        </p:spPr>
-      </p:pic>
-    </p:spTree>
-    <p:extLst>
-      <p:ext uri="{BB962C8B-B14F-4D97-AF65-F5344CB8AC3E}">
-        <p14:creationId xmlns:p14="http://schemas.microsoft.com/office/powerpoint/2010/main" val="1451288093"/>
-      </p:ext>
-    </p:extLst>
-  </p:cSld>
-  <p:clrMapOvr>
-    <a:masterClrMapping/>
-  </p:clrMapOvr>
-</p:sld>
-</file>
-
-<file path=ppt/slides/slide30.xml><?xml version="1.0" encoding="utf-8"?>
+<file path=ppt/slides/slide29.xml><?xml version="1.0" encoding="utf-8"?>
 <p:sld xmlns:a="http://schemas.openxmlformats.org/drawingml/2006/main" xmlns:r="http://schemas.openxmlformats.org/officeDocument/2006/relationships" xmlns:p="http://schemas.openxmlformats.org/presentationml/2006/main">
   <p:cSld>
     <p:spTree>
@@ -24082,7 +23533,84 @@
 </p:sld>
 </file>
 
-<file path=ppt/slides/slide31.xml><?xml version="1.0" encoding="utf-8"?>
+<file path=ppt/slides/slide3.xml><?xml version="1.0" encoding="utf-8"?>
+<p:sld xmlns:a="http://schemas.openxmlformats.org/drawingml/2006/main" xmlns:r="http://schemas.openxmlformats.org/officeDocument/2006/relationships" xmlns:p="http://schemas.openxmlformats.org/presentationml/2006/main">
+  <p:cSld>
+    <p:spTree>
+      <p:nvGrpSpPr>
+        <p:cNvPr id="1" name=""/>
+        <p:cNvGrpSpPr/>
+        <p:nvPr/>
+      </p:nvGrpSpPr>
+      <p:grpSpPr>
+        <a:xfrm>
+          <a:off x="0" y="0"/>
+          <a:ext cx="0" cy="0"/>
+          <a:chOff x="0" y="0"/>
+          <a:chExt cx="0" cy="0"/>
+        </a:xfrm>
+      </p:grpSpPr>
+      <p:pic>
+        <p:nvPicPr>
+          <p:cNvPr id="1028" name="Picture 4">
+            <a:extLst>
+              <a:ext uri="{FF2B5EF4-FFF2-40B4-BE49-F238E27FC236}">
+                <a16:creationId xmlns:a16="http://schemas.microsoft.com/office/drawing/2014/main" id="{76C3C845-63E2-25D5-3260-3402A990F2B6}"/>
+              </a:ext>
+            </a:extLst>
+          </p:cNvPr>
+          <p:cNvPicPr>
+            <a:picLocks noChangeAspect="1" noChangeArrowheads="1"/>
+          </p:cNvPicPr>
+          <p:nvPr/>
+        </p:nvPicPr>
+        <p:blipFill>
+          <a:blip r:embed="rId2">
+            <a:extLst>
+              <a:ext uri="{28A0092B-C50C-407E-A947-70E740481C1C}">
+                <a14:useLocalDpi xmlns:a14="http://schemas.microsoft.com/office/drawing/2010/main" val="0"/>
+              </a:ext>
+            </a:extLst>
+          </a:blip>
+          <a:srcRect/>
+          <a:stretch>
+            <a:fillRect/>
+          </a:stretch>
+        </p:blipFill>
+        <p:spPr bwMode="auto">
+          <a:xfrm>
+            <a:off x="4667250" y="2833688"/>
+            <a:ext cx="2857500" cy="1190625"/>
+          </a:xfrm>
+          <a:prstGeom prst="rect">
+            <a:avLst/>
+          </a:prstGeom>
+          <a:noFill/>
+          <a:extLst>
+            <a:ext uri="{909E8E84-426E-40DD-AFC4-6F175D3DCCD1}">
+              <a14:hiddenFill xmlns:a14="http://schemas.microsoft.com/office/drawing/2010/main">
+                <a:solidFill>
+                  <a:srgbClr val="FFFFFF"/>
+                </a:solidFill>
+              </a14:hiddenFill>
+            </a:ext>
+          </a:extLst>
+        </p:spPr>
+      </p:pic>
+    </p:spTree>
+    <p:extLst>
+      <p:ext uri="{BB962C8B-B14F-4D97-AF65-F5344CB8AC3E}">
+        <p14:creationId xmlns:p14="http://schemas.microsoft.com/office/powerpoint/2010/main" val="1451288093"/>
+      </p:ext>
+    </p:extLst>
+  </p:cSld>
+  <p:clrMapOvr>
+    <a:masterClrMapping/>
+  </p:clrMapOvr>
+</p:sld>
+</file>
+
+<file path=ppt/slides/slide30.xml><?xml version="1.0" encoding="utf-8"?>
 <p:sld xmlns:a="http://schemas.openxmlformats.org/drawingml/2006/main" xmlns:r="http://schemas.openxmlformats.org/officeDocument/2006/relationships" xmlns:p="http://schemas.openxmlformats.org/presentationml/2006/main">
   <p:cSld>
     <p:spTree>
@@ -25521,7 +25049,7 @@
 </p:sld>
 </file>
 
-<file path=ppt/slides/slide32.xml><?xml version="1.0" encoding="utf-8"?>
+<file path=ppt/slides/slide31.xml><?xml version="1.0" encoding="utf-8"?>
 <p:sld xmlns:a="http://schemas.openxmlformats.org/drawingml/2006/main" xmlns:r="http://schemas.openxmlformats.org/officeDocument/2006/relationships" xmlns:p="http://schemas.openxmlformats.org/presentationml/2006/main">
   <p:cSld>
     <p:spTree>
@@ -26048,7 +25576,7 @@
 </p:sld>
 </file>
 
-<file path=ppt/slides/slide33.xml><?xml version="1.0" encoding="utf-8"?>
+<file path=ppt/slides/slide32.xml><?xml version="1.0" encoding="utf-8"?>
 <p:sld xmlns:a="http://schemas.openxmlformats.org/drawingml/2006/main" xmlns:r="http://schemas.openxmlformats.org/officeDocument/2006/relationships" xmlns:p="http://schemas.openxmlformats.org/presentationml/2006/main">
   <p:cSld>
     <p:spTree>
@@ -26084,7 +25612,7 @@
 </p:sld>
 </file>
 
-<file path=ppt/slides/slide34.xml><?xml version="1.0" encoding="utf-8"?>
+<file path=ppt/slides/slide33.xml><?xml version="1.0" encoding="utf-8"?>
 <p:sld xmlns:a="http://schemas.openxmlformats.org/drawingml/2006/main" xmlns:r="http://schemas.openxmlformats.org/officeDocument/2006/relationships" xmlns:p="http://schemas.openxmlformats.org/presentationml/2006/main">
   <p:cSld>
     <p:spTree>
@@ -26120,7 +25648,7 @@
 </p:sld>
 </file>
 
-<file path=ppt/slides/slide35.xml><?xml version="1.0" encoding="utf-8"?>
+<file path=ppt/slides/slide34.xml><?xml version="1.0" encoding="utf-8"?>
 <p:sld xmlns:a="http://schemas.openxmlformats.org/drawingml/2006/main" xmlns:r="http://schemas.openxmlformats.org/officeDocument/2006/relationships" xmlns:p="http://schemas.openxmlformats.org/presentationml/2006/main">
   <p:cSld>
     <p:spTree>
@@ -26774,7 +26302,7 @@
 </p:sld>
 </file>
 
-<file path=ppt/slides/slide36.xml><?xml version="1.0" encoding="utf-8"?>
+<file path=ppt/slides/slide35.xml><?xml version="1.0" encoding="utf-8"?>
 <p:sld xmlns:a="http://schemas.openxmlformats.org/drawingml/2006/main" xmlns:r="http://schemas.openxmlformats.org/officeDocument/2006/relationships" xmlns:p="http://schemas.openxmlformats.org/presentationml/2006/main">
   <p:cSld>
     <p:spTree>
@@ -28002,7 +27530,7 @@
 </p:sld>
 </file>
 
-<file path=ppt/slides/slide37.xml><?xml version="1.0" encoding="utf-8"?>
+<file path=ppt/slides/slide36.xml><?xml version="1.0" encoding="utf-8"?>
 <p:sld xmlns:a="http://schemas.openxmlformats.org/drawingml/2006/main" xmlns:r="http://schemas.openxmlformats.org/officeDocument/2006/relationships" xmlns:p="http://schemas.openxmlformats.org/presentationml/2006/main">
   <p:cSld>
     <p:spTree>
@@ -29726,7 +29254,7 @@
 </p:sld>
 </file>
 
-<file path=ppt/slides/slide38.xml><?xml version="1.0" encoding="utf-8"?>
+<file path=ppt/slides/slide37.xml><?xml version="1.0" encoding="utf-8"?>
 <p:sld xmlns:a="http://schemas.openxmlformats.org/drawingml/2006/main" xmlns:r="http://schemas.openxmlformats.org/officeDocument/2006/relationships" xmlns:p="http://schemas.openxmlformats.org/presentationml/2006/main">
   <p:cSld>
     <p:spTree>
@@ -29762,7 +29290,7 @@
 </p:sld>
 </file>
 
-<file path=ppt/slides/slide39.xml><?xml version="1.0" encoding="utf-8"?>
+<file path=ppt/slides/slide38.xml><?xml version="1.0" encoding="utf-8"?>
 <p:sld xmlns:a="http://schemas.openxmlformats.org/drawingml/2006/main" xmlns:r="http://schemas.openxmlformats.org/officeDocument/2006/relationships" xmlns:p="http://schemas.openxmlformats.org/presentationml/2006/main">
   <p:cSld>
     <p:spTree>
@@ -30015,6 +29543,447 @@
     <p:extLst>
       <p:ext uri="{BB962C8B-B14F-4D97-AF65-F5344CB8AC3E}">
         <p14:creationId xmlns:p14="http://schemas.microsoft.com/office/powerpoint/2010/main" val="2709493387"/>
+      </p:ext>
+    </p:extLst>
+  </p:cSld>
+  <p:clrMapOvr>
+    <a:masterClrMapping/>
+  </p:clrMapOvr>
+</p:sld>
+</file>
+
+<file path=ppt/slides/slide39.xml><?xml version="1.0" encoding="utf-8"?>
+<p:sld xmlns:a="http://schemas.openxmlformats.org/drawingml/2006/main" xmlns:r="http://schemas.openxmlformats.org/officeDocument/2006/relationships" xmlns:p="http://schemas.openxmlformats.org/presentationml/2006/main">
+  <p:cSld>
+    <p:spTree>
+      <p:nvGrpSpPr>
+        <p:cNvPr id="1" name="">
+          <a:extLst>
+            <a:ext uri="{FF2B5EF4-FFF2-40B4-BE49-F238E27FC236}">
+              <a16:creationId xmlns:a16="http://schemas.microsoft.com/office/drawing/2014/main" id="{E6711B58-FCD1-4600-6BCF-BBB7293D14C3}"/>
+            </a:ext>
+          </a:extLst>
+        </p:cNvPr>
+        <p:cNvGrpSpPr/>
+        <p:nvPr/>
+      </p:nvGrpSpPr>
+      <p:grpSpPr>
+        <a:xfrm>
+          <a:off x="0" y="0"/>
+          <a:ext cx="0" cy="0"/>
+          <a:chOff x="0" y="0"/>
+          <a:chExt cx="0" cy="0"/>
+        </a:xfrm>
+      </p:grpSpPr>
+      <p:pic>
+        <p:nvPicPr>
+          <p:cNvPr id="14" name="図 13">
+            <a:extLst>
+              <a:ext uri="{FF2B5EF4-FFF2-40B4-BE49-F238E27FC236}">
+                <a16:creationId xmlns:a16="http://schemas.microsoft.com/office/drawing/2014/main" id="{28DD81DA-9A17-929F-1C69-31225BFD1C26}"/>
+              </a:ext>
+            </a:extLst>
+          </p:cNvPr>
+          <p:cNvPicPr>
+            <a:picLocks noChangeAspect="1"/>
+          </p:cNvPicPr>
+          <p:nvPr/>
+        </p:nvPicPr>
+        <p:blipFill>
+          <a:blip r:embed="rId2">
+            <a:extLst>
+              <a:ext uri="{28A0092B-C50C-407E-A947-70E740481C1C}">
+                <a14:useLocalDpi xmlns:a14="http://schemas.microsoft.com/office/drawing/2010/main" val="0"/>
+              </a:ext>
+            </a:extLst>
+          </a:blip>
+          <a:stretch>
+            <a:fillRect/>
+          </a:stretch>
+        </p:blipFill>
+        <p:spPr>
+          <a:xfrm>
+            <a:off x="3890816" y="2298652"/>
+            <a:ext cx="1080000" cy="1080000"/>
+          </a:xfrm>
+          <a:prstGeom prst="rect">
+            <a:avLst/>
+          </a:prstGeom>
+        </p:spPr>
+      </p:pic>
+      <p:sp>
+        <p:nvSpPr>
+          <p:cNvPr id="15" name="テキスト ボックス 14">
+            <a:extLst>
+              <a:ext uri="{FF2B5EF4-FFF2-40B4-BE49-F238E27FC236}">
+                <a16:creationId xmlns:a16="http://schemas.microsoft.com/office/drawing/2014/main" id="{9CF27B9C-2604-B2D3-D018-0D86D81B7F73}"/>
+              </a:ext>
+            </a:extLst>
+          </p:cNvPr>
+          <p:cNvSpPr txBox="1"/>
+          <p:nvPr/>
+        </p:nvSpPr>
+        <p:spPr>
+          <a:xfrm>
+            <a:off x="4853937" y="2677782"/>
+            <a:ext cx="2262158" cy="369332"/>
+          </a:xfrm>
+          <a:prstGeom prst="rect">
+            <a:avLst/>
+          </a:prstGeom>
+          <a:noFill/>
+        </p:spPr>
+        <p:txBody>
+          <a:bodyPr wrap="none" rtlCol="0">
+            <a:spAutoFit/>
+          </a:bodyPr>
+          <a:lstStyle/>
+          <a:p>
+            <a:r>
+              <a:rPr kumimoji="1" lang="ja-JP" altLang="en-US" b="1" dirty="0"/>
+              <a:t>現在のディレクトリ</a:t>
+            </a:r>
+          </a:p>
+        </p:txBody>
+      </p:sp>
+      <p:cxnSp>
+        <p:nvCxnSpPr>
+          <p:cNvPr id="18" name="コネクタ: カギ線 17">
+            <a:extLst>
+              <a:ext uri="{FF2B5EF4-FFF2-40B4-BE49-F238E27FC236}">
+                <a16:creationId xmlns:a16="http://schemas.microsoft.com/office/drawing/2014/main" id="{B10EB6E0-D7B7-BB68-9EFE-2E3DDCE53A95}"/>
+              </a:ext>
+            </a:extLst>
+          </p:cNvPr>
+          <p:cNvCxnSpPr>
+            <a:cxnSpLocks/>
+          </p:cNvCxnSpPr>
+          <p:nvPr/>
+        </p:nvCxnSpPr>
+        <p:spPr>
+          <a:xfrm>
+            <a:off x="4419224" y="3193495"/>
+            <a:ext cx="1408521" cy="504000"/>
+          </a:xfrm>
+          <a:prstGeom prst="bentConnector3">
+            <a:avLst>
+              <a:gd name="adj1" fmla="val -235"/>
+            </a:avLst>
+          </a:prstGeom>
+          <a:ln w="38100"/>
+        </p:spPr>
+        <p:style>
+          <a:lnRef idx="1">
+            <a:schemeClr val="dk1"/>
+          </a:lnRef>
+          <a:fillRef idx="0">
+            <a:schemeClr val="dk1"/>
+          </a:fillRef>
+          <a:effectRef idx="0">
+            <a:schemeClr val="dk1"/>
+          </a:effectRef>
+          <a:fontRef idx="minor">
+            <a:schemeClr val="tx1"/>
+          </a:fontRef>
+        </p:style>
+      </p:cxnSp>
+      <p:pic>
+        <p:nvPicPr>
+          <p:cNvPr id="23" name="図 22">
+            <a:extLst>
+              <a:ext uri="{FF2B5EF4-FFF2-40B4-BE49-F238E27FC236}">
+                <a16:creationId xmlns:a16="http://schemas.microsoft.com/office/drawing/2014/main" id="{05044BF6-FD6B-F00C-37B5-C6A617D57F1D}"/>
+              </a:ext>
+            </a:extLst>
+          </p:cNvPr>
+          <p:cNvPicPr>
+            <a:picLocks noChangeAspect="1"/>
+          </p:cNvPicPr>
+          <p:nvPr/>
+        </p:nvPicPr>
+        <p:blipFill>
+          <a:blip r:embed="rId2">
+            <a:extLst>
+              <a:ext uri="{28A0092B-C50C-407E-A947-70E740481C1C}">
+                <a14:useLocalDpi xmlns:a14="http://schemas.microsoft.com/office/drawing/2010/main" val="0"/>
+              </a:ext>
+            </a:extLst>
+          </a:blip>
+          <a:stretch>
+            <a:fillRect/>
+          </a:stretch>
+        </p:blipFill>
+        <p:spPr>
+          <a:xfrm>
+            <a:off x="5814926" y="3080533"/>
+            <a:ext cx="1080000" cy="1080000"/>
+          </a:xfrm>
+          <a:prstGeom prst="rect">
+            <a:avLst/>
+          </a:prstGeom>
+        </p:spPr>
+      </p:pic>
+      <p:sp>
+        <p:nvSpPr>
+          <p:cNvPr id="24" name="四角形: 角を丸くする 23">
+            <a:extLst>
+              <a:ext uri="{FF2B5EF4-FFF2-40B4-BE49-F238E27FC236}">
+                <a16:creationId xmlns:a16="http://schemas.microsoft.com/office/drawing/2014/main" id="{119FEC79-8775-4C4C-AA4B-A7F0D9150785}"/>
+              </a:ext>
+            </a:extLst>
+          </p:cNvPr>
+          <p:cNvSpPr/>
+          <p:nvPr/>
+        </p:nvSpPr>
+        <p:spPr>
+          <a:xfrm>
+            <a:off x="4030824" y="3225677"/>
+            <a:ext cx="8042988" cy="2454703"/>
+          </a:xfrm>
+          <a:prstGeom prst="roundRect">
+            <a:avLst/>
+          </a:prstGeom>
+          <a:noFill/>
+          <a:ln w="38100">
+            <a:solidFill>
+              <a:srgbClr val="00B0F0"/>
+            </a:solidFill>
+            <a:prstDash val="dash"/>
+          </a:ln>
+        </p:spPr>
+        <p:style>
+          <a:lnRef idx="2">
+            <a:schemeClr val="accent1">
+              <a:shade val="15000"/>
+            </a:schemeClr>
+          </a:lnRef>
+          <a:fillRef idx="1">
+            <a:schemeClr val="accent1"/>
+          </a:fillRef>
+          <a:effectRef idx="0">
+            <a:schemeClr val="accent1"/>
+          </a:effectRef>
+          <a:fontRef idx="minor">
+            <a:schemeClr val="lt1"/>
+          </a:fontRef>
+        </p:style>
+        <p:txBody>
+          <a:bodyPr rtlCol="0" anchor="b"/>
+          <a:lstStyle/>
+          <a:p>
+            <a:r>
+              <a:rPr lang="ja-JP" altLang="en-US" b="1" dirty="0">
+                <a:solidFill>
+                  <a:srgbClr val="00B0F0"/>
+                </a:solidFill>
+              </a:rPr>
+              <a:t>ローカルリポジトリ</a:t>
+            </a:r>
+            <a:endParaRPr kumimoji="1" lang="ja-JP" altLang="en-US" dirty="0"/>
+          </a:p>
+        </p:txBody>
+      </p:sp>
+      <p:sp>
+        <p:nvSpPr>
+          <p:cNvPr id="27" name="四角形: 角を丸くする 26">
+            <a:extLst>
+              <a:ext uri="{FF2B5EF4-FFF2-40B4-BE49-F238E27FC236}">
+                <a16:creationId xmlns:a16="http://schemas.microsoft.com/office/drawing/2014/main" id="{95D72625-1421-5BCE-35C1-E471DBF33B67}"/>
+              </a:ext>
+            </a:extLst>
+          </p:cNvPr>
+          <p:cNvSpPr/>
+          <p:nvPr/>
+        </p:nvSpPr>
+        <p:spPr>
+          <a:xfrm>
+            <a:off x="4282751" y="4137966"/>
+            <a:ext cx="5040000" cy="720000"/>
+          </a:xfrm>
+          <a:prstGeom prst="roundRect">
+            <a:avLst/>
+          </a:prstGeom>
+          <a:noFill/>
+          <a:ln w="38100">
+            <a:solidFill>
+              <a:srgbClr val="00B050"/>
+            </a:solidFill>
+            <a:prstDash val="dash"/>
+          </a:ln>
+        </p:spPr>
+        <p:style>
+          <a:lnRef idx="2">
+            <a:schemeClr val="accent1">
+              <a:shade val="15000"/>
+            </a:schemeClr>
+          </a:lnRef>
+          <a:fillRef idx="1">
+            <a:schemeClr val="accent1"/>
+          </a:fillRef>
+          <a:effectRef idx="0">
+            <a:schemeClr val="accent1"/>
+          </a:effectRef>
+          <a:fontRef idx="minor">
+            <a:schemeClr val="lt1"/>
+          </a:fontRef>
+        </p:style>
+        <p:txBody>
+          <a:bodyPr rtlCol="0" anchor="ctr"/>
+          <a:lstStyle/>
+          <a:p>
+            <a:pPr algn="ctr"/>
+            <a:r>
+              <a:rPr kumimoji="1" lang="ja-JP" altLang="en-US" b="1" dirty="0">
+                <a:solidFill>
+                  <a:srgbClr val="00B050"/>
+                </a:solidFill>
+              </a:rPr>
+              <a:t>ワーキングツリー</a:t>
+            </a:r>
+          </a:p>
+        </p:txBody>
+      </p:sp>
+      <p:cxnSp>
+        <p:nvCxnSpPr>
+          <p:cNvPr id="28" name="コネクタ: カギ線 27">
+            <a:extLst>
+              <a:ext uri="{FF2B5EF4-FFF2-40B4-BE49-F238E27FC236}">
+                <a16:creationId xmlns:a16="http://schemas.microsoft.com/office/drawing/2014/main" id="{462762B9-D477-C6B9-4D18-90FD420F4A1E}"/>
+              </a:ext>
+            </a:extLst>
+          </p:cNvPr>
+          <p:cNvCxnSpPr>
+            <a:cxnSpLocks/>
+          </p:cNvCxnSpPr>
+          <p:nvPr/>
+        </p:nvCxnSpPr>
+        <p:spPr>
+          <a:xfrm>
+            <a:off x="4414384" y="3197006"/>
+            <a:ext cx="1408521" cy="1296000"/>
+          </a:xfrm>
+          <a:prstGeom prst="bentConnector3">
+            <a:avLst>
+              <a:gd name="adj1" fmla="val -235"/>
+            </a:avLst>
+          </a:prstGeom>
+          <a:ln w="38100"/>
+        </p:spPr>
+        <p:style>
+          <a:lnRef idx="1">
+            <a:schemeClr val="dk1"/>
+          </a:lnRef>
+          <a:fillRef idx="0">
+            <a:schemeClr val="dk1"/>
+          </a:fillRef>
+          <a:effectRef idx="0">
+            <a:schemeClr val="dk1"/>
+          </a:effectRef>
+          <a:fontRef idx="minor">
+            <a:schemeClr val="tx1"/>
+          </a:fontRef>
+        </p:style>
+      </p:cxnSp>
+      <p:sp>
+        <p:nvSpPr>
+          <p:cNvPr id="33" name="テキスト ボックス 32">
+            <a:extLst>
+              <a:ext uri="{FF2B5EF4-FFF2-40B4-BE49-F238E27FC236}">
+                <a16:creationId xmlns:a16="http://schemas.microsoft.com/office/drawing/2014/main" id="{983EC35A-F761-0ADA-9BAD-49907A586DC4}"/>
+              </a:ext>
+            </a:extLst>
+          </p:cNvPr>
+          <p:cNvSpPr txBox="1"/>
+          <p:nvPr/>
+        </p:nvSpPr>
+        <p:spPr>
+          <a:xfrm>
+            <a:off x="6761672" y="3459726"/>
+            <a:ext cx="537327" cy="369332"/>
+          </a:xfrm>
+          <a:prstGeom prst="rect">
+            <a:avLst/>
+          </a:prstGeom>
+          <a:noFill/>
+        </p:spPr>
+        <p:txBody>
+          <a:bodyPr wrap="none" rtlCol="0">
+            <a:spAutoFit/>
+          </a:bodyPr>
+          <a:lstStyle/>
+          <a:p>
+            <a:r>
+              <a:rPr kumimoji="1" lang="en-US" altLang="ja-JP" b="1" dirty="0"/>
+              <a:t>.git</a:t>
+            </a:r>
+            <a:endParaRPr kumimoji="1" lang="ja-JP" altLang="en-US" b="1" dirty="0"/>
+          </a:p>
+        </p:txBody>
+      </p:sp>
+      <p:sp>
+        <p:nvSpPr>
+          <p:cNvPr id="35" name="四角形: 角を丸くする 34">
+            <a:extLst>
+              <a:ext uri="{FF2B5EF4-FFF2-40B4-BE49-F238E27FC236}">
+                <a16:creationId xmlns:a16="http://schemas.microsoft.com/office/drawing/2014/main" id="{261FD4CB-39F7-48F9-E343-66E06835D6D7}"/>
+              </a:ext>
+            </a:extLst>
+          </p:cNvPr>
+          <p:cNvSpPr/>
+          <p:nvPr/>
+        </p:nvSpPr>
+        <p:spPr>
+          <a:xfrm>
+            <a:off x="5833587" y="3310127"/>
+            <a:ext cx="6090935" cy="720000"/>
+          </a:xfrm>
+          <a:prstGeom prst="roundRect">
+            <a:avLst/>
+          </a:prstGeom>
+          <a:noFill/>
+          <a:ln w="38100">
+            <a:solidFill>
+              <a:srgbClr val="FFC000"/>
+            </a:solidFill>
+            <a:prstDash val="dash"/>
+          </a:ln>
+        </p:spPr>
+        <p:style>
+          <a:lnRef idx="2">
+            <a:schemeClr val="accent1">
+              <a:shade val="15000"/>
+            </a:schemeClr>
+          </a:lnRef>
+          <a:fillRef idx="1">
+            <a:schemeClr val="accent1"/>
+          </a:fillRef>
+          <a:effectRef idx="0">
+            <a:schemeClr val="accent1"/>
+          </a:effectRef>
+          <a:fontRef idx="minor">
+            <a:schemeClr val="lt1"/>
+          </a:fontRef>
+        </p:style>
+        <p:txBody>
+          <a:bodyPr rtlCol="0" anchor="ctr"/>
+          <a:lstStyle/>
+          <a:p>
+            <a:pPr lvl="3"/>
+            <a:r>
+              <a:rPr lang="ja-JP" altLang="en-US" b="1" dirty="0">
+                <a:solidFill>
+                  <a:srgbClr val="FFC000"/>
+                </a:solidFill>
+              </a:rPr>
+              <a:t>ブランチ情報など</a:t>
+            </a:r>
+          </a:p>
+        </p:txBody>
+      </p:sp>
+    </p:spTree>
+    <p:extLst>
+      <p:ext uri="{BB962C8B-B14F-4D97-AF65-F5344CB8AC3E}">
+        <p14:creationId xmlns:p14="http://schemas.microsoft.com/office/powerpoint/2010/main" val="1003559266"/>
       </p:ext>
     </p:extLst>
   </p:cSld>
@@ -30790,447 +30759,6 @@
         <p:cNvPr id="1" name="">
           <a:extLst>
             <a:ext uri="{FF2B5EF4-FFF2-40B4-BE49-F238E27FC236}">
-              <a16:creationId xmlns:a16="http://schemas.microsoft.com/office/drawing/2014/main" id="{E6711B58-FCD1-4600-6BCF-BBB7293D14C3}"/>
-            </a:ext>
-          </a:extLst>
-        </p:cNvPr>
-        <p:cNvGrpSpPr/>
-        <p:nvPr/>
-      </p:nvGrpSpPr>
-      <p:grpSpPr>
-        <a:xfrm>
-          <a:off x="0" y="0"/>
-          <a:ext cx="0" cy="0"/>
-          <a:chOff x="0" y="0"/>
-          <a:chExt cx="0" cy="0"/>
-        </a:xfrm>
-      </p:grpSpPr>
-      <p:pic>
-        <p:nvPicPr>
-          <p:cNvPr id="14" name="図 13">
-            <a:extLst>
-              <a:ext uri="{FF2B5EF4-FFF2-40B4-BE49-F238E27FC236}">
-                <a16:creationId xmlns:a16="http://schemas.microsoft.com/office/drawing/2014/main" id="{28DD81DA-9A17-929F-1C69-31225BFD1C26}"/>
-              </a:ext>
-            </a:extLst>
-          </p:cNvPr>
-          <p:cNvPicPr>
-            <a:picLocks noChangeAspect="1"/>
-          </p:cNvPicPr>
-          <p:nvPr/>
-        </p:nvPicPr>
-        <p:blipFill>
-          <a:blip r:embed="rId2">
-            <a:extLst>
-              <a:ext uri="{28A0092B-C50C-407E-A947-70E740481C1C}">
-                <a14:useLocalDpi xmlns:a14="http://schemas.microsoft.com/office/drawing/2010/main" val="0"/>
-              </a:ext>
-            </a:extLst>
-          </a:blip>
-          <a:stretch>
-            <a:fillRect/>
-          </a:stretch>
-        </p:blipFill>
-        <p:spPr>
-          <a:xfrm>
-            <a:off x="3890816" y="2298652"/>
-            <a:ext cx="1080000" cy="1080000"/>
-          </a:xfrm>
-          <a:prstGeom prst="rect">
-            <a:avLst/>
-          </a:prstGeom>
-        </p:spPr>
-      </p:pic>
-      <p:sp>
-        <p:nvSpPr>
-          <p:cNvPr id="15" name="テキスト ボックス 14">
-            <a:extLst>
-              <a:ext uri="{FF2B5EF4-FFF2-40B4-BE49-F238E27FC236}">
-                <a16:creationId xmlns:a16="http://schemas.microsoft.com/office/drawing/2014/main" id="{9CF27B9C-2604-B2D3-D018-0D86D81B7F73}"/>
-              </a:ext>
-            </a:extLst>
-          </p:cNvPr>
-          <p:cNvSpPr txBox="1"/>
-          <p:nvPr/>
-        </p:nvSpPr>
-        <p:spPr>
-          <a:xfrm>
-            <a:off x="4853937" y="2677782"/>
-            <a:ext cx="2262158" cy="369332"/>
-          </a:xfrm>
-          <a:prstGeom prst="rect">
-            <a:avLst/>
-          </a:prstGeom>
-          <a:noFill/>
-        </p:spPr>
-        <p:txBody>
-          <a:bodyPr wrap="none" rtlCol="0">
-            <a:spAutoFit/>
-          </a:bodyPr>
-          <a:lstStyle/>
-          <a:p>
-            <a:r>
-              <a:rPr kumimoji="1" lang="ja-JP" altLang="en-US" b="1" dirty="0"/>
-              <a:t>現在のディレクトリ</a:t>
-            </a:r>
-          </a:p>
-        </p:txBody>
-      </p:sp>
-      <p:cxnSp>
-        <p:nvCxnSpPr>
-          <p:cNvPr id="18" name="コネクタ: カギ線 17">
-            <a:extLst>
-              <a:ext uri="{FF2B5EF4-FFF2-40B4-BE49-F238E27FC236}">
-                <a16:creationId xmlns:a16="http://schemas.microsoft.com/office/drawing/2014/main" id="{B10EB6E0-D7B7-BB68-9EFE-2E3DDCE53A95}"/>
-              </a:ext>
-            </a:extLst>
-          </p:cNvPr>
-          <p:cNvCxnSpPr>
-            <a:cxnSpLocks/>
-          </p:cNvCxnSpPr>
-          <p:nvPr/>
-        </p:nvCxnSpPr>
-        <p:spPr>
-          <a:xfrm>
-            <a:off x="4419224" y="3193495"/>
-            <a:ext cx="1408521" cy="504000"/>
-          </a:xfrm>
-          <a:prstGeom prst="bentConnector3">
-            <a:avLst>
-              <a:gd name="adj1" fmla="val -235"/>
-            </a:avLst>
-          </a:prstGeom>
-          <a:ln w="38100"/>
-        </p:spPr>
-        <p:style>
-          <a:lnRef idx="1">
-            <a:schemeClr val="dk1"/>
-          </a:lnRef>
-          <a:fillRef idx="0">
-            <a:schemeClr val="dk1"/>
-          </a:fillRef>
-          <a:effectRef idx="0">
-            <a:schemeClr val="dk1"/>
-          </a:effectRef>
-          <a:fontRef idx="minor">
-            <a:schemeClr val="tx1"/>
-          </a:fontRef>
-        </p:style>
-      </p:cxnSp>
-      <p:pic>
-        <p:nvPicPr>
-          <p:cNvPr id="23" name="図 22">
-            <a:extLst>
-              <a:ext uri="{FF2B5EF4-FFF2-40B4-BE49-F238E27FC236}">
-                <a16:creationId xmlns:a16="http://schemas.microsoft.com/office/drawing/2014/main" id="{05044BF6-FD6B-F00C-37B5-C6A617D57F1D}"/>
-              </a:ext>
-            </a:extLst>
-          </p:cNvPr>
-          <p:cNvPicPr>
-            <a:picLocks noChangeAspect="1"/>
-          </p:cNvPicPr>
-          <p:nvPr/>
-        </p:nvPicPr>
-        <p:blipFill>
-          <a:blip r:embed="rId2">
-            <a:extLst>
-              <a:ext uri="{28A0092B-C50C-407E-A947-70E740481C1C}">
-                <a14:useLocalDpi xmlns:a14="http://schemas.microsoft.com/office/drawing/2010/main" val="0"/>
-              </a:ext>
-            </a:extLst>
-          </a:blip>
-          <a:stretch>
-            <a:fillRect/>
-          </a:stretch>
-        </p:blipFill>
-        <p:spPr>
-          <a:xfrm>
-            <a:off x="5814926" y="3080533"/>
-            <a:ext cx="1080000" cy="1080000"/>
-          </a:xfrm>
-          <a:prstGeom prst="rect">
-            <a:avLst/>
-          </a:prstGeom>
-        </p:spPr>
-      </p:pic>
-      <p:sp>
-        <p:nvSpPr>
-          <p:cNvPr id="24" name="四角形: 角を丸くする 23">
-            <a:extLst>
-              <a:ext uri="{FF2B5EF4-FFF2-40B4-BE49-F238E27FC236}">
-                <a16:creationId xmlns:a16="http://schemas.microsoft.com/office/drawing/2014/main" id="{119FEC79-8775-4C4C-AA4B-A7F0D9150785}"/>
-              </a:ext>
-            </a:extLst>
-          </p:cNvPr>
-          <p:cNvSpPr/>
-          <p:nvPr/>
-        </p:nvSpPr>
-        <p:spPr>
-          <a:xfrm>
-            <a:off x="4030824" y="3225677"/>
-            <a:ext cx="8042988" cy="2454703"/>
-          </a:xfrm>
-          <a:prstGeom prst="roundRect">
-            <a:avLst/>
-          </a:prstGeom>
-          <a:noFill/>
-          <a:ln w="38100">
-            <a:solidFill>
-              <a:srgbClr val="00B0F0"/>
-            </a:solidFill>
-            <a:prstDash val="dash"/>
-          </a:ln>
-        </p:spPr>
-        <p:style>
-          <a:lnRef idx="2">
-            <a:schemeClr val="accent1">
-              <a:shade val="15000"/>
-            </a:schemeClr>
-          </a:lnRef>
-          <a:fillRef idx="1">
-            <a:schemeClr val="accent1"/>
-          </a:fillRef>
-          <a:effectRef idx="0">
-            <a:schemeClr val="accent1"/>
-          </a:effectRef>
-          <a:fontRef idx="minor">
-            <a:schemeClr val="lt1"/>
-          </a:fontRef>
-        </p:style>
-        <p:txBody>
-          <a:bodyPr rtlCol="0" anchor="b"/>
-          <a:lstStyle/>
-          <a:p>
-            <a:r>
-              <a:rPr lang="ja-JP" altLang="en-US" b="1" dirty="0">
-                <a:solidFill>
-                  <a:srgbClr val="00B0F0"/>
-                </a:solidFill>
-              </a:rPr>
-              <a:t>ローカルリポジトリ</a:t>
-            </a:r>
-            <a:endParaRPr kumimoji="1" lang="ja-JP" altLang="en-US" dirty="0"/>
-          </a:p>
-        </p:txBody>
-      </p:sp>
-      <p:sp>
-        <p:nvSpPr>
-          <p:cNvPr id="27" name="四角形: 角を丸くする 26">
-            <a:extLst>
-              <a:ext uri="{FF2B5EF4-FFF2-40B4-BE49-F238E27FC236}">
-                <a16:creationId xmlns:a16="http://schemas.microsoft.com/office/drawing/2014/main" id="{95D72625-1421-5BCE-35C1-E471DBF33B67}"/>
-              </a:ext>
-            </a:extLst>
-          </p:cNvPr>
-          <p:cNvSpPr/>
-          <p:nvPr/>
-        </p:nvSpPr>
-        <p:spPr>
-          <a:xfrm>
-            <a:off x="4282751" y="4137966"/>
-            <a:ext cx="5040000" cy="720000"/>
-          </a:xfrm>
-          <a:prstGeom prst="roundRect">
-            <a:avLst/>
-          </a:prstGeom>
-          <a:noFill/>
-          <a:ln w="38100">
-            <a:solidFill>
-              <a:srgbClr val="00B050"/>
-            </a:solidFill>
-            <a:prstDash val="dash"/>
-          </a:ln>
-        </p:spPr>
-        <p:style>
-          <a:lnRef idx="2">
-            <a:schemeClr val="accent1">
-              <a:shade val="15000"/>
-            </a:schemeClr>
-          </a:lnRef>
-          <a:fillRef idx="1">
-            <a:schemeClr val="accent1"/>
-          </a:fillRef>
-          <a:effectRef idx="0">
-            <a:schemeClr val="accent1"/>
-          </a:effectRef>
-          <a:fontRef idx="minor">
-            <a:schemeClr val="lt1"/>
-          </a:fontRef>
-        </p:style>
-        <p:txBody>
-          <a:bodyPr rtlCol="0" anchor="ctr"/>
-          <a:lstStyle/>
-          <a:p>
-            <a:pPr algn="ctr"/>
-            <a:r>
-              <a:rPr kumimoji="1" lang="ja-JP" altLang="en-US" b="1" dirty="0">
-                <a:solidFill>
-                  <a:srgbClr val="00B050"/>
-                </a:solidFill>
-              </a:rPr>
-              <a:t>ワーキングツリー</a:t>
-            </a:r>
-          </a:p>
-        </p:txBody>
-      </p:sp>
-      <p:cxnSp>
-        <p:nvCxnSpPr>
-          <p:cNvPr id="28" name="コネクタ: カギ線 27">
-            <a:extLst>
-              <a:ext uri="{FF2B5EF4-FFF2-40B4-BE49-F238E27FC236}">
-                <a16:creationId xmlns:a16="http://schemas.microsoft.com/office/drawing/2014/main" id="{462762B9-D477-C6B9-4D18-90FD420F4A1E}"/>
-              </a:ext>
-            </a:extLst>
-          </p:cNvPr>
-          <p:cNvCxnSpPr>
-            <a:cxnSpLocks/>
-          </p:cNvCxnSpPr>
-          <p:nvPr/>
-        </p:nvCxnSpPr>
-        <p:spPr>
-          <a:xfrm>
-            <a:off x="4414384" y="3197006"/>
-            <a:ext cx="1408521" cy="1296000"/>
-          </a:xfrm>
-          <a:prstGeom prst="bentConnector3">
-            <a:avLst>
-              <a:gd name="adj1" fmla="val -235"/>
-            </a:avLst>
-          </a:prstGeom>
-          <a:ln w="38100"/>
-        </p:spPr>
-        <p:style>
-          <a:lnRef idx="1">
-            <a:schemeClr val="dk1"/>
-          </a:lnRef>
-          <a:fillRef idx="0">
-            <a:schemeClr val="dk1"/>
-          </a:fillRef>
-          <a:effectRef idx="0">
-            <a:schemeClr val="dk1"/>
-          </a:effectRef>
-          <a:fontRef idx="minor">
-            <a:schemeClr val="tx1"/>
-          </a:fontRef>
-        </p:style>
-      </p:cxnSp>
-      <p:sp>
-        <p:nvSpPr>
-          <p:cNvPr id="33" name="テキスト ボックス 32">
-            <a:extLst>
-              <a:ext uri="{FF2B5EF4-FFF2-40B4-BE49-F238E27FC236}">
-                <a16:creationId xmlns:a16="http://schemas.microsoft.com/office/drawing/2014/main" id="{983EC35A-F761-0ADA-9BAD-49907A586DC4}"/>
-              </a:ext>
-            </a:extLst>
-          </p:cNvPr>
-          <p:cNvSpPr txBox="1"/>
-          <p:nvPr/>
-        </p:nvSpPr>
-        <p:spPr>
-          <a:xfrm>
-            <a:off x="6761672" y="3459726"/>
-            <a:ext cx="537327" cy="369332"/>
-          </a:xfrm>
-          <a:prstGeom prst="rect">
-            <a:avLst/>
-          </a:prstGeom>
-          <a:noFill/>
-        </p:spPr>
-        <p:txBody>
-          <a:bodyPr wrap="none" rtlCol="0">
-            <a:spAutoFit/>
-          </a:bodyPr>
-          <a:lstStyle/>
-          <a:p>
-            <a:r>
-              <a:rPr kumimoji="1" lang="en-US" altLang="ja-JP" b="1" dirty="0"/>
-              <a:t>.git</a:t>
-            </a:r>
-            <a:endParaRPr kumimoji="1" lang="ja-JP" altLang="en-US" b="1" dirty="0"/>
-          </a:p>
-        </p:txBody>
-      </p:sp>
-      <p:sp>
-        <p:nvSpPr>
-          <p:cNvPr id="35" name="四角形: 角を丸くする 34">
-            <a:extLst>
-              <a:ext uri="{FF2B5EF4-FFF2-40B4-BE49-F238E27FC236}">
-                <a16:creationId xmlns:a16="http://schemas.microsoft.com/office/drawing/2014/main" id="{261FD4CB-39F7-48F9-E343-66E06835D6D7}"/>
-              </a:ext>
-            </a:extLst>
-          </p:cNvPr>
-          <p:cNvSpPr/>
-          <p:nvPr/>
-        </p:nvSpPr>
-        <p:spPr>
-          <a:xfrm>
-            <a:off x="5833587" y="3310127"/>
-            <a:ext cx="6090935" cy="720000"/>
-          </a:xfrm>
-          <a:prstGeom prst="roundRect">
-            <a:avLst/>
-          </a:prstGeom>
-          <a:noFill/>
-          <a:ln w="38100">
-            <a:solidFill>
-              <a:srgbClr val="FFC000"/>
-            </a:solidFill>
-            <a:prstDash val="dash"/>
-          </a:ln>
-        </p:spPr>
-        <p:style>
-          <a:lnRef idx="2">
-            <a:schemeClr val="accent1">
-              <a:shade val="15000"/>
-            </a:schemeClr>
-          </a:lnRef>
-          <a:fillRef idx="1">
-            <a:schemeClr val="accent1"/>
-          </a:fillRef>
-          <a:effectRef idx="0">
-            <a:schemeClr val="accent1"/>
-          </a:effectRef>
-          <a:fontRef idx="minor">
-            <a:schemeClr val="lt1"/>
-          </a:fontRef>
-        </p:style>
-        <p:txBody>
-          <a:bodyPr rtlCol="0" anchor="ctr"/>
-          <a:lstStyle/>
-          <a:p>
-            <a:pPr lvl="3"/>
-            <a:r>
-              <a:rPr lang="ja-JP" altLang="en-US" b="1" dirty="0">
-                <a:solidFill>
-                  <a:srgbClr val="FFC000"/>
-                </a:solidFill>
-              </a:rPr>
-              <a:t>ブランチ情報など</a:t>
-            </a:r>
-          </a:p>
-        </p:txBody>
-      </p:sp>
-    </p:spTree>
-    <p:extLst>
-      <p:ext uri="{BB962C8B-B14F-4D97-AF65-F5344CB8AC3E}">
-        <p14:creationId xmlns:p14="http://schemas.microsoft.com/office/powerpoint/2010/main" val="1003559266"/>
-      </p:ext>
-    </p:extLst>
-  </p:cSld>
-  <p:clrMapOvr>
-    <a:masterClrMapping/>
-  </p:clrMapOvr>
-</p:sld>
-</file>
-
-<file path=ppt/slides/slide41.xml><?xml version="1.0" encoding="utf-8"?>
-<p:sld xmlns:a="http://schemas.openxmlformats.org/drawingml/2006/main" xmlns:r="http://schemas.openxmlformats.org/officeDocument/2006/relationships" xmlns:p="http://schemas.openxmlformats.org/presentationml/2006/main">
-  <p:cSld>
-    <p:spTree>
-      <p:nvGrpSpPr>
-        <p:cNvPr id="1" name="">
-          <a:extLst>
-            <a:ext uri="{FF2B5EF4-FFF2-40B4-BE49-F238E27FC236}">
               <a16:creationId xmlns:a16="http://schemas.microsoft.com/office/drawing/2014/main" id="{A0429E5F-B17D-1966-DF33-ECC586158E82}"/>
             </a:ext>
           </a:extLst>
@@ -31913,7 +31441,7 @@
 </p:sld>
 </file>
 
-<file path=ppt/slides/slide42.xml><?xml version="1.0" encoding="utf-8"?>
+<file path=ppt/slides/slide41.xml><?xml version="1.0" encoding="utf-8"?>
 <p:sld xmlns:a="http://schemas.openxmlformats.org/drawingml/2006/main" xmlns:r="http://schemas.openxmlformats.org/officeDocument/2006/relationships" xmlns:p="http://schemas.openxmlformats.org/presentationml/2006/main">
   <p:cSld>
     <p:spTree>
@@ -32434,7 +31962,7 @@
 </p:sld>
 </file>
 
-<file path=ppt/slides/slide43.xml><?xml version="1.0" encoding="utf-8"?>
+<file path=ppt/slides/slide42.xml><?xml version="1.0" encoding="utf-8"?>
 <p:sld xmlns:a="http://schemas.openxmlformats.org/drawingml/2006/main" xmlns:r="http://schemas.openxmlformats.org/officeDocument/2006/relationships" xmlns:p="http://schemas.openxmlformats.org/presentationml/2006/main">
   <p:cSld>
     <p:spTree>
@@ -33644,7 +33172,7 @@
 </p:sld>
 </file>
 
-<file path=ppt/slides/slide44.xml><?xml version="1.0" encoding="utf-8"?>
+<file path=ppt/slides/slide43.xml><?xml version="1.0" encoding="utf-8"?>
 <p:sld xmlns:a="http://schemas.openxmlformats.org/drawingml/2006/main" xmlns:r="http://schemas.openxmlformats.org/officeDocument/2006/relationships" xmlns:p="http://schemas.openxmlformats.org/presentationml/2006/main">
   <p:cSld>
     <p:spTree>
@@ -34980,7 +34508,7 @@
 </p:sld>
 </file>
 
-<file path=ppt/slides/slide45.xml><?xml version="1.0" encoding="utf-8"?>
+<file path=ppt/slides/slide44.xml><?xml version="1.0" encoding="utf-8"?>
 <p:sld xmlns:a="http://schemas.openxmlformats.org/drawingml/2006/main" xmlns:r="http://schemas.openxmlformats.org/officeDocument/2006/relationships" xmlns:p="http://schemas.openxmlformats.org/presentationml/2006/main">
   <p:cSld>
     <p:spTree>
@@ -35514,7 +35042,7 @@
 </p:sld>
 </file>
 
-<file path=ppt/slides/slide46.xml><?xml version="1.0" encoding="utf-8"?>
+<file path=ppt/slides/slide45.xml><?xml version="1.0" encoding="utf-8"?>
 <p:sld xmlns:a="http://schemas.openxmlformats.org/drawingml/2006/main" xmlns:r="http://schemas.openxmlformats.org/officeDocument/2006/relationships" xmlns:p="http://schemas.openxmlformats.org/presentationml/2006/main">
   <p:cSld>
     <p:spTree>
@@ -37179,7 +36707,7 @@
 </p:sld>
 </file>
 
-<file path=ppt/slides/slide47.xml><?xml version="1.0" encoding="utf-8"?>
+<file path=ppt/slides/slide46.xml><?xml version="1.0" encoding="utf-8"?>
 <p:sld xmlns:a="http://schemas.openxmlformats.org/drawingml/2006/main" xmlns:r="http://schemas.openxmlformats.org/officeDocument/2006/relationships" xmlns:p="http://schemas.openxmlformats.org/presentationml/2006/main">
   <p:cSld>
     <p:spTree>
@@ -38838,7 +38366,7 @@
 </p:sld>
 </file>
 
-<file path=ppt/slides/slide48.xml><?xml version="1.0" encoding="utf-8"?>
+<file path=ppt/slides/slide47.xml><?xml version="1.0" encoding="utf-8"?>
 <p:sld xmlns:a="http://schemas.openxmlformats.org/drawingml/2006/main" xmlns:r="http://schemas.openxmlformats.org/officeDocument/2006/relationships" xmlns:p="http://schemas.openxmlformats.org/presentationml/2006/main">
   <p:cSld>
     <p:spTree>
@@ -38874,7 +38402,7 @@
 </p:sld>
 </file>
 
-<file path=ppt/slides/slide49.xml><?xml version="1.0" encoding="utf-8"?>
+<file path=ppt/slides/slide48.xml><?xml version="1.0" encoding="utf-8"?>
 <p:sld xmlns:a="http://schemas.openxmlformats.org/drawingml/2006/main" xmlns:r="http://schemas.openxmlformats.org/officeDocument/2006/relationships" xmlns:p="http://schemas.openxmlformats.org/presentationml/2006/main">
   <p:cSld>
     <p:spTree>
@@ -38901,6 +38429,696 @@
     <p:extLst>
       <p:ext uri="{BB962C8B-B14F-4D97-AF65-F5344CB8AC3E}">
         <p14:creationId xmlns:p14="http://schemas.microsoft.com/office/powerpoint/2010/main" val="4047675846"/>
+      </p:ext>
+    </p:extLst>
+  </p:cSld>
+  <p:clrMapOvr>
+    <a:masterClrMapping/>
+  </p:clrMapOvr>
+</p:sld>
+</file>
+
+<file path=ppt/slides/slide49.xml><?xml version="1.0" encoding="utf-8"?>
+<p:sld xmlns:a="http://schemas.openxmlformats.org/drawingml/2006/main" xmlns:r="http://schemas.openxmlformats.org/officeDocument/2006/relationships" xmlns:p="http://schemas.openxmlformats.org/presentationml/2006/main">
+  <p:cSld>
+    <p:spTree>
+      <p:nvGrpSpPr>
+        <p:cNvPr id="1" name="">
+          <a:extLst>
+            <a:ext uri="{FF2B5EF4-FFF2-40B4-BE49-F238E27FC236}">
+              <a16:creationId xmlns:a16="http://schemas.microsoft.com/office/drawing/2014/main" id="{D3D296E8-EA97-7349-AE84-605B0AC723F5}"/>
+            </a:ext>
+          </a:extLst>
+        </p:cNvPr>
+        <p:cNvGrpSpPr/>
+        <p:nvPr/>
+      </p:nvGrpSpPr>
+      <p:grpSpPr>
+        <a:xfrm>
+          <a:off x="0" y="0"/>
+          <a:ext cx="0" cy="0"/>
+          <a:chOff x="0" y="0"/>
+          <a:chExt cx="0" cy="0"/>
+        </a:xfrm>
+      </p:grpSpPr>
+      <p:cxnSp>
+        <p:nvCxnSpPr>
+          <p:cNvPr id="41" name="直線コネクタ 40">
+            <a:extLst>
+              <a:ext uri="{FF2B5EF4-FFF2-40B4-BE49-F238E27FC236}">
+                <a16:creationId xmlns:a16="http://schemas.microsoft.com/office/drawing/2014/main" id="{6499AE2B-6DA7-F6F2-B41E-D1074AD609B0}"/>
+              </a:ext>
+            </a:extLst>
+          </p:cNvPr>
+          <p:cNvCxnSpPr>
+            <a:cxnSpLocks/>
+          </p:cNvCxnSpPr>
+          <p:nvPr/>
+        </p:nvCxnSpPr>
+        <p:spPr>
+          <a:xfrm>
+            <a:off x="1816100" y="2569018"/>
+            <a:ext cx="9000000" cy="0"/>
+          </a:xfrm>
+          <a:prstGeom prst="line">
+            <a:avLst/>
+          </a:prstGeom>
+          <a:ln>
+            <a:prstDash val="dash"/>
+          </a:ln>
+        </p:spPr>
+        <p:style>
+          <a:lnRef idx="1">
+            <a:schemeClr val="accent1"/>
+          </a:lnRef>
+          <a:fillRef idx="0">
+            <a:schemeClr val="accent1"/>
+          </a:fillRef>
+          <a:effectRef idx="0">
+            <a:schemeClr val="accent1"/>
+          </a:effectRef>
+          <a:fontRef idx="minor">
+            <a:schemeClr val="tx1"/>
+          </a:fontRef>
+        </p:style>
+      </p:cxnSp>
+      <p:cxnSp>
+        <p:nvCxnSpPr>
+          <p:cNvPr id="38" name="直線コネクタ 37">
+            <a:extLst>
+              <a:ext uri="{FF2B5EF4-FFF2-40B4-BE49-F238E27FC236}">
+                <a16:creationId xmlns:a16="http://schemas.microsoft.com/office/drawing/2014/main" id="{9558E5C8-5B1C-AE27-C2E4-D72E03976114}"/>
+              </a:ext>
+            </a:extLst>
+          </p:cNvPr>
+          <p:cNvCxnSpPr>
+            <a:cxnSpLocks/>
+          </p:cNvCxnSpPr>
+          <p:nvPr/>
+        </p:nvCxnSpPr>
+        <p:spPr>
+          <a:xfrm>
+            <a:off x="1816100" y="909468"/>
+            <a:ext cx="9000000" cy="0"/>
+          </a:xfrm>
+          <a:prstGeom prst="line">
+            <a:avLst/>
+          </a:prstGeom>
+          <a:ln>
+            <a:prstDash val="dash"/>
+          </a:ln>
+        </p:spPr>
+        <p:style>
+          <a:lnRef idx="1">
+            <a:schemeClr val="accent1"/>
+          </a:lnRef>
+          <a:fillRef idx="0">
+            <a:schemeClr val="accent1"/>
+          </a:fillRef>
+          <a:effectRef idx="0">
+            <a:schemeClr val="accent1"/>
+          </a:effectRef>
+          <a:fontRef idx="minor">
+            <a:schemeClr val="tx1"/>
+          </a:fontRef>
+        </p:style>
+      </p:cxnSp>
+      <p:sp>
+        <p:nvSpPr>
+          <p:cNvPr id="8" name="楕円 7">
+            <a:extLst>
+              <a:ext uri="{FF2B5EF4-FFF2-40B4-BE49-F238E27FC236}">
+                <a16:creationId xmlns:a16="http://schemas.microsoft.com/office/drawing/2014/main" id="{5A5F5CBA-F95F-512E-EF73-22030E192D9C}"/>
+              </a:ext>
+            </a:extLst>
+          </p:cNvPr>
+          <p:cNvSpPr/>
+          <p:nvPr/>
+        </p:nvSpPr>
+        <p:spPr>
+          <a:xfrm>
+            <a:off x="5461999" y="2217568"/>
+            <a:ext cx="720000" cy="720000"/>
+          </a:xfrm>
+          <a:prstGeom prst="ellipse">
+            <a:avLst/>
+          </a:prstGeom>
+          <a:solidFill>
+            <a:schemeClr val="bg1"/>
+          </a:solidFill>
+          <a:ln w="38100"/>
+        </p:spPr>
+        <p:style>
+          <a:lnRef idx="2">
+            <a:schemeClr val="dk1">
+              <a:shade val="15000"/>
+            </a:schemeClr>
+          </a:lnRef>
+          <a:fillRef idx="1">
+            <a:schemeClr val="dk1"/>
+          </a:fillRef>
+          <a:effectRef idx="0">
+            <a:schemeClr val="dk1"/>
+          </a:effectRef>
+          <a:fontRef idx="minor">
+            <a:schemeClr val="lt1"/>
+          </a:fontRef>
+        </p:style>
+        <p:txBody>
+          <a:bodyPr rtlCol="0" anchor="ctr"/>
+          <a:lstStyle/>
+          <a:p>
+            <a:pPr algn="ctr"/>
+            <a:r>
+              <a:rPr lang="en-US" altLang="ja-JP" b="1" dirty="0">
+                <a:ln w="0"/>
+                <a:solidFill>
+                  <a:schemeClr val="tx1"/>
+                </a:solidFill>
+                <a:effectLst>
+                  <a:outerShdw blurRad="38100" dist="19050" dir="2700000" algn="tl" rotWithShape="0">
+                    <a:schemeClr val="dk1">
+                      <a:alpha val="40000"/>
+                    </a:schemeClr>
+                  </a:outerShdw>
+                </a:effectLst>
+              </a:rPr>
+              <a:t>A</a:t>
+            </a:r>
+          </a:p>
+        </p:txBody>
+      </p:sp>
+      <p:sp>
+        <p:nvSpPr>
+          <p:cNvPr id="9" name="楕円 8">
+            <a:extLst>
+              <a:ext uri="{FF2B5EF4-FFF2-40B4-BE49-F238E27FC236}">
+                <a16:creationId xmlns:a16="http://schemas.microsoft.com/office/drawing/2014/main" id="{F92A035C-C8E4-D883-D4DD-DB64157496E5}"/>
+              </a:ext>
+            </a:extLst>
+          </p:cNvPr>
+          <p:cNvSpPr/>
+          <p:nvPr/>
+        </p:nvSpPr>
+        <p:spPr>
+          <a:xfrm>
+            <a:off x="3332358" y="549468"/>
+            <a:ext cx="720000" cy="720000"/>
+          </a:xfrm>
+          <a:prstGeom prst="ellipse">
+            <a:avLst/>
+          </a:prstGeom>
+          <a:solidFill>
+            <a:schemeClr val="bg1"/>
+          </a:solidFill>
+          <a:ln w="38100"/>
+        </p:spPr>
+        <p:style>
+          <a:lnRef idx="2">
+            <a:schemeClr val="dk1">
+              <a:shade val="15000"/>
+            </a:schemeClr>
+          </a:lnRef>
+          <a:fillRef idx="1">
+            <a:schemeClr val="dk1"/>
+          </a:fillRef>
+          <a:effectRef idx="0">
+            <a:schemeClr val="dk1"/>
+          </a:effectRef>
+          <a:fontRef idx="minor">
+            <a:schemeClr val="lt1"/>
+          </a:fontRef>
+        </p:style>
+        <p:txBody>
+          <a:bodyPr rtlCol="0" anchor="ctr"/>
+          <a:lstStyle/>
+          <a:p>
+            <a:pPr algn="ctr"/>
+            <a:r>
+              <a:rPr lang="en-US" altLang="ja-JP" b="1" dirty="0">
+                <a:solidFill>
+                  <a:schemeClr val="tx1"/>
+                </a:solidFill>
+              </a:rPr>
+              <a:t>A</a:t>
+            </a:r>
+            <a:endParaRPr lang="ja-JP" altLang="en-US" b="1" dirty="0">
+              <a:solidFill>
+                <a:schemeClr val="tx1"/>
+              </a:solidFill>
+            </a:endParaRPr>
+          </a:p>
+        </p:txBody>
+      </p:sp>
+      <p:sp>
+        <p:nvSpPr>
+          <p:cNvPr id="16" name="テキスト ボックス 15">
+            <a:extLst>
+              <a:ext uri="{FF2B5EF4-FFF2-40B4-BE49-F238E27FC236}">
+                <a16:creationId xmlns:a16="http://schemas.microsoft.com/office/drawing/2014/main" id="{A49CDB26-2107-0496-702D-5D677295D2F1}"/>
+              </a:ext>
+            </a:extLst>
+          </p:cNvPr>
+          <p:cNvSpPr txBox="1"/>
+          <p:nvPr/>
+        </p:nvSpPr>
+        <p:spPr>
+          <a:xfrm>
+            <a:off x="945493" y="724802"/>
+            <a:ext cx="737702" cy="369332"/>
+          </a:xfrm>
+          <a:prstGeom prst="rect">
+            <a:avLst/>
+          </a:prstGeom>
+          <a:noFill/>
+        </p:spPr>
+        <p:txBody>
+          <a:bodyPr wrap="none" rtlCol="0">
+            <a:spAutoFit/>
+          </a:bodyPr>
+          <a:lstStyle/>
+          <a:p>
+            <a:r>
+              <a:rPr lang="en-US" altLang="ja-JP" b="1" dirty="0"/>
+              <a:t>main</a:t>
+            </a:r>
+            <a:endParaRPr kumimoji="1" lang="ja-JP" altLang="en-US" b="1" dirty="0"/>
+          </a:p>
+        </p:txBody>
+      </p:sp>
+      <p:cxnSp>
+        <p:nvCxnSpPr>
+          <p:cNvPr id="18" name="直線矢印コネクタ 17">
+            <a:extLst>
+              <a:ext uri="{FF2B5EF4-FFF2-40B4-BE49-F238E27FC236}">
+                <a16:creationId xmlns:a16="http://schemas.microsoft.com/office/drawing/2014/main" id="{78A9850C-50B0-6C69-A636-7D822AA2BBA0}"/>
+              </a:ext>
+            </a:extLst>
+          </p:cNvPr>
+          <p:cNvCxnSpPr>
+            <a:cxnSpLocks/>
+            <a:stCxn id="9" idx="4"/>
+            <a:endCxn id="8" idx="2"/>
+          </p:cNvCxnSpPr>
+          <p:nvPr/>
+        </p:nvCxnSpPr>
+        <p:spPr>
+          <a:xfrm>
+            <a:off x="3692358" y="1269468"/>
+            <a:ext cx="1769641" cy="1308100"/>
+          </a:xfrm>
+          <a:prstGeom prst="straightConnector1">
+            <a:avLst/>
+          </a:prstGeom>
+          <a:ln w="38100">
+            <a:tailEnd type="triangle"/>
+          </a:ln>
+        </p:spPr>
+        <p:style>
+          <a:lnRef idx="1">
+            <a:schemeClr val="dk1"/>
+          </a:lnRef>
+          <a:fillRef idx="0">
+            <a:schemeClr val="dk1"/>
+          </a:fillRef>
+          <a:effectRef idx="0">
+            <a:schemeClr val="dk1"/>
+          </a:effectRef>
+          <a:fontRef idx="minor">
+            <a:schemeClr val="tx1"/>
+          </a:fontRef>
+        </p:style>
+      </p:cxnSp>
+      <p:cxnSp>
+        <p:nvCxnSpPr>
+          <p:cNvPr id="19" name="直線矢印コネクタ 18">
+            <a:extLst>
+              <a:ext uri="{FF2B5EF4-FFF2-40B4-BE49-F238E27FC236}">
+                <a16:creationId xmlns:a16="http://schemas.microsoft.com/office/drawing/2014/main" id="{C465DCE8-33B4-801B-D5FD-87F1E284906B}"/>
+              </a:ext>
+            </a:extLst>
+          </p:cNvPr>
+          <p:cNvCxnSpPr>
+            <a:cxnSpLocks/>
+            <a:endCxn id="9" idx="2"/>
+          </p:cNvCxnSpPr>
+          <p:nvPr/>
+        </p:nvCxnSpPr>
+        <p:spPr>
+          <a:xfrm>
+            <a:off x="2202058" y="900136"/>
+            <a:ext cx="1130300" cy="9332"/>
+          </a:xfrm>
+          <a:prstGeom prst="straightConnector1">
+            <a:avLst/>
+          </a:prstGeom>
+          <a:ln w="38100">
+            <a:tailEnd type="triangle"/>
+          </a:ln>
+        </p:spPr>
+        <p:style>
+          <a:lnRef idx="1">
+            <a:schemeClr val="dk1"/>
+          </a:lnRef>
+          <a:fillRef idx="0">
+            <a:schemeClr val="dk1"/>
+          </a:fillRef>
+          <a:effectRef idx="0">
+            <a:schemeClr val="dk1"/>
+          </a:effectRef>
+          <a:fontRef idx="minor">
+            <a:schemeClr val="tx1"/>
+          </a:fontRef>
+        </p:style>
+      </p:cxnSp>
+      <p:sp>
+        <p:nvSpPr>
+          <p:cNvPr id="26" name="楕円 25">
+            <a:extLst>
+              <a:ext uri="{FF2B5EF4-FFF2-40B4-BE49-F238E27FC236}">
+                <a16:creationId xmlns:a16="http://schemas.microsoft.com/office/drawing/2014/main" id="{22B256F5-3EDA-18F7-75F4-39B6964A064A}"/>
+              </a:ext>
+            </a:extLst>
+          </p:cNvPr>
+          <p:cNvSpPr/>
+          <p:nvPr/>
+        </p:nvSpPr>
+        <p:spPr>
+          <a:xfrm>
+            <a:off x="7621999" y="2217568"/>
+            <a:ext cx="720000" cy="720000"/>
+          </a:xfrm>
+          <a:prstGeom prst="ellipse">
+            <a:avLst/>
+          </a:prstGeom>
+          <a:solidFill>
+            <a:schemeClr val="bg1"/>
+          </a:solidFill>
+          <a:ln w="38100"/>
+        </p:spPr>
+        <p:style>
+          <a:lnRef idx="2">
+            <a:schemeClr val="dk1">
+              <a:shade val="15000"/>
+            </a:schemeClr>
+          </a:lnRef>
+          <a:fillRef idx="1">
+            <a:schemeClr val="dk1"/>
+          </a:fillRef>
+          <a:effectRef idx="0">
+            <a:schemeClr val="dk1"/>
+          </a:effectRef>
+          <a:fontRef idx="minor">
+            <a:schemeClr val="lt1"/>
+          </a:fontRef>
+        </p:style>
+        <p:txBody>
+          <a:bodyPr rtlCol="0" anchor="ctr"/>
+          <a:lstStyle/>
+          <a:p>
+            <a:pPr algn="ctr"/>
+            <a:r>
+              <a:rPr lang="en-US" altLang="ja-JP" b="1" dirty="0">
+                <a:solidFill>
+                  <a:schemeClr val="tx1"/>
+                </a:solidFill>
+              </a:rPr>
+              <a:t>B</a:t>
+            </a:r>
+            <a:endParaRPr lang="ja-JP" altLang="en-US" b="1" dirty="0">
+              <a:solidFill>
+                <a:schemeClr val="tx1"/>
+              </a:solidFill>
+            </a:endParaRPr>
+          </a:p>
+        </p:txBody>
+      </p:sp>
+      <p:cxnSp>
+        <p:nvCxnSpPr>
+          <p:cNvPr id="27" name="直線矢印コネクタ 26">
+            <a:extLst>
+              <a:ext uri="{FF2B5EF4-FFF2-40B4-BE49-F238E27FC236}">
+                <a16:creationId xmlns:a16="http://schemas.microsoft.com/office/drawing/2014/main" id="{779BCEC9-AB36-2533-5ED2-E5475B8CE9FD}"/>
+              </a:ext>
+            </a:extLst>
+          </p:cNvPr>
+          <p:cNvCxnSpPr>
+            <a:cxnSpLocks/>
+          </p:cNvCxnSpPr>
+          <p:nvPr/>
+        </p:nvCxnSpPr>
+        <p:spPr>
+          <a:xfrm flipV="1">
+            <a:off x="6181999" y="2577568"/>
+            <a:ext cx="1440000" cy="0"/>
+          </a:xfrm>
+          <a:prstGeom prst="straightConnector1">
+            <a:avLst/>
+          </a:prstGeom>
+          <a:ln w="38100">
+            <a:tailEnd type="triangle"/>
+          </a:ln>
+        </p:spPr>
+        <p:style>
+          <a:lnRef idx="1">
+            <a:schemeClr val="dk1"/>
+          </a:lnRef>
+          <a:fillRef idx="0">
+            <a:schemeClr val="dk1"/>
+          </a:fillRef>
+          <a:effectRef idx="0">
+            <a:schemeClr val="dk1"/>
+          </a:effectRef>
+          <a:fontRef idx="minor">
+            <a:schemeClr val="tx1"/>
+          </a:fontRef>
+        </p:style>
+      </p:cxnSp>
+      <p:sp>
+        <p:nvSpPr>
+          <p:cNvPr id="39" name="テキスト ボックス 38">
+            <a:extLst>
+              <a:ext uri="{FF2B5EF4-FFF2-40B4-BE49-F238E27FC236}">
+                <a16:creationId xmlns:a16="http://schemas.microsoft.com/office/drawing/2014/main" id="{AA70A16A-B7C2-37A9-EB5C-5F1B9B409BBF}"/>
+              </a:ext>
+            </a:extLst>
+          </p:cNvPr>
+          <p:cNvSpPr txBox="1"/>
+          <p:nvPr/>
+        </p:nvSpPr>
+        <p:spPr>
+          <a:xfrm>
+            <a:off x="774773" y="2392902"/>
+            <a:ext cx="1160895" cy="369332"/>
+          </a:xfrm>
+          <a:prstGeom prst="rect">
+            <a:avLst/>
+          </a:prstGeom>
+          <a:noFill/>
+        </p:spPr>
+        <p:txBody>
+          <a:bodyPr wrap="none" rtlCol="0">
+            <a:spAutoFit/>
+          </a:bodyPr>
+          <a:lstStyle/>
+          <a:p>
+            <a:r>
+              <a:rPr lang="en-US" altLang="ja-JP" b="1" dirty="0"/>
+              <a:t>branch1 </a:t>
+            </a:r>
+            <a:endParaRPr kumimoji="1" lang="ja-JP" altLang="en-US" b="1" dirty="0"/>
+          </a:p>
+        </p:txBody>
+      </p:sp>
+      <p:cxnSp>
+        <p:nvCxnSpPr>
+          <p:cNvPr id="44" name="直線コネクタ 43">
+            <a:extLst>
+              <a:ext uri="{FF2B5EF4-FFF2-40B4-BE49-F238E27FC236}">
+                <a16:creationId xmlns:a16="http://schemas.microsoft.com/office/drawing/2014/main" id="{A46D8CDB-03F4-C0BF-5090-F243C9C37728}"/>
+              </a:ext>
+            </a:extLst>
+          </p:cNvPr>
+          <p:cNvCxnSpPr>
+            <a:cxnSpLocks/>
+          </p:cNvCxnSpPr>
+          <p:nvPr/>
+        </p:nvCxnSpPr>
+        <p:spPr>
+          <a:xfrm>
+            <a:off x="1816100" y="4228568"/>
+            <a:ext cx="9000000" cy="0"/>
+          </a:xfrm>
+          <a:prstGeom prst="line">
+            <a:avLst/>
+          </a:prstGeom>
+          <a:ln>
+            <a:prstDash val="dash"/>
+          </a:ln>
+        </p:spPr>
+        <p:style>
+          <a:lnRef idx="1">
+            <a:schemeClr val="accent1"/>
+          </a:lnRef>
+          <a:fillRef idx="0">
+            <a:schemeClr val="accent1"/>
+          </a:fillRef>
+          <a:effectRef idx="0">
+            <a:schemeClr val="accent1"/>
+          </a:effectRef>
+          <a:fontRef idx="minor">
+            <a:schemeClr val="tx1"/>
+          </a:fontRef>
+        </p:style>
+      </p:cxnSp>
+      <p:sp>
+        <p:nvSpPr>
+          <p:cNvPr id="45" name="楕円 44">
+            <a:extLst>
+              <a:ext uri="{FF2B5EF4-FFF2-40B4-BE49-F238E27FC236}">
+                <a16:creationId xmlns:a16="http://schemas.microsoft.com/office/drawing/2014/main" id="{1B50FDEA-C177-5A6F-7D83-6C0E3D99D1CD}"/>
+              </a:ext>
+            </a:extLst>
+          </p:cNvPr>
+          <p:cNvSpPr/>
+          <p:nvPr/>
+        </p:nvSpPr>
+        <p:spPr>
+          <a:xfrm>
+            <a:off x="5411199" y="3868568"/>
+            <a:ext cx="720000" cy="720000"/>
+          </a:xfrm>
+          <a:prstGeom prst="ellipse">
+            <a:avLst/>
+          </a:prstGeom>
+          <a:solidFill>
+            <a:schemeClr val="bg1"/>
+          </a:solidFill>
+          <a:ln w="38100"/>
+        </p:spPr>
+        <p:style>
+          <a:lnRef idx="2">
+            <a:schemeClr val="dk1">
+              <a:shade val="15000"/>
+            </a:schemeClr>
+          </a:lnRef>
+          <a:fillRef idx="1">
+            <a:schemeClr val="dk1"/>
+          </a:fillRef>
+          <a:effectRef idx="0">
+            <a:schemeClr val="dk1"/>
+          </a:effectRef>
+          <a:fontRef idx="minor">
+            <a:schemeClr val="lt1"/>
+          </a:fontRef>
+        </p:style>
+        <p:txBody>
+          <a:bodyPr rtlCol="0" anchor="ctr"/>
+          <a:lstStyle/>
+          <a:p>
+            <a:pPr algn="ctr"/>
+            <a:r>
+              <a:rPr lang="en-US" altLang="ja-JP" b="1" dirty="0">
+                <a:ln w="0"/>
+                <a:solidFill>
+                  <a:schemeClr val="tx1"/>
+                </a:solidFill>
+                <a:effectLst>
+                  <a:outerShdw blurRad="38100" dist="19050" dir="2700000" algn="tl" rotWithShape="0">
+                    <a:schemeClr val="dk1">
+                      <a:alpha val="40000"/>
+                    </a:schemeClr>
+                  </a:outerShdw>
+                </a:effectLst>
+              </a:rPr>
+              <a:t>A</a:t>
+            </a:r>
+          </a:p>
+        </p:txBody>
+      </p:sp>
+      <p:sp>
+        <p:nvSpPr>
+          <p:cNvPr id="48" name="テキスト ボックス 47">
+            <a:extLst>
+              <a:ext uri="{FF2B5EF4-FFF2-40B4-BE49-F238E27FC236}">
+                <a16:creationId xmlns:a16="http://schemas.microsoft.com/office/drawing/2014/main" id="{FFAFBDCD-340A-A1B8-A5DF-E62B0D794F9B}"/>
+              </a:ext>
+            </a:extLst>
+          </p:cNvPr>
+          <p:cNvSpPr txBox="1"/>
+          <p:nvPr/>
+        </p:nvSpPr>
+        <p:spPr>
+          <a:xfrm>
+            <a:off x="774773" y="4043902"/>
+            <a:ext cx="1120820" cy="369332"/>
+          </a:xfrm>
+          <a:prstGeom prst="rect">
+            <a:avLst/>
+          </a:prstGeom>
+          <a:noFill/>
+        </p:spPr>
+        <p:txBody>
+          <a:bodyPr wrap="none" rtlCol="0">
+            <a:spAutoFit/>
+          </a:bodyPr>
+          <a:lstStyle/>
+          <a:p>
+            <a:r>
+              <a:rPr lang="en-US" altLang="ja-JP" b="1" dirty="0" err="1"/>
+              <a:t>branchX</a:t>
+            </a:r>
+            <a:endParaRPr lang="ja-JP" altLang="en-US" b="1" dirty="0"/>
+          </a:p>
+        </p:txBody>
+      </p:sp>
+      <p:cxnSp>
+        <p:nvCxnSpPr>
+          <p:cNvPr id="49" name="直線矢印コネクタ 48">
+            <a:extLst>
+              <a:ext uri="{FF2B5EF4-FFF2-40B4-BE49-F238E27FC236}">
+                <a16:creationId xmlns:a16="http://schemas.microsoft.com/office/drawing/2014/main" id="{B94C4627-E923-B051-DD99-6A31F8097971}"/>
+              </a:ext>
+            </a:extLst>
+          </p:cNvPr>
+          <p:cNvCxnSpPr>
+            <a:cxnSpLocks/>
+            <a:stCxn id="9" idx="4"/>
+            <a:endCxn id="45" idx="2"/>
+          </p:cNvCxnSpPr>
+          <p:nvPr/>
+        </p:nvCxnSpPr>
+        <p:spPr>
+          <a:xfrm>
+            <a:off x="3692358" y="1269468"/>
+            <a:ext cx="1718841" cy="2959100"/>
+          </a:xfrm>
+          <a:prstGeom prst="straightConnector1">
+            <a:avLst/>
+          </a:prstGeom>
+          <a:ln w="38100">
+            <a:tailEnd type="triangle"/>
+          </a:ln>
+        </p:spPr>
+        <p:style>
+          <a:lnRef idx="1">
+            <a:schemeClr val="dk1"/>
+          </a:lnRef>
+          <a:fillRef idx="0">
+            <a:schemeClr val="dk1"/>
+          </a:fillRef>
+          <a:effectRef idx="0">
+            <a:schemeClr val="dk1"/>
+          </a:effectRef>
+          <a:fontRef idx="minor">
+            <a:schemeClr val="tx1"/>
+          </a:fontRef>
+        </p:style>
+      </p:cxnSp>
+    </p:spTree>
+    <p:extLst>
+      <p:ext uri="{BB962C8B-B14F-4D97-AF65-F5344CB8AC3E}">
+        <p14:creationId xmlns:p14="http://schemas.microsoft.com/office/powerpoint/2010/main" val="3142681971"/>
       </p:ext>
     </p:extLst>
   </p:cSld>
@@ -38954,696 +39172,6 @@
         <p:cNvPr id="1" name="">
           <a:extLst>
             <a:ext uri="{FF2B5EF4-FFF2-40B4-BE49-F238E27FC236}">
-              <a16:creationId xmlns:a16="http://schemas.microsoft.com/office/drawing/2014/main" id="{D3D296E8-EA97-7349-AE84-605B0AC723F5}"/>
-            </a:ext>
-          </a:extLst>
-        </p:cNvPr>
-        <p:cNvGrpSpPr/>
-        <p:nvPr/>
-      </p:nvGrpSpPr>
-      <p:grpSpPr>
-        <a:xfrm>
-          <a:off x="0" y="0"/>
-          <a:ext cx="0" cy="0"/>
-          <a:chOff x="0" y="0"/>
-          <a:chExt cx="0" cy="0"/>
-        </a:xfrm>
-      </p:grpSpPr>
-      <p:cxnSp>
-        <p:nvCxnSpPr>
-          <p:cNvPr id="41" name="直線コネクタ 40">
-            <a:extLst>
-              <a:ext uri="{FF2B5EF4-FFF2-40B4-BE49-F238E27FC236}">
-                <a16:creationId xmlns:a16="http://schemas.microsoft.com/office/drawing/2014/main" id="{6499AE2B-6DA7-F6F2-B41E-D1074AD609B0}"/>
-              </a:ext>
-            </a:extLst>
-          </p:cNvPr>
-          <p:cNvCxnSpPr>
-            <a:cxnSpLocks/>
-          </p:cNvCxnSpPr>
-          <p:nvPr/>
-        </p:nvCxnSpPr>
-        <p:spPr>
-          <a:xfrm>
-            <a:off x="1816100" y="2569018"/>
-            <a:ext cx="9000000" cy="0"/>
-          </a:xfrm>
-          <a:prstGeom prst="line">
-            <a:avLst/>
-          </a:prstGeom>
-          <a:ln>
-            <a:prstDash val="dash"/>
-          </a:ln>
-        </p:spPr>
-        <p:style>
-          <a:lnRef idx="1">
-            <a:schemeClr val="accent1"/>
-          </a:lnRef>
-          <a:fillRef idx="0">
-            <a:schemeClr val="accent1"/>
-          </a:fillRef>
-          <a:effectRef idx="0">
-            <a:schemeClr val="accent1"/>
-          </a:effectRef>
-          <a:fontRef idx="minor">
-            <a:schemeClr val="tx1"/>
-          </a:fontRef>
-        </p:style>
-      </p:cxnSp>
-      <p:cxnSp>
-        <p:nvCxnSpPr>
-          <p:cNvPr id="38" name="直線コネクタ 37">
-            <a:extLst>
-              <a:ext uri="{FF2B5EF4-FFF2-40B4-BE49-F238E27FC236}">
-                <a16:creationId xmlns:a16="http://schemas.microsoft.com/office/drawing/2014/main" id="{9558E5C8-5B1C-AE27-C2E4-D72E03976114}"/>
-              </a:ext>
-            </a:extLst>
-          </p:cNvPr>
-          <p:cNvCxnSpPr>
-            <a:cxnSpLocks/>
-          </p:cNvCxnSpPr>
-          <p:nvPr/>
-        </p:nvCxnSpPr>
-        <p:spPr>
-          <a:xfrm>
-            <a:off x="1816100" y="909468"/>
-            <a:ext cx="9000000" cy="0"/>
-          </a:xfrm>
-          <a:prstGeom prst="line">
-            <a:avLst/>
-          </a:prstGeom>
-          <a:ln>
-            <a:prstDash val="dash"/>
-          </a:ln>
-        </p:spPr>
-        <p:style>
-          <a:lnRef idx="1">
-            <a:schemeClr val="accent1"/>
-          </a:lnRef>
-          <a:fillRef idx="0">
-            <a:schemeClr val="accent1"/>
-          </a:fillRef>
-          <a:effectRef idx="0">
-            <a:schemeClr val="accent1"/>
-          </a:effectRef>
-          <a:fontRef idx="minor">
-            <a:schemeClr val="tx1"/>
-          </a:fontRef>
-        </p:style>
-      </p:cxnSp>
-      <p:sp>
-        <p:nvSpPr>
-          <p:cNvPr id="8" name="楕円 7">
-            <a:extLst>
-              <a:ext uri="{FF2B5EF4-FFF2-40B4-BE49-F238E27FC236}">
-                <a16:creationId xmlns:a16="http://schemas.microsoft.com/office/drawing/2014/main" id="{5A5F5CBA-F95F-512E-EF73-22030E192D9C}"/>
-              </a:ext>
-            </a:extLst>
-          </p:cNvPr>
-          <p:cNvSpPr/>
-          <p:nvPr/>
-        </p:nvSpPr>
-        <p:spPr>
-          <a:xfrm>
-            <a:off x="5461999" y="2217568"/>
-            <a:ext cx="720000" cy="720000"/>
-          </a:xfrm>
-          <a:prstGeom prst="ellipse">
-            <a:avLst/>
-          </a:prstGeom>
-          <a:solidFill>
-            <a:schemeClr val="bg1"/>
-          </a:solidFill>
-          <a:ln w="38100"/>
-        </p:spPr>
-        <p:style>
-          <a:lnRef idx="2">
-            <a:schemeClr val="dk1">
-              <a:shade val="15000"/>
-            </a:schemeClr>
-          </a:lnRef>
-          <a:fillRef idx="1">
-            <a:schemeClr val="dk1"/>
-          </a:fillRef>
-          <a:effectRef idx="0">
-            <a:schemeClr val="dk1"/>
-          </a:effectRef>
-          <a:fontRef idx="minor">
-            <a:schemeClr val="lt1"/>
-          </a:fontRef>
-        </p:style>
-        <p:txBody>
-          <a:bodyPr rtlCol="0" anchor="ctr"/>
-          <a:lstStyle/>
-          <a:p>
-            <a:pPr algn="ctr"/>
-            <a:r>
-              <a:rPr lang="en-US" altLang="ja-JP" b="1" dirty="0">
-                <a:ln w="0"/>
-                <a:solidFill>
-                  <a:schemeClr val="tx1"/>
-                </a:solidFill>
-                <a:effectLst>
-                  <a:outerShdw blurRad="38100" dist="19050" dir="2700000" algn="tl" rotWithShape="0">
-                    <a:schemeClr val="dk1">
-                      <a:alpha val="40000"/>
-                    </a:schemeClr>
-                  </a:outerShdw>
-                </a:effectLst>
-              </a:rPr>
-              <a:t>A</a:t>
-            </a:r>
-          </a:p>
-        </p:txBody>
-      </p:sp>
-      <p:sp>
-        <p:nvSpPr>
-          <p:cNvPr id="9" name="楕円 8">
-            <a:extLst>
-              <a:ext uri="{FF2B5EF4-FFF2-40B4-BE49-F238E27FC236}">
-                <a16:creationId xmlns:a16="http://schemas.microsoft.com/office/drawing/2014/main" id="{F92A035C-C8E4-D883-D4DD-DB64157496E5}"/>
-              </a:ext>
-            </a:extLst>
-          </p:cNvPr>
-          <p:cNvSpPr/>
-          <p:nvPr/>
-        </p:nvSpPr>
-        <p:spPr>
-          <a:xfrm>
-            <a:off x="3332358" y="549468"/>
-            <a:ext cx="720000" cy="720000"/>
-          </a:xfrm>
-          <a:prstGeom prst="ellipse">
-            <a:avLst/>
-          </a:prstGeom>
-          <a:solidFill>
-            <a:schemeClr val="bg1"/>
-          </a:solidFill>
-          <a:ln w="38100"/>
-        </p:spPr>
-        <p:style>
-          <a:lnRef idx="2">
-            <a:schemeClr val="dk1">
-              <a:shade val="15000"/>
-            </a:schemeClr>
-          </a:lnRef>
-          <a:fillRef idx="1">
-            <a:schemeClr val="dk1"/>
-          </a:fillRef>
-          <a:effectRef idx="0">
-            <a:schemeClr val="dk1"/>
-          </a:effectRef>
-          <a:fontRef idx="minor">
-            <a:schemeClr val="lt1"/>
-          </a:fontRef>
-        </p:style>
-        <p:txBody>
-          <a:bodyPr rtlCol="0" anchor="ctr"/>
-          <a:lstStyle/>
-          <a:p>
-            <a:pPr algn="ctr"/>
-            <a:r>
-              <a:rPr lang="en-US" altLang="ja-JP" b="1" dirty="0">
-                <a:solidFill>
-                  <a:schemeClr val="tx1"/>
-                </a:solidFill>
-              </a:rPr>
-              <a:t>A</a:t>
-            </a:r>
-            <a:endParaRPr lang="ja-JP" altLang="en-US" b="1" dirty="0">
-              <a:solidFill>
-                <a:schemeClr val="tx1"/>
-              </a:solidFill>
-            </a:endParaRPr>
-          </a:p>
-        </p:txBody>
-      </p:sp>
-      <p:sp>
-        <p:nvSpPr>
-          <p:cNvPr id="16" name="テキスト ボックス 15">
-            <a:extLst>
-              <a:ext uri="{FF2B5EF4-FFF2-40B4-BE49-F238E27FC236}">
-                <a16:creationId xmlns:a16="http://schemas.microsoft.com/office/drawing/2014/main" id="{A49CDB26-2107-0496-702D-5D677295D2F1}"/>
-              </a:ext>
-            </a:extLst>
-          </p:cNvPr>
-          <p:cNvSpPr txBox="1"/>
-          <p:nvPr/>
-        </p:nvSpPr>
-        <p:spPr>
-          <a:xfrm>
-            <a:off x="945493" y="724802"/>
-            <a:ext cx="737702" cy="369332"/>
-          </a:xfrm>
-          <a:prstGeom prst="rect">
-            <a:avLst/>
-          </a:prstGeom>
-          <a:noFill/>
-        </p:spPr>
-        <p:txBody>
-          <a:bodyPr wrap="none" rtlCol="0">
-            <a:spAutoFit/>
-          </a:bodyPr>
-          <a:lstStyle/>
-          <a:p>
-            <a:r>
-              <a:rPr lang="en-US" altLang="ja-JP" b="1" dirty="0"/>
-              <a:t>main</a:t>
-            </a:r>
-            <a:endParaRPr kumimoji="1" lang="ja-JP" altLang="en-US" b="1" dirty="0"/>
-          </a:p>
-        </p:txBody>
-      </p:sp>
-      <p:cxnSp>
-        <p:nvCxnSpPr>
-          <p:cNvPr id="18" name="直線矢印コネクタ 17">
-            <a:extLst>
-              <a:ext uri="{FF2B5EF4-FFF2-40B4-BE49-F238E27FC236}">
-                <a16:creationId xmlns:a16="http://schemas.microsoft.com/office/drawing/2014/main" id="{78A9850C-50B0-6C69-A636-7D822AA2BBA0}"/>
-              </a:ext>
-            </a:extLst>
-          </p:cNvPr>
-          <p:cNvCxnSpPr>
-            <a:cxnSpLocks/>
-            <a:stCxn id="9" idx="4"/>
-            <a:endCxn id="8" idx="2"/>
-          </p:cNvCxnSpPr>
-          <p:nvPr/>
-        </p:nvCxnSpPr>
-        <p:spPr>
-          <a:xfrm>
-            <a:off x="3692358" y="1269468"/>
-            <a:ext cx="1769641" cy="1308100"/>
-          </a:xfrm>
-          <a:prstGeom prst="straightConnector1">
-            <a:avLst/>
-          </a:prstGeom>
-          <a:ln w="38100">
-            <a:tailEnd type="triangle"/>
-          </a:ln>
-        </p:spPr>
-        <p:style>
-          <a:lnRef idx="1">
-            <a:schemeClr val="dk1"/>
-          </a:lnRef>
-          <a:fillRef idx="0">
-            <a:schemeClr val="dk1"/>
-          </a:fillRef>
-          <a:effectRef idx="0">
-            <a:schemeClr val="dk1"/>
-          </a:effectRef>
-          <a:fontRef idx="minor">
-            <a:schemeClr val="tx1"/>
-          </a:fontRef>
-        </p:style>
-      </p:cxnSp>
-      <p:cxnSp>
-        <p:nvCxnSpPr>
-          <p:cNvPr id="19" name="直線矢印コネクタ 18">
-            <a:extLst>
-              <a:ext uri="{FF2B5EF4-FFF2-40B4-BE49-F238E27FC236}">
-                <a16:creationId xmlns:a16="http://schemas.microsoft.com/office/drawing/2014/main" id="{C465DCE8-33B4-801B-D5FD-87F1E284906B}"/>
-              </a:ext>
-            </a:extLst>
-          </p:cNvPr>
-          <p:cNvCxnSpPr>
-            <a:cxnSpLocks/>
-            <a:endCxn id="9" idx="2"/>
-          </p:cNvCxnSpPr>
-          <p:nvPr/>
-        </p:nvCxnSpPr>
-        <p:spPr>
-          <a:xfrm>
-            <a:off x="2202058" y="900136"/>
-            <a:ext cx="1130300" cy="9332"/>
-          </a:xfrm>
-          <a:prstGeom prst="straightConnector1">
-            <a:avLst/>
-          </a:prstGeom>
-          <a:ln w="38100">
-            <a:tailEnd type="triangle"/>
-          </a:ln>
-        </p:spPr>
-        <p:style>
-          <a:lnRef idx="1">
-            <a:schemeClr val="dk1"/>
-          </a:lnRef>
-          <a:fillRef idx="0">
-            <a:schemeClr val="dk1"/>
-          </a:fillRef>
-          <a:effectRef idx="0">
-            <a:schemeClr val="dk1"/>
-          </a:effectRef>
-          <a:fontRef idx="minor">
-            <a:schemeClr val="tx1"/>
-          </a:fontRef>
-        </p:style>
-      </p:cxnSp>
-      <p:sp>
-        <p:nvSpPr>
-          <p:cNvPr id="26" name="楕円 25">
-            <a:extLst>
-              <a:ext uri="{FF2B5EF4-FFF2-40B4-BE49-F238E27FC236}">
-                <a16:creationId xmlns:a16="http://schemas.microsoft.com/office/drawing/2014/main" id="{22B256F5-3EDA-18F7-75F4-39B6964A064A}"/>
-              </a:ext>
-            </a:extLst>
-          </p:cNvPr>
-          <p:cNvSpPr/>
-          <p:nvPr/>
-        </p:nvSpPr>
-        <p:spPr>
-          <a:xfrm>
-            <a:off x="7621999" y="2217568"/>
-            <a:ext cx="720000" cy="720000"/>
-          </a:xfrm>
-          <a:prstGeom prst="ellipse">
-            <a:avLst/>
-          </a:prstGeom>
-          <a:solidFill>
-            <a:schemeClr val="bg1"/>
-          </a:solidFill>
-          <a:ln w="38100"/>
-        </p:spPr>
-        <p:style>
-          <a:lnRef idx="2">
-            <a:schemeClr val="dk1">
-              <a:shade val="15000"/>
-            </a:schemeClr>
-          </a:lnRef>
-          <a:fillRef idx="1">
-            <a:schemeClr val="dk1"/>
-          </a:fillRef>
-          <a:effectRef idx="0">
-            <a:schemeClr val="dk1"/>
-          </a:effectRef>
-          <a:fontRef idx="minor">
-            <a:schemeClr val="lt1"/>
-          </a:fontRef>
-        </p:style>
-        <p:txBody>
-          <a:bodyPr rtlCol="0" anchor="ctr"/>
-          <a:lstStyle/>
-          <a:p>
-            <a:pPr algn="ctr"/>
-            <a:r>
-              <a:rPr lang="en-US" altLang="ja-JP" b="1" dirty="0">
-                <a:solidFill>
-                  <a:schemeClr val="tx1"/>
-                </a:solidFill>
-              </a:rPr>
-              <a:t>B</a:t>
-            </a:r>
-            <a:endParaRPr lang="ja-JP" altLang="en-US" b="1" dirty="0">
-              <a:solidFill>
-                <a:schemeClr val="tx1"/>
-              </a:solidFill>
-            </a:endParaRPr>
-          </a:p>
-        </p:txBody>
-      </p:sp>
-      <p:cxnSp>
-        <p:nvCxnSpPr>
-          <p:cNvPr id="27" name="直線矢印コネクタ 26">
-            <a:extLst>
-              <a:ext uri="{FF2B5EF4-FFF2-40B4-BE49-F238E27FC236}">
-                <a16:creationId xmlns:a16="http://schemas.microsoft.com/office/drawing/2014/main" id="{779BCEC9-AB36-2533-5ED2-E5475B8CE9FD}"/>
-              </a:ext>
-            </a:extLst>
-          </p:cNvPr>
-          <p:cNvCxnSpPr>
-            <a:cxnSpLocks/>
-          </p:cNvCxnSpPr>
-          <p:nvPr/>
-        </p:nvCxnSpPr>
-        <p:spPr>
-          <a:xfrm flipV="1">
-            <a:off x="6181999" y="2577568"/>
-            <a:ext cx="1440000" cy="0"/>
-          </a:xfrm>
-          <a:prstGeom prst="straightConnector1">
-            <a:avLst/>
-          </a:prstGeom>
-          <a:ln w="38100">
-            <a:tailEnd type="triangle"/>
-          </a:ln>
-        </p:spPr>
-        <p:style>
-          <a:lnRef idx="1">
-            <a:schemeClr val="dk1"/>
-          </a:lnRef>
-          <a:fillRef idx="0">
-            <a:schemeClr val="dk1"/>
-          </a:fillRef>
-          <a:effectRef idx="0">
-            <a:schemeClr val="dk1"/>
-          </a:effectRef>
-          <a:fontRef idx="minor">
-            <a:schemeClr val="tx1"/>
-          </a:fontRef>
-        </p:style>
-      </p:cxnSp>
-      <p:sp>
-        <p:nvSpPr>
-          <p:cNvPr id="39" name="テキスト ボックス 38">
-            <a:extLst>
-              <a:ext uri="{FF2B5EF4-FFF2-40B4-BE49-F238E27FC236}">
-                <a16:creationId xmlns:a16="http://schemas.microsoft.com/office/drawing/2014/main" id="{AA70A16A-B7C2-37A9-EB5C-5F1B9B409BBF}"/>
-              </a:ext>
-            </a:extLst>
-          </p:cNvPr>
-          <p:cNvSpPr txBox="1"/>
-          <p:nvPr/>
-        </p:nvSpPr>
-        <p:spPr>
-          <a:xfrm>
-            <a:off x="774773" y="2392902"/>
-            <a:ext cx="1160895" cy="369332"/>
-          </a:xfrm>
-          <a:prstGeom prst="rect">
-            <a:avLst/>
-          </a:prstGeom>
-          <a:noFill/>
-        </p:spPr>
-        <p:txBody>
-          <a:bodyPr wrap="none" rtlCol="0">
-            <a:spAutoFit/>
-          </a:bodyPr>
-          <a:lstStyle/>
-          <a:p>
-            <a:r>
-              <a:rPr lang="en-US" altLang="ja-JP" b="1" dirty="0"/>
-              <a:t>branch1 </a:t>
-            </a:r>
-            <a:endParaRPr kumimoji="1" lang="ja-JP" altLang="en-US" b="1" dirty="0"/>
-          </a:p>
-        </p:txBody>
-      </p:sp>
-      <p:cxnSp>
-        <p:nvCxnSpPr>
-          <p:cNvPr id="44" name="直線コネクタ 43">
-            <a:extLst>
-              <a:ext uri="{FF2B5EF4-FFF2-40B4-BE49-F238E27FC236}">
-                <a16:creationId xmlns:a16="http://schemas.microsoft.com/office/drawing/2014/main" id="{A46D8CDB-03F4-C0BF-5090-F243C9C37728}"/>
-              </a:ext>
-            </a:extLst>
-          </p:cNvPr>
-          <p:cNvCxnSpPr>
-            <a:cxnSpLocks/>
-          </p:cNvCxnSpPr>
-          <p:nvPr/>
-        </p:nvCxnSpPr>
-        <p:spPr>
-          <a:xfrm>
-            <a:off x="1816100" y="4228568"/>
-            <a:ext cx="9000000" cy="0"/>
-          </a:xfrm>
-          <a:prstGeom prst="line">
-            <a:avLst/>
-          </a:prstGeom>
-          <a:ln>
-            <a:prstDash val="dash"/>
-          </a:ln>
-        </p:spPr>
-        <p:style>
-          <a:lnRef idx="1">
-            <a:schemeClr val="accent1"/>
-          </a:lnRef>
-          <a:fillRef idx="0">
-            <a:schemeClr val="accent1"/>
-          </a:fillRef>
-          <a:effectRef idx="0">
-            <a:schemeClr val="accent1"/>
-          </a:effectRef>
-          <a:fontRef idx="minor">
-            <a:schemeClr val="tx1"/>
-          </a:fontRef>
-        </p:style>
-      </p:cxnSp>
-      <p:sp>
-        <p:nvSpPr>
-          <p:cNvPr id="45" name="楕円 44">
-            <a:extLst>
-              <a:ext uri="{FF2B5EF4-FFF2-40B4-BE49-F238E27FC236}">
-                <a16:creationId xmlns:a16="http://schemas.microsoft.com/office/drawing/2014/main" id="{1B50FDEA-C177-5A6F-7D83-6C0E3D99D1CD}"/>
-              </a:ext>
-            </a:extLst>
-          </p:cNvPr>
-          <p:cNvSpPr/>
-          <p:nvPr/>
-        </p:nvSpPr>
-        <p:spPr>
-          <a:xfrm>
-            <a:off x="5411199" y="3868568"/>
-            <a:ext cx="720000" cy="720000"/>
-          </a:xfrm>
-          <a:prstGeom prst="ellipse">
-            <a:avLst/>
-          </a:prstGeom>
-          <a:solidFill>
-            <a:schemeClr val="bg1"/>
-          </a:solidFill>
-          <a:ln w="38100"/>
-        </p:spPr>
-        <p:style>
-          <a:lnRef idx="2">
-            <a:schemeClr val="dk1">
-              <a:shade val="15000"/>
-            </a:schemeClr>
-          </a:lnRef>
-          <a:fillRef idx="1">
-            <a:schemeClr val="dk1"/>
-          </a:fillRef>
-          <a:effectRef idx="0">
-            <a:schemeClr val="dk1"/>
-          </a:effectRef>
-          <a:fontRef idx="minor">
-            <a:schemeClr val="lt1"/>
-          </a:fontRef>
-        </p:style>
-        <p:txBody>
-          <a:bodyPr rtlCol="0" anchor="ctr"/>
-          <a:lstStyle/>
-          <a:p>
-            <a:pPr algn="ctr"/>
-            <a:r>
-              <a:rPr lang="en-US" altLang="ja-JP" b="1" dirty="0">
-                <a:ln w="0"/>
-                <a:solidFill>
-                  <a:schemeClr val="tx1"/>
-                </a:solidFill>
-                <a:effectLst>
-                  <a:outerShdw blurRad="38100" dist="19050" dir="2700000" algn="tl" rotWithShape="0">
-                    <a:schemeClr val="dk1">
-                      <a:alpha val="40000"/>
-                    </a:schemeClr>
-                  </a:outerShdw>
-                </a:effectLst>
-              </a:rPr>
-              <a:t>A</a:t>
-            </a:r>
-          </a:p>
-        </p:txBody>
-      </p:sp>
-      <p:sp>
-        <p:nvSpPr>
-          <p:cNvPr id="48" name="テキスト ボックス 47">
-            <a:extLst>
-              <a:ext uri="{FF2B5EF4-FFF2-40B4-BE49-F238E27FC236}">
-                <a16:creationId xmlns:a16="http://schemas.microsoft.com/office/drawing/2014/main" id="{FFAFBDCD-340A-A1B8-A5DF-E62B0D794F9B}"/>
-              </a:ext>
-            </a:extLst>
-          </p:cNvPr>
-          <p:cNvSpPr txBox="1"/>
-          <p:nvPr/>
-        </p:nvSpPr>
-        <p:spPr>
-          <a:xfrm>
-            <a:off x="774773" y="4043902"/>
-            <a:ext cx="1120820" cy="369332"/>
-          </a:xfrm>
-          <a:prstGeom prst="rect">
-            <a:avLst/>
-          </a:prstGeom>
-          <a:noFill/>
-        </p:spPr>
-        <p:txBody>
-          <a:bodyPr wrap="none" rtlCol="0">
-            <a:spAutoFit/>
-          </a:bodyPr>
-          <a:lstStyle/>
-          <a:p>
-            <a:r>
-              <a:rPr lang="en-US" altLang="ja-JP" b="1" dirty="0" err="1"/>
-              <a:t>branchX</a:t>
-            </a:r>
-            <a:endParaRPr lang="ja-JP" altLang="en-US" b="1" dirty="0"/>
-          </a:p>
-        </p:txBody>
-      </p:sp>
-      <p:cxnSp>
-        <p:nvCxnSpPr>
-          <p:cNvPr id="49" name="直線矢印コネクタ 48">
-            <a:extLst>
-              <a:ext uri="{FF2B5EF4-FFF2-40B4-BE49-F238E27FC236}">
-                <a16:creationId xmlns:a16="http://schemas.microsoft.com/office/drawing/2014/main" id="{B94C4627-E923-B051-DD99-6A31F8097971}"/>
-              </a:ext>
-            </a:extLst>
-          </p:cNvPr>
-          <p:cNvCxnSpPr>
-            <a:cxnSpLocks/>
-            <a:stCxn id="9" idx="4"/>
-            <a:endCxn id="45" idx="2"/>
-          </p:cNvCxnSpPr>
-          <p:nvPr/>
-        </p:nvCxnSpPr>
-        <p:spPr>
-          <a:xfrm>
-            <a:off x="3692358" y="1269468"/>
-            <a:ext cx="1718841" cy="2959100"/>
-          </a:xfrm>
-          <a:prstGeom prst="straightConnector1">
-            <a:avLst/>
-          </a:prstGeom>
-          <a:ln w="38100">
-            <a:tailEnd type="triangle"/>
-          </a:ln>
-        </p:spPr>
-        <p:style>
-          <a:lnRef idx="1">
-            <a:schemeClr val="dk1"/>
-          </a:lnRef>
-          <a:fillRef idx="0">
-            <a:schemeClr val="dk1"/>
-          </a:fillRef>
-          <a:effectRef idx="0">
-            <a:schemeClr val="dk1"/>
-          </a:effectRef>
-          <a:fontRef idx="minor">
-            <a:schemeClr val="tx1"/>
-          </a:fontRef>
-        </p:style>
-      </p:cxnSp>
-    </p:spTree>
-    <p:extLst>
-      <p:ext uri="{BB962C8B-B14F-4D97-AF65-F5344CB8AC3E}">
-        <p14:creationId xmlns:p14="http://schemas.microsoft.com/office/powerpoint/2010/main" val="3142681971"/>
-      </p:ext>
-    </p:extLst>
-  </p:cSld>
-  <p:clrMapOvr>
-    <a:masterClrMapping/>
-  </p:clrMapOvr>
-</p:sld>
-</file>
-
-<file path=ppt/slides/slide51.xml><?xml version="1.0" encoding="utf-8"?>
-<p:sld xmlns:a="http://schemas.openxmlformats.org/drawingml/2006/main" xmlns:r="http://schemas.openxmlformats.org/officeDocument/2006/relationships" xmlns:p="http://schemas.openxmlformats.org/presentationml/2006/main">
-  <p:cSld>
-    <p:spTree>
-      <p:nvGrpSpPr>
-        <p:cNvPr id="1" name="">
-          <a:extLst>
-            <a:ext uri="{FF2B5EF4-FFF2-40B4-BE49-F238E27FC236}">
               <a16:creationId xmlns:a16="http://schemas.microsoft.com/office/drawing/2014/main" id="{8E06D92F-062F-1B0A-86BF-63465C686373}"/>
             </a:ext>
           </a:extLst>
@@ -40265,7 +39793,7 @@
 </p:sld>
 </file>
 
-<file path=ppt/slides/slide52.xml><?xml version="1.0" encoding="utf-8"?>
+<file path=ppt/slides/slide51.xml><?xml version="1.0" encoding="utf-8"?>
 <p:sld xmlns:a="http://schemas.openxmlformats.org/drawingml/2006/main" xmlns:r="http://schemas.openxmlformats.org/officeDocument/2006/relationships" xmlns:p="http://schemas.openxmlformats.org/presentationml/2006/main">
   <p:cSld>
     <p:spTree>
@@ -41477,7 +41005,7 @@
 </p:sld>
 </file>
 
-<file path=ppt/slides/slide53.xml><?xml version="1.0" encoding="utf-8"?>
+<file path=ppt/slides/slide52.xml><?xml version="1.0" encoding="utf-8"?>
 <p:sld xmlns:a="http://schemas.openxmlformats.org/drawingml/2006/main" xmlns:r="http://schemas.openxmlformats.org/officeDocument/2006/relationships" xmlns:p="http://schemas.openxmlformats.org/presentationml/2006/main">
   <p:cSld>
     <p:spTree>
@@ -42806,7 +42334,7 @@
 </p:sld>
 </file>
 
-<file path=ppt/slides/slide54.xml><?xml version="1.0" encoding="utf-8"?>
+<file path=ppt/slides/slide53.xml><?xml version="1.0" encoding="utf-8"?>
 <p:sld xmlns:a="http://schemas.openxmlformats.org/drawingml/2006/main" xmlns:r="http://schemas.openxmlformats.org/officeDocument/2006/relationships" xmlns:p="http://schemas.openxmlformats.org/presentationml/2006/main">
   <p:cSld>
     <p:spTree>
@@ -43340,7 +42868,7 @@
 </p:sld>
 </file>
 
-<file path=ppt/slides/slide55.xml><?xml version="1.0" encoding="utf-8"?>
+<file path=ppt/slides/slide54.xml><?xml version="1.0" encoding="utf-8"?>
 <p:sld xmlns:a="http://schemas.openxmlformats.org/drawingml/2006/main" xmlns:r="http://schemas.openxmlformats.org/officeDocument/2006/relationships" xmlns:p="http://schemas.openxmlformats.org/presentationml/2006/main">
   <p:cSld>
     <p:spTree>
@@ -44873,7 +44401,7 @@
 </p:sld>
 </file>
 
-<file path=ppt/slides/slide56.xml><?xml version="1.0" encoding="utf-8"?>
+<file path=ppt/slides/slide55.xml><?xml version="1.0" encoding="utf-8"?>
 <p:sld xmlns:a="http://schemas.openxmlformats.org/drawingml/2006/main" xmlns:r="http://schemas.openxmlformats.org/officeDocument/2006/relationships" xmlns:p="http://schemas.openxmlformats.org/presentationml/2006/main">
   <p:cSld>
     <p:spTree>
@@ -46512,7 +46040,7 @@
 </p:sld>
 </file>
 
-<file path=ppt/slides/slide57.xml><?xml version="1.0" encoding="utf-8"?>
+<file path=ppt/slides/slide56.xml><?xml version="1.0" encoding="utf-8"?>
 <p:sld xmlns:a="http://schemas.openxmlformats.org/drawingml/2006/main" xmlns:r="http://schemas.openxmlformats.org/officeDocument/2006/relationships" xmlns:p="http://schemas.openxmlformats.org/presentationml/2006/main">
   <p:cSld>
     <p:spTree>
@@ -46548,7 +46076,7 @@
 </p:sld>
 </file>
 
-<file path=ppt/slides/slide58.xml><?xml version="1.0" encoding="utf-8"?>
+<file path=ppt/slides/slide57.xml><?xml version="1.0" encoding="utf-8"?>
 <p:sld xmlns:a="http://schemas.openxmlformats.org/drawingml/2006/main" xmlns:r="http://schemas.openxmlformats.org/officeDocument/2006/relationships" xmlns:p="http://schemas.openxmlformats.org/presentationml/2006/main">
   <p:cSld>
     <p:spTree>
@@ -46631,7 +46159,7 @@
 </p:sld>
 </file>
 
-<file path=ppt/slides/slide59.xml><?xml version="1.0" encoding="utf-8"?>
+<file path=ppt/slides/slide58.xml><?xml version="1.0" encoding="utf-8"?>
 <p:sld xmlns:a="http://schemas.openxmlformats.org/drawingml/2006/main" xmlns:r="http://schemas.openxmlformats.org/officeDocument/2006/relationships" xmlns:p="http://schemas.openxmlformats.org/presentationml/2006/main">
   <p:cSld>
     <p:spTree>
@@ -46798,6 +46326,78 @@
     <p:extLst>
       <p:ext uri="{BB962C8B-B14F-4D97-AF65-F5344CB8AC3E}">
         <p14:creationId xmlns:p14="http://schemas.microsoft.com/office/powerpoint/2010/main" val="894963790"/>
+      </p:ext>
+    </p:extLst>
+  </p:cSld>
+  <p:clrMapOvr>
+    <a:masterClrMapping/>
+  </p:clrMapOvr>
+</p:sld>
+</file>
+
+<file path=ppt/slides/slide59.xml><?xml version="1.0" encoding="utf-8"?>
+<p:sld xmlns:a="http://schemas.openxmlformats.org/drawingml/2006/main" xmlns:r="http://schemas.openxmlformats.org/officeDocument/2006/relationships" xmlns:p="http://schemas.openxmlformats.org/presentationml/2006/main">
+  <p:cSld>
+    <p:spTree>
+      <p:nvGrpSpPr>
+        <p:cNvPr id="1" name="">
+          <a:extLst>
+            <a:ext uri="{FF2B5EF4-FFF2-40B4-BE49-F238E27FC236}">
+              <a16:creationId xmlns:a16="http://schemas.microsoft.com/office/drawing/2014/main" id="{F3A682E2-D352-A701-9043-CBC0414C7479}"/>
+            </a:ext>
+          </a:extLst>
+        </p:cNvPr>
+        <p:cNvGrpSpPr/>
+        <p:nvPr/>
+      </p:nvGrpSpPr>
+      <p:grpSpPr>
+        <a:xfrm>
+          <a:off x="0" y="0"/>
+          <a:ext cx="0" cy="0"/>
+          <a:chOff x="0" y="0"/>
+          <a:chExt cx="0" cy="0"/>
+        </a:xfrm>
+      </p:grpSpPr>
+      <p:pic>
+        <p:nvPicPr>
+          <p:cNvPr id="3" name="図 2">
+            <a:extLst>
+              <a:ext uri="{FF2B5EF4-FFF2-40B4-BE49-F238E27FC236}">
+                <a16:creationId xmlns:a16="http://schemas.microsoft.com/office/drawing/2014/main" id="{B72770B2-309F-75EE-FF87-E7E09F61FFBE}"/>
+              </a:ext>
+            </a:extLst>
+          </p:cNvPr>
+          <p:cNvPicPr>
+            <a:picLocks noChangeAspect="1"/>
+          </p:cNvPicPr>
+          <p:nvPr/>
+        </p:nvPicPr>
+        <p:blipFill>
+          <a:blip r:embed="rId2">
+            <a:extLst>
+              <a:ext uri="{28A0092B-C50C-407E-A947-70E740481C1C}">
+                <a14:useLocalDpi xmlns:a14="http://schemas.microsoft.com/office/drawing/2010/main" val="0"/>
+              </a:ext>
+            </a:extLst>
+          </a:blip>
+          <a:stretch>
+            <a:fillRect/>
+          </a:stretch>
+        </p:blipFill>
+        <p:spPr>
+          <a:xfrm>
+            <a:off x="5072062" y="2686050"/>
+            <a:ext cx="1153636" cy="1080000"/>
+          </a:xfrm>
+          <a:prstGeom prst="rect">
+            <a:avLst/>
+          </a:prstGeom>
+        </p:spPr>
+      </p:pic>
+    </p:spTree>
+    <p:extLst>
+      <p:ext uri="{BB962C8B-B14F-4D97-AF65-F5344CB8AC3E}">
+        <p14:creationId xmlns:p14="http://schemas.microsoft.com/office/powerpoint/2010/main" val="2362055097"/>
       </p:ext>
     </p:extLst>
   </p:cSld>
@@ -47330,78 +46930,6 @@
         <p:cNvPr id="1" name="">
           <a:extLst>
             <a:ext uri="{FF2B5EF4-FFF2-40B4-BE49-F238E27FC236}">
-              <a16:creationId xmlns:a16="http://schemas.microsoft.com/office/drawing/2014/main" id="{F3A682E2-D352-A701-9043-CBC0414C7479}"/>
-            </a:ext>
-          </a:extLst>
-        </p:cNvPr>
-        <p:cNvGrpSpPr/>
-        <p:nvPr/>
-      </p:nvGrpSpPr>
-      <p:grpSpPr>
-        <a:xfrm>
-          <a:off x="0" y="0"/>
-          <a:ext cx="0" cy="0"/>
-          <a:chOff x="0" y="0"/>
-          <a:chExt cx="0" cy="0"/>
-        </a:xfrm>
-      </p:grpSpPr>
-      <p:pic>
-        <p:nvPicPr>
-          <p:cNvPr id="3" name="図 2">
-            <a:extLst>
-              <a:ext uri="{FF2B5EF4-FFF2-40B4-BE49-F238E27FC236}">
-                <a16:creationId xmlns:a16="http://schemas.microsoft.com/office/drawing/2014/main" id="{B72770B2-309F-75EE-FF87-E7E09F61FFBE}"/>
-              </a:ext>
-            </a:extLst>
-          </p:cNvPr>
-          <p:cNvPicPr>
-            <a:picLocks noChangeAspect="1"/>
-          </p:cNvPicPr>
-          <p:nvPr/>
-        </p:nvPicPr>
-        <p:blipFill>
-          <a:blip r:embed="rId2">
-            <a:extLst>
-              <a:ext uri="{28A0092B-C50C-407E-A947-70E740481C1C}">
-                <a14:useLocalDpi xmlns:a14="http://schemas.microsoft.com/office/drawing/2010/main" val="0"/>
-              </a:ext>
-            </a:extLst>
-          </a:blip>
-          <a:stretch>
-            <a:fillRect/>
-          </a:stretch>
-        </p:blipFill>
-        <p:spPr>
-          <a:xfrm>
-            <a:off x="5072062" y="2686050"/>
-            <a:ext cx="1153636" cy="1080000"/>
-          </a:xfrm>
-          <a:prstGeom prst="rect">
-            <a:avLst/>
-          </a:prstGeom>
-        </p:spPr>
-      </p:pic>
-    </p:spTree>
-    <p:extLst>
-      <p:ext uri="{BB962C8B-B14F-4D97-AF65-F5344CB8AC3E}">
-        <p14:creationId xmlns:p14="http://schemas.microsoft.com/office/powerpoint/2010/main" val="2362055097"/>
-      </p:ext>
-    </p:extLst>
-  </p:cSld>
-  <p:clrMapOvr>
-    <a:masterClrMapping/>
-  </p:clrMapOvr>
-</p:sld>
-</file>
-
-<file path=ppt/slides/slide61.xml><?xml version="1.0" encoding="utf-8"?>
-<p:sld xmlns:a="http://schemas.openxmlformats.org/drawingml/2006/main" xmlns:r="http://schemas.openxmlformats.org/officeDocument/2006/relationships" xmlns:p="http://schemas.openxmlformats.org/presentationml/2006/main">
-  <p:cSld>
-    <p:spTree>
-      <p:nvGrpSpPr>
-        <p:cNvPr id="1" name="">
-          <a:extLst>
-            <a:ext uri="{FF2B5EF4-FFF2-40B4-BE49-F238E27FC236}">
               <a16:creationId xmlns:a16="http://schemas.microsoft.com/office/drawing/2014/main" id="{FB41574C-373B-1394-C2FE-149B7DA3B16B}"/>
             </a:ext>
           </a:extLst>
@@ -47566,7 +47094,7 @@
 </p:sld>
 </file>
 
-<file path=ppt/slides/slide62.xml><?xml version="1.0" encoding="utf-8"?>
+<file path=ppt/slides/slide61.xml><?xml version="1.0" encoding="utf-8"?>
 <p:sld xmlns:a="http://schemas.openxmlformats.org/drawingml/2006/main" xmlns:r="http://schemas.openxmlformats.org/officeDocument/2006/relationships" xmlns:p="http://schemas.openxmlformats.org/presentationml/2006/main">
   <p:cSld>
     <p:spTree>
@@ -47688,7 +47216,7 @@
 </p:sld>
 </file>
 
-<file path=ppt/slides/slide63.xml><?xml version="1.0" encoding="utf-8"?>
+<file path=ppt/slides/slide62.xml><?xml version="1.0" encoding="utf-8"?>
 <p:sld xmlns:a="http://schemas.openxmlformats.org/drawingml/2006/main" xmlns:r="http://schemas.openxmlformats.org/officeDocument/2006/relationships" xmlns:p="http://schemas.openxmlformats.org/presentationml/2006/main">
   <p:cSld>
     <p:spTree>
@@ -47810,7 +47338,7 @@
 </p:sld>
 </file>
 
-<file path=ppt/slides/slide64.xml><?xml version="1.0" encoding="utf-8"?>
+<file path=ppt/slides/slide63.xml><?xml version="1.0" encoding="utf-8"?>
 <p:sld xmlns:a="http://schemas.openxmlformats.org/drawingml/2006/main" xmlns:r="http://schemas.openxmlformats.org/officeDocument/2006/relationships" xmlns:p="http://schemas.openxmlformats.org/presentationml/2006/main">
   <p:cSld>
     <p:spTree>
@@ -47937,7 +47465,7 @@
 </p:sld>
 </file>
 
-<file path=ppt/slides/slide65.xml><?xml version="1.0" encoding="utf-8"?>
+<file path=ppt/slides/slide64.xml><?xml version="1.0" encoding="utf-8"?>
 <p:sld xmlns:a="http://schemas.openxmlformats.org/drawingml/2006/main" xmlns:r="http://schemas.openxmlformats.org/officeDocument/2006/relationships" xmlns:p="http://schemas.openxmlformats.org/presentationml/2006/main">
   <p:cSld>
     <p:spTree>
@@ -48009,7 +47537,7 @@
 </p:sld>
 </file>
 
-<file path=ppt/slides/slide66.xml><?xml version="1.0" encoding="utf-8"?>
+<file path=ppt/slides/slide65.xml><?xml version="1.0" encoding="utf-8"?>
 <p:sld xmlns:a="http://schemas.openxmlformats.org/drawingml/2006/main" xmlns:r="http://schemas.openxmlformats.org/officeDocument/2006/relationships" xmlns:p="http://schemas.openxmlformats.org/presentationml/2006/main">
   <p:cSld>
     <p:spTree>
@@ -48045,7 +47573,7 @@
 </p:sld>
 </file>
 
-<file path=ppt/slides/slide67.xml><?xml version="1.0" encoding="utf-8"?>
+<file path=ppt/slides/slide66.xml><?xml version="1.0" encoding="utf-8"?>
 <p:sld xmlns:a="http://schemas.openxmlformats.org/drawingml/2006/main" xmlns:r="http://schemas.openxmlformats.org/officeDocument/2006/relationships" xmlns:p="http://schemas.openxmlformats.org/presentationml/2006/main">
   <p:cSld>
     <p:spTree>
@@ -48167,7 +47695,7 @@
 </p:sld>
 </file>
 
-<file path=ppt/slides/slide68.xml><?xml version="1.0" encoding="utf-8"?>
+<file path=ppt/slides/slide67.xml><?xml version="1.0" encoding="utf-8"?>
 <p:sld xmlns:a="http://schemas.openxmlformats.org/drawingml/2006/main" xmlns:r="http://schemas.openxmlformats.org/officeDocument/2006/relationships" xmlns:p="http://schemas.openxmlformats.org/presentationml/2006/main">
   <p:cSld>
     <p:spTree>
@@ -48289,7 +47817,7 @@
 </p:sld>
 </file>
 
-<file path=ppt/slides/slide69.xml><?xml version="1.0" encoding="utf-8"?>
+<file path=ppt/slides/slide68.xml><?xml version="1.0" encoding="utf-8"?>
 <p:sld xmlns:a="http://schemas.openxmlformats.org/drawingml/2006/main" xmlns:r="http://schemas.openxmlformats.org/officeDocument/2006/relationships" xmlns:p="http://schemas.openxmlformats.org/presentationml/2006/main">
   <p:cSld>
     <p:spTree>
@@ -48402,6 +47930,128 @@
     <p:extLst>
       <p:ext uri="{BB962C8B-B14F-4D97-AF65-F5344CB8AC3E}">
         <p14:creationId xmlns:p14="http://schemas.microsoft.com/office/powerpoint/2010/main" val="2871749264"/>
+      </p:ext>
+    </p:extLst>
+  </p:cSld>
+  <p:clrMapOvr>
+    <a:masterClrMapping/>
+  </p:clrMapOvr>
+</p:sld>
+</file>
+
+<file path=ppt/slides/slide69.xml><?xml version="1.0" encoding="utf-8"?>
+<p:sld xmlns:a="http://schemas.openxmlformats.org/drawingml/2006/main" xmlns:r="http://schemas.openxmlformats.org/officeDocument/2006/relationships" xmlns:p="http://schemas.openxmlformats.org/presentationml/2006/main">
+  <p:cSld>
+    <p:spTree>
+      <p:nvGrpSpPr>
+        <p:cNvPr id="1" name="">
+          <a:extLst>
+            <a:ext uri="{FF2B5EF4-FFF2-40B4-BE49-F238E27FC236}">
+              <a16:creationId xmlns:a16="http://schemas.microsoft.com/office/drawing/2014/main" id="{1570C996-A1FD-17C5-12F9-C185A44FA454}"/>
+            </a:ext>
+          </a:extLst>
+        </p:cNvPr>
+        <p:cNvGrpSpPr/>
+        <p:nvPr/>
+      </p:nvGrpSpPr>
+      <p:grpSpPr>
+        <a:xfrm>
+          <a:off x="0" y="0"/>
+          <a:ext cx="0" cy="0"/>
+          <a:chOff x="0" y="0"/>
+          <a:chExt cx="0" cy="0"/>
+        </a:xfrm>
+      </p:grpSpPr>
+      <p:pic>
+        <p:nvPicPr>
+          <p:cNvPr id="3" name="図 2">
+            <a:extLst>
+              <a:ext uri="{FF2B5EF4-FFF2-40B4-BE49-F238E27FC236}">
+                <a16:creationId xmlns:a16="http://schemas.microsoft.com/office/drawing/2014/main" id="{19800585-E009-681D-F973-4FFDBCB24A6D}"/>
+              </a:ext>
+            </a:extLst>
+          </p:cNvPr>
+          <p:cNvPicPr>
+            <a:picLocks noChangeAspect="1"/>
+          </p:cNvPicPr>
+          <p:nvPr/>
+        </p:nvPicPr>
+        <p:blipFill>
+          <a:blip r:embed="rId2">
+            <a:extLst>
+              <a:ext uri="{28A0092B-C50C-407E-A947-70E740481C1C}">
+                <a14:useLocalDpi xmlns:a14="http://schemas.microsoft.com/office/drawing/2010/main" val="0"/>
+              </a:ext>
+            </a:extLst>
+          </a:blip>
+          <a:stretch>
+            <a:fillRect/>
+          </a:stretch>
+        </p:blipFill>
+        <p:spPr>
+          <a:xfrm>
+            <a:off x="3957637" y="2800350"/>
+            <a:ext cx="4276725" cy="1257300"/>
+          </a:xfrm>
+          <a:prstGeom prst="rect">
+            <a:avLst/>
+          </a:prstGeom>
+        </p:spPr>
+      </p:pic>
+      <p:sp>
+        <p:nvSpPr>
+          <p:cNvPr id="6" name="正方形/長方形 5">
+            <a:extLst>
+              <a:ext uri="{FF2B5EF4-FFF2-40B4-BE49-F238E27FC236}">
+                <a16:creationId xmlns:a16="http://schemas.microsoft.com/office/drawing/2014/main" id="{90116AF5-5E12-C6B5-BE85-9EE686683A5D}"/>
+              </a:ext>
+            </a:extLst>
+          </p:cNvPr>
+          <p:cNvSpPr/>
+          <p:nvPr/>
+        </p:nvSpPr>
+        <p:spPr>
+          <a:xfrm>
+            <a:off x="4665661" y="3429000"/>
+            <a:ext cx="947739" cy="279400"/>
+          </a:xfrm>
+          <a:prstGeom prst="rect">
+            <a:avLst/>
+          </a:prstGeom>
+          <a:noFill/>
+          <a:ln w="28575">
+            <a:solidFill>
+              <a:srgbClr val="FF0000"/>
+            </a:solidFill>
+          </a:ln>
+        </p:spPr>
+        <p:style>
+          <a:lnRef idx="2">
+            <a:schemeClr val="accent6"/>
+          </a:lnRef>
+          <a:fillRef idx="1">
+            <a:schemeClr val="lt1"/>
+          </a:fillRef>
+          <a:effectRef idx="0">
+            <a:schemeClr val="accent6"/>
+          </a:effectRef>
+          <a:fontRef idx="minor">
+            <a:schemeClr val="dk1"/>
+          </a:fontRef>
+        </p:style>
+        <p:txBody>
+          <a:bodyPr rtlCol="0" anchor="ctr"/>
+          <a:lstStyle/>
+          <a:p>
+            <a:pPr algn="ctr"/>
+            <a:endParaRPr kumimoji="1" lang="ja-JP" altLang="en-US"/>
+          </a:p>
+        </p:txBody>
+      </p:sp>
+    </p:spTree>
+    <p:extLst>
+      <p:ext uri="{BB962C8B-B14F-4D97-AF65-F5344CB8AC3E}">
+        <p14:creationId xmlns:p14="http://schemas.microsoft.com/office/powerpoint/2010/main" val="3776241511"/>
       </p:ext>
     </p:extLst>
   </p:cSld>
@@ -49163,128 +48813,6 @@
         <p:cNvPr id="1" name="">
           <a:extLst>
             <a:ext uri="{FF2B5EF4-FFF2-40B4-BE49-F238E27FC236}">
-              <a16:creationId xmlns:a16="http://schemas.microsoft.com/office/drawing/2014/main" id="{1570C996-A1FD-17C5-12F9-C185A44FA454}"/>
-            </a:ext>
-          </a:extLst>
-        </p:cNvPr>
-        <p:cNvGrpSpPr/>
-        <p:nvPr/>
-      </p:nvGrpSpPr>
-      <p:grpSpPr>
-        <a:xfrm>
-          <a:off x="0" y="0"/>
-          <a:ext cx="0" cy="0"/>
-          <a:chOff x="0" y="0"/>
-          <a:chExt cx="0" cy="0"/>
-        </a:xfrm>
-      </p:grpSpPr>
-      <p:pic>
-        <p:nvPicPr>
-          <p:cNvPr id="3" name="図 2">
-            <a:extLst>
-              <a:ext uri="{FF2B5EF4-FFF2-40B4-BE49-F238E27FC236}">
-                <a16:creationId xmlns:a16="http://schemas.microsoft.com/office/drawing/2014/main" id="{19800585-E009-681D-F973-4FFDBCB24A6D}"/>
-              </a:ext>
-            </a:extLst>
-          </p:cNvPr>
-          <p:cNvPicPr>
-            <a:picLocks noChangeAspect="1"/>
-          </p:cNvPicPr>
-          <p:nvPr/>
-        </p:nvPicPr>
-        <p:blipFill>
-          <a:blip r:embed="rId2">
-            <a:extLst>
-              <a:ext uri="{28A0092B-C50C-407E-A947-70E740481C1C}">
-                <a14:useLocalDpi xmlns:a14="http://schemas.microsoft.com/office/drawing/2010/main" val="0"/>
-              </a:ext>
-            </a:extLst>
-          </a:blip>
-          <a:stretch>
-            <a:fillRect/>
-          </a:stretch>
-        </p:blipFill>
-        <p:spPr>
-          <a:xfrm>
-            <a:off x="3957637" y="2800350"/>
-            <a:ext cx="4276725" cy="1257300"/>
-          </a:xfrm>
-          <a:prstGeom prst="rect">
-            <a:avLst/>
-          </a:prstGeom>
-        </p:spPr>
-      </p:pic>
-      <p:sp>
-        <p:nvSpPr>
-          <p:cNvPr id="6" name="正方形/長方形 5">
-            <a:extLst>
-              <a:ext uri="{FF2B5EF4-FFF2-40B4-BE49-F238E27FC236}">
-                <a16:creationId xmlns:a16="http://schemas.microsoft.com/office/drawing/2014/main" id="{90116AF5-5E12-C6B5-BE85-9EE686683A5D}"/>
-              </a:ext>
-            </a:extLst>
-          </p:cNvPr>
-          <p:cNvSpPr/>
-          <p:nvPr/>
-        </p:nvSpPr>
-        <p:spPr>
-          <a:xfrm>
-            <a:off x="4665661" y="3429000"/>
-            <a:ext cx="947739" cy="279400"/>
-          </a:xfrm>
-          <a:prstGeom prst="rect">
-            <a:avLst/>
-          </a:prstGeom>
-          <a:noFill/>
-          <a:ln w="28575">
-            <a:solidFill>
-              <a:srgbClr val="FF0000"/>
-            </a:solidFill>
-          </a:ln>
-        </p:spPr>
-        <p:style>
-          <a:lnRef idx="2">
-            <a:schemeClr val="accent6"/>
-          </a:lnRef>
-          <a:fillRef idx="1">
-            <a:schemeClr val="lt1"/>
-          </a:fillRef>
-          <a:effectRef idx="0">
-            <a:schemeClr val="accent6"/>
-          </a:effectRef>
-          <a:fontRef idx="minor">
-            <a:schemeClr val="dk1"/>
-          </a:fontRef>
-        </p:style>
-        <p:txBody>
-          <a:bodyPr rtlCol="0" anchor="ctr"/>
-          <a:lstStyle/>
-          <a:p>
-            <a:pPr algn="ctr"/>
-            <a:endParaRPr kumimoji="1" lang="ja-JP" altLang="en-US"/>
-          </a:p>
-        </p:txBody>
-      </p:sp>
-    </p:spTree>
-    <p:extLst>
-      <p:ext uri="{BB962C8B-B14F-4D97-AF65-F5344CB8AC3E}">
-        <p14:creationId xmlns:p14="http://schemas.microsoft.com/office/powerpoint/2010/main" val="3776241511"/>
-      </p:ext>
-    </p:extLst>
-  </p:cSld>
-  <p:clrMapOvr>
-    <a:masterClrMapping/>
-  </p:clrMapOvr>
-</p:sld>
-</file>
-
-<file path=ppt/slides/slide71.xml><?xml version="1.0" encoding="utf-8"?>
-<p:sld xmlns:a="http://schemas.openxmlformats.org/drawingml/2006/main" xmlns:r="http://schemas.openxmlformats.org/officeDocument/2006/relationships" xmlns:p="http://schemas.openxmlformats.org/presentationml/2006/main">
-  <p:cSld>
-    <p:spTree>
-      <p:nvGrpSpPr>
-        <p:cNvPr id="1" name="">
-          <a:extLst>
-            <a:ext uri="{FF2B5EF4-FFF2-40B4-BE49-F238E27FC236}">
               <a16:creationId xmlns:a16="http://schemas.microsoft.com/office/drawing/2014/main" id="{D6D51AFC-4130-139A-CECD-676A26A3A7DD}"/>
             </a:ext>
           </a:extLst>
@@ -49406,7 +48934,7 @@
 </p:sld>
 </file>
 
-<file path=ppt/slides/slide72.xml><?xml version="1.0" encoding="utf-8"?>
+<file path=ppt/slides/slide71.xml><?xml version="1.0" encoding="utf-8"?>
 <p:sld xmlns:a="http://schemas.openxmlformats.org/drawingml/2006/main" xmlns:r="http://schemas.openxmlformats.org/officeDocument/2006/relationships" xmlns:p="http://schemas.openxmlformats.org/presentationml/2006/main">
   <p:cSld>
     <p:spTree>
@@ -49442,7 +48970,7 @@
 </p:sld>
 </file>
 
-<file path=ppt/slides/slide73.xml><?xml version="1.0" encoding="utf-8"?>
+<file path=ppt/slides/slide72.xml><?xml version="1.0" encoding="utf-8"?>
 <p:sld xmlns:a="http://schemas.openxmlformats.org/drawingml/2006/main" xmlns:r="http://schemas.openxmlformats.org/officeDocument/2006/relationships" xmlns:p="http://schemas.openxmlformats.org/presentationml/2006/main">
   <p:cSld>
     <p:spTree>
@@ -49564,7 +49092,7 @@
 </p:sld>
 </file>
 
-<file path=ppt/slides/slide74.xml><?xml version="1.0" encoding="utf-8"?>
+<file path=ppt/slides/slide73.xml><?xml version="1.0" encoding="utf-8"?>
 <p:sld xmlns:a="http://schemas.openxmlformats.org/drawingml/2006/main" xmlns:r="http://schemas.openxmlformats.org/officeDocument/2006/relationships" xmlns:p="http://schemas.openxmlformats.org/presentationml/2006/main">
   <p:cSld>
     <p:spTree>
@@ -49686,7 +49214,7 @@
 </p:sld>
 </file>
 
-<file path=ppt/slides/slide75.xml><?xml version="1.0" encoding="utf-8"?>
+<file path=ppt/slides/slide74.xml><?xml version="1.0" encoding="utf-8"?>
 <p:sld xmlns:a="http://schemas.openxmlformats.org/drawingml/2006/main" xmlns:r="http://schemas.openxmlformats.org/officeDocument/2006/relationships" xmlns:p="http://schemas.openxmlformats.org/presentationml/2006/main">
   <p:cSld>
     <p:spTree>
@@ -49858,7 +49386,7 @@
 </p:sld>
 </file>
 
-<file path=ppt/slides/slide76.xml><?xml version="1.0" encoding="utf-8"?>
+<file path=ppt/slides/slide75.xml><?xml version="1.0" encoding="utf-8"?>
 <p:sld xmlns:a="http://schemas.openxmlformats.org/drawingml/2006/main" xmlns:r="http://schemas.openxmlformats.org/officeDocument/2006/relationships" xmlns:p="http://schemas.openxmlformats.org/presentationml/2006/main">
   <p:cSld>
     <p:spTree>
@@ -49894,7 +49422,7 @@
 </p:sld>
 </file>
 
-<file path=ppt/slides/slide77.xml><?xml version="1.0" encoding="utf-8"?>
+<file path=ppt/slides/slide76.xml><?xml version="1.0" encoding="utf-8"?>
 <p:sld xmlns:a="http://schemas.openxmlformats.org/drawingml/2006/main" xmlns:r="http://schemas.openxmlformats.org/officeDocument/2006/relationships" xmlns:p="http://schemas.openxmlformats.org/presentationml/2006/main">
   <p:cSld>
     <p:spTree>
@@ -50016,7 +49544,7 @@
 </p:sld>
 </file>
 
-<file path=ppt/slides/slide78.xml><?xml version="1.0" encoding="utf-8"?>
+<file path=ppt/slides/slide77.xml><?xml version="1.0" encoding="utf-8"?>
 <p:sld xmlns:a="http://schemas.openxmlformats.org/drawingml/2006/main" xmlns:r="http://schemas.openxmlformats.org/officeDocument/2006/relationships" xmlns:p="http://schemas.openxmlformats.org/presentationml/2006/main">
   <p:cSld>
     <p:spTree>
@@ -50138,7 +49666,7 @@
 </p:sld>
 </file>
 
-<file path=ppt/slides/slide79.xml><?xml version="1.0" encoding="utf-8"?>
+<file path=ppt/slides/slide78.xml><?xml version="1.0" encoding="utf-8"?>
 <p:sld xmlns:a="http://schemas.openxmlformats.org/drawingml/2006/main" xmlns:r="http://schemas.openxmlformats.org/officeDocument/2006/relationships" xmlns:p="http://schemas.openxmlformats.org/presentationml/2006/main">
   <p:cSld>
     <p:spTree>
@@ -50251,6 +49779,128 @@
     <p:extLst>
       <p:ext uri="{BB962C8B-B14F-4D97-AF65-F5344CB8AC3E}">
         <p14:creationId xmlns:p14="http://schemas.microsoft.com/office/powerpoint/2010/main" val="2512079859"/>
+      </p:ext>
+    </p:extLst>
+  </p:cSld>
+  <p:clrMapOvr>
+    <a:masterClrMapping/>
+  </p:clrMapOvr>
+</p:sld>
+</file>
+
+<file path=ppt/slides/slide79.xml><?xml version="1.0" encoding="utf-8"?>
+<p:sld xmlns:a="http://schemas.openxmlformats.org/drawingml/2006/main" xmlns:r="http://schemas.openxmlformats.org/officeDocument/2006/relationships" xmlns:p="http://schemas.openxmlformats.org/presentationml/2006/main">
+  <p:cSld>
+    <p:spTree>
+      <p:nvGrpSpPr>
+        <p:cNvPr id="1" name="">
+          <a:extLst>
+            <a:ext uri="{FF2B5EF4-FFF2-40B4-BE49-F238E27FC236}">
+              <a16:creationId xmlns:a16="http://schemas.microsoft.com/office/drawing/2014/main" id="{F253F93B-975B-B902-761D-FE8F9E9A482E}"/>
+            </a:ext>
+          </a:extLst>
+        </p:cNvPr>
+        <p:cNvGrpSpPr/>
+        <p:nvPr/>
+      </p:nvGrpSpPr>
+      <p:grpSpPr>
+        <a:xfrm>
+          <a:off x="0" y="0"/>
+          <a:ext cx="0" cy="0"/>
+          <a:chOff x="0" y="0"/>
+          <a:chExt cx="0" cy="0"/>
+        </a:xfrm>
+      </p:grpSpPr>
+      <p:pic>
+        <p:nvPicPr>
+          <p:cNvPr id="3" name="図 2">
+            <a:extLst>
+              <a:ext uri="{FF2B5EF4-FFF2-40B4-BE49-F238E27FC236}">
+                <a16:creationId xmlns:a16="http://schemas.microsoft.com/office/drawing/2014/main" id="{C1FCD0C8-B622-9B6D-6C98-467B170875CE}"/>
+              </a:ext>
+            </a:extLst>
+          </p:cNvPr>
+          <p:cNvPicPr>
+            <a:picLocks noChangeAspect="1"/>
+          </p:cNvPicPr>
+          <p:nvPr/>
+        </p:nvPicPr>
+        <p:blipFill>
+          <a:blip r:embed="rId2">
+            <a:extLst>
+              <a:ext uri="{28A0092B-C50C-407E-A947-70E740481C1C}">
+                <a14:useLocalDpi xmlns:a14="http://schemas.microsoft.com/office/drawing/2010/main" val="0"/>
+              </a:ext>
+            </a:extLst>
+          </a:blip>
+          <a:stretch>
+            <a:fillRect/>
+          </a:stretch>
+        </p:blipFill>
+        <p:spPr>
+          <a:xfrm>
+            <a:off x="4295775" y="2047875"/>
+            <a:ext cx="3600450" cy="2762250"/>
+          </a:xfrm>
+          <a:prstGeom prst="rect">
+            <a:avLst/>
+          </a:prstGeom>
+        </p:spPr>
+      </p:pic>
+      <p:sp>
+        <p:nvSpPr>
+          <p:cNvPr id="4" name="正方形/長方形 3">
+            <a:extLst>
+              <a:ext uri="{FF2B5EF4-FFF2-40B4-BE49-F238E27FC236}">
+                <a16:creationId xmlns:a16="http://schemas.microsoft.com/office/drawing/2014/main" id="{BF03B34E-2C76-5DD7-F3B7-6AC9B92CF3A1}"/>
+              </a:ext>
+            </a:extLst>
+          </p:cNvPr>
+          <p:cNvSpPr/>
+          <p:nvPr/>
+        </p:nvSpPr>
+        <p:spPr>
+          <a:xfrm flipV="1">
+            <a:off x="4965699" y="3556000"/>
+            <a:ext cx="2879725" cy="495300"/>
+          </a:xfrm>
+          <a:prstGeom prst="rect">
+            <a:avLst/>
+          </a:prstGeom>
+          <a:noFill/>
+          <a:ln w="28575">
+            <a:solidFill>
+              <a:srgbClr val="FF0000"/>
+            </a:solidFill>
+          </a:ln>
+        </p:spPr>
+        <p:style>
+          <a:lnRef idx="2">
+            <a:schemeClr val="accent6"/>
+          </a:lnRef>
+          <a:fillRef idx="1">
+            <a:schemeClr val="lt1"/>
+          </a:fillRef>
+          <a:effectRef idx="0">
+            <a:schemeClr val="accent6"/>
+          </a:effectRef>
+          <a:fontRef idx="minor">
+            <a:schemeClr val="dk1"/>
+          </a:fontRef>
+        </p:style>
+        <p:txBody>
+          <a:bodyPr rtlCol="0" anchor="ctr"/>
+          <a:lstStyle/>
+          <a:p>
+            <a:pPr algn="ctr"/>
+            <a:endParaRPr kumimoji="1" lang="ja-JP" altLang="en-US"/>
+          </a:p>
+        </p:txBody>
+      </p:sp>
+    </p:spTree>
+    <p:extLst>
+      <p:ext uri="{BB962C8B-B14F-4D97-AF65-F5344CB8AC3E}">
+        <p14:creationId xmlns:p14="http://schemas.microsoft.com/office/powerpoint/2010/main" val="1711747926"/>
       </p:ext>
     </p:extLst>
   </p:cSld>
@@ -50436,128 +50086,6 @@
         <p:cNvPr id="1" name="">
           <a:extLst>
             <a:ext uri="{FF2B5EF4-FFF2-40B4-BE49-F238E27FC236}">
-              <a16:creationId xmlns:a16="http://schemas.microsoft.com/office/drawing/2014/main" id="{F253F93B-975B-B902-761D-FE8F9E9A482E}"/>
-            </a:ext>
-          </a:extLst>
-        </p:cNvPr>
-        <p:cNvGrpSpPr/>
-        <p:nvPr/>
-      </p:nvGrpSpPr>
-      <p:grpSpPr>
-        <a:xfrm>
-          <a:off x="0" y="0"/>
-          <a:ext cx="0" cy="0"/>
-          <a:chOff x="0" y="0"/>
-          <a:chExt cx="0" cy="0"/>
-        </a:xfrm>
-      </p:grpSpPr>
-      <p:pic>
-        <p:nvPicPr>
-          <p:cNvPr id="3" name="図 2">
-            <a:extLst>
-              <a:ext uri="{FF2B5EF4-FFF2-40B4-BE49-F238E27FC236}">
-                <a16:creationId xmlns:a16="http://schemas.microsoft.com/office/drawing/2014/main" id="{C1FCD0C8-B622-9B6D-6C98-467B170875CE}"/>
-              </a:ext>
-            </a:extLst>
-          </p:cNvPr>
-          <p:cNvPicPr>
-            <a:picLocks noChangeAspect="1"/>
-          </p:cNvPicPr>
-          <p:nvPr/>
-        </p:nvPicPr>
-        <p:blipFill>
-          <a:blip r:embed="rId2">
-            <a:extLst>
-              <a:ext uri="{28A0092B-C50C-407E-A947-70E740481C1C}">
-                <a14:useLocalDpi xmlns:a14="http://schemas.microsoft.com/office/drawing/2010/main" val="0"/>
-              </a:ext>
-            </a:extLst>
-          </a:blip>
-          <a:stretch>
-            <a:fillRect/>
-          </a:stretch>
-        </p:blipFill>
-        <p:spPr>
-          <a:xfrm>
-            <a:off x="4295775" y="2047875"/>
-            <a:ext cx="3600450" cy="2762250"/>
-          </a:xfrm>
-          <a:prstGeom prst="rect">
-            <a:avLst/>
-          </a:prstGeom>
-        </p:spPr>
-      </p:pic>
-      <p:sp>
-        <p:nvSpPr>
-          <p:cNvPr id="4" name="正方形/長方形 3">
-            <a:extLst>
-              <a:ext uri="{FF2B5EF4-FFF2-40B4-BE49-F238E27FC236}">
-                <a16:creationId xmlns:a16="http://schemas.microsoft.com/office/drawing/2014/main" id="{BF03B34E-2C76-5DD7-F3B7-6AC9B92CF3A1}"/>
-              </a:ext>
-            </a:extLst>
-          </p:cNvPr>
-          <p:cNvSpPr/>
-          <p:nvPr/>
-        </p:nvSpPr>
-        <p:spPr>
-          <a:xfrm flipV="1">
-            <a:off x="4965699" y="3556000"/>
-            <a:ext cx="2879725" cy="495300"/>
-          </a:xfrm>
-          <a:prstGeom prst="rect">
-            <a:avLst/>
-          </a:prstGeom>
-          <a:noFill/>
-          <a:ln w="28575">
-            <a:solidFill>
-              <a:srgbClr val="FF0000"/>
-            </a:solidFill>
-          </a:ln>
-        </p:spPr>
-        <p:style>
-          <a:lnRef idx="2">
-            <a:schemeClr val="accent6"/>
-          </a:lnRef>
-          <a:fillRef idx="1">
-            <a:schemeClr val="lt1"/>
-          </a:fillRef>
-          <a:effectRef idx="0">
-            <a:schemeClr val="accent6"/>
-          </a:effectRef>
-          <a:fontRef idx="minor">
-            <a:schemeClr val="dk1"/>
-          </a:fontRef>
-        </p:style>
-        <p:txBody>
-          <a:bodyPr rtlCol="0" anchor="ctr"/>
-          <a:lstStyle/>
-          <a:p>
-            <a:pPr algn="ctr"/>
-            <a:endParaRPr kumimoji="1" lang="ja-JP" altLang="en-US"/>
-          </a:p>
-        </p:txBody>
-      </p:sp>
-    </p:spTree>
-    <p:extLst>
-      <p:ext uri="{BB962C8B-B14F-4D97-AF65-F5344CB8AC3E}">
-        <p14:creationId xmlns:p14="http://schemas.microsoft.com/office/powerpoint/2010/main" val="1711747926"/>
-      </p:ext>
-    </p:extLst>
-  </p:cSld>
-  <p:clrMapOvr>
-    <a:masterClrMapping/>
-  </p:clrMapOvr>
-</p:sld>
-</file>
-
-<file path=ppt/slides/slide81.xml><?xml version="1.0" encoding="utf-8"?>
-<p:sld xmlns:a="http://schemas.openxmlformats.org/drawingml/2006/main" xmlns:r="http://schemas.openxmlformats.org/officeDocument/2006/relationships" xmlns:p="http://schemas.openxmlformats.org/presentationml/2006/main">
-  <p:cSld>
-    <p:spTree>
-      <p:nvGrpSpPr>
-        <p:cNvPr id="1" name="">
-          <a:extLst>
-            <a:ext uri="{FF2B5EF4-FFF2-40B4-BE49-F238E27FC236}">
               <a16:creationId xmlns:a16="http://schemas.microsoft.com/office/drawing/2014/main" id="{F44319D2-0EC2-A0CA-2AC2-0623598CBEB6}"/>
             </a:ext>
           </a:extLst>
@@ -50672,7 +50200,7 @@
 </p:sld>
 </file>
 
-<file path=ppt/slides/slide82.xml><?xml version="1.0" encoding="utf-8"?>
+<file path=ppt/slides/slide81.xml><?xml version="1.0" encoding="utf-8"?>
 <p:sld xmlns:a="http://schemas.openxmlformats.org/drawingml/2006/main" xmlns:r="http://schemas.openxmlformats.org/officeDocument/2006/relationships" xmlns:p="http://schemas.openxmlformats.org/presentationml/2006/main">
   <p:cSld>
     <p:spTree>
@@ -50708,7 +50236,7 @@
 </p:sld>
 </file>
 
-<file path=ppt/slides/slide83.xml><?xml version="1.0" encoding="utf-8"?>
+<file path=ppt/slides/slide82.xml><?xml version="1.0" encoding="utf-8"?>
 <p:sld xmlns:a="http://schemas.openxmlformats.org/drawingml/2006/main" xmlns:r="http://schemas.openxmlformats.org/officeDocument/2006/relationships" xmlns:p="http://schemas.openxmlformats.org/presentationml/2006/main">
   <p:cSld>
     <p:spTree>
@@ -50830,7 +50358,7 @@
 </p:sld>
 </file>
 
-<file path=ppt/slides/slide84.xml><?xml version="1.0" encoding="utf-8"?>
+<file path=ppt/slides/slide83.xml><?xml version="1.0" encoding="utf-8"?>
 <p:sld xmlns:a="http://schemas.openxmlformats.org/drawingml/2006/main" xmlns:r="http://schemas.openxmlformats.org/officeDocument/2006/relationships" xmlns:p="http://schemas.openxmlformats.org/presentationml/2006/main">
   <p:cSld>
     <p:spTree>
@@ -51002,7 +50530,7 @@
 </p:sld>
 </file>
 
-<file path=ppt/slides/slide85.xml><?xml version="1.0" encoding="utf-8"?>
+<file path=ppt/slides/slide84.xml><?xml version="1.0" encoding="utf-8"?>
 <p:sld xmlns:a="http://schemas.openxmlformats.org/drawingml/2006/main" xmlns:r="http://schemas.openxmlformats.org/officeDocument/2006/relationships" xmlns:p="http://schemas.openxmlformats.org/presentationml/2006/main">
   <p:cSld>
     <p:spTree>
@@ -51124,7 +50652,7 @@
 </p:sld>
 </file>
 
-<file path=ppt/slides/slide86.xml><?xml version="1.0" encoding="utf-8"?>
+<file path=ppt/slides/slide85.xml><?xml version="1.0" encoding="utf-8"?>
 <p:sld xmlns:a="http://schemas.openxmlformats.org/drawingml/2006/main" xmlns:r="http://schemas.openxmlformats.org/officeDocument/2006/relationships" xmlns:p="http://schemas.openxmlformats.org/presentationml/2006/main">
   <p:cSld>
     <p:spTree>
@@ -51246,7 +50774,7 @@
 </p:sld>
 </file>
 
-<file path=ppt/slides/slide87.xml><?xml version="1.0" encoding="utf-8"?>
+<file path=ppt/slides/slide86.xml><?xml version="1.0" encoding="utf-8"?>
 <p:sld xmlns:a="http://schemas.openxmlformats.org/drawingml/2006/main" xmlns:r="http://schemas.openxmlformats.org/officeDocument/2006/relationships" xmlns:p="http://schemas.openxmlformats.org/presentationml/2006/main">
   <p:cSld>
     <p:spTree>
@@ -51414,7 +50942,7 @@
 </p:sld>
 </file>
 
-<file path=ppt/slides/slide88.xml><?xml version="1.0" encoding="utf-8"?>
+<file path=ppt/slides/slide87.xml><?xml version="1.0" encoding="utf-8"?>
 <p:sld xmlns:a="http://schemas.openxmlformats.org/drawingml/2006/main" xmlns:r="http://schemas.openxmlformats.org/officeDocument/2006/relationships" xmlns:p="http://schemas.openxmlformats.org/presentationml/2006/main">
   <p:cSld>
     <p:spTree>
@@ -51450,7 +50978,7 @@
 </p:sld>
 </file>
 
-<file path=ppt/slides/slide89.xml><?xml version="1.0" encoding="utf-8"?>
+<file path=ppt/slides/slide88.xml><?xml version="1.0" encoding="utf-8"?>
 <p:sld xmlns:a="http://schemas.openxmlformats.org/drawingml/2006/main" xmlns:r="http://schemas.openxmlformats.org/officeDocument/2006/relationships" xmlns:p="http://schemas.openxmlformats.org/presentationml/2006/main">
   <p:cSld>
     <p:spTree>
@@ -51613,6 +51141,128 @@
     <p:extLst>
       <p:ext uri="{BB962C8B-B14F-4D97-AF65-F5344CB8AC3E}">
         <p14:creationId xmlns:p14="http://schemas.microsoft.com/office/powerpoint/2010/main" val="251339051"/>
+      </p:ext>
+    </p:extLst>
+  </p:cSld>
+  <p:clrMapOvr>
+    <a:masterClrMapping/>
+  </p:clrMapOvr>
+</p:sld>
+</file>
+
+<file path=ppt/slides/slide89.xml><?xml version="1.0" encoding="utf-8"?>
+<p:sld xmlns:a="http://schemas.openxmlformats.org/drawingml/2006/main" xmlns:r="http://schemas.openxmlformats.org/officeDocument/2006/relationships" xmlns:p="http://schemas.openxmlformats.org/presentationml/2006/main">
+  <p:cSld>
+    <p:spTree>
+      <p:nvGrpSpPr>
+        <p:cNvPr id="1" name="">
+          <a:extLst>
+            <a:ext uri="{FF2B5EF4-FFF2-40B4-BE49-F238E27FC236}">
+              <a16:creationId xmlns:a16="http://schemas.microsoft.com/office/drawing/2014/main" id="{FC9F031F-B6B7-40F1-7623-40E901DC0750}"/>
+            </a:ext>
+          </a:extLst>
+        </p:cNvPr>
+        <p:cNvGrpSpPr/>
+        <p:nvPr/>
+      </p:nvGrpSpPr>
+      <p:grpSpPr>
+        <a:xfrm>
+          <a:off x="0" y="0"/>
+          <a:ext cx="0" cy="0"/>
+          <a:chOff x="0" y="0"/>
+          <a:chExt cx="0" cy="0"/>
+        </a:xfrm>
+      </p:grpSpPr>
+      <p:pic>
+        <p:nvPicPr>
+          <p:cNvPr id="3" name="図 2">
+            <a:extLst>
+              <a:ext uri="{FF2B5EF4-FFF2-40B4-BE49-F238E27FC236}">
+                <a16:creationId xmlns:a16="http://schemas.microsoft.com/office/drawing/2014/main" id="{EB0907B9-ECF1-88BC-F2C8-6D127F0613E3}"/>
+              </a:ext>
+            </a:extLst>
+          </p:cNvPr>
+          <p:cNvPicPr>
+            <a:picLocks noChangeAspect="1"/>
+          </p:cNvPicPr>
+          <p:nvPr/>
+        </p:nvPicPr>
+        <p:blipFill>
+          <a:blip r:embed="rId2">
+            <a:extLst>
+              <a:ext uri="{28A0092B-C50C-407E-A947-70E740481C1C}">
+                <a14:useLocalDpi xmlns:a14="http://schemas.microsoft.com/office/drawing/2010/main" val="0"/>
+              </a:ext>
+            </a:extLst>
+          </a:blip>
+          <a:stretch>
+            <a:fillRect/>
+          </a:stretch>
+        </p:blipFill>
+        <p:spPr>
+          <a:xfrm>
+            <a:off x="4100512" y="2047875"/>
+            <a:ext cx="3990975" cy="2762250"/>
+          </a:xfrm>
+          <a:prstGeom prst="rect">
+            <a:avLst/>
+          </a:prstGeom>
+        </p:spPr>
+      </p:pic>
+      <p:sp>
+        <p:nvSpPr>
+          <p:cNvPr id="4" name="正方形/長方形 3">
+            <a:extLst>
+              <a:ext uri="{FF2B5EF4-FFF2-40B4-BE49-F238E27FC236}">
+                <a16:creationId xmlns:a16="http://schemas.microsoft.com/office/drawing/2014/main" id="{D7AB3F89-760F-870B-1AD5-2978E08F310A}"/>
+              </a:ext>
+            </a:extLst>
+          </p:cNvPr>
+          <p:cNvSpPr/>
+          <p:nvPr/>
+        </p:nvSpPr>
+        <p:spPr>
+          <a:xfrm flipV="1">
+            <a:off x="4119175" y="3221326"/>
+            <a:ext cx="432000" cy="432000"/>
+          </a:xfrm>
+          <a:prstGeom prst="rect">
+            <a:avLst/>
+          </a:prstGeom>
+          <a:noFill/>
+          <a:ln w="28575">
+            <a:solidFill>
+              <a:srgbClr val="FF0000"/>
+            </a:solidFill>
+          </a:ln>
+        </p:spPr>
+        <p:style>
+          <a:lnRef idx="2">
+            <a:schemeClr val="accent6"/>
+          </a:lnRef>
+          <a:fillRef idx="1">
+            <a:schemeClr val="lt1"/>
+          </a:fillRef>
+          <a:effectRef idx="0">
+            <a:schemeClr val="accent6"/>
+          </a:effectRef>
+          <a:fontRef idx="minor">
+            <a:schemeClr val="dk1"/>
+          </a:fontRef>
+        </p:style>
+        <p:txBody>
+          <a:bodyPr rtlCol="0" anchor="ctr"/>
+          <a:lstStyle/>
+          <a:p>
+            <a:pPr algn="ctr"/>
+            <a:endParaRPr kumimoji="1" lang="ja-JP" altLang="en-US"/>
+          </a:p>
+        </p:txBody>
+      </p:sp>
+    </p:spTree>
+    <p:extLst>
+      <p:ext uri="{BB962C8B-B14F-4D97-AF65-F5344CB8AC3E}">
+        <p14:creationId xmlns:p14="http://schemas.microsoft.com/office/powerpoint/2010/main" val="2214367467"/>
       </p:ext>
     </p:extLst>
   </p:cSld>
@@ -51666,128 +51316,6 @@
         <p:cNvPr id="1" name="">
           <a:extLst>
             <a:ext uri="{FF2B5EF4-FFF2-40B4-BE49-F238E27FC236}">
-              <a16:creationId xmlns:a16="http://schemas.microsoft.com/office/drawing/2014/main" id="{FC9F031F-B6B7-40F1-7623-40E901DC0750}"/>
-            </a:ext>
-          </a:extLst>
-        </p:cNvPr>
-        <p:cNvGrpSpPr/>
-        <p:nvPr/>
-      </p:nvGrpSpPr>
-      <p:grpSpPr>
-        <a:xfrm>
-          <a:off x="0" y="0"/>
-          <a:ext cx="0" cy="0"/>
-          <a:chOff x="0" y="0"/>
-          <a:chExt cx="0" cy="0"/>
-        </a:xfrm>
-      </p:grpSpPr>
-      <p:pic>
-        <p:nvPicPr>
-          <p:cNvPr id="3" name="図 2">
-            <a:extLst>
-              <a:ext uri="{FF2B5EF4-FFF2-40B4-BE49-F238E27FC236}">
-                <a16:creationId xmlns:a16="http://schemas.microsoft.com/office/drawing/2014/main" id="{EB0907B9-ECF1-88BC-F2C8-6D127F0613E3}"/>
-              </a:ext>
-            </a:extLst>
-          </p:cNvPr>
-          <p:cNvPicPr>
-            <a:picLocks noChangeAspect="1"/>
-          </p:cNvPicPr>
-          <p:nvPr/>
-        </p:nvPicPr>
-        <p:blipFill>
-          <a:blip r:embed="rId2">
-            <a:extLst>
-              <a:ext uri="{28A0092B-C50C-407E-A947-70E740481C1C}">
-                <a14:useLocalDpi xmlns:a14="http://schemas.microsoft.com/office/drawing/2010/main" val="0"/>
-              </a:ext>
-            </a:extLst>
-          </a:blip>
-          <a:stretch>
-            <a:fillRect/>
-          </a:stretch>
-        </p:blipFill>
-        <p:spPr>
-          <a:xfrm>
-            <a:off x="4100512" y="2047875"/>
-            <a:ext cx="3990975" cy="2762250"/>
-          </a:xfrm>
-          <a:prstGeom prst="rect">
-            <a:avLst/>
-          </a:prstGeom>
-        </p:spPr>
-      </p:pic>
-      <p:sp>
-        <p:nvSpPr>
-          <p:cNvPr id="4" name="正方形/長方形 3">
-            <a:extLst>
-              <a:ext uri="{FF2B5EF4-FFF2-40B4-BE49-F238E27FC236}">
-                <a16:creationId xmlns:a16="http://schemas.microsoft.com/office/drawing/2014/main" id="{D7AB3F89-760F-870B-1AD5-2978E08F310A}"/>
-              </a:ext>
-            </a:extLst>
-          </p:cNvPr>
-          <p:cNvSpPr/>
-          <p:nvPr/>
-        </p:nvSpPr>
-        <p:spPr>
-          <a:xfrm flipV="1">
-            <a:off x="4119175" y="3221326"/>
-            <a:ext cx="432000" cy="432000"/>
-          </a:xfrm>
-          <a:prstGeom prst="rect">
-            <a:avLst/>
-          </a:prstGeom>
-          <a:noFill/>
-          <a:ln w="28575">
-            <a:solidFill>
-              <a:srgbClr val="FF0000"/>
-            </a:solidFill>
-          </a:ln>
-        </p:spPr>
-        <p:style>
-          <a:lnRef idx="2">
-            <a:schemeClr val="accent6"/>
-          </a:lnRef>
-          <a:fillRef idx="1">
-            <a:schemeClr val="lt1"/>
-          </a:fillRef>
-          <a:effectRef idx="0">
-            <a:schemeClr val="accent6"/>
-          </a:effectRef>
-          <a:fontRef idx="minor">
-            <a:schemeClr val="dk1"/>
-          </a:fontRef>
-        </p:style>
-        <p:txBody>
-          <a:bodyPr rtlCol="0" anchor="ctr"/>
-          <a:lstStyle/>
-          <a:p>
-            <a:pPr algn="ctr"/>
-            <a:endParaRPr kumimoji="1" lang="ja-JP" altLang="en-US"/>
-          </a:p>
-        </p:txBody>
-      </p:sp>
-    </p:spTree>
-    <p:extLst>
-      <p:ext uri="{BB962C8B-B14F-4D97-AF65-F5344CB8AC3E}">
-        <p14:creationId xmlns:p14="http://schemas.microsoft.com/office/powerpoint/2010/main" val="2214367467"/>
-      </p:ext>
-    </p:extLst>
-  </p:cSld>
-  <p:clrMapOvr>
-    <a:masterClrMapping/>
-  </p:clrMapOvr>
-</p:sld>
-</file>
-
-<file path=ppt/slides/slide91.xml><?xml version="1.0" encoding="utf-8"?>
-<p:sld xmlns:a="http://schemas.openxmlformats.org/drawingml/2006/main" xmlns:r="http://schemas.openxmlformats.org/officeDocument/2006/relationships" xmlns:p="http://schemas.openxmlformats.org/presentationml/2006/main">
-  <p:cSld>
-    <p:spTree>
-      <p:nvGrpSpPr>
-        <p:cNvPr id="1" name="">
-          <a:extLst>
-            <a:ext uri="{FF2B5EF4-FFF2-40B4-BE49-F238E27FC236}">
               <a16:creationId xmlns:a16="http://schemas.microsoft.com/office/drawing/2014/main" id="{35A34F90-D11B-B88F-3B83-5669E338DB12}"/>
             </a:ext>
           </a:extLst>
@@ -51902,7 +51430,7 @@
 </p:sld>
 </file>
 
-<file path=ppt/slides/slide92.xml><?xml version="1.0" encoding="utf-8"?>
+<file path=ppt/slides/slide91.xml><?xml version="1.0" encoding="utf-8"?>
 <p:sld xmlns:a="http://schemas.openxmlformats.org/drawingml/2006/main" xmlns:r="http://schemas.openxmlformats.org/officeDocument/2006/relationships" xmlns:p="http://schemas.openxmlformats.org/presentationml/2006/main">
   <p:cSld>
     <p:spTree>
@@ -52162,7 +51690,7 @@
 </p:sld>
 </file>
 
-<file path=ppt/slides/slide93.xml><?xml version="1.0" encoding="utf-8"?>
+<file path=ppt/slides/slide92.xml><?xml version="1.0" encoding="utf-8"?>
 <p:sld xmlns:a="http://schemas.openxmlformats.org/drawingml/2006/main" xmlns:r="http://schemas.openxmlformats.org/officeDocument/2006/relationships" xmlns:p="http://schemas.openxmlformats.org/presentationml/2006/main">
   <p:cSld>
     <p:spTree>
@@ -52270,7 +51798,7 @@
 </p:sld>
 </file>
 
-<file path=ppt/slides/slide94.xml><?xml version="1.0" encoding="utf-8"?>
+<file path=ppt/slides/slide93.xml><?xml version="1.0" encoding="utf-8"?>
 <p:sld xmlns:a="http://schemas.openxmlformats.org/drawingml/2006/main" xmlns:r="http://schemas.openxmlformats.org/officeDocument/2006/relationships" xmlns:p="http://schemas.openxmlformats.org/presentationml/2006/main">
   <p:cSld>
     <p:spTree>
@@ -52347,7 +51875,7 @@
 </p:sld>
 </file>
 
-<file path=ppt/slides/slide95.xml><?xml version="1.0" encoding="utf-8"?>
+<file path=ppt/slides/slide94.xml><?xml version="1.0" encoding="utf-8"?>
 <p:sld xmlns:a="http://schemas.openxmlformats.org/drawingml/2006/main" xmlns:r="http://schemas.openxmlformats.org/officeDocument/2006/relationships" xmlns:p="http://schemas.openxmlformats.org/presentationml/2006/main">
   <p:cSld>
     <p:spTree>
@@ -52383,7 +51911,7 @@
 </p:sld>
 </file>
 
-<file path=ppt/slides/slide96.xml><?xml version="1.0" encoding="utf-8"?>
+<file path=ppt/slides/slide95.xml><?xml version="1.0" encoding="utf-8"?>
 <p:sld xmlns:a="http://schemas.openxmlformats.org/drawingml/2006/main" xmlns:r="http://schemas.openxmlformats.org/officeDocument/2006/relationships" xmlns:p="http://schemas.openxmlformats.org/presentationml/2006/main">
   <p:cSld>
     <p:spTree>
@@ -52541,7 +52069,7 @@
 </p:sld>
 </file>
 
-<file path=ppt/slides/slide97.xml><?xml version="1.0" encoding="utf-8"?>
+<file path=ppt/slides/slide96.xml><?xml version="1.0" encoding="utf-8"?>
 <p:sld xmlns:a="http://schemas.openxmlformats.org/drawingml/2006/main" xmlns:r="http://schemas.openxmlformats.org/officeDocument/2006/relationships" xmlns:p="http://schemas.openxmlformats.org/presentationml/2006/main">
   <p:cSld>
     <p:spTree>
@@ -52701,7 +52229,7 @@
 </p:sld>
 </file>
 
-<file path=ppt/slides/slide98.xml><?xml version="1.0" encoding="utf-8"?>
+<file path=ppt/slides/slide97.xml><?xml version="1.0" encoding="utf-8"?>
 <p:sld xmlns:a="http://schemas.openxmlformats.org/drawingml/2006/main" xmlns:r="http://schemas.openxmlformats.org/officeDocument/2006/relationships" xmlns:p="http://schemas.openxmlformats.org/presentationml/2006/main">
   <p:cSld>
     <p:spTree>
@@ -52823,7 +52351,7 @@
 </p:sld>
 </file>
 
-<file path=ppt/slides/slide99.xml><?xml version="1.0" encoding="utf-8"?>
+<file path=ppt/slides/slide98.xml><?xml version="1.0" encoding="utf-8"?>
 <p:sld xmlns:a="http://schemas.openxmlformats.org/drawingml/2006/main" xmlns:r="http://schemas.openxmlformats.org/officeDocument/2006/relationships" xmlns:p="http://schemas.openxmlformats.org/presentationml/2006/main">
   <p:cSld>
     <p:spTree>
@@ -52974,6 +52502,42 @@
     <p:extLst>
       <p:ext uri="{BB962C8B-B14F-4D97-AF65-F5344CB8AC3E}">
         <p14:creationId xmlns:p14="http://schemas.microsoft.com/office/powerpoint/2010/main" val="1673256633"/>
+      </p:ext>
+    </p:extLst>
+  </p:cSld>
+  <p:clrMapOvr>
+    <a:masterClrMapping/>
+  </p:clrMapOvr>
+</p:sld>
+</file>
+
+<file path=ppt/slides/slide99.xml><?xml version="1.0" encoding="utf-8"?>
+<p:sld xmlns:a="http://schemas.openxmlformats.org/drawingml/2006/main" xmlns:r="http://schemas.openxmlformats.org/officeDocument/2006/relationships" xmlns:p="http://schemas.openxmlformats.org/presentationml/2006/main">
+  <p:cSld>
+    <p:spTree>
+      <p:nvGrpSpPr>
+        <p:cNvPr id="1" name="">
+          <a:extLst>
+            <a:ext uri="{FF2B5EF4-FFF2-40B4-BE49-F238E27FC236}">
+              <a16:creationId xmlns:a16="http://schemas.microsoft.com/office/drawing/2014/main" id="{3E1076F6-F09B-6C65-709A-A33333D53F07}"/>
+            </a:ext>
+          </a:extLst>
+        </p:cNvPr>
+        <p:cNvGrpSpPr/>
+        <p:nvPr/>
+      </p:nvGrpSpPr>
+      <p:grpSpPr>
+        <a:xfrm>
+          <a:off x="0" y="0"/>
+          <a:ext cx="0" cy="0"/>
+          <a:chOff x="0" y="0"/>
+          <a:chExt cx="0" cy="0"/>
+        </a:xfrm>
+      </p:grpSpPr>
+    </p:spTree>
+    <p:extLst>
+      <p:ext uri="{BB962C8B-B14F-4D97-AF65-F5344CB8AC3E}">
+        <p14:creationId xmlns:p14="http://schemas.microsoft.com/office/powerpoint/2010/main" val="3798773095"/>
       </p:ext>
     </p:extLst>
   </p:cSld>

--- a/01_テキスト/Git入門_図.pptx
+++ b/01_テキスト/Git入門_図.pptx
@@ -7609,6 +7609,56 @@
           <a:xfrm flipV="1">
             <a:off x="8138530" y="2608622"/>
             <a:ext cx="2143805" cy="274539"/>
+          </a:xfrm>
+          <a:prstGeom prst="rect">
+            <a:avLst/>
+          </a:prstGeom>
+          <a:noFill/>
+          <a:ln w="28575">
+            <a:solidFill>
+              <a:srgbClr val="FF0000"/>
+            </a:solidFill>
+          </a:ln>
+        </p:spPr>
+        <p:style>
+          <a:lnRef idx="2">
+            <a:schemeClr val="accent6"/>
+          </a:lnRef>
+          <a:fillRef idx="1">
+            <a:schemeClr val="lt1"/>
+          </a:fillRef>
+          <a:effectRef idx="0">
+            <a:schemeClr val="accent6"/>
+          </a:effectRef>
+          <a:fontRef idx="minor">
+            <a:schemeClr val="dk1"/>
+          </a:fontRef>
+        </p:style>
+        <p:txBody>
+          <a:bodyPr rtlCol="0" anchor="ctr"/>
+          <a:lstStyle/>
+          <a:p>
+            <a:pPr algn="ctr"/>
+            <a:endParaRPr kumimoji="1" lang="ja-JP" altLang="en-US"/>
+          </a:p>
+        </p:txBody>
+      </p:sp>
+      <p:sp>
+        <p:nvSpPr>
+          <p:cNvPr id="2" name="正方形/長方形 1">
+            <a:extLst>
+              <a:ext uri="{FF2B5EF4-FFF2-40B4-BE49-F238E27FC236}">
+                <a16:creationId xmlns:a16="http://schemas.microsoft.com/office/drawing/2014/main" id="{E955F9FB-A640-3D0A-59AA-02F538832099}"/>
+              </a:ext>
+            </a:extLst>
+          </p:cNvPr>
+          <p:cNvSpPr/>
+          <p:nvPr/>
+        </p:nvSpPr>
+        <p:spPr>
+          <a:xfrm flipV="1">
+            <a:off x="5447231" y="1720364"/>
+            <a:ext cx="252000" cy="252000"/>
           </a:xfrm>
           <a:prstGeom prst="rect">
             <a:avLst/>

--- a/01_テキスト/Git入門_図.pptx
+++ b/01_テキスト/Git入門_図.pptx
@@ -20781,42 +20781,6 @@
       </p:cxnSp>
       <p:pic>
         <p:nvPicPr>
-          <p:cNvPr id="2" name="図 1">
-            <a:extLst>
-              <a:ext uri="{FF2B5EF4-FFF2-40B4-BE49-F238E27FC236}">
-                <a16:creationId xmlns:a16="http://schemas.microsoft.com/office/drawing/2014/main" id="{9CB39E36-D204-9010-21BA-A70770FA0A8C}"/>
-              </a:ext>
-            </a:extLst>
-          </p:cNvPr>
-          <p:cNvPicPr>
-            <a:picLocks noChangeAspect="1"/>
-          </p:cNvPicPr>
-          <p:nvPr/>
-        </p:nvPicPr>
-        <p:blipFill>
-          <a:blip r:embed="rId3">
-            <a:extLst>
-              <a:ext uri="{28A0092B-C50C-407E-A947-70E740481C1C}">
-                <a14:useLocalDpi xmlns:a14="http://schemas.microsoft.com/office/drawing/2010/main" val="0"/>
-              </a:ext>
-            </a:extLst>
-          </a:blip>
-          <a:stretch>
-            <a:fillRect/>
-          </a:stretch>
-        </p:blipFill>
-        <p:spPr>
-          <a:xfrm>
-            <a:off x="5919313" y="5606276"/>
-            <a:ext cx="871225" cy="871225"/>
-          </a:xfrm>
-          <a:prstGeom prst="rect">
-            <a:avLst/>
-          </a:prstGeom>
-        </p:spPr>
-      </p:pic>
-      <p:pic>
-        <p:nvPicPr>
           <p:cNvPr id="5" name="図 4">
             <a:extLst>
               <a:ext uri="{FF2B5EF4-FFF2-40B4-BE49-F238E27FC236}">
@@ -21122,10 +21086,10 @@
       </p:cxnSp>
       <p:sp>
         <p:nvSpPr>
-          <p:cNvPr id="16" name="テキスト ボックス 15">
-            <a:extLst>
-              <a:ext uri="{FF2B5EF4-FFF2-40B4-BE49-F238E27FC236}">
-                <a16:creationId xmlns:a16="http://schemas.microsoft.com/office/drawing/2014/main" id="{E7808924-7EFE-89F9-F834-A570E0E838BB}"/>
+          <p:cNvPr id="32" name="テキスト ボックス 31">
+            <a:extLst>
+              <a:ext uri="{FF2B5EF4-FFF2-40B4-BE49-F238E27FC236}">
+                <a16:creationId xmlns:a16="http://schemas.microsoft.com/office/drawing/2014/main" id="{D4C58CA9-F931-708E-12F8-7643C4A3D6BE}"/>
               </a:ext>
             </a:extLst>
           </p:cNvPr>
@@ -21134,8 +21098,8 @@
         </p:nvSpPr>
         <p:spPr>
           <a:xfrm>
-            <a:off x="6748892" y="5910550"/>
-            <a:ext cx="723275" cy="307777"/>
+            <a:off x="6761672" y="1192382"/>
+            <a:ext cx="537327" cy="369332"/>
           </a:xfrm>
           <a:prstGeom prst="rect">
             <a:avLst/>
@@ -21149,18 +21113,55 @@
           <a:lstStyle/>
           <a:p>
             <a:r>
-              <a:rPr kumimoji="1" lang="ja-JP" altLang="en-US" sz="1400" b="1" dirty="0"/>
-              <a:t>または</a:t>
-            </a:r>
+              <a:rPr kumimoji="1" lang="en-US" altLang="ja-JP" b="1" dirty="0"/>
+              <a:t>.git</a:t>
+            </a:r>
+            <a:endParaRPr kumimoji="1" lang="ja-JP" altLang="en-US" b="1" dirty="0"/>
+          </a:p>
+        </p:txBody>
+      </p:sp>
+      <p:sp>
+        <p:nvSpPr>
+          <p:cNvPr id="33" name="テキスト ボックス 32">
+            <a:extLst>
+              <a:ext uri="{FF2B5EF4-FFF2-40B4-BE49-F238E27FC236}">
+                <a16:creationId xmlns:a16="http://schemas.microsoft.com/office/drawing/2014/main" id="{0F8720C4-C7DE-B2FA-1DF2-686AB92C9253}"/>
+              </a:ext>
+            </a:extLst>
+          </p:cNvPr>
+          <p:cNvSpPr txBox="1"/>
+          <p:nvPr/>
+        </p:nvSpPr>
+        <p:spPr>
+          <a:xfrm>
+            <a:off x="6761672" y="4989947"/>
+            <a:ext cx="537327" cy="369332"/>
+          </a:xfrm>
+          <a:prstGeom prst="rect">
+            <a:avLst/>
+          </a:prstGeom>
+          <a:noFill/>
+        </p:spPr>
+        <p:txBody>
+          <a:bodyPr wrap="none" rtlCol="0">
+            <a:spAutoFit/>
+          </a:bodyPr>
+          <a:lstStyle/>
+          <a:p>
+            <a:r>
+              <a:rPr kumimoji="1" lang="en-US" altLang="ja-JP" b="1" dirty="0"/>
+              <a:t>.git</a:t>
+            </a:r>
+            <a:endParaRPr kumimoji="1" lang="ja-JP" altLang="en-US" b="1" dirty="0"/>
           </a:p>
         </p:txBody>
       </p:sp>
       <p:grpSp>
         <p:nvGrpSpPr>
-          <p:cNvPr id="26" name="グループ化 25">
-            <a:extLst>
-              <a:ext uri="{FF2B5EF4-FFF2-40B4-BE49-F238E27FC236}">
-                <a16:creationId xmlns:a16="http://schemas.microsoft.com/office/drawing/2014/main" id="{7E2FDB25-17B0-9D56-0B0B-743510D1854F}"/>
+          <p:cNvPr id="3" name="グループ化 2">
+            <a:extLst>
+              <a:ext uri="{FF2B5EF4-FFF2-40B4-BE49-F238E27FC236}">
+                <a16:creationId xmlns:a16="http://schemas.microsoft.com/office/drawing/2014/main" id="{79B2EEAA-EEB6-311B-4964-B9A0C8F31CF4}"/>
               </a:ext>
             </a:extLst>
           </p:cNvPr>
@@ -21169,7 +21170,7 @@
         </p:nvGrpSpPr>
         <p:grpSpPr>
           <a:xfrm>
-            <a:off x="7472167" y="5617292"/>
+            <a:off x="5791689" y="5614730"/>
             <a:ext cx="1751021" cy="871225"/>
             <a:chOff x="7288481" y="5613979"/>
             <a:chExt cx="1751021" cy="871225"/>
@@ -21177,10 +21178,10 @@
         </p:grpSpPr>
         <p:pic>
           <p:nvPicPr>
-            <p:cNvPr id="17" name="図 16">
+            <p:cNvPr id="4" name="図 3">
               <a:extLst>
                 <a:ext uri="{FF2B5EF4-FFF2-40B4-BE49-F238E27FC236}">
-                  <a16:creationId xmlns:a16="http://schemas.microsoft.com/office/drawing/2014/main" id="{5139B4A2-E884-1187-22FA-F34FCA52DDBF}"/>
+                  <a16:creationId xmlns:a16="http://schemas.microsoft.com/office/drawing/2014/main" id="{8E9C9E76-5FDA-359F-FFE9-B207CCBBEC4A}"/>
                 </a:ext>
               </a:extLst>
             </p:cNvPr>
@@ -21213,10 +21214,10 @@
         </p:pic>
         <p:pic>
           <p:nvPicPr>
-            <p:cNvPr id="21" name="図 20">
+            <p:cNvPr id="8" name="図 7">
               <a:extLst>
                 <a:ext uri="{FF2B5EF4-FFF2-40B4-BE49-F238E27FC236}">
-                  <a16:creationId xmlns:a16="http://schemas.microsoft.com/office/drawing/2014/main" id="{1804D995-F681-0CDE-4C4B-85FCCB319B5C}"/>
+                  <a16:creationId xmlns:a16="http://schemas.microsoft.com/office/drawing/2014/main" id="{9F83657C-D3CD-3087-4831-93AE181AA5A0}"/>
                 </a:ext>
               </a:extLst>
             </p:cNvPr>
@@ -21256,10 +21257,10 @@
         </p:pic>
         <p:cxnSp>
           <p:nvCxnSpPr>
-            <p:cNvPr id="22" name="直線矢印コネクタ 21">
+            <p:cNvPr id="19" name="直線矢印コネクタ 18">
               <a:extLst>
                 <a:ext uri="{FF2B5EF4-FFF2-40B4-BE49-F238E27FC236}">
-                  <a16:creationId xmlns:a16="http://schemas.microsoft.com/office/drawing/2014/main" id="{FF593104-7518-71DF-1EFC-0B7A223CF042}"/>
+                  <a16:creationId xmlns:a16="http://schemas.microsoft.com/office/drawing/2014/main" id="{FECF7ACE-AFD0-5C3F-2A4C-F85EBD872943}"/>
                 </a:ext>
               </a:extLst>
             </p:cNvPr>
@@ -21296,78 +21297,6 @@
           </p:style>
         </p:cxnSp>
       </p:grpSp>
-      <p:sp>
-        <p:nvSpPr>
-          <p:cNvPr id="32" name="テキスト ボックス 31">
-            <a:extLst>
-              <a:ext uri="{FF2B5EF4-FFF2-40B4-BE49-F238E27FC236}">
-                <a16:creationId xmlns:a16="http://schemas.microsoft.com/office/drawing/2014/main" id="{D4C58CA9-F931-708E-12F8-7643C4A3D6BE}"/>
-              </a:ext>
-            </a:extLst>
-          </p:cNvPr>
-          <p:cNvSpPr txBox="1"/>
-          <p:nvPr/>
-        </p:nvSpPr>
-        <p:spPr>
-          <a:xfrm>
-            <a:off x="6761672" y="1192382"/>
-            <a:ext cx="537327" cy="369332"/>
-          </a:xfrm>
-          <a:prstGeom prst="rect">
-            <a:avLst/>
-          </a:prstGeom>
-          <a:noFill/>
-        </p:spPr>
-        <p:txBody>
-          <a:bodyPr wrap="none" rtlCol="0">
-            <a:spAutoFit/>
-          </a:bodyPr>
-          <a:lstStyle/>
-          <a:p>
-            <a:r>
-              <a:rPr kumimoji="1" lang="en-US" altLang="ja-JP" b="1" dirty="0"/>
-              <a:t>.git</a:t>
-            </a:r>
-            <a:endParaRPr kumimoji="1" lang="ja-JP" altLang="en-US" b="1" dirty="0"/>
-          </a:p>
-        </p:txBody>
-      </p:sp>
-      <p:sp>
-        <p:nvSpPr>
-          <p:cNvPr id="33" name="テキスト ボックス 32">
-            <a:extLst>
-              <a:ext uri="{FF2B5EF4-FFF2-40B4-BE49-F238E27FC236}">
-                <a16:creationId xmlns:a16="http://schemas.microsoft.com/office/drawing/2014/main" id="{0F8720C4-C7DE-B2FA-1DF2-686AB92C9253}"/>
-              </a:ext>
-            </a:extLst>
-          </p:cNvPr>
-          <p:cNvSpPr txBox="1"/>
-          <p:nvPr/>
-        </p:nvSpPr>
-        <p:spPr>
-          <a:xfrm>
-            <a:off x="6761672" y="4989947"/>
-            <a:ext cx="537327" cy="369332"/>
-          </a:xfrm>
-          <a:prstGeom prst="rect">
-            <a:avLst/>
-          </a:prstGeom>
-          <a:noFill/>
-        </p:spPr>
-        <p:txBody>
-          <a:bodyPr wrap="none" rtlCol="0">
-            <a:spAutoFit/>
-          </a:bodyPr>
-          <a:lstStyle/>
-          <a:p>
-            <a:r>
-              <a:rPr kumimoji="1" lang="en-US" altLang="ja-JP" b="1" dirty="0"/>
-              <a:t>.git</a:t>
-            </a:r>
-            <a:endParaRPr kumimoji="1" lang="ja-JP" altLang="en-US" b="1" dirty="0"/>
-          </a:p>
-        </p:txBody>
-      </p:sp>
     </p:spTree>
     <p:extLst>
       <p:ext uri="{BB962C8B-B14F-4D97-AF65-F5344CB8AC3E}">
@@ -22241,77 +22170,6 @@
           </a:p>
         </p:txBody>
       </p:sp>
-      <p:pic>
-        <p:nvPicPr>
-          <p:cNvPr id="37" name="図 36">
-            <a:extLst>
-              <a:ext uri="{FF2B5EF4-FFF2-40B4-BE49-F238E27FC236}">
-                <a16:creationId xmlns:a16="http://schemas.microsoft.com/office/drawing/2014/main" id="{315B3FF9-F174-6B40-E968-7A5C81AF4655}"/>
-              </a:ext>
-            </a:extLst>
-          </p:cNvPr>
-          <p:cNvPicPr>
-            <a:picLocks noChangeAspect="1"/>
-          </p:cNvPicPr>
-          <p:nvPr/>
-        </p:nvPicPr>
-        <p:blipFill>
-          <a:blip r:embed="rId3">
-            <a:extLst>
-              <a:ext uri="{28A0092B-C50C-407E-A947-70E740481C1C}">
-                <a14:useLocalDpi xmlns:a14="http://schemas.microsoft.com/office/drawing/2010/main" val="0"/>
-              </a:ext>
-            </a:extLst>
-          </a:blip>
-          <a:stretch>
-            <a:fillRect/>
-          </a:stretch>
-        </p:blipFill>
-        <p:spPr>
-          <a:xfrm>
-            <a:off x="5685087" y="1722182"/>
-            <a:ext cx="871225" cy="871225"/>
-          </a:xfrm>
-          <a:prstGeom prst="rect">
-            <a:avLst/>
-          </a:prstGeom>
-        </p:spPr>
-      </p:pic>
-      <p:sp>
-        <p:nvSpPr>
-          <p:cNvPr id="38" name="テキスト ボックス 37">
-            <a:extLst>
-              <a:ext uri="{FF2B5EF4-FFF2-40B4-BE49-F238E27FC236}">
-                <a16:creationId xmlns:a16="http://schemas.microsoft.com/office/drawing/2014/main" id="{67E34D8A-4920-3483-F894-7036734CBA5F}"/>
-              </a:ext>
-            </a:extLst>
-          </p:cNvPr>
-          <p:cNvSpPr txBox="1"/>
-          <p:nvPr/>
-        </p:nvSpPr>
-        <p:spPr>
-          <a:xfrm>
-            <a:off x="6514666" y="2026456"/>
-            <a:ext cx="723275" cy="307777"/>
-          </a:xfrm>
-          <a:prstGeom prst="rect">
-            <a:avLst/>
-          </a:prstGeom>
-          <a:noFill/>
-        </p:spPr>
-        <p:txBody>
-          <a:bodyPr wrap="none" rtlCol="0">
-            <a:spAutoFit/>
-          </a:bodyPr>
-          <a:lstStyle/>
-          <a:p>
-            <a:r>
-              <a:rPr kumimoji="1" lang="ja-JP" altLang="en-US" sz="1400" b="1" dirty="0"/>
-              <a:t>または</a:t>
-            </a:r>
-          </a:p>
-        </p:txBody>
-      </p:sp>
       <p:grpSp>
         <p:nvGrpSpPr>
           <p:cNvPr id="39" name="グループ化 38">
@@ -22326,7 +22184,7 @@
         </p:nvGrpSpPr>
         <p:grpSpPr>
           <a:xfrm>
-            <a:off x="7237941" y="1733198"/>
+            <a:off x="5791689" y="1733198"/>
             <a:ext cx="1751021" cy="871225"/>
             <a:chOff x="7288481" y="5613979"/>
             <a:chExt cx="1751021" cy="871225"/>
@@ -22815,83 +22673,118 @@
           </a:p>
         </p:txBody>
       </p:sp>
-      <p:pic>
-        <p:nvPicPr>
-          <p:cNvPr id="52" name="図 51">
-            <a:extLst>
-              <a:ext uri="{FF2B5EF4-FFF2-40B4-BE49-F238E27FC236}">
-                <a16:creationId xmlns:a16="http://schemas.microsoft.com/office/drawing/2014/main" id="{17668B92-C953-A8CF-8139-37B0503B8084}"/>
-              </a:ext>
-            </a:extLst>
-          </p:cNvPr>
-          <p:cNvPicPr>
-            <a:picLocks noChangeAspect="1"/>
-          </p:cNvPicPr>
-          <p:nvPr/>
-        </p:nvPicPr>
-        <p:blipFill>
-          <a:blip r:embed="rId3">
-            <a:extLst>
-              <a:ext uri="{28A0092B-C50C-407E-A947-70E740481C1C}">
-                <a14:useLocalDpi xmlns:a14="http://schemas.microsoft.com/office/drawing/2010/main" val="0"/>
-              </a:ext>
-            </a:extLst>
-          </a:blip>
-          <a:stretch>
-            <a:fillRect/>
-          </a:stretch>
-        </p:blipFill>
-        <p:spPr>
-          <a:xfrm>
-            <a:off x="5685087" y="5532948"/>
-            <a:ext cx="871225" cy="871225"/>
-          </a:xfrm>
-          <a:prstGeom prst="rect">
-            <a:avLst/>
-          </a:prstGeom>
-        </p:spPr>
-      </p:pic>
       <p:sp>
         <p:nvSpPr>
-          <p:cNvPr id="53" name="テキスト ボックス 52">
-            <a:extLst>
-              <a:ext uri="{FF2B5EF4-FFF2-40B4-BE49-F238E27FC236}">
-                <a16:creationId xmlns:a16="http://schemas.microsoft.com/office/drawing/2014/main" id="{0DBB5F54-A426-6EBE-8DD3-B3F1A2C8ECEE}"/>
-              </a:ext>
-            </a:extLst>
-          </p:cNvPr>
-          <p:cNvSpPr txBox="1"/>
+          <p:cNvPr id="60" name="四角形: 角を丸くする 59">
+            <a:extLst>
+              <a:ext uri="{FF2B5EF4-FFF2-40B4-BE49-F238E27FC236}">
+                <a16:creationId xmlns:a16="http://schemas.microsoft.com/office/drawing/2014/main" id="{25F829FB-B368-8780-40F5-6D8990B0762E}"/>
+              </a:ext>
+            </a:extLst>
+          </p:cNvPr>
+          <p:cNvSpPr/>
           <p:nvPr/>
         </p:nvSpPr>
         <p:spPr>
           <a:xfrm>
-            <a:off x="6514666" y="5837222"/>
-            <a:ext cx="723275" cy="307777"/>
-          </a:xfrm>
-          <a:prstGeom prst="rect">
-            <a:avLst/>
-          </a:prstGeom>
-          <a:noFill/>
-        </p:spPr>
+            <a:off x="7075772" y="4882765"/>
+            <a:ext cx="1800000" cy="504000"/>
+          </a:xfrm>
+          <a:prstGeom prst="roundRect">
+            <a:avLst/>
+          </a:prstGeom>
+          <a:ln w="38100">
+            <a:solidFill>
+              <a:schemeClr val="accent4">
+                <a:lumMod val="75000"/>
+              </a:schemeClr>
+            </a:solidFill>
+          </a:ln>
+        </p:spPr>
+        <p:style>
+          <a:lnRef idx="2">
+            <a:schemeClr val="accent6"/>
+          </a:lnRef>
+          <a:fillRef idx="1">
+            <a:schemeClr val="lt1"/>
+          </a:fillRef>
+          <a:effectRef idx="0">
+            <a:schemeClr val="accent6"/>
+          </a:effectRef>
+          <a:fontRef idx="minor">
+            <a:schemeClr val="dk1"/>
+          </a:fontRef>
+        </p:style>
         <p:txBody>
-          <a:bodyPr wrap="none" rtlCol="0">
-            <a:spAutoFit/>
-          </a:bodyPr>
+          <a:bodyPr rtlCol="0" anchor="ctr"/>
           <a:lstStyle/>
           <a:p>
-            <a:r>
-              <a:rPr kumimoji="1" lang="ja-JP" altLang="en-US" sz="1400" b="1" dirty="0"/>
-              <a:t>または</a:t>
-            </a:r>
+            <a:pPr algn="ctr"/>
+            <a:r>
+              <a:rPr kumimoji="1" lang="ja-JP" altLang="en-US" b="1" dirty="0">
+                <a:solidFill>
+                  <a:schemeClr val="accent4">
+                    <a:lumMod val="75000"/>
+                  </a:schemeClr>
+                </a:solidFill>
+              </a:rPr>
+              <a:t>変更内容</a:t>
+            </a:r>
+          </a:p>
+        </p:txBody>
+      </p:sp>
+      <p:sp>
+        <p:nvSpPr>
+          <p:cNvPr id="6" name="矢印: 右 5">
+            <a:extLst>
+              <a:ext uri="{FF2B5EF4-FFF2-40B4-BE49-F238E27FC236}">
+                <a16:creationId xmlns:a16="http://schemas.microsoft.com/office/drawing/2014/main" id="{4226FAF2-115C-58E8-C645-890643A28B01}"/>
+              </a:ext>
+            </a:extLst>
+          </p:cNvPr>
+          <p:cNvSpPr/>
+          <p:nvPr/>
+        </p:nvSpPr>
+        <p:spPr>
+          <a:xfrm rot="5400000">
+            <a:off x="7818275" y="3374682"/>
+            <a:ext cx="468086" cy="677228"/>
+          </a:xfrm>
+          <a:prstGeom prst="rightArrow">
+            <a:avLst/>
+          </a:prstGeom>
+        </p:spPr>
+        <p:style>
+          <a:lnRef idx="2">
+            <a:schemeClr val="dk1">
+              <a:shade val="15000"/>
+            </a:schemeClr>
+          </a:lnRef>
+          <a:fillRef idx="1">
+            <a:schemeClr val="dk1"/>
+          </a:fillRef>
+          <a:effectRef idx="0">
+            <a:schemeClr val="dk1"/>
+          </a:effectRef>
+          <a:fontRef idx="minor">
+            <a:schemeClr val="lt1"/>
+          </a:fontRef>
+        </p:style>
+        <p:txBody>
+          <a:bodyPr rtlCol="0" anchor="ctr"/>
+          <a:lstStyle/>
+          <a:p>
+            <a:pPr algn="ctr"/>
+            <a:endParaRPr kumimoji="1" lang="ja-JP" altLang="en-US"/>
           </a:p>
         </p:txBody>
       </p:sp>
       <p:grpSp>
         <p:nvGrpSpPr>
-          <p:cNvPr id="54" name="グループ化 53">
-            <a:extLst>
-              <a:ext uri="{FF2B5EF4-FFF2-40B4-BE49-F238E27FC236}">
-                <a16:creationId xmlns:a16="http://schemas.microsoft.com/office/drawing/2014/main" id="{91A4A9E6-597B-E5AA-C9EB-F85205FC4D87}"/>
+          <p:cNvPr id="3" name="グループ化 2">
+            <a:extLst>
+              <a:ext uri="{FF2B5EF4-FFF2-40B4-BE49-F238E27FC236}">
+                <a16:creationId xmlns:a16="http://schemas.microsoft.com/office/drawing/2014/main" id="{527116D7-AD7F-D595-0FE4-7205DDDF2298}"/>
               </a:ext>
             </a:extLst>
           </p:cNvPr>
@@ -22900,7 +22793,7 @@
         </p:nvGrpSpPr>
         <p:grpSpPr>
           <a:xfrm>
-            <a:off x="7237941" y="5543964"/>
+            <a:off x="5794795" y="5533871"/>
             <a:ext cx="1751021" cy="871225"/>
             <a:chOff x="7288481" y="5613979"/>
             <a:chExt cx="1751021" cy="871225"/>
@@ -22908,10 +22801,10 @@
         </p:grpSpPr>
         <p:pic>
           <p:nvPicPr>
-            <p:cNvPr id="55" name="図 54">
+            <p:cNvPr id="4" name="図 3">
               <a:extLst>
                 <a:ext uri="{FF2B5EF4-FFF2-40B4-BE49-F238E27FC236}">
-                  <a16:creationId xmlns:a16="http://schemas.microsoft.com/office/drawing/2014/main" id="{3FAADAD7-CD5B-E304-0637-477156CEC938}"/>
+                  <a16:creationId xmlns:a16="http://schemas.microsoft.com/office/drawing/2014/main" id="{4A442252-17C6-E044-029D-A553D72C35FB}"/>
                 </a:ext>
               </a:extLst>
             </p:cNvPr>
@@ -22944,10 +22837,10 @@
         </p:pic>
         <p:pic>
           <p:nvPicPr>
-            <p:cNvPr id="56" name="図 55">
+            <p:cNvPr id="5" name="図 4">
               <a:extLst>
                 <a:ext uri="{FF2B5EF4-FFF2-40B4-BE49-F238E27FC236}">
-                  <a16:creationId xmlns:a16="http://schemas.microsoft.com/office/drawing/2014/main" id="{794EC6CF-B6A2-5592-C4D9-5AD65950FB64}"/>
+                  <a16:creationId xmlns:a16="http://schemas.microsoft.com/office/drawing/2014/main" id="{01CFD534-142B-81E6-78AB-914974AA6416}"/>
                 </a:ext>
               </a:extLst>
             </p:cNvPr>
@@ -22987,10 +22880,10 @@
         </p:pic>
         <p:cxnSp>
           <p:nvCxnSpPr>
-            <p:cNvPr id="57" name="直線矢印コネクタ 56">
+            <p:cNvPr id="7" name="直線矢印コネクタ 6">
               <a:extLst>
                 <a:ext uri="{FF2B5EF4-FFF2-40B4-BE49-F238E27FC236}">
-                  <a16:creationId xmlns:a16="http://schemas.microsoft.com/office/drawing/2014/main" id="{1B0F3608-98FC-083A-D220-924A41D4D37D}"/>
+                  <a16:creationId xmlns:a16="http://schemas.microsoft.com/office/drawing/2014/main" id="{B2C9884D-81D8-62EB-D7ED-2DA7ED859633}"/>
                 </a:ext>
               </a:extLst>
             </p:cNvPr>
@@ -23027,112 +22920,6 @@
           </p:style>
         </p:cxnSp>
       </p:grpSp>
-      <p:sp>
-        <p:nvSpPr>
-          <p:cNvPr id="60" name="四角形: 角を丸くする 59">
-            <a:extLst>
-              <a:ext uri="{FF2B5EF4-FFF2-40B4-BE49-F238E27FC236}">
-                <a16:creationId xmlns:a16="http://schemas.microsoft.com/office/drawing/2014/main" id="{25F829FB-B368-8780-40F5-6D8990B0762E}"/>
-              </a:ext>
-            </a:extLst>
-          </p:cNvPr>
-          <p:cNvSpPr/>
-          <p:nvPr/>
-        </p:nvSpPr>
-        <p:spPr>
-          <a:xfrm>
-            <a:off x="7075772" y="4882765"/>
-            <a:ext cx="1800000" cy="504000"/>
-          </a:xfrm>
-          <a:prstGeom prst="roundRect">
-            <a:avLst/>
-          </a:prstGeom>
-          <a:ln w="38100">
-            <a:solidFill>
-              <a:schemeClr val="accent4">
-                <a:lumMod val="75000"/>
-              </a:schemeClr>
-            </a:solidFill>
-          </a:ln>
-        </p:spPr>
-        <p:style>
-          <a:lnRef idx="2">
-            <a:schemeClr val="accent6"/>
-          </a:lnRef>
-          <a:fillRef idx="1">
-            <a:schemeClr val="lt1"/>
-          </a:fillRef>
-          <a:effectRef idx="0">
-            <a:schemeClr val="accent6"/>
-          </a:effectRef>
-          <a:fontRef idx="minor">
-            <a:schemeClr val="dk1"/>
-          </a:fontRef>
-        </p:style>
-        <p:txBody>
-          <a:bodyPr rtlCol="0" anchor="ctr"/>
-          <a:lstStyle/>
-          <a:p>
-            <a:pPr algn="ctr"/>
-            <a:r>
-              <a:rPr kumimoji="1" lang="ja-JP" altLang="en-US" b="1" dirty="0">
-                <a:solidFill>
-                  <a:schemeClr val="accent4">
-                    <a:lumMod val="75000"/>
-                  </a:schemeClr>
-                </a:solidFill>
-              </a:rPr>
-              <a:t>変更内容</a:t>
-            </a:r>
-          </a:p>
-        </p:txBody>
-      </p:sp>
-      <p:sp>
-        <p:nvSpPr>
-          <p:cNvPr id="6" name="矢印: 右 5">
-            <a:extLst>
-              <a:ext uri="{FF2B5EF4-FFF2-40B4-BE49-F238E27FC236}">
-                <a16:creationId xmlns:a16="http://schemas.microsoft.com/office/drawing/2014/main" id="{4226FAF2-115C-58E8-C645-890643A28B01}"/>
-              </a:ext>
-            </a:extLst>
-          </p:cNvPr>
-          <p:cNvSpPr/>
-          <p:nvPr/>
-        </p:nvSpPr>
-        <p:spPr>
-          <a:xfrm rot="5400000">
-            <a:off x="7818275" y="3374682"/>
-            <a:ext cx="468086" cy="677228"/>
-          </a:xfrm>
-          <a:prstGeom prst="rightArrow">
-            <a:avLst/>
-          </a:prstGeom>
-        </p:spPr>
-        <p:style>
-          <a:lnRef idx="2">
-            <a:schemeClr val="dk1">
-              <a:shade val="15000"/>
-            </a:schemeClr>
-          </a:lnRef>
-          <a:fillRef idx="1">
-            <a:schemeClr val="dk1"/>
-          </a:fillRef>
-          <a:effectRef idx="0">
-            <a:schemeClr val="dk1"/>
-          </a:effectRef>
-          <a:fontRef idx="minor">
-            <a:schemeClr val="lt1"/>
-          </a:fontRef>
-        </p:style>
-        <p:txBody>
-          <a:bodyPr rtlCol="0" anchor="ctr"/>
-          <a:lstStyle/>
-          <a:p>
-            <a:pPr algn="ctr"/>
-            <a:endParaRPr kumimoji="1" lang="ja-JP" altLang="en-US"/>
-          </a:p>
-        </p:txBody>
-      </p:sp>
     </p:spTree>
     <p:extLst>
       <p:ext uri="{BB962C8B-B14F-4D97-AF65-F5344CB8AC3E}">
@@ -23551,10 +23338,10 @@
       </p:sp>
       <p:pic>
         <p:nvPicPr>
-          <p:cNvPr id="37" name="図 36">
-            <a:extLst>
-              <a:ext uri="{FF2B5EF4-FFF2-40B4-BE49-F238E27FC236}">
-                <a16:creationId xmlns:a16="http://schemas.microsoft.com/office/drawing/2014/main" id="{F17319AC-D1FC-69B6-A5D2-12EA8B5845F3}"/>
+          <p:cNvPr id="43" name="図 42">
+            <a:extLst>
+              <a:ext uri="{FF2B5EF4-FFF2-40B4-BE49-F238E27FC236}">
+                <a16:creationId xmlns:a16="http://schemas.microsoft.com/office/drawing/2014/main" id="{6C9F4B8E-9EEC-3BA7-0EBA-C43C1F4C775A}"/>
               </a:ext>
             </a:extLst>
           </p:cNvPr>
@@ -23564,7 +23351,7 @@
           <p:nvPr/>
         </p:nvPicPr>
         <p:blipFill>
-          <a:blip r:embed="rId3">
+          <a:blip r:embed="rId2">
             <a:extLst>
               <a:ext uri="{28A0092B-C50C-407E-A947-70E740481C1C}">
                 <a14:useLocalDpi xmlns:a14="http://schemas.microsoft.com/office/drawing/2010/main" val="0"/>
@@ -23577,8 +23364,8 @@
         </p:blipFill>
         <p:spPr>
           <a:xfrm>
-            <a:off x="5685087" y="1722182"/>
-            <a:ext cx="871225" cy="871225"/>
+            <a:off x="3890816" y="3772618"/>
+            <a:ext cx="1080000" cy="1080000"/>
           </a:xfrm>
           <a:prstGeom prst="rect">
             <a:avLst/>
@@ -23587,10 +23374,10 @@
       </p:pic>
       <p:sp>
         <p:nvSpPr>
-          <p:cNvPr id="38" name="テキスト ボックス 37">
-            <a:extLst>
-              <a:ext uri="{FF2B5EF4-FFF2-40B4-BE49-F238E27FC236}">
-                <a16:creationId xmlns:a16="http://schemas.microsoft.com/office/drawing/2014/main" id="{A213BFF7-5449-4023-CA3A-58BADBA6E333}"/>
+          <p:cNvPr id="44" name="テキスト ボックス 43">
+            <a:extLst>
+              <a:ext uri="{FF2B5EF4-FFF2-40B4-BE49-F238E27FC236}">
+                <a16:creationId xmlns:a16="http://schemas.microsoft.com/office/drawing/2014/main" id="{37E21E00-AFB6-4F15-A889-4A5927091E5C}"/>
               </a:ext>
             </a:extLst>
           </p:cNvPr>
@@ -23599,8 +23386,8 @@
         </p:nvSpPr>
         <p:spPr>
           <a:xfrm>
-            <a:off x="6514666" y="2026456"/>
-            <a:ext cx="723275" cy="307777"/>
+            <a:off x="4853937" y="4151748"/>
+            <a:ext cx="2262158" cy="369332"/>
           </a:xfrm>
           <a:prstGeom prst="rect">
             <a:avLst/>
@@ -23614,18 +23401,635 @@
           <a:lstStyle/>
           <a:p>
             <a:r>
-              <a:rPr kumimoji="1" lang="ja-JP" altLang="en-US" sz="1400" b="1" dirty="0"/>
-              <a:t>または</a:t>
+              <a:rPr kumimoji="1" lang="ja-JP" altLang="en-US" b="1" dirty="0"/>
+              <a:t>現在のディレクトリ</a:t>
+            </a:r>
+          </a:p>
+        </p:txBody>
+      </p:sp>
+      <p:cxnSp>
+        <p:nvCxnSpPr>
+          <p:cNvPr id="45" name="コネクタ: カギ線 44">
+            <a:extLst>
+              <a:ext uri="{FF2B5EF4-FFF2-40B4-BE49-F238E27FC236}">
+                <a16:creationId xmlns:a16="http://schemas.microsoft.com/office/drawing/2014/main" id="{5764B3D9-96B3-78D2-52FA-3FBD2546EAD1}"/>
+              </a:ext>
+            </a:extLst>
+          </p:cNvPr>
+          <p:cNvCxnSpPr>
+            <a:cxnSpLocks/>
+          </p:cNvCxnSpPr>
+          <p:nvPr/>
+        </p:nvCxnSpPr>
+        <p:spPr>
+          <a:xfrm>
+            <a:off x="4414384" y="4667461"/>
+            <a:ext cx="1408521" cy="504000"/>
+          </a:xfrm>
+          <a:prstGeom prst="bentConnector3">
+            <a:avLst>
+              <a:gd name="adj1" fmla="val -235"/>
+            </a:avLst>
+          </a:prstGeom>
+          <a:ln w="38100"/>
+        </p:spPr>
+        <p:style>
+          <a:lnRef idx="1">
+            <a:schemeClr val="dk1"/>
+          </a:lnRef>
+          <a:fillRef idx="0">
+            <a:schemeClr val="dk1"/>
+          </a:fillRef>
+          <a:effectRef idx="0">
+            <a:schemeClr val="dk1"/>
+          </a:effectRef>
+          <a:fontRef idx="minor">
+            <a:schemeClr val="tx1"/>
+          </a:fontRef>
+        </p:style>
+      </p:cxnSp>
+      <p:pic>
+        <p:nvPicPr>
+          <p:cNvPr id="46" name="図 45">
+            <a:extLst>
+              <a:ext uri="{FF2B5EF4-FFF2-40B4-BE49-F238E27FC236}">
+                <a16:creationId xmlns:a16="http://schemas.microsoft.com/office/drawing/2014/main" id="{2062A5EF-0275-A2AD-550E-7CCD983A13B0}"/>
+              </a:ext>
+            </a:extLst>
+          </p:cNvPr>
+          <p:cNvPicPr>
+            <a:picLocks noChangeAspect="1"/>
+          </p:cNvPicPr>
+          <p:nvPr/>
+        </p:nvPicPr>
+        <p:blipFill>
+          <a:blip r:embed="rId2">
+            <a:extLst>
+              <a:ext uri="{28A0092B-C50C-407E-A947-70E740481C1C}">
+                <a14:useLocalDpi xmlns:a14="http://schemas.microsoft.com/office/drawing/2010/main" val="0"/>
+              </a:ext>
+            </a:extLst>
+          </a:blip>
+          <a:stretch>
+            <a:fillRect/>
+          </a:stretch>
+        </p:blipFill>
+        <p:spPr>
+          <a:xfrm>
+            <a:off x="5814926" y="4554499"/>
+            <a:ext cx="1080000" cy="1080000"/>
+          </a:xfrm>
+          <a:prstGeom prst="rect">
+            <a:avLst/>
+          </a:prstGeom>
+        </p:spPr>
+      </p:pic>
+      <p:sp>
+        <p:nvSpPr>
+          <p:cNvPr id="48" name="四角形: 角を丸くする 47">
+            <a:extLst>
+              <a:ext uri="{FF2B5EF4-FFF2-40B4-BE49-F238E27FC236}">
+                <a16:creationId xmlns:a16="http://schemas.microsoft.com/office/drawing/2014/main" id="{4D8BF8F8-65B0-43A4-8133-FD3C8325BE14}"/>
+              </a:ext>
+            </a:extLst>
+          </p:cNvPr>
+          <p:cNvSpPr/>
+          <p:nvPr/>
+        </p:nvSpPr>
+        <p:spPr>
+          <a:xfrm>
+            <a:off x="4282751" y="5611932"/>
+            <a:ext cx="5040000" cy="720000"/>
+          </a:xfrm>
+          <a:prstGeom prst="roundRect">
+            <a:avLst/>
+          </a:prstGeom>
+          <a:noFill/>
+          <a:ln w="38100">
+            <a:solidFill>
+              <a:srgbClr val="00B050"/>
+            </a:solidFill>
+            <a:prstDash val="dash"/>
+          </a:ln>
+        </p:spPr>
+        <p:style>
+          <a:lnRef idx="2">
+            <a:schemeClr val="accent1">
+              <a:shade val="15000"/>
+            </a:schemeClr>
+          </a:lnRef>
+          <a:fillRef idx="1">
+            <a:schemeClr val="accent1"/>
+          </a:fillRef>
+          <a:effectRef idx="0">
+            <a:schemeClr val="accent1"/>
+          </a:effectRef>
+          <a:fontRef idx="minor">
+            <a:schemeClr val="lt1"/>
+          </a:fontRef>
+        </p:style>
+        <p:txBody>
+          <a:bodyPr rtlCol="0" anchor="ctr"/>
+          <a:lstStyle/>
+          <a:p>
+            <a:pPr algn="ctr"/>
+            <a:endParaRPr kumimoji="1" lang="ja-JP" altLang="en-US" b="1" dirty="0">
+              <a:solidFill>
+                <a:srgbClr val="00B050"/>
+              </a:solidFill>
+            </a:endParaRPr>
+          </a:p>
+        </p:txBody>
+      </p:sp>
+      <p:cxnSp>
+        <p:nvCxnSpPr>
+          <p:cNvPr id="49" name="コネクタ: カギ線 48">
+            <a:extLst>
+              <a:ext uri="{FF2B5EF4-FFF2-40B4-BE49-F238E27FC236}">
+                <a16:creationId xmlns:a16="http://schemas.microsoft.com/office/drawing/2014/main" id="{FD05884F-A8A7-61D4-9929-18BC12ECF268}"/>
+              </a:ext>
+            </a:extLst>
+          </p:cNvPr>
+          <p:cNvCxnSpPr>
+            <a:cxnSpLocks/>
+          </p:cNvCxnSpPr>
+          <p:nvPr/>
+        </p:nvCxnSpPr>
+        <p:spPr>
+          <a:xfrm>
+            <a:off x="4414384" y="4670972"/>
+            <a:ext cx="1408521" cy="1296000"/>
+          </a:xfrm>
+          <a:prstGeom prst="bentConnector3">
+            <a:avLst>
+              <a:gd name="adj1" fmla="val -235"/>
+            </a:avLst>
+          </a:prstGeom>
+          <a:ln w="38100"/>
+        </p:spPr>
+        <p:style>
+          <a:lnRef idx="1">
+            <a:schemeClr val="dk1"/>
+          </a:lnRef>
+          <a:fillRef idx="0">
+            <a:schemeClr val="dk1"/>
+          </a:fillRef>
+          <a:effectRef idx="0">
+            <a:schemeClr val="dk1"/>
+          </a:effectRef>
+          <a:fontRef idx="minor">
+            <a:schemeClr val="tx1"/>
+          </a:fontRef>
+        </p:style>
+      </p:cxnSp>
+      <p:sp>
+        <p:nvSpPr>
+          <p:cNvPr id="51" name="四角形: 角を丸くする 50">
+            <a:extLst>
+              <a:ext uri="{FF2B5EF4-FFF2-40B4-BE49-F238E27FC236}">
+                <a16:creationId xmlns:a16="http://schemas.microsoft.com/office/drawing/2014/main" id="{EE7B905D-9789-6596-C3D3-D14AED937138}"/>
+              </a:ext>
+            </a:extLst>
+          </p:cNvPr>
+          <p:cNvSpPr/>
+          <p:nvPr/>
+        </p:nvSpPr>
+        <p:spPr>
+          <a:xfrm>
+            <a:off x="5833587" y="4784093"/>
+            <a:ext cx="5748505" cy="720000"/>
+          </a:xfrm>
+          <a:prstGeom prst="roundRect">
+            <a:avLst/>
+          </a:prstGeom>
+          <a:noFill/>
+          <a:ln w="38100">
+            <a:solidFill>
+              <a:srgbClr val="FFC000"/>
+            </a:solidFill>
+            <a:prstDash val="dash"/>
+          </a:ln>
+        </p:spPr>
+        <p:style>
+          <a:lnRef idx="2">
+            <a:schemeClr val="accent1">
+              <a:shade val="15000"/>
+            </a:schemeClr>
+          </a:lnRef>
+          <a:fillRef idx="1">
+            <a:schemeClr val="accent1"/>
+          </a:fillRef>
+          <a:effectRef idx="0">
+            <a:schemeClr val="accent1"/>
+          </a:effectRef>
+          <a:fontRef idx="minor">
+            <a:schemeClr val="lt1"/>
+          </a:fontRef>
+        </p:style>
+        <p:txBody>
+          <a:bodyPr rtlCol="0" anchor="ctr"/>
+          <a:lstStyle/>
+          <a:p>
+            <a:pPr lvl="3"/>
+            <a:endParaRPr lang="ja-JP" altLang="en-US" b="1" dirty="0">
+              <a:solidFill>
+                <a:srgbClr val="FFC000"/>
+              </a:solidFill>
+            </a:endParaRPr>
+          </a:p>
+        </p:txBody>
+      </p:sp>
+      <p:sp>
+        <p:nvSpPr>
+          <p:cNvPr id="60" name="四角形: 角を丸くする 59">
+            <a:extLst>
+              <a:ext uri="{FF2B5EF4-FFF2-40B4-BE49-F238E27FC236}">
+                <a16:creationId xmlns:a16="http://schemas.microsoft.com/office/drawing/2014/main" id="{C1BC62D7-3D9E-1515-0833-7EDABD3174EA}"/>
+              </a:ext>
+            </a:extLst>
+          </p:cNvPr>
+          <p:cNvSpPr/>
+          <p:nvPr/>
+        </p:nvSpPr>
+        <p:spPr>
+          <a:xfrm>
+            <a:off x="7075772" y="4882765"/>
+            <a:ext cx="1800000" cy="504000"/>
+          </a:xfrm>
+          <a:prstGeom prst="roundRect">
+            <a:avLst/>
+          </a:prstGeom>
+          <a:ln w="38100">
+            <a:solidFill>
+              <a:schemeClr val="accent4">
+                <a:lumMod val="75000"/>
+              </a:schemeClr>
+            </a:solidFill>
+          </a:ln>
+        </p:spPr>
+        <p:style>
+          <a:lnRef idx="2">
+            <a:schemeClr val="accent6"/>
+          </a:lnRef>
+          <a:fillRef idx="1">
+            <a:schemeClr val="lt1"/>
+          </a:fillRef>
+          <a:effectRef idx="0">
+            <a:schemeClr val="accent6"/>
+          </a:effectRef>
+          <a:fontRef idx="minor">
+            <a:schemeClr val="dk1"/>
+          </a:fontRef>
+        </p:style>
+        <p:txBody>
+          <a:bodyPr rtlCol="0" anchor="ctr"/>
+          <a:lstStyle/>
+          <a:p>
+            <a:pPr algn="ctr"/>
+            <a:r>
+              <a:rPr kumimoji="1" lang="ja-JP" altLang="en-US" b="1" dirty="0">
+                <a:solidFill>
+                  <a:schemeClr val="accent4">
+                    <a:lumMod val="75000"/>
+                  </a:schemeClr>
+                </a:solidFill>
+              </a:rPr>
+              <a:t>変更内容</a:t>
+            </a:r>
+          </a:p>
+        </p:txBody>
+      </p:sp>
+      <p:sp>
+        <p:nvSpPr>
+          <p:cNvPr id="2" name="四角形: 角を丸くする 1">
+            <a:extLst>
+              <a:ext uri="{FF2B5EF4-FFF2-40B4-BE49-F238E27FC236}">
+                <a16:creationId xmlns:a16="http://schemas.microsoft.com/office/drawing/2014/main" id="{5E919CB3-8EAB-B622-F15B-F42641E896B4}"/>
+              </a:ext>
+            </a:extLst>
+          </p:cNvPr>
+          <p:cNvSpPr/>
+          <p:nvPr/>
+        </p:nvSpPr>
+        <p:spPr>
+          <a:xfrm>
+            <a:off x="7075772" y="1095994"/>
+            <a:ext cx="1800000" cy="504000"/>
+          </a:xfrm>
+          <a:prstGeom prst="roundRect">
+            <a:avLst/>
+          </a:prstGeom>
+          <a:ln w="38100">
+            <a:solidFill>
+              <a:schemeClr val="accent4">
+                <a:lumMod val="75000"/>
+              </a:schemeClr>
+            </a:solidFill>
+          </a:ln>
+        </p:spPr>
+        <p:style>
+          <a:lnRef idx="2">
+            <a:schemeClr val="accent6"/>
+          </a:lnRef>
+          <a:fillRef idx="1">
+            <a:schemeClr val="lt1"/>
+          </a:fillRef>
+          <a:effectRef idx="0">
+            <a:schemeClr val="accent6"/>
+          </a:effectRef>
+          <a:fontRef idx="minor">
+            <a:schemeClr val="dk1"/>
+          </a:fontRef>
+        </p:style>
+        <p:txBody>
+          <a:bodyPr rtlCol="0" anchor="ctr"/>
+          <a:lstStyle/>
+          <a:p>
+            <a:pPr algn="ctr"/>
+            <a:r>
+              <a:rPr kumimoji="1" lang="ja-JP" altLang="en-US" b="1" dirty="0">
+                <a:solidFill>
+                  <a:schemeClr val="accent4">
+                    <a:lumMod val="75000"/>
+                  </a:schemeClr>
+                </a:solidFill>
+              </a:rPr>
+              <a:t>変更内容</a:t>
+            </a:r>
+          </a:p>
+        </p:txBody>
+      </p:sp>
+      <p:sp>
+        <p:nvSpPr>
+          <p:cNvPr id="3" name="四角形: 角を丸くする 2">
+            <a:extLst>
+              <a:ext uri="{FF2B5EF4-FFF2-40B4-BE49-F238E27FC236}">
+                <a16:creationId xmlns:a16="http://schemas.microsoft.com/office/drawing/2014/main" id="{5555A984-E3F5-7002-60BD-FC31C608824D}"/>
+              </a:ext>
+            </a:extLst>
+          </p:cNvPr>
+          <p:cNvSpPr/>
+          <p:nvPr/>
+        </p:nvSpPr>
+        <p:spPr>
+          <a:xfrm>
+            <a:off x="9540775" y="4882765"/>
+            <a:ext cx="1800000" cy="504000"/>
+          </a:xfrm>
+          <a:prstGeom prst="roundRect">
+            <a:avLst/>
+          </a:prstGeom>
+          <a:ln w="38100">
+            <a:solidFill>
+              <a:schemeClr val="accent4">
+                <a:lumMod val="75000"/>
+              </a:schemeClr>
+            </a:solidFill>
+          </a:ln>
+        </p:spPr>
+        <p:style>
+          <a:lnRef idx="2">
+            <a:schemeClr val="accent6"/>
+          </a:lnRef>
+          <a:fillRef idx="1">
+            <a:schemeClr val="lt1"/>
+          </a:fillRef>
+          <a:effectRef idx="0">
+            <a:schemeClr val="accent6"/>
+          </a:effectRef>
+          <a:fontRef idx="minor">
+            <a:schemeClr val="dk1"/>
+          </a:fontRef>
+        </p:style>
+        <p:txBody>
+          <a:bodyPr rtlCol="0" anchor="ctr"/>
+          <a:lstStyle/>
+          <a:p>
+            <a:pPr algn="ctr"/>
+            <a:r>
+              <a:rPr kumimoji="1" lang="ja-JP" altLang="en-US" b="1" dirty="0">
+                <a:solidFill>
+                  <a:schemeClr val="accent4">
+                    <a:lumMod val="75000"/>
+                  </a:schemeClr>
+                </a:solidFill>
+              </a:rPr>
+              <a:t>変更履歴</a:t>
+            </a:r>
+          </a:p>
+        </p:txBody>
+      </p:sp>
+      <p:cxnSp>
+        <p:nvCxnSpPr>
+          <p:cNvPr id="4" name="直線矢印コネクタ 3">
+            <a:extLst>
+              <a:ext uri="{FF2B5EF4-FFF2-40B4-BE49-F238E27FC236}">
+                <a16:creationId xmlns:a16="http://schemas.microsoft.com/office/drawing/2014/main" id="{4E3720D7-9ED3-7859-D668-5AE5ADA391D2}"/>
+              </a:ext>
+            </a:extLst>
+          </p:cNvPr>
+          <p:cNvCxnSpPr>
+            <a:cxnSpLocks/>
+          </p:cNvCxnSpPr>
+          <p:nvPr/>
+        </p:nvCxnSpPr>
+        <p:spPr>
+          <a:xfrm flipV="1">
+            <a:off x="9032249" y="5158761"/>
+            <a:ext cx="360000" cy="1"/>
+          </a:xfrm>
+          <a:prstGeom prst="straightConnector1">
+            <a:avLst/>
+          </a:prstGeom>
+          <a:ln w="28575">
+            <a:tailEnd type="triangle"/>
+          </a:ln>
+        </p:spPr>
+        <p:style>
+          <a:lnRef idx="1">
+            <a:schemeClr val="dk1"/>
+          </a:lnRef>
+          <a:fillRef idx="0">
+            <a:schemeClr val="dk1"/>
+          </a:fillRef>
+          <a:effectRef idx="0">
+            <a:schemeClr val="dk1"/>
+          </a:effectRef>
+          <a:fontRef idx="minor">
+            <a:schemeClr val="tx1"/>
+          </a:fontRef>
+        </p:style>
+      </p:cxnSp>
+      <p:sp>
+        <p:nvSpPr>
+          <p:cNvPr id="5" name="四角形: 角を丸くする 4">
+            <a:extLst>
+              <a:ext uri="{FF2B5EF4-FFF2-40B4-BE49-F238E27FC236}">
+                <a16:creationId xmlns:a16="http://schemas.microsoft.com/office/drawing/2014/main" id="{8ABED6E2-CC4A-C977-1989-E89712F9F4ED}"/>
+              </a:ext>
+            </a:extLst>
+          </p:cNvPr>
+          <p:cNvSpPr/>
+          <p:nvPr/>
+        </p:nvSpPr>
+        <p:spPr>
+          <a:xfrm>
+            <a:off x="4030824" y="888878"/>
+            <a:ext cx="8042988" cy="2304000"/>
+          </a:xfrm>
+          <a:prstGeom prst="roundRect">
+            <a:avLst/>
+          </a:prstGeom>
+          <a:noFill/>
+          <a:ln w="38100">
+            <a:solidFill>
+              <a:srgbClr val="00B0F0"/>
+            </a:solidFill>
+            <a:prstDash val="dash"/>
+          </a:ln>
+        </p:spPr>
+        <p:style>
+          <a:lnRef idx="2">
+            <a:schemeClr val="accent1">
+              <a:shade val="15000"/>
+            </a:schemeClr>
+          </a:lnRef>
+          <a:fillRef idx="1">
+            <a:schemeClr val="accent1"/>
+          </a:fillRef>
+          <a:effectRef idx="0">
+            <a:schemeClr val="accent1"/>
+          </a:effectRef>
+          <a:fontRef idx="minor">
+            <a:schemeClr val="lt1"/>
+          </a:fontRef>
+        </p:style>
+        <p:txBody>
+          <a:bodyPr rtlCol="0" anchor="b"/>
+          <a:lstStyle/>
+          <a:p>
+            <a:r>
+              <a:rPr lang="ja-JP" altLang="en-US" b="1" dirty="0">
+                <a:solidFill>
+                  <a:srgbClr val="00B0F0"/>
+                </a:solidFill>
+              </a:rPr>
+              <a:t>ローカルリポジトリ</a:t>
+            </a:r>
+          </a:p>
+        </p:txBody>
+      </p:sp>
+      <p:sp>
+        <p:nvSpPr>
+          <p:cNvPr id="9" name="矢印: 右 8">
+            <a:extLst>
+              <a:ext uri="{FF2B5EF4-FFF2-40B4-BE49-F238E27FC236}">
+                <a16:creationId xmlns:a16="http://schemas.microsoft.com/office/drawing/2014/main" id="{08029C2E-C46A-9B6B-201F-68164E7BE556}"/>
+              </a:ext>
+            </a:extLst>
+          </p:cNvPr>
+          <p:cNvSpPr/>
+          <p:nvPr/>
+        </p:nvSpPr>
+        <p:spPr>
+          <a:xfrm rot="5400000">
+            <a:off x="7818275" y="3374682"/>
+            <a:ext cx="468086" cy="677228"/>
+          </a:xfrm>
+          <a:prstGeom prst="rightArrow">
+            <a:avLst/>
+          </a:prstGeom>
+        </p:spPr>
+        <p:style>
+          <a:lnRef idx="2">
+            <a:schemeClr val="dk1">
+              <a:shade val="15000"/>
+            </a:schemeClr>
+          </a:lnRef>
+          <a:fillRef idx="1">
+            <a:schemeClr val="dk1"/>
+          </a:fillRef>
+          <a:effectRef idx="0">
+            <a:schemeClr val="dk1"/>
+          </a:effectRef>
+          <a:fontRef idx="minor">
+            <a:schemeClr val="lt1"/>
+          </a:fontRef>
+        </p:style>
+        <p:txBody>
+          <a:bodyPr rtlCol="0" anchor="ctr"/>
+          <a:lstStyle/>
+          <a:p>
+            <a:pPr algn="ctr"/>
+            <a:endParaRPr kumimoji="1" lang="ja-JP" altLang="en-US"/>
+          </a:p>
+        </p:txBody>
+      </p:sp>
+      <p:sp>
+        <p:nvSpPr>
+          <p:cNvPr id="10" name="四角形: 角を丸くする 9">
+            <a:extLst>
+              <a:ext uri="{FF2B5EF4-FFF2-40B4-BE49-F238E27FC236}">
+                <a16:creationId xmlns:a16="http://schemas.microsoft.com/office/drawing/2014/main" id="{06E2447B-D38E-8ECF-51C6-6FD9540454B4}"/>
+              </a:ext>
+            </a:extLst>
+          </p:cNvPr>
+          <p:cNvSpPr/>
+          <p:nvPr/>
+        </p:nvSpPr>
+        <p:spPr>
+          <a:xfrm>
+            <a:off x="4030824" y="4699644"/>
+            <a:ext cx="8042988" cy="2304000"/>
+          </a:xfrm>
+          <a:prstGeom prst="roundRect">
+            <a:avLst/>
+          </a:prstGeom>
+          <a:noFill/>
+          <a:ln w="38100">
+            <a:solidFill>
+              <a:srgbClr val="00B0F0"/>
+            </a:solidFill>
+            <a:prstDash val="dash"/>
+          </a:ln>
+        </p:spPr>
+        <p:style>
+          <a:lnRef idx="2">
+            <a:schemeClr val="accent1">
+              <a:shade val="15000"/>
+            </a:schemeClr>
+          </a:lnRef>
+          <a:fillRef idx="1">
+            <a:schemeClr val="accent1"/>
+          </a:fillRef>
+          <a:effectRef idx="0">
+            <a:schemeClr val="accent1"/>
+          </a:effectRef>
+          <a:fontRef idx="minor">
+            <a:schemeClr val="lt1"/>
+          </a:fontRef>
+        </p:style>
+        <p:txBody>
+          <a:bodyPr rtlCol="0" anchor="b"/>
+          <a:lstStyle/>
+          <a:p>
+            <a:r>
+              <a:rPr lang="ja-JP" altLang="en-US" b="1">
+                <a:solidFill>
+                  <a:srgbClr val="00B0F0"/>
+                </a:solidFill>
+              </a:rPr>
+              <a:t>ローカルリポジトリ</a:t>
             </a:r>
           </a:p>
         </p:txBody>
       </p:sp>
       <p:grpSp>
         <p:nvGrpSpPr>
-          <p:cNvPr id="39" name="グループ化 38">
-            <a:extLst>
-              <a:ext uri="{FF2B5EF4-FFF2-40B4-BE49-F238E27FC236}">
-                <a16:creationId xmlns:a16="http://schemas.microsoft.com/office/drawing/2014/main" id="{A3FA290D-2288-8E3A-D21D-6E982D2CFFF4}"/>
+          <p:cNvPr id="6" name="グループ化 5">
+            <a:extLst>
+              <a:ext uri="{FF2B5EF4-FFF2-40B4-BE49-F238E27FC236}">
+                <a16:creationId xmlns:a16="http://schemas.microsoft.com/office/drawing/2014/main" id="{7C11FE86-A809-C524-0632-3E4485F300D9}"/>
               </a:ext>
             </a:extLst>
           </p:cNvPr>
@@ -23634,7 +24038,7 @@
         </p:nvGrpSpPr>
         <p:grpSpPr>
           <a:xfrm>
-            <a:off x="7237941" y="1733198"/>
+            <a:off x="5791689" y="1733198"/>
             <a:ext cx="1751021" cy="871225"/>
             <a:chOff x="7288481" y="5613979"/>
             <a:chExt cx="1751021" cy="871225"/>
@@ -23642,10 +24046,10 @@
         </p:grpSpPr>
         <p:pic>
           <p:nvPicPr>
-            <p:cNvPr id="40" name="図 39">
+            <p:cNvPr id="7" name="図 6">
               <a:extLst>
                 <a:ext uri="{FF2B5EF4-FFF2-40B4-BE49-F238E27FC236}">
-                  <a16:creationId xmlns:a16="http://schemas.microsoft.com/office/drawing/2014/main" id="{3B6C2770-315B-C7A1-3725-628A5F13E878}"/>
+                  <a16:creationId xmlns:a16="http://schemas.microsoft.com/office/drawing/2014/main" id="{1E80F37F-3095-0BB1-EF01-FD44A2907791}"/>
                 </a:ext>
               </a:extLst>
             </p:cNvPr>
@@ -23678,10 +24082,10 @@
         </p:pic>
         <p:pic>
           <p:nvPicPr>
-            <p:cNvPr id="41" name="図 40">
+            <p:cNvPr id="11" name="図 10">
               <a:extLst>
                 <a:ext uri="{FF2B5EF4-FFF2-40B4-BE49-F238E27FC236}">
-                  <a16:creationId xmlns:a16="http://schemas.microsoft.com/office/drawing/2014/main" id="{6E7B2C53-966F-E047-1E9A-2BEE3276EA61}"/>
+                  <a16:creationId xmlns:a16="http://schemas.microsoft.com/office/drawing/2014/main" id="{DF8893DE-2F47-3308-BDAB-9B680135F110}"/>
                 </a:ext>
               </a:extLst>
             </p:cNvPr>
@@ -23721,10 +24125,10 @@
         </p:pic>
         <p:cxnSp>
           <p:nvCxnSpPr>
-            <p:cNvPr id="42" name="直線矢印コネクタ 41">
+            <p:cNvPr id="12" name="直線矢印コネクタ 11">
               <a:extLst>
                 <a:ext uri="{FF2B5EF4-FFF2-40B4-BE49-F238E27FC236}">
-                  <a16:creationId xmlns:a16="http://schemas.microsoft.com/office/drawing/2014/main" id="{4667A151-8EC7-B055-24FD-139B882870BC}"/>
+                  <a16:creationId xmlns:a16="http://schemas.microsoft.com/office/drawing/2014/main" id="{1C41BF8E-2F9C-6103-8468-D9BAD3268501}"/>
                 </a:ext>
               </a:extLst>
             </p:cNvPr>
@@ -23761,386 +24165,12 @@
           </p:style>
         </p:cxnSp>
       </p:grpSp>
-      <p:pic>
-        <p:nvPicPr>
-          <p:cNvPr id="43" name="図 42">
-            <a:extLst>
-              <a:ext uri="{FF2B5EF4-FFF2-40B4-BE49-F238E27FC236}">
-                <a16:creationId xmlns:a16="http://schemas.microsoft.com/office/drawing/2014/main" id="{6C9F4B8E-9EEC-3BA7-0EBA-C43C1F4C775A}"/>
-              </a:ext>
-            </a:extLst>
-          </p:cNvPr>
-          <p:cNvPicPr>
-            <a:picLocks noChangeAspect="1"/>
-          </p:cNvPicPr>
-          <p:nvPr/>
-        </p:nvPicPr>
-        <p:blipFill>
-          <a:blip r:embed="rId2">
-            <a:extLst>
-              <a:ext uri="{28A0092B-C50C-407E-A947-70E740481C1C}">
-                <a14:useLocalDpi xmlns:a14="http://schemas.microsoft.com/office/drawing/2010/main" val="0"/>
-              </a:ext>
-            </a:extLst>
-          </a:blip>
-          <a:stretch>
-            <a:fillRect/>
-          </a:stretch>
-        </p:blipFill>
-        <p:spPr>
-          <a:xfrm>
-            <a:off x="3890816" y="3772618"/>
-            <a:ext cx="1080000" cy="1080000"/>
-          </a:xfrm>
-          <a:prstGeom prst="rect">
-            <a:avLst/>
-          </a:prstGeom>
-        </p:spPr>
-      </p:pic>
-      <p:sp>
-        <p:nvSpPr>
-          <p:cNvPr id="44" name="テキスト ボックス 43">
-            <a:extLst>
-              <a:ext uri="{FF2B5EF4-FFF2-40B4-BE49-F238E27FC236}">
-                <a16:creationId xmlns:a16="http://schemas.microsoft.com/office/drawing/2014/main" id="{37E21E00-AFB6-4F15-A889-4A5927091E5C}"/>
-              </a:ext>
-            </a:extLst>
-          </p:cNvPr>
-          <p:cNvSpPr txBox="1"/>
-          <p:nvPr/>
-        </p:nvSpPr>
-        <p:spPr>
-          <a:xfrm>
-            <a:off x="4853937" y="4151748"/>
-            <a:ext cx="2262158" cy="369332"/>
-          </a:xfrm>
-          <a:prstGeom prst="rect">
-            <a:avLst/>
-          </a:prstGeom>
-          <a:noFill/>
-        </p:spPr>
-        <p:txBody>
-          <a:bodyPr wrap="none" rtlCol="0">
-            <a:spAutoFit/>
-          </a:bodyPr>
-          <a:lstStyle/>
-          <a:p>
-            <a:r>
-              <a:rPr kumimoji="1" lang="ja-JP" altLang="en-US" b="1" dirty="0"/>
-              <a:t>現在のディレクトリ</a:t>
-            </a:r>
-          </a:p>
-        </p:txBody>
-      </p:sp>
-      <p:cxnSp>
-        <p:nvCxnSpPr>
-          <p:cNvPr id="45" name="コネクタ: カギ線 44">
-            <a:extLst>
-              <a:ext uri="{FF2B5EF4-FFF2-40B4-BE49-F238E27FC236}">
-                <a16:creationId xmlns:a16="http://schemas.microsoft.com/office/drawing/2014/main" id="{5764B3D9-96B3-78D2-52FA-3FBD2546EAD1}"/>
-              </a:ext>
-            </a:extLst>
-          </p:cNvPr>
-          <p:cNvCxnSpPr>
-            <a:cxnSpLocks/>
-          </p:cNvCxnSpPr>
-          <p:nvPr/>
-        </p:nvCxnSpPr>
-        <p:spPr>
-          <a:xfrm>
-            <a:off x="4414384" y="4667461"/>
-            <a:ext cx="1408521" cy="504000"/>
-          </a:xfrm>
-          <a:prstGeom prst="bentConnector3">
-            <a:avLst>
-              <a:gd name="adj1" fmla="val -235"/>
-            </a:avLst>
-          </a:prstGeom>
-          <a:ln w="38100"/>
-        </p:spPr>
-        <p:style>
-          <a:lnRef idx="1">
-            <a:schemeClr val="dk1"/>
-          </a:lnRef>
-          <a:fillRef idx="0">
-            <a:schemeClr val="dk1"/>
-          </a:fillRef>
-          <a:effectRef idx="0">
-            <a:schemeClr val="dk1"/>
-          </a:effectRef>
-          <a:fontRef idx="minor">
-            <a:schemeClr val="tx1"/>
-          </a:fontRef>
-        </p:style>
-      </p:cxnSp>
-      <p:pic>
-        <p:nvPicPr>
-          <p:cNvPr id="46" name="図 45">
-            <a:extLst>
-              <a:ext uri="{FF2B5EF4-FFF2-40B4-BE49-F238E27FC236}">
-                <a16:creationId xmlns:a16="http://schemas.microsoft.com/office/drawing/2014/main" id="{2062A5EF-0275-A2AD-550E-7CCD983A13B0}"/>
-              </a:ext>
-            </a:extLst>
-          </p:cNvPr>
-          <p:cNvPicPr>
-            <a:picLocks noChangeAspect="1"/>
-          </p:cNvPicPr>
-          <p:nvPr/>
-        </p:nvPicPr>
-        <p:blipFill>
-          <a:blip r:embed="rId2">
-            <a:extLst>
-              <a:ext uri="{28A0092B-C50C-407E-A947-70E740481C1C}">
-                <a14:useLocalDpi xmlns:a14="http://schemas.microsoft.com/office/drawing/2010/main" val="0"/>
-              </a:ext>
-            </a:extLst>
-          </a:blip>
-          <a:stretch>
-            <a:fillRect/>
-          </a:stretch>
-        </p:blipFill>
-        <p:spPr>
-          <a:xfrm>
-            <a:off x="5814926" y="4554499"/>
-            <a:ext cx="1080000" cy="1080000"/>
-          </a:xfrm>
-          <a:prstGeom prst="rect">
-            <a:avLst/>
-          </a:prstGeom>
-        </p:spPr>
-      </p:pic>
-      <p:sp>
-        <p:nvSpPr>
-          <p:cNvPr id="48" name="四角形: 角を丸くする 47">
-            <a:extLst>
-              <a:ext uri="{FF2B5EF4-FFF2-40B4-BE49-F238E27FC236}">
-                <a16:creationId xmlns:a16="http://schemas.microsoft.com/office/drawing/2014/main" id="{4D8BF8F8-65B0-43A4-8133-FD3C8325BE14}"/>
-              </a:ext>
-            </a:extLst>
-          </p:cNvPr>
-          <p:cNvSpPr/>
-          <p:nvPr/>
-        </p:nvSpPr>
-        <p:spPr>
-          <a:xfrm>
-            <a:off x="4282751" y="5611932"/>
-            <a:ext cx="5040000" cy="720000"/>
-          </a:xfrm>
-          <a:prstGeom prst="roundRect">
-            <a:avLst/>
-          </a:prstGeom>
-          <a:noFill/>
-          <a:ln w="38100">
-            <a:solidFill>
-              <a:srgbClr val="00B050"/>
-            </a:solidFill>
-            <a:prstDash val="dash"/>
-          </a:ln>
-        </p:spPr>
-        <p:style>
-          <a:lnRef idx="2">
-            <a:schemeClr val="accent1">
-              <a:shade val="15000"/>
-            </a:schemeClr>
-          </a:lnRef>
-          <a:fillRef idx="1">
-            <a:schemeClr val="accent1"/>
-          </a:fillRef>
-          <a:effectRef idx="0">
-            <a:schemeClr val="accent1"/>
-          </a:effectRef>
-          <a:fontRef idx="minor">
-            <a:schemeClr val="lt1"/>
-          </a:fontRef>
-        </p:style>
-        <p:txBody>
-          <a:bodyPr rtlCol="0" anchor="ctr"/>
-          <a:lstStyle/>
-          <a:p>
-            <a:pPr algn="ctr"/>
-            <a:endParaRPr kumimoji="1" lang="ja-JP" altLang="en-US" b="1" dirty="0">
-              <a:solidFill>
-                <a:srgbClr val="00B050"/>
-              </a:solidFill>
-            </a:endParaRPr>
-          </a:p>
-        </p:txBody>
-      </p:sp>
-      <p:cxnSp>
-        <p:nvCxnSpPr>
-          <p:cNvPr id="49" name="コネクタ: カギ線 48">
-            <a:extLst>
-              <a:ext uri="{FF2B5EF4-FFF2-40B4-BE49-F238E27FC236}">
-                <a16:creationId xmlns:a16="http://schemas.microsoft.com/office/drawing/2014/main" id="{FD05884F-A8A7-61D4-9929-18BC12ECF268}"/>
-              </a:ext>
-            </a:extLst>
-          </p:cNvPr>
-          <p:cNvCxnSpPr>
-            <a:cxnSpLocks/>
-          </p:cNvCxnSpPr>
-          <p:nvPr/>
-        </p:nvCxnSpPr>
-        <p:spPr>
-          <a:xfrm>
-            <a:off x="4414384" y="4670972"/>
-            <a:ext cx="1408521" cy="1296000"/>
-          </a:xfrm>
-          <a:prstGeom prst="bentConnector3">
-            <a:avLst>
-              <a:gd name="adj1" fmla="val -235"/>
-            </a:avLst>
-          </a:prstGeom>
-          <a:ln w="38100"/>
-        </p:spPr>
-        <p:style>
-          <a:lnRef idx="1">
-            <a:schemeClr val="dk1"/>
-          </a:lnRef>
-          <a:fillRef idx="0">
-            <a:schemeClr val="dk1"/>
-          </a:fillRef>
-          <a:effectRef idx="0">
-            <a:schemeClr val="dk1"/>
-          </a:effectRef>
-          <a:fontRef idx="minor">
-            <a:schemeClr val="tx1"/>
-          </a:fontRef>
-        </p:style>
-      </p:cxnSp>
-      <p:sp>
-        <p:nvSpPr>
-          <p:cNvPr id="51" name="四角形: 角を丸くする 50">
-            <a:extLst>
-              <a:ext uri="{FF2B5EF4-FFF2-40B4-BE49-F238E27FC236}">
-                <a16:creationId xmlns:a16="http://schemas.microsoft.com/office/drawing/2014/main" id="{EE7B905D-9789-6596-C3D3-D14AED937138}"/>
-              </a:ext>
-            </a:extLst>
-          </p:cNvPr>
-          <p:cNvSpPr/>
-          <p:nvPr/>
-        </p:nvSpPr>
-        <p:spPr>
-          <a:xfrm>
-            <a:off x="5833587" y="4784093"/>
-            <a:ext cx="5748505" cy="720000"/>
-          </a:xfrm>
-          <a:prstGeom prst="roundRect">
-            <a:avLst/>
-          </a:prstGeom>
-          <a:noFill/>
-          <a:ln w="38100">
-            <a:solidFill>
-              <a:srgbClr val="FFC000"/>
-            </a:solidFill>
-            <a:prstDash val="dash"/>
-          </a:ln>
-        </p:spPr>
-        <p:style>
-          <a:lnRef idx="2">
-            <a:schemeClr val="accent1">
-              <a:shade val="15000"/>
-            </a:schemeClr>
-          </a:lnRef>
-          <a:fillRef idx="1">
-            <a:schemeClr val="accent1"/>
-          </a:fillRef>
-          <a:effectRef idx="0">
-            <a:schemeClr val="accent1"/>
-          </a:effectRef>
-          <a:fontRef idx="minor">
-            <a:schemeClr val="lt1"/>
-          </a:fontRef>
-        </p:style>
-        <p:txBody>
-          <a:bodyPr rtlCol="0" anchor="ctr"/>
-          <a:lstStyle/>
-          <a:p>
-            <a:pPr lvl="3"/>
-            <a:endParaRPr lang="ja-JP" altLang="en-US" b="1" dirty="0">
-              <a:solidFill>
-                <a:srgbClr val="FFC000"/>
-              </a:solidFill>
-            </a:endParaRPr>
-          </a:p>
-        </p:txBody>
-      </p:sp>
-      <p:pic>
-        <p:nvPicPr>
-          <p:cNvPr id="52" name="図 51">
-            <a:extLst>
-              <a:ext uri="{FF2B5EF4-FFF2-40B4-BE49-F238E27FC236}">
-                <a16:creationId xmlns:a16="http://schemas.microsoft.com/office/drawing/2014/main" id="{9775F906-4529-C01A-A8C9-B392D4194ED8}"/>
-              </a:ext>
-            </a:extLst>
-          </p:cNvPr>
-          <p:cNvPicPr>
-            <a:picLocks noChangeAspect="1"/>
-          </p:cNvPicPr>
-          <p:nvPr/>
-        </p:nvPicPr>
-        <p:blipFill>
-          <a:blip r:embed="rId3">
-            <a:extLst>
-              <a:ext uri="{28A0092B-C50C-407E-A947-70E740481C1C}">
-                <a14:useLocalDpi xmlns:a14="http://schemas.microsoft.com/office/drawing/2010/main" val="0"/>
-              </a:ext>
-            </a:extLst>
-          </a:blip>
-          <a:stretch>
-            <a:fillRect/>
-          </a:stretch>
-        </p:blipFill>
-        <p:spPr>
-          <a:xfrm>
-            <a:off x="5685087" y="5532948"/>
-            <a:ext cx="871225" cy="871225"/>
-          </a:xfrm>
-          <a:prstGeom prst="rect">
-            <a:avLst/>
-          </a:prstGeom>
-        </p:spPr>
-      </p:pic>
-      <p:sp>
-        <p:nvSpPr>
-          <p:cNvPr id="53" name="テキスト ボックス 52">
-            <a:extLst>
-              <a:ext uri="{FF2B5EF4-FFF2-40B4-BE49-F238E27FC236}">
-                <a16:creationId xmlns:a16="http://schemas.microsoft.com/office/drawing/2014/main" id="{54E5585A-C99F-EC2D-C0EE-4DE99F7381DE}"/>
-              </a:ext>
-            </a:extLst>
-          </p:cNvPr>
-          <p:cNvSpPr txBox="1"/>
-          <p:nvPr/>
-        </p:nvSpPr>
-        <p:spPr>
-          <a:xfrm>
-            <a:off x="6514666" y="5837222"/>
-            <a:ext cx="723275" cy="307777"/>
-          </a:xfrm>
-          <a:prstGeom prst="rect">
-            <a:avLst/>
-          </a:prstGeom>
-          <a:noFill/>
-        </p:spPr>
-        <p:txBody>
-          <a:bodyPr wrap="none" rtlCol="0">
-            <a:spAutoFit/>
-          </a:bodyPr>
-          <a:lstStyle/>
-          <a:p>
-            <a:r>
-              <a:rPr kumimoji="1" lang="ja-JP" altLang="en-US" sz="1400" b="1" dirty="0"/>
-              <a:t>または</a:t>
-            </a:r>
-          </a:p>
-        </p:txBody>
-      </p:sp>
       <p:grpSp>
         <p:nvGrpSpPr>
-          <p:cNvPr id="54" name="グループ化 53">
-            <a:extLst>
-              <a:ext uri="{FF2B5EF4-FFF2-40B4-BE49-F238E27FC236}">
-                <a16:creationId xmlns:a16="http://schemas.microsoft.com/office/drawing/2014/main" id="{3937203E-9DB0-EED5-E5AD-AC61EBFA0A7F}"/>
+          <p:cNvPr id="13" name="グループ化 12">
+            <a:extLst>
+              <a:ext uri="{FF2B5EF4-FFF2-40B4-BE49-F238E27FC236}">
+                <a16:creationId xmlns:a16="http://schemas.microsoft.com/office/drawing/2014/main" id="{98630871-36DC-4FDA-5AA3-31F92B164BE5}"/>
               </a:ext>
             </a:extLst>
           </p:cNvPr>
@@ -24149,7 +24179,7 @@
         </p:nvGrpSpPr>
         <p:grpSpPr>
           <a:xfrm>
-            <a:off x="7237941" y="5543964"/>
+            <a:off x="5794795" y="5533871"/>
             <a:ext cx="1751021" cy="871225"/>
             <a:chOff x="7288481" y="5613979"/>
             <a:chExt cx="1751021" cy="871225"/>
@@ -24157,10 +24187,10 @@
         </p:grpSpPr>
         <p:pic>
           <p:nvPicPr>
-            <p:cNvPr id="55" name="図 54">
+            <p:cNvPr id="14" name="図 13">
               <a:extLst>
                 <a:ext uri="{FF2B5EF4-FFF2-40B4-BE49-F238E27FC236}">
-                  <a16:creationId xmlns:a16="http://schemas.microsoft.com/office/drawing/2014/main" id="{40326CC0-EC06-D22E-2F9C-6F858B0F09BA}"/>
+                  <a16:creationId xmlns:a16="http://schemas.microsoft.com/office/drawing/2014/main" id="{01DAC588-EC8F-6037-9F97-3C6C7F3D3254}"/>
                 </a:ext>
               </a:extLst>
             </p:cNvPr>
@@ -24193,10 +24223,10 @@
         </p:pic>
         <p:pic>
           <p:nvPicPr>
-            <p:cNvPr id="56" name="図 55">
+            <p:cNvPr id="15" name="図 14">
               <a:extLst>
                 <a:ext uri="{FF2B5EF4-FFF2-40B4-BE49-F238E27FC236}">
-                  <a16:creationId xmlns:a16="http://schemas.microsoft.com/office/drawing/2014/main" id="{75AF40FE-9E65-63B3-9885-0B8082173545}"/>
+                  <a16:creationId xmlns:a16="http://schemas.microsoft.com/office/drawing/2014/main" id="{02850B72-2F47-1D72-E9B9-44D84A274833}"/>
                 </a:ext>
               </a:extLst>
             </p:cNvPr>
@@ -24236,10 +24266,10 @@
         </p:pic>
         <p:cxnSp>
           <p:nvCxnSpPr>
-            <p:cNvPr id="57" name="直線矢印コネクタ 56">
+            <p:cNvPr id="16" name="直線矢印コネクタ 15">
               <a:extLst>
                 <a:ext uri="{FF2B5EF4-FFF2-40B4-BE49-F238E27FC236}">
-                  <a16:creationId xmlns:a16="http://schemas.microsoft.com/office/drawing/2014/main" id="{C2E01E75-EFA0-B6B0-A8E9-6B80A94AD2D2}"/>
+                  <a16:creationId xmlns:a16="http://schemas.microsoft.com/office/drawing/2014/main" id="{30B83D73-5C89-2AC7-26F7-417E7D6A1AB9}"/>
                 </a:ext>
               </a:extLst>
             </p:cNvPr>
@@ -24276,391 +24306,6 @@
           </p:style>
         </p:cxnSp>
       </p:grpSp>
-      <p:sp>
-        <p:nvSpPr>
-          <p:cNvPr id="60" name="四角形: 角を丸くする 59">
-            <a:extLst>
-              <a:ext uri="{FF2B5EF4-FFF2-40B4-BE49-F238E27FC236}">
-                <a16:creationId xmlns:a16="http://schemas.microsoft.com/office/drawing/2014/main" id="{C1BC62D7-3D9E-1515-0833-7EDABD3174EA}"/>
-              </a:ext>
-            </a:extLst>
-          </p:cNvPr>
-          <p:cNvSpPr/>
-          <p:nvPr/>
-        </p:nvSpPr>
-        <p:spPr>
-          <a:xfrm>
-            <a:off x="7075772" y="4882765"/>
-            <a:ext cx="1800000" cy="504000"/>
-          </a:xfrm>
-          <a:prstGeom prst="roundRect">
-            <a:avLst/>
-          </a:prstGeom>
-          <a:ln w="38100">
-            <a:solidFill>
-              <a:schemeClr val="accent4">
-                <a:lumMod val="75000"/>
-              </a:schemeClr>
-            </a:solidFill>
-          </a:ln>
-        </p:spPr>
-        <p:style>
-          <a:lnRef idx="2">
-            <a:schemeClr val="accent6"/>
-          </a:lnRef>
-          <a:fillRef idx="1">
-            <a:schemeClr val="lt1"/>
-          </a:fillRef>
-          <a:effectRef idx="0">
-            <a:schemeClr val="accent6"/>
-          </a:effectRef>
-          <a:fontRef idx="minor">
-            <a:schemeClr val="dk1"/>
-          </a:fontRef>
-        </p:style>
-        <p:txBody>
-          <a:bodyPr rtlCol="0" anchor="ctr"/>
-          <a:lstStyle/>
-          <a:p>
-            <a:pPr algn="ctr"/>
-            <a:r>
-              <a:rPr kumimoji="1" lang="ja-JP" altLang="en-US" b="1" dirty="0">
-                <a:solidFill>
-                  <a:schemeClr val="accent4">
-                    <a:lumMod val="75000"/>
-                  </a:schemeClr>
-                </a:solidFill>
-              </a:rPr>
-              <a:t>変更内容</a:t>
-            </a:r>
-          </a:p>
-        </p:txBody>
-      </p:sp>
-      <p:sp>
-        <p:nvSpPr>
-          <p:cNvPr id="2" name="四角形: 角を丸くする 1">
-            <a:extLst>
-              <a:ext uri="{FF2B5EF4-FFF2-40B4-BE49-F238E27FC236}">
-                <a16:creationId xmlns:a16="http://schemas.microsoft.com/office/drawing/2014/main" id="{5E919CB3-8EAB-B622-F15B-F42641E896B4}"/>
-              </a:ext>
-            </a:extLst>
-          </p:cNvPr>
-          <p:cNvSpPr/>
-          <p:nvPr/>
-        </p:nvSpPr>
-        <p:spPr>
-          <a:xfrm>
-            <a:off x="7075772" y="1095994"/>
-            <a:ext cx="1800000" cy="504000"/>
-          </a:xfrm>
-          <a:prstGeom prst="roundRect">
-            <a:avLst/>
-          </a:prstGeom>
-          <a:ln w="38100">
-            <a:solidFill>
-              <a:schemeClr val="accent4">
-                <a:lumMod val="75000"/>
-              </a:schemeClr>
-            </a:solidFill>
-          </a:ln>
-        </p:spPr>
-        <p:style>
-          <a:lnRef idx="2">
-            <a:schemeClr val="accent6"/>
-          </a:lnRef>
-          <a:fillRef idx="1">
-            <a:schemeClr val="lt1"/>
-          </a:fillRef>
-          <a:effectRef idx="0">
-            <a:schemeClr val="accent6"/>
-          </a:effectRef>
-          <a:fontRef idx="minor">
-            <a:schemeClr val="dk1"/>
-          </a:fontRef>
-        </p:style>
-        <p:txBody>
-          <a:bodyPr rtlCol="0" anchor="ctr"/>
-          <a:lstStyle/>
-          <a:p>
-            <a:pPr algn="ctr"/>
-            <a:r>
-              <a:rPr kumimoji="1" lang="ja-JP" altLang="en-US" b="1" dirty="0">
-                <a:solidFill>
-                  <a:schemeClr val="accent4">
-                    <a:lumMod val="75000"/>
-                  </a:schemeClr>
-                </a:solidFill>
-              </a:rPr>
-              <a:t>変更内容</a:t>
-            </a:r>
-          </a:p>
-        </p:txBody>
-      </p:sp>
-      <p:sp>
-        <p:nvSpPr>
-          <p:cNvPr id="3" name="四角形: 角を丸くする 2">
-            <a:extLst>
-              <a:ext uri="{FF2B5EF4-FFF2-40B4-BE49-F238E27FC236}">
-                <a16:creationId xmlns:a16="http://schemas.microsoft.com/office/drawing/2014/main" id="{5555A984-E3F5-7002-60BD-FC31C608824D}"/>
-              </a:ext>
-            </a:extLst>
-          </p:cNvPr>
-          <p:cNvSpPr/>
-          <p:nvPr/>
-        </p:nvSpPr>
-        <p:spPr>
-          <a:xfrm>
-            <a:off x="9540775" y="4882765"/>
-            <a:ext cx="1800000" cy="504000"/>
-          </a:xfrm>
-          <a:prstGeom prst="roundRect">
-            <a:avLst/>
-          </a:prstGeom>
-          <a:ln w="38100">
-            <a:solidFill>
-              <a:schemeClr val="accent4">
-                <a:lumMod val="75000"/>
-              </a:schemeClr>
-            </a:solidFill>
-          </a:ln>
-        </p:spPr>
-        <p:style>
-          <a:lnRef idx="2">
-            <a:schemeClr val="accent6"/>
-          </a:lnRef>
-          <a:fillRef idx="1">
-            <a:schemeClr val="lt1"/>
-          </a:fillRef>
-          <a:effectRef idx="0">
-            <a:schemeClr val="accent6"/>
-          </a:effectRef>
-          <a:fontRef idx="minor">
-            <a:schemeClr val="dk1"/>
-          </a:fontRef>
-        </p:style>
-        <p:txBody>
-          <a:bodyPr rtlCol="0" anchor="ctr"/>
-          <a:lstStyle/>
-          <a:p>
-            <a:pPr algn="ctr"/>
-            <a:r>
-              <a:rPr kumimoji="1" lang="ja-JP" altLang="en-US" b="1" dirty="0">
-                <a:solidFill>
-                  <a:schemeClr val="accent4">
-                    <a:lumMod val="75000"/>
-                  </a:schemeClr>
-                </a:solidFill>
-              </a:rPr>
-              <a:t>変更履歴</a:t>
-            </a:r>
-          </a:p>
-        </p:txBody>
-      </p:sp>
-      <p:cxnSp>
-        <p:nvCxnSpPr>
-          <p:cNvPr id="4" name="直線矢印コネクタ 3">
-            <a:extLst>
-              <a:ext uri="{FF2B5EF4-FFF2-40B4-BE49-F238E27FC236}">
-                <a16:creationId xmlns:a16="http://schemas.microsoft.com/office/drawing/2014/main" id="{4E3720D7-9ED3-7859-D668-5AE5ADA391D2}"/>
-              </a:ext>
-            </a:extLst>
-          </p:cNvPr>
-          <p:cNvCxnSpPr>
-            <a:cxnSpLocks/>
-          </p:cNvCxnSpPr>
-          <p:nvPr/>
-        </p:nvCxnSpPr>
-        <p:spPr>
-          <a:xfrm flipV="1">
-            <a:off x="9032249" y="5158761"/>
-            <a:ext cx="360000" cy="1"/>
-          </a:xfrm>
-          <a:prstGeom prst="straightConnector1">
-            <a:avLst/>
-          </a:prstGeom>
-          <a:ln w="28575">
-            <a:tailEnd type="triangle"/>
-          </a:ln>
-        </p:spPr>
-        <p:style>
-          <a:lnRef idx="1">
-            <a:schemeClr val="dk1"/>
-          </a:lnRef>
-          <a:fillRef idx="0">
-            <a:schemeClr val="dk1"/>
-          </a:fillRef>
-          <a:effectRef idx="0">
-            <a:schemeClr val="dk1"/>
-          </a:effectRef>
-          <a:fontRef idx="minor">
-            <a:schemeClr val="tx1"/>
-          </a:fontRef>
-        </p:style>
-      </p:cxnSp>
-      <p:sp>
-        <p:nvSpPr>
-          <p:cNvPr id="5" name="四角形: 角を丸くする 4">
-            <a:extLst>
-              <a:ext uri="{FF2B5EF4-FFF2-40B4-BE49-F238E27FC236}">
-                <a16:creationId xmlns:a16="http://schemas.microsoft.com/office/drawing/2014/main" id="{8ABED6E2-CC4A-C977-1989-E89712F9F4ED}"/>
-              </a:ext>
-            </a:extLst>
-          </p:cNvPr>
-          <p:cNvSpPr/>
-          <p:nvPr/>
-        </p:nvSpPr>
-        <p:spPr>
-          <a:xfrm>
-            <a:off x="4030824" y="888878"/>
-            <a:ext cx="8042988" cy="2304000"/>
-          </a:xfrm>
-          <a:prstGeom prst="roundRect">
-            <a:avLst/>
-          </a:prstGeom>
-          <a:noFill/>
-          <a:ln w="38100">
-            <a:solidFill>
-              <a:srgbClr val="00B0F0"/>
-            </a:solidFill>
-            <a:prstDash val="dash"/>
-          </a:ln>
-        </p:spPr>
-        <p:style>
-          <a:lnRef idx="2">
-            <a:schemeClr val="accent1">
-              <a:shade val="15000"/>
-            </a:schemeClr>
-          </a:lnRef>
-          <a:fillRef idx="1">
-            <a:schemeClr val="accent1"/>
-          </a:fillRef>
-          <a:effectRef idx="0">
-            <a:schemeClr val="accent1"/>
-          </a:effectRef>
-          <a:fontRef idx="minor">
-            <a:schemeClr val="lt1"/>
-          </a:fontRef>
-        </p:style>
-        <p:txBody>
-          <a:bodyPr rtlCol="0" anchor="b"/>
-          <a:lstStyle/>
-          <a:p>
-            <a:r>
-              <a:rPr lang="ja-JP" altLang="en-US" b="1" dirty="0">
-                <a:solidFill>
-                  <a:srgbClr val="00B0F0"/>
-                </a:solidFill>
-              </a:rPr>
-              <a:t>ローカルリポジトリ</a:t>
-            </a:r>
-          </a:p>
-        </p:txBody>
-      </p:sp>
-      <p:sp>
-        <p:nvSpPr>
-          <p:cNvPr id="9" name="矢印: 右 8">
-            <a:extLst>
-              <a:ext uri="{FF2B5EF4-FFF2-40B4-BE49-F238E27FC236}">
-                <a16:creationId xmlns:a16="http://schemas.microsoft.com/office/drawing/2014/main" id="{08029C2E-C46A-9B6B-201F-68164E7BE556}"/>
-              </a:ext>
-            </a:extLst>
-          </p:cNvPr>
-          <p:cNvSpPr/>
-          <p:nvPr/>
-        </p:nvSpPr>
-        <p:spPr>
-          <a:xfrm rot="5400000">
-            <a:off x="7818275" y="3374682"/>
-            <a:ext cx="468086" cy="677228"/>
-          </a:xfrm>
-          <a:prstGeom prst="rightArrow">
-            <a:avLst/>
-          </a:prstGeom>
-        </p:spPr>
-        <p:style>
-          <a:lnRef idx="2">
-            <a:schemeClr val="dk1">
-              <a:shade val="15000"/>
-            </a:schemeClr>
-          </a:lnRef>
-          <a:fillRef idx="1">
-            <a:schemeClr val="dk1"/>
-          </a:fillRef>
-          <a:effectRef idx="0">
-            <a:schemeClr val="dk1"/>
-          </a:effectRef>
-          <a:fontRef idx="minor">
-            <a:schemeClr val="lt1"/>
-          </a:fontRef>
-        </p:style>
-        <p:txBody>
-          <a:bodyPr rtlCol="0" anchor="ctr"/>
-          <a:lstStyle/>
-          <a:p>
-            <a:pPr algn="ctr"/>
-            <a:endParaRPr kumimoji="1" lang="ja-JP" altLang="en-US"/>
-          </a:p>
-        </p:txBody>
-      </p:sp>
-      <p:sp>
-        <p:nvSpPr>
-          <p:cNvPr id="10" name="四角形: 角を丸くする 9">
-            <a:extLst>
-              <a:ext uri="{FF2B5EF4-FFF2-40B4-BE49-F238E27FC236}">
-                <a16:creationId xmlns:a16="http://schemas.microsoft.com/office/drawing/2014/main" id="{06E2447B-D38E-8ECF-51C6-6FD9540454B4}"/>
-              </a:ext>
-            </a:extLst>
-          </p:cNvPr>
-          <p:cNvSpPr/>
-          <p:nvPr/>
-        </p:nvSpPr>
-        <p:spPr>
-          <a:xfrm>
-            <a:off x="4030824" y="4699644"/>
-            <a:ext cx="8042988" cy="2304000"/>
-          </a:xfrm>
-          <a:prstGeom prst="roundRect">
-            <a:avLst/>
-          </a:prstGeom>
-          <a:noFill/>
-          <a:ln w="38100">
-            <a:solidFill>
-              <a:srgbClr val="00B0F0"/>
-            </a:solidFill>
-            <a:prstDash val="dash"/>
-          </a:ln>
-        </p:spPr>
-        <p:style>
-          <a:lnRef idx="2">
-            <a:schemeClr val="accent1">
-              <a:shade val="15000"/>
-            </a:schemeClr>
-          </a:lnRef>
-          <a:fillRef idx="1">
-            <a:schemeClr val="accent1"/>
-          </a:fillRef>
-          <a:effectRef idx="0">
-            <a:schemeClr val="accent1"/>
-          </a:effectRef>
-          <a:fontRef idx="minor">
-            <a:schemeClr val="lt1"/>
-          </a:fontRef>
-        </p:style>
-        <p:txBody>
-          <a:bodyPr rtlCol="0" anchor="b"/>
-          <a:lstStyle/>
-          <a:p>
-            <a:r>
-              <a:rPr lang="ja-JP" altLang="en-US" b="1">
-                <a:solidFill>
-                  <a:srgbClr val="00B0F0"/>
-                </a:solidFill>
-              </a:rPr>
-              <a:t>ローカルリポジトリ</a:t>
-            </a:r>
-          </a:p>
-        </p:txBody>
-      </p:sp>
     </p:spTree>
     <p:extLst>
       <p:ext uri="{BB962C8B-B14F-4D97-AF65-F5344CB8AC3E}">

--- a/01_テキスト/Git入門_図.pptx
+++ b/01_テキスト/Git入門_図.pptx
@@ -47,103 +47,104 @@
     <p:sldId id="299" r:id="rId41"/>
     <p:sldId id="406" r:id="rId42"/>
     <p:sldId id="304" r:id="rId43"/>
-    <p:sldId id="300" r:id="rId44"/>
+    <p:sldId id="420" r:id="rId44"/>
     <p:sldId id="419" r:id="rId45"/>
-    <p:sldId id="305" r:id="rId46"/>
-    <p:sldId id="306" r:id="rId47"/>
-    <p:sldId id="301" r:id="rId48"/>
-    <p:sldId id="407" r:id="rId49"/>
-    <p:sldId id="418" r:id="rId50"/>
-    <p:sldId id="318" r:id="rId51"/>
-    <p:sldId id="319" r:id="rId52"/>
-    <p:sldId id="320" r:id="rId53"/>
-    <p:sldId id="321" r:id="rId54"/>
-    <p:sldId id="324" r:id="rId55"/>
-    <p:sldId id="325" r:id="rId56"/>
-    <p:sldId id="326" r:id="rId57"/>
-    <p:sldId id="327" r:id="rId58"/>
-    <p:sldId id="322" r:id="rId59"/>
-    <p:sldId id="328" r:id="rId60"/>
-    <p:sldId id="323" r:id="rId61"/>
-    <p:sldId id="329" r:id="rId62"/>
-    <p:sldId id="330" r:id="rId63"/>
-    <p:sldId id="332" r:id="rId64"/>
-    <p:sldId id="331" r:id="rId65"/>
-    <p:sldId id="333" r:id="rId66"/>
-    <p:sldId id="334" r:id="rId67"/>
-    <p:sldId id="335" r:id="rId68"/>
-    <p:sldId id="340" r:id="rId69"/>
-    <p:sldId id="336" r:id="rId70"/>
-    <p:sldId id="341" r:id="rId71"/>
-    <p:sldId id="342" r:id="rId72"/>
-    <p:sldId id="344" r:id="rId73"/>
-    <p:sldId id="337" r:id="rId74"/>
-    <p:sldId id="343" r:id="rId75"/>
-    <p:sldId id="345" r:id="rId76"/>
-    <p:sldId id="346" r:id="rId77"/>
-    <p:sldId id="347" r:id="rId78"/>
-    <p:sldId id="338" r:id="rId79"/>
-    <p:sldId id="348" r:id="rId80"/>
-    <p:sldId id="339" r:id="rId81"/>
-    <p:sldId id="349" r:id="rId82"/>
-    <p:sldId id="350" r:id="rId83"/>
-    <p:sldId id="351" r:id="rId84"/>
-    <p:sldId id="362" r:id="rId85"/>
-    <p:sldId id="352" r:id="rId86"/>
-    <p:sldId id="353" r:id="rId87"/>
-    <p:sldId id="354" r:id="rId88"/>
-    <p:sldId id="355" r:id="rId89"/>
-    <p:sldId id="356" r:id="rId90"/>
-    <p:sldId id="357" r:id="rId91"/>
-    <p:sldId id="358" r:id="rId92"/>
-    <p:sldId id="359" r:id="rId93"/>
-    <p:sldId id="360" r:id="rId94"/>
-    <p:sldId id="361" r:id="rId95"/>
-    <p:sldId id="363" r:id="rId96"/>
-    <p:sldId id="364" r:id="rId97"/>
-    <p:sldId id="365" r:id="rId98"/>
-    <p:sldId id="366" r:id="rId99"/>
-    <p:sldId id="367" r:id="rId100"/>
-    <p:sldId id="369" r:id="rId101"/>
-    <p:sldId id="370" r:id="rId102"/>
-    <p:sldId id="371" r:id="rId103"/>
-    <p:sldId id="372" r:id="rId104"/>
-    <p:sldId id="373" r:id="rId105"/>
-    <p:sldId id="368" r:id="rId106"/>
-    <p:sldId id="374" r:id="rId107"/>
-    <p:sldId id="379" r:id="rId108"/>
-    <p:sldId id="375" r:id="rId109"/>
-    <p:sldId id="378" r:id="rId110"/>
-    <p:sldId id="376" r:id="rId111"/>
-    <p:sldId id="380" r:id="rId112"/>
-    <p:sldId id="385" r:id="rId113"/>
-    <p:sldId id="377" r:id="rId114"/>
-    <p:sldId id="381" r:id="rId115"/>
-    <p:sldId id="382" r:id="rId116"/>
-    <p:sldId id="383" r:id="rId117"/>
-    <p:sldId id="384" r:id="rId118"/>
-    <p:sldId id="386" r:id="rId119"/>
-    <p:sldId id="387" r:id="rId120"/>
-    <p:sldId id="388" r:id="rId121"/>
-    <p:sldId id="392" r:id="rId122"/>
-    <p:sldId id="389" r:id="rId123"/>
-    <p:sldId id="390" r:id="rId124"/>
-    <p:sldId id="391" r:id="rId125"/>
-    <p:sldId id="393" r:id="rId126"/>
-    <p:sldId id="394" r:id="rId127"/>
-    <p:sldId id="399" r:id="rId128"/>
-    <p:sldId id="400" r:id="rId129"/>
-    <p:sldId id="401" r:id="rId130"/>
-    <p:sldId id="405" r:id="rId131"/>
-    <p:sldId id="403" r:id="rId132"/>
-    <p:sldId id="402" r:id="rId133"/>
-    <p:sldId id="404" r:id="rId134"/>
-    <p:sldId id="415" r:id="rId135"/>
-    <p:sldId id="408" r:id="rId136"/>
-    <p:sldId id="409" r:id="rId137"/>
-    <p:sldId id="410" r:id="rId138"/>
-    <p:sldId id="411" r:id="rId139"/>
-    <p:sldId id="412" r:id="rId140"/>
+    <p:sldId id="300" r:id="rId46"/>
+    <p:sldId id="305" r:id="rId47"/>
+    <p:sldId id="306" r:id="rId48"/>
+    <p:sldId id="301" r:id="rId49"/>
+    <p:sldId id="407" r:id="rId50"/>
+    <p:sldId id="418" r:id="rId51"/>
+    <p:sldId id="318" r:id="rId52"/>
+    <p:sldId id="319" r:id="rId53"/>
+    <p:sldId id="320" r:id="rId54"/>
+    <p:sldId id="321" r:id="rId55"/>
+    <p:sldId id="324" r:id="rId56"/>
+    <p:sldId id="325" r:id="rId57"/>
+    <p:sldId id="326" r:id="rId58"/>
+    <p:sldId id="327" r:id="rId59"/>
+    <p:sldId id="322" r:id="rId60"/>
+    <p:sldId id="328" r:id="rId61"/>
+    <p:sldId id="323" r:id="rId62"/>
+    <p:sldId id="329" r:id="rId63"/>
+    <p:sldId id="330" r:id="rId64"/>
+    <p:sldId id="332" r:id="rId65"/>
+    <p:sldId id="331" r:id="rId66"/>
+    <p:sldId id="333" r:id="rId67"/>
+    <p:sldId id="334" r:id="rId68"/>
+    <p:sldId id="335" r:id="rId69"/>
+    <p:sldId id="340" r:id="rId70"/>
+    <p:sldId id="336" r:id="rId71"/>
+    <p:sldId id="341" r:id="rId72"/>
+    <p:sldId id="342" r:id="rId73"/>
+    <p:sldId id="344" r:id="rId74"/>
+    <p:sldId id="337" r:id="rId75"/>
+    <p:sldId id="343" r:id="rId76"/>
+    <p:sldId id="345" r:id="rId77"/>
+    <p:sldId id="346" r:id="rId78"/>
+    <p:sldId id="347" r:id="rId79"/>
+    <p:sldId id="338" r:id="rId80"/>
+    <p:sldId id="348" r:id="rId81"/>
+    <p:sldId id="339" r:id="rId82"/>
+    <p:sldId id="349" r:id="rId83"/>
+    <p:sldId id="350" r:id="rId84"/>
+    <p:sldId id="351" r:id="rId85"/>
+    <p:sldId id="362" r:id="rId86"/>
+    <p:sldId id="352" r:id="rId87"/>
+    <p:sldId id="353" r:id="rId88"/>
+    <p:sldId id="354" r:id="rId89"/>
+    <p:sldId id="355" r:id="rId90"/>
+    <p:sldId id="356" r:id="rId91"/>
+    <p:sldId id="357" r:id="rId92"/>
+    <p:sldId id="358" r:id="rId93"/>
+    <p:sldId id="359" r:id="rId94"/>
+    <p:sldId id="360" r:id="rId95"/>
+    <p:sldId id="361" r:id="rId96"/>
+    <p:sldId id="363" r:id="rId97"/>
+    <p:sldId id="364" r:id="rId98"/>
+    <p:sldId id="365" r:id="rId99"/>
+    <p:sldId id="366" r:id="rId100"/>
+    <p:sldId id="367" r:id="rId101"/>
+    <p:sldId id="369" r:id="rId102"/>
+    <p:sldId id="370" r:id="rId103"/>
+    <p:sldId id="371" r:id="rId104"/>
+    <p:sldId id="372" r:id="rId105"/>
+    <p:sldId id="373" r:id="rId106"/>
+    <p:sldId id="368" r:id="rId107"/>
+    <p:sldId id="374" r:id="rId108"/>
+    <p:sldId id="379" r:id="rId109"/>
+    <p:sldId id="375" r:id="rId110"/>
+    <p:sldId id="378" r:id="rId111"/>
+    <p:sldId id="376" r:id="rId112"/>
+    <p:sldId id="380" r:id="rId113"/>
+    <p:sldId id="385" r:id="rId114"/>
+    <p:sldId id="377" r:id="rId115"/>
+    <p:sldId id="381" r:id="rId116"/>
+    <p:sldId id="382" r:id="rId117"/>
+    <p:sldId id="383" r:id="rId118"/>
+    <p:sldId id="384" r:id="rId119"/>
+    <p:sldId id="386" r:id="rId120"/>
+    <p:sldId id="387" r:id="rId121"/>
+    <p:sldId id="388" r:id="rId122"/>
+    <p:sldId id="392" r:id="rId123"/>
+    <p:sldId id="389" r:id="rId124"/>
+    <p:sldId id="390" r:id="rId125"/>
+    <p:sldId id="391" r:id="rId126"/>
+    <p:sldId id="393" r:id="rId127"/>
+    <p:sldId id="394" r:id="rId128"/>
+    <p:sldId id="399" r:id="rId129"/>
+    <p:sldId id="400" r:id="rId130"/>
+    <p:sldId id="401" r:id="rId131"/>
+    <p:sldId id="405" r:id="rId132"/>
+    <p:sldId id="403" r:id="rId133"/>
+    <p:sldId id="402" r:id="rId134"/>
+    <p:sldId id="404" r:id="rId135"/>
+    <p:sldId id="415" r:id="rId136"/>
+    <p:sldId id="408" r:id="rId137"/>
+    <p:sldId id="409" r:id="rId138"/>
+    <p:sldId id="410" r:id="rId139"/>
+    <p:sldId id="411" r:id="rId140"/>
+    <p:sldId id="412" r:id="rId141"/>
   </p:sldIdLst>
   <p:sldSz cx="12192000" cy="6858000"/>
   <p:notesSz cx="6858000" cy="9144000"/>
@@ -397,7 +398,7 @@
           <a:p>
             <a:fld id="{7D4D8970-2F0F-4F19-9427-F451CC43E670}" type="datetimeFigureOut">
               <a:rPr kumimoji="1" lang="ja-JP" altLang="en-US" smtClean="0"/>
-              <a:t>2026/6/23</a:t>
+              <a:t>2026/6/24</a:t>
             </a:fld>
             <a:endParaRPr kumimoji="1" lang="ja-JP" altLang="en-US"/>
           </a:p>
@@ -627,7 +628,7 @@
           <a:p>
             <a:fld id="{7D4D8970-2F0F-4F19-9427-F451CC43E670}" type="datetimeFigureOut">
               <a:rPr kumimoji="1" lang="ja-JP" altLang="en-US" smtClean="0"/>
-              <a:t>2026/6/23</a:t>
+              <a:t>2026/6/24</a:t>
             </a:fld>
             <a:endParaRPr kumimoji="1" lang="ja-JP" altLang="en-US"/>
           </a:p>
@@ -867,7 +868,7 @@
           <a:p>
             <a:fld id="{7D4D8970-2F0F-4F19-9427-F451CC43E670}" type="datetimeFigureOut">
               <a:rPr kumimoji="1" lang="ja-JP" altLang="en-US" smtClean="0"/>
-              <a:t>2026/6/23</a:t>
+              <a:t>2026/6/24</a:t>
             </a:fld>
             <a:endParaRPr kumimoji="1" lang="ja-JP" altLang="en-US"/>
           </a:p>
@@ -1097,7 +1098,7 @@
           <a:p>
             <a:fld id="{7D4D8970-2F0F-4F19-9427-F451CC43E670}" type="datetimeFigureOut">
               <a:rPr kumimoji="1" lang="ja-JP" altLang="en-US" smtClean="0"/>
-              <a:t>2026/6/23</a:t>
+              <a:t>2026/6/24</a:t>
             </a:fld>
             <a:endParaRPr kumimoji="1" lang="ja-JP" altLang="en-US"/>
           </a:p>
@@ -1372,7 +1373,7 @@
           <a:p>
             <a:fld id="{7D4D8970-2F0F-4F19-9427-F451CC43E670}" type="datetimeFigureOut">
               <a:rPr kumimoji="1" lang="ja-JP" altLang="en-US" smtClean="0"/>
-              <a:t>2026/6/23</a:t>
+              <a:t>2026/6/24</a:t>
             </a:fld>
             <a:endParaRPr kumimoji="1" lang="ja-JP" altLang="en-US"/>
           </a:p>
@@ -1701,7 +1702,7 @@
           <a:p>
             <a:fld id="{7D4D8970-2F0F-4F19-9427-F451CC43E670}" type="datetimeFigureOut">
               <a:rPr kumimoji="1" lang="ja-JP" altLang="en-US" smtClean="0"/>
-              <a:t>2026/6/23</a:t>
+              <a:t>2026/6/24</a:t>
             </a:fld>
             <a:endParaRPr kumimoji="1" lang="ja-JP" altLang="en-US"/>
           </a:p>
@@ -2177,7 +2178,7 @@
           <a:p>
             <a:fld id="{7D4D8970-2F0F-4F19-9427-F451CC43E670}" type="datetimeFigureOut">
               <a:rPr kumimoji="1" lang="ja-JP" altLang="en-US" smtClean="0"/>
-              <a:t>2026/6/23</a:t>
+              <a:t>2026/6/24</a:t>
             </a:fld>
             <a:endParaRPr kumimoji="1" lang="ja-JP" altLang="en-US"/>
           </a:p>
@@ -2318,7 +2319,7 @@
           <a:p>
             <a:fld id="{7D4D8970-2F0F-4F19-9427-F451CC43E670}" type="datetimeFigureOut">
               <a:rPr kumimoji="1" lang="ja-JP" altLang="en-US" smtClean="0"/>
-              <a:t>2026/6/23</a:t>
+              <a:t>2026/6/24</a:t>
             </a:fld>
             <a:endParaRPr kumimoji="1" lang="ja-JP" altLang="en-US"/>
           </a:p>
@@ -2431,7 +2432,7 @@
           <a:p>
             <a:fld id="{7D4D8970-2F0F-4F19-9427-F451CC43E670}" type="datetimeFigureOut">
               <a:rPr kumimoji="1" lang="ja-JP" altLang="en-US" smtClean="0"/>
-              <a:t>2026/6/23</a:t>
+              <a:t>2026/6/24</a:t>
             </a:fld>
             <a:endParaRPr kumimoji="1" lang="ja-JP" altLang="en-US"/>
           </a:p>
@@ -2774,7 +2775,7 @@
           <a:p>
             <a:fld id="{7D4D8970-2F0F-4F19-9427-F451CC43E670}" type="datetimeFigureOut">
               <a:rPr kumimoji="1" lang="ja-JP" altLang="en-US" smtClean="0"/>
-              <a:t>2026/6/23</a:t>
+              <a:t>2026/6/24</a:t>
             </a:fld>
             <a:endParaRPr kumimoji="1" lang="ja-JP" altLang="en-US"/>
           </a:p>
@@ -3062,7 +3063,7 @@
           <a:p>
             <a:fld id="{7D4D8970-2F0F-4F19-9427-F451CC43E670}" type="datetimeFigureOut">
               <a:rPr kumimoji="1" lang="ja-JP" altLang="en-US" smtClean="0"/>
-              <a:t>2026/6/23</a:t>
+              <a:t>2026/6/24</a:t>
             </a:fld>
             <a:endParaRPr kumimoji="1" lang="ja-JP" altLang="en-US"/>
           </a:p>
@@ -3335,7 +3336,7 @@
           <a:p>
             <a:fld id="{7D4D8970-2F0F-4F19-9427-F451CC43E670}" type="datetimeFigureOut">
               <a:rPr kumimoji="1" lang="ja-JP" altLang="en-US" smtClean="0"/>
-              <a:t>2026/6/23</a:t>
+              <a:t>2026/6/24</a:t>
             </a:fld>
             <a:endParaRPr kumimoji="1" lang="ja-JP" altLang="en-US"/>
           </a:p>
@@ -3859,6 +3860,42 @@
         <p:cNvPr id="1" name="">
           <a:extLst>
             <a:ext uri="{FF2B5EF4-FFF2-40B4-BE49-F238E27FC236}">
+              <a16:creationId xmlns:a16="http://schemas.microsoft.com/office/drawing/2014/main" id="{A7C950DC-84F2-A293-2479-BF267F4B25A6}"/>
+            </a:ext>
+          </a:extLst>
+        </p:cNvPr>
+        <p:cNvGrpSpPr/>
+        <p:nvPr/>
+      </p:nvGrpSpPr>
+      <p:grpSpPr>
+        <a:xfrm>
+          <a:off x="0" y="0"/>
+          <a:ext cx="0" cy="0"/>
+          <a:chOff x="0" y="0"/>
+          <a:chExt cx="0" cy="0"/>
+        </a:xfrm>
+      </p:grpSpPr>
+    </p:spTree>
+    <p:extLst>
+      <p:ext uri="{BB962C8B-B14F-4D97-AF65-F5344CB8AC3E}">
+        <p14:creationId xmlns:p14="http://schemas.microsoft.com/office/powerpoint/2010/main" val="2815932081"/>
+      </p:ext>
+    </p:extLst>
+  </p:cSld>
+  <p:clrMapOvr>
+    <a:masterClrMapping/>
+  </p:clrMapOvr>
+</p:sld>
+</file>
+
+<file path=ppt/slides/slide101.xml><?xml version="1.0" encoding="utf-8"?>
+<p:sld xmlns:a="http://schemas.openxmlformats.org/drawingml/2006/main" xmlns:r="http://schemas.openxmlformats.org/officeDocument/2006/relationships" xmlns:p="http://schemas.openxmlformats.org/presentationml/2006/main">
+  <p:cSld>
+    <p:spTree>
+      <p:nvGrpSpPr>
+        <p:cNvPr id="1" name="">
+          <a:extLst>
+            <a:ext uri="{FF2B5EF4-FFF2-40B4-BE49-F238E27FC236}">
               <a16:creationId xmlns:a16="http://schemas.microsoft.com/office/drawing/2014/main" id="{26AA375B-371A-A128-1427-5091F5B56F05}"/>
             </a:ext>
           </a:extLst>
@@ -4009,7 +4046,7 @@
 </p:sld>
 </file>
 
-<file path=ppt/slides/slide101.xml><?xml version="1.0" encoding="utf-8"?>
+<file path=ppt/slides/slide102.xml><?xml version="1.0" encoding="utf-8"?>
 <p:sld xmlns:a="http://schemas.openxmlformats.org/drawingml/2006/main" xmlns:r="http://schemas.openxmlformats.org/officeDocument/2006/relationships" xmlns:p="http://schemas.openxmlformats.org/presentationml/2006/main">
   <p:cSld>
     <p:spTree>
@@ -4131,7 +4168,7 @@
 </p:sld>
 </file>
 
-<file path=ppt/slides/slide102.xml><?xml version="1.0" encoding="utf-8"?>
+<file path=ppt/slides/slide103.xml><?xml version="1.0" encoding="utf-8"?>
 <p:sld xmlns:a="http://schemas.openxmlformats.org/drawingml/2006/main" xmlns:r="http://schemas.openxmlformats.org/officeDocument/2006/relationships" xmlns:p="http://schemas.openxmlformats.org/presentationml/2006/main">
   <p:cSld>
     <p:spTree>
@@ -4345,7 +4382,7 @@
 </p:sld>
 </file>
 
-<file path=ppt/slides/slide103.xml><?xml version="1.0" encoding="utf-8"?>
+<file path=ppt/slides/slide104.xml><?xml version="1.0" encoding="utf-8"?>
 <p:sld xmlns:a="http://schemas.openxmlformats.org/drawingml/2006/main" xmlns:r="http://schemas.openxmlformats.org/officeDocument/2006/relationships" xmlns:p="http://schemas.openxmlformats.org/presentationml/2006/main">
   <p:cSld>
     <p:spTree>
@@ -4467,7 +4504,7 @@
 </p:sld>
 </file>
 
-<file path=ppt/slides/slide104.xml><?xml version="1.0" encoding="utf-8"?>
+<file path=ppt/slides/slide105.xml><?xml version="1.0" encoding="utf-8"?>
 <p:sld xmlns:a="http://schemas.openxmlformats.org/drawingml/2006/main" xmlns:r="http://schemas.openxmlformats.org/officeDocument/2006/relationships" xmlns:p="http://schemas.openxmlformats.org/presentationml/2006/main">
   <p:cSld>
     <p:spTree>
@@ -4589,7 +4626,7 @@
 </p:sld>
 </file>
 
-<file path=ppt/slides/slide105.xml><?xml version="1.0" encoding="utf-8"?>
+<file path=ppt/slides/slide106.xml><?xml version="1.0" encoding="utf-8"?>
 <p:sld xmlns:a="http://schemas.openxmlformats.org/drawingml/2006/main" xmlns:r="http://schemas.openxmlformats.org/officeDocument/2006/relationships" xmlns:p="http://schemas.openxmlformats.org/presentationml/2006/main">
   <p:cSld>
     <p:spTree>
@@ -4625,7 +4662,7 @@
 </p:sld>
 </file>
 
-<file path=ppt/slides/slide106.xml><?xml version="1.0" encoding="utf-8"?>
+<file path=ppt/slides/slide107.xml><?xml version="1.0" encoding="utf-8"?>
 <p:sld xmlns:a="http://schemas.openxmlformats.org/drawingml/2006/main" xmlns:r="http://schemas.openxmlformats.org/officeDocument/2006/relationships" xmlns:p="http://schemas.openxmlformats.org/presentationml/2006/main">
   <p:cSld>
     <p:spTree>
@@ -4783,7 +4820,7 @@
 </p:sld>
 </file>
 
-<file path=ppt/slides/slide107.xml><?xml version="1.0" encoding="utf-8"?>
+<file path=ppt/slides/slide108.xml><?xml version="1.0" encoding="utf-8"?>
 <p:sld xmlns:a="http://schemas.openxmlformats.org/drawingml/2006/main" xmlns:r="http://schemas.openxmlformats.org/officeDocument/2006/relationships" xmlns:p="http://schemas.openxmlformats.org/presentationml/2006/main">
   <p:cSld>
     <p:spTree>
@@ -4905,7 +4942,7 @@
 </p:sld>
 </file>
 
-<file path=ppt/slides/slide108.xml><?xml version="1.0" encoding="utf-8"?>
+<file path=ppt/slides/slide109.xml><?xml version="1.0" encoding="utf-8"?>
 <p:sld xmlns:a="http://schemas.openxmlformats.org/drawingml/2006/main" xmlns:r="http://schemas.openxmlformats.org/officeDocument/2006/relationships" xmlns:p="http://schemas.openxmlformats.org/presentationml/2006/main">
   <p:cSld>
     <p:spTree>
@@ -5110,128 +5147,6 @@
     <p:extLst>
       <p:ext uri="{BB962C8B-B14F-4D97-AF65-F5344CB8AC3E}">
         <p14:creationId xmlns:p14="http://schemas.microsoft.com/office/powerpoint/2010/main" val="1787207874"/>
-      </p:ext>
-    </p:extLst>
-  </p:cSld>
-  <p:clrMapOvr>
-    <a:masterClrMapping/>
-  </p:clrMapOvr>
-</p:sld>
-</file>
-
-<file path=ppt/slides/slide109.xml><?xml version="1.0" encoding="utf-8"?>
-<p:sld xmlns:a="http://schemas.openxmlformats.org/drawingml/2006/main" xmlns:r="http://schemas.openxmlformats.org/officeDocument/2006/relationships" xmlns:p="http://schemas.openxmlformats.org/presentationml/2006/main">
-  <p:cSld>
-    <p:spTree>
-      <p:nvGrpSpPr>
-        <p:cNvPr id="1" name="">
-          <a:extLst>
-            <a:ext uri="{FF2B5EF4-FFF2-40B4-BE49-F238E27FC236}">
-              <a16:creationId xmlns:a16="http://schemas.microsoft.com/office/drawing/2014/main" id="{0C7F44C8-51FB-7423-E16B-A311BE186D42}"/>
-            </a:ext>
-          </a:extLst>
-        </p:cNvPr>
-        <p:cNvGrpSpPr/>
-        <p:nvPr/>
-      </p:nvGrpSpPr>
-      <p:grpSpPr>
-        <a:xfrm>
-          <a:off x="0" y="0"/>
-          <a:ext cx="0" cy="0"/>
-          <a:chOff x="0" y="0"/>
-          <a:chExt cx="0" cy="0"/>
-        </a:xfrm>
-      </p:grpSpPr>
-      <p:pic>
-        <p:nvPicPr>
-          <p:cNvPr id="7" name="図 6">
-            <a:extLst>
-              <a:ext uri="{FF2B5EF4-FFF2-40B4-BE49-F238E27FC236}">
-                <a16:creationId xmlns:a16="http://schemas.microsoft.com/office/drawing/2014/main" id="{D27DA15E-ABD3-A8FB-3FFD-C1DDFEDB7D17}"/>
-              </a:ext>
-            </a:extLst>
-          </p:cNvPr>
-          <p:cNvPicPr>
-            <a:picLocks noChangeAspect="1"/>
-          </p:cNvPicPr>
-          <p:nvPr/>
-        </p:nvPicPr>
-        <p:blipFill>
-          <a:blip r:embed="rId2">
-            <a:extLst>
-              <a:ext uri="{28A0092B-C50C-407E-A947-70E740481C1C}">
-                <a14:useLocalDpi xmlns:a14="http://schemas.microsoft.com/office/drawing/2010/main" val="0"/>
-              </a:ext>
-            </a:extLst>
-          </a:blip>
-          <a:stretch>
-            <a:fillRect/>
-          </a:stretch>
-        </p:blipFill>
-        <p:spPr>
-          <a:xfrm>
-            <a:off x="4086225" y="1366837"/>
-            <a:ext cx="4019550" cy="4124325"/>
-          </a:xfrm>
-          <a:prstGeom prst="rect">
-            <a:avLst/>
-          </a:prstGeom>
-        </p:spPr>
-      </p:pic>
-      <p:sp>
-        <p:nvSpPr>
-          <p:cNvPr id="4" name="正方形/長方形 3">
-            <a:extLst>
-              <a:ext uri="{FF2B5EF4-FFF2-40B4-BE49-F238E27FC236}">
-                <a16:creationId xmlns:a16="http://schemas.microsoft.com/office/drawing/2014/main" id="{C780EA19-CF10-5F4E-43CA-0148EEAA15BE}"/>
-              </a:ext>
-            </a:extLst>
-          </p:cNvPr>
-          <p:cNvSpPr/>
-          <p:nvPr/>
-        </p:nvSpPr>
-        <p:spPr>
-          <a:xfrm flipV="1">
-            <a:off x="4492400" y="5242055"/>
-            <a:ext cx="676760" cy="239777"/>
-          </a:xfrm>
-          <a:prstGeom prst="rect">
-            <a:avLst/>
-          </a:prstGeom>
-          <a:noFill/>
-          <a:ln w="28575">
-            <a:solidFill>
-              <a:srgbClr val="FF0000"/>
-            </a:solidFill>
-          </a:ln>
-        </p:spPr>
-        <p:style>
-          <a:lnRef idx="2">
-            <a:schemeClr val="accent6"/>
-          </a:lnRef>
-          <a:fillRef idx="1">
-            <a:schemeClr val="lt1"/>
-          </a:fillRef>
-          <a:effectRef idx="0">
-            <a:schemeClr val="accent6"/>
-          </a:effectRef>
-          <a:fontRef idx="minor">
-            <a:schemeClr val="dk1"/>
-          </a:fontRef>
-        </p:style>
-        <p:txBody>
-          <a:bodyPr rtlCol="0" anchor="ctr"/>
-          <a:lstStyle/>
-          <a:p>
-            <a:pPr algn="ctr"/>
-            <a:endParaRPr kumimoji="1" lang="ja-JP" altLang="en-US"/>
-          </a:p>
-        </p:txBody>
-      </p:sp>
-    </p:spTree>
-    <p:extLst>
-      <p:ext uri="{BB962C8B-B14F-4D97-AF65-F5344CB8AC3E}">
-        <p14:creationId xmlns:p14="http://schemas.microsoft.com/office/powerpoint/2010/main" val="1098197827"/>
       </p:ext>
     </p:extLst>
   </p:cSld>
@@ -6412,6 +6327,128 @@
         <p:cNvPr id="1" name="">
           <a:extLst>
             <a:ext uri="{FF2B5EF4-FFF2-40B4-BE49-F238E27FC236}">
+              <a16:creationId xmlns:a16="http://schemas.microsoft.com/office/drawing/2014/main" id="{0C7F44C8-51FB-7423-E16B-A311BE186D42}"/>
+            </a:ext>
+          </a:extLst>
+        </p:cNvPr>
+        <p:cNvGrpSpPr/>
+        <p:nvPr/>
+      </p:nvGrpSpPr>
+      <p:grpSpPr>
+        <a:xfrm>
+          <a:off x="0" y="0"/>
+          <a:ext cx="0" cy="0"/>
+          <a:chOff x="0" y="0"/>
+          <a:chExt cx="0" cy="0"/>
+        </a:xfrm>
+      </p:grpSpPr>
+      <p:pic>
+        <p:nvPicPr>
+          <p:cNvPr id="7" name="図 6">
+            <a:extLst>
+              <a:ext uri="{FF2B5EF4-FFF2-40B4-BE49-F238E27FC236}">
+                <a16:creationId xmlns:a16="http://schemas.microsoft.com/office/drawing/2014/main" id="{D27DA15E-ABD3-A8FB-3FFD-C1DDFEDB7D17}"/>
+              </a:ext>
+            </a:extLst>
+          </p:cNvPr>
+          <p:cNvPicPr>
+            <a:picLocks noChangeAspect="1"/>
+          </p:cNvPicPr>
+          <p:nvPr/>
+        </p:nvPicPr>
+        <p:blipFill>
+          <a:blip r:embed="rId2">
+            <a:extLst>
+              <a:ext uri="{28A0092B-C50C-407E-A947-70E740481C1C}">
+                <a14:useLocalDpi xmlns:a14="http://schemas.microsoft.com/office/drawing/2010/main" val="0"/>
+              </a:ext>
+            </a:extLst>
+          </a:blip>
+          <a:stretch>
+            <a:fillRect/>
+          </a:stretch>
+        </p:blipFill>
+        <p:spPr>
+          <a:xfrm>
+            <a:off x="4086225" y="1366837"/>
+            <a:ext cx="4019550" cy="4124325"/>
+          </a:xfrm>
+          <a:prstGeom prst="rect">
+            <a:avLst/>
+          </a:prstGeom>
+        </p:spPr>
+      </p:pic>
+      <p:sp>
+        <p:nvSpPr>
+          <p:cNvPr id="4" name="正方形/長方形 3">
+            <a:extLst>
+              <a:ext uri="{FF2B5EF4-FFF2-40B4-BE49-F238E27FC236}">
+                <a16:creationId xmlns:a16="http://schemas.microsoft.com/office/drawing/2014/main" id="{C780EA19-CF10-5F4E-43CA-0148EEAA15BE}"/>
+              </a:ext>
+            </a:extLst>
+          </p:cNvPr>
+          <p:cNvSpPr/>
+          <p:nvPr/>
+        </p:nvSpPr>
+        <p:spPr>
+          <a:xfrm flipV="1">
+            <a:off x="4492400" y="5242055"/>
+            <a:ext cx="676760" cy="239777"/>
+          </a:xfrm>
+          <a:prstGeom prst="rect">
+            <a:avLst/>
+          </a:prstGeom>
+          <a:noFill/>
+          <a:ln w="28575">
+            <a:solidFill>
+              <a:srgbClr val="FF0000"/>
+            </a:solidFill>
+          </a:ln>
+        </p:spPr>
+        <p:style>
+          <a:lnRef idx="2">
+            <a:schemeClr val="accent6"/>
+          </a:lnRef>
+          <a:fillRef idx="1">
+            <a:schemeClr val="lt1"/>
+          </a:fillRef>
+          <a:effectRef idx="0">
+            <a:schemeClr val="accent6"/>
+          </a:effectRef>
+          <a:fontRef idx="minor">
+            <a:schemeClr val="dk1"/>
+          </a:fontRef>
+        </p:style>
+        <p:txBody>
+          <a:bodyPr rtlCol="0" anchor="ctr"/>
+          <a:lstStyle/>
+          <a:p>
+            <a:pPr algn="ctr"/>
+            <a:endParaRPr kumimoji="1" lang="ja-JP" altLang="en-US"/>
+          </a:p>
+        </p:txBody>
+      </p:sp>
+    </p:spTree>
+    <p:extLst>
+      <p:ext uri="{BB962C8B-B14F-4D97-AF65-F5344CB8AC3E}">
+        <p14:creationId xmlns:p14="http://schemas.microsoft.com/office/powerpoint/2010/main" val="1098197827"/>
+      </p:ext>
+    </p:extLst>
+  </p:cSld>
+  <p:clrMapOvr>
+    <a:masterClrMapping/>
+  </p:clrMapOvr>
+</p:sld>
+</file>
+
+<file path=ppt/slides/slide111.xml><?xml version="1.0" encoding="utf-8"?>
+<p:sld xmlns:a="http://schemas.openxmlformats.org/drawingml/2006/main" xmlns:r="http://schemas.openxmlformats.org/officeDocument/2006/relationships" xmlns:p="http://schemas.openxmlformats.org/presentationml/2006/main">
+  <p:cSld>
+    <p:spTree>
+      <p:nvGrpSpPr>
+        <p:cNvPr id="1" name="">
+          <a:extLst>
+            <a:ext uri="{FF2B5EF4-FFF2-40B4-BE49-F238E27FC236}">
               <a16:creationId xmlns:a16="http://schemas.microsoft.com/office/drawing/2014/main" id="{C8E3AA0B-99AA-1CE4-D159-C644D5C9934F}"/>
             </a:ext>
           </a:extLst>
@@ -6440,7 +6477,7 @@
 </p:sld>
 </file>
 
-<file path=ppt/slides/slide111.xml><?xml version="1.0" encoding="utf-8"?>
+<file path=ppt/slides/slide112.xml><?xml version="1.0" encoding="utf-8"?>
 <p:sld xmlns:a="http://schemas.openxmlformats.org/drawingml/2006/main" xmlns:r="http://schemas.openxmlformats.org/officeDocument/2006/relationships" xmlns:p="http://schemas.openxmlformats.org/presentationml/2006/main">
   <p:cSld>
     <p:spTree>
@@ -6598,7 +6635,7 @@
 </p:sld>
 </file>
 
-<file path=ppt/slides/slide112.xml><?xml version="1.0" encoding="utf-8"?>
+<file path=ppt/slides/slide113.xml><?xml version="1.0" encoding="utf-8"?>
 <p:sld xmlns:a="http://schemas.openxmlformats.org/drawingml/2006/main" xmlns:r="http://schemas.openxmlformats.org/officeDocument/2006/relationships" xmlns:p="http://schemas.openxmlformats.org/presentationml/2006/main">
   <p:cSld>
     <p:spTree>
@@ -6720,7 +6757,7 @@
 </p:sld>
 </file>
 
-<file path=ppt/slides/slide113.xml><?xml version="1.0" encoding="utf-8"?>
+<file path=ppt/slides/slide114.xml><?xml version="1.0" encoding="utf-8"?>
 <p:sld xmlns:a="http://schemas.openxmlformats.org/drawingml/2006/main" xmlns:r="http://schemas.openxmlformats.org/officeDocument/2006/relationships" xmlns:p="http://schemas.openxmlformats.org/presentationml/2006/main">
   <p:cSld>
     <p:spTree>
@@ -6942,7 +6979,7 @@
 </p:sld>
 </file>
 
-<file path=ppt/slides/slide114.xml><?xml version="1.0" encoding="utf-8"?>
+<file path=ppt/slides/slide115.xml><?xml version="1.0" encoding="utf-8"?>
 <p:sld xmlns:a="http://schemas.openxmlformats.org/drawingml/2006/main" xmlns:r="http://schemas.openxmlformats.org/officeDocument/2006/relationships" xmlns:p="http://schemas.openxmlformats.org/presentationml/2006/main">
   <p:cSld>
     <p:spTree>
@@ -7156,7 +7193,7 @@
 </p:sld>
 </file>
 
-<file path=ppt/slides/slide115.xml><?xml version="1.0" encoding="utf-8"?>
+<file path=ppt/slides/slide116.xml><?xml version="1.0" encoding="utf-8"?>
 <p:sld xmlns:a="http://schemas.openxmlformats.org/drawingml/2006/main" xmlns:r="http://schemas.openxmlformats.org/officeDocument/2006/relationships" xmlns:p="http://schemas.openxmlformats.org/presentationml/2006/main">
   <p:cSld>
     <p:spTree>
@@ -7314,7 +7351,7 @@
 </p:sld>
 </file>
 
-<file path=ppt/slides/slide116.xml><?xml version="1.0" encoding="utf-8"?>
+<file path=ppt/slides/slide117.xml><?xml version="1.0" encoding="utf-8"?>
 <p:sld xmlns:a="http://schemas.openxmlformats.org/drawingml/2006/main" xmlns:r="http://schemas.openxmlformats.org/officeDocument/2006/relationships" xmlns:p="http://schemas.openxmlformats.org/presentationml/2006/main">
   <p:cSld>
     <p:spTree>
@@ -7350,7 +7387,7 @@
 </p:sld>
 </file>
 
-<file path=ppt/slides/slide117.xml><?xml version="1.0" encoding="utf-8"?>
+<file path=ppt/slides/slide118.xml><?xml version="1.0" encoding="utf-8"?>
 <p:sld xmlns:a="http://schemas.openxmlformats.org/drawingml/2006/main" xmlns:r="http://schemas.openxmlformats.org/officeDocument/2006/relationships" xmlns:p="http://schemas.openxmlformats.org/presentationml/2006/main">
   <p:cSld>
     <p:spTree>
@@ -7386,7 +7423,7 @@
 </p:sld>
 </file>
 
-<file path=ppt/slides/slide118.xml><?xml version="1.0" encoding="utf-8"?>
+<file path=ppt/slides/slide119.xml><?xml version="1.0" encoding="utf-8"?>
 <p:sld xmlns:a="http://schemas.openxmlformats.org/drawingml/2006/main" xmlns:r="http://schemas.openxmlformats.org/officeDocument/2006/relationships" xmlns:p="http://schemas.openxmlformats.org/presentationml/2006/main">
   <p:cSld>
     <p:spTree>
@@ -7535,210 +7572,6 @@
     <p:extLst>
       <p:ext uri="{BB962C8B-B14F-4D97-AF65-F5344CB8AC3E}">
         <p14:creationId xmlns:p14="http://schemas.microsoft.com/office/powerpoint/2010/main" val="2155091631"/>
-      </p:ext>
-    </p:extLst>
-  </p:cSld>
-  <p:clrMapOvr>
-    <a:masterClrMapping/>
-  </p:clrMapOvr>
-</p:sld>
-</file>
-
-<file path=ppt/slides/slide119.xml><?xml version="1.0" encoding="utf-8"?>
-<p:sld xmlns:a="http://schemas.openxmlformats.org/drawingml/2006/main" xmlns:r="http://schemas.openxmlformats.org/officeDocument/2006/relationships" xmlns:p="http://schemas.openxmlformats.org/presentationml/2006/main">
-  <p:cSld>
-    <p:spTree>
-      <p:nvGrpSpPr>
-        <p:cNvPr id="1" name="">
-          <a:extLst>
-            <a:ext uri="{FF2B5EF4-FFF2-40B4-BE49-F238E27FC236}">
-              <a16:creationId xmlns:a16="http://schemas.microsoft.com/office/drawing/2014/main" id="{C271332C-4CDE-9C43-848B-B33DDD66CDB6}"/>
-            </a:ext>
-          </a:extLst>
-        </p:cNvPr>
-        <p:cNvGrpSpPr/>
-        <p:nvPr/>
-      </p:nvGrpSpPr>
-      <p:grpSpPr>
-        <a:xfrm>
-          <a:off x="0" y="0"/>
-          <a:ext cx="0" cy="0"/>
-          <a:chOff x="0" y="0"/>
-          <a:chExt cx="0" cy="0"/>
-        </a:xfrm>
-      </p:grpSpPr>
-      <p:pic>
-        <p:nvPicPr>
-          <p:cNvPr id="3" name="図 2">
-            <a:extLst>
-              <a:ext uri="{FF2B5EF4-FFF2-40B4-BE49-F238E27FC236}">
-                <a16:creationId xmlns:a16="http://schemas.microsoft.com/office/drawing/2014/main" id="{21ABFEF9-6905-BB44-FEC9-C7AE57B0E10E}"/>
-              </a:ext>
-            </a:extLst>
-          </p:cNvPr>
-          <p:cNvPicPr>
-            <a:picLocks noChangeAspect="1"/>
-          </p:cNvPicPr>
-          <p:nvPr/>
-        </p:nvPicPr>
-        <p:blipFill>
-          <a:blip r:embed="rId2">
-            <a:extLst>
-              <a:ext uri="{28A0092B-C50C-407E-A947-70E740481C1C}">
-                <a14:useLocalDpi xmlns:a14="http://schemas.microsoft.com/office/drawing/2010/main" val="0"/>
-              </a:ext>
-            </a:extLst>
-          </a:blip>
-          <a:stretch>
-            <a:fillRect/>
-          </a:stretch>
-        </p:blipFill>
-        <p:spPr>
-          <a:xfrm>
-            <a:off x="4062412" y="2000250"/>
-            <a:ext cx="4067175" cy="2857500"/>
-          </a:xfrm>
-          <a:prstGeom prst="rect">
-            <a:avLst/>
-          </a:prstGeom>
-        </p:spPr>
-      </p:pic>
-      <p:pic>
-        <p:nvPicPr>
-          <p:cNvPr id="15" name="図 14">
-            <a:extLst>
-              <a:ext uri="{FF2B5EF4-FFF2-40B4-BE49-F238E27FC236}">
-                <a16:creationId xmlns:a16="http://schemas.microsoft.com/office/drawing/2014/main" id="{329B5375-B548-7C91-A648-7DE142D405E5}"/>
-              </a:ext>
-            </a:extLst>
-          </p:cNvPr>
-          <p:cNvPicPr>
-            <a:picLocks noChangeAspect="1"/>
-          </p:cNvPicPr>
-          <p:nvPr/>
-        </p:nvPicPr>
-        <p:blipFill>
-          <a:blip r:embed="rId3">
-            <a:extLst>
-              <a:ext uri="{28A0092B-C50C-407E-A947-70E740481C1C}">
-                <a14:useLocalDpi xmlns:a14="http://schemas.microsoft.com/office/drawing/2010/main" val="0"/>
-              </a:ext>
-            </a:extLst>
-          </a:blip>
-          <a:stretch>
-            <a:fillRect/>
-          </a:stretch>
-        </p:blipFill>
-        <p:spPr>
-          <a:xfrm>
-            <a:off x="4864845" y="2723762"/>
-            <a:ext cx="3152775" cy="723900"/>
-          </a:xfrm>
-          <a:prstGeom prst="rect">
-            <a:avLst/>
-          </a:prstGeom>
-        </p:spPr>
-      </p:pic>
-      <p:sp>
-        <p:nvSpPr>
-          <p:cNvPr id="4" name="正方形/長方形 3">
-            <a:extLst>
-              <a:ext uri="{FF2B5EF4-FFF2-40B4-BE49-F238E27FC236}">
-                <a16:creationId xmlns:a16="http://schemas.microsoft.com/office/drawing/2014/main" id="{0976FBC9-9102-6DF7-353F-136BDB55F8AA}"/>
-              </a:ext>
-            </a:extLst>
-          </p:cNvPr>
-          <p:cNvSpPr/>
-          <p:nvPr/>
-        </p:nvSpPr>
-        <p:spPr>
-          <a:xfrm flipV="1">
-            <a:off x="4567045" y="4197026"/>
-            <a:ext cx="3562542" cy="309659"/>
-          </a:xfrm>
-          <a:prstGeom prst="rect">
-            <a:avLst/>
-          </a:prstGeom>
-          <a:noFill/>
-          <a:ln w="28575">
-            <a:solidFill>
-              <a:srgbClr val="FF0000"/>
-            </a:solidFill>
-          </a:ln>
-        </p:spPr>
-        <p:style>
-          <a:lnRef idx="2">
-            <a:schemeClr val="accent6"/>
-          </a:lnRef>
-          <a:fillRef idx="1">
-            <a:schemeClr val="lt1"/>
-          </a:fillRef>
-          <a:effectRef idx="0">
-            <a:schemeClr val="accent6"/>
-          </a:effectRef>
-          <a:fontRef idx="minor">
-            <a:schemeClr val="dk1"/>
-          </a:fontRef>
-        </p:style>
-        <p:txBody>
-          <a:bodyPr rtlCol="0" anchor="ctr"/>
-          <a:lstStyle/>
-          <a:p>
-            <a:pPr algn="ctr"/>
-            <a:endParaRPr kumimoji="1" lang="ja-JP" altLang="en-US"/>
-          </a:p>
-        </p:txBody>
-      </p:sp>
-      <p:sp>
-        <p:nvSpPr>
-          <p:cNvPr id="6" name="正方形/長方形 5">
-            <a:extLst>
-              <a:ext uri="{FF2B5EF4-FFF2-40B4-BE49-F238E27FC236}">
-                <a16:creationId xmlns:a16="http://schemas.microsoft.com/office/drawing/2014/main" id="{96DE9728-0D2E-3058-FDA1-1EB30DCC75F3}"/>
-              </a:ext>
-            </a:extLst>
-          </p:cNvPr>
-          <p:cNvSpPr/>
-          <p:nvPr/>
-        </p:nvSpPr>
-        <p:spPr>
-          <a:xfrm>
-            <a:off x="6235955" y="3023117"/>
-            <a:ext cx="873972" cy="186612"/>
-          </a:xfrm>
-          <a:prstGeom prst="rect">
-            <a:avLst/>
-          </a:prstGeom>
-        </p:spPr>
-        <p:style>
-          <a:lnRef idx="2">
-            <a:schemeClr val="dk1">
-              <a:shade val="15000"/>
-            </a:schemeClr>
-          </a:lnRef>
-          <a:fillRef idx="1">
-            <a:schemeClr val="dk1"/>
-          </a:fillRef>
-          <a:effectRef idx="0">
-            <a:schemeClr val="dk1"/>
-          </a:effectRef>
-          <a:fontRef idx="minor">
-            <a:schemeClr val="lt1"/>
-          </a:fontRef>
-        </p:style>
-        <p:txBody>
-          <a:bodyPr rtlCol="0" anchor="ctr"/>
-          <a:lstStyle/>
-          <a:p>
-            <a:pPr algn="ctr"/>
-            <a:endParaRPr kumimoji="1" lang="ja-JP" altLang="en-US" dirty="0"/>
-          </a:p>
-        </p:txBody>
-      </p:sp>
-    </p:spTree>
-    <p:extLst>
-      <p:ext uri="{BB962C8B-B14F-4D97-AF65-F5344CB8AC3E}">
-        <p14:creationId xmlns:p14="http://schemas.microsoft.com/office/powerpoint/2010/main" val="785930039"/>
       </p:ext>
     </p:extLst>
   </p:cSld>
@@ -8170,6 +8003,210 @@
         <p:cNvPr id="1" name="">
           <a:extLst>
             <a:ext uri="{FF2B5EF4-FFF2-40B4-BE49-F238E27FC236}">
+              <a16:creationId xmlns:a16="http://schemas.microsoft.com/office/drawing/2014/main" id="{C271332C-4CDE-9C43-848B-B33DDD66CDB6}"/>
+            </a:ext>
+          </a:extLst>
+        </p:cNvPr>
+        <p:cNvGrpSpPr/>
+        <p:nvPr/>
+      </p:nvGrpSpPr>
+      <p:grpSpPr>
+        <a:xfrm>
+          <a:off x="0" y="0"/>
+          <a:ext cx="0" cy="0"/>
+          <a:chOff x="0" y="0"/>
+          <a:chExt cx="0" cy="0"/>
+        </a:xfrm>
+      </p:grpSpPr>
+      <p:pic>
+        <p:nvPicPr>
+          <p:cNvPr id="3" name="図 2">
+            <a:extLst>
+              <a:ext uri="{FF2B5EF4-FFF2-40B4-BE49-F238E27FC236}">
+                <a16:creationId xmlns:a16="http://schemas.microsoft.com/office/drawing/2014/main" id="{21ABFEF9-6905-BB44-FEC9-C7AE57B0E10E}"/>
+              </a:ext>
+            </a:extLst>
+          </p:cNvPr>
+          <p:cNvPicPr>
+            <a:picLocks noChangeAspect="1"/>
+          </p:cNvPicPr>
+          <p:nvPr/>
+        </p:nvPicPr>
+        <p:blipFill>
+          <a:blip r:embed="rId2">
+            <a:extLst>
+              <a:ext uri="{28A0092B-C50C-407E-A947-70E740481C1C}">
+                <a14:useLocalDpi xmlns:a14="http://schemas.microsoft.com/office/drawing/2010/main" val="0"/>
+              </a:ext>
+            </a:extLst>
+          </a:blip>
+          <a:stretch>
+            <a:fillRect/>
+          </a:stretch>
+        </p:blipFill>
+        <p:spPr>
+          <a:xfrm>
+            <a:off x="4062412" y="2000250"/>
+            <a:ext cx="4067175" cy="2857500"/>
+          </a:xfrm>
+          <a:prstGeom prst="rect">
+            <a:avLst/>
+          </a:prstGeom>
+        </p:spPr>
+      </p:pic>
+      <p:pic>
+        <p:nvPicPr>
+          <p:cNvPr id="15" name="図 14">
+            <a:extLst>
+              <a:ext uri="{FF2B5EF4-FFF2-40B4-BE49-F238E27FC236}">
+                <a16:creationId xmlns:a16="http://schemas.microsoft.com/office/drawing/2014/main" id="{329B5375-B548-7C91-A648-7DE142D405E5}"/>
+              </a:ext>
+            </a:extLst>
+          </p:cNvPr>
+          <p:cNvPicPr>
+            <a:picLocks noChangeAspect="1"/>
+          </p:cNvPicPr>
+          <p:nvPr/>
+        </p:nvPicPr>
+        <p:blipFill>
+          <a:blip r:embed="rId3">
+            <a:extLst>
+              <a:ext uri="{28A0092B-C50C-407E-A947-70E740481C1C}">
+                <a14:useLocalDpi xmlns:a14="http://schemas.microsoft.com/office/drawing/2010/main" val="0"/>
+              </a:ext>
+            </a:extLst>
+          </a:blip>
+          <a:stretch>
+            <a:fillRect/>
+          </a:stretch>
+        </p:blipFill>
+        <p:spPr>
+          <a:xfrm>
+            <a:off x="4864845" y="2723762"/>
+            <a:ext cx="3152775" cy="723900"/>
+          </a:xfrm>
+          <a:prstGeom prst="rect">
+            <a:avLst/>
+          </a:prstGeom>
+        </p:spPr>
+      </p:pic>
+      <p:sp>
+        <p:nvSpPr>
+          <p:cNvPr id="4" name="正方形/長方形 3">
+            <a:extLst>
+              <a:ext uri="{FF2B5EF4-FFF2-40B4-BE49-F238E27FC236}">
+                <a16:creationId xmlns:a16="http://schemas.microsoft.com/office/drawing/2014/main" id="{0976FBC9-9102-6DF7-353F-136BDB55F8AA}"/>
+              </a:ext>
+            </a:extLst>
+          </p:cNvPr>
+          <p:cNvSpPr/>
+          <p:nvPr/>
+        </p:nvSpPr>
+        <p:spPr>
+          <a:xfrm flipV="1">
+            <a:off x="4567045" y="4197026"/>
+            <a:ext cx="3562542" cy="309659"/>
+          </a:xfrm>
+          <a:prstGeom prst="rect">
+            <a:avLst/>
+          </a:prstGeom>
+          <a:noFill/>
+          <a:ln w="28575">
+            <a:solidFill>
+              <a:srgbClr val="FF0000"/>
+            </a:solidFill>
+          </a:ln>
+        </p:spPr>
+        <p:style>
+          <a:lnRef idx="2">
+            <a:schemeClr val="accent6"/>
+          </a:lnRef>
+          <a:fillRef idx="1">
+            <a:schemeClr val="lt1"/>
+          </a:fillRef>
+          <a:effectRef idx="0">
+            <a:schemeClr val="accent6"/>
+          </a:effectRef>
+          <a:fontRef idx="minor">
+            <a:schemeClr val="dk1"/>
+          </a:fontRef>
+        </p:style>
+        <p:txBody>
+          <a:bodyPr rtlCol="0" anchor="ctr"/>
+          <a:lstStyle/>
+          <a:p>
+            <a:pPr algn="ctr"/>
+            <a:endParaRPr kumimoji="1" lang="ja-JP" altLang="en-US"/>
+          </a:p>
+        </p:txBody>
+      </p:sp>
+      <p:sp>
+        <p:nvSpPr>
+          <p:cNvPr id="6" name="正方形/長方形 5">
+            <a:extLst>
+              <a:ext uri="{FF2B5EF4-FFF2-40B4-BE49-F238E27FC236}">
+                <a16:creationId xmlns:a16="http://schemas.microsoft.com/office/drawing/2014/main" id="{96DE9728-0D2E-3058-FDA1-1EB30DCC75F3}"/>
+              </a:ext>
+            </a:extLst>
+          </p:cNvPr>
+          <p:cNvSpPr/>
+          <p:nvPr/>
+        </p:nvSpPr>
+        <p:spPr>
+          <a:xfrm>
+            <a:off x="6235955" y="3023117"/>
+            <a:ext cx="873972" cy="186612"/>
+          </a:xfrm>
+          <a:prstGeom prst="rect">
+            <a:avLst/>
+          </a:prstGeom>
+        </p:spPr>
+        <p:style>
+          <a:lnRef idx="2">
+            <a:schemeClr val="dk1">
+              <a:shade val="15000"/>
+            </a:schemeClr>
+          </a:lnRef>
+          <a:fillRef idx="1">
+            <a:schemeClr val="dk1"/>
+          </a:fillRef>
+          <a:effectRef idx="0">
+            <a:schemeClr val="dk1"/>
+          </a:effectRef>
+          <a:fontRef idx="minor">
+            <a:schemeClr val="lt1"/>
+          </a:fontRef>
+        </p:style>
+        <p:txBody>
+          <a:bodyPr rtlCol="0" anchor="ctr"/>
+          <a:lstStyle/>
+          <a:p>
+            <a:pPr algn="ctr"/>
+            <a:endParaRPr kumimoji="1" lang="ja-JP" altLang="en-US" dirty="0"/>
+          </a:p>
+        </p:txBody>
+      </p:sp>
+    </p:spTree>
+    <p:extLst>
+      <p:ext uri="{BB962C8B-B14F-4D97-AF65-F5344CB8AC3E}">
+        <p14:creationId xmlns:p14="http://schemas.microsoft.com/office/powerpoint/2010/main" val="785930039"/>
+      </p:ext>
+    </p:extLst>
+  </p:cSld>
+  <p:clrMapOvr>
+    <a:masterClrMapping/>
+  </p:clrMapOvr>
+</p:sld>
+</file>
+
+<file path=ppt/slides/slide121.xml><?xml version="1.0" encoding="utf-8"?>
+<p:sld xmlns:a="http://schemas.openxmlformats.org/drawingml/2006/main" xmlns:r="http://schemas.openxmlformats.org/officeDocument/2006/relationships" xmlns:p="http://schemas.openxmlformats.org/presentationml/2006/main">
+  <p:cSld>
+    <p:spTree>
+      <p:nvGrpSpPr>
+        <p:cNvPr id="1" name="">
+          <a:extLst>
+            <a:ext uri="{FF2B5EF4-FFF2-40B4-BE49-F238E27FC236}">
               <a16:creationId xmlns:a16="http://schemas.microsoft.com/office/drawing/2014/main" id="{44213A13-0E67-F602-0AA2-4B88632C7E97}"/>
             </a:ext>
           </a:extLst>
@@ -8234,7 +8271,7 @@
 </p:sld>
 </file>
 
-<file path=ppt/slides/slide121.xml><?xml version="1.0" encoding="utf-8"?>
+<file path=ppt/slides/slide122.xml><?xml version="1.0" encoding="utf-8"?>
 <p:sld xmlns:a="http://schemas.openxmlformats.org/drawingml/2006/main" xmlns:r="http://schemas.openxmlformats.org/officeDocument/2006/relationships" xmlns:p="http://schemas.openxmlformats.org/presentationml/2006/main">
   <p:cSld>
     <p:spTree>
@@ -8356,7 +8393,7 @@
 </p:sld>
 </file>
 
-<file path=ppt/slides/slide122.xml><?xml version="1.0" encoding="utf-8"?>
+<file path=ppt/slides/slide123.xml><?xml version="1.0" encoding="utf-8"?>
 <p:sld xmlns:a="http://schemas.openxmlformats.org/drawingml/2006/main" xmlns:r="http://schemas.openxmlformats.org/officeDocument/2006/relationships" xmlns:p="http://schemas.openxmlformats.org/presentationml/2006/main">
   <p:cSld>
     <p:spTree>
@@ -8478,7 +8515,7 @@
 </p:sld>
 </file>
 
-<file path=ppt/slides/slide123.xml><?xml version="1.0" encoding="utf-8"?>
+<file path=ppt/slides/slide124.xml><?xml version="1.0" encoding="utf-8"?>
 <p:sld xmlns:a="http://schemas.openxmlformats.org/drawingml/2006/main" xmlns:r="http://schemas.openxmlformats.org/officeDocument/2006/relationships" xmlns:p="http://schemas.openxmlformats.org/presentationml/2006/main">
   <p:cSld>
     <p:spTree>
@@ -8696,7 +8733,7 @@
 </p:sld>
 </file>
 
-<file path=ppt/slides/slide124.xml><?xml version="1.0" encoding="utf-8"?>
+<file path=ppt/slides/slide125.xml><?xml version="1.0" encoding="utf-8"?>
 <p:sld xmlns:a="http://schemas.openxmlformats.org/drawingml/2006/main" xmlns:r="http://schemas.openxmlformats.org/officeDocument/2006/relationships" xmlns:p="http://schemas.openxmlformats.org/presentationml/2006/main">
   <p:cSld>
     <p:spTree>
@@ -8732,7 +8769,7 @@
 </p:sld>
 </file>
 
-<file path=ppt/slides/slide125.xml><?xml version="1.0" encoding="utf-8"?>
+<file path=ppt/slides/slide126.xml><?xml version="1.0" encoding="utf-8"?>
 <p:sld xmlns:a="http://schemas.openxmlformats.org/drawingml/2006/main" xmlns:r="http://schemas.openxmlformats.org/officeDocument/2006/relationships" xmlns:p="http://schemas.openxmlformats.org/presentationml/2006/main">
   <p:cSld>
     <p:spTree>
@@ -9099,7 +9136,7 @@
 </p:sld>
 </file>
 
-<file path=ppt/slides/slide126.xml><?xml version="1.0" encoding="utf-8"?>
+<file path=ppt/slides/slide127.xml><?xml version="1.0" encoding="utf-8"?>
 <p:sld xmlns:a="http://schemas.openxmlformats.org/drawingml/2006/main" xmlns:r="http://schemas.openxmlformats.org/officeDocument/2006/relationships" xmlns:p="http://schemas.openxmlformats.org/presentationml/2006/main">
   <p:cSld>
     <p:spTree>
@@ -9453,7 +9490,7 @@
 </p:sld>
 </file>
 
-<file path=ppt/slides/slide127.xml><?xml version="1.0" encoding="utf-8"?>
+<file path=ppt/slides/slide128.xml><?xml version="1.0" encoding="utf-8"?>
 <p:sld xmlns:a="http://schemas.openxmlformats.org/drawingml/2006/main" xmlns:r="http://schemas.openxmlformats.org/officeDocument/2006/relationships" xmlns:p="http://schemas.openxmlformats.org/presentationml/2006/main">
   <p:cSld>
     <p:spTree>
@@ -9650,7 +9687,7 @@
 </p:sld>
 </file>
 
-<file path=ppt/slides/slide128.xml><?xml version="1.0" encoding="utf-8"?>
+<file path=ppt/slides/slide129.xml><?xml version="1.0" encoding="utf-8"?>
 <p:sld xmlns:a="http://schemas.openxmlformats.org/drawingml/2006/main" xmlns:r="http://schemas.openxmlformats.org/officeDocument/2006/relationships" xmlns:p="http://schemas.openxmlformats.org/presentationml/2006/main">
   <p:cSld>
     <p:spTree>
@@ -9757,184 +9794,6 @@
     <p:extLst>
       <p:ext uri="{BB962C8B-B14F-4D97-AF65-F5344CB8AC3E}">
         <p14:creationId xmlns:p14="http://schemas.microsoft.com/office/powerpoint/2010/main" val="3218276701"/>
-      </p:ext>
-    </p:extLst>
-  </p:cSld>
-  <p:clrMapOvr>
-    <a:masterClrMapping/>
-  </p:clrMapOvr>
-</p:sld>
-</file>
-
-<file path=ppt/slides/slide129.xml><?xml version="1.0" encoding="utf-8"?>
-<p:sld xmlns:a="http://schemas.openxmlformats.org/drawingml/2006/main" xmlns:r="http://schemas.openxmlformats.org/officeDocument/2006/relationships" xmlns:p="http://schemas.openxmlformats.org/presentationml/2006/main">
-  <p:cSld>
-    <p:spTree>
-      <p:nvGrpSpPr>
-        <p:cNvPr id="1" name="">
-          <a:extLst>
-            <a:ext uri="{FF2B5EF4-FFF2-40B4-BE49-F238E27FC236}">
-              <a16:creationId xmlns:a16="http://schemas.microsoft.com/office/drawing/2014/main" id="{A541EC57-574E-505F-899A-EE0835DF7A7E}"/>
-            </a:ext>
-          </a:extLst>
-        </p:cNvPr>
-        <p:cNvGrpSpPr/>
-        <p:nvPr/>
-      </p:nvGrpSpPr>
-      <p:grpSpPr>
-        <a:xfrm>
-          <a:off x="0" y="0"/>
-          <a:ext cx="0" cy="0"/>
-          <a:chOff x="0" y="0"/>
-          <a:chExt cx="0" cy="0"/>
-        </a:xfrm>
-      </p:grpSpPr>
-      <p:sp>
-        <p:nvSpPr>
-          <p:cNvPr id="2" name="正方形/長方形 1">
-            <a:extLst>
-              <a:ext uri="{FF2B5EF4-FFF2-40B4-BE49-F238E27FC236}">
-                <a16:creationId xmlns:a16="http://schemas.microsoft.com/office/drawing/2014/main" id="{4C66B004-6E66-EF6B-84F5-C204982FF942}"/>
-              </a:ext>
-            </a:extLst>
-          </p:cNvPr>
-          <p:cNvSpPr/>
-          <p:nvPr/>
-        </p:nvSpPr>
-        <p:spPr>
-          <a:xfrm>
-            <a:off x="3470986" y="1530219"/>
-            <a:ext cx="7200000" cy="1380931"/>
-          </a:xfrm>
-          <a:prstGeom prst="rect">
-            <a:avLst/>
-          </a:prstGeom>
-          <a:solidFill>
-            <a:schemeClr val="tx1"/>
-          </a:solidFill>
-          <a:ln>
-            <a:solidFill>
-              <a:schemeClr val="tx1"/>
-            </a:solidFill>
-          </a:ln>
-        </p:spPr>
-        <p:style>
-          <a:lnRef idx="2">
-            <a:schemeClr val="accent6"/>
-          </a:lnRef>
-          <a:fillRef idx="1">
-            <a:schemeClr val="lt1"/>
-          </a:fillRef>
-          <a:effectRef idx="0">
-            <a:schemeClr val="accent6"/>
-          </a:effectRef>
-          <a:fontRef idx="minor">
-            <a:schemeClr val="dk1"/>
-          </a:fontRef>
-        </p:style>
-        <p:txBody>
-          <a:bodyPr rtlCol="0" anchor="t"/>
-          <a:lstStyle/>
-          <a:p>
-            <a:r>
-              <a:rPr lang="en-US" altLang="ja-JP" sz="1400" dirty="0">
-                <a:solidFill>
-                  <a:schemeClr val="bg1"/>
-                </a:solidFill>
-              </a:rPr>
-              <a:t>C:\git-test&gt;git commit -m "</a:t>
-            </a:r>
-            <a:r>
-              <a:rPr lang="ja-JP" altLang="en-US" sz="1400" dirty="0">
-                <a:solidFill>
-                  <a:schemeClr val="bg1"/>
-                </a:solidFill>
-              </a:rPr>
-              <a:t>テストデータ登録</a:t>
-            </a:r>
-            <a:r>
-              <a:rPr lang="en-US" altLang="ja-JP" sz="1400" dirty="0">
-                <a:solidFill>
-                  <a:schemeClr val="bg1"/>
-                </a:solidFill>
-              </a:rPr>
-              <a:t>"</a:t>
-            </a:r>
-          </a:p>
-          <a:p>
-            <a:r>
-              <a:rPr lang="en-US" altLang="ja-JP" sz="1400" dirty="0">
-                <a:solidFill>
-                  <a:schemeClr val="bg1"/>
-                </a:solidFill>
-              </a:rPr>
-              <a:t>[master (root-commit) 9e326ae] </a:t>
-            </a:r>
-            <a:r>
-              <a:rPr lang="ja-JP" altLang="en-US" sz="1400" dirty="0">
-                <a:solidFill>
-                  <a:schemeClr val="bg1"/>
-                </a:solidFill>
-              </a:rPr>
-              <a:t>テストデータ登録</a:t>
-            </a:r>
-          </a:p>
-          <a:p>
-            <a:r>
-              <a:rPr lang="ja-JP" altLang="en-US" sz="1400" dirty="0">
-                <a:solidFill>
-                  <a:schemeClr val="bg1"/>
-                </a:solidFill>
-              </a:rPr>
-              <a:t> </a:t>
-            </a:r>
-            <a:r>
-              <a:rPr lang="en-US" altLang="ja-JP" sz="1400" dirty="0">
-                <a:solidFill>
-                  <a:schemeClr val="bg1"/>
-                </a:solidFill>
-              </a:rPr>
-              <a:t>1 file changed, 1 insertion(+)</a:t>
-            </a:r>
-          </a:p>
-          <a:p>
-            <a:r>
-              <a:rPr lang="en-US" altLang="ja-JP" sz="1400" dirty="0">
-                <a:solidFill>
-                  <a:schemeClr val="bg1"/>
-                </a:solidFill>
-              </a:rPr>
-              <a:t> create mode 100644 test.txt</a:t>
-            </a:r>
-          </a:p>
-          <a:p>
-            <a:endParaRPr lang="en-US" altLang="ja-JP" sz="1400" dirty="0">
-              <a:solidFill>
-                <a:schemeClr val="bg1"/>
-              </a:solidFill>
-            </a:endParaRPr>
-          </a:p>
-          <a:p>
-            <a:r>
-              <a:rPr lang="en-US" altLang="ja-JP" sz="1400" dirty="0">
-                <a:solidFill>
-                  <a:schemeClr val="bg1"/>
-                </a:solidFill>
-              </a:rPr>
-              <a:t>C:\git-test&gt;</a:t>
-            </a:r>
-            <a:endParaRPr kumimoji="1" lang="ja-JP" altLang="en-US" sz="1400" dirty="0">
-              <a:solidFill>
-                <a:schemeClr val="bg1"/>
-              </a:solidFill>
-            </a:endParaRPr>
-          </a:p>
-        </p:txBody>
-      </p:sp>
-    </p:spTree>
-    <p:extLst>
-      <p:ext uri="{BB962C8B-B14F-4D97-AF65-F5344CB8AC3E}">
-        <p14:creationId xmlns:p14="http://schemas.microsoft.com/office/powerpoint/2010/main" val="2830637044"/>
       </p:ext>
     </p:extLst>
   </p:cSld>
@@ -10832,6 +10691,184 @@
         <p:cNvPr id="1" name="">
           <a:extLst>
             <a:ext uri="{FF2B5EF4-FFF2-40B4-BE49-F238E27FC236}">
+              <a16:creationId xmlns:a16="http://schemas.microsoft.com/office/drawing/2014/main" id="{A541EC57-574E-505F-899A-EE0835DF7A7E}"/>
+            </a:ext>
+          </a:extLst>
+        </p:cNvPr>
+        <p:cNvGrpSpPr/>
+        <p:nvPr/>
+      </p:nvGrpSpPr>
+      <p:grpSpPr>
+        <a:xfrm>
+          <a:off x="0" y="0"/>
+          <a:ext cx="0" cy="0"/>
+          <a:chOff x="0" y="0"/>
+          <a:chExt cx="0" cy="0"/>
+        </a:xfrm>
+      </p:grpSpPr>
+      <p:sp>
+        <p:nvSpPr>
+          <p:cNvPr id="2" name="正方形/長方形 1">
+            <a:extLst>
+              <a:ext uri="{FF2B5EF4-FFF2-40B4-BE49-F238E27FC236}">
+                <a16:creationId xmlns:a16="http://schemas.microsoft.com/office/drawing/2014/main" id="{4C66B004-6E66-EF6B-84F5-C204982FF942}"/>
+              </a:ext>
+            </a:extLst>
+          </p:cNvPr>
+          <p:cNvSpPr/>
+          <p:nvPr/>
+        </p:nvSpPr>
+        <p:spPr>
+          <a:xfrm>
+            <a:off x="3470986" y="1530219"/>
+            <a:ext cx="7200000" cy="1380931"/>
+          </a:xfrm>
+          <a:prstGeom prst="rect">
+            <a:avLst/>
+          </a:prstGeom>
+          <a:solidFill>
+            <a:schemeClr val="tx1"/>
+          </a:solidFill>
+          <a:ln>
+            <a:solidFill>
+              <a:schemeClr val="tx1"/>
+            </a:solidFill>
+          </a:ln>
+        </p:spPr>
+        <p:style>
+          <a:lnRef idx="2">
+            <a:schemeClr val="accent6"/>
+          </a:lnRef>
+          <a:fillRef idx="1">
+            <a:schemeClr val="lt1"/>
+          </a:fillRef>
+          <a:effectRef idx="0">
+            <a:schemeClr val="accent6"/>
+          </a:effectRef>
+          <a:fontRef idx="minor">
+            <a:schemeClr val="dk1"/>
+          </a:fontRef>
+        </p:style>
+        <p:txBody>
+          <a:bodyPr rtlCol="0" anchor="t"/>
+          <a:lstStyle/>
+          <a:p>
+            <a:r>
+              <a:rPr lang="en-US" altLang="ja-JP" sz="1400" dirty="0">
+                <a:solidFill>
+                  <a:schemeClr val="bg1"/>
+                </a:solidFill>
+              </a:rPr>
+              <a:t>C:\git-test&gt;git commit -m "</a:t>
+            </a:r>
+            <a:r>
+              <a:rPr lang="ja-JP" altLang="en-US" sz="1400" dirty="0">
+                <a:solidFill>
+                  <a:schemeClr val="bg1"/>
+                </a:solidFill>
+              </a:rPr>
+              <a:t>テストデータ登録</a:t>
+            </a:r>
+            <a:r>
+              <a:rPr lang="en-US" altLang="ja-JP" sz="1400" dirty="0">
+                <a:solidFill>
+                  <a:schemeClr val="bg1"/>
+                </a:solidFill>
+              </a:rPr>
+              <a:t>"</a:t>
+            </a:r>
+          </a:p>
+          <a:p>
+            <a:r>
+              <a:rPr lang="en-US" altLang="ja-JP" sz="1400" dirty="0">
+                <a:solidFill>
+                  <a:schemeClr val="bg1"/>
+                </a:solidFill>
+              </a:rPr>
+              <a:t>[master (root-commit) 9e326ae] </a:t>
+            </a:r>
+            <a:r>
+              <a:rPr lang="ja-JP" altLang="en-US" sz="1400" dirty="0">
+                <a:solidFill>
+                  <a:schemeClr val="bg1"/>
+                </a:solidFill>
+              </a:rPr>
+              <a:t>テストデータ登録</a:t>
+            </a:r>
+          </a:p>
+          <a:p>
+            <a:r>
+              <a:rPr lang="ja-JP" altLang="en-US" sz="1400" dirty="0">
+                <a:solidFill>
+                  <a:schemeClr val="bg1"/>
+                </a:solidFill>
+              </a:rPr>
+              <a:t> </a:t>
+            </a:r>
+            <a:r>
+              <a:rPr lang="en-US" altLang="ja-JP" sz="1400" dirty="0">
+                <a:solidFill>
+                  <a:schemeClr val="bg1"/>
+                </a:solidFill>
+              </a:rPr>
+              <a:t>1 file changed, 1 insertion(+)</a:t>
+            </a:r>
+          </a:p>
+          <a:p>
+            <a:r>
+              <a:rPr lang="en-US" altLang="ja-JP" sz="1400" dirty="0">
+                <a:solidFill>
+                  <a:schemeClr val="bg1"/>
+                </a:solidFill>
+              </a:rPr>
+              <a:t> create mode 100644 test.txt</a:t>
+            </a:r>
+          </a:p>
+          <a:p>
+            <a:endParaRPr lang="en-US" altLang="ja-JP" sz="1400" dirty="0">
+              <a:solidFill>
+                <a:schemeClr val="bg1"/>
+              </a:solidFill>
+            </a:endParaRPr>
+          </a:p>
+          <a:p>
+            <a:r>
+              <a:rPr lang="en-US" altLang="ja-JP" sz="1400" dirty="0">
+                <a:solidFill>
+                  <a:schemeClr val="bg1"/>
+                </a:solidFill>
+              </a:rPr>
+              <a:t>C:\git-test&gt;</a:t>
+            </a:r>
+            <a:endParaRPr kumimoji="1" lang="ja-JP" altLang="en-US" sz="1400" dirty="0">
+              <a:solidFill>
+                <a:schemeClr val="bg1"/>
+              </a:solidFill>
+            </a:endParaRPr>
+          </a:p>
+        </p:txBody>
+      </p:sp>
+    </p:spTree>
+    <p:extLst>
+      <p:ext uri="{BB962C8B-B14F-4D97-AF65-F5344CB8AC3E}">
+        <p14:creationId xmlns:p14="http://schemas.microsoft.com/office/powerpoint/2010/main" val="2830637044"/>
+      </p:ext>
+    </p:extLst>
+  </p:cSld>
+  <p:clrMapOvr>
+    <a:masterClrMapping/>
+  </p:clrMapOvr>
+</p:sld>
+</file>
+
+<file path=ppt/slides/slide131.xml><?xml version="1.0" encoding="utf-8"?>
+<p:sld xmlns:a="http://schemas.openxmlformats.org/drawingml/2006/main" xmlns:r="http://schemas.openxmlformats.org/officeDocument/2006/relationships" xmlns:p="http://schemas.openxmlformats.org/presentationml/2006/main">
+  <p:cSld>
+    <p:spTree>
+      <p:nvGrpSpPr>
+        <p:cNvPr id="1" name="">
+          <a:extLst>
+            <a:ext uri="{FF2B5EF4-FFF2-40B4-BE49-F238E27FC236}">
               <a16:creationId xmlns:a16="http://schemas.microsoft.com/office/drawing/2014/main" id="{0BB99027-BF16-D5DE-0CE0-52E78B5EAC16}"/>
             </a:ext>
           </a:extLst>
@@ -10860,7 +10897,7 @@
 </p:sld>
 </file>
 
-<file path=ppt/slides/slide131.xml><?xml version="1.0" encoding="utf-8"?>
+<file path=ppt/slides/slide132.xml><?xml version="1.0" encoding="utf-8"?>
 <p:sld xmlns:a="http://schemas.openxmlformats.org/drawingml/2006/main" xmlns:r="http://schemas.openxmlformats.org/officeDocument/2006/relationships" xmlns:p="http://schemas.openxmlformats.org/presentationml/2006/main">
   <p:cSld>
     <p:spTree>
@@ -11282,7 +11319,7 @@
 </p:sld>
 </file>
 
-<file path=ppt/slides/slide132.xml><?xml version="1.0" encoding="utf-8"?>
+<file path=ppt/slides/slide133.xml><?xml version="1.0" encoding="utf-8"?>
 <p:sld xmlns:a="http://schemas.openxmlformats.org/drawingml/2006/main" xmlns:r="http://schemas.openxmlformats.org/officeDocument/2006/relationships" xmlns:p="http://schemas.openxmlformats.org/presentationml/2006/main">
   <p:cSld>
     <p:spTree>
@@ -11494,7 +11531,7 @@
 </p:sld>
 </file>
 
-<file path=ppt/slides/slide133.xml><?xml version="1.0" encoding="utf-8"?>
+<file path=ppt/slides/slide134.xml><?xml version="1.0" encoding="utf-8"?>
 <p:sld xmlns:a="http://schemas.openxmlformats.org/drawingml/2006/main" xmlns:r="http://schemas.openxmlformats.org/officeDocument/2006/relationships" xmlns:p="http://schemas.openxmlformats.org/presentationml/2006/main">
   <p:cSld>
     <p:spTree>
@@ -11706,7 +11743,7 @@
 </p:sld>
 </file>
 
-<file path=ppt/slides/slide134.xml><?xml version="1.0" encoding="utf-8"?>
+<file path=ppt/slides/slide135.xml><?xml version="1.0" encoding="utf-8"?>
 <p:sld xmlns:a="http://schemas.openxmlformats.org/drawingml/2006/main" xmlns:r="http://schemas.openxmlformats.org/officeDocument/2006/relationships" xmlns:p="http://schemas.openxmlformats.org/presentationml/2006/main">
   <p:cSld>
     <p:spTree>
@@ -11918,7 +11955,7 @@
 </p:sld>
 </file>
 
-<file path=ppt/slides/slide135.xml><?xml version="1.0" encoding="utf-8"?>
+<file path=ppt/slides/slide136.xml><?xml version="1.0" encoding="utf-8"?>
 <p:sld xmlns:a="http://schemas.openxmlformats.org/drawingml/2006/main" xmlns:r="http://schemas.openxmlformats.org/officeDocument/2006/relationships" xmlns:p="http://schemas.openxmlformats.org/presentationml/2006/main">
   <p:cSld>
     <p:spTree>
@@ -11954,7 +11991,7 @@
 </p:sld>
 </file>
 
-<file path=ppt/slides/slide136.xml><?xml version="1.0" encoding="utf-8"?>
+<file path=ppt/slides/slide137.xml><?xml version="1.0" encoding="utf-8"?>
 <p:sld xmlns:a="http://schemas.openxmlformats.org/drawingml/2006/main" xmlns:r="http://schemas.openxmlformats.org/officeDocument/2006/relationships" xmlns:p="http://schemas.openxmlformats.org/presentationml/2006/main">
   <p:cSld>
     <p:spTree>
@@ -12133,7 +12170,7 @@
 </p:sld>
 </file>
 
-<file path=ppt/slides/slide137.xml><?xml version="1.0" encoding="utf-8"?>
+<file path=ppt/slides/slide138.xml><?xml version="1.0" encoding="utf-8"?>
 <p:sld xmlns:a="http://schemas.openxmlformats.org/drawingml/2006/main" xmlns:r="http://schemas.openxmlformats.org/officeDocument/2006/relationships" xmlns:p="http://schemas.openxmlformats.org/presentationml/2006/main">
   <p:cSld>
     <p:spTree>
@@ -12338,7 +12375,7 @@
 </p:sld>
 </file>
 
-<file path=ppt/slides/slide138.xml><?xml version="1.0" encoding="utf-8"?>
+<file path=ppt/slides/slide139.xml><?xml version="1.0" encoding="utf-8"?>
 <p:sld xmlns:a="http://schemas.openxmlformats.org/drawingml/2006/main" xmlns:r="http://schemas.openxmlformats.org/officeDocument/2006/relationships" xmlns:p="http://schemas.openxmlformats.org/presentationml/2006/main">
   <p:cSld>
     <p:spTree>
@@ -12640,165 +12677,6 @@
     <p:extLst>
       <p:ext uri="{BB962C8B-B14F-4D97-AF65-F5344CB8AC3E}">
         <p14:creationId xmlns:p14="http://schemas.microsoft.com/office/powerpoint/2010/main" val="1051006001"/>
-      </p:ext>
-    </p:extLst>
-  </p:cSld>
-  <p:clrMapOvr>
-    <a:masterClrMapping/>
-  </p:clrMapOvr>
-</p:sld>
-</file>
-
-<file path=ppt/slides/slide139.xml><?xml version="1.0" encoding="utf-8"?>
-<p:sld xmlns:a="http://schemas.openxmlformats.org/drawingml/2006/main" xmlns:r="http://schemas.openxmlformats.org/officeDocument/2006/relationships" xmlns:p="http://schemas.openxmlformats.org/presentationml/2006/main">
-  <p:cSld>
-    <p:spTree>
-      <p:nvGrpSpPr>
-        <p:cNvPr id="1" name="">
-          <a:extLst>
-            <a:ext uri="{FF2B5EF4-FFF2-40B4-BE49-F238E27FC236}">
-              <a16:creationId xmlns:a16="http://schemas.microsoft.com/office/drawing/2014/main" id="{19240F6A-0F09-69DF-6080-4AAF0F2296B2}"/>
-            </a:ext>
-          </a:extLst>
-        </p:cNvPr>
-        <p:cNvGrpSpPr/>
-        <p:nvPr/>
-      </p:nvGrpSpPr>
-      <p:grpSpPr>
-        <a:xfrm>
-          <a:off x="0" y="0"/>
-          <a:ext cx="0" cy="0"/>
-          <a:chOff x="0" y="0"/>
-          <a:chExt cx="0" cy="0"/>
-        </a:xfrm>
-      </p:grpSpPr>
-      <p:sp>
-        <p:nvSpPr>
-          <p:cNvPr id="2" name="正方形/長方形 1">
-            <a:extLst>
-              <a:ext uri="{FF2B5EF4-FFF2-40B4-BE49-F238E27FC236}">
-                <a16:creationId xmlns:a16="http://schemas.microsoft.com/office/drawing/2014/main" id="{D9492C21-5D16-A915-1BAC-1C6D4BD53041}"/>
-              </a:ext>
-            </a:extLst>
-          </p:cNvPr>
-          <p:cNvSpPr/>
-          <p:nvPr/>
-        </p:nvSpPr>
-        <p:spPr>
-          <a:xfrm>
-            <a:off x="3470986" y="1530220"/>
-            <a:ext cx="7200000" cy="1567544"/>
-          </a:xfrm>
-          <a:prstGeom prst="rect">
-            <a:avLst/>
-          </a:prstGeom>
-          <a:solidFill>
-            <a:schemeClr val="tx1"/>
-          </a:solidFill>
-          <a:ln>
-            <a:solidFill>
-              <a:schemeClr val="tx1"/>
-            </a:solidFill>
-          </a:ln>
-        </p:spPr>
-        <p:style>
-          <a:lnRef idx="2">
-            <a:schemeClr val="accent6"/>
-          </a:lnRef>
-          <a:fillRef idx="1">
-            <a:schemeClr val="lt1"/>
-          </a:fillRef>
-          <a:effectRef idx="0">
-            <a:schemeClr val="accent6"/>
-          </a:effectRef>
-          <a:fontRef idx="minor">
-            <a:schemeClr val="dk1"/>
-          </a:fontRef>
-        </p:style>
-        <p:txBody>
-          <a:bodyPr rtlCol="0" anchor="t"/>
-          <a:lstStyle/>
-          <a:p>
-            <a:r>
-              <a:rPr lang="en-US" altLang="ja-JP" sz="1400" dirty="0">
-                <a:solidFill>
-                  <a:schemeClr val="bg1"/>
-                </a:solidFill>
-              </a:rPr>
-              <a:t>C:\git-test-remote&gt;git merge origin/</a:t>
-            </a:r>
-            <a:r>
-              <a:rPr lang="en-US" altLang="ja-JP" sz="1400" dirty="0" err="1">
-                <a:solidFill>
-                  <a:schemeClr val="bg1"/>
-                </a:solidFill>
-              </a:rPr>
-              <a:t>branchX</a:t>
-            </a:r>
-            <a:endParaRPr lang="en-US" altLang="ja-JP" sz="1400" dirty="0">
-              <a:solidFill>
-                <a:schemeClr val="bg1"/>
-              </a:solidFill>
-            </a:endParaRPr>
-          </a:p>
-          <a:p>
-            <a:r>
-              <a:rPr lang="en-US" altLang="ja-JP" sz="1400" dirty="0">
-                <a:solidFill>
-                  <a:schemeClr val="bg1"/>
-                </a:solidFill>
-              </a:rPr>
-              <a:t>Auto-merging test.txt</a:t>
-            </a:r>
-          </a:p>
-          <a:p>
-            <a:r>
-              <a:rPr lang="en-US" altLang="ja-JP" sz="1400" dirty="0">
-                <a:solidFill>
-                  <a:schemeClr val="bg1"/>
-                </a:solidFill>
-              </a:rPr>
-              <a:t>CONFLICT (content): Merge conflict in test.txt</a:t>
-            </a:r>
-          </a:p>
-          <a:p>
-            <a:r>
-              <a:rPr lang="en-US" altLang="ja-JP" sz="1400" dirty="0">
-                <a:solidFill>
-                  <a:schemeClr val="bg1"/>
-                </a:solidFill>
-              </a:rPr>
-              <a:t>Automatic merge failed; fix conflicts and then commit the result.</a:t>
-            </a:r>
-          </a:p>
-          <a:p>
-            <a:endParaRPr kumimoji="1" lang="en-US" altLang="ja-JP" sz="1400" dirty="0">
-              <a:solidFill>
-                <a:schemeClr val="bg1"/>
-              </a:solidFill>
-            </a:endParaRPr>
-          </a:p>
-          <a:p>
-            <a:r>
-              <a:rPr lang="en-US" altLang="ja-JP" sz="1400" dirty="0">
-                <a:solidFill>
-                  <a:schemeClr val="bg1"/>
-                </a:solidFill>
-              </a:rPr>
-              <a:t>C:\git-test-remote&gt;</a:t>
-            </a:r>
-            <a:endParaRPr kumimoji="1" lang="ja-JP" altLang="en-US" sz="1400" dirty="0">
-              <a:solidFill>
-                <a:schemeClr val="bg1"/>
-              </a:solidFill>
-            </a:endParaRPr>
-          </a:p>
-        </p:txBody>
-      </p:sp>
-    </p:spTree>
-    <p:extLst>
-      <p:ext uri="{BB962C8B-B14F-4D97-AF65-F5344CB8AC3E}">
-        <p14:creationId xmlns:p14="http://schemas.microsoft.com/office/powerpoint/2010/main" val="2335755136"/>
       </p:ext>
     </p:extLst>
   </p:cSld>
@@ -13028,6 +12906,165 @@
     <p:extLst>
       <p:ext uri="{BB962C8B-B14F-4D97-AF65-F5344CB8AC3E}">
         <p14:creationId xmlns:p14="http://schemas.microsoft.com/office/powerpoint/2010/main" val="2212931319"/>
+      </p:ext>
+    </p:extLst>
+  </p:cSld>
+  <p:clrMapOvr>
+    <a:masterClrMapping/>
+  </p:clrMapOvr>
+</p:sld>
+</file>
+
+<file path=ppt/slides/slide140.xml><?xml version="1.0" encoding="utf-8"?>
+<p:sld xmlns:a="http://schemas.openxmlformats.org/drawingml/2006/main" xmlns:r="http://schemas.openxmlformats.org/officeDocument/2006/relationships" xmlns:p="http://schemas.openxmlformats.org/presentationml/2006/main">
+  <p:cSld>
+    <p:spTree>
+      <p:nvGrpSpPr>
+        <p:cNvPr id="1" name="">
+          <a:extLst>
+            <a:ext uri="{FF2B5EF4-FFF2-40B4-BE49-F238E27FC236}">
+              <a16:creationId xmlns:a16="http://schemas.microsoft.com/office/drawing/2014/main" id="{19240F6A-0F09-69DF-6080-4AAF0F2296B2}"/>
+            </a:ext>
+          </a:extLst>
+        </p:cNvPr>
+        <p:cNvGrpSpPr/>
+        <p:nvPr/>
+      </p:nvGrpSpPr>
+      <p:grpSpPr>
+        <a:xfrm>
+          <a:off x="0" y="0"/>
+          <a:ext cx="0" cy="0"/>
+          <a:chOff x="0" y="0"/>
+          <a:chExt cx="0" cy="0"/>
+        </a:xfrm>
+      </p:grpSpPr>
+      <p:sp>
+        <p:nvSpPr>
+          <p:cNvPr id="2" name="正方形/長方形 1">
+            <a:extLst>
+              <a:ext uri="{FF2B5EF4-FFF2-40B4-BE49-F238E27FC236}">
+                <a16:creationId xmlns:a16="http://schemas.microsoft.com/office/drawing/2014/main" id="{D9492C21-5D16-A915-1BAC-1C6D4BD53041}"/>
+              </a:ext>
+            </a:extLst>
+          </p:cNvPr>
+          <p:cNvSpPr/>
+          <p:nvPr/>
+        </p:nvSpPr>
+        <p:spPr>
+          <a:xfrm>
+            <a:off x="3470986" y="1530220"/>
+            <a:ext cx="7200000" cy="1567544"/>
+          </a:xfrm>
+          <a:prstGeom prst="rect">
+            <a:avLst/>
+          </a:prstGeom>
+          <a:solidFill>
+            <a:schemeClr val="tx1"/>
+          </a:solidFill>
+          <a:ln>
+            <a:solidFill>
+              <a:schemeClr val="tx1"/>
+            </a:solidFill>
+          </a:ln>
+        </p:spPr>
+        <p:style>
+          <a:lnRef idx="2">
+            <a:schemeClr val="accent6"/>
+          </a:lnRef>
+          <a:fillRef idx="1">
+            <a:schemeClr val="lt1"/>
+          </a:fillRef>
+          <a:effectRef idx="0">
+            <a:schemeClr val="accent6"/>
+          </a:effectRef>
+          <a:fontRef idx="minor">
+            <a:schemeClr val="dk1"/>
+          </a:fontRef>
+        </p:style>
+        <p:txBody>
+          <a:bodyPr rtlCol="0" anchor="t"/>
+          <a:lstStyle/>
+          <a:p>
+            <a:r>
+              <a:rPr lang="en-US" altLang="ja-JP" sz="1400" dirty="0">
+                <a:solidFill>
+                  <a:schemeClr val="bg1"/>
+                </a:solidFill>
+              </a:rPr>
+              <a:t>C:\git-test-remote&gt;git merge origin/</a:t>
+            </a:r>
+            <a:r>
+              <a:rPr lang="en-US" altLang="ja-JP" sz="1400" dirty="0" err="1">
+                <a:solidFill>
+                  <a:schemeClr val="bg1"/>
+                </a:solidFill>
+              </a:rPr>
+              <a:t>branchX</a:t>
+            </a:r>
+            <a:endParaRPr lang="en-US" altLang="ja-JP" sz="1400" dirty="0">
+              <a:solidFill>
+                <a:schemeClr val="bg1"/>
+              </a:solidFill>
+            </a:endParaRPr>
+          </a:p>
+          <a:p>
+            <a:r>
+              <a:rPr lang="en-US" altLang="ja-JP" sz="1400" dirty="0">
+                <a:solidFill>
+                  <a:schemeClr val="bg1"/>
+                </a:solidFill>
+              </a:rPr>
+              <a:t>Auto-merging test.txt</a:t>
+            </a:r>
+          </a:p>
+          <a:p>
+            <a:r>
+              <a:rPr lang="en-US" altLang="ja-JP" sz="1400" dirty="0">
+                <a:solidFill>
+                  <a:schemeClr val="bg1"/>
+                </a:solidFill>
+              </a:rPr>
+              <a:t>CONFLICT (content): Merge conflict in test.txt</a:t>
+            </a:r>
+          </a:p>
+          <a:p>
+            <a:r>
+              <a:rPr lang="en-US" altLang="ja-JP" sz="1400" dirty="0">
+                <a:solidFill>
+                  <a:schemeClr val="bg1"/>
+                </a:solidFill>
+              </a:rPr>
+              <a:t>Automatic merge failed; fix conflicts and then commit the result.</a:t>
+            </a:r>
+          </a:p>
+          <a:p>
+            <a:endParaRPr kumimoji="1" lang="en-US" altLang="ja-JP" sz="1400" dirty="0">
+              <a:solidFill>
+                <a:schemeClr val="bg1"/>
+              </a:solidFill>
+            </a:endParaRPr>
+          </a:p>
+          <a:p>
+            <a:r>
+              <a:rPr lang="en-US" altLang="ja-JP" sz="1400" dirty="0">
+                <a:solidFill>
+                  <a:schemeClr val="bg1"/>
+                </a:solidFill>
+              </a:rPr>
+              <a:t>C:\git-test-remote&gt;</a:t>
+            </a:r>
+            <a:endParaRPr kumimoji="1" lang="ja-JP" altLang="en-US" sz="1400" dirty="0">
+              <a:solidFill>
+                <a:schemeClr val="bg1"/>
+              </a:solidFill>
+            </a:endParaRPr>
+          </a:p>
+        </p:txBody>
+      </p:sp>
+    </p:spTree>
+    <p:extLst>
+      <p:ext uri="{BB962C8B-B14F-4D97-AF65-F5344CB8AC3E}">
+        <p14:creationId xmlns:p14="http://schemas.microsoft.com/office/powerpoint/2010/main" val="2335755136"/>
       </p:ext>
     </p:extLst>
   </p:cSld>
@@ -32412,7 +32449,7 @@
         <p:cNvPr id="1" name="">
           <a:extLst>
             <a:ext uri="{FF2B5EF4-FFF2-40B4-BE49-F238E27FC236}">
-              <a16:creationId xmlns:a16="http://schemas.microsoft.com/office/drawing/2014/main" id="{DE3EDDBB-CBAF-8FCF-DAA4-50DD4B4408A3}"/>
+              <a16:creationId xmlns:a16="http://schemas.microsoft.com/office/drawing/2014/main" id="{4762E807-DD1A-8881-34C7-A112E2406E9C}"/>
             </a:ext>
           </a:extLst>
         </p:cNvPr>
@@ -32432,7 +32469,7 @@
           <p:cNvPr id="40" name="四角形: 角を丸くする 39">
             <a:extLst>
               <a:ext uri="{FF2B5EF4-FFF2-40B4-BE49-F238E27FC236}">
-                <a16:creationId xmlns:a16="http://schemas.microsoft.com/office/drawing/2014/main" id="{B98D9863-9677-0C7E-6DD0-3A5FBAE513DD}"/>
+                <a16:creationId xmlns:a16="http://schemas.microsoft.com/office/drawing/2014/main" id="{F9E3F394-D608-7BA8-9F5B-8771A939CAB5}"/>
               </a:ext>
             </a:extLst>
           </p:cNvPr>
@@ -32485,7 +32522,7 @@
           <p:cNvPr id="42" name="四角形: 角を丸くする 41">
             <a:extLst>
               <a:ext uri="{FF2B5EF4-FFF2-40B4-BE49-F238E27FC236}">
-                <a16:creationId xmlns:a16="http://schemas.microsoft.com/office/drawing/2014/main" id="{FB7F9C63-B2AB-7F3F-06B3-87D5AD1B0CE9}"/>
+                <a16:creationId xmlns:a16="http://schemas.microsoft.com/office/drawing/2014/main" id="{64BB9A61-4115-E303-7151-E9DD34636C13}"/>
               </a:ext>
             </a:extLst>
           </p:cNvPr>
@@ -32538,7 +32575,7 @@
           <p:cNvPr id="20" name="直線コネクタ 19">
             <a:extLst>
               <a:ext uri="{FF2B5EF4-FFF2-40B4-BE49-F238E27FC236}">
-                <a16:creationId xmlns:a16="http://schemas.microsoft.com/office/drawing/2014/main" id="{C94CC3D9-A685-7CFF-4307-2C633E8C7912}"/>
+                <a16:creationId xmlns:a16="http://schemas.microsoft.com/office/drawing/2014/main" id="{336BCB3B-942C-F72D-3148-2518CB90F029}"/>
               </a:ext>
             </a:extLst>
           </p:cNvPr>
@@ -32579,7 +32616,7 @@
           <p:cNvPr id="21" name="直線コネクタ 20">
             <a:extLst>
               <a:ext uri="{FF2B5EF4-FFF2-40B4-BE49-F238E27FC236}">
-                <a16:creationId xmlns:a16="http://schemas.microsoft.com/office/drawing/2014/main" id="{C90EB966-76C2-3BDF-C51F-42F6D7FA7225}"/>
+                <a16:creationId xmlns:a16="http://schemas.microsoft.com/office/drawing/2014/main" id="{035AC604-2E17-75F1-2291-92598E52E3A0}"/>
               </a:ext>
             </a:extLst>
           </p:cNvPr>
@@ -32620,7 +32657,7 @@
           <p:cNvPr id="23" name="楕円 22">
             <a:extLst>
               <a:ext uri="{FF2B5EF4-FFF2-40B4-BE49-F238E27FC236}">
-                <a16:creationId xmlns:a16="http://schemas.microsoft.com/office/drawing/2014/main" id="{1CC7FE54-9291-D52A-76F7-61A6275EAE06}"/>
+                <a16:creationId xmlns:a16="http://schemas.microsoft.com/office/drawing/2014/main" id="{9FAA8486-C107-D5BF-2BD4-C7CAF1863982}"/>
               </a:ext>
             </a:extLst>
           </p:cNvPr>
@@ -32679,52 +32716,10 @@
       </p:sp>
       <p:cxnSp>
         <p:nvCxnSpPr>
-          <p:cNvPr id="25" name="直線矢印コネクタ 24">
-            <a:extLst>
-              <a:ext uri="{FF2B5EF4-FFF2-40B4-BE49-F238E27FC236}">
-                <a16:creationId xmlns:a16="http://schemas.microsoft.com/office/drawing/2014/main" id="{E85A0147-87AD-063A-58D0-6D7DAA969BC4}"/>
-              </a:ext>
-            </a:extLst>
-          </p:cNvPr>
-          <p:cNvCxnSpPr>
-            <a:cxnSpLocks/>
-            <a:stCxn id="23" idx="4"/>
-          </p:cNvCxnSpPr>
-          <p:nvPr/>
-        </p:nvCxnSpPr>
-        <p:spPr>
-          <a:xfrm>
-            <a:off x="3692358" y="4600236"/>
-            <a:ext cx="1895948" cy="1308100"/>
-          </a:xfrm>
-          <a:prstGeom prst="straightConnector1">
-            <a:avLst/>
-          </a:prstGeom>
-          <a:ln w="38100">
-            <a:tailEnd type="triangle"/>
-          </a:ln>
-        </p:spPr>
-        <p:style>
-          <a:lnRef idx="1">
-            <a:schemeClr val="dk1"/>
-          </a:lnRef>
-          <a:fillRef idx="0">
-            <a:schemeClr val="dk1"/>
-          </a:fillRef>
-          <a:effectRef idx="0">
-            <a:schemeClr val="dk1"/>
-          </a:effectRef>
-          <a:fontRef idx="minor">
-            <a:schemeClr val="tx1"/>
-          </a:fontRef>
-        </p:style>
-      </p:cxnSp>
-      <p:cxnSp>
-        <p:nvCxnSpPr>
           <p:cNvPr id="26" name="直線矢印コネクタ 25">
             <a:extLst>
               <a:ext uri="{FF2B5EF4-FFF2-40B4-BE49-F238E27FC236}">
-                <a16:creationId xmlns:a16="http://schemas.microsoft.com/office/drawing/2014/main" id="{5A72FE4E-EF97-BB60-E4A0-63F542508334}"/>
+                <a16:creationId xmlns:a16="http://schemas.microsoft.com/office/drawing/2014/main" id="{EB5304B8-A034-90F7-5218-D189BB895A87}"/>
               </a:ext>
             </a:extLst>
           </p:cNvPr>
@@ -32766,7 +32761,7 @@
           <p:cNvPr id="28" name="テキスト ボックス 27">
             <a:extLst>
               <a:ext uri="{FF2B5EF4-FFF2-40B4-BE49-F238E27FC236}">
-                <a16:creationId xmlns:a16="http://schemas.microsoft.com/office/drawing/2014/main" id="{3F8672AC-246C-CAD2-AB49-2C3F18568B39}"/>
+                <a16:creationId xmlns:a16="http://schemas.microsoft.com/office/drawing/2014/main" id="{77479A03-7B34-D81D-A173-711C6D20164B}"/>
               </a:ext>
             </a:extLst>
           </p:cNvPr>
@@ -32806,7 +32801,7 @@
           <p:cNvPr id="29" name="直線コネクタ 28">
             <a:extLst>
               <a:ext uri="{FF2B5EF4-FFF2-40B4-BE49-F238E27FC236}">
-                <a16:creationId xmlns:a16="http://schemas.microsoft.com/office/drawing/2014/main" id="{1DC7FE43-1374-4A9A-0F78-AFFDF70658A4}"/>
+                <a16:creationId xmlns:a16="http://schemas.microsoft.com/office/drawing/2014/main" id="{EEB9A844-B879-7EDC-CF99-E8080ECC7081}"/>
               </a:ext>
             </a:extLst>
           </p:cNvPr>
@@ -32847,7 +32842,7 @@
           <p:cNvPr id="30" name="直線コネクタ 29">
             <a:extLst>
               <a:ext uri="{FF2B5EF4-FFF2-40B4-BE49-F238E27FC236}">
-                <a16:creationId xmlns:a16="http://schemas.microsoft.com/office/drawing/2014/main" id="{4FDA5D77-C967-6D52-6704-08F491F56F37}"/>
+                <a16:creationId xmlns:a16="http://schemas.microsoft.com/office/drawing/2014/main" id="{47CB22CF-B3A2-D8E0-6C3F-28B2F744D58F}"/>
               </a:ext>
             </a:extLst>
           </p:cNvPr>
@@ -32888,7 +32883,7 @@
           <p:cNvPr id="32" name="楕円 31">
             <a:extLst>
               <a:ext uri="{FF2B5EF4-FFF2-40B4-BE49-F238E27FC236}">
-                <a16:creationId xmlns:a16="http://schemas.microsoft.com/office/drawing/2014/main" id="{04B88A0E-7C0F-0003-6E73-578C8FD63804}"/>
+                <a16:creationId xmlns:a16="http://schemas.microsoft.com/office/drawing/2014/main" id="{93E5E5EE-1C08-8076-68AC-F7124764F0EE}"/>
               </a:ext>
             </a:extLst>
           </p:cNvPr>
@@ -32947,52 +32942,10 @@
       </p:sp>
       <p:cxnSp>
         <p:nvCxnSpPr>
-          <p:cNvPr id="34" name="直線矢印コネクタ 33">
-            <a:extLst>
-              <a:ext uri="{FF2B5EF4-FFF2-40B4-BE49-F238E27FC236}">
-                <a16:creationId xmlns:a16="http://schemas.microsoft.com/office/drawing/2014/main" id="{890E187F-602C-F1D1-487F-1609C57286E1}"/>
-              </a:ext>
-            </a:extLst>
-          </p:cNvPr>
-          <p:cNvCxnSpPr>
-            <a:cxnSpLocks/>
-            <a:stCxn id="32" idx="4"/>
-          </p:cNvCxnSpPr>
-          <p:nvPr/>
-        </p:nvCxnSpPr>
-        <p:spPr>
-          <a:xfrm>
-            <a:off x="3692358" y="1209336"/>
-            <a:ext cx="1895948" cy="1308100"/>
-          </a:xfrm>
-          <a:prstGeom prst="straightConnector1">
-            <a:avLst/>
-          </a:prstGeom>
-          <a:ln w="38100">
-            <a:tailEnd type="triangle"/>
-          </a:ln>
-        </p:spPr>
-        <p:style>
-          <a:lnRef idx="1">
-            <a:schemeClr val="dk1"/>
-          </a:lnRef>
-          <a:fillRef idx="0">
-            <a:schemeClr val="dk1"/>
-          </a:fillRef>
-          <a:effectRef idx="0">
-            <a:schemeClr val="dk1"/>
-          </a:effectRef>
-          <a:fontRef idx="minor">
-            <a:schemeClr val="tx1"/>
-          </a:fontRef>
-        </p:style>
-      </p:cxnSp>
-      <p:cxnSp>
-        <p:nvCxnSpPr>
           <p:cNvPr id="35" name="直線矢印コネクタ 34">
             <a:extLst>
               <a:ext uri="{FF2B5EF4-FFF2-40B4-BE49-F238E27FC236}">
-                <a16:creationId xmlns:a16="http://schemas.microsoft.com/office/drawing/2014/main" id="{EA964BA5-F2DC-1A9F-7D5E-1FFF6995E229}"/>
+                <a16:creationId xmlns:a16="http://schemas.microsoft.com/office/drawing/2014/main" id="{ABE4B6B1-D1C1-C100-9252-1A9C92CE8D1D}"/>
               </a:ext>
             </a:extLst>
           </p:cNvPr>
@@ -33034,7 +32987,7 @@
           <p:cNvPr id="37" name="テキスト ボックス 36">
             <a:extLst>
               <a:ext uri="{FF2B5EF4-FFF2-40B4-BE49-F238E27FC236}">
-                <a16:creationId xmlns:a16="http://schemas.microsoft.com/office/drawing/2014/main" id="{EA61E555-5105-07D6-7CD7-788F5094D3A5}"/>
+                <a16:creationId xmlns:a16="http://schemas.microsoft.com/office/drawing/2014/main" id="{8D0266D6-2F2E-3048-0E63-3C1DD31D5CAD}"/>
               </a:ext>
             </a:extLst>
           </p:cNvPr>
@@ -33074,7 +33027,7 @@
           <p:cNvPr id="39" name="テキスト ボックス 38">
             <a:extLst>
               <a:ext uri="{FF2B5EF4-FFF2-40B4-BE49-F238E27FC236}">
-                <a16:creationId xmlns:a16="http://schemas.microsoft.com/office/drawing/2014/main" id="{1D862111-4B57-5508-6997-7A4AA1054BD2}"/>
+                <a16:creationId xmlns:a16="http://schemas.microsoft.com/office/drawing/2014/main" id="{E9F81F84-2CF5-647C-932B-ADBEB97B23E7}"/>
               </a:ext>
             </a:extLst>
           </p:cNvPr>
@@ -33113,7 +33066,7 @@
           <p:cNvPr id="41" name="テキスト ボックス 40">
             <a:extLst>
               <a:ext uri="{FF2B5EF4-FFF2-40B4-BE49-F238E27FC236}">
-                <a16:creationId xmlns:a16="http://schemas.microsoft.com/office/drawing/2014/main" id="{CEE23E1D-14CA-E014-0A91-02BC78885E3F}"/>
+                <a16:creationId xmlns:a16="http://schemas.microsoft.com/office/drawing/2014/main" id="{1B08B12F-C5D0-7371-69E7-8830F6D2EE3F}"/>
               </a:ext>
             </a:extLst>
           </p:cNvPr>
@@ -33149,10 +33102,10 @@
       </p:sp>
       <p:sp>
         <p:nvSpPr>
-          <p:cNvPr id="59" name="楕円 58">
-            <a:extLst>
-              <a:ext uri="{FF2B5EF4-FFF2-40B4-BE49-F238E27FC236}">
-                <a16:creationId xmlns:a16="http://schemas.microsoft.com/office/drawing/2014/main" id="{BD8AFBD1-EACA-930C-4AAE-12171B7BD36D}"/>
+          <p:cNvPr id="61" name="矢印: 右 60">
+            <a:extLst>
+              <a:ext uri="{FF2B5EF4-FFF2-40B4-BE49-F238E27FC236}">
+                <a16:creationId xmlns:a16="http://schemas.microsoft.com/office/drawing/2014/main" id="{95BBC139-713F-CDE8-4AB6-1D15943B7572}"/>
               </a:ext>
             </a:extLst>
           </p:cNvPr>
@@ -33160,17 +33113,13 @@
           <p:nvPr/>
         </p:nvSpPr>
         <p:spPr>
-          <a:xfrm>
-            <a:off x="5588306" y="5548336"/>
-            <a:ext cx="720000" cy="720000"/>
-          </a:xfrm>
-          <a:prstGeom prst="ellipse">
-            <a:avLst/>
-          </a:prstGeom>
-          <a:solidFill>
-            <a:schemeClr val="bg1"/>
-          </a:solidFill>
-          <a:ln w="38100"/>
+          <a:xfrm rot="5400000">
+            <a:off x="5714263" y="3096987"/>
+            <a:ext cx="468086" cy="677228"/>
+          </a:xfrm>
+          <a:prstGeom prst="rightArrow">
+            <a:avLst/>
+          </a:prstGeom>
         </p:spPr>
         <p:style>
           <a:lnRef idx="2">
@@ -33193,31 +33142,88 @@
           <a:lstStyle/>
           <a:p>
             <a:pPr algn="ctr"/>
-            <a:r>
-              <a:rPr lang="en-US" altLang="ja-JP" sz="1600" b="1" dirty="0">
-                <a:ln w="0"/>
-                <a:solidFill>
-                  <a:schemeClr val="tx1"/>
-                </a:solidFill>
-                <a:effectLst>
-                  <a:outerShdw blurRad="38100" dist="19050" dir="2700000" algn="tl" rotWithShape="0">
-                    <a:schemeClr val="dk1">
-                      <a:alpha val="40000"/>
-                    </a:schemeClr>
-                  </a:outerShdw>
-                </a:effectLst>
-              </a:rPr>
-              <a:t>X1</a:t>
-            </a:r>
+            <a:endParaRPr kumimoji="1" lang="ja-JP" altLang="en-US" sz="1600"/>
           </a:p>
         </p:txBody>
       </p:sp>
       <p:sp>
         <p:nvSpPr>
-          <p:cNvPr id="60" name="楕円 59">
-            <a:extLst>
-              <a:ext uri="{FF2B5EF4-FFF2-40B4-BE49-F238E27FC236}">
-                <a16:creationId xmlns:a16="http://schemas.microsoft.com/office/drawing/2014/main" id="{A2AB7F65-263B-73CC-1461-9D35094D7F2F}"/>
+          <p:cNvPr id="5" name="テキスト ボックス 4">
+            <a:extLst>
+              <a:ext uri="{FF2B5EF4-FFF2-40B4-BE49-F238E27FC236}">
+                <a16:creationId xmlns:a16="http://schemas.microsoft.com/office/drawing/2014/main" id="{93763C2D-DAC7-069E-5641-A4115E9B36A4}"/>
+              </a:ext>
+            </a:extLst>
+          </p:cNvPr>
+          <p:cNvSpPr txBox="1"/>
+          <p:nvPr/>
+        </p:nvSpPr>
+        <p:spPr>
+          <a:xfrm>
+            <a:off x="986807" y="4055570"/>
+            <a:ext cx="737702" cy="369332"/>
+          </a:xfrm>
+          <a:prstGeom prst="rect">
+            <a:avLst/>
+          </a:prstGeom>
+          <a:noFill/>
+        </p:spPr>
+        <p:txBody>
+          <a:bodyPr wrap="none" rtlCol="0">
+            <a:spAutoFit/>
+          </a:bodyPr>
+          <a:lstStyle/>
+          <a:p>
+            <a:r>
+              <a:rPr lang="en-US" altLang="ja-JP" b="1" dirty="0"/>
+              <a:t>main</a:t>
+            </a:r>
+            <a:endParaRPr lang="ja-JP" altLang="en-US" b="1" dirty="0"/>
+          </a:p>
+        </p:txBody>
+      </p:sp>
+      <p:sp>
+        <p:nvSpPr>
+          <p:cNvPr id="6" name="テキスト ボックス 5">
+            <a:extLst>
+              <a:ext uri="{FF2B5EF4-FFF2-40B4-BE49-F238E27FC236}">
+                <a16:creationId xmlns:a16="http://schemas.microsoft.com/office/drawing/2014/main" id="{B0D932E9-BD0D-DB49-DDA7-D6FA89E6A201}"/>
+              </a:ext>
+            </a:extLst>
+          </p:cNvPr>
+          <p:cNvSpPr txBox="1"/>
+          <p:nvPr/>
+        </p:nvSpPr>
+        <p:spPr>
+          <a:xfrm>
+            <a:off x="986807" y="664670"/>
+            <a:ext cx="737702" cy="369332"/>
+          </a:xfrm>
+          <a:prstGeom prst="rect">
+            <a:avLst/>
+          </a:prstGeom>
+          <a:noFill/>
+        </p:spPr>
+        <p:txBody>
+          <a:bodyPr wrap="none" rtlCol="0">
+            <a:spAutoFit/>
+          </a:bodyPr>
+          <a:lstStyle/>
+          <a:p>
+            <a:r>
+              <a:rPr kumimoji="1" lang="en-US" altLang="ja-JP" b="1" dirty="0"/>
+              <a:t>main</a:t>
+            </a:r>
+            <a:endParaRPr kumimoji="1" lang="ja-JP" altLang="en-US" b="1" dirty="0"/>
+          </a:p>
+        </p:txBody>
+      </p:sp>
+      <p:sp>
+        <p:nvSpPr>
+          <p:cNvPr id="2" name="楕円 1">
+            <a:extLst>
+              <a:ext uri="{FF2B5EF4-FFF2-40B4-BE49-F238E27FC236}">
+                <a16:creationId xmlns:a16="http://schemas.microsoft.com/office/drawing/2014/main" id="{D43EA4AE-0B25-8E90-703D-F00995D9053B}"/>
               </a:ext>
             </a:extLst>
           </p:cNvPr>
@@ -33226,7 +33232,7 @@
         </p:nvSpPr>
         <p:spPr>
           <a:xfrm>
-            <a:off x="5588306" y="2157436"/>
+            <a:off x="3332358" y="2161063"/>
             <a:ext cx="720000" cy="720000"/>
           </a:xfrm>
           <a:prstGeom prst="ellipse">
@@ -33235,7 +33241,11 @@
           <a:solidFill>
             <a:schemeClr val="bg1"/>
           </a:solidFill>
-          <a:ln w="38100"/>
+          <a:ln w="38100">
+            <a:solidFill>
+              <a:schemeClr val="accent3"/>
+            </a:solidFill>
+          </a:ln>
         </p:spPr>
         <p:style>
           <a:lnRef idx="2">
@@ -33260,29 +33270,71 @@
             <a:pPr algn="ctr"/>
             <a:r>
               <a:rPr lang="en-US" altLang="ja-JP" sz="1600" b="1" dirty="0">
-                <a:ln w="0"/>
                 <a:solidFill>
-                  <a:schemeClr val="tx1"/>
+                  <a:schemeClr val="accent3"/>
                 </a:solidFill>
-                <a:effectLst>
-                  <a:outerShdw blurRad="38100" dist="19050" dir="2700000" algn="tl" rotWithShape="0">
-                    <a:schemeClr val="dk1">
-                      <a:alpha val="40000"/>
-                    </a:schemeClr>
-                  </a:outerShdw>
-                </a:effectLst>
               </a:rPr>
-              <a:t>X1</a:t>
-            </a:r>
+              <a:t>M1</a:t>
+            </a:r>
+            <a:endParaRPr lang="ja-JP" altLang="en-US" sz="1600" b="1" dirty="0">
+              <a:solidFill>
+                <a:schemeClr val="accent3"/>
+              </a:solidFill>
+            </a:endParaRPr>
           </a:p>
         </p:txBody>
       </p:sp>
+      <p:cxnSp>
+        <p:nvCxnSpPr>
+          <p:cNvPr id="3" name="直線矢印コネクタ 2">
+            <a:extLst>
+              <a:ext uri="{FF2B5EF4-FFF2-40B4-BE49-F238E27FC236}">
+                <a16:creationId xmlns:a16="http://schemas.microsoft.com/office/drawing/2014/main" id="{15CC4DEA-DB21-CC71-3B7B-1EF07C9AEE49}"/>
+              </a:ext>
+            </a:extLst>
+          </p:cNvPr>
+          <p:cNvCxnSpPr>
+            <a:cxnSpLocks/>
+            <a:endCxn id="2" idx="2"/>
+          </p:cNvCxnSpPr>
+          <p:nvPr/>
+        </p:nvCxnSpPr>
+        <p:spPr>
+          <a:xfrm>
+            <a:off x="2202058" y="2511731"/>
+            <a:ext cx="1130300" cy="9332"/>
+          </a:xfrm>
+          <a:prstGeom prst="straightConnector1">
+            <a:avLst/>
+          </a:prstGeom>
+          <a:ln w="38100">
+            <a:solidFill>
+              <a:schemeClr val="accent3"/>
+            </a:solidFill>
+            <a:tailEnd type="triangle"/>
+          </a:ln>
+        </p:spPr>
+        <p:style>
+          <a:lnRef idx="1">
+            <a:schemeClr val="dk1"/>
+          </a:lnRef>
+          <a:fillRef idx="0">
+            <a:schemeClr val="dk1"/>
+          </a:fillRef>
+          <a:effectRef idx="0">
+            <a:schemeClr val="dk1"/>
+          </a:effectRef>
+          <a:fontRef idx="minor">
+            <a:schemeClr val="tx1"/>
+          </a:fontRef>
+        </p:style>
+      </p:cxnSp>
       <p:sp>
         <p:nvSpPr>
-          <p:cNvPr id="61" name="矢印: 右 60">
-            <a:extLst>
-              <a:ext uri="{FF2B5EF4-FFF2-40B4-BE49-F238E27FC236}">
-                <a16:creationId xmlns:a16="http://schemas.microsoft.com/office/drawing/2014/main" id="{E11096B2-1909-C3B0-400B-30E74730C415}"/>
+          <p:cNvPr id="4" name="楕円 3">
+            <a:extLst>
+              <a:ext uri="{FF2B5EF4-FFF2-40B4-BE49-F238E27FC236}">
+                <a16:creationId xmlns:a16="http://schemas.microsoft.com/office/drawing/2014/main" id="{BD9B955A-6C55-C1B2-5671-67DB11CE8DE8}"/>
               </a:ext>
             </a:extLst>
           </p:cNvPr>
@@ -33290,13 +33342,21 @@
           <p:nvPr/>
         </p:nvSpPr>
         <p:spPr>
-          <a:xfrm rot="5400000">
-            <a:off x="5714263" y="3096987"/>
-            <a:ext cx="468086" cy="677228"/>
-          </a:xfrm>
-          <a:prstGeom prst="rightArrow">
-            <a:avLst/>
-          </a:prstGeom>
+          <a:xfrm>
+            <a:off x="3332358" y="5557409"/>
+            <a:ext cx="720000" cy="720000"/>
+          </a:xfrm>
+          <a:prstGeom prst="ellipse">
+            <a:avLst/>
+          </a:prstGeom>
+          <a:solidFill>
+            <a:schemeClr val="bg1"/>
+          </a:solidFill>
+          <a:ln w="38100">
+            <a:solidFill>
+              <a:schemeClr val="accent3"/>
+            </a:solidFill>
+          </a:ln>
         </p:spPr>
         <p:style>
           <a:lnRef idx="2">
@@ -33319,86 +33379,71 @@
           <a:lstStyle/>
           <a:p>
             <a:pPr algn="ctr"/>
-            <a:endParaRPr kumimoji="1" lang="ja-JP" altLang="en-US" sz="1600"/>
+            <a:r>
+              <a:rPr lang="en-US" altLang="ja-JP" sz="1600" b="1" dirty="0">
+                <a:solidFill>
+                  <a:schemeClr val="accent3"/>
+                </a:solidFill>
+              </a:rPr>
+              <a:t>M1</a:t>
+            </a:r>
+            <a:endParaRPr lang="ja-JP" altLang="en-US" sz="1600" b="1" dirty="0">
+              <a:solidFill>
+                <a:schemeClr val="accent3"/>
+              </a:solidFill>
+            </a:endParaRPr>
           </a:p>
         </p:txBody>
       </p:sp>
-      <p:sp>
-        <p:nvSpPr>
-          <p:cNvPr id="5" name="テキスト ボックス 4">
-            <a:extLst>
-              <a:ext uri="{FF2B5EF4-FFF2-40B4-BE49-F238E27FC236}">
-                <a16:creationId xmlns:a16="http://schemas.microsoft.com/office/drawing/2014/main" id="{B8C3E3EA-E2A3-E8BC-530F-09CABB74CD2A}"/>
-              </a:ext>
-            </a:extLst>
-          </p:cNvPr>
-          <p:cNvSpPr txBox="1"/>
-          <p:nvPr/>
-        </p:nvSpPr>
-        <p:spPr>
-          <a:xfrm>
-            <a:off x="986807" y="4055570"/>
-            <a:ext cx="737702" cy="369332"/>
-          </a:xfrm>
-          <a:prstGeom prst="rect">
-            <a:avLst/>
-          </a:prstGeom>
-          <a:noFill/>
-        </p:spPr>
-        <p:txBody>
-          <a:bodyPr wrap="none" rtlCol="0">
-            <a:spAutoFit/>
-          </a:bodyPr>
-          <a:lstStyle/>
-          <a:p>
-            <a:r>
-              <a:rPr lang="en-US" altLang="ja-JP" b="1" dirty="0"/>
-              <a:t>main</a:t>
-            </a:r>
-            <a:endParaRPr lang="ja-JP" altLang="en-US" b="1" dirty="0"/>
-          </a:p>
-        </p:txBody>
-      </p:sp>
-      <p:sp>
-        <p:nvSpPr>
-          <p:cNvPr id="6" name="テキスト ボックス 5">
-            <a:extLst>
-              <a:ext uri="{FF2B5EF4-FFF2-40B4-BE49-F238E27FC236}">
-                <a16:creationId xmlns:a16="http://schemas.microsoft.com/office/drawing/2014/main" id="{2F47475E-41A7-0B85-06CB-43487AB68A90}"/>
-              </a:ext>
-            </a:extLst>
-          </p:cNvPr>
-          <p:cNvSpPr txBox="1"/>
-          <p:nvPr/>
-        </p:nvSpPr>
-        <p:spPr>
-          <a:xfrm>
-            <a:off x="986807" y="664670"/>
-            <a:ext cx="737702" cy="369332"/>
-          </a:xfrm>
-          <a:prstGeom prst="rect">
-            <a:avLst/>
-          </a:prstGeom>
-          <a:noFill/>
-        </p:spPr>
-        <p:txBody>
-          <a:bodyPr wrap="none" rtlCol="0">
-            <a:spAutoFit/>
-          </a:bodyPr>
-          <a:lstStyle/>
-          <a:p>
-            <a:r>
-              <a:rPr kumimoji="1" lang="en-US" altLang="ja-JP" b="1" dirty="0"/>
-              <a:t>main</a:t>
-            </a:r>
-            <a:endParaRPr kumimoji="1" lang="ja-JP" altLang="en-US" b="1" dirty="0"/>
-          </a:p>
-        </p:txBody>
-      </p:sp>
+      <p:cxnSp>
+        <p:nvCxnSpPr>
+          <p:cNvPr id="7" name="直線矢印コネクタ 6">
+            <a:extLst>
+              <a:ext uri="{FF2B5EF4-FFF2-40B4-BE49-F238E27FC236}">
+                <a16:creationId xmlns:a16="http://schemas.microsoft.com/office/drawing/2014/main" id="{5856A00D-EAE9-8309-25BC-33173F036197}"/>
+              </a:ext>
+            </a:extLst>
+          </p:cNvPr>
+          <p:cNvCxnSpPr>
+            <a:cxnSpLocks/>
+            <a:endCxn id="4" idx="2"/>
+          </p:cNvCxnSpPr>
+          <p:nvPr/>
+        </p:nvCxnSpPr>
+        <p:spPr>
+          <a:xfrm>
+            <a:off x="2202058" y="5908077"/>
+            <a:ext cx="1130300" cy="9332"/>
+          </a:xfrm>
+          <a:prstGeom prst="straightConnector1">
+            <a:avLst/>
+          </a:prstGeom>
+          <a:ln w="38100">
+            <a:solidFill>
+              <a:schemeClr val="accent3"/>
+            </a:solidFill>
+            <a:tailEnd type="triangle"/>
+          </a:ln>
+        </p:spPr>
+        <p:style>
+          <a:lnRef idx="1">
+            <a:schemeClr val="dk1"/>
+          </a:lnRef>
+          <a:fillRef idx="0">
+            <a:schemeClr val="dk1"/>
+          </a:fillRef>
+          <a:effectRef idx="0">
+            <a:schemeClr val="dk1"/>
+          </a:effectRef>
+          <a:fontRef idx="minor">
+            <a:schemeClr val="tx1"/>
+          </a:fontRef>
+        </p:style>
+      </p:cxnSp>
     </p:spTree>
     <p:extLst>
       <p:ext uri="{BB962C8B-B14F-4D97-AF65-F5344CB8AC3E}">
-        <p14:creationId xmlns:p14="http://schemas.microsoft.com/office/powerpoint/2010/main" val="2554854746"/>
+        <p14:creationId xmlns:p14="http://schemas.microsoft.com/office/powerpoint/2010/main" val="3599332522"/>
       </p:ext>
     </p:extLst>
   </p:cSld>
@@ -33691,10 +33736,18 @@
             <a:r>
               <a:rPr lang="ja-JP" altLang="en-US" b="1" dirty="0">
                 <a:solidFill>
+                  <a:srgbClr val="FF0000"/>
+                </a:solidFill>
+              </a:rPr>
+              <a:t>切り替え元の</a:t>
+            </a:r>
+            <a:r>
+              <a:rPr lang="ja-JP" altLang="en-US" b="1" dirty="0">
+                <a:solidFill>
                   <a:srgbClr val="00B050"/>
                 </a:solidFill>
               </a:rPr>
-              <a:t>切り替え元のブランチのワーキングツリー</a:t>
+              <a:t>ブランチのワーキングツリー</a:t>
             </a:r>
           </a:p>
         </p:txBody>
@@ -34096,10 +34149,18 @@
             <a:r>
               <a:rPr kumimoji="1" lang="ja-JP" altLang="en-US" b="1" dirty="0">
                 <a:solidFill>
+                  <a:srgbClr val="FF0000"/>
+                </a:solidFill>
+              </a:rPr>
+              <a:t>切り替え先の</a:t>
+            </a:r>
+            <a:r>
+              <a:rPr kumimoji="1" lang="ja-JP" altLang="en-US" b="1" dirty="0">
+                <a:solidFill>
                   <a:srgbClr val="00B050"/>
                 </a:solidFill>
               </a:rPr>
-              <a:t>切り替え先のブランチのワーキングツリー</a:t>
+              <a:t>ブランチのワーキングツリー</a:t>
             </a:r>
           </a:p>
         </p:txBody>
@@ -34301,6 +34362,1014 @@
 </file>
 
 <file path=ppt/slides/slide45.xml><?xml version="1.0" encoding="utf-8"?>
+<p:sld xmlns:a="http://schemas.openxmlformats.org/drawingml/2006/main" xmlns:r="http://schemas.openxmlformats.org/officeDocument/2006/relationships" xmlns:p="http://schemas.openxmlformats.org/presentationml/2006/main">
+  <p:cSld>
+    <p:spTree>
+      <p:nvGrpSpPr>
+        <p:cNvPr id="1" name="">
+          <a:extLst>
+            <a:ext uri="{FF2B5EF4-FFF2-40B4-BE49-F238E27FC236}">
+              <a16:creationId xmlns:a16="http://schemas.microsoft.com/office/drawing/2014/main" id="{DE3EDDBB-CBAF-8FCF-DAA4-50DD4B4408A3}"/>
+            </a:ext>
+          </a:extLst>
+        </p:cNvPr>
+        <p:cNvGrpSpPr/>
+        <p:nvPr/>
+      </p:nvGrpSpPr>
+      <p:grpSpPr>
+        <a:xfrm>
+          <a:off x="0" y="0"/>
+          <a:ext cx="0" cy="0"/>
+          <a:chOff x="0" y="0"/>
+          <a:chExt cx="0" cy="0"/>
+        </a:xfrm>
+      </p:grpSpPr>
+      <p:sp>
+        <p:nvSpPr>
+          <p:cNvPr id="40" name="四角形: 角を丸くする 39">
+            <a:extLst>
+              <a:ext uri="{FF2B5EF4-FFF2-40B4-BE49-F238E27FC236}">
+                <a16:creationId xmlns:a16="http://schemas.microsoft.com/office/drawing/2014/main" id="{B98D9863-9677-0C7E-6DD0-3A5FBAE513DD}"/>
+              </a:ext>
+            </a:extLst>
+          </p:cNvPr>
+          <p:cNvSpPr/>
+          <p:nvPr/>
+        </p:nvSpPr>
+        <p:spPr>
+          <a:xfrm>
+            <a:off x="774773" y="1965658"/>
+            <a:ext cx="10274227" cy="1080000"/>
+          </a:xfrm>
+          <a:prstGeom prst="roundRect">
+            <a:avLst/>
+          </a:prstGeom>
+          <a:noFill/>
+          <a:ln w="38100">
+            <a:solidFill>
+              <a:srgbClr val="00B050"/>
+            </a:solidFill>
+            <a:prstDash val="dash"/>
+          </a:ln>
+        </p:spPr>
+        <p:style>
+          <a:lnRef idx="2">
+            <a:schemeClr val="accent1">
+              <a:shade val="15000"/>
+            </a:schemeClr>
+          </a:lnRef>
+          <a:fillRef idx="1">
+            <a:schemeClr val="accent1"/>
+          </a:fillRef>
+          <a:effectRef idx="0">
+            <a:schemeClr val="accent1"/>
+          </a:effectRef>
+          <a:fontRef idx="minor">
+            <a:schemeClr val="lt1"/>
+          </a:fontRef>
+        </p:style>
+        <p:txBody>
+          <a:bodyPr rtlCol="0" anchor="ctr"/>
+          <a:lstStyle/>
+          <a:p>
+            <a:pPr algn="ctr"/>
+            <a:endParaRPr kumimoji="1" lang="ja-JP" altLang="en-US"/>
+          </a:p>
+        </p:txBody>
+      </p:sp>
+      <p:sp>
+        <p:nvSpPr>
+          <p:cNvPr id="42" name="四角形: 角を丸くする 41">
+            <a:extLst>
+              <a:ext uri="{FF2B5EF4-FFF2-40B4-BE49-F238E27FC236}">
+                <a16:creationId xmlns:a16="http://schemas.microsoft.com/office/drawing/2014/main" id="{FB7F9C63-B2AB-7F3F-06B3-87D5AD1B0CE9}"/>
+              </a:ext>
+            </a:extLst>
+          </p:cNvPr>
+          <p:cNvSpPr/>
+          <p:nvPr/>
+        </p:nvSpPr>
+        <p:spPr>
+          <a:xfrm>
+            <a:off x="773399" y="5362904"/>
+            <a:ext cx="10274227" cy="1080000"/>
+          </a:xfrm>
+          <a:prstGeom prst="roundRect">
+            <a:avLst/>
+          </a:prstGeom>
+          <a:noFill/>
+          <a:ln w="38100">
+            <a:solidFill>
+              <a:srgbClr val="00B050"/>
+            </a:solidFill>
+            <a:prstDash val="dash"/>
+          </a:ln>
+        </p:spPr>
+        <p:style>
+          <a:lnRef idx="2">
+            <a:schemeClr val="accent1">
+              <a:shade val="15000"/>
+            </a:schemeClr>
+          </a:lnRef>
+          <a:fillRef idx="1">
+            <a:schemeClr val="accent1"/>
+          </a:fillRef>
+          <a:effectRef idx="0">
+            <a:schemeClr val="accent1"/>
+          </a:effectRef>
+          <a:fontRef idx="minor">
+            <a:schemeClr val="lt1"/>
+          </a:fontRef>
+        </p:style>
+        <p:txBody>
+          <a:bodyPr rtlCol="0" anchor="ctr"/>
+          <a:lstStyle/>
+          <a:p>
+            <a:pPr algn="ctr"/>
+            <a:endParaRPr kumimoji="1" lang="ja-JP" altLang="en-US"/>
+          </a:p>
+        </p:txBody>
+      </p:sp>
+      <p:cxnSp>
+        <p:nvCxnSpPr>
+          <p:cNvPr id="20" name="直線コネクタ 19">
+            <a:extLst>
+              <a:ext uri="{FF2B5EF4-FFF2-40B4-BE49-F238E27FC236}">
+                <a16:creationId xmlns:a16="http://schemas.microsoft.com/office/drawing/2014/main" id="{C94CC3D9-A685-7CFF-4307-2C633E8C7912}"/>
+              </a:ext>
+            </a:extLst>
+          </p:cNvPr>
+          <p:cNvCxnSpPr>
+            <a:cxnSpLocks/>
+          </p:cNvCxnSpPr>
+          <p:nvPr/>
+        </p:nvCxnSpPr>
+        <p:spPr>
+          <a:xfrm>
+            <a:off x="1816100" y="5899786"/>
+            <a:ext cx="9000000" cy="0"/>
+          </a:xfrm>
+          <a:prstGeom prst="line">
+            <a:avLst/>
+          </a:prstGeom>
+          <a:ln>
+            <a:prstDash val="dash"/>
+          </a:ln>
+        </p:spPr>
+        <p:style>
+          <a:lnRef idx="1">
+            <a:schemeClr val="accent1"/>
+          </a:lnRef>
+          <a:fillRef idx="0">
+            <a:schemeClr val="accent1"/>
+          </a:fillRef>
+          <a:effectRef idx="0">
+            <a:schemeClr val="accent1"/>
+          </a:effectRef>
+          <a:fontRef idx="minor">
+            <a:schemeClr val="tx1"/>
+          </a:fontRef>
+        </p:style>
+      </p:cxnSp>
+      <p:cxnSp>
+        <p:nvCxnSpPr>
+          <p:cNvPr id="21" name="直線コネクタ 20">
+            <a:extLst>
+              <a:ext uri="{FF2B5EF4-FFF2-40B4-BE49-F238E27FC236}">
+                <a16:creationId xmlns:a16="http://schemas.microsoft.com/office/drawing/2014/main" id="{C90EB966-76C2-3BDF-C51F-42F6D7FA7225}"/>
+              </a:ext>
+            </a:extLst>
+          </p:cNvPr>
+          <p:cNvCxnSpPr>
+            <a:cxnSpLocks/>
+          </p:cNvCxnSpPr>
+          <p:nvPr/>
+        </p:nvCxnSpPr>
+        <p:spPr>
+          <a:xfrm>
+            <a:off x="1816100" y="4240236"/>
+            <a:ext cx="9000000" cy="0"/>
+          </a:xfrm>
+          <a:prstGeom prst="line">
+            <a:avLst/>
+          </a:prstGeom>
+          <a:ln>
+            <a:prstDash val="dash"/>
+          </a:ln>
+        </p:spPr>
+        <p:style>
+          <a:lnRef idx="1">
+            <a:schemeClr val="accent1"/>
+          </a:lnRef>
+          <a:fillRef idx="0">
+            <a:schemeClr val="accent1"/>
+          </a:fillRef>
+          <a:effectRef idx="0">
+            <a:schemeClr val="accent1"/>
+          </a:effectRef>
+          <a:fontRef idx="minor">
+            <a:schemeClr val="tx1"/>
+          </a:fontRef>
+        </p:style>
+      </p:cxnSp>
+      <p:sp>
+        <p:nvSpPr>
+          <p:cNvPr id="23" name="楕円 22">
+            <a:extLst>
+              <a:ext uri="{FF2B5EF4-FFF2-40B4-BE49-F238E27FC236}">
+                <a16:creationId xmlns:a16="http://schemas.microsoft.com/office/drawing/2014/main" id="{1CC7FE54-9291-D52A-76F7-61A6275EAE06}"/>
+              </a:ext>
+            </a:extLst>
+          </p:cNvPr>
+          <p:cNvSpPr/>
+          <p:nvPr/>
+        </p:nvSpPr>
+        <p:spPr>
+          <a:xfrm>
+            <a:off x="3332358" y="3880236"/>
+            <a:ext cx="720000" cy="720000"/>
+          </a:xfrm>
+          <a:prstGeom prst="ellipse">
+            <a:avLst/>
+          </a:prstGeom>
+          <a:solidFill>
+            <a:schemeClr val="bg1"/>
+          </a:solidFill>
+          <a:ln w="38100"/>
+        </p:spPr>
+        <p:style>
+          <a:lnRef idx="2">
+            <a:schemeClr val="dk1">
+              <a:shade val="15000"/>
+            </a:schemeClr>
+          </a:lnRef>
+          <a:fillRef idx="1">
+            <a:schemeClr val="dk1"/>
+          </a:fillRef>
+          <a:effectRef idx="0">
+            <a:schemeClr val="dk1"/>
+          </a:effectRef>
+          <a:fontRef idx="minor">
+            <a:schemeClr val="lt1"/>
+          </a:fontRef>
+        </p:style>
+        <p:txBody>
+          <a:bodyPr rtlCol="0" anchor="ctr"/>
+          <a:lstStyle/>
+          <a:p>
+            <a:pPr algn="ctr"/>
+            <a:r>
+              <a:rPr lang="en-US" altLang="ja-JP" sz="1600" b="1" dirty="0">
+                <a:solidFill>
+                  <a:schemeClr val="tx1"/>
+                </a:solidFill>
+              </a:rPr>
+              <a:t>M1</a:t>
+            </a:r>
+            <a:endParaRPr lang="ja-JP" altLang="en-US" sz="1600" b="1" dirty="0">
+              <a:solidFill>
+                <a:schemeClr val="tx1"/>
+              </a:solidFill>
+            </a:endParaRPr>
+          </a:p>
+        </p:txBody>
+      </p:sp>
+      <p:cxnSp>
+        <p:nvCxnSpPr>
+          <p:cNvPr id="25" name="直線矢印コネクタ 24">
+            <a:extLst>
+              <a:ext uri="{FF2B5EF4-FFF2-40B4-BE49-F238E27FC236}">
+                <a16:creationId xmlns:a16="http://schemas.microsoft.com/office/drawing/2014/main" id="{E85A0147-87AD-063A-58D0-6D7DAA969BC4}"/>
+              </a:ext>
+            </a:extLst>
+          </p:cNvPr>
+          <p:cNvCxnSpPr>
+            <a:cxnSpLocks/>
+            <a:stCxn id="23" idx="4"/>
+          </p:cNvCxnSpPr>
+          <p:nvPr/>
+        </p:nvCxnSpPr>
+        <p:spPr>
+          <a:xfrm>
+            <a:off x="3692358" y="4600236"/>
+            <a:ext cx="1895948" cy="1308100"/>
+          </a:xfrm>
+          <a:prstGeom prst="straightConnector1">
+            <a:avLst/>
+          </a:prstGeom>
+          <a:ln w="38100">
+            <a:tailEnd type="triangle"/>
+          </a:ln>
+        </p:spPr>
+        <p:style>
+          <a:lnRef idx="1">
+            <a:schemeClr val="dk1"/>
+          </a:lnRef>
+          <a:fillRef idx="0">
+            <a:schemeClr val="dk1"/>
+          </a:fillRef>
+          <a:effectRef idx="0">
+            <a:schemeClr val="dk1"/>
+          </a:effectRef>
+          <a:fontRef idx="minor">
+            <a:schemeClr val="tx1"/>
+          </a:fontRef>
+        </p:style>
+      </p:cxnSp>
+      <p:cxnSp>
+        <p:nvCxnSpPr>
+          <p:cNvPr id="26" name="直線矢印コネクタ 25">
+            <a:extLst>
+              <a:ext uri="{FF2B5EF4-FFF2-40B4-BE49-F238E27FC236}">
+                <a16:creationId xmlns:a16="http://schemas.microsoft.com/office/drawing/2014/main" id="{5A72FE4E-EF97-BB60-E4A0-63F542508334}"/>
+              </a:ext>
+            </a:extLst>
+          </p:cNvPr>
+          <p:cNvCxnSpPr>
+            <a:cxnSpLocks/>
+            <a:endCxn id="23" idx="2"/>
+          </p:cNvCxnSpPr>
+          <p:nvPr/>
+        </p:nvCxnSpPr>
+        <p:spPr>
+          <a:xfrm>
+            <a:off x="2202058" y="4230904"/>
+            <a:ext cx="1130300" cy="9332"/>
+          </a:xfrm>
+          <a:prstGeom prst="straightConnector1">
+            <a:avLst/>
+          </a:prstGeom>
+          <a:ln w="38100">
+            <a:tailEnd type="triangle"/>
+          </a:ln>
+        </p:spPr>
+        <p:style>
+          <a:lnRef idx="1">
+            <a:schemeClr val="dk1"/>
+          </a:lnRef>
+          <a:fillRef idx="0">
+            <a:schemeClr val="dk1"/>
+          </a:fillRef>
+          <a:effectRef idx="0">
+            <a:schemeClr val="dk1"/>
+          </a:effectRef>
+          <a:fontRef idx="minor">
+            <a:schemeClr val="tx1"/>
+          </a:fontRef>
+        </p:style>
+      </p:cxnSp>
+      <p:sp>
+        <p:nvSpPr>
+          <p:cNvPr id="28" name="テキスト ボックス 27">
+            <a:extLst>
+              <a:ext uri="{FF2B5EF4-FFF2-40B4-BE49-F238E27FC236}">
+                <a16:creationId xmlns:a16="http://schemas.microsoft.com/office/drawing/2014/main" id="{3F8672AC-246C-CAD2-AB49-2C3F18568B39}"/>
+              </a:ext>
+            </a:extLst>
+          </p:cNvPr>
+          <p:cNvSpPr txBox="1"/>
+          <p:nvPr/>
+        </p:nvSpPr>
+        <p:spPr>
+          <a:xfrm>
+            <a:off x="774773" y="5723670"/>
+            <a:ext cx="1186543" cy="369332"/>
+          </a:xfrm>
+          <a:prstGeom prst="rect">
+            <a:avLst/>
+          </a:prstGeom>
+          <a:noFill/>
+        </p:spPr>
+        <p:txBody>
+          <a:bodyPr wrap="none" rtlCol="0">
+            <a:spAutoFit/>
+          </a:bodyPr>
+          <a:lstStyle/>
+          <a:p>
+            <a:r>
+              <a:rPr lang="en-US" altLang="ja-JP" b="1" dirty="0" err="1"/>
+              <a:t>branchX</a:t>
+            </a:r>
+            <a:r>
+              <a:rPr lang="en-US" altLang="ja-JP" b="1" dirty="0"/>
+              <a:t> </a:t>
+            </a:r>
+            <a:endParaRPr kumimoji="1" lang="ja-JP" altLang="en-US" b="1" dirty="0"/>
+          </a:p>
+        </p:txBody>
+      </p:sp>
+      <p:cxnSp>
+        <p:nvCxnSpPr>
+          <p:cNvPr id="29" name="直線コネクタ 28">
+            <a:extLst>
+              <a:ext uri="{FF2B5EF4-FFF2-40B4-BE49-F238E27FC236}">
+                <a16:creationId xmlns:a16="http://schemas.microsoft.com/office/drawing/2014/main" id="{1DC7FE43-1374-4A9A-0F78-AFFDF70658A4}"/>
+              </a:ext>
+            </a:extLst>
+          </p:cNvPr>
+          <p:cNvCxnSpPr>
+            <a:cxnSpLocks/>
+          </p:cNvCxnSpPr>
+          <p:nvPr/>
+        </p:nvCxnSpPr>
+        <p:spPr>
+          <a:xfrm>
+            <a:off x="1816100" y="2508886"/>
+            <a:ext cx="9000000" cy="0"/>
+          </a:xfrm>
+          <a:prstGeom prst="line">
+            <a:avLst/>
+          </a:prstGeom>
+          <a:ln>
+            <a:prstDash val="dash"/>
+          </a:ln>
+        </p:spPr>
+        <p:style>
+          <a:lnRef idx="1">
+            <a:schemeClr val="accent1"/>
+          </a:lnRef>
+          <a:fillRef idx="0">
+            <a:schemeClr val="accent1"/>
+          </a:fillRef>
+          <a:effectRef idx="0">
+            <a:schemeClr val="accent1"/>
+          </a:effectRef>
+          <a:fontRef idx="minor">
+            <a:schemeClr val="tx1"/>
+          </a:fontRef>
+        </p:style>
+      </p:cxnSp>
+      <p:cxnSp>
+        <p:nvCxnSpPr>
+          <p:cNvPr id="30" name="直線コネクタ 29">
+            <a:extLst>
+              <a:ext uri="{FF2B5EF4-FFF2-40B4-BE49-F238E27FC236}">
+                <a16:creationId xmlns:a16="http://schemas.microsoft.com/office/drawing/2014/main" id="{4FDA5D77-C967-6D52-6704-08F491F56F37}"/>
+              </a:ext>
+            </a:extLst>
+          </p:cNvPr>
+          <p:cNvCxnSpPr>
+            <a:cxnSpLocks/>
+          </p:cNvCxnSpPr>
+          <p:nvPr/>
+        </p:nvCxnSpPr>
+        <p:spPr>
+          <a:xfrm>
+            <a:off x="1816100" y="849336"/>
+            <a:ext cx="9000000" cy="0"/>
+          </a:xfrm>
+          <a:prstGeom prst="line">
+            <a:avLst/>
+          </a:prstGeom>
+          <a:ln>
+            <a:prstDash val="dash"/>
+          </a:ln>
+        </p:spPr>
+        <p:style>
+          <a:lnRef idx="1">
+            <a:schemeClr val="accent1"/>
+          </a:lnRef>
+          <a:fillRef idx="0">
+            <a:schemeClr val="accent1"/>
+          </a:fillRef>
+          <a:effectRef idx="0">
+            <a:schemeClr val="accent1"/>
+          </a:effectRef>
+          <a:fontRef idx="minor">
+            <a:schemeClr val="tx1"/>
+          </a:fontRef>
+        </p:style>
+      </p:cxnSp>
+      <p:sp>
+        <p:nvSpPr>
+          <p:cNvPr id="32" name="楕円 31">
+            <a:extLst>
+              <a:ext uri="{FF2B5EF4-FFF2-40B4-BE49-F238E27FC236}">
+                <a16:creationId xmlns:a16="http://schemas.microsoft.com/office/drawing/2014/main" id="{04B88A0E-7C0F-0003-6E73-578C8FD63804}"/>
+              </a:ext>
+            </a:extLst>
+          </p:cNvPr>
+          <p:cNvSpPr/>
+          <p:nvPr/>
+        </p:nvSpPr>
+        <p:spPr>
+          <a:xfrm>
+            <a:off x="3332358" y="489336"/>
+            <a:ext cx="720000" cy="720000"/>
+          </a:xfrm>
+          <a:prstGeom prst="ellipse">
+            <a:avLst/>
+          </a:prstGeom>
+          <a:solidFill>
+            <a:schemeClr val="bg1"/>
+          </a:solidFill>
+          <a:ln w="38100"/>
+        </p:spPr>
+        <p:style>
+          <a:lnRef idx="2">
+            <a:schemeClr val="dk1">
+              <a:shade val="15000"/>
+            </a:schemeClr>
+          </a:lnRef>
+          <a:fillRef idx="1">
+            <a:schemeClr val="dk1"/>
+          </a:fillRef>
+          <a:effectRef idx="0">
+            <a:schemeClr val="dk1"/>
+          </a:effectRef>
+          <a:fontRef idx="minor">
+            <a:schemeClr val="lt1"/>
+          </a:fontRef>
+        </p:style>
+        <p:txBody>
+          <a:bodyPr rtlCol="0" anchor="ctr"/>
+          <a:lstStyle/>
+          <a:p>
+            <a:pPr algn="ctr"/>
+            <a:r>
+              <a:rPr lang="en-US" altLang="ja-JP" sz="1600" b="1" dirty="0">
+                <a:solidFill>
+                  <a:schemeClr val="tx1"/>
+                </a:solidFill>
+              </a:rPr>
+              <a:t>M1</a:t>
+            </a:r>
+            <a:endParaRPr lang="ja-JP" altLang="en-US" sz="1600" b="1" dirty="0">
+              <a:solidFill>
+                <a:schemeClr val="tx1"/>
+              </a:solidFill>
+            </a:endParaRPr>
+          </a:p>
+        </p:txBody>
+      </p:sp>
+      <p:cxnSp>
+        <p:nvCxnSpPr>
+          <p:cNvPr id="35" name="直線矢印コネクタ 34">
+            <a:extLst>
+              <a:ext uri="{FF2B5EF4-FFF2-40B4-BE49-F238E27FC236}">
+                <a16:creationId xmlns:a16="http://schemas.microsoft.com/office/drawing/2014/main" id="{EA964BA5-F2DC-1A9F-7D5E-1FFF6995E229}"/>
+              </a:ext>
+            </a:extLst>
+          </p:cNvPr>
+          <p:cNvCxnSpPr>
+            <a:cxnSpLocks/>
+            <a:endCxn id="32" idx="2"/>
+          </p:cNvCxnSpPr>
+          <p:nvPr/>
+        </p:nvCxnSpPr>
+        <p:spPr>
+          <a:xfrm>
+            <a:off x="2202058" y="840004"/>
+            <a:ext cx="1130300" cy="9332"/>
+          </a:xfrm>
+          <a:prstGeom prst="straightConnector1">
+            <a:avLst/>
+          </a:prstGeom>
+          <a:ln w="38100">
+            <a:tailEnd type="triangle"/>
+          </a:ln>
+        </p:spPr>
+        <p:style>
+          <a:lnRef idx="1">
+            <a:schemeClr val="dk1"/>
+          </a:lnRef>
+          <a:fillRef idx="0">
+            <a:schemeClr val="dk1"/>
+          </a:fillRef>
+          <a:effectRef idx="0">
+            <a:schemeClr val="dk1"/>
+          </a:effectRef>
+          <a:fontRef idx="minor">
+            <a:schemeClr val="tx1"/>
+          </a:fontRef>
+        </p:style>
+      </p:cxnSp>
+      <p:sp>
+        <p:nvSpPr>
+          <p:cNvPr id="37" name="テキスト ボックス 36">
+            <a:extLst>
+              <a:ext uri="{FF2B5EF4-FFF2-40B4-BE49-F238E27FC236}">
+                <a16:creationId xmlns:a16="http://schemas.microsoft.com/office/drawing/2014/main" id="{EA61E555-5105-07D6-7CD7-788F5094D3A5}"/>
+              </a:ext>
+            </a:extLst>
+          </p:cNvPr>
+          <p:cNvSpPr txBox="1"/>
+          <p:nvPr/>
+        </p:nvSpPr>
+        <p:spPr>
+          <a:xfrm>
+            <a:off x="774773" y="2332770"/>
+            <a:ext cx="1186543" cy="369332"/>
+          </a:xfrm>
+          <a:prstGeom prst="rect">
+            <a:avLst/>
+          </a:prstGeom>
+          <a:noFill/>
+        </p:spPr>
+        <p:txBody>
+          <a:bodyPr wrap="none" rtlCol="0">
+            <a:spAutoFit/>
+          </a:bodyPr>
+          <a:lstStyle/>
+          <a:p>
+            <a:r>
+              <a:rPr lang="en-US" altLang="ja-JP" b="1" dirty="0" err="1"/>
+              <a:t>branchX</a:t>
+            </a:r>
+            <a:r>
+              <a:rPr lang="en-US" altLang="ja-JP" b="1" dirty="0"/>
+              <a:t> </a:t>
+            </a:r>
+            <a:endParaRPr kumimoji="1" lang="ja-JP" altLang="en-US" b="1" dirty="0"/>
+          </a:p>
+        </p:txBody>
+      </p:sp>
+      <p:sp>
+        <p:nvSpPr>
+          <p:cNvPr id="39" name="テキスト ボックス 38">
+            <a:extLst>
+              <a:ext uri="{FF2B5EF4-FFF2-40B4-BE49-F238E27FC236}">
+                <a16:creationId xmlns:a16="http://schemas.microsoft.com/office/drawing/2014/main" id="{1D862111-4B57-5508-6997-7A4AA1054BD2}"/>
+              </a:ext>
+            </a:extLst>
+          </p:cNvPr>
+          <p:cNvSpPr txBox="1"/>
+          <p:nvPr/>
+        </p:nvSpPr>
+        <p:spPr>
+          <a:xfrm>
+            <a:off x="-910561" y="2320992"/>
+            <a:ext cx="1569660" cy="369332"/>
+          </a:xfrm>
+          <a:prstGeom prst="rect">
+            <a:avLst/>
+          </a:prstGeom>
+          <a:noFill/>
+        </p:spPr>
+        <p:txBody>
+          <a:bodyPr wrap="none" rtlCol="0">
+            <a:spAutoFit/>
+          </a:bodyPr>
+          <a:lstStyle/>
+          <a:p>
+            <a:r>
+              <a:rPr kumimoji="1" lang="ja-JP" altLang="en-US" b="1" dirty="0">
+                <a:solidFill>
+                  <a:srgbClr val="00B050"/>
+                </a:solidFill>
+              </a:rPr>
+              <a:t>作業ブランチ</a:t>
+            </a:r>
+          </a:p>
+        </p:txBody>
+      </p:sp>
+      <p:sp>
+        <p:nvSpPr>
+          <p:cNvPr id="41" name="テキスト ボックス 40">
+            <a:extLst>
+              <a:ext uri="{FF2B5EF4-FFF2-40B4-BE49-F238E27FC236}">
+                <a16:creationId xmlns:a16="http://schemas.microsoft.com/office/drawing/2014/main" id="{CEE23E1D-14CA-E014-0A91-02BC78885E3F}"/>
+              </a:ext>
+            </a:extLst>
+          </p:cNvPr>
+          <p:cNvSpPr txBox="1"/>
+          <p:nvPr/>
+        </p:nvSpPr>
+        <p:spPr>
+          <a:xfrm>
+            <a:off x="-911935" y="5718238"/>
+            <a:ext cx="1569660" cy="369332"/>
+          </a:xfrm>
+          <a:prstGeom prst="rect">
+            <a:avLst/>
+          </a:prstGeom>
+          <a:noFill/>
+        </p:spPr>
+        <p:txBody>
+          <a:bodyPr wrap="none" rtlCol="0">
+            <a:spAutoFit/>
+          </a:bodyPr>
+          <a:lstStyle/>
+          <a:p>
+            <a:r>
+              <a:rPr kumimoji="1" lang="ja-JP" altLang="en-US" b="1" dirty="0">
+                <a:solidFill>
+                  <a:srgbClr val="00B050"/>
+                </a:solidFill>
+              </a:rPr>
+              <a:t>作業ブランチ</a:t>
+            </a:r>
+          </a:p>
+        </p:txBody>
+      </p:sp>
+      <p:sp>
+        <p:nvSpPr>
+          <p:cNvPr id="59" name="楕円 58">
+            <a:extLst>
+              <a:ext uri="{FF2B5EF4-FFF2-40B4-BE49-F238E27FC236}">
+                <a16:creationId xmlns:a16="http://schemas.microsoft.com/office/drawing/2014/main" id="{BD8AFBD1-EACA-930C-4AAE-12171B7BD36D}"/>
+              </a:ext>
+            </a:extLst>
+          </p:cNvPr>
+          <p:cNvSpPr/>
+          <p:nvPr/>
+        </p:nvSpPr>
+        <p:spPr>
+          <a:xfrm>
+            <a:off x="5588306" y="5548336"/>
+            <a:ext cx="720000" cy="720000"/>
+          </a:xfrm>
+          <a:prstGeom prst="ellipse">
+            <a:avLst/>
+          </a:prstGeom>
+          <a:solidFill>
+            <a:schemeClr val="bg1"/>
+          </a:solidFill>
+          <a:ln w="38100"/>
+        </p:spPr>
+        <p:style>
+          <a:lnRef idx="2">
+            <a:schemeClr val="dk1">
+              <a:shade val="15000"/>
+            </a:schemeClr>
+          </a:lnRef>
+          <a:fillRef idx="1">
+            <a:schemeClr val="dk1"/>
+          </a:fillRef>
+          <a:effectRef idx="0">
+            <a:schemeClr val="dk1"/>
+          </a:effectRef>
+          <a:fontRef idx="minor">
+            <a:schemeClr val="lt1"/>
+          </a:fontRef>
+        </p:style>
+        <p:txBody>
+          <a:bodyPr rtlCol="0" anchor="ctr"/>
+          <a:lstStyle/>
+          <a:p>
+            <a:pPr algn="ctr"/>
+            <a:r>
+              <a:rPr lang="en-US" altLang="ja-JP" sz="1600" b="1" dirty="0">
+                <a:ln w="0"/>
+                <a:solidFill>
+                  <a:schemeClr val="tx1"/>
+                </a:solidFill>
+                <a:effectLst>
+                  <a:outerShdw blurRad="38100" dist="19050" dir="2700000" algn="tl" rotWithShape="0">
+                    <a:schemeClr val="dk1">
+                      <a:alpha val="40000"/>
+                    </a:schemeClr>
+                  </a:outerShdw>
+                </a:effectLst>
+              </a:rPr>
+              <a:t>X1</a:t>
+            </a:r>
+          </a:p>
+        </p:txBody>
+      </p:sp>
+      <p:sp>
+        <p:nvSpPr>
+          <p:cNvPr id="61" name="矢印: 右 60">
+            <a:extLst>
+              <a:ext uri="{FF2B5EF4-FFF2-40B4-BE49-F238E27FC236}">
+                <a16:creationId xmlns:a16="http://schemas.microsoft.com/office/drawing/2014/main" id="{E11096B2-1909-C3B0-400B-30E74730C415}"/>
+              </a:ext>
+            </a:extLst>
+          </p:cNvPr>
+          <p:cNvSpPr/>
+          <p:nvPr/>
+        </p:nvSpPr>
+        <p:spPr>
+          <a:xfrm rot="5400000">
+            <a:off x="5714263" y="3320923"/>
+            <a:ext cx="468086" cy="677228"/>
+          </a:xfrm>
+          <a:prstGeom prst="rightArrow">
+            <a:avLst/>
+          </a:prstGeom>
+        </p:spPr>
+        <p:style>
+          <a:lnRef idx="2">
+            <a:schemeClr val="dk1">
+              <a:shade val="15000"/>
+            </a:schemeClr>
+          </a:lnRef>
+          <a:fillRef idx="1">
+            <a:schemeClr val="dk1"/>
+          </a:fillRef>
+          <a:effectRef idx="0">
+            <a:schemeClr val="dk1"/>
+          </a:effectRef>
+          <a:fontRef idx="minor">
+            <a:schemeClr val="lt1"/>
+          </a:fontRef>
+        </p:style>
+        <p:txBody>
+          <a:bodyPr rtlCol="0" anchor="ctr"/>
+          <a:lstStyle/>
+          <a:p>
+            <a:pPr algn="ctr"/>
+            <a:endParaRPr kumimoji="1" lang="ja-JP" altLang="en-US" sz="1600"/>
+          </a:p>
+        </p:txBody>
+      </p:sp>
+      <p:sp>
+        <p:nvSpPr>
+          <p:cNvPr id="5" name="テキスト ボックス 4">
+            <a:extLst>
+              <a:ext uri="{FF2B5EF4-FFF2-40B4-BE49-F238E27FC236}">
+                <a16:creationId xmlns:a16="http://schemas.microsoft.com/office/drawing/2014/main" id="{B8C3E3EA-E2A3-E8BC-530F-09CABB74CD2A}"/>
+              </a:ext>
+            </a:extLst>
+          </p:cNvPr>
+          <p:cNvSpPr txBox="1"/>
+          <p:nvPr/>
+        </p:nvSpPr>
+        <p:spPr>
+          <a:xfrm>
+            <a:off x="986807" y="4055570"/>
+            <a:ext cx="737702" cy="369332"/>
+          </a:xfrm>
+          <a:prstGeom prst="rect">
+            <a:avLst/>
+          </a:prstGeom>
+          <a:noFill/>
+        </p:spPr>
+        <p:txBody>
+          <a:bodyPr wrap="none" rtlCol="0">
+            <a:spAutoFit/>
+          </a:bodyPr>
+          <a:lstStyle/>
+          <a:p>
+            <a:r>
+              <a:rPr lang="en-US" altLang="ja-JP" b="1" dirty="0"/>
+              <a:t>main</a:t>
+            </a:r>
+            <a:endParaRPr lang="ja-JP" altLang="en-US" b="1" dirty="0"/>
+          </a:p>
+        </p:txBody>
+      </p:sp>
+      <p:sp>
+        <p:nvSpPr>
+          <p:cNvPr id="6" name="テキスト ボックス 5">
+            <a:extLst>
+              <a:ext uri="{FF2B5EF4-FFF2-40B4-BE49-F238E27FC236}">
+                <a16:creationId xmlns:a16="http://schemas.microsoft.com/office/drawing/2014/main" id="{2F47475E-41A7-0B85-06CB-43487AB68A90}"/>
+              </a:ext>
+            </a:extLst>
+          </p:cNvPr>
+          <p:cNvSpPr txBox="1"/>
+          <p:nvPr/>
+        </p:nvSpPr>
+        <p:spPr>
+          <a:xfrm>
+            <a:off x="986807" y="664670"/>
+            <a:ext cx="737702" cy="369332"/>
+          </a:xfrm>
+          <a:prstGeom prst="rect">
+            <a:avLst/>
+          </a:prstGeom>
+          <a:noFill/>
+        </p:spPr>
+        <p:txBody>
+          <a:bodyPr wrap="none" rtlCol="0">
+            <a:spAutoFit/>
+          </a:bodyPr>
+          <a:lstStyle/>
+          <a:p>
+            <a:r>
+              <a:rPr kumimoji="1" lang="en-US" altLang="ja-JP" b="1" dirty="0"/>
+              <a:t>main</a:t>
+            </a:r>
+            <a:endParaRPr kumimoji="1" lang="ja-JP" altLang="en-US" b="1" dirty="0"/>
+          </a:p>
+        </p:txBody>
+      </p:sp>
+      <p:sp>
+        <p:nvSpPr>
+          <p:cNvPr id="2" name="楕円 1">
+            <a:extLst>
+              <a:ext uri="{FF2B5EF4-FFF2-40B4-BE49-F238E27FC236}">
+                <a16:creationId xmlns:a16="http://schemas.microsoft.com/office/drawing/2014/main" id="{F7D6531F-7724-8854-F81A-B389EAE5FFBD}"/>
+              </a:ext>
+            </a:extLst>
+          </p:cNvPr>
+          <p:cNvSpPr/>
+          <p:nvPr/>
+        </p:nvSpPr>
+        <p:spPr>
+          <a:xfrm>
+            <a:off x="3332358" y="2161061"/>
+            <a:ext cx="720000" cy="720000"/>
+          </a:xfrm>
+          <a:prstGeom prst="ellipse">
+            <a:avLst/>
+          </a:prstGeom>
+          <a:solidFill>
+            <a:schemeClr val="bg1"/>
+          </a:solidFill>
+          <a:ln w="38100">
+            <a:solidFill>
+              <a:schemeClr val="accent3"/>
+            </a:solidFill>
+          </a:ln>
+        </p:spPr>
+        <p:style>
+          <a:lnRef idx="2">
+            <a:schemeClr val="dk1">
+              <a:shade val="15000"/>
+            </a:schemeClr>
+          </a:lnRef>
+          <a:fillRef idx="1">
+            <a:schemeClr val="dk1"/>
+          </a:fillRef>
+          <a:effectRef idx="0">
+            <a:schemeClr val="dk1"/>
+          </a:effectRef>
+          <a:fontRef idx="minor">
+            <a:schemeClr val="lt1"/>
+          </a:fontRef>
+        </p:style>
+        <p:txBody>
+          <a:bodyPr rtlCol="0" anchor="ctr"/>
+          <a:lstStyle/>
+          <a:p>
+            <a:pPr algn="ctr"/>
+            <a:r>
+              <a:rPr lang="en-US" altLang="ja-JP" sz="1600" b="1" dirty="0">
+                <a:solidFill>
+                  <a:schemeClr val="accent3"/>
+                </a:solidFill>
+              </a:rPr>
+              <a:t>M1</a:t>
+            </a:r>
+            <a:endParaRPr lang="ja-JP" altLang="en-US" sz="1600" b="1" dirty="0">
+              <a:solidFill>
+                <a:schemeClr val="accent3"/>
+              </a:solidFill>
+            </a:endParaRPr>
+          </a:p>
+        </p:txBody>
+      </p:sp>
+      <p:cxnSp>
+        <p:nvCxnSpPr>
+          <p:cNvPr id="3" name="直線矢印コネクタ 2">
+            <a:extLst>
+              <a:ext uri="{FF2B5EF4-FFF2-40B4-BE49-F238E27FC236}">
+                <a16:creationId xmlns:a16="http://schemas.microsoft.com/office/drawing/2014/main" id="{F1933812-392D-4081-BDC9-7B25FDC30051}"/>
+              </a:ext>
+            </a:extLst>
+          </p:cNvPr>
+          <p:cNvCxnSpPr>
+            <a:cxnSpLocks/>
+            <a:endCxn id="2" idx="2"/>
+          </p:cNvCxnSpPr>
+          <p:nvPr/>
+        </p:nvCxnSpPr>
+        <p:spPr>
+          <a:xfrm>
+            <a:off x="2202058" y="2511729"/>
+            <a:ext cx="1130300" cy="9332"/>
+          </a:xfrm>
+          <a:prstGeom prst="straightConnector1">
+            <a:avLst/>
+          </a:prstGeom>
+          <a:ln w="38100">
+            <a:solidFill>
+              <a:schemeClr val="accent3"/>
+            </a:solidFill>
+            <a:tailEnd type="triangle"/>
+          </a:ln>
+        </p:spPr>
+        <p:style>
+          <a:lnRef idx="1">
+            <a:schemeClr val="dk1"/>
+          </a:lnRef>
+          <a:fillRef idx="0">
+            <a:schemeClr val="dk1"/>
+          </a:fillRef>
+          <a:effectRef idx="0">
+            <a:schemeClr val="dk1"/>
+          </a:effectRef>
+          <a:fontRef idx="minor">
+            <a:schemeClr val="tx1"/>
+          </a:fontRef>
+        </p:style>
+      </p:cxnSp>
+    </p:spTree>
+    <p:extLst>
+      <p:ext uri="{BB962C8B-B14F-4D97-AF65-F5344CB8AC3E}">
+        <p14:creationId xmlns:p14="http://schemas.microsoft.com/office/powerpoint/2010/main" val="2554854746"/>
+      </p:ext>
+    </p:extLst>
+  </p:cSld>
+  <p:clrMapOvr>
+    <a:masterClrMapping/>
+  </p:clrMapOvr>
+</p:sld>
+</file>
+
+<file path=ppt/slides/slide46.xml><?xml version="1.0" encoding="utf-8"?>
 <p:sld xmlns:a="http://schemas.openxmlformats.org/drawingml/2006/main" xmlns:r="http://schemas.openxmlformats.org/officeDocument/2006/relationships" xmlns:p="http://schemas.openxmlformats.org/presentationml/2006/main">
   <p:cSld>
     <p:spTree>
@@ -35464,7 +36533,7 @@
 </p:sld>
 </file>
 
-<file path=ppt/slides/slide46.xml><?xml version="1.0" encoding="utf-8"?>
+<file path=ppt/slides/slide47.xml><?xml version="1.0" encoding="utf-8"?>
 <p:sld xmlns:a="http://schemas.openxmlformats.org/drawingml/2006/main" xmlns:r="http://schemas.openxmlformats.org/officeDocument/2006/relationships" xmlns:p="http://schemas.openxmlformats.org/presentationml/2006/main">
   <p:cSld>
     <p:spTree>
@@ -36041,7 +37110,7 @@
 </p:sld>
 </file>
 
-<file path=ppt/slides/slide47.xml><?xml version="1.0" encoding="utf-8"?>
+<file path=ppt/slides/slide48.xml><?xml version="1.0" encoding="utf-8"?>
 <p:sld xmlns:a="http://schemas.openxmlformats.org/drawingml/2006/main" xmlns:r="http://schemas.openxmlformats.org/officeDocument/2006/relationships" xmlns:p="http://schemas.openxmlformats.org/presentationml/2006/main">
   <p:cSld>
     <p:spTree>
@@ -36575,7 +37644,7 @@
 </p:sld>
 </file>
 
-<file path=ppt/slides/slide48.xml><?xml version="1.0" encoding="utf-8"?>
+<file path=ppt/slides/slide49.xml><?xml version="1.0" encoding="utf-8"?>
 <p:sld xmlns:a="http://schemas.openxmlformats.org/drawingml/2006/main" xmlns:r="http://schemas.openxmlformats.org/officeDocument/2006/relationships" xmlns:p="http://schemas.openxmlformats.org/presentationml/2006/main">
   <p:cSld>
     <p:spTree>
@@ -37972,2389 +39041,6 @@
     <p:extLst>
       <p:ext uri="{BB962C8B-B14F-4D97-AF65-F5344CB8AC3E}">
         <p14:creationId xmlns:p14="http://schemas.microsoft.com/office/powerpoint/2010/main" val="3808907058"/>
-      </p:ext>
-    </p:extLst>
-  </p:cSld>
-  <p:clrMapOvr>
-    <a:masterClrMapping/>
-  </p:clrMapOvr>
-</p:sld>
-</file>
-
-<file path=ppt/slides/slide49.xml><?xml version="1.0" encoding="utf-8"?>
-<p:sld xmlns:a="http://schemas.openxmlformats.org/drawingml/2006/main" xmlns:r="http://schemas.openxmlformats.org/officeDocument/2006/relationships" xmlns:p="http://schemas.openxmlformats.org/presentationml/2006/main">
-  <p:cSld>
-    <p:spTree>
-      <p:nvGrpSpPr>
-        <p:cNvPr id="1" name="">
-          <a:extLst>
-            <a:ext uri="{FF2B5EF4-FFF2-40B4-BE49-F238E27FC236}">
-              <a16:creationId xmlns:a16="http://schemas.microsoft.com/office/drawing/2014/main" id="{2ADF4022-D9F7-2BE5-BEFB-79BCDC117BB4}"/>
-            </a:ext>
-          </a:extLst>
-        </p:cNvPr>
-        <p:cNvGrpSpPr/>
-        <p:nvPr/>
-      </p:nvGrpSpPr>
-      <p:grpSpPr>
-        <a:xfrm>
-          <a:off x="0" y="0"/>
-          <a:ext cx="0" cy="0"/>
-          <a:chOff x="0" y="0"/>
-          <a:chExt cx="0" cy="0"/>
-        </a:xfrm>
-      </p:grpSpPr>
-      <p:cxnSp>
-        <p:nvCxnSpPr>
-          <p:cNvPr id="20" name="直線コネクタ 19">
-            <a:extLst>
-              <a:ext uri="{FF2B5EF4-FFF2-40B4-BE49-F238E27FC236}">
-                <a16:creationId xmlns:a16="http://schemas.microsoft.com/office/drawing/2014/main" id="{19FA3A50-1136-C0CF-CF44-2AF2E71DA12E}"/>
-              </a:ext>
-            </a:extLst>
-          </p:cNvPr>
-          <p:cNvCxnSpPr>
-            <a:cxnSpLocks/>
-          </p:cNvCxnSpPr>
-          <p:nvPr/>
-        </p:nvCxnSpPr>
-        <p:spPr>
-          <a:xfrm flipV="1">
-            <a:off x="1816100" y="5899400"/>
-            <a:ext cx="9000000" cy="0"/>
-          </a:xfrm>
-          <a:prstGeom prst="line">
-            <a:avLst/>
-          </a:prstGeom>
-          <a:ln>
-            <a:prstDash val="dash"/>
-          </a:ln>
-        </p:spPr>
-        <p:style>
-          <a:lnRef idx="1">
-            <a:schemeClr val="accent1"/>
-          </a:lnRef>
-          <a:fillRef idx="0">
-            <a:schemeClr val="accent1"/>
-          </a:fillRef>
-          <a:effectRef idx="0">
-            <a:schemeClr val="accent1"/>
-          </a:effectRef>
-          <a:fontRef idx="minor">
-            <a:schemeClr val="tx1"/>
-          </a:fontRef>
-        </p:style>
-      </p:cxnSp>
-      <p:cxnSp>
-        <p:nvCxnSpPr>
-          <p:cNvPr id="21" name="直線コネクタ 20">
-            <a:extLst>
-              <a:ext uri="{FF2B5EF4-FFF2-40B4-BE49-F238E27FC236}">
-                <a16:creationId xmlns:a16="http://schemas.microsoft.com/office/drawing/2014/main" id="{804A3FCF-BD3F-2F2C-CE2B-E338D65EF098}"/>
-              </a:ext>
-            </a:extLst>
-          </p:cNvPr>
-          <p:cNvCxnSpPr>
-            <a:cxnSpLocks/>
-          </p:cNvCxnSpPr>
-          <p:nvPr/>
-        </p:nvCxnSpPr>
-        <p:spPr>
-          <a:xfrm>
-            <a:off x="1816100" y="4240236"/>
-            <a:ext cx="9000000" cy="0"/>
-          </a:xfrm>
-          <a:prstGeom prst="line">
-            <a:avLst/>
-          </a:prstGeom>
-          <a:ln>
-            <a:prstDash val="dash"/>
-          </a:ln>
-        </p:spPr>
-        <p:style>
-          <a:lnRef idx="1">
-            <a:schemeClr val="accent1"/>
-          </a:lnRef>
-          <a:fillRef idx="0">
-            <a:schemeClr val="accent1"/>
-          </a:fillRef>
-          <a:effectRef idx="0">
-            <a:schemeClr val="accent1"/>
-          </a:effectRef>
-          <a:fontRef idx="minor">
-            <a:schemeClr val="tx1"/>
-          </a:fontRef>
-        </p:style>
-      </p:cxnSp>
-      <p:sp>
-        <p:nvSpPr>
-          <p:cNvPr id="22" name="楕円 21">
-            <a:extLst>
-              <a:ext uri="{FF2B5EF4-FFF2-40B4-BE49-F238E27FC236}">
-                <a16:creationId xmlns:a16="http://schemas.microsoft.com/office/drawing/2014/main" id="{D2571C54-EA91-0E63-4885-2146A6C623AF}"/>
-              </a:ext>
-            </a:extLst>
-          </p:cNvPr>
-          <p:cNvSpPr/>
-          <p:nvPr/>
-        </p:nvSpPr>
-        <p:spPr>
-          <a:xfrm>
-            <a:off x="5588306" y="5539400"/>
-            <a:ext cx="720000" cy="720000"/>
-          </a:xfrm>
-          <a:prstGeom prst="ellipse">
-            <a:avLst/>
-          </a:prstGeom>
-          <a:solidFill>
-            <a:schemeClr val="bg1"/>
-          </a:solidFill>
-          <a:ln w="38100">
-            <a:solidFill>
-              <a:srgbClr val="FF0000"/>
-            </a:solidFill>
-          </a:ln>
-        </p:spPr>
-        <p:style>
-          <a:lnRef idx="2">
-            <a:schemeClr val="dk1">
-              <a:shade val="15000"/>
-            </a:schemeClr>
-          </a:lnRef>
-          <a:fillRef idx="1">
-            <a:schemeClr val="dk1"/>
-          </a:fillRef>
-          <a:effectRef idx="0">
-            <a:schemeClr val="dk1"/>
-          </a:effectRef>
-          <a:fontRef idx="minor">
-            <a:schemeClr val="lt1"/>
-          </a:fontRef>
-        </p:style>
-        <p:txBody>
-          <a:bodyPr rtlCol="0" anchor="ctr"/>
-          <a:lstStyle/>
-          <a:p>
-            <a:pPr algn="ctr"/>
-            <a:r>
-              <a:rPr lang="en-US" altLang="ja-JP" b="1">
-                <a:ln w="0"/>
-                <a:solidFill>
-                  <a:srgbClr val="FF0000"/>
-                </a:solidFill>
-                <a:effectLst>
-                  <a:outerShdw blurRad="38100" dist="19050" dir="2700000" algn="tl" rotWithShape="0">
-                    <a:schemeClr val="dk1">
-                      <a:alpha val="40000"/>
-                    </a:schemeClr>
-                  </a:outerShdw>
-                </a:effectLst>
-              </a:rPr>
-              <a:t>B1</a:t>
-            </a:r>
-            <a:endParaRPr lang="en-US" altLang="ja-JP" b="1" dirty="0">
-              <a:ln w="0"/>
-              <a:solidFill>
-                <a:srgbClr val="FF0000"/>
-              </a:solidFill>
-              <a:effectLst>
-                <a:outerShdw blurRad="38100" dist="19050" dir="2700000" algn="tl" rotWithShape="0">
-                  <a:schemeClr val="dk1">
-                    <a:alpha val="40000"/>
-                  </a:schemeClr>
-                </a:outerShdw>
-              </a:effectLst>
-            </a:endParaRPr>
-          </a:p>
-        </p:txBody>
-      </p:sp>
-      <p:sp>
-        <p:nvSpPr>
-          <p:cNvPr id="23" name="楕円 22">
-            <a:extLst>
-              <a:ext uri="{FF2B5EF4-FFF2-40B4-BE49-F238E27FC236}">
-                <a16:creationId xmlns:a16="http://schemas.microsoft.com/office/drawing/2014/main" id="{EDA0A91C-8C5D-892F-155C-A7A1116B2D5C}"/>
-              </a:ext>
-            </a:extLst>
-          </p:cNvPr>
-          <p:cNvSpPr/>
-          <p:nvPr/>
-        </p:nvSpPr>
-        <p:spPr>
-          <a:xfrm>
-            <a:off x="3332358" y="3880236"/>
-            <a:ext cx="720000" cy="720000"/>
-          </a:xfrm>
-          <a:prstGeom prst="ellipse">
-            <a:avLst/>
-          </a:prstGeom>
-          <a:solidFill>
-            <a:schemeClr val="bg1"/>
-          </a:solidFill>
-          <a:ln w="38100"/>
-        </p:spPr>
-        <p:style>
-          <a:lnRef idx="2">
-            <a:schemeClr val="dk1">
-              <a:shade val="15000"/>
-            </a:schemeClr>
-          </a:lnRef>
-          <a:fillRef idx="1">
-            <a:schemeClr val="dk1"/>
-          </a:fillRef>
-          <a:effectRef idx="0">
-            <a:schemeClr val="dk1"/>
-          </a:effectRef>
-          <a:fontRef idx="minor">
-            <a:schemeClr val="lt1"/>
-          </a:fontRef>
-        </p:style>
-        <p:txBody>
-          <a:bodyPr rtlCol="0" anchor="ctr"/>
-          <a:lstStyle/>
-          <a:p>
-            <a:pPr algn="ctr"/>
-            <a:r>
-              <a:rPr lang="en-US" altLang="ja-JP" b="1" dirty="0">
-                <a:solidFill>
-                  <a:schemeClr val="tx1"/>
-                </a:solidFill>
-              </a:rPr>
-              <a:t>A1</a:t>
-            </a:r>
-            <a:endParaRPr lang="ja-JP" altLang="en-US" b="1" dirty="0">
-              <a:solidFill>
-                <a:schemeClr val="tx1"/>
-              </a:solidFill>
-            </a:endParaRPr>
-          </a:p>
-        </p:txBody>
-      </p:sp>
-      <p:cxnSp>
-        <p:nvCxnSpPr>
-          <p:cNvPr id="25" name="直線矢印コネクタ 24">
-            <a:extLst>
-              <a:ext uri="{FF2B5EF4-FFF2-40B4-BE49-F238E27FC236}">
-                <a16:creationId xmlns:a16="http://schemas.microsoft.com/office/drawing/2014/main" id="{8D824E50-198D-E448-7393-FD845A62A587}"/>
-              </a:ext>
-            </a:extLst>
-          </p:cNvPr>
-          <p:cNvCxnSpPr>
-            <a:cxnSpLocks/>
-            <a:stCxn id="23" idx="4"/>
-            <a:endCxn id="22" idx="2"/>
-          </p:cNvCxnSpPr>
-          <p:nvPr/>
-        </p:nvCxnSpPr>
-        <p:spPr>
-          <a:xfrm>
-            <a:off x="3692358" y="4600236"/>
-            <a:ext cx="1895948" cy="1299164"/>
-          </a:xfrm>
-          <a:prstGeom prst="straightConnector1">
-            <a:avLst/>
-          </a:prstGeom>
-          <a:ln w="38100">
-            <a:tailEnd type="triangle"/>
-          </a:ln>
-        </p:spPr>
-        <p:style>
-          <a:lnRef idx="1">
-            <a:schemeClr val="dk1"/>
-          </a:lnRef>
-          <a:fillRef idx="0">
-            <a:schemeClr val="dk1"/>
-          </a:fillRef>
-          <a:effectRef idx="0">
-            <a:schemeClr val="dk1"/>
-          </a:effectRef>
-          <a:fontRef idx="minor">
-            <a:schemeClr val="tx1"/>
-          </a:fontRef>
-        </p:style>
-      </p:cxnSp>
-      <p:cxnSp>
-        <p:nvCxnSpPr>
-          <p:cNvPr id="26" name="直線矢印コネクタ 25">
-            <a:extLst>
-              <a:ext uri="{FF2B5EF4-FFF2-40B4-BE49-F238E27FC236}">
-                <a16:creationId xmlns:a16="http://schemas.microsoft.com/office/drawing/2014/main" id="{3F55ED5B-B7B4-FE2B-B871-38A7973ABF9E}"/>
-              </a:ext>
-            </a:extLst>
-          </p:cNvPr>
-          <p:cNvCxnSpPr>
-            <a:cxnSpLocks/>
-            <a:endCxn id="23" idx="2"/>
-          </p:cNvCxnSpPr>
-          <p:nvPr/>
-        </p:nvCxnSpPr>
-        <p:spPr>
-          <a:xfrm>
-            <a:off x="2202058" y="4230904"/>
-            <a:ext cx="1130300" cy="9332"/>
-          </a:xfrm>
-          <a:prstGeom prst="straightConnector1">
-            <a:avLst/>
-          </a:prstGeom>
-          <a:ln w="38100">
-            <a:tailEnd type="triangle"/>
-          </a:ln>
-        </p:spPr>
-        <p:style>
-          <a:lnRef idx="1">
-            <a:schemeClr val="dk1"/>
-          </a:lnRef>
-          <a:fillRef idx="0">
-            <a:schemeClr val="dk1"/>
-          </a:fillRef>
-          <a:effectRef idx="0">
-            <a:schemeClr val="dk1"/>
-          </a:effectRef>
-          <a:fontRef idx="minor">
-            <a:schemeClr val="tx1"/>
-          </a:fontRef>
-        </p:style>
-      </p:cxnSp>
-      <p:cxnSp>
-        <p:nvCxnSpPr>
-          <p:cNvPr id="27" name="直線矢印コネクタ 26">
-            <a:extLst>
-              <a:ext uri="{FF2B5EF4-FFF2-40B4-BE49-F238E27FC236}">
-                <a16:creationId xmlns:a16="http://schemas.microsoft.com/office/drawing/2014/main" id="{25204A73-8071-CC97-EDCD-B6720F07366F}"/>
-              </a:ext>
-            </a:extLst>
-          </p:cNvPr>
-          <p:cNvCxnSpPr>
-            <a:cxnSpLocks/>
-            <a:stCxn id="23" idx="6"/>
-            <a:endCxn id="8" idx="2"/>
-          </p:cNvCxnSpPr>
-          <p:nvPr/>
-        </p:nvCxnSpPr>
-        <p:spPr>
-          <a:xfrm flipV="1">
-            <a:off x="4052358" y="4235055"/>
-            <a:ext cx="1535948" cy="5181"/>
-          </a:xfrm>
-          <a:prstGeom prst="straightConnector1">
-            <a:avLst/>
-          </a:prstGeom>
-          <a:ln w="38100">
-            <a:tailEnd type="triangle"/>
-          </a:ln>
-        </p:spPr>
-        <p:style>
-          <a:lnRef idx="1">
-            <a:schemeClr val="dk1"/>
-          </a:lnRef>
-          <a:fillRef idx="0">
-            <a:schemeClr val="dk1"/>
-          </a:fillRef>
-          <a:effectRef idx="0">
-            <a:schemeClr val="dk1"/>
-          </a:effectRef>
-          <a:fontRef idx="minor">
-            <a:schemeClr val="tx1"/>
-          </a:fontRef>
-        </p:style>
-      </p:cxnSp>
-      <p:cxnSp>
-        <p:nvCxnSpPr>
-          <p:cNvPr id="29" name="直線コネクタ 28">
-            <a:extLst>
-              <a:ext uri="{FF2B5EF4-FFF2-40B4-BE49-F238E27FC236}">
-                <a16:creationId xmlns:a16="http://schemas.microsoft.com/office/drawing/2014/main" id="{BEEE2C07-4924-7882-44F9-FCF4C9C48892}"/>
-              </a:ext>
-            </a:extLst>
-          </p:cNvPr>
-          <p:cNvCxnSpPr>
-            <a:cxnSpLocks/>
-          </p:cNvCxnSpPr>
-          <p:nvPr/>
-        </p:nvCxnSpPr>
-        <p:spPr>
-          <a:xfrm>
-            <a:off x="1816100" y="2508886"/>
-            <a:ext cx="9000000" cy="0"/>
-          </a:xfrm>
-          <a:prstGeom prst="line">
-            <a:avLst/>
-          </a:prstGeom>
-          <a:ln>
-            <a:prstDash val="dash"/>
-          </a:ln>
-        </p:spPr>
-        <p:style>
-          <a:lnRef idx="1">
-            <a:schemeClr val="accent1"/>
-          </a:lnRef>
-          <a:fillRef idx="0">
-            <a:schemeClr val="accent1"/>
-          </a:fillRef>
-          <a:effectRef idx="0">
-            <a:schemeClr val="accent1"/>
-          </a:effectRef>
-          <a:fontRef idx="minor">
-            <a:schemeClr val="tx1"/>
-          </a:fontRef>
-        </p:style>
-      </p:cxnSp>
-      <p:cxnSp>
-        <p:nvCxnSpPr>
-          <p:cNvPr id="30" name="直線コネクタ 29">
-            <a:extLst>
-              <a:ext uri="{FF2B5EF4-FFF2-40B4-BE49-F238E27FC236}">
-                <a16:creationId xmlns:a16="http://schemas.microsoft.com/office/drawing/2014/main" id="{19735A37-32EA-5231-2FC6-A9C09364C81D}"/>
-              </a:ext>
-            </a:extLst>
-          </p:cNvPr>
-          <p:cNvCxnSpPr>
-            <a:cxnSpLocks/>
-          </p:cNvCxnSpPr>
-          <p:nvPr/>
-        </p:nvCxnSpPr>
-        <p:spPr>
-          <a:xfrm>
-            <a:off x="1816100" y="849336"/>
-            <a:ext cx="9000000" cy="0"/>
-          </a:xfrm>
-          <a:prstGeom prst="line">
-            <a:avLst/>
-          </a:prstGeom>
-          <a:ln>
-            <a:prstDash val="dash"/>
-          </a:ln>
-        </p:spPr>
-        <p:style>
-          <a:lnRef idx="1">
-            <a:schemeClr val="accent1"/>
-          </a:lnRef>
-          <a:fillRef idx="0">
-            <a:schemeClr val="accent1"/>
-          </a:fillRef>
-          <a:effectRef idx="0">
-            <a:schemeClr val="accent1"/>
-          </a:effectRef>
-          <a:fontRef idx="minor">
-            <a:schemeClr val="tx1"/>
-          </a:fontRef>
-        </p:style>
-      </p:cxnSp>
-      <p:sp>
-        <p:nvSpPr>
-          <p:cNvPr id="31" name="楕円 30">
-            <a:extLst>
-              <a:ext uri="{FF2B5EF4-FFF2-40B4-BE49-F238E27FC236}">
-                <a16:creationId xmlns:a16="http://schemas.microsoft.com/office/drawing/2014/main" id="{E4CAD24B-BC86-68FB-C826-86D7092E0409}"/>
-              </a:ext>
-            </a:extLst>
-          </p:cNvPr>
-          <p:cNvSpPr/>
-          <p:nvPr/>
-        </p:nvSpPr>
-        <p:spPr>
-          <a:xfrm>
-            <a:off x="5588306" y="2157436"/>
-            <a:ext cx="720000" cy="720000"/>
-          </a:xfrm>
-          <a:prstGeom prst="ellipse">
-            <a:avLst/>
-          </a:prstGeom>
-          <a:solidFill>
-            <a:schemeClr val="bg1"/>
-          </a:solidFill>
-          <a:ln w="38100">
-            <a:solidFill>
-              <a:srgbClr val="FF0000"/>
-            </a:solidFill>
-          </a:ln>
-        </p:spPr>
-        <p:style>
-          <a:lnRef idx="2">
-            <a:schemeClr val="dk1">
-              <a:shade val="15000"/>
-            </a:schemeClr>
-          </a:lnRef>
-          <a:fillRef idx="1">
-            <a:schemeClr val="dk1"/>
-          </a:fillRef>
-          <a:effectRef idx="0">
-            <a:schemeClr val="dk1"/>
-          </a:effectRef>
-          <a:fontRef idx="minor">
-            <a:schemeClr val="lt1"/>
-          </a:fontRef>
-        </p:style>
-        <p:txBody>
-          <a:bodyPr rtlCol="0" anchor="ctr"/>
-          <a:lstStyle/>
-          <a:p>
-            <a:pPr algn="ctr"/>
-            <a:r>
-              <a:rPr lang="en-US" altLang="ja-JP" b="1">
-                <a:ln w="0"/>
-                <a:solidFill>
-                  <a:srgbClr val="FF0000"/>
-                </a:solidFill>
-                <a:effectLst>
-                  <a:outerShdw blurRad="38100" dist="19050" dir="2700000" algn="tl" rotWithShape="0">
-                    <a:schemeClr val="dk1">
-                      <a:alpha val="40000"/>
-                    </a:schemeClr>
-                  </a:outerShdw>
-                </a:effectLst>
-              </a:rPr>
-              <a:t>B1</a:t>
-            </a:r>
-            <a:endParaRPr lang="en-US" altLang="ja-JP" b="1" dirty="0">
-              <a:ln w="0"/>
-              <a:solidFill>
-                <a:srgbClr val="FF0000"/>
-              </a:solidFill>
-              <a:effectLst>
-                <a:outerShdw blurRad="38100" dist="19050" dir="2700000" algn="tl" rotWithShape="0">
-                  <a:schemeClr val="dk1">
-                    <a:alpha val="40000"/>
-                  </a:schemeClr>
-                </a:outerShdw>
-              </a:effectLst>
-            </a:endParaRPr>
-          </a:p>
-        </p:txBody>
-      </p:sp>
-      <p:sp>
-        <p:nvSpPr>
-          <p:cNvPr id="32" name="楕円 31">
-            <a:extLst>
-              <a:ext uri="{FF2B5EF4-FFF2-40B4-BE49-F238E27FC236}">
-                <a16:creationId xmlns:a16="http://schemas.microsoft.com/office/drawing/2014/main" id="{00167EA7-E150-C11C-4AA4-7C38709A603C}"/>
-              </a:ext>
-            </a:extLst>
-          </p:cNvPr>
-          <p:cNvSpPr/>
-          <p:nvPr/>
-        </p:nvSpPr>
-        <p:spPr>
-          <a:xfrm>
-            <a:off x="3332358" y="489336"/>
-            <a:ext cx="720000" cy="720000"/>
-          </a:xfrm>
-          <a:prstGeom prst="ellipse">
-            <a:avLst/>
-          </a:prstGeom>
-          <a:solidFill>
-            <a:schemeClr val="bg1"/>
-          </a:solidFill>
-          <a:ln w="38100"/>
-        </p:spPr>
-        <p:style>
-          <a:lnRef idx="2">
-            <a:schemeClr val="dk1">
-              <a:shade val="15000"/>
-            </a:schemeClr>
-          </a:lnRef>
-          <a:fillRef idx="1">
-            <a:schemeClr val="dk1"/>
-          </a:fillRef>
-          <a:effectRef idx="0">
-            <a:schemeClr val="dk1"/>
-          </a:effectRef>
-          <a:fontRef idx="minor">
-            <a:schemeClr val="lt1"/>
-          </a:fontRef>
-        </p:style>
-        <p:txBody>
-          <a:bodyPr rtlCol="0" anchor="ctr"/>
-          <a:lstStyle/>
-          <a:p>
-            <a:pPr algn="ctr"/>
-            <a:r>
-              <a:rPr lang="en-US" altLang="ja-JP" b="1" dirty="0">
-                <a:solidFill>
-                  <a:schemeClr val="tx1"/>
-                </a:solidFill>
-              </a:rPr>
-              <a:t>A1</a:t>
-            </a:r>
-            <a:endParaRPr lang="ja-JP" altLang="en-US" b="1" dirty="0">
-              <a:solidFill>
-                <a:schemeClr val="tx1"/>
-              </a:solidFill>
-            </a:endParaRPr>
-          </a:p>
-        </p:txBody>
-      </p:sp>
-      <p:cxnSp>
-        <p:nvCxnSpPr>
-          <p:cNvPr id="34" name="直線矢印コネクタ 33">
-            <a:extLst>
-              <a:ext uri="{FF2B5EF4-FFF2-40B4-BE49-F238E27FC236}">
-                <a16:creationId xmlns:a16="http://schemas.microsoft.com/office/drawing/2014/main" id="{949940FF-245F-3A9B-FED5-39562AD33E8A}"/>
-              </a:ext>
-            </a:extLst>
-          </p:cNvPr>
-          <p:cNvCxnSpPr>
-            <a:cxnSpLocks/>
-            <a:stCxn id="32" idx="4"/>
-            <a:endCxn id="31" idx="2"/>
-          </p:cNvCxnSpPr>
-          <p:nvPr/>
-        </p:nvCxnSpPr>
-        <p:spPr>
-          <a:xfrm>
-            <a:off x="3692358" y="1209336"/>
-            <a:ext cx="1895948" cy="1308100"/>
-          </a:xfrm>
-          <a:prstGeom prst="straightConnector1">
-            <a:avLst/>
-          </a:prstGeom>
-          <a:ln w="38100">
-            <a:tailEnd type="triangle"/>
-          </a:ln>
-        </p:spPr>
-        <p:style>
-          <a:lnRef idx="1">
-            <a:schemeClr val="dk1"/>
-          </a:lnRef>
-          <a:fillRef idx="0">
-            <a:schemeClr val="dk1"/>
-          </a:fillRef>
-          <a:effectRef idx="0">
-            <a:schemeClr val="dk1"/>
-          </a:effectRef>
-          <a:fontRef idx="minor">
-            <a:schemeClr val="tx1"/>
-          </a:fontRef>
-        </p:style>
-      </p:cxnSp>
-      <p:cxnSp>
-        <p:nvCxnSpPr>
-          <p:cNvPr id="35" name="直線矢印コネクタ 34">
-            <a:extLst>
-              <a:ext uri="{FF2B5EF4-FFF2-40B4-BE49-F238E27FC236}">
-                <a16:creationId xmlns:a16="http://schemas.microsoft.com/office/drawing/2014/main" id="{CE62CD14-2278-5ABE-3300-45396F8C5E70}"/>
-              </a:ext>
-            </a:extLst>
-          </p:cNvPr>
-          <p:cNvCxnSpPr>
-            <a:cxnSpLocks/>
-            <a:endCxn id="32" idx="2"/>
-          </p:cNvCxnSpPr>
-          <p:nvPr/>
-        </p:nvCxnSpPr>
-        <p:spPr>
-          <a:xfrm>
-            <a:off x="2202058" y="840004"/>
-            <a:ext cx="1130300" cy="9332"/>
-          </a:xfrm>
-          <a:prstGeom prst="straightConnector1">
-            <a:avLst/>
-          </a:prstGeom>
-          <a:ln w="38100">
-            <a:tailEnd type="triangle"/>
-          </a:ln>
-        </p:spPr>
-        <p:style>
-          <a:lnRef idx="1">
-            <a:schemeClr val="dk1"/>
-          </a:lnRef>
-          <a:fillRef idx="0">
-            <a:schemeClr val="dk1"/>
-          </a:fillRef>
-          <a:effectRef idx="0">
-            <a:schemeClr val="dk1"/>
-          </a:effectRef>
-          <a:fontRef idx="minor">
-            <a:schemeClr val="tx1"/>
-          </a:fontRef>
-        </p:style>
-      </p:cxnSp>
-      <p:sp>
-        <p:nvSpPr>
-          <p:cNvPr id="8" name="楕円 7">
-            <a:extLst>
-              <a:ext uri="{FF2B5EF4-FFF2-40B4-BE49-F238E27FC236}">
-                <a16:creationId xmlns:a16="http://schemas.microsoft.com/office/drawing/2014/main" id="{9E5A721E-7272-9F9A-1D47-1E8C508CC9BC}"/>
-              </a:ext>
-            </a:extLst>
-          </p:cNvPr>
-          <p:cNvSpPr/>
-          <p:nvPr/>
-        </p:nvSpPr>
-        <p:spPr>
-          <a:xfrm>
-            <a:off x="5588306" y="3875055"/>
-            <a:ext cx="720000" cy="720000"/>
-          </a:xfrm>
-          <a:prstGeom prst="ellipse">
-            <a:avLst/>
-          </a:prstGeom>
-          <a:solidFill>
-            <a:schemeClr val="bg1"/>
-          </a:solidFill>
-          <a:ln w="38100">
-            <a:solidFill>
-              <a:schemeClr val="accent1"/>
-            </a:solidFill>
-          </a:ln>
-        </p:spPr>
-        <p:style>
-          <a:lnRef idx="2">
-            <a:schemeClr val="dk1">
-              <a:shade val="15000"/>
-            </a:schemeClr>
-          </a:lnRef>
-          <a:fillRef idx="1">
-            <a:schemeClr val="dk1"/>
-          </a:fillRef>
-          <a:effectRef idx="0">
-            <a:schemeClr val="dk1"/>
-          </a:effectRef>
-          <a:fontRef idx="minor">
-            <a:schemeClr val="lt1"/>
-          </a:fontRef>
-        </p:style>
-        <p:txBody>
-          <a:bodyPr rtlCol="0" anchor="ctr"/>
-          <a:lstStyle/>
-          <a:p>
-            <a:pPr algn="ctr"/>
-            <a:r>
-              <a:rPr lang="en-US" altLang="ja-JP" b="1">
-                <a:ln w="0"/>
-                <a:solidFill>
-                  <a:srgbClr val="0070C0"/>
-                </a:solidFill>
-                <a:effectLst>
-                  <a:outerShdw blurRad="38100" dist="19050" dir="2700000" algn="tl" rotWithShape="0">
-                    <a:schemeClr val="dk1">
-                      <a:alpha val="40000"/>
-                    </a:schemeClr>
-                  </a:outerShdw>
-                </a:effectLst>
-              </a:rPr>
-              <a:t>A2</a:t>
-            </a:r>
-            <a:endParaRPr lang="en-US" altLang="ja-JP" b="1" dirty="0">
-              <a:ln w="0"/>
-              <a:solidFill>
-                <a:srgbClr val="0070C0"/>
-              </a:solidFill>
-              <a:effectLst>
-                <a:outerShdw blurRad="38100" dist="19050" dir="2700000" algn="tl" rotWithShape="0">
-                  <a:schemeClr val="dk1">
-                    <a:alpha val="40000"/>
-                  </a:schemeClr>
-                </a:outerShdw>
-              </a:effectLst>
-            </a:endParaRPr>
-          </a:p>
-        </p:txBody>
-      </p:sp>
-      <p:sp>
-        <p:nvSpPr>
-          <p:cNvPr id="13" name="楕円 12">
-            <a:extLst>
-              <a:ext uri="{FF2B5EF4-FFF2-40B4-BE49-F238E27FC236}">
-                <a16:creationId xmlns:a16="http://schemas.microsoft.com/office/drawing/2014/main" id="{7D845FE1-050F-65AB-353C-EB4C2E1719F8}"/>
-              </a:ext>
-            </a:extLst>
-          </p:cNvPr>
-          <p:cNvSpPr/>
-          <p:nvPr/>
-        </p:nvSpPr>
-        <p:spPr>
-          <a:xfrm>
-            <a:off x="5588306" y="480787"/>
-            <a:ext cx="720000" cy="720000"/>
-          </a:xfrm>
-          <a:prstGeom prst="ellipse">
-            <a:avLst/>
-          </a:prstGeom>
-          <a:solidFill>
-            <a:schemeClr val="bg1"/>
-          </a:solidFill>
-          <a:ln w="38100">
-            <a:solidFill>
-              <a:schemeClr val="accent1"/>
-            </a:solidFill>
-          </a:ln>
-        </p:spPr>
-        <p:style>
-          <a:lnRef idx="2">
-            <a:schemeClr val="dk1">
-              <a:shade val="15000"/>
-            </a:schemeClr>
-          </a:lnRef>
-          <a:fillRef idx="1">
-            <a:schemeClr val="dk1"/>
-          </a:fillRef>
-          <a:effectRef idx="0">
-            <a:schemeClr val="dk1"/>
-          </a:effectRef>
-          <a:fontRef idx="minor">
-            <a:schemeClr val="lt1"/>
-          </a:fontRef>
-        </p:style>
-        <p:txBody>
-          <a:bodyPr rtlCol="0" anchor="ctr"/>
-          <a:lstStyle/>
-          <a:p>
-            <a:pPr algn="ctr"/>
-            <a:r>
-              <a:rPr lang="en-US" altLang="ja-JP" b="1" dirty="0">
-                <a:ln w="0"/>
-                <a:solidFill>
-                  <a:srgbClr val="0070C0"/>
-                </a:solidFill>
-                <a:effectLst>
-                  <a:outerShdw blurRad="38100" dist="19050" dir="2700000" algn="tl" rotWithShape="0">
-                    <a:schemeClr val="dk1">
-                      <a:alpha val="40000"/>
-                    </a:schemeClr>
-                  </a:outerShdw>
-                </a:effectLst>
-              </a:rPr>
-              <a:t>A2</a:t>
-            </a:r>
-          </a:p>
-        </p:txBody>
-      </p:sp>
-      <p:cxnSp>
-        <p:nvCxnSpPr>
-          <p:cNvPr id="14" name="直線矢印コネクタ 13">
-            <a:extLst>
-              <a:ext uri="{FF2B5EF4-FFF2-40B4-BE49-F238E27FC236}">
-                <a16:creationId xmlns:a16="http://schemas.microsoft.com/office/drawing/2014/main" id="{8BAA9843-49D2-A3AF-49E6-024788716140}"/>
-              </a:ext>
-            </a:extLst>
-          </p:cNvPr>
-          <p:cNvCxnSpPr>
-            <a:cxnSpLocks/>
-            <a:stCxn id="32" idx="6"/>
-            <a:endCxn id="13" idx="2"/>
-          </p:cNvCxnSpPr>
-          <p:nvPr/>
-        </p:nvCxnSpPr>
-        <p:spPr>
-          <a:xfrm flipV="1">
-            <a:off x="4052358" y="840787"/>
-            <a:ext cx="1535948" cy="8549"/>
-          </a:xfrm>
-          <a:prstGeom prst="straightConnector1">
-            <a:avLst/>
-          </a:prstGeom>
-          <a:ln w="38100">
-            <a:tailEnd type="triangle"/>
-          </a:ln>
-        </p:spPr>
-        <p:style>
-          <a:lnRef idx="1">
-            <a:schemeClr val="dk1"/>
-          </a:lnRef>
-          <a:fillRef idx="0">
-            <a:schemeClr val="dk1"/>
-          </a:fillRef>
-          <a:effectRef idx="0">
-            <a:schemeClr val="dk1"/>
-          </a:effectRef>
-          <a:fontRef idx="minor">
-            <a:schemeClr val="tx1"/>
-          </a:fontRef>
-        </p:style>
-      </p:cxnSp>
-      <p:sp>
-        <p:nvSpPr>
-          <p:cNvPr id="18" name="矢印: 右 17">
-            <a:extLst>
-              <a:ext uri="{FF2B5EF4-FFF2-40B4-BE49-F238E27FC236}">
-                <a16:creationId xmlns:a16="http://schemas.microsoft.com/office/drawing/2014/main" id="{0CC5B2D8-97C0-BF8A-2EF1-12A3C52E0164}"/>
-              </a:ext>
-            </a:extLst>
-          </p:cNvPr>
-          <p:cNvSpPr/>
-          <p:nvPr/>
-        </p:nvSpPr>
-        <p:spPr>
-          <a:xfrm rot="5400000">
-            <a:off x="5704324" y="3096987"/>
-            <a:ext cx="468086" cy="677228"/>
-          </a:xfrm>
-          <a:prstGeom prst="rightArrow">
-            <a:avLst/>
-          </a:prstGeom>
-        </p:spPr>
-        <p:style>
-          <a:lnRef idx="2">
-            <a:schemeClr val="dk1">
-              <a:shade val="15000"/>
-            </a:schemeClr>
-          </a:lnRef>
-          <a:fillRef idx="1">
-            <a:schemeClr val="dk1"/>
-          </a:fillRef>
-          <a:effectRef idx="0">
-            <a:schemeClr val="dk1"/>
-          </a:effectRef>
-          <a:fontRef idx="minor">
-            <a:schemeClr val="lt1"/>
-          </a:fontRef>
-        </p:style>
-        <p:txBody>
-          <a:bodyPr rtlCol="0" anchor="ctr"/>
-          <a:lstStyle/>
-          <a:p>
-            <a:pPr algn="ctr"/>
-            <a:endParaRPr kumimoji="1" lang="ja-JP" altLang="en-US"/>
-          </a:p>
-        </p:txBody>
-      </p:sp>
-      <p:sp>
-        <p:nvSpPr>
-          <p:cNvPr id="19" name="テキスト ボックス 18">
-            <a:extLst>
-              <a:ext uri="{FF2B5EF4-FFF2-40B4-BE49-F238E27FC236}">
-                <a16:creationId xmlns:a16="http://schemas.microsoft.com/office/drawing/2014/main" id="{B6ADE055-2CBC-5FE5-6442-51CAEEF53366}"/>
-              </a:ext>
-            </a:extLst>
-          </p:cNvPr>
-          <p:cNvSpPr txBox="1"/>
-          <p:nvPr/>
-        </p:nvSpPr>
-        <p:spPr>
-          <a:xfrm>
-            <a:off x="807634" y="5714734"/>
-            <a:ext cx="1120820" cy="369332"/>
-          </a:xfrm>
-          <a:prstGeom prst="rect">
-            <a:avLst/>
-          </a:prstGeom>
-          <a:noFill/>
-        </p:spPr>
-        <p:txBody>
-          <a:bodyPr wrap="none" rtlCol="0">
-            <a:spAutoFit/>
-          </a:bodyPr>
-          <a:lstStyle/>
-          <a:p>
-            <a:r>
-              <a:rPr lang="en-US" altLang="ja-JP" b="1" dirty="0" err="1"/>
-              <a:t>branchX</a:t>
-            </a:r>
-            <a:endParaRPr kumimoji="1" lang="ja-JP" altLang="en-US" b="1" dirty="0"/>
-          </a:p>
-        </p:txBody>
-      </p:sp>
-      <p:sp>
-        <p:nvSpPr>
-          <p:cNvPr id="24" name="テキスト ボックス 23">
-            <a:extLst>
-              <a:ext uri="{FF2B5EF4-FFF2-40B4-BE49-F238E27FC236}">
-                <a16:creationId xmlns:a16="http://schemas.microsoft.com/office/drawing/2014/main" id="{264723AE-BED5-A553-ACF2-7969AF281D9B}"/>
-              </a:ext>
-            </a:extLst>
-          </p:cNvPr>
-          <p:cNvSpPr txBox="1"/>
-          <p:nvPr/>
-        </p:nvSpPr>
-        <p:spPr>
-          <a:xfrm>
-            <a:off x="774773" y="2332770"/>
-            <a:ext cx="1186543" cy="369332"/>
-          </a:xfrm>
-          <a:prstGeom prst="rect">
-            <a:avLst/>
-          </a:prstGeom>
-          <a:noFill/>
-        </p:spPr>
-        <p:txBody>
-          <a:bodyPr wrap="none" rtlCol="0">
-            <a:spAutoFit/>
-          </a:bodyPr>
-          <a:lstStyle/>
-          <a:p>
-            <a:r>
-              <a:rPr lang="en-US" altLang="ja-JP" b="1" dirty="0" err="1"/>
-              <a:t>branchX</a:t>
-            </a:r>
-            <a:r>
-              <a:rPr lang="en-US" altLang="ja-JP" b="1" dirty="0"/>
-              <a:t> </a:t>
-            </a:r>
-            <a:endParaRPr kumimoji="1" lang="ja-JP" altLang="en-US" b="1" dirty="0"/>
-          </a:p>
-        </p:txBody>
-      </p:sp>
-      <p:cxnSp>
-        <p:nvCxnSpPr>
-          <p:cNvPr id="44" name="直線矢印コネクタ 43">
-            <a:extLst>
-              <a:ext uri="{FF2B5EF4-FFF2-40B4-BE49-F238E27FC236}">
-                <a16:creationId xmlns:a16="http://schemas.microsoft.com/office/drawing/2014/main" id="{30CC8413-45E3-C3D1-4D22-9A7E288D9D65}"/>
-              </a:ext>
-            </a:extLst>
-          </p:cNvPr>
-          <p:cNvCxnSpPr>
-            <a:cxnSpLocks/>
-          </p:cNvCxnSpPr>
-          <p:nvPr/>
-        </p:nvCxnSpPr>
-        <p:spPr>
-          <a:xfrm flipV="1">
-            <a:off x="6316100" y="5894734"/>
-            <a:ext cx="1400594" cy="9333"/>
-          </a:xfrm>
-          <a:prstGeom prst="straightConnector1">
-            <a:avLst/>
-          </a:prstGeom>
-          <a:ln w="38100">
-            <a:solidFill>
-              <a:srgbClr val="7030A0"/>
-            </a:solidFill>
-            <a:tailEnd type="triangle"/>
-          </a:ln>
-        </p:spPr>
-        <p:style>
-          <a:lnRef idx="1">
-            <a:schemeClr val="dk1"/>
-          </a:lnRef>
-          <a:fillRef idx="0">
-            <a:schemeClr val="dk1"/>
-          </a:fillRef>
-          <a:effectRef idx="0">
-            <a:schemeClr val="dk1"/>
-          </a:effectRef>
-          <a:fontRef idx="minor">
-            <a:schemeClr val="tx1"/>
-          </a:fontRef>
-        </p:style>
-      </p:cxnSp>
-      <p:sp>
-        <p:nvSpPr>
-          <p:cNvPr id="45" name="楕円 44">
-            <a:extLst>
-              <a:ext uri="{FF2B5EF4-FFF2-40B4-BE49-F238E27FC236}">
-                <a16:creationId xmlns:a16="http://schemas.microsoft.com/office/drawing/2014/main" id="{681328B9-2F82-AA2D-8AA5-AB91E2937952}"/>
-              </a:ext>
-            </a:extLst>
-          </p:cNvPr>
-          <p:cNvSpPr/>
-          <p:nvPr/>
-        </p:nvSpPr>
-        <p:spPr>
-          <a:xfrm>
-            <a:off x="7708900" y="5539400"/>
-            <a:ext cx="720000" cy="720000"/>
-          </a:xfrm>
-          <a:prstGeom prst="ellipse">
-            <a:avLst/>
-          </a:prstGeom>
-          <a:solidFill>
-            <a:schemeClr val="bg1"/>
-          </a:solidFill>
-          <a:ln w="38100">
-            <a:solidFill>
-              <a:srgbClr val="7030A0"/>
-            </a:solidFill>
-          </a:ln>
-        </p:spPr>
-        <p:style>
-          <a:lnRef idx="2">
-            <a:schemeClr val="dk1">
-              <a:shade val="15000"/>
-            </a:schemeClr>
-          </a:lnRef>
-          <a:fillRef idx="1">
-            <a:schemeClr val="dk1"/>
-          </a:fillRef>
-          <a:effectRef idx="0">
-            <a:schemeClr val="dk1"/>
-          </a:effectRef>
-          <a:fontRef idx="minor">
-            <a:schemeClr val="lt1"/>
-          </a:fontRef>
-        </p:style>
-        <p:txBody>
-          <a:bodyPr rtlCol="0" anchor="ctr"/>
-          <a:lstStyle/>
-          <a:p>
-            <a:pPr algn="ctr"/>
-            <a:r>
-              <a:rPr lang="en-US" altLang="ja-JP" b="1">
-                <a:ln w="0"/>
-                <a:solidFill>
-                  <a:srgbClr val="7030A0"/>
-                </a:solidFill>
-                <a:effectLst>
-                  <a:outerShdw blurRad="38100" dist="19050" dir="2700000" algn="tl" rotWithShape="0">
-                    <a:schemeClr val="dk1">
-                      <a:alpha val="40000"/>
-                    </a:schemeClr>
-                  </a:outerShdw>
-                </a:effectLst>
-              </a:rPr>
-              <a:t>B2</a:t>
-            </a:r>
-            <a:endParaRPr lang="en-US" altLang="ja-JP" b="1" dirty="0">
-              <a:ln w="0"/>
-              <a:solidFill>
-                <a:srgbClr val="7030A0"/>
-              </a:solidFill>
-              <a:effectLst>
-                <a:outerShdw blurRad="38100" dist="19050" dir="2700000" algn="tl" rotWithShape="0">
-                  <a:schemeClr val="dk1">
-                    <a:alpha val="40000"/>
-                  </a:schemeClr>
-                </a:outerShdw>
-              </a:effectLst>
-            </a:endParaRPr>
-          </a:p>
-        </p:txBody>
-      </p:sp>
-      <p:sp>
-        <p:nvSpPr>
-          <p:cNvPr id="6" name="テキスト ボックス 5">
-            <a:extLst>
-              <a:ext uri="{FF2B5EF4-FFF2-40B4-BE49-F238E27FC236}">
-                <a16:creationId xmlns:a16="http://schemas.microsoft.com/office/drawing/2014/main" id="{551D878E-9AAB-ECD3-F315-C7338E15E3FC}"/>
-              </a:ext>
-            </a:extLst>
-          </p:cNvPr>
-          <p:cNvSpPr txBox="1"/>
-          <p:nvPr/>
-        </p:nvSpPr>
-        <p:spPr>
-          <a:xfrm>
-            <a:off x="-918304" y="2323834"/>
-            <a:ext cx="1905325" cy="369332"/>
-          </a:xfrm>
-          <a:prstGeom prst="rect">
-            <a:avLst/>
-          </a:prstGeom>
-          <a:noFill/>
-        </p:spPr>
-        <p:txBody>
-          <a:bodyPr wrap="square" rtlCol="0">
-            <a:spAutoFit/>
-          </a:bodyPr>
-          <a:lstStyle/>
-          <a:p>
-            <a:r>
-              <a:rPr kumimoji="1" lang="ja-JP" altLang="en-US" b="1" dirty="0">
-                <a:solidFill>
-                  <a:srgbClr val="00B050"/>
-                </a:solidFill>
-              </a:rPr>
-              <a:t>作業ブランチ</a:t>
-            </a:r>
-          </a:p>
-        </p:txBody>
-      </p:sp>
-      <p:sp>
-        <p:nvSpPr>
-          <p:cNvPr id="9" name="テキスト ボックス 8">
-            <a:extLst>
-              <a:ext uri="{FF2B5EF4-FFF2-40B4-BE49-F238E27FC236}">
-                <a16:creationId xmlns:a16="http://schemas.microsoft.com/office/drawing/2014/main" id="{B9D49057-C877-1D88-D298-9E0DDFFE589C}"/>
-              </a:ext>
-            </a:extLst>
-          </p:cNvPr>
-          <p:cNvSpPr txBox="1"/>
-          <p:nvPr/>
-        </p:nvSpPr>
-        <p:spPr>
-          <a:xfrm>
-            <a:off x="-918304" y="5702155"/>
-            <a:ext cx="1905325" cy="369332"/>
-          </a:xfrm>
-          <a:prstGeom prst="rect">
-            <a:avLst/>
-          </a:prstGeom>
-          <a:noFill/>
-        </p:spPr>
-        <p:txBody>
-          <a:bodyPr wrap="square" rtlCol="0">
-            <a:spAutoFit/>
-          </a:bodyPr>
-          <a:lstStyle/>
-          <a:p>
-            <a:r>
-              <a:rPr kumimoji="1" lang="ja-JP" altLang="en-US" b="1" dirty="0">
-                <a:solidFill>
-                  <a:srgbClr val="00B050"/>
-                </a:solidFill>
-              </a:rPr>
-              <a:t>作業ブランチ</a:t>
-            </a:r>
-          </a:p>
-        </p:txBody>
-      </p:sp>
-      <p:sp>
-        <p:nvSpPr>
-          <p:cNvPr id="15" name="四角形: 角を丸くする 14">
-            <a:extLst>
-              <a:ext uri="{FF2B5EF4-FFF2-40B4-BE49-F238E27FC236}">
-                <a16:creationId xmlns:a16="http://schemas.microsoft.com/office/drawing/2014/main" id="{858191CF-6484-6160-6AAE-3541F5D8B190}"/>
-              </a:ext>
-            </a:extLst>
-          </p:cNvPr>
-          <p:cNvSpPr/>
-          <p:nvPr/>
-        </p:nvSpPr>
-        <p:spPr>
-          <a:xfrm>
-            <a:off x="774773" y="1968500"/>
-            <a:ext cx="10274227" cy="1080000"/>
-          </a:xfrm>
-          <a:prstGeom prst="roundRect">
-            <a:avLst/>
-          </a:prstGeom>
-          <a:noFill/>
-          <a:ln w="38100">
-            <a:solidFill>
-              <a:srgbClr val="00B050"/>
-            </a:solidFill>
-            <a:prstDash val="dash"/>
-          </a:ln>
-        </p:spPr>
-        <p:style>
-          <a:lnRef idx="2">
-            <a:schemeClr val="accent1">
-              <a:shade val="15000"/>
-            </a:schemeClr>
-          </a:lnRef>
-          <a:fillRef idx="1">
-            <a:schemeClr val="accent1"/>
-          </a:fillRef>
-          <a:effectRef idx="0">
-            <a:schemeClr val="accent1"/>
-          </a:effectRef>
-          <a:fontRef idx="minor">
-            <a:schemeClr val="lt1"/>
-          </a:fontRef>
-        </p:style>
-        <p:txBody>
-          <a:bodyPr rtlCol="0" anchor="ctr"/>
-          <a:lstStyle/>
-          <a:p>
-            <a:pPr algn="ctr"/>
-            <a:endParaRPr kumimoji="1" lang="ja-JP" altLang="en-US"/>
-          </a:p>
-        </p:txBody>
-      </p:sp>
-      <p:sp>
-        <p:nvSpPr>
-          <p:cNvPr id="16" name="四角形: 角を丸くする 15">
-            <a:extLst>
-              <a:ext uri="{FF2B5EF4-FFF2-40B4-BE49-F238E27FC236}">
-                <a16:creationId xmlns:a16="http://schemas.microsoft.com/office/drawing/2014/main" id="{1B4D245B-5431-B348-6E9F-D1677057CA75}"/>
-              </a:ext>
-            </a:extLst>
-          </p:cNvPr>
-          <p:cNvSpPr/>
-          <p:nvPr/>
-        </p:nvSpPr>
-        <p:spPr>
-          <a:xfrm>
-            <a:off x="774773" y="5359400"/>
-            <a:ext cx="10274227" cy="1080000"/>
-          </a:xfrm>
-          <a:prstGeom prst="roundRect">
-            <a:avLst/>
-          </a:prstGeom>
-          <a:noFill/>
-          <a:ln w="38100">
-            <a:solidFill>
-              <a:srgbClr val="00B050"/>
-            </a:solidFill>
-            <a:prstDash val="dash"/>
-          </a:ln>
-        </p:spPr>
-        <p:style>
-          <a:lnRef idx="2">
-            <a:schemeClr val="accent1">
-              <a:shade val="15000"/>
-            </a:schemeClr>
-          </a:lnRef>
-          <a:fillRef idx="1">
-            <a:schemeClr val="accent1"/>
-          </a:fillRef>
-          <a:effectRef idx="0">
-            <a:schemeClr val="accent1"/>
-          </a:effectRef>
-          <a:fontRef idx="minor">
-            <a:schemeClr val="lt1"/>
-          </a:fontRef>
-        </p:style>
-        <p:txBody>
-          <a:bodyPr rtlCol="0" anchor="ctr"/>
-          <a:lstStyle/>
-          <a:p>
-            <a:pPr algn="ctr"/>
-            <a:endParaRPr kumimoji="1" lang="ja-JP" altLang="en-US"/>
-          </a:p>
-        </p:txBody>
-      </p:sp>
-      <p:sp>
-        <p:nvSpPr>
-          <p:cNvPr id="11" name="爆発: 8 pt 10">
-            <a:extLst>
-              <a:ext uri="{FF2B5EF4-FFF2-40B4-BE49-F238E27FC236}">
-                <a16:creationId xmlns:a16="http://schemas.microsoft.com/office/drawing/2014/main" id="{030B99E2-5E71-2874-6A05-ED1E955BBB81}"/>
-              </a:ext>
-            </a:extLst>
-          </p:cNvPr>
-          <p:cNvSpPr/>
-          <p:nvPr/>
-        </p:nvSpPr>
-        <p:spPr>
-          <a:xfrm>
-            <a:off x="6212403" y="1120292"/>
-            <a:ext cx="3492500" cy="1222449"/>
-          </a:xfrm>
-          <a:prstGeom prst="irregularSeal1">
-            <a:avLst/>
-          </a:prstGeom>
-          <a:solidFill>
-            <a:schemeClr val="bg1"/>
-          </a:solidFill>
-          <a:ln w="38100">
-            <a:solidFill>
-              <a:srgbClr val="FFC000"/>
-            </a:solidFill>
-          </a:ln>
-        </p:spPr>
-        <p:style>
-          <a:lnRef idx="2">
-            <a:schemeClr val="accent6"/>
-          </a:lnRef>
-          <a:fillRef idx="1">
-            <a:schemeClr val="lt1"/>
-          </a:fillRef>
-          <a:effectRef idx="0">
-            <a:schemeClr val="accent6"/>
-          </a:effectRef>
-          <a:fontRef idx="minor">
-            <a:schemeClr val="dk1"/>
-          </a:fontRef>
-        </p:style>
-        <p:txBody>
-          <a:bodyPr rtlCol="0" anchor="ctr"/>
-          <a:lstStyle/>
-          <a:p>
-            <a:pPr algn="ctr"/>
-            <a:r>
-              <a:rPr kumimoji="1" lang="ja-JP" altLang="en-US" b="1" dirty="0">
-                <a:solidFill>
-                  <a:srgbClr val="FFC000"/>
-                </a:solidFill>
-              </a:rPr>
-              <a:t>コンフリクト</a:t>
-            </a:r>
-          </a:p>
-        </p:txBody>
-      </p:sp>
-      <p:sp>
-        <p:nvSpPr>
-          <p:cNvPr id="3" name="テキスト ボックス 2">
-            <a:extLst>
-              <a:ext uri="{FF2B5EF4-FFF2-40B4-BE49-F238E27FC236}">
-                <a16:creationId xmlns:a16="http://schemas.microsoft.com/office/drawing/2014/main" id="{2BD6074B-242A-19D1-F089-A67533B09B1E}"/>
-              </a:ext>
-            </a:extLst>
-          </p:cNvPr>
-          <p:cNvSpPr txBox="1"/>
-          <p:nvPr/>
-        </p:nvSpPr>
-        <p:spPr>
-          <a:xfrm>
-            <a:off x="999193" y="4055570"/>
-            <a:ext cx="737702" cy="369332"/>
-          </a:xfrm>
-          <a:prstGeom prst="rect">
-            <a:avLst/>
-          </a:prstGeom>
-          <a:noFill/>
-        </p:spPr>
-        <p:txBody>
-          <a:bodyPr wrap="none" rtlCol="0">
-            <a:spAutoFit/>
-          </a:bodyPr>
-          <a:lstStyle/>
-          <a:p>
-            <a:r>
-              <a:rPr lang="en-US" altLang="ja-JP" b="1" dirty="0"/>
-              <a:t>main</a:t>
-            </a:r>
-            <a:endParaRPr lang="ja-JP" altLang="en-US" b="1" dirty="0"/>
-          </a:p>
-        </p:txBody>
-      </p:sp>
-      <p:sp>
-        <p:nvSpPr>
-          <p:cNvPr id="4" name="テキスト ボックス 3">
-            <a:extLst>
-              <a:ext uri="{FF2B5EF4-FFF2-40B4-BE49-F238E27FC236}">
-                <a16:creationId xmlns:a16="http://schemas.microsoft.com/office/drawing/2014/main" id="{E7A23DF4-7664-1C02-E43C-48F8E3C20461}"/>
-              </a:ext>
-            </a:extLst>
-          </p:cNvPr>
-          <p:cNvSpPr txBox="1"/>
-          <p:nvPr/>
-        </p:nvSpPr>
-        <p:spPr>
-          <a:xfrm>
-            <a:off x="999193" y="664670"/>
-            <a:ext cx="737702" cy="369332"/>
-          </a:xfrm>
-          <a:prstGeom prst="rect">
-            <a:avLst/>
-          </a:prstGeom>
-          <a:noFill/>
-        </p:spPr>
-        <p:txBody>
-          <a:bodyPr wrap="none" rtlCol="0">
-            <a:spAutoFit/>
-          </a:bodyPr>
-          <a:lstStyle/>
-          <a:p>
-            <a:r>
-              <a:rPr kumimoji="1" lang="en-US" altLang="ja-JP" b="1" dirty="0"/>
-              <a:t>main</a:t>
-            </a:r>
-            <a:endParaRPr kumimoji="1" lang="ja-JP" altLang="en-US" b="1" dirty="0"/>
-          </a:p>
-        </p:txBody>
-      </p:sp>
-      <p:cxnSp>
-        <p:nvCxnSpPr>
-          <p:cNvPr id="12" name="直線コネクタ 11">
-            <a:extLst>
-              <a:ext uri="{FF2B5EF4-FFF2-40B4-BE49-F238E27FC236}">
-                <a16:creationId xmlns:a16="http://schemas.microsoft.com/office/drawing/2014/main" id="{96299E3B-1A0B-D701-D2F4-20EC7FDC21A6}"/>
-              </a:ext>
-            </a:extLst>
-          </p:cNvPr>
-          <p:cNvCxnSpPr>
-            <a:cxnSpLocks/>
-          </p:cNvCxnSpPr>
-          <p:nvPr/>
-        </p:nvCxnSpPr>
-        <p:spPr>
-          <a:xfrm flipV="1">
-            <a:off x="1822727" y="9236624"/>
-            <a:ext cx="9000000" cy="0"/>
-          </a:xfrm>
-          <a:prstGeom prst="line">
-            <a:avLst/>
-          </a:prstGeom>
-          <a:ln>
-            <a:prstDash val="dash"/>
-          </a:ln>
-        </p:spPr>
-        <p:style>
-          <a:lnRef idx="1">
-            <a:schemeClr val="accent1"/>
-          </a:lnRef>
-          <a:fillRef idx="0">
-            <a:schemeClr val="accent1"/>
-          </a:fillRef>
-          <a:effectRef idx="0">
-            <a:schemeClr val="accent1"/>
-          </a:effectRef>
-          <a:fontRef idx="minor">
-            <a:schemeClr val="tx1"/>
-          </a:fontRef>
-        </p:style>
-      </p:cxnSp>
-      <p:cxnSp>
-        <p:nvCxnSpPr>
-          <p:cNvPr id="17" name="直線コネクタ 16">
-            <a:extLst>
-              <a:ext uri="{FF2B5EF4-FFF2-40B4-BE49-F238E27FC236}">
-                <a16:creationId xmlns:a16="http://schemas.microsoft.com/office/drawing/2014/main" id="{B596A1B1-E5F9-104C-03FA-B61766C32B1F}"/>
-              </a:ext>
-            </a:extLst>
-          </p:cNvPr>
-          <p:cNvCxnSpPr>
-            <a:cxnSpLocks/>
-          </p:cNvCxnSpPr>
-          <p:nvPr/>
-        </p:nvCxnSpPr>
-        <p:spPr>
-          <a:xfrm>
-            <a:off x="1822727" y="7589147"/>
-            <a:ext cx="9000000" cy="0"/>
-          </a:xfrm>
-          <a:prstGeom prst="line">
-            <a:avLst/>
-          </a:prstGeom>
-          <a:ln>
-            <a:prstDash val="dash"/>
-          </a:ln>
-        </p:spPr>
-        <p:style>
-          <a:lnRef idx="1">
-            <a:schemeClr val="accent1"/>
-          </a:lnRef>
-          <a:fillRef idx="0">
-            <a:schemeClr val="accent1"/>
-          </a:fillRef>
-          <a:effectRef idx="0">
-            <a:schemeClr val="accent1"/>
-          </a:effectRef>
-          <a:fontRef idx="minor">
-            <a:schemeClr val="tx1"/>
-          </a:fontRef>
-        </p:style>
-      </p:cxnSp>
-      <p:sp>
-        <p:nvSpPr>
-          <p:cNvPr id="28" name="楕円 27">
-            <a:extLst>
-              <a:ext uri="{FF2B5EF4-FFF2-40B4-BE49-F238E27FC236}">
-                <a16:creationId xmlns:a16="http://schemas.microsoft.com/office/drawing/2014/main" id="{E6E24BE5-A2B8-42FE-543C-249098ADC465}"/>
-              </a:ext>
-            </a:extLst>
-          </p:cNvPr>
-          <p:cNvSpPr/>
-          <p:nvPr/>
-        </p:nvSpPr>
-        <p:spPr>
-          <a:xfrm>
-            <a:off x="5594933" y="8893175"/>
-            <a:ext cx="720000" cy="720000"/>
-          </a:xfrm>
-          <a:prstGeom prst="ellipse">
-            <a:avLst/>
-          </a:prstGeom>
-          <a:solidFill>
-            <a:schemeClr val="bg1"/>
-          </a:solidFill>
-          <a:ln w="38100">
-            <a:solidFill>
-              <a:srgbClr val="FF0000"/>
-            </a:solidFill>
-          </a:ln>
-        </p:spPr>
-        <p:style>
-          <a:lnRef idx="2">
-            <a:schemeClr val="dk1">
-              <a:shade val="15000"/>
-            </a:schemeClr>
-          </a:lnRef>
-          <a:fillRef idx="1">
-            <a:schemeClr val="dk1"/>
-          </a:fillRef>
-          <a:effectRef idx="0">
-            <a:schemeClr val="dk1"/>
-          </a:effectRef>
-          <a:fontRef idx="minor">
-            <a:schemeClr val="lt1"/>
-          </a:fontRef>
-        </p:style>
-        <p:txBody>
-          <a:bodyPr rtlCol="0" anchor="ctr"/>
-          <a:lstStyle/>
-          <a:p>
-            <a:pPr algn="ctr"/>
-            <a:r>
-              <a:rPr lang="en-US" altLang="ja-JP" b="1">
-                <a:ln w="0"/>
-                <a:solidFill>
-                  <a:srgbClr val="FF0000"/>
-                </a:solidFill>
-                <a:effectLst>
-                  <a:outerShdw blurRad="38100" dist="19050" dir="2700000" algn="tl" rotWithShape="0">
-                    <a:schemeClr val="dk1">
-                      <a:alpha val="40000"/>
-                    </a:schemeClr>
-                  </a:outerShdw>
-                </a:effectLst>
-              </a:rPr>
-              <a:t>B1</a:t>
-            </a:r>
-            <a:endParaRPr lang="en-US" altLang="ja-JP" b="1" dirty="0">
-              <a:ln w="0"/>
-              <a:solidFill>
-                <a:srgbClr val="FF0000"/>
-              </a:solidFill>
-              <a:effectLst>
-                <a:outerShdw blurRad="38100" dist="19050" dir="2700000" algn="tl" rotWithShape="0">
-                  <a:schemeClr val="dk1">
-                    <a:alpha val="40000"/>
-                  </a:schemeClr>
-                </a:outerShdw>
-              </a:effectLst>
-            </a:endParaRPr>
-          </a:p>
-        </p:txBody>
-      </p:sp>
-      <p:sp>
-        <p:nvSpPr>
-          <p:cNvPr id="37" name="楕円 36">
-            <a:extLst>
-              <a:ext uri="{FF2B5EF4-FFF2-40B4-BE49-F238E27FC236}">
-                <a16:creationId xmlns:a16="http://schemas.microsoft.com/office/drawing/2014/main" id="{AE795FC1-3183-B0C3-0560-4AAC145BE0F4}"/>
-              </a:ext>
-            </a:extLst>
-          </p:cNvPr>
-          <p:cNvSpPr/>
-          <p:nvPr/>
-        </p:nvSpPr>
-        <p:spPr>
-          <a:xfrm>
-            <a:off x="3338985" y="7229147"/>
-            <a:ext cx="720000" cy="720000"/>
-          </a:xfrm>
-          <a:prstGeom prst="ellipse">
-            <a:avLst/>
-          </a:prstGeom>
-          <a:solidFill>
-            <a:schemeClr val="bg1"/>
-          </a:solidFill>
-          <a:ln w="38100"/>
-        </p:spPr>
-        <p:style>
-          <a:lnRef idx="2">
-            <a:schemeClr val="dk1">
-              <a:shade val="15000"/>
-            </a:schemeClr>
-          </a:lnRef>
-          <a:fillRef idx="1">
-            <a:schemeClr val="dk1"/>
-          </a:fillRef>
-          <a:effectRef idx="0">
-            <a:schemeClr val="dk1"/>
-          </a:effectRef>
-          <a:fontRef idx="minor">
-            <a:schemeClr val="lt1"/>
-          </a:fontRef>
-        </p:style>
-        <p:txBody>
-          <a:bodyPr rtlCol="0" anchor="ctr"/>
-          <a:lstStyle/>
-          <a:p>
-            <a:pPr algn="ctr"/>
-            <a:r>
-              <a:rPr lang="en-US" altLang="ja-JP" b="1" dirty="0">
-                <a:solidFill>
-                  <a:schemeClr val="tx1"/>
-                </a:solidFill>
-              </a:rPr>
-              <a:t>A1</a:t>
-            </a:r>
-            <a:endParaRPr lang="ja-JP" altLang="en-US" b="1" dirty="0">
-              <a:solidFill>
-                <a:schemeClr val="tx1"/>
-              </a:solidFill>
-            </a:endParaRPr>
-          </a:p>
-        </p:txBody>
-      </p:sp>
-      <p:cxnSp>
-        <p:nvCxnSpPr>
-          <p:cNvPr id="38" name="直線矢印コネクタ 37">
-            <a:extLst>
-              <a:ext uri="{FF2B5EF4-FFF2-40B4-BE49-F238E27FC236}">
-                <a16:creationId xmlns:a16="http://schemas.microsoft.com/office/drawing/2014/main" id="{267CBD82-3ABA-5CB0-DFFD-C39B46F1BF42}"/>
-              </a:ext>
-            </a:extLst>
-          </p:cNvPr>
-          <p:cNvCxnSpPr>
-            <a:cxnSpLocks/>
-            <a:stCxn id="37" idx="4"/>
-            <a:endCxn id="28" idx="2"/>
-          </p:cNvCxnSpPr>
-          <p:nvPr/>
-        </p:nvCxnSpPr>
-        <p:spPr>
-          <a:xfrm>
-            <a:off x="3698985" y="7949147"/>
-            <a:ext cx="1895948" cy="1304028"/>
-          </a:xfrm>
-          <a:prstGeom prst="straightConnector1">
-            <a:avLst/>
-          </a:prstGeom>
-          <a:ln w="38100">
-            <a:tailEnd type="triangle"/>
-          </a:ln>
-        </p:spPr>
-        <p:style>
-          <a:lnRef idx="1">
-            <a:schemeClr val="dk1"/>
-          </a:lnRef>
-          <a:fillRef idx="0">
-            <a:schemeClr val="dk1"/>
-          </a:fillRef>
-          <a:effectRef idx="0">
-            <a:schemeClr val="dk1"/>
-          </a:effectRef>
-          <a:fontRef idx="minor">
-            <a:schemeClr val="tx1"/>
-          </a:fontRef>
-        </p:style>
-      </p:cxnSp>
-      <p:cxnSp>
-        <p:nvCxnSpPr>
-          <p:cNvPr id="39" name="直線矢印コネクタ 38">
-            <a:extLst>
-              <a:ext uri="{FF2B5EF4-FFF2-40B4-BE49-F238E27FC236}">
-                <a16:creationId xmlns:a16="http://schemas.microsoft.com/office/drawing/2014/main" id="{FEC13AD7-9D36-3A05-5E2A-451E8FE4A71E}"/>
-              </a:ext>
-            </a:extLst>
-          </p:cNvPr>
-          <p:cNvCxnSpPr>
-            <a:cxnSpLocks/>
-          </p:cNvCxnSpPr>
-          <p:nvPr/>
-        </p:nvCxnSpPr>
-        <p:spPr>
-          <a:xfrm>
-            <a:off x="2208685" y="7583111"/>
-            <a:ext cx="1130300" cy="12072"/>
-          </a:xfrm>
-          <a:prstGeom prst="straightConnector1">
-            <a:avLst/>
-          </a:prstGeom>
-          <a:ln w="38100">
-            <a:tailEnd type="triangle"/>
-          </a:ln>
-        </p:spPr>
-        <p:style>
-          <a:lnRef idx="1">
-            <a:schemeClr val="dk1"/>
-          </a:lnRef>
-          <a:fillRef idx="0">
-            <a:schemeClr val="dk1"/>
-          </a:fillRef>
-          <a:effectRef idx="0">
-            <a:schemeClr val="dk1"/>
-          </a:effectRef>
-          <a:fontRef idx="minor">
-            <a:schemeClr val="tx1"/>
-          </a:fontRef>
-        </p:style>
-      </p:cxnSp>
-      <p:cxnSp>
-        <p:nvCxnSpPr>
-          <p:cNvPr id="46" name="直線矢印コネクタ 45">
-            <a:extLst>
-              <a:ext uri="{FF2B5EF4-FFF2-40B4-BE49-F238E27FC236}">
-                <a16:creationId xmlns:a16="http://schemas.microsoft.com/office/drawing/2014/main" id="{EE353364-9468-0621-3440-7AB1DC8014EA}"/>
-              </a:ext>
-            </a:extLst>
-          </p:cNvPr>
-          <p:cNvCxnSpPr>
-            <a:cxnSpLocks/>
-          </p:cNvCxnSpPr>
-          <p:nvPr/>
-        </p:nvCxnSpPr>
-        <p:spPr>
-          <a:xfrm flipV="1">
-            <a:off x="4058985" y="7585187"/>
-            <a:ext cx="1535948" cy="7921"/>
-          </a:xfrm>
-          <a:prstGeom prst="straightConnector1">
-            <a:avLst/>
-          </a:prstGeom>
-          <a:ln w="38100">
-            <a:tailEnd type="triangle"/>
-          </a:ln>
-        </p:spPr>
-        <p:style>
-          <a:lnRef idx="1">
-            <a:schemeClr val="dk1"/>
-          </a:lnRef>
-          <a:fillRef idx="0">
-            <a:schemeClr val="dk1"/>
-          </a:fillRef>
-          <a:effectRef idx="0">
-            <a:schemeClr val="dk1"/>
-          </a:effectRef>
-          <a:fontRef idx="minor">
-            <a:schemeClr val="tx1"/>
-          </a:fontRef>
-        </p:style>
-      </p:cxnSp>
-      <p:sp>
-        <p:nvSpPr>
-          <p:cNvPr id="47" name="楕円 46">
-            <a:extLst>
-              <a:ext uri="{FF2B5EF4-FFF2-40B4-BE49-F238E27FC236}">
-                <a16:creationId xmlns:a16="http://schemas.microsoft.com/office/drawing/2014/main" id="{D6DB1CC6-FEC7-336B-4FDA-1D8D1E605302}"/>
-              </a:ext>
-            </a:extLst>
-          </p:cNvPr>
-          <p:cNvSpPr/>
-          <p:nvPr/>
-        </p:nvSpPr>
-        <p:spPr>
-          <a:xfrm>
-            <a:off x="5594933" y="7229147"/>
-            <a:ext cx="720000" cy="720000"/>
-          </a:xfrm>
-          <a:prstGeom prst="ellipse">
-            <a:avLst/>
-          </a:prstGeom>
-          <a:solidFill>
-            <a:schemeClr val="bg1"/>
-          </a:solidFill>
-          <a:ln w="38100">
-            <a:solidFill>
-              <a:schemeClr val="accent1"/>
-            </a:solidFill>
-          </a:ln>
-        </p:spPr>
-        <p:style>
-          <a:lnRef idx="2">
-            <a:schemeClr val="dk1">
-              <a:shade val="15000"/>
-            </a:schemeClr>
-          </a:lnRef>
-          <a:fillRef idx="1">
-            <a:schemeClr val="dk1"/>
-          </a:fillRef>
-          <a:effectRef idx="0">
-            <a:schemeClr val="dk1"/>
-          </a:effectRef>
-          <a:fontRef idx="minor">
-            <a:schemeClr val="lt1"/>
-          </a:fontRef>
-        </p:style>
-        <p:txBody>
-          <a:bodyPr rtlCol="0" anchor="ctr"/>
-          <a:lstStyle/>
-          <a:p>
-            <a:pPr algn="ctr"/>
-            <a:r>
-              <a:rPr lang="en-US" altLang="ja-JP" b="1">
-                <a:ln w="0"/>
-                <a:solidFill>
-                  <a:srgbClr val="0070C0"/>
-                </a:solidFill>
-                <a:effectLst>
-                  <a:outerShdw blurRad="38100" dist="19050" dir="2700000" algn="tl" rotWithShape="0">
-                    <a:schemeClr val="dk1">
-                      <a:alpha val="40000"/>
-                    </a:schemeClr>
-                  </a:outerShdw>
-                </a:effectLst>
-              </a:rPr>
-              <a:t>A2</a:t>
-            </a:r>
-            <a:endParaRPr lang="en-US" altLang="ja-JP" b="1" dirty="0">
-              <a:ln w="0"/>
-              <a:solidFill>
-                <a:srgbClr val="0070C0"/>
-              </a:solidFill>
-              <a:effectLst>
-                <a:outerShdw blurRad="38100" dist="19050" dir="2700000" algn="tl" rotWithShape="0">
-                  <a:schemeClr val="dk1">
-                    <a:alpha val="40000"/>
-                  </a:schemeClr>
-                </a:outerShdw>
-              </a:effectLst>
-            </a:endParaRPr>
-          </a:p>
-        </p:txBody>
-      </p:sp>
-      <p:sp>
-        <p:nvSpPr>
-          <p:cNvPr id="48" name="テキスト ボックス 47">
-            <a:extLst>
-              <a:ext uri="{FF2B5EF4-FFF2-40B4-BE49-F238E27FC236}">
-                <a16:creationId xmlns:a16="http://schemas.microsoft.com/office/drawing/2014/main" id="{D263861A-136E-884F-BE2F-0D45B03E2771}"/>
-              </a:ext>
-            </a:extLst>
-          </p:cNvPr>
-          <p:cNvSpPr txBox="1"/>
-          <p:nvPr/>
-        </p:nvSpPr>
-        <p:spPr>
-          <a:xfrm>
-            <a:off x="807634" y="9069841"/>
-            <a:ext cx="1120820" cy="369332"/>
-          </a:xfrm>
-          <a:prstGeom prst="rect">
-            <a:avLst/>
-          </a:prstGeom>
-          <a:noFill/>
-        </p:spPr>
-        <p:txBody>
-          <a:bodyPr wrap="none" rtlCol="0">
-            <a:spAutoFit/>
-          </a:bodyPr>
-          <a:lstStyle/>
-          <a:p>
-            <a:r>
-              <a:rPr lang="en-US" altLang="ja-JP" b="1" dirty="0" err="1"/>
-              <a:t>branchX</a:t>
-            </a:r>
-            <a:endParaRPr kumimoji="1" lang="ja-JP" altLang="en-US" b="1" dirty="0"/>
-          </a:p>
-        </p:txBody>
-      </p:sp>
-      <p:cxnSp>
-        <p:nvCxnSpPr>
-          <p:cNvPr id="49" name="直線矢印コネクタ 48">
-            <a:extLst>
-              <a:ext uri="{FF2B5EF4-FFF2-40B4-BE49-F238E27FC236}">
-                <a16:creationId xmlns:a16="http://schemas.microsoft.com/office/drawing/2014/main" id="{B11EE254-563B-F24C-60F0-17341810738F}"/>
-              </a:ext>
-            </a:extLst>
-          </p:cNvPr>
-          <p:cNvCxnSpPr>
-            <a:cxnSpLocks/>
-          </p:cNvCxnSpPr>
-          <p:nvPr/>
-        </p:nvCxnSpPr>
-        <p:spPr>
-          <a:xfrm flipV="1">
-            <a:off x="6322727" y="9248509"/>
-            <a:ext cx="1400594" cy="9333"/>
-          </a:xfrm>
-          <a:prstGeom prst="straightConnector1">
-            <a:avLst/>
-          </a:prstGeom>
-          <a:ln w="38100">
-            <a:solidFill>
-              <a:srgbClr val="7030A0"/>
-            </a:solidFill>
-            <a:tailEnd type="triangle"/>
-          </a:ln>
-        </p:spPr>
-        <p:style>
-          <a:lnRef idx="1">
-            <a:schemeClr val="dk1"/>
-          </a:lnRef>
-          <a:fillRef idx="0">
-            <a:schemeClr val="dk1"/>
-          </a:fillRef>
-          <a:effectRef idx="0">
-            <a:schemeClr val="dk1"/>
-          </a:effectRef>
-          <a:fontRef idx="minor">
-            <a:schemeClr val="tx1"/>
-          </a:fontRef>
-        </p:style>
-      </p:cxnSp>
-      <p:sp>
-        <p:nvSpPr>
-          <p:cNvPr id="50" name="楕円 49">
-            <a:extLst>
-              <a:ext uri="{FF2B5EF4-FFF2-40B4-BE49-F238E27FC236}">
-                <a16:creationId xmlns:a16="http://schemas.microsoft.com/office/drawing/2014/main" id="{49EF939A-63F4-8867-812D-3C71483689F1}"/>
-              </a:ext>
-            </a:extLst>
-          </p:cNvPr>
-          <p:cNvSpPr/>
-          <p:nvPr/>
-        </p:nvSpPr>
-        <p:spPr>
-          <a:xfrm>
-            <a:off x="7715527" y="8893175"/>
-            <a:ext cx="720000" cy="720000"/>
-          </a:xfrm>
-          <a:prstGeom prst="ellipse">
-            <a:avLst/>
-          </a:prstGeom>
-          <a:solidFill>
-            <a:schemeClr val="bg1"/>
-          </a:solidFill>
-          <a:ln w="38100">
-            <a:solidFill>
-              <a:srgbClr val="7030A0"/>
-            </a:solidFill>
-          </a:ln>
-        </p:spPr>
-        <p:style>
-          <a:lnRef idx="2">
-            <a:schemeClr val="dk1">
-              <a:shade val="15000"/>
-            </a:schemeClr>
-          </a:lnRef>
-          <a:fillRef idx="1">
-            <a:schemeClr val="dk1"/>
-          </a:fillRef>
-          <a:effectRef idx="0">
-            <a:schemeClr val="dk1"/>
-          </a:effectRef>
-          <a:fontRef idx="minor">
-            <a:schemeClr val="lt1"/>
-          </a:fontRef>
-        </p:style>
-        <p:txBody>
-          <a:bodyPr rtlCol="0" anchor="ctr"/>
-          <a:lstStyle/>
-          <a:p>
-            <a:pPr algn="ctr"/>
-            <a:r>
-              <a:rPr lang="en-US" altLang="ja-JP" b="1">
-                <a:ln w="0"/>
-                <a:solidFill>
-                  <a:srgbClr val="7030A0"/>
-                </a:solidFill>
-                <a:effectLst>
-                  <a:outerShdw blurRad="38100" dist="19050" dir="2700000" algn="tl" rotWithShape="0">
-                    <a:schemeClr val="dk1">
-                      <a:alpha val="40000"/>
-                    </a:schemeClr>
-                  </a:outerShdw>
-                </a:effectLst>
-              </a:rPr>
-              <a:t>B2</a:t>
-            </a:r>
-            <a:endParaRPr lang="en-US" altLang="ja-JP" b="1" dirty="0">
-              <a:ln w="0"/>
-              <a:solidFill>
-                <a:srgbClr val="7030A0"/>
-              </a:solidFill>
-              <a:effectLst>
-                <a:outerShdw blurRad="38100" dist="19050" dir="2700000" algn="tl" rotWithShape="0">
-                  <a:schemeClr val="dk1">
-                    <a:alpha val="40000"/>
-                  </a:schemeClr>
-                </a:outerShdw>
-              </a:effectLst>
-            </a:endParaRPr>
-          </a:p>
-        </p:txBody>
-      </p:sp>
-      <p:sp>
-        <p:nvSpPr>
-          <p:cNvPr id="51" name="テキスト ボックス 50">
-            <a:extLst>
-              <a:ext uri="{FF2B5EF4-FFF2-40B4-BE49-F238E27FC236}">
-                <a16:creationId xmlns:a16="http://schemas.microsoft.com/office/drawing/2014/main" id="{554DE670-003B-77DC-26B3-47A55233752C}"/>
-              </a:ext>
-            </a:extLst>
-          </p:cNvPr>
-          <p:cNvSpPr txBox="1"/>
-          <p:nvPr/>
-        </p:nvSpPr>
-        <p:spPr>
-          <a:xfrm>
-            <a:off x="-918304" y="9048326"/>
-            <a:ext cx="1905325" cy="369332"/>
-          </a:xfrm>
-          <a:prstGeom prst="rect">
-            <a:avLst/>
-          </a:prstGeom>
-          <a:noFill/>
-        </p:spPr>
-        <p:txBody>
-          <a:bodyPr wrap="square" rtlCol="0">
-            <a:spAutoFit/>
-          </a:bodyPr>
-          <a:lstStyle/>
-          <a:p>
-            <a:r>
-              <a:rPr kumimoji="1" lang="ja-JP" altLang="en-US" b="1" dirty="0">
-                <a:solidFill>
-                  <a:srgbClr val="00B050"/>
-                </a:solidFill>
-              </a:rPr>
-              <a:t>作業ブランチ</a:t>
-            </a:r>
-          </a:p>
-        </p:txBody>
-      </p:sp>
-      <p:sp>
-        <p:nvSpPr>
-          <p:cNvPr id="52" name="四角形: 角を丸くする 51">
-            <a:extLst>
-              <a:ext uri="{FF2B5EF4-FFF2-40B4-BE49-F238E27FC236}">
-                <a16:creationId xmlns:a16="http://schemas.microsoft.com/office/drawing/2014/main" id="{19D545E2-AEF2-F0C8-427F-A86E92681785}"/>
-              </a:ext>
-            </a:extLst>
-          </p:cNvPr>
-          <p:cNvSpPr/>
-          <p:nvPr/>
-        </p:nvSpPr>
-        <p:spPr>
-          <a:xfrm>
-            <a:off x="774773" y="8705571"/>
-            <a:ext cx="10274227" cy="1080000"/>
-          </a:xfrm>
-          <a:prstGeom prst="roundRect">
-            <a:avLst/>
-          </a:prstGeom>
-          <a:noFill/>
-          <a:ln w="38100">
-            <a:solidFill>
-              <a:srgbClr val="00B050"/>
-            </a:solidFill>
-            <a:prstDash val="dash"/>
-          </a:ln>
-        </p:spPr>
-        <p:style>
-          <a:lnRef idx="2">
-            <a:schemeClr val="accent1">
-              <a:shade val="15000"/>
-            </a:schemeClr>
-          </a:lnRef>
-          <a:fillRef idx="1">
-            <a:schemeClr val="accent1"/>
-          </a:fillRef>
-          <a:effectRef idx="0">
-            <a:schemeClr val="accent1"/>
-          </a:effectRef>
-          <a:fontRef idx="minor">
-            <a:schemeClr val="lt1"/>
-          </a:fontRef>
-        </p:style>
-        <p:txBody>
-          <a:bodyPr rtlCol="0" anchor="ctr"/>
-          <a:lstStyle/>
-          <a:p>
-            <a:pPr algn="ctr"/>
-            <a:endParaRPr kumimoji="1" lang="ja-JP" altLang="en-US"/>
-          </a:p>
-        </p:txBody>
-      </p:sp>
-      <p:sp>
-        <p:nvSpPr>
-          <p:cNvPr id="53" name="テキスト ボックス 52">
-            <a:extLst>
-              <a:ext uri="{FF2B5EF4-FFF2-40B4-BE49-F238E27FC236}">
-                <a16:creationId xmlns:a16="http://schemas.microsoft.com/office/drawing/2014/main" id="{BA06EF55-3837-3EA9-AE6F-2236B628B90A}"/>
-              </a:ext>
-            </a:extLst>
-          </p:cNvPr>
-          <p:cNvSpPr txBox="1"/>
-          <p:nvPr/>
-        </p:nvSpPr>
-        <p:spPr>
-          <a:xfrm>
-            <a:off x="999193" y="7404481"/>
-            <a:ext cx="737702" cy="369332"/>
-          </a:xfrm>
-          <a:prstGeom prst="rect">
-            <a:avLst/>
-          </a:prstGeom>
-          <a:noFill/>
-        </p:spPr>
-        <p:txBody>
-          <a:bodyPr wrap="none" rtlCol="0">
-            <a:spAutoFit/>
-          </a:bodyPr>
-          <a:lstStyle/>
-          <a:p>
-            <a:r>
-              <a:rPr lang="en-US" altLang="ja-JP" b="1" dirty="0"/>
-              <a:t>main</a:t>
-            </a:r>
-            <a:endParaRPr lang="ja-JP" altLang="en-US" b="1" dirty="0"/>
-          </a:p>
-        </p:txBody>
-      </p:sp>
-      <p:sp>
-        <p:nvSpPr>
-          <p:cNvPr id="54" name="矢印: 右 53">
-            <a:extLst>
-              <a:ext uri="{FF2B5EF4-FFF2-40B4-BE49-F238E27FC236}">
-                <a16:creationId xmlns:a16="http://schemas.microsoft.com/office/drawing/2014/main" id="{B11B559F-7BAF-66E9-6F53-57913CC9DE4F}"/>
-              </a:ext>
-            </a:extLst>
-          </p:cNvPr>
-          <p:cNvSpPr/>
-          <p:nvPr/>
-        </p:nvSpPr>
-        <p:spPr>
-          <a:xfrm rot="5400000">
-            <a:off x="5704324" y="6509979"/>
-            <a:ext cx="468086" cy="677228"/>
-          </a:xfrm>
-          <a:prstGeom prst="rightArrow">
-            <a:avLst/>
-          </a:prstGeom>
-        </p:spPr>
-        <p:style>
-          <a:lnRef idx="2">
-            <a:schemeClr val="dk1">
-              <a:shade val="15000"/>
-            </a:schemeClr>
-          </a:lnRef>
-          <a:fillRef idx="1">
-            <a:schemeClr val="dk1"/>
-          </a:fillRef>
-          <a:effectRef idx="0">
-            <a:schemeClr val="dk1"/>
-          </a:effectRef>
-          <a:fontRef idx="minor">
-            <a:schemeClr val="lt1"/>
-          </a:fontRef>
-        </p:style>
-        <p:txBody>
-          <a:bodyPr rtlCol="0" anchor="ctr"/>
-          <a:lstStyle/>
-          <a:p>
-            <a:pPr algn="ctr"/>
-            <a:endParaRPr kumimoji="1" lang="ja-JP" altLang="en-US"/>
-          </a:p>
-        </p:txBody>
-      </p:sp>
-      <p:sp>
-        <p:nvSpPr>
-          <p:cNvPr id="55" name="楕円 54">
-            <a:extLst>
-              <a:ext uri="{FF2B5EF4-FFF2-40B4-BE49-F238E27FC236}">
-                <a16:creationId xmlns:a16="http://schemas.microsoft.com/office/drawing/2014/main" id="{CA817454-1894-8DBC-398C-FC4286D84C84}"/>
-              </a:ext>
-            </a:extLst>
-          </p:cNvPr>
-          <p:cNvSpPr/>
-          <p:nvPr/>
-        </p:nvSpPr>
-        <p:spPr>
-          <a:xfrm>
-            <a:off x="9171990" y="7229147"/>
-            <a:ext cx="720000" cy="720000"/>
-          </a:xfrm>
-          <a:prstGeom prst="ellipse">
-            <a:avLst/>
-          </a:prstGeom>
-          <a:solidFill>
-            <a:schemeClr val="bg1"/>
-          </a:solidFill>
-          <a:ln w="38100">
-            <a:solidFill>
-              <a:schemeClr val="tx1"/>
-            </a:solidFill>
-          </a:ln>
-        </p:spPr>
-        <p:style>
-          <a:lnRef idx="2">
-            <a:schemeClr val="dk1">
-              <a:shade val="15000"/>
-            </a:schemeClr>
-          </a:lnRef>
-          <a:fillRef idx="1">
-            <a:schemeClr val="dk1"/>
-          </a:fillRef>
-          <a:effectRef idx="0">
-            <a:schemeClr val="dk1"/>
-          </a:effectRef>
-          <a:fontRef idx="minor">
-            <a:schemeClr val="lt1"/>
-          </a:fontRef>
-        </p:style>
-        <p:txBody>
-          <a:bodyPr rtlCol="0" anchor="ctr"/>
-          <a:lstStyle/>
-          <a:p>
-            <a:pPr algn="ctr"/>
-            <a:r>
-              <a:rPr lang="en-US" altLang="ja-JP" b="1" dirty="0">
-                <a:ln w="0"/>
-                <a:solidFill>
-                  <a:schemeClr val="tx1"/>
-                </a:solidFill>
-                <a:effectLst>
-                  <a:outerShdw blurRad="38100" dist="19050" dir="2700000" algn="tl" rotWithShape="0">
-                    <a:schemeClr val="dk1">
-                      <a:alpha val="40000"/>
-                    </a:schemeClr>
-                  </a:outerShdw>
-                </a:effectLst>
-              </a:rPr>
-              <a:t>A3</a:t>
-            </a:r>
-          </a:p>
-        </p:txBody>
-      </p:sp>
-      <p:cxnSp>
-        <p:nvCxnSpPr>
-          <p:cNvPr id="56" name="直線矢印コネクタ 55">
-            <a:extLst>
-              <a:ext uri="{FF2B5EF4-FFF2-40B4-BE49-F238E27FC236}">
-                <a16:creationId xmlns:a16="http://schemas.microsoft.com/office/drawing/2014/main" id="{23F829DA-D516-BA07-2DCF-137EE5CF16D7}"/>
-              </a:ext>
-            </a:extLst>
-          </p:cNvPr>
-          <p:cNvCxnSpPr>
-            <a:cxnSpLocks/>
-            <a:stCxn id="50" idx="6"/>
-            <a:endCxn id="55" idx="4"/>
-          </p:cNvCxnSpPr>
-          <p:nvPr/>
-        </p:nvCxnSpPr>
-        <p:spPr>
-          <a:xfrm flipV="1">
-            <a:off x="8435527" y="7949147"/>
-            <a:ext cx="1096463" cy="1304028"/>
-          </a:xfrm>
-          <a:prstGeom prst="straightConnector1">
-            <a:avLst/>
-          </a:prstGeom>
-          <a:ln w="38100">
-            <a:solidFill>
-              <a:schemeClr val="tx1"/>
-            </a:solidFill>
-            <a:tailEnd type="triangle"/>
-          </a:ln>
-        </p:spPr>
-        <p:style>
-          <a:lnRef idx="1">
-            <a:schemeClr val="dk1"/>
-          </a:lnRef>
-          <a:fillRef idx="0">
-            <a:schemeClr val="dk1"/>
-          </a:fillRef>
-          <a:effectRef idx="0">
-            <a:schemeClr val="dk1"/>
-          </a:effectRef>
-          <a:fontRef idx="minor">
-            <a:schemeClr val="tx1"/>
-          </a:fontRef>
-        </p:style>
-      </p:cxnSp>
-      <p:cxnSp>
-        <p:nvCxnSpPr>
-          <p:cNvPr id="59" name="直線矢印コネクタ 58">
-            <a:extLst>
-              <a:ext uri="{FF2B5EF4-FFF2-40B4-BE49-F238E27FC236}">
-                <a16:creationId xmlns:a16="http://schemas.microsoft.com/office/drawing/2014/main" id="{CD76CE7A-87DC-1F38-9B35-DFCB339DA7BE}"/>
-              </a:ext>
-            </a:extLst>
-          </p:cNvPr>
-          <p:cNvCxnSpPr>
-            <a:cxnSpLocks/>
-          </p:cNvCxnSpPr>
-          <p:nvPr/>
-        </p:nvCxnSpPr>
-        <p:spPr>
-          <a:xfrm>
-            <a:off x="6314933" y="7589147"/>
-            <a:ext cx="2857057" cy="0"/>
-          </a:xfrm>
-          <a:prstGeom prst="straightConnector1">
-            <a:avLst/>
-          </a:prstGeom>
-          <a:ln w="38100">
-            <a:tailEnd type="triangle"/>
-          </a:ln>
-        </p:spPr>
-        <p:style>
-          <a:lnRef idx="1">
-            <a:schemeClr val="dk1"/>
-          </a:lnRef>
-          <a:fillRef idx="0">
-            <a:schemeClr val="dk1"/>
-          </a:fillRef>
-          <a:effectRef idx="0">
-            <a:schemeClr val="dk1"/>
-          </a:effectRef>
-          <a:fontRef idx="minor">
-            <a:schemeClr val="tx1"/>
-          </a:fontRef>
-        </p:style>
-      </p:cxnSp>
-    </p:spTree>
-    <p:extLst>
-      <p:ext uri="{BB962C8B-B14F-4D97-AF65-F5344CB8AC3E}">
-        <p14:creationId xmlns:p14="http://schemas.microsoft.com/office/powerpoint/2010/main" val="3598622837"/>
       </p:ext>
     </p:extLst>
   </p:cSld>
@@ -40408,6 +39094,2389 @@
         <p:cNvPr id="1" name="">
           <a:extLst>
             <a:ext uri="{FF2B5EF4-FFF2-40B4-BE49-F238E27FC236}">
+              <a16:creationId xmlns:a16="http://schemas.microsoft.com/office/drawing/2014/main" id="{2ADF4022-D9F7-2BE5-BEFB-79BCDC117BB4}"/>
+            </a:ext>
+          </a:extLst>
+        </p:cNvPr>
+        <p:cNvGrpSpPr/>
+        <p:nvPr/>
+      </p:nvGrpSpPr>
+      <p:grpSpPr>
+        <a:xfrm>
+          <a:off x="0" y="0"/>
+          <a:ext cx="0" cy="0"/>
+          <a:chOff x="0" y="0"/>
+          <a:chExt cx="0" cy="0"/>
+        </a:xfrm>
+      </p:grpSpPr>
+      <p:cxnSp>
+        <p:nvCxnSpPr>
+          <p:cNvPr id="20" name="直線コネクタ 19">
+            <a:extLst>
+              <a:ext uri="{FF2B5EF4-FFF2-40B4-BE49-F238E27FC236}">
+                <a16:creationId xmlns:a16="http://schemas.microsoft.com/office/drawing/2014/main" id="{19FA3A50-1136-C0CF-CF44-2AF2E71DA12E}"/>
+              </a:ext>
+            </a:extLst>
+          </p:cNvPr>
+          <p:cNvCxnSpPr>
+            <a:cxnSpLocks/>
+          </p:cNvCxnSpPr>
+          <p:nvPr/>
+        </p:nvCxnSpPr>
+        <p:spPr>
+          <a:xfrm flipV="1">
+            <a:off x="1816100" y="5899400"/>
+            <a:ext cx="9000000" cy="0"/>
+          </a:xfrm>
+          <a:prstGeom prst="line">
+            <a:avLst/>
+          </a:prstGeom>
+          <a:ln>
+            <a:prstDash val="dash"/>
+          </a:ln>
+        </p:spPr>
+        <p:style>
+          <a:lnRef idx="1">
+            <a:schemeClr val="accent1"/>
+          </a:lnRef>
+          <a:fillRef idx="0">
+            <a:schemeClr val="accent1"/>
+          </a:fillRef>
+          <a:effectRef idx="0">
+            <a:schemeClr val="accent1"/>
+          </a:effectRef>
+          <a:fontRef idx="minor">
+            <a:schemeClr val="tx1"/>
+          </a:fontRef>
+        </p:style>
+      </p:cxnSp>
+      <p:cxnSp>
+        <p:nvCxnSpPr>
+          <p:cNvPr id="21" name="直線コネクタ 20">
+            <a:extLst>
+              <a:ext uri="{FF2B5EF4-FFF2-40B4-BE49-F238E27FC236}">
+                <a16:creationId xmlns:a16="http://schemas.microsoft.com/office/drawing/2014/main" id="{804A3FCF-BD3F-2F2C-CE2B-E338D65EF098}"/>
+              </a:ext>
+            </a:extLst>
+          </p:cNvPr>
+          <p:cNvCxnSpPr>
+            <a:cxnSpLocks/>
+          </p:cNvCxnSpPr>
+          <p:nvPr/>
+        </p:nvCxnSpPr>
+        <p:spPr>
+          <a:xfrm>
+            <a:off x="1816100" y="4240236"/>
+            <a:ext cx="9000000" cy="0"/>
+          </a:xfrm>
+          <a:prstGeom prst="line">
+            <a:avLst/>
+          </a:prstGeom>
+          <a:ln>
+            <a:prstDash val="dash"/>
+          </a:ln>
+        </p:spPr>
+        <p:style>
+          <a:lnRef idx="1">
+            <a:schemeClr val="accent1"/>
+          </a:lnRef>
+          <a:fillRef idx="0">
+            <a:schemeClr val="accent1"/>
+          </a:fillRef>
+          <a:effectRef idx="0">
+            <a:schemeClr val="accent1"/>
+          </a:effectRef>
+          <a:fontRef idx="minor">
+            <a:schemeClr val="tx1"/>
+          </a:fontRef>
+        </p:style>
+      </p:cxnSp>
+      <p:sp>
+        <p:nvSpPr>
+          <p:cNvPr id="22" name="楕円 21">
+            <a:extLst>
+              <a:ext uri="{FF2B5EF4-FFF2-40B4-BE49-F238E27FC236}">
+                <a16:creationId xmlns:a16="http://schemas.microsoft.com/office/drawing/2014/main" id="{D2571C54-EA91-0E63-4885-2146A6C623AF}"/>
+              </a:ext>
+            </a:extLst>
+          </p:cNvPr>
+          <p:cNvSpPr/>
+          <p:nvPr/>
+        </p:nvSpPr>
+        <p:spPr>
+          <a:xfrm>
+            <a:off x="5588306" y="5539400"/>
+            <a:ext cx="720000" cy="720000"/>
+          </a:xfrm>
+          <a:prstGeom prst="ellipse">
+            <a:avLst/>
+          </a:prstGeom>
+          <a:solidFill>
+            <a:schemeClr val="bg1"/>
+          </a:solidFill>
+          <a:ln w="38100">
+            <a:solidFill>
+              <a:srgbClr val="FF0000"/>
+            </a:solidFill>
+          </a:ln>
+        </p:spPr>
+        <p:style>
+          <a:lnRef idx="2">
+            <a:schemeClr val="dk1">
+              <a:shade val="15000"/>
+            </a:schemeClr>
+          </a:lnRef>
+          <a:fillRef idx="1">
+            <a:schemeClr val="dk1"/>
+          </a:fillRef>
+          <a:effectRef idx="0">
+            <a:schemeClr val="dk1"/>
+          </a:effectRef>
+          <a:fontRef idx="minor">
+            <a:schemeClr val="lt1"/>
+          </a:fontRef>
+        </p:style>
+        <p:txBody>
+          <a:bodyPr rtlCol="0" anchor="ctr"/>
+          <a:lstStyle/>
+          <a:p>
+            <a:pPr algn="ctr"/>
+            <a:r>
+              <a:rPr lang="en-US" altLang="ja-JP" b="1">
+                <a:ln w="0"/>
+                <a:solidFill>
+                  <a:srgbClr val="FF0000"/>
+                </a:solidFill>
+                <a:effectLst>
+                  <a:outerShdw blurRad="38100" dist="19050" dir="2700000" algn="tl" rotWithShape="0">
+                    <a:schemeClr val="dk1">
+                      <a:alpha val="40000"/>
+                    </a:schemeClr>
+                  </a:outerShdw>
+                </a:effectLst>
+              </a:rPr>
+              <a:t>B1</a:t>
+            </a:r>
+            <a:endParaRPr lang="en-US" altLang="ja-JP" b="1" dirty="0">
+              <a:ln w="0"/>
+              <a:solidFill>
+                <a:srgbClr val="FF0000"/>
+              </a:solidFill>
+              <a:effectLst>
+                <a:outerShdw blurRad="38100" dist="19050" dir="2700000" algn="tl" rotWithShape="0">
+                  <a:schemeClr val="dk1">
+                    <a:alpha val="40000"/>
+                  </a:schemeClr>
+                </a:outerShdw>
+              </a:effectLst>
+            </a:endParaRPr>
+          </a:p>
+        </p:txBody>
+      </p:sp>
+      <p:sp>
+        <p:nvSpPr>
+          <p:cNvPr id="23" name="楕円 22">
+            <a:extLst>
+              <a:ext uri="{FF2B5EF4-FFF2-40B4-BE49-F238E27FC236}">
+                <a16:creationId xmlns:a16="http://schemas.microsoft.com/office/drawing/2014/main" id="{EDA0A91C-8C5D-892F-155C-A7A1116B2D5C}"/>
+              </a:ext>
+            </a:extLst>
+          </p:cNvPr>
+          <p:cNvSpPr/>
+          <p:nvPr/>
+        </p:nvSpPr>
+        <p:spPr>
+          <a:xfrm>
+            <a:off x="3332358" y="3880236"/>
+            <a:ext cx="720000" cy="720000"/>
+          </a:xfrm>
+          <a:prstGeom prst="ellipse">
+            <a:avLst/>
+          </a:prstGeom>
+          <a:solidFill>
+            <a:schemeClr val="bg1"/>
+          </a:solidFill>
+          <a:ln w="38100"/>
+        </p:spPr>
+        <p:style>
+          <a:lnRef idx="2">
+            <a:schemeClr val="dk1">
+              <a:shade val="15000"/>
+            </a:schemeClr>
+          </a:lnRef>
+          <a:fillRef idx="1">
+            <a:schemeClr val="dk1"/>
+          </a:fillRef>
+          <a:effectRef idx="0">
+            <a:schemeClr val="dk1"/>
+          </a:effectRef>
+          <a:fontRef idx="minor">
+            <a:schemeClr val="lt1"/>
+          </a:fontRef>
+        </p:style>
+        <p:txBody>
+          <a:bodyPr rtlCol="0" anchor="ctr"/>
+          <a:lstStyle/>
+          <a:p>
+            <a:pPr algn="ctr"/>
+            <a:r>
+              <a:rPr lang="en-US" altLang="ja-JP" b="1" dirty="0">
+                <a:solidFill>
+                  <a:schemeClr val="tx1"/>
+                </a:solidFill>
+              </a:rPr>
+              <a:t>A1</a:t>
+            </a:r>
+            <a:endParaRPr lang="ja-JP" altLang="en-US" b="1" dirty="0">
+              <a:solidFill>
+                <a:schemeClr val="tx1"/>
+              </a:solidFill>
+            </a:endParaRPr>
+          </a:p>
+        </p:txBody>
+      </p:sp>
+      <p:cxnSp>
+        <p:nvCxnSpPr>
+          <p:cNvPr id="25" name="直線矢印コネクタ 24">
+            <a:extLst>
+              <a:ext uri="{FF2B5EF4-FFF2-40B4-BE49-F238E27FC236}">
+                <a16:creationId xmlns:a16="http://schemas.microsoft.com/office/drawing/2014/main" id="{8D824E50-198D-E448-7393-FD845A62A587}"/>
+              </a:ext>
+            </a:extLst>
+          </p:cNvPr>
+          <p:cNvCxnSpPr>
+            <a:cxnSpLocks/>
+            <a:stCxn id="23" idx="4"/>
+            <a:endCxn id="22" idx="2"/>
+          </p:cNvCxnSpPr>
+          <p:nvPr/>
+        </p:nvCxnSpPr>
+        <p:spPr>
+          <a:xfrm>
+            <a:off x="3692358" y="4600236"/>
+            <a:ext cx="1895948" cy="1299164"/>
+          </a:xfrm>
+          <a:prstGeom prst="straightConnector1">
+            <a:avLst/>
+          </a:prstGeom>
+          <a:ln w="38100">
+            <a:tailEnd type="triangle"/>
+          </a:ln>
+        </p:spPr>
+        <p:style>
+          <a:lnRef idx="1">
+            <a:schemeClr val="dk1"/>
+          </a:lnRef>
+          <a:fillRef idx="0">
+            <a:schemeClr val="dk1"/>
+          </a:fillRef>
+          <a:effectRef idx="0">
+            <a:schemeClr val="dk1"/>
+          </a:effectRef>
+          <a:fontRef idx="minor">
+            <a:schemeClr val="tx1"/>
+          </a:fontRef>
+        </p:style>
+      </p:cxnSp>
+      <p:cxnSp>
+        <p:nvCxnSpPr>
+          <p:cNvPr id="26" name="直線矢印コネクタ 25">
+            <a:extLst>
+              <a:ext uri="{FF2B5EF4-FFF2-40B4-BE49-F238E27FC236}">
+                <a16:creationId xmlns:a16="http://schemas.microsoft.com/office/drawing/2014/main" id="{3F55ED5B-B7B4-FE2B-B871-38A7973ABF9E}"/>
+              </a:ext>
+            </a:extLst>
+          </p:cNvPr>
+          <p:cNvCxnSpPr>
+            <a:cxnSpLocks/>
+            <a:endCxn id="23" idx="2"/>
+          </p:cNvCxnSpPr>
+          <p:nvPr/>
+        </p:nvCxnSpPr>
+        <p:spPr>
+          <a:xfrm>
+            <a:off x="2202058" y="4230904"/>
+            <a:ext cx="1130300" cy="9332"/>
+          </a:xfrm>
+          <a:prstGeom prst="straightConnector1">
+            <a:avLst/>
+          </a:prstGeom>
+          <a:ln w="38100">
+            <a:tailEnd type="triangle"/>
+          </a:ln>
+        </p:spPr>
+        <p:style>
+          <a:lnRef idx="1">
+            <a:schemeClr val="dk1"/>
+          </a:lnRef>
+          <a:fillRef idx="0">
+            <a:schemeClr val="dk1"/>
+          </a:fillRef>
+          <a:effectRef idx="0">
+            <a:schemeClr val="dk1"/>
+          </a:effectRef>
+          <a:fontRef idx="minor">
+            <a:schemeClr val="tx1"/>
+          </a:fontRef>
+        </p:style>
+      </p:cxnSp>
+      <p:cxnSp>
+        <p:nvCxnSpPr>
+          <p:cNvPr id="27" name="直線矢印コネクタ 26">
+            <a:extLst>
+              <a:ext uri="{FF2B5EF4-FFF2-40B4-BE49-F238E27FC236}">
+                <a16:creationId xmlns:a16="http://schemas.microsoft.com/office/drawing/2014/main" id="{25204A73-8071-CC97-EDCD-B6720F07366F}"/>
+              </a:ext>
+            </a:extLst>
+          </p:cNvPr>
+          <p:cNvCxnSpPr>
+            <a:cxnSpLocks/>
+            <a:stCxn id="23" idx="6"/>
+            <a:endCxn id="8" idx="2"/>
+          </p:cNvCxnSpPr>
+          <p:nvPr/>
+        </p:nvCxnSpPr>
+        <p:spPr>
+          <a:xfrm flipV="1">
+            <a:off x="4052358" y="4235055"/>
+            <a:ext cx="1535948" cy="5181"/>
+          </a:xfrm>
+          <a:prstGeom prst="straightConnector1">
+            <a:avLst/>
+          </a:prstGeom>
+          <a:ln w="38100">
+            <a:tailEnd type="triangle"/>
+          </a:ln>
+        </p:spPr>
+        <p:style>
+          <a:lnRef idx="1">
+            <a:schemeClr val="dk1"/>
+          </a:lnRef>
+          <a:fillRef idx="0">
+            <a:schemeClr val="dk1"/>
+          </a:fillRef>
+          <a:effectRef idx="0">
+            <a:schemeClr val="dk1"/>
+          </a:effectRef>
+          <a:fontRef idx="minor">
+            <a:schemeClr val="tx1"/>
+          </a:fontRef>
+        </p:style>
+      </p:cxnSp>
+      <p:cxnSp>
+        <p:nvCxnSpPr>
+          <p:cNvPr id="29" name="直線コネクタ 28">
+            <a:extLst>
+              <a:ext uri="{FF2B5EF4-FFF2-40B4-BE49-F238E27FC236}">
+                <a16:creationId xmlns:a16="http://schemas.microsoft.com/office/drawing/2014/main" id="{BEEE2C07-4924-7882-44F9-FCF4C9C48892}"/>
+              </a:ext>
+            </a:extLst>
+          </p:cNvPr>
+          <p:cNvCxnSpPr>
+            <a:cxnSpLocks/>
+          </p:cNvCxnSpPr>
+          <p:nvPr/>
+        </p:nvCxnSpPr>
+        <p:spPr>
+          <a:xfrm>
+            <a:off x="1816100" y="2508886"/>
+            <a:ext cx="9000000" cy="0"/>
+          </a:xfrm>
+          <a:prstGeom prst="line">
+            <a:avLst/>
+          </a:prstGeom>
+          <a:ln>
+            <a:prstDash val="dash"/>
+          </a:ln>
+        </p:spPr>
+        <p:style>
+          <a:lnRef idx="1">
+            <a:schemeClr val="accent1"/>
+          </a:lnRef>
+          <a:fillRef idx="0">
+            <a:schemeClr val="accent1"/>
+          </a:fillRef>
+          <a:effectRef idx="0">
+            <a:schemeClr val="accent1"/>
+          </a:effectRef>
+          <a:fontRef idx="minor">
+            <a:schemeClr val="tx1"/>
+          </a:fontRef>
+        </p:style>
+      </p:cxnSp>
+      <p:cxnSp>
+        <p:nvCxnSpPr>
+          <p:cNvPr id="30" name="直線コネクタ 29">
+            <a:extLst>
+              <a:ext uri="{FF2B5EF4-FFF2-40B4-BE49-F238E27FC236}">
+                <a16:creationId xmlns:a16="http://schemas.microsoft.com/office/drawing/2014/main" id="{19735A37-32EA-5231-2FC6-A9C09364C81D}"/>
+              </a:ext>
+            </a:extLst>
+          </p:cNvPr>
+          <p:cNvCxnSpPr>
+            <a:cxnSpLocks/>
+          </p:cNvCxnSpPr>
+          <p:nvPr/>
+        </p:nvCxnSpPr>
+        <p:spPr>
+          <a:xfrm>
+            <a:off x="1816100" y="849336"/>
+            <a:ext cx="9000000" cy="0"/>
+          </a:xfrm>
+          <a:prstGeom prst="line">
+            <a:avLst/>
+          </a:prstGeom>
+          <a:ln>
+            <a:prstDash val="dash"/>
+          </a:ln>
+        </p:spPr>
+        <p:style>
+          <a:lnRef idx="1">
+            <a:schemeClr val="accent1"/>
+          </a:lnRef>
+          <a:fillRef idx="0">
+            <a:schemeClr val="accent1"/>
+          </a:fillRef>
+          <a:effectRef idx="0">
+            <a:schemeClr val="accent1"/>
+          </a:effectRef>
+          <a:fontRef idx="minor">
+            <a:schemeClr val="tx1"/>
+          </a:fontRef>
+        </p:style>
+      </p:cxnSp>
+      <p:sp>
+        <p:nvSpPr>
+          <p:cNvPr id="31" name="楕円 30">
+            <a:extLst>
+              <a:ext uri="{FF2B5EF4-FFF2-40B4-BE49-F238E27FC236}">
+                <a16:creationId xmlns:a16="http://schemas.microsoft.com/office/drawing/2014/main" id="{E4CAD24B-BC86-68FB-C826-86D7092E0409}"/>
+              </a:ext>
+            </a:extLst>
+          </p:cNvPr>
+          <p:cNvSpPr/>
+          <p:nvPr/>
+        </p:nvSpPr>
+        <p:spPr>
+          <a:xfrm>
+            <a:off x="5588306" y="2157436"/>
+            <a:ext cx="720000" cy="720000"/>
+          </a:xfrm>
+          <a:prstGeom prst="ellipse">
+            <a:avLst/>
+          </a:prstGeom>
+          <a:solidFill>
+            <a:schemeClr val="bg1"/>
+          </a:solidFill>
+          <a:ln w="38100">
+            <a:solidFill>
+              <a:srgbClr val="FF0000"/>
+            </a:solidFill>
+          </a:ln>
+        </p:spPr>
+        <p:style>
+          <a:lnRef idx="2">
+            <a:schemeClr val="dk1">
+              <a:shade val="15000"/>
+            </a:schemeClr>
+          </a:lnRef>
+          <a:fillRef idx="1">
+            <a:schemeClr val="dk1"/>
+          </a:fillRef>
+          <a:effectRef idx="0">
+            <a:schemeClr val="dk1"/>
+          </a:effectRef>
+          <a:fontRef idx="minor">
+            <a:schemeClr val="lt1"/>
+          </a:fontRef>
+        </p:style>
+        <p:txBody>
+          <a:bodyPr rtlCol="0" anchor="ctr"/>
+          <a:lstStyle/>
+          <a:p>
+            <a:pPr algn="ctr"/>
+            <a:r>
+              <a:rPr lang="en-US" altLang="ja-JP" b="1">
+                <a:ln w="0"/>
+                <a:solidFill>
+                  <a:srgbClr val="FF0000"/>
+                </a:solidFill>
+                <a:effectLst>
+                  <a:outerShdw blurRad="38100" dist="19050" dir="2700000" algn="tl" rotWithShape="0">
+                    <a:schemeClr val="dk1">
+                      <a:alpha val="40000"/>
+                    </a:schemeClr>
+                  </a:outerShdw>
+                </a:effectLst>
+              </a:rPr>
+              <a:t>B1</a:t>
+            </a:r>
+            <a:endParaRPr lang="en-US" altLang="ja-JP" b="1" dirty="0">
+              <a:ln w="0"/>
+              <a:solidFill>
+                <a:srgbClr val="FF0000"/>
+              </a:solidFill>
+              <a:effectLst>
+                <a:outerShdw blurRad="38100" dist="19050" dir="2700000" algn="tl" rotWithShape="0">
+                  <a:schemeClr val="dk1">
+                    <a:alpha val="40000"/>
+                  </a:schemeClr>
+                </a:outerShdw>
+              </a:effectLst>
+            </a:endParaRPr>
+          </a:p>
+        </p:txBody>
+      </p:sp>
+      <p:sp>
+        <p:nvSpPr>
+          <p:cNvPr id="32" name="楕円 31">
+            <a:extLst>
+              <a:ext uri="{FF2B5EF4-FFF2-40B4-BE49-F238E27FC236}">
+                <a16:creationId xmlns:a16="http://schemas.microsoft.com/office/drawing/2014/main" id="{00167EA7-E150-C11C-4AA4-7C38709A603C}"/>
+              </a:ext>
+            </a:extLst>
+          </p:cNvPr>
+          <p:cNvSpPr/>
+          <p:nvPr/>
+        </p:nvSpPr>
+        <p:spPr>
+          <a:xfrm>
+            <a:off x="3332358" y="489336"/>
+            <a:ext cx="720000" cy="720000"/>
+          </a:xfrm>
+          <a:prstGeom prst="ellipse">
+            <a:avLst/>
+          </a:prstGeom>
+          <a:solidFill>
+            <a:schemeClr val="bg1"/>
+          </a:solidFill>
+          <a:ln w="38100"/>
+        </p:spPr>
+        <p:style>
+          <a:lnRef idx="2">
+            <a:schemeClr val="dk1">
+              <a:shade val="15000"/>
+            </a:schemeClr>
+          </a:lnRef>
+          <a:fillRef idx="1">
+            <a:schemeClr val="dk1"/>
+          </a:fillRef>
+          <a:effectRef idx="0">
+            <a:schemeClr val="dk1"/>
+          </a:effectRef>
+          <a:fontRef idx="minor">
+            <a:schemeClr val="lt1"/>
+          </a:fontRef>
+        </p:style>
+        <p:txBody>
+          <a:bodyPr rtlCol="0" anchor="ctr"/>
+          <a:lstStyle/>
+          <a:p>
+            <a:pPr algn="ctr"/>
+            <a:r>
+              <a:rPr lang="en-US" altLang="ja-JP" b="1" dirty="0">
+                <a:solidFill>
+                  <a:schemeClr val="tx1"/>
+                </a:solidFill>
+              </a:rPr>
+              <a:t>A1</a:t>
+            </a:r>
+            <a:endParaRPr lang="ja-JP" altLang="en-US" b="1" dirty="0">
+              <a:solidFill>
+                <a:schemeClr val="tx1"/>
+              </a:solidFill>
+            </a:endParaRPr>
+          </a:p>
+        </p:txBody>
+      </p:sp>
+      <p:cxnSp>
+        <p:nvCxnSpPr>
+          <p:cNvPr id="34" name="直線矢印コネクタ 33">
+            <a:extLst>
+              <a:ext uri="{FF2B5EF4-FFF2-40B4-BE49-F238E27FC236}">
+                <a16:creationId xmlns:a16="http://schemas.microsoft.com/office/drawing/2014/main" id="{949940FF-245F-3A9B-FED5-39562AD33E8A}"/>
+              </a:ext>
+            </a:extLst>
+          </p:cNvPr>
+          <p:cNvCxnSpPr>
+            <a:cxnSpLocks/>
+            <a:stCxn id="32" idx="4"/>
+            <a:endCxn id="31" idx="2"/>
+          </p:cNvCxnSpPr>
+          <p:nvPr/>
+        </p:nvCxnSpPr>
+        <p:spPr>
+          <a:xfrm>
+            <a:off x="3692358" y="1209336"/>
+            <a:ext cx="1895948" cy="1308100"/>
+          </a:xfrm>
+          <a:prstGeom prst="straightConnector1">
+            <a:avLst/>
+          </a:prstGeom>
+          <a:ln w="38100">
+            <a:tailEnd type="triangle"/>
+          </a:ln>
+        </p:spPr>
+        <p:style>
+          <a:lnRef idx="1">
+            <a:schemeClr val="dk1"/>
+          </a:lnRef>
+          <a:fillRef idx="0">
+            <a:schemeClr val="dk1"/>
+          </a:fillRef>
+          <a:effectRef idx="0">
+            <a:schemeClr val="dk1"/>
+          </a:effectRef>
+          <a:fontRef idx="minor">
+            <a:schemeClr val="tx1"/>
+          </a:fontRef>
+        </p:style>
+      </p:cxnSp>
+      <p:cxnSp>
+        <p:nvCxnSpPr>
+          <p:cNvPr id="35" name="直線矢印コネクタ 34">
+            <a:extLst>
+              <a:ext uri="{FF2B5EF4-FFF2-40B4-BE49-F238E27FC236}">
+                <a16:creationId xmlns:a16="http://schemas.microsoft.com/office/drawing/2014/main" id="{CE62CD14-2278-5ABE-3300-45396F8C5E70}"/>
+              </a:ext>
+            </a:extLst>
+          </p:cNvPr>
+          <p:cNvCxnSpPr>
+            <a:cxnSpLocks/>
+            <a:endCxn id="32" idx="2"/>
+          </p:cNvCxnSpPr>
+          <p:nvPr/>
+        </p:nvCxnSpPr>
+        <p:spPr>
+          <a:xfrm>
+            <a:off x="2202058" y="840004"/>
+            <a:ext cx="1130300" cy="9332"/>
+          </a:xfrm>
+          <a:prstGeom prst="straightConnector1">
+            <a:avLst/>
+          </a:prstGeom>
+          <a:ln w="38100">
+            <a:tailEnd type="triangle"/>
+          </a:ln>
+        </p:spPr>
+        <p:style>
+          <a:lnRef idx="1">
+            <a:schemeClr val="dk1"/>
+          </a:lnRef>
+          <a:fillRef idx="0">
+            <a:schemeClr val="dk1"/>
+          </a:fillRef>
+          <a:effectRef idx="0">
+            <a:schemeClr val="dk1"/>
+          </a:effectRef>
+          <a:fontRef idx="minor">
+            <a:schemeClr val="tx1"/>
+          </a:fontRef>
+        </p:style>
+      </p:cxnSp>
+      <p:sp>
+        <p:nvSpPr>
+          <p:cNvPr id="8" name="楕円 7">
+            <a:extLst>
+              <a:ext uri="{FF2B5EF4-FFF2-40B4-BE49-F238E27FC236}">
+                <a16:creationId xmlns:a16="http://schemas.microsoft.com/office/drawing/2014/main" id="{9E5A721E-7272-9F9A-1D47-1E8C508CC9BC}"/>
+              </a:ext>
+            </a:extLst>
+          </p:cNvPr>
+          <p:cNvSpPr/>
+          <p:nvPr/>
+        </p:nvSpPr>
+        <p:spPr>
+          <a:xfrm>
+            <a:off x="5588306" y="3875055"/>
+            <a:ext cx="720000" cy="720000"/>
+          </a:xfrm>
+          <a:prstGeom prst="ellipse">
+            <a:avLst/>
+          </a:prstGeom>
+          <a:solidFill>
+            <a:schemeClr val="bg1"/>
+          </a:solidFill>
+          <a:ln w="38100">
+            <a:solidFill>
+              <a:schemeClr val="accent1"/>
+            </a:solidFill>
+          </a:ln>
+        </p:spPr>
+        <p:style>
+          <a:lnRef idx="2">
+            <a:schemeClr val="dk1">
+              <a:shade val="15000"/>
+            </a:schemeClr>
+          </a:lnRef>
+          <a:fillRef idx="1">
+            <a:schemeClr val="dk1"/>
+          </a:fillRef>
+          <a:effectRef idx="0">
+            <a:schemeClr val="dk1"/>
+          </a:effectRef>
+          <a:fontRef idx="minor">
+            <a:schemeClr val="lt1"/>
+          </a:fontRef>
+        </p:style>
+        <p:txBody>
+          <a:bodyPr rtlCol="0" anchor="ctr"/>
+          <a:lstStyle/>
+          <a:p>
+            <a:pPr algn="ctr"/>
+            <a:r>
+              <a:rPr lang="en-US" altLang="ja-JP" b="1">
+                <a:ln w="0"/>
+                <a:solidFill>
+                  <a:srgbClr val="0070C0"/>
+                </a:solidFill>
+                <a:effectLst>
+                  <a:outerShdw blurRad="38100" dist="19050" dir="2700000" algn="tl" rotWithShape="0">
+                    <a:schemeClr val="dk1">
+                      <a:alpha val="40000"/>
+                    </a:schemeClr>
+                  </a:outerShdw>
+                </a:effectLst>
+              </a:rPr>
+              <a:t>A2</a:t>
+            </a:r>
+            <a:endParaRPr lang="en-US" altLang="ja-JP" b="1" dirty="0">
+              <a:ln w="0"/>
+              <a:solidFill>
+                <a:srgbClr val="0070C0"/>
+              </a:solidFill>
+              <a:effectLst>
+                <a:outerShdw blurRad="38100" dist="19050" dir="2700000" algn="tl" rotWithShape="0">
+                  <a:schemeClr val="dk1">
+                    <a:alpha val="40000"/>
+                  </a:schemeClr>
+                </a:outerShdw>
+              </a:effectLst>
+            </a:endParaRPr>
+          </a:p>
+        </p:txBody>
+      </p:sp>
+      <p:sp>
+        <p:nvSpPr>
+          <p:cNvPr id="13" name="楕円 12">
+            <a:extLst>
+              <a:ext uri="{FF2B5EF4-FFF2-40B4-BE49-F238E27FC236}">
+                <a16:creationId xmlns:a16="http://schemas.microsoft.com/office/drawing/2014/main" id="{7D845FE1-050F-65AB-353C-EB4C2E1719F8}"/>
+              </a:ext>
+            </a:extLst>
+          </p:cNvPr>
+          <p:cNvSpPr/>
+          <p:nvPr/>
+        </p:nvSpPr>
+        <p:spPr>
+          <a:xfrm>
+            <a:off x="5588306" y="480787"/>
+            <a:ext cx="720000" cy="720000"/>
+          </a:xfrm>
+          <a:prstGeom prst="ellipse">
+            <a:avLst/>
+          </a:prstGeom>
+          <a:solidFill>
+            <a:schemeClr val="bg1"/>
+          </a:solidFill>
+          <a:ln w="38100">
+            <a:solidFill>
+              <a:schemeClr val="accent1"/>
+            </a:solidFill>
+          </a:ln>
+        </p:spPr>
+        <p:style>
+          <a:lnRef idx="2">
+            <a:schemeClr val="dk1">
+              <a:shade val="15000"/>
+            </a:schemeClr>
+          </a:lnRef>
+          <a:fillRef idx="1">
+            <a:schemeClr val="dk1"/>
+          </a:fillRef>
+          <a:effectRef idx="0">
+            <a:schemeClr val="dk1"/>
+          </a:effectRef>
+          <a:fontRef idx="minor">
+            <a:schemeClr val="lt1"/>
+          </a:fontRef>
+        </p:style>
+        <p:txBody>
+          <a:bodyPr rtlCol="0" anchor="ctr"/>
+          <a:lstStyle/>
+          <a:p>
+            <a:pPr algn="ctr"/>
+            <a:r>
+              <a:rPr lang="en-US" altLang="ja-JP" b="1" dirty="0">
+                <a:ln w="0"/>
+                <a:solidFill>
+                  <a:srgbClr val="0070C0"/>
+                </a:solidFill>
+                <a:effectLst>
+                  <a:outerShdw blurRad="38100" dist="19050" dir="2700000" algn="tl" rotWithShape="0">
+                    <a:schemeClr val="dk1">
+                      <a:alpha val="40000"/>
+                    </a:schemeClr>
+                  </a:outerShdw>
+                </a:effectLst>
+              </a:rPr>
+              <a:t>A2</a:t>
+            </a:r>
+          </a:p>
+        </p:txBody>
+      </p:sp>
+      <p:cxnSp>
+        <p:nvCxnSpPr>
+          <p:cNvPr id="14" name="直線矢印コネクタ 13">
+            <a:extLst>
+              <a:ext uri="{FF2B5EF4-FFF2-40B4-BE49-F238E27FC236}">
+                <a16:creationId xmlns:a16="http://schemas.microsoft.com/office/drawing/2014/main" id="{8BAA9843-49D2-A3AF-49E6-024788716140}"/>
+              </a:ext>
+            </a:extLst>
+          </p:cNvPr>
+          <p:cNvCxnSpPr>
+            <a:cxnSpLocks/>
+            <a:stCxn id="32" idx="6"/>
+            <a:endCxn id="13" idx="2"/>
+          </p:cNvCxnSpPr>
+          <p:nvPr/>
+        </p:nvCxnSpPr>
+        <p:spPr>
+          <a:xfrm flipV="1">
+            <a:off x="4052358" y="840787"/>
+            <a:ext cx="1535948" cy="8549"/>
+          </a:xfrm>
+          <a:prstGeom prst="straightConnector1">
+            <a:avLst/>
+          </a:prstGeom>
+          <a:ln w="38100">
+            <a:tailEnd type="triangle"/>
+          </a:ln>
+        </p:spPr>
+        <p:style>
+          <a:lnRef idx="1">
+            <a:schemeClr val="dk1"/>
+          </a:lnRef>
+          <a:fillRef idx="0">
+            <a:schemeClr val="dk1"/>
+          </a:fillRef>
+          <a:effectRef idx="0">
+            <a:schemeClr val="dk1"/>
+          </a:effectRef>
+          <a:fontRef idx="minor">
+            <a:schemeClr val="tx1"/>
+          </a:fontRef>
+        </p:style>
+      </p:cxnSp>
+      <p:sp>
+        <p:nvSpPr>
+          <p:cNvPr id="18" name="矢印: 右 17">
+            <a:extLst>
+              <a:ext uri="{FF2B5EF4-FFF2-40B4-BE49-F238E27FC236}">
+                <a16:creationId xmlns:a16="http://schemas.microsoft.com/office/drawing/2014/main" id="{0CC5B2D8-97C0-BF8A-2EF1-12A3C52E0164}"/>
+              </a:ext>
+            </a:extLst>
+          </p:cNvPr>
+          <p:cNvSpPr/>
+          <p:nvPr/>
+        </p:nvSpPr>
+        <p:spPr>
+          <a:xfrm rot="5400000">
+            <a:off x="5704324" y="3096987"/>
+            <a:ext cx="468086" cy="677228"/>
+          </a:xfrm>
+          <a:prstGeom prst="rightArrow">
+            <a:avLst/>
+          </a:prstGeom>
+        </p:spPr>
+        <p:style>
+          <a:lnRef idx="2">
+            <a:schemeClr val="dk1">
+              <a:shade val="15000"/>
+            </a:schemeClr>
+          </a:lnRef>
+          <a:fillRef idx="1">
+            <a:schemeClr val="dk1"/>
+          </a:fillRef>
+          <a:effectRef idx="0">
+            <a:schemeClr val="dk1"/>
+          </a:effectRef>
+          <a:fontRef idx="minor">
+            <a:schemeClr val="lt1"/>
+          </a:fontRef>
+        </p:style>
+        <p:txBody>
+          <a:bodyPr rtlCol="0" anchor="ctr"/>
+          <a:lstStyle/>
+          <a:p>
+            <a:pPr algn="ctr"/>
+            <a:endParaRPr kumimoji="1" lang="ja-JP" altLang="en-US"/>
+          </a:p>
+        </p:txBody>
+      </p:sp>
+      <p:sp>
+        <p:nvSpPr>
+          <p:cNvPr id="19" name="テキスト ボックス 18">
+            <a:extLst>
+              <a:ext uri="{FF2B5EF4-FFF2-40B4-BE49-F238E27FC236}">
+                <a16:creationId xmlns:a16="http://schemas.microsoft.com/office/drawing/2014/main" id="{B6ADE055-2CBC-5FE5-6442-51CAEEF53366}"/>
+              </a:ext>
+            </a:extLst>
+          </p:cNvPr>
+          <p:cNvSpPr txBox="1"/>
+          <p:nvPr/>
+        </p:nvSpPr>
+        <p:spPr>
+          <a:xfrm>
+            <a:off x="807634" y="5714734"/>
+            <a:ext cx="1120820" cy="369332"/>
+          </a:xfrm>
+          <a:prstGeom prst="rect">
+            <a:avLst/>
+          </a:prstGeom>
+          <a:noFill/>
+        </p:spPr>
+        <p:txBody>
+          <a:bodyPr wrap="none" rtlCol="0">
+            <a:spAutoFit/>
+          </a:bodyPr>
+          <a:lstStyle/>
+          <a:p>
+            <a:r>
+              <a:rPr lang="en-US" altLang="ja-JP" b="1" dirty="0" err="1"/>
+              <a:t>branchX</a:t>
+            </a:r>
+            <a:endParaRPr kumimoji="1" lang="ja-JP" altLang="en-US" b="1" dirty="0"/>
+          </a:p>
+        </p:txBody>
+      </p:sp>
+      <p:sp>
+        <p:nvSpPr>
+          <p:cNvPr id="24" name="テキスト ボックス 23">
+            <a:extLst>
+              <a:ext uri="{FF2B5EF4-FFF2-40B4-BE49-F238E27FC236}">
+                <a16:creationId xmlns:a16="http://schemas.microsoft.com/office/drawing/2014/main" id="{264723AE-BED5-A553-ACF2-7969AF281D9B}"/>
+              </a:ext>
+            </a:extLst>
+          </p:cNvPr>
+          <p:cNvSpPr txBox="1"/>
+          <p:nvPr/>
+        </p:nvSpPr>
+        <p:spPr>
+          <a:xfrm>
+            <a:off x="774773" y="2332770"/>
+            <a:ext cx="1186543" cy="369332"/>
+          </a:xfrm>
+          <a:prstGeom prst="rect">
+            <a:avLst/>
+          </a:prstGeom>
+          <a:noFill/>
+        </p:spPr>
+        <p:txBody>
+          <a:bodyPr wrap="none" rtlCol="0">
+            <a:spAutoFit/>
+          </a:bodyPr>
+          <a:lstStyle/>
+          <a:p>
+            <a:r>
+              <a:rPr lang="en-US" altLang="ja-JP" b="1" dirty="0" err="1"/>
+              <a:t>branchX</a:t>
+            </a:r>
+            <a:r>
+              <a:rPr lang="en-US" altLang="ja-JP" b="1" dirty="0"/>
+              <a:t> </a:t>
+            </a:r>
+            <a:endParaRPr kumimoji="1" lang="ja-JP" altLang="en-US" b="1" dirty="0"/>
+          </a:p>
+        </p:txBody>
+      </p:sp>
+      <p:cxnSp>
+        <p:nvCxnSpPr>
+          <p:cNvPr id="44" name="直線矢印コネクタ 43">
+            <a:extLst>
+              <a:ext uri="{FF2B5EF4-FFF2-40B4-BE49-F238E27FC236}">
+                <a16:creationId xmlns:a16="http://schemas.microsoft.com/office/drawing/2014/main" id="{30CC8413-45E3-C3D1-4D22-9A7E288D9D65}"/>
+              </a:ext>
+            </a:extLst>
+          </p:cNvPr>
+          <p:cNvCxnSpPr>
+            <a:cxnSpLocks/>
+          </p:cNvCxnSpPr>
+          <p:nvPr/>
+        </p:nvCxnSpPr>
+        <p:spPr>
+          <a:xfrm flipV="1">
+            <a:off x="6316100" y="5894734"/>
+            <a:ext cx="1400594" cy="9333"/>
+          </a:xfrm>
+          <a:prstGeom prst="straightConnector1">
+            <a:avLst/>
+          </a:prstGeom>
+          <a:ln w="38100">
+            <a:solidFill>
+              <a:srgbClr val="7030A0"/>
+            </a:solidFill>
+            <a:tailEnd type="triangle"/>
+          </a:ln>
+        </p:spPr>
+        <p:style>
+          <a:lnRef idx="1">
+            <a:schemeClr val="dk1"/>
+          </a:lnRef>
+          <a:fillRef idx="0">
+            <a:schemeClr val="dk1"/>
+          </a:fillRef>
+          <a:effectRef idx="0">
+            <a:schemeClr val="dk1"/>
+          </a:effectRef>
+          <a:fontRef idx="minor">
+            <a:schemeClr val="tx1"/>
+          </a:fontRef>
+        </p:style>
+      </p:cxnSp>
+      <p:sp>
+        <p:nvSpPr>
+          <p:cNvPr id="45" name="楕円 44">
+            <a:extLst>
+              <a:ext uri="{FF2B5EF4-FFF2-40B4-BE49-F238E27FC236}">
+                <a16:creationId xmlns:a16="http://schemas.microsoft.com/office/drawing/2014/main" id="{681328B9-2F82-AA2D-8AA5-AB91E2937952}"/>
+              </a:ext>
+            </a:extLst>
+          </p:cNvPr>
+          <p:cNvSpPr/>
+          <p:nvPr/>
+        </p:nvSpPr>
+        <p:spPr>
+          <a:xfrm>
+            <a:off x="7708900" y="5539400"/>
+            <a:ext cx="720000" cy="720000"/>
+          </a:xfrm>
+          <a:prstGeom prst="ellipse">
+            <a:avLst/>
+          </a:prstGeom>
+          <a:solidFill>
+            <a:schemeClr val="bg1"/>
+          </a:solidFill>
+          <a:ln w="38100">
+            <a:solidFill>
+              <a:srgbClr val="7030A0"/>
+            </a:solidFill>
+          </a:ln>
+        </p:spPr>
+        <p:style>
+          <a:lnRef idx="2">
+            <a:schemeClr val="dk1">
+              <a:shade val="15000"/>
+            </a:schemeClr>
+          </a:lnRef>
+          <a:fillRef idx="1">
+            <a:schemeClr val="dk1"/>
+          </a:fillRef>
+          <a:effectRef idx="0">
+            <a:schemeClr val="dk1"/>
+          </a:effectRef>
+          <a:fontRef idx="minor">
+            <a:schemeClr val="lt1"/>
+          </a:fontRef>
+        </p:style>
+        <p:txBody>
+          <a:bodyPr rtlCol="0" anchor="ctr"/>
+          <a:lstStyle/>
+          <a:p>
+            <a:pPr algn="ctr"/>
+            <a:r>
+              <a:rPr lang="en-US" altLang="ja-JP" b="1">
+                <a:ln w="0"/>
+                <a:solidFill>
+                  <a:srgbClr val="7030A0"/>
+                </a:solidFill>
+                <a:effectLst>
+                  <a:outerShdw blurRad="38100" dist="19050" dir="2700000" algn="tl" rotWithShape="0">
+                    <a:schemeClr val="dk1">
+                      <a:alpha val="40000"/>
+                    </a:schemeClr>
+                  </a:outerShdw>
+                </a:effectLst>
+              </a:rPr>
+              <a:t>B2</a:t>
+            </a:r>
+            <a:endParaRPr lang="en-US" altLang="ja-JP" b="1" dirty="0">
+              <a:ln w="0"/>
+              <a:solidFill>
+                <a:srgbClr val="7030A0"/>
+              </a:solidFill>
+              <a:effectLst>
+                <a:outerShdw blurRad="38100" dist="19050" dir="2700000" algn="tl" rotWithShape="0">
+                  <a:schemeClr val="dk1">
+                    <a:alpha val="40000"/>
+                  </a:schemeClr>
+                </a:outerShdw>
+              </a:effectLst>
+            </a:endParaRPr>
+          </a:p>
+        </p:txBody>
+      </p:sp>
+      <p:sp>
+        <p:nvSpPr>
+          <p:cNvPr id="6" name="テキスト ボックス 5">
+            <a:extLst>
+              <a:ext uri="{FF2B5EF4-FFF2-40B4-BE49-F238E27FC236}">
+                <a16:creationId xmlns:a16="http://schemas.microsoft.com/office/drawing/2014/main" id="{551D878E-9AAB-ECD3-F315-C7338E15E3FC}"/>
+              </a:ext>
+            </a:extLst>
+          </p:cNvPr>
+          <p:cNvSpPr txBox="1"/>
+          <p:nvPr/>
+        </p:nvSpPr>
+        <p:spPr>
+          <a:xfrm>
+            <a:off x="-918304" y="2323834"/>
+            <a:ext cx="1905325" cy="369332"/>
+          </a:xfrm>
+          <a:prstGeom prst="rect">
+            <a:avLst/>
+          </a:prstGeom>
+          <a:noFill/>
+        </p:spPr>
+        <p:txBody>
+          <a:bodyPr wrap="square" rtlCol="0">
+            <a:spAutoFit/>
+          </a:bodyPr>
+          <a:lstStyle/>
+          <a:p>
+            <a:r>
+              <a:rPr kumimoji="1" lang="ja-JP" altLang="en-US" b="1" dirty="0">
+                <a:solidFill>
+                  <a:srgbClr val="00B050"/>
+                </a:solidFill>
+              </a:rPr>
+              <a:t>作業ブランチ</a:t>
+            </a:r>
+          </a:p>
+        </p:txBody>
+      </p:sp>
+      <p:sp>
+        <p:nvSpPr>
+          <p:cNvPr id="9" name="テキスト ボックス 8">
+            <a:extLst>
+              <a:ext uri="{FF2B5EF4-FFF2-40B4-BE49-F238E27FC236}">
+                <a16:creationId xmlns:a16="http://schemas.microsoft.com/office/drawing/2014/main" id="{B9D49057-C877-1D88-D298-9E0DDFFE589C}"/>
+              </a:ext>
+            </a:extLst>
+          </p:cNvPr>
+          <p:cNvSpPr txBox="1"/>
+          <p:nvPr/>
+        </p:nvSpPr>
+        <p:spPr>
+          <a:xfrm>
+            <a:off x="-918304" y="5702155"/>
+            <a:ext cx="1905325" cy="369332"/>
+          </a:xfrm>
+          <a:prstGeom prst="rect">
+            <a:avLst/>
+          </a:prstGeom>
+          <a:noFill/>
+        </p:spPr>
+        <p:txBody>
+          <a:bodyPr wrap="square" rtlCol="0">
+            <a:spAutoFit/>
+          </a:bodyPr>
+          <a:lstStyle/>
+          <a:p>
+            <a:r>
+              <a:rPr kumimoji="1" lang="ja-JP" altLang="en-US" b="1" dirty="0">
+                <a:solidFill>
+                  <a:srgbClr val="00B050"/>
+                </a:solidFill>
+              </a:rPr>
+              <a:t>作業ブランチ</a:t>
+            </a:r>
+          </a:p>
+        </p:txBody>
+      </p:sp>
+      <p:sp>
+        <p:nvSpPr>
+          <p:cNvPr id="15" name="四角形: 角を丸くする 14">
+            <a:extLst>
+              <a:ext uri="{FF2B5EF4-FFF2-40B4-BE49-F238E27FC236}">
+                <a16:creationId xmlns:a16="http://schemas.microsoft.com/office/drawing/2014/main" id="{858191CF-6484-6160-6AAE-3541F5D8B190}"/>
+              </a:ext>
+            </a:extLst>
+          </p:cNvPr>
+          <p:cNvSpPr/>
+          <p:nvPr/>
+        </p:nvSpPr>
+        <p:spPr>
+          <a:xfrm>
+            <a:off x="774773" y="1968500"/>
+            <a:ext cx="10274227" cy="1080000"/>
+          </a:xfrm>
+          <a:prstGeom prst="roundRect">
+            <a:avLst/>
+          </a:prstGeom>
+          <a:noFill/>
+          <a:ln w="38100">
+            <a:solidFill>
+              <a:srgbClr val="00B050"/>
+            </a:solidFill>
+            <a:prstDash val="dash"/>
+          </a:ln>
+        </p:spPr>
+        <p:style>
+          <a:lnRef idx="2">
+            <a:schemeClr val="accent1">
+              <a:shade val="15000"/>
+            </a:schemeClr>
+          </a:lnRef>
+          <a:fillRef idx="1">
+            <a:schemeClr val="accent1"/>
+          </a:fillRef>
+          <a:effectRef idx="0">
+            <a:schemeClr val="accent1"/>
+          </a:effectRef>
+          <a:fontRef idx="minor">
+            <a:schemeClr val="lt1"/>
+          </a:fontRef>
+        </p:style>
+        <p:txBody>
+          <a:bodyPr rtlCol="0" anchor="ctr"/>
+          <a:lstStyle/>
+          <a:p>
+            <a:pPr algn="ctr"/>
+            <a:endParaRPr kumimoji="1" lang="ja-JP" altLang="en-US"/>
+          </a:p>
+        </p:txBody>
+      </p:sp>
+      <p:sp>
+        <p:nvSpPr>
+          <p:cNvPr id="16" name="四角形: 角を丸くする 15">
+            <a:extLst>
+              <a:ext uri="{FF2B5EF4-FFF2-40B4-BE49-F238E27FC236}">
+                <a16:creationId xmlns:a16="http://schemas.microsoft.com/office/drawing/2014/main" id="{1B4D245B-5431-B348-6E9F-D1677057CA75}"/>
+              </a:ext>
+            </a:extLst>
+          </p:cNvPr>
+          <p:cNvSpPr/>
+          <p:nvPr/>
+        </p:nvSpPr>
+        <p:spPr>
+          <a:xfrm>
+            <a:off x="774773" y="5359400"/>
+            <a:ext cx="10274227" cy="1080000"/>
+          </a:xfrm>
+          <a:prstGeom prst="roundRect">
+            <a:avLst/>
+          </a:prstGeom>
+          <a:noFill/>
+          <a:ln w="38100">
+            <a:solidFill>
+              <a:srgbClr val="00B050"/>
+            </a:solidFill>
+            <a:prstDash val="dash"/>
+          </a:ln>
+        </p:spPr>
+        <p:style>
+          <a:lnRef idx="2">
+            <a:schemeClr val="accent1">
+              <a:shade val="15000"/>
+            </a:schemeClr>
+          </a:lnRef>
+          <a:fillRef idx="1">
+            <a:schemeClr val="accent1"/>
+          </a:fillRef>
+          <a:effectRef idx="0">
+            <a:schemeClr val="accent1"/>
+          </a:effectRef>
+          <a:fontRef idx="minor">
+            <a:schemeClr val="lt1"/>
+          </a:fontRef>
+        </p:style>
+        <p:txBody>
+          <a:bodyPr rtlCol="0" anchor="ctr"/>
+          <a:lstStyle/>
+          <a:p>
+            <a:pPr algn="ctr"/>
+            <a:endParaRPr kumimoji="1" lang="ja-JP" altLang="en-US"/>
+          </a:p>
+        </p:txBody>
+      </p:sp>
+      <p:sp>
+        <p:nvSpPr>
+          <p:cNvPr id="11" name="爆発: 8 pt 10">
+            <a:extLst>
+              <a:ext uri="{FF2B5EF4-FFF2-40B4-BE49-F238E27FC236}">
+                <a16:creationId xmlns:a16="http://schemas.microsoft.com/office/drawing/2014/main" id="{030B99E2-5E71-2874-6A05-ED1E955BBB81}"/>
+              </a:ext>
+            </a:extLst>
+          </p:cNvPr>
+          <p:cNvSpPr/>
+          <p:nvPr/>
+        </p:nvSpPr>
+        <p:spPr>
+          <a:xfrm>
+            <a:off x="6212403" y="1120292"/>
+            <a:ext cx="3492500" cy="1222449"/>
+          </a:xfrm>
+          <a:prstGeom prst="irregularSeal1">
+            <a:avLst/>
+          </a:prstGeom>
+          <a:solidFill>
+            <a:schemeClr val="bg1"/>
+          </a:solidFill>
+          <a:ln w="38100">
+            <a:solidFill>
+              <a:srgbClr val="FFC000"/>
+            </a:solidFill>
+          </a:ln>
+        </p:spPr>
+        <p:style>
+          <a:lnRef idx="2">
+            <a:schemeClr val="accent6"/>
+          </a:lnRef>
+          <a:fillRef idx="1">
+            <a:schemeClr val="lt1"/>
+          </a:fillRef>
+          <a:effectRef idx="0">
+            <a:schemeClr val="accent6"/>
+          </a:effectRef>
+          <a:fontRef idx="minor">
+            <a:schemeClr val="dk1"/>
+          </a:fontRef>
+        </p:style>
+        <p:txBody>
+          <a:bodyPr rtlCol="0" anchor="ctr"/>
+          <a:lstStyle/>
+          <a:p>
+            <a:pPr algn="ctr"/>
+            <a:r>
+              <a:rPr kumimoji="1" lang="ja-JP" altLang="en-US" b="1" dirty="0">
+                <a:solidFill>
+                  <a:srgbClr val="FFC000"/>
+                </a:solidFill>
+              </a:rPr>
+              <a:t>コンフリクト</a:t>
+            </a:r>
+          </a:p>
+        </p:txBody>
+      </p:sp>
+      <p:sp>
+        <p:nvSpPr>
+          <p:cNvPr id="3" name="テキスト ボックス 2">
+            <a:extLst>
+              <a:ext uri="{FF2B5EF4-FFF2-40B4-BE49-F238E27FC236}">
+                <a16:creationId xmlns:a16="http://schemas.microsoft.com/office/drawing/2014/main" id="{2BD6074B-242A-19D1-F089-A67533B09B1E}"/>
+              </a:ext>
+            </a:extLst>
+          </p:cNvPr>
+          <p:cNvSpPr txBox="1"/>
+          <p:nvPr/>
+        </p:nvSpPr>
+        <p:spPr>
+          <a:xfrm>
+            <a:off x="999193" y="4055570"/>
+            <a:ext cx="737702" cy="369332"/>
+          </a:xfrm>
+          <a:prstGeom prst="rect">
+            <a:avLst/>
+          </a:prstGeom>
+          <a:noFill/>
+        </p:spPr>
+        <p:txBody>
+          <a:bodyPr wrap="none" rtlCol="0">
+            <a:spAutoFit/>
+          </a:bodyPr>
+          <a:lstStyle/>
+          <a:p>
+            <a:r>
+              <a:rPr lang="en-US" altLang="ja-JP" b="1" dirty="0"/>
+              <a:t>main</a:t>
+            </a:r>
+            <a:endParaRPr lang="ja-JP" altLang="en-US" b="1" dirty="0"/>
+          </a:p>
+        </p:txBody>
+      </p:sp>
+      <p:sp>
+        <p:nvSpPr>
+          <p:cNvPr id="4" name="テキスト ボックス 3">
+            <a:extLst>
+              <a:ext uri="{FF2B5EF4-FFF2-40B4-BE49-F238E27FC236}">
+                <a16:creationId xmlns:a16="http://schemas.microsoft.com/office/drawing/2014/main" id="{E7A23DF4-7664-1C02-E43C-48F8E3C20461}"/>
+              </a:ext>
+            </a:extLst>
+          </p:cNvPr>
+          <p:cNvSpPr txBox="1"/>
+          <p:nvPr/>
+        </p:nvSpPr>
+        <p:spPr>
+          <a:xfrm>
+            <a:off x="999193" y="664670"/>
+            <a:ext cx="737702" cy="369332"/>
+          </a:xfrm>
+          <a:prstGeom prst="rect">
+            <a:avLst/>
+          </a:prstGeom>
+          <a:noFill/>
+        </p:spPr>
+        <p:txBody>
+          <a:bodyPr wrap="none" rtlCol="0">
+            <a:spAutoFit/>
+          </a:bodyPr>
+          <a:lstStyle/>
+          <a:p>
+            <a:r>
+              <a:rPr kumimoji="1" lang="en-US" altLang="ja-JP" b="1" dirty="0"/>
+              <a:t>main</a:t>
+            </a:r>
+            <a:endParaRPr kumimoji="1" lang="ja-JP" altLang="en-US" b="1" dirty="0"/>
+          </a:p>
+        </p:txBody>
+      </p:sp>
+      <p:cxnSp>
+        <p:nvCxnSpPr>
+          <p:cNvPr id="12" name="直線コネクタ 11">
+            <a:extLst>
+              <a:ext uri="{FF2B5EF4-FFF2-40B4-BE49-F238E27FC236}">
+                <a16:creationId xmlns:a16="http://schemas.microsoft.com/office/drawing/2014/main" id="{96299E3B-1A0B-D701-D2F4-20EC7FDC21A6}"/>
+              </a:ext>
+            </a:extLst>
+          </p:cNvPr>
+          <p:cNvCxnSpPr>
+            <a:cxnSpLocks/>
+          </p:cNvCxnSpPr>
+          <p:nvPr/>
+        </p:nvCxnSpPr>
+        <p:spPr>
+          <a:xfrm flipV="1">
+            <a:off x="1822727" y="9236624"/>
+            <a:ext cx="9000000" cy="0"/>
+          </a:xfrm>
+          <a:prstGeom prst="line">
+            <a:avLst/>
+          </a:prstGeom>
+          <a:ln>
+            <a:prstDash val="dash"/>
+          </a:ln>
+        </p:spPr>
+        <p:style>
+          <a:lnRef idx="1">
+            <a:schemeClr val="accent1"/>
+          </a:lnRef>
+          <a:fillRef idx="0">
+            <a:schemeClr val="accent1"/>
+          </a:fillRef>
+          <a:effectRef idx="0">
+            <a:schemeClr val="accent1"/>
+          </a:effectRef>
+          <a:fontRef idx="minor">
+            <a:schemeClr val="tx1"/>
+          </a:fontRef>
+        </p:style>
+      </p:cxnSp>
+      <p:cxnSp>
+        <p:nvCxnSpPr>
+          <p:cNvPr id="17" name="直線コネクタ 16">
+            <a:extLst>
+              <a:ext uri="{FF2B5EF4-FFF2-40B4-BE49-F238E27FC236}">
+                <a16:creationId xmlns:a16="http://schemas.microsoft.com/office/drawing/2014/main" id="{B596A1B1-E5F9-104C-03FA-B61766C32B1F}"/>
+              </a:ext>
+            </a:extLst>
+          </p:cNvPr>
+          <p:cNvCxnSpPr>
+            <a:cxnSpLocks/>
+          </p:cNvCxnSpPr>
+          <p:nvPr/>
+        </p:nvCxnSpPr>
+        <p:spPr>
+          <a:xfrm>
+            <a:off x="1822727" y="7589147"/>
+            <a:ext cx="9000000" cy="0"/>
+          </a:xfrm>
+          <a:prstGeom prst="line">
+            <a:avLst/>
+          </a:prstGeom>
+          <a:ln>
+            <a:prstDash val="dash"/>
+          </a:ln>
+        </p:spPr>
+        <p:style>
+          <a:lnRef idx="1">
+            <a:schemeClr val="accent1"/>
+          </a:lnRef>
+          <a:fillRef idx="0">
+            <a:schemeClr val="accent1"/>
+          </a:fillRef>
+          <a:effectRef idx="0">
+            <a:schemeClr val="accent1"/>
+          </a:effectRef>
+          <a:fontRef idx="minor">
+            <a:schemeClr val="tx1"/>
+          </a:fontRef>
+        </p:style>
+      </p:cxnSp>
+      <p:sp>
+        <p:nvSpPr>
+          <p:cNvPr id="28" name="楕円 27">
+            <a:extLst>
+              <a:ext uri="{FF2B5EF4-FFF2-40B4-BE49-F238E27FC236}">
+                <a16:creationId xmlns:a16="http://schemas.microsoft.com/office/drawing/2014/main" id="{E6E24BE5-A2B8-42FE-543C-249098ADC465}"/>
+              </a:ext>
+            </a:extLst>
+          </p:cNvPr>
+          <p:cNvSpPr/>
+          <p:nvPr/>
+        </p:nvSpPr>
+        <p:spPr>
+          <a:xfrm>
+            <a:off x="5594933" y="8893175"/>
+            <a:ext cx="720000" cy="720000"/>
+          </a:xfrm>
+          <a:prstGeom prst="ellipse">
+            <a:avLst/>
+          </a:prstGeom>
+          <a:solidFill>
+            <a:schemeClr val="bg1"/>
+          </a:solidFill>
+          <a:ln w="38100">
+            <a:solidFill>
+              <a:srgbClr val="FF0000"/>
+            </a:solidFill>
+          </a:ln>
+        </p:spPr>
+        <p:style>
+          <a:lnRef idx="2">
+            <a:schemeClr val="dk1">
+              <a:shade val="15000"/>
+            </a:schemeClr>
+          </a:lnRef>
+          <a:fillRef idx="1">
+            <a:schemeClr val="dk1"/>
+          </a:fillRef>
+          <a:effectRef idx="0">
+            <a:schemeClr val="dk1"/>
+          </a:effectRef>
+          <a:fontRef idx="minor">
+            <a:schemeClr val="lt1"/>
+          </a:fontRef>
+        </p:style>
+        <p:txBody>
+          <a:bodyPr rtlCol="0" anchor="ctr"/>
+          <a:lstStyle/>
+          <a:p>
+            <a:pPr algn="ctr"/>
+            <a:r>
+              <a:rPr lang="en-US" altLang="ja-JP" b="1">
+                <a:ln w="0"/>
+                <a:solidFill>
+                  <a:srgbClr val="FF0000"/>
+                </a:solidFill>
+                <a:effectLst>
+                  <a:outerShdw blurRad="38100" dist="19050" dir="2700000" algn="tl" rotWithShape="0">
+                    <a:schemeClr val="dk1">
+                      <a:alpha val="40000"/>
+                    </a:schemeClr>
+                  </a:outerShdw>
+                </a:effectLst>
+              </a:rPr>
+              <a:t>B1</a:t>
+            </a:r>
+            <a:endParaRPr lang="en-US" altLang="ja-JP" b="1" dirty="0">
+              <a:ln w="0"/>
+              <a:solidFill>
+                <a:srgbClr val="FF0000"/>
+              </a:solidFill>
+              <a:effectLst>
+                <a:outerShdw blurRad="38100" dist="19050" dir="2700000" algn="tl" rotWithShape="0">
+                  <a:schemeClr val="dk1">
+                    <a:alpha val="40000"/>
+                  </a:schemeClr>
+                </a:outerShdw>
+              </a:effectLst>
+            </a:endParaRPr>
+          </a:p>
+        </p:txBody>
+      </p:sp>
+      <p:sp>
+        <p:nvSpPr>
+          <p:cNvPr id="37" name="楕円 36">
+            <a:extLst>
+              <a:ext uri="{FF2B5EF4-FFF2-40B4-BE49-F238E27FC236}">
+                <a16:creationId xmlns:a16="http://schemas.microsoft.com/office/drawing/2014/main" id="{AE795FC1-3183-B0C3-0560-4AAC145BE0F4}"/>
+              </a:ext>
+            </a:extLst>
+          </p:cNvPr>
+          <p:cNvSpPr/>
+          <p:nvPr/>
+        </p:nvSpPr>
+        <p:spPr>
+          <a:xfrm>
+            <a:off x="3338985" y="7229147"/>
+            <a:ext cx="720000" cy="720000"/>
+          </a:xfrm>
+          <a:prstGeom prst="ellipse">
+            <a:avLst/>
+          </a:prstGeom>
+          <a:solidFill>
+            <a:schemeClr val="bg1"/>
+          </a:solidFill>
+          <a:ln w="38100"/>
+        </p:spPr>
+        <p:style>
+          <a:lnRef idx="2">
+            <a:schemeClr val="dk1">
+              <a:shade val="15000"/>
+            </a:schemeClr>
+          </a:lnRef>
+          <a:fillRef idx="1">
+            <a:schemeClr val="dk1"/>
+          </a:fillRef>
+          <a:effectRef idx="0">
+            <a:schemeClr val="dk1"/>
+          </a:effectRef>
+          <a:fontRef idx="minor">
+            <a:schemeClr val="lt1"/>
+          </a:fontRef>
+        </p:style>
+        <p:txBody>
+          <a:bodyPr rtlCol="0" anchor="ctr"/>
+          <a:lstStyle/>
+          <a:p>
+            <a:pPr algn="ctr"/>
+            <a:r>
+              <a:rPr lang="en-US" altLang="ja-JP" b="1" dirty="0">
+                <a:solidFill>
+                  <a:schemeClr val="tx1"/>
+                </a:solidFill>
+              </a:rPr>
+              <a:t>A1</a:t>
+            </a:r>
+            <a:endParaRPr lang="ja-JP" altLang="en-US" b="1" dirty="0">
+              <a:solidFill>
+                <a:schemeClr val="tx1"/>
+              </a:solidFill>
+            </a:endParaRPr>
+          </a:p>
+        </p:txBody>
+      </p:sp>
+      <p:cxnSp>
+        <p:nvCxnSpPr>
+          <p:cNvPr id="38" name="直線矢印コネクタ 37">
+            <a:extLst>
+              <a:ext uri="{FF2B5EF4-FFF2-40B4-BE49-F238E27FC236}">
+                <a16:creationId xmlns:a16="http://schemas.microsoft.com/office/drawing/2014/main" id="{267CBD82-3ABA-5CB0-DFFD-C39B46F1BF42}"/>
+              </a:ext>
+            </a:extLst>
+          </p:cNvPr>
+          <p:cNvCxnSpPr>
+            <a:cxnSpLocks/>
+            <a:stCxn id="37" idx="4"/>
+            <a:endCxn id="28" idx="2"/>
+          </p:cNvCxnSpPr>
+          <p:nvPr/>
+        </p:nvCxnSpPr>
+        <p:spPr>
+          <a:xfrm>
+            <a:off x="3698985" y="7949147"/>
+            <a:ext cx="1895948" cy="1304028"/>
+          </a:xfrm>
+          <a:prstGeom prst="straightConnector1">
+            <a:avLst/>
+          </a:prstGeom>
+          <a:ln w="38100">
+            <a:tailEnd type="triangle"/>
+          </a:ln>
+        </p:spPr>
+        <p:style>
+          <a:lnRef idx="1">
+            <a:schemeClr val="dk1"/>
+          </a:lnRef>
+          <a:fillRef idx="0">
+            <a:schemeClr val="dk1"/>
+          </a:fillRef>
+          <a:effectRef idx="0">
+            <a:schemeClr val="dk1"/>
+          </a:effectRef>
+          <a:fontRef idx="minor">
+            <a:schemeClr val="tx1"/>
+          </a:fontRef>
+        </p:style>
+      </p:cxnSp>
+      <p:cxnSp>
+        <p:nvCxnSpPr>
+          <p:cNvPr id="39" name="直線矢印コネクタ 38">
+            <a:extLst>
+              <a:ext uri="{FF2B5EF4-FFF2-40B4-BE49-F238E27FC236}">
+                <a16:creationId xmlns:a16="http://schemas.microsoft.com/office/drawing/2014/main" id="{FEC13AD7-9D36-3A05-5E2A-451E8FE4A71E}"/>
+              </a:ext>
+            </a:extLst>
+          </p:cNvPr>
+          <p:cNvCxnSpPr>
+            <a:cxnSpLocks/>
+          </p:cNvCxnSpPr>
+          <p:nvPr/>
+        </p:nvCxnSpPr>
+        <p:spPr>
+          <a:xfrm>
+            <a:off x="2208685" y="7583111"/>
+            <a:ext cx="1130300" cy="12072"/>
+          </a:xfrm>
+          <a:prstGeom prst="straightConnector1">
+            <a:avLst/>
+          </a:prstGeom>
+          <a:ln w="38100">
+            <a:tailEnd type="triangle"/>
+          </a:ln>
+        </p:spPr>
+        <p:style>
+          <a:lnRef idx="1">
+            <a:schemeClr val="dk1"/>
+          </a:lnRef>
+          <a:fillRef idx="0">
+            <a:schemeClr val="dk1"/>
+          </a:fillRef>
+          <a:effectRef idx="0">
+            <a:schemeClr val="dk1"/>
+          </a:effectRef>
+          <a:fontRef idx="minor">
+            <a:schemeClr val="tx1"/>
+          </a:fontRef>
+        </p:style>
+      </p:cxnSp>
+      <p:cxnSp>
+        <p:nvCxnSpPr>
+          <p:cNvPr id="46" name="直線矢印コネクタ 45">
+            <a:extLst>
+              <a:ext uri="{FF2B5EF4-FFF2-40B4-BE49-F238E27FC236}">
+                <a16:creationId xmlns:a16="http://schemas.microsoft.com/office/drawing/2014/main" id="{EE353364-9468-0621-3440-7AB1DC8014EA}"/>
+              </a:ext>
+            </a:extLst>
+          </p:cNvPr>
+          <p:cNvCxnSpPr>
+            <a:cxnSpLocks/>
+          </p:cNvCxnSpPr>
+          <p:nvPr/>
+        </p:nvCxnSpPr>
+        <p:spPr>
+          <a:xfrm flipV="1">
+            <a:off x="4058985" y="7585187"/>
+            <a:ext cx="1535948" cy="7921"/>
+          </a:xfrm>
+          <a:prstGeom prst="straightConnector1">
+            <a:avLst/>
+          </a:prstGeom>
+          <a:ln w="38100">
+            <a:tailEnd type="triangle"/>
+          </a:ln>
+        </p:spPr>
+        <p:style>
+          <a:lnRef idx="1">
+            <a:schemeClr val="dk1"/>
+          </a:lnRef>
+          <a:fillRef idx="0">
+            <a:schemeClr val="dk1"/>
+          </a:fillRef>
+          <a:effectRef idx="0">
+            <a:schemeClr val="dk1"/>
+          </a:effectRef>
+          <a:fontRef idx="minor">
+            <a:schemeClr val="tx1"/>
+          </a:fontRef>
+        </p:style>
+      </p:cxnSp>
+      <p:sp>
+        <p:nvSpPr>
+          <p:cNvPr id="47" name="楕円 46">
+            <a:extLst>
+              <a:ext uri="{FF2B5EF4-FFF2-40B4-BE49-F238E27FC236}">
+                <a16:creationId xmlns:a16="http://schemas.microsoft.com/office/drawing/2014/main" id="{D6DB1CC6-FEC7-336B-4FDA-1D8D1E605302}"/>
+              </a:ext>
+            </a:extLst>
+          </p:cNvPr>
+          <p:cNvSpPr/>
+          <p:nvPr/>
+        </p:nvSpPr>
+        <p:spPr>
+          <a:xfrm>
+            <a:off x="5594933" y="7229147"/>
+            <a:ext cx="720000" cy="720000"/>
+          </a:xfrm>
+          <a:prstGeom prst="ellipse">
+            <a:avLst/>
+          </a:prstGeom>
+          <a:solidFill>
+            <a:schemeClr val="bg1"/>
+          </a:solidFill>
+          <a:ln w="38100">
+            <a:solidFill>
+              <a:schemeClr val="accent1"/>
+            </a:solidFill>
+          </a:ln>
+        </p:spPr>
+        <p:style>
+          <a:lnRef idx="2">
+            <a:schemeClr val="dk1">
+              <a:shade val="15000"/>
+            </a:schemeClr>
+          </a:lnRef>
+          <a:fillRef idx="1">
+            <a:schemeClr val="dk1"/>
+          </a:fillRef>
+          <a:effectRef idx="0">
+            <a:schemeClr val="dk1"/>
+          </a:effectRef>
+          <a:fontRef idx="minor">
+            <a:schemeClr val="lt1"/>
+          </a:fontRef>
+        </p:style>
+        <p:txBody>
+          <a:bodyPr rtlCol="0" anchor="ctr"/>
+          <a:lstStyle/>
+          <a:p>
+            <a:pPr algn="ctr"/>
+            <a:r>
+              <a:rPr lang="en-US" altLang="ja-JP" b="1">
+                <a:ln w="0"/>
+                <a:solidFill>
+                  <a:srgbClr val="0070C0"/>
+                </a:solidFill>
+                <a:effectLst>
+                  <a:outerShdw blurRad="38100" dist="19050" dir="2700000" algn="tl" rotWithShape="0">
+                    <a:schemeClr val="dk1">
+                      <a:alpha val="40000"/>
+                    </a:schemeClr>
+                  </a:outerShdw>
+                </a:effectLst>
+              </a:rPr>
+              <a:t>A2</a:t>
+            </a:r>
+            <a:endParaRPr lang="en-US" altLang="ja-JP" b="1" dirty="0">
+              <a:ln w="0"/>
+              <a:solidFill>
+                <a:srgbClr val="0070C0"/>
+              </a:solidFill>
+              <a:effectLst>
+                <a:outerShdw blurRad="38100" dist="19050" dir="2700000" algn="tl" rotWithShape="0">
+                  <a:schemeClr val="dk1">
+                    <a:alpha val="40000"/>
+                  </a:schemeClr>
+                </a:outerShdw>
+              </a:effectLst>
+            </a:endParaRPr>
+          </a:p>
+        </p:txBody>
+      </p:sp>
+      <p:sp>
+        <p:nvSpPr>
+          <p:cNvPr id="48" name="テキスト ボックス 47">
+            <a:extLst>
+              <a:ext uri="{FF2B5EF4-FFF2-40B4-BE49-F238E27FC236}">
+                <a16:creationId xmlns:a16="http://schemas.microsoft.com/office/drawing/2014/main" id="{D263861A-136E-884F-BE2F-0D45B03E2771}"/>
+              </a:ext>
+            </a:extLst>
+          </p:cNvPr>
+          <p:cNvSpPr txBox="1"/>
+          <p:nvPr/>
+        </p:nvSpPr>
+        <p:spPr>
+          <a:xfrm>
+            <a:off x="807634" y="9069841"/>
+            <a:ext cx="1120820" cy="369332"/>
+          </a:xfrm>
+          <a:prstGeom prst="rect">
+            <a:avLst/>
+          </a:prstGeom>
+          <a:noFill/>
+        </p:spPr>
+        <p:txBody>
+          <a:bodyPr wrap="none" rtlCol="0">
+            <a:spAutoFit/>
+          </a:bodyPr>
+          <a:lstStyle/>
+          <a:p>
+            <a:r>
+              <a:rPr lang="en-US" altLang="ja-JP" b="1" dirty="0" err="1"/>
+              <a:t>branchX</a:t>
+            </a:r>
+            <a:endParaRPr kumimoji="1" lang="ja-JP" altLang="en-US" b="1" dirty="0"/>
+          </a:p>
+        </p:txBody>
+      </p:sp>
+      <p:cxnSp>
+        <p:nvCxnSpPr>
+          <p:cNvPr id="49" name="直線矢印コネクタ 48">
+            <a:extLst>
+              <a:ext uri="{FF2B5EF4-FFF2-40B4-BE49-F238E27FC236}">
+                <a16:creationId xmlns:a16="http://schemas.microsoft.com/office/drawing/2014/main" id="{B11EE254-563B-F24C-60F0-17341810738F}"/>
+              </a:ext>
+            </a:extLst>
+          </p:cNvPr>
+          <p:cNvCxnSpPr>
+            <a:cxnSpLocks/>
+          </p:cNvCxnSpPr>
+          <p:nvPr/>
+        </p:nvCxnSpPr>
+        <p:spPr>
+          <a:xfrm flipV="1">
+            <a:off x="6322727" y="9248509"/>
+            <a:ext cx="1400594" cy="9333"/>
+          </a:xfrm>
+          <a:prstGeom prst="straightConnector1">
+            <a:avLst/>
+          </a:prstGeom>
+          <a:ln w="38100">
+            <a:solidFill>
+              <a:srgbClr val="7030A0"/>
+            </a:solidFill>
+            <a:tailEnd type="triangle"/>
+          </a:ln>
+        </p:spPr>
+        <p:style>
+          <a:lnRef idx="1">
+            <a:schemeClr val="dk1"/>
+          </a:lnRef>
+          <a:fillRef idx="0">
+            <a:schemeClr val="dk1"/>
+          </a:fillRef>
+          <a:effectRef idx="0">
+            <a:schemeClr val="dk1"/>
+          </a:effectRef>
+          <a:fontRef idx="minor">
+            <a:schemeClr val="tx1"/>
+          </a:fontRef>
+        </p:style>
+      </p:cxnSp>
+      <p:sp>
+        <p:nvSpPr>
+          <p:cNvPr id="50" name="楕円 49">
+            <a:extLst>
+              <a:ext uri="{FF2B5EF4-FFF2-40B4-BE49-F238E27FC236}">
+                <a16:creationId xmlns:a16="http://schemas.microsoft.com/office/drawing/2014/main" id="{49EF939A-63F4-8867-812D-3C71483689F1}"/>
+              </a:ext>
+            </a:extLst>
+          </p:cNvPr>
+          <p:cNvSpPr/>
+          <p:nvPr/>
+        </p:nvSpPr>
+        <p:spPr>
+          <a:xfrm>
+            <a:off x="7715527" y="8893175"/>
+            <a:ext cx="720000" cy="720000"/>
+          </a:xfrm>
+          <a:prstGeom prst="ellipse">
+            <a:avLst/>
+          </a:prstGeom>
+          <a:solidFill>
+            <a:schemeClr val="bg1"/>
+          </a:solidFill>
+          <a:ln w="38100">
+            <a:solidFill>
+              <a:srgbClr val="7030A0"/>
+            </a:solidFill>
+          </a:ln>
+        </p:spPr>
+        <p:style>
+          <a:lnRef idx="2">
+            <a:schemeClr val="dk1">
+              <a:shade val="15000"/>
+            </a:schemeClr>
+          </a:lnRef>
+          <a:fillRef idx="1">
+            <a:schemeClr val="dk1"/>
+          </a:fillRef>
+          <a:effectRef idx="0">
+            <a:schemeClr val="dk1"/>
+          </a:effectRef>
+          <a:fontRef idx="minor">
+            <a:schemeClr val="lt1"/>
+          </a:fontRef>
+        </p:style>
+        <p:txBody>
+          <a:bodyPr rtlCol="0" anchor="ctr"/>
+          <a:lstStyle/>
+          <a:p>
+            <a:pPr algn="ctr"/>
+            <a:r>
+              <a:rPr lang="en-US" altLang="ja-JP" b="1">
+                <a:ln w="0"/>
+                <a:solidFill>
+                  <a:srgbClr val="7030A0"/>
+                </a:solidFill>
+                <a:effectLst>
+                  <a:outerShdw blurRad="38100" dist="19050" dir="2700000" algn="tl" rotWithShape="0">
+                    <a:schemeClr val="dk1">
+                      <a:alpha val="40000"/>
+                    </a:schemeClr>
+                  </a:outerShdw>
+                </a:effectLst>
+              </a:rPr>
+              <a:t>B2</a:t>
+            </a:r>
+            <a:endParaRPr lang="en-US" altLang="ja-JP" b="1" dirty="0">
+              <a:ln w="0"/>
+              <a:solidFill>
+                <a:srgbClr val="7030A0"/>
+              </a:solidFill>
+              <a:effectLst>
+                <a:outerShdw blurRad="38100" dist="19050" dir="2700000" algn="tl" rotWithShape="0">
+                  <a:schemeClr val="dk1">
+                    <a:alpha val="40000"/>
+                  </a:schemeClr>
+                </a:outerShdw>
+              </a:effectLst>
+            </a:endParaRPr>
+          </a:p>
+        </p:txBody>
+      </p:sp>
+      <p:sp>
+        <p:nvSpPr>
+          <p:cNvPr id="51" name="テキスト ボックス 50">
+            <a:extLst>
+              <a:ext uri="{FF2B5EF4-FFF2-40B4-BE49-F238E27FC236}">
+                <a16:creationId xmlns:a16="http://schemas.microsoft.com/office/drawing/2014/main" id="{554DE670-003B-77DC-26B3-47A55233752C}"/>
+              </a:ext>
+            </a:extLst>
+          </p:cNvPr>
+          <p:cNvSpPr txBox="1"/>
+          <p:nvPr/>
+        </p:nvSpPr>
+        <p:spPr>
+          <a:xfrm>
+            <a:off x="-918304" y="9048326"/>
+            <a:ext cx="1905325" cy="369332"/>
+          </a:xfrm>
+          <a:prstGeom prst="rect">
+            <a:avLst/>
+          </a:prstGeom>
+          <a:noFill/>
+        </p:spPr>
+        <p:txBody>
+          <a:bodyPr wrap="square" rtlCol="0">
+            <a:spAutoFit/>
+          </a:bodyPr>
+          <a:lstStyle/>
+          <a:p>
+            <a:r>
+              <a:rPr kumimoji="1" lang="ja-JP" altLang="en-US" b="1" dirty="0">
+                <a:solidFill>
+                  <a:srgbClr val="00B050"/>
+                </a:solidFill>
+              </a:rPr>
+              <a:t>作業ブランチ</a:t>
+            </a:r>
+          </a:p>
+        </p:txBody>
+      </p:sp>
+      <p:sp>
+        <p:nvSpPr>
+          <p:cNvPr id="52" name="四角形: 角を丸くする 51">
+            <a:extLst>
+              <a:ext uri="{FF2B5EF4-FFF2-40B4-BE49-F238E27FC236}">
+                <a16:creationId xmlns:a16="http://schemas.microsoft.com/office/drawing/2014/main" id="{19D545E2-AEF2-F0C8-427F-A86E92681785}"/>
+              </a:ext>
+            </a:extLst>
+          </p:cNvPr>
+          <p:cNvSpPr/>
+          <p:nvPr/>
+        </p:nvSpPr>
+        <p:spPr>
+          <a:xfrm>
+            <a:off x="774773" y="8705571"/>
+            <a:ext cx="10274227" cy="1080000"/>
+          </a:xfrm>
+          <a:prstGeom prst="roundRect">
+            <a:avLst/>
+          </a:prstGeom>
+          <a:noFill/>
+          <a:ln w="38100">
+            <a:solidFill>
+              <a:srgbClr val="00B050"/>
+            </a:solidFill>
+            <a:prstDash val="dash"/>
+          </a:ln>
+        </p:spPr>
+        <p:style>
+          <a:lnRef idx="2">
+            <a:schemeClr val="accent1">
+              <a:shade val="15000"/>
+            </a:schemeClr>
+          </a:lnRef>
+          <a:fillRef idx="1">
+            <a:schemeClr val="accent1"/>
+          </a:fillRef>
+          <a:effectRef idx="0">
+            <a:schemeClr val="accent1"/>
+          </a:effectRef>
+          <a:fontRef idx="minor">
+            <a:schemeClr val="lt1"/>
+          </a:fontRef>
+        </p:style>
+        <p:txBody>
+          <a:bodyPr rtlCol="0" anchor="ctr"/>
+          <a:lstStyle/>
+          <a:p>
+            <a:pPr algn="ctr"/>
+            <a:endParaRPr kumimoji="1" lang="ja-JP" altLang="en-US"/>
+          </a:p>
+        </p:txBody>
+      </p:sp>
+      <p:sp>
+        <p:nvSpPr>
+          <p:cNvPr id="53" name="テキスト ボックス 52">
+            <a:extLst>
+              <a:ext uri="{FF2B5EF4-FFF2-40B4-BE49-F238E27FC236}">
+                <a16:creationId xmlns:a16="http://schemas.microsoft.com/office/drawing/2014/main" id="{BA06EF55-3837-3EA9-AE6F-2236B628B90A}"/>
+              </a:ext>
+            </a:extLst>
+          </p:cNvPr>
+          <p:cNvSpPr txBox="1"/>
+          <p:nvPr/>
+        </p:nvSpPr>
+        <p:spPr>
+          <a:xfrm>
+            <a:off x="999193" y="7404481"/>
+            <a:ext cx="737702" cy="369332"/>
+          </a:xfrm>
+          <a:prstGeom prst="rect">
+            <a:avLst/>
+          </a:prstGeom>
+          <a:noFill/>
+        </p:spPr>
+        <p:txBody>
+          <a:bodyPr wrap="none" rtlCol="0">
+            <a:spAutoFit/>
+          </a:bodyPr>
+          <a:lstStyle/>
+          <a:p>
+            <a:r>
+              <a:rPr lang="en-US" altLang="ja-JP" b="1" dirty="0"/>
+              <a:t>main</a:t>
+            </a:r>
+            <a:endParaRPr lang="ja-JP" altLang="en-US" b="1" dirty="0"/>
+          </a:p>
+        </p:txBody>
+      </p:sp>
+      <p:sp>
+        <p:nvSpPr>
+          <p:cNvPr id="54" name="矢印: 右 53">
+            <a:extLst>
+              <a:ext uri="{FF2B5EF4-FFF2-40B4-BE49-F238E27FC236}">
+                <a16:creationId xmlns:a16="http://schemas.microsoft.com/office/drawing/2014/main" id="{B11B559F-7BAF-66E9-6F53-57913CC9DE4F}"/>
+              </a:ext>
+            </a:extLst>
+          </p:cNvPr>
+          <p:cNvSpPr/>
+          <p:nvPr/>
+        </p:nvSpPr>
+        <p:spPr>
+          <a:xfrm rot="5400000">
+            <a:off x="5704324" y="6509979"/>
+            <a:ext cx="468086" cy="677228"/>
+          </a:xfrm>
+          <a:prstGeom prst="rightArrow">
+            <a:avLst/>
+          </a:prstGeom>
+        </p:spPr>
+        <p:style>
+          <a:lnRef idx="2">
+            <a:schemeClr val="dk1">
+              <a:shade val="15000"/>
+            </a:schemeClr>
+          </a:lnRef>
+          <a:fillRef idx="1">
+            <a:schemeClr val="dk1"/>
+          </a:fillRef>
+          <a:effectRef idx="0">
+            <a:schemeClr val="dk1"/>
+          </a:effectRef>
+          <a:fontRef idx="minor">
+            <a:schemeClr val="lt1"/>
+          </a:fontRef>
+        </p:style>
+        <p:txBody>
+          <a:bodyPr rtlCol="0" anchor="ctr"/>
+          <a:lstStyle/>
+          <a:p>
+            <a:pPr algn="ctr"/>
+            <a:endParaRPr kumimoji="1" lang="ja-JP" altLang="en-US"/>
+          </a:p>
+        </p:txBody>
+      </p:sp>
+      <p:sp>
+        <p:nvSpPr>
+          <p:cNvPr id="55" name="楕円 54">
+            <a:extLst>
+              <a:ext uri="{FF2B5EF4-FFF2-40B4-BE49-F238E27FC236}">
+                <a16:creationId xmlns:a16="http://schemas.microsoft.com/office/drawing/2014/main" id="{CA817454-1894-8DBC-398C-FC4286D84C84}"/>
+              </a:ext>
+            </a:extLst>
+          </p:cNvPr>
+          <p:cNvSpPr/>
+          <p:nvPr/>
+        </p:nvSpPr>
+        <p:spPr>
+          <a:xfrm>
+            <a:off x="9171990" y="7229147"/>
+            <a:ext cx="720000" cy="720000"/>
+          </a:xfrm>
+          <a:prstGeom prst="ellipse">
+            <a:avLst/>
+          </a:prstGeom>
+          <a:solidFill>
+            <a:schemeClr val="bg1"/>
+          </a:solidFill>
+          <a:ln w="38100">
+            <a:solidFill>
+              <a:schemeClr val="tx1"/>
+            </a:solidFill>
+          </a:ln>
+        </p:spPr>
+        <p:style>
+          <a:lnRef idx="2">
+            <a:schemeClr val="dk1">
+              <a:shade val="15000"/>
+            </a:schemeClr>
+          </a:lnRef>
+          <a:fillRef idx="1">
+            <a:schemeClr val="dk1"/>
+          </a:fillRef>
+          <a:effectRef idx="0">
+            <a:schemeClr val="dk1"/>
+          </a:effectRef>
+          <a:fontRef idx="minor">
+            <a:schemeClr val="lt1"/>
+          </a:fontRef>
+        </p:style>
+        <p:txBody>
+          <a:bodyPr rtlCol="0" anchor="ctr"/>
+          <a:lstStyle/>
+          <a:p>
+            <a:pPr algn="ctr"/>
+            <a:r>
+              <a:rPr lang="en-US" altLang="ja-JP" b="1" dirty="0">
+                <a:ln w="0"/>
+                <a:solidFill>
+                  <a:schemeClr val="tx1"/>
+                </a:solidFill>
+                <a:effectLst>
+                  <a:outerShdw blurRad="38100" dist="19050" dir="2700000" algn="tl" rotWithShape="0">
+                    <a:schemeClr val="dk1">
+                      <a:alpha val="40000"/>
+                    </a:schemeClr>
+                  </a:outerShdw>
+                </a:effectLst>
+              </a:rPr>
+              <a:t>A3</a:t>
+            </a:r>
+          </a:p>
+        </p:txBody>
+      </p:sp>
+      <p:cxnSp>
+        <p:nvCxnSpPr>
+          <p:cNvPr id="56" name="直線矢印コネクタ 55">
+            <a:extLst>
+              <a:ext uri="{FF2B5EF4-FFF2-40B4-BE49-F238E27FC236}">
+                <a16:creationId xmlns:a16="http://schemas.microsoft.com/office/drawing/2014/main" id="{23F829DA-D516-BA07-2DCF-137EE5CF16D7}"/>
+              </a:ext>
+            </a:extLst>
+          </p:cNvPr>
+          <p:cNvCxnSpPr>
+            <a:cxnSpLocks/>
+            <a:stCxn id="50" idx="6"/>
+            <a:endCxn id="55" idx="4"/>
+          </p:cNvCxnSpPr>
+          <p:nvPr/>
+        </p:nvCxnSpPr>
+        <p:spPr>
+          <a:xfrm flipV="1">
+            <a:off x="8435527" y="7949147"/>
+            <a:ext cx="1096463" cy="1304028"/>
+          </a:xfrm>
+          <a:prstGeom prst="straightConnector1">
+            <a:avLst/>
+          </a:prstGeom>
+          <a:ln w="38100">
+            <a:solidFill>
+              <a:schemeClr val="tx1"/>
+            </a:solidFill>
+            <a:tailEnd type="triangle"/>
+          </a:ln>
+        </p:spPr>
+        <p:style>
+          <a:lnRef idx="1">
+            <a:schemeClr val="dk1"/>
+          </a:lnRef>
+          <a:fillRef idx="0">
+            <a:schemeClr val="dk1"/>
+          </a:fillRef>
+          <a:effectRef idx="0">
+            <a:schemeClr val="dk1"/>
+          </a:effectRef>
+          <a:fontRef idx="minor">
+            <a:schemeClr val="tx1"/>
+          </a:fontRef>
+        </p:style>
+      </p:cxnSp>
+      <p:cxnSp>
+        <p:nvCxnSpPr>
+          <p:cNvPr id="59" name="直線矢印コネクタ 58">
+            <a:extLst>
+              <a:ext uri="{FF2B5EF4-FFF2-40B4-BE49-F238E27FC236}">
+                <a16:creationId xmlns:a16="http://schemas.microsoft.com/office/drawing/2014/main" id="{CD76CE7A-87DC-1F38-9B35-DFCB339DA7BE}"/>
+              </a:ext>
+            </a:extLst>
+          </p:cNvPr>
+          <p:cNvCxnSpPr>
+            <a:cxnSpLocks/>
+          </p:cNvCxnSpPr>
+          <p:nvPr/>
+        </p:nvCxnSpPr>
+        <p:spPr>
+          <a:xfrm>
+            <a:off x="6314933" y="7589147"/>
+            <a:ext cx="2857057" cy="0"/>
+          </a:xfrm>
+          <a:prstGeom prst="straightConnector1">
+            <a:avLst/>
+          </a:prstGeom>
+          <a:ln w="38100">
+            <a:tailEnd type="triangle"/>
+          </a:ln>
+        </p:spPr>
+        <p:style>
+          <a:lnRef idx="1">
+            <a:schemeClr val="dk1"/>
+          </a:lnRef>
+          <a:fillRef idx="0">
+            <a:schemeClr val="dk1"/>
+          </a:fillRef>
+          <a:effectRef idx="0">
+            <a:schemeClr val="dk1"/>
+          </a:effectRef>
+          <a:fontRef idx="minor">
+            <a:schemeClr val="tx1"/>
+          </a:fontRef>
+        </p:style>
+      </p:cxnSp>
+    </p:spTree>
+    <p:extLst>
+      <p:ext uri="{BB962C8B-B14F-4D97-AF65-F5344CB8AC3E}">
+        <p14:creationId xmlns:p14="http://schemas.microsoft.com/office/powerpoint/2010/main" val="3598622837"/>
+      </p:ext>
+    </p:extLst>
+  </p:cSld>
+  <p:clrMapOvr>
+    <a:masterClrMapping/>
+  </p:clrMapOvr>
+</p:sld>
+</file>
+
+<file path=ppt/slides/slide51.xml><?xml version="1.0" encoding="utf-8"?>
+<p:sld xmlns:a="http://schemas.openxmlformats.org/drawingml/2006/main" xmlns:r="http://schemas.openxmlformats.org/officeDocument/2006/relationships" xmlns:p="http://schemas.openxmlformats.org/presentationml/2006/main">
+  <p:cSld>
+    <p:spTree>
+      <p:nvGrpSpPr>
+        <p:cNvPr id="1" name="">
+          <a:extLst>
+            <a:ext uri="{FF2B5EF4-FFF2-40B4-BE49-F238E27FC236}">
               <a16:creationId xmlns:a16="http://schemas.microsoft.com/office/drawing/2014/main" id="{5AAFAE8D-F7F2-51C2-A616-2DCC53CF70FF}"/>
             </a:ext>
           </a:extLst>
@@ -40436,7 +41505,7 @@
 </p:sld>
 </file>
 
-<file path=ppt/slides/slide51.xml><?xml version="1.0" encoding="utf-8"?>
+<file path=ppt/slides/slide52.xml><?xml version="1.0" encoding="utf-8"?>
 <p:sld xmlns:a="http://schemas.openxmlformats.org/drawingml/2006/main" xmlns:r="http://schemas.openxmlformats.org/officeDocument/2006/relationships" xmlns:p="http://schemas.openxmlformats.org/presentationml/2006/main">
   <p:cSld>
     <p:spTree>
@@ -40519,7 +41588,7 @@
 </p:sld>
 </file>
 
-<file path=ppt/slides/slide52.xml><?xml version="1.0" encoding="utf-8"?>
+<file path=ppt/slides/slide53.xml><?xml version="1.0" encoding="utf-8"?>
 <p:sld xmlns:a="http://schemas.openxmlformats.org/drawingml/2006/main" xmlns:r="http://schemas.openxmlformats.org/officeDocument/2006/relationships" xmlns:p="http://schemas.openxmlformats.org/presentationml/2006/main">
   <p:cSld>
     <p:spTree>
@@ -40695,7 +41764,7 @@
 </p:sld>
 </file>
 
-<file path=ppt/slides/slide53.xml><?xml version="1.0" encoding="utf-8"?>
+<file path=ppt/slides/slide54.xml><?xml version="1.0" encoding="utf-8"?>
 <p:sld xmlns:a="http://schemas.openxmlformats.org/drawingml/2006/main" xmlns:r="http://schemas.openxmlformats.org/officeDocument/2006/relationships" xmlns:p="http://schemas.openxmlformats.org/presentationml/2006/main">
   <p:cSld>
     <p:spTree>
@@ -40767,7 +41836,7 @@
 </p:sld>
 </file>
 
-<file path=ppt/slides/slide54.xml><?xml version="1.0" encoding="utf-8"?>
+<file path=ppt/slides/slide55.xml><?xml version="1.0" encoding="utf-8"?>
 <p:sld xmlns:a="http://schemas.openxmlformats.org/drawingml/2006/main" xmlns:r="http://schemas.openxmlformats.org/officeDocument/2006/relationships" xmlns:p="http://schemas.openxmlformats.org/presentationml/2006/main">
   <p:cSld>
     <p:spTree>
@@ -40939,7 +42008,7 @@
 </p:sld>
 </file>
 
-<file path=ppt/slides/slide55.xml><?xml version="1.0" encoding="utf-8"?>
+<file path=ppt/slides/slide56.xml><?xml version="1.0" encoding="utf-8"?>
 <p:sld xmlns:a="http://schemas.openxmlformats.org/drawingml/2006/main" xmlns:r="http://schemas.openxmlformats.org/officeDocument/2006/relationships" xmlns:p="http://schemas.openxmlformats.org/presentationml/2006/main">
   <p:cSld>
     <p:spTree>
@@ -41061,7 +42130,7 @@
 </p:sld>
 </file>
 
-<file path=ppt/slides/slide56.xml><?xml version="1.0" encoding="utf-8"?>
+<file path=ppt/slides/slide57.xml><?xml version="1.0" encoding="utf-8"?>
 <p:sld xmlns:a="http://schemas.openxmlformats.org/drawingml/2006/main" xmlns:r="http://schemas.openxmlformats.org/officeDocument/2006/relationships" xmlns:p="http://schemas.openxmlformats.org/presentationml/2006/main">
   <p:cSld>
     <p:spTree>
@@ -41183,7 +42252,7 @@
 </p:sld>
 </file>
 
-<file path=ppt/slides/slide57.xml><?xml version="1.0" encoding="utf-8"?>
+<file path=ppt/slides/slide58.xml><?xml version="1.0" encoding="utf-8"?>
 <p:sld xmlns:a="http://schemas.openxmlformats.org/drawingml/2006/main" xmlns:r="http://schemas.openxmlformats.org/officeDocument/2006/relationships" xmlns:p="http://schemas.openxmlformats.org/presentationml/2006/main">
   <p:cSld>
     <p:spTree>
@@ -41310,7 +42379,7 @@
 </p:sld>
 </file>
 
-<file path=ppt/slides/slide58.xml><?xml version="1.0" encoding="utf-8"?>
+<file path=ppt/slides/slide59.xml><?xml version="1.0" encoding="utf-8"?>
 <p:sld xmlns:a="http://schemas.openxmlformats.org/drawingml/2006/main" xmlns:r="http://schemas.openxmlformats.org/officeDocument/2006/relationships" xmlns:p="http://schemas.openxmlformats.org/presentationml/2006/main">
   <p:cSld>
     <p:spTree>
@@ -41373,42 +42442,6 @@
     <p:extLst>
       <p:ext uri="{BB962C8B-B14F-4D97-AF65-F5344CB8AC3E}">
         <p14:creationId xmlns:p14="http://schemas.microsoft.com/office/powerpoint/2010/main" val="1867924360"/>
-      </p:ext>
-    </p:extLst>
-  </p:cSld>
-  <p:clrMapOvr>
-    <a:masterClrMapping/>
-  </p:clrMapOvr>
-</p:sld>
-</file>
-
-<file path=ppt/slides/slide59.xml><?xml version="1.0" encoding="utf-8"?>
-<p:sld xmlns:a="http://schemas.openxmlformats.org/drawingml/2006/main" xmlns:r="http://schemas.openxmlformats.org/officeDocument/2006/relationships" xmlns:p="http://schemas.openxmlformats.org/presentationml/2006/main">
-  <p:cSld>
-    <p:spTree>
-      <p:nvGrpSpPr>
-        <p:cNvPr id="1" name="">
-          <a:extLst>
-            <a:ext uri="{FF2B5EF4-FFF2-40B4-BE49-F238E27FC236}">
-              <a16:creationId xmlns:a16="http://schemas.microsoft.com/office/drawing/2014/main" id="{35DC8A8E-2AFE-56B9-5F4C-AE3BD1DD87B0}"/>
-            </a:ext>
-          </a:extLst>
-        </p:cNvPr>
-        <p:cNvGrpSpPr/>
-        <p:nvPr/>
-      </p:nvGrpSpPr>
-      <p:grpSpPr>
-        <a:xfrm>
-          <a:off x="0" y="0"/>
-          <a:ext cx="0" cy="0"/>
-          <a:chOff x="0" y="0"/>
-          <a:chExt cx="0" cy="0"/>
-        </a:xfrm>
-      </p:grpSpPr>
-    </p:spTree>
-    <p:extLst>
-      <p:ext uri="{BB962C8B-B14F-4D97-AF65-F5344CB8AC3E}">
-        <p14:creationId xmlns:p14="http://schemas.microsoft.com/office/powerpoint/2010/main" val="1615550512"/>
       </p:ext>
     </p:extLst>
   </p:cSld>
@@ -41941,6 +42974,42 @@
         <p:cNvPr id="1" name="">
           <a:extLst>
             <a:ext uri="{FF2B5EF4-FFF2-40B4-BE49-F238E27FC236}">
+              <a16:creationId xmlns:a16="http://schemas.microsoft.com/office/drawing/2014/main" id="{35DC8A8E-2AFE-56B9-5F4C-AE3BD1DD87B0}"/>
+            </a:ext>
+          </a:extLst>
+        </p:cNvPr>
+        <p:cNvGrpSpPr/>
+        <p:nvPr/>
+      </p:nvGrpSpPr>
+      <p:grpSpPr>
+        <a:xfrm>
+          <a:off x="0" y="0"/>
+          <a:ext cx="0" cy="0"/>
+          <a:chOff x="0" y="0"/>
+          <a:chExt cx="0" cy="0"/>
+        </a:xfrm>
+      </p:grpSpPr>
+    </p:spTree>
+    <p:extLst>
+      <p:ext uri="{BB962C8B-B14F-4D97-AF65-F5344CB8AC3E}">
+        <p14:creationId xmlns:p14="http://schemas.microsoft.com/office/powerpoint/2010/main" val="1615550512"/>
+      </p:ext>
+    </p:extLst>
+  </p:cSld>
+  <p:clrMapOvr>
+    <a:masterClrMapping/>
+  </p:clrMapOvr>
+</p:sld>
+</file>
+
+<file path=ppt/slides/slide61.xml><?xml version="1.0" encoding="utf-8"?>
+<p:sld xmlns:a="http://schemas.openxmlformats.org/drawingml/2006/main" xmlns:r="http://schemas.openxmlformats.org/officeDocument/2006/relationships" xmlns:p="http://schemas.openxmlformats.org/presentationml/2006/main">
+  <p:cSld>
+    <p:spTree>
+      <p:nvGrpSpPr>
+        <p:cNvPr id="1" name="">
+          <a:extLst>
+            <a:ext uri="{FF2B5EF4-FFF2-40B4-BE49-F238E27FC236}">
               <a16:creationId xmlns:a16="http://schemas.microsoft.com/office/drawing/2014/main" id="{8256CCE8-E6B2-9826-6396-396B741FFB9B}"/>
             </a:ext>
           </a:extLst>
@@ -42055,7 +43124,7 @@
 </p:sld>
 </file>
 
-<file path=ppt/slides/slide61.xml><?xml version="1.0" encoding="utf-8"?>
+<file path=ppt/slides/slide62.xml><?xml version="1.0" encoding="utf-8"?>
 <p:sld xmlns:a="http://schemas.openxmlformats.org/drawingml/2006/main" xmlns:r="http://schemas.openxmlformats.org/officeDocument/2006/relationships" xmlns:p="http://schemas.openxmlformats.org/presentationml/2006/main">
   <p:cSld>
     <p:spTree>
@@ -42177,7 +43246,7 @@
 </p:sld>
 </file>
 
-<file path=ppt/slides/slide62.xml><?xml version="1.0" encoding="utf-8"?>
+<file path=ppt/slides/slide63.xml><?xml version="1.0" encoding="utf-8"?>
 <p:sld xmlns:a="http://schemas.openxmlformats.org/drawingml/2006/main" xmlns:r="http://schemas.openxmlformats.org/officeDocument/2006/relationships" xmlns:p="http://schemas.openxmlformats.org/presentationml/2006/main">
   <p:cSld>
     <p:spTree>
@@ -42299,7 +43368,7 @@
 </p:sld>
 </file>
 
-<file path=ppt/slides/slide63.xml><?xml version="1.0" encoding="utf-8"?>
+<file path=ppt/slides/slide64.xml><?xml version="1.0" encoding="utf-8"?>
 <p:sld xmlns:a="http://schemas.openxmlformats.org/drawingml/2006/main" xmlns:r="http://schemas.openxmlformats.org/officeDocument/2006/relationships" xmlns:p="http://schemas.openxmlformats.org/presentationml/2006/main">
   <p:cSld>
     <p:spTree>
@@ -42421,7 +43490,7 @@
 </p:sld>
 </file>
 
-<file path=ppt/slides/slide64.xml><?xml version="1.0" encoding="utf-8"?>
+<file path=ppt/slides/slide65.xml><?xml version="1.0" encoding="utf-8"?>
 <p:sld xmlns:a="http://schemas.openxmlformats.org/drawingml/2006/main" xmlns:r="http://schemas.openxmlformats.org/officeDocument/2006/relationships" xmlns:p="http://schemas.openxmlformats.org/presentationml/2006/main">
   <p:cSld>
     <p:spTree>
@@ -42550,7 +43619,7 @@
 </p:sld>
 </file>
 
-<file path=ppt/slides/slide65.xml><?xml version="1.0" encoding="utf-8"?>
+<file path=ppt/slides/slide66.xml><?xml version="1.0" encoding="utf-8"?>
 <p:sld xmlns:a="http://schemas.openxmlformats.org/drawingml/2006/main" xmlns:r="http://schemas.openxmlformats.org/officeDocument/2006/relationships" xmlns:p="http://schemas.openxmlformats.org/presentationml/2006/main">
   <p:cSld>
     <p:spTree>
@@ -42586,7 +43655,7 @@
 </p:sld>
 </file>
 
-<file path=ppt/slides/slide66.xml><?xml version="1.0" encoding="utf-8"?>
+<file path=ppt/slides/slide67.xml><?xml version="1.0" encoding="utf-8"?>
 <p:sld xmlns:a="http://schemas.openxmlformats.org/drawingml/2006/main" xmlns:r="http://schemas.openxmlformats.org/officeDocument/2006/relationships" xmlns:p="http://schemas.openxmlformats.org/presentationml/2006/main">
   <p:cSld>
     <p:spTree>
@@ -42708,7 +43777,7 @@
 </p:sld>
 </file>
 
-<file path=ppt/slides/slide67.xml><?xml version="1.0" encoding="utf-8"?>
+<file path=ppt/slides/slide68.xml><?xml version="1.0" encoding="utf-8"?>
 <p:sld xmlns:a="http://schemas.openxmlformats.org/drawingml/2006/main" xmlns:r="http://schemas.openxmlformats.org/officeDocument/2006/relationships" xmlns:p="http://schemas.openxmlformats.org/presentationml/2006/main">
   <p:cSld>
     <p:spTree>
@@ -42830,7 +43899,7 @@
 </p:sld>
 </file>
 
-<file path=ppt/slides/slide68.xml><?xml version="1.0" encoding="utf-8"?>
+<file path=ppt/slides/slide69.xml><?xml version="1.0" encoding="utf-8"?>
 <p:sld xmlns:a="http://schemas.openxmlformats.org/drawingml/2006/main" xmlns:r="http://schemas.openxmlformats.org/officeDocument/2006/relationships" xmlns:p="http://schemas.openxmlformats.org/presentationml/2006/main">
   <p:cSld>
     <p:spTree>
@@ -42993,42 +44062,6 @@
     <p:extLst>
       <p:ext uri="{BB962C8B-B14F-4D97-AF65-F5344CB8AC3E}">
         <p14:creationId xmlns:p14="http://schemas.microsoft.com/office/powerpoint/2010/main" val="2938292229"/>
-      </p:ext>
-    </p:extLst>
-  </p:cSld>
-  <p:clrMapOvr>
-    <a:masterClrMapping/>
-  </p:clrMapOvr>
-</p:sld>
-</file>
-
-<file path=ppt/slides/slide69.xml><?xml version="1.0" encoding="utf-8"?>
-<p:sld xmlns:a="http://schemas.openxmlformats.org/drawingml/2006/main" xmlns:r="http://schemas.openxmlformats.org/officeDocument/2006/relationships" xmlns:p="http://schemas.openxmlformats.org/presentationml/2006/main">
-  <p:cSld>
-    <p:spTree>
-      <p:nvGrpSpPr>
-        <p:cNvPr id="1" name="">
-          <a:extLst>
-            <a:ext uri="{FF2B5EF4-FFF2-40B4-BE49-F238E27FC236}">
-              <a16:creationId xmlns:a16="http://schemas.microsoft.com/office/drawing/2014/main" id="{3BE081F3-6C64-1B7B-15F8-41C30F6D8097}"/>
-            </a:ext>
-          </a:extLst>
-        </p:cNvPr>
-        <p:cNvGrpSpPr/>
-        <p:nvPr/>
-      </p:nvGrpSpPr>
-      <p:grpSpPr>
-        <a:xfrm>
-          <a:off x="0" y="0"/>
-          <a:ext cx="0" cy="0"/>
-          <a:chOff x="0" y="0"/>
-          <a:chExt cx="0" cy="0"/>
-        </a:xfrm>
-      </p:grpSpPr>
-    </p:spTree>
-    <p:extLst>
-      <p:ext uri="{BB962C8B-B14F-4D97-AF65-F5344CB8AC3E}">
-        <p14:creationId xmlns:p14="http://schemas.microsoft.com/office/powerpoint/2010/main" val="2073511393"/>
       </p:ext>
     </p:extLst>
   </p:cSld>
@@ -43790,6 +44823,42 @@
         <p:cNvPr id="1" name="">
           <a:extLst>
             <a:ext uri="{FF2B5EF4-FFF2-40B4-BE49-F238E27FC236}">
+              <a16:creationId xmlns:a16="http://schemas.microsoft.com/office/drawing/2014/main" id="{3BE081F3-6C64-1B7B-15F8-41C30F6D8097}"/>
+            </a:ext>
+          </a:extLst>
+        </p:cNvPr>
+        <p:cNvGrpSpPr/>
+        <p:nvPr/>
+      </p:nvGrpSpPr>
+      <p:grpSpPr>
+        <a:xfrm>
+          <a:off x="0" y="0"/>
+          <a:ext cx="0" cy="0"/>
+          <a:chOff x="0" y="0"/>
+          <a:chExt cx="0" cy="0"/>
+        </a:xfrm>
+      </p:grpSpPr>
+    </p:spTree>
+    <p:extLst>
+      <p:ext uri="{BB962C8B-B14F-4D97-AF65-F5344CB8AC3E}">
+        <p14:creationId xmlns:p14="http://schemas.microsoft.com/office/powerpoint/2010/main" val="2073511393"/>
+      </p:ext>
+    </p:extLst>
+  </p:cSld>
+  <p:clrMapOvr>
+    <a:masterClrMapping/>
+  </p:clrMapOvr>
+</p:sld>
+</file>
+
+<file path=ppt/slides/slide71.xml><?xml version="1.0" encoding="utf-8"?>
+<p:sld xmlns:a="http://schemas.openxmlformats.org/drawingml/2006/main" xmlns:r="http://schemas.openxmlformats.org/officeDocument/2006/relationships" xmlns:p="http://schemas.openxmlformats.org/presentationml/2006/main">
+  <p:cSld>
+    <p:spTree>
+      <p:nvGrpSpPr>
+        <p:cNvPr id="1" name="">
+          <a:extLst>
+            <a:ext uri="{FF2B5EF4-FFF2-40B4-BE49-F238E27FC236}">
               <a16:creationId xmlns:a16="http://schemas.microsoft.com/office/drawing/2014/main" id="{FF075BC6-0676-9C3A-EC4F-F254C46A2724}"/>
             </a:ext>
           </a:extLst>
@@ -43904,7 +44973,7 @@
 </p:sld>
 </file>
 
-<file path=ppt/slides/slide71.xml><?xml version="1.0" encoding="utf-8"?>
+<file path=ppt/slides/slide72.xml><?xml version="1.0" encoding="utf-8"?>
 <p:sld xmlns:a="http://schemas.openxmlformats.org/drawingml/2006/main" xmlns:r="http://schemas.openxmlformats.org/officeDocument/2006/relationships" xmlns:p="http://schemas.openxmlformats.org/presentationml/2006/main">
   <p:cSld>
     <p:spTree>
@@ -44026,7 +45095,7 @@
 </p:sld>
 </file>
 
-<file path=ppt/slides/slide72.xml><?xml version="1.0" encoding="utf-8"?>
+<file path=ppt/slides/slide73.xml><?xml version="1.0" encoding="utf-8"?>
 <p:sld xmlns:a="http://schemas.openxmlformats.org/drawingml/2006/main" xmlns:r="http://schemas.openxmlformats.org/officeDocument/2006/relationships" xmlns:p="http://schemas.openxmlformats.org/presentationml/2006/main">
   <p:cSld>
     <p:spTree>
@@ -44148,7 +45217,7 @@
 </p:sld>
 </file>
 
-<file path=ppt/slides/slide73.xml><?xml version="1.0" encoding="utf-8"?>
+<file path=ppt/slides/slide74.xml><?xml version="1.0" encoding="utf-8"?>
 <p:sld xmlns:a="http://schemas.openxmlformats.org/drawingml/2006/main" xmlns:r="http://schemas.openxmlformats.org/officeDocument/2006/relationships" xmlns:p="http://schemas.openxmlformats.org/presentationml/2006/main">
   <p:cSld>
     <p:spTree>
@@ -44270,7 +45339,7 @@
 </p:sld>
 </file>
 
-<file path=ppt/slides/slide74.xml><?xml version="1.0" encoding="utf-8"?>
+<file path=ppt/slides/slide75.xml><?xml version="1.0" encoding="utf-8"?>
 <p:sld xmlns:a="http://schemas.openxmlformats.org/drawingml/2006/main" xmlns:r="http://schemas.openxmlformats.org/officeDocument/2006/relationships" xmlns:p="http://schemas.openxmlformats.org/presentationml/2006/main">
   <p:cSld>
     <p:spTree>
@@ -44392,7 +45461,7 @@
 </p:sld>
 </file>
 
-<file path=ppt/slides/slide75.xml><?xml version="1.0" encoding="utf-8"?>
+<file path=ppt/slides/slide76.xml><?xml version="1.0" encoding="utf-8"?>
 <p:sld xmlns:a="http://schemas.openxmlformats.org/drawingml/2006/main" xmlns:r="http://schemas.openxmlformats.org/officeDocument/2006/relationships" xmlns:p="http://schemas.openxmlformats.org/presentationml/2006/main">
   <p:cSld>
     <p:spTree>
@@ -44428,7 +45497,7 @@
 </p:sld>
 </file>
 
-<file path=ppt/slides/slide76.xml><?xml version="1.0" encoding="utf-8"?>
+<file path=ppt/slides/slide77.xml><?xml version="1.0" encoding="utf-8"?>
 <p:sld xmlns:a="http://schemas.openxmlformats.org/drawingml/2006/main" xmlns:r="http://schemas.openxmlformats.org/officeDocument/2006/relationships" xmlns:p="http://schemas.openxmlformats.org/presentationml/2006/main">
   <p:cSld>
     <p:spTree>
@@ -44550,7 +45619,7 @@
 </p:sld>
 </file>
 
-<file path=ppt/slides/slide77.xml><?xml version="1.0" encoding="utf-8"?>
+<file path=ppt/slides/slide78.xml><?xml version="1.0" encoding="utf-8"?>
 <p:sld xmlns:a="http://schemas.openxmlformats.org/drawingml/2006/main" xmlns:r="http://schemas.openxmlformats.org/officeDocument/2006/relationships" xmlns:p="http://schemas.openxmlformats.org/presentationml/2006/main">
   <p:cSld>
     <p:spTree>
@@ -44722,7 +45791,7 @@
 </p:sld>
 </file>
 
-<file path=ppt/slides/slide78.xml><?xml version="1.0" encoding="utf-8"?>
+<file path=ppt/slides/slide79.xml><?xml version="1.0" encoding="utf-8"?>
 <p:sld xmlns:a="http://schemas.openxmlformats.org/drawingml/2006/main" xmlns:r="http://schemas.openxmlformats.org/officeDocument/2006/relationships" xmlns:p="http://schemas.openxmlformats.org/presentationml/2006/main">
   <p:cSld>
     <p:spTree>
@@ -44835,128 +45904,6 @@
     <p:extLst>
       <p:ext uri="{BB962C8B-B14F-4D97-AF65-F5344CB8AC3E}">
         <p14:creationId xmlns:p14="http://schemas.microsoft.com/office/powerpoint/2010/main" val="546176998"/>
-      </p:ext>
-    </p:extLst>
-  </p:cSld>
-  <p:clrMapOvr>
-    <a:masterClrMapping/>
-  </p:clrMapOvr>
-</p:sld>
-</file>
-
-<file path=ppt/slides/slide79.xml><?xml version="1.0" encoding="utf-8"?>
-<p:sld xmlns:a="http://schemas.openxmlformats.org/drawingml/2006/main" xmlns:r="http://schemas.openxmlformats.org/officeDocument/2006/relationships" xmlns:p="http://schemas.openxmlformats.org/presentationml/2006/main">
-  <p:cSld>
-    <p:spTree>
-      <p:nvGrpSpPr>
-        <p:cNvPr id="1" name="">
-          <a:extLst>
-            <a:ext uri="{FF2B5EF4-FFF2-40B4-BE49-F238E27FC236}">
-              <a16:creationId xmlns:a16="http://schemas.microsoft.com/office/drawing/2014/main" id="{F2233294-2155-B136-077A-732F11C4EFE6}"/>
-            </a:ext>
-          </a:extLst>
-        </p:cNvPr>
-        <p:cNvGrpSpPr/>
-        <p:nvPr/>
-      </p:nvGrpSpPr>
-      <p:grpSpPr>
-        <a:xfrm>
-          <a:off x="0" y="0"/>
-          <a:ext cx="0" cy="0"/>
-          <a:chOff x="0" y="0"/>
-          <a:chExt cx="0" cy="0"/>
-        </a:xfrm>
-      </p:grpSpPr>
-      <p:pic>
-        <p:nvPicPr>
-          <p:cNvPr id="3" name="図 2">
-            <a:extLst>
-              <a:ext uri="{FF2B5EF4-FFF2-40B4-BE49-F238E27FC236}">
-                <a16:creationId xmlns:a16="http://schemas.microsoft.com/office/drawing/2014/main" id="{77481837-E1CC-A6C7-C860-EE1D5A25EFA6}"/>
-              </a:ext>
-            </a:extLst>
-          </p:cNvPr>
-          <p:cNvPicPr>
-            <a:picLocks noChangeAspect="1"/>
-          </p:cNvPicPr>
-          <p:nvPr/>
-        </p:nvPicPr>
-        <p:blipFill>
-          <a:blip r:embed="rId2">
-            <a:extLst>
-              <a:ext uri="{28A0092B-C50C-407E-A947-70E740481C1C}">
-                <a14:useLocalDpi xmlns:a14="http://schemas.microsoft.com/office/drawing/2010/main" val="0"/>
-              </a:ext>
-            </a:extLst>
-          </a:blip>
-          <a:stretch>
-            <a:fillRect/>
-          </a:stretch>
-        </p:blipFill>
-        <p:spPr>
-          <a:xfrm>
-            <a:off x="3522662" y="1933575"/>
-            <a:ext cx="3571875" cy="2762250"/>
-          </a:xfrm>
-          <a:prstGeom prst="rect">
-            <a:avLst/>
-          </a:prstGeom>
-        </p:spPr>
-      </p:pic>
-      <p:sp>
-        <p:nvSpPr>
-          <p:cNvPr id="4" name="正方形/長方形 3">
-            <a:extLst>
-              <a:ext uri="{FF2B5EF4-FFF2-40B4-BE49-F238E27FC236}">
-                <a16:creationId xmlns:a16="http://schemas.microsoft.com/office/drawing/2014/main" id="{AE6205F5-E501-E79E-FC8C-14D36686CA35}"/>
-              </a:ext>
-            </a:extLst>
-          </p:cNvPr>
-          <p:cNvSpPr/>
-          <p:nvPr/>
-        </p:nvSpPr>
-        <p:spPr>
-          <a:xfrm flipV="1">
-            <a:off x="4303713" y="3022600"/>
-            <a:ext cx="2668588" cy="317500"/>
-          </a:xfrm>
-          <a:prstGeom prst="rect">
-            <a:avLst/>
-          </a:prstGeom>
-          <a:noFill/>
-          <a:ln w="28575">
-            <a:solidFill>
-              <a:srgbClr val="FF0000"/>
-            </a:solidFill>
-          </a:ln>
-        </p:spPr>
-        <p:style>
-          <a:lnRef idx="2">
-            <a:schemeClr val="accent6"/>
-          </a:lnRef>
-          <a:fillRef idx="1">
-            <a:schemeClr val="lt1"/>
-          </a:fillRef>
-          <a:effectRef idx="0">
-            <a:schemeClr val="accent6"/>
-          </a:effectRef>
-          <a:fontRef idx="minor">
-            <a:schemeClr val="dk1"/>
-          </a:fontRef>
-        </p:style>
-        <p:txBody>
-          <a:bodyPr rtlCol="0" anchor="ctr"/>
-          <a:lstStyle/>
-          <a:p>
-            <a:pPr algn="ctr"/>
-            <a:endParaRPr kumimoji="1" lang="ja-JP" altLang="en-US"/>
-          </a:p>
-        </p:txBody>
-      </p:sp>
-    </p:spTree>
-    <p:extLst>
-      <p:ext uri="{BB962C8B-B14F-4D97-AF65-F5344CB8AC3E}">
-        <p14:creationId xmlns:p14="http://schemas.microsoft.com/office/powerpoint/2010/main" val="3073031344"/>
       </p:ext>
     </p:extLst>
   </p:cSld>
@@ -45142,6 +46089,128 @@
         <p:cNvPr id="1" name="">
           <a:extLst>
             <a:ext uri="{FF2B5EF4-FFF2-40B4-BE49-F238E27FC236}">
+              <a16:creationId xmlns:a16="http://schemas.microsoft.com/office/drawing/2014/main" id="{F2233294-2155-B136-077A-732F11C4EFE6}"/>
+            </a:ext>
+          </a:extLst>
+        </p:cNvPr>
+        <p:cNvGrpSpPr/>
+        <p:nvPr/>
+      </p:nvGrpSpPr>
+      <p:grpSpPr>
+        <a:xfrm>
+          <a:off x="0" y="0"/>
+          <a:ext cx="0" cy="0"/>
+          <a:chOff x="0" y="0"/>
+          <a:chExt cx="0" cy="0"/>
+        </a:xfrm>
+      </p:grpSpPr>
+      <p:pic>
+        <p:nvPicPr>
+          <p:cNvPr id="3" name="図 2">
+            <a:extLst>
+              <a:ext uri="{FF2B5EF4-FFF2-40B4-BE49-F238E27FC236}">
+                <a16:creationId xmlns:a16="http://schemas.microsoft.com/office/drawing/2014/main" id="{77481837-E1CC-A6C7-C860-EE1D5A25EFA6}"/>
+              </a:ext>
+            </a:extLst>
+          </p:cNvPr>
+          <p:cNvPicPr>
+            <a:picLocks noChangeAspect="1"/>
+          </p:cNvPicPr>
+          <p:nvPr/>
+        </p:nvPicPr>
+        <p:blipFill>
+          <a:blip r:embed="rId2">
+            <a:extLst>
+              <a:ext uri="{28A0092B-C50C-407E-A947-70E740481C1C}">
+                <a14:useLocalDpi xmlns:a14="http://schemas.microsoft.com/office/drawing/2010/main" val="0"/>
+              </a:ext>
+            </a:extLst>
+          </a:blip>
+          <a:stretch>
+            <a:fillRect/>
+          </a:stretch>
+        </p:blipFill>
+        <p:spPr>
+          <a:xfrm>
+            <a:off x="3522662" y="1933575"/>
+            <a:ext cx="3571875" cy="2762250"/>
+          </a:xfrm>
+          <a:prstGeom prst="rect">
+            <a:avLst/>
+          </a:prstGeom>
+        </p:spPr>
+      </p:pic>
+      <p:sp>
+        <p:nvSpPr>
+          <p:cNvPr id="4" name="正方形/長方形 3">
+            <a:extLst>
+              <a:ext uri="{FF2B5EF4-FFF2-40B4-BE49-F238E27FC236}">
+                <a16:creationId xmlns:a16="http://schemas.microsoft.com/office/drawing/2014/main" id="{AE6205F5-E501-E79E-FC8C-14D36686CA35}"/>
+              </a:ext>
+            </a:extLst>
+          </p:cNvPr>
+          <p:cNvSpPr/>
+          <p:nvPr/>
+        </p:nvSpPr>
+        <p:spPr>
+          <a:xfrm flipV="1">
+            <a:off x="4303713" y="3022600"/>
+            <a:ext cx="2668588" cy="317500"/>
+          </a:xfrm>
+          <a:prstGeom prst="rect">
+            <a:avLst/>
+          </a:prstGeom>
+          <a:noFill/>
+          <a:ln w="28575">
+            <a:solidFill>
+              <a:srgbClr val="FF0000"/>
+            </a:solidFill>
+          </a:ln>
+        </p:spPr>
+        <p:style>
+          <a:lnRef idx="2">
+            <a:schemeClr val="accent6"/>
+          </a:lnRef>
+          <a:fillRef idx="1">
+            <a:schemeClr val="lt1"/>
+          </a:fillRef>
+          <a:effectRef idx="0">
+            <a:schemeClr val="accent6"/>
+          </a:effectRef>
+          <a:fontRef idx="minor">
+            <a:schemeClr val="dk1"/>
+          </a:fontRef>
+        </p:style>
+        <p:txBody>
+          <a:bodyPr rtlCol="0" anchor="ctr"/>
+          <a:lstStyle/>
+          <a:p>
+            <a:pPr algn="ctr"/>
+            <a:endParaRPr kumimoji="1" lang="ja-JP" altLang="en-US"/>
+          </a:p>
+        </p:txBody>
+      </p:sp>
+    </p:spTree>
+    <p:extLst>
+      <p:ext uri="{BB962C8B-B14F-4D97-AF65-F5344CB8AC3E}">
+        <p14:creationId xmlns:p14="http://schemas.microsoft.com/office/powerpoint/2010/main" val="3073031344"/>
+      </p:ext>
+    </p:extLst>
+  </p:cSld>
+  <p:clrMapOvr>
+    <a:masterClrMapping/>
+  </p:clrMapOvr>
+</p:sld>
+</file>
+
+<file path=ppt/slides/slide81.xml><?xml version="1.0" encoding="utf-8"?>
+<p:sld xmlns:a="http://schemas.openxmlformats.org/drawingml/2006/main" xmlns:r="http://schemas.openxmlformats.org/officeDocument/2006/relationships" xmlns:p="http://schemas.openxmlformats.org/presentationml/2006/main">
+  <p:cSld>
+    <p:spTree>
+      <p:nvGrpSpPr>
+        <p:cNvPr id="1" name="">
+          <a:extLst>
+            <a:ext uri="{FF2B5EF4-FFF2-40B4-BE49-F238E27FC236}">
               <a16:creationId xmlns:a16="http://schemas.microsoft.com/office/drawing/2014/main" id="{ED239A4F-A50F-105F-465D-57A95A47F678}"/>
             </a:ext>
           </a:extLst>
@@ -45302,7 +46371,7 @@
 </p:sld>
 </file>
 
-<file path=ppt/slides/slide81.xml><?xml version="1.0" encoding="utf-8"?>
+<file path=ppt/slides/slide82.xml><?xml version="1.0" encoding="utf-8"?>
 <p:sld xmlns:a="http://schemas.openxmlformats.org/drawingml/2006/main" xmlns:r="http://schemas.openxmlformats.org/officeDocument/2006/relationships" xmlns:p="http://schemas.openxmlformats.org/presentationml/2006/main">
   <p:cSld>
     <p:spTree>
@@ -45338,7 +46407,7 @@
 </p:sld>
 </file>
 
-<file path=ppt/slides/slide82.xml><?xml version="1.0" encoding="utf-8"?>
+<file path=ppt/slides/slide83.xml><?xml version="1.0" encoding="utf-8"?>
 <p:sld xmlns:a="http://schemas.openxmlformats.org/drawingml/2006/main" xmlns:r="http://schemas.openxmlformats.org/officeDocument/2006/relationships" xmlns:p="http://schemas.openxmlformats.org/presentationml/2006/main">
   <p:cSld>
     <p:spTree>
@@ -45510,7 +46579,7 @@
 </p:sld>
 </file>
 
-<file path=ppt/slides/slide83.xml><?xml version="1.0" encoding="utf-8"?>
+<file path=ppt/slides/slide84.xml><?xml version="1.0" encoding="utf-8"?>
 <p:sld xmlns:a="http://schemas.openxmlformats.org/drawingml/2006/main" xmlns:r="http://schemas.openxmlformats.org/officeDocument/2006/relationships" xmlns:p="http://schemas.openxmlformats.org/presentationml/2006/main">
   <p:cSld>
     <p:spTree>
@@ -45632,7 +46701,7 @@
 </p:sld>
 </file>
 
-<file path=ppt/slides/slide84.xml><?xml version="1.0" encoding="utf-8"?>
+<file path=ppt/slides/slide85.xml><?xml version="1.0" encoding="utf-8"?>
 <p:sld xmlns:a="http://schemas.openxmlformats.org/drawingml/2006/main" xmlns:r="http://schemas.openxmlformats.org/officeDocument/2006/relationships" xmlns:p="http://schemas.openxmlformats.org/presentationml/2006/main">
   <p:cSld>
     <p:spTree>
@@ -45754,7 +46823,7 @@
 </p:sld>
 </file>
 
-<file path=ppt/slides/slide85.xml><?xml version="1.0" encoding="utf-8"?>
+<file path=ppt/slides/slide86.xml><?xml version="1.0" encoding="utf-8"?>
 <p:sld xmlns:a="http://schemas.openxmlformats.org/drawingml/2006/main" xmlns:r="http://schemas.openxmlformats.org/officeDocument/2006/relationships" xmlns:p="http://schemas.openxmlformats.org/presentationml/2006/main">
   <p:cSld>
     <p:spTree>
@@ -46014,7 +47083,7 @@
 </p:sld>
 </file>
 
-<file path=ppt/slides/slide86.xml><?xml version="1.0" encoding="utf-8"?>
+<file path=ppt/slides/slide87.xml><?xml version="1.0" encoding="utf-8"?>
 <p:sld xmlns:a="http://schemas.openxmlformats.org/drawingml/2006/main" xmlns:r="http://schemas.openxmlformats.org/officeDocument/2006/relationships" xmlns:p="http://schemas.openxmlformats.org/presentationml/2006/main">
   <p:cSld>
     <p:spTree>
@@ -46122,7 +47191,7 @@
 </p:sld>
 </file>
 
-<file path=ppt/slides/slide87.xml><?xml version="1.0" encoding="utf-8"?>
+<file path=ppt/slides/slide88.xml><?xml version="1.0" encoding="utf-8"?>
 <p:sld xmlns:a="http://schemas.openxmlformats.org/drawingml/2006/main" xmlns:r="http://schemas.openxmlformats.org/officeDocument/2006/relationships" xmlns:p="http://schemas.openxmlformats.org/presentationml/2006/main">
   <p:cSld>
     <p:spTree>
@@ -46199,7 +47268,7 @@
 </p:sld>
 </file>
 
-<file path=ppt/slides/slide88.xml><?xml version="1.0" encoding="utf-8"?>
+<file path=ppt/slides/slide89.xml><?xml version="1.0" encoding="utf-8"?>
 <p:sld xmlns:a="http://schemas.openxmlformats.org/drawingml/2006/main" xmlns:r="http://schemas.openxmlformats.org/officeDocument/2006/relationships" xmlns:p="http://schemas.openxmlformats.org/presentationml/2006/main">
   <p:cSld>
     <p:spTree>
@@ -46226,164 +47295,6 @@
     <p:extLst>
       <p:ext uri="{BB962C8B-B14F-4D97-AF65-F5344CB8AC3E}">
         <p14:creationId xmlns:p14="http://schemas.microsoft.com/office/powerpoint/2010/main" val="3543807343"/>
-      </p:ext>
-    </p:extLst>
-  </p:cSld>
-  <p:clrMapOvr>
-    <a:masterClrMapping/>
-  </p:clrMapOvr>
-</p:sld>
-</file>
-
-<file path=ppt/slides/slide89.xml><?xml version="1.0" encoding="utf-8"?>
-<p:sld xmlns:a="http://schemas.openxmlformats.org/drawingml/2006/main" xmlns:r="http://schemas.openxmlformats.org/officeDocument/2006/relationships" xmlns:p="http://schemas.openxmlformats.org/presentationml/2006/main">
-  <p:cSld>
-    <p:spTree>
-      <p:nvGrpSpPr>
-        <p:cNvPr id="1" name="">
-          <a:extLst>
-            <a:ext uri="{FF2B5EF4-FFF2-40B4-BE49-F238E27FC236}">
-              <a16:creationId xmlns:a16="http://schemas.microsoft.com/office/drawing/2014/main" id="{A457482D-A7D2-8CD5-2A96-65FC5E352E31}"/>
-            </a:ext>
-          </a:extLst>
-        </p:cNvPr>
-        <p:cNvGrpSpPr/>
-        <p:nvPr/>
-      </p:nvGrpSpPr>
-      <p:grpSpPr>
-        <a:xfrm>
-          <a:off x="0" y="0"/>
-          <a:ext cx="0" cy="0"/>
-          <a:chOff x="0" y="0"/>
-          <a:chExt cx="0" cy="0"/>
-        </a:xfrm>
-      </p:grpSpPr>
-      <p:pic>
-        <p:nvPicPr>
-          <p:cNvPr id="2" name="図 1">
-            <a:extLst>
-              <a:ext uri="{FF2B5EF4-FFF2-40B4-BE49-F238E27FC236}">
-                <a16:creationId xmlns:a16="http://schemas.microsoft.com/office/drawing/2014/main" id="{340B3760-AA89-EEB8-D740-832785031D59}"/>
-              </a:ext>
-            </a:extLst>
-          </p:cNvPr>
-          <p:cNvPicPr>
-            <a:picLocks noChangeAspect="1"/>
-          </p:cNvPicPr>
-          <p:nvPr/>
-        </p:nvPicPr>
-        <p:blipFill>
-          <a:blip r:embed="rId2">
-            <a:extLst>
-              <a:ext uri="{28A0092B-C50C-407E-A947-70E740481C1C}">
-                <a14:useLocalDpi xmlns:a14="http://schemas.microsoft.com/office/drawing/2010/main" val="0"/>
-              </a:ext>
-            </a:extLst>
-          </a:blip>
-          <a:stretch>
-            <a:fillRect/>
-          </a:stretch>
-        </p:blipFill>
-        <p:spPr>
-          <a:xfrm>
-            <a:off x="4095750" y="1810332"/>
-            <a:ext cx="4000500" cy="3181350"/>
-          </a:xfrm>
-          <a:prstGeom prst="rect">
-            <a:avLst/>
-          </a:prstGeom>
-        </p:spPr>
-      </p:pic>
-      <p:sp>
-        <p:nvSpPr>
-          <p:cNvPr id="9" name="正方形/長方形 8">
-            <a:extLst>
-              <a:ext uri="{FF2B5EF4-FFF2-40B4-BE49-F238E27FC236}">
-                <a16:creationId xmlns:a16="http://schemas.microsoft.com/office/drawing/2014/main" id="{80876F6F-21B3-1621-2208-74AE651A53F9}"/>
-              </a:ext>
-            </a:extLst>
-          </p:cNvPr>
-          <p:cNvSpPr/>
-          <p:nvPr/>
-        </p:nvSpPr>
-        <p:spPr>
-          <a:xfrm flipV="1">
-            <a:off x="4119175" y="3398610"/>
-            <a:ext cx="432000" cy="432000"/>
-          </a:xfrm>
-          <a:prstGeom prst="rect">
-            <a:avLst/>
-          </a:prstGeom>
-          <a:noFill/>
-          <a:ln w="28575">
-            <a:solidFill>
-              <a:srgbClr val="FF0000"/>
-            </a:solidFill>
-          </a:ln>
-        </p:spPr>
-        <p:style>
-          <a:lnRef idx="2">
-            <a:schemeClr val="accent6"/>
-          </a:lnRef>
-          <a:fillRef idx="1">
-            <a:schemeClr val="lt1"/>
-          </a:fillRef>
-          <a:effectRef idx="0">
-            <a:schemeClr val="accent6"/>
-          </a:effectRef>
-          <a:fontRef idx="minor">
-            <a:schemeClr val="dk1"/>
-          </a:fontRef>
-        </p:style>
-        <p:txBody>
-          <a:bodyPr rtlCol="0" anchor="ctr"/>
-          <a:lstStyle/>
-          <a:p>
-            <a:pPr algn="ctr"/>
-            <a:endParaRPr kumimoji="1" lang="ja-JP" altLang="en-US"/>
-          </a:p>
-        </p:txBody>
-      </p:sp>
-      <p:pic>
-        <p:nvPicPr>
-          <p:cNvPr id="11" name="図 10">
-            <a:extLst>
-              <a:ext uri="{FF2B5EF4-FFF2-40B4-BE49-F238E27FC236}">
-                <a16:creationId xmlns:a16="http://schemas.microsoft.com/office/drawing/2014/main" id="{F2EF6662-6DCB-3BEC-5A8E-7216CBF795DD}"/>
-              </a:ext>
-            </a:extLst>
-          </p:cNvPr>
-          <p:cNvPicPr>
-            <a:picLocks noChangeAspect="1"/>
-          </p:cNvPicPr>
-          <p:nvPr/>
-        </p:nvPicPr>
-        <p:blipFill>
-          <a:blip r:embed="rId3">
-            <a:extLst>
-              <a:ext uri="{28A0092B-C50C-407E-A947-70E740481C1C}">
-                <a14:useLocalDpi xmlns:a14="http://schemas.microsoft.com/office/drawing/2010/main" val="0"/>
-              </a:ext>
-            </a:extLst>
-          </a:blip>
-          <a:stretch>
-            <a:fillRect/>
-          </a:stretch>
-        </p:blipFill>
-        <p:spPr>
-          <a:xfrm>
-            <a:off x="4833063" y="2694698"/>
-            <a:ext cx="1228725" cy="180975"/>
-          </a:xfrm>
-          <a:prstGeom prst="rect">
-            <a:avLst/>
-          </a:prstGeom>
-        </p:spPr>
-      </p:pic>
-    </p:spTree>
-    <p:extLst>
-      <p:ext uri="{BB962C8B-B14F-4D97-AF65-F5344CB8AC3E}">
-        <p14:creationId xmlns:p14="http://schemas.microsoft.com/office/powerpoint/2010/main" val="565009452"/>
       </p:ext>
     </p:extLst>
   </p:cSld>
@@ -46437,6 +47348,164 @@
         <p:cNvPr id="1" name="">
           <a:extLst>
             <a:ext uri="{FF2B5EF4-FFF2-40B4-BE49-F238E27FC236}">
+              <a16:creationId xmlns:a16="http://schemas.microsoft.com/office/drawing/2014/main" id="{A457482D-A7D2-8CD5-2A96-65FC5E352E31}"/>
+            </a:ext>
+          </a:extLst>
+        </p:cNvPr>
+        <p:cNvGrpSpPr/>
+        <p:nvPr/>
+      </p:nvGrpSpPr>
+      <p:grpSpPr>
+        <a:xfrm>
+          <a:off x="0" y="0"/>
+          <a:ext cx="0" cy="0"/>
+          <a:chOff x="0" y="0"/>
+          <a:chExt cx="0" cy="0"/>
+        </a:xfrm>
+      </p:grpSpPr>
+      <p:pic>
+        <p:nvPicPr>
+          <p:cNvPr id="2" name="図 1">
+            <a:extLst>
+              <a:ext uri="{FF2B5EF4-FFF2-40B4-BE49-F238E27FC236}">
+                <a16:creationId xmlns:a16="http://schemas.microsoft.com/office/drawing/2014/main" id="{340B3760-AA89-EEB8-D740-832785031D59}"/>
+              </a:ext>
+            </a:extLst>
+          </p:cNvPr>
+          <p:cNvPicPr>
+            <a:picLocks noChangeAspect="1"/>
+          </p:cNvPicPr>
+          <p:nvPr/>
+        </p:nvPicPr>
+        <p:blipFill>
+          <a:blip r:embed="rId2">
+            <a:extLst>
+              <a:ext uri="{28A0092B-C50C-407E-A947-70E740481C1C}">
+                <a14:useLocalDpi xmlns:a14="http://schemas.microsoft.com/office/drawing/2010/main" val="0"/>
+              </a:ext>
+            </a:extLst>
+          </a:blip>
+          <a:stretch>
+            <a:fillRect/>
+          </a:stretch>
+        </p:blipFill>
+        <p:spPr>
+          <a:xfrm>
+            <a:off x="4095750" y="1810332"/>
+            <a:ext cx="4000500" cy="3181350"/>
+          </a:xfrm>
+          <a:prstGeom prst="rect">
+            <a:avLst/>
+          </a:prstGeom>
+        </p:spPr>
+      </p:pic>
+      <p:sp>
+        <p:nvSpPr>
+          <p:cNvPr id="9" name="正方形/長方形 8">
+            <a:extLst>
+              <a:ext uri="{FF2B5EF4-FFF2-40B4-BE49-F238E27FC236}">
+                <a16:creationId xmlns:a16="http://schemas.microsoft.com/office/drawing/2014/main" id="{80876F6F-21B3-1621-2208-74AE651A53F9}"/>
+              </a:ext>
+            </a:extLst>
+          </p:cNvPr>
+          <p:cNvSpPr/>
+          <p:nvPr/>
+        </p:nvSpPr>
+        <p:spPr>
+          <a:xfrm flipV="1">
+            <a:off x="4119175" y="3398610"/>
+            <a:ext cx="432000" cy="432000"/>
+          </a:xfrm>
+          <a:prstGeom prst="rect">
+            <a:avLst/>
+          </a:prstGeom>
+          <a:noFill/>
+          <a:ln w="28575">
+            <a:solidFill>
+              <a:srgbClr val="FF0000"/>
+            </a:solidFill>
+          </a:ln>
+        </p:spPr>
+        <p:style>
+          <a:lnRef idx="2">
+            <a:schemeClr val="accent6"/>
+          </a:lnRef>
+          <a:fillRef idx="1">
+            <a:schemeClr val="lt1"/>
+          </a:fillRef>
+          <a:effectRef idx="0">
+            <a:schemeClr val="accent6"/>
+          </a:effectRef>
+          <a:fontRef idx="minor">
+            <a:schemeClr val="dk1"/>
+          </a:fontRef>
+        </p:style>
+        <p:txBody>
+          <a:bodyPr rtlCol="0" anchor="ctr"/>
+          <a:lstStyle/>
+          <a:p>
+            <a:pPr algn="ctr"/>
+            <a:endParaRPr kumimoji="1" lang="ja-JP" altLang="en-US"/>
+          </a:p>
+        </p:txBody>
+      </p:sp>
+      <p:pic>
+        <p:nvPicPr>
+          <p:cNvPr id="11" name="図 10">
+            <a:extLst>
+              <a:ext uri="{FF2B5EF4-FFF2-40B4-BE49-F238E27FC236}">
+                <a16:creationId xmlns:a16="http://schemas.microsoft.com/office/drawing/2014/main" id="{F2EF6662-6DCB-3BEC-5A8E-7216CBF795DD}"/>
+              </a:ext>
+            </a:extLst>
+          </p:cNvPr>
+          <p:cNvPicPr>
+            <a:picLocks noChangeAspect="1"/>
+          </p:cNvPicPr>
+          <p:nvPr/>
+        </p:nvPicPr>
+        <p:blipFill>
+          <a:blip r:embed="rId3">
+            <a:extLst>
+              <a:ext uri="{28A0092B-C50C-407E-A947-70E740481C1C}">
+                <a14:useLocalDpi xmlns:a14="http://schemas.microsoft.com/office/drawing/2010/main" val="0"/>
+              </a:ext>
+            </a:extLst>
+          </a:blip>
+          <a:stretch>
+            <a:fillRect/>
+          </a:stretch>
+        </p:blipFill>
+        <p:spPr>
+          <a:xfrm>
+            <a:off x="4833063" y="2694698"/>
+            <a:ext cx="1228725" cy="180975"/>
+          </a:xfrm>
+          <a:prstGeom prst="rect">
+            <a:avLst/>
+          </a:prstGeom>
+        </p:spPr>
+      </p:pic>
+    </p:spTree>
+    <p:extLst>
+      <p:ext uri="{BB962C8B-B14F-4D97-AF65-F5344CB8AC3E}">
+        <p14:creationId xmlns:p14="http://schemas.microsoft.com/office/powerpoint/2010/main" val="565009452"/>
+      </p:ext>
+    </p:extLst>
+  </p:cSld>
+  <p:clrMapOvr>
+    <a:masterClrMapping/>
+  </p:clrMapOvr>
+</p:sld>
+</file>
+
+<file path=ppt/slides/slide91.xml><?xml version="1.0" encoding="utf-8"?>
+<p:sld xmlns:a="http://schemas.openxmlformats.org/drawingml/2006/main" xmlns:r="http://schemas.openxmlformats.org/officeDocument/2006/relationships" xmlns:p="http://schemas.openxmlformats.org/presentationml/2006/main">
+  <p:cSld>
+    <p:spTree>
+      <p:nvGrpSpPr>
+        <p:cNvPr id="1" name="">
+          <a:extLst>
+            <a:ext uri="{FF2B5EF4-FFF2-40B4-BE49-F238E27FC236}">
               <a16:creationId xmlns:a16="http://schemas.microsoft.com/office/drawing/2014/main" id="{045FC740-4586-7F3E-A0A2-AFF1311FB3DE}"/>
             </a:ext>
           </a:extLst>
@@ -46589,7 +47658,7 @@
 </p:sld>
 </file>
 
-<file path=ppt/slides/slide91.xml><?xml version="1.0" encoding="utf-8"?>
+<file path=ppt/slides/slide92.xml><?xml version="1.0" encoding="utf-8"?>
 <p:sld xmlns:a="http://schemas.openxmlformats.org/drawingml/2006/main" xmlns:r="http://schemas.openxmlformats.org/officeDocument/2006/relationships" xmlns:p="http://schemas.openxmlformats.org/presentationml/2006/main">
   <p:cSld>
     <p:spTree>
@@ -46711,7 +47780,7 @@
 </p:sld>
 </file>
 
-<file path=ppt/slides/slide92.xml><?xml version="1.0" encoding="utf-8"?>
+<file path=ppt/slides/slide93.xml><?xml version="1.0" encoding="utf-8"?>
 <p:sld xmlns:a="http://schemas.openxmlformats.org/drawingml/2006/main" xmlns:r="http://schemas.openxmlformats.org/officeDocument/2006/relationships" xmlns:p="http://schemas.openxmlformats.org/presentationml/2006/main">
   <p:cSld>
     <p:spTree>
@@ -46871,7 +47940,7 @@
 </p:sld>
 </file>
 
-<file path=ppt/slides/slide93.xml><?xml version="1.0" encoding="utf-8"?>
+<file path=ppt/slides/slide94.xml><?xml version="1.0" encoding="utf-8"?>
 <p:sld xmlns:a="http://schemas.openxmlformats.org/drawingml/2006/main" xmlns:r="http://schemas.openxmlformats.org/officeDocument/2006/relationships" xmlns:p="http://schemas.openxmlformats.org/presentationml/2006/main">
   <p:cSld>
     <p:spTree>
@@ -46907,7 +47976,7 @@
 </p:sld>
 </file>
 
-<file path=ppt/slides/slide94.xml><?xml version="1.0" encoding="utf-8"?>
+<file path=ppt/slides/slide95.xml><?xml version="1.0" encoding="utf-8"?>
 <p:sld xmlns:a="http://schemas.openxmlformats.org/drawingml/2006/main" xmlns:r="http://schemas.openxmlformats.org/officeDocument/2006/relationships" xmlns:p="http://schemas.openxmlformats.org/presentationml/2006/main">
   <p:cSld>
     <p:spTree>
@@ -46943,7 +48012,7 @@
 </p:sld>
 </file>
 
-<file path=ppt/slides/slide95.xml><?xml version="1.0" encoding="utf-8"?>
+<file path=ppt/slides/slide96.xml><?xml version="1.0" encoding="utf-8"?>
 <p:sld xmlns:a="http://schemas.openxmlformats.org/drawingml/2006/main" xmlns:r="http://schemas.openxmlformats.org/officeDocument/2006/relationships" xmlns:p="http://schemas.openxmlformats.org/presentationml/2006/main">
   <p:cSld>
     <p:spTree>
@@ -47101,7 +48170,7 @@
 </p:sld>
 </file>
 
-<file path=ppt/slides/slide96.xml><?xml version="1.0" encoding="utf-8"?>
+<file path=ppt/slides/slide97.xml><?xml version="1.0" encoding="utf-8"?>
 <p:sld xmlns:a="http://schemas.openxmlformats.org/drawingml/2006/main" xmlns:r="http://schemas.openxmlformats.org/officeDocument/2006/relationships" xmlns:p="http://schemas.openxmlformats.org/presentationml/2006/main">
   <p:cSld>
     <p:spTree>
@@ -47273,7 +48342,7 @@
 </p:sld>
 </file>
 
-<file path=ppt/slides/slide97.xml><?xml version="1.0" encoding="utf-8"?>
+<file path=ppt/slides/slide98.xml><?xml version="1.0" encoding="utf-8"?>
 <p:sld xmlns:a="http://schemas.openxmlformats.org/drawingml/2006/main" xmlns:r="http://schemas.openxmlformats.org/officeDocument/2006/relationships" xmlns:p="http://schemas.openxmlformats.org/presentationml/2006/main">
   <p:cSld>
     <p:spTree>
@@ -47433,7 +48502,7 @@
 </p:sld>
 </file>
 
-<file path=ppt/slides/slide98.xml><?xml version="1.0" encoding="utf-8"?>
+<file path=ppt/slides/slide99.xml><?xml version="1.0" encoding="utf-8"?>
 <p:sld xmlns:a="http://schemas.openxmlformats.org/drawingml/2006/main" xmlns:r="http://schemas.openxmlformats.org/officeDocument/2006/relationships" xmlns:p="http://schemas.openxmlformats.org/presentationml/2006/main">
   <p:cSld>
     <p:spTree>
@@ -47620,42 +48689,6 @@
     <p:extLst>
       <p:ext uri="{BB962C8B-B14F-4D97-AF65-F5344CB8AC3E}">
         <p14:creationId xmlns:p14="http://schemas.microsoft.com/office/powerpoint/2010/main" val="2317979742"/>
-      </p:ext>
-    </p:extLst>
-  </p:cSld>
-  <p:clrMapOvr>
-    <a:masterClrMapping/>
-  </p:clrMapOvr>
-</p:sld>
-</file>
-
-<file path=ppt/slides/slide99.xml><?xml version="1.0" encoding="utf-8"?>
-<p:sld xmlns:a="http://schemas.openxmlformats.org/drawingml/2006/main" xmlns:r="http://schemas.openxmlformats.org/officeDocument/2006/relationships" xmlns:p="http://schemas.openxmlformats.org/presentationml/2006/main">
-  <p:cSld>
-    <p:spTree>
-      <p:nvGrpSpPr>
-        <p:cNvPr id="1" name="">
-          <a:extLst>
-            <a:ext uri="{FF2B5EF4-FFF2-40B4-BE49-F238E27FC236}">
-              <a16:creationId xmlns:a16="http://schemas.microsoft.com/office/drawing/2014/main" id="{A7C950DC-84F2-A293-2479-BF267F4B25A6}"/>
-            </a:ext>
-          </a:extLst>
-        </p:cNvPr>
-        <p:cNvGrpSpPr/>
-        <p:nvPr/>
-      </p:nvGrpSpPr>
-      <p:grpSpPr>
-        <a:xfrm>
-          <a:off x="0" y="0"/>
-          <a:ext cx="0" cy="0"/>
-          <a:chOff x="0" y="0"/>
-          <a:chExt cx="0" cy="0"/>
-        </a:xfrm>
-      </p:grpSpPr>
-    </p:spTree>
-    <p:extLst>
-      <p:ext uri="{BB962C8B-B14F-4D97-AF65-F5344CB8AC3E}">
-        <p14:creationId xmlns:p14="http://schemas.microsoft.com/office/powerpoint/2010/main" val="2815932081"/>
       </p:ext>
     </p:extLst>
   </p:cSld>

--- a/01_テキスト/Git入門_図.pptx
+++ b/01_テキスト/Git入門_図.pptx
@@ -54,97 +54,96 @@
     <p:sldId id="306" r:id="rId48"/>
     <p:sldId id="301" r:id="rId49"/>
     <p:sldId id="407" r:id="rId50"/>
-    <p:sldId id="418" r:id="rId51"/>
-    <p:sldId id="318" r:id="rId52"/>
-    <p:sldId id="319" r:id="rId53"/>
-    <p:sldId id="320" r:id="rId54"/>
-    <p:sldId id="321" r:id="rId55"/>
-    <p:sldId id="324" r:id="rId56"/>
-    <p:sldId id="325" r:id="rId57"/>
-    <p:sldId id="326" r:id="rId58"/>
-    <p:sldId id="327" r:id="rId59"/>
-    <p:sldId id="322" r:id="rId60"/>
-    <p:sldId id="328" r:id="rId61"/>
-    <p:sldId id="323" r:id="rId62"/>
-    <p:sldId id="329" r:id="rId63"/>
-    <p:sldId id="330" r:id="rId64"/>
-    <p:sldId id="332" r:id="rId65"/>
-    <p:sldId id="331" r:id="rId66"/>
-    <p:sldId id="333" r:id="rId67"/>
-    <p:sldId id="334" r:id="rId68"/>
-    <p:sldId id="335" r:id="rId69"/>
-    <p:sldId id="340" r:id="rId70"/>
-    <p:sldId id="336" r:id="rId71"/>
-    <p:sldId id="341" r:id="rId72"/>
-    <p:sldId id="342" r:id="rId73"/>
-    <p:sldId id="344" r:id="rId74"/>
-    <p:sldId id="337" r:id="rId75"/>
-    <p:sldId id="343" r:id="rId76"/>
-    <p:sldId id="345" r:id="rId77"/>
-    <p:sldId id="346" r:id="rId78"/>
-    <p:sldId id="347" r:id="rId79"/>
-    <p:sldId id="338" r:id="rId80"/>
-    <p:sldId id="348" r:id="rId81"/>
-    <p:sldId id="339" r:id="rId82"/>
-    <p:sldId id="349" r:id="rId83"/>
-    <p:sldId id="350" r:id="rId84"/>
-    <p:sldId id="351" r:id="rId85"/>
-    <p:sldId id="362" r:id="rId86"/>
-    <p:sldId id="352" r:id="rId87"/>
-    <p:sldId id="353" r:id="rId88"/>
-    <p:sldId id="354" r:id="rId89"/>
-    <p:sldId id="355" r:id="rId90"/>
-    <p:sldId id="356" r:id="rId91"/>
-    <p:sldId id="357" r:id="rId92"/>
-    <p:sldId id="358" r:id="rId93"/>
-    <p:sldId id="359" r:id="rId94"/>
-    <p:sldId id="360" r:id="rId95"/>
-    <p:sldId id="361" r:id="rId96"/>
-    <p:sldId id="363" r:id="rId97"/>
-    <p:sldId id="364" r:id="rId98"/>
-    <p:sldId id="365" r:id="rId99"/>
-    <p:sldId id="366" r:id="rId100"/>
-    <p:sldId id="367" r:id="rId101"/>
-    <p:sldId id="369" r:id="rId102"/>
-    <p:sldId id="370" r:id="rId103"/>
-    <p:sldId id="371" r:id="rId104"/>
-    <p:sldId id="372" r:id="rId105"/>
-    <p:sldId id="373" r:id="rId106"/>
-    <p:sldId id="368" r:id="rId107"/>
-    <p:sldId id="374" r:id="rId108"/>
-    <p:sldId id="379" r:id="rId109"/>
-    <p:sldId id="375" r:id="rId110"/>
-    <p:sldId id="378" r:id="rId111"/>
-    <p:sldId id="376" r:id="rId112"/>
-    <p:sldId id="380" r:id="rId113"/>
-    <p:sldId id="385" r:id="rId114"/>
-    <p:sldId id="377" r:id="rId115"/>
-    <p:sldId id="381" r:id="rId116"/>
-    <p:sldId id="382" r:id="rId117"/>
-    <p:sldId id="383" r:id="rId118"/>
-    <p:sldId id="384" r:id="rId119"/>
-    <p:sldId id="386" r:id="rId120"/>
-    <p:sldId id="387" r:id="rId121"/>
-    <p:sldId id="388" r:id="rId122"/>
-    <p:sldId id="392" r:id="rId123"/>
-    <p:sldId id="389" r:id="rId124"/>
-    <p:sldId id="390" r:id="rId125"/>
-    <p:sldId id="391" r:id="rId126"/>
-    <p:sldId id="393" r:id="rId127"/>
-    <p:sldId id="394" r:id="rId128"/>
-    <p:sldId id="399" r:id="rId129"/>
-    <p:sldId id="400" r:id="rId130"/>
-    <p:sldId id="401" r:id="rId131"/>
-    <p:sldId id="405" r:id="rId132"/>
-    <p:sldId id="403" r:id="rId133"/>
-    <p:sldId id="402" r:id="rId134"/>
-    <p:sldId id="404" r:id="rId135"/>
-    <p:sldId id="415" r:id="rId136"/>
-    <p:sldId id="408" r:id="rId137"/>
-    <p:sldId id="409" r:id="rId138"/>
-    <p:sldId id="410" r:id="rId139"/>
-    <p:sldId id="411" r:id="rId140"/>
-    <p:sldId id="412" r:id="rId141"/>
+    <p:sldId id="318" r:id="rId51"/>
+    <p:sldId id="319" r:id="rId52"/>
+    <p:sldId id="320" r:id="rId53"/>
+    <p:sldId id="321" r:id="rId54"/>
+    <p:sldId id="324" r:id="rId55"/>
+    <p:sldId id="325" r:id="rId56"/>
+    <p:sldId id="326" r:id="rId57"/>
+    <p:sldId id="327" r:id="rId58"/>
+    <p:sldId id="322" r:id="rId59"/>
+    <p:sldId id="328" r:id="rId60"/>
+    <p:sldId id="323" r:id="rId61"/>
+    <p:sldId id="329" r:id="rId62"/>
+    <p:sldId id="330" r:id="rId63"/>
+    <p:sldId id="332" r:id="rId64"/>
+    <p:sldId id="331" r:id="rId65"/>
+    <p:sldId id="333" r:id="rId66"/>
+    <p:sldId id="334" r:id="rId67"/>
+    <p:sldId id="335" r:id="rId68"/>
+    <p:sldId id="340" r:id="rId69"/>
+    <p:sldId id="336" r:id="rId70"/>
+    <p:sldId id="341" r:id="rId71"/>
+    <p:sldId id="342" r:id="rId72"/>
+    <p:sldId id="344" r:id="rId73"/>
+    <p:sldId id="337" r:id="rId74"/>
+    <p:sldId id="343" r:id="rId75"/>
+    <p:sldId id="345" r:id="rId76"/>
+    <p:sldId id="346" r:id="rId77"/>
+    <p:sldId id="347" r:id="rId78"/>
+    <p:sldId id="338" r:id="rId79"/>
+    <p:sldId id="348" r:id="rId80"/>
+    <p:sldId id="339" r:id="rId81"/>
+    <p:sldId id="349" r:id="rId82"/>
+    <p:sldId id="350" r:id="rId83"/>
+    <p:sldId id="351" r:id="rId84"/>
+    <p:sldId id="362" r:id="rId85"/>
+    <p:sldId id="352" r:id="rId86"/>
+    <p:sldId id="353" r:id="rId87"/>
+    <p:sldId id="354" r:id="rId88"/>
+    <p:sldId id="355" r:id="rId89"/>
+    <p:sldId id="356" r:id="rId90"/>
+    <p:sldId id="357" r:id="rId91"/>
+    <p:sldId id="358" r:id="rId92"/>
+    <p:sldId id="359" r:id="rId93"/>
+    <p:sldId id="360" r:id="rId94"/>
+    <p:sldId id="361" r:id="rId95"/>
+    <p:sldId id="363" r:id="rId96"/>
+    <p:sldId id="364" r:id="rId97"/>
+    <p:sldId id="365" r:id="rId98"/>
+    <p:sldId id="366" r:id="rId99"/>
+    <p:sldId id="367" r:id="rId100"/>
+    <p:sldId id="369" r:id="rId101"/>
+    <p:sldId id="370" r:id="rId102"/>
+    <p:sldId id="371" r:id="rId103"/>
+    <p:sldId id="372" r:id="rId104"/>
+    <p:sldId id="373" r:id="rId105"/>
+    <p:sldId id="368" r:id="rId106"/>
+    <p:sldId id="374" r:id="rId107"/>
+    <p:sldId id="379" r:id="rId108"/>
+    <p:sldId id="375" r:id="rId109"/>
+    <p:sldId id="378" r:id="rId110"/>
+    <p:sldId id="376" r:id="rId111"/>
+    <p:sldId id="380" r:id="rId112"/>
+    <p:sldId id="385" r:id="rId113"/>
+    <p:sldId id="377" r:id="rId114"/>
+    <p:sldId id="381" r:id="rId115"/>
+    <p:sldId id="382" r:id="rId116"/>
+    <p:sldId id="383" r:id="rId117"/>
+    <p:sldId id="384" r:id="rId118"/>
+    <p:sldId id="386" r:id="rId119"/>
+    <p:sldId id="387" r:id="rId120"/>
+    <p:sldId id="388" r:id="rId121"/>
+    <p:sldId id="392" r:id="rId122"/>
+    <p:sldId id="389" r:id="rId123"/>
+    <p:sldId id="390" r:id="rId124"/>
+    <p:sldId id="391" r:id="rId125"/>
+    <p:sldId id="393" r:id="rId126"/>
+    <p:sldId id="394" r:id="rId127"/>
+    <p:sldId id="399" r:id="rId128"/>
+    <p:sldId id="400" r:id="rId129"/>
+    <p:sldId id="401" r:id="rId130"/>
+    <p:sldId id="405" r:id="rId131"/>
+    <p:sldId id="403" r:id="rId132"/>
+    <p:sldId id="402" r:id="rId133"/>
+    <p:sldId id="404" r:id="rId134"/>
+    <p:sldId id="415" r:id="rId135"/>
+    <p:sldId id="408" r:id="rId136"/>
+    <p:sldId id="409" r:id="rId137"/>
+    <p:sldId id="410" r:id="rId138"/>
+    <p:sldId id="411" r:id="rId139"/>
+    <p:sldId id="412" r:id="rId140"/>
   </p:sldIdLst>
   <p:sldSz cx="12192000" cy="6858000"/>
   <p:notesSz cx="6858000" cy="9144000"/>
@@ -3860,42 +3859,6 @@
         <p:cNvPr id="1" name="">
           <a:extLst>
             <a:ext uri="{FF2B5EF4-FFF2-40B4-BE49-F238E27FC236}">
-              <a16:creationId xmlns:a16="http://schemas.microsoft.com/office/drawing/2014/main" id="{A7C950DC-84F2-A293-2479-BF267F4B25A6}"/>
-            </a:ext>
-          </a:extLst>
-        </p:cNvPr>
-        <p:cNvGrpSpPr/>
-        <p:nvPr/>
-      </p:nvGrpSpPr>
-      <p:grpSpPr>
-        <a:xfrm>
-          <a:off x="0" y="0"/>
-          <a:ext cx="0" cy="0"/>
-          <a:chOff x="0" y="0"/>
-          <a:chExt cx="0" cy="0"/>
-        </a:xfrm>
-      </p:grpSpPr>
-    </p:spTree>
-    <p:extLst>
-      <p:ext uri="{BB962C8B-B14F-4D97-AF65-F5344CB8AC3E}">
-        <p14:creationId xmlns:p14="http://schemas.microsoft.com/office/powerpoint/2010/main" val="2815932081"/>
-      </p:ext>
-    </p:extLst>
-  </p:cSld>
-  <p:clrMapOvr>
-    <a:masterClrMapping/>
-  </p:clrMapOvr>
-</p:sld>
-</file>
-
-<file path=ppt/slides/slide101.xml><?xml version="1.0" encoding="utf-8"?>
-<p:sld xmlns:a="http://schemas.openxmlformats.org/drawingml/2006/main" xmlns:r="http://schemas.openxmlformats.org/officeDocument/2006/relationships" xmlns:p="http://schemas.openxmlformats.org/presentationml/2006/main">
-  <p:cSld>
-    <p:spTree>
-      <p:nvGrpSpPr>
-        <p:cNvPr id="1" name="">
-          <a:extLst>
-            <a:ext uri="{FF2B5EF4-FFF2-40B4-BE49-F238E27FC236}">
               <a16:creationId xmlns:a16="http://schemas.microsoft.com/office/drawing/2014/main" id="{26AA375B-371A-A128-1427-5091F5B56F05}"/>
             </a:ext>
           </a:extLst>
@@ -4046,7 +4009,7 @@
 </p:sld>
 </file>
 
-<file path=ppt/slides/slide102.xml><?xml version="1.0" encoding="utf-8"?>
+<file path=ppt/slides/slide101.xml><?xml version="1.0" encoding="utf-8"?>
 <p:sld xmlns:a="http://schemas.openxmlformats.org/drawingml/2006/main" xmlns:r="http://schemas.openxmlformats.org/officeDocument/2006/relationships" xmlns:p="http://schemas.openxmlformats.org/presentationml/2006/main">
   <p:cSld>
     <p:spTree>
@@ -4168,7 +4131,7 @@
 </p:sld>
 </file>
 
-<file path=ppt/slides/slide103.xml><?xml version="1.0" encoding="utf-8"?>
+<file path=ppt/slides/slide102.xml><?xml version="1.0" encoding="utf-8"?>
 <p:sld xmlns:a="http://schemas.openxmlformats.org/drawingml/2006/main" xmlns:r="http://schemas.openxmlformats.org/officeDocument/2006/relationships" xmlns:p="http://schemas.openxmlformats.org/presentationml/2006/main">
   <p:cSld>
     <p:spTree>
@@ -4382,7 +4345,7 @@
 </p:sld>
 </file>
 
-<file path=ppt/slides/slide104.xml><?xml version="1.0" encoding="utf-8"?>
+<file path=ppt/slides/slide103.xml><?xml version="1.0" encoding="utf-8"?>
 <p:sld xmlns:a="http://schemas.openxmlformats.org/drawingml/2006/main" xmlns:r="http://schemas.openxmlformats.org/officeDocument/2006/relationships" xmlns:p="http://schemas.openxmlformats.org/presentationml/2006/main">
   <p:cSld>
     <p:spTree>
@@ -4504,7 +4467,7 @@
 </p:sld>
 </file>
 
-<file path=ppt/slides/slide105.xml><?xml version="1.0" encoding="utf-8"?>
+<file path=ppt/slides/slide104.xml><?xml version="1.0" encoding="utf-8"?>
 <p:sld xmlns:a="http://schemas.openxmlformats.org/drawingml/2006/main" xmlns:r="http://schemas.openxmlformats.org/officeDocument/2006/relationships" xmlns:p="http://schemas.openxmlformats.org/presentationml/2006/main">
   <p:cSld>
     <p:spTree>
@@ -4626,7 +4589,7 @@
 </p:sld>
 </file>
 
-<file path=ppt/slides/slide106.xml><?xml version="1.0" encoding="utf-8"?>
+<file path=ppt/slides/slide105.xml><?xml version="1.0" encoding="utf-8"?>
 <p:sld xmlns:a="http://schemas.openxmlformats.org/drawingml/2006/main" xmlns:r="http://schemas.openxmlformats.org/officeDocument/2006/relationships" xmlns:p="http://schemas.openxmlformats.org/presentationml/2006/main">
   <p:cSld>
     <p:spTree>
@@ -4662,7 +4625,7 @@
 </p:sld>
 </file>
 
-<file path=ppt/slides/slide107.xml><?xml version="1.0" encoding="utf-8"?>
+<file path=ppt/slides/slide106.xml><?xml version="1.0" encoding="utf-8"?>
 <p:sld xmlns:a="http://schemas.openxmlformats.org/drawingml/2006/main" xmlns:r="http://schemas.openxmlformats.org/officeDocument/2006/relationships" xmlns:p="http://schemas.openxmlformats.org/presentationml/2006/main">
   <p:cSld>
     <p:spTree>
@@ -4820,7 +4783,7 @@
 </p:sld>
 </file>
 
-<file path=ppt/slides/slide108.xml><?xml version="1.0" encoding="utf-8"?>
+<file path=ppt/slides/slide107.xml><?xml version="1.0" encoding="utf-8"?>
 <p:sld xmlns:a="http://schemas.openxmlformats.org/drawingml/2006/main" xmlns:r="http://schemas.openxmlformats.org/officeDocument/2006/relationships" xmlns:p="http://schemas.openxmlformats.org/presentationml/2006/main">
   <p:cSld>
     <p:spTree>
@@ -4942,7 +4905,7 @@
 </p:sld>
 </file>
 
-<file path=ppt/slides/slide109.xml><?xml version="1.0" encoding="utf-8"?>
+<file path=ppt/slides/slide108.xml><?xml version="1.0" encoding="utf-8"?>
 <p:sld xmlns:a="http://schemas.openxmlformats.org/drawingml/2006/main" xmlns:r="http://schemas.openxmlformats.org/officeDocument/2006/relationships" xmlns:p="http://schemas.openxmlformats.org/presentationml/2006/main">
   <p:cSld>
     <p:spTree>
@@ -5147,6 +5110,128 @@
     <p:extLst>
       <p:ext uri="{BB962C8B-B14F-4D97-AF65-F5344CB8AC3E}">
         <p14:creationId xmlns:p14="http://schemas.microsoft.com/office/powerpoint/2010/main" val="1787207874"/>
+      </p:ext>
+    </p:extLst>
+  </p:cSld>
+  <p:clrMapOvr>
+    <a:masterClrMapping/>
+  </p:clrMapOvr>
+</p:sld>
+</file>
+
+<file path=ppt/slides/slide109.xml><?xml version="1.0" encoding="utf-8"?>
+<p:sld xmlns:a="http://schemas.openxmlformats.org/drawingml/2006/main" xmlns:r="http://schemas.openxmlformats.org/officeDocument/2006/relationships" xmlns:p="http://schemas.openxmlformats.org/presentationml/2006/main">
+  <p:cSld>
+    <p:spTree>
+      <p:nvGrpSpPr>
+        <p:cNvPr id="1" name="">
+          <a:extLst>
+            <a:ext uri="{FF2B5EF4-FFF2-40B4-BE49-F238E27FC236}">
+              <a16:creationId xmlns:a16="http://schemas.microsoft.com/office/drawing/2014/main" id="{0C7F44C8-51FB-7423-E16B-A311BE186D42}"/>
+            </a:ext>
+          </a:extLst>
+        </p:cNvPr>
+        <p:cNvGrpSpPr/>
+        <p:nvPr/>
+      </p:nvGrpSpPr>
+      <p:grpSpPr>
+        <a:xfrm>
+          <a:off x="0" y="0"/>
+          <a:ext cx="0" cy="0"/>
+          <a:chOff x="0" y="0"/>
+          <a:chExt cx="0" cy="0"/>
+        </a:xfrm>
+      </p:grpSpPr>
+      <p:pic>
+        <p:nvPicPr>
+          <p:cNvPr id="7" name="図 6">
+            <a:extLst>
+              <a:ext uri="{FF2B5EF4-FFF2-40B4-BE49-F238E27FC236}">
+                <a16:creationId xmlns:a16="http://schemas.microsoft.com/office/drawing/2014/main" id="{D27DA15E-ABD3-A8FB-3FFD-C1DDFEDB7D17}"/>
+              </a:ext>
+            </a:extLst>
+          </p:cNvPr>
+          <p:cNvPicPr>
+            <a:picLocks noChangeAspect="1"/>
+          </p:cNvPicPr>
+          <p:nvPr/>
+        </p:nvPicPr>
+        <p:blipFill>
+          <a:blip r:embed="rId2">
+            <a:extLst>
+              <a:ext uri="{28A0092B-C50C-407E-A947-70E740481C1C}">
+                <a14:useLocalDpi xmlns:a14="http://schemas.microsoft.com/office/drawing/2010/main" val="0"/>
+              </a:ext>
+            </a:extLst>
+          </a:blip>
+          <a:stretch>
+            <a:fillRect/>
+          </a:stretch>
+        </p:blipFill>
+        <p:spPr>
+          <a:xfrm>
+            <a:off x="4086225" y="1366837"/>
+            <a:ext cx="4019550" cy="4124325"/>
+          </a:xfrm>
+          <a:prstGeom prst="rect">
+            <a:avLst/>
+          </a:prstGeom>
+        </p:spPr>
+      </p:pic>
+      <p:sp>
+        <p:nvSpPr>
+          <p:cNvPr id="4" name="正方形/長方形 3">
+            <a:extLst>
+              <a:ext uri="{FF2B5EF4-FFF2-40B4-BE49-F238E27FC236}">
+                <a16:creationId xmlns:a16="http://schemas.microsoft.com/office/drawing/2014/main" id="{C780EA19-CF10-5F4E-43CA-0148EEAA15BE}"/>
+              </a:ext>
+            </a:extLst>
+          </p:cNvPr>
+          <p:cNvSpPr/>
+          <p:nvPr/>
+        </p:nvSpPr>
+        <p:spPr>
+          <a:xfrm flipV="1">
+            <a:off x="4492400" y="5242055"/>
+            <a:ext cx="676760" cy="239777"/>
+          </a:xfrm>
+          <a:prstGeom prst="rect">
+            <a:avLst/>
+          </a:prstGeom>
+          <a:noFill/>
+          <a:ln w="28575">
+            <a:solidFill>
+              <a:srgbClr val="FF0000"/>
+            </a:solidFill>
+          </a:ln>
+        </p:spPr>
+        <p:style>
+          <a:lnRef idx="2">
+            <a:schemeClr val="accent6"/>
+          </a:lnRef>
+          <a:fillRef idx="1">
+            <a:schemeClr val="lt1"/>
+          </a:fillRef>
+          <a:effectRef idx="0">
+            <a:schemeClr val="accent6"/>
+          </a:effectRef>
+          <a:fontRef idx="minor">
+            <a:schemeClr val="dk1"/>
+          </a:fontRef>
+        </p:style>
+        <p:txBody>
+          <a:bodyPr rtlCol="0" anchor="ctr"/>
+          <a:lstStyle/>
+          <a:p>
+            <a:pPr algn="ctr"/>
+            <a:endParaRPr kumimoji="1" lang="ja-JP" altLang="en-US"/>
+          </a:p>
+        </p:txBody>
+      </p:sp>
+    </p:spTree>
+    <p:extLst>
+      <p:ext uri="{BB962C8B-B14F-4D97-AF65-F5344CB8AC3E}">
+        <p14:creationId xmlns:p14="http://schemas.microsoft.com/office/powerpoint/2010/main" val="1098197827"/>
       </p:ext>
     </p:extLst>
   </p:cSld>
@@ -6327,128 +6412,6 @@
         <p:cNvPr id="1" name="">
           <a:extLst>
             <a:ext uri="{FF2B5EF4-FFF2-40B4-BE49-F238E27FC236}">
-              <a16:creationId xmlns:a16="http://schemas.microsoft.com/office/drawing/2014/main" id="{0C7F44C8-51FB-7423-E16B-A311BE186D42}"/>
-            </a:ext>
-          </a:extLst>
-        </p:cNvPr>
-        <p:cNvGrpSpPr/>
-        <p:nvPr/>
-      </p:nvGrpSpPr>
-      <p:grpSpPr>
-        <a:xfrm>
-          <a:off x="0" y="0"/>
-          <a:ext cx="0" cy="0"/>
-          <a:chOff x="0" y="0"/>
-          <a:chExt cx="0" cy="0"/>
-        </a:xfrm>
-      </p:grpSpPr>
-      <p:pic>
-        <p:nvPicPr>
-          <p:cNvPr id="7" name="図 6">
-            <a:extLst>
-              <a:ext uri="{FF2B5EF4-FFF2-40B4-BE49-F238E27FC236}">
-                <a16:creationId xmlns:a16="http://schemas.microsoft.com/office/drawing/2014/main" id="{D27DA15E-ABD3-A8FB-3FFD-C1DDFEDB7D17}"/>
-              </a:ext>
-            </a:extLst>
-          </p:cNvPr>
-          <p:cNvPicPr>
-            <a:picLocks noChangeAspect="1"/>
-          </p:cNvPicPr>
-          <p:nvPr/>
-        </p:nvPicPr>
-        <p:blipFill>
-          <a:blip r:embed="rId2">
-            <a:extLst>
-              <a:ext uri="{28A0092B-C50C-407E-A947-70E740481C1C}">
-                <a14:useLocalDpi xmlns:a14="http://schemas.microsoft.com/office/drawing/2010/main" val="0"/>
-              </a:ext>
-            </a:extLst>
-          </a:blip>
-          <a:stretch>
-            <a:fillRect/>
-          </a:stretch>
-        </p:blipFill>
-        <p:spPr>
-          <a:xfrm>
-            <a:off x="4086225" y="1366837"/>
-            <a:ext cx="4019550" cy="4124325"/>
-          </a:xfrm>
-          <a:prstGeom prst="rect">
-            <a:avLst/>
-          </a:prstGeom>
-        </p:spPr>
-      </p:pic>
-      <p:sp>
-        <p:nvSpPr>
-          <p:cNvPr id="4" name="正方形/長方形 3">
-            <a:extLst>
-              <a:ext uri="{FF2B5EF4-FFF2-40B4-BE49-F238E27FC236}">
-                <a16:creationId xmlns:a16="http://schemas.microsoft.com/office/drawing/2014/main" id="{C780EA19-CF10-5F4E-43CA-0148EEAA15BE}"/>
-              </a:ext>
-            </a:extLst>
-          </p:cNvPr>
-          <p:cNvSpPr/>
-          <p:nvPr/>
-        </p:nvSpPr>
-        <p:spPr>
-          <a:xfrm flipV="1">
-            <a:off x="4492400" y="5242055"/>
-            <a:ext cx="676760" cy="239777"/>
-          </a:xfrm>
-          <a:prstGeom prst="rect">
-            <a:avLst/>
-          </a:prstGeom>
-          <a:noFill/>
-          <a:ln w="28575">
-            <a:solidFill>
-              <a:srgbClr val="FF0000"/>
-            </a:solidFill>
-          </a:ln>
-        </p:spPr>
-        <p:style>
-          <a:lnRef idx="2">
-            <a:schemeClr val="accent6"/>
-          </a:lnRef>
-          <a:fillRef idx="1">
-            <a:schemeClr val="lt1"/>
-          </a:fillRef>
-          <a:effectRef idx="0">
-            <a:schemeClr val="accent6"/>
-          </a:effectRef>
-          <a:fontRef idx="minor">
-            <a:schemeClr val="dk1"/>
-          </a:fontRef>
-        </p:style>
-        <p:txBody>
-          <a:bodyPr rtlCol="0" anchor="ctr"/>
-          <a:lstStyle/>
-          <a:p>
-            <a:pPr algn="ctr"/>
-            <a:endParaRPr kumimoji="1" lang="ja-JP" altLang="en-US"/>
-          </a:p>
-        </p:txBody>
-      </p:sp>
-    </p:spTree>
-    <p:extLst>
-      <p:ext uri="{BB962C8B-B14F-4D97-AF65-F5344CB8AC3E}">
-        <p14:creationId xmlns:p14="http://schemas.microsoft.com/office/powerpoint/2010/main" val="1098197827"/>
-      </p:ext>
-    </p:extLst>
-  </p:cSld>
-  <p:clrMapOvr>
-    <a:masterClrMapping/>
-  </p:clrMapOvr>
-</p:sld>
-</file>
-
-<file path=ppt/slides/slide111.xml><?xml version="1.0" encoding="utf-8"?>
-<p:sld xmlns:a="http://schemas.openxmlformats.org/drawingml/2006/main" xmlns:r="http://schemas.openxmlformats.org/officeDocument/2006/relationships" xmlns:p="http://schemas.openxmlformats.org/presentationml/2006/main">
-  <p:cSld>
-    <p:spTree>
-      <p:nvGrpSpPr>
-        <p:cNvPr id="1" name="">
-          <a:extLst>
-            <a:ext uri="{FF2B5EF4-FFF2-40B4-BE49-F238E27FC236}">
               <a16:creationId xmlns:a16="http://schemas.microsoft.com/office/drawing/2014/main" id="{C8E3AA0B-99AA-1CE4-D159-C644D5C9934F}"/>
             </a:ext>
           </a:extLst>
@@ -6477,7 +6440,7 @@
 </p:sld>
 </file>
 
-<file path=ppt/slides/slide112.xml><?xml version="1.0" encoding="utf-8"?>
+<file path=ppt/slides/slide111.xml><?xml version="1.0" encoding="utf-8"?>
 <p:sld xmlns:a="http://schemas.openxmlformats.org/drawingml/2006/main" xmlns:r="http://schemas.openxmlformats.org/officeDocument/2006/relationships" xmlns:p="http://schemas.openxmlformats.org/presentationml/2006/main">
   <p:cSld>
     <p:spTree>
@@ -6635,7 +6598,7 @@
 </p:sld>
 </file>
 
-<file path=ppt/slides/slide113.xml><?xml version="1.0" encoding="utf-8"?>
+<file path=ppt/slides/slide112.xml><?xml version="1.0" encoding="utf-8"?>
 <p:sld xmlns:a="http://schemas.openxmlformats.org/drawingml/2006/main" xmlns:r="http://schemas.openxmlformats.org/officeDocument/2006/relationships" xmlns:p="http://schemas.openxmlformats.org/presentationml/2006/main">
   <p:cSld>
     <p:spTree>
@@ -6757,7 +6720,7 @@
 </p:sld>
 </file>
 
-<file path=ppt/slides/slide114.xml><?xml version="1.0" encoding="utf-8"?>
+<file path=ppt/slides/slide113.xml><?xml version="1.0" encoding="utf-8"?>
 <p:sld xmlns:a="http://schemas.openxmlformats.org/drawingml/2006/main" xmlns:r="http://schemas.openxmlformats.org/officeDocument/2006/relationships" xmlns:p="http://schemas.openxmlformats.org/presentationml/2006/main">
   <p:cSld>
     <p:spTree>
@@ -6979,7 +6942,7 @@
 </p:sld>
 </file>
 
-<file path=ppt/slides/slide115.xml><?xml version="1.0" encoding="utf-8"?>
+<file path=ppt/slides/slide114.xml><?xml version="1.0" encoding="utf-8"?>
 <p:sld xmlns:a="http://schemas.openxmlformats.org/drawingml/2006/main" xmlns:r="http://schemas.openxmlformats.org/officeDocument/2006/relationships" xmlns:p="http://schemas.openxmlformats.org/presentationml/2006/main">
   <p:cSld>
     <p:spTree>
@@ -7193,7 +7156,7 @@
 </p:sld>
 </file>
 
-<file path=ppt/slides/slide116.xml><?xml version="1.0" encoding="utf-8"?>
+<file path=ppt/slides/slide115.xml><?xml version="1.0" encoding="utf-8"?>
 <p:sld xmlns:a="http://schemas.openxmlformats.org/drawingml/2006/main" xmlns:r="http://schemas.openxmlformats.org/officeDocument/2006/relationships" xmlns:p="http://schemas.openxmlformats.org/presentationml/2006/main">
   <p:cSld>
     <p:spTree>
@@ -7351,7 +7314,7 @@
 </p:sld>
 </file>
 
-<file path=ppt/slides/slide117.xml><?xml version="1.0" encoding="utf-8"?>
+<file path=ppt/slides/slide116.xml><?xml version="1.0" encoding="utf-8"?>
 <p:sld xmlns:a="http://schemas.openxmlformats.org/drawingml/2006/main" xmlns:r="http://schemas.openxmlformats.org/officeDocument/2006/relationships" xmlns:p="http://schemas.openxmlformats.org/presentationml/2006/main">
   <p:cSld>
     <p:spTree>
@@ -7387,7 +7350,7 @@
 </p:sld>
 </file>
 
-<file path=ppt/slides/slide118.xml><?xml version="1.0" encoding="utf-8"?>
+<file path=ppt/slides/slide117.xml><?xml version="1.0" encoding="utf-8"?>
 <p:sld xmlns:a="http://schemas.openxmlformats.org/drawingml/2006/main" xmlns:r="http://schemas.openxmlformats.org/officeDocument/2006/relationships" xmlns:p="http://schemas.openxmlformats.org/presentationml/2006/main">
   <p:cSld>
     <p:spTree>
@@ -7423,7 +7386,7 @@
 </p:sld>
 </file>
 
-<file path=ppt/slides/slide119.xml><?xml version="1.0" encoding="utf-8"?>
+<file path=ppt/slides/slide118.xml><?xml version="1.0" encoding="utf-8"?>
 <p:sld xmlns:a="http://schemas.openxmlformats.org/drawingml/2006/main" xmlns:r="http://schemas.openxmlformats.org/officeDocument/2006/relationships" xmlns:p="http://schemas.openxmlformats.org/presentationml/2006/main">
   <p:cSld>
     <p:spTree>
@@ -7572,6 +7535,210 @@
     <p:extLst>
       <p:ext uri="{BB962C8B-B14F-4D97-AF65-F5344CB8AC3E}">
         <p14:creationId xmlns:p14="http://schemas.microsoft.com/office/powerpoint/2010/main" val="2155091631"/>
+      </p:ext>
+    </p:extLst>
+  </p:cSld>
+  <p:clrMapOvr>
+    <a:masterClrMapping/>
+  </p:clrMapOvr>
+</p:sld>
+</file>
+
+<file path=ppt/slides/slide119.xml><?xml version="1.0" encoding="utf-8"?>
+<p:sld xmlns:a="http://schemas.openxmlformats.org/drawingml/2006/main" xmlns:r="http://schemas.openxmlformats.org/officeDocument/2006/relationships" xmlns:p="http://schemas.openxmlformats.org/presentationml/2006/main">
+  <p:cSld>
+    <p:spTree>
+      <p:nvGrpSpPr>
+        <p:cNvPr id="1" name="">
+          <a:extLst>
+            <a:ext uri="{FF2B5EF4-FFF2-40B4-BE49-F238E27FC236}">
+              <a16:creationId xmlns:a16="http://schemas.microsoft.com/office/drawing/2014/main" id="{C271332C-4CDE-9C43-848B-B33DDD66CDB6}"/>
+            </a:ext>
+          </a:extLst>
+        </p:cNvPr>
+        <p:cNvGrpSpPr/>
+        <p:nvPr/>
+      </p:nvGrpSpPr>
+      <p:grpSpPr>
+        <a:xfrm>
+          <a:off x="0" y="0"/>
+          <a:ext cx="0" cy="0"/>
+          <a:chOff x="0" y="0"/>
+          <a:chExt cx="0" cy="0"/>
+        </a:xfrm>
+      </p:grpSpPr>
+      <p:pic>
+        <p:nvPicPr>
+          <p:cNvPr id="3" name="図 2">
+            <a:extLst>
+              <a:ext uri="{FF2B5EF4-FFF2-40B4-BE49-F238E27FC236}">
+                <a16:creationId xmlns:a16="http://schemas.microsoft.com/office/drawing/2014/main" id="{21ABFEF9-6905-BB44-FEC9-C7AE57B0E10E}"/>
+              </a:ext>
+            </a:extLst>
+          </p:cNvPr>
+          <p:cNvPicPr>
+            <a:picLocks noChangeAspect="1"/>
+          </p:cNvPicPr>
+          <p:nvPr/>
+        </p:nvPicPr>
+        <p:blipFill>
+          <a:blip r:embed="rId2">
+            <a:extLst>
+              <a:ext uri="{28A0092B-C50C-407E-A947-70E740481C1C}">
+                <a14:useLocalDpi xmlns:a14="http://schemas.microsoft.com/office/drawing/2010/main" val="0"/>
+              </a:ext>
+            </a:extLst>
+          </a:blip>
+          <a:stretch>
+            <a:fillRect/>
+          </a:stretch>
+        </p:blipFill>
+        <p:spPr>
+          <a:xfrm>
+            <a:off x="4062412" y="2000250"/>
+            <a:ext cx="4067175" cy="2857500"/>
+          </a:xfrm>
+          <a:prstGeom prst="rect">
+            <a:avLst/>
+          </a:prstGeom>
+        </p:spPr>
+      </p:pic>
+      <p:pic>
+        <p:nvPicPr>
+          <p:cNvPr id="15" name="図 14">
+            <a:extLst>
+              <a:ext uri="{FF2B5EF4-FFF2-40B4-BE49-F238E27FC236}">
+                <a16:creationId xmlns:a16="http://schemas.microsoft.com/office/drawing/2014/main" id="{329B5375-B548-7C91-A648-7DE142D405E5}"/>
+              </a:ext>
+            </a:extLst>
+          </p:cNvPr>
+          <p:cNvPicPr>
+            <a:picLocks noChangeAspect="1"/>
+          </p:cNvPicPr>
+          <p:nvPr/>
+        </p:nvPicPr>
+        <p:blipFill>
+          <a:blip r:embed="rId3">
+            <a:extLst>
+              <a:ext uri="{28A0092B-C50C-407E-A947-70E740481C1C}">
+                <a14:useLocalDpi xmlns:a14="http://schemas.microsoft.com/office/drawing/2010/main" val="0"/>
+              </a:ext>
+            </a:extLst>
+          </a:blip>
+          <a:stretch>
+            <a:fillRect/>
+          </a:stretch>
+        </p:blipFill>
+        <p:spPr>
+          <a:xfrm>
+            <a:off x="4864845" y="2723762"/>
+            <a:ext cx="3152775" cy="723900"/>
+          </a:xfrm>
+          <a:prstGeom prst="rect">
+            <a:avLst/>
+          </a:prstGeom>
+        </p:spPr>
+      </p:pic>
+      <p:sp>
+        <p:nvSpPr>
+          <p:cNvPr id="4" name="正方形/長方形 3">
+            <a:extLst>
+              <a:ext uri="{FF2B5EF4-FFF2-40B4-BE49-F238E27FC236}">
+                <a16:creationId xmlns:a16="http://schemas.microsoft.com/office/drawing/2014/main" id="{0976FBC9-9102-6DF7-353F-136BDB55F8AA}"/>
+              </a:ext>
+            </a:extLst>
+          </p:cNvPr>
+          <p:cNvSpPr/>
+          <p:nvPr/>
+        </p:nvSpPr>
+        <p:spPr>
+          <a:xfrm flipV="1">
+            <a:off x="4567045" y="4197026"/>
+            <a:ext cx="3562542" cy="309659"/>
+          </a:xfrm>
+          <a:prstGeom prst="rect">
+            <a:avLst/>
+          </a:prstGeom>
+          <a:noFill/>
+          <a:ln w="28575">
+            <a:solidFill>
+              <a:srgbClr val="FF0000"/>
+            </a:solidFill>
+          </a:ln>
+        </p:spPr>
+        <p:style>
+          <a:lnRef idx="2">
+            <a:schemeClr val="accent6"/>
+          </a:lnRef>
+          <a:fillRef idx="1">
+            <a:schemeClr val="lt1"/>
+          </a:fillRef>
+          <a:effectRef idx="0">
+            <a:schemeClr val="accent6"/>
+          </a:effectRef>
+          <a:fontRef idx="minor">
+            <a:schemeClr val="dk1"/>
+          </a:fontRef>
+        </p:style>
+        <p:txBody>
+          <a:bodyPr rtlCol="0" anchor="ctr"/>
+          <a:lstStyle/>
+          <a:p>
+            <a:pPr algn="ctr"/>
+            <a:endParaRPr kumimoji="1" lang="ja-JP" altLang="en-US"/>
+          </a:p>
+        </p:txBody>
+      </p:sp>
+      <p:sp>
+        <p:nvSpPr>
+          <p:cNvPr id="6" name="正方形/長方形 5">
+            <a:extLst>
+              <a:ext uri="{FF2B5EF4-FFF2-40B4-BE49-F238E27FC236}">
+                <a16:creationId xmlns:a16="http://schemas.microsoft.com/office/drawing/2014/main" id="{96DE9728-0D2E-3058-FDA1-1EB30DCC75F3}"/>
+              </a:ext>
+            </a:extLst>
+          </p:cNvPr>
+          <p:cNvSpPr/>
+          <p:nvPr/>
+        </p:nvSpPr>
+        <p:spPr>
+          <a:xfrm>
+            <a:off x="6235955" y="3023117"/>
+            <a:ext cx="873972" cy="186612"/>
+          </a:xfrm>
+          <a:prstGeom prst="rect">
+            <a:avLst/>
+          </a:prstGeom>
+        </p:spPr>
+        <p:style>
+          <a:lnRef idx="2">
+            <a:schemeClr val="dk1">
+              <a:shade val="15000"/>
+            </a:schemeClr>
+          </a:lnRef>
+          <a:fillRef idx="1">
+            <a:schemeClr val="dk1"/>
+          </a:fillRef>
+          <a:effectRef idx="0">
+            <a:schemeClr val="dk1"/>
+          </a:effectRef>
+          <a:fontRef idx="minor">
+            <a:schemeClr val="lt1"/>
+          </a:fontRef>
+        </p:style>
+        <p:txBody>
+          <a:bodyPr rtlCol="0" anchor="ctr"/>
+          <a:lstStyle/>
+          <a:p>
+            <a:pPr algn="ctr"/>
+            <a:endParaRPr kumimoji="1" lang="ja-JP" altLang="en-US" dirty="0"/>
+          </a:p>
+        </p:txBody>
+      </p:sp>
+    </p:spTree>
+    <p:extLst>
+      <p:ext uri="{BB962C8B-B14F-4D97-AF65-F5344CB8AC3E}">
+        <p14:creationId xmlns:p14="http://schemas.microsoft.com/office/powerpoint/2010/main" val="785930039"/>
       </p:ext>
     </p:extLst>
   </p:cSld>
@@ -8003,210 +8170,6 @@
         <p:cNvPr id="1" name="">
           <a:extLst>
             <a:ext uri="{FF2B5EF4-FFF2-40B4-BE49-F238E27FC236}">
-              <a16:creationId xmlns:a16="http://schemas.microsoft.com/office/drawing/2014/main" id="{C271332C-4CDE-9C43-848B-B33DDD66CDB6}"/>
-            </a:ext>
-          </a:extLst>
-        </p:cNvPr>
-        <p:cNvGrpSpPr/>
-        <p:nvPr/>
-      </p:nvGrpSpPr>
-      <p:grpSpPr>
-        <a:xfrm>
-          <a:off x="0" y="0"/>
-          <a:ext cx="0" cy="0"/>
-          <a:chOff x="0" y="0"/>
-          <a:chExt cx="0" cy="0"/>
-        </a:xfrm>
-      </p:grpSpPr>
-      <p:pic>
-        <p:nvPicPr>
-          <p:cNvPr id="3" name="図 2">
-            <a:extLst>
-              <a:ext uri="{FF2B5EF4-FFF2-40B4-BE49-F238E27FC236}">
-                <a16:creationId xmlns:a16="http://schemas.microsoft.com/office/drawing/2014/main" id="{21ABFEF9-6905-BB44-FEC9-C7AE57B0E10E}"/>
-              </a:ext>
-            </a:extLst>
-          </p:cNvPr>
-          <p:cNvPicPr>
-            <a:picLocks noChangeAspect="1"/>
-          </p:cNvPicPr>
-          <p:nvPr/>
-        </p:nvPicPr>
-        <p:blipFill>
-          <a:blip r:embed="rId2">
-            <a:extLst>
-              <a:ext uri="{28A0092B-C50C-407E-A947-70E740481C1C}">
-                <a14:useLocalDpi xmlns:a14="http://schemas.microsoft.com/office/drawing/2010/main" val="0"/>
-              </a:ext>
-            </a:extLst>
-          </a:blip>
-          <a:stretch>
-            <a:fillRect/>
-          </a:stretch>
-        </p:blipFill>
-        <p:spPr>
-          <a:xfrm>
-            <a:off x="4062412" y="2000250"/>
-            <a:ext cx="4067175" cy="2857500"/>
-          </a:xfrm>
-          <a:prstGeom prst="rect">
-            <a:avLst/>
-          </a:prstGeom>
-        </p:spPr>
-      </p:pic>
-      <p:pic>
-        <p:nvPicPr>
-          <p:cNvPr id="15" name="図 14">
-            <a:extLst>
-              <a:ext uri="{FF2B5EF4-FFF2-40B4-BE49-F238E27FC236}">
-                <a16:creationId xmlns:a16="http://schemas.microsoft.com/office/drawing/2014/main" id="{329B5375-B548-7C91-A648-7DE142D405E5}"/>
-              </a:ext>
-            </a:extLst>
-          </p:cNvPr>
-          <p:cNvPicPr>
-            <a:picLocks noChangeAspect="1"/>
-          </p:cNvPicPr>
-          <p:nvPr/>
-        </p:nvPicPr>
-        <p:blipFill>
-          <a:blip r:embed="rId3">
-            <a:extLst>
-              <a:ext uri="{28A0092B-C50C-407E-A947-70E740481C1C}">
-                <a14:useLocalDpi xmlns:a14="http://schemas.microsoft.com/office/drawing/2010/main" val="0"/>
-              </a:ext>
-            </a:extLst>
-          </a:blip>
-          <a:stretch>
-            <a:fillRect/>
-          </a:stretch>
-        </p:blipFill>
-        <p:spPr>
-          <a:xfrm>
-            <a:off x="4864845" y="2723762"/>
-            <a:ext cx="3152775" cy="723900"/>
-          </a:xfrm>
-          <a:prstGeom prst="rect">
-            <a:avLst/>
-          </a:prstGeom>
-        </p:spPr>
-      </p:pic>
-      <p:sp>
-        <p:nvSpPr>
-          <p:cNvPr id="4" name="正方形/長方形 3">
-            <a:extLst>
-              <a:ext uri="{FF2B5EF4-FFF2-40B4-BE49-F238E27FC236}">
-                <a16:creationId xmlns:a16="http://schemas.microsoft.com/office/drawing/2014/main" id="{0976FBC9-9102-6DF7-353F-136BDB55F8AA}"/>
-              </a:ext>
-            </a:extLst>
-          </p:cNvPr>
-          <p:cNvSpPr/>
-          <p:nvPr/>
-        </p:nvSpPr>
-        <p:spPr>
-          <a:xfrm flipV="1">
-            <a:off x="4567045" y="4197026"/>
-            <a:ext cx="3562542" cy="309659"/>
-          </a:xfrm>
-          <a:prstGeom prst="rect">
-            <a:avLst/>
-          </a:prstGeom>
-          <a:noFill/>
-          <a:ln w="28575">
-            <a:solidFill>
-              <a:srgbClr val="FF0000"/>
-            </a:solidFill>
-          </a:ln>
-        </p:spPr>
-        <p:style>
-          <a:lnRef idx="2">
-            <a:schemeClr val="accent6"/>
-          </a:lnRef>
-          <a:fillRef idx="1">
-            <a:schemeClr val="lt1"/>
-          </a:fillRef>
-          <a:effectRef idx="0">
-            <a:schemeClr val="accent6"/>
-          </a:effectRef>
-          <a:fontRef idx="minor">
-            <a:schemeClr val="dk1"/>
-          </a:fontRef>
-        </p:style>
-        <p:txBody>
-          <a:bodyPr rtlCol="0" anchor="ctr"/>
-          <a:lstStyle/>
-          <a:p>
-            <a:pPr algn="ctr"/>
-            <a:endParaRPr kumimoji="1" lang="ja-JP" altLang="en-US"/>
-          </a:p>
-        </p:txBody>
-      </p:sp>
-      <p:sp>
-        <p:nvSpPr>
-          <p:cNvPr id="6" name="正方形/長方形 5">
-            <a:extLst>
-              <a:ext uri="{FF2B5EF4-FFF2-40B4-BE49-F238E27FC236}">
-                <a16:creationId xmlns:a16="http://schemas.microsoft.com/office/drawing/2014/main" id="{96DE9728-0D2E-3058-FDA1-1EB30DCC75F3}"/>
-              </a:ext>
-            </a:extLst>
-          </p:cNvPr>
-          <p:cNvSpPr/>
-          <p:nvPr/>
-        </p:nvSpPr>
-        <p:spPr>
-          <a:xfrm>
-            <a:off x="6235955" y="3023117"/>
-            <a:ext cx="873972" cy="186612"/>
-          </a:xfrm>
-          <a:prstGeom prst="rect">
-            <a:avLst/>
-          </a:prstGeom>
-        </p:spPr>
-        <p:style>
-          <a:lnRef idx="2">
-            <a:schemeClr val="dk1">
-              <a:shade val="15000"/>
-            </a:schemeClr>
-          </a:lnRef>
-          <a:fillRef idx="1">
-            <a:schemeClr val="dk1"/>
-          </a:fillRef>
-          <a:effectRef idx="0">
-            <a:schemeClr val="dk1"/>
-          </a:effectRef>
-          <a:fontRef idx="minor">
-            <a:schemeClr val="lt1"/>
-          </a:fontRef>
-        </p:style>
-        <p:txBody>
-          <a:bodyPr rtlCol="0" anchor="ctr"/>
-          <a:lstStyle/>
-          <a:p>
-            <a:pPr algn="ctr"/>
-            <a:endParaRPr kumimoji="1" lang="ja-JP" altLang="en-US" dirty="0"/>
-          </a:p>
-        </p:txBody>
-      </p:sp>
-    </p:spTree>
-    <p:extLst>
-      <p:ext uri="{BB962C8B-B14F-4D97-AF65-F5344CB8AC3E}">
-        <p14:creationId xmlns:p14="http://schemas.microsoft.com/office/powerpoint/2010/main" val="785930039"/>
-      </p:ext>
-    </p:extLst>
-  </p:cSld>
-  <p:clrMapOvr>
-    <a:masterClrMapping/>
-  </p:clrMapOvr>
-</p:sld>
-</file>
-
-<file path=ppt/slides/slide121.xml><?xml version="1.0" encoding="utf-8"?>
-<p:sld xmlns:a="http://schemas.openxmlformats.org/drawingml/2006/main" xmlns:r="http://schemas.openxmlformats.org/officeDocument/2006/relationships" xmlns:p="http://schemas.openxmlformats.org/presentationml/2006/main">
-  <p:cSld>
-    <p:spTree>
-      <p:nvGrpSpPr>
-        <p:cNvPr id="1" name="">
-          <a:extLst>
-            <a:ext uri="{FF2B5EF4-FFF2-40B4-BE49-F238E27FC236}">
               <a16:creationId xmlns:a16="http://schemas.microsoft.com/office/drawing/2014/main" id="{44213A13-0E67-F602-0AA2-4B88632C7E97}"/>
             </a:ext>
           </a:extLst>
@@ -8271,7 +8234,7 @@
 </p:sld>
 </file>
 
-<file path=ppt/slides/slide122.xml><?xml version="1.0" encoding="utf-8"?>
+<file path=ppt/slides/slide121.xml><?xml version="1.0" encoding="utf-8"?>
 <p:sld xmlns:a="http://schemas.openxmlformats.org/drawingml/2006/main" xmlns:r="http://schemas.openxmlformats.org/officeDocument/2006/relationships" xmlns:p="http://schemas.openxmlformats.org/presentationml/2006/main">
   <p:cSld>
     <p:spTree>
@@ -8393,7 +8356,7 @@
 </p:sld>
 </file>
 
-<file path=ppt/slides/slide123.xml><?xml version="1.0" encoding="utf-8"?>
+<file path=ppt/slides/slide122.xml><?xml version="1.0" encoding="utf-8"?>
 <p:sld xmlns:a="http://schemas.openxmlformats.org/drawingml/2006/main" xmlns:r="http://schemas.openxmlformats.org/officeDocument/2006/relationships" xmlns:p="http://schemas.openxmlformats.org/presentationml/2006/main">
   <p:cSld>
     <p:spTree>
@@ -8515,7 +8478,7 @@
 </p:sld>
 </file>
 
-<file path=ppt/slides/slide124.xml><?xml version="1.0" encoding="utf-8"?>
+<file path=ppt/slides/slide123.xml><?xml version="1.0" encoding="utf-8"?>
 <p:sld xmlns:a="http://schemas.openxmlformats.org/drawingml/2006/main" xmlns:r="http://schemas.openxmlformats.org/officeDocument/2006/relationships" xmlns:p="http://schemas.openxmlformats.org/presentationml/2006/main">
   <p:cSld>
     <p:spTree>
@@ -8733,7 +8696,7 @@
 </p:sld>
 </file>
 
-<file path=ppt/slides/slide125.xml><?xml version="1.0" encoding="utf-8"?>
+<file path=ppt/slides/slide124.xml><?xml version="1.0" encoding="utf-8"?>
 <p:sld xmlns:a="http://schemas.openxmlformats.org/drawingml/2006/main" xmlns:r="http://schemas.openxmlformats.org/officeDocument/2006/relationships" xmlns:p="http://schemas.openxmlformats.org/presentationml/2006/main">
   <p:cSld>
     <p:spTree>
@@ -8769,7 +8732,7 @@
 </p:sld>
 </file>
 
-<file path=ppt/slides/slide126.xml><?xml version="1.0" encoding="utf-8"?>
+<file path=ppt/slides/slide125.xml><?xml version="1.0" encoding="utf-8"?>
 <p:sld xmlns:a="http://schemas.openxmlformats.org/drawingml/2006/main" xmlns:r="http://schemas.openxmlformats.org/officeDocument/2006/relationships" xmlns:p="http://schemas.openxmlformats.org/presentationml/2006/main">
   <p:cSld>
     <p:spTree>
@@ -9136,7 +9099,7 @@
 </p:sld>
 </file>
 
-<file path=ppt/slides/slide127.xml><?xml version="1.0" encoding="utf-8"?>
+<file path=ppt/slides/slide126.xml><?xml version="1.0" encoding="utf-8"?>
 <p:sld xmlns:a="http://schemas.openxmlformats.org/drawingml/2006/main" xmlns:r="http://schemas.openxmlformats.org/officeDocument/2006/relationships" xmlns:p="http://schemas.openxmlformats.org/presentationml/2006/main">
   <p:cSld>
     <p:spTree>
@@ -9490,7 +9453,7 @@
 </p:sld>
 </file>
 
-<file path=ppt/slides/slide128.xml><?xml version="1.0" encoding="utf-8"?>
+<file path=ppt/slides/slide127.xml><?xml version="1.0" encoding="utf-8"?>
 <p:sld xmlns:a="http://schemas.openxmlformats.org/drawingml/2006/main" xmlns:r="http://schemas.openxmlformats.org/officeDocument/2006/relationships" xmlns:p="http://schemas.openxmlformats.org/presentationml/2006/main">
   <p:cSld>
     <p:spTree>
@@ -9687,7 +9650,7 @@
 </p:sld>
 </file>
 
-<file path=ppt/slides/slide129.xml><?xml version="1.0" encoding="utf-8"?>
+<file path=ppt/slides/slide128.xml><?xml version="1.0" encoding="utf-8"?>
 <p:sld xmlns:a="http://schemas.openxmlformats.org/drawingml/2006/main" xmlns:r="http://schemas.openxmlformats.org/officeDocument/2006/relationships" xmlns:p="http://schemas.openxmlformats.org/presentationml/2006/main">
   <p:cSld>
     <p:spTree>
@@ -9794,6 +9757,184 @@
     <p:extLst>
       <p:ext uri="{BB962C8B-B14F-4D97-AF65-F5344CB8AC3E}">
         <p14:creationId xmlns:p14="http://schemas.microsoft.com/office/powerpoint/2010/main" val="3218276701"/>
+      </p:ext>
+    </p:extLst>
+  </p:cSld>
+  <p:clrMapOvr>
+    <a:masterClrMapping/>
+  </p:clrMapOvr>
+</p:sld>
+</file>
+
+<file path=ppt/slides/slide129.xml><?xml version="1.0" encoding="utf-8"?>
+<p:sld xmlns:a="http://schemas.openxmlformats.org/drawingml/2006/main" xmlns:r="http://schemas.openxmlformats.org/officeDocument/2006/relationships" xmlns:p="http://schemas.openxmlformats.org/presentationml/2006/main">
+  <p:cSld>
+    <p:spTree>
+      <p:nvGrpSpPr>
+        <p:cNvPr id="1" name="">
+          <a:extLst>
+            <a:ext uri="{FF2B5EF4-FFF2-40B4-BE49-F238E27FC236}">
+              <a16:creationId xmlns:a16="http://schemas.microsoft.com/office/drawing/2014/main" id="{A541EC57-574E-505F-899A-EE0835DF7A7E}"/>
+            </a:ext>
+          </a:extLst>
+        </p:cNvPr>
+        <p:cNvGrpSpPr/>
+        <p:nvPr/>
+      </p:nvGrpSpPr>
+      <p:grpSpPr>
+        <a:xfrm>
+          <a:off x="0" y="0"/>
+          <a:ext cx="0" cy="0"/>
+          <a:chOff x="0" y="0"/>
+          <a:chExt cx="0" cy="0"/>
+        </a:xfrm>
+      </p:grpSpPr>
+      <p:sp>
+        <p:nvSpPr>
+          <p:cNvPr id="2" name="正方形/長方形 1">
+            <a:extLst>
+              <a:ext uri="{FF2B5EF4-FFF2-40B4-BE49-F238E27FC236}">
+                <a16:creationId xmlns:a16="http://schemas.microsoft.com/office/drawing/2014/main" id="{4C66B004-6E66-EF6B-84F5-C204982FF942}"/>
+              </a:ext>
+            </a:extLst>
+          </p:cNvPr>
+          <p:cNvSpPr/>
+          <p:nvPr/>
+        </p:nvSpPr>
+        <p:spPr>
+          <a:xfrm>
+            <a:off x="3470986" y="1530219"/>
+            <a:ext cx="7200000" cy="1380931"/>
+          </a:xfrm>
+          <a:prstGeom prst="rect">
+            <a:avLst/>
+          </a:prstGeom>
+          <a:solidFill>
+            <a:schemeClr val="tx1"/>
+          </a:solidFill>
+          <a:ln>
+            <a:solidFill>
+              <a:schemeClr val="tx1"/>
+            </a:solidFill>
+          </a:ln>
+        </p:spPr>
+        <p:style>
+          <a:lnRef idx="2">
+            <a:schemeClr val="accent6"/>
+          </a:lnRef>
+          <a:fillRef idx="1">
+            <a:schemeClr val="lt1"/>
+          </a:fillRef>
+          <a:effectRef idx="0">
+            <a:schemeClr val="accent6"/>
+          </a:effectRef>
+          <a:fontRef idx="minor">
+            <a:schemeClr val="dk1"/>
+          </a:fontRef>
+        </p:style>
+        <p:txBody>
+          <a:bodyPr rtlCol="0" anchor="t"/>
+          <a:lstStyle/>
+          <a:p>
+            <a:r>
+              <a:rPr lang="en-US" altLang="ja-JP" sz="1400" dirty="0">
+                <a:solidFill>
+                  <a:schemeClr val="bg1"/>
+                </a:solidFill>
+              </a:rPr>
+              <a:t>C:\git-test&gt;git commit -m "</a:t>
+            </a:r>
+            <a:r>
+              <a:rPr lang="ja-JP" altLang="en-US" sz="1400" dirty="0">
+                <a:solidFill>
+                  <a:schemeClr val="bg1"/>
+                </a:solidFill>
+              </a:rPr>
+              <a:t>テストデータ登録</a:t>
+            </a:r>
+            <a:r>
+              <a:rPr lang="en-US" altLang="ja-JP" sz="1400" dirty="0">
+                <a:solidFill>
+                  <a:schemeClr val="bg1"/>
+                </a:solidFill>
+              </a:rPr>
+              <a:t>"</a:t>
+            </a:r>
+          </a:p>
+          <a:p>
+            <a:r>
+              <a:rPr lang="en-US" altLang="ja-JP" sz="1400" dirty="0">
+                <a:solidFill>
+                  <a:schemeClr val="bg1"/>
+                </a:solidFill>
+              </a:rPr>
+              <a:t>[master (root-commit) 9e326ae] </a:t>
+            </a:r>
+            <a:r>
+              <a:rPr lang="ja-JP" altLang="en-US" sz="1400" dirty="0">
+                <a:solidFill>
+                  <a:schemeClr val="bg1"/>
+                </a:solidFill>
+              </a:rPr>
+              <a:t>テストデータ登録</a:t>
+            </a:r>
+          </a:p>
+          <a:p>
+            <a:r>
+              <a:rPr lang="ja-JP" altLang="en-US" sz="1400" dirty="0">
+                <a:solidFill>
+                  <a:schemeClr val="bg1"/>
+                </a:solidFill>
+              </a:rPr>
+              <a:t> </a:t>
+            </a:r>
+            <a:r>
+              <a:rPr lang="en-US" altLang="ja-JP" sz="1400" dirty="0">
+                <a:solidFill>
+                  <a:schemeClr val="bg1"/>
+                </a:solidFill>
+              </a:rPr>
+              <a:t>1 file changed, 1 insertion(+)</a:t>
+            </a:r>
+          </a:p>
+          <a:p>
+            <a:r>
+              <a:rPr lang="en-US" altLang="ja-JP" sz="1400" dirty="0">
+                <a:solidFill>
+                  <a:schemeClr val="bg1"/>
+                </a:solidFill>
+              </a:rPr>
+              <a:t> create mode 100644 test.txt</a:t>
+            </a:r>
+          </a:p>
+          <a:p>
+            <a:endParaRPr lang="en-US" altLang="ja-JP" sz="1400" dirty="0">
+              <a:solidFill>
+                <a:schemeClr val="bg1"/>
+              </a:solidFill>
+            </a:endParaRPr>
+          </a:p>
+          <a:p>
+            <a:r>
+              <a:rPr lang="en-US" altLang="ja-JP" sz="1400" dirty="0">
+                <a:solidFill>
+                  <a:schemeClr val="bg1"/>
+                </a:solidFill>
+              </a:rPr>
+              <a:t>C:\git-test&gt;</a:t>
+            </a:r>
+            <a:endParaRPr kumimoji="1" lang="ja-JP" altLang="en-US" sz="1400" dirty="0">
+              <a:solidFill>
+                <a:schemeClr val="bg1"/>
+              </a:solidFill>
+            </a:endParaRPr>
+          </a:p>
+        </p:txBody>
+      </p:sp>
+    </p:spTree>
+    <p:extLst>
+      <p:ext uri="{BB962C8B-B14F-4D97-AF65-F5344CB8AC3E}">
+        <p14:creationId xmlns:p14="http://schemas.microsoft.com/office/powerpoint/2010/main" val="2830637044"/>
       </p:ext>
     </p:extLst>
   </p:cSld>
@@ -10691,184 +10832,6 @@
         <p:cNvPr id="1" name="">
           <a:extLst>
             <a:ext uri="{FF2B5EF4-FFF2-40B4-BE49-F238E27FC236}">
-              <a16:creationId xmlns:a16="http://schemas.microsoft.com/office/drawing/2014/main" id="{A541EC57-574E-505F-899A-EE0835DF7A7E}"/>
-            </a:ext>
-          </a:extLst>
-        </p:cNvPr>
-        <p:cNvGrpSpPr/>
-        <p:nvPr/>
-      </p:nvGrpSpPr>
-      <p:grpSpPr>
-        <a:xfrm>
-          <a:off x="0" y="0"/>
-          <a:ext cx="0" cy="0"/>
-          <a:chOff x="0" y="0"/>
-          <a:chExt cx="0" cy="0"/>
-        </a:xfrm>
-      </p:grpSpPr>
-      <p:sp>
-        <p:nvSpPr>
-          <p:cNvPr id="2" name="正方形/長方形 1">
-            <a:extLst>
-              <a:ext uri="{FF2B5EF4-FFF2-40B4-BE49-F238E27FC236}">
-                <a16:creationId xmlns:a16="http://schemas.microsoft.com/office/drawing/2014/main" id="{4C66B004-6E66-EF6B-84F5-C204982FF942}"/>
-              </a:ext>
-            </a:extLst>
-          </p:cNvPr>
-          <p:cNvSpPr/>
-          <p:nvPr/>
-        </p:nvSpPr>
-        <p:spPr>
-          <a:xfrm>
-            <a:off x="3470986" y="1530219"/>
-            <a:ext cx="7200000" cy="1380931"/>
-          </a:xfrm>
-          <a:prstGeom prst="rect">
-            <a:avLst/>
-          </a:prstGeom>
-          <a:solidFill>
-            <a:schemeClr val="tx1"/>
-          </a:solidFill>
-          <a:ln>
-            <a:solidFill>
-              <a:schemeClr val="tx1"/>
-            </a:solidFill>
-          </a:ln>
-        </p:spPr>
-        <p:style>
-          <a:lnRef idx="2">
-            <a:schemeClr val="accent6"/>
-          </a:lnRef>
-          <a:fillRef idx="1">
-            <a:schemeClr val="lt1"/>
-          </a:fillRef>
-          <a:effectRef idx="0">
-            <a:schemeClr val="accent6"/>
-          </a:effectRef>
-          <a:fontRef idx="minor">
-            <a:schemeClr val="dk1"/>
-          </a:fontRef>
-        </p:style>
-        <p:txBody>
-          <a:bodyPr rtlCol="0" anchor="t"/>
-          <a:lstStyle/>
-          <a:p>
-            <a:r>
-              <a:rPr lang="en-US" altLang="ja-JP" sz="1400" dirty="0">
-                <a:solidFill>
-                  <a:schemeClr val="bg1"/>
-                </a:solidFill>
-              </a:rPr>
-              <a:t>C:\git-test&gt;git commit -m "</a:t>
-            </a:r>
-            <a:r>
-              <a:rPr lang="ja-JP" altLang="en-US" sz="1400" dirty="0">
-                <a:solidFill>
-                  <a:schemeClr val="bg1"/>
-                </a:solidFill>
-              </a:rPr>
-              <a:t>テストデータ登録</a:t>
-            </a:r>
-            <a:r>
-              <a:rPr lang="en-US" altLang="ja-JP" sz="1400" dirty="0">
-                <a:solidFill>
-                  <a:schemeClr val="bg1"/>
-                </a:solidFill>
-              </a:rPr>
-              <a:t>"</a:t>
-            </a:r>
-          </a:p>
-          <a:p>
-            <a:r>
-              <a:rPr lang="en-US" altLang="ja-JP" sz="1400" dirty="0">
-                <a:solidFill>
-                  <a:schemeClr val="bg1"/>
-                </a:solidFill>
-              </a:rPr>
-              <a:t>[master (root-commit) 9e326ae] </a:t>
-            </a:r>
-            <a:r>
-              <a:rPr lang="ja-JP" altLang="en-US" sz="1400" dirty="0">
-                <a:solidFill>
-                  <a:schemeClr val="bg1"/>
-                </a:solidFill>
-              </a:rPr>
-              <a:t>テストデータ登録</a:t>
-            </a:r>
-          </a:p>
-          <a:p>
-            <a:r>
-              <a:rPr lang="ja-JP" altLang="en-US" sz="1400" dirty="0">
-                <a:solidFill>
-                  <a:schemeClr val="bg1"/>
-                </a:solidFill>
-              </a:rPr>
-              <a:t> </a:t>
-            </a:r>
-            <a:r>
-              <a:rPr lang="en-US" altLang="ja-JP" sz="1400" dirty="0">
-                <a:solidFill>
-                  <a:schemeClr val="bg1"/>
-                </a:solidFill>
-              </a:rPr>
-              <a:t>1 file changed, 1 insertion(+)</a:t>
-            </a:r>
-          </a:p>
-          <a:p>
-            <a:r>
-              <a:rPr lang="en-US" altLang="ja-JP" sz="1400" dirty="0">
-                <a:solidFill>
-                  <a:schemeClr val="bg1"/>
-                </a:solidFill>
-              </a:rPr>
-              <a:t> create mode 100644 test.txt</a:t>
-            </a:r>
-          </a:p>
-          <a:p>
-            <a:endParaRPr lang="en-US" altLang="ja-JP" sz="1400" dirty="0">
-              <a:solidFill>
-                <a:schemeClr val="bg1"/>
-              </a:solidFill>
-            </a:endParaRPr>
-          </a:p>
-          <a:p>
-            <a:r>
-              <a:rPr lang="en-US" altLang="ja-JP" sz="1400" dirty="0">
-                <a:solidFill>
-                  <a:schemeClr val="bg1"/>
-                </a:solidFill>
-              </a:rPr>
-              <a:t>C:\git-test&gt;</a:t>
-            </a:r>
-            <a:endParaRPr kumimoji="1" lang="ja-JP" altLang="en-US" sz="1400" dirty="0">
-              <a:solidFill>
-                <a:schemeClr val="bg1"/>
-              </a:solidFill>
-            </a:endParaRPr>
-          </a:p>
-        </p:txBody>
-      </p:sp>
-    </p:spTree>
-    <p:extLst>
-      <p:ext uri="{BB962C8B-B14F-4D97-AF65-F5344CB8AC3E}">
-        <p14:creationId xmlns:p14="http://schemas.microsoft.com/office/powerpoint/2010/main" val="2830637044"/>
-      </p:ext>
-    </p:extLst>
-  </p:cSld>
-  <p:clrMapOvr>
-    <a:masterClrMapping/>
-  </p:clrMapOvr>
-</p:sld>
-</file>
-
-<file path=ppt/slides/slide131.xml><?xml version="1.0" encoding="utf-8"?>
-<p:sld xmlns:a="http://schemas.openxmlformats.org/drawingml/2006/main" xmlns:r="http://schemas.openxmlformats.org/officeDocument/2006/relationships" xmlns:p="http://schemas.openxmlformats.org/presentationml/2006/main">
-  <p:cSld>
-    <p:spTree>
-      <p:nvGrpSpPr>
-        <p:cNvPr id="1" name="">
-          <a:extLst>
-            <a:ext uri="{FF2B5EF4-FFF2-40B4-BE49-F238E27FC236}">
               <a16:creationId xmlns:a16="http://schemas.microsoft.com/office/drawing/2014/main" id="{0BB99027-BF16-D5DE-0CE0-52E78B5EAC16}"/>
             </a:ext>
           </a:extLst>
@@ -10897,7 +10860,7 @@
 </p:sld>
 </file>
 
-<file path=ppt/slides/slide132.xml><?xml version="1.0" encoding="utf-8"?>
+<file path=ppt/slides/slide131.xml><?xml version="1.0" encoding="utf-8"?>
 <p:sld xmlns:a="http://schemas.openxmlformats.org/drawingml/2006/main" xmlns:r="http://schemas.openxmlformats.org/officeDocument/2006/relationships" xmlns:p="http://schemas.openxmlformats.org/presentationml/2006/main">
   <p:cSld>
     <p:spTree>
@@ -11319,7 +11282,7 @@
 </p:sld>
 </file>
 
-<file path=ppt/slides/slide133.xml><?xml version="1.0" encoding="utf-8"?>
+<file path=ppt/slides/slide132.xml><?xml version="1.0" encoding="utf-8"?>
 <p:sld xmlns:a="http://schemas.openxmlformats.org/drawingml/2006/main" xmlns:r="http://schemas.openxmlformats.org/officeDocument/2006/relationships" xmlns:p="http://schemas.openxmlformats.org/presentationml/2006/main">
   <p:cSld>
     <p:spTree>
@@ -11531,7 +11494,7 @@
 </p:sld>
 </file>
 
-<file path=ppt/slides/slide134.xml><?xml version="1.0" encoding="utf-8"?>
+<file path=ppt/slides/slide133.xml><?xml version="1.0" encoding="utf-8"?>
 <p:sld xmlns:a="http://schemas.openxmlformats.org/drawingml/2006/main" xmlns:r="http://schemas.openxmlformats.org/officeDocument/2006/relationships" xmlns:p="http://schemas.openxmlformats.org/presentationml/2006/main">
   <p:cSld>
     <p:spTree>
@@ -11743,7 +11706,7 @@
 </p:sld>
 </file>
 
-<file path=ppt/slides/slide135.xml><?xml version="1.0" encoding="utf-8"?>
+<file path=ppt/slides/slide134.xml><?xml version="1.0" encoding="utf-8"?>
 <p:sld xmlns:a="http://schemas.openxmlformats.org/drawingml/2006/main" xmlns:r="http://schemas.openxmlformats.org/officeDocument/2006/relationships" xmlns:p="http://schemas.openxmlformats.org/presentationml/2006/main">
   <p:cSld>
     <p:spTree>
@@ -11955,7 +11918,7 @@
 </p:sld>
 </file>
 
-<file path=ppt/slides/slide136.xml><?xml version="1.0" encoding="utf-8"?>
+<file path=ppt/slides/slide135.xml><?xml version="1.0" encoding="utf-8"?>
 <p:sld xmlns:a="http://schemas.openxmlformats.org/drawingml/2006/main" xmlns:r="http://schemas.openxmlformats.org/officeDocument/2006/relationships" xmlns:p="http://schemas.openxmlformats.org/presentationml/2006/main">
   <p:cSld>
     <p:spTree>
@@ -11991,7 +11954,7 @@
 </p:sld>
 </file>
 
-<file path=ppt/slides/slide137.xml><?xml version="1.0" encoding="utf-8"?>
+<file path=ppt/slides/slide136.xml><?xml version="1.0" encoding="utf-8"?>
 <p:sld xmlns:a="http://schemas.openxmlformats.org/drawingml/2006/main" xmlns:r="http://schemas.openxmlformats.org/officeDocument/2006/relationships" xmlns:p="http://schemas.openxmlformats.org/presentationml/2006/main">
   <p:cSld>
     <p:spTree>
@@ -12170,7 +12133,7 @@
 </p:sld>
 </file>
 
-<file path=ppt/slides/slide138.xml><?xml version="1.0" encoding="utf-8"?>
+<file path=ppt/slides/slide137.xml><?xml version="1.0" encoding="utf-8"?>
 <p:sld xmlns:a="http://schemas.openxmlformats.org/drawingml/2006/main" xmlns:r="http://schemas.openxmlformats.org/officeDocument/2006/relationships" xmlns:p="http://schemas.openxmlformats.org/presentationml/2006/main">
   <p:cSld>
     <p:spTree>
@@ -12375,7 +12338,7 @@
 </p:sld>
 </file>
 
-<file path=ppt/slides/slide139.xml><?xml version="1.0" encoding="utf-8"?>
+<file path=ppt/slides/slide138.xml><?xml version="1.0" encoding="utf-8"?>
 <p:sld xmlns:a="http://schemas.openxmlformats.org/drawingml/2006/main" xmlns:r="http://schemas.openxmlformats.org/officeDocument/2006/relationships" xmlns:p="http://schemas.openxmlformats.org/presentationml/2006/main">
   <p:cSld>
     <p:spTree>
@@ -12677,6 +12640,165 @@
     <p:extLst>
       <p:ext uri="{BB962C8B-B14F-4D97-AF65-F5344CB8AC3E}">
         <p14:creationId xmlns:p14="http://schemas.microsoft.com/office/powerpoint/2010/main" val="1051006001"/>
+      </p:ext>
+    </p:extLst>
+  </p:cSld>
+  <p:clrMapOvr>
+    <a:masterClrMapping/>
+  </p:clrMapOvr>
+</p:sld>
+</file>
+
+<file path=ppt/slides/slide139.xml><?xml version="1.0" encoding="utf-8"?>
+<p:sld xmlns:a="http://schemas.openxmlformats.org/drawingml/2006/main" xmlns:r="http://schemas.openxmlformats.org/officeDocument/2006/relationships" xmlns:p="http://schemas.openxmlformats.org/presentationml/2006/main">
+  <p:cSld>
+    <p:spTree>
+      <p:nvGrpSpPr>
+        <p:cNvPr id="1" name="">
+          <a:extLst>
+            <a:ext uri="{FF2B5EF4-FFF2-40B4-BE49-F238E27FC236}">
+              <a16:creationId xmlns:a16="http://schemas.microsoft.com/office/drawing/2014/main" id="{19240F6A-0F09-69DF-6080-4AAF0F2296B2}"/>
+            </a:ext>
+          </a:extLst>
+        </p:cNvPr>
+        <p:cNvGrpSpPr/>
+        <p:nvPr/>
+      </p:nvGrpSpPr>
+      <p:grpSpPr>
+        <a:xfrm>
+          <a:off x="0" y="0"/>
+          <a:ext cx="0" cy="0"/>
+          <a:chOff x="0" y="0"/>
+          <a:chExt cx="0" cy="0"/>
+        </a:xfrm>
+      </p:grpSpPr>
+      <p:sp>
+        <p:nvSpPr>
+          <p:cNvPr id="2" name="正方形/長方形 1">
+            <a:extLst>
+              <a:ext uri="{FF2B5EF4-FFF2-40B4-BE49-F238E27FC236}">
+                <a16:creationId xmlns:a16="http://schemas.microsoft.com/office/drawing/2014/main" id="{D9492C21-5D16-A915-1BAC-1C6D4BD53041}"/>
+              </a:ext>
+            </a:extLst>
+          </p:cNvPr>
+          <p:cNvSpPr/>
+          <p:nvPr/>
+        </p:nvSpPr>
+        <p:spPr>
+          <a:xfrm>
+            <a:off x="3470986" y="1530220"/>
+            <a:ext cx="7200000" cy="1567544"/>
+          </a:xfrm>
+          <a:prstGeom prst="rect">
+            <a:avLst/>
+          </a:prstGeom>
+          <a:solidFill>
+            <a:schemeClr val="tx1"/>
+          </a:solidFill>
+          <a:ln>
+            <a:solidFill>
+              <a:schemeClr val="tx1"/>
+            </a:solidFill>
+          </a:ln>
+        </p:spPr>
+        <p:style>
+          <a:lnRef idx="2">
+            <a:schemeClr val="accent6"/>
+          </a:lnRef>
+          <a:fillRef idx="1">
+            <a:schemeClr val="lt1"/>
+          </a:fillRef>
+          <a:effectRef idx="0">
+            <a:schemeClr val="accent6"/>
+          </a:effectRef>
+          <a:fontRef idx="minor">
+            <a:schemeClr val="dk1"/>
+          </a:fontRef>
+        </p:style>
+        <p:txBody>
+          <a:bodyPr rtlCol="0" anchor="t"/>
+          <a:lstStyle/>
+          <a:p>
+            <a:r>
+              <a:rPr lang="en-US" altLang="ja-JP" sz="1400" dirty="0">
+                <a:solidFill>
+                  <a:schemeClr val="bg1"/>
+                </a:solidFill>
+              </a:rPr>
+              <a:t>C:\git-test-remote&gt;git merge origin/</a:t>
+            </a:r>
+            <a:r>
+              <a:rPr lang="en-US" altLang="ja-JP" sz="1400" dirty="0" err="1">
+                <a:solidFill>
+                  <a:schemeClr val="bg1"/>
+                </a:solidFill>
+              </a:rPr>
+              <a:t>branchX</a:t>
+            </a:r>
+            <a:endParaRPr lang="en-US" altLang="ja-JP" sz="1400" dirty="0">
+              <a:solidFill>
+                <a:schemeClr val="bg1"/>
+              </a:solidFill>
+            </a:endParaRPr>
+          </a:p>
+          <a:p>
+            <a:r>
+              <a:rPr lang="en-US" altLang="ja-JP" sz="1400" dirty="0">
+                <a:solidFill>
+                  <a:schemeClr val="bg1"/>
+                </a:solidFill>
+              </a:rPr>
+              <a:t>Auto-merging test.txt</a:t>
+            </a:r>
+          </a:p>
+          <a:p>
+            <a:r>
+              <a:rPr lang="en-US" altLang="ja-JP" sz="1400" dirty="0">
+                <a:solidFill>
+                  <a:schemeClr val="bg1"/>
+                </a:solidFill>
+              </a:rPr>
+              <a:t>CONFLICT (content): Merge conflict in test.txt</a:t>
+            </a:r>
+          </a:p>
+          <a:p>
+            <a:r>
+              <a:rPr lang="en-US" altLang="ja-JP" sz="1400" dirty="0">
+                <a:solidFill>
+                  <a:schemeClr val="bg1"/>
+                </a:solidFill>
+              </a:rPr>
+              <a:t>Automatic merge failed; fix conflicts and then commit the result.</a:t>
+            </a:r>
+          </a:p>
+          <a:p>
+            <a:endParaRPr kumimoji="1" lang="en-US" altLang="ja-JP" sz="1400" dirty="0">
+              <a:solidFill>
+                <a:schemeClr val="bg1"/>
+              </a:solidFill>
+            </a:endParaRPr>
+          </a:p>
+          <a:p>
+            <a:r>
+              <a:rPr lang="en-US" altLang="ja-JP" sz="1400" dirty="0">
+                <a:solidFill>
+                  <a:schemeClr val="bg1"/>
+                </a:solidFill>
+              </a:rPr>
+              <a:t>C:\git-test-remote&gt;</a:t>
+            </a:r>
+            <a:endParaRPr kumimoji="1" lang="ja-JP" altLang="en-US" sz="1400" dirty="0">
+              <a:solidFill>
+                <a:schemeClr val="bg1"/>
+              </a:solidFill>
+            </a:endParaRPr>
+          </a:p>
+        </p:txBody>
+      </p:sp>
+    </p:spTree>
+    <p:extLst>
+      <p:ext uri="{BB962C8B-B14F-4D97-AF65-F5344CB8AC3E}">
+        <p14:creationId xmlns:p14="http://schemas.microsoft.com/office/powerpoint/2010/main" val="2335755136"/>
       </p:ext>
     </p:extLst>
   </p:cSld>
@@ -12906,165 +13028,6 @@
     <p:extLst>
       <p:ext uri="{BB962C8B-B14F-4D97-AF65-F5344CB8AC3E}">
         <p14:creationId xmlns:p14="http://schemas.microsoft.com/office/powerpoint/2010/main" val="2212931319"/>
-      </p:ext>
-    </p:extLst>
-  </p:cSld>
-  <p:clrMapOvr>
-    <a:masterClrMapping/>
-  </p:clrMapOvr>
-</p:sld>
-</file>
-
-<file path=ppt/slides/slide140.xml><?xml version="1.0" encoding="utf-8"?>
-<p:sld xmlns:a="http://schemas.openxmlformats.org/drawingml/2006/main" xmlns:r="http://schemas.openxmlformats.org/officeDocument/2006/relationships" xmlns:p="http://schemas.openxmlformats.org/presentationml/2006/main">
-  <p:cSld>
-    <p:spTree>
-      <p:nvGrpSpPr>
-        <p:cNvPr id="1" name="">
-          <a:extLst>
-            <a:ext uri="{FF2B5EF4-FFF2-40B4-BE49-F238E27FC236}">
-              <a16:creationId xmlns:a16="http://schemas.microsoft.com/office/drawing/2014/main" id="{19240F6A-0F09-69DF-6080-4AAF0F2296B2}"/>
-            </a:ext>
-          </a:extLst>
-        </p:cNvPr>
-        <p:cNvGrpSpPr/>
-        <p:nvPr/>
-      </p:nvGrpSpPr>
-      <p:grpSpPr>
-        <a:xfrm>
-          <a:off x="0" y="0"/>
-          <a:ext cx="0" cy="0"/>
-          <a:chOff x="0" y="0"/>
-          <a:chExt cx="0" cy="0"/>
-        </a:xfrm>
-      </p:grpSpPr>
-      <p:sp>
-        <p:nvSpPr>
-          <p:cNvPr id="2" name="正方形/長方形 1">
-            <a:extLst>
-              <a:ext uri="{FF2B5EF4-FFF2-40B4-BE49-F238E27FC236}">
-                <a16:creationId xmlns:a16="http://schemas.microsoft.com/office/drawing/2014/main" id="{D9492C21-5D16-A915-1BAC-1C6D4BD53041}"/>
-              </a:ext>
-            </a:extLst>
-          </p:cNvPr>
-          <p:cNvSpPr/>
-          <p:nvPr/>
-        </p:nvSpPr>
-        <p:spPr>
-          <a:xfrm>
-            <a:off x="3470986" y="1530220"/>
-            <a:ext cx="7200000" cy="1567544"/>
-          </a:xfrm>
-          <a:prstGeom prst="rect">
-            <a:avLst/>
-          </a:prstGeom>
-          <a:solidFill>
-            <a:schemeClr val="tx1"/>
-          </a:solidFill>
-          <a:ln>
-            <a:solidFill>
-              <a:schemeClr val="tx1"/>
-            </a:solidFill>
-          </a:ln>
-        </p:spPr>
-        <p:style>
-          <a:lnRef idx="2">
-            <a:schemeClr val="accent6"/>
-          </a:lnRef>
-          <a:fillRef idx="1">
-            <a:schemeClr val="lt1"/>
-          </a:fillRef>
-          <a:effectRef idx="0">
-            <a:schemeClr val="accent6"/>
-          </a:effectRef>
-          <a:fontRef idx="minor">
-            <a:schemeClr val="dk1"/>
-          </a:fontRef>
-        </p:style>
-        <p:txBody>
-          <a:bodyPr rtlCol="0" anchor="t"/>
-          <a:lstStyle/>
-          <a:p>
-            <a:r>
-              <a:rPr lang="en-US" altLang="ja-JP" sz="1400" dirty="0">
-                <a:solidFill>
-                  <a:schemeClr val="bg1"/>
-                </a:solidFill>
-              </a:rPr>
-              <a:t>C:\git-test-remote&gt;git merge origin/</a:t>
-            </a:r>
-            <a:r>
-              <a:rPr lang="en-US" altLang="ja-JP" sz="1400" dirty="0" err="1">
-                <a:solidFill>
-                  <a:schemeClr val="bg1"/>
-                </a:solidFill>
-              </a:rPr>
-              <a:t>branchX</a:t>
-            </a:r>
-            <a:endParaRPr lang="en-US" altLang="ja-JP" sz="1400" dirty="0">
-              <a:solidFill>
-                <a:schemeClr val="bg1"/>
-              </a:solidFill>
-            </a:endParaRPr>
-          </a:p>
-          <a:p>
-            <a:r>
-              <a:rPr lang="en-US" altLang="ja-JP" sz="1400" dirty="0">
-                <a:solidFill>
-                  <a:schemeClr val="bg1"/>
-                </a:solidFill>
-              </a:rPr>
-              <a:t>Auto-merging test.txt</a:t>
-            </a:r>
-          </a:p>
-          <a:p>
-            <a:r>
-              <a:rPr lang="en-US" altLang="ja-JP" sz="1400" dirty="0">
-                <a:solidFill>
-                  <a:schemeClr val="bg1"/>
-                </a:solidFill>
-              </a:rPr>
-              <a:t>CONFLICT (content): Merge conflict in test.txt</a:t>
-            </a:r>
-          </a:p>
-          <a:p>
-            <a:r>
-              <a:rPr lang="en-US" altLang="ja-JP" sz="1400" dirty="0">
-                <a:solidFill>
-                  <a:schemeClr val="bg1"/>
-                </a:solidFill>
-              </a:rPr>
-              <a:t>Automatic merge failed; fix conflicts and then commit the result.</a:t>
-            </a:r>
-          </a:p>
-          <a:p>
-            <a:endParaRPr kumimoji="1" lang="en-US" altLang="ja-JP" sz="1400" dirty="0">
-              <a:solidFill>
-                <a:schemeClr val="bg1"/>
-              </a:solidFill>
-            </a:endParaRPr>
-          </a:p>
-          <a:p>
-            <a:r>
-              <a:rPr lang="en-US" altLang="ja-JP" sz="1400" dirty="0">
-                <a:solidFill>
-                  <a:schemeClr val="bg1"/>
-                </a:solidFill>
-              </a:rPr>
-              <a:t>C:\git-test-remote&gt;</a:t>
-            </a:r>
-            <a:endParaRPr kumimoji="1" lang="ja-JP" altLang="en-US" sz="1400" dirty="0">
-              <a:solidFill>
-                <a:schemeClr val="bg1"/>
-              </a:solidFill>
-            </a:endParaRPr>
-          </a:p>
-        </p:txBody>
-      </p:sp>
-    </p:spTree>
-    <p:extLst>
-      <p:ext uri="{BB962C8B-B14F-4D97-AF65-F5344CB8AC3E}">
-        <p14:creationId xmlns:p14="http://schemas.microsoft.com/office/powerpoint/2010/main" val="2335755136"/>
       </p:ext>
     </p:extLst>
   </p:cSld>
@@ -33036,8 +32999,8 @@
         </p:nvSpPr>
         <p:spPr>
           <a:xfrm>
-            <a:off x="-910561" y="660134"/>
-            <a:ext cx="1569660" cy="369332"/>
+            <a:off x="-1321111" y="660134"/>
+            <a:ext cx="2031325" cy="369332"/>
           </a:xfrm>
           <a:prstGeom prst="rect">
             <a:avLst/>
@@ -33056,7 +33019,7 @@
                   <a:srgbClr val="00B050"/>
                 </a:solidFill>
               </a:rPr>
-              <a:t>作業ブランチ</a:t>
+              <a:t>作業中のブランチ</a:t>
             </a:r>
           </a:p>
         </p:txBody>
@@ -33075,8 +33038,8 @@
         </p:nvSpPr>
         <p:spPr>
           <a:xfrm>
-            <a:off x="-911935" y="5718238"/>
-            <a:ext cx="1569660" cy="369332"/>
+            <a:off x="-1321111" y="5718238"/>
+            <a:ext cx="2031325" cy="369332"/>
           </a:xfrm>
           <a:prstGeom prst="rect">
             <a:avLst/>
@@ -33095,7 +33058,7 @@
                   <a:srgbClr val="00B050"/>
                 </a:solidFill>
               </a:rPr>
-              <a:t>作業ブランチ</a:t>
+              <a:t>作業中のブランチ</a:t>
             </a:r>
           </a:p>
         </p:txBody>
@@ -34986,84 +34949,6 @@
       </p:sp>
       <p:sp>
         <p:nvSpPr>
-          <p:cNvPr id="39" name="テキスト ボックス 38">
-            <a:extLst>
-              <a:ext uri="{FF2B5EF4-FFF2-40B4-BE49-F238E27FC236}">
-                <a16:creationId xmlns:a16="http://schemas.microsoft.com/office/drawing/2014/main" id="{1D862111-4B57-5508-6997-7A4AA1054BD2}"/>
-              </a:ext>
-            </a:extLst>
-          </p:cNvPr>
-          <p:cNvSpPr txBox="1"/>
-          <p:nvPr/>
-        </p:nvSpPr>
-        <p:spPr>
-          <a:xfrm>
-            <a:off x="-910561" y="2320992"/>
-            <a:ext cx="1569660" cy="369332"/>
-          </a:xfrm>
-          <a:prstGeom prst="rect">
-            <a:avLst/>
-          </a:prstGeom>
-          <a:noFill/>
-        </p:spPr>
-        <p:txBody>
-          <a:bodyPr wrap="none" rtlCol="0">
-            <a:spAutoFit/>
-          </a:bodyPr>
-          <a:lstStyle/>
-          <a:p>
-            <a:r>
-              <a:rPr kumimoji="1" lang="ja-JP" altLang="en-US" b="1" dirty="0">
-                <a:solidFill>
-                  <a:srgbClr val="00B050"/>
-                </a:solidFill>
-              </a:rPr>
-              <a:t>作業ブランチ</a:t>
-            </a:r>
-          </a:p>
-        </p:txBody>
-      </p:sp>
-      <p:sp>
-        <p:nvSpPr>
-          <p:cNvPr id="41" name="テキスト ボックス 40">
-            <a:extLst>
-              <a:ext uri="{FF2B5EF4-FFF2-40B4-BE49-F238E27FC236}">
-                <a16:creationId xmlns:a16="http://schemas.microsoft.com/office/drawing/2014/main" id="{CEE23E1D-14CA-E014-0A91-02BC78885E3F}"/>
-              </a:ext>
-            </a:extLst>
-          </p:cNvPr>
-          <p:cNvSpPr txBox="1"/>
-          <p:nvPr/>
-        </p:nvSpPr>
-        <p:spPr>
-          <a:xfrm>
-            <a:off x="-911935" y="5718238"/>
-            <a:ext cx="1569660" cy="369332"/>
-          </a:xfrm>
-          <a:prstGeom prst="rect">
-            <a:avLst/>
-          </a:prstGeom>
-          <a:noFill/>
-        </p:spPr>
-        <p:txBody>
-          <a:bodyPr wrap="none" rtlCol="0">
-            <a:spAutoFit/>
-          </a:bodyPr>
-          <a:lstStyle/>
-          <a:p>
-            <a:r>
-              <a:rPr kumimoji="1" lang="ja-JP" altLang="en-US" b="1" dirty="0">
-                <a:solidFill>
-                  <a:srgbClr val="00B050"/>
-                </a:solidFill>
-              </a:rPr>
-              <a:t>作業ブランチ</a:t>
-            </a:r>
-          </a:p>
-        </p:txBody>
-      </p:sp>
-      <p:sp>
-        <p:nvSpPr>
           <p:cNvPr id="59" name="楕円 58">
             <a:extLst>
               <a:ext uri="{FF2B5EF4-FFF2-40B4-BE49-F238E27FC236}">
@@ -35356,6 +35241,84 @@
           </a:fontRef>
         </p:style>
       </p:cxnSp>
+      <p:sp>
+        <p:nvSpPr>
+          <p:cNvPr id="4" name="テキスト ボックス 3">
+            <a:extLst>
+              <a:ext uri="{FF2B5EF4-FFF2-40B4-BE49-F238E27FC236}">
+                <a16:creationId xmlns:a16="http://schemas.microsoft.com/office/drawing/2014/main" id="{1BBE901A-2EC7-5B16-4ADC-E4CAB8A4CAA4}"/>
+              </a:ext>
+            </a:extLst>
+          </p:cNvPr>
+          <p:cNvSpPr txBox="1"/>
+          <p:nvPr/>
+        </p:nvSpPr>
+        <p:spPr>
+          <a:xfrm>
+            <a:off x="-1321111" y="2320992"/>
+            <a:ext cx="2031325" cy="369332"/>
+          </a:xfrm>
+          <a:prstGeom prst="rect">
+            <a:avLst/>
+          </a:prstGeom>
+          <a:noFill/>
+        </p:spPr>
+        <p:txBody>
+          <a:bodyPr wrap="none" rtlCol="0">
+            <a:spAutoFit/>
+          </a:bodyPr>
+          <a:lstStyle/>
+          <a:p>
+            <a:r>
+              <a:rPr kumimoji="1" lang="ja-JP" altLang="en-US" b="1" dirty="0">
+                <a:solidFill>
+                  <a:srgbClr val="00B050"/>
+                </a:solidFill>
+              </a:rPr>
+              <a:t>作業中のブランチ</a:t>
+            </a:r>
+          </a:p>
+        </p:txBody>
+      </p:sp>
+      <p:sp>
+        <p:nvSpPr>
+          <p:cNvPr id="7" name="テキスト ボックス 6">
+            <a:extLst>
+              <a:ext uri="{FF2B5EF4-FFF2-40B4-BE49-F238E27FC236}">
+                <a16:creationId xmlns:a16="http://schemas.microsoft.com/office/drawing/2014/main" id="{A63DD010-1849-BF4D-C91D-894DBAA44257}"/>
+              </a:ext>
+            </a:extLst>
+          </p:cNvPr>
+          <p:cNvSpPr txBox="1"/>
+          <p:nvPr/>
+        </p:nvSpPr>
+        <p:spPr>
+          <a:xfrm>
+            <a:off x="-1321111" y="5718238"/>
+            <a:ext cx="2031325" cy="369332"/>
+          </a:xfrm>
+          <a:prstGeom prst="rect">
+            <a:avLst/>
+          </a:prstGeom>
+          <a:noFill/>
+        </p:spPr>
+        <p:txBody>
+          <a:bodyPr wrap="none" rtlCol="0">
+            <a:spAutoFit/>
+          </a:bodyPr>
+          <a:lstStyle/>
+          <a:p>
+            <a:r>
+              <a:rPr kumimoji="1" lang="ja-JP" altLang="en-US" b="1" dirty="0">
+                <a:solidFill>
+                  <a:srgbClr val="00B050"/>
+                </a:solidFill>
+              </a:rPr>
+              <a:t>作業中のブランチ</a:t>
+            </a:r>
+          </a:p>
+        </p:txBody>
+      </p:sp>
     </p:spTree>
     <p:extLst>
       <p:ext uri="{BB962C8B-B14F-4D97-AF65-F5344CB8AC3E}">
@@ -36319,45 +36282,6 @@
       </p:sp>
       <p:sp>
         <p:nvSpPr>
-          <p:cNvPr id="5" name="テキスト ボックス 4">
-            <a:extLst>
-              <a:ext uri="{FF2B5EF4-FFF2-40B4-BE49-F238E27FC236}">
-                <a16:creationId xmlns:a16="http://schemas.microsoft.com/office/drawing/2014/main" id="{202DA908-9748-7032-5A53-9A848B55F58F}"/>
-              </a:ext>
-            </a:extLst>
-          </p:cNvPr>
-          <p:cNvSpPr txBox="1"/>
-          <p:nvPr/>
-        </p:nvSpPr>
-        <p:spPr>
-          <a:xfrm>
-            <a:off x="-910561" y="660134"/>
-            <a:ext cx="1569660" cy="369332"/>
-          </a:xfrm>
-          <a:prstGeom prst="rect">
-            <a:avLst/>
-          </a:prstGeom>
-          <a:noFill/>
-        </p:spPr>
-        <p:txBody>
-          <a:bodyPr wrap="none" rtlCol="0">
-            <a:spAutoFit/>
-          </a:bodyPr>
-          <a:lstStyle/>
-          <a:p>
-            <a:r>
-              <a:rPr kumimoji="1" lang="ja-JP" altLang="en-US" b="1" dirty="0">
-                <a:solidFill>
-                  <a:srgbClr val="00B050"/>
-                </a:solidFill>
-              </a:rPr>
-              <a:t>作業ブランチ</a:t>
-            </a:r>
-          </a:p>
-        </p:txBody>
-      </p:sp>
-      <p:sp>
-        <p:nvSpPr>
           <p:cNvPr id="6" name="四角形: 角を丸くする 5">
             <a:extLst>
               <a:ext uri="{FF2B5EF4-FFF2-40B4-BE49-F238E27FC236}">
@@ -36411,10 +36335,10 @@
       </p:sp>
       <p:sp>
         <p:nvSpPr>
-          <p:cNvPr id="8" name="テキスト ボックス 7">
-            <a:extLst>
-              <a:ext uri="{FF2B5EF4-FFF2-40B4-BE49-F238E27FC236}">
-                <a16:creationId xmlns:a16="http://schemas.microsoft.com/office/drawing/2014/main" id="{59A90982-1FF9-8626-B588-3AE893730A01}"/>
+          <p:cNvPr id="14" name="テキスト ボックス 13">
+            <a:extLst>
+              <a:ext uri="{FF2B5EF4-FFF2-40B4-BE49-F238E27FC236}">
+                <a16:creationId xmlns:a16="http://schemas.microsoft.com/office/drawing/2014/main" id="{1F57482F-42FB-6F3E-B570-986DFD1C7338}"/>
               </a:ext>
             </a:extLst>
           </p:cNvPr>
@@ -36423,8 +36347,8 @@
         </p:nvSpPr>
         <p:spPr>
           <a:xfrm>
-            <a:off x="-903933" y="4085824"/>
-            <a:ext cx="1569660" cy="369332"/>
+            <a:off x="986807" y="4055570"/>
+            <a:ext cx="737702" cy="369332"/>
           </a:xfrm>
           <a:prstGeom prst="rect">
             <a:avLst/>
@@ -36438,22 +36362,94 @@
           <a:lstStyle/>
           <a:p>
             <a:r>
+              <a:rPr lang="en-US" altLang="ja-JP" b="1" dirty="0"/>
+              <a:t>main</a:t>
+            </a:r>
+            <a:endParaRPr lang="ja-JP" altLang="en-US" b="1" dirty="0"/>
+          </a:p>
+        </p:txBody>
+      </p:sp>
+      <p:sp>
+        <p:nvSpPr>
+          <p:cNvPr id="15" name="テキスト ボックス 14">
+            <a:extLst>
+              <a:ext uri="{FF2B5EF4-FFF2-40B4-BE49-F238E27FC236}">
+                <a16:creationId xmlns:a16="http://schemas.microsoft.com/office/drawing/2014/main" id="{8FE90C75-DEFC-363D-EED7-48E626D7D957}"/>
+              </a:ext>
+            </a:extLst>
+          </p:cNvPr>
+          <p:cNvSpPr txBox="1"/>
+          <p:nvPr/>
+        </p:nvSpPr>
+        <p:spPr>
+          <a:xfrm>
+            <a:off x="986807" y="664670"/>
+            <a:ext cx="737702" cy="369332"/>
+          </a:xfrm>
+          <a:prstGeom prst="rect">
+            <a:avLst/>
+          </a:prstGeom>
+          <a:noFill/>
+        </p:spPr>
+        <p:txBody>
+          <a:bodyPr wrap="none" rtlCol="0">
+            <a:spAutoFit/>
+          </a:bodyPr>
+          <a:lstStyle/>
+          <a:p>
+            <a:r>
+              <a:rPr kumimoji="1" lang="en-US" altLang="ja-JP" b="1" dirty="0"/>
+              <a:t>main</a:t>
+            </a:r>
+            <a:endParaRPr kumimoji="1" lang="ja-JP" altLang="en-US" b="1" dirty="0"/>
+          </a:p>
+        </p:txBody>
+      </p:sp>
+      <p:sp>
+        <p:nvSpPr>
+          <p:cNvPr id="3" name="テキスト ボックス 2">
+            <a:extLst>
+              <a:ext uri="{FF2B5EF4-FFF2-40B4-BE49-F238E27FC236}">
+                <a16:creationId xmlns:a16="http://schemas.microsoft.com/office/drawing/2014/main" id="{0E733555-41B3-79B1-F9EC-C40C721E333F}"/>
+              </a:ext>
+            </a:extLst>
+          </p:cNvPr>
+          <p:cNvSpPr txBox="1"/>
+          <p:nvPr/>
+        </p:nvSpPr>
+        <p:spPr>
+          <a:xfrm>
+            <a:off x="-1321111" y="660134"/>
+            <a:ext cx="2031325" cy="369332"/>
+          </a:xfrm>
+          <a:prstGeom prst="rect">
+            <a:avLst/>
+          </a:prstGeom>
+          <a:noFill/>
+        </p:spPr>
+        <p:txBody>
+          <a:bodyPr wrap="none" rtlCol="0">
+            <a:spAutoFit/>
+          </a:bodyPr>
+          <a:lstStyle/>
+          <a:p>
+            <a:r>
               <a:rPr kumimoji="1" lang="ja-JP" altLang="en-US" b="1" dirty="0">
                 <a:solidFill>
                   <a:srgbClr val="00B050"/>
                 </a:solidFill>
               </a:rPr>
-              <a:t>作業ブランチ</a:t>
+              <a:t>作業中のブランチ</a:t>
             </a:r>
           </a:p>
         </p:txBody>
       </p:sp>
       <p:sp>
         <p:nvSpPr>
-          <p:cNvPr id="14" name="テキスト ボックス 13">
-            <a:extLst>
-              <a:ext uri="{FF2B5EF4-FFF2-40B4-BE49-F238E27FC236}">
-                <a16:creationId xmlns:a16="http://schemas.microsoft.com/office/drawing/2014/main" id="{1F57482F-42FB-6F3E-B570-986DFD1C7338}"/>
+          <p:cNvPr id="4" name="テキスト ボックス 3">
+            <a:extLst>
+              <a:ext uri="{FF2B5EF4-FFF2-40B4-BE49-F238E27FC236}">
+                <a16:creationId xmlns:a16="http://schemas.microsoft.com/office/drawing/2014/main" id="{CD4D981E-3E81-DAC8-DBC5-9133C4C565F3}"/>
               </a:ext>
             </a:extLst>
           </p:cNvPr>
@@ -36462,8 +36458,8 @@
         </p:nvSpPr>
         <p:spPr>
           <a:xfrm>
-            <a:off x="986807" y="4055570"/>
-            <a:ext cx="737702" cy="369332"/>
+            <a:off x="-1321111" y="4085824"/>
+            <a:ext cx="2031325" cy="369332"/>
           </a:xfrm>
           <a:prstGeom prst="rect">
             <a:avLst/>
@@ -36477,46 +36473,13 @@
           <a:lstStyle/>
           <a:p>
             <a:r>
-              <a:rPr lang="en-US" altLang="ja-JP" b="1" dirty="0"/>
-              <a:t>main</a:t>
-            </a:r>
-            <a:endParaRPr lang="ja-JP" altLang="en-US" b="1" dirty="0"/>
-          </a:p>
-        </p:txBody>
-      </p:sp>
-      <p:sp>
-        <p:nvSpPr>
-          <p:cNvPr id="15" name="テキスト ボックス 14">
-            <a:extLst>
-              <a:ext uri="{FF2B5EF4-FFF2-40B4-BE49-F238E27FC236}">
-                <a16:creationId xmlns:a16="http://schemas.microsoft.com/office/drawing/2014/main" id="{8FE90C75-DEFC-363D-EED7-48E626D7D957}"/>
-              </a:ext>
-            </a:extLst>
-          </p:cNvPr>
-          <p:cNvSpPr txBox="1"/>
-          <p:nvPr/>
-        </p:nvSpPr>
-        <p:spPr>
-          <a:xfrm>
-            <a:off x="986807" y="664670"/>
-            <a:ext cx="737702" cy="369332"/>
-          </a:xfrm>
-          <a:prstGeom prst="rect">
-            <a:avLst/>
-          </a:prstGeom>
-          <a:noFill/>
-        </p:spPr>
-        <p:txBody>
-          <a:bodyPr wrap="none" rtlCol="0">
-            <a:spAutoFit/>
-          </a:bodyPr>
-          <a:lstStyle/>
-          <a:p>
-            <a:r>
-              <a:rPr kumimoji="1" lang="en-US" altLang="ja-JP" b="1" dirty="0"/>
-              <a:t>main</a:t>
-            </a:r>
-            <a:endParaRPr kumimoji="1" lang="ja-JP" altLang="en-US" b="1" dirty="0"/>
+              <a:rPr kumimoji="1" lang="ja-JP" altLang="en-US" b="1" dirty="0">
+                <a:solidFill>
+                  <a:srgbClr val="00B050"/>
+                </a:solidFill>
+              </a:rPr>
+              <a:t>作業中のブランチ</a:t>
+            </a:r>
           </a:p>
         </p:txBody>
       </p:sp>
@@ -37004,6 +36967,134 @@
       </p:sp>
       <p:sp>
         <p:nvSpPr>
+          <p:cNvPr id="2" name="テキスト ボックス 1">
+            <a:extLst>
+              <a:ext uri="{FF2B5EF4-FFF2-40B4-BE49-F238E27FC236}">
+                <a16:creationId xmlns:a16="http://schemas.microsoft.com/office/drawing/2014/main" id="{1B6830C5-54AC-E13C-4285-185A32C7C826}"/>
+              </a:ext>
+            </a:extLst>
+          </p:cNvPr>
+          <p:cNvSpPr txBox="1"/>
+          <p:nvPr/>
+        </p:nvSpPr>
+        <p:spPr>
+          <a:xfrm>
+            <a:off x="986807" y="4055570"/>
+            <a:ext cx="737702" cy="369332"/>
+          </a:xfrm>
+          <a:prstGeom prst="rect">
+            <a:avLst/>
+          </a:prstGeom>
+          <a:noFill/>
+        </p:spPr>
+        <p:txBody>
+          <a:bodyPr wrap="none" rtlCol="0">
+            <a:spAutoFit/>
+          </a:bodyPr>
+          <a:lstStyle/>
+          <a:p>
+            <a:r>
+              <a:rPr lang="en-US" altLang="ja-JP" b="1" dirty="0"/>
+              <a:t>main</a:t>
+            </a:r>
+            <a:endParaRPr lang="ja-JP" altLang="en-US" b="1" dirty="0"/>
+          </a:p>
+        </p:txBody>
+      </p:sp>
+      <p:sp>
+        <p:nvSpPr>
+          <p:cNvPr id="3" name="四角形: 角を丸くする 2">
+            <a:extLst>
+              <a:ext uri="{FF2B5EF4-FFF2-40B4-BE49-F238E27FC236}">
+                <a16:creationId xmlns:a16="http://schemas.microsoft.com/office/drawing/2014/main" id="{4E1E1618-10BB-A005-7D11-66AA2CA2B432}"/>
+              </a:ext>
+            </a:extLst>
+          </p:cNvPr>
+          <p:cNvSpPr/>
+          <p:nvPr/>
+        </p:nvSpPr>
+        <p:spPr>
+          <a:xfrm>
+            <a:off x="781401" y="3730490"/>
+            <a:ext cx="10274227" cy="1080000"/>
+          </a:xfrm>
+          <a:prstGeom prst="roundRect">
+            <a:avLst/>
+          </a:prstGeom>
+          <a:noFill/>
+          <a:ln w="38100">
+            <a:solidFill>
+              <a:srgbClr val="00B050"/>
+            </a:solidFill>
+            <a:prstDash val="dash"/>
+          </a:ln>
+        </p:spPr>
+        <p:style>
+          <a:lnRef idx="2">
+            <a:schemeClr val="accent1">
+              <a:shade val="15000"/>
+            </a:schemeClr>
+          </a:lnRef>
+          <a:fillRef idx="1">
+            <a:schemeClr val="accent1"/>
+          </a:fillRef>
+          <a:effectRef idx="0">
+            <a:schemeClr val="accent1"/>
+          </a:effectRef>
+          <a:fontRef idx="minor">
+            <a:schemeClr val="lt1"/>
+          </a:fontRef>
+        </p:style>
+        <p:txBody>
+          <a:bodyPr rtlCol="0" anchor="ctr"/>
+          <a:lstStyle/>
+          <a:p>
+            <a:pPr algn="ctr"/>
+            <a:endParaRPr kumimoji="1" lang="ja-JP" altLang="en-US"/>
+          </a:p>
+        </p:txBody>
+      </p:sp>
+      <p:sp>
+        <p:nvSpPr>
+          <p:cNvPr id="4" name="テキスト ボックス 3">
+            <a:extLst>
+              <a:ext uri="{FF2B5EF4-FFF2-40B4-BE49-F238E27FC236}">
+                <a16:creationId xmlns:a16="http://schemas.microsoft.com/office/drawing/2014/main" id="{CFD638D9-8788-2CDB-EA67-88C1D8700010}"/>
+              </a:ext>
+            </a:extLst>
+          </p:cNvPr>
+          <p:cNvSpPr txBox="1"/>
+          <p:nvPr/>
+        </p:nvSpPr>
+        <p:spPr>
+          <a:xfrm>
+            <a:off x="-1321111" y="4085824"/>
+            <a:ext cx="2031325" cy="369332"/>
+          </a:xfrm>
+          <a:prstGeom prst="rect">
+            <a:avLst/>
+          </a:prstGeom>
+          <a:noFill/>
+        </p:spPr>
+        <p:txBody>
+          <a:bodyPr wrap="none" rtlCol="0">
+            <a:spAutoFit/>
+          </a:bodyPr>
+          <a:lstStyle/>
+          <a:p>
+            <a:r>
+              <a:rPr kumimoji="1" lang="ja-JP" altLang="en-US" b="1" dirty="0">
+                <a:solidFill>
+                  <a:srgbClr val="00B050"/>
+                </a:solidFill>
+              </a:rPr>
+              <a:t>作業中のブランチ</a:t>
+            </a:r>
+          </a:p>
+        </p:txBody>
+      </p:sp>
+      <p:sp>
+        <p:nvSpPr>
           <p:cNvPr id="10" name="爆発: 8 pt 9">
             <a:extLst>
               <a:ext uri="{FF2B5EF4-FFF2-40B4-BE49-F238E27FC236}">
@@ -37058,42 +37149,6 @@
               </a:rPr>
               <a:t>コンフリクト</a:t>
             </a:r>
-          </a:p>
-        </p:txBody>
-      </p:sp>
-      <p:sp>
-        <p:nvSpPr>
-          <p:cNvPr id="2" name="テキスト ボックス 1">
-            <a:extLst>
-              <a:ext uri="{FF2B5EF4-FFF2-40B4-BE49-F238E27FC236}">
-                <a16:creationId xmlns:a16="http://schemas.microsoft.com/office/drawing/2014/main" id="{1B6830C5-54AC-E13C-4285-185A32C7C826}"/>
-              </a:ext>
-            </a:extLst>
-          </p:cNvPr>
-          <p:cNvSpPr txBox="1"/>
-          <p:nvPr/>
-        </p:nvSpPr>
-        <p:spPr>
-          <a:xfrm>
-            <a:off x="986807" y="4055570"/>
-            <a:ext cx="737702" cy="369332"/>
-          </a:xfrm>
-          <a:prstGeom prst="rect">
-            <a:avLst/>
-          </a:prstGeom>
-          <a:noFill/>
-        </p:spPr>
-        <p:txBody>
-          <a:bodyPr wrap="none" rtlCol="0">
-            <a:spAutoFit/>
-          </a:bodyPr>
-          <a:lstStyle/>
-          <a:p>
-            <a:r>
-              <a:rPr lang="en-US" altLang="ja-JP" b="1" dirty="0"/>
-              <a:t>main</a:t>
-            </a:r>
-            <a:endParaRPr lang="ja-JP" altLang="en-US" b="1" dirty="0"/>
           </a:p>
         </p:txBody>
       </p:sp>
@@ -38724,84 +38779,6 @@
       </p:sp>
       <p:sp>
         <p:nvSpPr>
-          <p:cNvPr id="6" name="テキスト ボックス 5">
-            <a:extLst>
-              <a:ext uri="{FF2B5EF4-FFF2-40B4-BE49-F238E27FC236}">
-                <a16:creationId xmlns:a16="http://schemas.microsoft.com/office/drawing/2014/main" id="{49B66781-F288-C206-ED4E-123087A2B894}"/>
-              </a:ext>
-            </a:extLst>
-          </p:cNvPr>
-          <p:cNvSpPr txBox="1"/>
-          <p:nvPr/>
-        </p:nvSpPr>
-        <p:spPr>
-          <a:xfrm>
-            <a:off x="-918304" y="2323834"/>
-            <a:ext cx="1905325" cy="369332"/>
-          </a:xfrm>
-          <a:prstGeom prst="rect">
-            <a:avLst/>
-          </a:prstGeom>
-          <a:noFill/>
-        </p:spPr>
-        <p:txBody>
-          <a:bodyPr wrap="square" rtlCol="0">
-            <a:spAutoFit/>
-          </a:bodyPr>
-          <a:lstStyle/>
-          <a:p>
-            <a:r>
-              <a:rPr kumimoji="1" lang="ja-JP" altLang="en-US" b="1" dirty="0">
-                <a:solidFill>
-                  <a:srgbClr val="00B050"/>
-                </a:solidFill>
-              </a:rPr>
-              <a:t>作業ブランチ</a:t>
-            </a:r>
-          </a:p>
-        </p:txBody>
-      </p:sp>
-      <p:sp>
-        <p:nvSpPr>
-          <p:cNvPr id="9" name="テキスト ボックス 8">
-            <a:extLst>
-              <a:ext uri="{FF2B5EF4-FFF2-40B4-BE49-F238E27FC236}">
-                <a16:creationId xmlns:a16="http://schemas.microsoft.com/office/drawing/2014/main" id="{9EEA621B-191A-B072-0C09-E47A8736CBEC}"/>
-              </a:ext>
-            </a:extLst>
-          </p:cNvPr>
-          <p:cNvSpPr txBox="1"/>
-          <p:nvPr/>
-        </p:nvSpPr>
-        <p:spPr>
-          <a:xfrm>
-            <a:off x="-918304" y="5702155"/>
-            <a:ext cx="1905325" cy="369332"/>
-          </a:xfrm>
-          <a:prstGeom prst="rect">
-            <a:avLst/>
-          </a:prstGeom>
-          <a:noFill/>
-        </p:spPr>
-        <p:txBody>
-          <a:bodyPr wrap="square" rtlCol="0">
-            <a:spAutoFit/>
-          </a:bodyPr>
-          <a:lstStyle/>
-          <a:p>
-            <a:r>
-              <a:rPr kumimoji="1" lang="ja-JP" altLang="en-US" b="1" dirty="0">
-                <a:solidFill>
-                  <a:srgbClr val="00B050"/>
-                </a:solidFill>
-              </a:rPr>
-              <a:t>作業ブランチ</a:t>
-            </a:r>
-          </a:p>
-        </p:txBody>
-      </p:sp>
-      <p:sp>
-        <p:nvSpPr>
           <p:cNvPr id="15" name="四角形: 角を丸くする 14">
             <a:extLst>
               <a:ext uri="{FF2B5EF4-FFF2-40B4-BE49-F238E27FC236}">
@@ -39034,6 +39011,84 @@
               <a:t>main</a:t>
             </a:r>
             <a:endParaRPr kumimoji="1" lang="ja-JP" altLang="en-US" b="1" dirty="0"/>
+          </a:p>
+        </p:txBody>
+      </p:sp>
+      <p:sp>
+        <p:nvSpPr>
+          <p:cNvPr id="2" name="テキスト ボックス 1">
+            <a:extLst>
+              <a:ext uri="{FF2B5EF4-FFF2-40B4-BE49-F238E27FC236}">
+                <a16:creationId xmlns:a16="http://schemas.microsoft.com/office/drawing/2014/main" id="{7A8CF3DA-67EA-7042-EEA3-0F5BFEA50998}"/>
+              </a:ext>
+            </a:extLst>
+          </p:cNvPr>
+          <p:cNvSpPr txBox="1"/>
+          <p:nvPr/>
+        </p:nvSpPr>
+        <p:spPr>
+          <a:xfrm>
+            <a:off x="-1321111" y="2320992"/>
+            <a:ext cx="2031325" cy="369332"/>
+          </a:xfrm>
+          <a:prstGeom prst="rect">
+            <a:avLst/>
+          </a:prstGeom>
+          <a:noFill/>
+        </p:spPr>
+        <p:txBody>
+          <a:bodyPr wrap="none" rtlCol="0">
+            <a:spAutoFit/>
+          </a:bodyPr>
+          <a:lstStyle/>
+          <a:p>
+            <a:r>
+              <a:rPr kumimoji="1" lang="ja-JP" altLang="en-US" b="1" dirty="0">
+                <a:solidFill>
+                  <a:srgbClr val="00B050"/>
+                </a:solidFill>
+              </a:rPr>
+              <a:t>作業中のブランチ</a:t>
+            </a:r>
+          </a:p>
+        </p:txBody>
+      </p:sp>
+      <p:sp>
+        <p:nvSpPr>
+          <p:cNvPr id="5" name="テキスト ボックス 4">
+            <a:extLst>
+              <a:ext uri="{FF2B5EF4-FFF2-40B4-BE49-F238E27FC236}">
+                <a16:creationId xmlns:a16="http://schemas.microsoft.com/office/drawing/2014/main" id="{0650487B-4CBD-F8E2-4441-A0E739F1C51E}"/>
+              </a:ext>
+            </a:extLst>
+          </p:cNvPr>
+          <p:cNvSpPr txBox="1"/>
+          <p:nvPr/>
+        </p:nvSpPr>
+        <p:spPr>
+          <a:xfrm>
+            <a:off x="-1321111" y="5718238"/>
+            <a:ext cx="2031325" cy="369332"/>
+          </a:xfrm>
+          <a:prstGeom prst="rect">
+            <a:avLst/>
+          </a:prstGeom>
+          <a:noFill/>
+        </p:spPr>
+        <p:txBody>
+          <a:bodyPr wrap="none" rtlCol="0">
+            <a:spAutoFit/>
+          </a:bodyPr>
+          <a:lstStyle/>
+          <a:p>
+            <a:r>
+              <a:rPr kumimoji="1" lang="ja-JP" altLang="en-US" b="1" dirty="0">
+                <a:solidFill>
+                  <a:srgbClr val="00B050"/>
+                </a:solidFill>
+              </a:rPr>
+              <a:t>作業中のブランチ</a:t>
+            </a:r>
           </a:p>
         </p:txBody>
       </p:sp>
@@ -39094,2389 +39149,6 @@
         <p:cNvPr id="1" name="">
           <a:extLst>
             <a:ext uri="{FF2B5EF4-FFF2-40B4-BE49-F238E27FC236}">
-              <a16:creationId xmlns:a16="http://schemas.microsoft.com/office/drawing/2014/main" id="{2ADF4022-D9F7-2BE5-BEFB-79BCDC117BB4}"/>
-            </a:ext>
-          </a:extLst>
-        </p:cNvPr>
-        <p:cNvGrpSpPr/>
-        <p:nvPr/>
-      </p:nvGrpSpPr>
-      <p:grpSpPr>
-        <a:xfrm>
-          <a:off x="0" y="0"/>
-          <a:ext cx="0" cy="0"/>
-          <a:chOff x="0" y="0"/>
-          <a:chExt cx="0" cy="0"/>
-        </a:xfrm>
-      </p:grpSpPr>
-      <p:cxnSp>
-        <p:nvCxnSpPr>
-          <p:cNvPr id="20" name="直線コネクタ 19">
-            <a:extLst>
-              <a:ext uri="{FF2B5EF4-FFF2-40B4-BE49-F238E27FC236}">
-                <a16:creationId xmlns:a16="http://schemas.microsoft.com/office/drawing/2014/main" id="{19FA3A50-1136-C0CF-CF44-2AF2E71DA12E}"/>
-              </a:ext>
-            </a:extLst>
-          </p:cNvPr>
-          <p:cNvCxnSpPr>
-            <a:cxnSpLocks/>
-          </p:cNvCxnSpPr>
-          <p:nvPr/>
-        </p:nvCxnSpPr>
-        <p:spPr>
-          <a:xfrm flipV="1">
-            <a:off x="1816100" y="5899400"/>
-            <a:ext cx="9000000" cy="0"/>
-          </a:xfrm>
-          <a:prstGeom prst="line">
-            <a:avLst/>
-          </a:prstGeom>
-          <a:ln>
-            <a:prstDash val="dash"/>
-          </a:ln>
-        </p:spPr>
-        <p:style>
-          <a:lnRef idx="1">
-            <a:schemeClr val="accent1"/>
-          </a:lnRef>
-          <a:fillRef idx="0">
-            <a:schemeClr val="accent1"/>
-          </a:fillRef>
-          <a:effectRef idx="0">
-            <a:schemeClr val="accent1"/>
-          </a:effectRef>
-          <a:fontRef idx="minor">
-            <a:schemeClr val="tx1"/>
-          </a:fontRef>
-        </p:style>
-      </p:cxnSp>
-      <p:cxnSp>
-        <p:nvCxnSpPr>
-          <p:cNvPr id="21" name="直線コネクタ 20">
-            <a:extLst>
-              <a:ext uri="{FF2B5EF4-FFF2-40B4-BE49-F238E27FC236}">
-                <a16:creationId xmlns:a16="http://schemas.microsoft.com/office/drawing/2014/main" id="{804A3FCF-BD3F-2F2C-CE2B-E338D65EF098}"/>
-              </a:ext>
-            </a:extLst>
-          </p:cNvPr>
-          <p:cNvCxnSpPr>
-            <a:cxnSpLocks/>
-          </p:cNvCxnSpPr>
-          <p:nvPr/>
-        </p:nvCxnSpPr>
-        <p:spPr>
-          <a:xfrm>
-            <a:off x="1816100" y="4240236"/>
-            <a:ext cx="9000000" cy="0"/>
-          </a:xfrm>
-          <a:prstGeom prst="line">
-            <a:avLst/>
-          </a:prstGeom>
-          <a:ln>
-            <a:prstDash val="dash"/>
-          </a:ln>
-        </p:spPr>
-        <p:style>
-          <a:lnRef idx="1">
-            <a:schemeClr val="accent1"/>
-          </a:lnRef>
-          <a:fillRef idx="0">
-            <a:schemeClr val="accent1"/>
-          </a:fillRef>
-          <a:effectRef idx="0">
-            <a:schemeClr val="accent1"/>
-          </a:effectRef>
-          <a:fontRef idx="minor">
-            <a:schemeClr val="tx1"/>
-          </a:fontRef>
-        </p:style>
-      </p:cxnSp>
-      <p:sp>
-        <p:nvSpPr>
-          <p:cNvPr id="22" name="楕円 21">
-            <a:extLst>
-              <a:ext uri="{FF2B5EF4-FFF2-40B4-BE49-F238E27FC236}">
-                <a16:creationId xmlns:a16="http://schemas.microsoft.com/office/drawing/2014/main" id="{D2571C54-EA91-0E63-4885-2146A6C623AF}"/>
-              </a:ext>
-            </a:extLst>
-          </p:cNvPr>
-          <p:cNvSpPr/>
-          <p:nvPr/>
-        </p:nvSpPr>
-        <p:spPr>
-          <a:xfrm>
-            <a:off x="5588306" y="5539400"/>
-            <a:ext cx="720000" cy="720000"/>
-          </a:xfrm>
-          <a:prstGeom prst="ellipse">
-            <a:avLst/>
-          </a:prstGeom>
-          <a:solidFill>
-            <a:schemeClr val="bg1"/>
-          </a:solidFill>
-          <a:ln w="38100">
-            <a:solidFill>
-              <a:srgbClr val="FF0000"/>
-            </a:solidFill>
-          </a:ln>
-        </p:spPr>
-        <p:style>
-          <a:lnRef idx="2">
-            <a:schemeClr val="dk1">
-              <a:shade val="15000"/>
-            </a:schemeClr>
-          </a:lnRef>
-          <a:fillRef idx="1">
-            <a:schemeClr val="dk1"/>
-          </a:fillRef>
-          <a:effectRef idx="0">
-            <a:schemeClr val="dk1"/>
-          </a:effectRef>
-          <a:fontRef idx="minor">
-            <a:schemeClr val="lt1"/>
-          </a:fontRef>
-        </p:style>
-        <p:txBody>
-          <a:bodyPr rtlCol="0" anchor="ctr"/>
-          <a:lstStyle/>
-          <a:p>
-            <a:pPr algn="ctr"/>
-            <a:r>
-              <a:rPr lang="en-US" altLang="ja-JP" b="1">
-                <a:ln w="0"/>
-                <a:solidFill>
-                  <a:srgbClr val="FF0000"/>
-                </a:solidFill>
-                <a:effectLst>
-                  <a:outerShdw blurRad="38100" dist="19050" dir="2700000" algn="tl" rotWithShape="0">
-                    <a:schemeClr val="dk1">
-                      <a:alpha val="40000"/>
-                    </a:schemeClr>
-                  </a:outerShdw>
-                </a:effectLst>
-              </a:rPr>
-              <a:t>B1</a:t>
-            </a:r>
-            <a:endParaRPr lang="en-US" altLang="ja-JP" b="1" dirty="0">
-              <a:ln w="0"/>
-              <a:solidFill>
-                <a:srgbClr val="FF0000"/>
-              </a:solidFill>
-              <a:effectLst>
-                <a:outerShdw blurRad="38100" dist="19050" dir="2700000" algn="tl" rotWithShape="0">
-                  <a:schemeClr val="dk1">
-                    <a:alpha val="40000"/>
-                  </a:schemeClr>
-                </a:outerShdw>
-              </a:effectLst>
-            </a:endParaRPr>
-          </a:p>
-        </p:txBody>
-      </p:sp>
-      <p:sp>
-        <p:nvSpPr>
-          <p:cNvPr id="23" name="楕円 22">
-            <a:extLst>
-              <a:ext uri="{FF2B5EF4-FFF2-40B4-BE49-F238E27FC236}">
-                <a16:creationId xmlns:a16="http://schemas.microsoft.com/office/drawing/2014/main" id="{EDA0A91C-8C5D-892F-155C-A7A1116B2D5C}"/>
-              </a:ext>
-            </a:extLst>
-          </p:cNvPr>
-          <p:cNvSpPr/>
-          <p:nvPr/>
-        </p:nvSpPr>
-        <p:spPr>
-          <a:xfrm>
-            <a:off x="3332358" y="3880236"/>
-            <a:ext cx="720000" cy="720000"/>
-          </a:xfrm>
-          <a:prstGeom prst="ellipse">
-            <a:avLst/>
-          </a:prstGeom>
-          <a:solidFill>
-            <a:schemeClr val="bg1"/>
-          </a:solidFill>
-          <a:ln w="38100"/>
-        </p:spPr>
-        <p:style>
-          <a:lnRef idx="2">
-            <a:schemeClr val="dk1">
-              <a:shade val="15000"/>
-            </a:schemeClr>
-          </a:lnRef>
-          <a:fillRef idx="1">
-            <a:schemeClr val="dk1"/>
-          </a:fillRef>
-          <a:effectRef idx="0">
-            <a:schemeClr val="dk1"/>
-          </a:effectRef>
-          <a:fontRef idx="minor">
-            <a:schemeClr val="lt1"/>
-          </a:fontRef>
-        </p:style>
-        <p:txBody>
-          <a:bodyPr rtlCol="0" anchor="ctr"/>
-          <a:lstStyle/>
-          <a:p>
-            <a:pPr algn="ctr"/>
-            <a:r>
-              <a:rPr lang="en-US" altLang="ja-JP" b="1" dirty="0">
-                <a:solidFill>
-                  <a:schemeClr val="tx1"/>
-                </a:solidFill>
-              </a:rPr>
-              <a:t>A1</a:t>
-            </a:r>
-            <a:endParaRPr lang="ja-JP" altLang="en-US" b="1" dirty="0">
-              <a:solidFill>
-                <a:schemeClr val="tx1"/>
-              </a:solidFill>
-            </a:endParaRPr>
-          </a:p>
-        </p:txBody>
-      </p:sp>
-      <p:cxnSp>
-        <p:nvCxnSpPr>
-          <p:cNvPr id="25" name="直線矢印コネクタ 24">
-            <a:extLst>
-              <a:ext uri="{FF2B5EF4-FFF2-40B4-BE49-F238E27FC236}">
-                <a16:creationId xmlns:a16="http://schemas.microsoft.com/office/drawing/2014/main" id="{8D824E50-198D-E448-7393-FD845A62A587}"/>
-              </a:ext>
-            </a:extLst>
-          </p:cNvPr>
-          <p:cNvCxnSpPr>
-            <a:cxnSpLocks/>
-            <a:stCxn id="23" idx="4"/>
-            <a:endCxn id="22" idx="2"/>
-          </p:cNvCxnSpPr>
-          <p:nvPr/>
-        </p:nvCxnSpPr>
-        <p:spPr>
-          <a:xfrm>
-            <a:off x="3692358" y="4600236"/>
-            <a:ext cx="1895948" cy="1299164"/>
-          </a:xfrm>
-          <a:prstGeom prst="straightConnector1">
-            <a:avLst/>
-          </a:prstGeom>
-          <a:ln w="38100">
-            <a:tailEnd type="triangle"/>
-          </a:ln>
-        </p:spPr>
-        <p:style>
-          <a:lnRef idx="1">
-            <a:schemeClr val="dk1"/>
-          </a:lnRef>
-          <a:fillRef idx="0">
-            <a:schemeClr val="dk1"/>
-          </a:fillRef>
-          <a:effectRef idx="0">
-            <a:schemeClr val="dk1"/>
-          </a:effectRef>
-          <a:fontRef idx="minor">
-            <a:schemeClr val="tx1"/>
-          </a:fontRef>
-        </p:style>
-      </p:cxnSp>
-      <p:cxnSp>
-        <p:nvCxnSpPr>
-          <p:cNvPr id="26" name="直線矢印コネクタ 25">
-            <a:extLst>
-              <a:ext uri="{FF2B5EF4-FFF2-40B4-BE49-F238E27FC236}">
-                <a16:creationId xmlns:a16="http://schemas.microsoft.com/office/drawing/2014/main" id="{3F55ED5B-B7B4-FE2B-B871-38A7973ABF9E}"/>
-              </a:ext>
-            </a:extLst>
-          </p:cNvPr>
-          <p:cNvCxnSpPr>
-            <a:cxnSpLocks/>
-            <a:endCxn id="23" idx="2"/>
-          </p:cNvCxnSpPr>
-          <p:nvPr/>
-        </p:nvCxnSpPr>
-        <p:spPr>
-          <a:xfrm>
-            <a:off x="2202058" y="4230904"/>
-            <a:ext cx="1130300" cy="9332"/>
-          </a:xfrm>
-          <a:prstGeom prst="straightConnector1">
-            <a:avLst/>
-          </a:prstGeom>
-          <a:ln w="38100">
-            <a:tailEnd type="triangle"/>
-          </a:ln>
-        </p:spPr>
-        <p:style>
-          <a:lnRef idx="1">
-            <a:schemeClr val="dk1"/>
-          </a:lnRef>
-          <a:fillRef idx="0">
-            <a:schemeClr val="dk1"/>
-          </a:fillRef>
-          <a:effectRef idx="0">
-            <a:schemeClr val="dk1"/>
-          </a:effectRef>
-          <a:fontRef idx="minor">
-            <a:schemeClr val="tx1"/>
-          </a:fontRef>
-        </p:style>
-      </p:cxnSp>
-      <p:cxnSp>
-        <p:nvCxnSpPr>
-          <p:cNvPr id="27" name="直線矢印コネクタ 26">
-            <a:extLst>
-              <a:ext uri="{FF2B5EF4-FFF2-40B4-BE49-F238E27FC236}">
-                <a16:creationId xmlns:a16="http://schemas.microsoft.com/office/drawing/2014/main" id="{25204A73-8071-CC97-EDCD-B6720F07366F}"/>
-              </a:ext>
-            </a:extLst>
-          </p:cNvPr>
-          <p:cNvCxnSpPr>
-            <a:cxnSpLocks/>
-            <a:stCxn id="23" idx="6"/>
-            <a:endCxn id="8" idx="2"/>
-          </p:cNvCxnSpPr>
-          <p:nvPr/>
-        </p:nvCxnSpPr>
-        <p:spPr>
-          <a:xfrm flipV="1">
-            <a:off x="4052358" y="4235055"/>
-            <a:ext cx="1535948" cy="5181"/>
-          </a:xfrm>
-          <a:prstGeom prst="straightConnector1">
-            <a:avLst/>
-          </a:prstGeom>
-          <a:ln w="38100">
-            <a:tailEnd type="triangle"/>
-          </a:ln>
-        </p:spPr>
-        <p:style>
-          <a:lnRef idx="1">
-            <a:schemeClr val="dk1"/>
-          </a:lnRef>
-          <a:fillRef idx="0">
-            <a:schemeClr val="dk1"/>
-          </a:fillRef>
-          <a:effectRef idx="0">
-            <a:schemeClr val="dk1"/>
-          </a:effectRef>
-          <a:fontRef idx="minor">
-            <a:schemeClr val="tx1"/>
-          </a:fontRef>
-        </p:style>
-      </p:cxnSp>
-      <p:cxnSp>
-        <p:nvCxnSpPr>
-          <p:cNvPr id="29" name="直線コネクタ 28">
-            <a:extLst>
-              <a:ext uri="{FF2B5EF4-FFF2-40B4-BE49-F238E27FC236}">
-                <a16:creationId xmlns:a16="http://schemas.microsoft.com/office/drawing/2014/main" id="{BEEE2C07-4924-7882-44F9-FCF4C9C48892}"/>
-              </a:ext>
-            </a:extLst>
-          </p:cNvPr>
-          <p:cNvCxnSpPr>
-            <a:cxnSpLocks/>
-          </p:cNvCxnSpPr>
-          <p:nvPr/>
-        </p:nvCxnSpPr>
-        <p:spPr>
-          <a:xfrm>
-            <a:off x="1816100" y="2508886"/>
-            <a:ext cx="9000000" cy="0"/>
-          </a:xfrm>
-          <a:prstGeom prst="line">
-            <a:avLst/>
-          </a:prstGeom>
-          <a:ln>
-            <a:prstDash val="dash"/>
-          </a:ln>
-        </p:spPr>
-        <p:style>
-          <a:lnRef idx="1">
-            <a:schemeClr val="accent1"/>
-          </a:lnRef>
-          <a:fillRef idx="0">
-            <a:schemeClr val="accent1"/>
-          </a:fillRef>
-          <a:effectRef idx="0">
-            <a:schemeClr val="accent1"/>
-          </a:effectRef>
-          <a:fontRef idx="minor">
-            <a:schemeClr val="tx1"/>
-          </a:fontRef>
-        </p:style>
-      </p:cxnSp>
-      <p:cxnSp>
-        <p:nvCxnSpPr>
-          <p:cNvPr id="30" name="直線コネクタ 29">
-            <a:extLst>
-              <a:ext uri="{FF2B5EF4-FFF2-40B4-BE49-F238E27FC236}">
-                <a16:creationId xmlns:a16="http://schemas.microsoft.com/office/drawing/2014/main" id="{19735A37-32EA-5231-2FC6-A9C09364C81D}"/>
-              </a:ext>
-            </a:extLst>
-          </p:cNvPr>
-          <p:cNvCxnSpPr>
-            <a:cxnSpLocks/>
-          </p:cNvCxnSpPr>
-          <p:nvPr/>
-        </p:nvCxnSpPr>
-        <p:spPr>
-          <a:xfrm>
-            <a:off x="1816100" y="849336"/>
-            <a:ext cx="9000000" cy="0"/>
-          </a:xfrm>
-          <a:prstGeom prst="line">
-            <a:avLst/>
-          </a:prstGeom>
-          <a:ln>
-            <a:prstDash val="dash"/>
-          </a:ln>
-        </p:spPr>
-        <p:style>
-          <a:lnRef idx="1">
-            <a:schemeClr val="accent1"/>
-          </a:lnRef>
-          <a:fillRef idx="0">
-            <a:schemeClr val="accent1"/>
-          </a:fillRef>
-          <a:effectRef idx="0">
-            <a:schemeClr val="accent1"/>
-          </a:effectRef>
-          <a:fontRef idx="minor">
-            <a:schemeClr val="tx1"/>
-          </a:fontRef>
-        </p:style>
-      </p:cxnSp>
-      <p:sp>
-        <p:nvSpPr>
-          <p:cNvPr id="31" name="楕円 30">
-            <a:extLst>
-              <a:ext uri="{FF2B5EF4-FFF2-40B4-BE49-F238E27FC236}">
-                <a16:creationId xmlns:a16="http://schemas.microsoft.com/office/drawing/2014/main" id="{E4CAD24B-BC86-68FB-C826-86D7092E0409}"/>
-              </a:ext>
-            </a:extLst>
-          </p:cNvPr>
-          <p:cNvSpPr/>
-          <p:nvPr/>
-        </p:nvSpPr>
-        <p:spPr>
-          <a:xfrm>
-            <a:off x="5588306" y="2157436"/>
-            <a:ext cx="720000" cy="720000"/>
-          </a:xfrm>
-          <a:prstGeom prst="ellipse">
-            <a:avLst/>
-          </a:prstGeom>
-          <a:solidFill>
-            <a:schemeClr val="bg1"/>
-          </a:solidFill>
-          <a:ln w="38100">
-            <a:solidFill>
-              <a:srgbClr val="FF0000"/>
-            </a:solidFill>
-          </a:ln>
-        </p:spPr>
-        <p:style>
-          <a:lnRef idx="2">
-            <a:schemeClr val="dk1">
-              <a:shade val="15000"/>
-            </a:schemeClr>
-          </a:lnRef>
-          <a:fillRef idx="1">
-            <a:schemeClr val="dk1"/>
-          </a:fillRef>
-          <a:effectRef idx="0">
-            <a:schemeClr val="dk1"/>
-          </a:effectRef>
-          <a:fontRef idx="minor">
-            <a:schemeClr val="lt1"/>
-          </a:fontRef>
-        </p:style>
-        <p:txBody>
-          <a:bodyPr rtlCol="0" anchor="ctr"/>
-          <a:lstStyle/>
-          <a:p>
-            <a:pPr algn="ctr"/>
-            <a:r>
-              <a:rPr lang="en-US" altLang="ja-JP" b="1">
-                <a:ln w="0"/>
-                <a:solidFill>
-                  <a:srgbClr val="FF0000"/>
-                </a:solidFill>
-                <a:effectLst>
-                  <a:outerShdw blurRad="38100" dist="19050" dir="2700000" algn="tl" rotWithShape="0">
-                    <a:schemeClr val="dk1">
-                      <a:alpha val="40000"/>
-                    </a:schemeClr>
-                  </a:outerShdw>
-                </a:effectLst>
-              </a:rPr>
-              <a:t>B1</a:t>
-            </a:r>
-            <a:endParaRPr lang="en-US" altLang="ja-JP" b="1" dirty="0">
-              <a:ln w="0"/>
-              <a:solidFill>
-                <a:srgbClr val="FF0000"/>
-              </a:solidFill>
-              <a:effectLst>
-                <a:outerShdw blurRad="38100" dist="19050" dir="2700000" algn="tl" rotWithShape="0">
-                  <a:schemeClr val="dk1">
-                    <a:alpha val="40000"/>
-                  </a:schemeClr>
-                </a:outerShdw>
-              </a:effectLst>
-            </a:endParaRPr>
-          </a:p>
-        </p:txBody>
-      </p:sp>
-      <p:sp>
-        <p:nvSpPr>
-          <p:cNvPr id="32" name="楕円 31">
-            <a:extLst>
-              <a:ext uri="{FF2B5EF4-FFF2-40B4-BE49-F238E27FC236}">
-                <a16:creationId xmlns:a16="http://schemas.microsoft.com/office/drawing/2014/main" id="{00167EA7-E150-C11C-4AA4-7C38709A603C}"/>
-              </a:ext>
-            </a:extLst>
-          </p:cNvPr>
-          <p:cNvSpPr/>
-          <p:nvPr/>
-        </p:nvSpPr>
-        <p:spPr>
-          <a:xfrm>
-            <a:off x="3332358" y="489336"/>
-            <a:ext cx="720000" cy="720000"/>
-          </a:xfrm>
-          <a:prstGeom prst="ellipse">
-            <a:avLst/>
-          </a:prstGeom>
-          <a:solidFill>
-            <a:schemeClr val="bg1"/>
-          </a:solidFill>
-          <a:ln w="38100"/>
-        </p:spPr>
-        <p:style>
-          <a:lnRef idx="2">
-            <a:schemeClr val="dk1">
-              <a:shade val="15000"/>
-            </a:schemeClr>
-          </a:lnRef>
-          <a:fillRef idx="1">
-            <a:schemeClr val="dk1"/>
-          </a:fillRef>
-          <a:effectRef idx="0">
-            <a:schemeClr val="dk1"/>
-          </a:effectRef>
-          <a:fontRef idx="minor">
-            <a:schemeClr val="lt1"/>
-          </a:fontRef>
-        </p:style>
-        <p:txBody>
-          <a:bodyPr rtlCol="0" anchor="ctr"/>
-          <a:lstStyle/>
-          <a:p>
-            <a:pPr algn="ctr"/>
-            <a:r>
-              <a:rPr lang="en-US" altLang="ja-JP" b="1" dirty="0">
-                <a:solidFill>
-                  <a:schemeClr val="tx1"/>
-                </a:solidFill>
-              </a:rPr>
-              <a:t>A1</a:t>
-            </a:r>
-            <a:endParaRPr lang="ja-JP" altLang="en-US" b="1" dirty="0">
-              <a:solidFill>
-                <a:schemeClr val="tx1"/>
-              </a:solidFill>
-            </a:endParaRPr>
-          </a:p>
-        </p:txBody>
-      </p:sp>
-      <p:cxnSp>
-        <p:nvCxnSpPr>
-          <p:cNvPr id="34" name="直線矢印コネクタ 33">
-            <a:extLst>
-              <a:ext uri="{FF2B5EF4-FFF2-40B4-BE49-F238E27FC236}">
-                <a16:creationId xmlns:a16="http://schemas.microsoft.com/office/drawing/2014/main" id="{949940FF-245F-3A9B-FED5-39562AD33E8A}"/>
-              </a:ext>
-            </a:extLst>
-          </p:cNvPr>
-          <p:cNvCxnSpPr>
-            <a:cxnSpLocks/>
-            <a:stCxn id="32" idx="4"/>
-            <a:endCxn id="31" idx="2"/>
-          </p:cNvCxnSpPr>
-          <p:nvPr/>
-        </p:nvCxnSpPr>
-        <p:spPr>
-          <a:xfrm>
-            <a:off x="3692358" y="1209336"/>
-            <a:ext cx="1895948" cy="1308100"/>
-          </a:xfrm>
-          <a:prstGeom prst="straightConnector1">
-            <a:avLst/>
-          </a:prstGeom>
-          <a:ln w="38100">
-            <a:tailEnd type="triangle"/>
-          </a:ln>
-        </p:spPr>
-        <p:style>
-          <a:lnRef idx="1">
-            <a:schemeClr val="dk1"/>
-          </a:lnRef>
-          <a:fillRef idx="0">
-            <a:schemeClr val="dk1"/>
-          </a:fillRef>
-          <a:effectRef idx="0">
-            <a:schemeClr val="dk1"/>
-          </a:effectRef>
-          <a:fontRef idx="minor">
-            <a:schemeClr val="tx1"/>
-          </a:fontRef>
-        </p:style>
-      </p:cxnSp>
-      <p:cxnSp>
-        <p:nvCxnSpPr>
-          <p:cNvPr id="35" name="直線矢印コネクタ 34">
-            <a:extLst>
-              <a:ext uri="{FF2B5EF4-FFF2-40B4-BE49-F238E27FC236}">
-                <a16:creationId xmlns:a16="http://schemas.microsoft.com/office/drawing/2014/main" id="{CE62CD14-2278-5ABE-3300-45396F8C5E70}"/>
-              </a:ext>
-            </a:extLst>
-          </p:cNvPr>
-          <p:cNvCxnSpPr>
-            <a:cxnSpLocks/>
-            <a:endCxn id="32" idx="2"/>
-          </p:cNvCxnSpPr>
-          <p:nvPr/>
-        </p:nvCxnSpPr>
-        <p:spPr>
-          <a:xfrm>
-            <a:off x="2202058" y="840004"/>
-            <a:ext cx="1130300" cy="9332"/>
-          </a:xfrm>
-          <a:prstGeom prst="straightConnector1">
-            <a:avLst/>
-          </a:prstGeom>
-          <a:ln w="38100">
-            <a:tailEnd type="triangle"/>
-          </a:ln>
-        </p:spPr>
-        <p:style>
-          <a:lnRef idx="1">
-            <a:schemeClr val="dk1"/>
-          </a:lnRef>
-          <a:fillRef idx="0">
-            <a:schemeClr val="dk1"/>
-          </a:fillRef>
-          <a:effectRef idx="0">
-            <a:schemeClr val="dk1"/>
-          </a:effectRef>
-          <a:fontRef idx="minor">
-            <a:schemeClr val="tx1"/>
-          </a:fontRef>
-        </p:style>
-      </p:cxnSp>
-      <p:sp>
-        <p:nvSpPr>
-          <p:cNvPr id="8" name="楕円 7">
-            <a:extLst>
-              <a:ext uri="{FF2B5EF4-FFF2-40B4-BE49-F238E27FC236}">
-                <a16:creationId xmlns:a16="http://schemas.microsoft.com/office/drawing/2014/main" id="{9E5A721E-7272-9F9A-1D47-1E8C508CC9BC}"/>
-              </a:ext>
-            </a:extLst>
-          </p:cNvPr>
-          <p:cNvSpPr/>
-          <p:nvPr/>
-        </p:nvSpPr>
-        <p:spPr>
-          <a:xfrm>
-            <a:off x="5588306" y="3875055"/>
-            <a:ext cx="720000" cy="720000"/>
-          </a:xfrm>
-          <a:prstGeom prst="ellipse">
-            <a:avLst/>
-          </a:prstGeom>
-          <a:solidFill>
-            <a:schemeClr val="bg1"/>
-          </a:solidFill>
-          <a:ln w="38100">
-            <a:solidFill>
-              <a:schemeClr val="accent1"/>
-            </a:solidFill>
-          </a:ln>
-        </p:spPr>
-        <p:style>
-          <a:lnRef idx="2">
-            <a:schemeClr val="dk1">
-              <a:shade val="15000"/>
-            </a:schemeClr>
-          </a:lnRef>
-          <a:fillRef idx="1">
-            <a:schemeClr val="dk1"/>
-          </a:fillRef>
-          <a:effectRef idx="0">
-            <a:schemeClr val="dk1"/>
-          </a:effectRef>
-          <a:fontRef idx="minor">
-            <a:schemeClr val="lt1"/>
-          </a:fontRef>
-        </p:style>
-        <p:txBody>
-          <a:bodyPr rtlCol="0" anchor="ctr"/>
-          <a:lstStyle/>
-          <a:p>
-            <a:pPr algn="ctr"/>
-            <a:r>
-              <a:rPr lang="en-US" altLang="ja-JP" b="1">
-                <a:ln w="0"/>
-                <a:solidFill>
-                  <a:srgbClr val="0070C0"/>
-                </a:solidFill>
-                <a:effectLst>
-                  <a:outerShdw blurRad="38100" dist="19050" dir="2700000" algn="tl" rotWithShape="0">
-                    <a:schemeClr val="dk1">
-                      <a:alpha val="40000"/>
-                    </a:schemeClr>
-                  </a:outerShdw>
-                </a:effectLst>
-              </a:rPr>
-              <a:t>A2</a:t>
-            </a:r>
-            <a:endParaRPr lang="en-US" altLang="ja-JP" b="1" dirty="0">
-              <a:ln w="0"/>
-              <a:solidFill>
-                <a:srgbClr val="0070C0"/>
-              </a:solidFill>
-              <a:effectLst>
-                <a:outerShdw blurRad="38100" dist="19050" dir="2700000" algn="tl" rotWithShape="0">
-                  <a:schemeClr val="dk1">
-                    <a:alpha val="40000"/>
-                  </a:schemeClr>
-                </a:outerShdw>
-              </a:effectLst>
-            </a:endParaRPr>
-          </a:p>
-        </p:txBody>
-      </p:sp>
-      <p:sp>
-        <p:nvSpPr>
-          <p:cNvPr id="13" name="楕円 12">
-            <a:extLst>
-              <a:ext uri="{FF2B5EF4-FFF2-40B4-BE49-F238E27FC236}">
-                <a16:creationId xmlns:a16="http://schemas.microsoft.com/office/drawing/2014/main" id="{7D845FE1-050F-65AB-353C-EB4C2E1719F8}"/>
-              </a:ext>
-            </a:extLst>
-          </p:cNvPr>
-          <p:cNvSpPr/>
-          <p:nvPr/>
-        </p:nvSpPr>
-        <p:spPr>
-          <a:xfrm>
-            <a:off x="5588306" y="480787"/>
-            <a:ext cx="720000" cy="720000"/>
-          </a:xfrm>
-          <a:prstGeom prst="ellipse">
-            <a:avLst/>
-          </a:prstGeom>
-          <a:solidFill>
-            <a:schemeClr val="bg1"/>
-          </a:solidFill>
-          <a:ln w="38100">
-            <a:solidFill>
-              <a:schemeClr val="accent1"/>
-            </a:solidFill>
-          </a:ln>
-        </p:spPr>
-        <p:style>
-          <a:lnRef idx="2">
-            <a:schemeClr val="dk1">
-              <a:shade val="15000"/>
-            </a:schemeClr>
-          </a:lnRef>
-          <a:fillRef idx="1">
-            <a:schemeClr val="dk1"/>
-          </a:fillRef>
-          <a:effectRef idx="0">
-            <a:schemeClr val="dk1"/>
-          </a:effectRef>
-          <a:fontRef idx="minor">
-            <a:schemeClr val="lt1"/>
-          </a:fontRef>
-        </p:style>
-        <p:txBody>
-          <a:bodyPr rtlCol="0" anchor="ctr"/>
-          <a:lstStyle/>
-          <a:p>
-            <a:pPr algn="ctr"/>
-            <a:r>
-              <a:rPr lang="en-US" altLang="ja-JP" b="1" dirty="0">
-                <a:ln w="0"/>
-                <a:solidFill>
-                  <a:srgbClr val="0070C0"/>
-                </a:solidFill>
-                <a:effectLst>
-                  <a:outerShdw blurRad="38100" dist="19050" dir="2700000" algn="tl" rotWithShape="0">
-                    <a:schemeClr val="dk1">
-                      <a:alpha val="40000"/>
-                    </a:schemeClr>
-                  </a:outerShdw>
-                </a:effectLst>
-              </a:rPr>
-              <a:t>A2</a:t>
-            </a:r>
-          </a:p>
-        </p:txBody>
-      </p:sp>
-      <p:cxnSp>
-        <p:nvCxnSpPr>
-          <p:cNvPr id="14" name="直線矢印コネクタ 13">
-            <a:extLst>
-              <a:ext uri="{FF2B5EF4-FFF2-40B4-BE49-F238E27FC236}">
-                <a16:creationId xmlns:a16="http://schemas.microsoft.com/office/drawing/2014/main" id="{8BAA9843-49D2-A3AF-49E6-024788716140}"/>
-              </a:ext>
-            </a:extLst>
-          </p:cNvPr>
-          <p:cNvCxnSpPr>
-            <a:cxnSpLocks/>
-            <a:stCxn id="32" idx="6"/>
-            <a:endCxn id="13" idx="2"/>
-          </p:cNvCxnSpPr>
-          <p:nvPr/>
-        </p:nvCxnSpPr>
-        <p:spPr>
-          <a:xfrm flipV="1">
-            <a:off x="4052358" y="840787"/>
-            <a:ext cx="1535948" cy="8549"/>
-          </a:xfrm>
-          <a:prstGeom prst="straightConnector1">
-            <a:avLst/>
-          </a:prstGeom>
-          <a:ln w="38100">
-            <a:tailEnd type="triangle"/>
-          </a:ln>
-        </p:spPr>
-        <p:style>
-          <a:lnRef idx="1">
-            <a:schemeClr val="dk1"/>
-          </a:lnRef>
-          <a:fillRef idx="0">
-            <a:schemeClr val="dk1"/>
-          </a:fillRef>
-          <a:effectRef idx="0">
-            <a:schemeClr val="dk1"/>
-          </a:effectRef>
-          <a:fontRef idx="minor">
-            <a:schemeClr val="tx1"/>
-          </a:fontRef>
-        </p:style>
-      </p:cxnSp>
-      <p:sp>
-        <p:nvSpPr>
-          <p:cNvPr id="18" name="矢印: 右 17">
-            <a:extLst>
-              <a:ext uri="{FF2B5EF4-FFF2-40B4-BE49-F238E27FC236}">
-                <a16:creationId xmlns:a16="http://schemas.microsoft.com/office/drawing/2014/main" id="{0CC5B2D8-97C0-BF8A-2EF1-12A3C52E0164}"/>
-              </a:ext>
-            </a:extLst>
-          </p:cNvPr>
-          <p:cNvSpPr/>
-          <p:nvPr/>
-        </p:nvSpPr>
-        <p:spPr>
-          <a:xfrm rot="5400000">
-            <a:off x="5704324" y="3096987"/>
-            <a:ext cx="468086" cy="677228"/>
-          </a:xfrm>
-          <a:prstGeom prst="rightArrow">
-            <a:avLst/>
-          </a:prstGeom>
-        </p:spPr>
-        <p:style>
-          <a:lnRef idx="2">
-            <a:schemeClr val="dk1">
-              <a:shade val="15000"/>
-            </a:schemeClr>
-          </a:lnRef>
-          <a:fillRef idx="1">
-            <a:schemeClr val="dk1"/>
-          </a:fillRef>
-          <a:effectRef idx="0">
-            <a:schemeClr val="dk1"/>
-          </a:effectRef>
-          <a:fontRef idx="minor">
-            <a:schemeClr val="lt1"/>
-          </a:fontRef>
-        </p:style>
-        <p:txBody>
-          <a:bodyPr rtlCol="0" anchor="ctr"/>
-          <a:lstStyle/>
-          <a:p>
-            <a:pPr algn="ctr"/>
-            <a:endParaRPr kumimoji="1" lang="ja-JP" altLang="en-US"/>
-          </a:p>
-        </p:txBody>
-      </p:sp>
-      <p:sp>
-        <p:nvSpPr>
-          <p:cNvPr id="19" name="テキスト ボックス 18">
-            <a:extLst>
-              <a:ext uri="{FF2B5EF4-FFF2-40B4-BE49-F238E27FC236}">
-                <a16:creationId xmlns:a16="http://schemas.microsoft.com/office/drawing/2014/main" id="{B6ADE055-2CBC-5FE5-6442-51CAEEF53366}"/>
-              </a:ext>
-            </a:extLst>
-          </p:cNvPr>
-          <p:cNvSpPr txBox="1"/>
-          <p:nvPr/>
-        </p:nvSpPr>
-        <p:spPr>
-          <a:xfrm>
-            <a:off x="807634" y="5714734"/>
-            <a:ext cx="1120820" cy="369332"/>
-          </a:xfrm>
-          <a:prstGeom prst="rect">
-            <a:avLst/>
-          </a:prstGeom>
-          <a:noFill/>
-        </p:spPr>
-        <p:txBody>
-          <a:bodyPr wrap="none" rtlCol="0">
-            <a:spAutoFit/>
-          </a:bodyPr>
-          <a:lstStyle/>
-          <a:p>
-            <a:r>
-              <a:rPr lang="en-US" altLang="ja-JP" b="1" dirty="0" err="1"/>
-              <a:t>branchX</a:t>
-            </a:r>
-            <a:endParaRPr kumimoji="1" lang="ja-JP" altLang="en-US" b="1" dirty="0"/>
-          </a:p>
-        </p:txBody>
-      </p:sp>
-      <p:sp>
-        <p:nvSpPr>
-          <p:cNvPr id="24" name="テキスト ボックス 23">
-            <a:extLst>
-              <a:ext uri="{FF2B5EF4-FFF2-40B4-BE49-F238E27FC236}">
-                <a16:creationId xmlns:a16="http://schemas.microsoft.com/office/drawing/2014/main" id="{264723AE-BED5-A553-ACF2-7969AF281D9B}"/>
-              </a:ext>
-            </a:extLst>
-          </p:cNvPr>
-          <p:cNvSpPr txBox="1"/>
-          <p:nvPr/>
-        </p:nvSpPr>
-        <p:spPr>
-          <a:xfrm>
-            <a:off x="774773" y="2332770"/>
-            <a:ext cx="1186543" cy="369332"/>
-          </a:xfrm>
-          <a:prstGeom prst="rect">
-            <a:avLst/>
-          </a:prstGeom>
-          <a:noFill/>
-        </p:spPr>
-        <p:txBody>
-          <a:bodyPr wrap="none" rtlCol="0">
-            <a:spAutoFit/>
-          </a:bodyPr>
-          <a:lstStyle/>
-          <a:p>
-            <a:r>
-              <a:rPr lang="en-US" altLang="ja-JP" b="1" dirty="0" err="1"/>
-              <a:t>branchX</a:t>
-            </a:r>
-            <a:r>
-              <a:rPr lang="en-US" altLang="ja-JP" b="1" dirty="0"/>
-              <a:t> </a:t>
-            </a:r>
-            <a:endParaRPr kumimoji="1" lang="ja-JP" altLang="en-US" b="1" dirty="0"/>
-          </a:p>
-        </p:txBody>
-      </p:sp>
-      <p:cxnSp>
-        <p:nvCxnSpPr>
-          <p:cNvPr id="44" name="直線矢印コネクタ 43">
-            <a:extLst>
-              <a:ext uri="{FF2B5EF4-FFF2-40B4-BE49-F238E27FC236}">
-                <a16:creationId xmlns:a16="http://schemas.microsoft.com/office/drawing/2014/main" id="{30CC8413-45E3-C3D1-4D22-9A7E288D9D65}"/>
-              </a:ext>
-            </a:extLst>
-          </p:cNvPr>
-          <p:cNvCxnSpPr>
-            <a:cxnSpLocks/>
-          </p:cNvCxnSpPr>
-          <p:nvPr/>
-        </p:nvCxnSpPr>
-        <p:spPr>
-          <a:xfrm flipV="1">
-            <a:off x="6316100" y="5894734"/>
-            <a:ext cx="1400594" cy="9333"/>
-          </a:xfrm>
-          <a:prstGeom prst="straightConnector1">
-            <a:avLst/>
-          </a:prstGeom>
-          <a:ln w="38100">
-            <a:solidFill>
-              <a:srgbClr val="7030A0"/>
-            </a:solidFill>
-            <a:tailEnd type="triangle"/>
-          </a:ln>
-        </p:spPr>
-        <p:style>
-          <a:lnRef idx="1">
-            <a:schemeClr val="dk1"/>
-          </a:lnRef>
-          <a:fillRef idx="0">
-            <a:schemeClr val="dk1"/>
-          </a:fillRef>
-          <a:effectRef idx="0">
-            <a:schemeClr val="dk1"/>
-          </a:effectRef>
-          <a:fontRef idx="minor">
-            <a:schemeClr val="tx1"/>
-          </a:fontRef>
-        </p:style>
-      </p:cxnSp>
-      <p:sp>
-        <p:nvSpPr>
-          <p:cNvPr id="45" name="楕円 44">
-            <a:extLst>
-              <a:ext uri="{FF2B5EF4-FFF2-40B4-BE49-F238E27FC236}">
-                <a16:creationId xmlns:a16="http://schemas.microsoft.com/office/drawing/2014/main" id="{681328B9-2F82-AA2D-8AA5-AB91E2937952}"/>
-              </a:ext>
-            </a:extLst>
-          </p:cNvPr>
-          <p:cNvSpPr/>
-          <p:nvPr/>
-        </p:nvSpPr>
-        <p:spPr>
-          <a:xfrm>
-            <a:off x="7708900" y="5539400"/>
-            <a:ext cx="720000" cy="720000"/>
-          </a:xfrm>
-          <a:prstGeom prst="ellipse">
-            <a:avLst/>
-          </a:prstGeom>
-          <a:solidFill>
-            <a:schemeClr val="bg1"/>
-          </a:solidFill>
-          <a:ln w="38100">
-            <a:solidFill>
-              <a:srgbClr val="7030A0"/>
-            </a:solidFill>
-          </a:ln>
-        </p:spPr>
-        <p:style>
-          <a:lnRef idx="2">
-            <a:schemeClr val="dk1">
-              <a:shade val="15000"/>
-            </a:schemeClr>
-          </a:lnRef>
-          <a:fillRef idx="1">
-            <a:schemeClr val="dk1"/>
-          </a:fillRef>
-          <a:effectRef idx="0">
-            <a:schemeClr val="dk1"/>
-          </a:effectRef>
-          <a:fontRef idx="minor">
-            <a:schemeClr val="lt1"/>
-          </a:fontRef>
-        </p:style>
-        <p:txBody>
-          <a:bodyPr rtlCol="0" anchor="ctr"/>
-          <a:lstStyle/>
-          <a:p>
-            <a:pPr algn="ctr"/>
-            <a:r>
-              <a:rPr lang="en-US" altLang="ja-JP" b="1">
-                <a:ln w="0"/>
-                <a:solidFill>
-                  <a:srgbClr val="7030A0"/>
-                </a:solidFill>
-                <a:effectLst>
-                  <a:outerShdw blurRad="38100" dist="19050" dir="2700000" algn="tl" rotWithShape="0">
-                    <a:schemeClr val="dk1">
-                      <a:alpha val="40000"/>
-                    </a:schemeClr>
-                  </a:outerShdw>
-                </a:effectLst>
-              </a:rPr>
-              <a:t>B2</a:t>
-            </a:r>
-            <a:endParaRPr lang="en-US" altLang="ja-JP" b="1" dirty="0">
-              <a:ln w="0"/>
-              <a:solidFill>
-                <a:srgbClr val="7030A0"/>
-              </a:solidFill>
-              <a:effectLst>
-                <a:outerShdw blurRad="38100" dist="19050" dir="2700000" algn="tl" rotWithShape="0">
-                  <a:schemeClr val="dk1">
-                    <a:alpha val="40000"/>
-                  </a:schemeClr>
-                </a:outerShdw>
-              </a:effectLst>
-            </a:endParaRPr>
-          </a:p>
-        </p:txBody>
-      </p:sp>
-      <p:sp>
-        <p:nvSpPr>
-          <p:cNvPr id="6" name="テキスト ボックス 5">
-            <a:extLst>
-              <a:ext uri="{FF2B5EF4-FFF2-40B4-BE49-F238E27FC236}">
-                <a16:creationId xmlns:a16="http://schemas.microsoft.com/office/drawing/2014/main" id="{551D878E-9AAB-ECD3-F315-C7338E15E3FC}"/>
-              </a:ext>
-            </a:extLst>
-          </p:cNvPr>
-          <p:cNvSpPr txBox="1"/>
-          <p:nvPr/>
-        </p:nvSpPr>
-        <p:spPr>
-          <a:xfrm>
-            <a:off x="-918304" y="2323834"/>
-            <a:ext cx="1905325" cy="369332"/>
-          </a:xfrm>
-          <a:prstGeom prst="rect">
-            <a:avLst/>
-          </a:prstGeom>
-          <a:noFill/>
-        </p:spPr>
-        <p:txBody>
-          <a:bodyPr wrap="square" rtlCol="0">
-            <a:spAutoFit/>
-          </a:bodyPr>
-          <a:lstStyle/>
-          <a:p>
-            <a:r>
-              <a:rPr kumimoji="1" lang="ja-JP" altLang="en-US" b="1" dirty="0">
-                <a:solidFill>
-                  <a:srgbClr val="00B050"/>
-                </a:solidFill>
-              </a:rPr>
-              <a:t>作業ブランチ</a:t>
-            </a:r>
-          </a:p>
-        </p:txBody>
-      </p:sp>
-      <p:sp>
-        <p:nvSpPr>
-          <p:cNvPr id="9" name="テキスト ボックス 8">
-            <a:extLst>
-              <a:ext uri="{FF2B5EF4-FFF2-40B4-BE49-F238E27FC236}">
-                <a16:creationId xmlns:a16="http://schemas.microsoft.com/office/drawing/2014/main" id="{B9D49057-C877-1D88-D298-9E0DDFFE589C}"/>
-              </a:ext>
-            </a:extLst>
-          </p:cNvPr>
-          <p:cNvSpPr txBox="1"/>
-          <p:nvPr/>
-        </p:nvSpPr>
-        <p:spPr>
-          <a:xfrm>
-            <a:off x="-918304" y="5702155"/>
-            <a:ext cx="1905325" cy="369332"/>
-          </a:xfrm>
-          <a:prstGeom prst="rect">
-            <a:avLst/>
-          </a:prstGeom>
-          <a:noFill/>
-        </p:spPr>
-        <p:txBody>
-          <a:bodyPr wrap="square" rtlCol="0">
-            <a:spAutoFit/>
-          </a:bodyPr>
-          <a:lstStyle/>
-          <a:p>
-            <a:r>
-              <a:rPr kumimoji="1" lang="ja-JP" altLang="en-US" b="1" dirty="0">
-                <a:solidFill>
-                  <a:srgbClr val="00B050"/>
-                </a:solidFill>
-              </a:rPr>
-              <a:t>作業ブランチ</a:t>
-            </a:r>
-          </a:p>
-        </p:txBody>
-      </p:sp>
-      <p:sp>
-        <p:nvSpPr>
-          <p:cNvPr id="15" name="四角形: 角を丸くする 14">
-            <a:extLst>
-              <a:ext uri="{FF2B5EF4-FFF2-40B4-BE49-F238E27FC236}">
-                <a16:creationId xmlns:a16="http://schemas.microsoft.com/office/drawing/2014/main" id="{858191CF-6484-6160-6AAE-3541F5D8B190}"/>
-              </a:ext>
-            </a:extLst>
-          </p:cNvPr>
-          <p:cNvSpPr/>
-          <p:nvPr/>
-        </p:nvSpPr>
-        <p:spPr>
-          <a:xfrm>
-            <a:off x="774773" y="1968500"/>
-            <a:ext cx="10274227" cy="1080000"/>
-          </a:xfrm>
-          <a:prstGeom prst="roundRect">
-            <a:avLst/>
-          </a:prstGeom>
-          <a:noFill/>
-          <a:ln w="38100">
-            <a:solidFill>
-              <a:srgbClr val="00B050"/>
-            </a:solidFill>
-            <a:prstDash val="dash"/>
-          </a:ln>
-        </p:spPr>
-        <p:style>
-          <a:lnRef idx="2">
-            <a:schemeClr val="accent1">
-              <a:shade val="15000"/>
-            </a:schemeClr>
-          </a:lnRef>
-          <a:fillRef idx="1">
-            <a:schemeClr val="accent1"/>
-          </a:fillRef>
-          <a:effectRef idx="0">
-            <a:schemeClr val="accent1"/>
-          </a:effectRef>
-          <a:fontRef idx="minor">
-            <a:schemeClr val="lt1"/>
-          </a:fontRef>
-        </p:style>
-        <p:txBody>
-          <a:bodyPr rtlCol="0" anchor="ctr"/>
-          <a:lstStyle/>
-          <a:p>
-            <a:pPr algn="ctr"/>
-            <a:endParaRPr kumimoji="1" lang="ja-JP" altLang="en-US"/>
-          </a:p>
-        </p:txBody>
-      </p:sp>
-      <p:sp>
-        <p:nvSpPr>
-          <p:cNvPr id="16" name="四角形: 角を丸くする 15">
-            <a:extLst>
-              <a:ext uri="{FF2B5EF4-FFF2-40B4-BE49-F238E27FC236}">
-                <a16:creationId xmlns:a16="http://schemas.microsoft.com/office/drawing/2014/main" id="{1B4D245B-5431-B348-6E9F-D1677057CA75}"/>
-              </a:ext>
-            </a:extLst>
-          </p:cNvPr>
-          <p:cNvSpPr/>
-          <p:nvPr/>
-        </p:nvSpPr>
-        <p:spPr>
-          <a:xfrm>
-            <a:off x="774773" y="5359400"/>
-            <a:ext cx="10274227" cy="1080000"/>
-          </a:xfrm>
-          <a:prstGeom prst="roundRect">
-            <a:avLst/>
-          </a:prstGeom>
-          <a:noFill/>
-          <a:ln w="38100">
-            <a:solidFill>
-              <a:srgbClr val="00B050"/>
-            </a:solidFill>
-            <a:prstDash val="dash"/>
-          </a:ln>
-        </p:spPr>
-        <p:style>
-          <a:lnRef idx="2">
-            <a:schemeClr val="accent1">
-              <a:shade val="15000"/>
-            </a:schemeClr>
-          </a:lnRef>
-          <a:fillRef idx="1">
-            <a:schemeClr val="accent1"/>
-          </a:fillRef>
-          <a:effectRef idx="0">
-            <a:schemeClr val="accent1"/>
-          </a:effectRef>
-          <a:fontRef idx="minor">
-            <a:schemeClr val="lt1"/>
-          </a:fontRef>
-        </p:style>
-        <p:txBody>
-          <a:bodyPr rtlCol="0" anchor="ctr"/>
-          <a:lstStyle/>
-          <a:p>
-            <a:pPr algn="ctr"/>
-            <a:endParaRPr kumimoji="1" lang="ja-JP" altLang="en-US"/>
-          </a:p>
-        </p:txBody>
-      </p:sp>
-      <p:sp>
-        <p:nvSpPr>
-          <p:cNvPr id="11" name="爆発: 8 pt 10">
-            <a:extLst>
-              <a:ext uri="{FF2B5EF4-FFF2-40B4-BE49-F238E27FC236}">
-                <a16:creationId xmlns:a16="http://schemas.microsoft.com/office/drawing/2014/main" id="{030B99E2-5E71-2874-6A05-ED1E955BBB81}"/>
-              </a:ext>
-            </a:extLst>
-          </p:cNvPr>
-          <p:cNvSpPr/>
-          <p:nvPr/>
-        </p:nvSpPr>
-        <p:spPr>
-          <a:xfrm>
-            <a:off x="6212403" y="1120292"/>
-            <a:ext cx="3492500" cy="1222449"/>
-          </a:xfrm>
-          <a:prstGeom prst="irregularSeal1">
-            <a:avLst/>
-          </a:prstGeom>
-          <a:solidFill>
-            <a:schemeClr val="bg1"/>
-          </a:solidFill>
-          <a:ln w="38100">
-            <a:solidFill>
-              <a:srgbClr val="FFC000"/>
-            </a:solidFill>
-          </a:ln>
-        </p:spPr>
-        <p:style>
-          <a:lnRef idx="2">
-            <a:schemeClr val="accent6"/>
-          </a:lnRef>
-          <a:fillRef idx="1">
-            <a:schemeClr val="lt1"/>
-          </a:fillRef>
-          <a:effectRef idx="0">
-            <a:schemeClr val="accent6"/>
-          </a:effectRef>
-          <a:fontRef idx="minor">
-            <a:schemeClr val="dk1"/>
-          </a:fontRef>
-        </p:style>
-        <p:txBody>
-          <a:bodyPr rtlCol="0" anchor="ctr"/>
-          <a:lstStyle/>
-          <a:p>
-            <a:pPr algn="ctr"/>
-            <a:r>
-              <a:rPr kumimoji="1" lang="ja-JP" altLang="en-US" b="1" dirty="0">
-                <a:solidFill>
-                  <a:srgbClr val="FFC000"/>
-                </a:solidFill>
-              </a:rPr>
-              <a:t>コンフリクト</a:t>
-            </a:r>
-          </a:p>
-        </p:txBody>
-      </p:sp>
-      <p:sp>
-        <p:nvSpPr>
-          <p:cNvPr id="3" name="テキスト ボックス 2">
-            <a:extLst>
-              <a:ext uri="{FF2B5EF4-FFF2-40B4-BE49-F238E27FC236}">
-                <a16:creationId xmlns:a16="http://schemas.microsoft.com/office/drawing/2014/main" id="{2BD6074B-242A-19D1-F089-A67533B09B1E}"/>
-              </a:ext>
-            </a:extLst>
-          </p:cNvPr>
-          <p:cNvSpPr txBox="1"/>
-          <p:nvPr/>
-        </p:nvSpPr>
-        <p:spPr>
-          <a:xfrm>
-            <a:off x="999193" y="4055570"/>
-            <a:ext cx="737702" cy="369332"/>
-          </a:xfrm>
-          <a:prstGeom prst="rect">
-            <a:avLst/>
-          </a:prstGeom>
-          <a:noFill/>
-        </p:spPr>
-        <p:txBody>
-          <a:bodyPr wrap="none" rtlCol="0">
-            <a:spAutoFit/>
-          </a:bodyPr>
-          <a:lstStyle/>
-          <a:p>
-            <a:r>
-              <a:rPr lang="en-US" altLang="ja-JP" b="1" dirty="0"/>
-              <a:t>main</a:t>
-            </a:r>
-            <a:endParaRPr lang="ja-JP" altLang="en-US" b="1" dirty="0"/>
-          </a:p>
-        </p:txBody>
-      </p:sp>
-      <p:sp>
-        <p:nvSpPr>
-          <p:cNvPr id="4" name="テキスト ボックス 3">
-            <a:extLst>
-              <a:ext uri="{FF2B5EF4-FFF2-40B4-BE49-F238E27FC236}">
-                <a16:creationId xmlns:a16="http://schemas.microsoft.com/office/drawing/2014/main" id="{E7A23DF4-7664-1C02-E43C-48F8E3C20461}"/>
-              </a:ext>
-            </a:extLst>
-          </p:cNvPr>
-          <p:cNvSpPr txBox="1"/>
-          <p:nvPr/>
-        </p:nvSpPr>
-        <p:spPr>
-          <a:xfrm>
-            <a:off x="999193" y="664670"/>
-            <a:ext cx="737702" cy="369332"/>
-          </a:xfrm>
-          <a:prstGeom prst="rect">
-            <a:avLst/>
-          </a:prstGeom>
-          <a:noFill/>
-        </p:spPr>
-        <p:txBody>
-          <a:bodyPr wrap="none" rtlCol="0">
-            <a:spAutoFit/>
-          </a:bodyPr>
-          <a:lstStyle/>
-          <a:p>
-            <a:r>
-              <a:rPr kumimoji="1" lang="en-US" altLang="ja-JP" b="1" dirty="0"/>
-              <a:t>main</a:t>
-            </a:r>
-            <a:endParaRPr kumimoji="1" lang="ja-JP" altLang="en-US" b="1" dirty="0"/>
-          </a:p>
-        </p:txBody>
-      </p:sp>
-      <p:cxnSp>
-        <p:nvCxnSpPr>
-          <p:cNvPr id="12" name="直線コネクタ 11">
-            <a:extLst>
-              <a:ext uri="{FF2B5EF4-FFF2-40B4-BE49-F238E27FC236}">
-                <a16:creationId xmlns:a16="http://schemas.microsoft.com/office/drawing/2014/main" id="{96299E3B-1A0B-D701-D2F4-20EC7FDC21A6}"/>
-              </a:ext>
-            </a:extLst>
-          </p:cNvPr>
-          <p:cNvCxnSpPr>
-            <a:cxnSpLocks/>
-          </p:cNvCxnSpPr>
-          <p:nvPr/>
-        </p:nvCxnSpPr>
-        <p:spPr>
-          <a:xfrm flipV="1">
-            <a:off x="1822727" y="9236624"/>
-            <a:ext cx="9000000" cy="0"/>
-          </a:xfrm>
-          <a:prstGeom prst="line">
-            <a:avLst/>
-          </a:prstGeom>
-          <a:ln>
-            <a:prstDash val="dash"/>
-          </a:ln>
-        </p:spPr>
-        <p:style>
-          <a:lnRef idx="1">
-            <a:schemeClr val="accent1"/>
-          </a:lnRef>
-          <a:fillRef idx="0">
-            <a:schemeClr val="accent1"/>
-          </a:fillRef>
-          <a:effectRef idx="0">
-            <a:schemeClr val="accent1"/>
-          </a:effectRef>
-          <a:fontRef idx="minor">
-            <a:schemeClr val="tx1"/>
-          </a:fontRef>
-        </p:style>
-      </p:cxnSp>
-      <p:cxnSp>
-        <p:nvCxnSpPr>
-          <p:cNvPr id="17" name="直線コネクタ 16">
-            <a:extLst>
-              <a:ext uri="{FF2B5EF4-FFF2-40B4-BE49-F238E27FC236}">
-                <a16:creationId xmlns:a16="http://schemas.microsoft.com/office/drawing/2014/main" id="{B596A1B1-E5F9-104C-03FA-B61766C32B1F}"/>
-              </a:ext>
-            </a:extLst>
-          </p:cNvPr>
-          <p:cNvCxnSpPr>
-            <a:cxnSpLocks/>
-          </p:cNvCxnSpPr>
-          <p:nvPr/>
-        </p:nvCxnSpPr>
-        <p:spPr>
-          <a:xfrm>
-            <a:off x="1822727" y="7589147"/>
-            <a:ext cx="9000000" cy="0"/>
-          </a:xfrm>
-          <a:prstGeom prst="line">
-            <a:avLst/>
-          </a:prstGeom>
-          <a:ln>
-            <a:prstDash val="dash"/>
-          </a:ln>
-        </p:spPr>
-        <p:style>
-          <a:lnRef idx="1">
-            <a:schemeClr val="accent1"/>
-          </a:lnRef>
-          <a:fillRef idx="0">
-            <a:schemeClr val="accent1"/>
-          </a:fillRef>
-          <a:effectRef idx="0">
-            <a:schemeClr val="accent1"/>
-          </a:effectRef>
-          <a:fontRef idx="minor">
-            <a:schemeClr val="tx1"/>
-          </a:fontRef>
-        </p:style>
-      </p:cxnSp>
-      <p:sp>
-        <p:nvSpPr>
-          <p:cNvPr id="28" name="楕円 27">
-            <a:extLst>
-              <a:ext uri="{FF2B5EF4-FFF2-40B4-BE49-F238E27FC236}">
-                <a16:creationId xmlns:a16="http://schemas.microsoft.com/office/drawing/2014/main" id="{E6E24BE5-A2B8-42FE-543C-249098ADC465}"/>
-              </a:ext>
-            </a:extLst>
-          </p:cNvPr>
-          <p:cNvSpPr/>
-          <p:nvPr/>
-        </p:nvSpPr>
-        <p:spPr>
-          <a:xfrm>
-            <a:off x="5594933" y="8893175"/>
-            <a:ext cx="720000" cy="720000"/>
-          </a:xfrm>
-          <a:prstGeom prst="ellipse">
-            <a:avLst/>
-          </a:prstGeom>
-          <a:solidFill>
-            <a:schemeClr val="bg1"/>
-          </a:solidFill>
-          <a:ln w="38100">
-            <a:solidFill>
-              <a:srgbClr val="FF0000"/>
-            </a:solidFill>
-          </a:ln>
-        </p:spPr>
-        <p:style>
-          <a:lnRef idx="2">
-            <a:schemeClr val="dk1">
-              <a:shade val="15000"/>
-            </a:schemeClr>
-          </a:lnRef>
-          <a:fillRef idx="1">
-            <a:schemeClr val="dk1"/>
-          </a:fillRef>
-          <a:effectRef idx="0">
-            <a:schemeClr val="dk1"/>
-          </a:effectRef>
-          <a:fontRef idx="minor">
-            <a:schemeClr val="lt1"/>
-          </a:fontRef>
-        </p:style>
-        <p:txBody>
-          <a:bodyPr rtlCol="0" anchor="ctr"/>
-          <a:lstStyle/>
-          <a:p>
-            <a:pPr algn="ctr"/>
-            <a:r>
-              <a:rPr lang="en-US" altLang="ja-JP" b="1">
-                <a:ln w="0"/>
-                <a:solidFill>
-                  <a:srgbClr val="FF0000"/>
-                </a:solidFill>
-                <a:effectLst>
-                  <a:outerShdw blurRad="38100" dist="19050" dir="2700000" algn="tl" rotWithShape="0">
-                    <a:schemeClr val="dk1">
-                      <a:alpha val="40000"/>
-                    </a:schemeClr>
-                  </a:outerShdw>
-                </a:effectLst>
-              </a:rPr>
-              <a:t>B1</a:t>
-            </a:r>
-            <a:endParaRPr lang="en-US" altLang="ja-JP" b="1" dirty="0">
-              <a:ln w="0"/>
-              <a:solidFill>
-                <a:srgbClr val="FF0000"/>
-              </a:solidFill>
-              <a:effectLst>
-                <a:outerShdw blurRad="38100" dist="19050" dir="2700000" algn="tl" rotWithShape="0">
-                  <a:schemeClr val="dk1">
-                    <a:alpha val="40000"/>
-                  </a:schemeClr>
-                </a:outerShdw>
-              </a:effectLst>
-            </a:endParaRPr>
-          </a:p>
-        </p:txBody>
-      </p:sp>
-      <p:sp>
-        <p:nvSpPr>
-          <p:cNvPr id="37" name="楕円 36">
-            <a:extLst>
-              <a:ext uri="{FF2B5EF4-FFF2-40B4-BE49-F238E27FC236}">
-                <a16:creationId xmlns:a16="http://schemas.microsoft.com/office/drawing/2014/main" id="{AE795FC1-3183-B0C3-0560-4AAC145BE0F4}"/>
-              </a:ext>
-            </a:extLst>
-          </p:cNvPr>
-          <p:cNvSpPr/>
-          <p:nvPr/>
-        </p:nvSpPr>
-        <p:spPr>
-          <a:xfrm>
-            <a:off x="3338985" y="7229147"/>
-            <a:ext cx="720000" cy="720000"/>
-          </a:xfrm>
-          <a:prstGeom prst="ellipse">
-            <a:avLst/>
-          </a:prstGeom>
-          <a:solidFill>
-            <a:schemeClr val="bg1"/>
-          </a:solidFill>
-          <a:ln w="38100"/>
-        </p:spPr>
-        <p:style>
-          <a:lnRef idx="2">
-            <a:schemeClr val="dk1">
-              <a:shade val="15000"/>
-            </a:schemeClr>
-          </a:lnRef>
-          <a:fillRef idx="1">
-            <a:schemeClr val="dk1"/>
-          </a:fillRef>
-          <a:effectRef idx="0">
-            <a:schemeClr val="dk1"/>
-          </a:effectRef>
-          <a:fontRef idx="minor">
-            <a:schemeClr val="lt1"/>
-          </a:fontRef>
-        </p:style>
-        <p:txBody>
-          <a:bodyPr rtlCol="0" anchor="ctr"/>
-          <a:lstStyle/>
-          <a:p>
-            <a:pPr algn="ctr"/>
-            <a:r>
-              <a:rPr lang="en-US" altLang="ja-JP" b="1" dirty="0">
-                <a:solidFill>
-                  <a:schemeClr val="tx1"/>
-                </a:solidFill>
-              </a:rPr>
-              <a:t>A1</a:t>
-            </a:r>
-            <a:endParaRPr lang="ja-JP" altLang="en-US" b="1" dirty="0">
-              <a:solidFill>
-                <a:schemeClr val="tx1"/>
-              </a:solidFill>
-            </a:endParaRPr>
-          </a:p>
-        </p:txBody>
-      </p:sp>
-      <p:cxnSp>
-        <p:nvCxnSpPr>
-          <p:cNvPr id="38" name="直線矢印コネクタ 37">
-            <a:extLst>
-              <a:ext uri="{FF2B5EF4-FFF2-40B4-BE49-F238E27FC236}">
-                <a16:creationId xmlns:a16="http://schemas.microsoft.com/office/drawing/2014/main" id="{267CBD82-3ABA-5CB0-DFFD-C39B46F1BF42}"/>
-              </a:ext>
-            </a:extLst>
-          </p:cNvPr>
-          <p:cNvCxnSpPr>
-            <a:cxnSpLocks/>
-            <a:stCxn id="37" idx="4"/>
-            <a:endCxn id="28" idx="2"/>
-          </p:cNvCxnSpPr>
-          <p:nvPr/>
-        </p:nvCxnSpPr>
-        <p:spPr>
-          <a:xfrm>
-            <a:off x="3698985" y="7949147"/>
-            <a:ext cx="1895948" cy="1304028"/>
-          </a:xfrm>
-          <a:prstGeom prst="straightConnector1">
-            <a:avLst/>
-          </a:prstGeom>
-          <a:ln w="38100">
-            <a:tailEnd type="triangle"/>
-          </a:ln>
-        </p:spPr>
-        <p:style>
-          <a:lnRef idx="1">
-            <a:schemeClr val="dk1"/>
-          </a:lnRef>
-          <a:fillRef idx="0">
-            <a:schemeClr val="dk1"/>
-          </a:fillRef>
-          <a:effectRef idx="0">
-            <a:schemeClr val="dk1"/>
-          </a:effectRef>
-          <a:fontRef idx="minor">
-            <a:schemeClr val="tx1"/>
-          </a:fontRef>
-        </p:style>
-      </p:cxnSp>
-      <p:cxnSp>
-        <p:nvCxnSpPr>
-          <p:cNvPr id="39" name="直線矢印コネクタ 38">
-            <a:extLst>
-              <a:ext uri="{FF2B5EF4-FFF2-40B4-BE49-F238E27FC236}">
-                <a16:creationId xmlns:a16="http://schemas.microsoft.com/office/drawing/2014/main" id="{FEC13AD7-9D36-3A05-5E2A-451E8FE4A71E}"/>
-              </a:ext>
-            </a:extLst>
-          </p:cNvPr>
-          <p:cNvCxnSpPr>
-            <a:cxnSpLocks/>
-          </p:cNvCxnSpPr>
-          <p:nvPr/>
-        </p:nvCxnSpPr>
-        <p:spPr>
-          <a:xfrm>
-            <a:off x="2208685" y="7583111"/>
-            <a:ext cx="1130300" cy="12072"/>
-          </a:xfrm>
-          <a:prstGeom prst="straightConnector1">
-            <a:avLst/>
-          </a:prstGeom>
-          <a:ln w="38100">
-            <a:tailEnd type="triangle"/>
-          </a:ln>
-        </p:spPr>
-        <p:style>
-          <a:lnRef idx="1">
-            <a:schemeClr val="dk1"/>
-          </a:lnRef>
-          <a:fillRef idx="0">
-            <a:schemeClr val="dk1"/>
-          </a:fillRef>
-          <a:effectRef idx="0">
-            <a:schemeClr val="dk1"/>
-          </a:effectRef>
-          <a:fontRef idx="minor">
-            <a:schemeClr val="tx1"/>
-          </a:fontRef>
-        </p:style>
-      </p:cxnSp>
-      <p:cxnSp>
-        <p:nvCxnSpPr>
-          <p:cNvPr id="46" name="直線矢印コネクタ 45">
-            <a:extLst>
-              <a:ext uri="{FF2B5EF4-FFF2-40B4-BE49-F238E27FC236}">
-                <a16:creationId xmlns:a16="http://schemas.microsoft.com/office/drawing/2014/main" id="{EE353364-9468-0621-3440-7AB1DC8014EA}"/>
-              </a:ext>
-            </a:extLst>
-          </p:cNvPr>
-          <p:cNvCxnSpPr>
-            <a:cxnSpLocks/>
-          </p:cNvCxnSpPr>
-          <p:nvPr/>
-        </p:nvCxnSpPr>
-        <p:spPr>
-          <a:xfrm flipV="1">
-            <a:off x="4058985" y="7585187"/>
-            <a:ext cx="1535948" cy="7921"/>
-          </a:xfrm>
-          <a:prstGeom prst="straightConnector1">
-            <a:avLst/>
-          </a:prstGeom>
-          <a:ln w="38100">
-            <a:tailEnd type="triangle"/>
-          </a:ln>
-        </p:spPr>
-        <p:style>
-          <a:lnRef idx="1">
-            <a:schemeClr val="dk1"/>
-          </a:lnRef>
-          <a:fillRef idx="0">
-            <a:schemeClr val="dk1"/>
-          </a:fillRef>
-          <a:effectRef idx="0">
-            <a:schemeClr val="dk1"/>
-          </a:effectRef>
-          <a:fontRef idx="minor">
-            <a:schemeClr val="tx1"/>
-          </a:fontRef>
-        </p:style>
-      </p:cxnSp>
-      <p:sp>
-        <p:nvSpPr>
-          <p:cNvPr id="47" name="楕円 46">
-            <a:extLst>
-              <a:ext uri="{FF2B5EF4-FFF2-40B4-BE49-F238E27FC236}">
-                <a16:creationId xmlns:a16="http://schemas.microsoft.com/office/drawing/2014/main" id="{D6DB1CC6-FEC7-336B-4FDA-1D8D1E605302}"/>
-              </a:ext>
-            </a:extLst>
-          </p:cNvPr>
-          <p:cNvSpPr/>
-          <p:nvPr/>
-        </p:nvSpPr>
-        <p:spPr>
-          <a:xfrm>
-            <a:off x="5594933" y="7229147"/>
-            <a:ext cx="720000" cy="720000"/>
-          </a:xfrm>
-          <a:prstGeom prst="ellipse">
-            <a:avLst/>
-          </a:prstGeom>
-          <a:solidFill>
-            <a:schemeClr val="bg1"/>
-          </a:solidFill>
-          <a:ln w="38100">
-            <a:solidFill>
-              <a:schemeClr val="accent1"/>
-            </a:solidFill>
-          </a:ln>
-        </p:spPr>
-        <p:style>
-          <a:lnRef idx="2">
-            <a:schemeClr val="dk1">
-              <a:shade val="15000"/>
-            </a:schemeClr>
-          </a:lnRef>
-          <a:fillRef idx="1">
-            <a:schemeClr val="dk1"/>
-          </a:fillRef>
-          <a:effectRef idx="0">
-            <a:schemeClr val="dk1"/>
-          </a:effectRef>
-          <a:fontRef idx="minor">
-            <a:schemeClr val="lt1"/>
-          </a:fontRef>
-        </p:style>
-        <p:txBody>
-          <a:bodyPr rtlCol="0" anchor="ctr"/>
-          <a:lstStyle/>
-          <a:p>
-            <a:pPr algn="ctr"/>
-            <a:r>
-              <a:rPr lang="en-US" altLang="ja-JP" b="1">
-                <a:ln w="0"/>
-                <a:solidFill>
-                  <a:srgbClr val="0070C0"/>
-                </a:solidFill>
-                <a:effectLst>
-                  <a:outerShdw blurRad="38100" dist="19050" dir="2700000" algn="tl" rotWithShape="0">
-                    <a:schemeClr val="dk1">
-                      <a:alpha val="40000"/>
-                    </a:schemeClr>
-                  </a:outerShdw>
-                </a:effectLst>
-              </a:rPr>
-              <a:t>A2</a:t>
-            </a:r>
-            <a:endParaRPr lang="en-US" altLang="ja-JP" b="1" dirty="0">
-              <a:ln w="0"/>
-              <a:solidFill>
-                <a:srgbClr val="0070C0"/>
-              </a:solidFill>
-              <a:effectLst>
-                <a:outerShdw blurRad="38100" dist="19050" dir="2700000" algn="tl" rotWithShape="0">
-                  <a:schemeClr val="dk1">
-                    <a:alpha val="40000"/>
-                  </a:schemeClr>
-                </a:outerShdw>
-              </a:effectLst>
-            </a:endParaRPr>
-          </a:p>
-        </p:txBody>
-      </p:sp>
-      <p:sp>
-        <p:nvSpPr>
-          <p:cNvPr id="48" name="テキスト ボックス 47">
-            <a:extLst>
-              <a:ext uri="{FF2B5EF4-FFF2-40B4-BE49-F238E27FC236}">
-                <a16:creationId xmlns:a16="http://schemas.microsoft.com/office/drawing/2014/main" id="{D263861A-136E-884F-BE2F-0D45B03E2771}"/>
-              </a:ext>
-            </a:extLst>
-          </p:cNvPr>
-          <p:cNvSpPr txBox="1"/>
-          <p:nvPr/>
-        </p:nvSpPr>
-        <p:spPr>
-          <a:xfrm>
-            <a:off x="807634" y="9069841"/>
-            <a:ext cx="1120820" cy="369332"/>
-          </a:xfrm>
-          <a:prstGeom prst="rect">
-            <a:avLst/>
-          </a:prstGeom>
-          <a:noFill/>
-        </p:spPr>
-        <p:txBody>
-          <a:bodyPr wrap="none" rtlCol="0">
-            <a:spAutoFit/>
-          </a:bodyPr>
-          <a:lstStyle/>
-          <a:p>
-            <a:r>
-              <a:rPr lang="en-US" altLang="ja-JP" b="1" dirty="0" err="1"/>
-              <a:t>branchX</a:t>
-            </a:r>
-            <a:endParaRPr kumimoji="1" lang="ja-JP" altLang="en-US" b="1" dirty="0"/>
-          </a:p>
-        </p:txBody>
-      </p:sp>
-      <p:cxnSp>
-        <p:nvCxnSpPr>
-          <p:cNvPr id="49" name="直線矢印コネクタ 48">
-            <a:extLst>
-              <a:ext uri="{FF2B5EF4-FFF2-40B4-BE49-F238E27FC236}">
-                <a16:creationId xmlns:a16="http://schemas.microsoft.com/office/drawing/2014/main" id="{B11EE254-563B-F24C-60F0-17341810738F}"/>
-              </a:ext>
-            </a:extLst>
-          </p:cNvPr>
-          <p:cNvCxnSpPr>
-            <a:cxnSpLocks/>
-          </p:cNvCxnSpPr>
-          <p:nvPr/>
-        </p:nvCxnSpPr>
-        <p:spPr>
-          <a:xfrm flipV="1">
-            <a:off x="6322727" y="9248509"/>
-            <a:ext cx="1400594" cy="9333"/>
-          </a:xfrm>
-          <a:prstGeom prst="straightConnector1">
-            <a:avLst/>
-          </a:prstGeom>
-          <a:ln w="38100">
-            <a:solidFill>
-              <a:srgbClr val="7030A0"/>
-            </a:solidFill>
-            <a:tailEnd type="triangle"/>
-          </a:ln>
-        </p:spPr>
-        <p:style>
-          <a:lnRef idx="1">
-            <a:schemeClr val="dk1"/>
-          </a:lnRef>
-          <a:fillRef idx="0">
-            <a:schemeClr val="dk1"/>
-          </a:fillRef>
-          <a:effectRef idx="0">
-            <a:schemeClr val="dk1"/>
-          </a:effectRef>
-          <a:fontRef idx="minor">
-            <a:schemeClr val="tx1"/>
-          </a:fontRef>
-        </p:style>
-      </p:cxnSp>
-      <p:sp>
-        <p:nvSpPr>
-          <p:cNvPr id="50" name="楕円 49">
-            <a:extLst>
-              <a:ext uri="{FF2B5EF4-FFF2-40B4-BE49-F238E27FC236}">
-                <a16:creationId xmlns:a16="http://schemas.microsoft.com/office/drawing/2014/main" id="{49EF939A-63F4-8867-812D-3C71483689F1}"/>
-              </a:ext>
-            </a:extLst>
-          </p:cNvPr>
-          <p:cNvSpPr/>
-          <p:nvPr/>
-        </p:nvSpPr>
-        <p:spPr>
-          <a:xfrm>
-            <a:off x="7715527" y="8893175"/>
-            <a:ext cx="720000" cy="720000"/>
-          </a:xfrm>
-          <a:prstGeom prst="ellipse">
-            <a:avLst/>
-          </a:prstGeom>
-          <a:solidFill>
-            <a:schemeClr val="bg1"/>
-          </a:solidFill>
-          <a:ln w="38100">
-            <a:solidFill>
-              <a:srgbClr val="7030A0"/>
-            </a:solidFill>
-          </a:ln>
-        </p:spPr>
-        <p:style>
-          <a:lnRef idx="2">
-            <a:schemeClr val="dk1">
-              <a:shade val="15000"/>
-            </a:schemeClr>
-          </a:lnRef>
-          <a:fillRef idx="1">
-            <a:schemeClr val="dk1"/>
-          </a:fillRef>
-          <a:effectRef idx="0">
-            <a:schemeClr val="dk1"/>
-          </a:effectRef>
-          <a:fontRef idx="minor">
-            <a:schemeClr val="lt1"/>
-          </a:fontRef>
-        </p:style>
-        <p:txBody>
-          <a:bodyPr rtlCol="0" anchor="ctr"/>
-          <a:lstStyle/>
-          <a:p>
-            <a:pPr algn="ctr"/>
-            <a:r>
-              <a:rPr lang="en-US" altLang="ja-JP" b="1">
-                <a:ln w="0"/>
-                <a:solidFill>
-                  <a:srgbClr val="7030A0"/>
-                </a:solidFill>
-                <a:effectLst>
-                  <a:outerShdw blurRad="38100" dist="19050" dir="2700000" algn="tl" rotWithShape="0">
-                    <a:schemeClr val="dk1">
-                      <a:alpha val="40000"/>
-                    </a:schemeClr>
-                  </a:outerShdw>
-                </a:effectLst>
-              </a:rPr>
-              <a:t>B2</a:t>
-            </a:r>
-            <a:endParaRPr lang="en-US" altLang="ja-JP" b="1" dirty="0">
-              <a:ln w="0"/>
-              <a:solidFill>
-                <a:srgbClr val="7030A0"/>
-              </a:solidFill>
-              <a:effectLst>
-                <a:outerShdw blurRad="38100" dist="19050" dir="2700000" algn="tl" rotWithShape="0">
-                  <a:schemeClr val="dk1">
-                    <a:alpha val="40000"/>
-                  </a:schemeClr>
-                </a:outerShdw>
-              </a:effectLst>
-            </a:endParaRPr>
-          </a:p>
-        </p:txBody>
-      </p:sp>
-      <p:sp>
-        <p:nvSpPr>
-          <p:cNvPr id="51" name="テキスト ボックス 50">
-            <a:extLst>
-              <a:ext uri="{FF2B5EF4-FFF2-40B4-BE49-F238E27FC236}">
-                <a16:creationId xmlns:a16="http://schemas.microsoft.com/office/drawing/2014/main" id="{554DE670-003B-77DC-26B3-47A55233752C}"/>
-              </a:ext>
-            </a:extLst>
-          </p:cNvPr>
-          <p:cNvSpPr txBox="1"/>
-          <p:nvPr/>
-        </p:nvSpPr>
-        <p:spPr>
-          <a:xfrm>
-            <a:off x="-918304" y="9048326"/>
-            <a:ext cx="1905325" cy="369332"/>
-          </a:xfrm>
-          <a:prstGeom prst="rect">
-            <a:avLst/>
-          </a:prstGeom>
-          <a:noFill/>
-        </p:spPr>
-        <p:txBody>
-          <a:bodyPr wrap="square" rtlCol="0">
-            <a:spAutoFit/>
-          </a:bodyPr>
-          <a:lstStyle/>
-          <a:p>
-            <a:r>
-              <a:rPr kumimoji="1" lang="ja-JP" altLang="en-US" b="1" dirty="0">
-                <a:solidFill>
-                  <a:srgbClr val="00B050"/>
-                </a:solidFill>
-              </a:rPr>
-              <a:t>作業ブランチ</a:t>
-            </a:r>
-          </a:p>
-        </p:txBody>
-      </p:sp>
-      <p:sp>
-        <p:nvSpPr>
-          <p:cNvPr id="52" name="四角形: 角を丸くする 51">
-            <a:extLst>
-              <a:ext uri="{FF2B5EF4-FFF2-40B4-BE49-F238E27FC236}">
-                <a16:creationId xmlns:a16="http://schemas.microsoft.com/office/drawing/2014/main" id="{19D545E2-AEF2-F0C8-427F-A86E92681785}"/>
-              </a:ext>
-            </a:extLst>
-          </p:cNvPr>
-          <p:cNvSpPr/>
-          <p:nvPr/>
-        </p:nvSpPr>
-        <p:spPr>
-          <a:xfrm>
-            <a:off x="774773" y="8705571"/>
-            <a:ext cx="10274227" cy="1080000"/>
-          </a:xfrm>
-          <a:prstGeom prst="roundRect">
-            <a:avLst/>
-          </a:prstGeom>
-          <a:noFill/>
-          <a:ln w="38100">
-            <a:solidFill>
-              <a:srgbClr val="00B050"/>
-            </a:solidFill>
-            <a:prstDash val="dash"/>
-          </a:ln>
-        </p:spPr>
-        <p:style>
-          <a:lnRef idx="2">
-            <a:schemeClr val="accent1">
-              <a:shade val="15000"/>
-            </a:schemeClr>
-          </a:lnRef>
-          <a:fillRef idx="1">
-            <a:schemeClr val="accent1"/>
-          </a:fillRef>
-          <a:effectRef idx="0">
-            <a:schemeClr val="accent1"/>
-          </a:effectRef>
-          <a:fontRef idx="minor">
-            <a:schemeClr val="lt1"/>
-          </a:fontRef>
-        </p:style>
-        <p:txBody>
-          <a:bodyPr rtlCol="0" anchor="ctr"/>
-          <a:lstStyle/>
-          <a:p>
-            <a:pPr algn="ctr"/>
-            <a:endParaRPr kumimoji="1" lang="ja-JP" altLang="en-US"/>
-          </a:p>
-        </p:txBody>
-      </p:sp>
-      <p:sp>
-        <p:nvSpPr>
-          <p:cNvPr id="53" name="テキスト ボックス 52">
-            <a:extLst>
-              <a:ext uri="{FF2B5EF4-FFF2-40B4-BE49-F238E27FC236}">
-                <a16:creationId xmlns:a16="http://schemas.microsoft.com/office/drawing/2014/main" id="{BA06EF55-3837-3EA9-AE6F-2236B628B90A}"/>
-              </a:ext>
-            </a:extLst>
-          </p:cNvPr>
-          <p:cNvSpPr txBox="1"/>
-          <p:nvPr/>
-        </p:nvSpPr>
-        <p:spPr>
-          <a:xfrm>
-            <a:off x="999193" y="7404481"/>
-            <a:ext cx="737702" cy="369332"/>
-          </a:xfrm>
-          <a:prstGeom prst="rect">
-            <a:avLst/>
-          </a:prstGeom>
-          <a:noFill/>
-        </p:spPr>
-        <p:txBody>
-          <a:bodyPr wrap="none" rtlCol="0">
-            <a:spAutoFit/>
-          </a:bodyPr>
-          <a:lstStyle/>
-          <a:p>
-            <a:r>
-              <a:rPr lang="en-US" altLang="ja-JP" b="1" dirty="0"/>
-              <a:t>main</a:t>
-            </a:r>
-            <a:endParaRPr lang="ja-JP" altLang="en-US" b="1" dirty="0"/>
-          </a:p>
-        </p:txBody>
-      </p:sp>
-      <p:sp>
-        <p:nvSpPr>
-          <p:cNvPr id="54" name="矢印: 右 53">
-            <a:extLst>
-              <a:ext uri="{FF2B5EF4-FFF2-40B4-BE49-F238E27FC236}">
-                <a16:creationId xmlns:a16="http://schemas.microsoft.com/office/drawing/2014/main" id="{B11B559F-7BAF-66E9-6F53-57913CC9DE4F}"/>
-              </a:ext>
-            </a:extLst>
-          </p:cNvPr>
-          <p:cNvSpPr/>
-          <p:nvPr/>
-        </p:nvSpPr>
-        <p:spPr>
-          <a:xfrm rot="5400000">
-            <a:off x="5704324" y="6509979"/>
-            <a:ext cx="468086" cy="677228"/>
-          </a:xfrm>
-          <a:prstGeom prst="rightArrow">
-            <a:avLst/>
-          </a:prstGeom>
-        </p:spPr>
-        <p:style>
-          <a:lnRef idx="2">
-            <a:schemeClr val="dk1">
-              <a:shade val="15000"/>
-            </a:schemeClr>
-          </a:lnRef>
-          <a:fillRef idx="1">
-            <a:schemeClr val="dk1"/>
-          </a:fillRef>
-          <a:effectRef idx="0">
-            <a:schemeClr val="dk1"/>
-          </a:effectRef>
-          <a:fontRef idx="minor">
-            <a:schemeClr val="lt1"/>
-          </a:fontRef>
-        </p:style>
-        <p:txBody>
-          <a:bodyPr rtlCol="0" anchor="ctr"/>
-          <a:lstStyle/>
-          <a:p>
-            <a:pPr algn="ctr"/>
-            <a:endParaRPr kumimoji="1" lang="ja-JP" altLang="en-US"/>
-          </a:p>
-        </p:txBody>
-      </p:sp>
-      <p:sp>
-        <p:nvSpPr>
-          <p:cNvPr id="55" name="楕円 54">
-            <a:extLst>
-              <a:ext uri="{FF2B5EF4-FFF2-40B4-BE49-F238E27FC236}">
-                <a16:creationId xmlns:a16="http://schemas.microsoft.com/office/drawing/2014/main" id="{CA817454-1894-8DBC-398C-FC4286D84C84}"/>
-              </a:ext>
-            </a:extLst>
-          </p:cNvPr>
-          <p:cNvSpPr/>
-          <p:nvPr/>
-        </p:nvSpPr>
-        <p:spPr>
-          <a:xfrm>
-            <a:off x="9171990" y="7229147"/>
-            <a:ext cx="720000" cy="720000"/>
-          </a:xfrm>
-          <a:prstGeom prst="ellipse">
-            <a:avLst/>
-          </a:prstGeom>
-          <a:solidFill>
-            <a:schemeClr val="bg1"/>
-          </a:solidFill>
-          <a:ln w="38100">
-            <a:solidFill>
-              <a:schemeClr val="tx1"/>
-            </a:solidFill>
-          </a:ln>
-        </p:spPr>
-        <p:style>
-          <a:lnRef idx="2">
-            <a:schemeClr val="dk1">
-              <a:shade val="15000"/>
-            </a:schemeClr>
-          </a:lnRef>
-          <a:fillRef idx="1">
-            <a:schemeClr val="dk1"/>
-          </a:fillRef>
-          <a:effectRef idx="0">
-            <a:schemeClr val="dk1"/>
-          </a:effectRef>
-          <a:fontRef idx="minor">
-            <a:schemeClr val="lt1"/>
-          </a:fontRef>
-        </p:style>
-        <p:txBody>
-          <a:bodyPr rtlCol="0" anchor="ctr"/>
-          <a:lstStyle/>
-          <a:p>
-            <a:pPr algn="ctr"/>
-            <a:r>
-              <a:rPr lang="en-US" altLang="ja-JP" b="1" dirty="0">
-                <a:ln w="0"/>
-                <a:solidFill>
-                  <a:schemeClr val="tx1"/>
-                </a:solidFill>
-                <a:effectLst>
-                  <a:outerShdw blurRad="38100" dist="19050" dir="2700000" algn="tl" rotWithShape="0">
-                    <a:schemeClr val="dk1">
-                      <a:alpha val="40000"/>
-                    </a:schemeClr>
-                  </a:outerShdw>
-                </a:effectLst>
-              </a:rPr>
-              <a:t>A3</a:t>
-            </a:r>
-          </a:p>
-        </p:txBody>
-      </p:sp>
-      <p:cxnSp>
-        <p:nvCxnSpPr>
-          <p:cNvPr id="56" name="直線矢印コネクタ 55">
-            <a:extLst>
-              <a:ext uri="{FF2B5EF4-FFF2-40B4-BE49-F238E27FC236}">
-                <a16:creationId xmlns:a16="http://schemas.microsoft.com/office/drawing/2014/main" id="{23F829DA-D516-BA07-2DCF-137EE5CF16D7}"/>
-              </a:ext>
-            </a:extLst>
-          </p:cNvPr>
-          <p:cNvCxnSpPr>
-            <a:cxnSpLocks/>
-            <a:stCxn id="50" idx="6"/>
-            <a:endCxn id="55" idx="4"/>
-          </p:cNvCxnSpPr>
-          <p:nvPr/>
-        </p:nvCxnSpPr>
-        <p:spPr>
-          <a:xfrm flipV="1">
-            <a:off x="8435527" y="7949147"/>
-            <a:ext cx="1096463" cy="1304028"/>
-          </a:xfrm>
-          <a:prstGeom prst="straightConnector1">
-            <a:avLst/>
-          </a:prstGeom>
-          <a:ln w="38100">
-            <a:solidFill>
-              <a:schemeClr val="tx1"/>
-            </a:solidFill>
-            <a:tailEnd type="triangle"/>
-          </a:ln>
-        </p:spPr>
-        <p:style>
-          <a:lnRef idx="1">
-            <a:schemeClr val="dk1"/>
-          </a:lnRef>
-          <a:fillRef idx="0">
-            <a:schemeClr val="dk1"/>
-          </a:fillRef>
-          <a:effectRef idx="0">
-            <a:schemeClr val="dk1"/>
-          </a:effectRef>
-          <a:fontRef idx="minor">
-            <a:schemeClr val="tx1"/>
-          </a:fontRef>
-        </p:style>
-      </p:cxnSp>
-      <p:cxnSp>
-        <p:nvCxnSpPr>
-          <p:cNvPr id="59" name="直線矢印コネクタ 58">
-            <a:extLst>
-              <a:ext uri="{FF2B5EF4-FFF2-40B4-BE49-F238E27FC236}">
-                <a16:creationId xmlns:a16="http://schemas.microsoft.com/office/drawing/2014/main" id="{CD76CE7A-87DC-1F38-9B35-DFCB339DA7BE}"/>
-              </a:ext>
-            </a:extLst>
-          </p:cNvPr>
-          <p:cNvCxnSpPr>
-            <a:cxnSpLocks/>
-          </p:cNvCxnSpPr>
-          <p:nvPr/>
-        </p:nvCxnSpPr>
-        <p:spPr>
-          <a:xfrm>
-            <a:off x="6314933" y="7589147"/>
-            <a:ext cx="2857057" cy="0"/>
-          </a:xfrm>
-          <a:prstGeom prst="straightConnector1">
-            <a:avLst/>
-          </a:prstGeom>
-          <a:ln w="38100">
-            <a:tailEnd type="triangle"/>
-          </a:ln>
-        </p:spPr>
-        <p:style>
-          <a:lnRef idx="1">
-            <a:schemeClr val="dk1"/>
-          </a:lnRef>
-          <a:fillRef idx="0">
-            <a:schemeClr val="dk1"/>
-          </a:fillRef>
-          <a:effectRef idx="0">
-            <a:schemeClr val="dk1"/>
-          </a:effectRef>
-          <a:fontRef idx="minor">
-            <a:schemeClr val="tx1"/>
-          </a:fontRef>
-        </p:style>
-      </p:cxnSp>
-    </p:spTree>
-    <p:extLst>
-      <p:ext uri="{BB962C8B-B14F-4D97-AF65-F5344CB8AC3E}">
-        <p14:creationId xmlns:p14="http://schemas.microsoft.com/office/powerpoint/2010/main" val="3598622837"/>
-      </p:ext>
-    </p:extLst>
-  </p:cSld>
-  <p:clrMapOvr>
-    <a:masterClrMapping/>
-  </p:clrMapOvr>
-</p:sld>
-</file>
-
-<file path=ppt/slides/slide51.xml><?xml version="1.0" encoding="utf-8"?>
-<p:sld xmlns:a="http://schemas.openxmlformats.org/drawingml/2006/main" xmlns:r="http://schemas.openxmlformats.org/officeDocument/2006/relationships" xmlns:p="http://schemas.openxmlformats.org/presentationml/2006/main">
-  <p:cSld>
-    <p:spTree>
-      <p:nvGrpSpPr>
-        <p:cNvPr id="1" name="">
-          <a:extLst>
-            <a:ext uri="{FF2B5EF4-FFF2-40B4-BE49-F238E27FC236}">
               <a16:creationId xmlns:a16="http://schemas.microsoft.com/office/drawing/2014/main" id="{5AAFAE8D-F7F2-51C2-A616-2DCC53CF70FF}"/>
             </a:ext>
           </a:extLst>
@@ -41505,7 +39177,7 @@
 </p:sld>
 </file>
 
-<file path=ppt/slides/slide52.xml><?xml version="1.0" encoding="utf-8"?>
+<file path=ppt/slides/slide51.xml><?xml version="1.0" encoding="utf-8"?>
 <p:sld xmlns:a="http://schemas.openxmlformats.org/drawingml/2006/main" xmlns:r="http://schemas.openxmlformats.org/officeDocument/2006/relationships" xmlns:p="http://schemas.openxmlformats.org/presentationml/2006/main">
   <p:cSld>
     <p:spTree>
@@ -41588,7 +39260,7 @@
 </p:sld>
 </file>
 
-<file path=ppt/slides/slide53.xml><?xml version="1.0" encoding="utf-8"?>
+<file path=ppt/slides/slide52.xml><?xml version="1.0" encoding="utf-8"?>
 <p:sld xmlns:a="http://schemas.openxmlformats.org/drawingml/2006/main" xmlns:r="http://schemas.openxmlformats.org/officeDocument/2006/relationships" xmlns:p="http://schemas.openxmlformats.org/presentationml/2006/main">
   <p:cSld>
     <p:spTree>
@@ -41764,7 +39436,7 @@
 </p:sld>
 </file>
 
-<file path=ppt/slides/slide54.xml><?xml version="1.0" encoding="utf-8"?>
+<file path=ppt/slides/slide53.xml><?xml version="1.0" encoding="utf-8"?>
 <p:sld xmlns:a="http://schemas.openxmlformats.org/drawingml/2006/main" xmlns:r="http://schemas.openxmlformats.org/officeDocument/2006/relationships" xmlns:p="http://schemas.openxmlformats.org/presentationml/2006/main">
   <p:cSld>
     <p:spTree>
@@ -41836,7 +39508,7 @@
 </p:sld>
 </file>
 
-<file path=ppt/slides/slide55.xml><?xml version="1.0" encoding="utf-8"?>
+<file path=ppt/slides/slide54.xml><?xml version="1.0" encoding="utf-8"?>
 <p:sld xmlns:a="http://schemas.openxmlformats.org/drawingml/2006/main" xmlns:r="http://schemas.openxmlformats.org/officeDocument/2006/relationships" xmlns:p="http://schemas.openxmlformats.org/presentationml/2006/main">
   <p:cSld>
     <p:spTree>
@@ -42008,7 +39680,7 @@
 </p:sld>
 </file>
 
-<file path=ppt/slides/slide56.xml><?xml version="1.0" encoding="utf-8"?>
+<file path=ppt/slides/slide55.xml><?xml version="1.0" encoding="utf-8"?>
 <p:sld xmlns:a="http://schemas.openxmlformats.org/drawingml/2006/main" xmlns:r="http://schemas.openxmlformats.org/officeDocument/2006/relationships" xmlns:p="http://schemas.openxmlformats.org/presentationml/2006/main">
   <p:cSld>
     <p:spTree>
@@ -42130,7 +39802,7 @@
 </p:sld>
 </file>
 
-<file path=ppt/slides/slide57.xml><?xml version="1.0" encoding="utf-8"?>
+<file path=ppt/slides/slide56.xml><?xml version="1.0" encoding="utf-8"?>
 <p:sld xmlns:a="http://schemas.openxmlformats.org/drawingml/2006/main" xmlns:r="http://schemas.openxmlformats.org/officeDocument/2006/relationships" xmlns:p="http://schemas.openxmlformats.org/presentationml/2006/main">
   <p:cSld>
     <p:spTree>
@@ -42252,7 +39924,7 @@
 </p:sld>
 </file>
 
-<file path=ppt/slides/slide58.xml><?xml version="1.0" encoding="utf-8"?>
+<file path=ppt/slides/slide57.xml><?xml version="1.0" encoding="utf-8"?>
 <p:sld xmlns:a="http://schemas.openxmlformats.org/drawingml/2006/main" xmlns:r="http://schemas.openxmlformats.org/officeDocument/2006/relationships" xmlns:p="http://schemas.openxmlformats.org/presentationml/2006/main">
   <p:cSld>
     <p:spTree>
@@ -42379,7 +40051,7 @@
 </p:sld>
 </file>
 
-<file path=ppt/slides/slide59.xml><?xml version="1.0" encoding="utf-8"?>
+<file path=ppt/slides/slide58.xml><?xml version="1.0" encoding="utf-8"?>
 <p:sld xmlns:a="http://schemas.openxmlformats.org/drawingml/2006/main" xmlns:r="http://schemas.openxmlformats.org/officeDocument/2006/relationships" xmlns:p="http://schemas.openxmlformats.org/presentationml/2006/main">
   <p:cSld>
     <p:spTree>
@@ -42442,6 +40114,42 @@
     <p:extLst>
       <p:ext uri="{BB962C8B-B14F-4D97-AF65-F5344CB8AC3E}">
         <p14:creationId xmlns:p14="http://schemas.microsoft.com/office/powerpoint/2010/main" val="1867924360"/>
+      </p:ext>
+    </p:extLst>
+  </p:cSld>
+  <p:clrMapOvr>
+    <a:masterClrMapping/>
+  </p:clrMapOvr>
+</p:sld>
+</file>
+
+<file path=ppt/slides/slide59.xml><?xml version="1.0" encoding="utf-8"?>
+<p:sld xmlns:a="http://schemas.openxmlformats.org/drawingml/2006/main" xmlns:r="http://schemas.openxmlformats.org/officeDocument/2006/relationships" xmlns:p="http://schemas.openxmlformats.org/presentationml/2006/main">
+  <p:cSld>
+    <p:spTree>
+      <p:nvGrpSpPr>
+        <p:cNvPr id="1" name="">
+          <a:extLst>
+            <a:ext uri="{FF2B5EF4-FFF2-40B4-BE49-F238E27FC236}">
+              <a16:creationId xmlns:a16="http://schemas.microsoft.com/office/drawing/2014/main" id="{35DC8A8E-2AFE-56B9-5F4C-AE3BD1DD87B0}"/>
+            </a:ext>
+          </a:extLst>
+        </p:cNvPr>
+        <p:cNvGrpSpPr/>
+        <p:nvPr/>
+      </p:nvGrpSpPr>
+      <p:grpSpPr>
+        <a:xfrm>
+          <a:off x="0" y="0"/>
+          <a:ext cx="0" cy="0"/>
+          <a:chOff x="0" y="0"/>
+          <a:chExt cx="0" cy="0"/>
+        </a:xfrm>
+      </p:grpSpPr>
+    </p:spTree>
+    <p:extLst>
+      <p:ext uri="{BB962C8B-B14F-4D97-AF65-F5344CB8AC3E}">
+        <p14:creationId xmlns:p14="http://schemas.microsoft.com/office/powerpoint/2010/main" val="1615550512"/>
       </p:ext>
     </p:extLst>
   </p:cSld>
@@ -42974,42 +40682,6 @@
         <p:cNvPr id="1" name="">
           <a:extLst>
             <a:ext uri="{FF2B5EF4-FFF2-40B4-BE49-F238E27FC236}">
-              <a16:creationId xmlns:a16="http://schemas.microsoft.com/office/drawing/2014/main" id="{35DC8A8E-2AFE-56B9-5F4C-AE3BD1DD87B0}"/>
-            </a:ext>
-          </a:extLst>
-        </p:cNvPr>
-        <p:cNvGrpSpPr/>
-        <p:nvPr/>
-      </p:nvGrpSpPr>
-      <p:grpSpPr>
-        <a:xfrm>
-          <a:off x="0" y="0"/>
-          <a:ext cx="0" cy="0"/>
-          <a:chOff x="0" y="0"/>
-          <a:chExt cx="0" cy="0"/>
-        </a:xfrm>
-      </p:grpSpPr>
-    </p:spTree>
-    <p:extLst>
-      <p:ext uri="{BB962C8B-B14F-4D97-AF65-F5344CB8AC3E}">
-        <p14:creationId xmlns:p14="http://schemas.microsoft.com/office/powerpoint/2010/main" val="1615550512"/>
-      </p:ext>
-    </p:extLst>
-  </p:cSld>
-  <p:clrMapOvr>
-    <a:masterClrMapping/>
-  </p:clrMapOvr>
-</p:sld>
-</file>
-
-<file path=ppt/slides/slide61.xml><?xml version="1.0" encoding="utf-8"?>
-<p:sld xmlns:a="http://schemas.openxmlformats.org/drawingml/2006/main" xmlns:r="http://schemas.openxmlformats.org/officeDocument/2006/relationships" xmlns:p="http://schemas.openxmlformats.org/presentationml/2006/main">
-  <p:cSld>
-    <p:spTree>
-      <p:nvGrpSpPr>
-        <p:cNvPr id="1" name="">
-          <a:extLst>
-            <a:ext uri="{FF2B5EF4-FFF2-40B4-BE49-F238E27FC236}">
               <a16:creationId xmlns:a16="http://schemas.microsoft.com/office/drawing/2014/main" id="{8256CCE8-E6B2-9826-6396-396B741FFB9B}"/>
             </a:ext>
           </a:extLst>
@@ -43124,7 +40796,7 @@
 </p:sld>
 </file>
 
-<file path=ppt/slides/slide62.xml><?xml version="1.0" encoding="utf-8"?>
+<file path=ppt/slides/slide61.xml><?xml version="1.0" encoding="utf-8"?>
 <p:sld xmlns:a="http://schemas.openxmlformats.org/drawingml/2006/main" xmlns:r="http://schemas.openxmlformats.org/officeDocument/2006/relationships" xmlns:p="http://schemas.openxmlformats.org/presentationml/2006/main">
   <p:cSld>
     <p:spTree>
@@ -43246,7 +40918,7 @@
 </p:sld>
 </file>
 
-<file path=ppt/slides/slide63.xml><?xml version="1.0" encoding="utf-8"?>
+<file path=ppt/slides/slide62.xml><?xml version="1.0" encoding="utf-8"?>
 <p:sld xmlns:a="http://schemas.openxmlformats.org/drawingml/2006/main" xmlns:r="http://schemas.openxmlformats.org/officeDocument/2006/relationships" xmlns:p="http://schemas.openxmlformats.org/presentationml/2006/main">
   <p:cSld>
     <p:spTree>
@@ -43368,7 +41040,7 @@
 </p:sld>
 </file>
 
-<file path=ppt/slides/slide64.xml><?xml version="1.0" encoding="utf-8"?>
+<file path=ppt/slides/slide63.xml><?xml version="1.0" encoding="utf-8"?>
 <p:sld xmlns:a="http://schemas.openxmlformats.org/drawingml/2006/main" xmlns:r="http://schemas.openxmlformats.org/officeDocument/2006/relationships" xmlns:p="http://schemas.openxmlformats.org/presentationml/2006/main">
   <p:cSld>
     <p:spTree>
@@ -43490,7 +41162,7 @@
 </p:sld>
 </file>
 
-<file path=ppt/slides/slide65.xml><?xml version="1.0" encoding="utf-8"?>
+<file path=ppt/slides/slide64.xml><?xml version="1.0" encoding="utf-8"?>
 <p:sld xmlns:a="http://schemas.openxmlformats.org/drawingml/2006/main" xmlns:r="http://schemas.openxmlformats.org/officeDocument/2006/relationships" xmlns:p="http://schemas.openxmlformats.org/presentationml/2006/main">
   <p:cSld>
     <p:spTree>
@@ -43619,7 +41291,7 @@
 </p:sld>
 </file>
 
-<file path=ppt/slides/slide66.xml><?xml version="1.0" encoding="utf-8"?>
+<file path=ppt/slides/slide65.xml><?xml version="1.0" encoding="utf-8"?>
 <p:sld xmlns:a="http://schemas.openxmlformats.org/drawingml/2006/main" xmlns:r="http://schemas.openxmlformats.org/officeDocument/2006/relationships" xmlns:p="http://schemas.openxmlformats.org/presentationml/2006/main">
   <p:cSld>
     <p:spTree>
@@ -43655,7 +41327,7 @@
 </p:sld>
 </file>
 
-<file path=ppt/slides/slide67.xml><?xml version="1.0" encoding="utf-8"?>
+<file path=ppt/slides/slide66.xml><?xml version="1.0" encoding="utf-8"?>
 <p:sld xmlns:a="http://schemas.openxmlformats.org/drawingml/2006/main" xmlns:r="http://schemas.openxmlformats.org/officeDocument/2006/relationships" xmlns:p="http://schemas.openxmlformats.org/presentationml/2006/main">
   <p:cSld>
     <p:spTree>
@@ -43777,7 +41449,7 @@
 </p:sld>
 </file>
 
-<file path=ppt/slides/slide68.xml><?xml version="1.0" encoding="utf-8"?>
+<file path=ppt/slides/slide67.xml><?xml version="1.0" encoding="utf-8"?>
 <p:sld xmlns:a="http://schemas.openxmlformats.org/drawingml/2006/main" xmlns:r="http://schemas.openxmlformats.org/officeDocument/2006/relationships" xmlns:p="http://schemas.openxmlformats.org/presentationml/2006/main">
   <p:cSld>
     <p:spTree>
@@ -43899,7 +41571,7 @@
 </p:sld>
 </file>
 
-<file path=ppt/slides/slide69.xml><?xml version="1.0" encoding="utf-8"?>
+<file path=ppt/slides/slide68.xml><?xml version="1.0" encoding="utf-8"?>
 <p:sld xmlns:a="http://schemas.openxmlformats.org/drawingml/2006/main" xmlns:r="http://schemas.openxmlformats.org/officeDocument/2006/relationships" xmlns:p="http://schemas.openxmlformats.org/presentationml/2006/main">
   <p:cSld>
     <p:spTree>
@@ -44062,6 +41734,42 @@
     <p:extLst>
       <p:ext uri="{BB962C8B-B14F-4D97-AF65-F5344CB8AC3E}">
         <p14:creationId xmlns:p14="http://schemas.microsoft.com/office/powerpoint/2010/main" val="2938292229"/>
+      </p:ext>
+    </p:extLst>
+  </p:cSld>
+  <p:clrMapOvr>
+    <a:masterClrMapping/>
+  </p:clrMapOvr>
+</p:sld>
+</file>
+
+<file path=ppt/slides/slide69.xml><?xml version="1.0" encoding="utf-8"?>
+<p:sld xmlns:a="http://schemas.openxmlformats.org/drawingml/2006/main" xmlns:r="http://schemas.openxmlformats.org/officeDocument/2006/relationships" xmlns:p="http://schemas.openxmlformats.org/presentationml/2006/main">
+  <p:cSld>
+    <p:spTree>
+      <p:nvGrpSpPr>
+        <p:cNvPr id="1" name="">
+          <a:extLst>
+            <a:ext uri="{FF2B5EF4-FFF2-40B4-BE49-F238E27FC236}">
+              <a16:creationId xmlns:a16="http://schemas.microsoft.com/office/drawing/2014/main" id="{3BE081F3-6C64-1B7B-15F8-41C30F6D8097}"/>
+            </a:ext>
+          </a:extLst>
+        </p:cNvPr>
+        <p:cNvGrpSpPr/>
+        <p:nvPr/>
+      </p:nvGrpSpPr>
+      <p:grpSpPr>
+        <a:xfrm>
+          <a:off x="0" y="0"/>
+          <a:ext cx="0" cy="0"/>
+          <a:chOff x="0" y="0"/>
+          <a:chExt cx="0" cy="0"/>
+        </a:xfrm>
+      </p:grpSpPr>
+    </p:spTree>
+    <p:extLst>
+      <p:ext uri="{BB962C8B-B14F-4D97-AF65-F5344CB8AC3E}">
+        <p14:creationId xmlns:p14="http://schemas.microsoft.com/office/powerpoint/2010/main" val="2073511393"/>
       </p:ext>
     </p:extLst>
   </p:cSld>
@@ -44823,42 +42531,6 @@
         <p:cNvPr id="1" name="">
           <a:extLst>
             <a:ext uri="{FF2B5EF4-FFF2-40B4-BE49-F238E27FC236}">
-              <a16:creationId xmlns:a16="http://schemas.microsoft.com/office/drawing/2014/main" id="{3BE081F3-6C64-1B7B-15F8-41C30F6D8097}"/>
-            </a:ext>
-          </a:extLst>
-        </p:cNvPr>
-        <p:cNvGrpSpPr/>
-        <p:nvPr/>
-      </p:nvGrpSpPr>
-      <p:grpSpPr>
-        <a:xfrm>
-          <a:off x="0" y="0"/>
-          <a:ext cx="0" cy="0"/>
-          <a:chOff x="0" y="0"/>
-          <a:chExt cx="0" cy="0"/>
-        </a:xfrm>
-      </p:grpSpPr>
-    </p:spTree>
-    <p:extLst>
-      <p:ext uri="{BB962C8B-B14F-4D97-AF65-F5344CB8AC3E}">
-        <p14:creationId xmlns:p14="http://schemas.microsoft.com/office/powerpoint/2010/main" val="2073511393"/>
-      </p:ext>
-    </p:extLst>
-  </p:cSld>
-  <p:clrMapOvr>
-    <a:masterClrMapping/>
-  </p:clrMapOvr>
-</p:sld>
-</file>
-
-<file path=ppt/slides/slide71.xml><?xml version="1.0" encoding="utf-8"?>
-<p:sld xmlns:a="http://schemas.openxmlformats.org/drawingml/2006/main" xmlns:r="http://schemas.openxmlformats.org/officeDocument/2006/relationships" xmlns:p="http://schemas.openxmlformats.org/presentationml/2006/main">
-  <p:cSld>
-    <p:spTree>
-      <p:nvGrpSpPr>
-        <p:cNvPr id="1" name="">
-          <a:extLst>
-            <a:ext uri="{FF2B5EF4-FFF2-40B4-BE49-F238E27FC236}">
               <a16:creationId xmlns:a16="http://schemas.microsoft.com/office/drawing/2014/main" id="{FF075BC6-0676-9C3A-EC4F-F254C46A2724}"/>
             </a:ext>
           </a:extLst>
@@ -44973,7 +42645,7 @@
 </p:sld>
 </file>
 
-<file path=ppt/slides/slide72.xml><?xml version="1.0" encoding="utf-8"?>
+<file path=ppt/slides/slide71.xml><?xml version="1.0" encoding="utf-8"?>
 <p:sld xmlns:a="http://schemas.openxmlformats.org/drawingml/2006/main" xmlns:r="http://schemas.openxmlformats.org/officeDocument/2006/relationships" xmlns:p="http://schemas.openxmlformats.org/presentationml/2006/main">
   <p:cSld>
     <p:spTree>
@@ -45095,7 +42767,7 @@
 </p:sld>
 </file>
 
-<file path=ppt/slides/slide73.xml><?xml version="1.0" encoding="utf-8"?>
+<file path=ppt/slides/slide72.xml><?xml version="1.0" encoding="utf-8"?>
 <p:sld xmlns:a="http://schemas.openxmlformats.org/drawingml/2006/main" xmlns:r="http://schemas.openxmlformats.org/officeDocument/2006/relationships" xmlns:p="http://schemas.openxmlformats.org/presentationml/2006/main">
   <p:cSld>
     <p:spTree>
@@ -45217,7 +42889,7 @@
 </p:sld>
 </file>
 
-<file path=ppt/slides/slide74.xml><?xml version="1.0" encoding="utf-8"?>
+<file path=ppt/slides/slide73.xml><?xml version="1.0" encoding="utf-8"?>
 <p:sld xmlns:a="http://schemas.openxmlformats.org/drawingml/2006/main" xmlns:r="http://schemas.openxmlformats.org/officeDocument/2006/relationships" xmlns:p="http://schemas.openxmlformats.org/presentationml/2006/main">
   <p:cSld>
     <p:spTree>
@@ -45339,7 +43011,7 @@
 </p:sld>
 </file>
 
-<file path=ppt/slides/slide75.xml><?xml version="1.0" encoding="utf-8"?>
+<file path=ppt/slides/slide74.xml><?xml version="1.0" encoding="utf-8"?>
 <p:sld xmlns:a="http://schemas.openxmlformats.org/drawingml/2006/main" xmlns:r="http://schemas.openxmlformats.org/officeDocument/2006/relationships" xmlns:p="http://schemas.openxmlformats.org/presentationml/2006/main">
   <p:cSld>
     <p:spTree>
@@ -45461,7 +43133,7 @@
 </p:sld>
 </file>
 
-<file path=ppt/slides/slide76.xml><?xml version="1.0" encoding="utf-8"?>
+<file path=ppt/slides/slide75.xml><?xml version="1.0" encoding="utf-8"?>
 <p:sld xmlns:a="http://schemas.openxmlformats.org/drawingml/2006/main" xmlns:r="http://schemas.openxmlformats.org/officeDocument/2006/relationships" xmlns:p="http://schemas.openxmlformats.org/presentationml/2006/main">
   <p:cSld>
     <p:spTree>
@@ -45497,7 +43169,7 @@
 </p:sld>
 </file>
 
-<file path=ppt/slides/slide77.xml><?xml version="1.0" encoding="utf-8"?>
+<file path=ppt/slides/slide76.xml><?xml version="1.0" encoding="utf-8"?>
 <p:sld xmlns:a="http://schemas.openxmlformats.org/drawingml/2006/main" xmlns:r="http://schemas.openxmlformats.org/officeDocument/2006/relationships" xmlns:p="http://schemas.openxmlformats.org/presentationml/2006/main">
   <p:cSld>
     <p:spTree>
@@ -45619,7 +43291,7 @@
 </p:sld>
 </file>
 
-<file path=ppt/slides/slide78.xml><?xml version="1.0" encoding="utf-8"?>
+<file path=ppt/slides/slide77.xml><?xml version="1.0" encoding="utf-8"?>
 <p:sld xmlns:a="http://schemas.openxmlformats.org/drawingml/2006/main" xmlns:r="http://schemas.openxmlformats.org/officeDocument/2006/relationships" xmlns:p="http://schemas.openxmlformats.org/presentationml/2006/main">
   <p:cSld>
     <p:spTree>
@@ -45791,7 +43463,7 @@
 </p:sld>
 </file>
 
-<file path=ppt/slides/slide79.xml><?xml version="1.0" encoding="utf-8"?>
+<file path=ppt/slides/slide78.xml><?xml version="1.0" encoding="utf-8"?>
 <p:sld xmlns:a="http://schemas.openxmlformats.org/drawingml/2006/main" xmlns:r="http://schemas.openxmlformats.org/officeDocument/2006/relationships" xmlns:p="http://schemas.openxmlformats.org/presentationml/2006/main">
   <p:cSld>
     <p:spTree>
@@ -45904,6 +43576,128 @@
     <p:extLst>
       <p:ext uri="{BB962C8B-B14F-4D97-AF65-F5344CB8AC3E}">
         <p14:creationId xmlns:p14="http://schemas.microsoft.com/office/powerpoint/2010/main" val="546176998"/>
+      </p:ext>
+    </p:extLst>
+  </p:cSld>
+  <p:clrMapOvr>
+    <a:masterClrMapping/>
+  </p:clrMapOvr>
+</p:sld>
+</file>
+
+<file path=ppt/slides/slide79.xml><?xml version="1.0" encoding="utf-8"?>
+<p:sld xmlns:a="http://schemas.openxmlformats.org/drawingml/2006/main" xmlns:r="http://schemas.openxmlformats.org/officeDocument/2006/relationships" xmlns:p="http://schemas.openxmlformats.org/presentationml/2006/main">
+  <p:cSld>
+    <p:spTree>
+      <p:nvGrpSpPr>
+        <p:cNvPr id="1" name="">
+          <a:extLst>
+            <a:ext uri="{FF2B5EF4-FFF2-40B4-BE49-F238E27FC236}">
+              <a16:creationId xmlns:a16="http://schemas.microsoft.com/office/drawing/2014/main" id="{F2233294-2155-B136-077A-732F11C4EFE6}"/>
+            </a:ext>
+          </a:extLst>
+        </p:cNvPr>
+        <p:cNvGrpSpPr/>
+        <p:nvPr/>
+      </p:nvGrpSpPr>
+      <p:grpSpPr>
+        <a:xfrm>
+          <a:off x="0" y="0"/>
+          <a:ext cx="0" cy="0"/>
+          <a:chOff x="0" y="0"/>
+          <a:chExt cx="0" cy="0"/>
+        </a:xfrm>
+      </p:grpSpPr>
+      <p:pic>
+        <p:nvPicPr>
+          <p:cNvPr id="3" name="図 2">
+            <a:extLst>
+              <a:ext uri="{FF2B5EF4-FFF2-40B4-BE49-F238E27FC236}">
+                <a16:creationId xmlns:a16="http://schemas.microsoft.com/office/drawing/2014/main" id="{77481837-E1CC-A6C7-C860-EE1D5A25EFA6}"/>
+              </a:ext>
+            </a:extLst>
+          </p:cNvPr>
+          <p:cNvPicPr>
+            <a:picLocks noChangeAspect="1"/>
+          </p:cNvPicPr>
+          <p:nvPr/>
+        </p:nvPicPr>
+        <p:blipFill>
+          <a:blip r:embed="rId2">
+            <a:extLst>
+              <a:ext uri="{28A0092B-C50C-407E-A947-70E740481C1C}">
+                <a14:useLocalDpi xmlns:a14="http://schemas.microsoft.com/office/drawing/2010/main" val="0"/>
+              </a:ext>
+            </a:extLst>
+          </a:blip>
+          <a:stretch>
+            <a:fillRect/>
+          </a:stretch>
+        </p:blipFill>
+        <p:spPr>
+          <a:xfrm>
+            <a:off x="3522662" y="1933575"/>
+            <a:ext cx="3571875" cy="2762250"/>
+          </a:xfrm>
+          <a:prstGeom prst="rect">
+            <a:avLst/>
+          </a:prstGeom>
+        </p:spPr>
+      </p:pic>
+      <p:sp>
+        <p:nvSpPr>
+          <p:cNvPr id="4" name="正方形/長方形 3">
+            <a:extLst>
+              <a:ext uri="{FF2B5EF4-FFF2-40B4-BE49-F238E27FC236}">
+                <a16:creationId xmlns:a16="http://schemas.microsoft.com/office/drawing/2014/main" id="{AE6205F5-E501-E79E-FC8C-14D36686CA35}"/>
+              </a:ext>
+            </a:extLst>
+          </p:cNvPr>
+          <p:cNvSpPr/>
+          <p:nvPr/>
+        </p:nvSpPr>
+        <p:spPr>
+          <a:xfrm flipV="1">
+            <a:off x="4303713" y="3022600"/>
+            <a:ext cx="2668588" cy="317500"/>
+          </a:xfrm>
+          <a:prstGeom prst="rect">
+            <a:avLst/>
+          </a:prstGeom>
+          <a:noFill/>
+          <a:ln w="28575">
+            <a:solidFill>
+              <a:srgbClr val="FF0000"/>
+            </a:solidFill>
+          </a:ln>
+        </p:spPr>
+        <p:style>
+          <a:lnRef idx="2">
+            <a:schemeClr val="accent6"/>
+          </a:lnRef>
+          <a:fillRef idx="1">
+            <a:schemeClr val="lt1"/>
+          </a:fillRef>
+          <a:effectRef idx="0">
+            <a:schemeClr val="accent6"/>
+          </a:effectRef>
+          <a:fontRef idx="minor">
+            <a:schemeClr val="dk1"/>
+          </a:fontRef>
+        </p:style>
+        <p:txBody>
+          <a:bodyPr rtlCol="0" anchor="ctr"/>
+          <a:lstStyle/>
+          <a:p>
+            <a:pPr algn="ctr"/>
+            <a:endParaRPr kumimoji="1" lang="ja-JP" altLang="en-US"/>
+          </a:p>
+        </p:txBody>
+      </p:sp>
+    </p:spTree>
+    <p:extLst>
+      <p:ext uri="{BB962C8B-B14F-4D97-AF65-F5344CB8AC3E}">
+        <p14:creationId xmlns:p14="http://schemas.microsoft.com/office/powerpoint/2010/main" val="3073031344"/>
       </p:ext>
     </p:extLst>
   </p:cSld>
@@ -46089,128 +43883,6 @@
         <p:cNvPr id="1" name="">
           <a:extLst>
             <a:ext uri="{FF2B5EF4-FFF2-40B4-BE49-F238E27FC236}">
-              <a16:creationId xmlns:a16="http://schemas.microsoft.com/office/drawing/2014/main" id="{F2233294-2155-B136-077A-732F11C4EFE6}"/>
-            </a:ext>
-          </a:extLst>
-        </p:cNvPr>
-        <p:cNvGrpSpPr/>
-        <p:nvPr/>
-      </p:nvGrpSpPr>
-      <p:grpSpPr>
-        <a:xfrm>
-          <a:off x="0" y="0"/>
-          <a:ext cx="0" cy="0"/>
-          <a:chOff x="0" y="0"/>
-          <a:chExt cx="0" cy="0"/>
-        </a:xfrm>
-      </p:grpSpPr>
-      <p:pic>
-        <p:nvPicPr>
-          <p:cNvPr id="3" name="図 2">
-            <a:extLst>
-              <a:ext uri="{FF2B5EF4-FFF2-40B4-BE49-F238E27FC236}">
-                <a16:creationId xmlns:a16="http://schemas.microsoft.com/office/drawing/2014/main" id="{77481837-E1CC-A6C7-C860-EE1D5A25EFA6}"/>
-              </a:ext>
-            </a:extLst>
-          </p:cNvPr>
-          <p:cNvPicPr>
-            <a:picLocks noChangeAspect="1"/>
-          </p:cNvPicPr>
-          <p:nvPr/>
-        </p:nvPicPr>
-        <p:blipFill>
-          <a:blip r:embed="rId2">
-            <a:extLst>
-              <a:ext uri="{28A0092B-C50C-407E-A947-70E740481C1C}">
-                <a14:useLocalDpi xmlns:a14="http://schemas.microsoft.com/office/drawing/2010/main" val="0"/>
-              </a:ext>
-            </a:extLst>
-          </a:blip>
-          <a:stretch>
-            <a:fillRect/>
-          </a:stretch>
-        </p:blipFill>
-        <p:spPr>
-          <a:xfrm>
-            <a:off x="3522662" y="1933575"/>
-            <a:ext cx="3571875" cy="2762250"/>
-          </a:xfrm>
-          <a:prstGeom prst="rect">
-            <a:avLst/>
-          </a:prstGeom>
-        </p:spPr>
-      </p:pic>
-      <p:sp>
-        <p:nvSpPr>
-          <p:cNvPr id="4" name="正方形/長方形 3">
-            <a:extLst>
-              <a:ext uri="{FF2B5EF4-FFF2-40B4-BE49-F238E27FC236}">
-                <a16:creationId xmlns:a16="http://schemas.microsoft.com/office/drawing/2014/main" id="{AE6205F5-E501-E79E-FC8C-14D36686CA35}"/>
-              </a:ext>
-            </a:extLst>
-          </p:cNvPr>
-          <p:cNvSpPr/>
-          <p:nvPr/>
-        </p:nvSpPr>
-        <p:spPr>
-          <a:xfrm flipV="1">
-            <a:off x="4303713" y="3022600"/>
-            <a:ext cx="2668588" cy="317500"/>
-          </a:xfrm>
-          <a:prstGeom prst="rect">
-            <a:avLst/>
-          </a:prstGeom>
-          <a:noFill/>
-          <a:ln w="28575">
-            <a:solidFill>
-              <a:srgbClr val="FF0000"/>
-            </a:solidFill>
-          </a:ln>
-        </p:spPr>
-        <p:style>
-          <a:lnRef idx="2">
-            <a:schemeClr val="accent6"/>
-          </a:lnRef>
-          <a:fillRef idx="1">
-            <a:schemeClr val="lt1"/>
-          </a:fillRef>
-          <a:effectRef idx="0">
-            <a:schemeClr val="accent6"/>
-          </a:effectRef>
-          <a:fontRef idx="minor">
-            <a:schemeClr val="dk1"/>
-          </a:fontRef>
-        </p:style>
-        <p:txBody>
-          <a:bodyPr rtlCol="0" anchor="ctr"/>
-          <a:lstStyle/>
-          <a:p>
-            <a:pPr algn="ctr"/>
-            <a:endParaRPr kumimoji="1" lang="ja-JP" altLang="en-US"/>
-          </a:p>
-        </p:txBody>
-      </p:sp>
-    </p:spTree>
-    <p:extLst>
-      <p:ext uri="{BB962C8B-B14F-4D97-AF65-F5344CB8AC3E}">
-        <p14:creationId xmlns:p14="http://schemas.microsoft.com/office/powerpoint/2010/main" val="3073031344"/>
-      </p:ext>
-    </p:extLst>
-  </p:cSld>
-  <p:clrMapOvr>
-    <a:masterClrMapping/>
-  </p:clrMapOvr>
-</p:sld>
-</file>
-
-<file path=ppt/slides/slide81.xml><?xml version="1.0" encoding="utf-8"?>
-<p:sld xmlns:a="http://schemas.openxmlformats.org/drawingml/2006/main" xmlns:r="http://schemas.openxmlformats.org/officeDocument/2006/relationships" xmlns:p="http://schemas.openxmlformats.org/presentationml/2006/main">
-  <p:cSld>
-    <p:spTree>
-      <p:nvGrpSpPr>
-        <p:cNvPr id="1" name="">
-          <a:extLst>
-            <a:ext uri="{FF2B5EF4-FFF2-40B4-BE49-F238E27FC236}">
               <a16:creationId xmlns:a16="http://schemas.microsoft.com/office/drawing/2014/main" id="{ED239A4F-A50F-105F-465D-57A95A47F678}"/>
             </a:ext>
           </a:extLst>
@@ -46371,7 +44043,7 @@
 </p:sld>
 </file>
 
-<file path=ppt/slides/slide82.xml><?xml version="1.0" encoding="utf-8"?>
+<file path=ppt/slides/slide81.xml><?xml version="1.0" encoding="utf-8"?>
 <p:sld xmlns:a="http://schemas.openxmlformats.org/drawingml/2006/main" xmlns:r="http://schemas.openxmlformats.org/officeDocument/2006/relationships" xmlns:p="http://schemas.openxmlformats.org/presentationml/2006/main">
   <p:cSld>
     <p:spTree>
@@ -46407,7 +44079,7 @@
 </p:sld>
 </file>
 
-<file path=ppt/slides/slide83.xml><?xml version="1.0" encoding="utf-8"?>
+<file path=ppt/slides/slide82.xml><?xml version="1.0" encoding="utf-8"?>
 <p:sld xmlns:a="http://schemas.openxmlformats.org/drawingml/2006/main" xmlns:r="http://schemas.openxmlformats.org/officeDocument/2006/relationships" xmlns:p="http://schemas.openxmlformats.org/presentationml/2006/main">
   <p:cSld>
     <p:spTree>
@@ -46579,7 +44251,7 @@
 </p:sld>
 </file>
 
-<file path=ppt/slides/slide84.xml><?xml version="1.0" encoding="utf-8"?>
+<file path=ppt/slides/slide83.xml><?xml version="1.0" encoding="utf-8"?>
 <p:sld xmlns:a="http://schemas.openxmlformats.org/drawingml/2006/main" xmlns:r="http://schemas.openxmlformats.org/officeDocument/2006/relationships" xmlns:p="http://schemas.openxmlformats.org/presentationml/2006/main">
   <p:cSld>
     <p:spTree>
@@ -46701,7 +44373,7 @@
 </p:sld>
 </file>
 
-<file path=ppt/slides/slide85.xml><?xml version="1.0" encoding="utf-8"?>
+<file path=ppt/slides/slide84.xml><?xml version="1.0" encoding="utf-8"?>
 <p:sld xmlns:a="http://schemas.openxmlformats.org/drawingml/2006/main" xmlns:r="http://schemas.openxmlformats.org/officeDocument/2006/relationships" xmlns:p="http://schemas.openxmlformats.org/presentationml/2006/main">
   <p:cSld>
     <p:spTree>
@@ -46823,7 +44495,7 @@
 </p:sld>
 </file>
 
-<file path=ppt/slides/slide86.xml><?xml version="1.0" encoding="utf-8"?>
+<file path=ppt/slides/slide85.xml><?xml version="1.0" encoding="utf-8"?>
 <p:sld xmlns:a="http://schemas.openxmlformats.org/drawingml/2006/main" xmlns:r="http://schemas.openxmlformats.org/officeDocument/2006/relationships" xmlns:p="http://schemas.openxmlformats.org/presentationml/2006/main">
   <p:cSld>
     <p:spTree>
@@ -47083,7 +44755,7 @@
 </p:sld>
 </file>
 
-<file path=ppt/slides/slide87.xml><?xml version="1.0" encoding="utf-8"?>
+<file path=ppt/slides/slide86.xml><?xml version="1.0" encoding="utf-8"?>
 <p:sld xmlns:a="http://schemas.openxmlformats.org/drawingml/2006/main" xmlns:r="http://schemas.openxmlformats.org/officeDocument/2006/relationships" xmlns:p="http://schemas.openxmlformats.org/presentationml/2006/main">
   <p:cSld>
     <p:spTree>
@@ -47191,7 +44863,7 @@
 </p:sld>
 </file>
 
-<file path=ppt/slides/slide88.xml><?xml version="1.0" encoding="utf-8"?>
+<file path=ppt/slides/slide87.xml><?xml version="1.0" encoding="utf-8"?>
 <p:sld xmlns:a="http://schemas.openxmlformats.org/drawingml/2006/main" xmlns:r="http://schemas.openxmlformats.org/officeDocument/2006/relationships" xmlns:p="http://schemas.openxmlformats.org/presentationml/2006/main">
   <p:cSld>
     <p:spTree>
@@ -47268,7 +44940,7 @@
 </p:sld>
 </file>
 
-<file path=ppt/slides/slide89.xml><?xml version="1.0" encoding="utf-8"?>
+<file path=ppt/slides/slide88.xml><?xml version="1.0" encoding="utf-8"?>
 <p:sld xmlns:a="http://schemas.openxmlformats.org/drawingml/2006/main" xmlns:r="http://schemas.openxmlformats.org/officeDocument/2006/relationships" xmlns:p="http://schemas.openxmlformats.org/presentationml/2006/main">
   <p:cSld>
     <p:spTree>
@@ -47295,6 +44967,164 @@
     <p:extLst>
       <p:ext uri="{BB962C8B-B14F-4D97-AF65-F5344CB8AC3E}">
         <p14:creationId xmlns:p14="http://schemas.microsoft.com/office/powerpoint/2010/main" val="3543807343"/>
+      </p:ext>
+    </p:extLst>
+  </p:cSld>
+  <p:clrMapOvr>
+    <a:masterClrMapping/>
+  </p:clrMapOvr>
+</p:sld>
+</file>
+
+<file path=ppt/slides/slide89.xml><?xml version="1.0" encoding="utf-8"?>
+<p:sld xmlns:a="http://schemas.openxmlformats.org/drawingml/2006/main" xmlns:r="http://schemas.openxmlformats.org/officeDocument/2006/relationships" xmlns:p="http://schemas.openxmlformats.org/presentationml/2006/main">
+  <p:cSld>
+    <p:spTree>
+      <p:nvGrpSpPr>
+        <p:cNvPr id="1" name="">
+          <a:extLst>
+            <a:ext uri="{FF2B5EF4-FFF2-40B4-BE49-F238E27FC236}">
+              <a16:creationId xmlns:a16="http://schemas.microsoft.com/office/drawing/2014/main" id="{A457482D-A7D2-8CD5-2A96-65FC5E352E31}"/>
+            </a:ext>
+          </a:extLst>
+        </p:cNvPr>
+        <p:cNvGrpSpPr/>
+        <p:nvPr/>
+      </p:nvGrpSpPr>
+      <p:grpSpPr>
+        <a:xfrm>
+          <a:off x="0" y="0"/>
+          <a:ext cx="0" cy="0"/>
+          <a:chOff x="0" y="0"/>
+          <a:chExt cx="0" cy="0"/>
+        </a:xfrm>
+      </p:grpSpPr>
+      <p:pic>
+        <p:nvPicPr>
+          <p:cNvPr id="2" name="図 1">
+            <a:extLst>
+              <a:ext uri="{FF2B5EF4-FFF2-40B4-BE49-F238E27FC236}">
+                <a16:creationId xmlns:a16="http://schemas.microsoft.com/office/drawing/2014/main" id="{340B3760-AA89-EEB8-D740-832785031D59}"/>
+              </a:ext>
+            </a:extLst>
+          </p:cNvPr>
+          <p:cNvPicPr>
+            <a:picLocks noChangeAspect="1"/>
+          </p:cNvPicPr>
+          <p:nvPr/>
+        </p:nvPicPr>
+        <p:blipFill>
+          <a:blip r:embed="rId2">
+            <a:extLst>
+              <a:ext uri="{28A0092B-C50C-407E-A947-70E740481C1C}">
+                <a14:useLocalDpi xmlns:a14="http://schemas.microsoft.com/office/drawing/2010/main" val="0"/>
+              </a:ext>
+            </a:extLst>
+          </a:blip>
+          <a:stretch>
+            <a:fillRect/>
+          </a:stretch>
+        </p:blipFill>
+        <p:spPr>
+          <a:xfrm>
+            <a:off x="4095750" y="1810332"/>
+            <a:ext cx="4000500" cy="3181350"/>
+          </a:xfrm>
+          <a:prstGeom prst="rect">
+            <a:avLst/>
+          </a:prstGeom>
+        </p:spPr>
+      </p:pic>
+      <p:sp>
+        <p:nvSpPr>
+          <p:cNvPr id="9" name="正方形/長方形 8">
+            <a:extLst>
+              <a:ext uri="{FF2B5EF4-FFF2-40B4-BE49-F238E27FC236}">
+                <a16:creationId xmlns:a16="http://schemas.microsoft.com/office/drawing/2014/main" id="{80876F6F-21B3-1621-2208-74AE651A53F9}"/>
+              </a:ext>
+            </a:extLst>
+          </p:cNvPr>
+          <p:cNvSpPr/>
+          <p:nvPr/>
+        </p:nvSpPr>
+        <p:spPr>
+          <a:xfrm flipV="1">
+            <a:off x="4119175" y="3398610"/>
+            <a:ext cx="432000" cy="432000"/>
+          </a:xfrm>
+          <a:prstGeom prst="rect">
+            <a:avLst/>
+          </a:prstGeom>
+          <a:noFill/>
+          <a:ln w="28575">
+            <a:solidFill>
+              <a:srgbClr val="FF0000"/>
+            </a:solidFill>
+          </a:ln>
+        </p:spPr>
+        <p:style>
+          <a:lnRef idx="2">
+            <a:schemeClr val="accent6"/>
+          </a:lnRef>
+          <a:fillRef idx="1">
+            <a:schemeClr val="lt1"/>
+          </a:fillRef>
+          <a:effectRef idx="0">
+            <a:schemeClr val="accent6"/>
+          </a:effectRef>
+          <a:fontRef idx="minor">
+            <a:schemeClr val="dk1"/>
+          </a:fontRef>
+        </p:style>
+        <p:txBody>
+          <a:bodyPr rtlCol="0" anchor="ctr"/>
+          <a:lstStyle/>
+          <a:p>
+            <a:pPr algn="ctr"/>
+            <a:endParaRPr kumimoji="1" lang="ja-JP" altLang="en-US"/>
+          </a:p>
+        </p:txBody>
+      </p:sp>
+      <p:pic>
+        <p:nvPicPr>
+          <p:cNvPr id="11" name="図 10">
+            <a:extLst>
+              <a:ext uri="{FF2B5EF4-FFF2-40B4-BE49-F238E27FC236}">
+                <a16:creationId xmlns:a16="http://schemas.microsoft.com/office/drawing/2014/main" id="{F2EF6662-6DCB-3BEC-5A8E-7216CBF795DD}"/>
+              </a:ext>
+            </a:extLst>
+          </p:cNvPr>
+          <p:cNvPicPr>
+            <a:picLocks noChangeAspect="1"/>
+          </p:cNvPicPr>
+          <p:nvPr/>
+        </p:nvPicPr>
+        <p:blipFill>
+          <a:blip r:embed="rId3">
+            <a:extLst>
+              <a:ext uri="{28A0092B-C50C-407E-A947-70E740481C1C}">
+                <a14:useLocalDpi xmlns:a14="http://schemas.microsoft.com/office/drawing/2010/main" val="0"/>
+              </a:ext>
+            </a:extLst>
+          </a:blip>
+          <a:stretch>
+            <a:fillRect/>
+          </a:stretch>
+        </p:blipFill>
+        <p:spPr>
+          <a:xfrm>
+            <a:off x="4833063" y="2694698"/>
+            <a:ext cx="1228725" cy="180975"/>
+          </a:xfrm>
+          <a:prstGeom prst="rect">
+            <a:avLst/>
+          </a:prstGeom>
+        </p:spPr>
+      </p:pic>
+    </p:spTree>
+    <p:extLst>
+      <p:ext uri="{BB962C8B-B14F-4D97-AF65-F5344CB8AC3E}">
+        <p14:creationId xmlns:p14="http://schemas.microsoft.com/office/powerpoint/2010/main" val="565009452"/>
       </p:ext>
     </p:extLst>
   </p:cSld>
@@ -47348,164 +45178,6 @@
         <p:cNvPr id="1" name="">
           <a:extLst>
             <a:ext uri="{FF2B5EF4-FFF2-40B4-BE49-F238E27FC236}">
-              <a16:creationId xmlns:a16="http://schemas.microsoft.com/office/drawing/2014/main" id="{A457482D-A7D2-8CD5-2A96-65FC5E352E31}"/>
-            </a:ext>
-          </a:extLst>
-        </p:cNvPr>
-        <p:cNvGrpSpPr/>
-        <p:nvPr/>
-      </p:nvGrpSpPr>
-      <p:grpSpPr>
-        <a:xfrm>
-          <a:off x="0" y="0"/>
-          <a:ext cx="0" cy="0"/>
-          <a:chOff x="0" y="0"/>
-          <a:chExt cx="0" cy="0"/>
-        </a:xfrm>
-      </p:grpSpPr>
-      <p:pic>
-        <p:nvPicPr>
-          <p:cNvPr id="2" name="図 1">
-            <a:extLst>
-              <a:ext uri="{FF2B5EF4-FFF2-40B4-BE49-F238E27FC236}">
-                <a16:creationId xmlns:a16="http://schemas.microsoft.com/office/drawing/2014/main" id="{340B3760-AA89-EEB8-D740-832785031D59}"/>
-              </a:ext>
-            </a:extLst>
-          </p:cNvPr>
-          <p:cNvPicPr>
-            <a:picLocks noChangeAspect="1"/>
-          </p:cNvPicPr>
-          <p:nvPr/>
-        </p:nvPicPr>
-        <p:blipFill>
-          <a:blip r:embed="rId2">
-            <a:extLst>
-              <a:ext uri="{28A0092B-C50C-407E-A947-70E740481C1C}">
-                <a14:useLocalDpi xmlns:a14="http://schemas.microsoft.com/office/drawing/2010/main" val="0"/>
-              </a:ext>
-            </a:extLst>
-          </a:blip>
-          <a:stretch>
-            <a:fillRect/>
-          </a:stretch>
-        </p:blipFill>
-        <p:spPr>
-          <a:xfrm>
-            <a:off x="4095750" y="1810332"/>
-            <a:ext cx="4000500" cy="3181350"/>
-          </a:xfrm>
-          <a:prstGeom prst="rect">
-            <a:avLst/>
-          </a:prstGeom>
-        </p:spPr>
-      </p:pic>
-      <p:sp>
-        <p:nvSpPr>
-          <p:cNvPr id="9" name="正方形/長方形 8">
-            <a:extLst>
-              <a:ext uri="{FF2B5EF4-FFF2-40B4-BE49-F238E27FC236}">
-                <a16:creationId xmlns:a16="http://schemas.microsoft.com/office/drawing/2014/main" id="{80876F6F-21B3-1621-2208-74AE651A53F9}"/>
-              </a:ext>
-            </a:extLst>
-          </p:cNvPr>
-          <p:cNvSpPr/>
-          <p:nvPr/>
-        </p:nvSpPr>
-        <p:spPr>
-          <a:xfrm flipV="1">
-            <a:off x="4119175" y="3398610"/>
-            <a:ext cx="432000" cy="432000"/>
-          </a:xfrm>
-          <a:prstGeom prst="rect">
-            <a:avLst/>
-          </a:prstGeom>
-          <a:noFill/>
-          <a:ln w="28575">
-            <a:solidFill>
-              <a:srgbClr val="FF0000"/>
-            </a:solidFill>
-          </a:ln>
-        </p:spPr>
-        <p:style>
-          <a:lnRef idx="2">
-            <a:schemeClr val="accent6"/>
-          </a:lnRef>
-          <a:fillRef idx="1">
-            <a:schemeClr val="lt1"/>
-          </a:fillRef>
-          <a:effectRef idx="0">
-            <a:schemeClr val="accent6"/>
-          </a:effectRef>
-          <a:fontRef idx="minor">
-            <a:schemeClr val="dk1"/>
-          </a:fontRef>
-        </p:style>
-        <p:txBody>
-          <a:bodyPr rtlCol="0" anchor="ctr"/>
-          <a:lstStyle/>
-          <a:p>
-            <a:pPr algn="ctr"/>
-            <a:endParaRPr kumimoji="1" lang="ja-JP" altLang="en-US"/>
-          </a:p>
-        </p:txBody>
-      </p:sp>
-      <p:pic>
-        <p:nvPicPr>
-          <p:cNvPr id="11" name="図 10">
-            <a:extLst>
-              <a:ext uri="{FF2B5EF4-FFF2-40B4-BE49-F238E27FC236}">
-                <a16:creationId xmlns:a16="http://schemas.microsoft.com/office/drawing/2014/main" id="{F2EF6662-6DCB-3BEC-5A8E-7216CBF795DD}"/>
-              </a:ext>
-            </a:extLst>
-          </p:cNvPr>
-          <p:cNvPicPr>
-            <a:picLocks noChangeAspect="1"/>
-          </p:cNvPicPr>
-          <p:nvPr/>
-        </p:nvPicPr>
-        <p:blipFill>
-          <a:blip r:embed="rId3">
-            <a:extLst>
-              <a:ext uri="{28A0092B-C50C-407E-A947-70E740481C1C}">
-                <a14:useLocalDpi xmlns:a14="http://schemas.microsoft.com/office/drawing/2010/main" val="0"/>
-              </a:ext>
-            </a:extLst>
-          </a:blip>
-          <a:stretch>
-            <a:fillRect/>
-          </a:stretch>
-        </p:blipFill>
-        <p:spPr>
-          <a:xfrm>
-            <a:off x="4833063" y="2694698"/>
-            <a:ext cx="1228725" cy="180975"/>
-          </a:xfrm>
-          <a:prstGeom prst="rect">
-            <a:avLst/>
-          </a:prstGeom>
-        </p:spPr>
-      </p:pic>
-    </p:spTree>
-    <p:extLst>
-      <p:ext uri="{BB962C8B-B14F-4D97-AF65-F5344CB8AC3E}">
-        <p14:creationId xmlns:p14="http://schemas.microsoft.com/office/powerpoint/2010/main" val="565009452"/>
-      </p:ext>
-    </p:extLst>
-  </p:cSld>
-  <p:clrMapOvr>
-    <a:masterClrMapping/>
-  </p:clrMapOvr>
-</p:sld>
-</file>
-
-<file path=ppt/slides/slide91.xml><?xml version="1.0" encoding="utf-8"?>
-<p:sld xmlns:a="http://schemas.openxmlformats.org/drawingml/2006/main" xmlns:r="http://schemas.openxmlformats.org/officeDocument/2006/relationships" xmlns:p="http://schemas.openxmlformats.org/presentationml/2006/main">
-  <p:cSld>
-    <p:spTree>
-      <p:nvGrpSpPr>
-        <p:cNvPr id="1" name="">
-          <a:extLst>
-            <a:ext uri="{FF2B5EF4-FFF2-40B4-BE49-F238E27FC236}">
               <a16:creationId xmlns:a16="http://schemas.microsoft.com/office/drawing/2014/main" id="{045FC740-4586-7F3E-A0A2-AFF1311FB3DE}"/>
             </a:ext>
           </a:extLst>
@@ -47658,7 +45330,7 @@
 </p:sld>
 </file>
 
-<file path=ppt/slides/slide92.xml><?xml version="1.0" encoding="utf-8"?>
+<file path=ppt/slides/slide91.xml><?xml version="1.0" encoding="utf-8"?>
 <p:sld xmlns:a="http://schemas.openxmlformats.org/drawingml/2006/main" xmlns:r="http://schemas.openxmlformats.org/officeDocument/2006/relationships" xmlns:p="http://schemas.openxmlformats.org/presentationml/2006/main">
   <p:cSld>
     <p:spTree>
@@ -47780,7 +45452,7 @@
 </p:sld>
 </file>
 
-<file path=ppt/slides/slide93.xml><?xml version="1.0" encoding="utf-8"?>
+<file path=ppt/slides/slide92.xml><?xml version="1.0" encoding="utf-8"?>
 <p:sld xmlns:a="http://schemas.openxmlformats.org/drawingml/2006/main" xmlns:r="http://schemas.openxmlformats.org/officeDocument/2006/relationships" xmlns:p="http://schemas.openxmlformats.org/presentationml/2006/main">
   <p:cSld>
     <p:spTree>
@@ -47940,7 +45612,7 @@
 </p:sld>
 </file>
 
-<file path=ppt/slides/slide94.xml><?xml version="1.0" encoding="utf-8"?>
+<file path=ppt/slides/slide93.xml><?xml version="1.0" encoding="utf-8"?>
 <p:sld xmlns:a="http://schemas.openxmlformats.org/drawingml/2006/main" xmlns:r="http://schemas.openxmlformats.org/officeDocument/2006/relationships" xmlns:p="http://schemas.openxmlformats.org/presentationml/2006/main">
   <p:cSld>
     <p:spTree>
@@ -47976,7 +45648,7 @@
 </p:sld>
 </file>
 
-<file path=ppt/slides/slide95.xml><?xml version="1.0" encoding="utf-8"?>
+<file path=ppt/slides/slide94.xml><?xml version="1.0" encoding="utf-8"?>
 <p:sld xmlns:a="http://schemas.openxmlformats.org/drawingml/2006/main" xmlns:r="http://schemas.openxmlformats.org/officeDocument/2006/relationships" xmlns:p="http://schemas.openxmlformats.org/presentationml/2006/main">
   <p:cSld>
     <p:spTree>
@@ -48012,7 +45684,7 @@
 </p:sld>
 </file>
 
-<file path=ppt/slides/slide96.xml><?xml version="1.0" encoding="utf-8"?>
+<file path=ppt/slides/slide95.xml><?xml version="1.0" encoding="utf-8"?>
 <p:sld xmlns:a="http://schemas.openxmlformats.org/drawingml/2006/main" xmlns:r="http://schemas.openxmlformats.org/officeDocument/2006/relationships" xmlns:p="http://schemas.openxmlformats.org/presentationml/2006/main">
   <p:cSld>
     <p:spTree>
@@ -48170,7 +45842,7 @@
 </p:sld>
 </file>
 
-<file path=ppt/slides/slide97.xml><?xml version="1.0" encoding="utf-8"?>
+<file path=ppt/slides/slide96.xml><?xml version="1.0" encoding="utf-8"?>
 <p:sld xmlns:a="http://schemas.openxmlformats.org/drawingml/2006/main" xmlns:r="http://schemas.openxmlformats.org/officeDocument/2006/relationships" xmlns:p="http://schemas.openxmlformats.org/presentationml/2006/main">
   <p:cSld>
     <p:spTree>
@@ -48342,7 +46014,7 @@
 </p:sld>
 </file>
 
-<file path=ppt/slides/slide98.xml><?xml version="1.0" encoding="utf-8"?>
+<file path=ppt/slides/slide97.xml><?xml version="1.0" encoding="utf-8"?>
 <p:sld xmlns:a="http://schemas.openxmlformats.org/drawingml/2006/main" xmlns:r="http://schemas.openxmlformats.org/officeDocument/2006/relationships" xmlns:p="http://schemas.openxmlformats.org/presentationml/2006/main">
   <p:cSld>
     <p:spTree>
@@ -48502,7 +46174,7 @@
 </p:sld>
 </file>
 
-<file path=ppt/slides/slide99.xml><?xml version="1.0" encoding="utf-8"?>
+<file path=ppt/slides/slide98.xml><?xml version="1.0" encoding="utf-8"?>
 <p:sld xmlns:a="http://schemas.openxmlformats.org/drawingml/2006/main" xmlns:r="http://schemas.openxmlformats.org/officeDocument/2006/relationships" xmlns:p="http://schemas.openxmlformats.org/presentationml/2006/main">
   <p:cSld>
     <p:spTree>
@@ -48689,6 +46361,42 @@
     <p:extLst>
       <p:ext uri="{BB962C8B-B14F-4D97-AF65-F5344CB8AC3E}">
         <p14:creationId xmlns:p14="http://schemas.microsoft.com/office/powerpoint/2010/main" val="2317979742"/>
+      </p:ext>
+    </p:extLst>
+  </p:cSld>
+  <p:clrMapOvr>
+    <a:masterClrMapping/>
+  </p:clrMapOvr>
+</p:sld>
+</file>
+
+<file path=ppt/slides/slide99.xml><?xml version="1.0" encoding="utf-8"?>
+<p:sld xmlns:a="http://schemas.openxmlformats.org/drawingml/2006/main" xmlns:r="http://schemas.openxmlformats.org/officeDocument/2006/relationships" xmlns:p="http://schemas.openxmlformats.org/presentationml/2006/main">
+  <p:cSld>
+    <p:spTree>
+      <p:nvGrpSpPr>
+        <p:cNvPr id="1" name="">
+          <a:extLst>
+            <a:ext uri="{FF2B5EF4-FFF2-40B4-BE49-F238E27FC236}">
+              <a16:creationId xmlns:a16="http://schemas.microsoft.com/office/drawing/2014/main" id="{A7C950DC-84F2-A293-2479-BF267F4B25A6}"/>
+            </a:ext>
+          </a:extLst>
+        </p:cNvPr>
+        <p:cNvGrpSpPr/>
+        <p:nvPr/>
+      </p:nvGrpSpPr>
+      <p:grpSpPr>
+        <a:xfrm>
+          <a:off x="0" y="0"/>
+          <a:ext cx="0" cy="0"/>
+          <a:chOff x="0" y="0"/>
+          <a:chExt cx="0" cy="0"/>
+        </a:xfrm>
+      </p:grpSpPr>
+    </p:spTree>
+    <p:extLst>
+      <p:ext uri="{BB962C8B-B14F-4D97-AF65-F5344CB8AC3E}">
+        <p14:creationId xmlns:p14="http://schemas.microsoft.com/office/powerpoint/2010/main" val="2815932081"/>
       </p:ext>
     </p:extLst>
   </p:cSld>

--- a/01_テキスト/Git入門_図.pptx
+++ b/01_テキスト/Git入門_図.pptx
@@ -38,116 +38,118 @@
     <p:sldId id="292" r:id="rId32"/>
     <p:sldId id="421" r:id="rId33"/>
     <p:sldId id="424" r:id="rId34"/>
-    <p:sldId id="283" r:id="rId35"/>
-    <p:sldId id="284" r:id="rId36"/>
-    <p:sldId id="293" r:id="rId37"/>
-    <p:sldId id="416" r:id="rId38"/>
-    <p:sldId id="417" r:id="rId39"/>
-    <p:sldId id="294" r:id="rId40"/>
-    <p:sldId id="298" r:id="rId41"/>
-    <p:sldId id="285" r:id="rId42"/>
-    <p:sldId id="299" r:id="rId43"/>
-    <p:sldId id="406" r:id="rId44"/>
-    <p:sldId id="304" r:id="rId45"/>
-    <p:sldId id="420" r:id="rId46"/>
-    <p:sldId id="419" r:id="rId47"/>
-    <p:sldId id="300" r:id="rId48"/>
-    <p:sldId id="305" r:id="rId49"/>
-    <p:sldId id="306" r:id="rId50"/>
-    <p:sldId id="301" r:id="rId51"/>
-    <p:sldId id="407" r:id="rId52"/>
-    <p:sldId id="318" r:id="rId53"/>
-    <p:sldId id="319" r:id="rId54"/>
-    <p:sldId id="320" r:id="rId55"/>
-    <p:sldId id="321" r:id="rId56"/>
-    <p:sldId id="324" r:id="rId57"/>
-    <p:sldId id="325" r:id="rId58"/>
-    <p:sldId id="326" r:id="rId59"/>
-    <p:sldId id="327" r:id="rId60"/>
-    <p:sldId id="322" r:id="rId61"/>
-    <p:sldId id="328" r:id="rId62"/>
-    <p:sldId id="323" r:id="rId63"/>
-    <p:sldId id="329" r:id="rId64"/>
-    <p:sldId id="330" r:id="rId65"/>
-    <p:sldId id="332" r:id="rId66"/>
-    <p:sldId id="331" r:id="rId67"/>
-    <p:sldId id="333" r:id="rId68"/>
-    <p:sldId id="334" r:id="rId69"/>
-    <p:sldId id="335" r:id="rId70"/>
-    <p:sldId id="340" r:id="rId71"/>
-    <p:sldId id="336" r:id="rId72"/>
-    <p:sldId id="341" r:id="rId73"/>
-    <p:sldId id="342" r:id="rId74"/>
-    <p:sldId id="344" r:id="rId75"/>
-    <p:sldId id="337" r:id="rId76"/>
-    <p:sldId id="343" r:id="rId77"/>
-    <p:sldId id="345" r:id="rId78"/>
-    <p:sldId id="346" r:id="rId79"/>
-    <p:sldId id="347" r:id="rId80"/>
-    <p:sldId id="338" r:id="rId81"/>
-    <p:sldId id="348" r:id="rId82"/>
-    <p:sldId id="339" r:id="rId83"/>
-    <p:sldId id="349" r:id="rId84"/>
-    <p:sldId id="350" r:id="rId85"/>
-    <p:sldId id="351" r:id="rId86"/>
-    <p:sldId id="362" r:id="rId87"/>
-    <p:sldId id="352" r:id="rId88"/>
-    <p:sldId id="353" r:id="rId89"/>
-    <p:sldId id="354" r:id="rId90"/>
-    <p:sldId id="355" r:id="rId91"/>
-    <p:sldId id="356" r:id="rId92"/>
-    <p:sldId id="357" r:id="rId93"/>
-    <p:sldId id="358" r:id="rId94"/>
-    <p:sldId id="359" r:id="rId95"/>
-    <p:sldId id="360" r:id="rId96"/>
-    <p:sldId id="361" r:id="rId97"/>
-    <p:sldId id="363" r:id="rId98"/>
-    <p:sldId id="364" r:id="rId99"/>
-    <p:sldId id="365" r:id="rId100"/>
-    <p:sldId id="366" r:id="rId101"/>
-    <p:sldId id="367" r:id="rId102"/>
-    <p:sldId id="369" r:id="rId103"/>
-    <p:sldId id="370" r:id="rId104"/>
-    <p:sldId id="371" r:id="rId105"/>
-    <p:sldId id="372" r:id="rId106"/>
-    <p:sldId id="373" r:id="rId107"/>
-    <p:sldId id="368" r:id="rId108"/>
-    <p:sldId id="374" r:id="rId109"/>
-    <p:sldId id="379" r:id="rId110"/>
-    <p:sldId id="375" r:id="rId111"/>
-    <p:sldId id="378" r:id="rId112"/>
-    <p:sldId id="376" r:id="rId113"/>
-    <p:sldId id="380" r:id="rId114"/>
-    <p:sldId id="385" r:id="rId115"/>
-    <p:sldId id="377" r:id="rId116"/>
-    <p:sldId id="381" r:id="rId117"/>
-    <p:sldId id="382" r:id="rId118"/>
-    <p:sldId id="383" r:id="rId119"/>
-    <p:sldId id="384" r:id="rId120"/>
-    <p:sldId id="386" r:id="rId121"/>
-    <p:sldId id="387" r:id="rId122"/>
-    <p:sldId id="388" r:id="rId123"/>
-    <p:sldId id="392" r:id="rId124"/>
-    <p:sldId id="389" r:id="rId125"/>
-    <p:sldId id="390" r:id="rId126"/>
-    <p:sldId id="391" r:id="rId127"/>
-    <p:sldId id="393" r:id="rId128"/>
-    <p:sldId id="394" r:id="rId129"/>
-    <p:sldId id="399" r:id="rId130"/>
-    <p:sldId id="400" r:id="rId131"/>
-    <p:sldId id="422" r:id="rId132"/>
-    <p:sldId id="425" r:id="rId133"/>
-    <p:sldId id="426" r:id="rId134"/>
-    <p:sldId id="405" r:id="rId135"/>
-    <p:sldId id="403" r:id="rId136"/>
-    <p:sldId id="402" r:id="rId137"/>
-    <p:sldId id="404" r:id="rId138"/>
-    <p:sldId id="415" r:id="rId139"/>
-    <p:sldId id="408" r:id="rId140"/>
-    <p:sldId id="409" r:id="rId141"/>
-    <p:sldId id="410" r:id="rId142"/>
-    <p:sldId id="411" r:id="rId143"/>
-    <p:sldId id="412" r:id="rId144"/>
+    <p:sldId id="427" r:id="rId35"/>
+    <p:sldId id="283" r:id="rId36"/>
+    <p:sldId id="284" r:id="rId37"/>
+    <p:sldId id="293" r:id="rId38"/>
+    <p:sldId id="416" r:id="rId39"/>
+    <p:sldId id="417" r:id="rId40"/>
+    <p:sldId id="294" r:id="rId41"/>
+    <p:sldId id="298" r:id="rId42"/>
+    <p:sldId id="285" r:id="rId43"/>
+    <p:sldId id="299" r:id="rId44"/>
+    <p:sldId id="406" r:id="rId45"/>
+    <p:sldId id="304" r:id="rId46"/>
+    <p:sldId id="420" r:id="rId47"/>
+    <p:sldId id="419" r:id="rId48"/>
+    <p:sldId id="300" r:id="rId49"/>
+    <p:sldId id="305" r:id="rId50"/>
+    <p:sldId id="306" r:id="rId51"/>
+    <p:sldId id="301" r:id="rId52"/>
+    <p:sldId id="407" r:id="rId53"/>
+    <p:sldId id="318" r:id="rId54"/>
+    <p:sldId id="319" r:id="rId55"/>
+    <p:sldId id="320" r:id="rId56"/>
+    <p:sldId id="321" r:id="rId57"/>
+    <p:sldId id="324" r:id="rId58"/>
+    <p:sldId id="325" r:id="rId59"/>
+    <p:sldId id="326" r:id="rId60"/>
+    <p:sldId id="327" r:id="rId61"/>
+    <p:sldId id="322" r:id="rId62"/>
+    <p:sldId id="328" r:id="rId63"/>
+    <p:sldId id="323" r:id="rId64"/>
+    <p:sldId id="329" r:id="rId65"/>
+    <p:sldId id="330" r:id="rId66"/>
+    <p:sldId id="332" r:id="rId67"/>
+    <p:sldId id="331" r:id="rId68"/>
+    <p:sldId id="333" r:id="rId69"/>
+    <p:sldId id="334" r:id="rId70"/>
+    <p:sldId id="335" r:id="rId71"/>
+    <p:sldId id="340" r:id="rId72"/>
+    <p:sldId id="336" r:id="rId73"/>
+    <p:sldId id="341" r:id="rId74"/>
+    <p:sldId id="342" r:id="rId75"/>
+    <p:sldId id="344" r:id="rId76"/>
+    <p:sldId id="337" r:id="rId77"/>
+    <p:sldId id="343" r:id="rId78"/>
+    <p:sldId id="345" r:id="rId79"/>
+    <p:sldId id="346" r:id="rId80"/>
+    <p:sldId id="347" r:id="rId81"/>
+    <p:sldId id="338" r:id="rId82"/>
+    <p:sldId id="348" r:id="rId83"/>
+    <p:sldId id="339" r:id="rId84"/>
+    <p:sldId id="349" r:id="rId85"/>
+    <p:sldId id="350" r:id="rId86"/>
+    <p:sldId id="351" r:id="rId87"/>
+    <p:sldId id="362" r:id="rId88"/>
+    <p:sldId id="352" r:id="rId89"/>
+    <p:sldId id="353" r:id="rId90"/>
+    <p:sldId id="354" r:id="rId91"/>
+    <p:sldId id="355" r:id="rId92"/>
+    <p:sldId id="356" r:id="rId93"/>
+    <p:sldId id="357" r:id="rId94"/>
+    <p:sldId id="358" r:id="rId95"/>
+    <p:sldId id="359" r:id="rId96"/>
+    <p:sldId id="360" r:id="rId97"/>
+    <p:sldId id="361" r:id="rId98"/>
+    <p:sldId id="363" r:id="rId99"/>
+    <p:sldId id="364" r:id="rId100"/>
+    <p:sldId id="365" r:id="rId101"/>
+    <p:sldId id="366" r:id="rId102"/>
+    <p:sldId id="367" r:id="rId103"/>
+    <p:sldId id="369" r:id="rId104"/>
+    <p:sldId id="370" r:id="rId105"/>
+    <p:sldId id="371" r:id="rId106"/>
+    <p:sldId id="372" r:id="rId107"/>
+    <p:sldId id="373" r:id="rId108"/>
+    <p:sldId id="368" r:id="rId109"/>
+    <p:sldId id="374" r:id="rId110"/>
+    <p:sldId id="379" r:id="rId111"/>
+    <p:sldId id="375" r:id="rId112"/>
+    <p:sldId id="378" r:id="rId113"/>
+    <p:sldId id="376" r:id="rId114"/>
+    <p:sldId id="380" r:id="rId115"/>
+    <p:sldId id="385" r:id="rId116"/>
+    <p:sldId id="377" r:id="rId117"/>
+    <p:sldId id="381" r:id="rId118"/>
+    <p:sldId id="382" r:id="rId119"/>
+    <p:sldId id="383" r:id="rId120"/>
+    <p:sldId id="384" r:id="rId121"/>
+    <p:sldId id="386" r:id="rId122"/>
+    <p:sldId id="387" r:id="rId123"/>
+    <p:sldId id="388" r:id="rId124"/>
+    <p:sldId id="392" r:id="rId125"/>
+    <p:sldId id="389" r:id="rId126"/>
+    <p:sldId id="390" r:id="rId127"/>
+    <p:sldId id="391" r:id="rId128"/>
+    <p:sldId id="393" r:id="rId129"/>
+    <p:sldId id="394" r:id="rId130"/>
+    <p:sldId id="399" r:id="rId131"/>
+    <p:sldId id="400" r:id="rId132"/>
+    <p:sldId id="422" r:id="rId133"/>
+    <p:sldId id="425" r:id="rId134"/>
+    <p:sldId id="426" r:id="rId135"/>
+    <p:sldId id="405" r:id="rId136"/>
+    <p:sldId id="403" r:id="rId137"/>
+    <p:sldId id="402" r:id="rId138"/>
+    <p:sldId id="404" r:id="rId139"/>
+    <p:sldId id="415" r:id="rId140"/>
+    <p:sldId id="408" r:id="rId141"/>
+    <p:sldId id="409" r:id="rId142"/>
+    <p:sldId id="410" r:id="rId143"/>
+    <p:sldId id="411" r:id="rId144"/>
+    <p:sldId id="412" r:id="rId145"/>
+    <p:sldId id="428" r:id="rId146"/>
   </p:sldIdLst>
   <p:sldSz cx="12192000" cy="6858000"/>
   <p:notesSz cx="6858000" cy="9144000"/>
@@ -3863,6 +3865,166 @@
         <p:cNvPr id="1" name="">
           <a:extLst>
             <a:ext uri="{FF2B5EF4-FFF2-40B4-BE49-F238E27FC236}">
+              <a16:creationId xmlns:a16="http://schemas.microsoft.com/office/drawing/2014/main" id="{AD8FF697-422D-DCDC-C32B-D693B41EB8EB}"/>
+            </a:ext>
+          </a:extLst>
+        </p:cNvPr>
+        <p:cNvGrpSpPr/>
+        <p:nvPr/>
+      </p:nvGrpSpPr>
+      <p:grpSpPr>
+        <a:xfrm>
+          <a:off x="0" y="0"/>
+          <a:ext cx="0" cy="0"/>
+          <a:chOff x="0" y="0"/>
+          <a:chExt cx="0" cy="0"/>
+        </a:xfrm>
+      </p:grpSpPr>
+      <p:pic>
+        <p:nvPicPr>
+          <p:cNvPr id="3" name="図 2">
+            <a:extLst>
+              <a:ext uri="{FF2B5EF4-FFF2-40B4-BE49-F238E27FC236}">
+                <a16:creationId xmlns:a16="http://schemas.microsoft.com/office/drawing/2014/main" id="{46B478A4-D3EC-2343-2217-E068C14DDDF4}"/>
+              </a:ext>
+            </a:extLst>
+          </p:cNvPr>
+          <p:cNvPicPr>
+            <a:picLocks noChangeAspect="1"/>
+          </p:cNvPicPr>
+          <p:nvPr/>
+        </p:nvPicPr>
+        <p:blipFill>
+          <a:blip r:embed="rId2">
+            <a:extLst>
+              <a:ext uri="{28A0092B-C50C-407E-A947-70E740481C1C}">
+                <a14:useLocalDpi xmlns:a14="http://schemas.microsoft.com/office/drawing/2010/main" val="0"/>
+              </a:ext>
+            </a:extLst>
+          </a:blip>
+          <a:stretch>
+            <a:fillRect/>
+          </a:stretch>
+        </p:blipFill>
+        <p:spPr>
+          <a:xfrm>
+            <a:off x="4090987" y="1809750"/>
+            <a:ext cx="4010025" cy="3238500"/>
+          </a:xfrm>
+          <a:prstGeom prst="rect">
+            <a:avLst/>
+          </a:prstGeom>
+        </p:spPr>
+      </p:pic>
+      <p:sp>
+        <p:nvSpPr>
+          <p:cNvPr id="5" name="テキスト ボックス 4">
+            <a:extLst>
+              <a:ext uri="{FF2B5EF4-FFF2-40B4-BE49-F238E27FC236}">
+                <a16:creationId xmlns:a16="http://schemas.microsoft.com/office/drawing/2014/main" id="{D88F0626-EA91-361F-2FD5-413195406128}"/>
+              </a:ext>
+            </a:extLst>
+          </p:cNvPr>
+          <p:cNvSpPr txBox="1"/>
+          <p:nvPr/>
+        </p:nvSpPr>
+        <p:spPr>
+          <a:xfrm>
+            <a:off x="5898733" y="4787129"/>
+            <a:ext cx="889000" cy="246221"/>
+          </a:xfrm>
+          <a:prstGeom prst="rect">
+            <a:avLst/>
+          </a:prstGeom>
+          <a:solidFill>
+            <a:schemeClr val="tx1"/>
+          </a:solidFill>
+        </p:spPr>
+        <p:txBody>
+          <a:bodyPr wrap="square" rtlCol="0" anchor="ctr">
+            <a:spAutoFit/>
+          </a:bodyPr>
+          <a:lstStyle/>
+          <a:p>
+            <a:endParaRPr kumimoji="1" lang="ja-JP" altLang="en-US" sz="1000" dirty="0">
+              <a:solidFill>
+                <a:schemeClr val="bg1"/>
+              </a:solidFill>
+            </a:endParaRPr>
+          </a:p>
+        </p:txBody>
+      </p:sp>
+      <p:sp>
+        <p:nvSpPr>
+          <p:cNvPr id="4" name="正方形/長方形 3">
+            <a:extLst>
+              <a:ext uri="{FF2B5EF4-FFF2-40B4-BE49-F238E27FC236}">
+                <a16:creationId xmlns:a16="http://schemas.microsoft.com/office/drawing/2014/main" id="{AAF10AC9-162A-8419-0D5D-FE907AFBFD4B}"/>
+              </a:ext>
+            </a:extLst>
+          </p:cNvPr>
+          <p:cNvSpPr/>
+          <p:nvPr/>
+        </p:nvSpPr>
+        <p:spPr>
+          <a:xfrm flipV="1">
+            <a:off x="4609322" y="4707162"/>
+            <a:ext cx="3449750" cy="322038"/>
+          </a:xfrm>
+          <a:prstGeom prst="rect">
+            <a:avLst/>
+          </a:prstGeom>
+          <a:noFill/>
+          <a:ln w="28575">
+            <a:solidFill>
+              <a:srgbClr val="FF0000"/>
+            </a:solidFill>
+          </a:ln>
+        </p:spPr>
+        <p:style>
+          <a:lnRef idx="2">
+            <a:schemeClr val="accent6"/>
+          </a:lnRef>
+          <a:fillRef idx="1">
+            <a:schemeClr val="lt1"/>
+          </a:fillRef>
+          <a:effectRef idx="0">
+            <a:schemeClr val="accent6"/>
+          </a:effectRef>
+          <a:fontRef idx="minor">
+            <a:schemeClr val="dk1"/>
+          </a:fontRef>
+        </p:style>
+        <p:txBody>
+          <a:bodyPr rtlCol="0" anchor="ctr"/>
+          <a:lstStyle/>
+          <a:p>
+            <a:pPr algn="ctr"/>
+            <a:endParaRPr kumimoji="1" lang="ja-JP" altLang="en-US"/>
+          </a:p>
+        </p:txBody>
+      </p:sp>
+    </p:spTree>
+    <p:extLst>
+      <p:ext uri="{BB962C8B-B14F-4D97-AF65-F5344CB8AC3E}">
+        <p14:creationId xmlns:p14="http://schemas.microsoft.com/office/powerpoint/2010/main" val="720484910"/>
+      </p:ext>
+    </p:extLst>
+  </p:cSld>
+  <p:clrMapOvr>
+    <a:masterClrMapping/>
+  </p:clrMapOvr>
+</p:sld>
+</file>
+
+<file path=ppt/slides/slide101.xml><?xml version="1.0" encoding="utf-8"?>
+<p:sld xmlns:a="http://schemas.openxmlformats.org/drawingml/2006/main" xmlns:r="http://schemas.openxmlformats.org/officeDocument/2006/relationships" xmlns:p="http://schemas.openxmlformats.org/presentationml/2006/main">
+  <p:cSld>
+    <p:spTree>
+      <p:nvGrpSpPr>
+        <p:cNvPr id="1" name="">
+          <a:extLst>
+            <a:ext uri="{FF2B5EF4-FFF2-40B4-BE49-F238E27FC236}">
               <a16:creationId xmlns:a16="http://schemas.microsoft.com/office/drawing/2014/main" id="{7E56821A-6831-E938-9C3B-F7573F25DD68}"/>
             </a:ext>
           </a:extLst>
@@ -4051,7 +4213,7 @@
 </p:sld>
 </file>
 
-<file path=ppt/slides/slide101.xml><?xml version="1.0" encoding="utf-8"?>
+<file path=ppt/slides/slide102.xml><?xml version="1.0" encoding="utf-8"?>
 <p:sld xmlns:a="http://schemas.openxmlformats.org/drawingml/2006/main" xmlns:r="http://schemas.openxmlformats.org/officeDocument/2006/relationships" xmlns:p="http://schemas.openxmlformats.org/presentationml/2006/main">
   <p:cSld>
     <p:spTree>
@@ -4087,7 +4249,7 @@
 </p:sld>
 </file>
 
-<file path=ppt/slides/slide102.xml><?xml version="1.0" encoding="utf-8"?>
+<file path=ppt/slides/slide103.xml><?xml version="1.0" encoding="utf-8"?>
 <p:sld xmlns:a="http://schemas.openxmlformats.org/drawingml/2006/main" xmlns:r="http://schemas.openxmlformats.org/officeDocument/2006/relationships" xmlns:p="http://schemas.openxmlformats.org/presentationml/2006/main">
   <p:cSld>
     <p:spTree>
@@ -4245,7 +4407,7 @@
 </p:sld>
 </file>
 
-<file path=ppt/slides/slide103.xml><?xml version="1.0" encoding="utf-8"?>
+<file path=ppt/slides/slide104.xml><?xml version="1.0" encoding="utf-8"?>
 <p:sld xmlns:a="http://schemas.openxmlformats.org/drawingml/2006/main" xmlns:r="http://schemas.openxmlformats.org/officeDocument/2006/relationships" xmlns:p="http://schemas.openxmlformats.org/presentationml/2006/main">
   <p:cSld>
     <p:spTree>
@@ -4367,7 +4529,7 @@
 </p:sld>
 </file>
 
-<file path=ppt/slides/slide104.xml><?xml version="1.0" encoding="utf-8"?>
+<file path=ppt/slides/slide105.xml><?xml version="1.0" encoding="utf-8"?>
 <p:sld xmlns:a="http://schemas.openxmlformats.org/drawingml/2006/main" xmlns:r="http://schemas.openxmlformats.org/officeDocument/2006/relationships" xmlns:p="http://schemas.openxmlformats.org/presentationml/2006/main">
   <p:cSld>
     <p:spTree>
@@ -4581,7 +4743,7 @@
 </p:sld>
 </file>
 
-<file path=ppt/slides/slide105.xml><?xml version="1.0" encoding="utf-8"?>
+<file path=ppt/slides/slide106.xml><?xml version="1.0" encoding="utf-8"?>
 <p:sld xmlns:a="http://schemas.openxmlformats.org/drawingml/2006/main" xmlns:r="http://schemas.openxmlformats.org/officeDocument/2006/relationships" xmlns:p="http://schemas.openxmlformats.org/presentationml/2006/main">
   <p:cSld>
     <p:spTree>
@@ -4703,7 +4865,7 @@
 </p:sld>
 </file>
 
-<file path=ppt/slides/slide106.xml><?xml version="1.0" encoding="utf-8"?>
+<file path=ppt/slides/slide107.xml><?xml version="1.0" encoding="utf-8"?>
 <p:sld xmlns:a="http://schemas.openxmlformats.org/drawingml/2006/main" xmlns:r="http://schemas.openxmlformats.org/officeDocument/2006/relationships" xmlns:p="http://schemas.openxmlformats.org/presentationml/2006/main">
   <p:cSld>
     <p:spTree>
@@ -4825,7 +4987,7 @@
 </p:sld>
 </file>
 
-<file path=ppt/slides/slide107.xml><?xml version="1.0" encoding="utf-8"?>
+<file path=ppt/slides/slide108.xml><?xml version="1.0" encoding="utf-8"?>
 <p:sld xmlns:a="http://schemas.openxmlformats.org/drawingml/2006/main" xmlns:r="http://schemas.openxmlformats.org/officeDocument/2006/relationships" xmlns:p="http://schemas.openxmlformats.org/presentationml/2006/main">
   <p:cSld>
     <p:spTree>
@@ -4861,7 +5023,7 @@
 </p:sld>
 </file>
 
-<file path=ppt/slides/slide108.xml><?xml version="1.0" encoding="utf-8"?>
+<file path=ppt/slides/slide109.xml><?xml version="1.0" encoding="utf-8"?>
 <p:sld xmlns:a="http://schemas.openxmlformats.org/drawingml/2006/main" xmlns:r="http://schemas.openxmlformats.org/officeDocument/2006/relationships" xmlns:p="http://schemas.openxmlformats.org/presentationml/2006/main">
   <p:cSld>
     <p:spTree>
@@ -5010,128 +5172,6 @@
     <p:extLst>
       <p:ext uri="{BB962C8B-B14F-4D97-AF65-F5344CB8AC3E}">
         <p14:creationId xmlns:p14="http://schemas.microsoft.com/office/powerpoint/2010/main" val="1162902369"/>
-      </p:ext>
-    </p:extLst>
-  </p:cSld>
-  <p:clrMapOvr>
-    <a:masterClrMapping/>
-  </p:clrMapOvr>
-</p:sld>
-</file>
-
-<file path=ppt/slides/slide109.xml><?xml version="1.0" encoding="utf-8"?>
-<p:sld xmlns:a="http://schemas.openxmlformats.org/drawingml/2006/main" xmlns:r="http://schemas.openxmlformats.org/officeDocument/2006/relationships" xmlns:p="http://schemas.openxmlformats.org/presentationml/2006/main">
-  <p:cSld>
-    <p:spTree>
-      <p:nvGrpSpPr>
-        <p:cNvPr id="1" name="">
-          <a:extLst>
-            <a:ext uri="{FF2B5EF4-FFF2-40B4-BE49-F238E27FC236}">
-              <a16:creationId xmlns:a16="http://schemas.microsoft.com/office/drawing/2014/main" id="{A9C636DA-5D53-F4A7-C5DD-22177BA3F604}"/>
-            </a:ext>
-          </a:extLst>
-        </p:cNvPr>
-        <p:cNvGrpSpPr/>
-        <p:nvPr/>
-      </p:nvGrpSpPr>
-      <p:grpSpPr>
-        <a:xfrm>
-          <a:off x="0" y="0"/>
-          <a:ext cx="0" cy="0"/>
-          <a:chOff x="0" y="0"/>
-          <a:chExt cx="0" cy="0"/>
-        </a:xfrm>
-      </p:grpSpPr>
-      <p:pic>
-        <p:nvPicPr>
-          <p:cNvPr id="7" name="図 6">
-            <a:extLst>
-              <a:ext uri="{FF2B5EF4-FFF2-40B4-BE49-F238E27FC236}">
-                <a16:creationId xmlns:a16="http://schemas.microsoft.com/office/drawing/2014/main" id="{B095C851-75E6-4661-B27E-ED17C928984F}"/>
-              </a:ext>
-            </a:extLst>
-          </p:cNvPr>
-          <p:cNvPicPr>
-            <a:picLocks noChangeAspect="1"/>
-          </p:cNvPicPr>
-          <p:nvPr/>
-        </p:nvPicPr>
-        <p:blipFill>
-          <a:blip r:embed="rId2">
-            <a:extLst>
-              <a:ext uri="{28A0092B-C50C-407E-A947-70E740481C1C}">
-                <a14:useLocalDpi xmlns:a14="http://schemas.microsoft.com/office/drawing/2010/main" val="0"/>
-              </a:ext>
-            </a:extLst>
-          </a:blip>
-          <a:stretch>
-            <a:fillRect/>
-          </a:stretch>
-        </p:blipFill>
-        <p:spPr>
-          <a:xfrm>
-            <a:off x="4100512" y="1371600"/>
-            <a:ext cx="3990975" cy="4114800"/>
-          </a:xfrm>
-          <a:prstGeom prst="rect">
-            <a:avLst/>
-          </a:prstGeom>
-        </p:spPr>
-      </p:pic>
-      <p:sp>
-        <p:nvSpPr>
-          <p:cNvPr id="5" name="正方形/長方形 4">
-            <a:extLst>
-              <a:ext uri="{FF2B5EF4-FFF2-40B4-BE49-F238E27FC236}">
-                <a16:creationId xmlns:a16="http://schemas.microsoft.com/office/drawing/2014/main" id="{E5D00F09-5C93-6727-A785-D56AC6F095FE}"/>
-              </a:ext>
-            </a:extLst>
-          </p:cNvPr>
-          <p:cNvSpPr/>
-          <p:nvPr/>
-        </p:nvSpPr>
-        <p:spPr>
-          <a:xfrm flipV="1">
-            <a:off x="4529722" y="5234667"/>
-            <a:ext cx="779396" cy="239777"/>
-          </a:xfrm>
-          <a:prstGeom prst="rect">
-            <a:avLst/>
-          </a:prstGeom>
-          <a:noFill/>
-          <a:ln w="28575">
-            <a:solidFill>
-              <a:srgbClr val="FF0000"/>
-            </a:solidFill>
-          </a:ln>
-        </p:spPr>
-        <p:style>
-          <a:lnRef idx="2">
-            <a:schemeClr val="accent6"/>
-          </a:lnRef>
-          <a:fillRef idx="1">
-            <a:schemeClr val="lt1"/>
-          </a:fillRef>
-          <a:effectRef idx="0">
-            <a:schemeClr val="accent6"/>
-          </a:effectRef>
-          <a:fontRef idx="minor">
-            <a:schemeClr val="dk1"/>
-          </a:fontRef>
-        </p:style>
-        <p:txBody>
-          <a:bodyPr rtlCol="0" anchor="ctr"/>
-          <a:lstStyle/>
-          <a:p>
-            <a:pPr algn="ctr"/>
-            <a:endParaRPr kumimoji="1" lang="ja-JP" altLang="en-US"/>
-          </a:p>
-        </p:txBody>
-      </p:sp>
-    </p:spTree>
-    <p:extLst>
-      <p:ext uri="{BB962C8B-B14F-4D97-AF65-F5344CB8AC3E}">
-        <p14:creationId xmlns:p14="http://schemas.microsoft.com/office/powerpoint/2010/main" val="575003878"/>
       </p:ext>
     </p:extLst>
   </p:cSld>
@@ -6312,6 +6352,128 @@
         <p:cNvPr id="1" name="">
           <a:extLst>
             <a:ext uri="{FF2B5EF4-FFF2-40B4-BE49-F238E27FC236}">
+              <a16:creationId xmlns:a16="http://schemas.microsoft.com/office/drawing/2014/main" id="{A9C636DA-5D53-F4A7-C5DD-22177BA3F604}"/>
+            </a:ext>
+          </a:extLst>
+        </p:cNvPr>
+        <p:cNvGrpSpPr/>
+        <p:nvPr/>
+      </p:nvGrpSpPr>
+      <p:grpSpPr>
+        <a:xfrm>
+          <a:off x="0" y="0"/>
+          <a:ext cx="0" cy="0"/>
+          <a:chOff x="0" y="0"/>
+          <a:chExt cx="0" cy="0"/>
+        </a:xfrm>
+      </p:grpSpPr>
+      <p:pic>
+        <p:nvPicPr>
+          <p:cNvPr id="7" name="図 6">
+            <a:extLst>
+              <a:ext uri="{FF2B5EF4-FFF2-40B4-BE49-F238E27FC236}">
+                <a16:creationId xmlns:a16="http://schemas.microsoft.com/office/drawing/2014/main" id="{B095C851-75E6-4661-B27E-ED17C928984F}"/>
+              </a:ext>
+            </a:extLst>
+          </p:cNvPr>
+          <p:cNvPicPr>
+            <a:picLocks noChangeAspect="1"/>
+          </p:cNvPicPr>
+          <p:nvPr/>
+        </p:nvPicPr>
+        <p:blipFill>
+          <a:blip r:embed="rId2">
+            <a:extLst>
+              <a:ext uri="{28A0092B-C50C-407E-A947-70E740481C1C}">
+                <a14:useLocalDpi xmlns:a14="http://schemas.microsoft.com/office/drawing/2010/main" val="0"/>
+              </a:ext>
+            </a:extLst>
+          </a:blip>
+          <a:stretch>
+            <a:fillRect/>
+          </a:stretch>
+        </p:blipFill>
+        <p:spPr>
+          <a:xfrm>
+            <a:off x="4100512" y="1371600"/>
+            <a:ext cx="3990975" cy="4114800"/>
+          </a:xfrm>
+          <a:prstGeom prst="rect">
+            <a:avLst/>
+          </a:prstGeom>
+        </p:spPr>
+      </p:pic>
+      <p:sp>
+        <p:nvSpPr>
+          <p:cNvPr id="5" name="正方形/長方形 4">
+            <a:extLst>
+              <a:ext uri="{FF2B5EF4-FFF2-40B4-BE49-F238E27FC236}">
+                <a16:creationId xmlns:a16="http://schemas.microsoft.com/office/drawing/2014/main" id="{E5D00F09-5C93-6727-A785-D56AC6F095FE}"/>
+              </a:ext>
+            </a:extLst>
+          </p:cNvPr>
+          <p:cNvSpPr/>
+          <p:nvPr/>
+        </p:nvSpPr>
+        <p:spPr>
+          <a:xfrm flipV="1">
+            <a:off x="4529722" y="5234667"/>
+            <a:ext cx="779396" cy="239777"/>
+          </a:xfrm>
+          <a:prstGeom prst="rect">
+            <a:avLst/>
+          </a:prstGeom>
+          <a:noFill/>
+          <a:ln w="28575">
+            <a:solidFill>
+              <a:srgbClr val="FF0000"/>
+            </a:solidFill>
+          </a:ln>
+        </p:spPr>
+        <p:style>
+          <a:lnRef idx="2">
+            <a:schemeClr val="accent6"/>
+          </a:lnRef>
+          <a:fillRef idx="1">
+            <a:schemeClr val="lt1"/>
+          </a:fillRef>
+          <a:effectRef idx="0">
+            <a:schemeClr val="accent6"/>
+          </a:effectRef>
+          <a:fontRef idx="minor">
+            <a:schemeClr val="dk1"/>
+          </a:fontRef>
+        </p:style>
+        <p:txBody>
+          <a:bodyPr rtlCol="0" anchor="ctr"/>
+          <a:lstStyle/>
+          <a:p>
+            <a:pPr algn="ctr"/>
+            <a:endParaRPr kumimoji="1" lang="ja-JP" altLang="en-US"/>
+          </a:p>
+        </p:txBody>
+      </p:sp>
+    </p:spTree>
+    <p:extLst>
+      <p:ext uri="{BB962C8B-B14F-4D97-AF65-F5344CB8AC3E}">
+        <p14:creationId xmlns:p14="http://schemas.microsoft.com/office/powerpoint/2010/main" val="575003878"/>
+      </p:ext>
+    </p:extLst>
+  </p:cSld>
+  <p:clrMapOvr>
+    <a:masterClrMapping/>
+  </p:clrMapOvr>
+</p:sld>
+</file>
+
+<file path=ppt/slides/slide111.xml><?xml version="1.0" encoding="utf-8"?>
+<p:sld xmlns:a="http://schemas.openxmlformats.org/drawingml/2006/main" xmlns:r="http://schemas.openxmlformats.org/officeDocument/2006/relationships" xmlns:p="http://schemas.openxmlformats.org/presentationml/2006/main">
+  <p:cSld>
+    <p:spTree>
+      <p:nvGrpSpPr>
+        <p:cNvPr id="1" name="">
+          <a:extLst>
+            <a:ext uri="{FF2B5EF4-FFF2-40B4-BE49-F238E27FC236}">
               <a16:creationId xmlns:a16="http://schemas.microsoft.com/office/drawing/2014/main" id="{5200755A-8DFF-4AB9-93B9-AF9F0DAF5B90}"/>
             </a:ext>
           </a:extLst>
@@ -6518,7 +6680,7 @@
 </p:sld>
 </file>
 
-<file path=ppt/slides/slide111.xml><?xml version="1.0" encoding="utf-8"?>
+<file path=ppt/slides/slide112.xml><?xml version="1.0" encoding="utf-8"?>
 <p:sld xmlns:a="http://schemas.openxmlformats.org/drawingml/2006/main" xmlns:r="http://schemas.openxmlformats.org/officeDocument/2006/relationships" xmlns:p="http://schemas.openxmlformats.org/presentationml/2006/main">
   <p:cSld>
     <p:spTree>
@@ -6640,7 +6802,7 @@
 </p:sld>
 </file>
 
-<file path=ppt/slides/slide112.xml><?xml version="1.0" encoding="utf-8"?>
+<file path=ppt/slides/slide113.xml><?xml version="1.0" encoding="utf-8"?>
 <p:sld xmlns:a="http://schemas.openxmlformats.org/drawingml/2006/main" xmlns:r="http://schemas.openxmlformats.org/officeDocument/2006/relationships" xmlns:p="http://schemas.openxmlformats.org/presentationml/2006/main">
   <p:cSld>
     <p:spTree>
@@ -6676,7 +6838,7 @@
 </p:sld>
 </file>
 
-<file path=ppt/slides/slide113.xml><?xml version="1.0" encoding="utf-8"?>
+<file path=ppt/slides/slide114.xml><?xml version="1.0" encoding="utf-8"?>
 <p:sld xmlns:a="http://schemas.openxmlformats.org/drawingml/2006/main" xmlns:r="http://schemas.openxmlformats.org/officeDocument/2006/relationships" xmlns:p="http://schemas.openxmlformats.org/presentationml/2006/main">
   <p:cSld>
     <p:spTree>
@@ -6834,7 +6996,7 @@
 </p:sld>
 </file>
 
-<file path=ppt/slides/slide114.xml><?xml version="1.0" encoding="utf-8"?>
+<file path=ppt/slides/slide115.xml><?xml version="1.0" encoding="utf-8"?>
 <p:sld xmlns:a="http://schemas.openxmlformats.org/drawingml/2006/main" xmlns:r="http://schemas.openxmlformats.org/officeDocument/2006/relationships" xmlns:p="http://schemas.openxmlformats.org/presentationml/2006/main">
   <p:cSld>
     <p:spTree>
@@ -6956,7 +7118,7 @@
 </p:sld>
 </file>
 
-<file path=ppt/slides/slide115.xml><?xml version="1.0" encoding="utf-8"?>
+<file path=ppt/slides/slide116.xml><?xml version="1.0" encoding="utf-8"?>
 <p:sld xmlns:a="http://schemas.openxmlformats.org/drawingml/2006/main" xmlns:r="http://schemas.openxmlformats.org/officeDocument/2006/relationships" xmlns:p="http://schemas.openxmlformats.org/presentationml/2006/main">
   <p:cSld>
     <p:spTree>
@@ -7178,7 +7340,7 @@
 </p:sld>
 </file>
 
-<file path=ppt/slides/slide116.xml><?xml version="1.0" encoding="utf-8"?>
+<file path=ppt/slides/slide117.xml><?xml version="1.0" encoding="utf-8"?>
 <p:sld xmlns:a="http://schemas.openxmlformats.org/drawingml/2006/main" xmlns:r="http://schemas.openxmlformats.org/officeDocument/2006/relationships" xmlns:p="http://schemas.openxmlformats.org/presentationml/2006/main">
   <p:cSld>
     <p:spTree>
@@ -7392,7 +7554,7 @@
 </p:sld>
 </file>
 
-<file path=ppt/slides/slide117.xml><?xml version="1.0" encoding="utf-8"?>
+<file path=ppt/slides/slide118.xml><?xml version="1.0" encoding="utf-8"?>
 <p:sld xmlns:a="http://schemas.openxmlformats.org/drawingml/2006/main" xmlns:r="http://schemas.openxmlformats.org/officeDocument/2006/relationships" xmlns:p="http://schemas.openxmlformats.org/presentationml/2006/main">
   <p:cSld>
     <p:spTree>
@@ -7550,7 +7712,7 @@
 </p:sld>
 </file>
 
-<file path=ppt/slides/slide118.xml><?xml version="1.0" encoding="utf-8"?>
+<file path=ppt/slides/slide119.xml><?xml version="1.0" encoding="utf-8"?>
 <p:sld xmlns:a="http://schemas.openxmlformats.org/drawingml/2006/main" xmlns:r="http://schemas.openxmlformats.org/officeDocument/2006/relationships" xmlns:p="http://schemas.openxmlformats.org/presentationml/2006/main">
   <p:cSld>
     <p:spTree>
@@ -7577,42 +7739,6 @@
     <p:extLst>
       <p:ext uri="{BB962C8B-B14F-4D97-AF65-F5344CB8AC3E}">
         <p14:creationId xmlns:p14="http://schemas.microsoft.com/office/powerpoint/2010/main" val="3781842566"/>
-      </p:ext>
-    </p:extLst>
-  </p:cSld>
-  <p:clrMapOvr>
-    <a:masterClrMapping/>
-  </p:clrMapOvr>
-</p:sld>
-</file>
-
-<file path=ppt/slides/slide119.xml><?xml version="1.0" encoding="utf-8"?>
-<p:sld xmlns:a="http://schemas.openxmlformats.org/drawingml/2006/main" xmlns:r="http://schemas.openxmlformats.org/officeDocument/2006/relationships" xmlns:p="http://schemas.openxmlformats.org/presentationml/2006/main">
-  <p:cSld>
-    <p:spTree>
-      <p:nvGrpSpPr>
-        <p:cNvPr id="1" name="">
-          <a:extLst>
-            <a:ext uri="{FF2B5EF4-FFF2-40B4-BE49-F238E27FC236}">
-              <a16:creationId xmlns:a16="http://schemas.microsoft.com/office/drawing/2014/main" id="{C03AFA2F-85E4-42F0-2B1F-CC1346CC79A1}"/>
-            </a:ext>
-          </a:extLst>
-        </p:cNvPr>
-        <p:cNvGrpSpPr/>
-        <p:nvPr/>
-      </p:nvGrpSpPr>
-      <p:grpSpPr>
-        <a:xfrm>
-          <a:off x="0" y="0"/>
-          <a:ext cx="0" cy="0"/>
-          <a:chOff x="0" y="0"/>
-          <a:chExt cx="0" cy="0"/>
-        </a:xfrm>
-      </p:grpSpPr>
-    </p:spTree>
-    <p:extLst>
-      <p:ext uri="{BB962C8B-B14F-4D97-AF65-F5344CB8AC3E}">
-        <p14:creationId xmlns:p14="http://schemas.microsoft.com/office/powerpoint/2010/main" val="887096851"/>
       </p:ext>
     </p:extLst>
   </p:cSld>
@@ -8044,6 +8170,42 @@
         <p:cNvPr id="1" name="">
           <a:extLst>
             <a:ext uri="{FF2B5EF4-FFF2-40B4-BE49-F238E27FC236}">
+              <a16:creationId xmlns:a16="http://schemas.microsoft.com/office/drawing/2014/main" id="{C03AFA2F-85E4-42F0-2B1F-CC1346CC79A1}"/>
+            </a:ext>
+          </a:extLst>
+        </p:cNvPr>
+        <p:cNvGrpSpPr/>
+        <p:nvPr/>
+      </p:nvGrpSpPr>
+      <p:grpSpPr>
+        <a:xfrm>
+          <a:off x="0" y="0"/>
+          <a:ext cx="0" cy="0"/>
+          <a:chOff x="0" y="0"/>
+          <a:chExt cx="0" cy="0"/>
+        </a:xfrm>
+      </p:grpSpPr>
+    </p:spTree>
+    <p:extLst>
+      <p:ext uri="{BB962C8B-B14F-4D97-AF65-F5344CB8AC3E}">
+        <p14:creationId xmlns:p14="http://schemas.microsoft.com/office/powerpoint/2010/main" val="887096851"/>
+      </p:ext>
+    </p:extLst>
+  </p:cSld>
+  <p:clrMapOvr>
+    <a:masterClrMapping/>
+  </p:clrMapOvr>
+</p:sld>
+</file>
+
+<file path=ppt/slides/slide121.xml><?xml version="1.0" encoding="utf-8"?>
+<p:sld xmlns:a="http://schemas.openxmlformats.org/drawingml/2006/main" xmlns:r="http://schemas.openxmlformats.org/officeDocument/2006/relationships" xmlns:p="http://schemas.openxmlformats.org/presentationml/2006/main">
+  <p:cSld>
+    <p:spTree>
+      <p:nvGrpSpPr>
+        <p:cNvPr id="1" name="">
+          <a:extLst>
+            <a:ext uri="{FF2B5EF4-FFF2-40B4-BE49-F238E27FC236}">
               <a16:creationId xmlns:a16="http://schemas.microsoft.com/office/drawing/2014/main" id="{24D75C8D-5A73-52CE-E878-96625523380A}"/>
             </a:ext>
           </a:extLst>
@@ -8194,7 +8356,7 @@
 </p:sld>
 </file>
 
-<file path=ppt/slides/slide121.xml><?xml version="1.0" encoding="utf-8"?>
+<file path=ppt/slides/slide122.xml><?xml version="1.0" encoding="utf-8"?>
 <p:sld xmlns:a="http://schemas.openxmlformats.org/drawingml/2006/main" xmlns:r="http://schemas.openxmlformats.org/officeDocument/2006/relationships" xmlns:p="http://schemas.openxmlformats.org/presentationml/2006/main">
   <p:cSld>
     <p:spTree>
@@ -8398,7 +8560,7 @@
 </p:sld>
 </file>
 
-<file path=ppt/slides/slide122.xml><?xml version="1.0" encoding="utf-8"?>
+<file path=ppt/slides/slide123.xml><?xml version="1.0" encoding="utf-8"?>
 <p:sld xmlns:a="http://schemas.openxmlformats.org/drawingml/2006/main" xmlns:r="http://schemas.openxmlformats.org/officeDocument/2006/relationships" xmlns:p="http://schemas.openxmlformats.org/presentationml/2006/main">
   <p:cSld>
     <p:spTree>
@@ -8470,7 +8632,7 @@
 </p:sld>
 </file>
 
-<file path=ppt/slides/slide123.xml><?xml version="1.0" encoding="utf-8"?>
+<file path=ppt/slides/slide124.xml><?xml version="1.0" encoding="utf-8"?>
 <p:sld xmlns:a="http://schemas.openxmlformats.org/drawingml/2006/main" xmlns:r="http://schemas.openxmlformats.org/officeDocument/2006/relationships" xmlns:p="http://schemas.openxmlformats.org/presentationml/2006/main">
   <p:cSld>
     <p:spTree>
@@ -8592,7 +8754,7 @@
 </p:sld>
 </file>
 
-<file path=ppt/slides/slide124.xml><?xml version="1.0" encoding="utf-8"?>
+<file path=ppt/slides/slide125.xml><?xml version="1.0" encoding="utf-8"?>
 <p:sld xmlns:a="http://schemas.openxmlformats.org/drawingml/2006/main" xmlns:r="http://schemas.openxmlformats.org/officeDocument/2006/relationships" xmlns:p="http://schemas.openxmlformats.org/presentationml/2006/main">
   <p:cSld>
     <p:spTree>
@@ -8714,7 +8876,7 @@
 </p:sld>
 </file>
 
-<file path=ppt/slides/slide125.xml><?xml version="1.0" encoding="utf-8"?>
+<file path=ppt/slides/slide126.xml><?xml version="1.0" encoding="utf-8"?>
 <p:sld xmlns:a="http://schemas.openxmlformats.org/drawingml/2006/main" xmlns:r="http://schemas.openxmlformats.org/officeDocument/2006/relationships" xmlns:p="http://schemas.openxmlformats.org/presentationml/2006/main">
   <p:cSld>
     <p:spTree>
@@ -8932,7 +9094,7 @@
 </p:sld>
 </file>
 
-<file path=ppt/slides/slide126.xml><?xml version="1.0" encoding="utf-8"?>
+<file path=ppt/slides/slide127.xml><?xml version="1.0" encoding="utf-8"?>
 <p:sld xmlns:a="http://schemas.openxmlformats.org/drawingml/2006/main" xmlns:r="http://schemas.openxmlformats.org/officeDocument/2006/relationships" xmlns:p="http://schemas.openxmlformats.org/presentationml/2006/main">
   <p:cSld>
     <p:spTree>
@@ -8968,7 +9130,7 @@
 </p:sld>
 </file>
 
-<file path=ppt/slides/slide127.xml><?xml version="1.0" encoding="utf-8"?>
+<file path=ppt/slides/slide128.xml><?xml version="1.0" encoding="utf-8"?>
 <p:sld xmlns:a="http://schemas.openxmlformats.org/drawingml/2006/main" xmlns:r="http://schemas.openxmlformats.org/officeDocument/2006/relationships" xmlns:p="http://schemas.openxmlformats.org/presentationml/2006/main">
   <p:cSld>
     <p:spTree>
@@ -9335,7 +9497,7 @@
 </p:sld>
 </file>
 
-<file path=ppt/slides/slide128.xml><?xml version="1.0" encoding="utf-8"?>
+<file path=ppt/slides/slide129.xml><?xml version="1.0" encoding="utf-8"?>
 <p:sld xmlns:a="http://schemas.openxmlformats.org/drawingml/2006/main" xmlns:r="http://schemas.openxmlformats.org/officeDocument/2006/relationships" xmlns:p="http://schemas.openxmlformats.org/presentationml/2006/main">
   <p:cSld>
     <p:spTree>
@@ -9680,203 +9842,6 @@
     <p:extLst>
       <p:ext uri="{BB962C8B-B14F-4D97-AF65-F5344CB8AC3E}">
         <p14:creationId xmlns:p14="http://schemas.microsoft.com/office/powerpoint/2010/main" val="3412231482"/>
-      </p:ext>
-    </p:extLst>
-  </p:cSld>
-  <p:clrMapOvr>
-    <a:masterClrMapping/>
-  </p:clrMapOvr>
-</p:sld>
-</file>
-
-<file path=ppt/slides/slide129.xml><?xml version="1.0" encoding="utf-8"?>
-<p:sld xmlns:a="http://schemas.openxmlformats.org/drawingml/2006/main" xmlns:r="http://schemas.openxmlformats.org/officeDocument/2006/relationships" xmlns:p="http://schemas.openxmlformats.org/presentationml/2006/main">
-  <p:cSld>
-    <p:spTree>
-      <p:nvGrpSpPr>
-        <p:cNvPr id="1" name="">
-          <a:extLst>
-            <a:ext uri="{FF2B5EF4-FFF2-40B4-BE49-F238E27FC236}">
-              <a16:creationId xmlns:a16="http://schemas.microsoft.com/office/drawing/2014/main" id="{CF7F78A9-831F-CD8B-1F8C-47A315A81723}"/>
-            </a:ext>
-          </a:extLst>
-        </p:cNvPr>
-        <p:cNvGrpSpPr/>
-        <p:nvPr/>
-      </p:nvGrpSpPr>
-      <p:grpSpPr>
-        <a:xfrm>
-          <a:off x="0" y="0"/>
-          <a:ext cx="0" cy="0"/>
-          <a:chOff x="0" y="0"/>
-          <a:chExt cx="0" cy="0"/>
-        </a:xfrm>
-      </p:grpSpPr>
-      <p:sp>
-        <p:nvSpPr>
-          <p:cNvPr id="2" name="正方形/長方形 1">
-            <a:extLst>
-              <a:ext uri="{FF2B5EF4-FFF2-40B4-BE49-F238E27FC236}">
-                <a16:creationId xmlns:a16="http://schemas.microsoft.com/office/drawing/2014/main" id="{B3766FAB-F82B-5251-791B-DC66A0DC3C86}"/>
-              </a:ext>
-            </a:extLst>
-          </p:cNvPr>
-          <p:cNvSpPr/>
-          <p:nvPr/>
-        </p:nvSpPr>
-        <p:spPr>
-          <a:xfrm>
-            <a:off x="3470986" y="1586201"/>
-            <a:ext cx="7200000" cy="2631235"/>
-          </a:xfrm>
-          <a:prstGeom prst="rect">
-            <a:avLst/>
-          </a:prstGeom>
-          <a:solidFill>
-            <a:schemeClr val="tx1"/>
-          </a:solidFill>
-          <a:ln>
-            <a:solidFill>
-              <a:schemeClr val="tx1"/>
-            </a:solidFill>
-          </a:ln>
-        </p:spPr>
-        <p:style>
-          <a:lnRef idx="2">
-            <a:schemeClr val="accent6"/>
-          </a:lnRef>
-          <a:fillRef idx="1">
-            <a:schemeClr val="lt1"/>
-          </a:fillRef>
-          <a:effectRef idx="0">
-            <a:schemeClr val="accent6"/>
-          </a:effectRef>
-          <a:fontRef idx="minor">
-            <a:schemeClr val="dk1"/>
-          </a:fontRef>
-        </p:style>
-        <p:txBody>
-          <a:bodyPr rtlCol="0" anchor="t"/>
-          <a:lstStyle/>
-          <a:p>
-            <a:r>
-              <a:rPr lang="en-US" altLang="ja-JP" sz="1400" dirty="0">
-                <a:solidFill>
-                  <a:schemeClr val="bg1"/>
-                </a:solidFill>
-              </a:rPr>
-              <a:t>C:\git-test&gt;git status</a:t>
-            </a:r>
-          </a:p>
-          <a:p>
-            <a:r>
-              <a:rPr lang="en-US" altLang="ja-JP" sz="1400" dirty="0">
-                <a:solidFill>
-                  <a:schemeClr val="bg1"/>
-                </a:solidFill>
-              </a:rPr>
-              <a:t>On branch master</a:t>
-            </a:r>
-          </a:p>
-          <a:p>
-            <a:endParaRPr lang="en-US" altLang="ja-JP" sz="1400" dirty="0">
-              <a:solidFill>
-                <a:schemeClr val="bg1"/>
-              </a:solidFill>
-            </a:endParaRPr>
-          </a:p>
-          <a:p>
-            <a:r>
-              <a:rPr lang="en-US" altLang="ja-JP" sz="1400" dirty="0">
-                <a:solidFill>
-                  <a:schemeClr val="bg1"/>
-                </a:solidFill>
-              </a:rPr>
-              <a:t>No commits yet</a:t>
-            </a:r>
-          </a:p>
-          <a:p>
-            <a:endParaRPr lang="en-US" altLang="ja-JP" sz="1400" dirty="0">
-              <a:solidFill>
-                <a:schemeClr val="bg1"/>
-              </a:solidFill>
-            </a:endParaRPr>
-          </a:p>
-          <a:p>
-            <a:r>
-              <a:rPr lang="en-US" altLang="ja-JP" sz="1400" dirty="0">
-                <a:solidFill>
-                  <a:schemeClr val="bg1"/>
-                </a:solidFill>
-              </a:rPr>
-              <a:t>Untracked files:</a:t>
-            </a:r>
-          </a:p>
-          <a:p>
-            <a:r>
-              <a:rPr lang="en-US" altLang="ja-JP" sz="1400" dirty="0">
-                <a:solidFill>
-                  <a:schemeClr val="bg1"/>
-                </a:solidFill>
-              </a:rPr>
-              <a:t>  (use "git add &lt;file&gt;..." to include in what will be committed)</a:t>
-            </a:r>
-          </a:p>
-          <a:p>
-            <a:r>
-              <a:rPr lang="en-US" altLang="ja-JP" sz="1400" dirty="0">
-                <a:solidFill>
-                  <a:schemeClr val="bg1"/>
-                </a:solidFill>
-              </a:rPr>
-              <a:t>        test.txt</a:t>
-            </a:r>
-          </a:p>
-          <a:p>
-            <a:endParaRPr lang="en-US" altLang="ja-JP" sz="1400" dirty="0">
-              <a:solidFill>
-                <a:schemeClr val="bg1"/>
-              </a:solidFill>
-            </a:endParaRPr>
-          </a:p>
-          <a:p>
-            <a:r>
-              <a:rPr lang="en-US" altLang="ja-JP" sz="1400" dirty="0">
-                <a:solidFill>
-                  <a:schemeClr val="bg1"/>
-                </a:solidFill>
-              </a:rPr>
-              <a:t>nothing added to commit but untracked files present (use "git add" to track)</a:t>
-            </a:r>
-          </a:p>
-          <a:p>
-            <a:endParaRPr kumimoji="1" lang="en-US" altLang="ja-JP" sz="1400" dirty="0">
-              <a:solidFill>
-                <a:schemeClr val="bg1"/>
-              </a:solidFill>
-            </a:endParaRPr>
-          </a:p>
-          <a:p>
-            <a:r>
-              <a:rPr lang="en-US" altLang="ja-JP" sz="1400" dirty="0">
-                <a:solidFill>
-                  <a:schemeClr val="bg1"/>
-                </a:solidFill>
-              </a:rPr>
-              <a:t>C:\git-test&gt;</a:t>
-            </a:r>
-            <a:endParaRPr kumimoji="1" lang="ja-JP" altLang="en-US" sz="1400" dirty="0">
-              <a:solidFill>
-                <a:schemeClr val="bg1"/>
-              </a:solidFill>
-            </a:endParaRPr>
-          </a:p>
-        </p:txBody>
-      </p:sp>
-    </p:spTree>
-    <p:extLst>
-      <p:ext uri="{BB962C8B-B14F-4D97-AF65-F5344CB8AC3E}">
-        <p14:creationId xmlns:p14="http://schemas.microsoft.com/office/powerpoint/2010/main" val="1999855878"/>
       </p:ext>
     </p:extLst>
   </p:cSld>
@@ -10774,6 +10739,203 @@
         <p:cNvPr id="1" name="">
           <a:extLst>
             <a:ext uri="{FF2B5EF4-FFF2-40B4-BE49-F238E27FC236}">
+              <a16:creationId xmlns:a16="http://schemas.microsoft.com/office/drawing/2014/main" id="{CF7F78A9-831F-CD8B-1F8C-47A315A81723}"/>
+            </a:ext>
+          </a:extLst>
+        </p:cNvPr>
+        <p:cNvGrpSpPr/>
+        <p:nvPr/>
+      </p:nvGrpSpPr>
+      <p:grpSpPr>
+        <a:xfrm>
+          <a:off x="0" y="0"/>
+          <a:ext cx="0" cy="0"/>
+          <a:chOff x="0" y="0"/>
+          <a:chExt cx="0" cy="0"/>
+        </a:xfrm>
+      </p:grpSpPr>
+      <p:sp>
+        <p:nvSpPr>
+          <p:cNvPr id="2" name="正方形/長方形 1">
+            <a:extLst>
+              <a:ext uri="{FF2B5EF4-FFF2-40B4-BE49-F238E27FC236}">
+                <a16:creationId xmlns:a16="http://schemas.microsoft.com/office/drawing/2014/main" id="{B3766FAB-F82B-5251-791B-DC66A0DC3C86}"/>
+              </a:ext>
+            </a:extLst>
+          </p:cNvPr>
+          <p:cNvSpPr/>
+          <p:nvPr/>
+        </p:nvSpPr>
+        <p:spPr>
+          <a:xfrm>
+            <a:off x="3470986" y="1586201"/>
+            <a:ext cx="7200000" cy="2631235"/>
+          </a:xfrm>
+          <a:prstGeom prst="rect">
+            <a:avLst/>
+          </a:prstGeom>
+          <a:solidFill>
+            <a:schemeClr val="tx1"/>
+          </a:solidFill>
+          <a:ln>
+            <a:solidFill>
+              <a:schemeClr val="tx1"/>
+            </a:solidFill>
+          </a:ln>
+        </p:spPr>
+        <p:style>
+          <a:lnRef idx="2">
+            <a:schemeClr val="accent6"/>
+          </a:lnRef>
+          <a:fillRef idx="1">
+            <a:schemeClr val="lt1"/>
+          </a:fillRef>
+          <a:effectRef idx="0">
+            <a:schemeClr val="accent6"/>
+          </a:effectRef>
+          <a:fontRef idx="minor">
+            <a:schemeClr val="dk1"/>
+          </a:fontRef>
+        </p:style>
+        <p:txBody>
+          <a:bodyPr rtlCol="0" anchor="t"/>
+          <a:lstStyle/>
+          <a:p>
+            <a:r>
+              <a:rPr lang="en-US" altLang="ja-JP" sz="1400" dirty="0">
+                <a:solidFill>
+                  <a:schemeClr val="bg1"/>
+                </a:solidFill>
+              </a:rPr>
+              <a:t>C:\git-test&gt;git status</a:t>
+            </a:r>
+          </a:p>
+          <a:p>
+            <a:r>
+              <a:rPr lang="en-US" altLang="ja-JP" sz="1400" dirty="0">
+                <a:solidFill>
+                  <a:schemeClr val="bg1"/>
+                </a:solidFill>
+              </a:rPr>
+              <a:t>On branch master</a:t>
+            </a:r>
+          </a:p>
+          <a:p>
+            <a:endParaRPr lang="en-US" altLang="ja-JP" sz="1400" dirty="0">
+              <a:solidFill>
+                <a:schemeClr val="bg1"/>
+              </a:solidFill>
+            </a:endParaRPr>
+          </a:p>
+          <a:p>
+            <a:r>
+              <a:rPr lang="en-US" altLang="ja-JP" sz="1400" dirty="0">
+                <a:solidFill>
+                  <a:schemeClr val="bg1"/>
+                </a:solidFill>
+              </a:rPr>
+              <a:t>No commits yet</a:t>
+            </a:r>
+          </a:p>
+          <a:p>
+            <a:endParaRPr lang="en-US" altLang="ja-JP" sz="1400" dirty="0">
+              <a:solidFill>
+                <a:schemeClr val="bg1"/>
+              </a:solidFill>
+            </a:endParaRPr>
+          </a:p>
+          <a:p>
+            <a:r>
+              <a:rPr lang="en-US" altLang="ja-JP" sz="1400" dirty="0">
+                <a:solidFill>
+                  <a:schemeClr val="bg1"/>
+                </a:solidFill>
+              </a:rPr>
+              <a:t>Untracked files:</a:t>
+            </a:r>
+          </a:p>
+          <a:p>
+            <a:r>
+              <a:rPr lang="en-US" altLang="ja-JP" sz="1400" dirty="0">
+                <a:solidFill>
+                  <a:schemeClr val="bg1"/>
+                </a:solidFill>
+              </a:rPr>
+              <a:t>  (use "git add &lt;file&gt;..." to include in what will be committed)</a:t>
+            </a:r>
+          </a:p>
+          <a:p>
+            <a:r>
+              <a:rPr lang="en-US" altLang="ja-JP" sz="1400" dirty="0">
+                <a:solidFill>
+                  <a:schemeClr val="bg1"/>
+                </a:solidFill>
+              </a:rPr>
+              <a:t>        test.txt</a:t>
+            </a:r>
+          </a:p>
+          <a:p>
+            <a:endParaRPr lang="en-US" altLang="ja-JP" sz="1400" dirty="0">
+              <a:solidFill>
+                <a:schemeClr val="bg1"/>
+              </a:solidFill>
+            </a:endParaRPr>
+          </a:p>
+          <a:p>
+            <a:r>
+              <a:rPr lang="en-US" altLang="ja-JP" sz="1400" dirty="0">
+                <a:solidFill>
+                  <a:schemeClr val="bg1"/>
+                </a:solidFill>
+              </a:rPr>
+              <a:t>nothing added to commit but untracked files present (use "git add" to track)</a:t>
+            </a:r>
+          </a:p>
+          <a:p>
+            <a:endParaRPr kumimoji="1" lang="en-US" altLang="ja-JP" sz="1400" dirty="0">
+              <a:solidFill>
+                <a:schemeClr val="bg1"/>
+              </a:solidFill>
+            </a:endParaRPr>
+          </a:p>
+          <a:p>
+            <a:r>
+              <a:rPr lang="en-US" altLang="ja-JP" sz="1400" dirty="0">
+                <a:solidFill>
+                  <a:schemeClr val="bg1"/>
+                </a:solidFill>
+              </a:rPr>
+              <a:t>C:\git-test&gt;</a:t>
+            </a:r>
+            <a:endParaRPr kumimoji="1" lang="ja-JP" altLang="en-US" sz="1400" dirty="0">
+              <a:solidFill>
+                <a:schemeClr val="bg1"/>
+              </a:solidFill>
+            </a:endParaRPr>
+          </a:p>
+        </p:txBody>
+      </p:sp>
+    </p:spTree>
+    <p:extLst>
+      <p:ext uri="{BB962C8B-B14F-4D97-AF65-F5344CB8AC3E}">
+        <p14:creationId xmlns:p14="http://schemas.microsoft.com/office/powerpoint/2010/main" val="1999855878"/>
+      </p:ext>
+    </p:extLst>
+  </p:cSld>
+  <p:clrMapOvr>
+    <a:masterClrMapping/>
+  </p:clrMapOvr>
+</p:sld>
+</file>
+
+<file path=ppt/slides/slide131.xml><?xml version="1.0" encoding="utf-8"?>
+<p:sld xmlns:a="http://schemas.openxmlformats.org/drawingml/2006/main" xmlns:r="http://schemas.openxmlformats.org/officeDocument/2006/relationships" xmlns:p="http://schemas.openxmlformats.org/presentationml/2006/main">
+  <p:cSld>
+    <p:spTree>
+      <p:nvGrpSpPr>
+        <p:cNvPr id="1" name="">
+          <a:extLst>
+            <a:ext uri="{FF2B5EF4-FFF2-40B4-BE49-F238E27FC236}">
               <a16:creationId xmlns:a16="http://schemas.microsoft.com/office/drawing/2014/main" id="{7A1BFD28-A982-97FA-1FAA-8C1C51FBBD62}"/>
             </a:ext>
           </a:extLst>
@@ -10981,7 +11143,7 @@
 </p:sld>
 </file>
 
-<file path=ppt/slides/slide131.xml><?xml version="1.0" encoding="utf-8"?>
+<file path=ppt/slides/slide132.xml><?xml version="1.0" encoding="utf-8"?>
 <p:sld xmlns:a="http://schemas.openxmlformats.org/drawingml/2006/main" xmlns:r="http://schemas.openxmlformats.org/officeDocument/2006/relationships" xmlns:p="http://schemas.openxmlformats.org/presentationml/2006/main">
   <p:cSld>
     <p:spTree>
@@ -11159,7 +11321,7 @@
 </p:sld>
 </file>
 
-<file path=ppt/slides/slide132.xml><?xml version="1.0" encoding="utf-8"?>
+<file path=ppt/slides/slide133.xml><?xml version="1.0" encoding="utf-8"?>
 <p:sld xmlns:a="http://schemas.openxmlformats.org/drawingml/2006/main" xmlns:r="http://schemas.openxmlformats.org/officeDocument/2006/relationships" xmlns:p="http://schemas.openxmlformats.org/presentationml/2006/main">
   <p:cSld>
     <p:spTree>
@@ -11396,7 +11558,7 @@
 </p:sld>
 </file>
 
-<file path=ppt/slides/slide133.xml><?xml version="1.0" encoding="utf-8"?>
+<file path=ppt/slides/slide134.xml><?xml version="1.0" encoding="utf-8"?>
 <p:sld xmlns:a="http://schemas.openxmlformats.org/drawingml/2006/main" xmlns:r="http://schemas.openxmlformats.org/officeDocument/2006/relationships" xmlns:p="http://schemas.openxmlformats.org/presentationml/2006/main">
   <p:cSld>
     <p:spTree>
@@ -11676,7 +11838,7 @@
 </p:sld>
 </file>
 
-<file path=ppt/slides/slide134.xml><?xml version="1.0" encoding="utf-8"?>
+<file path=ppt/slides/slide135.xml><?xml version="1.0" encoding="utf-8"?>
 <p:sld xmlns:a="http://schemas.openxmlformats.org/drawingml/2006/main" xmlns:r="http://schemas.openxmlformats.org/officeDocument/2006/relationships" xmlns:p="http://schemas.openxmlformats.org/presentationml/2006/main">
   <p:cSld>
     <p:spTree>
@@ -11712,7 +11874,7 @@
 </p:sld>
 </file>
 
-<file path=ppt/slides/slide135.xml><?xml version="1.0" encoding="utf-8"?>
+<file path=ppt/slides/slide136.xml><?xml version="1.0" encoding="utf-8"?>
 <p:sld xmlns:a="http://schemas.openxmlformats.org/drawingml/2006/main" xmlns:r="http://schemas.openxmlformats.org/officeDocument/2006/relationships" xmlns:p="http://schemas.openxmlformats.org/presentationml/2006/main">
   <p:cSld>
     <p:spTree>
@@ -12134,7 +12296,7 @@
 </p:sld>
 </file>
 
-<file path=ppt/slides/slide136.xml><?xml version="1.0" encoding="utf-8"?>
+<file path=ppt/slides/slide137.xml><?xml version="1.0" encoding="utf-8"?>
 <p:sld xmlns:a="http://schemas.openxmlformats.org/drawingml/2006/main" xmlns:r="http://schemas.openxmlformats.org/officeDocument/2006/relationships" xmlns:p="http://schemas.openxmlformats.org/presentationml/2006/main">
   <p:cSld>
     <p:spTree>
@@ -12346,7 +12508,7 @@
 </p:sld>
 </file>
 
-<file path=ppt/slides/slide137.xml><?xml version="1.0" encoding="utf-8"?>
+<file path=ppt/slides/slide138.xml><?xml version="1.0" encoding="utf-8"?>
 <p:sld xmlns:a="http://schemas.openxmlformats.org/drawingml/2006/main" xmlns:r="http://schemas.openxmlformats.org/officeDocument/2006/relationships" xmlns:p="http://schemas.openxmlformats.org/presentationml/2006/main">
   <p:cSld>
     <p:spTree>
@@ -12558,7 +12720,7 @@
 </p:sld>
 </file>
 
-<file path=ppt/slides/slide138.xml><?xml version="1.0" encoding="utf-8"?>
+<file path=ppt/slides/slide139.xml><?xml version="1.0" encoding="utf-8"?>
 <p:sld xmlns:a="http://schemas.openxmlformats.org/drawingml/2006/main" xmlns:r="http://schemas.openxmlformats.org/officeDocument/2006/relationships" xmlns:p="http://schemas.openxmlformats.org/presentationml/2006/main">
   <p:cSld>
     <p:spTree>
@@ -12761,42 +12923,6 @@
     <p:extLst>
       <p:ext uri="{BB962C8B-B14F-4D97-AF65-F5344CB8AC3E}">
         <p14:creationId xmlns:p14="http://schemas.microsoft.com/office/powerpoint/2010/main" val="1356153992"/>
-      </p:ext>
-    </p:extLst>
-  </p:cSld>
-  <p:clrMapOvr>
-    <a:masterClrMapping/>
-  </p:clrMapOvr>
-</p:sld>
-</file>
-
-<file path=ppt/slides/slide139.xml><?xml version="1.0" encoding="utf-8"?>
-<p:sld xmlns:a="http://schemas.openxmlformats.org/drawingml/2006/main" xmlns:r="http://schemas.openxmlformats.org/officeDocument/2006/relationships" xmlns:p="http://schemas.openxmlformats.org/presentationml/2006/main">
-  <p:cSld>
-    <p:spTree>
-      <p:nvGrpSpPr>
-        <p:cNvPr id="1" name="">
-          <a:extLst>
-            <a:ext uri="{FF2B5EF4-FFF2-40B4-BE49-F238E27FC236}">
-              <a16:creationId xmlns:a16="http://schemas.microsoft.com/office/drawing/2014/main" id="{234154BB-3551-8E9E-55D9-7D88F78E575C}"/>
-            </a:ext>
-          </a:extLst>
-        </p:cNvPr>
-        <p:cNvGrpSpPr/>
-        <p:nvPr/>
-      </p:nvGrpSpPr>
-      <p:grpSpPr>
-        <a:xfrm>
-          <a:off x="0" y="0"/>
-          <a:ext cx="0" cy="0"/>
-          <a:chOff x="0" y="0"/>
-          <a:chExt cx="0" cy="0"/>
-        </a:xfrm>
-      </p:grpSpPr>
-    </p:spTree>
-    <p:extLst>
-      <p:ext uri="{BB962C8B-B14F-4D97-AF65-F5344CB8AC3E}">
-        <p14:creationId xmlns:p14="http://schemas.microsoft.com/office/powerpoint/2010/main" val="2316390152"/>
       </p:ext>
     </p:extLst>
   </p:cSld>
@@ -13043,6 +13169,42 @@
         <p:cNvPr id="1" name="">
           <a:extLst>
             <a:ext uri="{FF2B5EF4-FFF2-40B4-BE49-F238E27FC236}">
+              <a16:creationId xmlns:a16="http://schemas.microsoft.com/office/drawing/2014/main" id="{234154BB-3551-8E9E-55D9-7D88F78E575C}"/>
+            </a:ext>
+          </a:extLst>
+        </p:cNvPr>
+        <p:cNvGrpSpPr/>
+        <p:nvPr/>
+      </p:nvGrpSpPr>
+      <p:grpSpPr>
+        <a:xfrm>
+          <a:off x="0" y="0"/>
+          <a:ext cx="0" cy="0"/>
+          <a:chOff x="0" y="0"/>
+          <a:chExt cx="0" cy="0"/>
+        </a:xfrm>
+      </p:grpSpPr>
+    </p:spTree>
+    <p:extLst>
+      <p:ext uri="{BB962C8B-B14F-4D97-AF65-F5344CB8AC3E}">
+        <p14:creationId xmlns:p14="http://schemas.microsoft.com/office/powerpoint/2010/main" val="2316390152"/>
+      </p:ext>
+    </p:extLst>
+  </p:cSld>
+  <p:clrMapOvr>
+    <a:masterClrMapping/>
+  </p:clrMapOvr>
+</p:sld>
+</file>
+
+<file path=ppt/slides/slide141.xml><?xml version="1.0" encoding="utf-8"?>
+<p:sld xmlns:a="http://schemas.openxmlformats.org/drawingml/2006/main" xmlns:r="http://schemas.openxmlformats.org/officeDocument/2006/relationships" xmlns:p="http://schemas.openxmlformats.org/presentationml/2006/main">
+  <p:cSld>
+    <p:spTree>
+      <p:nvGrpSpPr>
+        <p:cNvPr id="1" name="">
+          <a:extLst>
+            <a:ext uri="{FF2B5EF4-FFF2-40B4-BE49-F238E27FC236}">
               <a16:creationId xmlns:a16="http://schemas.microsoft.com/office/drawing/2014/main" id="{4721D5FF-5858-712E-ED6A-D93B02FD537D}"/>
             </a:ext>
           </a:extLst>
@@ -13214,7 +13376,7 @@
 </p:sld>
 </file>
 
-<file path=ppt/slides/slide141.xml><?xml version="1.0" encoding="utf-8"?>
+<file path=ppt/slides/slide142.xml><?xml version="1.0" encoding="utf-8"?>
 <p:sld xmlns:a="http://schemas.openxmlformats.org/drawingml/2006/main" xmlns:r="http://schemas.openxmlformats.org/officeDocument/2006/relationships" xmlns:p="http://schemas.openxmlformats.org/presentationml/2006/main">
   <p:cSld>
     <p:spTree>
@@ -13419,7 +13581,7 @@
 </p:sld>
 </file>
 
-<file path=ppt/slides/slide142.xml><?xml version="1.0" encoding="utf-8"?>
+<file path=ppt/slides/slide143.xml><?xml version="1.0" encoding="utf-8"?>
 <p:sld xmlns:a="http://schemas.openxmlformats.org/drawingml/2006/main" xmlns:r="http://schemas.openxmlformats.org/officeDocument/2006/relationships" xmlns:p="http://schemas.openxmlformats.org/presentationml/2006/main">
   <p:cSld>
     <p:spTree>
@@ -13730,7 +13892,7 @@
 </p:sld>
 </file>
 
-<file path=ppt/slides/slide143.xml><?xml version="1.0" encoding="utf-8"?>
+<file path=ppt/slides/slide144.xml><?xml version="1.0" encoding="utf-8"?>
 <p:sld xmlns:a="http://schemas.openxmlformats.org/drawingml/2006/main" xmlns:r="http://schemas.openxmlformats.org/officeDocument/2006/relationships" xmlns:p="http://schemas.openxmlformats.org/presentationml/2006/main">
   <p:cSld>
     <p:spTree>
@@ -13880,6 +14042,208 @@
     <p:extLst>
       <p:ext uri="{BB962C8B-B14F-4D97-AF65-F5344CB8AC3E}">
         <p14:creationId xmlns:p14="http://schemas.microsoft.com/office/powerpoint/2010/main" val="2335755136"/>
+      </p:ext>
+    </p:extLst>
+  </p:cSld>
+  <p:clrMapOvr>
+    <a:masterClrMapping/>
+  </p:clrMapOvr>
+</p:sld>
+</file>
+
+<file path=ppt/slides/slide145.xml><?xml version="1.0" encoding="utf-8"?>
+<p:sld xmlns:a="http://schemas.openxmlformats.org/drawingml/2006/main" xmlns:r="http://schemas.openxmlformats.org/officeDocument/2006/relationships" xmlns:p="http://schemas.openxmlformats.org/presentationml/2006/main">
+  <p:cSld>
+    <p:spTree>
+      <p:nvGrpSpPr>
+        <p:cNvPr id="1" name="">
+          <a:extLst>
+            <a:ext uri="{FF2B5EF4-FFF2-40B4-BE49-F238E27FC236}">
+              <a16:creationId xmlns:a16="http://schemas.microsoft.com/office/drawing/2014/main" id="{C9CBE842-9B6D-BE17-7102-5922AD97A8E0}"/>
+            </a:ext>
+          </a:extLst>
+        </p:cNvPr>
+        <p:cNvGrpSpPr/>
+        <p:nvPr/>
+      </p:nvGrpSpPr>
+      <p:grpSpPr>
+        <a:xfrm>
+          <a:off x="0" y="0"/>
+          <a:ext cx="0" cy="0"/>
+          <a:chOff x="0" y="0"/>
+          <a:chExt cx="0" cy="0"/>
+        </a:xfrm>
+      </p:grpSpPr>
+      <p:sp>
+        <p:nvSpPr>
+          <p:cNvPr id="2" name="正方形/長方形 1">
+            <a:extLst>
+              <a:ext uri="{FF2B5EF4-FFF2-40B4-BE49-F238E27FC236}">
+                <a16:creationId xmlns:a16="http://schemas.microsoft.com/office/drawing/2014/main" id="{387BA21D-3472-D990-E9A8-4E0EBC9CE0F5}"/>
+              </a:ext>
+            </a:extLst>
+          </p:cNvPr>
+          <p:cNvSpPr/>
+          <p:nvPr/>
+        </p:nvSpPr>
+        <p:spPr>
+          <a:xfrm>
+            <a:off x="3470986" y="1530220"/>
+            <a:ext cx="7200000" cy="2362158"/>
+          </a:xfrm>
+          <a:prstGeom prst="rect">
+            <a:avLst/>
+          </a:prstGeom>
+          <a:solidFill>
+            <a:schemeClr val="tx1"/>
+          </a:solidFill>
+          <a:ln>
+            <a:solidFill>
+              <a:schemeClr val="tx1"/>
+            </a:solidFill>
+          </a:ln>
+        </p:spPr>
+        <p:style>
+          <a:lnRef idx="2">
+            <a:schemeClr val="accent6"/>
+          </a:lnRef>
+          <a:fillRef idx="1">
+            <a:schemeClr val="lt1"/>
+          </a:fillRef>
+          <a:effectRef idx="0">
+            <a:schemeClr val="accent6"/>
+          </a:effectRef>
+          <a:fontRef idx="minor">
+            <a:schemeClr val="dk1"/>
+          </a:fontRef>
+        </p:style>
+        <p:txBody>
+          <a:bodyPr rtlCol="0" anchor="t"/>
+          <a:lstStyle/>
+          <a:p>
+            <a:r>
+              <a:rPr lang="en-US" altLang="ja-JP" sz="1400" dirty="0">
+                <a:solidFill>
+                  <a:schemeClr val="bg1"/>
+                </a:solidFill>
+              </a:rPr>
+              <a:t>C:\git-test&gt;type test.txt</a:t>
+            </a:r>
+          </a:p>
+          <a:p>
+            <a:r>
+              <a:rPr lang="en-US" altLang="ja-JP" sz="1400" dirty="0">
+                <a:solidFill>
+                  <a:schemeClr val="bg1"/>
+                </a:solidFill>
+              </a:rPr>
+              <a:t>Good Morning</a:t>
+            </a:r>
+          </a:p>
+          <a:p>
+            <a:r>
+              <a:rPr lang="en-US" altLang="ja-JP" sz="1400" dirty="0">
+                <a:solidFill>
+                  <a:schemeClr val="bg1"/>
+                </a:solidFill>
+              </a:rPr>
+              <a:t>C:\git-test&gt;git revert --no-edit HEAD</a:t>
+            </a:r>
+          </a:p>
+          <a:p>
+            <a:r>
+              <a:rPr lang="en-US" altLang="ja-JP" sz="1400" dirty="0">
+                <a:solidFill>
+                  <a:schemeClr val="bg1"/>
+                </a:solidFill>
+              </a:rPr>
+              <a:t>[master 600e623] Revert "</a:t>
+            </a:r>
+            <a:r>
+              <a:rPr lang="ja-JP" altLang="en-US" sz="1400" dirty="0">
+                <a:solidFill>
+                  <a:schemeClr val="bg1"/>
+                </a:solidFill>
+              </a:rPr>
+              <a:t>テストデータ変更</a:t>
+            </a:r>
+            <a:r>
+              <a:rPr lang="en-US" altLang="ja-JP" sz="1400" dirty="0">
+                <a:solidFill>
+                  <a:schemeClr val="bg1"/>
+                </a:solidFill>
+              </a:rPr>
+              <a:t>"</a:t>
+            </a:r>
+          </a:p>
+          <a:p>
+            <a:r>
+              <a:rPr lang="en-US" altLang="ja-JP" sz="1400" dirty="0">
+                <a:solidFill>
+                  <a:schemeClr val="bg1"/>
+                </a:solidFill>
+              </a:rPr>
+              <a:t> Date: Thu Jun 25 18:00:21 2026 +0900</a:t>
+            </a:r>
+          </a:p>
+          <a:p>
+            <a:r>
+              <a:rPr lang="en-US" altLang="ja-JP" sz="1400" dirty="0">
+                <a:solidFill>
+                  <a:schemeClr val="bg1"/>
+                </a:solidFill>
+              </a:rPr>
+              <a:t> 1 file changed, 1 insertion(+), 1 deletion(-)</a:t>
+            </a:r>
+          </a:p>
+          <a:p>
+            <a:endParaRPr lang="en-US" altLang="ja-JP" sz="1400" dirty="0">
+              <a:solidFill>
+                <a:schemeClr val="bg1"/>
+              </a:solidFill>
+            </a:endParaRPr>
+          </a:p>
+          <a:p>
+            <a:r>
+              <a:rPr lang="en-US" altLang="ja-JP" sz="1400" dirty="0">
+                <a:solidFill>
+                  <a:schemeClr val="bg1"/>
+                </a:solidFill>
+              </a:rPr>
+              <a:t>C:\git-test&gt;type test.txt</a:t>
+            </a:r>
+          </a:p>
+          <a:p>
+            <a:r>
+              <a:rPr lang="en-US" altLang="ja-JP" sz="1400" dirty="0">
+                <a:solidFill>
+                  <a:schemeClr val="bg1"/>
+                </a:solidFill>
+              </a:rPr>
+              <a:t>Hello</a:t>
+            </a:r>
+          </a:p>
+          <a:p>
+            <a:r>
+              <a:rPr lang="en-US" altLang="ja-JP" sz="1400" dirty="0">
+                <a:solidFill>
+                  <a:schemeClr val="bg1"/>
+                </a:solidFill>
+              </a:rPr>
+              <a:t>C:\git-test&gt;</a:t>
+            </a:r>
+            <a:endParaRPr kumimoji="1" lang="ja-JP" altLang="en-US" sz="1400" dirty="0">
+              <a:solidFill>
+                <a:schemeClr val="bg1"/>
+              </a:solidFill>
+            </a:endParaRPr>
+          </a:p>
+        </p:txBody>
+      </p:sp>
+    </p:spTree>
+    <p:extLst>
+      <p:ext uri="{BB962C8B-B14F-4D97-AF65-F5344CB8AC3E}">
+        <p14:creationId xmlns:p14="http://schemas.microsoft.com/office/powerpoint/2010/main" val="408400398"/>
       </p:ext>
     </p:extLst>
   </p:cSld>
@@ -27843,6 +28207,1249 @@
         <p:cNvPr id="1" name="">
           <a:extLst>
             <a:ext uri="{FF2B5EF4-FFF2-40B4-BE49-F238E27FC236}">
+              <a16:creationId xmlns:a16="http://schemas.microsoft.com/office/drawing/2014/main" id="{8542AAB1-E73C-232F-3C4D-8AE4CF9AFE3F}"/>
+            </a:ext>
+          </a:extLst>
+        </p:cNvPr>
+        <p:cNvGrpSpPr/>
+        <p:nvPr/>
+      </p:nvGrpSpPr>
+      <p:grpSpPr>
+        <a:xfrm>
+          <a:off x="0" y="0"/>
+          <a:ext cx="0" cy="0"/>
+          <a:chOff x="0" y="0"/>
+          <a:chExt cx="0" cy="0"/>
+        </a:xfrm>
+      </p:grpSpPr>
+      <p:pic>
+        <p:nvPicPr>
+          <p:cNvPr id="8" name="図 7">
+            <a:extLst>
+              <a:ext uri="{FF2B5EF4-FFF2-40B4-BE49-F238E27FC236}">
+                <a16:creationId xmlns:a16="http://schemas.microsoft.com/office/drawing/2014/main" id="{FC497AB6-A52E-016B-971D-033141EF793B}"/>
+              </a:ext>
+            </a:extLst>
+          </p:cNvPr>
+          <p:cNvPicPr>
+            <a:picLocks noChangeAspect="1"/>
+          </p:cNvPicPr>
+          <p:nvPr/>
+        </p:nvPicPr>
+        <p:blipFill>
+          <a:blip r:embed="rId2">
+            <a:extLst>
+              <a:ext uri="{28A0092B-C50C-407E-A947-70E740481C1C}">
+                <a14:useLocalDpi xmlns:a14="http://schemas.microsoft.com/office/drawing/2010/main" val="0"/>
+              </a:ext>
+            </a:extLst>
+          </a:blip>
+          <a:stretch>
+            <a:fillRect/>
+          </a:stretch>
+        </p:blipFill>
+        <p:spPr>
+          <a:xfrm>
+            <a:off x="3890816" y="-38148"/>
+            <a:ext cx="1080000" cy="1080000"/>
+          </a:xfrm>
+          <a:prstGeom prst="rect">
+            <a:avLst/>
+          </a:prstGeom>
+        </p:spPr>
+      </p:pic>
+      <p:sp>
+        <p:nvSpPr>
+          <p:cNvPr id="19" name="テキスト ボックス 18">
+            <a:extLst>
+              <a:ext uri="{FF2B5EF4-FFF2-40B4-BE49-F238E27FC236}">
+                <a16:creationId xmlns:a16="http://schemas.microsoft.com/office/drawing/2014/main" id="{8ECA8800-9F70-593A-77AC-628AF7936E4C}"/>
+              </a:ext>
+            </a:extLst>
+          </p:cNvPr>
+          <p:cNvSpPr txBox="1"/>
+          <p:nvPr/>
+        </p:nvSpPr>
+        <p:spPr>
+          <a:xfrm>
+            <a:off x="4853937" y="340982"/>
+            <a:ext cx="2262158" cy="369332"/>
+          </a:xfrm>
+          <a:prstGeom prst="rect">
+            <a:avLst/>
+          </a:prstGeom>
+          <a:noFill/>
+        </p:spPr>
+        <p:txBody>
+          <a:bodyPr wrap="none" rtlCol="0">
+            <a:spAutoFit/>
+          </a:bodyPr>
+          <a:lstStyle/>
+          <a:p>
+            <a:r>
+              <a:rPr kumimoji="1" lang="ja-JP" altLang="en-US" b="1" dirty="0"/>
+              <a:t>現在のディレクトリ</a:t>
+            </a:r>
+          </a:p>
+        </p:txBody>
+      </p:sp>
+      <p:cxnSp>
+        <p:nvCxnSpPr>
+          <p:cNvPr id="20" name="コネクタ: カギ線 19">
+            <a:extLst>
+              <a:ext uri="{FF2B5EF4-FFF2-40B4-BE49-F238E27FC236}">
+                <a16:creationId xmlns:a16="http://schemas.microsoft.com/office/drawing/2014/main" id="{2F683CF9-D217-78DA-8E03-1BBFEAD6EF08}"/>
+              </a:ext>
+            </a:extLst>
+          </p:cNvPr>
+          <p:cNvCxnSpPr>
+            <a:cxnSpLocks/>
+          </p:cNvCxnSpPr>
+          <p:nvPr/>
+        </p:nvCxnSpPr>
+        <p:spPr>
+          <a:xfrm>
+            <a:off x="4419224" y="856695"/>
+            <a:ext cx="1408521" cy="504000"/>
+          </a:xfrm>
+          <a:prstGeom prst="bentConnector3">
+            <a:avLst>
+              <a:gd name="adj1" fmla="val -235"/>
+            </a:avLst>
+          </a:prstGeom>
+          <a:ln w="38100"/>
+        </p:spPr>
+        <p:style>
+          <a:lnRef idx="1">
+            <a:schemeClr val="dk1"/>
+          </a:lnRef>
+          <a:fillRef idx="0">
+            <a:schemeClr val="dk1"/>
+          </a:fillRef>
+          <a:effectRef idx="0">
+            <a:schemeClr val="dk1"/>
+          </a:effectRef>
+          <a:fontRef idx="minor">
+            <a:schemeClr val="tx1"/>
+          </a:fontRef>
+        </p:style>
+      </p:cxnSp>
+      <p:pic>
+        <p:nvPicPr>
+          <p:cNvPr id="25" name="図 24">
+            <a:extLst>
+              <a:ext uri="{FF2B5EF4-FFF2-40B4-BE49-F238E27FC236}">
+                <a16:creationId xmlns:a16="http://schemas.microsoft.com/office/drawing/2014/main" id="{DA4F5C9D-27F6-7F2B-1EBB-BE59C0A534E1}"/>
+              </a:ext>
+            </a:extLst>
+          </p:cNvPr>
+          <p:cNvPicPr>
+            <a:picLocks noChangeAspect="1"/>
+          </p:cNvPicPr>
+          <p:nvPr/>
+        </p:nvPicPr>
+        <p:blipFill>
+          <a:blip r:embed="rId2">
+            <a:extLst>
+              <a:ext uri="{28A0092B-C50C-407E-A947-70E740481C1C}">
+                <a14:useLocalDpi xmlns:a14="http://schemas.microsoft.com/office/drawing/2010/main" val="0"/>
+              </a:ext>
+            </a:extLst>
+          </a:blip>
+          <a:stretch>
+            <a:fillRect/>
+          </a:stretch>
+        </p:blipFill>
+        <p:spPr>
+          <a:xfrm>
+            <a:off x="5814926" y="743733"/>
+            <a:ext cx="1080000" cy="1080000"/>
+          </a:xfrm>
+          <a:prstGeom prst="rect">
+            <a:avLst/>
+          </a:prstGeom>
+        </p:spPr>
+      </p:pic>
+      <p:sp>
+        <p:nvSpPr>
+          <p:cNvPr id="31" name="四角形: 角を丸くする 30">
+            <a:extLst>
+              <a:ext uri="{FF2B5EF4-FFF2-40B4-BE49-F238E27FC236}">
+                <a16:creationId xmlns:a16="http://schemas.microsoft.com/office/drawing/2014/main" id="{8D283EE6-98EE-DEC0-76F4-AE6246AD6123}"/>
+              </a:ext>
+            </a:extLst>
+          </p:cNvPr>
+          <p:cNvSpPr/>
+          <p:nvPr/>
+        </p:nvSpPr>
+        <p:spPr>
+          <a:xfrm>
+            <a:off x="4282751" y="1801166"/>
+            <a:ext cx="5040000" cy="720000"/>
+          </a:xfrm>
+          <a:prstGeom prst="roundRect">
+            <a:avLst/>
+          </a:prstGeom>
+          <a:noFill/>
+          <a:ln w="38100">
+            <a:solidFill>
+              <a:srgbClr val="00B050"/>
+            </a:solidFill>
+            <a:prstDash val="dash"/>
+          </a:ln>
+        </p:spPr>
+        <p:style>
+          <a:lnRef idx="2">
+            <a:schemeClr val="accent1">
+              <a:shade val="15000"/>
+            </a:schemeClr>
+          </a:lnRef>
+          <a:fillRef idx="1">
+            <a:schemeClr val="accent1"/>
+          </a:fillRef>
+          <a:effectRef idx="0">
+            <a:schemeClr val="accent1"/>
+          </a:effectRef>
+          <a:fontRef idx="minor">
+            <a:schemeClr val="lt1"/>
+          </a:fontRef>
+        </p:style>
+        <p:txBody>
+          <a:bodyPr rtlCol="0" anchor="ctr"/>
+          <a:lstStyle/>
+          <a:p>
+            <a:pPr algn="ctr"/>
+            <a:endParaRPr kumimoji="1" lang="ja-JP" altLang="en-US" b="1" dirty="0">
+              <a:solidFill>
+                <a:srgbClr val="00B050"/>
+              </a:solidFill>
+            </a:endParaRPr>
+          </a:p>
+        </p:txBody>
+      </p:sp>
+      <p:cxnSp>
+        <p:nvCxnSpPr>
+          <p:cNvPr id="34" name="コネクタ: カギ線 33">
+            <a:extLst>
+              <a:ext uri="{FF2B5EF4-FFF2-40B4-BE49-F238E27FC236}">
+                <a16:creationId xmlns:a16="http://schemas.microsoft.com/office/drawing/2014/main" id="{17E46B08-9424-D426-7CEA-BD75B52235AB}"/>
+              </a:ext>
+            </a:extLst>
+          </p:cNvPr>
+          <p:cNvCxnSpPr>
+            <a:cxnSpLocks/>
+          </p:cNvCxnSpPr>
+          <p:nvPr/>
+        </p:nvCxnSpPr>
+        <p:spPr>
+          <a:xfrm>
+            <a:off x="4414384" y="860206"/>
+            <a:ext cx="1408521" cy="1296000"/>
+          </a:xfrm>
+          <a:prstGeom prst="bentConnector3">
+            <a:avLst>
+              <a:gd name="adj1" fmla="val -235"/>
+            </a:avLst>
+          </a:prstGeom>
+          <a:ln w="38100"/>
+        </p:spPr>
+        <p:style>
+          <a:lnRef idx="1">
+            <a:schemeClr val="dk1"/>
+          </a:lnRef>
+          <a:fillRef idx="0">
+            <a:schemeClr val="dk1"/>
+          </a:fillRef>
+          <a:effectRef idx="0">
+            <a:schemeClr val="dk1"/>
+          </a:effectRef>
+          <a:fontRef idx="minor">
+            <a:schemeClr val="tx1"/>
+          </a:fontRef>
+        </p:style>
+      </p:cxnSp>
+      <p:sp>
+        <p:nvSpPr>
+          <p:cNvPr id="36" name="四角形: 角を丸くする 35">
+            <a:extLst>
+              <a:ext uri="{FF2B5EF4-FFF2-40B4-BE49-F238E27FC236}">
+                <a16:creationId xmlns:a16="http://schemas.microsoft.com/office/drawing/2014/main" id="{600EC2A4-5BD2-8A94-0A46-2E549C7F4C0C}"/>
+              </a:ext>
+            </a:extLst>
+          </p:cNvPr>
+          <p:cNvSpPr/>
+          <p:nvPr/>
+        </p:nvSpPr>
+        <p:spPr>
+          <a:xfrm>
+            <a:off x="5833587" y="973327"/>
+            <a:ext cx="6090935" cy="720000"/>
+          </a:xfrm>
+          <a:prstGeom prst="roundRect">
+            <a:avLst/>
+          </a:prstGeom>
+          <a:noFill/>
+          <a:ln w="38100">
+            <a:solidFill>
+              <a:srgbClr val="FFC000"/>
+            </a:solidFill>
+            <a:prstDash val="dash"/>
+          </a:ln>
+        </p:spPr>
+        <p:style>
+          <a:lnRef idx="2">
+            <a:schemeClr val="accent1">
+              <a:shade val="15000"/>
+            </a:schemeClr>
+          </a:lnRef>
+          <a:fillRef idx="1">
+            <a:schemeClr val="accent1"/>
+          </a:fillRef>
+          <a:effectRef idx="0">
+            <a:schemeClr val="accent1"/>
+          </a:effectRef>
+          <a:fontRef idx="minor">
+            <a:schemeClr val="lt1"/>
+          </a:fontRef>
+        </p:style>
+        <p:txBody>
+          <a:bodyPr rtlCol="0" anchor="ctr"/>
+          <a:lstStyle/>
+          <a:p>
+            <a:pPr lvl="3"/>
+            <a:endParaRPr lang="ja-JP" altLang="en-US" b="1" dirty="0">
+              <a:solidFill>
+                <a:srgbClr val="FFC000"/>
+              </a:solidFill>
+            </a:endParaRPr>
+          </a:p>
+        </p:txBody>
+      </p:sp>
+      <p:pic>
+        <p:nvPicPr>
+          <p:cNvPr id="43" name="図 42">
+            <a:extLst>
+              <a:ext uri="{FF2B5EF4-FFF2-40B4-BE49-F238E27FC236}">
+                <a16:creationId xmlns:a16="http://schemas.microsoft.com/office/drawing/2014/main" id="{4DB8D223-B88E-FA63-CFE0-12ABDABB1950}"/>
+              </a:ext>
+            </a:extLst>
+          </p:cNvPr>
+          <p:cNvPicPr>
+            <a:picLocks noChangeAspect="1"/>
+          </p:cNvPicPr>
+          <p:nvPr/>
+        </p:nvPicPr>
+        <p:blipFill>
+          <a:blip r:embed="rId2">
+            <a:extLst>
+              <a:ext uri="{28A0092B-C50C-407E-A947-70E740481C1C}">
+                <a14:useLocalDpi xmlns:a14="http://schemas.microsoft.com/office/drawing/2010/main" val="0"/>
+              </a:ext>
+            </a:extLst>
+          </a:blip>
+          <a:stretch>
+            <a:fillRect/>
+          </a:stretch>
+        </p:blipFill>
+        <p:spPr>
+          <a:xfrm>
+            <a:off x="3890816" y="3772618"/>
+            <a:ext cx="1080000" cy="1080000"/>
+          </a:xfrm>
+          <a:prstGeom prst="rect">
+            <a:avLst/>
+          </a:prstGeom>
+        </p:spPr>
+      </p:pic>
+      <p:sp>
+        <p:nvSpPr>
+          <p:cNvPr id="44" name="テキスト ボックス 43">
+            <a:extLst>
+              <a:ext uri="{FF2B5EF4-FFF2-40B4-BE49-F238E27FC236}">
+                <a16:creationId xmlns:a16="http://schemas.microsoft.com/office/drawing/2014/main" id="{E8256B17-D795-0796-C56F-A075B00DC208}"/>
+              </a:ext>
+            </a:extLst>
+          </p:cNvPr>
+          <p:cNvSpPr txBox="1"/>
+          <p:nvPr/>
+        </p:nvSpPr>
+        <p:spPr>
+          <a:xfrm>
+            <a:off x="4853937" y="4151748"/>
+            <a:ext cx="2262158" cy="369332"/>
+          </a:xfrm>
+          <a:prstGeom prst="rect">
+            <a:avLst/>
+          </a:prstGeom>
+          <a:noFill/>
+        </p:spPr>
+        <p:txBody>
+          <a:bodyPr wrap="none" rtlCol="0">
+            <a:spAutoFit/>
+          </a:bodyPr>
+          <a:lstStyle/>
+          <a:p>
+            <a:r>
+              <a:rPr kumimoji="1" lang="ja-JP" altLang="en-US" b="1" dirty="0"/>
+              <a:t>現在のディレクトリ</a:t>
+            </a:r>
+          </a:p>
+        </p:txBody>
+      </p:sp>
+      <p:cxnSp>
+        <p:nvCxnSpPr>
+          <p:cNvPr id="45" name="コネクタ: カギ線 44">
+            <a:extLst>
+              <a:ext uri="{FF2B5EF4-FFF2-40B4-BE49-F238E27FC236}">
+                <a16:creationId xmlns:a16="http://schemas.microsoft.com/office/drawing/2014/main" id="{B5441CC6-55B8-C133-B199-8D069FD25C13}"/>
+              </a:ext>
+            </a:extLst>
+          </p:cNvPr>
+          <p:cNvCxnSpPr>
+            <a:cxnSpLocks/>
+          </p:cNvCxnSpPr>
+          <p:nvPr/>
+        </p:nvCxnSpPr>
+        <p:spPr>
+          <a:xfrm>
+            <a:off x="4414384" y="4667461"/>
+            <a:ext cx="1408521" cy="504000"/>
+          </a:xfrm>
+          <a:prstGeom prst="bentConnector3">
+            <a:avLst>
+              <a:gd name="adj1" fmla="val -235"/>
+            </a:avLst>
+          </a:prstGeom>
+          <a:ln w="38100"/>
+        </p:spPr>
+        <p:style>
+          <a:lnRef idx="1">
+            <a:schemeClr val="dk1"/>
+          </a:lnRef>
+          <a:fillRef idx="0">
+            <a:schemeClr val="dk1"/>
+          </a:fillRef>
+          <a:effectRef idx="0">
+            <a:schemeClr val="dk1"/>
+          </a:effectRef>
+          <a:fontRef idx="minor">
+            <a:schemeClr val="tx1"/>
+          </a:fontRef>
+        </p:style>
+      </p:cxnSp>
+      <p:pic>
+        <p:nvPicPr>
+          <p:cNvPr id="46" name="図 45">
+            <a:extLst>
+              <a:ext uri="{FF2B5EF4-FFF2-40B4-BE49-F238E27FC236}">
+                <a16:creationId xmlns:a16="http://schemas.microsoft.com/office/drawing/2014/main" id="{C56CF96B-363A-0B4D-8AD7-2E3CE4D969DD}"/>
+              </a:ext>
+            </a:extLst>
+          </p:cNvPr>
+          <p:cNvPicPr>
+            <a:picLocks noChangeAspect="1"/>
+          </p:cNvPicPr>
+          <p:nvPr/>
+        </p:nvPicPr>
+        <p:blipFill>
+          <a:blip r:embed="rId2">
+            <a:extLst>
+              <a:ext uri="{28A0092B-C50C-407E-A947-70E740481C1C}">
+                <a14:useLocalDpi xmlns:a14="http://schemas.microsoft.com/office/drawing/2010/main" val="0"/>
+              </a:ext>
+            </a:extLst>
+          </a:blip>
+          <a:stretch>
+            <a:fillRect/>
+          </a:stretch>
+        </p:blipFill>
+        <p:spPr>
+          <a:xfrm>
+            <a:off x="5814926" y="4554499"/>
+            <a:ext cx="1080000" cy="1080000"/>
+          </a:xfrm>
+          <a:prstGeom prst="rect">
+            <a:avLst/>
+          </a:prstGeom>
+        </p:spPr>
+      </p:pic>
+      <p:sp>
+        <p:nvSpPr>
+          <p:cNvPr id="48" name="四角形: 角を丸くする 47">
+            <a:extLst>
+              <a:ext uri="{FF2B5EF4-FFF2-40B4-BE49-F238E27FC236}">
+                <a16:creationId xmlns:a16="http://schemas.microsoft.com/office/drawing/2014/main" id="{894EBA1D-2077-CE54-6C97-342E0E4D1F80}"/>
+              </a:ext>
+            </a:extLst>
+          </p:cNvPr>
+          <p:cNvSpPr/>
+          <p:nvPr/>
+        </p:nvSpPr>
+        <p:spPr>
+          <a:xfrm>
+            <a:off x="4282751" y="6378058"/>
+            <a:ext cx="5040000" cy="720000"/>
+          </a:xfrm>
+          <a:prstGeom prst="roundRect">
+            <a:avLst/>
+          </a:prstGeom>
+          <a:noFill/>
+          <a:ln w="38100">
+            <a:solidFill>
+              <a:srgbClr val="00B050"/>
+            </a:solidFill>
+            <a:prstDash val="dash"/>
+          </a:ln>
+        </p:spPr>
+        <p:style>
+          <a:lnRef idx="2">
+            <a:schemeClr val="accent1">
+              <a:shade val="15000"/>
+            </a:schemeClr>
+          </a:lnRef>
+          <a:fillRef idx="1">
+            <a:schemeClr val="accent1"/>
+          </a:fillRef>
+          <a:effectRef idx="0">
+            <a:schemeClr val="accent1"/>
+          </a:effectRef>
+          <a:fontRef idx="minor">
+            <a:schemeClr val="lt1"/>
+          </a:fontRef>
+        </p:style>
+        <p:txBody>
+          <a:bodyPr rtlCol="0" anchor="ctr"/>
+          <a:lstStyle/>
+          <a:p>
+            <a:pPr algn="ctr"/>
+            <a:endParaRPr kumimoji="1" lang="ja-JP" altLang="en-US" b="1" dirty="0">
+              <a:solidFill>
+                <a:srgbClr val="00B050"/>
+              </a:solidFill>
+            </a:endParaRPr>
+          </a:p>
+        </p:txBody>
+      </p:sp>
+      <p:cxnSp>
+        <p:nvCxnSpPr>
+          <p:cNvPr id="49" name="コネクタ: カギ線 48">
+            <a:extLst>
+              <a:ext uri="{FF2B5EF4-FFF2-40B4-BE49-F238E27FC236}">
+                <a16:creationId xmlns:a16="http://schemas.microsoft.com/office/drawing/2014/main" id="{CDD748BF-1277-49E6-2E05-09FB4FFA1ADE}"/>
+              </a:ext>
+            </a:extLst>
+          </p:cNvPr>
+          <p:cNvCxnSpPr>
+            <a:cxnSpLocks/>
+          </p:cNvCxnSpPr>
+          <p:nvPr/>
+        </p:nvCxnSpPr>
+        <p:spPr>
+          <a:xfrm>
+            <a:off x="4414384" y="4670972"/>
+            <a:ext cx="1408521" cy="2016000"/>
+          </a:xfrm>
+          <a:prstGeom prst="bentConnector3">
+            <a:avLst>
+              <a:gd name="adj1" fmla="val -235"/>
+            </a:avLst>
+          </a:prstGeom>
+          <a:ln w="38100"/>
+        </p:spPr>
+        <p:style>
+          <a:lnRef idx="1">
+            <a:schemeClr val="dk1"/>
+          </a:lnRef>
+          <a:fillRef idx="0">
+            <a:schemeClr val="dk1"/>
+          </a:fillRef>
+          <a:effectRef idx="0">
+            <a:schemeClr val="dk1"/>
+          </a:effectRef>
+          <a:fontRef idx="minor">
+            <a:schemeClr val="tx1"/>
+          </a:fontRef>
+        </p:style>
+      </p:cxnSp>
+      <p:sp>
+        <p:nvSpPr>
+          <p:cNvPr id="51" name="四角形: 角を丸くする 50">
+            <a:extLst>
+              <a:ext uri="{FF2B5EF4-FFF2-40B4-BE49-F238E27FC236}">
+                <a16:creationId xmlns:a16="http://schemas.microsoft.com/office/drawing/2014/main" id="{81E076BF-BEA3-B27B-46BD-18D20CBE6510}"/>
+              </a:ext>
+            </a:extLst>
+          </p:cNvPr>
+          <p:cNvSpPr/>
+          <p:nvPr/>
+        </p:nvSpPr>
+        <p:spPr>
+          <a:xfrm>
+            <a:off x="5833587" y="4784092"/>
+            <a:ext cx="5748505" cy="1420967"/>
+          </a:xfrm>
+          <a:prstGeom prst="roundRect">
+            <a:avLst/>
+          </a:prstGeom>
+          <a:noFill/>
+          <a:ln w="38100">
+            <a:solidFill>
+              <a:srgbClr val="FFC000"/>
+            </a:solidFill>
+            <a:prstDash val="dash"/>
+          </a:ln>
+        </p:spPr>
+        <p:style>
+          <a:lnRef idx="2">
+            <a:schemeClr val="accent1">
+              <a:shade val="15000"/>
+            </a:schemeClr>
+          </a:lnRef>
+          <a:fillRef idx="1">
+            <a:schemeClr val="accent1"/>
+          </a:fillRef>
+          <a:effectRef idx="0">
+            <a:schemeClr val="accent1"/>
+          </a:effectRef>
+          <a:fontRef idx="minor">
+            <a:schemeClr val="lt1"/>
+          </a:fontRef>
+        </p:style>
+        <p:txBody>
+          <a:bodyPr rtlCol="0" anchor="ctr"/>
+          <a:lstStyle/>
+          <a:p>
+            <a:pPr lvl="3"/>
+            <a:endParaRPr lang="ja-JP" altLang="en-US" b="1" dirty="0">
+              <a:solidFill>
+                <a:srgbClr val="FFC000"/>
+              </a:solidFill>
+            </a:endParaRPr>
+          </a:p>
+        </p:txBody>
+      </p:sp>
+      <p:sp>
+        <p:nvSpPr>
+          <p:cNvPr id="5" name="四角形: 角を丸くする 4">
+            <a:extLst>
+              <a:ext uri="{FF2B5EF4-FFF2-40B4-BE49-F238E27FC236}">
+                <a16:creationId xmlns:a16="http://schemas.microsoft.com/office/drawing/2014/main" id="{526E689C-6FFC-6903-D368-210201903625}"/>
+              </a:ext>
+            </a:extLst>
+          </p:cNvPr>
+          <p:cNvSpPr/>
+          <p:nvPr/>
+        </p:nvSpPr>
+        <p:spPr>
+          <a:xfrm>
+            <a:off x="4030824" y="888878"/>
+            <a:ext cx="8042988" cy="2304000"/>
+          </a:xfrm>
+          <a:prstGeom prst="roundRect">
+            <a:avLst/>
+          </a:prstGeom>
+          <a:noFill/>
+          <a:ln w="38100">
+            <a:solidFill>
+              <a:srgbClr val="00B0F0"/>
+            </a:solidFill>
+            <a:prstDash val="dash"/>
+          </a:ln>
+        </p:spPr>
+        <p:style>
+          <a:lnRef idx="2">
+            <a:schemeClr val="accent1">
+              <a:shade val="15000"/>
+            </a:schemeClr>
+          </a:lnRef>
+          <a:fillRef idx="1">
+            <a:schemeClr val="accent1"/>
+          </a:fillRef>
+          <a:effectRef idx="0">
+            <a:schemeClr val="accent1"/>
+          </a:effectRef>
+          <a:fontRef idx="minor">
+            <a:schemeClr val="lt1"/>
+          </a:fontRef>
+        </p:style>
+        <p:txBody>
+          <a:bodyPr rtlCol="0" anchor="b"/>
+          <a:lstStyle/>
+          <a:p>
+            <a:r>
+              <a:rPr lang="ja-JP" altLang="en-US" b="1" dirty="0">
+                <a:solidFill>
+                  <a:srgbClr val="00B0F0"/>
+                </a:solidFill>
+              </a:rPr>
+              <a:t>ローカルリポジトリ</a:t>
+            </a:r>
+          </a:p>
+        </p:txBody>
+      </p:sp>
+      <p:sp>
+        <p:nvSpPr>
+          <p:cNvPr id="9" name="矢印: 右 8">
+            <a:extLst>
+              <a:ext uri="{FF2B5EF4-FFF2-40B4-BE49-F238E27FC236}">
+                <a16:creationId xmlns:a16="http://schemas.microsoft.com/office/drawing/2014/main" id="{6ED13B17-F854-0EA2-090A-6AAD785CA10C}"/>
+              </a:ext>
+            </a:extLst>
+          </p:cNvPr>
+          <p:cNvSpPr/>
+          <p:nvPr/>
+        </p:nvSpPr>
+        <p:spPr>
+          <a:xfrm rot="5400000">
+            <a:off x="7757770" y="3374682"/>
+            <a:ext cx="468086" cy="677228"/>
+          </a:xfrm>
+          <a:prstGeom prst="rightArrow">
+            <a:avLst/>
+          </a:prstGeom>
+        </p:spPr>
+        <p:style>
+          <a:lnRef idx="2">
+            <a:schemeClr val="dk1">
+              <a:shade val="15000"/>
+            </a:schemeClr>
+          </a:lnRef>
+          <a:fillRef idx="1">
+            <a:schemeClr val="dk1"/>
+          </a:fillRef>
+          <a:effectRef idx="0">
+            <a:schemeClr val="dk1"/>
+          </a:effectRef>
+          <a:fontRef idx="minor">
+            <a:schemeClr val="lt1"/>
+          </a:fontRef>
+        </p:style>
+        <p:txBody>
+          <a:bodyPr rtlCol="0" anchor="ctr"/>
+          <a:lstStyle/>
+          <a:p>
+            <a:pPr algn="ctr"/>
+            <a:endParaRPr kumimoji="1" lang="ja-JP" altLang="en-US"/>
+          </a:p>
+        </p:txBody>
+      </p:sp>
+      <p:sp>
+        <p:nvSpPr>
+          <p:cNvPr id="10" name="四角形: 角を丸くする 9">
+            <a:extLst>
+              <a:ext uri="{FF2B5EF4-FFF2-40B4-BE49-F238E27FC236}">
+                <a16:creationId xmlns:a16="http://schemas.microsoft.com/office/drawing/2014/main" id="{1E7082D8-B7D1-D6B3-703A-E697A6D0F1EC}"/>
+              </a:ext>
+            </a:extLst>
+          </p:cNvPr>
+          <p:cNvSpPr/>
+          <p:nvPr/>
+        </p:nvSpPr>
+        <p:spPr>
+          <a:xfrm>
+            <a:off x="4030824" y="4699643"/>
+            <a:ext cx="8042988" cy="2986259"/>
+          </a:xfrm>
+          <a:prstGeom prst="roundRect">
+            <a:avLst/>
+          </a:prstGeom>
+          <a:noFill/>
+          <a:ln w="38100">
+            <a:solidFill>
+              <a:srgbClr val="00B0F0"/>
+            </a:solidFill>
+            <a:prstDash val="dash"/>
+          </a:ln>
+        </p:spPr>
+        <p:style>
+          <a:lnRef idx="2">
+            <a:schemeClr val="accent1">
+              <a:shade val="15000"/>
+            </a:schemeClr>
+          </a:lnRef>
+          <a:fillRef idx="1">
+            <a:schemeClr val="accent1"/>
+          </a:fillRef>
+          <a:effectRef idx="0">
+            <a:schemeClr val="accent1"/>
+          </a:effectRef>
+          <a:fontRef idx="minor">
+            <a:schemeClr val="lt1"/>
+          </a:fontRef>
+        </p:style>
+        <p:txBody>
+          <a:bodyPr rtlCol="0" anchor="b"/>
+          <a:lstStyle/>
+          <a:p>
+            <a:r>
+              <a:rPr lang="ja-JP" altLang="en-US" b="1">
+                <a:solidFill>
+                  <a:srgbClr val="00B0F0"/>
+                </a:solidFill>
+              </a:rPr>
+              <a:t>ローカルリポジトリ</a:t>
+            </a:r>
+          </a:p>
+        </p:txBody>
+      </p:sp>
+      <p:pic>
+        <p:nvPicPr>
+          <p:cNvPr id="7" name="図 6">
+            <a:extLst>
+              <a:ext uri="{FF2B5EF4-FFF2-40B4-BE49-F238E27FC236}">
+                <a16:creationId xmlns:a16="http://schemas.microsoft.com/office/drawing/2014/main" id="{85A3FEAA-EFCB-1C35-4C26-37C1BF38AD9D}"/>
+              </a:ext>
+            </a:extLst>
+          </p:cNvPr>
+          <p:cNvPicPr>
+            <a:picLocks noChangeAspect="1"/>
+          </p:cNvPicPr>
+          <p:nvPr/>
+        </p:nvPicPr>
+        <p:blipFill>
+          <a:blip r:embed="rId3">
+            <a:extLst>
+              <a:ext uri="{28A0092B-C50C-407E-A947-70E740481C1C}">
+                <a14:useLocalDpi xmlns:a14="http://schemas.microsoft.com/office/drawing/2010/main" val="0"/>
+              </a:ext>
+            </a:extLst>
+          </a:blip>
+          <a:stretch>
+            <a:fillRect/>
+          </a:stretch>
+        </p:blipFill>
+        <p:spPr>
+          <a:xfrm>
+            <a:off x="5791689" y="1733198"/>
+            <a:ext cx="871225" cy="871225"/>
+          </a:xfrm>
+          <a:prstGeom prst="rect">
+            <a:avLst/>
+          </a:prstGeom>
+        </p:spPr>
+      </p:pic>
+      <p:pic>
+        <p:nvPicPr>
+          <p:cNvPr id="11" name="図 10">
+            <a:extLst>
+              <a:ext uri="{FF2B5EF4-FFF2-40B4-BE49-F238E27FC236}">
+                <a16:creationId xmlns:a16="http://schemas.microsoft.com/office/drawing/2014/main" id="{FD87FD42-F96A-6AE3-1FE6-DFD931B71C39}"/>
+              </a:ext>
+            </a:extLst>
+          </p:cNvPr>
+          <p:cNvPicPr>
+            <a:picLocks noChangeAspect="1"/>
+          </p:cNvPicPr>
+          <p:nvPr/>
+        </p:nvPicPr>
+        <p:blipFill>
+          <a:blip r:embed="rId3">
+            <a:duotone>
+              <a:schemeClr val="accent2">
+                <a:shade val="45000"/>
+                <a:satMod val="135000"/>
+              </a:schemeClr>
+              <a:prstClr val="white"/>
+            </a:duotone>
+            <a:extLst>
+              <a:ext uri="{28A0092B-C50C-407E-A947-70E740481C1C}">
+                <a14:useLocalDpi xmlns:a14="http://schemas.microsoft.com/office/drawing/2010/main" val="0"/>
+              </a:ext>
+            </a:extLst>
+          </a:blip>
+          <a:stretch>
+            <a:fillRect/>
+          </a:stretch>
+        </p:blipFill>
+        <p:spPr>
+          <a:xfrm>
+            <a:off x="6671485" y="1733198"/>
+            <a:ext cx="871225" cy="871225"/>
+          </a:xfrm>
+          <a:prstGeom prst="rect">
+            <a:avLst/>
+          </a:prstGeom>
+        </p:spPr>
+      </p:pic>
+      <p:cxnSp>
+        <p:nvCxnSpPr>
+          <p:cNvPr id="12" name="直線矢印コネクタ 11">
+            <a:extLst>
+              <a:ext uri="{FF2B5EF4-FFF2-40B4-BE49-F238E27FC236}">
+                <a16:creationId xmlns:a16="http://schemas.microsoft.com/office/drawing/2014/main" id="{C94FDBAB-1827-CCF1-3CD1-B2EE7CA700E0}"/>
+              </a:ext>
+            </a:extLst>
+          </p:cNvPr>
+          <p:cNvCxnSpPr>
+            <a:cxnSpLocks/>
+          </p:cNvCxnSpPr>
+          <p:nvPr/>
+        </p:nvCxnSpPr>
+        <p:spPr>
+          <a:xfrm flipV="1">
+            <a:off x="6487199" y="2168810"/>
+            <a:ext cx="360000" cy="1"/>
+          </a:xfrm>
+          <a:prstGeom prst="straightConnector1">
+            <a:avLst/>
+          </a:prstGeom>
+          <a:ln w="28575">
+            <a:tailEnd type="triangle"/>
+          </a:ln>
+        </p:spPr>
+        <p:style>
+          <a:lnRef idx="1">
+            <a:schemeClr val="dk1"/>
+          </a:lnRef>
+          <a:fillRef idx="0">
+            <a:schemeClr val="dk1"/>
+          </a:fillRef>
+          <a:effectRef idx="0">
+            <a:schemeClr val="dk1"/>
+          </a:effectRef>
+          <a:fontRef idx="minor">
+            <a:schemeClr val="tx1"/>
+          </a:fontRef>
+        </p:style>
+      </p:cxnSp>
+      <p:grpSp>
+        <p:nvGrpSpPr>
+          <p:cNvPr id="24" name="グループ化 23">
+            <a:extLst>
+              <a:ext uri="{FF2B5EF4-FFF2-40B4-BE49-F238E27FC236}">
+                <a16:creationId xmlns:a16="http://schemas.microsoft.com/office/drawing/2014/main" id="{D74B09FC-FC87-BE4E-5016-7EE82F9630DC}"/>
+              </a:ext>
+            </a:extLst>
+          </p:cNvPr>
+          <p:cNvGrpSpPr/>
+          <p:nvPr/>
+        </p:nvGrpSpPr>
+        <p:grpSpPr>
+          <a:xfrm>
+            <a:off x="5785535" y="6292797"/>
+            <a:ext cx="1754757" cy="871225"/>
+            <a:chOff x="5813135" y="5530326"/>
+            <a:chExt cx="1754757" cy="871225"/>
+          </a:xfrm>
+        </p:grpSpPr>
+        <p:pic>
+          <p:nvPicPr>
+            <p:cNvPr id="14" name="図 13">
+              <a:extLst>
+                <a:ext uri="{FF2B5EF4-FFF2-40B4-BE49-F238E27FC236}">
+                  <a16:creationId xmlns:a16="http://schemas.microsoft.com/office/drawing/2014/main" id="{5C9A4D0C-AECB-D685-5853-FEA01043A4A3}"/>
+                </a:ext>
+              </a:extLst>
+            </p:cNvPr>
+            <p:cNvPicPr>
+              <a:picLocks noChangeAspect="1"/>
+            </p:cNvPicPr>
+            <p:nvPr/>
+          </p:nvPicPr>
+          <p:blipFill>
+            <a:blip r:embed="rId3">
+              <a:extLst>
+                <a:ext uri="{28A0092B-C50C-407E-A947-70E740481C1C}">
+                  <a14:useLocalDpi xmlns:a14="http://schemas.microsoft.com/office/drawing/2010/main" val="0"/>
+                </a:ext>
+              </a:extLst>
+            </a:blip>
+            <a:stretch>
+              <a:fillRect/>
+            </a:stretch>
+          </p:blipFill>
+          <p:spPr>
+            <a:xfrm>
+              <a:off x="6696667" y="5530326"/>
+              <a:ext cx="871225" cy="871225"/>
+            </a:xfrm>
+            <a:prstGeom prst="rect">
+              <a:avLst/>
+            </a:prstGeom>
+          </p:spPr>
+        </p:pic>
+        <p:pic>
+          <p:nvPicPr>
+            <p:cNvPr id="15" name="図 14">
+              <a:extLst>
+                <a:ext uri="{FF2B5EF4-FFF2-40B4-BE49-F238E27FC236}">
+                  <a16:creationId xmlns:a16="http://schemas.microsoft.com/office/drawing/2014/main" id="{CD87833E-8F08-49A9-9D48-D3262E3006BC}"/>
+                </a:ext>
+              </a:extLst>
+            </p:cNvPr>
+            <p:cNvPicPr>
+              <a:picLocks noChangeAspect="1"/>
+            </p:cNvPicPr>
+            <p:nvPr/>
+          </p:nvPicPr>
+          <p:blipFill>
+            <a:blip r:embed="rId3">
+              <a:duotone>
+                <a:schemeClr val="accent2">
+                  <a:shade val="45000"/>
+                  <a:satMod val="135000"/>
+                </a:schemeClr>
+                <a:prstClr val="white"/>
+              </a:duotone>
+              <a:extLst>
+                <a:ext uri="{28A0092B-C50C-407E-A947-70E740481C1C}">
+                  <a14:useLocalDpi xmlns:a14="http://schemas.microsoft.com/office/drawing/2010/main" val="0"/>
+                </a:ext>
+              </a:extLst>
+            </a:blip>
+            <a:stretch>
+              <a:fillRect/>
+            </a:stretch>
+          </p:blipFill>
+          <p:spPr>
+            <a:xfrm>
+              <a:off x="5813135" y="5530326"/>
+              <a:ext cx="871225" cy="871225"/>
+            </a:xfrm>
+            <a:prstGeom prst="rect">
+              <a:avLst/>
+            </a:prstGeom>
+          </p:spPr>
+        </p:pic>
+        <p:cxnSp>
+          <p:nvCxnSpPr>
+            <p:cNvPr id="16" name="直線矢印コネクタ 15">
+              <a:extLst>
+                <a:ext uri="{FF2B5EF4-FFF2-40B4-BE49-F238E27FC236}">
+                  <a16:creationId xmlns:a16="http://schemas.microsoft.com/office/drawing/2014/main" id="{2CDE3A23-0505-8F42-0BCB-78E1041E15BF}"/>
+                </a:ext>
+              </a:extLst>
+            </p:cNvPr>
+            <p:cNvCxnSpPr>
+              <a:cxnSpLocks/>
+            </p:cNvCxnSpPr>
+            <p:nvPr/>
+          </p:nvCxnSpPr>
+          <p:spPr>
+            <a:xfrm flipV="1">
+              <a:off x="6490305" y="5965938"/>
+              <a:ext cx="360000" cy="1"/>
+            </a:xfrm>
+            <a:prstGeom prst="straightConnector1">
+              <a:avLst/>
+            </a:prstGeom>
+            <a:ln w="28575">
+              <a:tailEnd type="triangle"/>
+            </a:ln>
+          </p:spPr>
+          <p:style>
+            <a:lnRef idx="1">
+              <a:schemeClr val="dk1"/>
+            </a:lnRef>
+            <a:fillRef idx="0">
+              <a:schemeClr val="dk1"/>
+            </a:fillRef>
+            <a:effectRef idx="0">
+              <a:schemeClr val="dk1"/>
+            </a:effectRef>
+            <a:fontRef idx="minor">
+              <a:schemeClr val="tx1"/>
+            </a:fontRef>
+          </p:style>
+        </p:cxnSp>
+      </p:grpSp>
+      <p:sp>
+        <p:nvSpPr>
+          <p:cNvPr id="17" name="四角形: 角を丸くする 16">
+            <a:extLst>
+              <a:ext uri="{FF2B5EF4-FFF2-40B4-BE49-F238E27FC236}">
+                <a16:creationId xmlns:a16="http://schemas.microsoft.com/office/drawing/2014/main" id="{65630FB2-22BD-FD23-A9AB-E9903BFE022A}"/>
+              </a:ext>
+            </a:extLst>
+          </p:cNvPr>
+          <p:cNvSpPr/>
+          <p:nvPr/>
+        </p:nvSpPr>
+        <p:spPr>
+          <a:xfrm>
+            <a:off x="7091813" y="1061058"/>
+            <a:ext cx="1800000" cy="504000"/>
+          </a:xfrm>
+          <a:prstGeom prst="roundRect">
+            <a:avLst/>
+          </a:prstGeom>
+          <a:ln w="38100">
+            <a:solidFill>
+              <a:schemeClr val="accent4">
+                <a:lumMod val="75000"/>
+              </a:schemeClr>
+            </a:solidFill>
+          </a:ln>
+        </p:spPr>
+        <p:style>
+          <a:lnRef idx="2">
+            <a:schemeClr val="accent6"/>
+          </a:lnRef>
+          <a:fillRef idx="1">
+            <a:schemeClr val="lt1"/>
+          </a:fillRef>
+          <a:effectRef idx="0">
+            <a:schemeClr val="accent6"/>
+          </a:effectRef>
+          <a:fontRef idx="minor">
+            <a:schemeClr val="dk1"/>
+          </a:fontRef>
+        </p:style>
+        <p:txBody>
+          <a:bodyPr rtlCol="0" anchor="ctr"/>
+          <a:lstStyle/>
+          <a:p>
+            <a:pPr algn="ctr"/>
+            <a:r>
+              <a:rPr kumimoji="1" lang="ja-JP" altLang="en-US" b="1" dirty="0">
+                <a:solidFill>
+                  <a:schemeClr val="accent4">
+                    <a:lumMod val="75000"/>
+                  </a:schemeClr>
+                </a:solidFill>
+              </a:rPr>
+              <a:t>変更履歴</a:t>
+            </a:r>
+          </a:p>
+        </p:txBody>
+      </p:sp>
+      <p:sp>
+        <p:nvSpPr>
+          <p:cNvPr id="27" name="四角形: 角を丸くする 26">
+            <a:extLst>
+              <a:ext uri="{FF2B5EF4-FFF2-40B4-BE49-F238E27FC236}">
+                <a16:creationId xmlns:a16="http://schemas.microsoft.com/office/drawing/2014/main" id="{3822C5B8-F104-D4EF-4874-098826FC499C}"/>
+              </a:ext>
+            </a:extLst>
+          </p:cNvPr>
+          <p:cNvSpPr/>
+          <p:nvPr/>
+        </p:nvSpPr>
+        <p:spPr>
+          <a:xfrm>
+            <a:off x="7091813" y="5579428"/>
+            <a:ext cx="1800000" cy="504000"/>
+          </a:xfrm>
+          <a:prstGeom prst="roundRect">
+            <a:avLst/>
+          </a:prstGeom>
+          <a:ln w="38100">
+            <a:solidFill>
+              <a:schemeClr val="tx1"/>
+            </a:solidFill>
+          </a:ln>
+        </p:spPr>
+        <p:style>
+          <a:lnRef idx="2">
+            <a:schemeClr val="accent6"/>
+          </a:lnRef>
+          <a:fillRef idx="1">
+            <a:schemeClr val="lt1"/>
+          </a:fillRef>
+          <a:effectRef idx="0">
+            <a:schemeClr val="accent6"/>
+          </a:effectRef>
+          <a:fontRef idx="minor">
+            <a:schemeClr val="dk1"/>
+          </a:fontRef>
+        </p:style>
+        <p:txBody>
+          <a:bodyPr rtlCol="0" anchor="ctr"/>
+          <a:lstStyle/>
+          <a:p>
+            <a:pPr algn="ctr"/>
+            <a:r>
+              <a:rPr kumimoji="1" lang="ja-JP" altLang="en-US" b="1" dirty="0">
+                <a:solidFill>
+                  <a:schemeClr val="tx1"/>
+                </a:solidFill>
+              </a:rPr>
+              <a:t>変更履歴</a:t>
+            </a:r>
+          </a:p>
+        </p:txBody>
+      </p:sp>
+      <p:sp>
+        <p:nvSpPr>
+          <p:cNvPr id="29" name="四角形: 角を丸くする 28">
+            <a:extLst>
+              <a:ext uri="{FF2B5EF4-FFF2-40B4-BE49-F238E27FC236}">
+                <a16:creationId xmlns:a16="http://schemas.microsoft.com/office/drawing/2014/main" id="{C51E1C23-FACA-B013-2CEC-274A75867650}"/>
+              </a:ext>
+            </a:extLst>
+          </p:cNvPr>
+          <p:cNvSpPr/>
+          <p:nvPr/>
+        </p:nvSpPr>
+        <p:spPr>
+          <a:xfrm>
+            <a:off x="7091813" y="4896428"/>
+            <a:ext cx="1800000" cy="504000"/>
+          </a:xfrm>
+          <a:prstGeom prst="roundRect">
+            <a:avLst/>
+          </a:prstGeom>
+          <a:ln w="38100">
+            <a:solidFill>
+              <a:schemeClr val="accent4">
+                <a:lumMod val="75000"/>
+              </a:schemeClr>
+            </a:solidFill>
+          </a:ln>
+        </p:spPr>
+        <p:style>
+          <a:lnRef idx="2">
+            <a:schemeClr val="accent6"/>
+          </a:lnRef>
+          <a:fillRef idx="1">
+            <a:schemeClr val="lt1"/>
+          </a:fillRef>
+          <a:effectRef idx="0">
+            <a:schemeClr val="accent6"/>
+          </a:effectRef>
+          <a:fontRef idx="minor">
+            <a:schemeClr val="dk1"/>
+          </a:fontRef>
+        </p:style>
+        <p:txBody>
+          <a:bodyPr rtlCol="0" anchor="ctr"/>
+          <a:lstStyle/>
+          <a:p>
+            <a:pPr algn="ctr"/>
+            <a:r>
+              <a:rPr kumimoji="1" lang="ja-JP" altLang="en-US" b="1" dirty="0">
+                <a:solidFill>
+                  <a:schemeClr val="accent4">
+                    <a:lumMod val="75000"/>
+                  </a:schemeClr>
+                </a:solidFill>
+              </a:rPr>
+              <a:t>変更履歴</a:t>
+            </a:r>
+          </a:p>
+        </p:txBody>
+      </p:sp>
+    </p:spTree>
+    <p:extLst>
+      <p:ext uri="{BB962C8B-B14F-4D97-AF65-F5344CB8AC3E}">
+        <p14:creationId xmlns:p14="http://schemas.microsoft.com/office/powerpoint/2010/main" val="4236315777"/>
+      </p:ext>
+    </p:extLst>
+  </p:cSld>
+  <p:clrMapOvr>
+    <a:masterClrMapping/>
+  </p:clrMapOvr>
+</p:sld>
+</file>
+
+<file path=ppt/slides/slide35.xml><?xml version="1.0" encoding="utf-8"?>
+<p:sld xmlns:a="http://schemas.openxmlformats.org/drawingml/2006/main" xmlns:r="http://schemas.openxmlformats.org/officeDocument/2006/relationships" xmlns:p="http://schemas.openxmlformats.org/presentationml/2006/main">
+  <p:cSld>
+    <p:spTree>
+      <p:nvGrpSpPr>
+        <p:cNvPr id="1" name="">
+          <a:extLst>
+            <a:ext uri="{FF2B5EF4-FFF2-40B4-BE49-F238E27FC236}">
               <a16:creationId xmlns:a16="http://schemas.microsoft.com/office/drawing/2014/main" id="{9095A7FD-F001-63B0-FF1E-AF34BEE64592}"/>
             </a:ext>
           </a:extLst>
@@ -27871,7 +29478,7 @@
 </p:sld>
 </file>
 
-<file path=ppt/slides/slide35.xml><?xml version="1.0" encoding="utf-8"?>
+<file path=ppt/slides/slide36.xml><?xml version="1.0" encoding="utf-8"?>
 <p:sld xmlns:a="http://schemas.openxmlformats.org/drawingml/2006/main" xmlns:r="http://schemas.openxmlformats.org/officeDocument/2006/relationships" xmlns:p="http://schemas.openxmlformats.org/presentationml/2006/main">
   <p:cSld>
     <p:spTree>
@@ -27907,7 +29514,7 @@
 </p:sld>
 </file>
 
-<file path=ppt/slides/slide36.xml><?xml version="1.0" encoding="utf-8"?>
+<file path=ppt/slides/slide37.xml><?xml version="1.0" encoding="utf-8"?>
 <p:sld xmlns:a="http://schemas.openxmlformats.org/drawingml/2006/main" xmlns:r="http://schemas.openxmlformats.org/officeDocument/2006/relationships" xmlns:p="http://schemas.openxmlformats.org/presentationml/2006/main">
   <p:cSld>
     <p:spTree>
@@ -28708,7 +30315,7 @@
 </p:sld>
 </file>
 
-<file path=ppt/slides/slide37.xml><?xml version="1.0" encoding="utf-8"?>
+<file path=ppt/slides/slide38.xml><?xml version="1.0" encoding="utf-8"?>
 <p:sld xmlns:a="http://schemas.openxmlformats.org/drawingml/2006/main" xmlns:r="http://schemas.openxmlformats.org/officeDocument/2006/relationships" xmlns:p="http://schemas.openxmlformats.org/presentationml/2006/main">
   <p:cSld>
     <p:spTree>
@@ -29723,7 +31330,7 @@
 </p:sld>
 </file>
 
-<file path=ppt/slides/slide38.xml><?xml version="1.0" encoding="utf-8"?>
+<file path=ppt/slides/slide39.xml><?xml version="1.0" encoding="utf-8"?>
 <p:sld xmlns:a="http://schemas.openxmlformats.org/drawingml/2006/main" xmlns:r="http://schemas.openxmlformats.org/officeDocument/2006/relationships" xmlns:p="http://schemas.openxmlformats.org/presentationml/2006/main">
   <p:cSld>
     <p:spTree>
@@ -30873,1688 +32480,6 @@
     <p:extLst>
       <p:ext uri="{BB962C8B-B14F-4D97-AF65-F5344CB8AC3E}">
         <p14:creationId xmlns:p14="http://schemas.microsoft.com/office/powerpoint/2010/main" val="2312350636"/>
-      </p:ext>
-    </p:extLst>
-  </p:cSld>
-  <p:clrMapOvr>
-    <a:masterClrMapping/>
-  </p:clrMapOvr>
-</p:sld>
-</file>
-
-<file path=ppt/slides/slide39.xml><?xml version="1.0" encoding="utf-8"?>
-<p:sld xmlns:a="http://schemas.openxmlformats.org/drawingml/2006/main" xmlns:r="http://schemas.openxmlformats.org/officeDocument/2006/relationships" xmlns:p="http://schemas.openxmlformats.org/presentationml/2006/main">
-  <p:cSld>
-    <p:spTree>
-      <p:nvGrpSpPr>
-        <p:cNvPr id="1" name="">
-          <a:extLst>
-            <a:ext uri="{FF2B5EF4-FFF2-40B4-BE49-F238E27FC236}">
-              <a16:creationId xmlns:a16="http://schemas.microsoft.com/office/drawing/2014/main" id="{AF1D8D5C-391C-C9E1-4FC1-0940B749BB31}"/>
-            </a:ext>
-          </a:extLst>
-        </p:cNvPr>
-        <p:cNvGrpSpPr/>
-        <p:nvPr/>
-      </p:nvGrpSpPr>
-      <p:grpSpPr>
-        <a:xfrm>
-          <a:off x="0" y="0"/>
-          <a:ext cx="0" cy="0"/>
-          <a:chOff x="0" y="0"/>
-          <a:chExt cx="0" cy="0"/>
-        </a:xfrm>
-      </p:grpSpPr>
-      <p:grpSp>
-        <p:nvGrpSpPr>
-          <p:cNvPr id="53" name="グループ化 52">
-            <a:extLst>
-              <a:ext uri="{FF2B5EF4-FFF2-40B4-BE49-F238E27FC236}">
-                <a16:creationId xmlns:a16="http://schemas.microsoft.com/office/drawing/2014/main" id="{7954C2F0-8A12-0415-6780-18FF2A2570B9}"/>
-              </a:ext>
-            </a:extLst>
-          </p:cNvPr>
-          <p:cNvGrpSpPr/>
-          <p:nvPr/>
-        </p:nvGrpSpPr>
-        <p:grpSpPr>
-          <a:xfrm>
-            <a:off x="5827626" y="2447960"/>
-            <a:ext cx="2914765" cy="871225"/>
-            <a:chOff x="5827745" y="1277431"/>
-            <a:chExt cx="2914765" cy="871225"/>
-          </a:xfrm>
-        </p:grpSpPr>
-        <p:pic>
-          <p:nvPicPr>
-            <p:cNvPr id="54" name="図 53">
-              <a:extLst>
-                <a:ext uri="{FF2B5EF4-FFF2-40B4-BE49-F238E27FC236}">
-                  <a16:creationId xmlns:a16="http://schemas.microsoft.com/office/drawing/2014/main" id="{91C1A54C-3068-382A-3A28-00B94FB5ADA4}"/>
-                </a:ext>
-              </a:extLst>
-            </p:cNvPr>
-            <p:cNvPicPr>
-              <a:picLocks noChangeAspect="1"/>
-            </p:cNvPicPr>
-            <p:nvPr/>
-          </p:nvPicPr>
-          <p:blipFill>
-            <a:blip r:embed="rId2">
-              <a:duotone>
-                <a:prstClr val="black"/>
-                <a:srgbClr val="FF99FF">
-                  <a:tint val="45000"/>
-                  <a:satMod val="400000"/>
-                </a:srgbClr>
-              </a:duotone>
-              <a:extLst>
-                <a:ext uri="{28A0092B-C50C-407E-A947-70E740481C1C}">
-                  <a14:useLocalDpi xmlns:a14="http://schemas.microsoft.com/office/drawing/2010/main" val="0"/>
-                </a:ext>
-              </a:extLst>
-            </a:blip>
-            <a:stretch>
-              <a:fillRect/>
-            </a:stretch>
-          </p:blipFill>
-          <p:spPr>
-            <a:xfrm>
-              <a:off x="5827745" y="1277431"/>
-              <a:ext cx="871225" cy="871225"/>
-            </a:xfrm>
-            <a:prstGeom prst="rect">
-              <a:avLst/>
-            </a:prstGeom>
-          </p:spPr>
-        </p:pic>
-        <p:sp>
-          <p:nvSpPr>
-            <p:cNvPr id="55" name="テキスト ボックス 54">
-              <a:extLst>
-                <a:ext uri="{FF2B5EF4-FFF2-40B4-BE49-F238E27FC236}">
-                  <a16:creationId xmlns:a16="http://schemas.microsoft.com/office/drawing/2014/main" id="{622BD6D0-4FE4-F153-86FB-4735FE65B791}"/>
-                </a:ext>
-              </a:extLst>
-            </p:cNvPr>
-            <p:cNvSpPr txBox="1"/>
-            <p:nvPr/>
-          </p:nvSpPr>
-          <p:spPr>
-            <a:xfrm>
-              <a:off x="6480352" y="1517518"/>
-              <a:ext cx="2262158" cy="369332"/>
-            </a:xfrm>
-            <a:prstGeom prst="rect">
-              <a:avLst/>
-            </a:prstGeom>
-            <a:noFill/>
-          </p:spPr>
-          <p:txBody>
-            <a:bodyPr wrap="none" rtlCol="0">
-              <a:spAutoFit/>
-            </a:bodyPr>
-            <a:lstStyle/>
-            <a:p>
-              <a:r>
-                <a:rPr kumimoji="1" lang="ja-JP" altLang="en-US" b="1" dirty="0">
-                  <a:solidFill>
-                    <a:schemeClr val="accent3"/>
-                  </a:solidFill>
-                </a:rPr>
-                <a:t>リモートのファイル</a:t>
-              </a:r>
-            </a:p>
-          </p:txBody>
-        </p:sp>
-      </p:grpSp>
-      <p:sp>
-        <p:nvSpPr>
-          <p:cNvPr id="14" name="四角形: 角を丸くする 13">
-            <a:extLst>
-              <a:ext uri="{FF2B5EF4-FFF2-40B4-BE49-F238E27FC236}">
-                <a16:creationId xmlns:a16="http://schemas.microsoft.com/office/drawing/2014/main" id="{2DF8C2B3-3EEC-8CB8-CF8B-F2D2775E8507}"/>
-              </a:ext>
-            </a:extLst>
-          </p:cNvPr>
-          <p:cNvSpPr/>
-          <p:nvPr/>
-        </p:nvSpPr>
-        <p:spPr>
-          <a:xfrm>
-            <a:off x="4021542" y="5329039"/>
-            <a:ext cx="8042988" cy="2846945"/>
-          </a:xfrm>
-          <a:prstGeom prst="roundRect">
-            <a:avLst/>
-          </a:prstGeom>
-          <a:noFill/>
-          <a:ln w="38100">
-            <a:solidFill>
-              <a:srgbClr val="FFCCFF"/>
-            </a:solidFill>
-            <a:prstDash val="dash"/>
-          </a:ln>
-        </p:spPr>
-        <p:style>
-          <a:lnRef idx="2">
-            <a:schemeClr val="accent1">
-              <a:shade val="15000"/>
-            </a:schemeClr>
-          </a:lnRef>
-          <a:fillRef idx="1">
-            <a:schemeClr val="accent1"/>
-          </a:fillRef>
-          <a:effectRef idx="0">
-            <a:schemeClr val="accent1"/>
-          </a:effectRef>
-          <a:fontRef idx="minor">
-            <a:schemeClr val="lt1"/>
-          </a:fontRef>
-        </p:style>
-        <p:txBody>
-          <a:bodyPr rtlCol="0" anchor="b"/>
-          <a:lstStyle/>
-          <a:p>
-            <a:r>
-              <a:rPr lang="ja-JP" altLang="en-US" b="1" dirty="0">
-                <a:solidFill>
-                  <a:srgbClr val="FF99FF"/>
-                </a:solidFill>
-              </a:rPr>
-              <a:t>リモートリポジトリ</a:t>
-            </a:r>
-          </a:p>
-        </p:txBody>
-      </p:sp>
-      <p:sp>
-        <p:nvSpPr>
-          <p:cNvPr id="12" name="矢印: 右 11">
-            <a:extLst>
-              <a:ext uri="{FF2B5EF4-FFF2-40B4-BE49-F238E27FC236}">
-                <a16:creationId xmlns:a16="http://schemas.microsoft.com/office/drawing/2014/main" id="{4BFCEAAC-E466-8DE1-64D6-E58FF99701D7}"/>
-              </a:ext>
-            </a:extLst>
-          </p:cNvPr>
-          <p:cNvSpPr/>
-          <p:nvPr/>
-        </p:nvSpPr>
-        <p:spPr>
-          <a:xfrm rot="5400000">
-            <a:off x="7808993" y="4617908"/>
-            <a:ext cx="468086" cy="677228"/>
-          </a:xfrm>
-          <a:prstGeom prst="rightArrow">
-            <a:avLst/>
-          </a:prstGeom>
-        </p:spPr>
-        <p:style>
-          <a:lnRef idx="2">
-            <a:schemeClr val="dk1">
-              <a:shade val="15000"/>
-            </a:schemeClr>
-          </a:lnRef>
-          <a:fillRef idx="1">
-            <a:schemeClr val="dk1"/>
-          </a:fillRef>
-          <a:effectRef idx="0">
-            <a:schemeClr val="dk1"/>
-          </a:effectRef>
-          <a:fontRef idx="minor">
-            <a:schemeClr val="lt1"/>
-          </a:fontRef>
-        </p:style>
-        <p:txBody>
-          <a:bodyPr rtlCol="0" anchor="ctr"/>
-          <a:lstStyle/>
-          <a:p>
-            <a:pPr algn="ctr"/>
-            <a:endParaRPr kumimoji="1" lang="ja-JP" altLang="en-US"/>
-          </a:p>
-        </p:txBody>
-      </p:sp>
-      <p:pic>
-        <p:nvPicPr>
-          <p:cNvPr id="8" name="図 7">
-            <a:extLst>
-              <a:ext uri="{FF2B5EF4-FFF2-40B4-BE49-F238E27FC236}">
-                <a16:creationId xmlns:a16="http://schemas.microsoft.com/office/drawing/2014/main" id="{1CFFE98E-2167-F736-3666-905C56FBEE08}"/>
-              </a:ext>
-            </a:extLst>
-          </p:cNvPr>
-          <p:cNvPicPr>
-            <a:picLocks noChangeAspect="1"/>
-          </p:cNvPicPr>
-          <p:nvPr/>
-        </p:nvPicPr>
-        <p:blipFill>
-          <a:blip r:embed="rId3">
-            <a:extLst>
-              <a:ext uri="{28A0092B-C50C-407E-A947-70E740481C1C}">
-                <a14:useLocalDpi xmlns:a14="http://schemas.microsoft.com/office/drawing/2010/main" val="0"/>
-              </a:ext>
-            </a:extLst>
-          </a:blip>
-          <a:stretch>
-            <a:fillRect/>
-          </a:stretch>
-        </p:blipFill>
-        <p:spPr>
-          <a:xfrm>
-            <a:off x="3890816" y="-1422448"/>
-            <a:ext cx="1080000" cy="1080000"/>
-          </a:xfrm>
-          <a:prstGeom prst="rect">
-            <a:avLst/>
-          </a:prstGeom>
-        </p:spPr>
-      </p:pic>
-      <p:sp>
-        <p:nvSpPr>
-          <p:cNvPr id="19" name="テキスト ボックス 18">
-            <a:extLst>
-              <a:ext uri="{FF2B5EF4-FFF2-40B4-BE49-F238E27FC236}">
-                <a16:creationId xmlns:a16="http://schemas.microsoft.com/office/drawing/2014/main" id="{6432C6F2-67DE-DAA0-42EB-B426A13807C2}"/>
-              </a:ext>
-            </a:extLst>
-          </p:cNvPr>
-          <p:cNvSpPr txBox="1"/>
-          <p:nvPr/>
-        </p:nvSpPr>
-        <p:spPr>
-          <a:xfrm>
-            <a:off x="4853937" y="-1043318"/>
-            <a:ext cx="2262158" cy="369332"/>
-          </a:xfrm>
-          <a:prstGeom prst="rect">
-            <a:avLst/>
-          </a:prstGeom>
-          <a:noFill/>
-        </p:spPr>
-        <p:txBody>
-          <a:bodyPr wrap="none" rtlCol="0">
-            <a:spAutoFit/>
-          </a:bodyPr>
-          <a:lstStyle/>
-          <a:p>
-            <a:r>
-              <a:rPr kumimoji="1" lang="ja-JP" altLang="en-US" b="1" dirty="0"/>
-              <a:t>現在のディレクトリ</a:t>
-            </a:r>
-          </a:p>
-        </p:txBody>
-      </p:sp>
-      <p:cxnSp>
-        <p:nvCxnSpPr>
-          <p:cNvPr id="20" name="コネクタ: カギ線 19">
-            <a:extLst>
-              <a:ext uri="{FF2B5EF4-FFF2-40B4-BE49-F238E27FC236}">
-                <a16:creationId xmlns:a16="http://schemas.microsoft.com/office/drawing/2014/main" id="{080352DC-7D23-D027-9F6B-923170DE4E65}"/>
-              </a:ext>
-            </a:extLst>
-          </p:cNvPr>
-          <p:cNvCxnSpPr>
-            <a:cxnSpLocks/>
-          </p:cNvCxnSpPr>
-          <p:nvPr/>
-        </p:nvCxnSpPr>
-        <p:spPr>
-          <a:xfrm>
-            <a:off x="4419224" y="-527605"/>
-            <a:ext cx="1408521" cy="504000"/>
-          </a:xfrm>
-          <a:prstGeom prst="bentConnector3">
-            <a:avLst>
-              <a:gd name="adj1" fmla="val -235"/>
-            </a:avLst>
-          </a:prstGeom>
-          <a:ln w="38100"/>
-        </p:spPr>
-        <p:style>
-          <a:lnRef idx="1">
-            <a:schemeClr val="dk1"/>
-          </a:lnRef>
-          <a:fillRef idx="0">
-            <a:schemeClr val="dk1"/>
-          </a:fillRef>
-          <a:effectRef idx="0">
-            <a:schemeClr val="dk1"/>
-          </a:effectRef>
-          <a:fontRef idx="minor">
-            <a:schemeClr val="tx1"/>
-          </a:fontRef>
-        </p:style>
-      </p:cxnSp>
-      <p:pic>
-        <p:nvPicPr>
-          <p:cNvPr id="25" name="図 24">
-            <a:extLst>
-              <a:ext uri="{FF2B5EF4-FFF2-40B4-BE49-F238E27FC236}">
-                <a16:creationId xmlns:a16="http://schemas.microsoft.com/office/drawing/2014/main" id="{7C5BED71-E1B5-1994-85EB-EE7F6F9F2309}"/>
-              </a:ext>
-            </a:extLst>
-          </p:cNvPr>
-          <p:cNvPicPr>
-            <a:picLocks noChangeAspect="1"/>
-          </p:cNvPicPr>
-          <p:nvPr/>
-        </p:nvPicPr>
-        <p:blipFill>
-          <a:blip r:embed="rId3">
-            <a:extLst>
-              <a:ext uri="{28A0092B-C50C-407E-A947-70E740481C1C}">
-                <a14:useLocalDpi xmlns:a14="http://schemas.microsoft.com/office/drawing/2010/main" val="0"/>
-              </a:ext>
-            </a:extLst>
-          </a:blip>
-          <a:stretch>
-            <a:fillRect/>
-          </a:stretch>
-        </p:blipFill>
-        <p:spPr>
-          <a:xfrm>
-            <a:off x="5814926" y="-640567"/>
-            <a:ext cx="1080000" cy="1080000"/>
-          </a:xfrm>
-          <a:prstGeom prst="rect">
-            <a:avLst/>
-          </a:prstGeom>
-        </p:spPr>
-      </p:pic>
-      <p:sp>
-        <p:nvSpPr>
-          <p:cNvPr id="29" name="四角形: 角を丸くする 28">
-            <a:extLst>
-              <a:ext uri="{FF2B5EF4-FFF2-40B4-BE49-F238E27FC236}">
-                <a16:creationId xmlns:a16="http://schemas.microsoft.com/office/drawing/2014/main" id="{E32BF2FC-6940-0702-2345-7078571D8CB1}"/>
-              </a:ext>
-            </a:extLst>
-          </p:cNvPr>
-          <p:cNvSpPr/>
-          <p:nvPr/>
-        </p:nvSpPr>
-        <p:spPr>
-          <a:xfrm>
-            <a:off x="4030824" y="-495423"/>
-            <a:ext cx="8033706" cy="5055220"/>
-          </a:xfrm>
-          <a:prstGeom prst="roundRect">
-            <a:avLst/>
-          </a:prstGeom>
-          <a:noFill/>
-          <a:ln w="38100">
-            <a:solidFill>
-              <a:srgbClr val="00B0F0"/>
-            </a:solidFill>
-            <a:prstDash val="dash"/>
-          </a:ln>
-        </p:spPr>
-        <p:style>
-          <a:lnRef idx="2">
-            <a:schemeClr val="accent1">
-              <a:shade val="15000"/>
-            </a:schemeClr>
-          </a:lnRef>
-          <a:fillRef idx="1">
-            <a:schemeClr val="accent1"/>
-          </a:fillRef>
-          <a:effectRef idx="0">
-            <a:schemeClr val="accent1"/>
-          </a:effectRef>
-          <a:fontRef idx="minor">
-            <a:schemeClr val="lt1"/>
-          </a:fontRef>
-        </p:style>
-        <p:txBody>
-          <a:bodyPr rtlCol="0" anchor="b"/>
-          <a:lstStyle/>
-          <a:p>
-            <a:r>
-              <a:rPr kumimoji="1" lang="ja-JP" altLang="en-US" b="1" dirty="0">
-                <a:solidFill>
-                  <a:srgbClr val="00B0F0"/>
-                </a:solidFill>
-              </a:rPr>
-              <a:t>ローカルリポジトリ</a:t>
-            </a:r>
-          </a:p>
-        </p:txBody>
-      </p:sp>
-      <p:sp>
-        <p:nvSpPr>
-          <p:cNvPr id="31" name="四角形: 角を丸くする 30">
-            <a:extLst>
-              <a:ext uri="{FF2B5EF4-FFF2-40B4-BE49-F238E27FC236}">
-                <a16:creationId xmlns:a16="http://schemas.microsoft.com/office/drawing/2014/main" id="{304F70B0-7D6D-DD08-E1F1-EF51B76A688D}"/>
-              </a:ext>
-            </a:extLst>
-          </p:cNvPr>
-          <p:cNvSpPr/>
-          <p:nvPr/>
-        </p:nvSpPr>
-        <p:spPr>
-          <a:xfrm>
-            <a:off x="4282751" y="1875105"/>
-            <a:ext cx="5040000" cy="1943999"/>
-          </a:xfrm>
-          <a:prstGeom prst="roundRect">
-            <a:avLst/>
-          </a:prstGeom>
-          <a:noFill/>
-          <a:ln w="38100">
-            <a:solidFill>
-              <a:srgbClr val="00B050"/>
-            </a:solidFill>
-            <a:prstDash val="dash"/>
-          </a:ln>
-        </p:spPr>
-        <p:style>
-          <a:lnRef idx="2">
-            <a:schemeClr val="accent1">
-              <a:shade val="15000"/>
-            </a:schemeClr>
-          </a:lnRef>
-          <a:fillRef idx="1">
-            <a:schemeClr val="accent1"/>
-          </a:fillRef>
-          <a:effectRef idx="0">
-            <a:schemeClr val="accent1"/>
-          </a:effectRef>
-          <a:fontRef idx="minor">
-            <a:schemeClr val="lt1"/>
-          </a:fontRef>
-        </p:style>
-        <p:txBody>
-          <a:bodyPr rtlCol="0" anchor="ctr"/>
-          <a:lstStyle/>
-          <a:p>
-            <a:pPr algn="ctr"/>
-            <a:endParaRPr kumimoji="1" lang="ja-JP" altLang="en-US" b="1" dirty="0">
-              <a:solidFill>
-                <a:srgbClr val="00B050"/>
-              </a:solidFill>
-            </a:endParaRPr>
-          </a:p>
-        </p:txBody>
-      </p:sp>
-      <p:cxnSp>
-        <p:nvCxnSpPr>
-          <p:cNvPr id="34" name="コネクタ: カギ線 33">
-            <a:extLst>
-              <a:ext uri="{FF2B5EF4-FFF2-40B4-BE49-F238E27FC236}">
-                <a16:creationId xmlns:a16="http://schemas.microsoft.com/office/drawing/2014/main" id="{AD633165-13EE-28D3-E36A-72D6C1DD06BD}"/>
-              </a:ext>
-            </a:extLst>
-          </p:cNvPr>
-          <p:cNvCxnSpPr>
-            <a:cxnSpLocks/>
-          </p:cNvCxnSpPr>
-          <p:nvPr/>
-        </p:nvCxnSpPr>
-        <p:spPr>
-          <a:xfrm>
-            <a:off x="4414384" y="-524094"/>
-            <a:ext cx="1408521" cy="2772000"/>
-          </a:xfrm>
-          <a:prstGeom prst="bentConnector3">
-            <a:avLst>
-              <a:gd name="adj1" fmla="val -235"/>
-            </a:avLst>
-          </a:prstGeom>
-          <a:ln w="38100"/>
-        </p:spPr>
-        <p:style>
-          <a:lnRef idx="1">
-            <a:schemeClr val="dk1"/>
-          </a:lnRef>
-          <a:fillRef idx="0">
-            <a:schemeClr val="dk1"/>
-          </a:fillRef>
-          <a:effectRef idx="0">
-            <a:schemeClr val="dk1"/>
-          </a:effectRef>
-          <a:fontRef idx="minor">
-            <a:schemeClr val="tx1"/>
-          </a:fontRef>
-        </p:style>
-      </p:cxnSp>
-      <p:sp>
-        <p:nvSpPr>
-          <p:cNvPr id="36" name="四角形: 角を丸くする 35">
-            <a:extLst>
-              <a:ext uri="{FF2B5EF4-FFF2-40B4-BE49-F238E27FC236}">
-                <a16:creationId xmlns:a16="http://schemas.microsoft.com/office/drawing/2014/main" id="{01C33183-F280-DBD4-DB8F-051B446DC659}"/>
-              </a:ext>
-            </a:extLst>
-          </p:cNvPr>
-          <p:cNvSpPr/>
-          <p:nvPr/>
-        </p:nvSpPr>
-        <p:spPr>
-          <a:xfrm>
-            <a:off x="5755659" y="-385027"/>
-            <a:ext cx="6240225" cy="2045020"/>
-          </a:xfrm>
-          <a:prstGeom prst="roundRect">
-            <a:avLst/>
-          </a:prstGeom>
-          <a:noFill/>
-          <a:ln w="38100">
-            <a:solidFill>
-              <a:srgbClr val="FFC000"/>
-            </a:solidFill>
-            <a:prstDash val="dash"/>
-          </a:ln>
-        </p:spPr>
-        <p:style>
-          <a:lnRef idx="2">
-            <a:schemeClr val="accent1">
-              <a:shade val="15000"/>
-            </a:schemeClr>
-          </a:lnRef>
-          <a:fillRef idx="1">
-            <a:schemeClr val="accent1"/>
-          </a:fillRef>
-          <a:effectRef idx="0">
-            <a:schemeClr val="accent1"/>
-          </a:effectRef>
-          <a:fontRef idx="minor">
-            <a:schemeClr val="lt1"/>
-          </a:fontRef>
-        </p:style>
-        <p:txBody>
-          <a:bodyPr rtlCol="0" anchor="ctr"/>
-          <a:lstStyle/>
-          <a:p>
-            <a:pPr lvl="3"/>
-            <a:endParaRPr lang="ja-JP" altLang="en-US" b="1" dirty="0">
-              <a:solidFill>
-                <a:srgbClr val="FFC000"/>
-              </a:solidFill>
-            </a:endParaRPr>
-          </a:p>
-        </p:txBody>
-      </p:sp>
-      <p:sp>
-        <p:nvSpPr>
-          <p:cNvPr id="2" name="四角形: 角を丸くする 1">
-            <a:extLst>
-              <a:ext uri="{FF2B5EF4-FFF2-40B4-BE49-F238E27FC236}">
-                <a16:creationId xmlns:a16="http://schemas.microsoft.com/office/drawing/2014/main" id="{D6BD846C-1506-1019-A0D0-C578D3D866B2}"/>
-              </a:ext>
-            </a:extLst>
-          </p:cNvPr>
-          <p:cNvSpPr/>
-          <p:nvPr/>
-        </p:nvSpPr>
-        <p:spPr>
-          <a:xfrm>
-            <a:off x="6897972" y="935017"/>
-            <a:ext cx="1800000" cy="504000"/>
-          </a:xfrm>
-          <a:prstGeom prst="roundRect">
-            <a:avLst/>
-          </a:prstGeom>
-          <a:ln w="38100">
-            <a:solidFill>
-              <a:schemeClr val="accent4">
-                <a:lumMod val="75000"/>
-              </a:schemeClr>
-            </a:solidFill>
-          </a:ln>
-        </p:spPr>
-        <p:style>
-          <a:lnRef idx="2">
-            <a:schemeClr val="accent6"/>
-          </a:lnRef>
-          <a:fillRef idx="1">
-            <a:schemeClr val="lt1"/>
-          </a:fillRef>
-          <a:effectRef idx="0">
-            <a:schemeClr val="accent6"/>
-          </a:effectRef>
-          <a:fontRef idx="minor">
-            <a:schemeClr val="dk1"/>
-          </a:fontRef>
-        </p:style>
-        <p:txBody>
-          <a:bodyPr rtlCol="0" anchor="ctr"/>
-          <a:lstStyle/>
-          <a:p>
-            <a:pPr algn="ctr"/>
-            <a:r>
-              <a:rPr kumimoji="1" lang="ja-JP" altLang="en-US" b="1" dirty="0">
-                <a:solidFill>
-                  <a:schemeClr val="accent4">
-                    <a:lumMod val="75000"/>
-                  </a:schemeClr>
-                </a:solidFill>
-              </a:rPr>
-              <a:t>変更内容</a:t>
-            </a:r>
-          </a:p>
-        </p:txBody>
-      </p:sp>
-      <p:sp>
-        <p:nvSpPr>
-          <p:cNvPr id="3" name="四角形: 角を丸くする 2">
-            <a:extLst>
-              <a:ext uri="{FF2B5EF4-FFF2-40B4-BE49-F238E27FC236}">
-                <a16:creationId xmlns:a16="http://schemas.microsoft.com/office/drawing/2014/main" id="{4344DD63-806E-2EAF-7CB8-9CFB956A614E}"/>
-              </a:ext>
-            </a:extLst>
-          </p:cNvPr>
-          <p:cNvSpPr/>
-          <p:nvPr/>
-        </p:nvSpPr>
-        <p:spPr>
-          <a:xfrm>
-            <a:off x="9413773" y="935017"/>
-            <a:ext cx="2376000" cy="504000"/>
-          </a:xfrm>
-          <a:prstGeom prst="roundRect">
-            <a:avLst/>
-          </a:prstGeom>
-          <a:ln w="38100">
-            <a:solidFill>
-              <a:schemeClr val="accent4">
-                <a:lumMod val="75000"/>
-              </a:schemeClr>
-            </a:solidFill>
-          </a:ln>
-        </p:spPr>
-        <p:style>
-          <a:lnRef idx="2">
-            <a:schemeClr val="accent6"/>
-          </a:lnRef>
-          <a:fillRef idx="1">
-            <a:schemeClr val="lt1"/>
-          </a:fillRef>
-          <a:effectRef idx="0">
-            <a:schemeClr val="accent6"/>
-          </a:effectRef>
-          <a:fontRef idx="minor">
-            <a:schemeClr val="dk1"/>
-          </a:fontRef>
-        </p:style>
-        <p:txBody>
-          <a:bodyPr rtlCol="0" anchor="ctr"/>
-          <a:lstStyle/>
-          <a:p>
-            <a:pPr algn="ctr"/>
-            <a:r>
-              <a:rPr kumimoji="1" lang="ja-JP" altLang="en-US" b="1" dirty="0">
-                <a:solidFill>
-                  <a:schemeClr val="accent4">
-                    <a:lumMod val="75000"/>
-                  </a:schemeClr>
-                </a:solidFill>
-              </a:rPr>
-              <a:t>ローカルの変更履歴</a:t>
-            </a:r>
-          </a:p>
-        </p:txBody>
-      </p:sp>
-      <p:cxnSp>
-        <p:nvCxnSpPr>
-          <p:cNvPr id="4" name="直線矢印コネクタ 3">
-            <a:extLst>
-              <a:ext uri="{FF2B5EF4-FFF2-40B4-BE49-F238E27FC236}">
-                <a16:creationId xmlns:a16="http://schemas.microsoft.com/office/drawing/2014/main" id="{2992BBB0-8F91-265E-90DC-FFDF91E89E73}"/>
-              </a:ext>
-            </a:extLst>
-          </p:cNvPr>
-          <p:cNvCxnSpPr>
-            <a:cxnSpLocks/>
-          </p:cNvCxnSpPr>
-          <p:nvPr/>
-        </p:nvCxnSpPr>
-        <p:spPr>
-          <a:xfrm flipV="1">
-            <a:off x="8905249" y="1225117"/>
-            <a:ext cx="360000" cy="1"/>
-          </a:xfrm>
-          <a:prstGeom prst="straightConnector1">
-            <a:avLst/>
-          </a:prstGeom>
-          <a:ln w="28575">
-            <a:tailEnd type="triangle"/>
-          </a:ln>
-        </p:spPr>
-        <p:style>
-          <a:lnRef idx="1">
-            <a:schemeClr val="dk1"/>
-          </a:lnRef>
-          <a:fillRef idx="0">
-            <a:schemeClr val="dk1"/>
-          </a:fillRef>
-          <a:effectRef idx="0">
-            <a:schemeClr val="dk1"/>
-          </a:effectRef>
-          <a:fontRef idx="minor">
-            <a:schemeClr val="tx1"/>
-          </a:fontRef>
-        </p:style>
-      </p:cxnSp>
-      <p:sp>
-        <p:nvSpPr>
-          <p:cNvPr id="9" name="四角形: 角を丸くする 8">
-            <a:extLst>
-              <a:ext uri="{FF2B5EF4-FFF2-40B4-BE49-F238E27FC236}">
-                <a16:creationId xmlns:a16="http://schemas.microsoft.com/office/drawing/2014/main" id="{02FF46A2-13F7-A588-C313-6CF2DFC3B60A}"/>
-              </a:ext>
-            </a:extLst>
-          </p:cNvPr>
-          <p:cNvSpPr/>
-          <p:nvPr/>
-        </p:nvSpPr>
-        <p:spPr>
-          <a:xfrm>
-            <a:off x="4759706" y="7035310"/>
-            <a:ext cx="2376000" cy="504000"/>
-          </a:xfrm>
-          <a:prstGeom prst="roundRect">
-            <a:avLst/>
-          </a:prstGeom>
-          <a:ln w="38100">
-            <a:solidFill>
-              <a:schemeClr val="accent4">
-                <a:lumMod val="75000"/>
-              </a:schemeClr>
-            </a:solidFill>
-          </a:ln>
-        </p:spPr>
-        <p:style>
-          <a:lnRef idx="2">
-            <a:schemeClr val="accent6"/>
-          </a:lnRef>
-          <a:fillRef idx="1">
-            <a:schemeClr val="lt1"/>
-          </a:fillRef>
-          <a:effectRef idx="0">
-            <a:schemeClr val="accent6"/>
-          </a:effectRef>
-          <a:fontRef idx="minor">
-            <a:schemeClr val="dk1"/>
-          </a:fontRef>
-        </p:style>
-        <p:txBody>
-          <a:bodyPr rtlCol="0" anchor="ctr"/>
-          <a:lstStyle/>
-          <a:p>
-            <a:pPr algn="ctr"/>
-            <a:r>
-              <a:rPr lang="ja-JP" altLang="en-US" b="1" dirty="0">
-                <a:solidFill>
-                  <a:schemeClr val="accent4">
-                    <a:lumMod val="75000"/>
-                  </a:schemeClr>
-                </a:solidFill>
-              </a:rPr>
-              <a:t>ローカルの</a:t>
-            </a:r>
-            <a:r>
-              <a:rPr kumimoji="1" lang="ja-JP" altLang="en-US" b="1" dirty="0">
-                <a:solidFill>
-                  <a:schemeClr val="accent4">
-                    <a:lumMod val="75000"/>
-                  </a:schemeClr>
-                </a:solidFill>
-              </a:rPr>
-              <a:t>変更履歴</a:t>
-            </a:r>
-          </a:p>
-        </p:txBody>
-      </p:sp>
-      <p:sp>
-        <p:nvSpPr>
-          <p:cNvPr id="13" name="四角形: 角を丸くする 12">
-            <a:extLst>
-              <a:ext uri="{FF2B5EF4-FFF2-40B4-BE49-F238E27FC236}">
-                <a16:creationId xmlns:a16="http://schemas.microsoft.com/office/drawing/2014/main" id="{F68E929F-0B74-ED26-80DB-DC1EFECB14F6}"/>
-              </a:ext>
-            </a:extLst>
-          </p:cNvPr>
-          <p:cNvSpPr/>
-          <p:nvPr/>
-        </p:nvSpPr>
-        <p:spPr>
-          <a:xfrm>
-            <a:off x="4759706" y="5619282"/>
-            <a:ext cx="2376000" cy="504000"/>
-          </a:xfrm>
-          <a:prstGeom prst="roundRect">
-            <a:avLst/>
-          </a:prstGeom>
-          <a:ln w="38100">
-            <a:solidFill>
-              <a:srgbClr val="7030A0"/>
-            </a:solidFill>
-          </a:ln>
-        </p:spPr>
-        <p:style>
-          <a:lnRef idx="2">
-            <a:schemeClr val="accent6"/>
-          </a:lnRef>
-          <a:fillRef idx="1">
-            <a:schemeClr val="lt1"/>
-          </a:fillRef>
-          <a:effectRef idx="0">
-            <a:schemeClr val="accent6"/>
-          </a:effectRef>
-          <a:fontRef idx="minor">
-            <a:schemeClr val="dk1"/>
-          </a:fontRef>
-        </p:style>
-        <p:txBody>
-          <a:bodyPr rtlCol="0" anchor="ctr"/>
-          <a:lstStyle/>
-          <a:p>
-            <a:pPr algn="ctr"/>
-            <a:r>
-              <a:rPr kumimoji="1" lang="ja-JP" altLang="en-US" b="1" dirty="0">
-                <a:solidFill>
-                  <a:srgbClr val="7030A0"/>
-                </a:solidFill>
-              </a:rPr>
-              <a:t>リモートの変更履歴</a:t>
-            </a:r>
-          </a:p>
-        </p:txBody>
-      </p:sp>
-      <p:sp>
-        <p:nvSpPr>
-          <p:cNvPr id="21" name="四角形: 角を丸くする 20">
-            <a:extLst>
-              <a:ext uri="{FF2B5EF4-FFF2-40B4-BE49-F238E27FC236}">
-                <a16:creationId xmlns:a16="http://schemas.microsoft.com/office/drawing/2014/main" id="{03980DB4-64F2-4EEB-D032-30008AB9FC98}"/>
-              </a:ext>
-            </a:extLst>
-          </p:cNvPr>
-          <p:cNvSpPr/>
-          <p:nvPr/>
-        </p:nvSpPr>
-        <p:spPr>
-          <a:xfrm>
-            <a:off x="4771616" y="6269006"/>
-            <a:ext cx="2376000" cy="504000"/>
-          </a:xfrm>
-          <a:prstGeom prst="roundRect">
-            <a:avLst/>
-          </a:prstGeom>
-          <a:ln w="38100">
-            <a:solidFill>
-              <a:schemeClr val="accent3"/>
-            </a:solidFill>
-          </a:ln>
-        </p:spPr>
-        <p:style>
-          <a:lnRef idx="2">
-            <a:schemeClr val="accent6"/>
-          </a:lnRef>
-          <a:fillRef idx="1">
-            <a:schemeClr val="lt1"/>
-          </a:fillRef>
-          <a:effectRef idx="0">
-            <a:schemeClr val="accent6"/>
-          </a:effectRef>
-          <a:fontRef idx="minor">
-            <a:schemeClr val="dk1"/>
-          </a:fontRef>
-        </p:style>
-        <p:txBody>
-          <a:bodyPr rtlCol="0" anchor="ctr"/>
-          <a:lstStyle/>
-          <a:p>
-            <a:pPr algn="ctr"/>
-            <a:r>
-              <a:rPr lang="ja-JP" altLang="en-US" b="1" dirty="0">
-                <a:solidFill>
-                  <a:schemeClr val="accent3"/>
-                </a:solidFill>
-              </a:rPr>
-              <a:t>リモートの変更履歴</a:t>
-            </a:r>
-          </a:p>
-        </p:txBody>
-      </p:sp>
-      <p:grpSp>
-        <p:nvGrpSpPr>
-          <p:cNvPr id="22" name="グループ化 21">
-            <a:extLst>
-              <a:ext uri="{FF2B5EF4-FFF2-40B4-BE49-F238E27FC236}">
-                <a16:creationId xmlns:a16="http://schemas.microsoft.com/office/drawing/2014/main" id="{98A554EB-BE61-6FA3-F626-2D06CB77354C}"/>
-              </